--- a/第四週(10-01)/第四週_第1節_簡報.pptx
+++ b/第四週(10-01)/第四週_第1節_簡報.pptx
@@ -6953,7 +6953,7 @@
         <p:spPr>
           <a:xfrm>
             <a:off x="502920" y="1572768"/>
-            <a:ext cx="7498080" cy="1371600"/>
+            <a:ext cx="7498080" cy="1245074"/>
           </a:xfrm>
           <a:prstGeom prst="rect">
             <a:avLst/>
@@ -6972,7 +6972,7 @@
               <a:buNone/>
             </a:pPr>
             <a:r>
-              <a:rPr lang="en-US" sz="3400" b="1" dirty="0">
+              <a:rPr lang="en-US" sz="3000" b="1" dirty="0">
                 <a:solidFill>
                   <a:srgbClr val="FFFFFF"/>
                 </a:solidFill>
@@ -6982,7 +6982,7 @@
               </a:rPr>
               <a:t>Ba thanh trượt tuần trước</a:t>
             </a:r>
-            <a:endParaRPr lang="en-US" sz="3400" dirty="0"/>
+            <a:endParaRPr lang="en-US" sz="3000" dirty="0"/>
           </a:p>
           <a:p>
             <a:pPr indent="0" marL="0">
@@ -6992,7 +6992,7 @@
               <a:buNone/>
             </a:pPr>
             <a:r>
-              <a:rPr lang="en-US" sz="3400" b="1" dirty="0">
+              <a:rPr lang="en-US" sz="3000" b="1" dirty="0">
                 <a:solidFill>
                   <a:srgbClr val="FFFFFF"/>
                 </a:solidFill>
@@ -7002,7 +7002,7 @@
               </a:rPr>
               <a:t>chính là ba dòng trong bảng thông số</a:t>
             </a:r>
-            <a:endParaRPr lang="en-US" sz="3400" dirty="0"/>
+            <a:endParaRPr lang="en-US" sz="3000" dirty="0"/>
           </a:p>
           <a:p>
             <a:pPr indent="0" marL="0">
@@ -7012,7 +7012,7 @@
               <a:buNone/>
             </a:pPr>
             <a:r>
-              <a:rPr lang="en-US" sz="1900" dirty="0">
+              <a:rPr lang="en-US" sz="1700" dirty="0">
                 <a:solidFill>
                   <a:srgbClr val="C8D6E2"/>
                 </a:solidFill>
@@ -7022,7 +7022,7 @@
               </a:rPr>
               <a:t>上週你們拉的三個滑桿，就是規格表上的三行</a:t>
             </a:r>
-            <a:endParaRPr lang="en-US" sz="3400" dirty="0"/>
+            <a:endParaRPr lang="en-US" sz="3000" dirty="0"/>
           </a:p>
         </p:txBody>
       </p:sp>
@@ -7034,7 +7034,7 @@
         </p:nvSpPr>
         <p:spPr>
           <a:xfrm>
-            <a:off x="502920" y="3218688"/>
+            <a:off x="502920" y="3008479"/>
             <a:ext cx="1371600" cy="41148"/>
           </a:xfrm>
           <a:prstGeom prst="rect">
@@ -7054,8 +7054,8 @@
         </p:nvSpPr>
         <p:spPr>
           <a:xfrm>
-            <a:off x="502920" y="3419856"/>
-            <a:ext cx="7132320" cy="731520"/>
+            <a:off x="502920" y="3209647"/>
+            <a:ext cx="7132320" cy="612545"/>
           </a:xfrm>
           <a:prstGeom prst="rect">
             <a:avLst/>
@@ -8114,16 +8114,19 @@
         </p:nvSpPr>
         <p:spPr>
           <a:xfrm>
-            <a:off x="1567282" y="1735531"/>
-            <a:ext cx="340157" cy="340157"/>
-          </a:xfrm>
-          <a:prstGeom prst="ellipse">
-            <a:avLst/>
-          </a:prstGeom>
-          <a:solidFill>
-            <a:srgbClr val="FF7A59"/>
-          </a:solidFill>
-          <a:ln/>
+            <a:off x="896478" y="2003633"/>
+            <a:ext cx="1681764" cy="0"/>
+          </a:xfrm>
+          <a:prstGeom prst="line">
+            <a:avLst/>
+          </a:prstGeom>
+          <a:noFill/>
+          <a:ln w="12700">
+            <a:solidFill>
+              <a:srgbClr val="9AA6B0"/>
+            </a:solidFill>
+            <a:prstDash val="dash"/>
+          </a:ln>
         </p:spPr>
       </p:sp>
       <p:sp>
@@ -8134,18 +8137,19 @@
         </p:nvSpPr>
         <p:spPr>
           <a:xfrm>
-            <a:off x="1510589" y="2118208"/>
-            <a:ext cx="453542" cy="510235"/>
-          </a:xfrm>
-          <a:prstGeom prst="roundRect">
-            <a:avLst>
-              <a:gd name="adj" fmla="val 60484"/>
-            </a:avLst>
-          </a:prstGeom>
-          <a:solidFill>
-            <a:srgbClr val="FF7A59"/>
-          </a:solidFill>
-          <a:ln/>
+            <a:off x="896478" y="2270272"/>
+            <a:ext cx="1681764" cy="0"/>
+          </a:xfrm>
+          <a:prstGeom prst="line">
+            <a:avLst/>
+          </a:prstGeom>
+          <a:noFill/>
+          <a:ln w="12700">
+            <a:solidFill>
+              <a:srgbClr val="9AA6B0"/>
+            </a:solidFill>
+            <a:prstDash val="dash"/>
+          </a:ln>
         </p:spPr>
       </p:sp>
       <p:sp>
@@ -8155,17 +8159,21 @@
           <p:nvPr/>
         </p:nvSpPr>
         <p:spPr>
-          <a:xfrm rot="480000">
-            <a:off x="1538935" y="2614270"/>
-            <a:ext cx="127559" cy="368503"/>
-          </a:xfrm>
-          <a:prstGeom prst="rect">
-            <a:avLst/>
-          </a:prstGeom>
-          <a:solidFill>
-            <a:srgbClr val="FF7A59"/>
-          </a:solidFill>
-          <a:ln/>
+          <a:xfrm>
+            <a:off x="896478" y="2136953"/>
+            <a:ext cx="1548994" cy="0"/>
+          </a:xfrm>
+          <a:prstGeom prst="line">
+            <a:avLst/>
+          </a:prstGeom>
+          <a:noFill/>
+          <a:ln w="25400">
+            <a:solidFill>
+              <a:srgbClr val="1F4E79"/>
+            </a:solidFill>
+            <a:prstDash val="solid"/>
+            <a:tailEnd type="triangle"/>
+          </a:ln>
         </p:spPr>
       </p:sp>
       <p:sp>
@@ -8175,22 +8183,141 @@
           <p:nvPr/>
         </p:nvSpPr>
         <p:spPr>
-          <a:xfrm rot="-480000">
-            <a:off x="1808226" y="2614270"/>
-            <a:ext cx="127559" cy="368503"/>
-          </a:xfrm>
-          <a:prstGeom prst="rect">
-            <a:avLst/>
-          </a:prstGeom>
-          <a:solidFill>
-            <a:srgbClr val="FF7A59"/>
-          </a:solidFill>
-          <a:ln/>
-        </p:spPr>
-      </p:sp>
-      <p:sp>
-        <p:nvSpPr>
-          <p:cNvPr id="8" name="Text 6"/>
+          <a:xfrm>
+            <a:off x="896478" y="2847990"/>
+            <a:ext cx="1681764" cy="0"/>
+          </a:xfrm>
+          <a:prstGeom prst="line">
+            <a:avLst/>
+          </a:prstGeom>
+          <a:noFill/>
+          <a:ln w="12700">
+            <a:solidFill>
+              <a:srgbClr val="9AA6B0"/>
+            </a:solidFill>
+            <a:prstDash val="dash"/>
+          </a:ln>
+        </p:spPr>
+      </p:sp>
+      <p:sp>
+        <p:nvSpPr>
+          <p:cNvPr id="8" name="Shape 6"/>
+          <p:cNvSpPr/>
+          <p:nvPr/>
+        </p:nvSpPr>
+        <p:spPr>
+          <a:xfrm>
+            <a:off x="896478" y="3114629"/>
+            <a:ext cx="1681764" cy="0"/>
+          </a:xfrm>
+          <a:prstGeom prst="line">
+            <a:avLst/>
+          </a:prstGeom>
+          <a:noFill/>
+          <a:ln w="12700">
+            <a:solidFill>
+              <a:srgbClr val="9AA6B0"/>
+            </a:solidFill>
+            <a:prstDash val="dash"/>
+          </a:ln>
+        </p:spPr>
+      </p:sp>
+      <p:sp>
+        <p:nvSpPr>
+          <p:cNvPr id="9" name="Shape 7"/>
+          <p:cNvSpPr/>
+          <p:nvPr/>
+        </p:nvSpPr>
+        <p:spPr>
+          <a:xfrm flipV="1">
+            <a:off x="896478" y="2892430"/>
+            <a:ext cx="420441" cy="177759"/>
+          </a:xfrm>
+          <a:prstGeom prst="line">
+            <a:avLst/>
+          </a:prstGeom>
+          <a:noFill/>
+          <a:ln w="25400">
+            <a:solidFill>
+              <a:srgbClr val="D9463E"/>
+            </a:solidFill>
+            <a:prstDash val="solid"/>
+          </a:ln>
+        </p:spPr>
+      </p:sp>
+      <p:sp>
+        <p:nvSpPr>
+          <p:cNvPr id="10" name="Shape 8"/>
+          <p:cNvSpPr/>
+          <p:nvPr/>
+        </p:nvSpPr>
+        <p:spPr>
+          <a:xfrm>
+            <a:off x="1316919" y="2892430"/>
+            <a:ext cx="420441" cy="199979"/>
+          </a:xfrm>
+          <a:prstGeom prst="line">
+            <a:avLst/>
+          </a:prstGeom>
+          <a:noFill/>
+          <a:ln w="25400">
+            <a:solidFill>
+              <a:srgbClr val="D9463E"/>
+            </a:solidFill>
+            <a:prstDash val="solid"/>
+          </a:ln>
+        </p:spPr>
+      </p:sp>
+      <p:sp>
+        <p:nvSpPr>
+          <p:cNvPr id="11" name="Shape 9"/>
+          <p:cNvSpPr/>
+          <p:nvPr/>
+        </p:nvSpPr>
+        <p:spPr>
+          <a:xfrm flipV="1">
+            <a:off x="1737360" y="2803550"/>
+            <a:ext cx="420441" cy="288859"/>
+          </a:xfrm>
+          <a:prstGeom prst="line">
+            <a:avLst/>
+          </a:prstGeom>
+          <a:noFill/>
+          <a:ln w="25400">
+            <a:solidFill>
+              <a:srgbClr val="D9463E"/>
+            </a:solidFill>
+            <a:prstDash val="solid"/>
+          </a:ln>
+        </p:spPr>
+      </p:sp>
+      <p:sp>
+        <p:nvSpPr>
+          <p:cNvPr id="12" name="Shape 10"/>
+          <p:cNvSpPr/>
+          <p:nvPr/>
+        </p:nvSpPr>
+        <p:spPr>
+          <a:xfrm>
+            <a:off x="2157801" y="2803550"/>
+            <a:ext cx="287670" cy="177759"/>
+          </a:xfrm>
+          <a:prstGeom prst="line">
+            <a:avLst/>
+          </a:prstGeom>
+          <a:noFill/>
+          <a:ln w="25400">
+            <a:solidFill>
+              <a:srgbClr val="D9463E"/>
+            </a:solidFill>
+            <a:prstDash val="solid"/>
+            <a:tailEnd type="triangle"/>
+          </a:ln>
+        </p:spPr>
+      </p:sp>
+      <p:sp>
+        <p:nvSpPr>
+          <p:cNvPr id="13" name="Text 11"/>
           <p:cNvSpPr txBox="1"/>
           <p:nvPr/>
         </p:nvSpPr>
@@ -8252,7 +8379,7 @@
       </p:sp>
       <p:sp>
         <p:nvSpPr>
-          <p:cNvPr id="9" name="Text 7"/>
+          <p:cNvPr id="14" name="Text 12"/>
           <p:cNvSpPr txBox="1"/>
           <p:nvPr/>
         </p:nvSpPr>
@@ -8314,7 +8441,7 @@
       </p:sp>
       <p:sp>
         <p:nvSpPr>
-          <p:cNvPr id="10" name="Shape 8"/>
+          <p:cNvPr id="15" name="Shape 13"/>
           <p:cNvSpPr/>
           <p:nvPr/>
         </p:nvSpPr>
@@ -8341,7 +8468,7 @@
       </p:sp>
       <p:sp>
         <p:nvSpPr>
-          <p:cNvPr id="11" name="Text 9"/>
+          <p:cNvPr id="16" name="Text 14"/>
           <p:cNvSpPr txBox="1"/>
           <p:nvPr/>
         </p:nvSpPr>
@@ -8403,7 +8530,7 @@
       </p:sp>
       <p:pic>
         <p:nvPicPr>
-          <p:cNvPr id="13" name="Image 0" descr="/Users/tsengchenghsun/Class/carClass/Claude outputs/第四週(10-1)/src/logo.png">    </p:cNvPr>
+          <p:cNvPr id="18" name="Image 0" descr="/Users/tsengchenghsun/Class/carClass/Claude outputs/第四週(10-1)/src/logo.png">    </p:cNvPr>
           <p:cNvPicPr>
             <a:picLocks noChangeAspect="1"/>
           </p:cNvPicPr>
@@ -8427,7 +8554,7 @@
       </p:pic>
       <p:sp>
         <p:nvSpPr>
-          <p:cNvPr id="14" name="Text 10"/>
+          <p:cNvPr id="19" name="Text 15"/>
           <p:cNvSpPr txBox="1"/>
           <p:nvPr/>
         </p:nvSpPr>
@@ -8466,7 +8593,7 @@
       </p:sp>
       <p:sp>
         <p:nvSpPr>
-          <p:cNvPr id="15" name="Text 11"/>
+          <p:cNvPr id="20" name="Text 16"/>
           <p:cNvSpPr txBox="1"/>
           <p:nvPr/>
         </p:nvSpPr>
@@ -9131,42 +9258,149 @@
           <p:nvPr/>
         </p:nvSpPr>
         <p:spPr>
-          <a:xfrm rot="3000000">
-            <a:off x="1170432" y="2444191"/>
-            <a:ext cx="481889" cy="184252"/>
-          </a:xfrm>
-          <a:prstGeom prst="rect">
-            <a:avLst/>
+          <a:xfrm>
+            <a:off x="1493947" y="2203613"/>
+            <a:ext cx="929396" cy="755477"/>
+          </a:xfrm>
+          <a:prstGeom prst="roundRect">
+            <a:avLst>
+              <a:gd name="adj" fmla="val 6052"/>
+            </a:avLst>
+          </a:prstGeom>
+          <a:solidFill>
+            <a:srgbClr val="C8D3DE"/>
+          </a:solidFill>
+          <a:ln w="15240">
+            <a:solidFill>
+              <a:srgbClr val="F4F7FA"/>
+            </a:solidFill>
+            <a:prstDash val="solid"/>
+          </a:ln>
+        </p:spPr>
+      </p:sp>
+      <p:sp>
+        <p:nvSpPr>
+          <p:cNvPr id="5" name="Shape 3"/>
+          <p:cNvSpPr/>
+          <p:nvPr/>
+        </p:nvSpPr>
+        <p:spPr>
+          <a:xfrm>
+            <a:off x="1339047" y="2048073"/>
+            <a:ext cx="929396" cy="755477"/>
+          </a:xfrm>
+          <a:prstGeom prst="roundRect">
+            <a:avLst>
+              <a:gd name="adj" fmla="val 6052"/>
+            </a:avLst>
+          </a:prstGeom>
+          <a:solidFill>
+            <a:srgbClr val="C8D3DE"/>
+          </a:solidFill>
+          <a:ln w="15240">
+            <a:solidFill>
+              <a:srgbClr val="F4F7FA"/>
+            </a:solidFill>
+            <a:prstDash val="solid"/>
+          </a:ln>
+        </p:spPr>
+      </p:sp>
+      <p:sp>
+        <p:nvSpPr>
+          <p:cNvPr id="6" name="Shape 4"/>
+          <p:cNvSpPr/>
+          <p:nvPr/>
+        </p:nvSpPr>
+        <p:spPr>
+          <a:xfrm>
+            <a:off x="1184148" y="1892534"/>
+            <a:ext cx="929396" cy="755477"/>
+          </a:xfrm>
+          <a:prstGeom prst="roundRect">
+            <a:avLst>
+              <a:gd name="adj" fmla="val 6052"/>
+            </a:avLst>
+          </a:prstGeom>
+          <a:solidFill>
+            <a:srgbClr val="C8D3DE"/>
+          </a:solidFill>
+          <a:ln w="15240">
+            <a:solidFill>
+              <a:srgbClr val="F4F7FA"/>
+            </a:solidFill>
+            <a:prstDash val="solid"/>
+          </a:ln>
+        </p:spPr>
+      </p:sp>
+      <p:sp>
+        <p:nvSpPr>
+          <p:cNvPr id="7" name="Shape 5"/>
+          <p:cNvSpPr/>
+          <p:nvPr/>
+        </p:nvSpPr>
+        <p:spPr>
+          <a:xfrm>
+            <a:off x="1029249" y="1736994"/>
+            <a:ext cx="929396" cy="755477"/>
+          </a:xfrm>
+          <a:prstGeom prst="roundRect">
+            <a:avLst>
+              <a:gd name="adj" fmla="val 6052"/>
+            </a:avLst>
           </a:prstGeom>
           <a:solidFill>
             <a:srgbClr val="00A896"/>
           </a:solidFill>
-          <a:ln/>
-        </p:spPr>
-      </p:sp>
-      <p:sp>
-        <p:nvSpPr>
-          <p:cNvPr id="5" name="Shape 3"/>
-          <p:cNvSpPr/>
-          <p:nvPr/>
-        </p:nvSpPr>
-        <p:spPr>
-          <a:xfrm rot="-2520000">
-            <a:off x="1453896" y="2274113"/>
-            <a:ext cx="878738" cy="184252"/>
+          <a:ln w="15240">
+            <a:solidFill>
+              <a:srgbClr val="F4F7FA"/>
+            </a:solidFill>
+            <a:prstDash val="solid"/>
+          </a:ln>
+        </p:spPr>
+      </p:sp>
+      <p:sp>
+        <p:nvSpPr>
+          <p:cNvPr id="8" name="Text 6"/>
+          <p:cNvSpPr txBox="1"/>
+          <p:nvPr/>
+        </p:nvSpPr>
+        <p:spPr>
+          <a:xfrm>
+            <a:off x="630936" y="2892430"/>
+            <a:ext cx="2212848" cy="399959"/>
           </a:xfrm>
           <a:prstGeom prst="rect">
             <a:avLst/>
           </a:prstGeom>
-          <a:solidFill>
-            <a:srgbClr val="00A896"/>
-          </a:solidFill>
-          <a:ln/>
-        </p:spPr>
-      </p:sp>
-      <p:sp>
-        <p:nvSpPr>
-          <p:cNvPr id="6" name="Text 4"/>
+          <a:noFill/>
+          <a:ln/>
+        </p:spPr>
+        <p:txBody>
+          <a:bodyPr wrap="square" lIns="0" tIns="0" rIns="0" bIns="0" rtlCol="0" anchor="ctr"/>
+          <a:lstStyle/>
+          <a:p>
+            <a:pPr algn="ctr" indent="0" marL="0">
+              <a:buNone/>
+            </a:pPr>
+            <a:r>
+              <a:rPr lang="en-US" sz="1100" b="1" dirty="0">
+                <a:solidFill>
+                  <a:srgbClr val="00A896"/>
+                </a:solidFill>
+                <a:latin typeface="Arial" pitchFamily="34" charset="0"/>
+                <a:ea typeface="Arial" pitchFamily="34" charset="-122"/>
+                <a:cs typeface="Arial" pitchFamily="34" charset="-120"/>
+              </a:rPr>
+              <a:t>× 10 000</a:t>
+            </a:r>
+            <a:endParaRPr lang="en-US" sz="1100" dirty="0"/>
+          </a:p>
+        </p:txBody>
+      </p:sp>
+      <p:sp>
+        <p:nvSpPr>
+          <p:cNvPr id="9" name="Text 7"/>
           <p:cNvSpPr txBox="1"/>
           <p:nvPr/>
         </p:nvSpPr>
@@ -9228,7 +9462,7 @@
       </p:sp>
       <p:sp>
         <p:nvSpPr>
-          <p:cNvPr id="7" name="Text 5"/>
+          <p:cNvPr id="10" name="Text 8"/>
           <p:cNvSpPr txBox="1"/>
           <p:nvPr/>
         </p:nvSpPr>
@@ -9290,7 +9524,7 @@
       </p:sp>
       <p:sp>
         <p:nvSpPr>
-          <p:cNvPr id="8" name="Shape 6"/>
+          <p:cNvPr id="11" name="Shape 9"/>
           <p:cNvSpPr/>
           <p:nvPr/>
         </p:nvSpPr>
@@ -9317,7 +9551,7 @@
       </p:sp>
       <p:sp>
         <p:nvSpPr>
-          <p:cNvPr id="9" name="Text 7"/>
+          <p:cNvPr id="12" name="Text 10"/>
           <p:cNvSpPr txBox="1"/>
           <p:nvPr/>
         </p:nvSpPr>
@@ -9379,7 +9613,7 @@
       </p:sp>
       <p:pic>
         <p:nvPicPr>
-          <p:cNvPr id="11" name="Image 0" descr="/Users/tsengchenghsun/Class/carClass/Claude outputs/第四週(10-1)/src/logo.png">    </p:cNvPr>
+          <p:cNvPr id="14" name="Image 0" descr="/Users/tsengchenghsun/Class/carClass/Claude outputs/第四週(10-1)/src/logo.png">    </p:cNvPr>
           <p:cNvPicPr>
             <a:picLocks noChangeAspect="1"/>
           </p:cNvPicPr>
@@ -9403,7 +9637,7 @@
       </p:pic>
       <p:sp>
         <p:nvSpPr>
-          <p:cNvPr id="12" name="Text 8"/>
+          <p:cNvPr id="15" name="Text 11"/>
           <p:cNvSpPr txBox="1"/>
           <p:nvPr/>
         </p:nvSpPr>
@@ -9442,7 +9676,7 @@
       </p:sp>
       <p:sp>
         <p:nvSpPr>
-          <p:cNvPr id="13" name="Text 9"/>
+          <p:cNvPr id="16" name="Text 12"/>
           <p:cNvSpPr txBox="1"/>
           <p:nvPr/>
         </p:nvSpPr>
@@ -11736,7 +11970,7 @@
         <p:spPr>
           <a:xfrm>
             <a:off x="502920" y="1975104"/>
-            <a:ext cx="45720" cy="512064"/>
+            <a:ext cx="45720" cy="672713"/>
           </a:xfrm>
           <a:prstGeom prst="rect">
             <a:avLst/>
@@ -11756,7 +11990,7 @@
         <p:spPr>
           <a:xfrm>
             <a:off x="722376" y="1938528"/>
-            <a:ext cx="7863840" cy="603504"/>
+            <a:ext cx="7863840" cy="782441"/>
           </a:xfrm>
           <a:prstGeom prst="rect">
             <a:avLst/>
@@ -11817,8 +12051,8 @@
         </p:nvSpPr>
         <p:spPr>
           <a:xfrm>
-            <a:off x="502920" y="2633472"/>
-            <a:ext cx="45720" cy="512064"/>
+            <a:off x="502920" y="2848985"/>
+            <a:ext cx="45720" cy="672713"/>
           </a:xfrm>
           <a:prstGeom prst="rect">
             <a:avLst/>
@@ -11837,8 +12071,8 @@
         </p:nvSpPr>
         <p:spPr>
           <a:xfrm>
-            <a:off x="722376" y="2596896"/>
-            <a:ext cx="7863840" cy="603504"/>
+            <a:off x="722376" y="2812409"/>
+            <a:ext cx="7863840" cy="782441"/>
           </a:xfrm>
           <a:prstGeom prst="rect">
             <a:avLst/>
@@ -11899,8 +12133,8 @@
         </p:nvSpPr>
         <p:spPr>
           <a:xfrm>
-            <a:off x="502920" y="3291840"/>
-            <a:ext cx="45720" cy="512064"/>
+            <a:off x="502920" y="3722866"/>
+            <a:ext cx="45720" cy="672713"/>
           </a:xfrm>
           <a:prstGeom prst="rect">
             <a:avLst/>
@@ -11919,8 +12153,8 @@
         </p:nvSpPr>
         <p:spPr>
           <a:xfrm>
-            <a:off x="722376" y="3255264"/>
-            <a:ext cx="7863840" cy="603504"/>
+            <a:off x="722376" y="3686290"/>
+            <a:ext cx="7863840" cy="782441"/>
           </a:xfrm>
           <a:prstGeom prst="rect">
             <a:avLst/>
@@ -13228,19 +13462,20 @@
           <p:nvPr/>
         </p:nvSpPr>
         <p:spPr>
-          <a:xfrm rot="-2280000">
-            <a:off x="1402545" y="1505556"/>
-            <a:ext cx="335768" cy="35552"/>
-          </a:xfrm>
-          <a:prstGeom prst="rect">
-            <a:avLst/>
-          </a:prstGeom>
-          <a:solidFill>
-            <a:srgbClr val="7ED957">
-              <a:alpha val="45000"/>
-            </a:srgbClr>
-          </a:solidFill>
-          <a:ln/>
+          <a:xfrm flipV="1">
+            <a:off x="802112" y="1195009"/>
+            <a:ext cx="714052" cy="642935"/>
+          </a:xfrm>
+          <a:prstGeom prst="line">
+            <a:avLst/>
+          </a:prstGeom>
+          <a:noFill/>
+          <a:ln w="17780">
+            <a:solidFill>
+              <a:srgbClr val="2E6E4E"/>
+            </a:solidFill>
+            <a:prstDash val="solid"/>
+          </a:ln>
         </p:spPr>
       </p:sp>
       <p:sp>
@@ -13250,19 +13485,20 @@
           <p:nvPr/>
         </p:nvSpPr>
         <p:spPr>
-          <a:xfrm rot="-1140000">
-            <a:off x="1467875" y="1625878"/>
-            <a:ext cx="335768" cy="35552"/>
-          </a:xfrm>
-          <a:prstGeom prst="rect">
-            <a:avLst/>
-          </a:prstGeom>
-          <a:solidFill>
-            <a:srgbClr val="7ED957">
-              <a:alpha val="45000"/>
-            </a:srgbClr>
-          </a:solidFill>
-          <a:ln/>
+          <a:xfrm flipV="1">
+            <a:off x="802112" y="1386852"/>
+            <a:ext cx="848382" cy="451092"/>
+          </a:xfrm>
+          <a:prstGeom prst="line">
+            <a:avLst/>
+          </a:prstGeom>
+          <a:noFill/>
+          <a:ln w="17780">
+            <a:solidFill>
+              <a:srgbClr val="2E6E4E"/>
+            </a:solidFill>
+            <a:prstDash val="solid"/>
+          </a:ln>
         </p:spPr>
       </p:sp>
       <p:sp>
@@ -13272,19 +13508,20 @@
           <p:nvPr/>
         </p:nvSpPr>
         <p:spPr>
-          <a:xfrm>
-            <a:off x="1490472" y="1760915"/>
-            <a:ext cx="335768" cy="35552"/>
-          </a:xfrm>
-          <a:prstGeom prst="rect">
-            <a:avLst/>
-          </a:prstGeom>
-          <a:solidFill>
-            <a:srgbClr val="7ED957">
-              <a:alpha val="45000"/>
-            </a:srgbClr>
-          </a:solidFill>
-          <a:ln/>
+          <a:xfrm flipV="1">
+            <a:off x="802112" y="1605493"/>
+            <a:ext cx="932310" cy="232451"/>
+          </a:xfrm>
+          <a:prstGeom prst="line">
+            <a:avLst/>
+          </a:prstGeom>
+          <a:noFill/>
+          <a:ln w="17780">
+            <a:solidFill>
+              <a:srgbClr val="2E6E4E"/>
+            </a:solidFill>
+            <a:prstDash val="solid"/>
+          </a:ln>
         </p:spPr>
       </p:sp>
       <p:sp>
@@ -13294,19 +13531,20 @@
           <p:nvPr/>
         </p:nvSpPr>
         <p:spPr>
-          <a:xfrm rot="1140000">
-            <a:off x="1467875" y="1895951"/>
-            <a:ext cx="335768" cy="35552"/>
-          </a:xfrm>
-          <a:prstGeom prst="rect">
-            <a:avLst/>
-          </a:prstGeom>
-          <a:solidFill>
-            <a:srgbClr val="7ED957">
-              <a:alpha val="45000"/>
-            </a:srgbClr>
-          </a:solidFill>
-          <a:ln/>
+          <a:xfrm>
+            <a:off x="802112" y="1837944"/>
+            <a:ext cx="960852" cy="0"/>
+          </a:xfrm>
+          <a:prstGeom prst="line">
+            <a:avLst/>
+          </a:prstGeom>
+          <a:noFill/>
+          <a:ln w="17780">
+            <a:solidFill>
+              <a:srgbClr val="2E6E4E"/>
+            </a:solidFill>
+            <a:prstDash val="solid"/>
+          </a:ln>
         </p:spPr>
       </p:sp>
       <p:sp>
@@ -13316,19 +13554,20 @@
           <p:nvPr/>
         </p:nvSpPr>
         <p:spPr>
-          <a:xfrm rot="2280000">
-            <a:off x="1402545" y="2016274"/>
-            <a:ext cx="335768" cy="35552"/>
-          </a:xfrm>
-          <a:prstGeom prst="rect">
-            <a:avLst/>
-          </a:prstGeom>
-          <a:solidFill>
-            <a:srgbClr val="7ED957">
-              <a:alpha val="45000"/>
-            </a:srgbClr>
-          </a:solidFill>
-          <a:ln/>
+          <a:xfrm>
+            <a:off x="802112" y="1837944"/>
+            <a:ext cx="848382" cy="451092"/>
+          </a:xfrm>
+          <a:prstGeom prst="line">
+            <a:avLst/>
+          </a:prstGeom>
+          <a:noFill/>
+          <a:ln w="17780">
+            <a:solidFill>
+              <a:srgbClr val="2E6E4E"/>
+            </a:solidFill>
+            <a:prstDash val="solid"/>
+          </a:ln>
         </p:spPr>
       </p:sp>
       <p:sp>
@@ -13339,16 +13578,19 @@
         </p:nvSpPr>
         <p:spPr>
           <a:xfrm>
-            <a:off x="967069" y="1581180"/>
-            <a:ext cx="355519" cy="128382"/>
-          </a:xfrm>
-          <a:prstGeom prst="ellipse">
-            <a:avLst/>
-          </a:prstGeom>
-          <a:solidFill>
-            <a:srgbClr val="7ED957"/>
-          </a:solidFill>
-          <a:ln/>
+            <a:off x="802112" y="1837944"/>
+            <a:ext cx="714052" cy="642935"/>
+          </a:xfrm>
+          <a:prstGeom prst="line">
+            <a:avLst/>
+          </a:prstGeom>
+          <a:noFill/>
+          <a:ln w="17780">
+            <a:solidFill>
+              <a:srgbClr val="2E6E4E"/>
+            </a:solidFill>
+            <a:prstDash val="solid"/>
+          </a:ln>
         </p:spPr>
       </p:sp>
       <p:sp>
@@ -13359,14 +13601,14 @@
         </p:nvSpPr>
         <p:spPr>
           <a:xfrm>
-            <a:off x="967069" y="1640434"/>
-            <a:ext cx="355519" cy="335768"/>
-          </a:xfrm>
-          <a:prstGeom prst="rect">
+            <a:off x="756666" y="1792498"/>
+            <a:ext cx="90891" cy="90891"/>
+          </a:xfrm>
+          <a:prstGeom prst="ellipse">
             <a:avLst/>
           </a:prstGeom>
           <a:solidFill>
-            <a:srgbClr val="7ED957"/>
+            <a:srgbClr val="2E6E4E"/>
           </a:solidFill>
           <a:ln/>
         </p:spPr>
@@ -13379,65 +13621,23 @@
         </p:nvSpPr>
         <p:spPr>
           <a:xfrm>
-            <a:off x="967069" y="1907073"/>
-            <a:ext cx="355519" cy="128382"/>
-          </a:xfrm>
-          <a:prstGeom prst="ellipse">
-            <a:avLst/>
+            <a:off x="1408453" y="1940386"/>
+            <a:ext cx="129845" cy="129845"/>
+          </a:xfrm>
+          <a:prstGeom prst="roundRect">
+            <a:avLst>
+              <a:gd name="adj" fmla="val 20000"/>
+            </a:avLst>
           </a:prstGeom>
           <a:solidFill>
-            <a:srgbClr val="7ED957"/>
+            <a:srgbClr val="D9463E"/>
           </a:solidFill>
           <a:ln/>
         </p:spPr>
       </p:sp>
       <p:sp>
         <p:nvSpPr>
-          <p:cNvPr id="12" name="Shape 10"/>
-          <p:cNvSpPr/>
-          <p:nvPr/>
-        </p:nvSpPr>
-        <p:spPr>
-          <a:xfrm>
-            <a:off x="967069" y="1739189"/>
-            <a:ext cx="355519" cy="69129"/>
-          </a:xfrm>
-          <a:prstGeom prst="rect">
-            <a:avLst/>
-          </a:prstGeom>
-          <a:solidFill>
-            <a:srgbClr val="FFFFFF">
-              <a:alpha val="65000"/>
-            </a:srgbClr>
-          </a:solidFill>
-          <a:ln/>
-        </p:spPr>
-      </p:sp>
-      <p:sp>
-        <p:nvSpPr>
-          <p:cNvPr id="13" name="Shape 11"/>
-          <p:cNvSpPr/>
-          <p:nvPr/>
-        </p:nvSpPr>
-        <p:spPr>
-          <a:xfrm>
-            <a:off x="1085576" y="2035454"/>
-            <a:ext cx="118506" cy="138257"/>
-          </a:xfrm>
-          <a:prstGeom prst="rect">
-            <a:avLst/>
-          </a:prstGeom>
-          <a:solidFill>
-            <a:srgbClr val="7ED957">
-              <a:alpha val="60000"/>
-            </a:srgbClr>
-          </a:solidFill>
-          <a:ln/>
-        </p:spPr>
-      </p:sp>
-      <p:sp>
-        <p:nvSpPr>
-          <p:cNvPr id="14" name="Text 12"/>
+          <p:cNvPr id="12" name="Text 10"/>
           <p:cNvSpPr txBox="1"/>
           <p:nvPr/>
         </p:nvSpPr>
@@ -13499,18 +13699,18 @@
       </p:sp>
       <p:sp>
         <p:nvSpPr>
-          <p:cNvPr id="15" name="Shape 13"/>
+          <p:cNvPr id="13" name="Shape 11"/>
           <p:cNvSpPr/>
           <p:nvPr/>
         </p:nvSpPr>
         <p:spPr>
           <a:xfrm>
             <a:off x="2295144" y="1665299"/>
-            <a:ext cx="786384" cy="283464"/>
+            <a:ext cx="1060704" cy="400118"/>
           </a:xfrm>
           <a:prstGeom prst="roundRect">
             <a:avLst>
-              <a:gd name="adj" fmla="val 19355"/>
+              <a:gd name="adj" fmla="val 13712"/>
             </a:avLst>
           </a:prstGeom>
           <a:solidFill>
@@ -13521,14 +13721,14 @@
       </p:sp>
       <p:sp>
         <p:nvSpPr>
-          <p:cNvPr id="16" name="Text 14"/>
+          <p:cNvPr id="14" name="Text 12"/>
           <p:cNvSpPr txBox="1"/>
           <p:nvPr/>
         </p:nvSpPr>
         <p:spPr>
           <a:xfrm>
-            <a:off x="2295144" y="1688159"/>
-            <a:ext cx="786384" cy="256032"/>
+            <a:off x="2350008" y="1701875"/>
+            <a:ext cx="950976" cy="345254"/>
           </a:xfrm>
           <a:prstGeom prst="rect">
             <a:avLst/>
@@ -13542,7 +13742,7 @@
           <a:p>
             <a:pPr algn="ctr" indent="0" marL="0">
               <a:lnSpc>
-                <a:spcPct val="102000"/>
+                <a:spcPct val="106000"/>
               </a:lnSpc>
               <a:buNone/>
             </a:pPr>
@@ -13555,14 +13755,14 @@
                 <a:ea typeface="Arial" pitchFamily="34" charset="-122"/>
                 <a:cs typeface="Arial" pitchFamily="34" charset="-120"/>
               </a:rPr>
-              <a:t>Tên trên bảng thông số</a:t>
+              <a:t>Tên thông số</a:t>
             </a:r>
             <a:endParaRPr lang="en-US" sz="900" dirty="0"/>
           </a:p>
           <a:p>
             <a:pPr algn="ctr" indent="0" marL="0">
               <a:lnSpc>
-                <a:spcPct val="102000"/>
+                <a:spcPct val="106000"/>
               </a:lnSpc>
               <a:buNone/>
             </a:pPr>
@@ -13575,7 +13775,7 @@
                 <a:ea typeface="微軟正黑體" pitchFamily="34" charset="-122"/>
                 <a:cs typeface="微軟正黑體" pitchFamily="34" charset="-120"/>
               </a:rPr>
-              <a:t>規格表上的名字</a:t>
+              <a:t>規格表上叫</a:t>
             </a:r>
             <a:endParaRPr lang="en-US" sz="900" dirty="0"/>
           </a:p>
@@ -13583,18 +13783,80 @@
       </p:sp>
       <p:sp>
         <p:nvSpPr>
-          <p:cNvPr id="17" name="Shape 15"/>
+          <p:cNvPr id="15" name="Text 13"/>
+          <p:cNvSpPr txBox="1"/>
+          <p:nvPr/>
+        </p:nvSpPr>
+        <p:spPr>
+          <a:xfrm>
+            <a:off x="3502152" y="1665299"/>
+            <a:ext cx="5138928" cy="454982"/>
+          </a:xfrm>
+          <a:prstGeom prst="rect">
+            <a:avLst/>
+          </a:prstGeom>
+          <a:noFill/>
+          <a:ln/>
+        </p:spPr>
+        <p:txBody>
+          <a:bodyPr wrap="square" lIns="0" tIns="0" rIns="0" bIns="0" rtlCol="0" anchor="t"/>
+          <a:lstStyle/>
+          <a:p>
+            <a:pPr indent="0" marL="0">
+              <a:lnSpc>
+                <a:spcPct val="126000"/>
+              </a:lnSpc>
+              <a:buNone/>
+            </a:pPr>
+            <a:r>
+              <a:rPr lang="en-US" sz="1100" dirty="0">
+                <a:solidFill>
+                  <a:srgbClr val="1A2733"/>
+                </a:solidFill>
+                <a:latin typeface="Arial" pitchFamily="34" charset="0"/>
+                <a:ea typeface="Arial" pitchFamily="34" charset="-122"/>
+                <a:cs typeface="Arial" pitchFamily="34" charset="-120"/>
+              </a:rPr>
+              <a:t>Resolution · độ phân giải</a:t>
+            </a:r>
+            <a:endParaRPr lang="en-US" sz="1100" dirty="0"/>
+          </a:p>
+          <a:p>
+            <a:pPr indent="0" marL="0">
+              <a:lnSpc>
+                <a:spcPct val="126000"/>
+              </a:lnSpc>
+              <a:buNone/>
+            </a:pPr>
+            <a:r>
+              <a:rPr lang="en-US" sz="1000" dirty="0">
+                <a:solidFill>
+                  <a:srgbClr val="5F7183"/>
+                </a:solidFill>
+                <a:latin typeface="微軟正黑體" pitchFamily="34" charset="0"/>
+                <a:ea typeface="微軟正黑體" pitchFamily="34" charset="-122"/>
+                <a:cs typeface="微軟正黑體" pitchFamily="34" charset="-120"/>
+              </a:rPr>
+              <a:t>Resolution　解析度</a:t>
+            </a:r>
+            <a:endParaRPr lang="en-US" sz="1100" dirty="0"/>
+          </a:p>
+        </p:txBody>
+      </p:sp>
+      <p:sp>
+        <p:nvSpPr>
+          <p:cNvPr id="16" name="Shape 14"/>
           <p:cNvSpPr/>
           <p:nvPr/>
         </p:nvSpPr>
         <p:spPr>
           <a:xfrm>
-            <a:off x="2295144" y="2168219"/>
-            <a:ext cx="786384" cy="283464"/>
+            <a:off x="2295144" y="2184289"/>
+            <a:ext cx="1060704" cy="400118"/>
           </a:xfrm>
           <a:prstGeom prst="roundRect">
             <a:avLst>
-              <a:gd name="adj" fmla="val 19355"/>
+              <a:gd name="adj" fmla="val 13712"/>
             </a:avLst>
           </a:prstGeom>
           <a:solidFill>
@@ -13605,14 +13867,14 @@
       </p:sp>
       <p:sp>
         <p:nvSpPr>
-          <p:cNvPr id="18" name="Text 16"/>
+          <p:cNvPr id="17" name="Text 15"/>
           <p:cNvSpPr txBox="1"/>
           <p:nvPr/>
         </p:nvSpPr>
         <p:spPr>
           <a:xfrm>
-            <a:off x="2295144" y="2191079"/>
-            <a:ext cx="786384" cy="256032"/>
+            <a:off x="2350008" y="2220865"/>
+            <a:ext cx="950976" cy="345254"/>
           </a:xfrm>
           <a:prstGeom prst="rect">
             <a:avLst/>
@@ -13626,7 +13888,7 @@
           <a:p>
             <a:pPr algn="ctr" indent="0" marL="0">
               <a:lnSpc>
-                <a:spcPct val="102000"/>
+                <a:spcPct val="106000"/>
               </a:lnSpc>
               <a:buNone/>
             </a:pPr>
@@ -13646,7 +13908,7 @@
           <a:p>
             <a:pPr algn="ctr" indent="0" marL="0">
               <a:lnSpc>
-                <a:spcPct val="102000"/>
+                <a:spcPct val="106000"/>
               </a:lnSpc>
               <a:buNone/>
             </a:pPr>
@@ -13667,18 +13929,80 @@
       </p:sp>
       <p:sp>
         <p:nvSpPr>
+          <p:cNvPr id="18" name="Text 16"/>
+          <p:cNvSpPr txBox="1"/>
+          <p:nvPr/>
+        </p:nvSpPr>
+        <p:spPr>
+          <a:xfrm>
+            <a:off x="3502152" y="2184289"/>
+            <a:ext cx="5138928" cy="454982"/>
+          </a:xfrm>
+          <a:prstGeom prst="rect">
+            <a:avLst/>
+          </a:prstGeom>
+          <a:noFill/>
+          <a:ln/>
+        </p:spPr>
+        <p:txBody>
+          <a:bodyPr wrap="square" lIns="0" tIns="0" rIns="0" bIns="0" rtlCol="0" anchor="t"/>
+          <a:lstStyle/>
+          <a:p>
+            <a:pPr indent="0" marL="0">
+              <a:lnSpc>
+                <a:spcPct val="126000"/>
+              </a:lnSpc>
+              <a:buNone/>
+            </a:pPr>
+            <a:r>
+              <a:rPr lang="en-US" sz="1100" dirty="0">
+                <a:solidFill>
+                  <a:srgbClr val="1A2733"/>
+                </a:solidFill>
+                <a:latin typeface="Arial" pitchFamily="34" charset="0"/>
+                <a:ea typeface="Arial" pitchFamily="34" charset="-122"/>
+                <a:cs typeface="Arial" pitchFamily="34" charset="-120"/>
+              </a:rPr>
+              <a:t>3 đến 60 tia, bạn tự kéo</a:t>
+            </a:r>
+            <a:endParaRPr lang="en-US" sz="1100" dirty="0"/>
+          </a:p>
+          <a:p>
+            <a:pPr indent="0" marL="0">
+              <a:lnSpc>
+                <a:spcPct val="126000"/>
+              </a:lnSpc>
+              <a:buNone/>
+            </a:pPr>
+            <a:r>
+              <a:rPr lang="en-US" sz="1000" dirty="0">
+                <a:solidFill>
+                  <a:srgbClr val="5F7183"/>
+                </a:solidFill>
+                <a:latin typeface="微軟正黑體" pitchFamily="34" charset="0"/>
+                <a:ea typeface="微軟正黑體" pitchFamily="34" charset="-122"/>
+                <a:cs typeface="微軟正黑體" pitchFamily="34" charset="-120"/>
+              </a:rPr>
+              <a:t>3 到 60 條，自己拉</a:t>
+            </a:r>
+            <a:endParaRPr lang="en-US" sz="1100" dirty="0"/>
+          </a:p>
+        </p:txBody>
+      </p:sp>
+      <p:sp>
+        <p:nvSpPr>
           <p:cNvPr id="19" name="Shape 17"/>
           <p:cNvSpPr/>
           <p:nvPr/>
         </p:nvSpPr>
         <p:spPr>
           <a:xfrm>
-            <a:off x="2295144" y="2671139"/>
-            <a:ext cx="786384" cy="283464"/>
+            <a:off x="2295144" y="2703280"/>
+            <a:ext cx="1060704" cy="400118"/>
           </a:xfrm>
           <a:prstGeom prst="roundRect">
             <a:avLst>
-              <a:gd name="adj" fmla="val 19355"/>
+              <a:gd name="adj" fmla="val 13712"/>
             </a:avLst>
           </a:prstGeom>
           <a:solidFill>
@@ -13695,8 +14019,8 @@
         </p:nvSpPr>
         <p:spPr>
           <a:xfrm>
-            <a:off x="2295144" y="2693999"/>
-            <a:ext cx="786384" cy="256032"/>
+            <a:off x="2350008" y="2739856"/>
+            <a:ext cx="950976" cy="345254"/>
           </a:xfrm>
           <a:prstGeom prst="rect">
             <a:avLst/>
@@ -13710,7 +14034,7 @@
           <a:p>
             <a:pPr algn="ctr" indent="0" marL="0">
               <a:lnSpc>
-                <a:spcPct val="102000"/>
+                <a:spcPct val="106000"/>
               </a:lnSpc>
               <a:buNone/>
             </a:pPr>
@@ -13730,7 +14054,7 @@
           <a:p>
             <a:pPr algn="ctr" indent="0" marL="0">
               <a:lnSpc>
-                <a:spcPct val="102000"/>
+                <a:spcPct val="106000"/>
               </a:lnSpc>
               <a:buNone/>
             </a:pPr>
@@ -13751,18 +14075,80 @@
       </p:sp>
       <p:sp>
         <p:nvSpPr>
-          <p:cNvPr id="21" name="Shape 19"/>
+          <p:cNvPr id="21" name="Text 19"/>
+          <p:cNvSpPr txBox="1"/>
+          <p:nvPr/>
+        </p:nvSpPr>
+        <p:spPr>
+          <a:xfrm>
+            <a:off x="3502152" y="2703280"/>
+            <a:ext cx="5138928" cy="454982"/>
+          </a:xfrm>
+          <a:prstGeom prst="rect">
+            <a:avLst/>
+          </a:prstGeom>
+          <a:noFill/>
+          <a:ln/>
+        </p:spPr>
+        <p:txBody>
+          <a:bodyPr wrap="square" lIns="0" tIns="0" rIns="0" bIns="0" rtlCol="0" anchor="t"/>
+          <a:lstStyle/>
+          <a:p>
+            <a:pPr indent="0" marL="0">
+              <a:lnSpc>
+                <a:spcPct val="126000"/>
+              </a:lnSpc>
+              <a:buNone/>
+            </a:pPr>
+            <a:r>
+              <a:rPr lang="en-US" sz="1100" dirty="0">
+                <a:solidFill>
+                  <a:srgbClr val="1A2733"/>
+                </a:solidFill>
+                <a:latin typeface="Arial" pitchFamily="34" charset="0"/>
+                <a:ea typeface="Arial" pitchFamily="34" charset="-122"/>
+                <a:cs typeface="Arial" pitchFamily="34" charset="-120"/>
+              </a:rPr>
+              <a:t>LiDAR bắn vài trăm nghìn đến vài triệu điểm mỗi giây</a:t>
+            </a:r>
+            <a:endParaRPr lang="en-US" sz="1100" dirty="0"/>
+          </a:p>
+          <a:p>
+            <a:pPr indent="0" marL="0">
+              <a:lnSpc>
+                <a:spcPct val="126000"/>
+              </a:lnSpc>
+              <a:buNone/>
+            </a:pPr>
+            <a:r>
+              <a:rPr lang="en-US" sz="1000" dirty="0">
+                <a:solidFill>
+                  <a:srgbClr val="5F7183"/>
+                </a:solidFill>
+                <a:latin typeface="微軟正黑體" pitchFamily="34" charset="0"/>
+                <a:ea typeface="微軟正黑體" pitchFamily="34" charset="-122"/>
+                <a:cs typeface="微軟正黑體" pitchFamily="34" charset="-120"/>
+              </a:rPr>
+              <a:t>光達每秒打幾十萬到幾百萬個點</a:t>
+            </a:r>
+            <a:endParaRPr lang="en-US" sz="1100" dirty="0"/>
+          </a:p>
+        </p:txBody>
+      </p:sp>
+      <p:sp>
+        <p:nvSpPr>
+          <p:cNvPr id="22" name="Shape 20"/>
           <p:cNvSpPr/>
           <p:nvPr/>
         </p:nvSpPr>
         <p:spPr>
           <a:xfrm>
-            <a:off x="2295144" y="3174059"/>
-            <a:ext cx="786384" cy="283464"/>
+            <a:off x="2295144" y="3222270"/>
+            <a:ext cx="1060704" cy="400118"/>
           </a:xfrm>
           <a:prstGeom prst="roundRect">
             <a:avLst>
-              <a:gd name="adj" fmla="val 19355"/>
+              <a:gd name="adj" fmla="val 13712"/>
             </a:avLst>
           </a:prstGeom>
           <a:solidFill>
@@ -13773,14 +14159,14 @@
       </p:sp>
       <p:sp>
         <p:nvSpPr>
-          <p:cNvPr id="22" name="Text 20"/>
+          <p:cNvPr id="23" name="Text 21"/>
           <p:cNvSpPr txBox="1"/>
           <p:nvPr/>
         </p:nvSpPr>
         <p:spPr>
           <a:xfrm>
-            <a:off x="2295144" y="3196919"/>
-            <a:ext cx="786384" cy="256032"/>
+            <a:off x="2350008" y="3258846"/>
+            <a:ext cx="950976" cy="345254"/>
           </a:xfrm>
           <a:prstGeom prst="rect">
             <a:avLst/>
@@ -13794,7 +14180,7 @@
           <a:p>
             <a:pPr algn="ctr" indent="0" marL="0">
               <a:lnSpc>
-                <a:spcPct val="102000"/>
+                <a:spcPct val="106000"/>
               </a:lnSpc>
               <a:buNone/>
             </a:pPr>
@@ -13814,7 +14200,7 @@
           <a:p>
             <a:pPr algn="ctr" indent="0" marL="0">
               <a:lnSpc>
-                <a:spcPct val="102000"/>
+                <a:spcPct val="106000"/>
               </a:lnSpc>
               <a:buNone/>
             </a:pPr>
@@ -13835,7 +14221,69 @@
       </p:sp>
       <p:sp>
         <p:nvSpPr>
-          <p:cNvPr id="23" name="Shape 21"/>
+          <p:cNvPr id="24" name="Text 22"/>
+          <p:cNvSpPr txBox="1"/>
+          <p:nvPr/>
+        </p:nvSpPr>
+        <p:spPr>
+          <a:xfrm>
+            <a:off x="3502152" y="3222270"/>
+            <a:ext cx="5138928" cy="454982"/>
+          </a:xfrm>
+          <a:prstGeom prst="rect">
+            <a:avLst/>
+          </a:prstGeom>
+          <a:noFill/>
+          <a:ln/>
+        </p:spPr>
+        <p:txBody>
+          <a:bodyPr wrap="square" lIns="0" tIns="0" rIns="0" bIns="0" rtlCol="0" anchor="t"/>
+          <a:lstStyle/>
+          <a:p>
+            <a:pPr indent="0" marL="0">
+              <a:lnSpc>
+                <a:spcPct val="126000"/>
+              </a:lnSpc>
+              <a:buNone/>
+            </a:pPr>
+            <a:r>
+              <a:rPr lang="en-US" sz="1100" dirty="0">
+                <a:solidFill>
+                  <a:srgbClr val="1A2733"/>
+                </a:solidFill>
+                <a:latin typeface="Arial" pitchFamily="34" charset="0"/>
+                <a:ea typeface="Arial" pitchFamily="34" charset="-122"/>
+                <a:cs typeface="Arial" pitchFamily="34" charset="-120"/>
+              </a:rPr>
+              <a:t>Khe giữa hai tia rộng ra, xe máy lách qua khe thì không thấy</a:t>
+            </a:r>
+            <a:endParaRPr lang="en-US" sz="1100" dirty="0"/>
+          </a:p>
+          <a:p>
+            <a:pPr indent="0" marL="0">
+              <a:lnSpc>
+                <a:spcPct val="126000"/>
+              </a:lnSpc>
+              <a:buNone/>
+            </a:pPr>
+            <a:r>
+              <a:rPr lang="en-US" sz="1000" dirty="0">
+                <a:solidFill>
+                  <a:srgbClr val="5F7183"/>
+                </a:solidFill>
+                <a:latin typeface="微軟正黑體" pitchFamily="34" charset="0"/>
+                <a:ea typeface="微軟正黑體" pitchFamily="34" charset="-122"/>
+                <a:cs typeface="微軟正黑體" pitchFamily="34" charset="-120"/>
+              </a:rPr>
+              <a:t>射線之間的縫變寬，機車從縫裡鑽過去就看不到</a:t>
+            </a:r>
+            <a:endParaRPr lang="en-US" sz="1100" dirty="0"/>
+          </a:p>
+        </p:txBody>
+      </p:sp>
+      <p:sp>
+        <p:nvSpPr>
+          <p:cNvPr id="25" name="Shape 23"/>
           <p:cNvSpPr/>
           <p:nvPr/>
         </p:nvSpPr>
@@ -13862,7 +14310,7 @@
       </p:sp>
       <p:sp>
         <p:nvSpPr>
-          <p:cNvPr id="24" name="Text 22"/>
+          <p:cNvPr id="26" name="Text 24"/>
           <p:cNvSpPr txBox="1"/>
           <p:nvPr/>
         </p:nvSpPr>
@@ -13924,7 +14372,7 @@
       </p:sp>
       <p:pic>
         <p:nvPicPr>
-          <p:cNvPr id="26" name="Image 0" descr="/Users/tsengchenghsun/Class/carClass/Claude outputs/第四週(10-1)/src/logo.png">    </p:cNvPr>
+          <p:cNvPr id="28" name="Image 0" descr="/Users/tsengchenghsun/Class/carClass/Claude outputs/第四週(10-1)/src/logo.png">    </p:cNvPr>
           <p:cNvPicPr>
             <a:picLocks noChangeAspect="1"/>
           </p:cNvPicPr>
@@ -13948,7 +14396,7 @@
       </p:pic>
       <p:sp>
         <p:nvSpPr>
-          <p:cNvPr id="27" name="Text 23"/>
+          <p:cNvPr id="29" name="Text 25"/>
           <p:cNvSpPr txBox="1"/>
           <p:nvPr/>
         </p:nvSpPr>
@@ -13987,7 +14435,7 @@
       </p:sp>
       <p:sp>
         <p:nvSpPr>
-          <p:cNvPr id="28" name="Text 24"/>
+          <p:cNvPr id="30" name="Text 26"/>
           <p:cNvSpPr txBox="1"/>
           <p:nvPr/>
         </p:nvSpPr>
@@ -14123,11 +14571,526 @@
         </p:nvSpPr>
         <p:spPr>
           <a:xfrm>
-            <a:off x="848563" y="1758940"/>
-            <a:ext cx="177759" cy="177759"/>
-          </a:xfrm>
-          <a:prstGeom prst="ellipse">
-            <a:avLst/>
+            <a:off x="659282" y="1868317"/>
+            <a:ext cx="311628" cy="143349"/>
+          </a:xfrm>
+          <a:prstGeom prst="roundRect">
+            <a:avLst>
+              <a:gd name="adj" fmla="val 22000"/>
+            </a:avLst>
+          </a:prstGeom>
+          <a:solidFill>
+            <a:srgbClr val="8FA3B5"/>
+          </a:solidFill>
+          <a:ln/>
+        </p:spPr>
+      </p:sp>
+      <p:sp>
+        <p:nvSpPr>
+          <p:cNvPr id="5" name="Shape 3"/>
+          <p:cNvSpPr/>
+          <p:nvPr/>
+        </p:nvSpPr>
+        <p:spPr>
+          <a:xfrm>
+            <a:off x="777701" y="1896986"/>
+            <a:ext cx="105953" cy="86009"/>
+          </a:xfrm>
+          <a:prstGeom prst="roundRect">
+            <a:avLst>
+              <a:gd name="adj" fmla="val 23333"/>
+            </a:avLst>
+          </a:prstGeom>
+          <a:solidFill>
+            <a:srgbClr val="FFFFFF"/>
+          </a:solidFill>
+          <a:ln/>
+        </p:spPr>
+      </p:sp>
+      <p:sp>
+        <p:nvSpPr>
+          <p:cNvPr id="6" name="Shape 4"/>
+          <p:cNvSpPr/>
+          <p:nvPr/>
+        </p:nvSpPr>
+        <p:spPr>
+          <a:xfrm>
+            <a:off x="1009863" y="1939991"/>
+            <a:ext cx="649224" cy="0"/>
+          </a:xfrm>
+          <a:prstGeom prst="line">
+            <a:avLst/>
+          </a:prstGeom>
+          <a:noFill/>
+          <a:ln w="20320">
+            <a:solidFill>
+              <a:srgbClr val="8A5A00"/>
+            </a:solidFill>
+            <a:prstDash val="solid"/>
+            <a:tailEnd type="triangle"/>
+          </a:ln>
+        </p:spPr>
+      </p:sp>
+      <p:sp>
+        <p:nvSpPr>
+          <p:cNvPr id="7" name="Shape 5"/>
+          <p:cNvSpPr/>
+          <p:nvPr/>
+        </p:nvSpPr>
+        <p:spPr>
+          <a:xfrm>
+            <a:off x="1172169" y="1854952"/>
+            <a:ext cx="0" cy="170078"/>
+          </a:xfrm>
+          <a:prstGeom prst="line">
+            <a:avLst/>
+          </a:prstGeom>
+          <a:noFill/>
+          <a:ln w="12700">
+            <a:solidFill>
+              <a:srgbClr val="8A5A00"/>
+            </a:solidFill>
+            <a:prstDash val="solid"/>
+          </a:ln>
+        </p:spPr>
+      </p:sp>
+      <p:sp>
+        <p:nvSpPr>
+          <p:cNvPr id="8" name="Shape 6"/>
+          <p:cNvSpPr/>
+          <p:nvPr/>
+        </p:nvSpPr>
+        <p:spPr>
+          <a:xfrm>
+            <a:off x="1334475" y="1854952"/>
+            <a:ext cx="0" cy="170078"/>
+          </a:xfrm>
+          <a:prstGeom prst="line">
+            <a:avLst/>
+          </a:prstGeom>
+          <a:noFill/>
+          <a:ln w="12700">
+            <a:solidFill>
+              <a:srgbClr val="8A5A00"/>
+            </a:solidFill>
+            <a:prstDash val="solid"/>
+          </a:ln>
+        </p:spPr>
+      </p:sp>
+      <p:sp>
+        <p:nvSpPr>
+          <p:cNvPr id="9" name="Shape 7"/>
+          <p:cNvSpPr/>
+          <p:nvPr/>
+        </p:nvSpPr>
+        <p:spPr>
+          <a:xfrm>
+            <a:off x="1496781" y="1854952"/>
+            <a:ext cx="0" cy="170078"/>
+          </a:xfrm>
+          <a:prstGeom prst="line">
+            <a:avLst/>
+          </a:prstGeom>
+          <a:noFill/>
+          <a:ln w="12700">
+            <a:solidFill>
+              <a:srgbClr val="8A5A00"/>
+            </a:solidFill>
+            <a:prstDash val="solid"/>
+          </a:ln>
+        </p:spPr>
+      </p:sp>
+      <p:sp>
+        <p:nvSpPr>
+          <p:cNvPr id="10" name="Shape 8"/>
+          <p:cNvSpPr/>
+          <p:nvPr/>
+        </p:nvSpPr>
+        <p:spPr>
+          <a:xfrm>
+            <a:off x="1646103" y="1752905"/>
+            <a:ext cx="90891" cy="374172"/>
+          </a:xfrm>
+          <a:prstGeom prst="roundRect">
+            <a:avLst>
+              <a:gd name="adj" fmla="val 21429"/>
+            </a:avLst>
+          </a:prstGeom>
+          <a:solidFill>
+            <a:srgbClr val="D9463E"/>
+          </a:solidFill>
+          <a:ln/>
+        </p:spPr>
+      </p:sp>
+      <p:sp>
+        <p:nvSpPr>
+          <p:cNvPr id="11" name="Text 9"/>
+          <p:cNvSpPr txBox="1"/>
+          <p:nvPr/>
+        </p:nvSpPr>
+        <p:spPr>
+          <a:xfrm>
+            <a:off x="2295144" y="786384"/>
+            <a:ext cx="6345936" cy="522366"/>
+          </a:xfrm>
+          <a:prstGeom prst="rect">
+            <a:avLst/>
+          </a:prstGeom>
+          <a:noFill/>
+          <a:ln/>
+        </p:spPr>
+        <p:txBody>
+          <a:bodyPr wrap="square" lIns="0" tIns="0" rIns="0" bIns="0" rtlCol="0" anchor="t"/>
+          <a:lstStyle/>
+          <a:p>
+            <a:pPr indent="0" marL="0">
+              <a:lnSpc>
+                <a:spcPct val="116000"/>
+              </a:lnSpc>
+              <a:buNone/>
+            </a:pPr>
+            <a:r>
+              <a:rPr lang="en-US" sz="1800" b="1" dirty="0">
+                <a:solidFill>
+                  <a:srgbClr val="0B1F3A"/>
+                </a:solidFill>
+                <a:latin typeface="Arial" pitchFamily="34" charset="0"/>
+                <a:ea typeface="Arial" pitchFamily="34" charset="-122"/>
+                <a:cs typeface="Arial" pitchFamily="34" charset="-120"/>
+              </a:rPr>
+              <a:t>Chiều dài tia = tầm đo: nhìn được xa bao nhiêu mét</a:t>
+            </a:r>
+            <a:endParaRPr lang="en-US" sz="1800" dirty="0"/>
+          </a:p>
+          <a:p>
+            <a:pPr indent="0" marL="0">
+              <a:lnSpc>
+                <a:spcPct val="116000"/>
+              </a:lnSpc>
+              <a:buNone/>
+            </a:pPr>
+            <a:r>
+              <a:rPr lang="en-US" sz="1250" dirty="0">
+                <a:solidFill>
+                  <a:srgbClr val="007F72"/>
+                </a:solidFill>
+                <a:latin typeface="微軟正黑體" pitchFamily="34" charset="0"/>
+                <a:ea typeface="微軟正黑體" pitchFamily="34" charset="-122"/>
+                <a:cs typeface="微軟正黑體" pitchFamily="34" charset="-120"/>
+              </a:rPr>
+              <a:t>射線長度 ＝ 測距範圍：看得到幾公尺</a:t>
+            </a:r>
+            <a:endParaRPr lang="en-US" sz="1800" dirty="0"/>
+          </a:p>
+        </p:txBody>
+      </p:sp>
+      <p:sp>
+        <p:nvSpPr>
+          <p:cNvPr id="12" name="Shape 10"/>
+          <p:cNvSpPr/>
+          <p:nvPr/>
+        </p:nvSpPr>
+        <p:spPr>
+          <a:xfrm>
+            <a:off x="2295144" y="1400190"/>
+            <a:ext cx="1060704" cy="400118"/>
+          </a:xfrm>
+          <a:prstGeom prst="roundRect">
+            <a:avLst>
+              <a:gd name="adj" fmla="val 13712"/>
+            </a:avLst>
+          </a:prstGeom>
+          <a:solidFill>
+            <a:srgbClr val="0B1F3A"/>
+          </a:solidFill>
+          <a:ln/>
+        </p:spPr>
+      </p:sp>
+      <p:sp>
+        <p:nvSpPr>
+          <p:cNvPr id="13" name="Text 11"/>
+          <p:cNvSpPr txBox="1"/>
+          <p:nvPr/>
+        </p:nvSpPr>
+        <p:spPr>
+          <a:xfrm>
+            <a:off x="2350008" y="1436766"/>
+            <a:ext cx="950976" cy="345254"/>
+          </a:xfrm>
+          <a:prstGeom prst="rect">
+            <a:avLst/>
+          </a:prstGeom>
+          <a:noFill/>
+          <a:ln/>
+        </p:spPr>
+        <p:txBody>
+          <a:bodyPr wrap="square" lIns="0" tIns="0" rIns="0" bIns="0" rtlCol="0" anchor="t"/>
+          <a:lstStyle/>
+          <a:p>
+            <a:pPr algn="ctr" indent="0" marL="0">
+              <a:lnSpc>
+                <a:spcPct val="106000"/>
+              </a:lnSpc>
+              <a:buNone/>
+            </a:pPr>
+            <a:r>
+              <a:rPr lang="en-US" sz="900" b="1" dirty="0">
+                <a:solidFill>
+                  <a:srgbClr val="FFFFFF"/>
+                </a:solidFill>
+                <a:latin typeface="Arial" pitchFamily="34" charset="0"/>
+                <a:ea typeface="Arial" pitchFamily="34" charset="-122"/>
+                <a:cs typeface="Arial" pitchFamily="34" charset="-120"/>
+              </a:rPr>
+              <a:t>Tên thông số</a:t>
+            </a:r>
+            <a:endParaRPr lang="en-US" sz="900" dirty="0"/>
+          </a:p>
+          <a:p>
+            <a:pPr algn="ctr" indent="0" marL="0">
+              <a:lnSpc>
+                <a:spcPct val="106000"/>
+              </a:lnSpc>
+              <a:buNone/>
+            </a:pPr>
+            <a:r>
+              <a:rPr lang="en-US" sz="850" dirty="0">
+                <a:solidFill>
+                  <a:srgbClr val="FFFFFF"/>
+                </a:solidFill>
+                <a:latin typeface="微軟正黑體" pitchFamily="34" charset="0"/>
+                <a:ea typeface="微軟正黑體" pitchFamily="34" charset="-122"/>
+                <a:cs typeface="微軟正黑體" pitchFamily="34" charset="-120"/>
+              </a:rPr>
+              <a:t>規格表上叫</a:t>
+            </a:r>
+            <a:endParaRPr lang="en-US" sz="900" dirty="0"/>
+          </a:p>
+        </p:txBody>
+      </p:sp>
+      <p:sp>
+        <p:nvSpPr>
+          <p:cNvPr id="14" name="Text 12"/>
+          <p:cNvSpPr txBox="1"/>
+          <p:nvPr/>
+        </p:nvSpPr>
+        <p:spPr>
+          <a:xfrm>
+            <a:off x="3502152" y="1400190"/>
+            <a:ext cx="5138928" cy="454982"/>
+          </a:xfrm>
+          <a:prstGeom prst="rect">
+            <a:avLst/>
+          </a:prstGeom>
+          <a:noFill/>
+          <a:ln/>
+        </p:spPr>
+        <p:txBody>
+          <a:bodyPr wrap="square" lIns="0" tIns="0" rIns="0" bIns="0" rtlCol="0" anchor="t"/>
+          <a:lstStyle/>
+          <a:p>
+            <a:pPr indent="0" marL="0">
+              <a:lnSpc>
+                <a:spcPct val="126000"/>
+              </a:lnSpc>
+              <a:buNone/>
+            </a:pPr>
+            <a:r>
+              <a:rPr lang="en-US" sz="1100" dirty="0">
+                <a:solidFill>
+                  <a:srgbClr val="1A2733"/>
+                </a:solidFill>
+                <a:latin typeface="Arial" pitchFamily="34" charset="0"/>
+                <a:ea typeface="Arial" pitchFamily="34" charset="-122"/>
+                <a:cs typeface="Arial" pitchFamily="34" charset="-120"/>
+              </a:rPr>
+              <a:t>Range · tầm đo</a:t>
+            </a:r>
+            <a:endParaRPr lang="en-US" sz="1100" dirty="0"/>
+          </a:p>
+          <a:p>
+            <a:pPr indent="0" marL="0">
+              <a:lnSpc>
+                <a:spcPct val="126000"/>
+              </a:lnSpc>
+              <a:buNone/>
+            </a:pPr>
+            <a:r>
+              <a:rPr lang="en-US" sz="1000" dirty="0">
+                <a:solidFill>
+                  <a:srgbClr val="5F7183"/>
+                </a:solidFill>
+                <a:latin typeface="微軟正黑體" pitchFamily="34" charset="0"/>
+                <a:ea typeface="微軟正黑體" pitchFamily="34" charset="-122"/>
+                <a:cs typeface="微軟正黑體" pitchFamily="34" charset="-120"/>
+              </a:rPr>
+              <a:t>Range　測距範圍</a:t>
+            </a:r>
+            <a:endParaRPr lang="en-US" sz="1100" dirty="0"/>
+          </a:p>
+        </p:txBody>
+      </p:sp>
+      <p:sp>
+        <p:nvSpPr>
+          <p:cNvPr id="15" name="Shape 13"/>
+          <p:cNvSpPr/>
+          <p:nvPr/>
+        </p:nvSpPr>
+        <p:spPr>
+          <a:xfrm>
+            <a:off x="2295144" y="1919180"/>
+            <a:ext cx="1060704" cy="400118"/>
+          </a:xfrm>
+          <a:prstGeom prst="roundRect">
+            <a:avLst>
+              <a:gd name="adj" fmla="val 13712"/>
+            </a:avLst>
+          </a:prstGeom>
+          <a:solidFill>
+            <a:srgbClr val="007F72"/>
+          </a:solidFill>
+          <a:ln/>
+        </p:spPr>
+      </p:sp>
+      <p:sp>
+        <p:nvSpPr>
+          <p:cNvPr id="16" name="Text 14"/>
+          <p:cNvSpPr txBox="1"/>
+          <p:nvPr/>
+        </p:nvSpPr>
+        <p:spPr>
+          <a:xfrm>
+            <a:off x="2350008" y="1955756"/>
+            <a:ext cx="950976" cy="345254"/>
+          </a:xfrm>
+          <a:prstGeom prst="rect">
+            <a:avLst/>
+          </a:prstGeom>
+          <a:noFill/>
+          <a:ln/>
+        </p:spPr>
+        <p:txBody>
+          <a:bodyPr wrap="square" lIns="0" tIns="0" rIns="0" bIns="0" rtlCol="0" anchor="t"/>
+          <a:lstStyle/>
+          <a:p>
+            <a:pPr algn="ctr" indent="0" marL="0">
+              <a:lnSpc>
+                <a:spcPct val="106000"/>
+              </a:lnSpc>
+              <a:buNone/>
+            </a:pPr>
+            <a:r>
+              <a:rPr lang="en-US" sz="900" b="1" dirty="0">
+                <a:solidFill>
+                  <a:srgbClr val="FFFFFF"/>
+                </a:solidFill>
+                <a:latin typeface="Arial" pitchFamily="34" charset="0"/>
+                <a:ea typeface="Arial" pitchFamily="34" charset="-122"/>
+                <a:cs typeface="Arial" pitchFamily="34" charset="-120"/>
+              </a:rPr>
+              <a:t>Mô phỏng của ta</a:t>
+            </a:r>
+            <a:endParaRPr lang="en-US" sz="900" dirty="0"/>
+          </a:p>
+          <a:p>
+            <a:pPr algn="ctr" indent="0" marL="0">
+              <a:lnSpc>
+                <a:spcPct val="106000"/>
+              </a:lnSpc>
+              <a:buNone/>
+            </a:pPr>
+            <a:r>
+              <a:rPr lang="en-US" sz="850" dirty="0">
+                <a:solidFill>
+                  <a:srgbClr val="FFFFFF"/>
+                </a:solidFill>
+                <a:latin typeface="微軟正黑體" pitchFamily="34" charset="0"/>
+                <a:ea typeface="微軟正黑體" pitchFamily="34" charset="-122"/>
+                <a:cs typeface="微軟正黑體" pitchFamily="34" charset="-120"/>
+              </a:rPr>
+              <a:t>我們的模擬器</a:t>
+            </a:r>
+            <a:endParaRPr lang="en-US" sz="900" dirty="0"/>
+          </a:p>
+        </p:txBody>
+      </p:sp>
+      <p:sp>
+        <p:nvSpPr>
+          <p:cNvPr id="17" name="Text 15"/>
+          <p:cNvSpPr txBox="1"/>
+          <p:nvPr/>
+        </p:nvSpPr>
+        <p:spPr>
+          <a:xfrm>
+            <a:off x="3502152" y="1919180"/>
+            <a:ext cx="5138928" cy="454982"/>
+          </a:xfrm>
+          <a:prstGeom prst="rect">
+            <a:avLst/>
+          </a:prstGeom>
+          <a:noFill/>
+          <a:ln/>
+        </p:spPr>
+        <p:txBody>
+          <a:bodyPr wrap="square" lIns="0" tIns="0" rIns="0" bIns="0" rtlCol="0" anchor="t"/>
+          <a:lstStyle/>
+          <a:p>
+            <a:pPr indent="0" marL="0">
+              <a:lnSpc>
+                <a:spcPct val="126000"/>
+              </a:lnSpc>
+              <a:buNone/>
+            </a:pPr>
+            <a:r>
+              <a:rPr lang="en-US" sz="1100" dirty="0">
+                <a:solidFill>
+                  <a:srgbClr val="1A2733"/>
+                </a:solidFill>
+                <a:latin typeface="Arial" pitchFamily="34" charset="0"/>
+                <a:ea typeface="Arial" pitchFamily="34" charset="-122"/>
+                <a:cs typeface="Arial" pitchFamily="34" charset="-120"/>
+              </a:rPr>
+              <a:t>10 đến 120 m</a:t>
+            </a:r>
+            <a:endParaRPr lang="en-US" sz="1100" dirty="0"/>
+          </a:p>
+          <a:p>
+            <a:pPr indent="0" marL="0">
+              <a:lnSpc>
+                <a:spcPct val="126000"/>
+              </a:lnSpc>
+              <a:buNone/>
+            </a:pPr>
+            <a:r>
+              <a:rPr lang="en-US" sz="1000" dirty="0">
+                <a:solidFill>
+                  <a:srgbClr val="5F7183"/>
+                </a:solidFill>
+                <a:latin typeface="微軟正黑體" pitchFamily="34" charset="0"/>
+                <a:ea typeface="微軟正黑體" pitchFamily="34" charset="-122"/>
+                <a:cs typeface="微軟正黑體" pitchFamily="34" charset="-120"/>
+              </a:rPr>
+              <a:t>10 到 120 公尺</a:t>
+            </a:r>
+            <a:endParaRPr lang="en-US" sz="1100" dirty="0"/>
+          </a:p>
+        </p:txBody>
+      </p:sp>
+      <p:sp>
+        <p:nvSpPr>
+          <p:cNvPr id="18" name="Shape 16"/>
+          <p:cNvSpPr/>
+          <p:nvPr/>
+        </p:nvSpPr>
+        <p:spPr>
+          <a:xfrm>
+            <a:off x="2295144" y="2438170"/>
+            <a:ext cx="1060704" cy="400118"/>
+          </a:xfrm>
+          <a:prstGeom prst="roundRect">
+            <a:avLst>
+              <a:gd name="adj" fmla="val 13712"/>
+            </a:avLst>
           </a:prstGeom>
           <a:solidFill>
             <a:srgbClr val="FFB020"/>
@@ -14137,84 +15100,14 @@
       </p:sp>
       <p:sp>
         <p:nvSpPr>
-          <p:cNvPr id="5" name="Shape 3"/>
-          <p:cNvSpPr/>
-          <p:nvPr/>
-        </p:nvSpPr>
-        <p:spPr>
-          <a:xfrm>
-            <a:off x="986820" y="1561429"/>
-            <a:ext cx="237012" cy="572780"/>
-          </a:xfrm>
-          <a:prstGeom prst="chevron">
-            <a:avLst/>
-          </a:prstGeom>
-          <a:ln w="31750">
-            <a:solidFill>
-              <a:srgbClr val="FFB020"/>
-            </a:solidFill>
-            <a:prstDash val="solid"/>
-          </a:ln>
-        </p:spPr>
-      </p:sp>
-      <p:sp>
-        <p:nvSpPr>
-          <p:cNvPr id="6" name="Shape 4"/>
-          <p:cNvSpPr/>
-          <p:nvPr/>
-        </p:nvSpPr>
-        <p:spPr>
-          <a:xfrm>
-            <a:off x="1184331" y="1482425"/>
-            <a:ext cx="256764" cy="730788"/>
-          </a:xfrm>
-          <a:prstGeom prst="chevron">
-            <a:avLst/>
-          </a:prstGeom>
-          <a:ln w="31750">
-            <a:solidFill>
-              <a:srgbClr val="FFB020">
-                <a:alpha val="75000"/>
-              </a:srgbClr>
-            </a:solidFill>
-            <a:prstDash val="solid"/>
-          </a:ln>
-        </p:spPr>
-      </p:sp>
-      <p:sp>
-        <p:nvSpPr>
-          <p:cNvPr id="7" name="Shape 5"/>
-          <p:cNvSpPr/>
-          <p:nvPr/>
-        </p:nvSpPr>
-        <p:spPr>
-          <a:xfrm>
-            <a:off x="1381841" y="1403421"/>
-            <a:ext cx="276515" cy="888797"/>
-          </a:xfrm>
-          <a:prstGeom prst="chevron">
-            <a:avLst/>
-          </a:prstGeom>
-          <a:ln w="31750">
-            <a:solidFill>
-              <a:srgbClr val="FFB020">
-                <a:alpha val="50000"/>
-              </a:srgbClr>
-            </a:solidFill>
-            <a:prstDash val="solid"/>
-          </a:ln>
-        </p:spPr>
-      </p:sp>
-      <p:sp>
-        <p:nvSpPr>
-          <p:cNvPr id="8" name="Text 6"/>
+          <p:cNvPr id="19" name="Text 17"/>
           <p:cNvSpPr txBox="1"/>
           <p:nvPr/>
         </p:nvSpPr>
         <p:spPr>
           <a:xfrm>
-            <a:off x="2295144" y="786384"/>
-            <a:ext cx="6345936" cy="522366"/>
+            <a:off x="2350008" y="2474746"/>
+            <a:ext cx="950976" cy="345254"/>
           </a:xfrm>
           <a:prstGeom prst="rect">
             <a:avLst/>
@@ -14226,61 +15119,123 @@
           <a:bodyPr wrap="square" lIns="0" tIns="0" rIns="0" bIns="0" rtlCol="0" anchor="t"/>
           <a:lstStyle/>
           <a:p>
-            <a:pPr indent="0" marL="0">
-              <a:lnSpc>
-                <a:spcPct val="116000"/>
-              </a:lnSpc>
-              <a:buNone/>
-            </a:pPr>
-            <a:r>
-              <a:rPr lang="en-US" sz="1800" b="1" dirty="0">
-                <a:solidFill>
-                  <a:srgbClr val="0B1F3A"/>
+            <a:pPr algn="ctr" indent="0" marL="0">
+              <a:lnSpc>
+                <a:spcPct val="106000"/>
+              </a:lnSpc>
+              <a:buNone/>
+            </a:pPr>
+            <a:r>
+              <a:rPr lang="en-US" sz="900" b="1" dirty="0">
+                <a:solidFill>
+                  <a:srgbClr val="3A2A00"/>
                 </a:solidFill>
                 <a:latin typeface="Arial" pitchFamily="34" charset="0"/>
                 <a:ea typeface="Arial" pitchFamily="34" charset="-122"/>
                 <a:cs typeface="Arial" pitchFamily="34" charset="-120"/>
               </a:rPr>
-              <a:t>Chiều dài tia = tầm đo: nhìn được xa bao nhiêu mét</a:t>
-            </a:r>
-            <a:endParaRPr lang="en-US" sz="1800" dirty="0"/>
-          </a:p>
-          <a:p>
-            <a:pPr indent="0" marL="0">
-              <a:lnSpc>
-                <a:spcPct val="116000"/>
-              </a:lnSpc>
-              <a:buNone/>
-            </a:pPr>
-            <a:r>
-              <a:rPr lang="en-US" sz="1250" dirty="0">
-                <a:solidFill>
-                  <a:srgbClr val="007F72"/>
+              <a:t>LiDAR xe thật</a:t>
+            </a:r>
+            <a:endParaRPr lang="en-US" sz="900" dirty="0"/>
+          </a:p>
+          <a:p>
+            <a:pPr algn="ctr" indent="0" marL="0">
+              <a:lnSpc>
+                <a:spcPct val="106000"/>
+              </a:lnSpc>
+              <a:buNone/>
+            </a:pPr>
+            <a:r>
+              <a:rPr lang="en-US" sz="850" dirty="0">
+                <a:solidFill>
+                  <a:srgbClr val="3A2A00"/>
                 </a:solidFill>
                 <a:latin typeface="微軟正黑體" pitchFamily="34" charset="0"/>
                 <a:ea typeface="微軟正黑體" pitchFamily="34" charset="-122"/>
                 <a:cs typeface="微軟正黑體" pitchFamily="34" charset="-120"/>
               </a:rPr>
-              <a:t>射線長度 ＝ 測距範圍：看得到幾公尺</a:t>
-            </a:r>
-            <a:endParaRPr lang="en-US" sz="1800" dirty="0"/>
+              <a:t>真車的光達</a:t>
+            </a:r>
+            <a:endParaRPr lang="en-US" sz="900" dirty="0"/>
           </a:p>
         </p:txBody>
       </p:sp>
       <p:sp>
         <p:nvSpPr>
-          <p:cNvPr id="9" name="Shape 7"/>
+          <p:cNvPr id="20" name="Text 18"/>
+          <p:cNvSpPr txBox="1"/>
+          <p:nvPr/>
+        </p:nvSpPr>
+        <p:spPr>
+          <a:xfrm>
+            <a:off x="3502152" y="2438170"/>
+            <a:ext cx="5138928" cy="454982"/>
+          </a:xfrm>
+          <a:prstGeom prst="rect">
+            <a:avLst/>
+          </a:prstGeom>
+          <a:noFill/>
+          <a:ln/>
+        </p:spPr>
+        <p:txBody>
+          <a:bodyPr wrap="square" lIns="0" tIns="0" rIns="0" bIns="0" rtlCol="0" anchor="t"/>
+          <a:lstStyle/>
+          <a:p>
+            <a:pPr indent="0" marL="0">
+              <a:lnSpc>
+                <a:spcPct val="126000"/>
+              </a:lnSpc>
+              <a:buNone/>
+            </a:pPr>
+            <a:r>
+              <a:rPr lang="en-US" sz="1100" dirty="0">
+                <a:solidFill>
+                  <a:srgbClr val="1A2733"/>
+                </a:solidFill>
+                <a:latin typeface="Arial" pitchFamily="34" charset="0"/>
+                <a:ea typeface="Arial" pitchFamily="34" charset="-122"/>
+                <a:cs typeface="Arial" pitchFamily="34" charset="-120"/>
+              </a:rPr>
+              <a:t>150 đến 300 m</a:t>
+            </a:r>
+            <a:endParaRPr lang="en-US" sz="1100" dirty="0"/>
+          </a:p>
+          <a:p>
+            <a:pPr indent="0" marL="0">
+              <a:lnSpc>
+                <a:spcPct val="126000"/>
+              </a:lnSpc>
+              <a:buNone/>
+            </a:pPr>
+            <a:r>
+              <a:rPr lang="en-US" sz="1000" dirty="0">
+                <a:solidFill>
+                  <a:srgbClr val="5F7183"/>
+                </a:solidFill>
+                <a:latin typeface="微軟正黑體" pitchFamily="34" charset="0"/>
+                <a:ea typeface="微軟正黑體" pitchFamily="34" charset="-122"/>
+                <a:cs typeface="微軟正黑體" pitchFamily="34" charset="-120"/>
+              </a:rPr>
+              <a:t>150 到 300 公尺</a:t>
+            </a:r>
+            <a:endParaRPr lang="en-US" sz="1100" dirty="0"/>
+          </a:p>
+        </p:txBody>
+      </p:sp>
+      <p:sp>
+        <p:nvSpPr>
+          <p:cNvPr id="21" name="Shape 19"/>
           <p:cNvSpPr/>
           <p:nvPr/>
         </p:nvSpPr>
         <p:spPr>
           <a:xfrm>
-            <a:off x="2295144" y="1400190"/>
-            <a:ext cx="786384" cy="283464"/>
+            <a:off x="2295144" y="2957160"/>
+            <a:ext cx="1060704" cy="400118"/>
           </a:xfrm>
           <a:prstGeom prst="roundRect">
             <a:avLst>
-              <a:gd name="adj" fmla="val 19355"/>
+              <a:gd name="adj" fmla="val 13712"/>
             </a:avLst>
           </a:prstGeom>
           <a:solidFill>
@@ -14291,14 +15246,14 @@
       </p:sp>
       <p:sp>
         <p:nvSpPr>
-          <p:cNvPr id="10" name="Text 8"/>
+          <p:cNvPr id="22" name="Text 20"/>
           <p:cNvSpPr txBox="1"/>
           <p:nvPr/>
         </p:nvSpPr>
         <p:spPr>
           <a:xfrm>
-            <a:off x="2295144" y="1423050"/>
-            <a:ext cx="786384" cy="256032"/>
+            <a:off x="2350008" y="2993736"/>
+            <a:ext cx="950976" cy="345254"/>
           </a:xfrm>
           <a:prstGeom prst="rect">
             <a:avLst/>
@@ -14312,7 +15267,7 @@
           <a:p>
             <a:pPr algn="ctr" indent="0" marL="0">
               <a:lnSpc>
-                <a:spcPct val="102000"/>
+                <a:spcPct val="106000"/>
               </a:lnSpc>
               <a:buNone/>
             </a:pPr>
@@ -14325,14 +15280,14 @@
                 <a:ea typeface="Arial" pitchFamily="34" charset="-122"/>
                 <a:cs typeface="Arial" pitchFamily="34" charset="-120"/>
               </a:rPr>
-              <a:t>Tên trên bảng thông số</a:t>
+              <a:t>Ngắn quá thì sao</a:t>
             </a:r>
             <a:endParaRPr lang="en-US" sz="900" dirty="0"/>
           </a:p>
           <a:p>
             <a:pPr algn="ctr" indent="0" marL="0">
               <a:lnSpc>
-                <a:spcPct val="102000"/>
+                <a:spcPct val="106000"/>
               </a:lnSpc>
               <a:buNone/>
             </a:pPr>
@@ -14345,7 +15300,7 @@
                 <a:ea typeface="微軟正黑體" pitchFamily="34" charset="-122"/>
                 <a:cs typeface="微軟正黑體" pitchFamily="34" charset="-120"/>
               </a:rPr>
-              <a:t>規格表上的名字</a:t>
+              <a:t>太短會怎樣</a:t>
             </a:r>
             <a:endParaRPr lang="en-US" sz="900" dirty="0"/>
           </a:p>
@@ -14353,36 +15308,14 @@
       </p:sp>
       <p:sp>
         <p:nvSpPr>
-          <p:cNvPr id="11" name="Shape 9"/>
-          <p:cNvSpPr/>
-          <p:nvPr/>
-        </p:nvSpPr>
-        <p:spPr>
-          <a:xfrm>
-            <a:off x="2295144" y="1903110"/>
-            <a:ext cx="786384" cy="283464"/>
-          </a:xfrm>
-          <a:prstGeom prst="roundRect">
-            <a:avLst>
-              <a:gd name="adj" fmla="val 19355"/>
-            </a:avLst>
-          </a:prstGeom>
-          <a:solidFill>
-            <a:srgbClr val="007F72"/>
-          </a:solidFill>
-          <a:ln/>
-        </p:spPr>
-      </p:sp>
-      <p:sp>
-        <p:nvSpPr>
-          <p:cNvPr id="12" name="Text 10"/>
+          <p:cNvPr id="23" name="Text 21"/>
           <p:cNvSpPr txBox="1"/>
           <p:nvPr/>
         </p:nvSpPr>
         <p:spPr>
           <a:xfrm>
-            <a:off x="2295144" y="1925970"/>
-            <a:ext cx="786384" cy="256032"/>
+            <a:off x="3502152" y="2957160"/>
+            <a:ext cx="5138928" cy="454982"/>
           </a:xfrm>
           <a:prstGeom prst="rect">
             <a:avLst/>
@@ -14394,218 +15327,50 @@
           <a:bodyPr wrap="square" lIns="0" tIns="0" rIns="0" bIns="0" rtlCol="0" anchor="t"/>
           <a:lstStyle/>
           <a:p>
-            <a:pPr algn="ctr" indent="0" marL="0">
-              <a:lnSpc>
-                <a:spcPct val="102000"/>
-              </a:lnSpc>
-              <a:buNone/>
-            </a:pPr>
-            <a:r>
-              <a:rPr lang="en-US" sz="900" b="1" dirty="0">
-                <a:solidFill>
-                  <a:srgbClr val="FFFFFF"/>
+            <a:pPr indent="0" marL="0">
+              <a:lnSpc>
+                <a:spcPct val="126000"/>
+              </a:lnSpc>
+              <a:buNone/>
+            </a:pPr>
+            <a:r>
+              <a:rPr lang="en-US" sz="1100" dirty="0">
+                <a:solidFill>
+                  <a:srgbClr val="1A2733"/>
                 </a:solidFill>
                 <a:latin typeface="Arial" pitchFamily="34" charset="0"/>
                 <a:ea typeface="Arial" pitchFamily="34" charset="-122"/>
                 <a:cs typeface="Arial" pitchFamily="34" charset="-120"/>
               </a:rPr>
-              <a:t>Mô phỏng của ta</a:t>
-            </a:r>
-            <a:endParaRPr lang="en-US" sz="900" dirty="0"/>
-          </a:p>
-          <a:p>
-            <a:pPr algn="ctr" indent="0" marL="0">
-              <a:lnSpc>
-                <a:spcPct val="102000"/>
-              </a:lnSpc>
-              <a:buNone/>
-            </a:pPr>
-            <a:r>
-              <a:rPr lang="en-US" sz="850" dirty="0">
-                <a:solidFill>
-                  <a:srgbClr val="FFFFFF"/>
+              <a:t>Thấy rồi cũng phanh không kịp — chắc chắn đâm</a:t>
+            </a:r>
+            <a:endParaRPr lang="en-US" sz="1100" dirty="0"/>
+          </a:p>
+          <a:p>
+            <a:pPr indent="0" marL="0">
+              <a:lnSpc>
+                <a:spcPct val="126000"/>
+              </a:lnSpc>
+              <a:buNone/>
+            </a:pPr>
+            <a:r>
+              <a:rPr lang="en-US" sz="1000" dirty="0">
+                <a:solidFill>
+                  <a:srgbClr val="5F7183"/>
                 </a:solidFill>
                 <a:latin typeface="微軟正黑體" pitchFamily="34" charset="0"/>
                 <a:ea typeface="微軟正黑體" pitchFamily="34" charset="-122"/>
                 <a:cs typeface="微軟正黑體" pitchFamily="34" charset="-120"/>
               </a:rPr>
-              <a:t>我們的模擬器</a:t>
-            </a:r>
-            <a:endParaRPr lang="en-US" sz="900" dirty="0"/>
+              <a:t>看到了也煞不住——一定撞</a:t>
+            </a:r>
+            <a:endParaRPr lang="en-US" sz="1100" dirty="0"/>
           </a:p>
         </p:txBody>
       </p:sp>
       <p:sp>
         <p:nvSpPr>
-          <p:cNvPr id="13" name="Shape 11"/>
-          <p:cNvSpPr/>
-          <p:nvPr/>
-        </p:nvSpPr>
-        <p:spPr>
-          <a:xfrm>
-            <a:off x="2295144" y="2406030"/>
-            <a:ext cx="786384" cy="283464"/>
-          </a:xfrm>
-          <a:prstGeom prst="roundRect">
-            <a:avLst>
-              <a:gd name="adj" fmla="val 19355"/>
-            </a:avLst>
-          </a:prstGeom>
-          <a:solidFill>
-            <a:srgbClr val="FFB020"/>
-          </a:solidFill>
-          <a:ln/>
-        </p:spPr>
-      </p:sp>
-      <p:sp>
-        <p:nvSpPr>
-          <p:cNvPr id="14" name="Text 12"/>
-          <p:cNvSpPr txBox="1"/>
-          <p:nvPr/>
-        </p:nvSpPr>
-        <p:spPr>
-          <a:xfrm>
-            <a:off x="2295144" y="2428890"/>
-            <a:ext cx="786384" cy="256032"/>
-          </a:xfrm>
-          <a:prstGeom prst="rect">
-            <a:avLst/>
-          </a:prstGeom>
-          <a:noFill/>
-          <a:ln/>
-        </p:spPr>
-        <p:txBody>
-          <a:bodyPr wrap="square" lIns="0" tIns="0" rIns="0" bIns="0" rtlCol="0" anchor="t"/>
-          <a:lstStyle/>
-          <a:p>
-            <a:pPr algn="ctr" indent="0" marL="0">
-              <a:lnSpc>
-                <a:spcPct val="102000"/>
-              </a:lnSpc>
-              <a:buNone/>
-            </a:pPr>
-            <a:r>
-              <a:rPr lang="en-US" sz="900" b="1" dirty="0">
-                <a:solidFill>
-                  <a:srgbClr val="3A2A00"/>
-                </a:solidFill>
-                <a:latin typeface="Arial" pitchFamily="34" charset="0"/>
-                <a:ea typeface="Arial" pitchFamily="34" charset="-122"/>
-                <a:cs typeface="Arial" pitchFamily="34" charset="-120"/>
-              </a:rPr>
-              <a:t>LiDAR xe thật</a:t>
-            </a:r>
-            <a:endParaRPr lang="en-US" sz="900" dirty="0"/>
-          </a:p>
-          <a:p>
-            <a:pPr algn="ctr" indent="0" marL="0">
-              <a:lnSpc>
-                <a:spcPct val="102000"/>
-              </a:lnSpc>
-              <a:buNone/>
-            </a:pPr>
-            <a:r>
-              <a:rPr lang="en-US" sz="850" dirty="0">
-                <a:solidFill>
-                  <a:srgbClr val="3A2A00"/>
-                </a:solidFill>
-                <a:latin typeface="微軟正黑體" pitchFamily="34" charset="0"/>
-                <a:ea typeface="微軟正黑體" pitchFamily="34" charset="-122"/>
-                <a:cs typeface="微軟正黑體" pitchFamily="34" charset="-120"/>
-              </a:rPr>
-              <a:t>真車的光達</a:t>
-            </a:r>
-            <a:endParaRPr lang="en-US" sz="900" dirty="0"/>
-          </a:p>
-        </p:txBody>
-      </p:sp>
-      <p:sp>
-        <p:nvSpPr>
-          <p:cNvPr id="15" name="Shape 13"/>
-          <p:cNvSpPr/>
-          <p:nvPr/>
-        </p:nvSpPr>
-        <p:spPr>
-          <a:xfrm>
-            <a:off x="2295144" y="2908950"/>
-            <a:ext cx="786384" cy="283464"/>
-          </a:xfrm>
-          <a:prstGeom prst="roundRect">
-            <a:avLst>
-              <a:gd name="adj" fmla="val 19355"/>
-            </a:avLst>
-          </a:prstGeom>
-          <a:solidFill>
-            <a:srgbClr val="0B1F3A"/>
-          </a:solidFill>
-          <a:ln/>
-        </p:spPr>
-      </p:sp>
-      <p:sp>
-        <p:nvSpPr>
-          <p:cNvPr id="16" name="Text 14"/>
-          <p:cNvSpPr txBox="1"/>
-          <p:nvPr/>
-        </p:nvSpPr>
-        <p:spPr>
-          <a:xfrm>
-            <a:off x="2295144" y="2931810"/>
-            <a:ext cx="786384" cy="256032"/>
-          </a:xfrm>
-          <a:prstGeom prst="rect">
-            <a:avLst/>
-          </a:prstGeom>
-          <a:noFill/>
-          <a:ln/>
-        </p:spPr>
-        <p:txBody>
-          <a:bodyPr wrap="square" lIns="0" tIns="0" rIns="0" bIns="0" rtlCol="0" anchor="t"/>
-          <a:lstStyle/>
-          <a:p>
-            <a:pPr algn="ctr" indent="0" marL="0">
-              <a:lnSpc>
-                <a:spcPct val="102000"/>
-              </a:lnSpc>
-              <a:buNone/>
-            </a:pPr>
-            <a:r>
-              <a:rPr lang="en-US" sz="900" b="1" dirty="0">
-                <a:solidFill>
-                  <a:srgbClr val="FFFFFF"/>
-                </a:solidFill>
-                <a:latin typeface="Arial" pitchFamily="34" charset="0"/>
-                <a:ea typeface="Arial" pitchFamily="34" charset="-122"/>
-                <a:cs typeface="Arial" pitchFamily="34" charset="-120"/>
-              </a:rPr>
-              <a:t>Ngắn hơn quãng đường phanh thì sao</a:t>
-            </a:r>
-            <a:endParaRPr lang="en-US" sz="900" dirty="0"/>
-          </a:p>
-          <a:p>
-            <a:pPr algn="ctr" indent="0" marL="0">
-              <a:lnSpc>
-                <a:spcPct val="102000"/>
-              </a:lnSpc>
-              <a:buNone/>
-            </a:pPr>
-            <a:r>
-              <a:rPr lang="en-US" sz="850" dirty="0">
-                <a:solidFill>
-                  <a:srgbClr val="FFFFFF"/>
-                </a:solidFill>
-                <a:latin typeface="微軟正黑體" pitchFamily="34" charset="0"/>
-                <a:ea typeface="微軟正黑體" pitchFamily="34" charset="-122"/>
-                <a:cs typeface="微軟正黑體" pitchFamily="34" charset="-120"/>
-              </a:rPr>
-              <a:t>比煞停距離短會怎樣</a:t>
-            </a:r>
-            <a:endParaRPr lang="en-US" sz="900" dirty="0"/>
-          </a:p>
-        </p:txBody>
-      </p:sp>
-      <p:sp>
-        <p:nvSpPr>
-          <p:cNvPr id="17" name="Shape 15"/>
+          <p:cNvPr id="24" name="Shape 22"/>
           <p:cNvSpPr/>
           <p:nvPr/>
         </p:nvSpPr>
@@ -14632,7 +15397,7 @@
       </p:sp>
       <p:sp>
         <p:nvSpPr>
-          <p:cNvPr id="18" name="Text 16"/>
+          <p:cNvPr id="25" name="Text 23"/>
           <p:cNvSpPr txBox="1"/>
           <p:nvPr/>
         </p:nvSpPr>
@@ -14694,7 +15459,7 @@
       </p:sp>
       <p:pic>
         <p:nvPicPr>
-          <p:cNvPr id="20" name="Image 0" descr="/Users/tsengchenghsun/Class/carClass/Claude outputs/第四週(10-1)/src/logo.png">    </p:cNvPr>
+          <p:cNvPr id="27" name="Image 0" descr="/Users/tsengchenghsun/Class/carClass/Claude outputs/第四週(10-1)/src/logo.png">    </p:cNvPr>
           <p:cNvPicPr>
             <a:picLocks noChangeAspect="1"/>
           </p:cNvPicPr>
@@ -14718,7 +15483,7 @@
       </p:pic>
       <p:sp>
         <p:nvSpPr>
-          <p:cNvPr id="21" name="Text 17"/>
+          <p:cNvPr id="28" name="Text 24"/>
           <p:cNvSpPr txBox="1"/>
           <p:nvPr/>
         </p:nvSpPr>
@@ -14757,7 +15522,7 @@
       </p:sp>
       <p:sp>
         <p:nvSpPr>
-          <p:cNvPr id="22" name="Text 18"/>
+          <p:cNvPr id="29" name="Text 25"/>
           <p:cNvSpPr txBox="1"/>
           <p:nvPr/>
         </p:nvSpPr>
@@ -14892,19 +15657,20 @@
           <p:nvPr/>
         </p:nvSpPr>
         <p:spPr>
-          <a:xfrm>
-            <a:off x="809061" y="1620683"/>
-            <a:ext cx="869046" cy="493776"/>
-          </a:xfrm>
-          <a:prstGeom prst="roundRect">
-            <a:avLst>
-              <a:gd name="adj" fmla="val 25926"/>
-            </a:avLst>
-          </a:prstGeom>
-          <a:solidFill>
-            <a:srgbClr val="4FA8FF"/>
-          </a:solidFill>
-          <a:ln/>
+          <a:xfrm flipH="1" flipV="1">
+            <a:off x="920221" y="1018382"/>
+            <a:ext cx="323363" cy="479405"/>
+          </a:xfrm>
+          <a:prstGeom prst="line">
+            <a:avLst/>
+          </a:prstGeom>
+          <a:noFill/>
+          <a:ln w="15240">
+            <a:solidFill>
+              <a:srgbClr val="1F4E79"/>
+            </a:solidFill>
+            <a:prstDash val="solid"/>
+          </a:ln>
         </p:spPr>
       </p:sp>
       <p:sp>
@@ -14914,19 +15680,20 @@
           <p:nvPr/>
         </p:nvSpPr>
         <p:spPr>
-          <a:xfrm>
-            <a:off x="1006572" y="1521927"/>
-            <a:ext cx="256764" cy="118506"/>
-          </a:xfrm>
-          <a:prstGeom prst="roundRect">
-            <a:avLst>
-              <a:gd name="adj" fmla="val 231482"/>
-            </a:avLst>
-          </a:prstGeom>
-          <a:solidFill>
-            <a:srgbClr val="4FA8FF"/>
-          </a:solidFill>
-          <a:ln/>
+          <a:xfrm flipH="1" flipV="1">
+            <a:off x="1074515" y="944788"/>
+            <a:ext cx="169069" cy="552999"/>
+          </a:xfrm>
+          <a:prstGeom prst="line">
+            <a:avLst/>
+          </a:prstGeom>
+          <a:noFill/>
+          <a:ln w="15240">
+            <a:solidFill>
+              <a:srgbClr val="1F4E79"/>
+            </a:solidFill>
+            <a:prstDash val="solid"/>
+          </a:ln>
         </p:spPr>
       </p:sp>
       <p:sp>
@@ -14936,17 +15703,20 @@
           <p:nvPr/>
         </p:nvSpPr>
         <p:spPr>
-          <a:xfrm>
-            <a:off x="1085576" y="1699687"/>
-            <a:ext cx="316017" cy="316017"/>
-          </a:xfrm>
-          <a:prstGeom prst="ellipse">
-            <a:avLst/>
-          </a:prstGeom>
-          <a:solidFill>
-            <a:srgbClr val="FFFFFF"/>
-          </a:solidFill>
-          <a:ln/>
+          <a:xfrm flipV="1">
+            <a:off x="1243584" y="919521"/>
+            <a:ext cx="0" cy="578267"/>
+          </a:xfrm>
+          <a:prstGeom prst="line">
+            <a:avLst/>
+          </a:prstGeom>
+          <a:noFill/>
+          <a:ln w="15240">
+            <a:solidFill>
+              <a:srgbClr val="1F4E79"/>
+            </a:solidFill>
+            <a:prstDash val="solid"/>
+          </a:ln>
         </p:spPr>
       </p:sp>
       <p:sp>
@@ -14956,19 +15726,20 @@
           <p:nvPr/>
         </p:nvSpPr>
         <p:spPr>
-          <a:xfrm>
-            <a:off x="1154704" y="1768815"/>
-            <a:ext cx="177759" cy="177759"/>
-          </a:xfrm>
-          <a:prstGeom prst="ellipse">
-            <a:avLst/>
-          </a:prstGeom>
-          <a:solidFill>
-            <a:srgbClr val="4FA8FF">
-              <a:alpha val="70000"/>
-            </a:srgbClr>
-          </a:solidFill>
-          <a:ln/>
+          <a:xfrm flipV="1">
+            <a:off x="1243584" y="944788"/>
+            <a:ext cx="169069" cy="552999"/>
+          </a:xfrm>
+          <a:prstGeom prst="line">
+            <a:avLst/>
+          </a:prstGeom>
+          <a:noFill/>
+          <a:ln w="15240">
+            <a:solidFill>
+              <a:srgbClr val="1F4E79"/>
+            </a:solidFill>
+            <a:prstDash val="solid"/>
+          </a:ln>
         </p:spPr>
       </p:sp>
       <p:sp>
@@ -14978,24 +15749,180 @@
           <p:nvPr/>
         </p:nvSpPr>
         <p:spPr>
-          <a:xfrm>
-            <a:off x="1480596" y="1679936"/>
-            <a:ext cx="98755" cy="98755"/>
+          <a:xfrm flipV="1">
+            <a:off x="1243584" y="1018382"/>
+            <a:ext cx="323363" cy="479405"/>
+          </a:xfrm>
+          <a:prstGeom prst="line">
+            <a:avLst/>
+          </a:prstGeom>
+          <a:noFill/>
+          <a:ln w="15240">
+            <a:solidFill>
+              <a:srgbClr val="1F4E79"/>
+            </a:solidFill>
+            <a:prstDash val="solid"/>
+          </a:ln>
+        </p:spPr>
+      </p:sp>
+      <p:sp>
+        <p:nvSpPr>
+          <p:cNvPr id="9" name="Shape 7"/>
+          <p:cNvSpPr/>
+          <p:nvPr/>
+        </p:nvSpPr>
+        <p:spPr>
+          <a:xfrm>
+            <a:off x="1207227" y="1461431"/>
+            <a:ext cx="72713" cy="72713"/>
           </a:xfrm>
           <a:prstGeom prst="ellipse">
             <a:avLst/>
           </a:prstGeom>
           <a:solidFill>
-            <a:srgbClr val="FFFFFF">
-              <a:alpha val="60000"/>
-            </a:srgbClr>
+            <a:srgbClr val="1F4E79"/>
           </a:solidFill>
           <a:ln/>
         </p:spPr>
       </p:sp>
       <p:sp>
         <p:nvSpPr>
-          <p:cNvPr id="9" name="Text 7"/>
+          <p:cNvPr id="10" name="Shape 8"/>
+          <p:cNvSpPr/>
+          <p:nvPr/>
+        </p:nvSpPr>
+        <p:spPr>
+          <a:xfrm flipH="1" flipV="1">
+            <a:off x="677954" y="2193935"/>
+            <a:ext cx="565630" cy="120228"/>
+          </a:xfrm>
+          <a:prstGeom prst="line">
+            <a:avLst/>
+          </a:prstGeom>
+          <a:noFill/>
+          <a:ln w="15240">
+            <a:solidFill>
+              <a:srgbClr val="1F4E79"/>
+            </a:solidFill>
+            <a:prstDash val="solid"/>
+          </a:ln>
+        </p:spPr>
+      </p:sp>
+      <p:sp>
+        <p:nvSpPr>
+          <p:cNvPr id="11" name="Shape 9"/>
+          <p:cNvSpPr/>
+          <p:nvPr/>
+        </p:nvSpPr>
+        <p:spPr>
+          <a:xfrm flipH="1" flipV="1">
+            <a:off x="879669" y="1864766"/>
+            <a:ext cx="363915" cy="449398"/>
+          </a:xfrm>
+          <a:prstGeom prst="line">
+            <a:avLst/>
+          </a:prstGeom>
+          <a:noFill/>
+          <a:ln w="15240">
+            <a:solidFill>
+              <a:srgbClr val="1F4E79"/>
+            </a:solidFill>
+            <a:prstDash val="solid"/>
+          </a:ln>
+        </p:spPr>
+      </p:sp>
+      <p:sp>
+        <p:nvSpPr>
+          <p:cNvPr id="12" name="Shape 10"/>
+          <p:cNvSpPr/>
+          <p:nvPr/>
+        </p:nvSpPr>
+        <p:spPr>
+          <a:xfrm flipV="1">
+            <a:off x="1243584" y="1735897"/>
+            <a:ext cx="0" cy="578267"/>
+          </a:xfrm>
+          <a:prstGeom prst="line">
+            <a:avLst/>
+          </a:prstGeom>
+          <a:noFill/>
+          <a:ln w="15240">
+            <a:solidFill>
+              <a:srgbClr val="1F4E79"/>
+            </a:solidFill>
+            <a:prstDash val="solid"/>
+          </a:ln>
+        </p:spPr>
+      </p:sp>
+      <p:sp>
+        <p:nvSpPr>
+          <p:cNvPr id="13" name="Shape 11"/>
+          <p:cNvSpPr/>
+          <p:nvPr/>
+        </p:nvSpPr>
+        <p:spPr>
+          <a:xfrm flipV="1">
+            <a:off x="1243584" y="1864766"/>
+            <a:ext cx="363915" cy="449398"/>
+          </a:xfrm>
+          <a:prstGeom prst="line">
+            <a:avLst/>
+          </a:prstGeom>
+          <a:noFill/>
+          <a:ln w="15240">
+            <a:solidFill>
+              <a:srgbClr val="1F4E79"/>
+            </a:solidFill>
+            <a:prstDash val="solid"/>
+          </a:ln>
+        </p:spPr>
+      </p:sp>
+      <p:sp>
+        <p:nvSpPr>
+          <p:cNvPr id="14" name="Shape 12"/>
+          <p:cNvSpPr/>
+          <p:nvPr/>
+        </p:nvSpPr>
+        <p:spPr>
+          <a:xfrm flipV="1">
+            <a:off x="1243584" y="2193935"/>
+            <a:ext cx="565630" cy="120228"/>
+          </a:xfrm>
+          <a:prstGeom prst="line">
+            <a:avLst/>
+          </a:prstGeom>
+          <a:noFill/>
+          <a:ln w="15240">
+            <a:solidFill>
+              <a:srgbClr val="1F4E79"/>
+            </a:solidFill>
+            <a:prstDash val="solid"/>
+          </a:ln>
+        </p:spPr>
+      </p:sp>
+      <p:sp>
+        <p:nvSpPr>
+          <p:cNvPr id="15" name="Shape 13"/>
+          <p:cNvSpPr/>
+          <p:nvPr/>
+        </p:nvSpPr>
+        <p:spPr>
+          <a:xfrm>
+            <a:off x="1207227" y="2277807"/>
+            <a:ext cx="72713" cy="72713"/>
+          </a:xfrm>
+          <a:prstGeom prst="ellipse">
+            <a:avLst/>
+          </a:prstGeom>
+          <a:solidFill>
+            <a:srgbClr val="1F4E79"/>
+          </a:solidFill>
+          <a:ln/>
+        </p:spPr>
+      </p:sp>
+      <p:sp>
+        <p:nvSpPr>
+          <p:cNvPr id="16" name="Text 14"/>
           <p:cNvSpPr txBox="1"/>
           <p:nvPr/>
         </p:nvSpPr>
@@ -15057,18 +15984,18 @@
       </p:sp>
       <p:sp>
         <p:nvSpPr>
-          <p:cNvPr id="10" name="Shape 8"/>
+          <p:cNvPr id="17" name="Shape 15"/>
           <p:cNvSpPr/>
           <p:nvPr/>
         </p:nvSpPr>
         <p:spPr>
           <a:xfrm>
             <a:off x="2295144" y="1665299"/>
-            <a:ext cx="786384" cy="283464"/>
+            <a:ext cx="1060704" cy="400118"/>
           </a:xfrm>
           <a:prstGeom prst="roundRect">
             <a:avLst>
-              <a:gd name="adj" fmla="val 19355"/>
+              <a:gd name="adj" fmla="val 13712"/>
             </a:avLst>
           </a:prstGeom>
           <a:solidFill>
@@ -15079,14 +16006,14 @@
       </p:sp>
       <p:sp>
         <p:nvSpPr>
-          <p:cNvPr id="11" name="Text 9"/>
+          <p:cNvPr id="18" name="Text 16"/>
           <p:cNvSpPr txBox="1"/>
           <p:nvPr/>
         </p:nvSpPr>
         <p:spPr>
           <a:xfrm>
-            <a:off x="2295144" y="1688159"/>
-            <a:ext cx="786384" cy="256032"/>
+            <a:off x="2350008" y="1701875"/>
+            <a:ext cx="950976" cy="345254"/>
           </a:xfrm>
           <a:prstGeom prst="rect">
             <a:avLst/>
@@ -15100,7 +16027,7 @@
           <a:p>
             <a:pPr algn="ctr" indent="0" marL="0">
               <a:lnSpc>
-                <a:spcPct val="102000"/>
+                <a:spcPct val="106000"/>
               </a:lnSpc>
               <a:buNone/>
             </a:pPr>
@@ -15113,14 +16040,14 @@
                 <a:ea typeface="Arial" pitchFamily="34" charset="-122"/>
                 <a:cs typeface="Arial" pitchFamily="34" charset="-120"/>
               </a:rPr>
-              <a:t>Tên trên bảng thông số</a:t>
+              <a:t>Tên thông số</a:t>
             </a:r>
             <a:endParaRPr lang="en-US" sz="900" dirty="0"/>
           </a:p>
           <a:p>
             <a:pPr algn="ctr" indent="0" marL="0">
               <a:lnSpc>
-                <a:spcPct val="102000"/>
+                <a:spcPct val="106000"/>
               </a:lnSpc>
               <a:buNone/>
             </a:pPr>
@@ -15133,7 +16060,7 @@
                 <a:ea typeface="微軟正黑體" pitchFamily="34" charset="-122"/>
                 <a:cs typeface="微軟正黑體" pitchFamily="34" charset="-120"/>
               </a:rPr>
-              <a:t>規格表上的名字</a:t>
+              <a:t>規格表上叫</a:t>
             </a:r>
             <a:endParaRPr lang="en-US" sz="900" dirty="0"/>
           </a:p>
@@ -15141,18 +16068,80 @@
       </p:sp>
       <p:sp>
         <p:nvSpPr>
-          <p:cNvPr id="12" name="Shape 10"/>
+          <p:cNvPr id="19" name="Text 17"/>
+          <p:cNvSpPr txBox="1"/>
+          <p:nvPr/>
+        </p:nvSpPr>
+        <p:spPr>
+          <a:xfrm>
+            <a:off x="3502152" y="1665299"/>
+            <a:ext cx="5138928" cy="454982"/>
+          </a:xfrm>
+          <a:prstGeom prst="rect">
+            <a:avLst/>
+          </a:prstGeom>
+          <a:noFill/>
+          <a:ln/>
+        </p:spPr>
+        <p:txBody>
+          <a:bodyPr wrap="square" lIns="0" tIns="0" rIns="0" bIns="0" rtlCol="0" anchor="t"/>
+          <a:lstStyle/>
+          <a:p>
+            <a:pPr indent="0" marL="0">
+              <a:lnSpc>
+                <a:spcPct val="126000"/>
+              </a:lnSpc>
+              <a:buNone/>
+            </a:pPr>
+            <a:r>
+              <a:rPr lang="en-US" sz="1100" dirty="0">
+                <a:solidFill>
+                  <a:srgbClr val="1A2733"/>
+                </a:solidFill>
+                <a:latin typeface="Arial" pitchFamily="34" charset="0"/>
+                <a:ea typeface="Arial" pitchFamily="34" charset="-122"/>
+                <a:cs typeface="Arial" pitchFamily="34" charset="-120"/>
+              </a:rPr>
+              <a:t>Field of view (FOV) · góc nhìn</a:t>
+            </a:r>
+            <a:endParaRPr lang="en-US" sz="1100" dirty="0"/>
+          </a:p>
+          <a:p>
+            <a:pPr indent="0" marL="0">
+              <a:lnSpc>
+                <a:spcPct val="126000"/>
+              </a:lnSpc>
+              <a:buNone/>
+            </a:pPr>
+            <a:r>
+              <a:rPr lang="en-US" sz="1000" dirty="0">
+                <a:solidFill>
+                  <a:srgbClr val="5F7183"/>
+                </a:solidFill>
+                <a:latin typeface="微軟正黑體" pitchFamily="34" charset="0"/>
+                <a:ea typeface="微軟正黑體" pitchFamily="34" charset="-122"/>
+                <a:cs typeface="微軟正黑體" pitchFamily="34" charset="-120"/>
+              </a:rPr>
+              <a:t>Field of view（FOV）　視野</a:t>
+            </a:r>
+            <a:endParaRPr lang="en-US" sz="1100" dirty="0"/>
+          </a:p>
+        </p:txBody>
+      </p:sp>
+      <p:sp>
+        <p:nvSpPr>
+          <p:cNvPr id="20" name="Shape 18"/>
           <p:cNvSpPr/>
           <p:nvPr/>
         </p:nvSpPr>
         <p:spPr>
           <a:xfrm>
-            <a:off x="2295144" y="2168219"/>
-            <a:ext cx="786384" cy="283464"/>
+            <a:off x="2295144" y="2184289"/>
+            <a:ext cx="1060704" cy="400118"/>
           </a:xfrm>
           <a:prstGeom prst="roundRect">
             <a:avLst>
-              <a:gd name="adj" fmla="val 19355"/>
+              <a:gd name="adj" fmla="val 13712"/>
             </a:avLst>
           </a:prstGeom>
           <a:solidFill>
@@ -15163,14 +16152,14 @@
       </p:sp>
       <p:sp>
         <p:nvSpPr>
-          <p:cNvPr id="13" name="Text 11"/>
+          <p:cNvPr id="21" name="Text 19"/>
           <p:cNvSpPr txBox="1"/>
           <p:nvPr/>
         </p:nvSpPr>
         <p:spPr>
           <a:xfrm>
-            <a:off x="2295144" y="2191079"/>
-            <a:ext cx="786384" cy="256032"/>
+            <a:off x="2350008" y="2220865"/>
+            <a:ext cx="950976" cy="345254"/>
           </a:xfrm>
           <a:prstGeom prst="rect">
             <a:avLst/>
@@ -15184,7 +16173,7 @@
           <a:p>
             <a:pPr algn="ctr" indent="0" marL="0">
               <a:lnSpc>
-                <a:spcPct val="102000"/>
+                <a:spcPct val="106000"/>
               </a:lnSpc>
               <a:buNone/>
             </a:pPr>
@@ -15204,7 +16193,7 @@
           <a:p>
             <a:pPr algn="ctr" indent="0" marL="0">
               <a:lnSpc>
-                <a:spcPct val="102000"/>
+                <a:spcPct val="106000"/>
               </a:lnSpc>
               <a:buNone/>
             </a:pPr>
@@ -15225,18 +16214,80 @@
       </p:sp>
       <p:sp>
         <p:nvSpPr>
-          <p:cNvPr id="14" name="Shape 12"/>
+          <p:cNvPr id="22" name="Text 20"/>
+          <p:cNvSpPr txBox="1"/>
+          <p:nvPr/>
+        </p:nvSpPr>
+        <p:spPr>
+          <a:xfrm>
+            <a:off x="3502152" y="2184289"/>
+            <a:ext cx="5138928" cy="454982"/>
+          </a:xfrm>
+          <a:prstGeom prst="rect">
+            <a:avLst/>
+          </a:prstGeom>
+          <a:noFill/>
+          <a:ln/>
+        </p:spPr>
+        <p:txBody>
+          <a:bodyPr wrap="square" lIns="0" tIns="0" rIns="0" bIns="0" rtlCol="0" anchor="t"/>
+          <a:lstStyle/>
+          <a:p>
+            <a:pPr indent="0" marL="0">
+              <a:lnSpc>
+                <a:spcPct val="126000"/>
+              </a:lnSpc>
+              <a:buNone/>
+            </a:pPr>
+            <a:r>
+              <a:rPr lang="en-US" sz="1100" dirty="0">
+                <a:solidFill>
+                  <a:srgbClr val="1A2733"/>
+                </a:solidFill>
+                <a:latin typeface="Arial" pitchFamily="34" charset="0"/>
+                <a:ea typeface="Arial" pitchFamily="34" charset="-122"/>
+                <a:cs typeface="Arial" pitchFamily="34" charset="-120"/>
+              </a:rPr>
+              <a:t>20° đến 180°</a:t>
+            </a:r>
+            <a:endParaRPr lang="en-US" sz="1100" dirty="0"/>
+          </a:p>
+          <a:p>
+            <a:pPr indent="0" marL="0">
+              <a:lnSpc>
+                <a:spcPct val="126000"/>
+              </a:lnSpc>
+              <a:buNone/>
+            </a:pPr>
+            <a:r>
+              <a:rPr lang="en-US" sz="1000" dirty="0">
+                <a:solidFill>
+                  <a:srgbClr val="5F7183"/>
+                </a:solidFill>
+                <a:latin typeface="微軟正黑體" pitchFamily="34" charset="0"/>
+                <a:ea typeface="微軟正黑體" pitchFamily="34" charset="-122"/>
+                <a:cs typeface="微軟正黑體" pitchFamily="34" charset="-120"/>
+              </a:rPr>
+              <a:t>20° 到 180°</a:t>
+            </a:r>
+            <a:endParaRPr lang="en-US" sz="1100" dirty="0"/>
+          </a:p>
+        </p:txBody>
+      </p:sp>
+      <p:sp>
+        <p:nvSpPr>
+          <p:cNvPr id="23" name="Shape 21"/>
           <p:cNvSpPr/>
           <p:nvPr/>
         </p:nvSpPr>
         <p:spPr>
           <a:xfrm>
-            <a:off x="2295144" y="2671139"/>
-            <a:ext cx="786384" cy="283464"/>
+            <a:off x="2295144" y="2703280"/>
+            <a:ext cx="1060704" cy="400118"/>
           </a:xfrm>
           <a:prstGeom prst="roundRect">
             <a:avLst>
-              <a:gd name="adj" fmla="val 19355"/>
+              <a:gd name="adj" fmla="val 13712"/>
             </a:avLst>
           </a:prstGeom>
           <a:solidFill>
@@ -15247,14 +16298,14 @@
       </p:sp>
       <p:sp>
         <p:nvSpPr>
-          <p:cNvPr id="15" name="Text 13"/>
+          <p:cNvPr id="24" name="Text 22"/>
           <p:cNvSpPr txBox="1"/>
           <p:nvPr/>
         </p:nvSpPr>
         <p:spPr>
           <a:xfrm>
-            <a:off x="2295144" y="2693999"/>
-            <a:ext cx="786384" cy="256032"/>
+            <a:off x="2350008" y="2739856"/>
+            <a:ext cx="950976" cy="345254"/>
           </a:xfrm>
           <a:prstGeom prst="rect">
             <a:avLst/>
@@ -15268,7 +16319,7 @@
           <a:p>
             <a:pPr algn="ctr" indent="0" marL="0">
               <a:lnSpc>
-                <a:spcPct val="102000"/>
+                <a:spcPct val="106000"/>
               </a:lnSpc>
               <a:buNone/>
             </a:pPr>
@@ -15288,7 +16339,7 @@
           <a:p>
             <a:pPr algn="ctr" indent="0" marL="0">
               <a:lnSpc>
-                <a:spcPct val="102000"/>
+                <a:spcPct val="106000"/>
               </a:lnSpc>
               <a:buNone/>
             </a:pPr>
@@ -15309,18 +16360,80 @@
       </p:sp>
       <p:sp>
         <p:nvSpPr>
-          <p:cNvPr id="16" name="Shape 14"/>
+          <p:cNvPr id="25" name="Text 23"/>
+          <p:cNvSpPr txBox="1"/>
+          <p:nvPr/>
+        </p:nvSpPr>
+        <p:spPr>
+          <a:xfrm>
+            <a:off x="3502152" y="2703280"/>
+            <a:ext cx="5138928" cy="454982"/>
+          </a:xfrm>
+          <a:prstGeom prst="rect">
+            <a:avLst/>
+          </a:prstGeom>
+          <a:noFill/>
+          <a:ln/>
+        </p:spPr>
+        <p:txBody>
+          <a:bodyPr wrap="square" lIns="0" tIns="0" rIns="0" bIns="0" rtlCol="0" anchor="t"/>
+          <a:lstStyle/>
+          <a:p>
+            <a:pPr indent="0" marL="0">
+              <a:lnSpc>
+                <a:spcPct val="126000"/>
+              </a:lnSpc>
+              <a:buNone/>
+            </a:pPr>
+            <a:r>
+              <a:rPr lang="en-US" sz="1100" dirty="0">
+                <a:solidFill>
+                  <a:srgbClr val="1A2733"/>
+                </a:solidFill>
+                <a:latin typeface="Arial" pitchFamily="34" charset="0"/>
+                <a:ea typeface="Arial" pitchFamily="34" charset="-122"/>
+                <a:cs typeface="Arial" pitchFamily="34" charset="-120"/>
+              </a:rPr>
+              <a:t>Xe máy tạt từ bên hông vào hoàn toàn không thấy</a:t>
+            </a:r>
+            <a:endParaRPr lang="en-US" sz="1100" dirty="0"/>
+          </a:p>
+          <a:p>
+            <a:pPr indent="0" marL="0">
+              <a:lnSpc>
+                <a:spcPct val="126000"/>
+              </a:lnSpc>
+              <a:buNone/>
+            </a:pPr>
+            <a:r>
+              <a:rPr lang="en-US" sz="1000" dirty="0">
+                <a:solidFill>
+                  <a:srgbClr val="5F7183"/>
+                </a:solidFill>
+                <a:latin typeface="微軟正黑體" pitchFamily="34" charset="0"/>
+                <a:ea typeface="微軟正黑體" pitchFamily="34" charset="-122"/>
+                <a:cs typeface="微軟正黑體" pitchFamily="34" charset="-120"/>
+              </a:rPr>
+              <a:t>從側面切進來的機車完全看不到</a:t>
+            </a:r>
+            <a:endParaRPr lang="en-US" sz="1100" dirty="0"/>
+          </a:p>
+        </p:txBody>
+      </p:sp>
+      <p:sp>
+        <p:nvSpPr>
+          <p:cNvPr id="26" name="Shape 24"/>
           <p:cNvSpPr/>
           <p:nvPr/>
         </p:nvSpPr>
         <p:spPr>
           <a:xfrm>
-            <a:off x="2295144" y="3174059"/>
-            <a:ext cx="786384" cy="283464"/>
+            <a:off x="2295144" y="3222270"/>
+            <a:ext cx="1060704" cy="400118"/>
           </a:xfrm>
           <a:prstGeom prst="roundRect">
             <a:avLst>
-              <a:gd name="adj" fmla="val 19355"/>
+              <a:gd name="adj" fmla="val 13712"/>
             </a:avLst>
           </a:prstGeom>
           <a:solidFill>
@@ -15331,14 +16444,14 @@
       </p:sp>
       <p:sp>
         <p:nvSpPr>
-          <p:cNvPr id="17" name="Text 15"/>
+          <p:cNvPr id="27" name="Text 25"/>
           <p:cNvSpPr txBox="1"/>
           <p:nvPr/>
         </p:nvSpPr>
         <p:spPr>
           <a:xfrm>
-            <a:off x="2295144" y="3196919"/>
-            <a:ext cx="786384" cy="256032"/>
+            <a:off x="2350008" y="3258846"/>
+            <a:ext cx="950976" cy="345254"/>
           </a:xfrm>
           <a:prstGeom prst="rect">
             <a:avLst/>
@@ -15352,7 +16465,7 @@
           <a:p>
             <a:pPr algn="ctr" indent="0" marL="0">
               <a:lnSpc>
-                <a:spcPct val="102000"/>
+                <a:spcPct val="106000"/>
               </a:lnSpc>
               <a:buNone/>
             </a:pPr>
@@ -15372,7 +16485,7 @@
           <a:p>
             <a:pPr algn="ctr" indent="0" marL="0">
               <a:lnSpc>
-                <a:spcPct val="102000"/>
+                <a:spcPct val="106000"/>
               </a:lnSpc>
               <a:buNone/>
             </a:pPr>
@@ -15393,7 +16506,69 @@
       </p:sp>
       <p:sp>
         <p:nvSpPr>
-          <p:cNvPr id="18" name="Shape 16"/>
+          <p:cNvPr id="28" name="Text 26"/>
+          <p:cNvSpPr txBox="1"/>
+          <p:nvPr/>
+        </p:nvSpPr>
+        <p:spPr>
+          <a:xfrm>
+            <a:off x="3502152" y="3222270"/>
+            <a:ext cx="5138928" cy="454982"/>
+          </a:xfrm>
+          <a:prstGeom prst="rect">
+            <a:avLst/>
+          </a:prstGeom>
+          <a:noFill/>
+          <a:ln/>
+        </p:spPr>
+        <p:txBody>
+          <a:bodyPr wrap="square" lIns="0" tIns="0" rIns="0" bIns="0" rtlCol="0" anchor="t"/>
+          <a:lstStyle/>
+          <a:p>
+            <a:pPr indent="0" marL="0">
+              <a:lnSpc>
+                <a:spcPct val="126000"/>
+              </a:lnSpc>
+              <a:buNone/>
+            </a:pPr>
+            <a:r>
+              <a:rPr lang="en-US" sz="1100" dirty="0">
+                <a:solidFill>
+                  <a:srgbClr val="1A2733"/>
+                </a:solidFill>
+                <a:latin typeface="Arial" pitchFamily="34" charset="0"/>
+                <a:ea typeface="Arial" pitchFamily="34" charset="-122"/>
+                <a:cs typeface="Arial" pitchFamily="34" charset="-120"/>
+              </a:rPr>
+              <a:t>Cùng số tia đó bị trải mỏng ra — mỗi hướng thưa hơn</a:t>
+            </a:r>
+            <a:endParaRPr lang="en-US" sz="1100" dirty="0"/>
+          </a:p>
+          <a:p>
+            <a:pPr indent="0" marL="0">
+              <a:lnSpc>
+                <a:spcPct val="126000"/>
+              </a:lnSpc>
+              <a:buNone/>
+            </a:pPr>
+            <a:r>
+              <a:rPr lang="en-US" sz="1000" dirty="0">
+                <a:solidFill>
+                  <a:srgbClr val="5F7183"/>
+                </a:solidFill>
+                <a:latin typeface="微軟正黑體" pitchFamily="34" charset="0"/>
+                <a:ea typeface="微軟正黑體" pitchFamily="34" charset="-122"/>
+                <a:cs typeface="微軟正黑體" pitchFamily="34" charset="-120"/>
+              </a:rPr>
+              <a:t>同樣的射線數被攤開——每個方向變稀</a:t>
+            </a:r>
+            <a:endParaRPr lang="en-US" sz="1100" dirty="0"/>
+          </a:p>
+        </p:txBody>
+      </p:sp>
+      <p:sp>
+        <p:nvSpPr>
+          <p:cNvPr id="29" name="Shape 27"/>
           <p:cNvSpPr/>
           <p:nvPr/>
         </p:nvSpPr>
@@ -15420,7 +16595,7 @@
       </p:sp>
       <p:sp>
         <p:nvSpPr>
-          <p:cNvPr id="19" name="Text 17"/>
+          <p:cNvPr id="30" name="Text 28"/>
           <p:cNvSpPr txBox="1"/>
           <p:nvPr/>
         </p:nvSpPr>
@@ -15482,7 +16657,7 @@
       </p:sp>
       <p:pic>
         <p:nvPicPr>
-          <p:cNvPr id="21" name="Image 0" descr="/Users/tsengchenghsun/Class/carClass/Claude outputs/第四週(10-1)/src/logo.png">    </p:cNvPr>
+          <p:cNvPr id="32" name="Image 0" descr="/Users/tsengchenghsun/Class/carClass/Claude outputs/第四週(10-1)/src/logo.png">    </p:cNvPr>
           <p:cNvPicPr>
             <a:picLocks noChangeAspect="1"/>
           </p:cNvPicPr>
@@ -15506,7 +16681,7 @@
       </p:pic>
       <p:sp>
         <p:nvSpPr>
-          <p:cNvPr id="22" name="Text 18"/>
+          <p:cNvPr id="33" name="Text 29"/>
           <p:cNvSpPr txBox="1"/>
           <p:nvPr/>
         </p:nvSpPr>
@@ -15545,7 +16720,7 @@
       </p:sp>
       <p:sp>
         <p:nvSpPr>
-          <p:cNvPr id="23" name="Text 19"/>
+          <p:cNvPr id="34" name="Text 30"/>
           <p:cNvSpPr txBox="1"/>
           <p:nvPr/>
         </p:nvSpPr>
@@ -19853,7 +21028,7 @@
                 <a:ea typeface="Arial" pitchFamily="34" charset="-122"/>
                 <a:cs typeface="Arial" pitchFamily="34" charset="-120"/>
               </a:rPr>
-              <a:t>CARLA dựng cả thành phố: thời tiết, ánh sáng, người đi bộ, đèn tín hiệu đều chỉnh được.</a:t>
+              <a:t>Hình minh hoạ: cái mà camera nhìn thấy. Trong CARLA, thời tiết, ánh sáng, người đi bộ, đèn tín hiệu đều chỉnh được.</a:t>
             </a:r>
             <a:endParaRPr lang="en-US" sz="1000" dirty="0"/>
           </a:p>
@@ -19873,7 +21048,7 @@
                 <a:ea typeface="微軟正黑體" pitchFamily="34" charset="-122"/>
                 <a:cs typeface="微軟正黑體" pitchFamily="34" charset="-120"/>
               </a:rPr>
-              <a:t>CARLA 連整座城市都建出來：天氣、光線、行人、號誌全都可以調。</a:t>
+              <a:t>示意圖，畫的是相機看到的畫面。在 CARLA 裡，天氣、光線、行人、號誌全都可以調。</a:t>
             </a:r>
             <a:endParaRPr lang="en-US" sz="1000" dirty="0"/>
           </a:p>

--- a/第四週(10-01)/第四週_第1節_簡報.pptx
+++ b/第四週(10-01)/第四週_第1節_簡報.pptx
@@ -5339,7 +5339,304 @@
                 <a:ea typeface="Arial Unicode MS"/>
                 <a:cs typeface="Arial Unicode MS"/>
               </a:rPr>
-              <a:t>（公式裡除以十二，是因為減速度用六。十二等於二乘六。）
+              <a:t>（除以十二這件事，每一屆都會有人問，所以下面把它拆開講。老師可以先問全班：為什麼是除以十二，不是除以六？）
+</a:t>
+            </a:r>
+          </a:p>
+          <a:p>
+            <a:pPr algn="l">
+              <a:lnSpc>
+                <a:spcPct val="115000"/>
+              </a:lnSpc>
+              <a:spcAft>
+                <a:spcPts val="500"/>
+              </a:spcAft>
+            </a:pPr>
+            <a:r>
+              <a:rPr sz="1000" lang="zh-TW" dirty="0">
+                <a:solidFill>
+                  <a:srgbClr val="000000"/>
+                </a:solidFill>
+                <a:latin typeface="Arial Unicode MS"/>
+                <a:ea typeface="Arial Unicode MS"/>
+                <a:cs typeface="Arial Unicode MS"/>
+              </a:rPr>
+              <a:t>那個十二是</a:t>
+            </a:r>
+            <a:r>
+              <a:rPr sz="1000" b="1" lang="zh-TW" dirty="0">
+                <a:solidFill>
+                  <a:srgbClr val="000000"/>
+                </a:solidFill>
+                <a:latin typeface="Arial Unicode MS"/>
+                <a:ea typeface="Arial Unicode MS"/>
+                <a:cs typeface="Arial Unicode MS"/>
+              </a:rPr>
+              <a:t>二乘六</a:t>
+            </a:r>
+            <a:r>
+              <a:rPr sz="1000" lang="zh-TW" dirty="0">
+                <a:solidFill>
+                  <a:srgbClr val="000000"/>
+                </a:solidFill>
+                <a:latin typeface="Arial Unicode MS"/>
+                <a:ea typeface="Arial Unicode MS"/>
+                <a:cs typeface="Arial Unicode MS"/>
+              </a:rPr>
+              <a:t>。六是減速度，那個二是從哪裡來的？
+</a:t>
+            </a:r>
+          </a:p>
+          <a:p>
+            <a:pPr algn="l">
+              <a:lnSpc>
+                <a:spcPct val="115000"/>
+              </a:lnSpc>
+              <a:spcAft>
+                <a:spcPts val="500"/>
+              </a:spcAft>
+            </a:pPr>
+            <a:r>
+              <a:rPr sz="1000" lang="zh-TW" dirty="0">
+                <a:solidFill>
+                  <a:srgbClr val="000000"/>
+                </a:solidFill>
+                <a:latin typeface="Arial Unicode MS"/>
+                <a:ea typeface="Arial Unicode MS"/>
+                <a:cs typeface="Arial Unicode MS"/>
+              </a:rPr>
+              <a:t>（分兩步講，兩步都在白板上寫出來。）
+</a:t>
+            </a:r>
+          </a:p>
+          <a:p>
+            <a:pPr algn="l">
+              <a:lnSpc>
+                <a:spcPct val="115000"/>
+              </a:lnSpc>
+              <a:spcAft>
+                <a:spcPts val="500"/>
+              </a:spcAft>
+            </a:pPr>
+            <a:r>
+              <a:rPr sz="1000" b="1" lang="zh-TW" dirty="0">
+                <a:solidFill>
+                  <a:srgbClr val="000000"/>
+                </a:solidFill>
+                <a:latin typeface="Arial Unicode MS"/>
+                <a:ea typeface="Arial Unicode MS"/>
+                <a:cs typeface="Arial Unicode MS"/>
+              </a:rPr>
+              <a:t>第一步，煞多久才停？</a:t>
+            </a:r>
+            <a:r>
+              <a:rPr sz="1000" lang="zh-TW" dirty="0">
+                <a:solidFill>
+                  <a:srgbClr val="000000"/>
+                </a:solidFill>
+                <a:latin typeface="Arial Unicode MS"/>
+                <a:ea typeface="Arial Unicode MS"/>
+                <a:cs typeface="Arial Unicode MS"/>
+              </a:rPr>
+              <a:t>時速五十是每秒十三點九公尺。每過一秒速度減掉六，所以十三點九除以六，大約</a:t>
+            </a:r>
+            <a:r>
+              <a:rPr sz="1000" b="1" lang="zh-TW" dirty="0">
+                <a:solidFill>
+                  <a:srgbClr val="000000"/>
+                </a:solidFill>
+                <a:latin typeface="Arial Unicode MS"/>
+                <a:ea typeface="Arial Unicode MS"/>
+                <a:cs typeface="Arial Unicode MS"/>
+              </a:rPr>
+              <a:t>兩點三秒</a:t>
+            </a:r>
+            <a:r>
+              <a:rPr sz="1000" lang="zh-TW" dirty="0">
+                <a:solidFill>
+                  <a:srgbClr val="000000"/>
+                </a:solidFill>
+                <a:latin typeface="Arial Unicode MS"/>
+                <a:ea typeface="Arial Unicode MS"/>
+                <a:cs typeface="Arial Unicode MS"/>
+              </a:rPr>
+              <a:t>。
+</a:t>
+            </a:r>
+          </a:p>
+          <a:p>
+            <a:pPr algn="l">
+              <a:lnSpc>
+                <a:spcPct val="115000"/>
+              </a:lnSpc>
+              <a:spcAft>
+                <a:spcPts val="500"/>
+              </a:spcAft>
+            </a:pPr>
+            <a:r>
+              <a:rPr sz="1000" b="1" lang="zh-TW" dirty="0">
+                <a:solidFill>
+                  <a:srgbClr val="000000"/>
+                </a:solidFill>
+                <a:latin typeface="Arial Unicode MS"/>
+                <a:ea typeface="Arial Unicode MS"/>
+                <a:cs typeface="Arial Unicode MS"/>
+              </a:rPr>
+              <a:t>第二步，這兩點三秒跑了多遠？</a:t>
+            </a:r>
+            <a:r>
+              <a:rPr sz="1000" lang="zh-TW" dirty="0">
+                <a:solidFill>
+                  <a:srgbClr val="000000"/>
+                </a:solidFill>
+                <a:latin typeface="Arial Unicode MS"/>
+                <a:ea typeface="Arial Unicode MS"/>
+                <a:cs typeface="Arial Unicode MS"/>
+              </a:rPr>
+              <a:t>注意，這段時間車子</a:t>
+            </a:r>
+            <a:r>
+              <a:rPr sz="1000" b="1" lang="zh-TW" dirty="0">
+                <a:solidFill>
+                  <a:srgbClr val="000000"/>
+                </a:solidFill>
+                <a:latin typeface="Arial Unicode MS"/>
+                <a:ea typeface="Arial Unicode MS"/>
+                <a:cs typeface="Arial Unicode MS"/>
+              </a:rPr>
+              <a:t>不是用時速五十一路衝到停</a:t>
+            </a:r>
+            <a:r>
+              <a:rPr sz="1000" lang="zh-TW" dirty="0">
+                <a:solidFill>
+                  <a:srgbClr val="000000"/>
+                </a:solidFill>
+                <a:latin typeface="Arial Unicode MS"/>
+                <a:ea typeface="Arial Unicode MS"/>
+                <a:cs typeface="Arial Unicode MS"/>
+              </a:rPr>
+              <a:t>，是從十三點九一路掉到零。所以要用</a:t>
+            </a:r>
+            <a:r>
+              <a:rPr sz="1000" b="1" lang="zh-TW" dirty="0">
+                <a:solidFill>
+                  <a:srgbClr val="000000"/>
+                </a:solidFill>
+                <a:latin typeface="Arial Unicode MS"/>
+                <a:ea typeface="Arial Unicode MS"/>
+                <a:cs typeface="Arial Unicode MS"/>
+              </a:rPr>
+              <a:t>平均速度</a:t>
+            </a:r>
+            <a:r>
+              <a:rPr sz="1000" lang="zh-TW" dirty="0">
+                <a:solidFill>
+                  <a:srgbClr val="000000"/>
+                </a:solidFill>
+                <a:latin typeface="Arial Unicode MS"/>
+                <a:ea typeface="Arial Unicode MS"/>
+                <a:cs typeface="Arial Unicode MS"/>
+              </a:rPr>
+              <a:t>，也就是十三點九的一半，大約六點九五。六點九五乘兩點三，大約</a:t>
+            </a:r>
+            <a:r>
+              <a:rPr sz="1000" b="1" lang="zh-TW" dirty="0">
+                <a:solidFill>
+                  <a:srgbClr val="000000"/>
+                </a:solidFill>
+                <a:latin typeface="Arial Unicode MS"/>
+                <a:ea typeface="Arial Unicode MS"/>
+                <a:cs typeface="Arial Unicode MS"/>
+              </a:rPr>
+              <a:t>十六公尺</a:t>
+            </a:r>
+            <a:r>
+              <a:rPr sz="1000" lang="zh-TW" dirty="0">
+                <a:solidFill>
+                  <a:srgbClr val="000000"/>
+                </a:solidFill>
+                <a:latin typeface="Arial Unicode MS"/>
+                <a:ea typeface="Arial Unicode MS"/>
+                <a:cs typeface="Arial Unicode MS"/>
+              </a:rPr>
+              <a:t>。
+</a:t>
+            </a:r>
+          </a:p>
+          <a:p>
+            <a:pPr algn="l">
+              <a:lnSpc>
+                <a:spcPct val="115000"/>
+              </a:lnSpc>
+              <a:spcAft>
+                <a:spcPts val="500"/>
+              </a:spcAft>
+            </a:pPr>
+            <a:r>
+              <a:rPr sz="1000" lang="zh-TW" dirty="0">
+                <a:solidFill>
+                  <a:srgbClr val="000000"/>
+                </a:solidFill>
+                <a:latin typeface="Arial Unicode MS"/>
+                <a:ea typeface="Arial Unicode MS"/>
+                <a:cs typeface="Arial Unicode MS"/>
+              </a:rPr>
+              <a:t>把這兩步合起來寫成一條式子：距離等於「速度除以二」再乘「速度除以六」，也就是速度平方除以二乘六，除以十二。
+</a:t>
+            </a:r>
+          </a:p>
+          <a:p>
+            <a:pPr algn="l">
+              <a:lnSpc>
+                <a:spcPct val="115000"/>
+              </a:lnSpc>
+              <a:spcAft>
+                <a:spcPts val="500"/>
+              </a:spcAft>
+            </a:pPr>
+            <a:r>
+              <a:rPr sz="1000" b="1" lang="zh-TW" dirty="0">
+                <a:solidFill>
+                  <a:srgbClr val="000000"/>
+                </a:solidFill>
+                <a:latin typeface="Arial Unicode MS"/>
+                <a:ea typeface="Arial Unicode MS"/>
+                <a:cs typeface="Arial Unicode MS"/>
+              </a:rPr>
+              <a:t>所以那個二的意思是：煞車的時候平均速度只有原來的一半。</a:t>
+            </a:r>
+            <a:r>
+              <a:rPr sz="1000" lang="zh-TW" dirty="0">
+                <a:solidFill>
+                  <a:srgbClr val="000000"/>
+                </a:solidFill>
+                <a:latin typeface="Arial Unicode MS"/>
+                <a:ea typeface="Arial Unicode MS"/>
+                <a:cs typeface="Arial Unicode MS"/>
+              </a:rPr>
+              <a:t>那個六才是減速度。兩個分母乘起來才是十二。
+</a:t>
+            </a:r>
+          </a:p>
+          <a:p>
+            <a:pPr algn="l">
+              <a:lnSpc>
+                <a:spcPct val="115000"/>
+              </a:lnSpc>
+              <a:spcAft>
+                <a:spcPts val="500"/>
+              </a:spcAft>
+            </a:pPr>
+            <a:r>
+              <a:rPr sz="1000" lang="zh-TW" dirty="0">
+                <a:solidFill>
+                  <a:srgbClr val="000000"/>
+                </a:solidFill>
+                <a:latin typeface="Arial Unicode MS"/>
+                <a:ea typeface="Arial Unicode MS"/>
+                <a:cs typeface="Arial Unicode MS"/>
+              </a:rPr>
+              <a:t>（如果學生問為什麼是平方，可以補一句：速度變兩倍的時候，煞的時間變兩倍、平均速度也變兩倍，兩個都變兩倍，所以距離變四倍。）
 </a:t>
             </a:r>
           </a:p>
@@ -16991,8 +17288,8 @@
         </p:nvSpPr>
         <p:spPr>
           <a:xfrm>
-            <a:off x="5173675" y="3013862"/>
-            <a:ext cx="131674" cy="131674"/>
+            <a:off x="5184648" y="2991917"/>
+            <a:ext cx="109728" cy="109728"/>
           </a:xfrm>
           <a:prstGeom prst="ellipse">
             <a:avLst/>
@@ -17011,12 +17308,12 @@
         </p:nvSpPr>
         <p:spPr>
           <a:xfrm>
-            <a:off x="5151730" y="3161995"/>
+            <a:off x="5151730" y="3112618"/>
             <a:ext cx="175565" cy="197510"/>
           </a:xfrm>
           <a:prstGeom prst="roundRect">
             <a:avLst>
-              <a:gd name="adj" fmla="val 156250"/>
+              <a:gd name="adj" fmla="val 145833"/>
             </a:avLst>
           </a:prstGeom>
           <a:solidFill>
@@ -17032,9 +17329,9 @@
           <p:nvPr/>
         </p:nvSpPr>
         <p:spPr>
-          <a:xfrm rot="480000">
-            <a:off x="5162702" y="3354019"/>
-            <a:ext cx="49378" cy="142646"/>
+          <a:xfrm rot="960000">
+            <a:off x="5121554" y="3129077"/>
+            <a:ext cx="43891" cy="142646"/>
           </a:xfrm>
           <a:prstGeom prst="rect">
             <a:avLst/>
@@ -17052,9 +17349,9 @@
           <p:nvPr/>
         </p:nvSpPr>
         <p:spPr>
-          <a:xfrm rot="-480000">
-            <a:off x="5266944" y="3354019"/>
-            <a:ext cx="49378" cy="142646"/>
+          <a:xfrm rot="-960000">
+            <a:off x="5313578" y="3129077"/>
+            <a:ext cx="43891" cy="142646"/>
           </a:xfrm>
           <a:prstGeom prst="rect">
             <a:avLst/>
@@ -17072,6 +17369,46 @@
           <p:nvPr/>
         </p:nvSpPr>
         <p:spPr>
+          <a:xfrm rot="300000">
+            <a:off x="5181905" y="3282696"/>
+            <a:ext cx="49378" cy="197510"/>
+          </a:xfrm>
+          <a:prstGeom prst="rect">
+            <a:avLst/>
+          </a:prstGeom>
+          <a:solidFill>
+            <a:srgbClr val="007F72"/>
+          </a:solidFill>
+          <a:ln/>
+        </p:spPr>
+      </p:sp>
+      <p:sp>
+        <p:nvSpPr>
+          <p:cNvPr id="14" name="Shape 12"/>
+          <p:cNvSpPr/>
+          <p:nvPr/>
+        </p:nvSpPr>
+        <p:spPr>
+          <a:xfrm rot="-300000">
+            <a:off x="5247742" y="3282696"/>
+            <a:ext cx="49378" cy="197510"/>
+          </a:xfrm>
+          <a:prstGeom prst="rect">
+            <a:avLst/>
+          </a:prstGeom>
+          <a:solidFill>
+            <a:srgbClr val="007F72"/>
+          </a:solidFill>
+          <a:ln/>
+        </p:spPr>
+      </p:sp>
+      <p:sp>
+        <p:nvSpPr>
+          <p:cNvPr id="15" name="Shape 13"/>
+          <p:cNvSpPr/>
+          <p:nvPr/>
+        </p:nvSpPr>
+        <p:spPr>
           <a:xfrm>
             <a:off x="1271016" y="1664208"/>
             <a:ext cx="745394" cy="274320"/>
@@ -17087,7 +17424,7 @@
       </p:sp>
       <p:sp>
         <p:nvSpPr>
-          <p:cNvPr id="14" name="Text 12"/>
+          <p:cNvPr id="16" name="Text 14"/>
           <p:cNvSpPr txBox="1"/>
           <p:nvPr/>
         </p:nvSpPr>
@@ -17126,7 +17463,7 @@
       </p:sp>
       <p:sp>
         <p:nvSpPr>
-          <p:cNvPr id="15" name="Text 13"/>
+          <p:cNvPr id="17" name="Text 15"/>
           <p:cNvSpPr txBox="1"/>
           <p:nvPr/>
         </p:nvSpPr>
@@ -17188,7 +17525,7 @@
       </p:sp>
       <p:sp>
         <p:nvSpPr>
-          <p:cNvPr id="16" name="Text 14"/>
+          <p:cNvPr id="18" name="Text 16"/>
           <p:cNvSpPr txBox="1"/>
           <p:nvPr/>
         </p:nvSpPr>
@@ -17250,7 +17587,7 @@
       </p:sp>
       <p:sp>
         <p:nvSpPr>
-          <p:cNvPr id="17" name="Shape 15"/>
+          <p:cNvPr id="19" name="Shape 17"/>
           <p:cNvSpPr/>
           <p:nvPr/>
         </p:nvSpPr>
@@ -17270,7 +17607,7 @@
       </p:sp>
       <p:sp>
         <p:nvSpPr>
-          <p:cNvPr id="18" name="Text 16"/>
+          <p:cNvPr id="20" name="Text 18"/>
           <p:cNvSpPr txBox="1"/>
           <p:nvPr/>
         </p:nvSpPr>
@@ -17309,7 +17646,7 @@
       </p:sp>
       <p:sp>
         <p:nvSpPr>
-          <p:cNvPr id="19" name="Text 17"/>
+          <p:cNvPr id="21" name="Text 19"/>
           <p:cNvSpPr txBox="1"/>
           <p:nvPr/>
         </p:nvSpPr>
@@ -17371,7 +17708,7 @@
       </p:sp>
       <p:sp>
         <p:nvSpPr>
-          <p:cNvPr id="20" name="Text 18"/>
+          <p:cNvPr id="22" name="Text 20"/>
           <p:cNvSpPr txBox="1"/>
           <p:nvPr/>
         </p:nvSpPr>
@@ -17433,7 +17770,7 @@
       </p:sp>
       <p:sp>
         <p:nvSpPr>
-          <p:cNvPr id="21" name="Shape 19"/>
+          <p:cNvPr id="23" name="Shape 21"/>
           <p:cNvSpPr/>
           <p:nvPr/>
         </p:nvSpPr>
@@ -17456,7 +17793,7 @@
       </p:sp>
       <p:sp>
         <p:nvSpPr>
-          <p:cNvPr id="22" name="Shape 20"/>
+          <p:cNvPr id="24" name="Shape 22"/>
           <p:cNvSpPr/>
           <p:nvPr/>
         </p:nvSpPr>
@@ -17479,7 +17816,7 @@
       </p:sp>
       <p:sp>
         <p:nvSpPr>
-          <p:cNvPr id="23" name="Text 21"/>
+          <p:cNvPr id="25" name="Text 23"/>
           <p:cNvSpPr txBox="1"/>
           <p:nvPr/>
         </p:nvSpPr>
@@ -17541,7 +17878,7 @@
       </p:sp>
       <p:sp>
         <p:nvSpPr>
-          <p:cNvPr id="24" name="Shape 22"/>
+          <p:cNvPr id="26" name="Shape 24"/>
           <p:cNvSpPr/>
           <p:nvPr/>
         </p:nvSpPr>
@@ -17563,7 +17900,7 @@
       </p:sp>
       <p:sp>
         <p:nvSpPr>
-          <p:cNvPr id="25" name="Text 23"/>
+          <p:cNvPr id="27" name="Text 25"/>
           <p:cNvSpPr txBox="1"/>
           <p:nvPr/>
         </p:nvSpPr>
@@ -17625,7 +17962,7 @@
       </p:sp>
       <p:sp>
         <p:nvSpPr>
-          <p:cNvPr id="26" name="Shape 24"/>
+          <p:cNvPr id="28" name="Shape 26"/>
           <p:cNvSpPr/>
           <p:nvPr/>
         </p:nvSpPr>
@@ -17647,7 +17984,7 @@
       </p:sp>
       <p:sp>
         <p:nvSpPr>
-          <p:cNvPr id="27" name="Text 25"/>
+          <p:cNvPr id="29" name="Text 27"/>
           <p:cNvSpPr txBox="1"/>
           <p:nvPr/>
         </p:nvSpPr>
@@ -17709,7 +18046,7 @@
       </p:sp>
       <p:sp>
         <p:nvSpPr>
-          <p:cNvPr id="28" name="Text 26"/>
+          <p:cNvPr id="30" name="Text 28"/>
           <p:cNvSpPr txBox="1"/>
           <p:nvPr/>
         </p:nvSpPr>
@@ -17771,7 +18108,7 @@
       </p:sp>
       <p:sp>
         <p:nvSpPr>
-          <p:cNvPr id="29" name="Text 27"/>
+          <p:cNvPr id="31" name="Text 29"/>
           <p:cNvSpPr txBox="1"/>
           <p:nvPr/>
         </p:nvSpPr>
@@ -17810,7 +18147,7 @@
       </p:sp>
       <p:sp>
         <p:nvSpPr>
-          <p:cNvPr id="30" name="Text 28"/>
+          <p:cNvPr id="32" name="Text 30"/>
           <p:cNvSpPr txBox="1"/>
           <p:nvPr/>
         </p:nvSpPr>
@@ -17849,7 +18186,7 @@
       </p:sp>
       <p:sp>
         <p:nvSpPr>
-          <p:cNvPr id="31" name="Text 29"/>
+          <p:cNvPr id="33" name="Text 31"/>
           <p:cNvSpPr txBox="1"/>
           <p:nvPr/>
         </p:nvSpPr>
@@ -17888,7 +18225,7 @@
       </p:sp>
       <p:sp>
         <p:nvSpPr>
-          <p:cNvPr id="32" name="Shape 30"/>
+          <p:cNvPr id="34" name="Shape 32"/>
           <p:cNvSpPr/>
           <p:nvPr/>
         </p:nvSpPr>
@@ -17915,7 +18252,7 @@
       </p:sp>
       <p:sp>
         <p:nvSpPr>
-          <p:cNvPr id="33" name="Text 31"/>
+          <p:cNvPr id="35" name="Text 33"/>
           <p:cNvSpPr txBox="1"/>
           <p:nvPr/>
         </p:nvSpPr>
@@ -17977,7 +18314,7 @@
       </p:sp>
       <p:pic>
         <p:nvPicPr>
-          <p:cNvPr id="35" name="Image 0" descr="/Users/tsengchenghsun/Class/carClass/Claude outputs/第四週(10-1)/src/logo.png">    </p:cNvPr>
+          <p:cNvPr id="37" name="Image 0" descr="/Users/tsengchenghsun/Class/carClass/Claude outputs/第四週(10-1)/src/logo.png">    </p:cNvPr>
           <p:cNvPicPr>
             <a:picLocks noChangeAspect="1"/>
           </p:cNvPicPr>
@@ -18001,7 +18338,7 @@
       </p:pic>
       <p:sp>
         <p:nvSpPr>
-          <p:cNvPr id="36" name="Text 32"/>
+          <p:cNvPr id="38" name="Text 34"/>
           <p:cNvSpPr txBox="1"/>
           <p:nvPr/>
         </p:nvSpPr>
@@ -18040,7 +18377,7 @@
       </p:sp>
       <p:sp>
         <p:nvSpPr>
-          <p:cNvPr id="37" name="Text 33"/>
+          <p:cNvPr id="39" name="Text 35"/>
           <p:cNvSpPr txBox="1"/>
           <p:nvPr/>
         </p:nvSpPr>
@@ -20447,8 +20784,8 @@
         </p:nvSpPr>
         <p:spPr>
           <a:xfrm>
-            <a:off x="1379044" y="2533012"/>
-            <a:ext cx="173778" cy="173778"/>
+            <a:off x="1393526" y="2504049"/>
+            <a:ext cx="144815" cy="144815"/>
           </a:xfrm>
           <a:prstGeom prst="ellipse">
             <a:avLst/>
@@ -20467,12 +20804,12 @@
         </p:nvSpPr>
         <p:spPr>
           <a:xfrm>
-            <a:off x="1350081" y="2728512"/>
+            <a:off x="1350081" y="2663345"/>
             <a:ext cx="231703" cy="260666"/>
           </a:xfrm>
           <a:prstGeom prst="roundRect">
             <a:avLst>
-              <a:gd name="adj" fmla="val 118393"/>
+              <a:gd name="adj" fmla="val 110500"/>
             </a:avLst>
           </a:prstGeom>
           <a:solidFill>
@@ -20488,9 +20825,9 @@
           <p:nvPr/>
         </p:nvSpPr>
         <p:spPr>
-          <a:xfrm rot="480000">
-            <a:off x="1364563" y="2981937"/>
-            <a:ext cx="65167" cy="188259"/>
+          <a:xfrm rot="960000">
+            <a:off x="1310257" y="2685067"/>
+            <a:ext cx="57926" cy="188259"/>
           </a:xfrm>
           <a:prstGeom prst="rect">
             <a:avLst/>
@@ -20508,9 +20845,9 @@
           <p:nvPr/>
         </p:nvSpPr>
         <p:spPr>
-          <a:xfrm rot="-480000">
-            <a:off x="1502137" y="2981937"/>
-            <a:ext cx="65167" cy="188259"/>
+          <a:xfrm rot="-960000">
+            <a:off x="1563683" y="2685067"/>
+            <a:ext cx="57926" cy="188259"/>
           </a:xfrm>
           <a:prstGeom prst="rect">
             <a:avLst/>
@@ -20524,6 +20861,46 @@
       <p:sp>
         <p:nvSpPr>
           <p:cNvPr id="12" name="Shape 10"/>
+          <p:cNvSpPr/>
+          <p:nvPr/>
+        </p:nvSpPr>
+        <p:spPr>
+          <a:xfrm rot="300000">
+            <a:off x="1389905" y="2887808"/>
+            <a:ext cx="65167" cy="260666"/>
+          </a:xfrm>
+          <a:prstGeom prst="rect">
+            <a:avLst/>
+          </a:prstGeom>
+          <a:solidFill>
+            <a:srgbClr val="D8E4EC"/>
+          </a:solidFill>
+          <a:ln/>
+        </p:spPr>
+      </p:sp>
+      <p:sp>
+        <p:nvSpPr>
+          <p:cNvPr id="13" name="Shape 11"/>
+          <p:cNvSpPr/>
+          <p:nvPr/>
+        </p:nvSpPr>
+        <p:spPr>
+          <a:xfrm rot="-300000">
+            <a:off x="1476794" y="2887808"/>
+            <a:ext cx="65167" cy="260666"/>
+          </a:xfrm>
+          <a:prstGeom prst="rect">
+            <a:avLst/>
+          </a:prstGeom>
+          <a:solidFill>
+            <a:srgbClr val="D8E4EC"/>
+          </a:solidFill>
+          <a:ln/>
+        </p:spPr>
+      </p:sp>
+      <p:sp>
+        <p:nvSpPr>
+          <p:cNvPr id="14" name="Shape 12"/>
           <p:cNvSpPr/>
           <p:nvPr/>
         </p:nvSpPr>
@@ -20545,7 +20922,7 @@
       </p:sp>
       <p:sp>
         <p:nvSpPr>
-          <p:cNvPr id="13" name="Shape 11"/>
+          <p:cNvPr id="15" name="Shape 13"/>
           <p:cNvSpPr/>
           <p:nvPr/>
         </p:nvSpPr>
@@ -20565,7 +20942,7 @@
       </p:sp>
       <p:sp>
         <p:nvSpPr>
-          <p:cNvPr id="14" name="Text 12"/>
+          <p:cNvPr id="16" name="Text 14"/>
           <p:cNvSpPr txBox="1"/>
           <p:nvPr/>
         </p:nvSpPr>
@@ -20604,7 +20981,7 @@
       </p:sp>
       <p:sp>
         <p:nvSpPr>
-          <p:cNvPr id="15" name="Shape 13"/>
+          <p:cNvPr id="17" name="Shape 15"/>
           <p:cNvSpPr/>
           <p:nvPr/>
         </p:nvSpPr>
@@ -20626,7 +21003,7 @@
       </p:sp>
       <p:sp>
         <p:nvSpPr>
-          <p:cNvPr id="16" name="Shape 14"/>
+          <p:cNvPr id="18" name="Shape 16"/>
           <p:cNvSpPr/>
           <p:nvPr/>
         </p:nvSpPr>
@@ -20648,7 +21025,7 @@
       </p:sp>
       <p:sp>
         <p:nvSpPr>
-          <p:cNvPr id="17" name="Shape 15"/>
+          <p:cNvPr id="19" name="Shape 17"/>
           <p:cNvSpPr/>
           <p:nvPr/>
         </p:nvSpPr>
@@ -20668,7 +21045,7 @@
       </p:sp>
       <p:sp>
         <p:nvSpPr>
-          <p:cNvPr id="18" name="Shape 16"/>
+          <p:cNvPr id="20" name="Shape 18"/>
           <p:cNvSpPr/>
           <p:nvPr/>
         </p:nvSpPr>
@@ -20688,7 +21065,7 @@
       </p:sp>
       <p:sp>
         <p:nvSpPr>
-          <p:cNvPr id="19" name="Shape 17"/>
+          <p:cNvPr id="21" name="Shape 19"/>
           <p:cNvSpPr/>
           <p:nvPr/>
         </p:nvSpPr>
@@ -20708,7 +21085,7 @@
       </p:sp>
       <p:sp>
         <p:nvSpPr>
-          <p:cNvPr id="20" name="Shape 18"/>
+          <p:cNvPr id="22" name="Shape 20"/>
           <p:cNvSpPr/>
           <p:nvPr/>
         </p:nvSpPr>
@@ -20728,7 +21105,7 @@
       </p:sp>
       <p:sp>
         <p:nvSpPr>
-          <p:cNvPr id="21" name="Shape 19"/>
+          <p:cNvPr id="23" name="Shape 21"/>
           <p:cNvSpPr/>
           <p:nvPr/>
         </p:nvSpPr>
@@ -20750,7 +21127,7 @@
       </p:sp>
       <p:sp>
         <p:nvSpPr>
-          <p:cNvPr id="22" name="Shape 20"/>
+          <p:cNvPr id="24" name="Shape 22"/>
           <p:cNvSpPr/>
           <p:nvPr/>
         </p:nvSpPr>
@@ -20770,7 +21147,7 @@
       </p:sp>
       <p:sp>
         <p:nvSpPr>
-          <p:cNvPr id="23" name="Text 21"/>
+          <p:cNvPr id="25" name="Text 23"/>
           <p:cNvSpPr txBox="1"/>
           <p:nvPr/>
         </p:nvSpPr>
@@ -20809,7 +21186,7 @@
       </p:sp>
       <p:sp>
         <p:nvSpPr>
-          <p:cNvPr id="24" name="Shape 22"/>
+          <p:cNvPr id="26" name="Shape 24"/>
           <p:cNvSpPr/>
           <p:nvPr/>
         </p:nvSpPr>
@@ -20831,7 +21208,7 @@
       </p:sp>
       <p:sp>
         <p:nvSpPr>
-          <p:cNvPr id="25" name="Shape 23"/>
+          <p:cNvPr id="27" name="Shape 25"/>
           <p:cNvSpPr/>
           <p:nvPr/>
         </p:nvSpPr>
@@ -20851,7 +21228,7 @@
       </p:sp>
       <p:sp>
         <p:nvSpPr>
-          <p:cNvPr id="26" name="Shape 24"/>
+          <p:cNvPr id="28" name="Shape 26"/>
           <p:cNvSpPr/>
           <p:nvPr/>
         </p:nvSpPr>
@@ -20871,7 +21248,7 @@
       </p:sp>
       <p:sp>
         <p:nvSpPr>
-          <p:cNvPr id="27" name="Shape 25"/>
+          <p:cNvPr id="29" name="Shape 27"/>
           <p:cNvSpPr/>
           <p:nvPr/>
         </p:nvSpPr>
@@ -20891,7 +21268,7 @@
       </p:sp>
       <p:sp>
         <p:nvSpPr>
-          <p:cNvPr id="28" name="Shape 26"/>
+          <p:cNvPr id="30" name="Shape 28"/>
           <p:cNvSpPr/>
           <p:nvPr/>
         </p:nvSpPr>
@@ -20913,7 +21290,7 @@
       </p:sp>
       <p:sp>
         <p:nvSpPr>
-          <p:cNvPr id="29" name="Shape 27"/>
+          <p:cNvPr id="31" name="Shape 29"/>
           <p:cNvSpPr/>
           <p:nvPr/>
         </p:nvSpPr>
@@ -20933,7 +21310,7 @@
       </p:sp>
       <p:sp>
         <p:nvSpPr>
-          <p:cNvPr id="30" name="Text 28"/>
+          <p:cNvPr id="32" name="Text 30"/>
           <p:cNvSpPr txBox="1"/>
           <p:nvPr/>
         </p:nvSpPr>
@@ -20972,7 +21349,7 @@
       </p:sp>
       <p:sp>
         <p:nvSpPr>
-          <p:cNvPr id="31" name="Shape 29"/>
+          <p:cNvPr id="33" name="Shape 31"/>
           <p:cNvSpPr/>
           <p:nvPr/>
         </p:nvSpPr>
@@ -20994,7 +21371,7 @@
       </p:sp>
       <p:sp>
         <p:nvSpPr>
-          <p:cNvPr id="32" name="Text 30"/>
+          <p:cNvPr id="34" name="Text 32"/>
           <p:cNvSpPr txBox="1"/>
           <p:nvPr/>
         </p:nvSpPr>
@@ -21056,7 +21433,7 @@
       </p:sp>
       <p:sp>
         <p:nvSpPr>
-          <p:cNvPr id="33" name="Shape 31"/>
+          <p:cNvPr id="35" name="Shape 33"/>
           <p:cNvSpPr/>
           <p:nvPr/>
         </p:nvSpPr>
@@ -21083,7 +21460,7 @@
       </p:sp>
       <p:sp>
         <p:nvSpPr>
-          <p:cNvPr id="34" name="Shape 32"/>
+          <p:cNvPr id="36" name="Shape 34"/>
           <p:cNvSpPr/>
           <p:nvPr/>
         </p:nvSpPr>
@@ -21103,7 +21480,7 @@
       </p:sp>
       <p:sp>
         <p:nvSpPr>
-          <p:cNvPr id="35" name="Text 33"/>
+          <p:cNvPr id="37" name="Text 35"/>
           <p:cNvSpPr txBox="1"/>
           <p:nvPr/>
         </p:nvSpPr>
@@ -21142,7 +21519,7 @@
       </p:sp>
       <p:sp>
         <p:nvSpPr>
-          <p:cNvPr id="36" name="Text 34"/>
+          <p:cNvPr id="38" name="Text 36"/>
           <p:cNvSpPr txBox="1"/>
           <p:nvPr/>
         </p:nvSpPr>
@@ -21181,7 +21558,7 @@
       </p:sp>
       <p:sp>
         <p:nvSpPr>
-          <p:cNvPr id="37" name="Text 35"/>
+          <p:cNvPr id="39" name="Text 37"/>
           <p:cNvSpPr txBox="1"/>
           <p:nvPr/>
         </p:nvSpPr>
@@ -21220,7 +21597,7 @@
       </p:sp>
       <p:sp>
         <p:nvSpPr>
-          <p:cNvPr id="38" name="Text 36">
+          <p:cNvPr id="40" name="Text 38">
             <a:hlinkClick r:id="rId1" tooltip=""/>
           </p:cNvPr>
           <p:cNvSpPr txBox="1"/>
@@ -21268,7 +21645,7 @@
       </p:sp>
       <p:sp>
         <p:nvSpPr>
-          <p:cNvPr id="39" name="Shape 37"/>
+          <p:cNvPr id="41" name="Shape 39"/>
           <p:cNvSpPr/>
           <p:nvPr/>
         </p:nvSpPr>
@@ -21288,7 +21665,7 @@
       </p:sp>
       <p:sp>
         <p:nvSpPr>
-          <p:cNvPr id="40" name="Text 38"/>
+          <p:cNvPr id="42" name="Text 40"/>
           <p:cNvSpPr txBox="1"/>
           <p:nvPr/>
         </p:nvSpPr>
@@ -21350,7 +21727,7 @@
       </p:sp>
       <p:sp>
         <p:nvSpPr>
-          <p:cNvPr id="41" name="Shape 39"/>
+          <p:cNvPr id="43" name="Shape 41"/>
           <p:cNvSpPr/>
           <p:nvPr/>
         </p:nvSpPr>
@@ -21370,7 +21747,7 @@
       </p:sp>
       <p:sp>
         <p:nvSpPr>
-          <p:cNvPr id="42" name="Text 40"/>
+          <p:cNvPr id="44" name="Text 42"/>
           <p:cNvSpPr txBox="1"/>
           <p:nvPr/>
         </p:nvSpPr>
@@ -21432,7 +21809,7 @@
       </p:sp>
       <p:sp>
         <p:nvSpPr>
-          <p:cNvPr id="43" name="Shape 41"/>
+          <p:cNvPr id="45" name="Shape 43"/>
           <p:cNvSpPr/>
           <p:nvPr/>
         </p:nvSpPr>
@@ -21452,7 +21829,7 @@
       </p:sp>
       <p:sp>
         <p:nvSpPr>
-          <p:cNvPr id="44" name="Text 42"/>
+          <p:cNvPr id="46" name="Text 44"/>
           <p:cNvSpPr txBox="1"/>
           <p:nvPr/>
         </p:nvSpPr>
@@ -21514,7 +21891,7 @@
       </p:sp>
       <p:sp>
         <p:nvSpPr>
-          <p:cNvPr id="45" name="Shape 43"/>
+          <p:cNvPr id="47" name="Shape 45"/>
           <p:cNvSpPr/>
           <p:nvPr/>
         </p:nvSpPr>
@@ -21541,7 +21918,7 @@
       </p:sp>
       <p:sp>
         <p:nvSpPr>
-          <p:cNvPr id="46" name="Text 44"/>
+          <p:cNvPr id="48" name="Text 46"/>
           <p:cNvSpPr txBox="1"/>
           <p:nvPr/>
         </p:nvSpPr>
@@ -21603,7 +21980,7 @@
       </p:sp>
       <p:pic>
         <p:nvPicPr>
-          <p:cNvPr id="48" name="Image 0" descr="/Users/tsengchenghsun/Class/carClass/Claude outputs/第四週(10-1)/src/logo.png">    </p:cNvPr>
+          <p:cNvPr id="50" name="Image 0" descr="/Users/tsengchenghsun/Class/carClass/Claude outputs/第四週(10-1)/src/logo.png">    </p:cNvPr>
           <p:cNvPicPr>
             <a:picLocks noChangeAspect="1"/>
           </p:cNvPicPr>
@@ -21627,7 +22004,7 @@
       </p:pic>
       <p:sp>
         <p:nvSpPr>
-          <p:cNvPr id="49" name="Text 45"/>
+          <p:cNvPr id="51" name="Text 47"/>
           <p:cNvSpPr txBox="1"/>
           <p:nvPr/>
         </p:nvSpPr>
@@ -21666,7 +22043,7 @@
       </p:sp>
       <p:sp>
         <p:nvSpPr>
-          <p:cNvPr id="50" name="Text 46"/>
+          <p:cNvPr id="52" name="Text 48"/>
           <p:cNvSpPr txBox="1"/>
           <p:nvPr/>
         </p:nvSpPr>

--- a/第四週(10-01)/第四週_第1節_簡報.pptx
+++ b/第四週(10-01)/第四週_第1節_簡報.pptx
@@ -9281,7 +9281,7 @@
                 <a:ea typeface="Arial" pitchFamily="34" charset="-122"/>
                 <a:cs typeface="Arial" pitchFamily="34" charset="-120"/>
               </a:rPr>
-              <a:t>CARLA Simulator（官方）　·　≈2:00</a:t>
+              <a:t>CARLA Simulator（官方）　·　3:33，播 2 分鐘就夠</a:t>
             </a:r>
             <a:endParaRPr lang="en-US" sz="900" dirty="0"/>
           </a:p>

--- a/第四週(10-01)/第四週_第1節_簡報.pptx
+++ b/第四週(10-01)/第四週_第1節_簡報.pptx
@@ -8318,7 +8318,7 @@
         <p:spPr>
           <a:xfrm>
             <a:off x="502920" y="676656"/>
-            <a:ext cx="8138160" cy="713232"/>
+            <a:ext cx="8138160" cy="560684"/>
           </a:xfrm>
           <a:prstGeom prst="rect">
             <a:avLst/>
@@ -8379,12 +8379,12 @@
         </p:nvSpPr>
         <p:spPr>
           <a:xfrm>
-            <a:off x="502920" y="1243584"/>
-            <a:ext cx="3904488" cy="2578608"/>
+            <a:off x="502920" y="1255628"/>
+            <a:ext cx="3904488" cy="2566564"/>
           </a:xfrm>
           <a:prstGeom prst="roundRect">
             <a:avLst>
-              <a:gd name="adj" fmla="val 3546"/>
+              <a:gd name="adj" fmla="val 3563"/>
             </a:avLst>
           </a:prstGeom>
           <a:solidFill>
@@ -8406,8 +8406,8 @@
         </p:nvSpPr>
         <p:spPr>
           <a:xfrm>
-            <a:off x="539496" y="2326599"/>
-            <a:ext cx="3831336" cy="1459017"/>
+            <a:off x="539496" y="2333585"/>
+            <a:ext cx="3831336" cy="1452031"/>
           </a:xfrm>
           <a:prstGeom prst="rect">
             <a:avLst/>
@@ -8426,8 +8426,8 @@
         </p:nvSpPr>
         <p:spPr>
           <a:xfrm flipH="1">
-            <a:off x="815279" y="2326599"/>
-            <a:ext cx="1548445" cy="1440729"/>
+            <a:off x="815279" y="2333585"/>
+            <a:ext cx="1548445" cy="1433743"/>
           </a:xfrm>
           <a:prstGeom prst="line">
             <a:avLst/>
@@ -8451,8 +8451,8 @@
         </p:nvSpPr>
         <p:spPr>
           <a:xfrm>
-            <a:off x="2546604" y="2326599"/>
-            <a:ext cx="1548445" cy="1440729"/>
+            <a:off x="2546604" y="2333585"/>
+            <a:ext cx="1548445" cy="1433743"/>
           </a:xfrm>
           <a:prstGeom prst="line">
             <a:avLst/>
@@ -8476,8 +8476,8 @@
         </p:nvSpPr>
         <p:spPr>
           <a:xfrm>
-            <a:off x="1393526" y="2504049"/>
-            <a:ext cx="144815" cy="144815"/>
+            <a:off x="1393561" y="2510206"/>
+            <a:ext cx="144138" cy="144138"/>
           </a:xfrm>
           <a:prstGeom prst="ellipse">
             <a:avLst/>
@@ -8496,12 +8496,12 @@
         </p:nvSpPr>
         <p:spPr>
           <a:xfrm>
-            <a:off x="1350081" y="2663345"/>
-            <a:ext cx="231703" cy="260666"/>
+            <a:off x="1350319" y="2668758"/>
+            <a:ext cx="230621" cy="259449"/>
           </a:xfrm>
           <a:prstGeom prst="roundRect">
             <a:avLst>
-              <a:gd name="adj" fmla="val 110500"/>
+              <a:gd name="adj" fmla="val 111019"/>
             </a:avLst>
           </a:prstGeom>
           <a:solidFill>
@@ -8518,8 +8518,8 @@
         </p:nvSpPr>
         <p:spPr>
           <a:xfrm rot="960000">
-            <a:off x="1310257" y="2685067"/>
-            <a:ext cx="57926" cy="188259"/>
+            <a:off x="1310681" y="2690378"/>
+            <a:ext cx="57655" cy="187380"/>
           </a:xfrm>
           <a:prstGeom prst="rect">
             <a:avLst/>
@@ -8538,8 +8538,8 @@
         </p:nvSpPr>
         <p:spPr>
           <a:xfrm rot="-960000">
-            <a:off x="1563683" y="2685067"/>
-            <a:ext cx="57926" cy="188259"/>
+            <a:off x="1562923" y="2690378"/>
+            <a:ext cx="57655" cy="187380"/>
           </a:xfrm>
           <a:prstGeom prst="rect">
             <a:avLst/>
@@ -8558,8 +8558,8 @@
         </p:nvSpPr>
         <p:spPr>
           <a:xfrm rot="300000">
-            <a:off x="1389905" y="2887808"/>
-            <a:ext cx="65167" cy="260666"/>
+            <a:off x="1389957" y="2892172"/>
+            <a:ext cx="64862" cy="259449"/>
           </a:xfrm>
           <a:prstGeom prst="rect">
             <a:avLst/>
@@ -8578,8 +8578,8 @@
         </p:nvSpPr>
         <p:spPr>
           <a:xfrm rot="-300000">
-            <a:off x="1476794" y="2887808"/>
-            <a:ext cx="65167" cy="260666"/>
+            <a:off x="1476440" y="2892172"/>
+            <a:ext cx="64862" cy="259449"/>
           </a:xfrm>
           <a:prstGeom prst="rect">
             <a:avLst/>
@@ -8598,8 +8598,8 @@
         </p:nvSpPr>
         <p:spPr>
           <a:xfrm>
-            <a:off x="971459" y="2378172"/>
-            <a:ext cx="858987" cy="928299"/>
+            <a:off x="971459" y="2384916"/>
+            <a:ext cx="858987" cy="923963"/>
           </a:xfrm>
           <a:prstGeom prst="rect">
             <a:avLst/>
@@ -8620,7 +8620,7 @@
         </p:nvSpPr>
         <p:spPr>
           <a:xfrm>
-            <a:off x="971459" y="2204436"/>
+            <a:off x="971459" y="2211180"/>
             <a:ext cx="858987" cy="173736"/>
           </a:xfrm>
           <a:prstGeom prst="rect">
@@ -8640,7 +8640,7 @@
         </p:nvSpPr>
         <p:spPr>
           <a:xfrm>
-            <a:off x="998891" y="2209008"/>
+            <a:off x="998891" y="2215752"/>
             <a:ext cx="858987" cy="164592"/>
           </a:xfrm>
           <a:prstGeom prst="rect">
@@ -8679,12 +8679,12 @@
         </p:nvSpPr>
         <p:spPr>
           <a:xfrm>
-            <a:off x="3036802" y="2863527"/>
-            <a:ext cx="592131" cy="180214"/>
+            <a:off x="3037915" y="2868005"/>
+            <a:ext cx="589365" cy="179372"/>
           </a:xfrm>
           <a:prstGeom prst="roundRect">
             <a:avLst>
-              <a:gd name="adj" fmla="val 152219"/>
+              <a:gd name="adj" fmla="val 152934"/>
             </a:avLst>
           </a:prstGeom>
           <a:solidFill>
@@ -8701,8 +8701,8 @@
         </p:nvSpPr>
         <p:spPr>
           <a:xfrm>
-            <a:off x="3165526" y="2734803"/>
-            <a:ext cx="321810" cy="141597"/>
+            <a:off x="3166038" y="2739882"/>
+            <a:ext cx="320307" cy="140935"/>
           </a:xfrm>
           <a:prstGeom prst="trapezoid">
             <a:avLst/>
@@ -8723,8 +8723,8 @@
         </p:nvSpPr>
         <p:spPr>
           <a:xfrm>
-            <a:off x="3114036" y="3005124"/>
-            <a:ext cx="128724" cy="128724"/>
+            <a:off x="3114789" y="3008940"/>
+            <a:ext cx="128123" cy="128123"/>
           </a:xfrm>
           <a:prstGeom prst="ellipse">
             <a:avLst/>
@@ -8743,8 +8743,8 @@
         </p:nvSpPr>
         <p:spPr>
           <a:xfrm>
-            <a:off x="3422974" y="3005124"/>
-            <a:ext cx="128724" cy="128724"/>
+            <a:off x="3422284" y="3008940"/>
+            <a:ext cx="128123" cy="128123"/>
           </a:xfrm>
           <a:prstGeom prst="ellipse">
             <a:avLst/>
@@ -8763,8 +8763,8 @@
         </p:nvSpPr>
         <p:spPr>
           <a:xfrm>
-            <a:off x="3146217" y="3037305"/>
-            <a:ext cx="64362" cy="64362"/>
+            <a:off x="3146819" y="3040971"/>
+            <a:ext cx="64061" cy="64061"/>
           </a:xfrm>
           <a:prstGeom prst="ellipse">
             <a:avLst/>
@@ -8783,8 +8783,8 @@
         </p:nvSpPr>
         <p:spPr>
           <a:xfrm>
-            <a:off x="3455155" y="3037305"/>
-            <a:ext cx="64362" cy="64362"/>
+            <a:off x="3454314" y="3040971"/>
+            <a:ext cx="64061" cy="64061"/>
           </a:xfrm>
           <a:prstGeom prst="ellipse">
             <a:avLst/>
@@ -8803,8 +8803,8 @@
         </p:nvSpPr>
         <p:spPr>
           <a:xfrm>
-            <a:off x="2689433" y="2481316"/>
-            <a:ext cx="1171346" cy="825155"/>
+            <a:off x="2689433" y="2487579"/>
+            <a:ext cx="1171346" cy="821300"/>
           </a:xfrm>
           <a:prstGeom prst="rect">
             <a:avLst/>
@@ -8825,7 +8825,7 @@
         </p:nvSpPr>
         <p:spPr>
           <a:xfrm>
-            <a:off x="2689433" y="2307580"/>
+            <a:off x="2689433" y="2313843"/>
             <a:ext cx="1171346" cy="173736"/>
           </a:xfrm>
           <a:prstGeom prst="rect">
@@ -8845,7 +8845,7 @@
         </p:nvSpPr>
         <p:spPr>
           <a:xfrm>
-            <a:off x="2716865" y="2312152"/>
+            <a:off x="2716865" y="2318415"/>
             <a:ext cx="1171346" cy="164592"/>
           </a:xfrm>
           <a:prstGeom prst="rect">
@@ -8884,8 +8884,8 @@
         </p:nvSpPr>
         <p:spPr>
           <a:xfrm>
-            <a:off x="2145929" y="1511759"/>
-            <a:ext cx="345157" cy="443521"/>
+            <a:off x="2145929" y="1522551"/>
+            <a:ext cx="345157" cy="441449"/>
           </a:xfrm>
           <a:prstGeom prst="roundRect">
             <a:avLst>
@@ -8906,7 +8906,7 @@
         </p:nvSpPr>
         <p:spPr>
           <a:xfrm>
-            <a:off x="2221863" y="1551676"/>
+            <a:off x="2221863" y="1562281"/>
             <a:ext cx="193288" cy="193288"/>
           </a:xfrm>
           <a:prstGeom prst="ellipse">
@@ -8926,7 +8926,7 @@
         </p:nvSpPr>
         <p:spPr>
           <a:xfrm>
-            <a:off x="2221863" y="1684732"/>
+            <a:off x="2221863" y="1694716"/>
             <a:ext cx="193288" cy="193288"/>
           </a:xfrm>
           <a:prstGeom prst="ellipse">
@@ -8946,7 +8946,7 @@
         </p:nvSpPr>
         <p:spPr>
           <a:xfrm>
-            <a:off x="2221863" y="1817788"/>
+            <a:off x="2221863" y="1827151"/>
             <a:ext cx="193288" cy="193288"/>
           </a:xfrm>
           <a:prstGeom prst="ellipse">
@@ -8966,8 +8966,8 @@
         </p:nvSpPr>
         <p:spPr>
           <a:xfrm>
-            <a:off x="1986625" y="1475659"/>
-            <a:ext cx="663763" cy="515722"/>
+            <a:off x="1986625" y="1486619"/>
+            <a:ext cx="663763" cy="513313"/>
           </a:xfrm>
           <a:prstGeom prst="rect">
             <a:avLst/>
@@ -8988,7 +8988,7 @@
         </p:nvSpPr>
         <p:spPr>
           <a:xfrm>
-            <a:off x="1986625" y="1301923"/>
+            <a:off x="1986625" y="1312883"/>
             <a:ext cx="786384" cy="173736"/>
           </a:xfrm>
           <a:prstGeom prst="rect">
@@ -9008,7 +9008,7 @@
         </p:nvSpPr>
         <p:spPr>
           <a:xfrm>
-            <a:off x="2014057" y="1306495"/>
+            <a:off x="2014057" y="1317455"/>
             <a:ext cx="786384" cy="164592"/>
           </a:xfrm>
           <a:prstGeom prst="rect">
@@ -9097,7 +9097,7 @@
                 <a:ea typeface="Arial" pitchFamily="34" charset="-122"/>
                 <a:cs typeface="Arial" pitchFamily="34" charset="-120"/>
               </a:rPr>
-              <a:t>Hình minh hoạ: cái mà camera nhìn thấy. Trong CARLA, thời tiết, ánh sáng, người đi bộ, đèn tín hiệu đều chỉnh được.</a:t>
+              <a:t>Hình minh hoạ. Trong CARLA: thời tiết, ánh sáng, người đi bộ, đèn tín hiệu đều chỉnh được.</a:t>
             </a:r>
             <a:endParaRPr lang="en-US" sz="1000" dirty="0"/>
           </a:p>
@@ -9117,7 +9117,7 @@
                 <a:ea typeface="微軟正黑體" pitchFamily="34" charset="-122"/>
                 <a:cs typeface="微軟正黑體" pitchFamily="34" charset="-120"/>
               </a:rPr>
-              <a:t>示意圖，畫的是相機看到的畫面。在 CARLA 裡，天氣、光線、行人、號誌全都可以調。</a:t>
+              <a:t>示意圖。在 CARLA 裡，天氣、光線、行人、號誌全都可以調。</a:t>
             </a:r>
             <a:endParaRPr lang="en-US" sz="1000" dirty="0"/>
           </a:p>
@@ -9131,12 +9131,12 @@
         </p:nvSpPr>
         <p:spPr>
           <a:xfrm>
-            <a:off x="4736592" y="1243584"/>
-            <a:ext cx="3904488" cy="2578608"/>
+            <a:off x="4736592" y="1255628"/>
+            <a:ext cx="3904488" cy="2566564"/>
           </a:xfrm>
           <a:prstGeom prst="roundRect">
             <a:avLst>
-              <a:gd name="adj" fmla="val 3546"/>
+              <a:gd name="adj" fmla="val 3563"/>
             </a:avLst>
           </a:prstGeom>
           <a:solidFill>
@@ -9158,7 +9158,7 @@
         </p:nvSpPr>
         <p:spPr>
           <a:xfrm>
-            <a:off x="4919472" y="1408176"/>
+            <a:off x="4919472" y="1420220"/>
             <a:ext cx="347472" cy="347472"/>
           </a:xfrm>
           <a:prstGeom prst="ellipse">
@@ -9178,7 +9178,7 @@
         </p:nvSpPr>
         <p:spPr>
           <a:xfrm>
-            <a:off x="4919472" y="1453896"/>
+            <a:off x="4919472" y="1465940"/>
             <a:ext cx="347472" cy="256032"/>
           </a:xfrm>
           <a:prstGeom prst="rect">
@@ -9217,7 +9217,7 @@
         </p:nvSpPr>
         <p:spPr>
           <a:xfrm>
-            <a:off x="5340096" y="1389888"/>
+            <a:off x="5340096" y="1401932"/>
             <a:ext cx="3118104" cy="420624"/>
           </a:xfrm>
           <a:prstGeom prst="rect">
@@ -9256,7 +9256,7 @@
         </p:nvSpPr>
         <p:spPr>
           <a:xfrm>
-            <a:off x="4919472" y="1847088"/>
+            <a:off x="4919472" y="1859132"/>
             <a:ext cx="3538728" cy="201168"/>
           </a:xfrm>
           <a:prstGeom prst="rect">
@@ -9297,7 +9297,7 @@
         </p:nvSpPr>
         <p:spPr>
           <a:xfrm>
-            <a:off x="4919472" y="2029968"/>
+            <a:off x="4919472" y="2042012"/>
             <a:ext cx="3538728" cy="201168"/>
           </a:xfrm>
           <a:prstGeom prst="rect">
@@ -9343,7 +9343,7 @@
         </p:nvSpPr>
         <p:spPr>
           <a:xfrm>
-            <a:off x="4919472" y="2304288"/>
+            <a:off x="4919472" y="2316332"/>
             <a:ext cx="36576" cy="237744"/>
           </a:xfrm>
           <a:prstGeom prst="rect">
@@ -9363,7 +9363,7 @@
         </p:nvSpPr>
         <p:spPr>
           <a:xfrm>
-            <a:off x="5047488" y="2267712"/>
+            <a:off x="5047488" y="2279756"/>
             <a:ext cx="3429000" cy="456079"/>
           </a:xfrm>
           <a:prstGeom prst="rect">
@@ -9425,7 +9425,7 @@
         </p:nvSpPr>
         <p:spPr>
           <a:xfrm>
-            <a:off x="4919472" y="2796943"/>
+            <a:off x="4919472" y="2808987"/>
             <a:ext cx="36576" cy="237744"/>
           </a:xfrm>
           <a:prstGeom prst="rect">
@@ -9445,7 +9445,7 @@
         </p:nvSpPr>
         <p:spPr>
           <a:xfrm>
-            <a:off x="5047488" y="2760367"/>
+            <a:off x="5047488" y="2772411"/>
             <a:ext cx="3429000" cy="456079"/>
           </a:xfrm>
           <a:prstGeom prst="rect">
@@ -9507,7 +9507,7 @@
         </p:nvSpPr>
         <p:spPr>
           <a:xfrm>
-            <a:off x="4919472" y="3289598"/>
+            <a:off x="4919472" y="3301642"/>
             <a:ext cx="36576" cy="237744"/>
           </a:xfrm>
           <a:prstGeom prst="rect">
@@ -9527,7 +9527,7 @@
         </p:nvSpPr>
         <p:spPr>
           <a:xfrm>
-            <a:off x="5047488" y="3253022"/>
+            <a:off x="5047488" y="3265066"/>
             <a:ext cx="3429000" cy="456079"/>
           </a:xfrm>
           <a:prstGeom prst="rect">
@@ -20708,7 +20708,7 @@
         <p:spPr>
           <a:xfrm>
             <a:off x="502920" y="676656"/>
-            <a:ext cx="8138160" cy="713232"/>
+            <a:ext cx="8138160" cy="560684"/>
           </a:xfrm>
           <a:prstGeom prst="rect">
             <a:avLst/>
@@ -20769,12 +20769,12 @@
         </p:nvSpPr>
         <p:spPr>
           <a:xfrm>
-            <a:off x="502920" y="1243584"/>
-            <a:ext cx="3904488" cy="2578608"/>
+            <a:off x="502920" y="1255628"/>
+            <a:ext cx="3904488" cy="2566564"/>
           </a:xfrm>
           <a:prstGeom prst="roundRect">
             <a:avLst>
-              <a:gd name="adj" fmla="val 3546"/>
+              <a:gd name="adj" fmla="val 3563"/>
             </a:avLst>
           </a:prstGeom>
           <a:solidFill>
@@ -20796,8 +20796,8 @@
         </p:nvSpPr>
         <p:spPr>
           <a:xfrm>
-            <a:off x="999622" y="1670060"/>
-            <a:ext cx="1039673" cy="261153"/>
+            <a:off x="999622" y="1680177"/>
+            <a:ext cx="1039673" cy="259466"/>
           </a:xfrm>
           <a:prstGeom prst="rect">
             <a:avLst/>
@@ -20835,7 +20835,7 @@
         </p:nvSpPr>
         <p:spPr>
           <a:xfrm>
-            <a:off x="999622" y="1936968"/>
+            <a:off x="999622" y="1944435"/>
             <a:ext cx="623804" cy="286950"/>
           </a:xfrm>
           <a:prstGeom prst="roundRect">
@@ -20857,7 +20857,7 @@
         </p:nvSpPr>
         <p:spPr>
           <a:xfrm>
-            <a:off x="1236667" y="1994358"/>
+            <a:off x="1236667" y="2001825"/>
             <a:ext cx="212093" cy="172170"/>
           </a:xfrm>
           <a:prstGeom prst="roundRect">
@@ -20879,7 +20879,7 @@
         </p:nvSpPr>
         <p:spPr>
           <a:xfrm>
-            <a:off x="1692737" y="2080443"/>
+            <a:off x="1692737" y="2087910"/>
             <a:ext cx="1316919" cy="0"/>
           </a:xfrm>
           <a:prstGeom prst="line">
@@ -20902,8 +20902,8 @@
         </p:nvSpPr>
         <p:spPr>
           <a:xfrm>
-            <a:off x="3009656" y="1912559"/>
-            <a:ext cx="121295" cy="335768"/>
+            <a:off x="3009656" y="1921110"/>
+            <a:ext cx="121295" cy="333600"/>
           </a:xfrm>
           <a:prstGeom prst="roundRect">
             <a:avLst>
@@ -20924,8 +20924,8 @@
         </p:nvSpPr>
         <p:spPr>
           <a:xfrm>
-            <a:off x="999622" y="2341596"/>
-            <a:ext cx="1039673" cy="261153"/>
+            <a:off x="999622" y="2347377"/>
+            <a:ext cx="1039673" cy="259466"/>
           </a:xfrm>
           <a:prstGeom prst="rect">
             <a:avLst/>
@@ -20963,7 +20963,7 @@
         </p:nvSpPr>
         <p:spPr>
           <a:xfrm>
-            <a:off x="999622" y="2608503"/>
+            <a:off x="999622" y="2611635"/>
             <a:ext cx="623804" cy="286950"/>
           </a:xfrm>
           <a:prstGeom prst="roundRect">
@@ -20985,7 +20985,7 @@
         </p:nvSpPr>
         <p:spPr>
           <a:xfrm>
-            <a:off x="1236667" y="2665893"/>
+            <a:off x="1236667" y="2669025"/>
             <a:ext cx="212093" cy="172170"/>
           </a:xfrm>
           <a:prstGeom prst="roundRect">
@@ -21007,7 +21007,7 @@
         </p:nvSpPr>
         <p:spPr>
           <a:xfrm>
-            <a:off x="1692737" y="2751978"/>
+            <a:off x="1692737" y="2755110"/>
             <a:ext cx="2148657" cy="0"/>
           </a:xfrm>
           <a:prstGeom prst="line">
@@ -21030,8 +21030,8 @@
         </p:nvSpPr>
         <p:spPr>
           <a:xfrm>
-            <a:off x="3841394" y="2584094"/>
-            <a:ext cx="121295" cy="335768"/>
+            <a:off x="3841394" y="2588310"/>
+            <a:ext cx="121295" cy="333600"/>
           </a:xfrm>
           <a:prstGeom prst="roundRect">
             <a:avLst>
@@ -21114,12 +21114,12 @@
         </p:nvSpPr>
         <p:spPr>
           <a:xfrm>
-            <a:off x="4736592" y="1243584"/>
-            <a:ext cx="3904488" cy="2578608"/>
+            <a:off x="4736592" y="1255628"/>
+            <a:ext cx="3904488" cy="2566564"/>
           </a:xfrm>
           <a:prstGeom prst="roundRect">
             <a:avLst>
-              <a:gd name="adj" fmla="val 3546"/>
+              <a:gd name="adj" fmla="val 3563"/>
             </a:avLst>
           </a:prstGeom>
           <a:solidFill>
@@ -21141,7 +21141,7 @@
         </p:nvSpPr>
         <p:spPr>
           <a:xfrm>
-            <a:off x="4919472" y="1408176"/>
+            <a:off x="4919472" y="1420220"/>
             <a:ext cx="347472" cy="347472"/>
           </a:xfrm>
           <a:prstGeom prst="ellipse">
@@ -21161,7 +21161,7 @@
         </p:nvSpPr>
         <p:spPr>
           <a:xfrm>
-            <a:off x="4919472" y="1453896"/>
+            <a:off x="4919472" y="1465940"/>
             <a:ext cx="347472" cy="256032"/>
           </a:xfrm>
           <a:prstGeom prst="rect">
@@ -21200,7 +21200,7 @@
         </p:nvSpPr>
         <p:spPr>
           <a:xfrm>
-            <a:off x="5340096" y="1389888"/>
+            <a:off x="5340096" y="1401932"/>
             <a:ext cx="3118104" cy="420624"/>
           </a:xfrm>
           <a:prstGeom prst="rect">
@@ -21239,7 +21239,7 @@
         </p:nvSpPr>
         <p:spPr>
           <a:xfrm>
-            <a:off x="4919472" y="1847088"/>
+            <a:off x="4919472" y="1859132"/>
             <a:ext cx="3538728" cy="201168"/>
           </a:xfrm>
           <a:prstGeom prst="rect">
@@ -21280,7 +21280,7 @@
         </p:nvSpPr>
         <p:spPr>
           <a:xfrm>
-            <a:off x="4919472" y="2029968"/>
+            <a:off x="4919472" y="2042012"/>
             <a:ext cx="3538728" cy="201168"/>
           </a:xfrm>
           <a:prstGeom prst="rect">
@@ -21326,7 +21326,7 @@
         </p:nvSpPr>
         <p:spPr>
           <a:xfrm>
-            <a:off x="4919472" y="2304288"/>
+            <a:off x="4919472" y="2316332"/>
             <a:ext cx="36576" cy="237744"/>
           </a:xfrm>
           <a:prstGeom prst="rect">
@@ -21346,7 +21346,7 @@
         </p:nvSpPr>
         <p:spPr>
           <a:xfrm>
-            <a:off x="5047488" y="2267712"/>
+            <a:off x="5047488" y="2279756"/>
             <a:ext cx="3429000" cy="456079"/>
           </a:xfrm>
           <a:prstGeom prst="rect">
@@ -21408,7 +21408,7 @@
         </p:nvSpPr>
         <p:spPr>
           <a:xfrm>
-            <a:off x="4919472" y="2796943"/>
+            <a:off x="4919472" y="2808987"/>
             <a:ext cx="36576" cy="237744"/>
           </a:xfrm>
           <a:prstGeom prst="rect">
@@ -21428,7 +21428,7 @@
         </p:nvSpPr>
         <p:spPr>
           <a:xfrm>
-            <a:off x="5047488" y="2760367"/>
+            <a:off x="5047488" y="2772411"/>
             <a:ext cx="3429000" cy="456079"/>
           </a:xfrm>
           <a:prstGeom prst="rect">
@@ -21490,7 +21490,7 @@
         </p:nvSpPr>
         <p:spPr>
           <a:xfrm>
-            <a:off x="4919472" y="3289598"/>
+            <a:off x="4919472" y="3301642"/>
             <a:ext cx="36576" cy="237744"/>
           </a:xfrm>
           <a:prstGeom prst="rect">
@@ -21510,7 +21510,7 @@
         </p:nvSpPr>
         <p:spPr>
           <a:xfrm>
-            <a:off x="5047488" y="3253022"/>
+            <a:off x="5047488" y="3265066"/>
             <a:ext cx="3429000" cy="313748"/>
           </a:xfrm>
           <a:prstGeom prst="rect">

--- a/第四週(10-01)/第四週_第1節_簡報.pptx
+++ b/第四週(10-01)/第四週_第1節_簡報.pptx
@@ -21347,7 +21347,7 @@
         <p:spPr>
           <a:xfrm>
             <a:off x="5047488" y="2279756"/>
-            <a:ext cx="3429000" cy="456079"/>
+            <a:ext cx="3429000" cy="590919"/>
           </a:xfrm>
           <a:prstGeom prst="rect">
             <a:avLst/>
@@ -21408,7 +21408,7 @@
         </p:nvSpPr>
         <p:spPr>
           <a:xfrm>
-            <a:off x="4919472" y="2808987"/>
+            <a:off x="4919472" y="2943828"/>
             <a:ext cx="36576" cy="237744"/>
           </a:xfrm>
           <a:prstGeom prst="rect">
@@ -21428,7 +21428,7 @@
         </p:nvSpPr>
         <p:spPr>
           <a:xfrm>
-            <a:off x="5047488" y="2772411"/>
+            <a:off x="5047488" y="2907252"/>
             <a:ext cx="3429000" cy="456079"/>
           </a:xfrm>
           <a:prstGeom prst="rect">
@@ -21490,7 +21490,7 @@
         </p:nvSpPr>
         <p:spPr>
           <a:xfrm>
-            <a:off x="4919472" y="3301642"/>
+            <a:off x="4919472" y="3436483"/>
             <a:ext cx="36576" cy="237744"/>
           </a:xfrm>
           <a:prstGeom prst="rect">
@@ -21510,7 +21510,7 @@
         </p:nvSpPr>
         <p:spPr>
           <a:xfrm>
-            <a:off x="5047488" y="3265066"/>
+            <a:off x="5047488" y="3399907"/>
             <a:ext cx="3429000" cy="313748"/>
           </a:xfrm>
           <a:prstGeom prst="rect">

--- a/第四週(10-01)/第四週_第1節_簡報.pptx
+++ b/第四週(10-01)/第四週_第1節_簡報.pptx
@@ -632,7 +632,7 @@
                 <a:ea typeface="Arial Unicode MS"/>
                 <a:cs typeface="Arial Unicode MS"/>
               </a:rPr>
-              <a:t>（今天一樣要用模擬器，網址和 QR 在下一頁。請先打開放著。）</a:t>
+              <a:t>今天一樣要用模擬器，網址和 QR 在下一頁，請先打開放著。</a:t>
             </a:r>
           </a:p>
         </p:txBody>
@@ -841,7 +841,7 @@
                 <a:ea typeface="Arial Unicode MS"/>
                 <a:cs typeface="Arial Unicode MS"/>
               </a:rPr>
-              <a:t>（播 2 分鐘左右。沒有網路就跳過，用截圖講。）
+              <a:t>我們播兩分鐘左右就好。
 </a:t>
             </a:r>
           </a:p>
@@ -1061,7 +1061,7 @@
                 <a:ea typeface="Arial Unicode MS"/>
                 <a:cs typeface="Arial Unicode MS"/>
               </a:rPr>
-              <a:t>（預期答案：畫面精細很多、有真的城市、有天氣。）
+              <a:t>大家大概會說：畫面精細很多、有真的城市、有天氣。
 </a:t>
             </a:r>
           </a:p>
@@ -1105,7 +1105,7 @@
                 <a:ea typeface="Arial Unicode MS"/>
                 <a:cs typeface="Arial Unicode MS"/>
               </a:rPr>
-              <a:t>（預期答案：都是參數、都是規則、都不是真的。）
+              <a:t>答案是：都是參數、都是規則、都不是真的。
 </a:t>
             </a:r>
           </a:p>
@@ -1622,7 +1622,7 @@
                 <a:ea typeface="Arial Unicode MS"/>
                 <a:cs typeface="Arial Unicode MS"/>
               </a:rPr>
-              <a:t>（domain randomization）。
+              <a:t>，英文叫 domain randomization。。
 </a:t>
             </a:r>
           </a:p>
@@ -1644,7 +1644,7 @@
                 <a:ea typeface="Arial Unicode MS"/>
                 <a:cs typeface="Arial Unicode MS"/>
               </a:rPr>
-              <a:t>做法是：在模擬裡</a:t>
+              <a:t>它的做法是在模擬裡</a:t>
             </a:r>
             <a:r>
               <a:rPr sz="1000" b="1" lang="zh-TW" dirty="0">
@@ -1896,11 +1896,11 @@
                 <a:spcPct val="115000"/>
               </a:lnSpc>
               <a:spcAft>
-                <a:spcPts val="550"/>
+                <a:spcPts val="575"/>
               </a:spcAft>
             </a:pPr>
             <a:r>
-              <a:rPr sz="1100" lang="zh-TW" dirty="0">
+              <a:rPr sz="1150" lang="zh-TW" dirty="0">
                 <a:solidFill>
                   <a:srgbClr val="000000"/>
                 </a:solidFill>
@@ -1911,7 +1911,7 @@
               <a:t>第二種：</a:t>
             </a:r>
             <a:r>
-              <a:rPr sz="1100" b="1" lang="zh-TW" dirty="0">
+              <a:rPr sz="1150" b="1" lang="zh-TW" dirty="0">
                 <a:solidFill>
                   <a:srgbClr val="000000"/>
                 </a:solidFill>
@@ -1922,7 +1922,7 @@
               <a:t>行為落差</a:t>
             </a:r>
             <a:r>
-              <a:rPr sz="1100" lang="zh-TW" dirty="0">
+              <a:rPr sz="1150" lang="zh-TW" dirty="0">
                 <a:solidFill>
                   <a:srgbClr val="000000"/>
                 </a:solidFill>
@@ -1940,11 +1940,11 @@
                 <a:spcPct val="115000"/>
               </a:lnSpc>
               <a:spcAft>
-                <a:spcPts val="550"/>
+                <a:spcPts val="575"/>
               </a:spcAft>
             </a:pPr>
             <a:r>
-              <a:rPr sz="1100" lang="zh-TW" dirty="0">
+              <a:rPr sz="1150" lang="zh-TW" dirty="0">
                 <a:solidFill>
                   <a:srgbClr val="000000"/>
                 </a:solidFill>
@@ -1962,11 +1962,11 @@
                 <a:spcPct val="115000"/>
               </a:lnSpc>
               <a:spcAft>
-                <a:spcPts val="550"/>
+                <a:spcPts val="575"/>
               </a:spcAft>
             </a:pPr>
             <a:r>
-              <a:rPr sz="1100" lang="zh-TW" dirty="0">
+              <a:rPr sz="1150" lang="zh-TW" dirty="0">
                 <a:solidFill>
                   <a:srgbClr val="000000"/>
                 </a:solidFill>
@@ -1984,33 +1984,11 @@
                 <a:spcPct val="115000"/>
               </a:lnSpc>
               <a:spcAft>
-                <a:spcPts val="550"/>
+                <a:spcPts val="575"/>
               </a:spcAft>
             </a:pPr>
             <a:r>
-              <a:rPr sz="1100" lang="zh-TW" dirty="0">
-                <a:solidFill>
-                  <a:srgbClr val="000000"/>
-                </a:solidFill>
-                <a:latin typeface="Arial Unicode MS"/>
-                <a:ea typeface="Arial Unicode MS"/>
-                <a:cs typeface="Arial Unicode MS"/>
-              </a:rPr>
-              <a:t>（讓他們笑。這裡就是要他們笑。）
-</a:t>
-            </a:r>
-          </a:p>
-          <a:p>
-            <a:pPr algn="l">
-              <a:lnSpc>
-                <a:spcPct val="115000"/>
-              </a:lnSpc>
-              <a:spcAft>
-                <a:spcPts val="550"/>
-              </a:spcAft>
-            </a:pPr>
-            <a:r>
-              <a:rPr sz="1100" lang="zh-TW" dirty="0">
+              <a:rPr sz="1150" lang="zh-TW" dirty="0">
                 <a:solidFill>
                   <a:srgbClr val="000000"/>
                 </a:solidFill>
@@ -2028,11 +2006,11 @@
                 <a:spcPct val="115000"/>
               </a:lnSpc>
               <a:spcAft>
-                <a:spcPts val="550"/>
+                <a:spcPts val="575"/>
               </a:spcAft>
             </a:pPr>
             <a:r>
-              <a:rPr sz="1100" lang="zh-TW" dirty="0">
+              <a:rPr sz="1150" lang="zh-TW" dirty="0">
                 <a:solidFill>
                   <a:srgbClr val="000000"/>
                 </a:solidFill>
@@ -2043,7 +2021,7 @@
               <a:t>所以會發生一件很諷刺的事：</a:t>
             </a:r>
             <a:r>
-              <a:rPr sz="1100" b="1" lang="zh-TW" dirty="0">
+              <a:rPr sz="1150" b="1" lang="zh-TW" dirty="0">
                 <a:solidFill>
                   <a:srgbClr val="000000"/>
                 </a:solidFill>
@@ -2054,7 +2032,7 @@
               <a:t>一台在模擬裡表現完美的自駕車，丟到真的河內街頭，可能完全動不了</a:t>
             </a:r>
             <a:r>
-              <a:rPr sz="1100" lang="zh-TW" dirty="0">
+              <a:rPr sz="1150" lang="zh-TW" dirty="0">
                 <a:solidFill>
                   <a:srgbClr val="000000"/>
                 </a:solidFill>
@@ -2072,11 +2050,11 @@
                 <a:spcPct val="115000"/>
               </a:lnSpc>
               <a:spcAft>
-                <a:spcPts val="550"/>
+                <a:spcPts val="575"/>
               </a:spcAft>
             </a:pPr>
             <a:r>
-              <a:rPr sz="1100" lang="zh-TW" dirty="0">
+              <a:rPr sz="1150" lang="zh-TW" dirty="0">
                 <a:solidFill>
                   <a:srgbClr val="000000"/>
                 </a:solidFill>
@@ -2087,7 +2065,7 @@
               <a:t>解法是什麼？把</a:t>
             </a:r>
             <a:r>
-              <a:rPr sz="1100" b="1" lang="zh-TW" dirty="0">
+              <a:rPr sz="1150" b="1" lang="zh-TW" dirty="0">
                 <a:solidFill>
                   <a:srgbClr val="000000"/>
                 </a:solidFill>
@@ -2098,7 +2076,7 @@
               <a:t>真實道路上錄到的軌跡回放進模擬</a:t>
             </a:r>
             <a:r>
-              <a:rPr sz="1100" lang="zh-TW" dirty="0">
+              <a:rPr sz="1150" lang="zh-TW" dirty="0">
                 <a:solidFill>
                   <a:srgbClr val="000000"/>
                 </a:solidFill>
@@ -2116,11 +2094,11 @@
                 <a:spcPct val="115000"/>
               </a:lnSpc>
               <a:spcAft>
-                <a:spcPts val="550"/>
+                <a:spcPts val="575"/>
               </a:spcAft>
             </a:pPr>
             <a:r>
-              <a:rPr sz="1100" lang="zh-TW" dirty="0">
+              <a:rPr sz="1150" lang="zh-TW" dirty="0">
                 <a:solidFill>
                   <a:srgbClr val="000000"/>
                 </a:solidFill>
@@ -2131,7 +2109,7 @@
               <a:t>但這裡有個問題留給各位想：</a:t>
             </a:r>
             <a:r>
-              <a:rPr sz="1100" b="1" lang="zh-TW" dirty="0">
+              <a:rPr sz="1150" b="1" lang="zh-TW" dirty="0">
                 <a:solidFill>
                   <a:srgbClr val="000000"/>
                 </a:solidFill>
@@ -2142,7 +2120,7 @@
               <a:t>要回放河內的軌跡，你得先有河內的軌跡。</a:t>
             </a:r>
             <a:r>
-              <a:rPr sz="1100" lang="zh-TW" dirty="0">
+              <a:rPr sz="1150" lang="zh-TW" dirty="0">
                 <a:solidFill>
                   <a:srgbClr val="000000"/>
                 </a:solidFill>
@@ -2160,19 +2138,19 @@
                 <a:spcPct val="115000"/>
               </a:lnSpc>
               <a:spcAft>
-                <a:spcPts val="550"/>
+                <a:spcPts val="575"/>
               </a:spcAft>
             </a:pPr>
             <a:r>
-              <a:rPr sz="1100" lang="zh-TW" dirty="0">
-                <a:solidFill>
-                  <a:srgbClr val="000000"/>
-                </a:solidFill>
-                <a:latin typeface="Arial Unicode MS"/>
-                <a:ea typeface="Arial Unicode MS"/>
-                <a:cs typeface="Arial Unicode MS"/>
-              </a:rPr>
-              <a:t>（預期答案：要自己去收。）
+              <a:rPr sz="1150" lang="zh-TW" dirty="0">
+                <a:solidFill>
+                  <a:srgbClr val="000000"/>
+                </a:solidFill>
+                <a:latin typeface="Arial Unicode MS"/>
+                <a:ea typeface="Arial Unicode MS"/>
+                <a:cs typeface="Arial Unicode MS"/>
+              </a:rPr>
+              <a:t>答案是：要自己去收。
 </a:t>
             </a:r>
           </a:p>
@@ -2182,11 +2160,11 @@
                 <a:spcPct val="115000"/>
               </a:lnSpc>
               <a:spcAft>
-                <a:spcPts val="550"/>
+                <a:spcPts val="575"/>
               </a:spcAft>
             </a:pPr>
             <a:r>
-              <a:rPr sz="1100" lang="zh-TW" dirty="0">
+              <a:rPr sz="1150" lang="zh-TW" dirty="0">
                 <a:solidFill>
                   <a:srgbClr val="000000"/>
                 </a:solidFill>
@@ -2197,7 +2175,7 @@
               <a:t>對。這就是為什麼「做一個台灣或越南的交通行為模型」是很有價值的題目——</a:t>
             </a:r>
             <a:r>
-              <a:rPr sz="1100" b="1" lang="zh-TW" dirty="0">
+              <a:rPr sz="1150" b="1" lang="zh-TW" dirty="0">
                 <a:solidFill>
                   <a:srgbClr val="000000"/>
                 </a:solidFill>
@@ -2502,7 +2480,7 @@
                 <a:ea typeface="Arial Unicode MS"/>
                 <a:cs typeface="Arial Unicode MS"/>
               </a:rPr>
-              <a:t>（預期答案：比較難煞。）
+              <a:t>答案是比較難煞。
 </a:t>
             </a:r>
           </a:p>
@@ -2557,7 +2535,7 @@
                 <a:ea typeface="Arial Unicode MS"/>
                 <a:cs typeface="Arial Unicode MS"/>
               </a:rPr>
-              <a:t>（回頭指剛剛那張表）所以那張表的數字，只在</a:t>
+              <a:t>我們回頭看剛剛那張表。所以那張表的數字，只在</a:t>
             </a:r>
             <a:r>
               <a:rPr sz="1100" b="1" lang="zh-TW" dirty="0">
@@ -2854,7 +2832,7 @@
                 <a:ea typeface="Arial Unicode MS"/>
                 <a:cs typeface="Arial Unicode MS"/>
               </a:rPr>
-              <a:t>（這件事下一節講「場景」的時候會再展開——那才是模擬真正的用法。）
+              <a:t>這件事下一節講「場景」的時候會再展開，那才是模擬真正的用法。
 </a:t>
             </a:r>
           </a:p>
@@ -2942,7 +2920,7 @@
                 <a:ea typeface="Arial Unicode MS"/>
                 <a:cs typeface="Arial Unicode MS"/>
               </a:rPr>
-              <a:t>（讓學生自己說出來。）
+              <a:t>這一句我想聽大家自己說出來。
 </a:t>
             </a:r>
           </a:p>
@@ -3052,7 +3030,7 @@
                 <a:ea typeface="Arial Unicode MS"/>
                 <a:cs typeface="Arial Unicode MS"/>
               </a:rPr>
-              <a:t>（這句話值得寫在白板上：模擬做不到的，真車做得到；真車做不到的，模擬做得到。兩個都要。）</a:t>
+              <a:t>這句話我寫在白板上：模擬做不到的，真車做得到；真車做不到的，模擬做得到。兩個都要。</a:t>
             </a:r>
           </a:p>
         </p:txBody>
@@ -3404,7 +3382,7 @@
                 <a:ea typeface="Arial Unicode MS"/>
                 <a:cs typeface="Arial Unicode MS"/>
               </a:rPr>
-              <a:t>（讓各組各講一個自己遇過的，寫在白板上，分三欄。這就是下一頁的討論。）
+              <a:t>等一下請各組各講一個自己遇過的，我寫在白板上，分成三欄。這就是下一頁的討論。
 </a:t>
             </a:r>
           </a:p>
@@ -3613,7 +3591,7 @@
                 <a:ea typeface="Arial Unicode MS"/>
                 <a:cs typeface="Arial Unicode MS"/>
               </a:rPr>
-              <a:t>（四分鐘。每組講一件，老師在白板上分三欄記：外觀、行為、物理。）
+              <a:t>四分鐘，每一組講一件，我在白板上分三欄記下來：外觀、行為、物理。
 </a:t>
             </a:r>
           </a:p>
@@ -3679,7 +3657,7 @@
                 <a:ea typeface="Arial Unicode MS"/>
                 <a:cs typeface="Arial Unicode MS"/>
               </a:rPr>
-              <a:t>（預期：多數人猜行為，而且答對。）
+              <a:t>大部分的人會猜行為，而且會猜對。
 </a:t>
             </a:r>
           </a:p>
@@ -3723,7 +3701,7 @@
                 <a:ea typeface="Arial Unicode MS"/>
                 <a:cs typeface="Arial Unicode MS"/>
               </a:rPr>
-              <a:t>（學生講的例子，大部分會落在「行為」那一欄——鑽車縫、逆向、闖紅燈、路口不打方向燈、外送機車突然停下。這很正常，因為行為最有感。）
+              <a:t>大家講的例子，大部分會落在「行為」那一欄：鑽車縫、逆向、闖紅燈、路口不打方向燈、外送機車突然停下。這很正常，因為行為最有感。
 </a:t>
             </a:r>
           </a:p>
@@ -4163,7 +4141,7 @@
                 <a:ea typeface="Arial Unicode MS"/>
                 <a:cs typeface="Arial Unicode MS"/>
               </a:rPr>
-              <a:t>（第二節的主題是「場景」。）</a:t>
+              <a:t>第二節的主題就是「場景」。</a:t>
             </a:r>
           </a:p>
         </p:txBody>
@@ -4284,7 +4262,7 @@
                 <a:ea typeface="Arial Unicode MS"/>
                 <a:cs typeface="Arial Unicode MS"/>
               </a:rPr>
-              <a:t>（開場先花兩分鐘讓全班打開，不要等到第三節才手忙腳亂。）
+              <a:t>我們花兩分鐘先把它打開，不要等到第三節才手忙腳亂。
 </a:t>
             </a:r>
           </a:p>
@@ -4394,7 +4372,7 @@
                 <a:ea typeface="Arial Unicode MS"/>
                 <a:cs typeface="Arial Unicode MS"/>
               </a:rPr>
-              <a:t>（確認全班都打開了再往下。沒帶筆電的同學，請跟隔壁併桌。）</a:t>
+              <a:t>沒帶筆電的同學，請跟隔壁的同學併桌一起看。等全部的人都打開了我們再往下。</a:t>
             </a:r>
           </a:p>
         </p:txBody>
@@ -4834,7 +4812,7 @@
                 <a:ea typeface="Arial Unicode MS"/>
                 <a:cs typeface="Arial Unicode MS"/>
               </a:rPr>
-              <a:t>（預期答案：機車會從兩條射線中間鑽過去，車子看不到。）
+              <a:t>可能會有人說，機車會從兩條射線中間鑽過去，車子就看不到。對，就是這樣。
 </a:t>
             </a:r>
           </a:p>
@@ -4878,7 +4856,7 @@
                 <a:ea typeface="Arial Unicode MS"/>
                 <a:cs typeface="Arial Unicode MS"/>
               </a:rPr>
-              <a:t>（如果上週有同學缺席：請他等一下上機時把射線數拉到 3，跑一次河內尖峰，就知道了。）</a:t>
+              <a:t>上週缺席的同學，等一下上機的時候把射線數拉到三，跑一次河內尖峰，馬上就知道了。</a:t>
             </a:r>
           </a:p>
         </p:txBody>
@@ -5197,7 +5175,7 @@
                 <a:ea typeface="Arial Unicode MS"/>
                 <a:cs typeface="Arial Unicode MS"/>
               </a:rPr>
-              <a:t>（停在這裡，下一頁就用上週那條煞停距離的公式，把這個下限算出來。）</a:t>
+              <a:t>我們先停在這裡，下一頁就用上週那條煞停距離的公式，把這個下限算出來。</a:t>
             </a:r>
           </a:p>
         </p:txBody>
@@ -5428,7 +5406,7 @@
                 <a:ea typeface="Arial Unicode MS"/>
                 <a:cs typeface="Arial Unicode MS"/>
               </a:rPr>
-              <a:t>（等學生回答。上週第三週剛講過這題。）
+              <a:t>這題上週剛講過，大家想一下。
 </a:t>
             </a:r>
           </a:p>
@@ -5516,7 +5494,7 @@
                 <a:ea typeface="Arial Unicode MS"/>
                 <a:cs typeface="Arial Unicode MS"/>
               </a:rPr>
-              <a:t>（預期答案：裝好幾顆，分工。）
+              <a:t>答案是裝好幾顆，分工。
 </a:t>
             </a:r>
           </a:p>
@@ -5846,7 +5824,7 @@
                 <a:ea typeface="Arial Unicode MS"/>
                 <a:cs typeface="Arial Unicode MS"/>
               </a:rPr>
-              <a:t>（除以十二這件事，每一屆都會有人問，所以下面把它拆開講。老師可以先問全班：為什麼是除以十二，不是除以六？）
+              <a:t>除以十二這件事，每一屆都會有人問，所以我把它拆開講。先問大家一句：為什麼是除以十二，不是除以六？
 </a:t>
             </a:r>
           </a:p>
@@ -5912,7 +5890,7 @@
                 <a:ea typeface="Arial Unicode MS"/>
                 <a:cs typeface="Arial Unicode MS"/>
               </a:rPr>
-              <a:t>（分兩步講，兩步都在白板上寫出來。）
+              <a:t>分兩步，兩步我都寫在白板上。
 </a:t>
             </a:r>
           </a:p>
@@ -6143,7 +6121,7 @@
                 <a:ea typeface="Arial Unicode MS"/>
                 <a:cs typeface="Arial Unicode MS"/>
               </a:rPr>
-              <a:t>（如果學生問為什麼是平方，可以補一句：速度變兩倍的時候，煞的時間變兩倍、平均速度也變兩倍，兩個都變兩倍，所以距離變四倍。）
+              <a:t>如果有人問為什麼是平方，我再補一句：速度變兩倍的時候，煞的時間變兩倍、平均速度也變兩倍，兩個都變兩倍，所以距離變四倍。
 </a:t>
             </a:r>
           </a:p>
@@ -6187,7 +6165,7 @@
                 <a:ea typeface="Arial Unicode MS"/>
                 <a:cs typeface="Arial Unicode MS"/>
               </a:rPr>
-              <a:t>反應：十三點九乘零點三，四點二公尺。
+              <a:t>反應距離是十三點九乘零點三，得到四點二公尺。煞車距離是十三點九平方除以十二，得到十六點一公尺。
 </a:t>
             </a:r>
           </a:p>
@@ -6209,7 +6187,29 @@
                 <a:ea typeface="Arial Unicode MS"/>
                 <a:cs typeface="Arial Unicode MS"/>
               </a:rPr>
-              <a:t>煞車：十三點九平方除以十二，十六點一公尺。
+              <a:t>加起來，大約</a:t>
+            </a:r>
+            <a:r>
+              <a:rPr sz="1000" b="1" lang="zh-TW" dirty="0">
+                <a:solidFill>
+                  <a:srgbClr val="000000"/>
+                </a:solidFill>
+                <a:latin typeface="Arial Unicode MS"/>
+                <a:ea typeface="Arial Unicode MS"/>
+                <a:cs typeface="Arial Unicode MS"/>
+              </a:rPr>
+              <a:t>二十公尺</a:t>
+            </a:r>
+            <a:r>
+              <a:rPr sz="1000" lang="zh-TW" dirty="0">
+                <a:solidFill>
+                  <a:srgbClr val="000000"/>
+                </a:solidFill>
+                <a:latin typeface="Arial Unicode MS"/>
+                <a:ea typeface="Arial Unicode MS"/>
+                <a:cs typeface="Arial Unicode MS"/>
+              </a:rPr>
+              <a:t>。
 </a:t>
             </a:r>
           </a:p>
@@ -6231,29 +6231,7 @@
                 <a:ea typeface="Arial Unicode MS"/>
                 <a:cs typeface="Arial Unicode MS"/>
               </a:rPr>
-              <a:t>加起來，大約</a:t>
-            </a:r>
-            <a:r>
-              <a:rPr sz="1000" b="1" lang="zh-TW" dirty="0">
-                <a:solidFill>
-                  <a:srgbClr val="000000"/>
-                </a:solidFill>
-                <a:latin typeface="Arial Unicode MS"/>
-                <a:ea typeface="Arial Unicode MS"/>
-                <a:cs typeface="Arial Unicode MS"/>
-              </a:rPr>
-              <a:t>二十公尺</a:t>
-            </a:r>
-            <a:r>
-              <a:rPr sz="1000" lang="zh-TW" dirty="0">
-                <a:solidFill>
-                  <a:srgbClr val="000000"/>
-                </a:solidFill>
-                <a:latin typeface="Arial Unicode MS"/>
-                <a:ea typeface="Arial Unicode MS"/>
-                <a:cs typeface="Arial Unicode MS"/>
-              </a:rPr>
-              <a:t>。
+              <a:t>所以射線至少要二十五公尺——多給五公尺的餘裕。
 </a:t>
             </a:r>
           </a:p>
@@ -6275,29 +6253,7 @@
                 <a:ea typeface="Arial Unicode MS"/>
                 <a:cs typeface="Arial Unicode MS"/>
               </a:rPr>
-              <a:t>所以射線至少要二十五公尺——多給五公尺的餘裕。
-</a:t>
-            </a:r>
-          </a:p>
-          <a:p>
-            <a:pPr algn="l">
-              <a:lnSpc>
-                <a:spcPct val="115000"/>
-              </a:lnSpc>
-              <a:spcAft>
-                <a:spcPts val="500"/>
-              </a:spcAft>
-            </a:pPr>
-            <a:r>
-              <a:rPr sz="1000" lang="zh-TW" dirty="0">
-                <a:solidFill>
-                  <a:srgbClr val="000000"/>
-                </a:solidFill>
-                <a:latin typeface="Arial Unicode MS"/>
-                <a:ea typeface="Arial Unicode MS"/>
-                <a:cs typeface="Arial Unicode MS"/>
-              </a:rPr>
-              <a:t>（請在白板上把這三行寫出來，讓同學跟著按一次計算機。）
+              <a:t>我把這三行寫在白板上，大家跟著按一次計算機。
 </a:t>
             </a:r>
           </a:p>
@@ -6528,7 +6484,7 @@
                 <a:ea typeface="Arial Unicode MS"/>
                 <a:cs typeface="Arial Unicode MS"/>
               </a:rPr>
-              <a:t>（播放前先設定：英文旁白，請點播放器齒輪 → 字幕 → 自動翻譯 → 越南文。播到 2:30 就停，後面是英國考試的內容，我們用不到。需要網路；沒網路就跳過這一頁，直接講下面的三個問題。）
+              <a:t>這一支是英文旁白，請大家點播放器右下角的齒輪，字幕，自動翻譯，選越南文。我們播到兩分半就停，後面是英國考試的內容，我們用不到。
 </a:t>
             </a:r>
           </a:p>
@@ -6572,7 +6528,7 @@
                 <a:ea typeface="Arial Unicode MS"/>
                 <a:cs typeface="Arial Unicode MS"/>
               </a:rPr>
-              <a:t>（影片內容，方便中途暫停：
+              <a:t>我先講影片的順序，這樣大家知道要看哪裡。
 </a:t>
             </a:r>
           </a:p>
@@ -6594,7 +6550,7 @@
                 <a:ea typeface="Arial Unicode MS"/>
                 <a:cs typeface="Arial Unicode MS"/>
               </a:rPr>
-              <a:t>0:00 開場，問為什麼車子開快就比較難停、下雨也比較難停。
+              <a:t>開頭它先問，為什麼車子開快就比較難停、下雨也比較難停。
 </a:t>
             </a:r>
           </a:p>
@@ -6616,7 +6572,7 @@
                 <a:ea typeface="Arial Unicode MS"/>
                 <a:cs typeface="Arial Unicode MS"/>
               </a:rPr>
-              <a:t>0:20 停車距離的定義：從駕駛看到東西，到車子完全停下來，總共走了多遠。
+              <a:t>零分二十秒講停車距離的定義：從駕駛看到東西，到車子完全停下來，總共走了多遠。
 </a:t>
             </a:r>
           </a:p>
@@ -6638,7 +6594,7 @@
                 <a:ea typeface="Arial Unicode MS"/>
                 <a:cs typeface="Arial Unicode MS"/>
               </a:rPr>
-              <a:t>0:30 第一段，反應距離：反應時間乘上速度。影響因素是疲勞、喝酒、滑手機、大聲的音樂——這些都讓人反應變慢。
+              <a:t>三十秒開始講第一段，反應距離，也就是反應時間乘上速度。影響它的是疲勞、喝酒、滑手機、大聲的音樂，這些都讓人反應變慢。
 </a:t>
             </a:r>
           </a:p>
@@ -6660,7 +6616,7 @@
                 <a:ea typeface="Arial Unicode MS"/>
                 <a:cs typeface="Arial Unicode MS"/>
               </a:rPr>
-              <a:t>1:05 關鍵一句：</a:t>
+              <a:t>一分零五秒有一句話最關鍵：</a:t>
             </a:r>
             <a:r>
               <a:rPr sz="1000" b="1" lang="zh-TW" dirty="0">
@@ -6671,7 +6627,7 @@
                 <a:ea typeface="Arial Unicode MS"/>
                 <a:cs typeface="Arial Unicode MS"/>
               </a:rPr>
-              <a:t>速度不會改變你的反應時間，但是同樣的時間你會跑得更遠。</a:t>
+              <a:t>速度不會改變你的反應時間，可是同樣的時間你會跑得更遠。</a:t>
             </a:r>
             <a:r>
               <a:rPr sz="1000" lang="zh-TW" dirty="0">
@@ -6682,7 +6638,7 @@
                 <a:ea typeface="Arial Unicode MS"/>
                 <a:cs typeface="Arial Unicode MS"/>
               </a:rPr>
-              <a:t>高速公路上，還沒踩下煞車就已經過了四個車身。
+              <a:t>在高速公路上，還沒踩下煞車就已經過了四個車身。
 </a:t>
             </a:r>
           </a:p>
@@ -6704,7 +6660,7 @@
                 <a:ea typeface="Arial Unicode MS"/>
                 <a:cs typeface="Arial Unicode MS"/>
               </a:rPr>
-              <a:t>1:20 第二段，煞車距離：腳踩下去之後還要跑多遠。車速愈快、車子愈重就愈長，因為動能要先消耗掉。
+              <a:t>一分二十秒開始講第二段，煞車距離，腳踩下去之後還要跑多遠。車速愈快、車子愈重就愈長，因為動能要先消耗掉。
 </a:t>
             </a:r>
           </a:p>
@@ -6726,7 +6682,7 @@
                 <a:ea typeface="Arial Unicode MS"/>
                 <a:cs typeface="Arial Unicode MS"/>
               </a:rPr>
-              <a:t>1:50 路面條件：結冰、下雨、落葉，還有煞車和輪胎本身的狀況。
+              <a:t>一分五十秒講路面條件：結冰、下雨、落葉，還有煞車和輪胎本身的狀況。
 </a:t>
             </a:r>
           </a:p>
@@ -6748,7 +6704,7 @@
                 <a:ea typeface="Arial Unicode MS"/>
                 <a:cs typeface="Arial Unicode MS"/>
               </a:rPr>
-              <a:t>2:10 之後是考題練習，可以停了。）
+              <a:t>兩分十秒之後是考題練習，我們就停在那裡。
 </a:t>
             </a:r>
           </a:p>
@@ -6836,7 +6792,7 @@
                 <a:ea typeface="Arial Unicode MS"/>
                 <a:cs typeface="Arial Unicode MS"/>
               </a:rPr>
-              <a:t>（預期答案：反應距離、煞車距離。跟我們剛剛算的一樣。）
+              <a:t>答案是反應距離和煞車距離，跟我們剛剛算的一樣。
 </a:t>
             </a:r>
           </a:p>
@@ -6902,7 +6858,7 @@
                 <a:ea typeface="Arial Unicode MS"/>
                 <a:cs typeface="Arial Unicode MS"/>
               </a:rPr>
-              <a:t>（預期答案：煞車距離。反應距離只是速度乘一個固定的時間，速度變兩倍它就變兩倍；煞車距離是速度變兩倍就變四倍。）
+              <a:t>答案是煞車距離。反應距離只是速度乘一個固定的時間，速度變兩倍它就變兩倍；煞車距離是速度變兩倍就變四倍。
 </a:t>
             </a:r>
           </a:p>
@@ -7012,7 +6968,7 @@
                 <a:ea typeface="Arial Unicode MS"/>
                 <a:cs typeface="Arial Unicode MS"/>
               </a:rPr>
-              <a:t>（讓學生想一下。預期答案：需要看得更遠，因為停下來要更長的距離。）
+              <a:t>大家想一下。答案是需要看得更遠，因為停下來要更長的距離。
 </a:t>
             </a:r>
           </a:p>
@@ -7058,27 +7014,6 @@
               </a:rPr>
               <a:t>兩邊一起往壞的方向走。那一題的陷阱就在這裡。
 </a:t>
-            </a:r>
-          </a:p>
-          <a:p>
-            <a:pPr algn="l">
-              <a:lnSpc>
-                <a:spcPct val="115000"/>
-              </a:lnSpc>
-              <a:spcAft>
-                <a:spcPts val="500"/>
-              </a:spcAft>
-            </a:pPr>
-            <a:r>
-              <a:rPr sz="1000" lang="zh-TW" dirty="0">
-                <a:solidFill>
-                  <a:srgbClr val="000000"/>
-                </a:solidFill>
-                <a:latin typeface="Arial Unicode MS"/>
-                <a:ea typeface="Arial Unicode MS"/>
-                <a:cs typeface="Arial Unicode MS"/>
-              </a:rPr>
-              <a:t>（如果時間緊，這一頁可以直接跳過，三個問題留到第三節打開雨天的時候再問。）</a:t>
             </a:r>
           </a:p>
         </p:txBody>
@@ -7221,7 +7156,7 @@
                 <a:ea typeface="Arial Unicode MS"/>
                 <a:cs typeface="Arial Unicode MS"/>
               </a:rPr>
-              <a:t>（讓同學自己挑一個速度算一次，對答案。）
+              <a:t>請大家自己挑一個速度算一次，再跟表上對答案。
 </a:t>
             </a:r>
           </a:p>
@@ -7419,7 +7354,7 @@
                 <a:ea typeface="Arial Unicode MS"/>
                 <a:cs typeface="Arial Unicode MS"/>
               </a:rPr>
-              <a:t>（讓他們猜。答案是雷達，還有高階的長距光達。但這是第三章的內容，今天先不展開——留一個鉤子就好。）
+              <a:t>大家猜猜看。答案是雷達，還有高階的長距光達。不過那是第三章的內容，今天先不展開。
 </a:t>
             </a:r>
           </a:p>

--- a/第四週(10-01)/第四週_第1節_簡報.pptx
+++ b/第四週(10-01)/第四週_第1節_簡報.pptx
@@ -885,7 +885,7 @@
                 <a:ea typeface="Arial Unicode MS"/>
                 <a:cs typeface="Arial Unicode MS"/>
               </a:rPr>
-              <a:t>第一，</a:t>
+              <a:t>第一，CARLA 裡面，</a:t>
             </a:r>
             <a:r>
               <a:rPr sz="1000" b="1" lang="zh-TW" dirty="0">
@@ -929,7 +929,7 @@
                 <a:ea typeface="Arial Unicode MS"/>
                 <a:cs typeface="Arial Unicode MS"/>
               </a:rPr>
-              <a:t>第二，畫面角落那些小視窗，是它模擬出來的</a:t>
+              <a:t>第二，CARLA 也會把</a:t>
             </a:r>
             <a:r>
               <a:rPr sz="1000" b="1" lang="zh-TW" dirty="0">
@@ -973,7 +973,7 @@
                 <a:ea typeface="Arial Unicode MS"/>
                 <a:cs typeface="Arial Unicode MS"/>
               </a:rPr>
-              <a:t>。也就是說，它連感測器看到什麼都一起模擬了。
+              <a:t>一起模擬出來。也就是說，它連感測器看到什麼都算給你。
 </a:t>
             </a:r>
           </a:p>
@@ -9299,7 +9299,7 @@
         <p:spPr>
           <a:xfrm>
             <a:off x="5047488" y="2279756"/>
-            <a:ext cx="3429000" cy="456079"/>
+            <a:ext cx="3429000" cy="590919"/>
           </a:xfrm>
           <a:prstGeom prst="rect">
             <a:avLst/>
@@ -9326,7 +9326,7 @@
                 <a:ea typeface="Arial" pitchFamily="34" charset="-122"/>
                 <a:cs typeface="Arial" pitchFamily="34" charset="-120"/>
               </a:rPr>
-              <a:t>Chú ý: thời tiết, giờ trong ngày, mật độ xe đều là tham số chỉnh được</a:t>
+              <a:t>Trong CARLA, thời tiết, giờ trong ngày, mật độ xe đều là tham số chỉnh được</a:t>
             </a:r>
             <a:endParaRPr lang="en-US" sz="950" dirty="0"/>
           </a:p>
@@ -9346,7 +9346,7 @@
                 <a:ea typeface="微軟正黑體" pitchFamily="34" charset="-122"/>
                 <a:cs typeface="微軟正黑體" pitchFamily="34" charset="-120"/>
               </a:rPr>
-              <a:t>注意看：天氣、一天中的時間、車流密度，全部都是可以調的參數</a:t>
+              <a:t>CARLA 裡的天氣、一天中的時間、車流密度，全部都是可以調的參數</a:t>
             </a:r>
             <a:endParaRPr lang="en-US" sz="950" dirty="0"/>
           </a:p>
@@ -9360,7 +9360,7 @@
         </p:nvSpPr>
         <p:spPr>
           <a:xfrm>
-            <a:off x="4919472" y="2808987"/>
+            <a:off x="4919472" y="2943828"/>
             <a:ext cx="36576" cy="237744"/>
           </a:xfrm>
           <a:prstGeom prst="rect">
@@ -9380,8 +9380,8 @@
         </p:nvSpPr>
         <p:spPr>
           <a:xfrm>
-            <a:off x="5047488" y="2772411"/>
-            <a:ext cx="3429000" cy="456079"/>
+            <a:off x="5047488" y="2907252"/>
+            <a:ext cx="3429000" cy="313748"/>
           </a:xfrm>
           <a:prstGeom prst="rect">
             <a:avLst/>
@@ -9408,7 +9408,7 @@
                 <a:ea typeface="Arial" pitchFamily="34" charset="-122"/>
                 <a:cs typeface="Arial" pitchFamily="34" charset="-120"/>
               </a:rPr>
-              <a:t>Xem cả ô cửa sổ nhỏ: đó là ảnh camera và đám điểm LiDAR mô phỏng ra</a:t>
+              <a:t>CARLA mô phỏng được cả ảnh camera lẫn đám điểm LiDAR</a:t>
             </a:r>
             <a:endParaRPr lang="en-US" sz="950" dirty="0"/>
           </a:p>
@@ -9428,7 +9428,7 @@
                 <a:ea typeface="微軟正黑體" pitchFamily="34" charset="-122"/>
                 <a:cs typeface="微軟正黑體" pitchFamily="34" charset="-120"/>
               </a:rPr>
-              <a:t>也看那些小視窗：那是模擬出來的相機影像和光達點雲</a:t>
+              <a:t>CARLA 連相機影像和光達點雲都模擬得出來</a:t>
             </a:r>
             <a:endParaRPr lang="en-US" sz="950" dirty="0"/>
           </a:p>
@@ -9442,7 +9442,7 @@
         </p:nvSpPr>
         <p:spPr>
           <a:xfrm>
-            <a:off x="4919472" y="3301642"/>
+            <a:off x="4919472" y="3294151"/>
             <a:ext cx="36576" cy="237744"/>
           </a:xfrm>
           <a:prstGeom prst="rect">
@@ -9462,7 +9462,7 @@
         </p:nvSpPr>
         <p:spPr>
           <a:xfrm>
-            <a:off x="5047488" y="3265066"/>
+            <a:off x="5047488" y="3257575"/>
             <a:ext cx="3429000" cy="456079"/>
           </a:xfrm>
           <a:prstGeom prst="rect">

--- a/第四週(10-01)/第四週_第1節_簡報.pptx
+++ b/第四週(10-01)/第四週_第1節_簡報.pptx
@@ -885,7 +885,7 @@
                 <a:ea typeface="Arial Unicode MS"/>
                 <a:cs typeface="Arial Unicode MS"/>
               </a:rPr>
-              <a:t>第一，CARLA 裡面，</a:t>
+              <a:t>第一，影片裡會看到白天、晚上、下雨、起霧，也會看到車很多和車很少的路口。</a:t>
             </a:r>
             <a:r>
               <a:rPr sz="1000" b="1" lang="zh-TW" dirty="0">
@@ -896,7 +896,7 @@
                 <a:ea typeface="Arial Unicode MS"/>
                 <a:cs typeface="Arial Unicode MS"/>
               </a:rPr>
-              <a:t>天氣、一天中的時間、車流密度，全部都是參數</a:t>
+              <a:t>那些全部都是參數調出來的</a:t>
             </a:r>
             <a:r>
               <a:rPr sz="1000" lang="zh-TW" dirty="0">
@@ -907,7 +907,7 @@
                 <a:ea typeface="Arial Unicode MS"/>
                 <a:cs typeface="Arial Unicode MS"/>
               </a:rPr>
-              <a:t>。跟我們的滑桿是同一個概念，只是它的滑桿多得多。
+              <a:t>——天氣、一天中的時間、車流密度，跟我們的滑桿是同一個概念，只是它的滑桿多得多。
 </a:t>
             </a:r>
           </a:p>

--- a/第四週(10-01)/第四週_第1節_簡報.pptx
+++ b/第四週(10-01)/第四週_第1節_簡報.pptx
@@ -4746,7 +4746,7 @@
                 <a:ea typeface="Arial Unicode MS"/>
                 <a:cs typeface="Arial Unicode MS"/>
               </a:rPr>
-              <a:t>我們的模擬器可以從三條拉到六十條。真車的光達呢？</a:t>
+              <a:t>我們的模擬器可以從一條拉到六十條。真車的光達呢？</a:t>
             </a:r>
             <a:r>
               <a:rPr sz="1200" b="1" lang="zh-TW" dirty="0">

--- a/第四週(10-01)/第四週_第1節_簡報.pptx
+++ b/第四週(10-01)/第四週_第1節_簡報.pptx
@@ -7792,8 +7792,8 @@
         </p:nvSpPr>
         <p:spPr>
           <a:xfrm>
-            <a:off x="6766560" y="-1371600"/>
-            <a:ext cx="4206240" cy="4206240"/>
+            <a:off x="6130753" y="-947729"/>
+            <a:ext cx="2987610" cy="2987610"/>
           </a:xfrm>
           <a:prstGeom prst="ellipse">
             <a:avLst/>
@@ -7817,8 +7817,8 @@
         </p:nvSpPr>
         <p:spPr>
           <a:xfrm>
-            <a:off x="7863840" y="3108960"/>
-            <a:ext cx="2560320" cy="2560320"/>
+            <a:off x="7104973" y="1520297"/>
+            <a:ext cx="1688649" cy="1688649"/>
           </a:xfrm>
           <a:prstGeom prst="ellipse">
             <a:avLst/>
@@ -7839,8 +7839,8 @@
         </p:nvSpPr>
         <p:spPr>
           <a:xfrm>
-            <a:off x="502920" y="1207008"/>
-            <a:ext cx="6949440" cy="274320"/>
+            <a:off x="1681812" y="883806"/>
+            <a:ext cx="4936051" cy="194844"/>
           </a:xfrm>
           <a:prstGeom prst="rect">
             <a:avLst/>
@@ -7856,7 +7856,7 @@
               <a:buNone/>
             </a:pPr>
             <a:r>
-              <a:rPr lang="en-US" sz="1250" b="1" dirty="0">
+              <a:rPr lang="en-US" sz="890" b="1" dirty="0">
                 <a:solidFill>
                   <a:srgbClr val="00A896"/>
                 </a:solidFill>
@@ -7866,7 +7866,7 @@
               </a:rPr>
               <a:t>MITUST · Nguyên lý xe tự lái · Tuần 4</a:t>
             </a:r>
-            <a:endParaRPr lang="en-US" sz="1250" dirty="0"/>
+            <a:endParaRPr lang="en-US" sz="890" dirty="0"/>
           </a:p>
         </p:txBody>
       </p:sp>
@@ -7878,8 +7878,8 @@
         </p:nvSpPr>
         <p:spPr>
           <a:xfrm>
-            <a:off x="502920" y="1572768"/>
-            <a:ext cx="7498080" cy="1245074"/>
+            <a:off x="1681812" y="1143598"/>
+            <a:ext cx="5325739" cy="884351"/>
           </a:xfrm>
           <a:prstGeom prst="rect">
             <a:avLst/>
@@ -7898,7 +7898,7 @@
               <a:buNone/>
             </a:pPr>
             <a:r>
-              <a:rPr lang="en-US" sz="3000" b="1" dirty="0">
+              <a:rPr lang="en-US" sz="2130" b="1" dirty="0">
                 <a:solidFill>
                   <a:srgbClr val="FFFFFF"/>
                 </a:solidFill>
@@ -7908,7 +7908,7 @@
               </a:rPr>
               <a:t>Ba thanh trượt tuần trước</a:t>
             </a:r>
-            <a:endParaRPr lang="en-US" sz="3000" dirty="0"/>
+            <a:endParaRPr lang="en-US" sz="2130" dirty="0"/>
           </a:p>
           <a:p>
             <a:pPr indent="0" marL="0">
@@ -7918,7 +7918,7 @@
               <a:buNone/>
             </a:pPr>
             <a:r>
-              <a:rPr lang="en-US" sz="3000" b="1" dirty="0">
+              <a:rPr lang="en-US" sz="2130" b="1" dirty="0">
                 <a:solidFill>
                   <a:srgbClr val="FFFFFF"/>
                 </a:solidFill>
@@ -7928,7 +7928,7 @@
               </a:rPr>
               <a:t>chính là ba dòng trong bảng thông số</a:t>
             </a:r>
-            <a:endParaRPr lang="en-US" sz="3000" dirty="0"/>
+            <a:endParaRPr lang="en-US" sz="2130" dirty="0"/>
           </a:p>
           <a:p>
             <a:pPr indent="0" marL="0">
@@ -7938,7 +7938,7 @@
               <a:buNone/>
             </a:pPr>
             <a:r>
-              <a:rPr lang="en-US" sz="1700" dirty="0">
+              <a:rPr lang="en-US" sz="1210" dirty="0">
                 <a:solidFill>
                   <a:srgbClr val="C8D6E2"/>
                 </a:solidFill>
@@ -7948,7 +7948,7 @@
               </a:rPr>
               <a:t>上週你們拉的三個滑桿，就是規格表上的三行</a:t>
             </a:r>
-            <a:endParaRPr lang="en-US" sz="3000" dirty="0"/>
+            <a:endParaRPr lang="en-US" sz="2130" dirty="0"/>
           </a:p>
         </p:txBody>
       </p:sp>
@@ -7960,8 +7960,8 @@
         </p:nvSpPr>
         <p:spPr>
           <a:xfrm>
-            <a:off x="502920" y="3008479"/>
-            <a:ext cx="1371600" cy="41148"/>
+            <a:off x="1681812" y="2163355"/>
+            <a:ext cx="974221" cy="29227"/>
           </a:xfrm>
           <a:prstGeom prst="rect">
             <a:avLst/>
@@ -7980,8 +7980,8 @@
         </p:nvSpPr>
         <p:spPr>
           <a:xfrm>
-            <a:off x="502920" y="3209647"/>
-            <a:ext cx="7132320" cy="612545"/>
+            <a:off x="1681812" y="2306241"/>
+            <a:ext cx="5065947" cy="435079"/>
           </a:xfrm>
           <a:prstGeom prst="rect">
             <a:avLst/>
@@ -8000,7 +8000,7 @@
               <a:buNone/>
             </a:pPr>
             <a:r>
-              <a:rPr lang="en-US" sz="1450" dirty="0">
+              <a:rPr lang="en-US" sz="1030" dirty="0">
                 <a:solidFill>
                   <a:srgbClr val="C8D6E2"/>
                 </a:solidFill>
@@ -8010,7 +8010,7 @@
               </a:rPr>
               <a:t>Và: vì sao chạy tốt trong mô phỏng không có nghĩa là chạy được ngoài đường</a:t>
             </a:r>
-            <a:endParaRPr lang="en-US" sz="1450" dirty="0"/>
+            <a:endParaRPr lang="en-US" sz="1030" dirty="0"/>
           </a:p>
           <a:p>
             <a:pPr indent="0" marL="0">
@@ -8020,7 +8020,7 @@
               <a:buNone/>
             </a:pPr>
             <a:r>
-              <a:rPr lang="en-US" sz="1250" dirty="0">
+              <a:rPr lang="en-US" sz="890" dirty="0">
                 <a:solidFill>
                   <a:srgbClr val="8AA0B4"/>
                 </a:solidFill>
@@ -8030,7 +8030,7 @@
               </a:rPr>
               <a:t>還有：為什麼在模擬裡跑得好，不代表真車上路也可以</a:t>
             </a:r>
-            <a:endParaRPr lang="en-US" sz="1450" dirty="0"/>
+            <a:endParaRPr lang="en-US" sz="1030" dirty="0"/>
           </a:p>
         </p:txBody>
       </p:sp>
@@ -8042,8 +8042,8 @@
         </p:nvSpPr>
         <p:spPr>
           <a:xfrm>
-            <a:off x="502920" y="3895344"/>
-            <a:ext cx="5943600" cy="384048"/>
+            <a:off x="1681812" y="2793278"/>
+            <a:ext cx="4221622" cy="272782"/>
           </a:xfrm>
           <a:prstGeom prst="roundRect">
             <a:avLst>
@@ -8064,8 +8064,8 @@
         </p:nvSpPr>
         <p:spPr>
           <a:xfrm>
-            <a:off x="630936" y="3941064"/>
-            <a:ext cx="5687568" cy="292608"/>
+            <a:off x="1772740" y="2825752"/>
+            <a:ext cx="4039768" cy="207834"/>
           </a:xfrm>
           <a:prstGeom prst="rect">
             <a:avLst/>
@@ -8081,7 +8081,7 @@
               <a:buNone/>
             </a:pPr>
             <a:r>
-              <a:rPr lang="en-US" sz="1050" b="1" dirty="0">
+              <a:rPr lang="en-US" sz="750" b="1" dirty="0">
                 <a:solidFill>
                   <a:srgbClr val="9FD6CE"/>
                 </a:solidFill>
@@ -8091,7 +8091,7 @@
               </a:rPr>
               <a:t>工具｜Công cụ： ch-neural.github.io/MITUST-Principles-of-Self-Driving-Cars/week4/sim/</a:t>
             </a:r>
-            <a:endParaRPr lang="en-US" sz="1050" dirty="0"/>
+            <a:endParaRPr lang="en-US" sz="750" dirty="0"/>
           </a:p>
         </p:txBody>
       </p:sp>
@@ -8103,8 +8103,8 @@
         </p:nvSpPr>
         <p:spPr>
           <a:xfrm>
-            <a:off x="502920" y="4370832"/>
-            <a:ext cx="6949440" cy="274320"/>
+            <a:off x="1681812" y="3131008"/>
+            <a:ext cx="4936051" cy="194844"/>
           </a:xfrm>
           <a:prstGeom prst="rect">
             <a:avLst/>
@@ -8120,7 +8120,7 @@
               <a:buNone/>
             </a:pPr>
             <a:r>
-              <a:rPr lang="en-US" sz="1150" dirty="0">
+              <a:rPr lang="en-US" sz="820" dirty="0">
                 <a:solidFill>
                   <a:srgbClr val="8AA0B4"/>
                 </a:solidFill>
@@ -8130,7 +8130,7 @@
               </a:rPr>
               <a:t>第四週 第 1 節　2026/10/01（四）09:10–10:00　CH Tseng</a:t>
             </a:r>
-            <a:endParaRPr lang="en-US" sz="1150" dirty="0"/>
+            <a:endParaRPr lang="en-US" sz="820" dirty="0"/>
           </a:p>
         </p:txBody>
       </p:sp>
@@ -8142,8 +8142,8 @@
         </p:nvSpPr>
         <p:spPr>
           <a:xfrm>
-            <a:off x="356616" y="310896"/>
-            <a:ext cx="2212848" cy="749808"/>
+            <a:off x="1577895" y="247315"/>
+            <a:ext cx="1571743" cy="532574"/>
           </a:xfrm>
           <a:prstGeom prst="roundRect">
             <a:avLst>
@@ -8172,8 +8172,8 @@
         </p:blipFill>
         <p:spPr>
           <a:xfrm>
-            <a:off x="502920" y="475488"/>
-            <a:ext cx="1920240" cy="424269"/>
+            <a:off x="1681812" y="364222"/>
+            <a:ext cx="1363909" cy="301350"/>
           </a:xfrm>
           <a:prstGeom prst="rect">
             <a:avLst/>
@@ -8213,8 +8213,8 @@
         </p:nvSpPr>
         <p:spPr>
           <a:xfrm>
-            <a:off x="502920" y="365760"/>
-            <a:ext cx="8138160" cy="274320"/>
+            <a:off x="1681812" y="286284"/>
+            <a:ext cx="5780375" cy="194844"/>
           </a:xfrm>
           <a:prstGeom prst="rect">
             <a:avLst/>
@@ -8230,7 +8230,7 @@
               <a:buNone/>
             </a:pPr>
             <a:r>
-              <a:rPr lang="en-US" sz="1300" b="1" dirty="0">
+              <a:rPr lang="en-US" sz="920" b="1" dirty="0">
                 <a:solidFill>
                   <a:srgbClr val="007F72"/>
                 </a:solidFill>
@@ -8240,7 +8240,7 @@
               </a:rPr>
               <a:t>▶ Video · 真正的自駕模擬器長什麼樣</a:t>
             </a:r>
-            <a:endParaRPr lang="en-US" sz="1300" dirty="0"/>
+            <a:endParaRPr lang="en-US" sz="920" dirty="0"/>
           </a:p>
         </p:txBody>
       </p:sp>
@@ -8252,8 +8252,8 @@
         </p:nvSpPr>
         <p:spPr>
           <a:xfrm>
-            <a:off x="502920" y="676656"/>
-            <a:ext cx="8138160" cy="560684"/>
+            <a:off x="1681812" y="507107"/>
+            <a:ext cx="5780375" cy="398243"/>
           </a:xfrm>
           <a:prstGeom prst="rect">
             <a:avLst/>
@@ -8272,7 +8272,7 @@
               <a:buNone/>
             </a:pPr>
             <a:r>
-              <a:rPr lang="en-US" sz="1700" b="1" dirty="0">
+              <a:rPr lang="en-US" sz="1210" b="1" dirty="0">
                 <a:solidFill>
                   <a:srgbClr val="0B1F3A"/>
                 </a:solidFill>
@@ -8282,7 +8282,7 @@
               </a:rPr>
               <a:t>Mô phỏng của ta rất đơn giản — đây là loại mà ngành thật sự dùng</a:t>
             </a:r>
-            <a:endParaRPr lang="en-US" sz="1700" dirty="0"/>
+            <a:endParaRPr lang="en-US" sz="1210" dirty="0"/>
           </a:p>
           <a:p>
             <a:pPr indent="0" marL="0">
@@ -8292,7 +8292,7 @@
               <a:buNone/>
             </a:pPr>
             <a:r>
-              <a:rPr lang="en-US" sz="1250" dirty="0">
+              <a:rPr lang="en-US" sz="890" dirty="0">
                 <a:solidFill>
                   <a:srgbClr val="5F7183"/>
                 </a:solidFill>
@@ -8302,7 +8302,7 @@
               </a:rPr>
               <a:t>我們的模擬器很簡單——這是業界真的在用的那種</a:t>
             </a:r>
-            <a:endParaRPr lang="en-US" sz="1700" dirty="0"/>
+            <a:endParaRPr lang="en-US" sz="1210" dirty="0"/>
           </a:p>
         </p:txBody>
       </p:sp>
@@ -8314,8 +8314,8 @@
         </p:nvSpPr>
         <p:spPr>
           <a:xfrm>
-            <a:off x="502920" y="1255628"/>
-            <a:ext cx="3904488" cy="2566564"/>
+            <a:off x="1681812" y="918340"/>
+            <a:ext cx="2773281" cy="1822980"/>
           </a:xfrm>
           <a:prstGeom prst="roundRect">
             <a:avLst>
@@ -8341,8 +8341,8 @@
         </p:nvSpPr>
         <p:spPr>
           <a:xfrm>
-            <a:off x="539496" y="2333585"/>
-            <a:ext cx="3831336" cy="1452031"/>
+            <a:off x="1707792" y="1683992"/>
+            <a:ext cx="2721323" cy="1031349"/>
           </a:xfrm>
           <a:prstGeom prst="rect">
             <a:avLst/>
@@ -8361,8 +8361,8 @@
         </p:nvSpPr>
         <p:spPr>
           <a:xfrm flipH="1">
-            <a:off x="815279" y="2333585"/>
-            <a:ext cx="1548445" cy="1433743"/>
+            <a:off x="1903675" y="1683992"/>
+            <a:ext cx="1099830" cy="1018360"/>
           </a:xfrm>
           <a:prstGeom prst="line">
             <a:avLst/>
@@ -8386,8 +8386,8 @@
         </p:nvSpPr>
         <p:spPr>
           <a:xfrm>
-            <a:off x="2546604" y="2333585"/>
-            <a:ext cx="1548445" cy="1433743"/>
+            <a:off x="3133401" y="1683992"/>
+            <a:ext cx="1099830" cy="1018360"/>
           </a:xfrm>
           <a:prstGeom prst="line">
             <a:avLst/>
@@ -8411,8 +8411,8 @@
         </p:nvSpPr>
         <p:spPr>
           <a:xfrm>
-            <a:off x="1393561" y="2510206"/>
-            <a:ext cx="144138" cy="144138"/>
+            <a:off x="2314417" y="1809442"/>
+            <a:ext cx="102379" cy="102379"/>
           </a:xfrm>
           <a:prstGeom prst="ellipse">
             <a:avLst/>
@@ -8431,12 +8431,12 @@
         </p:nvSpPr>
         <p:spPr>
           <a:xfrm>
-            <a:off x="1350319" y="2668758"/>
-            <a:ext cx="230621" cy="259449"/>
+            <a:off x="2283703" y="1922058"/>
+            <a:ext cx="163806" cy="184281"/>
           </a:xfrm>
           <a:prstGeom prst="roundRect">
             <a:avLst>
-              <a:gd name="adj" fmla="val 111019"/>
+              <a:gd name="adj" fmla="val 111018"/>
             </a:avLst>
           </a:prstGeom>
           <a:solidFill>
@@ -8453,8 +8453,8 @@
         </p:nvSpPr>
         <p:spPr>
           <a:xfrm rot="960000">
-            <a:off x="1310681" y="2690378"/>
-            <a:ext cx="57655" cy="187380"/>
+            <a:off x="2255549" y="1937415"/>
+            <a:ext cx="40951" cy="133092"/>
           </a:xfrm>
           <a:prstGeom prst="rect">
             <a:avLst/>
@@ -8473,8 +8473,8 @@
         </p:nvSpPr>
         <p:spPr>
           <a:xfrm rot="-960000">
-            <a:off x="1562923" y="2690378"/>
-            <a:ext cx="57655" cy="187380"/>
+            <a:off x="2434712" y="1937415"/>
+            <a:ext cx="40951" cy="133092"/>
           </a:xfrm>
           <a:prstGeom prst="rect">
             <a:avLst/>
@@ -8493,8 +8493,8 @@
         </p:nvSpPr>
         <p:spPr>
           <a:xfrm rot="300000">
-            <a:off x="1389957" y="2892172"/>
-            <a:ext cx="64862" cy="259449"/>
+            <a:off x="2311857" y="2080745"/>
+            <a:ext cx="46070" cy="184281"/>
           </a:xfrm>
           <a:prstGeom prst="rect">
             <a:avLst/>
@@ -8513,8 +8513,8 @@
         </p:nvSpPr>
         <p:spPr>
           <a:xfrm rot="-300000">
-            <a:off x="1476440" y="2892172"/>
-            <a:ext cx="64862" cy="259449"/>
+            <a:off x="2373284" y="2080745"/>
+            <a:ext cx="46070" cy="184281"/>
           </a:xfrm>
           <a:prstGeom prst="rect">
             <a:avLst/>
@@ -8533,8 +8533,8 @@
         </p:nvSpPr>
         <p:spPr>
           <a:xfrm>
-            <a:off x="971459" y="2384916"/>
-            <a:ext cx="858987" cy="923963"/>
+            <a:off x="2014606" y="1720451"/>
+            <a:ext cx="610122" cy="656273"/>
           </a:xfrm>
           <a:prstGeom prst="rect">
             <a:avLst/>
@@ -8555,8 +8555,8 @@
         </p:nvSpPr>
         <p:spPr>
           <a:xfrm>
-            <a:off x="971459" y="2211180"/>
-            <a:ext cx="858987" cy="173736"/>
+            <a:off x="2014606" y="1597050"/>
+            <a:ext cx="610122" cy="123401"/>
           </a:xfrm>
           <a:prstGeom prst="rect">
             <a:avLst/>
@@ -8575,8 +8575,8 @@
         </p:nvSpPr>
         <p:spPr>
           <a:xfrm>
-            <a:off x="998891" y="2215752"/>
-            <a:ext cx="858987" cy="164592"/>
+            <a:off x="2034090" y="1600297"/>
+            <a:ext cx="610122" cy="116906"/>
           </a:xfrm>
           <a:prstGeom prst="rect">
             <a:avLst/>
@@ -8592,7 +8592,7 @@
               <a:buNone/>
             </a:pPr>
             <a:r>
-              <a:rPr lang="en-US" sz="800" b="1" dirty="0">
+              <a:rPr lang="en-US" sz="570" b="1" dirty="0">
                 <a:solidFill>
                   <a:srgbClr val="0B1F3A"/>
                 </a:solidFill>
@@ -8602,7 +8602,7 @@
               </a:rPr>
               <a:t>người 行人</a:t>
             </a:r>
-            <a:endParaRPr lang="en-US" sz="800" dirty="0"/>
+            <a:endParaRPr lang="en-US" sz="570" dirty="0"/>
           </a:p>
         </p:txBody>
       </p:sp>
@@ -8614,8 +8614,8 @@
         </p:nvSpPr>
         <p:spPr>
           <a:xfrm>
-            <a:off x="3037915" y="2868005"/>
-            <a:ext cx="589365" cy="179372"/>
+            <a:off x="3482369" y="2063580"/>
+            <a:ext cx="418615" cy="127404"/>
           </a:xfrm>
           <a:prstGeom prst="roundRect">
             <a:avLst>
@@ -8636,8 +8636,8 @@
         </p:nvSpPr>
         <p:spPr>
           <a:xfrm>
-            <a:off x="3166038" y="2739882"/>
-            <a:ext cx="320307" cy="140935"/>
+            <a:off x="3573373" y="1972577"/>
+            <a:ext cx="227508" cy="100103"/>
           </a:xfrm>
           <a:prstGeom prst="trapezoid">
             <a:avLst/>
@@ -8658,8 +8658,8 @@
         </p:nvSpPr>
         <p:spPr>
           <a:xfrm>
-            <a:off x="3114789" y="3008940"/>
-            <a:ext cx="128123" cy="128123"/>
+            <a:off x="3536971" y="2163683"/>
+            <a:ext cx="91003" cy="91003"/>
           </a:xfrm>
           <a:prstGeom prst="ellipse">
             <a:avLst/>
@@ -8678,8 +8678,8 @@
         </p:nvSpPr>
         <p:spPr>
           <a:xfrm>
-            <a:off x="3422284" y="3008940"/>
-            <a:ext cx="128123" cy="128123"/>
+            <a:off x="3755379" y="2163683"/>
+            <a:ext cx="91003" cy="91003"/>
           </a:xfrm>
           <a:prstGeom prst="ellipse">
             <a:avLst/>
@@ -8698,8 +8698,8 @@
         </p:nvSpPr>
         <p:spPr>
           <a:xfrm>
-            <a:off x="3146819" y="3040971"/>
-            <a:ext cx="64061" cy="64061"/>
+            <a:off x="3559722" y="2186434"/>
+            <a:ext cx="45502" cy="45502"/>
           </a:xfrm>
           <a:prstGeom prst="ellipse">
             <a:avLst/>
@@ -8718,8 +8718,8 @@
         </p:nvSpPr>
         <p:spPr>
           <a:xfrm>
-            <a:off x="3454314" y="3040971"/>
-            <a:ext cx="64061" cy="64061"/>
+            <a:off x="3778130" y="2186434"/>
+            <a:ext cx="45502" cy="45502"/>
           </a:xfrm>
           <a:prstGeom prst="ellipse">
             <a:avLst/>
@@ -8738,8 +8738,8 @@
         </p:nvSpPr>
         <p:spPr>
           <a:xfrm>
-            <a:off x="2689433" y="2487579"/>
-            <a:ext cx="1171346" cy="821300"/>
+            <a:off x="3234850" y="1793370"/>
+            <a:ext cx="831984" cy="583354"/>
           </a:xfrm>
           <a:prstGeom prst="rect">
             <a:avLst/>
@@ -8760,8 +8760,8 @@
         </p:nvSpPr>
         <p:spPr>
           <a:xfrm>
-            <a:off x="2689433" y="2313843"/>
-            <a:ext cx="1171346" cy="173736"/>
+            <a:off x="3234850" y="1669969"/>
+            <a:ext cx="831984" cy="123401"/>
           </a:xfrm>
           <a:prstGeom prst="rect">
             <a:avLst/>
@@ -8780,8 +8780,8 @@
         </p:nvSpPr>
         <p:spPr>
           <a:xfrm>
-            <a:off x="2716865" y="2318415"/>
-            <a:ext cx="1171346" cy="164592"/>
+            <a:off x="3254334" y="1673217"/>
+            <a:ext cx="831984" cy="116906"/>
           </a:xfrm>
           <a:prstGeom prst="rect">
             <a:avLst/>
@@ -8797,7 +8797,7 @@
               <a:buNone/>
             </a:pPr>
             <a:r>
-              <a:rPr lang="en-US" sz="800" b="1" dirty="0">
+              <a:rPr lang="en-US" sz="570" b="1" dirty="0">
                 <a:solidFill>
                   <a:srgbClr val="0B1F3A"/>
                 </a:solidFill>
@@ -8807,7 +8807,7 @@
               </a:rPr>
               <a:t>ô tô 汽車</a:t>
             </a:r>
-            <a:endParaRPr lang="en-US" sz="800" dirty="0"/>
+            <a:endParaRPr lang="en-US" sz="570" dirty="0"/>
           </a:p>
         </p:txBody>
       </p:sp>
@@ -8819,8 +8819,8 @@
         </p:nvSpPr>
         <p:spPr>
           <a:xfrm>
-            <a:off x="2145929" y="1522551"/>
-            <a:ext cx="345157" cy="441449"/>
+            <a:off x="2848809" y="1107930"/>
+            <a:ext cx="245158" cy="313553"/>
           </a:xfrm>
           <a:prstGeom prst="roundRect">
             <a:avLst>
@@ -8841,8 +8841,8 @@
         </p:nvSpPr>
         <p:spPr>
           <a:xfrm>
-            <a:off x="2221863" y="1562281"/>
-            <a:ext cx="193288" cy="193288"/>
+            <a:off x="2902744" y="1136150"/>
+            <a:ext cx="137289" cy="137289"/>
           </a:xfrm>
           <a:prstGeom prst="ellipse">
             <a:avLst/>
@@ -8861,8 +8861,8 @@
         </p:nvSpPr>
         <p:spPr>
           <a:xfrm>
-            <a:off x="2221863" y="1694716"/>
-            <a:ext cx="193288" cy="193288"/>
+            <a:off x="2902744" y="1230215"/>
+            <a:ext cx="137289" cy="137289"/>
           </a:xfrm>
           <a:prstGeom prst="ellipse">
             <a:avLst/>
@@ -8881,8 +8881,8 @@
         </p:nvSpPr>
         <p:spPr>
           <a:xfrm>
-            <a:off x="2221863" y="1827151"/>
-            <a:ext cx="193288" cy="193288"/>
+            <a:off x="2902744" y="1324281"/>
+            <a:ext cx="137289" cy="137289"/>
           </a:xfrm>
           <a:prstGeom prst="ellipse">
             <a:avLst/>
@@ -8901,8 +8901,8 @@
         </p:nvSpPr>
         <p:spPr>
           <a:xfrm>
-            <a:off x="1986625" y="1486619"/>
-            <a:ext cx="663763" cy="513313"/>
+            <a:off x="2735659" y="1082408"/>
+            <a:ext cx="471458" cy="364596"/>
           </a:xfrm>
           <a:prstGeom prst="rect">
             <a:avLst/>
@@ -8923,8 +8923,8 @@
         </p:nvSpPr>
         <p:spPr>
           <a:xfrm>
-            <a:off x="1986625" y="1312883"/>
-            <a:ext cx="786384" cy="173736"/>
+            <a:off x="2735659" y="959007"/>
+            <a:ext cx="558553" cy="123401"/>
           </a:xfrm>
           <a:prstGeom prst="rect">
             <a:avLst/>
@@ -8943,8 +8943,8 @@
         </p:nvSpPr>
         <p:spPr>
           <a:xfrm>
-            <a:off x="2014057" y="1317455"/>
-            <a:ext cx="786384" cy="164592"/>
+            <a:off x="2755144" y="962254"/>
+            <a:ext cx="558553" cy="116906"/>
           </a:xfrm>
           <a:prstGeom prst="rect">
             <a:avLst/>
@@ -8960,7 +8960,7 @@
               <a:buNone/>
             </a:pPr>
             <a:r>
-              <a:rPr lang="en-US" sz="800" b="1" dirty="0">
+              <a:rPr lang="en-US" sz="570" b="1" dirty="0">
                 <a:solidFill>
                   <a:srgbClr val="0B1F3A"/>
                 </a:solidFill>
@@ -8970,7 +8970,7 @@
               </a:rPr>
               <a:t>đèn 號誌</a:t>
             </a:r>
-            <a:endParaRPr lang="en-US" sz="800" dirty="0"/>
+            <a:endParaRPr lang="en-US" sz="570" dirty="0"/>
           </a:p>
         </p:txBody>
       </p:sp>
@@ -8982,8 +8982,8 @@
         </p:nvSpPr>
         <p:spPr>
           <a:xfrm>
-            <a:off x="539496" y="3310128"/>
-            <a:ext cx="3831336" cy="475488"/>
+            <a:off x="1707792" y="2377611"/>
+            <a:ext cx="2721323" cy="337730"/>
           </a:xfrm>
           <a:prstGeom prst="rect">
             <a:avLst/>
@@ -9004,8 +9004,8 @@
         </p:nvSpPr>
         <p:spPr>
           <a:xfrm>
-            <a:off x="630936" y="3346704"/>
-            <a:ext cx="3648456" cy="402336"/>
+            <a:off x="1772740" y="2403590"/>
+            <a:ext cx="2591427" cy="285771"/>
           </a:xfrm>
           <a:prstGeom prst="rect">
             <a:avLst/>
@@ -9024,7 +9024,7 @@
               <a:buNone/>
             </a:pPr>
             <a:r>
-              <a:rPr lang="en-US" sz="1000" b="1" dirty="0">
+              <a:rPr lang="en-US" sz="710" b="1" dirty="0">
                 <a:solidFill>
                   <a:srgbClr val="FFFFFF"/>
                 </a:solidFill>
@@ -9034,7 +9034,7 @@
               </a:rPr>
               <a:t>Hình minh hoạ. Trong CARLA: thời tiết, ánh sáng, người đi bộ, đèn tín hiệu đều chỉnh được.</a:t>
             </a:r>
-            <a:endParaRPr lang="en-US" sz="1000" dirty="0"/>
+            <a:endParaRPr lang="en-US" sz="710" dirty="0"/>
           </a:p>
           <a:p>
             <a:pPr indent="0" marL="0">
@@ -9044,7 +9044,7 @@
               <a:buNone/>
             </a:pPr>
             <a:r>
-              <a:rPr lang="en-US" sz="900" dirty="0">
+              <a:rPr lang="en-US" sz="640" dirty="0">
                 <a:solidFill>
                   <a:srgbClr val="D8E4EC"/>
                 </a:solidFill>
@@ -9054,7 +9054,7 @@
               </a:rPr>
               <a:t>示意圖。在 CARLA 裡，天氣、光線、行人、號誌全都可以調。</a:t>
             </a:r>
-            <a:endParaRPr lang="en-US" sz="1000" dirty="0"/>
+            <a:endParaRPr lang="en-US" sz="710" dirty="0"/>
           </a:p>
         </p:txBody>
       </p:sp>
@@ -9066,8 +9066,8 @@
         </p:nvSpPr>
         <p:spPr>
           <a:xfrm>
-            <a:off x="4736592" y="1255628"/>
-            <a:ext cx="3904488" cy="2566564"/>
+            <a:off x="4688906" y="918340"/>
+            <a:ext cx="2773281" cy="1822980"/>
           </a:xfrm>
           <a:prstGeom prst="roundRect">
             <a:avLst>
@@ -9093,8 +9093,8 @@
         </p:nvSpPr>
         <p:spPr>
           <a:xfrm>
-            <a:off x="4919472" y="1420220"/>
-            <a:ext cx="347472" cy="347472"/>
+            <a:off x="4818803" y="1035246"/>
+            <a:ext cx="246803" cy="246803"/>
           </a:xfrm>
           <a:prstGeom prst="ellipse">
             <a:avLst/>
@@ -9113,8 +9113,8 @@
         </p:nvSpPr>
         <p:spPr>
           <a:xfrm>
-            <a:off x="4919472" y="1465940"/>
-            <a:ext cx="347472" cy="256032"/>
+            <a:off x="4818803" y="1067721"/>
+            <a:ext cx="246803" cy="181855"/>
           </a:xfrm>
           <a:prstGeom prst="rect">
             <a:avLst/>
@@ -9130,7 +9130,7 @@
               <a:buNone/>
             </a:pPr>
             <a:r>
-              <a:rPr lang="en-US" sz="1200" b="1" dirty="0">
+              <a:rPr lang="en-US" sz="850" b="1" dirty="0">
                 <a:solidFill>
                   <a:srgbClr val="FFFFFF"/>
                 </a:solidFill>
@@ -9140,7 +9140,7 @@
               </a:rPr>
               <a:t>▶</a:t>
             </a:r>
-            <a:endParaRPr lang="en-US" sz="1200" dirty="0"/>
+            <a:endParaRPr lang="en-US" sz="850" dirty="0"/>
           </a:p>
         </p:txBody>
       </p:sp>
@@ -9152,8 +9152,8 @@
         </p:nvSpPr>
         <p:spPr>
           <a:xfrm>
-            <a:off x="5340096" y="1401932"/>
-            <a:ext cx="3118104" cy="420624"/>
+            <a:off x="5117564" y="1022257"/>
+            <a:ext cx="2214728" cy="298761"/>
           </a:xfrm>
           <a:prstGeom prst="rect">
             <a:avLst/>
@@ -9169,7 +9169,7 @@
               <a:buNone/>
             </a:pPr>
             <a:r>
-              <a:rPr lang="en-US" sz="1050" b="1" dirty="0">
+              <a:rPr lang="en-US" sz="750" b="1" dirty="0">
                 <a:solidFill>
                   <a:srgbClr val="0B1F3A"/>
                 </a:solidFill>
@@ -9179,7 +9179,7 @@
               </a:rPr>
               <a:t>CARLA 0.9.14</a:t>
             </a:r>
-            <a:endParaRPr lang="en-US" sz="1050" dirty="0"/>
+            <a:endParaRPr lang="en-US" sz="750" dirty="0"/>
           </a:p>
         </p:txBody>
       </p:sp>
@@ -9191,8 +9191,8 @@
         </p:nvSpPr>
         <p:spPr>
           <a:xfrm>
-            <a:off x="4919472" y="1859132"/>
-            <a:ext cx="3538728" cy="201168"/>
+            <a:off x="4818803" y="1346997"/>
+            <a:ext cx="2513489" cy="142886"/>
           </a:xfrm>
           <a:prstGeom prst="rect">
             <a:avLst/>
@@ -9208,7 +9208,7 @@
               <a:buNone/>
             </a:pPr>
             <a:r>
-              <a:rPr lang="en-US" sz="900" dirty="0">
+              <a:rPr lang="en-US" sz="640" dirty="0">
                 <a:solidFill>
                   <a:srgbClr val="5F7183"/>
                 </a:solidFill>
@@ -9218,7 +9218,7 @@
               </a:rPr>
               <a:t>CARLA Simulator（官方）　·　3:33，播 2 分鐘就夠</a:t>
             </a:r>
-            <a:endParaRPr lang="en-US" sz="900" dirty="0"/>
+            <a:endParaRPr lang="en-US" sz="640" dirty="0"/>
           </a:p>
         </p:txBody>
       </p:sp>
@@ -9232,8 +9232,8 @@
         </p:nvSpPr>
         <p:spPr>
           <a:xfrm>
-            <a:off x="4919472" y="2042012"/>
-            <a:ext cx="3538728" cy="201168"/>
+            <a:off x="4818803" y="1476893"/>
+            <a:ext cx="2513489" cy="142886"/>
           </a:xfrm>
           <a:prstGeom prst="rect">
             <a:avLst/>
@@ -9249,7 +9249,7 @@
               <a:buNone/>
             </a:pPr>
             <a:r>
-              <a:rPr lang="en-US" sz="850" u="sng" dirty="0">
+              <a:rPr lang="en-US" sz="600" u="sng" dirty="0">
                 <a:solidFill>
                   <a:srgbClr val="1F6FBF"/>
                 </a:solidFill>
@@ -9266,7 +9266,7 @@
               </a:rPr>
               <a:t>https://www.youtube.com/watch?v=AZhzZy57XeU</a:t>
             </a:r>
-            <a:endParaRPr lang="en-US" sz="850" dirty="0"/>
+            <a:endParaRPr lang="en-US" sz="600" dirty="0"/>
           </a:p>
         </p:txBody>
       </p:sp>
@@ -9278,8 +9278,8 @@
         </p:nvSpPr>
         <p:spPr>
           <a:xfrm>
-            <a:off x="4919472" y="2316332"/>
-            <a:ext cx="36576" cy="237744"/>
+            <a:off x="4818803" y="1671737"/>
+            <a:ext cx="25979" cy="168865"/>
           </a:xfrm>
           <a:prstGeom prst="rect">
             <a:avLst/>
@@ -9298,8 +9298,8 @@
         </p:nvSpPr>
         <p:spPr>
           <a:xfrm>
-            <a:off x="5047488" y="2279756"/>
-            <a:ext cx="3429000" cy="590919"/>
+            <a:off x="4909730" y="1645758"/>
+            <a:ext cx="2435551" cy="419718"/>
           </a:xfrm>
           <a:prstGeom prst="rect">
             <a:avLst/>
@@ -9318,7 +9318,7 @@
               <a:buNone/>
             </a:pPr>
             <a:r>
-              <a:rPr lang="en-US" sz="950" dirty="0">
+              <a:rPr lang="en-US" sz="670" dirty="0">
                 <a:solidFill>
                   <a:srgbClr val="1A2733"/>
                 </a:solidFill>
@@ -9328,7 +9328,7 @@
               </a:rPr>
               <a:t>Trong CARLA, thời tiết, giờ trong ngày, mật độ xe đều là tham số chỉnh được</a:t>
             </a:r>
-            <a:endParaRPr lang="en-US" sz="950" dirty="0"/>
+            <a:endParaRPr lang="en-US" sz="670" dirty="0"/>
           </a:p>
           <a:p>
             <a:pPr indent="0" marL="0">
@@ -9338,7 +9338,7 @@
               <a:buNone/>
             </a:pPr>
             <a:r>
-              <a:rPr lang="en-US" sz="900" dirty="0">
+              <a:rPr lang="en-US" sz="640" dirty="0">
                 <a:solidFill>
                   <a:srgbClr val="5F7183"/>
                 </a:solidFill>
@@ -9348,7 +9348,7 @@
               </a:rPr>
               <a:t>CARLA 裡的天氣、一天中的時間、車流密度，全部都是可以調的參數</a:t>
             </a:r>
-            <a:endParaRPr lang="en-US" sz="950" dirty="0"/>
+            <a:endParaRPr lang="en-US" sz="670" dirty="0"/>
           </a:p>
         </p:txBody>
       </p:sp>
@@ -9360,8 +9360,8 @@
         </p:nvSpPr>
         <p:spPr>
           <a:xfrm>
-            <a:off x="4919472" y="2943828"/>
-            <a:ext cx="36576" cy="237744"/>
+            <a:off x="4818803" y="2117435"/>
+            <a:ext cx="25979" cy="168865"/>
           </a:xfrm>
           <a:prstGeom prst="rect">
             <a:avLst/>
@@ -9380,8 +9380,8 @@
         </p:nvSpPr>
         <p:spPr>
           <a:xfrm>
-            <a:off x="5047488" y="2907252"/>
-            <a:ext cx="3429000" cy="313748"/>
+            <a:off x="4909730" y="2091456"/>
+            <a:ext cx="2435551" cy="222849"/>
           </a:xfrm>
           <a:prstGeom prst="rect">
             <a:avLst/>
@@ -9400,7 +9400,7 @@
               <a:buNone/>
             </a:pPr>
             <a:r>
-              <a:rPr lang="en-US" sz="950" dirty="0">
+              <a:rPr lang="en-US" sz="670" dirty="0">
                 <a:solidFill>
                   <a:srgbClr val="1A2733"/>
                 </a:solidFill>
@@ -9410,7 +9410,7 @@
               </a:rPr>
               <a:t>CARLA mô phỏng được cả ảnh camera lẫn đám điểm LiDAR</a:t>
             </a:r>
-            <a:endParaRPr lang="en-US" sz="950" dirty="0"/>
+            <a:endParaRPr lang="en-US" sz="670" dirty="0"/>
           </a:p>
           <a:p>
             <a:pPr indent="0" marL="0">
@@ -9420,7 +9420,7 @@
               <a:buNone/>
             </a:pPr>
             <a:r>
-              <a:rPr lang="en-US" sz="900" dirty="0">
+              <a:rPr lang="en-US" sz="640" dirty="0">
                 <a:solidFill>
                   <a:srgbClr val="5F7183"/>
                 </a:solidFill>
@@ -9430,7 +9430,7 @@
               </a:rPr>
               <a:t>CARLA 連相機影像和光達點雲都模擬得出來</a:t>
             </a:r>
-            <a:endParaRPr lang="en-US" sz="950" dirty="0"/>
+            <a:endParaRPr lang="en-US" sz="670" dirty="0"/>
           </a:p>
         </p:txBody>
       </p:sp>
@@ -9442,8 +9442,8 @@
         </p:nvSpPr>
         <p:spPr>
           <a:xfrm>
-            <a:off x="4919472" y="3294151"/>
-            <a:ext cx="36576" cy="237744"/>
+            <a:off x="4818803" y="2366263"/>
+            <a:ext cx="25979" cy="168865"/>
           </a:xfrm>
           <a:prstGeom prst="rect">
             <a:avLst/>
@@ -9462,8 +9462,8 @@
         </p:nvSpPr>
         <p:spPr>
           <a:xfrm>
-            <a:off x="5047488" y="3257575"/>
-            <a:ext cx="3429000" cy="456079"/>
+            <a:off x="4909730" y="2340284"/>
+            <a:ext cx="2435551" cy="323944"/>
           </a:xfrm>
           <a:prstGeom prst="rect">
             <a:avLst/>
@@ -9482,7 +9482,7 @@
               <a:buNone/>
             </a:pPr>
             <a:r>
-              <a:rPr lang="en-US" sz="950" dirty="0">
+              <a:rPr lang="en-US" sz="670" dirty="0">
                 <a:solidFill>
                   <a:srgbClr val="1A2733"/>
                 </a:solidFill>
@@ -9492,7 +9492,7 @@
               </a:rPr>
               <a:t>Câu hỏi: nó khác mô phỏng của ta ở chỗ nào? Và giống ở chỗ nào?</a:t>
             </a:r>
-            <a:endParaRPr lang="en-US" sz="950" dirty="0"/>
+            <a:endParaRPr lang="en-US" sz="670" dirty="0"/>
           </a:p>
           <a:p>
             <a:pPr indent="0" marL="0">
@@ -9502,7 +9502,7 @@
               <a:buNone/>
             </a:pPr>
             <a:r>
-              <a:rPr lang="en-US" sz="900" dirty="0">
+              <a:rPr lang="en-US" sz="640" dirty="0">
                 <a:solidFill>
                   <a:srgbClr val="5F7183"/>
                 </a:solidFill>
@@ -9512,7 +9512,7 @@
               </a:rPr>
               <a:t>問題：它跟我們的模擬器差在哪？又有哪裡是一樣的？</a:t>
             </a:r>
-            <a:endParaRPr lang="en-US" sz="950" dirty="0"/>
+            <a:endParaRPr lang="en-US" sz="670" dirty="0"/>
           </a:p>
         </p:txBody>
       </p:sp>
@@ -9524,8 +9524,8 @@
         </p:nvSpPr>
         <p:spPr>
           <a:xfrm>
-            <a:off x="502920" y="3931920"/>
-            <a:ext cx="8138160" cy="548640"/>
+            <a:off x="1681812" y="2819258"/>
+            <a:ext cx="5780375" cy="389688"/>
           </a:xfrm>
           <a:prstGeom prst="roundRect">
             <a:avLst>
@@ -9551,8 +9551,8 @@
         </p:nvSpPr>
         <p:spPr>
           <a:xfrm>
-            <a:off x="685800" y="3995928"/>
-            <a:ext cx="7772400" cy="438912"/>
+            <a:off x="1811708" y="2864721"/>
+            <a:ext cx="5520583" cy="311751"/>
           </a:xfrm>
           <a:prstGeom prst="rect">
             <a:avLst/>
@@ -9571,7 +9571,7 @@
               <a:buNone/>
             </a:pPr>
             <a:r>
-              <a:rPr lang="en-US" sz="1150" b="1" dirty="0">
+              <a:rPr lang="en-US" sz="820" b="1" dirty="0">
                 <a:solidFill>
                   <a:srgbClr val="7A4E00"/>
                 </a:solidFill>
@@ -9581,7 +9581,7 @@
               </a:rPr>
               <a:t>CARLA là mã nguồn mở, miễn phí, chạy được trên máy tính cá nhân có card đồ hoạ.</a:t>
             </a:r>
-            <a:endParaRPr lang="en-US" sz="1150" dirty="0"/>
+            <a:endParaRPr lang="en-US" sz="820" dirty="0"/>
           </a:p>
           <a:p>
             <a:pPr indent="0" marL="0">
@@ -9591,7 +9591,7 @@
               <a:buNone/>
             </a:pPr>
             <a:r>
-              <a:rPr lang="en-US" sz="1050" dirty="0">
+              <a:rPr lang="en-US" sz="750" dirty="0">
                 <a:solidFill>
                   <a:srgbClr val="7A4E00"/>
                 </a:solidFill>
@@ -9601,7 +9601,7 @@
               </a:rPr>
               <a:t>CARLA 是開源免費的，有顯示卡的個人電腦就跑得動。</a:t>
             </a:r>
-            <a:endParaRPr lang="en-US" sz="1150" dirty="0"/>
+            <a:endParaRPr lang="en-US" sz="820" dirty="0"/>
           </a:p>
         </p:txBody>
       </p:sp>
@@ -9621,8 +9621,8 @@
         </p:blipFill>
         <p:spPr>
           <a:xfrm>
-            <a:off x="7516368" y="4718304"/>
-            <a:ext cx="1097280" cy="242439"/>
+            <a:off x="6663327" y="3338842"/>
+            <a:ext cx="779376" cy="172200"/>
           </a:xfrm>
           <a:prstGeom prst="rect">
             <a:avLst/>
@@ -9637,8 +9637,8 @@
         </p:nvSpPr>
         <p:spPr>
           <a:xfrm>
-            <a:off x="109728" y="4791456"/>
-            <a:ext cx="822960" cy="256032"/>
+            <a:off x="1402536" y="3390800"/>
+            <a:ext cx="584532" cy="181855"/>
           </a:xfrm>
           <a:prstGeom prst="rect">
             <a:avLst/>
@@ -9654,7 +9654,7 @@
               <a:buNone/>
             </a:pPr>
             <a:r>
-              <a:rPr lang="en-US" sz="900" dirty="0">
+              <a:rPr lang="en-US" sz="640" dirty="0">
                 <a:solidFill>
                   <a:srgbClr val="5F7183"/>
                 </a:solidFill>
@@ -9664,7 +9664,7 @@
               </a:rPr>
               <a:t>10 / 18</a:t>
             </a:r>
-            <a:endParaRPr lang="en-US" sz="900" dirty="0"/>
+            <a:endParaRPr lang="en-US" sz="640" dirty="0"/>
           </a:p>
         </p:txBody>
       </p:sp>
@@ -9676,8 +9676,8 @@
         </p:nvSpPr>
         <p:spPr>
           <a:xfrm>
-            <a:off x="960120" y="4791456"/>
-            <a:ext cx="2011680" cy="256032"/>
+            <a:off x="2006553" y="3390800"/>
+            <a:ext cx="1428857" cy="181855"/>
           </a:xfrm>
           <a:prstGeom prst="rect">
             <a:avLst/>
@@ -9693,7 +9693,7 @@
               <a:buNone/>
             </a:pPr>
             <a:r>
-              <a:rPr lang="en-US" sz="900" dirty="0">
+              <a:rPr lang="en-US" sz="640" dirty="0">
                 <a:solidFill>
                   <a:srgbClr val="5F7183"/>
                 </a:solidFill>
@@ -9703,7 +9703,7 @@
               </a:rPr>
               <a:t>Tiết 1 · 第 1 節</a:t>
             </a:r>
-            <a:endParaRPr lang="en-US" sz="900" dirty="0"/>
+            <a:endParaRPr lang="en-US" sz="640" dirty="0"/>
           </a:p>
         </p:txBody>
       </p:sp>
@@ -9747,8 +9747,8 @@
         </p:nvSpPr>
         <p:spPr>
           <a:xfrm>
-            <a:off x="6766560" y="-1371600"/>
-            <a:ext cx="4206240" cy="4206240"/>
+            <a:off x="6130753" y="-947729"/>
+            <a:ext cx="2987610" cy="2987610"/>
           </a:xfrm>
           <a:prstGeom prst="ellipse">
             <a:avLst/>
@@ -9772,8 +9772,8 @@
         </p:nvSpPr>
         <p:spPr>
           <a:xfrm>
-            <a:off x="7863840" y="3108960"/>
-            <a:ext cx="2560320" cy="2560320"/>
+            <a:off x="7104973" y="1520297"/>
+            <a:ext cx="1688649" cy="1688649"/>
           </a:xfrm>
           <a:prstGeom prst="ellipse">
             <a:avLst/>
@@ -9794,8 +9794,8 @@
         </p:nvSpPr>
         <p:spPr>
           <a:xfrm>
-            <a:off x="502920" y="1691640"/>
-            <a:ext cx="4572000" cy="310896"/>
+            <a:off x="1681812" y="1228031"/>
+            <a:ext cx="3247402" cy="220823"/>
           </a:xfrm>
           <a:prstGeom prst="rect">
             <a:avLst/>
@@ -9810,7 +9810,7 @@
             <a:pPr indent="0" marL="0">
               <a:buNone/>
             </a:pPr>
-            <a:endParaRPr lang="en-US" sz="1350" dirty="0"/>
+            <a:endParaRPr lang="en-US" sz="960" dirty="0"/>
           </a:p>
         </p:txBody>
       </p:sp>
@@ -9822,8 +9822,8 @@
         </p:nvSpPr>
         <p:spPr>
           <a:xfrm>
-            <a:off x="502920" y="2048256"/>
-            <a:ext cx="7315200" cy="1188720"/>
+            <a:off x="1681812" y="1481328"/>
+            <a:ext cx="5195843" cy="844324"/>
           </a:xfrm>
           <a:prstGeom prst="rect">
             <a:avLst/>
@@ -9842,7 +9842,7 @@
               <a:buNone/>
             </a:pPr>
             <a:r>
-              <a:rPr lang="en-US" sz="2900" b="1" dirty="0">
+              <a:rPr lang="en-US" sz="2060" b="1" dirty="0">
                 <a:solidFill>
                   <a:srgbClr val="FFFFFF"/>
                 </a:solidFill>
@@ -9852,7 +9852,7 @@
               </a:rPr>
               <a:t>Vì sao chạy tốt trong mô phỏng vẫn chưa đủ</a:t>
             </a:r>
-            <a:endParaRPr lang="en-US" sz="2900" dirty="0"/>
+            <a:endParaRPr lang="en-US" sz="2060" dirty="0"/>
           </a:p>
           <a:p>
             <a:pPr indent="0" marL="0">
@@ -9862,7 +9862,7 @@
               <a:buNone/>
             </a:pPr>
             <a:r>
-              <a:rPr lang="en-US" sz="1700" dirty="0">
+              <a:rPr lang="en-US" sz="1210" dirty="0">
                 <a:solidFill>
                   <a:srgbClr val="AFC3D4"/>
                 </a:solidFill>
@@ -9872,7 +9872,7 @@
               </a:rPr>
               <a:t>為什麼在模擬裡跑得好還不夠</a:t>
             </a:r>
-            <a:endParaRPr lang="en-US" sz="2900" dirty="0"/>
+            <a:endParaRPr lang="en-US" sz="2060" dirty="0"/>
           </a:p>
         </p:txBody>
       </p:sp>
@@ -9884,8 +9884,8 @@
         </p:nvSpPr>
         <p:spPr>
           <a:xfrm>
-            <a:off x="109728" y="4791456"/>
-            <a:ext cx="822960" cy="256032"/>
+            <a:off x="1402536" y="3390800"/>
+            <a:ext cx="584532" cy="181855"/>
           </a:xfrm>
           <a:prstGeom prst="rect">
             <a:avLst/>
@@ -9901,7 +9901,7 @@
               <a:buNone/>
             </a:pPr>
             <a:r>
-              <a:rPr lang="en-US" sz="900" dirty="0">
+              <a:rPr lang="en-US" sz="640" dirty="0">
                 <a:solidFill>
                   <a:srgbClr val="9FB3C8"/>
                 </a:solidFill>
@@ -9911,7 +9911,7 @@
               </a:rPr>
               <a:t>11 / 18</a:t>
             </a:r>
-            <a:endParaRPr lang="en-US" sz="900" dirty="0"/>
+            <a:endParaRPr lang="en-US" sz="640" dirty="0"/>
           </a:p>
         </p:txBody>
       </p:sp>
@@ -9923,8 +9923,8 @@
         </p:nvSpPr>
         <p:spPr>
           <a:xfrm>
-            <a:off x="960120" y="4791456"/>
-            <a:ext cx="2011680" cy="256032"/>
+            <a:off x="2006553" y="3390800"/>
+            <a:ext cx="1428857" cy="181855"/>
           </a:xfrm>
           <a:prstGeom prst="rect">
             <a:avLst/>
@@ -9940,7 +9940,7 @@
               <a:buNone/>
             </a:pPr>
             <a:r>
-              <a:rPr lang="en-US" sz="900" dirty="0">
+              <a:rPr lang="en-US" sz="640" dirty="0">
                 <a:solidFill>
                   <a:srgbClr val="9FB3C8"/>
                 </a:solidFill>
@@ -9950,7 +9950,7 @@
               </a:rPr>
               <a:t>Tiết 1 · 第 1 節</a:t>
             </a:r>
-            <a:endParaRPr lang="en-US" sz="900" dirty="0"/>
+            <a:endParaRPr lang="en-US" sz="640" dirty="0"/>
           </a:p>
         </p:txBody>
       </p:sp>
@@ -9987,8 +9987,8 @@
         </p:nvSpPr>
         <p:spPr>
           <a:xfrm>
-            <a:off x="502920" y="420624"/>
-            <a:ext cx="8138160" cy="274320"/>
+            <a:off x="1681812" y="325253"/>
+            <a:ext cx="5780375" cy="194844"/>
           </a:xfrm>
           <a:prstGeom prst="rect">
             <a:avLst/>
@@ -10004,7 +10004,7 @@
               <a:buNone/>
             </a:pPr>
             <a:r>
-              <a:rPr lang="en-US" sz="1250" b="1" dirty="0">
+              <a:rPr lang="en-US" sz="890" b="1" dirty="0">
                 <a:solidFill>
                   <a:srgbClr val="007F72"/>
                 </a:solidFill>
@@ -10014,7 +10014,7 @@
               </a:rPr>
               <a:t>Khoảng cách 1 / 3 · 落差之一</a:t>
             </a:r>
-            <a:endParaRPr lang="en-US" sz="1250" dirty="0"/>
+            <a:endParaRPr lang="en-US" sz="890" dirty="0"/>
           </a:p>
         </p:txBody>
       </p:sp>
@@ -10026,8 +10026,8 @@
         </p:nvSpPr>
         <p:spPr>
           <a:xfrm>
-            <a:off x="502920" y="1101852"/>
-            <a:ext cx="2468880" cy="2514600"/>
+            <a:off x="1681812" y="809116"/>
+            <a:ext cx="1753597" cy="1786071"/>
           </a:xfrm>
           <a:prstGeom prst="roundRect">
             <a:avLst>
@@ -10053,8 +10053,8 @@
         </p:nvSpPr>
         <p:spPr>
           <a:xfrm>
-            <a:off x="1113739" y="2047342"/>
-            <a:ext cx="1247242" cy="708660"/>
+            <a:off x="2115665" y="1480679"/>
+            <a:ext cx="885891" cy="503347"/>
           </a:xfrm>
           <a:prstGeom prst="roundRect">
             <a:avLst>
@@ -10075,8 +10075,8 @@
         </p:nvSpPr>
         <p:spPr>
           <a:xfrm>
-            <a:off x="1397203" y="1905610"/>
-            <a:ext cx="368503" cy="170078"/>
+            <a:off x="2317004" y="1380009"/>
+            <a:ext cx="261741" cy="120803"/>
           </a:xfrm>
           <a:prstGeom prst="roundRect">
             <a:avLst>
@@ -10097,8 +10097,8 @@
         </p:nvSpPr>
         <p:spPr>
           <a:xfrm>
-            <a:off x="1510589" y="2160727"/>
-            <a:ext cx="453542" cy="453542"/>
+            <a:off x="2397540" y="1561214"/>
+            <a:ext cx="322142" cy="322142"/>
           </a:xfrm>
           <a:prstGeom prst="ellipse">
             <a:avLst/>
@@ -10117,8 +10117,8 @@
         </p:nvSpPr>
         <p:spPr>
           <a:xfrm>
-            <a:off x="1609801" y="2259940"/>
-            <a:ext cx="255118" cy="255118"/>
+            <a:off x="2468008" y="1631683"/>
+            <a:ext cx="181205" cy="181205"/>
           </a:xfrm>
           <a:prstGeom prst="ellipse">
             <a:avLst/>
@@ -10139,8 +10139,8 @@
         </p:nvSpPr>
         <p:spPr>
           <a:xfrm>
-            <a:off x="2077517" y="2132381"/>
-            <a:ext cx="141732" cy="141732"/>
+            <a:off x="2800218" y="1541080"/>
+            <a:ext cx="100669" cy="100669"/>
           </a:xfrm>
           <a:prstGeom prst="ellipse">
             <a:avLst/>
@@ -10161,8 +10161,8 @@
         </p:nvSpPr>
         <p:spPr>
           <a:xfrm>
-            <a:off x="3429000" y="1143789"/>
-            <a:ext cx="5212080" cy="1356044"/>
+            <a:off x="3760150" y="838903"/>
+            <a:ext cx="3702038" cy="963171"/>
           </a:xfrm>
           <a:prstGeom prst="rect">
             <a:avLst/>
@@ -10181,7 +10181,7 @@
               <a:buNone/>
             </a:pPr>
             <a:r>
-              <a:rPr lang="en-US" sz="2300" b="1" dirty="0">
+              <a:rPr lang="en-US" sz="1630" b="1" dirty="0">
                 <a:solidFill>
                   <a:srgbClr val="0B1F3A"/>
                 </a:solidFill>
@@ -10191,7 +10191,7 @@
               </a:rPr>
               <a:t>Khoảng cách về hình ảnh: ảnh mô phỏng vẽ ra không giống ảnh camera thật chụp</a:t>
             </a:r>
-            <a:endParaRPr lang="en-US" sz="2300" dirty="0"/>
+            <a:endParaRPr lang="en-US" sz="1630" dirty="0"/>
           </a:p>
           <a:p>
             <a:pPr indent="0" marL="0">
@@ -10201,7 +10201,7 @@
               <a:buNone/>
             </a:pPr>
             <a:r>
-              <a:rPr lang="en-US" sz="1400" dirty="0">
+              <a:rPr lang="en-US" sz="990" dirty="0">
                 <a:solidFill>
                   <a:srgbClr val="007F72"/>
                 </a:solidFill>
@@ -10211,7 +10211,7 @@
               </a:rPr>
               <a:t>外觀落差：模擬畫出來的影像，跟真相機拍到的不一樣</a:t>
             </a:r>
-            <a:endParaRPr lang="en-US" sz="2300" dirty="0"/>
+            <a:endParaRPr lang="en-US" sz="1630" dirty="0"/>
           </a:p>
         </p:txBody>
       </p:sp>
@@ -10223,8 +10223,8 @@
         </p:nvSpPr>
         <p:spPr>
           <a:xfrm>
-            <a:off x="3429000" y="2591273"/>
-            <a:ext cx="5212080" cy="1074682"/>
+            <a:off x="3760150" y="1867022"/>
+            <a:ext cx="3702038" cy="763326"/>
           </a:xfrm>
           <a:prstGeom prst="rect">
             <a:avLst/>
@@ -10243,7 +10243,7 @@
               <a:buNone/>
             </a:pPr>
             <a:r>
-              <a:rPr lang="en-US" sz="1250" dirty="0">
+              <a:rPr lang="en-US" sz="890" dirty="0">
                 <a:solidFill>
                   <a:srgbClr val="5F7183"/>
                 </a:solidFill>
@@ -10253,7 +10253,7 @@
               </a:rPr>
               <a:t>Ánh sáng, chất liệu bề mặt, nhiễu của cảm biến — cả ba đều khác. Một bộ nhận dạng huấn luyện trên ảnh mô phỏng, đem sang xe thật thì độ chính xác tụt xuống.</a:t>
             </a:r>
-            <a:endParaRPr lang="en-US" sz="1250" dirty="0"/>
+            <a:endParaRPr lang="en-US" sz="890" dirty="0"/>
           </a:p>
           <a:p>
             <a:pPr indent="0" marL="0">
@@ -10263,7 +10263,7 @@
               <a:buNone/>
             </a:pPr>
             <a:r>
-              <a:rPr lang="en-US" sz="1150" dirty="0">
+              <a:rPr lang="en-US" sz="820" dirty="0">
                 <a:solidFill>
                   <a:srgbClr val="5F7183"/>
                 </a:solidFill>
@@ -10273,7 +10273,7 @@
               </a:rPr>
               <a:t>光線、材質表面、感測器的雜訊——三個都不一樣。拿模擬影像訓練出來的偵測器，搬到真車上精度會掉。</a:t>
             </a:r>
-            <a:endParaRPr lang="en-US" sz="1250" dirty="0"/>
+            <a:endParaRPr lang="en-US" sz="890" dirty="0"/>
           </a:p>
         </p:txBody>
       </p:sp>
@@ -10285,8 +10285,8 @@
         </p:nvSpPr>
         <p:spPr>
           <a:xfrm>
-            <a:off x="502920" y="3913632"/>
-            <a:ext cx="8138160" cy="621792"/>
+            <a:off x="1681812" y="2806268"/>
+            <a:ext cx="5780375" cy="441647"/>
           </a:xfrm>
           <a:prstGeom prst="roundRect">
             <a:avLst>
@@ -10312,8 +10312,8 @@
         </p:nvSpPr>
         <p:spPr>
           <a:xfrm>
-            <a:off x="685800" y="3986784"/>
-            <a:ext cx="7772400" cy="493776"/>
+            <a:off x="1811708" y="2858226"/>
+            <a:ext cx="5520583" cy="350719"/>
           </a:xfrm>
           <a:prstGeom prst="rect">
             <a:avLst/>
@@ -10332,7 +10332,7 @@
               <a:buNone/>
             </a:pPr>
             <a:r>
-              <a:rPr lang="en-US" sz="1250" b="1" dirty="0">
+              <a:rPr lang="en-US" sz="890" b="1" dirty="0">
                 <a:solidFill>
                   <a:srgbClr val="7A4E00"/>
                 </a:solidFill>
@@ -10342,7 +10342,7 @@
               </a:rPr>
               <a:t>Cách chữa: domain randomization — đổi loạn ánh sáng, chất liệu trong mô phỏng.</a:t>
             </a:r>
-            <a:endParaRPr lang="en-US" sz="1250" dirty="0"/>
+            <a:endParaRPr lang="en-US" sz="890" dirty="0"/>
           </a:p>
           <a:p>
             <a:pPr indent="0" marL="0">
@@ -10352,7 +10352,7 @@
               <a:buNone/>
             </a:pPr>
             <a:r>
-              <a:rPr lang="en-US" sz="1150" dirty="0">
+              <a:rPr lang="en-US" sz="820" dirty="0">
                 <a:solidFill>
                   <a:srgbClr val="7A4E00"/>
                 </a:solidFill>
@@ -10362,7 +10362,7 @@
               </a:rPr>
               <a:t>解法叫「域隨機化」：在模擬裡故意把光線和材質亂改。</a:t>
             </a:r>
-            <a:endParaRPr lang="en-US" sz="1250" dirty="0"/>
+            <a:endParaRPr lang="en-US" sz="890" dirty="0"/>
           </a:p>
         </p:txBody>
       </p:sp>
@@ -10382,8 +10382,8 @@
         </p:blipFill>
         <p:spPr>
           <a:xfrm>
-            <a:off x="7516368" y="4718304"/>
-            <a:ext cx="1097280" cy="242439"/>
+            <a:off x="6663327" y="3338842"/>
+            <a:ext cx="779376" cy="172200"/>
           </a:xfrm>
           <a:prstGeom prst="rect">
             <a:avLst/>
@@ -10398,8 +10398,8 @@
         </p:nvSpPr>
         <p:spPr>
           <a:xfrm>
-            <a:off x="109728" y="4791456"/>
-            <a:ext cx="822960" cy="256032"/>
+            <a:off x="1402536" y="3390800"/>
+            <a:ext cx="584532" cy="181855"/>
           </a:xfrm>
           <a:prstGeom prst="rect">
             <a:avLst/>
@@ -10415,7 +10415,7 @@
               <a:buNone/>
             </a:pPr>
             <a:r>
-              <a:rPr lang="en-US" sz="900" dirty="0">
+              <a:rPr lang="en-US" sz="640" dirty="0">
                 <a:solidFill>
                   <a:srgbClr val="5F7183"/>
                 </a:solidFill>
@@ -10425,7 +10425,7 @@
               </a:rPr>
               <a:t>12 / 18</a:t>
             </a:r>
-            <a:endParaRPr lang="en-US" sz="900" dirty="0"/>
+            <a:endParaRPr lang="en-US" sz="640" dirty="0"/>
           </a:p>
         </p:txBody>
       </p:sp>
@@ -10437,8 +10437,8 @@
         </p:nvSpPr>
         <p:spPr>
           <a:xfrm>
-            <a:off x="960120" y="4791456"/>
-            <a:ext cx="2011680" cy="256032"/>
+            <a:off x="2006553" y="3390800"/>
+            <a:ext cx="1428857" cy="181855"/>
           </a:xfrm>
           <a:prstGeom prst="rect">
             <a:avLst/>
@@ -10454,7 +10454,7 @@
               <a:buNone/>
             </a:pPr>
             <a:r>
-              <a:rPr lang="en-US" sz="900" dirty="0">
+              <a:rPr lang="en-US" sz="640" dirty="0">
                 <a:solidFill>
                   <a:srgbClr val="5F7183"/>
                 </a:solidFill>
@@ -10464,7 +10464,7 @@
               </a:rPr>
               <a:t>Tiết 1 · 第 1 節</a:t>
             </a:r>
-            <a:endParaRPr lang="en-US" sz="900" dirty="0"/>
+            <a:endParaRPr lang="en-US" sz="640" dirty="0"/>
           </a:p>
         </p:txBody>
       </p:sp>
@@ -10501,8 +10501,8 @@
         </p:nvSpPr>
         <p:spPr>
           <a:xfrm>
-            <a:off x="502920" y="420624"/>
-            <a:ext cx="8138160" cy="274320"/>
+            <a:off x="1681812" y="325253"/>
+            <a:ext cx="5780375" cy="194844"/>
           </a:xfrm>
           <a:prstGeom prst="rect">
             <a:avLst/>
@@ -10518,7 +10518,7 @@
               <a:buNone/>
             </a:pPr>
             <a:r>
-              <a:rPr lang="en-US" sz="1250" b="1" dirty="0">
+              <a:rPr lang="en-US" sz="890" b="1" dirty="0">
                 <a:solidFill>
                   <a:srgbClr val="007F72"/>
                 </a:solidFill>
@@ -10528,7 +10528,7 @@
               </a:rPr>
               <a:t>Khoảng cách 2 / 3 · 落差之二</a:t>
             </a:r>
-            <a:endParaRPr lang="en-US" sz="1250" dirty="0"/>
+            <a:endParaRPr lang="en-US" sz="890" dirty="0"/>
           </a:p>
         </p:txBody>
       </p:sp>
@@ -10540,8 +10540,8 @@
         </p:nvSpPr>
         <p:spPr>
           <a:xfrm>
-            <a:off x="502920" y="1101852"/>
-            <a:ext cx="2468880" cy="2514600"/>
+            <a:off x="1681812" y="809116"/>
+            <a:ext cx="1753597" cy="1786071"/>
           </a:xfrm>
           <a:prstGeom prst="roundRect">
             <a:avLst>
@@ -10567,8 +10567,8 @@
         </p:nvSpPr>
         <p:spPr>
           <a:xfrm>
-            <a:off x="896478" y="2003633"/>
-            <a:ext cx="1681764" cy="0"/>
+            <a:off x="1961349" y="1449633"/>
+            <a:ext cx="1194524" cy="0"/>
           </a:xfrm>
           <a:prstGeom prst="line">
             <a:avLst/>
@@ -10590,8 +10590,8 @@
         </p:nvSpPr>
         <p:spPr>
           <a:xfrm>
-            <a:off x="896478" y="2270272"/>
-            <a:ext cx="1681764" cy="0"/>
+            <a:off x="1961349" y="1639022"/>
+            <a:ext cx="1194524" cy="0"/>
           </a:xfrm>
           <a:prstGeom prst="line">
             <a:avLst/>
@@ -10613,8 +10613,8 @@
         </p:nvSpPr>
         <p:spPr>
           <a:xfrm>
-            <a:off x="896478" y="2136953"/>
-            <a:ext cx="1548994" cy="0"/>
+            <a:off x="1961349" y="1544328"/>
+            <a:ext cx="1100220" cy="0"/>
           </a:xfrm>
           <a:prstGeom prst="line">
             <a:avLst/>
@@ -10637,8 +10637,8 @@
         </p:nvSpPr>
         <p:spPr>
           <a:xfrm>
-            <a:off x="896478" y="2847990"/>
-            <a:ext cx="1681764" cy="0"/>
+            <a:off x="1961349" y="2049364"/>
+            <a:ext cx="1194524" cy="0"/>
           </a:xfrm>
           <a:prstGeom prst="line">
             <a:avLst/>
@@ -10660,8 +10660,8 @@
         </p:nvSpPr>
         <p:spPr>
           <a:xfrm>
-            <a:off x="896478" y="3114629"/>
-            <a:ext cx="1681764" cy="0"/>
+            <a:off x="1961349" y="2238752"/>
+            <a:ext cx="1194524" cy="0"/>
           </a:xfrm>
           <a:prstGeom prst="line">
             <a:avLst/>
@@ -10683,8 +10683,8 @@
         </p:nvSpPr>
         <p:spPr>
           <a:xfrm flipV="1">
-            <a:off x="896478" y="2892430"/>
-            <a:ext cx="420441" cy="177759"/>
+            <a:off x="1961349" y="2080928"/>
+            <a:ext cx="298631" cy="126259"/>
           </a:xfrm>
           <a:prstGeom prst="line">
             <a:avLst/>
@@ -10706,8 +10706,8 @@
         </p:nvSpPr>
         <p:spPr>
           <a:xfrm>
-            <a:off x="1316919" y="2892430"/>
-            <a:ext cx="420441" cy="199979"/>
+            <a:off x="2259980" y="2080928"/>
+            <a:ext cx="298631" cy="142041"/>
           </a:xfrm>
           <a:prstGeom prst="line">
             <a:avLst/>
@@ -10729,8 +10729,8 @@
         </p:nvSpPr>
         <p:spPr>
           <a:xfrm flipV="1">
-            <a:off x="1737360" y="2803550"/>
-            <a:ext cx="420441" cy="288859"/>
+            <a:off x="2558611" y="2017799"/>
+            <a:ext cx="298631" cy="205171"/>
           </a:xfrm>
           <a:prstGeom prst="line">
             <a:avLst/>
@@ -10752,8 +10752,8 @@
         </p:nvSpPr>
         <p:spPr>
           <a:xfrm>
-            <a:off x="2157801" y="2803550"/>
-            <a:ext cx="287670" cy="177759"/>
+            <a:off x="2857242" y="2017799"/>
+            <a:ext cx="204327" cy="126259"/>
           </a:xfrm>
           <a:prstGeom prst="line">
             <a:avLst/>
@@ -10776,8 +10776,8 @@
         </p:nvSpPr>
         <p:spPr>
           <a:xfrm>
-            <a:off x="3429000" y="1143789"/>
-            <a:ext cx="5212080" cy="1356044"/>
+            <a:off x="3760150" y="838903"/>
+            <a:ext cx="3702038" cy="963171"/>
           </a:xfrm>
           <a:prstGeom prst="rect">
             <a:avLst/>
@@ -10796,7 +10796,7 @@
               <a:buNone/>
             </a:pPr>
             <a:r>
-              <a:rPr lang="en-US" sz="2300" b="1" dirty="0">
+              <a:rPr lang="en-US" sz="1630" b="1" dirty="0">
                 <a:solidFill>
                   <a:srgbClr val="0B1F3A"/>
                 </a:solidFill>
@@ -10806,7 +10806,7 @@
               </a:rPr>
               <a:t>Khoảng cách về hành vi: trong mô phỏng ai cũng đi đúng luật, ngoài đường thì không</a:t>
             </a:r>
-            <a:endParaRPr lang="en-US" sz="2300" dirty="0"/>
+            <a:endParaRPr lang="en-US" sz="1630" dirty="0"/>
           </a:p>
           <a:p>
             <a:pPr indent="0" marL="0">
@@ -10816,7 +10816,7 @@
               <a:buNone/>
             </a:pPr>
             <a:r>
-              <a:rPr lang="en-US" sz="1400" dirty="0">
+              <a:rPr lang="en-US" sz="990" dirty="0">
                 <a:solidFill>
                   <a:srgbClr val="007F72"/>
                 </a:solidFill>
@@ -10826,7 +10826,7 @@
               </a:rPr>
               <a:t>行為落差：模擬裡的車都照規則走，真實世界的人不照規則走</a:t>
             </a:r>
-            <a:endParaRPr lang="en-US" sz="2300" dirty="0"/>
+            <a:endParaRPr lang="en-US" sz="1630" dirty="0"/>
           </a:p>
         </p:txBody>
       </p:sp>
@@ -10838,8 +10838,8 @@
         </p:nvSpPr>
         <p:spPr>
           <a:xfrm>
-            <a:off x="3429000" y="2591273"/>
-            <a:ext cx="5212080" cy="1074682"/>
+            <a:off x="3760150" y="1867022"/>
+            <a:ext cx="3702038" cy="763326"/>
           </a:xfrm>
           <a:prstGeom prst="rect">
             <a:avLst/>
@@ -10858,7 +10858,7 @@
               <a:buNone/>
             </a:pPr>
             <a:r>
-              <a:rPr lang="en-US" sz="1250" dirty="0">
+              <a:rPr lang="en-US" sz="890" dirty="0">
                 <a:solidFill>
                   <a:srgbClr val="5F7183"/>
                 </a:solidFill>
@@ -10868,7 +10868,7 @@
               </a:rPr>
               <a:t>Xe trong mô phỏng giữ làn, giữ khoảng cách, bật xi-nhan rồi mới chuyển làn. Một chiếc xe tự lái hoàn hảo trong mô phỏng, gặp dòng xe máy thật ở Hà Nội có thể hỏng hoàn toàn.</a:t>
             </a:r>
-            <a:endParaRPr lang="en-US" sz="1250" dirty="0"/>
+            <a:endParaRPr lang="en-US" sz="890" dirty="0"/>
           </a:p>
           <a:p>
             <a:pPr indent="0" marL="0">
@@ -10878,7 +10878,7 @@
               <a:buNone/>
             </a:pPr>
             <a:r>
-              <a:rPr lang="en-US" sz="1150" dirty="0">
+              <a:rPr lang="en-US" sz="820" dirty="0">
                 <a:solidFill>
                   <a:srgbClr val="5F7183"/>
                 </a:solidFill>
@@ -10888,7 +10888,7 @@
               </a:rPr>
               <a:t>模擬裡的車乖乖待在車道、保持距離、打了方向燈才變換車道。在模擬裡完美的自駕車，遇到真的河內機車流，可能完全失效。</a:t>
             </a:r>
-            <a:endParaRPr lang="en-US" sz="1250" dirty="0"/>
+            <a:endParaRPr lang="en-US" sz="890" dirty="0"/>
           </a:p>
         </p:txBody>
       </p:sp>
@@ -10900,8 +10900,8 @@
         </p:nvSpPr>
         <p:spPr>
           <a:xfrm>
-            <a:off x="502920" y="3913632"/>
-            <a:ext cx="8138160" cy="621792"/>
+            <a:off x="1681812" y="2806268"/>
+            <a:ext cx="5780375" cy="441647"/>
           </a:xfrm>
           <a:prstGeom prst="roundRect">
             <a:avLst>
@@ -10927,8 +10927,8 @@
         </p:nvSpPr>
         <p:spPr>
           <a:xfrm>
-            <a:off x="685800" y="3986784"/>
-            <a:ext cx="7772400" cy="493776"/>
+            <a:off x="1811708" y="2858226"/>
+            <a:ext cx="5520583" cy="350719"/>
           </a:xfrm>
           <a:prstGeom prst="rect">
             <a:avLst/>
@@ -10947,7 +10947,7 @@
               <a:buNone/>
             </a:pPr>
             <a:r>
-              <a:rPr lang="en-US" sz="1250" b="1" dirty="0">
+              <a:rPr lang="en-US" sz="890" b="1" dirty="0">
                 <a:solidFill>
                   <a:srgbClr val="7A4E00"/>
                 </a:solidFill>
@@ -10957,7 +10957,7 @@
               </a:rPr>
               <a:t>Cách chữa: ghi lại quỹ đạo thật ngoài đường rồi phát lại vào trong mô phỏng.</a:t>
             </a:r>
-            <a:endParaRPr lang="en-US" sz="1250" dirty="0"/>
+            <a:endParaRPr lang="en-US" sz="890" dirty="0"/>
           </a:p>
           <a:p>
             <a:pPr indent="0" marL="0">
@@ -10967,7 +10967,7 @@
               <a:buNone/>
             </a:pPr>
             <a:r>
-              <a:rPr lang="en-US" sz="1150" dirty="0">
+              <a:rPr lang="en-US" sz="820" dirty="0">
                 <a:solidFill>
                   <a:srgbClr val="7A4E00"/>
                 </a:solidFill>
@@ -10977,7 +10977,7 @@
               </a:rPr>
               <a:t>解法：把實際道路上錄到的軌跡，回放進模擬裡。</a:t>
             </a:r>
-            <a:endParaRPr lang="en-US" sz="1250" dirty="0"/>
+            <a:endParaRPr lang="en-US" sz="890" dirty="0"/>
           </a:p>
         </p:txBody>
       </p:sp>
@@ -10997,8 +10997,8 @@
         </p:blipFill>
         <p:spPr>
           <a:xfrm>
-            <a:off x="7516368" y="4718304"/>
-            <a:ext cx="1097280" cy="242439"/>
+            <a:off x="6663327" y="3338842"/>
+            <a:ext cx="779376" cy="172200"/>
           </a:xfrm>
           <a:prstGeom prst="rect">
             <a:avLst/>
@@ -11013,8 +11013,8 @@
         </p:nvSpPr>
         <p:spPr>
           <a:xfrm>
-            <a:off x="109728" y="4791456"/>
-            <a:ext cx="822960" cy="256032"/>
+            <a:off x="1402536" y="3390800"/>
+            <a:ext cx="584532" cy="181855"/>
           </a:xfrm>
           <a:prstGeom prst="rect">
             <a:avLst/>
@@ -11030,7 +11030,7 @@
               <a:buNone/>
             </a:pPr>
             <a:r>
-              <a:rPr lang="en-US" sz="900" dirty="0">
+              <a:rPr lang="en-US" sz="640" dirty="0">
                 <a:solidFill>
                   <a:srgbClr val="5F7183"/>
                 </a:solidFill>
@@ -11040,7 +11040,7 @@
               </a:rPr>
               <a:t>13 / 18</a:t>
             </a:r>
-            <a:endParaRPr lang="en-US" sz="900" dirty="0"/>
+            <a:endParaRPr lang="en-US" sz="640" dirty="0"/>
           </a:p>
         </p:txBody>
       </p:sp>
@@ -11052,8 +11052,8 @@
         </p:nvSpPr>
         <p:spPr>
           <a:xfrm>
-            <a:off x="960120" y="4791456"/>
-            <a:ext cx="2011680" cy="256032"/>
+            <a:off x="2006553" y="3390800"/>
+            <a:ext cx="1428857" cy="181855"/>
           </a:xfrm>
           <a:prstGeom prst="rect">
             <a:avLst/>
@@ -11069,7 +11069,7 @@
               <a:buNone/>
             </a:pPr>
             <a:r>
-              <a:rPr lang="en-US" sz="900" dirty="0">
+              <a:rPr lang="en-US" sz="640" dirty="0">
                 <a:solidFill>
                   <a:srgbClr val="5F7183"/>
                 </a:solidFill>
@@ -11079,7 +11079,7 @@
               </a:rPr>
               <a:t>Tiết 1 · 第 1 節</a:t>
             </a:r>
-            <a:endParaRPr lang="en-US" sz="900" dirty="0"/>
+            <a:endParaRPr lang="en-US" sz="640" dirty="0"/>
           </a:p>
         </p:txBody>
       </p:sp>
@@ -11116,8 +11116,8 @@
         </p:nvSpPr>
         <p:spPr>
           <a:xfrm>
-            <a:off x="502920" y="420624"/>
-            <a:ext cx="8138160" cy="274320"/>
+            <a:off x="1681812" y="325253"/>
+            <a:ext cx="5780375" cy="194844"/>
           </a:xfrm>
           <a:prstGeom prst="rect">
             <a:avLst/>
@@ -11133,7 +11133,7 @@
               <a:buNone/>
             </a:pPr>
             <a:r>
-              <a:rPr lang="en-US" sz="1250" b="1" dirty="0">
+              <a:rPr lang="en-US" sz="890" b="1" dirty="0">
                 <a:solidFill>
                   <a:srgbClr val="007F72"/>
                 </a:solidFill>
@@ -11143,7 +11143,7 @@
               </a:rPr>
               <a:t>Khoảng cách 3 / 3 · 落差之三</a:t>
             </a:r>
-            <a:endParaRPr lang="en-US" sz="1250" dirty="0"/>
+            <a:endParaRPr lang="en-US" sz="890" dirty="0"/>
           </a:p>
         </p:txBody>
       </p:sp>
@@ -11155,8 +11155,8 @@
         </p:nvSpPr>
         <p:spPr>
           <a:xfrm>
-            <a:off x="502920" y="1101852"/>
-            <a:ext cx="2468880" cy="2514600"/>
+            <a:off x="1681812" y="809116"/>
+            <a:ext cx="1753597" cy="1786071"/>
           </a:xfrm>
           <a:prstGeom prst="roundRect">
             <a:avLst>
@@ -11182,12 +11182,12 @@
         </p:nvSpPr>
         <p:spPr>
           <a:xfrm>
-            <a:off x="1085393" y="2274113"/>
-            <a:ext cx="1303934" cy="396850"/>
+            <a:off x="2095531" y="1641750"/>
+            <a:ext cx="926159" cy="281874"/>
           </a:xfrm>
           <a:prstGeom prst="roundRect">
             <a:avLst>
-              <a:gd name="adj" fmla="val 69124"/>
+              <a:gd name="adj" fmla="val 69125"/>
             </a:avLst>
           </a:prstGeom>
           <a:solidFill>
@@ -11204,8 +11204,8 @@
         </p:nvSpPr>
         <p:spPr>
           <a:xfrm>
-            <a:off x="1368857" y="1990649"/>
-            <a:ext cx="708660" cy="311810"/>
+            <a:off x="2296870" y="1440411"/>
+            <a:ext cx="503347" cy="221473"/>
           </a:xfrm>
           <a:prstGeom prst="trapezoid">
             <a:avLst/>
@@ -11226,8 +11226,8 @@
         </p:nvSpPr>
         <p:spPr>
           <a:xfrm>
-            <a:off x="1255471" y="2585923"/>
-            <a:ext cx="283464" cy="283464"/>
+            <a:off x="2216335" y="1863222"/>
+            <a:ext cx="201339" cy="201339"/>
           </a:xfrm>
           <a:prstGeom prst="ellipse">
             <a:avLst/>
@@ -11246,8 +11246,8 @@
         </p:nvSpPr>
         <p:spPr>
           <a:xfrm>
-            <a:off x="1935785" y="2585923"/>
-            <a:ext cx="283464" cy="283464"/>
+            <a:off x="2699548" y="1863222"/>
+            <a:ext cx="201339" cy="201339"/>
           </a:xfrm>
           <a:prstGeom prst="ellipse">
             <a:avLst/>
@@ -11266,8 +11266,8 @@
         </p:nvSpPr>
         <p:spPr>
           <a:xfrm>
-            <a:off x="1326337" y="2656789"/>
-            <a:ext cx="141732" cy="141732"/>
+            <a:off x="2266669" y="1913557"/>
+            <a:ext cx="100669" cy="100669"/>
           </a:xfrm>
           <a:prstGeom prst="ellipse">
             <a:avLst/>
@@ -11286,8 +11286,8 @@
         </p:nvSpPr>
         <p:spPr>
           <a:xfrm>
-            <a:off x="2006651" y="2656789"/>
-            <a:ext cx="141732" cy="141732"/>
+            <a:off x="2749883" y="1913557"/>
+            <a:ext cx="100669" cy="100669"/>
           </a:xfrm>
           <a:prstGeom prst="ellipse">
             <a:avLst/>
@@ -11306,8 +11306,8 @@
         </p:nvSpPr>
         <p:spPr>
           <a:xfrm>
-            <a:off x="3429000" y="1212352"/>
-            <a:ext cx="5212080" cy="1218918"/>
+            <a:off x="3760150" y="887602"/>
+            <a:ext cx="3702038" cy="865774"/>
           </a:xfrm>
           <a:prstGeom prst="rect">
             <a:avLst/>
@@ -11326,7 +11326,7 @@
               <a:buNone/>
             </a:pPr>
             <a:r>
-              <a:rPr lang="en-US" sz="2000" b="1" dirty="0">
+              <a:rPr lang="en-US" sz="1420" b="1" dirty="0">
                 <a:solidFill>
                   <a:srgbClr val="0B1F3A"/>
                 </a:solidFill>
@@ -11336,7 +11336,7 @@
               </a:rPr>
               <a:t>Khoảng cách về vật lý: lốp, giảm xóc, độ trễ phanh trong mô phỏng đều chỉ là gần đúng</a:t>
             </a:r>
-            <a:endParaRPr lang="en-US" sz="2000" dirty="0"/>
+            <a:endParaRPr lang="en-US" sz="1420" dirty="0"/>
           </a:p>
           <a:p>
             <a:pPr indent="0" marL="0">
@@ -11346,7 +11346,7 @@
               <a:buNone/>
             </a:pPr>
             <a:r>
-              <a:rPr lang="en-US" sz="1400" dirty="0">
+              <a:rPr lang="en-US" sz="990" dirty="0">
                 <a:solidFill>
                   <a:srgbClr val="007F72"/>
                 </a:solidFill>
@@ -11356,7 +11356,7 @@
               </a:rPr>
               <a:t>物理落差：輪胎、懸吊、煞車延遲，在模擬裡都只是近似值</a:t>
             </a:r>
-            <a:endParaRPr lang="en-US" sz="2000" dirty="0"/>
+            <a:endParaRPr lang="en-US" sz="1420" dirty="0"/>
           </a:p>
         </p:txBody>
       </p:sp>
@@ -11368,8 +11368,8 @@
         </p:nvSpPr>
         <p:spPr>
           <a:xfrm>
-            <a:off x="3429000" y="2522710"/>
-            <a:ext cx="5212080" cy="1074682"/>
+            <a:off x="3760150" y="1818323"/>
+            <a:ext cx="3702038" cy="763326"/>
           </a:xfrm>
           <a:prstGeom prst="rect">
             <a:avLst/>
@@ -11388,7 +11388,7 @@
               <a:buNone/>
             </a:pPr>
             <a:r>
-              <a:rPr lang="en-US" sz="1250" dirty="0">
+              <a:rPr lang="en-US" sz="890" dirty="0">
                 <a:solidFill>
                   <a:srgbClr val="5F7183"/>
                 </a:solidFill>
@@ -11398,7 +11398,7 @@
               </a:rPr>
               <a:t>Mô phỏng của ta dùng một con số cố định: giảm tốc 6 m/s². Xe thật trên mặt đường ướt chỉ còn một nửa, nên quãng đường phanh dài gần gấp đôi.</a:t>
             </a:r>
-            <a:endParaRPr lang="en-US" sz="1250" dirty="0"/>
+            <a:endParaRPr lang="en-US" sz="890" dirty="0"/>
           </a:p>
           <a:p>
             <a:pPr indent="0" marL="0">
@@ -11408,7 +11408,7 @@
               <a:buNone/>
             </a:pPr>
             <a:r>
-              <a:rPr lang="en-US" sz="1150" dirty="0">
+              <a:rPr lang="en-US" sz="820" dirty="0">
                 <a:solidFill>
                   <a:srgbClr val="5F7183"/>
                 </a:solidFill>
@@ -11418,7 +11418,7 @@
               </a:rPr>
               <a:t>我們的模擬器用一個固定的數字：減速度 6 m/s²。真車在濕路面上只剩一半，所以煞停距離幾乎加倍。</a:t>
             </a:r>
-            <a:endParaRPr lang="en-US" sz="1250" dirty="0"/>
+            <a:endParaRPr lang="en-US" sz="890" dirty="0"/>
           </a:p>
         </p:txBody>
       </p:sp>
@@ -11430,8 +11430,8 @@
         </p:nvSpPr>
         <p:spPr>
           <a:xfrm>
-            <a:off x="502920" y="3913632"/>
-            <a:ext cx="8138160" cy="621792"/>
+            <a:off x="1681812" y="2806268"/>
+            <a:ext cx="5780375" cy="441647"/>
           </a:xfrm>
           <a:prstGeom prst="roundRect">
             <a:avLst>
@@ -11457,8 +11457,8 @@
         </p:nvSpPr>
         <p:spPr>
           <a:xfrm>
-            <a:off x="685800" y="3986784"/>
-            <a:ext cx="7772400" cy="493776"/>
+            <a:off x="1811708" y="2858226"/>
+            <a:ext cx="5520583" cy="350719"/>
           </a:xfrm>
           <a:prstGeom prst="rect">
             <a:avLst/>
@@ -11477,7 +11477,7 @@
               <a:buNone/>
             </a:pPr>
             <a:r>
-              <a:rPr lang="en-US" sz="1250" b="1" dirty="0">
+              <a:rPr lang="en-US" sz="890" b="1" dirty="0">
                 <a:solidFill>
                   <a:srgbClr val="7A4E00"/>
                 </a:solidFill>
@@ -11487,7 +11487,7 @@
               </a:rPr>
               <a:t>Tiết 3 khi bật mưa, các bạn sẽ gặp đúng chuyện này.</a:t>
             </a:r>
-            <a:endParaRPr lang="en-US" sz="1250" dirty="0"/>
+            <a:endParaRPr lang="en-US" sz="890" dirty="0"/>
           </a:p>
           <a:p>
             <a:pPr indent="0" marL="0">
@@ -11497,7 +11497,7 @@
               <a:buNone/>
             </a:pPr>
             <a:r>
-              <a:rPr lang="en-US" sz="1150" dirty="0">
+              <a:rPr lang="en-US" sz="820" dirty="0">
                 <a:solidFill>
                   <a:srgbClr val="7A4E00"/>
                 </a:solidFill>
@@ -11507,7 +11507,7 @@
               </a:rPr>
               <a:t>第三節打開雨天的時候，各位就會遇到這件事。</a:t>
             </a:r>
-            <a:endParaRPr lang="en-US" sz="1250" dirty="0"/>
+            <a:endParaRPr lang="en-US" sz="890" dirty="0"/>
           </a:p>
         </p:txBody>
       </p:sp>
@@ -11527,8 +11527,8 @@
         </p:blipFill>
         <p:spPr>
           <a:xfrm>
-            <a:off x="7516368" y="4718304"/>
-            <a:ext cx="1097280" cy="242439"/>
+            <a:off x="6663327" y="3338842"/>
+            <a:ext cx="779376" cy="172200"/>
           </a:xfrm>
           <a:prstGeom prst="rect">
             <a:avLst/>
@@ -11543,8 +11543,8 @@
         </p:nvSpPr>
         <p:spPr>
           <a:xfrm>
-            <a:off x="109728" y="4791456"/>
-            <a:ext cx="822960" cy="256032"/>
+            <a:off x="1402536" y="3390800"/>
+            <a:ext cx="584532" cy="181855"/>
           </a:xfrm>
           <a:prstGeom prst="rect">
             <a:avLst/>
@@ -11560,7 +11560,7 @@
               <a:buNone/>
             </a:pPr>
             <a:r>
-              <a:rPr lang="en-US" sz="900" dirty="0">
+              <a:rPr lang="en-US" sz="640" dirty="0">
                 <a:solidFill>
                   <a:srgbClr val="5F7183"/>
                 </a:solidFill>
@@ -11570,7 +11570,7 @@
               </a:rPr>
               <a:t>14 / 18</a:t>
             </a:r>
-            <a:endParaRPr lang="en-US" sz="900" dirty="0"/>
+            <a:endParaRPr lang="en-US" sz="640" dirty="0"/>
           </a:p>
         </p:txBody>
       </p:sp>
@@ -11582,8 +11582,8 @@
         </p:nvSpPr>
         <p:spPr>
           <a:xfrm>
-            <a:off x="960120" y="4791456"/>
-            <a:ext cx="2011680" cy="256032"/>
+            <a:off x="2006553" y="3390800"/>
+            <a:ext cx="1428857" cy="181855"/>
           </a:xfrm>
           <a:prstGeom prst="rect">
             <a:avLst/>
@@ -11599,7 +11599,7 @@
               <a:buNone/>
             </a:pPr>
             <a:r>
-              <a:rPr lang="en-US" sz="900" dirty="0">
+              <a:rPr lang="en-US" sz="640" dirty="0">
                 <a:solidFill>
                   <a:srgbClr val="5F7183"/>
                 </a:solidFill>
@@ -11609,7 +11609,7 @@
               </a:rPr>
               <a:t>Tiết 1 · 第 1 節</a:t>
             </a:r>
-            <a:endParaRPr lang="en-US" sz="900" dirty="0"/>
+            <a:endParaRPr lang="en-US" sz="640" dirty="0"/>
           </a:p>
         </p:txBody>
       </p:sp>
@@ -11646,8 +11646,8 @@
         </p:nvSpPr>
         <p:spPr>
           <a:xfrm>
-            <a:off x="502920" y="420624"/>
-            <a:ext cx="8138160" cy="274320"/>
+            <a:off x="1681812" y="325253"/>
+            <a:ext cx="5780375" cy="194844"/>
           </a:xfrm>
           <a:prstGeom prst="rect">
             <a:avLst/>
@@ -11663,7 +11663,7 @@
               <a:buNone/>
             </a:pPr>
             <a:r>
-              <a:rPr lang="en-US" sz="1250" b="1" dirty="0">
+              <a:rPr lang="en-US" sz="890" b="1" dirty="0">
                 <a:solidFill>
                   <a:srgbClr val="007F72"/>
                 </a:solidFill>
@@ -11673,7 +11673,7 @@
               </a:rPr>
               <a:t>Ngược lại · 反過來看</a:t>
             </a:r>
-            <a:endParaRPr lang="en-US" sz="1250" dirty="0"/>
+            <a:endParaRPr lang="en-US" sz="890" dirty="0"/>
           </a:p>
         </p:txBody>
       </p:sp>
@@ -11685,8 +11685,8 @@
         </p:nvSpPr>
         <p:spPr>
           <a:xfrm>
-            <a:off x="502920" y="1101852"/>
-            <a:ext cx="2468880" cy="2514600"/>
+            <a:off x="1681812" y="809116"/>
+            <a:ext cx="1753597" cy="1786071"/>
           </a:xfrm>
           <a:prstGeom prst="roundRect">
             <a:avLst>
@@ -11712,8 +11712,8 @@
         </p:nvSpPr>
         <p:spPr>
           <a:xfrm>
-            <a:off x="1493947" y="2203613"/>
-            <a:ext cx="929396" cy="755477"/>
+            <a:off x="2385719" y="1591675"/>
+            <a:ext cx="660132" cy="536601"/>
           </a:xfrm>
           <a:prstGeom prst="roundRect">
             <a:avLst>
@@ -11739,8 +11739,8 @@
         </p:nvSpPr>
         <p:spPr>
           <a:xfrm>
-            <a:off x="1339047" y="2048073"/>
-            <a:ext cx="929396" cy="755477"/>
+            <a:off x="2275697" y="1481198"/>
+            <a:ext cx="660132" cy="536601"/>
           </a:xfrm>
           <a:prstGeom prst="roundRect">
             <a:avLst>
@@ -11766,8 +11766,8 @@
         </p:nvSpPr>
         <p:spPr>
           <a:xfrm>
-            <a:off x="1184148" y="1892534"/>
-            <a:ext cx="929396" cy="755477"/>
+            <a:off x="2165675" y="1370721"/>
+            <a:ext cx="660132" cy="536601"/>
           </a:xfrm>
           <a:prstGeom prst="roundRect">
             <a:avLst>
@@ -11793,8 +11793,8 @@
         </p:nvSpPr>
         <p:spPr>
           <a:xfrm>
-            <a:off x="1029249" y="1736994"/>
-            <a:ext cx="929396" cy="755477"/>
+            <a:off x="2055653" y="1260245"/>
+            <a:ext cx="660132" cy="536601"/>
           </a:xfrm>
           <a:prstGeom prst="roundRect">
             <a:avLst>
@@ -11820,8 +11820,8 @@
         </p:nvSpPr>
         <p:spPr>
           <a:xfrm>
-            <a:off x="630936" y="2892430"/>
-            <a:ext cx="2212848" cy="399959"/>
+            <a:off x="1772740" y="2080928"/>
+            <a:ext cx="1571743" cy="284083"/>
           </a:xfrm>
           <a:prstGeom prst="rect">
             <a:avLst/>
@@ -11837,7 +11837,7 @@
               <a:buNone/>
             </a:pPr>
             <a:r>
-              <a:rPr lang="en-US" sz="1100" b="1" dirty="0">
+              <a:rPr lang="en-US" sz="780" b="1" dirty="0">
                 <a:solidFill>
                   <a:srgbClr val="00A896"/>
                 </a:solidFill>
@@ -11847,7 +11847,7 @@
               </a:rPr>
               <a:t>× 10 000</a:t>
             </a:r>
-            <a:endParaRPr lang="en-US" sz="1100" dirty="0"/>
+            <a:endParaRPr lang="en-US" sz="780" dirty="0"/>
           </a:p>
         </p:txBody>
       </p:sp>
@@ -11859,8 +11859,8 @@
         </p:nvSpPr>
         <p:spPr>
           <a:xfrm>
-            <a:off x="3429000" y="1319005"/>
-            <a:ext cx="5212080" cy="1005611"/>
+            <a:off x="3760150" y="963355"/>
+            <a:ext cx="3702038" cy="714266"/>
           </a:xfrm>
           <a:prstGeom prst="rect">
             <a:avLst/>
@@ -11879,7 +11879,7 @@
               <a:buNone/>
             </a:pPr>
             <a:r>
-              <a:rPr lang="en-US" sz="2300" b="1" dirty="0">
+              <a:rPr lang="en-US" sz="1630" b="1" dirty="0">
                 <a:solidFill>
                   <a:srgbClr val="0B1F3A"/>
                 </a:solidFill>
@@ -11889,7 +11889,7 @@
               </a:rPr>
               <a:t>Mô phỏng làm được những việc mà ngoài đường thật không làm được</a:t>
             </a:r>
-            <a:endParaRPr lang="en-US" sz="2300" dirty="0"/>
+            <a:endParaRPr lang="en-US" sz="1630" dirty="0"/>
           </a:p>
           <a:p>
             <a:pPr indent="0" marL="0">
@@ -11899,7 +11899,7 @@
               <a:buNone/>
             </a:pPr>
             <a:r>
-              <a:rPr lang="en-US" sz="1400" dirty="0">
+              <a:rPr lang="en-US" sz="990" dirty="0">
                 <a:solidFill>
                   <a:srgbClr val="007F72"/>
                 </a:solidFill>
@@ -11909,7 +11909,7 @@
               </a:rPr>
               <a:t>模擬能做到一些真實世界做不到的事</a:t>
             </a:r>
-            <a:endParaRPr lang="en-US" sz="2300" dirty="0"/>
+            <a:endParaRPr lang="en-US" sz="1630" dirty="0"/>
           </a:p>
         </p:txBody>
       </p:sp>
@@ -11921,8 +11921,8 @@
         </p:nvSpPr>
         <p:spPr>
           <a:xfrm>
-            <a:off x="3429000" y="2416057"/>
-            <a:ext cx="5212080" cy="1074682"/>
+            <a:off x="3760150" y="1742570"/>
+            <a:ext cx="3702038" cy="763326"/>
           </a:xfrm>
           <a:prstGeom prst="rect">
             <a:avLst/>
@@ -11941,7 +11941,7 @@
               <a:buNone/>
             </a:pPr>
             <a:r>
-              <a:rPr lang="en-US" sz="1250" dirty="0">
+              <a:rPr lang="en-US" sz="890" dirty="0">
                 <a:solidFill>
                   <a:srgbClr val="5F7183"/>
                 </a:solidFill>
@@ -11951,7 +11951,7 @@
               </a:rPr>
               <a:t>Chạy lại cùng một tình huống mười nghìn lần, mỗi lần đổi một tham số. Cho người đi bộ bước ra đúng vào thời điểm xấu nhất. Ngoài đường thật thì vừa không làm được, vừa không được phép làm.</a:t>
             </a:r>
-            <a:endParaRPr lang="en-US" sz="1250" dirty="0"/>
+            <a:endParaRPr lang="en-US" sz="890" dirty="0"/>
           </a:p>
           <a:p>
             <a:pPr indent="0" marL="0">
@@ -11961,7 +11961,7 @@
               <a:buNone/>
             </a:pPr>
             <a:r>
-              <a:rPr lang="en-US" sz="1150" dirty="0">
+              <a:rPr lang="en-US" sz="820" dirty="0">
                 <a:solidFill>
                   <a:srgbClr val="5F7183"/>
                 </a:solidFill>
@@ -11971,7 +11971,7 @@
               </a:rPr>
               <a:t>同一個情況重跑一萬次，每次只改一個參數。讓行人剛好在最糟的時間點走出來。這兩件事在真實世界既做不到，也不可以做。</a:t>
             </a:r>
-            <a:endParaRPr lang="en-US" sz="1250" dirty="0"/>
+            <a:endParaRPr lang="en-US" sz="890" dirty="0"/>
           </a:p>
         </p:txBody>
       </p:sp>
@@ -11983,8 +11983,8 @@
         </p:nvSpPr>
         <p:spPr>
           <a:xfrm>
-            <a:off x="502920" y="3913632"/>
-            <a:ext cx="8138160" cy="621792"/>
+            <a:off x="1681812" y="2806268"/>
+            <a:ext cx="5780375" cy="441647"/>
           </a:xfrm>
           <a:prstGeom prst="roundRect">
             <a:avLst>
@@ -12010,8 +12010,8 @@
         </p:nvSpPr>
         <p:spPr>
           <a:xfrm>
-            <a:off x="685800" y="3986784"/>
-            <a:ext cx="7772400" cy="493776"/>
+            <a:off x="1811708" y="2858226"/>
+            <a:ext cx="5520583" cy="350719"/>
           </a:xfrm>
           <a:prstGeom prst="rect">
             <a:avLst/>
@@ -12030,7 +12030,7 @@
               <a:buNone/>
             </a:pPr>
             <a:r>
-              <a:rPr lang="en-US" sz="1250" b="1" dirty="0">
+              <a:rPr lang="en-US" sz="890" b="1" dirty="0">
                 <a:solidFill>
                   <a:srgbClr val="7A4E00"/>
                 </a:solidFill>
@@ -12040,7 +12040,7 @@
               </a:rPr>
               <a:t>Nên đừng nghĩ mô phỏng là bản thay thế kém hơn — nó là một công cụ khác, làm được việc khác.</a:t>
             </a:r>
-            <a:endParaRPr lang="en-US" sz="1250" dirty="0"/>
+            <a:endParaRPr lang="en-US" sz="890" dirty="0"/>
           </a:p>
           <a:p>
             <a:pPr indent="0" marL="0">
@@ -12050,7 +12050,7 @@
               <a:buNone/>
             </a:pPr>
             <a:r>
-              <a:rPr lang="en-US" sz="1150" dirty="0">
+              <a:rPr lang="en-US" sz="820" dirty="0">
                 <a:solidFill>
                   <a:srgbClr val="7A4E00"/>
                 </a:solidFill>
@@ -12060,7 +12060,7 @@
               </a:rPr>
               <a:t>所以不要把模擬看成「比較差的替代品」——它是另一種工具，做的是另一件事。</a:t>
             </a:r>
-            <a:endParaRPr lang="en-US" sz="1250" dirty="0"/>
+            <a:endParaRPr lang="en-US" sz="890" dirty="0"/>
           </a:p>
         </p:txBody>
       </p:sp>
@@ -12080,8 +12080,8 @@
         </p:blipFill>
         <p:spPr>
           <a:xfrm>
-            <a:off x="7516368" y="4718304"/>
-            <a:ext cx="1097280" cy="242439"/>
+            <a:off x="6663327" y="3338842"/>
+            <a:ext cx="779376" cy="172200"/>
           </a:xfrm>
           <a:prstGeom prst="rect">
             <a:avLst/>
@@ -12096,8 +12096,8 @@
         </p:nvSpPr>
         <p:spPr>
           <a:xfrm>
-            <a:off x="109728" y="4791456"/>
-            <a:ext cx="822960" cy="256032"/>
+            <a:off x="1402536" y="3390800"/>
+            <a:ext cx="584532" cy="181855"/>
           </a:xfrm>
           <a:prstGeom prst="rect">
             <a:avLst/>
@@ -12113,7 +12113,7 @@
               <a:buNone/>
             </a:pPr>
             <a:r>
-              <a:rPr lang="en-US" sz="900" dirty="0">
+              <a:rPr lang="en-US" sz="640" dirty="0">
                 <a:solidFill>
                   <a:srgbClr val="5F7183"/>
                 </a:solidFill>
@@ -12123,7 +12123,7 @@
               </a:rPr>
               <a:t>15 / 18</a:t>
             </a:r>
-            <a:endParaRPr lang="en-US" sz="900" dirty="0"/>
+            <a:endParaRPr lang="en-US" sz="640" dirty="0"/>
           </a:p>
         </p:txBody>
       </p:sp>
@@ -12135,8 +12135,8 @@
         </p:nvSpPr>
         <p:spPr>
           <a:xfrm>
-            <a:off x="960120" y="4791456"/>
-            <a:ext cx="2011680" cy="256032"/>
+            <a:off x="2006553" y="3390800"/>
+            <a:ext cx="1428857" cy="181855"/>
           </a:xfrm>
           <a:prstGeom prst="rect">
             <a:avLst/>
@@ -12152,7 +12152,7 @@
               <a:buNone/>
             </a:pPr>
             <a:r>
-              <a:rPr lang="en-US" sz="900" dirty="0">
+              <a:rPr lang="en-US" sz="640" dirty="0">
                 <a:solidFill>
                   <a:srgbClr val="5F7183"/>
                 </a:solidFill>
@@ -12162,7 +12162,7 @@
               </a:rPr>
               <a:t>Tiết 1 · 第 1 節</a:t>
             </a:r>
-            <a:endParaRPr lang="en-US" sz="900" dirty="0"/>
+            <a:endParaRPr lang="en-US" sz="640" dirty="0"/>
           </a:p>
         </p:txBody>
       </p:sp>
@@ -12199,8 +12199,8 @@
         </p:nvSpPr>
         <p:spPr>
           <a:xfrm>
-            <a:off x="502920" y="292608"/>
-            <a:ext cx="8138160" cy="841248"/>
+            <a:off x="1681812" y="234326"/>
+            <a:ext cx="5780375" cy="597522"/>
           </a:xfrm>
           <a:prstGeom prst="rect">
             <a:avLst/>
@@ -12219,7 +12219,7 @@
               <a:buNone/>
             </a:pPr>
             <a:r>
-              <a:rPr lang="en-US" sz="2200" b="1" dirty="0">
+              <a:rPr lang="en-US" sz="1560" b="1" dirty="0">
                 <a:solidFill>
                   <a:srgbClr val="0B1F3A"/>
                 </a:solidFill>
@@ -12229,7 +12229,7 @@
               </a:rPr>
               <a:t>Ở Đài Loan và Việt Nam, cả ba khoảng cách đều lớn hơn</a:t>
             </a:r>
-            <a:endParaRPr lang="en-US" sz="2200" dirty="0"/>
+            <a:endParaRPr lang="en-US" sz="1560" dirty="0"/>
           </a:p>
           <a:p>
             <a:pPr indent="0" marL="0">
@@ -12239,7 +12239,7 @@
               <a:buNone/>
             </a:pPr>
             <a:r>
-              <a:rPr lang="en-US" sz="1350" dirty="0">
+              <a:rPr lang="en-US" sz="960" dirty="0">
                 <a:solidFill>
                   <a:srgbClr val="5F7183"/>
                 </a:solidFill>
@@ -12249,7 +12249,7 @@
               </a:rPr>
               <a:t>在台灣和越南，這三種落差都更大</a:t>
             </a:r>
-            <a:endParaRPr lang="en-US" sz="2200" dirty="0"/>
+            <a:endParaRPr lang="en-US" sz="1560" dirty="0"/>
           </a:p>
         </p:txBody>
       </p:sp>
@@ -12261,8 +12261,8 @@
         </p:nvSpPr>
         <p:spPr>
           <a:xfrm>
-            <a:off x="502920" y="1133856"/>
-            <a:ext cx="8138160" cy="713232"/>
+            <a:off x="1681812" y="831848"/>
+            <a:ext cx="5780375" cy="506595"/>
           </a:xfrm>
           <a:prstGeom prst="roundRect">
             <a:avLst>
@@ -12283,8 +12283,8 @@
         </p:nvSpPr>
         <p:spPr>
           <a:xfrm>
-            <a:off x="649224" y="1207008"/>
-            <a:ext cx="7845552" cy="566928"/>
+            <a:off x="1785729" y="883806"/>
+            <a:ext cx="5572542" cy="402678"/>
           </a:xfrm>
           <a:prstGeom prst="rect">
             <a:avLst/>
@@ -12303,7 +12303,7 @@
               <a:buNone/>
             </a:pPr>
             <a:r>
-              <a:rPr lang="en-US" sz="1150" b="1" dirty="0">
+              <a:rPr lang="en-US" sz="820" b="1" dirty="0">
                 <a:solidFill>
                   <a:srgbClr val="007F72"/>
                 </a:solidFill>
@@ -12313,7 +12313,7 @@
               </a:rPr>
               <a:t>Vì thế giới, xe cộ và hành vi trong các mô phỏng có sẵn đều được làm theo Âu Mỹ.</a:t>
             </a:r>
-            <a:endParaRPr lang="en-US" sz="1150" dirty="0"/>
+            <a:endParaRPr lang="en-US" sz="820" dirty="0"/>
           </a:p>
           <a:p>
             <a:pPr indent="0" marL="0">
@@ -12323,7 +12323,7 @@
               <a:buNone/>
             </a:pPr>
             <a:r>
-              <a:rPr lang="en-US" sz="1000" dirty="0">
+              <a:rPr lang="en-US" sz="710" dirty="0">
                 <a:solidFill>
                   <a:srgbClr val="007F72"/>
                 </a:solidFill>
@@ -12333,7 +12333,7 @@
               </a:rPr>
               <a:t>因為現成模擬器裡的世界、車輛、行為，都是照歐美做的。</a:t>
             </a:r>
-            <a:endParaRPr lang="en-US" sz="1150" dirty="0"/>
+            <a:endParaRPr lang="en-US" sz="820" dirty="0"/>
           </a:p>
         </p:txBody>
       </p:sp>
@@ -12352,17 +12352,17 @@
           </p:nvPr>
         </p:nvGraphicFramePr>
         <p:xfrm>
-          <a:off x="502920" y="1956816"/>
-          <a:ext cx="8138160" cy="914400"/>
+          <a:off x="1681812" y="1416380"/>
+          <a:ext cx="5780375" cy="914400"/>
         </p:xfrm>
         <a:graphic>
           <a:graphicData uri="http://schemas.openxmlformats.org/drawingml/2006/table">
             <a:tbl>
               <a:tblPr/>
               <a:tblGrid>
-                <a:gridCol w="1371600"/>
-                <a:gridCol w="3383280"/>
-                <a:gridCol w="3383280"/>
+                <a:gridCol w="974221"/>
+                <a:gridCol w="2403077"/>
+                <a:gridCol w="2403077"/>
               </a:tblGrid>
               <a:tr h="457200">
                 <a:tc>
@@ -13329,8 +13329,8 @@
         </p:nvSpPr>
         <p:spPr>
           <a:xfrm>
-            <a:off x="502920" y="4089418"/>
-            <a:ext cx="8138160" cy="457200"/>
+            <a:off x="1681812" y="2931125"/>
+            <a:ext cx="5780375" cy="324740"/>
           </a:xfrm>
           <a:prstGeom prst="rect">
             <a:avLst/>
@@ -13349,7 +13349,7 @@
               <a:buNone/>
             </a:pPr>
             <a:r>
-              <a:rPr lang="en-US" sz="1200" b="1" dirty="0">
+              <a:rPr lang="en-US" sz="850" b="1" dirty="0">
                 <a:solidFill>
                   <a:srgbClr val="007F72"/>
                 </a:solidFill>
@@ -13359,7 +13359,7 @@
               </a:rPr>
               <a:t>Mô hình hành vi giao thông Đài Loan / Việt Nam: dữ liệu đó chỉ các bạn thu được.</a:t>
             </a:r>
-            <a:endParaRPr lang="en-US" sz="1200" dirty="0"/>
+            <a:endParaRPr lang="en-US" sz="850" dirty="0"/>
           </a:p>
           <a:p>
             <a:pPr indent="0" marL="0">
@@ -13369,7 +13369,7 @@
               <a:buNone/>
             </a:pPr>
             <a:r>
-              <a:rPr lang="en-US" sz="1100" dirty="0">
+              <a:rPr lang="en-US" sz="780" dirty="0">
                 <a:solidFill>
                   <a:srgbClr val="007F72"/>
                 </a:solidFill>
@@ -13379,7 +13379,7 @@
               </a:rPr>
               <a:t>台灣或越南的交通行為模型：那份資料只有各位收得到。</a:t>
             </a:r>
-            <a:endParaRPr lang="en-US" sz="1200" dirty="0"/>
+            <a:endParaRPr lang="en-US" sz="850" dirty="0"/>
           </a:p>
         </p:txBody>
       </p:sp>
@@ -13399,8 +13399,8 @@
         </p:blipFill>
         <p:spPr>
           <a:xfrm>
-            <a:off x="7516368" y="4718304"/>
-            <a:ext cx="1097280" cy="242439"/>
+            <a:off x="6663327" y="3338842"/>
+            <a:ext cx="779376" cy="172200"/>
           </a:xfrm>
           <a:prstGeom prst="rect">
             <a:avLst/>
@@ -13415,8 +13415,8 @@
         </p:nvSpPr>
         <p:spPr>
           <a:xfrm>
-            <a:off x="109728" y="4791456"/>
-            <a:ext cx="822960" cy="256032"/>
+            <a:off x="1402536" y="3390800"/>
+            <a:ext cx="584532" cy="181855"/>
           </a:xfrm>
           <a:prstGeom prst="rect">
             <a:avLst/>
@@ -13432,7 +13432,7 @@
               <a:buNone/>
             </a:pPr>
             <a:r>
-              <a:rPr lang="en-US" sz="900" dirty="0">
+              <a:rPr lang="en-US" sz="640" dirty="0">
                 <a:solidFill>
                   <a:srgbClr val="5F7183"/>
                 </a:solidFill>
@@ -13442,7 +13442,7 @@
               </a:rPr>
               <a:t>16 / 18</a:t>
             </a:r>
-            <a:endParaRPr lang="en-US" sz="900" dirty="0"/>
+            <a:endParaRPr lang="en-US" sz="640" dirty="0"/>
           </a:p>
         </p:txBody>
       </p:sp>
@@ -13454,8 +13454,8 @@
         </p:nvSpPr>
         <p:spPr>
           <a:xfrm>
-            <a:off x="960120" y="4791456"/>
-            <a:ext cx="2011680" cy="256032"/>
+            <a:off x="2006553" y="3390800"/>
+            <a:ext cx="1428857" cy="181855"/>
           </a:xfrm>
           <a:prstGeom prst="rect">
             <a:avLst/>
@@ -13471,7 +13471,7 @@
               <a:buNone/>
             </a:pPr>
             <a:r>
-              <a:rPr lang="en-US" sz="900" dirty="0">
+              <a:rPr lang="en-US" sz="640" dirty="0">
                 <a:solidFill>
                   <a:srgbClr val="5F7183"/>
                 </a:solidFill>
@@ -13481,7 +13481,7 @@
               </a:rPr>
               <a:t>Tiết 1 · 第 1 節</a:t>
             </a:r>
-            <a:endParaRPr lang="en-US" sz="900" dirty="0"/>
+            <a:endParaRPr lang="en-US" sz="640" dirty="0"/>
           </a:p>
         </p:txBody>
       </p:sp>
@@ -13525,8 +13525,8 @@
         </p:nvSpPr>
         <p:spPr>
           <a:xfrm>
-            <a:off x="6766560" y="-1371600"/>
-            <a:ext cx="4206240" cy="4206240"/>
+            <a:off x="6130753" y="-947729"/>
+            <a:ext cx="2987610" cy="2987610"/>
           </a:xfrm>
           <a:prstGeom prst="ellipse">
             <a:avLst/>
@@ -13550,8 +13550,8 @@
         </p:nvSpPr>
         <p:spPr>
           <a:xfrm>
-            <a:off x="7863840" y="3108960"/>
-            <a:ext cx="2560320" cy="2560320"/>
+            <a:off x="7104973" y="1520297"/>
+            <a:ext cx="1688649" cy="1688649"/>
           </a:xfrm>
           <a:prstGeom prst="ellipse">
             <a:avLst/>
@@ -13572,8 +13572,8 @@
         </p:nvSpPr>
         <p:spPr>
           <a:xfrm>
-            <a:off x="502920" y="475488"/>
-            <a:ext cx="6766560" cy="274320"/>
+            <a:off x="1681812" y="364222"/>
+            <a:ext cx="4806155" cy="194844"/>
           </a:xfrm>
           <a:prstGeom prst="rect">
             <a:avLst/>
@@ -13589,7 +13589,7 @@
               <a:buNone/>
             </a:pPr>
             <a:r>
-              <a:rPr lang="en-US" sz="1250" b="1" dirty="0">
+              <a:rPr lang="en-US" sz="890" b="1" dirty="0">
                 <a:solidFill>
                   <a:srgbClr val="FFB020"/>
                 </a:solidFill>
@@ -13599,7 +13599,7 @@
               </a:rPr>
               <a:t>Thảo luận · 討論（上週的回家作業）</a:t>
             </a:r>
-            <a:endParaRPr lang="en-US" sz="1250" dirty="0"/>
+            <a:endParaRPr lang="en-US" sz="890" dirty="0"/>
           </a:p>
         </p:txBody>
       </p:sp>
@@ -13611,8 +13611,8 @@
         </p:nvSpPr>
         <p:spPr>
           <a:xfrm>
-            <a:off x="502920" y="786384"/>
-            <a:ext cx="8046720" cy="1225296"/>
+            <a:off x="1681812" y="585045"/>
+            <a:ext cx="5715427" cy="870304"/>
           </a:xfrm>
           <a:prstGeom prst="rect">
             <a:avLst/>
@@ -13631,7 +13631,7 @@
               <a:buNone/>
             </a:pPr>
             <a:r>
-              <a:rPr lang="en-US" sz="2300" b="1" dirty="0">
+              <a:rPr lang="en-US" sz="1630" b="1" dirty="0">
                 <a:solidFill>
                   <a:srgbClr val="FFFFFF"/>
                 </a:solidFill>
@@ -13641,7 +13641,7 @@
               </a:rPr>
               <a:t>Kể một chuyện bạn gặp hằng ngày trên đường, mà trong mô phỏng chắc chắn không có.</a:t>
             </a:r>
-            <a:endParaRPr lang="en-US" sz="2300" dirty="0"/>
+            <a:endParaRPr lang="en-US" sz="1630" dirty="0"/>
           </a:p>
           <a:p>
             <a:pPr indent="0" marL="0">
@@ -13651,7 +13651,7 @@
               <a:buNone/>
             </a:pPr>
             <a:r>
-              <a:rPr lang="en-US" sz="1500" dirty="0">
+              <a:rPr lang="en-US" sz="1070" dirty="0">
                 <a:solidFill>
                   <a:srgbClr val="AFC3D4"/>
                 </a:solidFill>
@@ -13661,7 +13661,7 @@
               </a:rPr>
               <a:t>講一件你每天在路上會遇到、但模擬裡一定不會出現的事。</a:t>
             </a:r>
-            <a:endParaRPr lang="en-US" sz="2300" dirty="0"/>
+            <a:endParaRPr lang="en-US" sz="1630" dirty="0"/>
           </a:p>
         </p:txBody>
       </p:sp>
@@ -13673,8 +13673,8 @@
         </p:nvSpPr>
         <p:spPr>
           <a:xfrm>
-            <a:off x="502920" y="1880384"/>
-            <a:ext cx="8138160" cy="621792"/>
+            <a:off x="1681812" y="1362092"/>
+            <a:ext cx="5780375" cy="441647"/>
           </a:xfrm>
           <a:prstGeom prst="roundRect">
             <a:avLst>
@@ -13695,8 +13695,8 @@
         </p:nvSpPr>
         <p:spPr>
           <a:xfrm>
-            <a:off x="667512" y="2026688"/>
-            <a:ext cx="329184" cy="329184"/>
+            <a:off x="1798719" y="1466008"/>
+            <a:ext cx="233813" cy="233813"/>
           </a:xfrm>
           <a:prstGeom prst="ellipse">
             <a:avLst/>
@@ -13715,8 +13715,8 @@
         </p:nvSpPr>
         <p:spPr>
           <a:xfrm>
-            <a:off x="667512" y="2054120"/>
-            <a:ext cx="329184" cy="274320"/>
+            <a:off x="1798719" y="1485493"/>
+            <a:ext cx="233813" cy="194844"/>
           </a:xfrm>
           <a:prstGeom prst="rect">
             <a:avLst/>
@@ -13732,7 +13732,7 @@
               <a:buNone/>
             </a:pPr>
             <a:r>
-              <a:rPr lang="en-US" sz="1200" b="1" dirty="0">
+              <a:rPr lang="en-US" sz="850" b="1" dirty="0">
                 <a:solidFill>
                   <a:srgbClr val="FFFFFF"/>
                 </a:solidFill>
@@ -13742,7 +13742,7 @@
               </a:rPr>
               <a:t>1</a:t>
             </a:r>
-            <a:endParaRPr lang="en-US" sz="1200" dirty="0"/>
+            <a:endParaRPr lang="en-US" sz="850" dirty="0"/>
           </a:p>
         </p:txBody>
       </p:sp>
@@ -13754,8 +13754,8 @@
         </p:nvSpPr>
         <p:spPr>
           <a:xfrm>
-            <a:off x="1161288" y="1926104"/>
-            <a:ext cx="7296912" cy="548640"/>
+            <a:off x="2149438" y="1394566"/>
+            <a:ext cx="5182853" cy="389688"/>
           </a:xfrm>
           <a:prstGeom prst="rect">
             <a:avLst/>
@@ -13774,7 +13774,7 @@
               <a:buNone/>
             </a:pPr>
             <a:r>
-              <a:rPr lang="en-US" sz="1250" b="1" dirty="0">
+              <a:rPr lang="en-US" sz="890" b="1" dirty="0">
                 <a:solidFill>
                   <a:srgbClr val="FFFFFF"/>
                 </a:solidFill>
@@ -13784,7 +13784,7 @@
               </a:rPr>
               <a:t>Mỗi nhóm một chuyện. Nói cụ thể, đừng nói chung chung.</a:t>
             </a:r>
-            <a:endParaRPr lang="en-US" sz="1250" dirty="0"/>
+            <a:endParaRPr lang="en-US" sz="890" dirty="0"/>
           </a:p>
           <a:p>
             <a:pPr indent="0" marL="0">
@@ -13794,7 +13794,7 @@
               <a:buNone/>
             </a:pPr>
             <a:r>
-              <a:rPr lang="en-US" sz="1150" dirty="0">
+              <a:rPr lang="en-US" sz="820" dirty="0">
                 <a:solidFill>
                   <a:srgbClr val="AFC3D4"/>
                 </a:solidFill>
@@ -13804,7 +13804,7 @@
               </a:rPr>
               <a:t>每組講一件。要講具體的，不要講「交通很亂」這種。</a:t>
             </a:r>
-            <a:endParaRPr lang="en-US" sz="1250" dirty="0"/>
+            <a:endParaRPr lang="en-US" sz="890" dirty="0"/>
           </a:p>
         </p:txBody>
       </p:sp>
@@ -13816,8 +13816,8 @@
         </p:nvSpPr>
         <p:spPr>
           <a:xfrm>
-            <a:off x="502920" y="2593616"/>
-            <a:ext cx="8138160" cy="621792"/>
+            <a:off x="1681812" y="1868686"/>
+            <a:ext cx="5780375" cy="441647"/>
           </a:xfrm>
           <a:prstGeom prst="roundRect">
             <a:avLst>
@@ -13838,8 +13838,8 @@
         </p:nvSpPr>
         <p:spPr>
           <a:xfrm>
-            <a:off x="667512" y="2739920"/>
-            <a:ext cx="329184" cy="329184"/>
+            <a:off x="1798719" y="1972603"/>
+            <a:ext cx="233813" cy="233813"/>
           </a:xfrm>
           <a:prstGeom prst="ellipse">
             <a:avLst/>
@@ -13858,8 +13858,8 @@
         </p:nvSpPr>
         <p:spPr>
           <a:xfrm>
-            <a:off x="667512" y="2767352"/>
-            <a:ext cx="329184" cy="274320"/>
+            <a:off x="1798719" y="1992087"/>
+            <a:ext cx="233813" cy="194844"/>
           </a:xfrm>
           <a:prstGeom prst="rect">
             <a:avLst/>
@@ -13875,7 +13875,7 @@
               <a:buNone/>
             </a:pPr>
             <a:r>
-              <a:rPr lang="en-US" sz="1200" b="1" dirty="0">
+              <a:rPr lang="en-US" sz="850" b="1" dirty="0">
                 <a:solidFill>
                   <a:srgbClr val="FFFFFF"/>
                 </a:solidFill>
@@ -13885,7 +13885,7 @@
               </a:rPr>
               <a:t>2</a:t>
             </a:r>
-            <a:endParaRPr lang="en-US" sz="1200" dirty="0"/>
+            <a:endParaRPr lang="en-US" sz="850" dirty="0"/>
           </a:p>
         </p:txBody>
       </p:sp>
@@ -13897,8 +13897,8 @@
         </p:nvSpPr>
         <p:spPr>
           <a:xfrm>
-            <a:off x="1161288" y="2639336"/>
-            <a:ext cx="7296912" cy="548640"/>
+            <a:off x="2149438" y="1901160"/>
+            <a:ext cx="5182853" cy="389688"/>
           </a:xfrm>
           <a:prstGeom prst="rect">
             <a:avLst/>
@@ -13917,7 +13917,7 @@
               <a:buNone/>
             </a:pPr>
             <a:r>
-              <a:rPr lang="en-US" sz="1250" b="1" dirty="0">
+              <a:rPr lang="en-US" sz="890" b="1" dirty="0">
                 <a:solidFill>
                   <a:srgbClr val="FFFFFF"/>
                 </a:solidFill>
@@ -13927,7 +13927,7 @@
               </a:rPr>
               <a:t>Thầy sẽ xếp vào ba cột trên bảng: hình ảnh · hành vi · vật lý</a:t>
             </a:r>
-            <a:endParaRPr lang="en-US" sz="1250" dirty="0"/>
+            <a:endParaRPr lang="en-US" sz="890" dirty="0"/>
           </a:p>
           <a:p>
             <a:pPr indent="0" marL="0">
@@ -13937,7 +13937,7 @@
               <a:buNone/>
             </a:pPr>
             <a:r>
-              <a:rPr lang="en-US" sz="1150" dirty="0">
+              <a:rPr lang="en-US" sz="820" dirty="0">
                 <a:solidFill>
                   <a:srgbClr val="AFC3D4"/>
                 </a:solidFill>
@@ -13947,7 +13947,7 @@
               </a:rPr>
               <a:t>老師把它寫到白板的三欄裡：外觀・行為・物理</a:t>
             </a:r>
-            <a:endParaRPr lang="en-US" sz="1250" dirty="0"/>
+            <a:endParaRPr lang="en-US" sz="890" dirty="0"/>
           </a:p>
         </p:txBody>
       </p:sp>
@@ -13959,8 +13959,8 @@
         </p:nvSpPr>
         <p:spPr>
           <a:xfrm>
-            <a:off x="502920" y="3306848"/>
-            <a:ext cx="8138160" cy="621792"/>
+            <a:off x="1681812" y="2375281"/>
+            <a:ext cx="5780375" cy="441647"/>
           </a:xfrm>
           <a:prstGeom prst="roundRect">
             <a:avLst>
@@ -13981,8 +13981,8 @@
         </p:nvSpPr>
         <p:spPr>
           <a:xfrm>
-            <a:off x="667512" y="3453152"/>
-            <a:ext cx="329184" cy="329184"/>
+            <a:off x="1798719" y="2479198"/>
+            <a:ext cx="233813" cy="233813"/>
           </a:xfrm>
           <a:prstGeom prst="ellipse">
             <a:avLst/>
@@ -14001,8 +14001,8 @@
         </p:nvSpPr>
         <p:spPr>
           <a:xfrm>
-            <a:off x="667512" y="3480584"/>
-            <a:ext cx="329184" cy="274320"/>
+            <a:off x="1798719" y="2498682"/>
+            <a:ext cx="233813" cy="194844"/>
           </a:xfrm>
           <a:prstGeom prst="rect">
             <a:avLst/>
@@ -14018,7 +14018,7 @@
               <a:buNone/>
             </a:pPr>
             <a:r>
-              <a:rPr lang="en-US" sz="1200" b="1" dirty="0">
+              <a:rPr lang="en-US" sz="850" b="1" dirty="0">
                 <a:solidFill>
                   <a:srgbClr val="FFFFFF"/>
                 </a:solidFill>
@@ -14028,7 +14028,7 @@
               </a:rPr>
               <a:t>3</a:t>
             </a:r>
-            <a:endParaRPr lang="en-US" sz="1200" dirty="0"/>
+            <a:endParaRPr lang="en-US" sz="850" dirty="0"/>
           </a:p>
         </p:txBody>
       </p:sp>
@@ -14040,8 +14040,8 @@
         </p:nvSpPr>
         <p:spPr>
           <a:xfrm>
-            <a:off x="1161288" y="3352568"/>
-            <a:ext cx="7296912" cy="548640"/>
+            <a:off x="2149438" y="2407755"/>
+            <a:ext cx="5182853" cy="389688"/>
           </a:xfrm>
           <a:prstGeom prst="rect">
             <a:avLst/>
@@ -14060,7 +14060,7 @@
               <a:buNone/>
             </a:pPr>
             <a:r>
-              <a:rPr lang="en-US" sz="1250" b="1" dirty="0">
+              <a:rPr lang="en-US" sz="890" b="1" dirty="0">
                 <a:solidFill>
                   <a:srgbClr val="FFFFFF"/>
                 </a:solidFill>
@@ -14070,7 +14070,7 @@
               </a:rPr>
               <a:t>Cột nào sẽ đầy nhất? Đoán thử trước khi bắt đầu.</a:t>
             </a:r>
-            <a:endParaRPr lang="en-US" sz="1250" dirty="0"/>
+            <a:endParaRPr lang="en-US" sz="890" dirty="0"/>
           </a:p>
           <a:p>
             <a:pPr indent="0" marL="0">
@@ -14080,7 +14080,7 @@
               <a:buNone/>
             </a:pPr>
             <a:r>
-              <a:rPr lang="en-US" sz="1150" dirty="0">
+              <a:rPr lang="en-US" sz="820" dirty="0">
                 <a:solidFill>
                   <a:srgbClr val="AFC3D4"/>
                 </a:solidFill>
@@ -14090,7 +14090,7 @@
               </a:rPr>
               <a:t>猜猜看哪一欄會最滿？先猜再開始。</a:t>
             </a:r>
-            <a:endParaRPr lang="en-US" sz="1250" dirty="0"/>
+            <a:endParaRPr lang="en-US" sz="890" dirty="0"/>
           </a:p>
         </p:txBody>
       </p:sp>
@@ -14102,8 +14102,8 @@
         </p:nvSpPr>
         <p:spPr>
           <a:xfrm>
-            <a:off x="502920" y="4056656"/>
-            <a:ext cx="8046720" cy="457200"/>
+            <a:off x="1681812" y="2907855"/>
+            <a:ext cx="5715427" cy="324740"/>
           </a:xfrm>
           <a:prstGeom prst="rect">
             <a:avLst/>
@@ -14122,7 +14122,7 @@
               <a:buNone/>
             </a:pPr>
             <a:r>
-              <a:rPr lang="en-US" sz="1250" b="1" dirty="0">
+              <a:rPr lang="en-US" sz="890" b="1" dirty="0">
                 <a:solidFill>
                   <a:srgbClr val="FFB020"/>
                 </a:solidFill>
@@ -14132,7 +14132,7 @@
               </a:rPr>
               <a:t>Giữ lại bảng này — làm đề tài cuối kỳ sẽ dùng đến.</a:t>
             </a:r>
-            <a:endParaRPr lang="en-US" sz="1250" dirty="0"/>
+            <a:endParaRPr lang="en-US" sz="890" dirty="0"/>
           </a:p>
           <a:p>
             <a:pPr indent="0" marL="0">
@@ -14142,7 +14142,7 @@
               <a:buNone/>
             </a:pPr>
             <a:r>
-              <a:rPr lang="en-US" sz="1150" dirty="0">
+              <a:rPr lang="en-US" sz="820" dirty="0">
                 <a:solidFill>
                   <a:srgbClr val="FFB020"/>
                 </a:solidFill>
@@ -14152,7 +14152,7 @@
               </a:rPr>
               <a:t>這張白板留著，期末專題選題會用到。</a:t>
             </a:r>
-            <a:endParaRPr lang="en-US" sz="1250" dirty="0"/>
+            <a:endParaRPr lang="en-US" sz="890" dirty="0"/>
           </a:p>
         </p:txBody>
       </p:sp>
@@ -14164,8 +14164,8 @@
         </p:nvSpPr>
         <p:spPr>
           <a:xfrm>
-            <a:off x="109728" y="4791456"/>
-            <a:ext cx="822960" cy="256032"/>
+            <a:off x="1402536" y="3390800"/>
+            <a:ext cx="584532" cy="181855"/>
           </a:xfrm>
           <a:prstGeom prst="rect">
             <a:avLst/>
@@ -14181,7 +14181,7 @@
               <a:buNone/>
             </a:pPr>
             <a:r>
-              <a:rPr lang="en-US" sz="900" dirty="0">
+              <a:rPr lang="en-US" sz="640" dirty="0">
                 <a:solidFill>
                   <a:srgbClr val="9FB3C8"/>
                 </a:solidFill>
@@ -14191,7 +14191,7 @@
               </a:rPr>
               <a:t>17 / 18</a:t>
             </a:r>
-            <a:endParaRPr lang="en-US" sz="900" dirty="0"/>
+            <a:endParaRPr lang="en-US" sz="640" dirty="0"/>
           </a:p>
         </p:txBody>
       </p:sp>
@@ -14203,8 +14203,8 @@
         </p:nvSpPr>
         <p:spPr>
           <a:xfrm>
-            <a:off x="960120" y="4791456"/>
-            <a:ext cx="2011680" cy="256032"/>
+            <a:off x="2006553" y="3390800"/>
+            <a:ext cx="1428857" cy="181855"/>
           </a:xfrm>
           <a:prstGeom prst="rect">
             <a:avLst/>
@@ -14220,7 +14220,7 @@
               <a:buNone/>
             </a:pPr>
             <a:r>
-              <a:rPr lang="en-US" sz="900" dirty="0">
+              <a:rPr lang="en-US" sz="640" dirty="0">
                 <a:solidFill>
                   <a:srgbClr val="9FB3C8"/>
                 </a:solidFill>
@@ -14230,7 +14230,7 @@
               </a:rPr>
               <a:t>Tiết 1 · 第 1 節</a:t>
             </a:r>
-            <a:endParaRPr lang="en-US" sz="900" dirty="0"/>
+            <a:endParaRPr lang="en-US" sz="640" dirty="0"/>
           </a:p>
         </p:txBody>
       </p:sp>
@@ -14274,8 +14274,8 @@
         </p:nvSpPr>
         <p:spPr>
           <a:xfrm>
-            <a:off x="6766560" y="-1371600"/>
-            <a:ext cx="4206240" cy="4206240"/>
+            <a:off x="6130753" y="-947729"/>
+            <a:ext cx="2987610" cy="2987610"/>
           </a:xfrm>
           <a:prstGeom prst="ellipse">
             <a:avLst/>
@@ -14299,8 +14299,8 @@
         </p:nvSpPr>
         <p:spPr>
           <a:xfrm>
-            <a:off x="7863840" y="3108960"/>
-            <a:ext cx="2560320" cy="2560320"/>
+            <a:off x="7104973" y="1520297"/>
+            <a:ext cx="1688649" cy="1688649"/>
           </a:xfrm>
           <a:prstGeom prst="ellipse">
             <a:avLst/>
@@ -14321,8 +14321,8 @@
         </p:nvSpPr>
         <p:spPr>
           <a:xfrm>
-            <a:off x="502920" y="475488"/>
-            <a:ext cx="6766560" cy="274320"/>
+            <a:off x="1681812" y="364222"/>
+            <a:ext cx="4806155" cy="194844"/>
           </a:xfrm>
           <a:prstGeom prst="rect">
             <a:avLst/>
@@ -14338,7 +14338,7 @@
               <a:buNone/>
             </a:pPr>
             <a:r>
-              <a:rPr lang="en-US" sz="1250" b="1" dirty="0">
+              <a:rPr lang="en-US" sz="890" b="1" dirty="0">
                 <a:solidFill>
                   <a:srgbClr val="FFB020"/>
                 </a:solidFill>
@@ -14348,7 +14348,7 @@
               </a:rPr>
               <a:t>Tiết 1 · 第一節小結</a:t>
             </a:r>
-            <a:endParaRPr lang="en-US" sz="1250" dirty="0"/>
+            <a:endParaRPr lang="en-US" sz="890" dirty="0"/>
           </a:p>
         </p:txBody>
       </p:sp>
@@ -14360,8 +14360,8 @@
         </p:nvSpPr>
         <p:spPr>
           <a:xfrm>
-            <a:off x="502920" y="822960"/>
-            <a:ext cx="8046720" cy="1060704"/>
+            <a:off x="1681812" y="611024"/>
+            <a:ext cx="5715427" cy="753397"/>
           </a:xfrm>
           <a:prstGeom prst="rect">
             <a:avLst/>
@@ -14380,7 +14380,7 @@
               <a:buNone/>
             </a:pPr>
             <a:r>
-              <a:rPr lang="en-US" sz="2500" b="1" dirty="0">
+              <a:rPr lang="en-US" sz="1780" b="1" dirty="0">
                 <a:solidFill>
                   <a:srgbClr val="FFFFFF"/>
                 </a:solidFill>
@@ -14390,7 +14390,7 @@
               </a:rPr>
               <a:t>Mang ba câu này sang tiết 2</a:t>
             </a:r>
-            <a:endParaRPr lang="en-US" sz="2500" dirty="0"/>
+            <a:endParaRPr lang="en-US" sz="1780" dirty="0"/>
           </a:p>
           <a:p>
             <a:pPr indent="0" marL="0">
@@ -14400,7 +14400,7 @@
               <a:buNone/>
             </a:pPr>
             <a:r>
-              <a:rPr lang="en-US" sz="1500" dirty="0">
+              <a:rPr lang="en-US" sz="1070" dirty="0">
                 <a:solidFill>
                   <a:srgbClr val="AFC3D4"/>
                 </a:solidFill>
@@ -14410,7 +14410,7 @@
               </a:rPr>
               <a:t>帶三句話進第二節</a:t>
             </a:r>
-            <a:endParaRPr lang="en-US" sz="2500" dirty="0"/>
+            <a:endParaRPr lang="en-US" sz="1780" dirty="0"/>
           </a:p>
         </p:txBody>
       </p:sp>
@@ -14422,8 +14422,8 @@
         </p:nvSpPr>
         <p:spPr>
           <a:xfrm>
-            <a:off x="502920" y="1975104"/>
-            <a:ext cx="45720" cy="672713"/>
+            <a:off x="1681812" y="1429370"/>
+            <a:ext cx="32474" cy="477815"/>
           </a:xfrm>
           <a:prstGeom prst="rect">
             <a:avLst/>
@@ -14442,8 +14442,8 @@
         </p:nvSpPr>
         <p:spPr>
           <a:xfrm>
-            <a:off x="722376" y="1938528"/>
-            <a:ext cx="7863840" cy="782441"/>
+            <a:off x="1837688" y="1403390"/>
+            <a:ext cx="5585531" cy="555752"/>
           </a:xfrm>
           <a:prstGeom prst="rect">
             <a:avLst/>
@@ -14462,7 +14462,7 @@
               <a:buNone/>
             </a:pPr>
             <a:r>
-              <a:rPr lang="en-US" sz="1350" b="1" dirty="0">
+              <a:rPr lang="en-US" sz="960" b="1" dirty="0">
                 <a:solidFill>
                   <a:srgbClr val="FFFFFF"/>
                 </a:solidFill>
@@ -14472,7 +14472,7 @@
               </a:rPr>
               <a:t>Ba thanh trượt = ba thông số: số tia là độ phân giải, chiều dài là tầm đo, góc quét là góc nhìn.</a:t>
             </a:r>
-            <a:endParaRPr lang="en-US" sz="1350" dirty="0"/>
+            <a:endParaRPr lang="en-US" sz="960" dirty="0"/>
           </a:p>
           <a:p>
             <a:pPr indent="0" marL="0">
@@ -14482,7 +14482,7 @@
               <a:buNone/>
             </a:pPr>
             <a:r>
-              <a:rPr lang="en-US" sz="1200" dirty="0">
+              <a:rPr lang="en-US" sz="850" dirty="0">
                 <a:solidFill>
                   <a:srgbClr val="AFC3D4"/>
                 </a:solidFill>
@@ -14492,7 +14492,7 @@
               </a:rPr>
               <a:t>三個滑桿就是三個規格：射線數是解析度、長度是測距、張角是視野。</a:t>
             </a:r>
-            <a:endParaRPr lang="en-US" sz="1350" dirty="0"/>
+            <a:endParaRPr lang="en-US" sz="960" dirty="0"/>
           </a:p>
         </p:txBody>
       </p:sp>
@@ -14504,8 +14504,8 @@
         </p:nvSpPr>
         <p:spPr>
           <a:xfrm>
-            <a:off x="502920" y="2848985"/>
-            <a:ext cx="45720" cy="672713"/>
+            <a:off x="1681812" y="2050070"/>
+            <a:ext cx="32474" cy="477815"/>
           </a:xfrm>
           <a:prstGeom prst="rect">
             <a:avLst/>
@@ -14524,8 +14524,8 @@
         </p:nvSpPr>
         <p:spPr>
           <a:xfrm>
-            <a:off x="722376" y="2812409"/>
-            <a:ext cx="7863840" cy="782441"/>
+            <a:off x="1837688" y="2024091"/>
+            <a:ext cx="5585531" cy="555752"/>
           </a:xfrm>
           <a:prstGeom prst="rect">
             <a:avLst/>
@@ -14544,7 +14544,7 @@
               <a:buNone/>
             </a:pPr>
             <a:r>
-              <a:rPr lang="en-US" sz="1350" b="1" dirty="0">
+              <a:rPr lang="en-US" sz="960" b="1" dirty="0">
                 <a:solidFill>
                   <a:srgbClr val="FFFFFF"/>
                 </a:solidFill>
@@ -14554,7 +14554,7 @@
               </a:rPr>
               <a:t>Quãng đường phanh quyết định tia phải dài bao nhiêu — 50 km/h thì ít nhất 25 m. Đây là giới hạn cứng.</a:t>
             </a:r>
-            <a:endParaRPr lang="en-US" sz="1350" dirty="0"/>
+            <a:endParaRPr lang="en-US" sz="960" dirty="0"/>
           </a:p>
           <a:p>
             <a:pPr indent="0" marL="0">
@@ -14564,7 +14564,7 @@
               <a:buNone/>
             </a:pPr>
             <a:r>
-              <a:rPr lang="en-US" sz="1200" dirty="0">
+              <a:rPr lang="en-US" sz="850" dirty="0">
                 <a:solidFill>
                   <a:srgbClr val="AFC3D4"/>
                 </a:solidFill>
@@ -14574,7 +14574,7 @@
               </a:rPr>
               <a:t>煞停距離決定射線至少要多長——時速 50 至少 25 公尺。這是硬下限。</a:t>
             </a:r>
-            <a:endParaRPr lang="en-US" sz="1350" dirty="0"/>
+            <a:endParaRPr lang="en-US" sz="960" dirty="0"/>
           </a:p>
         </p:txBody>
       </p:sp>
@@ -14586,8 +14586,8 @@
         </p:nvSpPr>
         <p:spPr>
           <a:xfrm>
-            <a:off x="502920" y="3722866"/>
-            <a:ext cx="45720" cy="672713"/>
+            <a:off x="1681812" y="2670770"/>
+            <a:ext cx="32474" cy="477815"/>
           </a:xfrm>
           <a:prstGeom prst="rect">
             <a:avLst/>
@@ -14606,8 +14606,8 @@
         </p:nvSpPr>
         <p:spPr>
           <a:xfrm>
-            <a:off x="722376" y="3686290"/>
-            <a:ext cx="7863840" cy="782441"/>
+            <a:off x="1837688" y="2644791"/>
+            <a:ext cx="5585531" cy="555752"/>
           </a:xfrm>
           <a:prstGeom prst="rect">
             <a:avLst/>
@@ -14626,7 +14626,7 @@
               <a:buNone/>
             </a:pPr>
             <a:r>
-              <a:rPr lang="en-US" sz="1350" b="1" dirty="0">
+              <a:rPr lang="en-US" sz="960" b="1" dirty="0">
                 <a:solidFill>
                   <a:srgbClr val="FFFFFF"/>
                 </a:solidFill>
@@ -14636,7 +14636,7 @@
               </a:rPr>
               <a:t>Ba khoảng cách mô phỏng–hiện thực: hình ảnh, hành vi, vật lý. Ở Đài Loan và Việt Nam đều lớn hơn.</a:t>
             </a:r>
-            <a:endParaRPr lang="en-US" sz="1350" dirty="0"/>
+            <a:endParaRPr lang="en-US" sz="960" dirty="0"/>
           </a:p>
           <a:p>
             <a:pPr indent="0" marL="0">
@@ -14646,7 +14646,7 @@
               <a:buNone/>
             </a:pPr>
             <a:r>
-              <a:rPr lang="en-US" sz="1200" dirty="0">
+              <a:rPr lang="en-US" sz="850" dirty="0">
                 <a:solidFill>
                   <a:srgbClr val="AFC3D4"/>
                 </a:solidFill>
@@ -14656,7 +14656,7 @@
               </a:rPr>
               <a:t>模擬與現實的三種落差：外觀、行為、物理。在台灣和越南都更大。</a:t>
             </a:r>
-            <a:endParaRPr lang="en-US" sz="1350" dirty="0"/>
+            <a:endParaRPr lang="en-US" sz="960" dirty="0"/>
           </a:p>
         </p:txBody>
       </p:sp>
@@ -14668,8 +14668,8 @@
         </p:nvSpPr>
         <p:spPr>
           <a:xfrm>
-            <a:off x="109728" y="4791456"/>
-            <a:ext cx="822960" cy="256032"/>
+            <a:off x="1402536" y="3390800"/>
+            <a:ext cx="584532" cy="181855"/>
           </a:xfrm>
           <a:prstGeom prst="rect">
             <a:avLst/>
@@ -14685,7 +14685,7 @@
               <a:buNone/>
             </a:pPr>
             <a:r>
-              <a:rPr lang="en-US" sz="900" dirty="0">
+              <a:rPr lang="en-US" sz="640" dirty="0">
                 <a:solidFill>
                   <a:srgbClr val="9FB3C8"/>
                 </a:solidFill>
@@ -14695,7 +14695,7 @@
               </a:rPr>
               <a:t>18 / 18</a:t>
             </a:r>
-            <a:endParaRPr lang="en-US" sz="900" dirty="0"/>
+            <a:endParaRPr lang="en-US" sz="640" dirty="0"/>
           </a:p>
         </p:txBody>
       </p:sp>
@@ -14707,8 +14707,8 @@
         </p:nvSpPr>
         <p:spPr>
           <a:xfrm>
-            <a:off x="960120" y="4791456"/>
-            <a:ext cx="2011680" cy="256032"/>
+            <a:off x="2006553" y="3390800"/>
+            <a:ext cx="1428857" cy="181855"/>
           </a:xfrm>
           <a:prstGeom prst="rect">
             <a:avLst/>
@@ -14724,7 +14724,7 @@
               <a:buNone/>
             </a:pPr>
             <a:r>
-              <a:rPr lang="en-US" sz="900" dirty="0">
+              <a:rPr lang="en-US" sz="640" dirty="0">
                 <a:solidFill>
                   <a:srgbClr val="9FB3C8"/>
                 </a:solidFill>
@@ -14734,7 +14734,7 @@
               </a:rPr>
               <a:t>Tiết 1 · 第 1 節</a:t>
             </a:r>
-            <a:endParaRPr lang="en-US" sz="900" dirty="0"/>
+            <a:endParaRPr lang="en-US" sz="640" dirty="0"/>
           </a:p>
         </p:txBody>
       </p:sp>
@@ -14771,8 +14771,8 @@
         </p:nvSpPr>
         <p:spPr>
           <a:xfrm>
-            <a:off x="502920" y="292608"/>
-            <a:ext cx="8138160" cy="841248"/>
+            <a:off x="1681812" y="234326"/>
+            <a:ext cx="5780375" cy="597522"/>
           </a:xfrm>
           <a:prstGeom prst="rect">
             <a:avLst/>
@@ -14791,7 +14791,7 @@
               <a:buNone/>
             </a:pPr>
             <a:r>
-              <a:rPr lang="en-US" sz="2200" b="1" dirty="0">
+              <a:rPr lang="en-US" sz="1560" b="1" dirty="0">
                 <a:solidFill>
                   <a:srgbClr val="0B1F3A"/>
                 </a:solidFill>
@@ -14801,7 +14801,7 @@
               </a:rPr>
               <a:t>Mở mô phỏng trên máy tính của bạn</a:t>
             </a:r>
-            <a:endParaRPr lang="en-US" sz="2200" dirty="0"/>
+            <a:endParaRPr lang="en-US" sz="1560" dirty="0"/>
           </a:p>
           <a:p>
             <a:pPr indent="0" marL="0">
@@ -14811,7 +14811,7 @@
               <a:buNone/>
             </a:pPr>
             <a:r>
-              <a:rPr lang="en-US" sz="1350" dirty="0">
+              <a:rPr lang="en-US" sz="960" dirty="0">
                 <a:solidFill>
                   <a:srgbClr val="5F7183"/>
                 </a:solidFill>
@@ -14821,7 +14821,7 @@
               </a:rPr>
               <a:t>在你的筆電上打開模擬器</a:t>
             </a:r>
-            <a:endParaRPr lang="en-US" sz="2200" dirty="0"/>
+            <a:endParaRPr lang="en-US" sz="1560" dirty="0"/>
           </a:p>
         </p:txBody>
       </p:sp>
@@ -14833,8 +14833,8 @@
         </p:nvSpPr>
         <p:spPr>
           <a:xfrm>
-            <a:off x="6364224" y="1133856"/>
-            <a:ext cx="2404872" cy="2624328"/>
+            <a:off x="5844982" y="831848"/>
+            <a:ext cx="1708133" cy="1864009"/>
           </a:xfrm>
           <a:prstGeom prst="roundRect">
             <a:avLst>
@@ -14868,8 +14868,8 @@
         </p:blipFill>
         <p:spPr>
           <a:xfrm>
-            <a:off x="6492240" y="1243584"/>
-            <a:ext cx="2148840" cy="2148840"/>
+            <a:off x="5935909" y="909785"/>
+            <a:ext cx="1526279" cy="1526279"/>
           </a:xfrm>
           <a:prstGeom prst="rect">
             <a:avLst/>
@@ -14884,8 +14884,8 @@
         </p:nvSpPr>
         <p:spPr>
           <a:xfrm>
-            <a:off x="6400800" y="3429000"/>
-            <a:ext cx="2331720" cy="310896"/>
+            <a:off x="5870961" y="2462043"/>
+            <a:ext cx="1656175" cy="220823"/>
           </a:xfrm>
           <a:prstGeom prst="rect">
             <a:avLst/>
@@ -14904,7 +14904,7 @@
               <a:buNone/>
             </a:pPr>
             <a:r>
-              <a:rPr lang="en-US" sz="1050" b="1" dirty="0">
+              <a:rPr lang="en-US" sz="750" b="1" dirty="0">
                 <a:solidFill>
                   <a:srgbClr val="5F7183"/>
                 </a:solidFill>
@@ -14914,7 +14914,7 @@
               </a:rPr>
               <a:t>Quét mã QR bằng camera điện thoại</a:t>
             </a:r>
-            <a:endParaRPr lang="en-US" sz="1050" dirty="0"/>
+            <a:endParaRPr lang="en-US" sz="750" dirty="0"/>
           </a:p>
           <a:p>
             <a:pPr algn="ctr" indent="0" marL="0">
@@ -14924,7 +14924,7 @@
               <a:buNone/>
             </a:pPr>
             <a:r>
-              <a:rPr lang="en-US" sz="950" dirty="0">
+              <a:rPr lang="en-US" sz="670" dirty="0">
                 <a:solidFill>
                   <a:srgbClr val="5F7183"/>
                 </a:solidFill>
@@ -14934,7 +14934,7 @@
               </a:rPr>
               <a:t>用手機相機掃這個 QR</a:t>
             </a:r>
-            <a:endParaRPr lang="en-US" sz="1050" dirty="0"/>
+            <a:endParaRPr lang="en-US" sz="750" dirty="0"/>
           </a:p>
         </p:txBody>
       </p:sp>
@@ -14946,8 +14946,8 @@
         </p:nvSpPr>
         <p:spPr>
           <a:xfrm>
-            <a:off x="502920" y="1133856"/>
-            <a:ext cx="5678424" cy="841248"/>
+            <a:off x="1681812" y="831848"/>
+            <a:ext cx="4033273" cy="597522"/>
           </a:xfrm>
           <a:prstGeom prst="roundRect">
             <a:avLst>
@@ -14968,8 +14968,8 @@
         </p:nvSpPr>
         <p:spPr>
           <a:xfrm>
-            <a:off x="649224" y="1225296"/>
-            <a:ext cx="5385816" cy="658368"/>
+            <a:off x="1785729" y="896796"/>
+            <a:ext cx="3825439" cy="467626"/>
           </a:xfrm>
           <a:prstGeom prst="rect">
             <a:avLst/>
@@ -14985,7 +14985,7 @@
               <a:buNone/>
             </a:pPr>
             <a:r>
-              <a:rPr lang="en-US" sz="1250" b="1" dirty="0">
+              <a:rPr lang="en-US" sz="890" b="1" dirty="0">
                 <a:solidFill>
                   <a:srgbClr val="FFFFFF"/>
                 </a:solidFill>
@@ -14995,14 +14995,14 @@
               </a:rPr>
               <a:t>https://ch-neural.github.io/</a:t>
             </a:r>
-            <a:endParaRPr lang="en-US" sz="1250" dirty="0"/>
+            <a:endParaRPr lang="en-US" sz="890" dirty="0"/>
           </a:p>
           <a:p>
             <a:pPr algn="ctr" indent="0" marL="0">
               <a:buNone/>
             </a:pPr>
             <a:r>
-              <a:rPr lang="en-US" sz="1250" b="1" dirty="0">
+              <a:rPr lang="en-US" sz="890" b="1" dirty="0">
                 <a:solidFill>
                   <a:srgbClr val="FFFFFF"/>
                 </a:solidFill>
@@ -15012,7 +15012,7 @@
               </a:rPr>
               <a:t>MITUST-Principles-of-Self-Driving-Cars/week4/sim/</a:t>
             </a:r>
-            <a:endParaRPr lang="en-US" sz="1250" dirty="0"/>
+            <a:endParaRPr lang="en-US" sz="890" dirty="0"/>
           </a:p>
         </p:txBody>
       </p:sp>
@@ -15024,8 +15024,8 @@
         </p:nvSpPr>
         <p:spPr>
           <a:xfrm>
-            <a:off x="539496" y="2157984"/>
-            <a:ext cx="292608" cy="292608"/>
+            <a:off x="1707792" y="1559266"/>
+            <a:ext cx="207834" cy="207834"/>
           </a:xfrm>
           <a:prstGeom prst="ellipse">
             <a:avLst/>
@@ -15044,8 +15044,8 @@
         </p:nvSpPr>
         <p:spPr>
           <a:xfrm>
-            <a:off x="539496" y="2167128"/>
-            <a:ext cx="292608" cy="274320"/>
+            <a:off x="1707792" y="1565760"/>
+            <a:ext cx="207834" cy="194844"/>
           </a:xfrm>
           <a:prstGeom prst="rect">
             <a:avLst/>
@@ -15061,7 +15061,7 @@
               <a:buNone/>
             </a:pPr>
             <a:r>
-              <a:rPr lang="en-US" sz="1100" b="1" dirty="0">
+              <a:rPr lang="en-US" sz="780" b="1" dirty="0">
                 <a:solidFill>
                   <a:srgbClr val="FFFFFF"/>
                 </a:solidFill>
@@ -15071,7 +15071,7 @@
               </a:rPr>
               <a:t>1</a:t>
             </a:r>
-            <a:endParaRPr lang="en-US" sz="1100" dirty="0"/>
+            <a:endParaRPr lang="en-US" sz="780" dirty="0"/>
           </a:p>
         </p:txBody>
       </p:sp>
@@ -15083,8 +15083,8 @@
         </p:nvSpPr>
         <p:spPr>
           <a:xfrm>
-            <a:off x="941832" y="2121408"/>
-            <a:ext cx="5166360" cy="457200"/>
+            <a:off x="1993563" y="1533286"/>
+            <a:ext cx="3669564" cy="324740"/>
           </a:xfrm>
           <a:prstGeom prst="rect">
             <a:avLst/>
@@ -15103,7 +15103,7 @@
               <a:buNone/>
             </a:pPr>
             <a:r>
-              <a:rPr lang="en-US" sz="1150" b="1" dirty="0">
+              <a:rPr lang="en-US" sz="820" b="1" dirty="0">
                 <a:solidFill>
                   <a:srgbClr val="1A2733"/>
                 </a:solidFill>
@@ -15113,7 +15113,7 @@
               </a:rPr>
               <a:t>Tuần này nên dùng máy tính: có bàn phím và màn hình rộng thì chỉnh thanh trượt dễ hơn nhiều</a:t>
             </a:r>
-            <a:endParaRPr lang="en-US" sz="1150" dirty="0"/>
+            <a:endParaRPr lang="en-US" sz="820" dirty="0"/>
           </a:p>
           <a:p>
             <a:pPr indent="0" marL="0">
@@ -15123,7 +15123,7 @@
               <a:buNone/>
             </a:pPr>
             <a:r>
-              <a:rPr lang="en-US" sz="1050" dirty="0">
+              <a:rPr lang="en-US" sz="750" dirty="0">
                 <a:solidFill>
                   <a:srgbClr val="5F7183"/>
                 </a:solidFill>
@@ -15133,7 +15133,7 @@
               </a:rPr>
               <a:t>這週建議用筆電：有鍵盤和大螢幕，調滑桿容易得多</a:t>
             </a:r>
-            <a:endParaRPr lang="en-US" sz="1150" dirty="0"/>
+            <a:endParaRPr lang="en-US" sz="820" dirty="0"/>
           </a:p>
         </p:txBody>
       </p:sp>
@@ -15145,8 +15145,8 @@
         </p:nvSpPr>
         <p:spPr>
           <a:xfrm>
-            <a:off x="539496" y="2745371"/>
-            <a:ext cx="292608" cy="292608"/>
+            <a:off x="1707792" y="1976475"/>
+            <a:ext cx="207834" cy="207834"/>
           </a:xfrm>
           <a:prstGeom prst="ellipse">
             <a:avLst/>
@@ -15165,8 +15165,8 @@
         </p:nvSpPr>
         <p:spPr>
           <a:xfrm>
-            <a:off x="539496" y="2754515"/>
-            <a:ext cx="292608" cy="274320"/>
+            <a:off x="1707792" y="1982970"/>
+            <a:ext cx="207834" cy="194844"/>
           </a:xfrm>
           <a:prstGeom prst="rect">
             <a:avLst/>
@@ -15182,7 +15182,7 @@
               <a:buNone/>
             </a:pPr>
             <a:r>
-              <a:rPr lang="en-US" sz="1100" b="1" dirty="0">
+              <a:rPr lang="en-US" sz="780" b="1" dirty="0">
                 <a:solidFill>
                   <a:srgbClr val="FFFFFF"/>
                 </a:solidFill>
@@ -15192,7 +15192,7 @@
               </a:rPr>
               <a:t>2</a:t>
             </a:r>
-            <a:endParaRPr lang="en-US" sz="1100" dirty="0"/>
+            <a:endParaRPr lang="en-US" sz="780" dirty="0"/>
           </a:p>
         </p:txBody>
       </p:sp>
@@ -15204,8 +15204,8 @@
         </p:nvSpPr>
         <p:spPr>
           <a:xfrm>
-            <a:off x="941832" y="2708795"/>
-            <a:ext cx="5166360" cy="457200"/>
+            <a:off x="1993563" y="1950496"/>
+            <a:ext cx="3669564" cy="324740"/>
           </a:xfrm>
           <a:prstGeom prst="rect">
             <a:avLst/>
@@ -15224,7 +15224,7 @@
               <a:buNone/>
             </a:pPr>
             <a:r>
-              <a:rPr lang="en-US" sz="1150" b="1" dirty="0">
+              <a:rPr lang="en-US" sz="820" b="1" dirty="0">
                 <a:solidFill>
                   <a:srgbClr val="1A2733"/>
                 </a:solidFill>
@@ -15234,7 +15234,7 @@
               </a:rPr>
               <a:t>Mở xong bấm «Bắt đầu» cho xe chạy thử một vòng</a:t>
             </a:r>
-            <a:endParaRPr lang="en-US" sz="1150" dirty="0"/>
+            <a:endParaRPr lang="en-US" sz="820" dirty="0"/>
           </a:p>
           <a:p>
             <a:pPr indent="0" marL="0">
@@ -15244,7 +15244,7 @@
               <a:buNone/>
             </a:pPr>
             <a:r>
-              <a:rPr lang="en-US" sz="1050" dirty="0">
+              <a:rPr lang="en-US" sz="750" dirty="0">
                 <a:solidFill>
                   <a:srgbClr val="5F7183"/>
                 </a:solidFill>
@@ -15254,7 +15254,7 @@
               </a:rPr>
               <a:t>打開之後按「開始」，先讓車子跑一圈看看</a:t>
             </a:r>
-            <a:endParaRPr lang="en-US" sz="1150" dirty="0"/>
+            <a:endParaRPr lang="en-US" sz="820" dirty="0"/>
           </a:p>
         </p:txBody>
       </p:sp>
@@ -15266,8 +15266,8 @@
         </p:nvSpPr>
         <p:spPr>
           <a:xfrm>
-            <a:off x="539496" y="3239147"/>
-            <a:ext cx="292608" cy="292608"/>
+            <a:off x="1707792" y="2327195"/>
+            <a:ext cx="207834" cy="207834"/>
           </a:xfrm>
           <a:prstGeom prst="ellipse">
             <a:avLst/>
@@ -15286,8 +15286,8 @@
         </p:nvSpPr>
         <p:spPr>
           <a:xfrm>
-            <a:off x="539496" y="3248291"/>
-            <a:ext cx="292608" cy="274320"/>
+            <a:off x="1707792" y="2333689"/>
+            <a:ext cx="207834" cy="194844"/>
           </a:xfrm>
           <a:prstGeom prst="rect">
             <a:avLst/>
@@ -15303,7 +15303,7 @@
               <a:buNone/>
             </a:pPr>
             <a:r>
-              <a:rPr lang="en-US" sz="1100" b="1" dirty="0">
+              <a:rPr lang="en-US" sz="780" b="1" dirty="0">
                 <a:solidFill>
                   <a:srgbClr val="FFFFFF"/>
                 </a:solidFill>
@@ -15313,7 +15313,7 @@
               </a:rPr>
               <a:t>3</a:t>
             </a:r>
-            <a:endParaRPr lang="en-US" sz="1100" dirty="0"/>
+            <a:endParaRPr lang="en-US" sz="780" dirty="0"/>
           </a:p>
         </p:txBody>
       </p:sp>
@@ -15325,8 +15325,8 @@
         </p:nvSpPr>
         <p:spPr>
           <a:xfrm>
-            <a:off x="941832" y="3202571"/>
-            <a:ext cx="5166360" cy="457200"/>
+            <a:off x="1993563" y="2301215"/>
+            <a:ext cx="3669564" cy="324740"/>
           </a:xfrm>
           <a:prstGeom prst="rect">
             <a:avLst/>
@@ -15345,7 +15345,7 @@
               <a:buNone/>
             </a:pPr>
             <a:r>
-              <a:rPr lang="en-US" sz="1150" b="1" dirty="0">
+              <a:rPr lang="en-US" sz="820" b="1" dirty="0">
                 <a:solidFill>
                   <a:srgbClr val="1A2733"/>
                 </a:solidFill>
@@ -15355,7 +15355,7 @@
               </a:rPr>
               <a:t>Không cần mạng sau khi đã mở — tiết 3 lên máy sẽ dùng suốt 50 phút</a:t>
             </a:r>
-            <a:endParaRPr lang="en-US" sz="1150" dirty="0"/>
+            <a:endParaRPr lang="en-US" sz="820" dirty="0"/>
           </a:p>
           <a:p>
             <a:pPr indent="0" marL="0">
@@ -15365,7 +15365,7 @@
               <a:buNone/>
             </a:pPr>
             <a:r>
-              <a:rPr lang="en-US" sz="1050" dirty="0">
+              <a:rPr lang="en-US" sz="750" dirty="0">
                 <a:solidFill>
                   <a:srgbClr val="5F7183"/>
                 </a:solidFill>
@@ -15375,7 +15375,7 @@
               </a:rPr>
               <a:t>打開之後不需要網路——第三節上機會用它整整 50 分鐘</a:t>
             </a:r>
-            <a:endParaRPr lang="en-US" sz="1150" dirty="0"/>
+            <a:endParaRPr lang="en-US" sz="820" dirty="0"/>
           </a:p>
         </p:txBody>
       </p:sp>
@@ -15387,8 +15387,8 @@
         </p:nvSpPr>
         <p:spPr>
           <a:xfrm>
-            <a:off x="502920" y="3913632"/>
-            <a:ext cx="8138160" cy="603504"/>
+            <a:off x="1681812" y="2806268"/>
+            <a:ext cx="5780375" cy="428657"/>
           </a:xfrm>
           <a:prstGeom prst="roundRect">
             <a:avLst>
@@ -15414,8 +15414,8 @@
         </p:nvSpPr>
         <p:spPr>
           <a:xfrm>
-            <a:off x="685800" y="3977640"/>
-            <a:ext cx="7772400" cy="493776"/>
+            <a:off x="1811708" y="2851732"/>
+            <a:ext cx="5520583" cy="350719"/>
           </a:xfrm>
           <a:prstGeom prst="rect">
             <a:avLst/>
@@ -15434,7 +15434,7 @@
               <a:buNone/>
             </a:pPr>
             <a:r>
-              <a:rPr lang="en-US" sz="1200" b="1" dirty="0">
+              <a:rPr lang="en-US" sz="850" b="1" dirty="0">
                 <a:solidFill>
                   <a:srgbClr val="7A4E00"/>
                 </a:solidFill>
@@ -15444,7 +15444,7 @@
               </a:rPr>
               <a:t>Đây là mô phỏng của tuần trước, có thêm một nút mới mà cuối buổi ta sẽ dùng tới.</a:t>
             </a:r>
-            <a:endParaRPr lang="en-US" sz="1200" dirty="0"/>
+            <a:endParaRPr lang="en-US" sz="850" dirty="0"/>
           </a:p>
           <a:p>
             <a:pPr indent="0" marL="0">
@@ -15454,7 +15454,7 @@
               <a:buNone/>
             </a:pPr>
             <a:r>
-              <a:rPr lang="en-US" sz="1100" dirty="0">
+              <a:rPr lang="en-US" sz="780" dirty="0">
                 <a:solidFill>
                   <a:srgbClr val="7A4E00"/>
                 </a:solidFill>
@@ -15464,7 +15464,7 @@
               </a:rPr>
               <a:t>就是上週那個模擬器，多了一個按鈕，今天最後會用到。</a:t>
             </a:r>
-            <a:endParaRPr lang="en-US" sz="1200" dirty="0"/>
+            <a:endParaRPr lang="en-US" sz="850" dirty="0"/>
           </a:p>
         </p:txBody>
       </p:sp>
@@ -15484,8 +15484,8 @@
         </p:blipFill>
         <p:spPr>
           <a:xfrm>
-            <a:off x="7516368" y="4718304"/>
-            <a:ext cx="1097280" cy="242439"/>
+            <a:off x="6663327" y="3338842"/>
+            <a:ext cx="779376" cy="172200"/>
           </a:xfrm>
           <a:prstGeom prst="rect">
             <a:avLst/>
@@ -15500,8 +15500,8 @@
         </p:nvSpPr>
         <p:spPr>
           <a:xfrm>
-            <a:off x="109728" y="4791456"/>
-            <a:ext cx="822960" cy="256032"/>
+            <a:off x="1402536" y="3390800"/>
+            <a:ext cx="584532" cy="181855"/>
           </a:xfrm>
           <a:prstGeom prst="rect">
             <a:avLst/>
@@ -15517,7 +15517,7 @@
               <a:buNone/>
             </a:pPr>
             <a:r>
-              <a:rPr lang="en-US" sz="900" dirty="0">
+              <a:rPr lang="en-US" sz="640" dirty="0">
                 <a:solidFill>
                   <a:srgbClr val="5F7183"/>
                 </a:solidFill>
@@ -15527,7 +15527,7 @@
               </a:rPr>
               <a:t>2 / 18</a:t>
             </a:r>
-            <a:endParaRPr lang="en-US" sz="900" dirty="0"/>
+            <a:endParaRPr lang="en-US" sz="640" dirty="0"/>
           </a:p>
         </p:txBody>
       </p:sp>
@@ -15539,8 +15539,8 @@
         </p:nvSpPr>
         <p:spPr>
           <a:xfrm>
-            <a:off x="960120" y="4791456"/>
-            <a:ext cx="2011680" cy="256032"/>
+            <a:off x="2006553" y="3390800"/>
+            <a:ext cx="1428857" cy="181855"/>
           </a:xfrm>
           <a:prstGeom prst="rect">
             <a:avLst/>
@@ -15556,7 +15556,7 @@
               <a:buNone/>
             </a:pPr>
             <a:r>
-              <a:rPr lang="en-US" sz="900" dirty="0">
+              <a:rPr lang="en-US" sz="640" dirty="0">
                 <a:solidFill>
                   <a:srgbClr val="5F7183"/>
                 </a:solidFill>
@@ -15566,7 +15566,7 @@
               </a:rPr>
               <a:t>Tiết 1 · 第 1 節</a:t>
             </a:r>
-            <a:endParaRPr lang="en-US" sz="900" dirty="0"/>
+            <a:endParaRPr lang="en-US" sz="640" dirty="0"/>
           </a:p>
         </p:txBody>
       </p:sp>
@@ -15610,8 +15610,8 @@
         </p:nvSpPr>
         <p:spPr>
           <a:xfrm>
-            <a:off x="6766560" y="-1371600"/>
-            <a:ext cx="4206240" cy="4206240"/>
+            <a:off x="6130753" y="-947729"/>
+            <a:ext cx="2987610" cy="2987610"/>
           </a:xfrm>
           <a:prstGeom prst="ellipse">
             <a:avLst/>
@@ -15635,8 +15635,8 @@
         </p:nvSpPr>
         <p:spPr>
           <a:xfrm>
-            <a:off x="7863840" y="3108960"/>
-            <a:ext cx="2560320" cy="2560320"/>
+            <a:off x="7104973" y="1520297"/>
+            <a:ext cx="1688649" cy="1688649"/>
           </a:xfrm>
           <a:prstGeom prst="ellipse">
             <a:avLst/>
@@ -15657,8 +15657,8 @@
         </p:nvSpPr>
         <p:spPr>
           <a:xfrm>
-            <a:off x="502920" y="1691640"/>
-            <a:ext cx="4572000" cy="310896"/>
+            <a:off x="1681812" y="1228031"/>
+            <a:ext cx="3247402" cy="220823"/>
           </a:xfrm>
           <a:prstGeom prst="rect">
             <a:avLst/>
@@ -15673,7 +15673,7 @@
             <a:pPr indent="0" marL="0">
               <a:buNone/>
             </a:pPr>
-            <a:endParaRPr lang="en-US" sz="1350" dirty="0"/>
+            <a:endParaRPr lang="en-US" sz="960" dirty="0"/>
           </a:p>
         </p:txBody>
       </p:sp>
@@ -15685,8 +15685,8 @@
         </p:nvSpPr>
         <p:spPr>
           <a:xfrm>
-            <a:off x="502920" y="2048256"/>
-            <a:ext cx="7315200" cy="1188720"/>
+            <a:off x="1681812" y="1481328"/>
+            <a:ext cx="5195843" cy="844324"/>
           </a:xfrm>
           <a:prstGeom prst="rect">
             <a:avLst/>
@@ -15705,7 +15705,7 @@
               <a:buNone/>
             </a:pPr>
             <a:r>
-              <a:rPr lang="en-US" sz="2900" b="1" dirty="0">
+              <a:rPr lang="en-US" sz="2060" b="1" dirty="0">
                 <a:solidFill>
                   <a:srgbClr val="FFFFFF"/>
                 </a:solidFill>
@@ -15715,7 +15715,7 @@
               </a:rPr>
               <a:t>Ba thanh trượt, ba thông số thật</a:t>
             </a:r>
-            <a:endParaRPr lang="en-US" sz="2900" dirty="0"/>
+            <a:endParaRPr lang="en-US" sz="2060" dirty="0"/>
           </a:p>
           <a:p>
             <a:pPr indent="0" marL="0">
@@ -15725,7 +15725,7 @@
               <a:buNone/>
             </a:pPr>
             <a:r>
-              <a:rPr lang="en-US" sz="1700" dirty="0">
+              <a:rPr lang="en-US" sz="1210" dirty="0">
                 <a:solidFill>
                   <a:srgbClr val="AFC3D4"/>
                 </a:solidFill>
@@ -15735,7 +15735,7 @@
               </a:rPr>
               <a:t>三個滑桿，三個真的規格</a:t>
             </a:r>
-            <a:endParaRPr lang="en-US" sz="2900" dirty="0"/>
+            <a:endParaRPr lang="en-US" sz="2060" dirty="0"/>
           </a:p>
         </p:txBody>
       </p:sp>
@@ -15747,8 +15747,8 @@
         </p:nvSpPr>
         <p:spPr>
           <a:xfrm>
-            <a:off x="109728" y="4791456"/>
-            <a:ext cx="822960" cy="256032"/>
+            <a:off x="1402536" y="3390800"/>
+            <a:ext cx="584532" cy="181855"/>
           </a:xfrm>
           <a:prstGeom prst="rect">
             <a:avLst/>
@@ -15764,7 +15764,7 @@
               <a:buNone/>
             </a:pPr>
             <a:r>
-              <a:rPr lang="en-US" sz="900" dirty="0">
+              <a:rPr lang="en-US" sz="640" dirty="0">
                 <a:solidFill>
                   <a:srgbClr val="9FB3C8"/>
                 </a:solidFill>
@@ -15774,7 +15774,7 @@
               </a:rPr>
               <a:t>3 / 18</a:t>
             </a:r>
-            <a:endParaRPr lang="en-US" sz="900" dirty="0"/>
+            <a:endParaRPr lang="en-US" sz="640" dirty="0"/>
           </a:p>
         </p:txBody>
       </p:sp>
@@ -15786,8 +15786,8 @@
         </p:nvSpPr>
         <p:spPr>
           <a:xfrm>
-            <a:off x="960120" y="4791456"/>
-            <a:ext cx="2011680" cy="256032"/>
+            <a:off x="2006553" y="3390800"/>
+            <a:ext cx="1428857" cy="181855"/>
           </a:xfrm>
           <a:prstGeom prst="rect">
             <a:avLst/>
@@ -15803,7 +15803,7 @@
               <a:buNone/>
             </a:pPr>
             <a:r>
-              <a:rPr lang="en-US" sz="900" dirty="0">
+              <a:rPr lang="en-US" sz="640" dirty="0">
                 <a:solidFill>
                   <a:srgbClr val="9FB3C8"/>
                 </a:solidFill>
@@ -15813,7 +15813,7 @@
               </a:rPr>
               <a:t>Tiết 1 · 第 1 節</a:t>
             </a:r>
-            <a:endParaRPr lang="en-US" sz="900" dirty="0"/>
+            <a:endParaRPr lang="en-US" sz="640" dirty="0"/>
           </a:p>
         </p:txBody>
       </p:sp>
@@ -15850,8 +15850,8 @@
         </p:nvSpPr>
         <p:spPr>
           <a:xfrm>
-            <a:off x="502920" y="365760"/>
-            <a:ext cx="8138160" cy="274320"/>
+            <a:off x="1681812" y="286284"/>
+            <a:ext cx="5780375" cy="194844"/>
           </a:xfrm>
           <a:prstGeom prst="rect">
             <a:avLst/>
@@ -15867,7 +15867,7 @@
               <a:buNone/>
             </a:pPr>
             <a:r>
-              <a:rPr lang="en-US" sz="1300" b="1" dirty="0">
+              <a:rPr lang="en-US" sz="920" b="1" dirty="0">
                 <a:solidFill>
                   <a:srgbClr val="007F72"/>
                 </a:solidFill>
@@ -15877,7 +15877,7 @@
               </a:rPr>
               <a:t>1 / 3　Số tia · 射線數</a:t>
             </a:r>
-            <a:endParaRPr lang="en-US" sz="1300" dirty="0"/>
+            <a:endParaRPr lang="en-US" sz="920" dirty="0"/>
           </a:p>
         </p:txBody>
       </p:sp>
@@ -15889,8 +15889,8 @@
         </p:nvSpPr>
         <p:spPr>
           <a:xfrm>
-            <a:off x="502920" y="877824"/>
-            <a:ext cx="1481328" cy="1920240"/>
+            <a:off x="1681812" y="649993"/>
+            <a:ext cx="1052158" cy="1363909"/>
           </a:xfrm>
           <a:prstGeom prst="roundRect">
             <a:avLst>
@@ -15916,8 +15916,8 @@
         </p:nvSpPr>
         <p:spPr>
           <a:xfrm flipV="1">
-            <a:off x="802112" y="1195009"/>
-            <a:ext cx="714052" cy="642935"/>
+            <a:off x="1894322" y="875283"/>
+            <a:ext cx="507177" cy="456664"/>
           </a:xfrm>
           <a:prstGeom prst="line">
             <a:avLst/>
@@ -15939,8 +15939,8 @@
         </p:nvSpPr>
         <p:spPr>
           <a:xfrm flipV="1">
-            <a:off x="802112" y="1386852"/>
-            <a:ext cx="848382" cy="451092"/>
+            <a:off x="1894322" y="1011545"/>
+            <a:ext cx="602589" cy="320402"/>
           </a:xfrm>
           <a:prstGeom prst="line">
             <a:avLst/>
@@ -15962,8 +15962,8 @@
         </p:nvSpPr>
         <p:spPr>
           <a:xfrm flipV="1">
-            <a:off x="802112" y="1605493"/>
-            <a:ext cx="932310" cy="232451"/>
+            <a:off x="1894322" y="1166842"/>
+            <a:ext cx="662202" cy="165105"/>
           </a:xfrm>
           <a:prstGeom prst="line">
             <a:avLst/>
@@ -15985,8 +15985,8 @@
         </p:nvSpPr>
         <p:spPr>
           <a:xfrm>
-            <a:off x="802112" y="1837944"/>
-            <a:ext cx="960852" cy="0"/>
+            <a:off x="1894322" y="1331948"/>
+            <a:ext cx="682474" cy="0"/>
           </a:xfrm>
           <a:prstGeom prst="line">
             <a:avLst/>
@@ -16008,8 +16008,8 @@
         </p:nvSpPr>
         <p:spPr>
           <a:xfrm>
-            <a:off x="802112" y="1837944"/>
-            <a:ext cx="848382" cy="451092"/>
+            <a:off x="1894322" y="1331948"/>
+            <a:ext cx="602589" cy="320402"/>
           </a:xfrm>
           <a:prstGeom prst="line">
             <a:avLst/>
@@ -16031,8 +16031,8 @@
         </p:nvSpPr>
         <p:spPr>
           <a:xfrm>
-            <a:off x="802112" y="1837944"/>
-            <a:ext cx="714052" cy="642935"/>
+            <a:off x="1894322" y="1331948"/>
+            <a:ext cx="507177" cy="456664"/>
           </a:xfrm>
           <a:prstGeom prst="line">
             <a:avLst/>
@@ -16054,8 +16054,8 @@
         </p:nvSpPr>
         <p:spPr>
           <a:xfrm>
-            <a:off x="756666" y="1792498"/>
-            <a:ext cx="90891" cy="90891"/>
+            <a:off x="1862043" y="1299668"/>
+            <a:ext cx="64558" cy="64558"/>
           </a:xfrm>
           <a:prstGeom prst="ellipse">
             <a:avLst/>
@@ -16074,8 +16074,8 @@
         </p:nvSpPr>
         <p:spPr>
           <a:xfrm>
-            <a:off x="1408453" y="1940386"/>
-            <a:ext cx="129845" cy="129845"/>
+            <a:off x="2324994" y="1404710"/>
+            <a:ext cx="92226" cy="92226"/>
           </a:xfrm>
           <a:prstGeom prst="roundRect">
             <a:avLst>
@@ -16096,8 +16096,8 @@
         </p:nvSpPr>
         <p:spPr>
           <a:xfrm>
-            <a:off x="2295144" y="786384"/>
-            <a:ext cx="6345936" cy="787475"/>
+            <a:off x="2954794" y="585045"/>
+            <a:ext cx="4507394" cy="559328"/>
           </a:xfrm>
           <a:prstGeom prst="rect">
             <a:avLst/>
@@ -16116,7 +16116,7 @@
               <a:buNone/>
             </a:pPr>
             <a:r>
-              <a:rPr lang="en-US" sz="1800" b="1" dirty="0">
+              <a:rPr lang="en-US" sz="1280" b="1" dirty="0">
                 <a:solidFill>
                   <a:srgbClr val="0B1F3A"/>
                 </a:solidFill>
@@ -16126,7 +16126,7 @@
               </a:rPr>
               <a:t>Số tia = độ phân giải: cùng một góc nhìn, chia được thành bao nhiêu hướng</a:t>
             </a:r>
-            <a:endParaRPr lang="en-US" sz="1800" dirty="0"/>
+            <a:endParaRPr lang="en-US" sz="1280" dirty="0"/>
           </a:p>
           <a:p>
             <a:pPr indent="0" marL="0">
@@ -16136,7 +16136,7 @@
               <a:buNone/>
             </a:pPr>
             <a:r>
-              <a:rPr lang="en-US" sz="1250" dirty="0">
+              <a:rPr lang="en-US" sz="890" dirty="0">
                 <a:solidFill>
                   <a:srgbClr val="007F72"/>
                 </a:solidFill>
@@ -16146,7 +16146,7 @@
               </a:rPr>
               <a:t>射線數 ＝ 解析度：同樣的視野，切成幾個方向去看</a:t>
             </a:r>
-            <a:endParaRPr lang="en-US" sz="1800" dirty="0"/>
+            <a:endParaRPr lang="en-US" sz="1280" dirty="0"/>
           </a:p>
         </p:txBody>
       </p:sp>
@@ -16158,8 +16158,8 @@
         </p:nvSpPr>
         <p:spPr>
           <a:xfrm>
-            <a:off x="2295144" y="1665299"/>
-            <a:ext cx="1060704" cy="400118"/>
+            <a:off x="2954794" y="1209321"/>
+            <a:ext cx="753397" cy="284196"/>
           </a:xfrm>
           <a:prstGeom prst="roundRect">
             <a:avLst>
@@ -16180,8 +16180,8 @@
         </p:nvSpPr>
         <p:spPr>
           <a:xfrm>
-            <a:off x="2350008" y="1701875"/>
-            <a:ext cx="950976" cy="345254"/>
+            <a:off x="2993763" y="1235301"/>
+            <a:ext cx="675460" cy="245227"/>
           </a:xfrm>
           <a:prstGeom prst="rect">
             <a:avLst/>
@@ -16200,7 +16200,7 @@
               <a:buNone/>
             </a:pPr>
             <a:r>
-              <a:rPr lang="en-US" sz="900" b="1" dirty="0">
+              <a:rPr lang="en-US" sz="640" b="1" dirty="0">
                 <a:solidFill>
                   <a:srgbClr val="FFFFFF"/>
                 </a:solidFill>
@@ -16210,7 +16210,7 @@
               </a:rPr>
               <a:t>Tên thông số</a:t>
             </a:r>
-            <a:endParaRPr lang="en-US" sz="900" dirty="0"/>
+            <a:endParaRPr lang="en-US" sz="640" dirty="0"/>
           </a:p>
           <a:p>
             <a:pPr algn="ctr" indent="0" marL="0">
@@ -16220,7 +16220,7 @@
               <a:buNone/>
             </a:pPr>
             <a:r>
-              <a:rPr lang="en-US" sz="850" dirty="0">
+              <a:rPr lang="en-US" sz="600" dirty="0">
                 <a:solidFill>
                   <a:srgbClr val="FFFFFF"/>
                 </a:solidFill>
@@ -16230,7 +16230,7 @@
               </a:rPr>
               <a:t>規格表上叫</a:t>
             </a:r>
-            <a:endParaRPr lang="en-US" sz="900" dirty="0"/>
+            <a:endParaRPr lang="en-US" sz="640" dirty="0"/>
           </a:p>
         </p:txBody>
       </p:sp>
@@ -16242,8 +16242,8 @@
         </p:nvSpPr>
         <p:spPr>
           <a:xfrm>
-            <a:off x="3502152" y="1665299"/>
-            <a:ext cx="5138928" cy="454982"/>
+            <a:off x="3812108" y="1209321"/>
+            <a:ext cx="3650080" cy="323165"/>
           </a:xfrm>
           <a:prstGeom prst="rect">
             <a:avLst/>
@@ -16262,7 +16262,7 @@
               <a:buNone/>
             </a:pPr>
             <a:r>
-              <a:rPr lang="en-US" sz="1100" dirty="0">
+              <a:rPr lang="en-US" sz="780" dirty="0">
                 <a:solidFill>
                   <a:srgbClr val="1A2733"/>
                 </a:solidFill>
@@ -16272,7 +16272,7 @@
               </a:rPr>
               <a:t>Resolution · độ phân giải</a:t>
             </a:r>
-            <a:endParaRPr lang="en-US" sz="1100" dirty="0"/>
+            <a:endParaRPr lang="en-US" sz="780" dirty="0"/>
           </a:p>
           <a:p>
             <a:pPr indent="0" marL="0">
@@ -16282,7 +16282,7 @@
               <a:buNone/>
             </a:pPr>
             <a:r>
-              <a:rPr lang="en-US" sz="1000" dirty="0">
+              <a:rPr lang="en-US" sz="710" dirty="0">
                 <a:solidFill>
                   <a:srgbClr val="5F7183"/>
                 </a:solidFill>
@@ -16292,7 +16292,7 @@
               </a:rPr>
               <a:t>Resolution　解析度</a:t>
             </a:r>
-            <a:endParaRPr lang="en-US" sz="1100" dirty="0"/>
+            <a:endParaRPr lang="en-US" sz="780" dirty="0"/>
           </a:p>
         </p:txBody>
       </p:sp>
@@ -16304,8 +16304,8 @@
         </p:nvSpPr>
         <p:spPr>
           <a:xfrm>
-            <a:off x="2295144" y="2184289"/>
-            <a:ext cx="1060704" cy="400118"/>
+            <a:off x="2954794" y="1577950"/>
+            <a:ext cx="753397" cy="284196"/>
           </a:xfrm>
           <a:prstGeom prst="roundRect">
             <a:avLst>
@@ -16326,8 +16326,8 @@
         </p:nvSpPr>
         <p:spPr>
           <a:xfrm>
-            <a:off x="2350008" y="2220865"/>
-            <a:ext cx="950976" cy="345254"/>
+            <a:off x="2993763" y="1603929"/>
+            <a:ext cx="675460" cy="245227"/>
           </a:xfrm>
           <a:prstGeom prst="rect">
             <a:avLst/>
@@ -16346,7 +16346,7 @@
               <a:buNone/>
             </a:pPr>
             <a:r>
-              <a:rPr lang="en-US" sz="900" b="1" dirty="0">
+              <a:rPr lang="en-US" sz="640" b="1" dirty="0">
                 <a:solidFill>
                   <a:srgbClr val="FFFFFF"/>
                 </a:solidFill>
@@ -16356,7 +16356,7 @@
               </a:rPr>
               <a:t>Mô phỏng của ta</a:t>
             </a:r>
-            <a:endParaRPr lang="en-US" sz="900" dirty="0"/>
+            <a:endParaRPr lang="en-US" sz="640" dirty="0"/>
           </a:p>
           <a:p>
             <a:pPr algn="ctr" indent="0" marL="0">
@@ -16366,7 +16366,7 @@
               <a:buNone/>
             </a:pPr>
             <a:r>
-              <a:rPr lang="en-US" sz="850" dirty="0">
+              <a:rPr lang="en-US" sz="600" dirty="0">
                 <a:solidFill>
                   <a:srgbClr val="FFFFFF"/>
                 </a:solidFill>
@@ -16376,7 +16376,7 @@
               </a:rPr>
               <a:t>我們的模擬器</a:t>
             </a:r>
-            <a:endParaRPr lang="en-US" sz="900" dirty="0"/>
+            <a:endParaRPr lang="en-US" sz="640" dirty="0"/>
           </a:p>
         </p:txBody>
       </p:sp>
@@ -16388,8 +16388,8 @@
         </p:nvSpPr>
         <p:spPr>
           <a:xfrm>
-            <a:off x="3502152" y="2184289"/>
-            <a:ext cx="5138928" cy="454982"/>
+            <a:off x="3812108" y="1577950"/>
+            <a:ext cx="3650080" cy="323165"/>
           </a:xfrm>
           <a:prstGeom prst="rect">
             <a:avLst/>
@@ -16408,7 +16408,7 @@
               <a:buNone/>
             </a:pPr>
             <a:r>
-              <a:rPr lang="en-US" sz="1100" dirty="0">
+              <a:rPr lang="en-US" sz="780" dirty="0">
                 <a:solidFill>
                   <a:srgbClr val="1A2733"/>
                 </a:solidFill>
@@ -16418,7 +16418,7 @@
               </a:rPr>
               <a:t>3 đến 60 tia, bạn tự kéo</a:t>
             </a:r>
-            <a:endParaRPr lang="en-US" sz="1100" dirty="0"/>
+            <a:endParaRPr lang="en-US" sz="780" dirty="0"/>
           </a:p>
           <a:p>
             <a:pPr indent="0" marL="0">
@@ -16428,7 +16428,7 @@
               <a:buNone/>
             </a:pPr>
             <a:r>
-              <a:rPr lang="en-US" sz="1000" dirty="0">
+              <a:rPr lang="en-US" sz="710" dirty="0">
                 <a:solidFill>
                   <a:srgbClr val="5F7183"/>
                 </a:solidFill>
@@ -16438,7 +16438,7 @@
               </a:rPr>
               <a:t>3 到 60 條，自己拉</a:t>
             </a:r>
-            <a:endParaRPr lang="en-US" sz="1100" dirty="0"/>
+            <a:endParaRPr lang="en-US" sz="780" dirty="0"/>
           </a:p>
         </p:txBody>
       </p:sp>
@@ -16450,8 +16450,8 @@
         </p:nvSpPr>
         <p:spPr>
           <a:xfrm>
-            <a:off x="2295144" y="2703280"/>
-            <a:ext cx="1060704" cy="400118"/>
+            <a:off x="2954794" y="1946578"/>
+            <a:ext cx="753397" cy="284196"/>
           </a:xfrm>
           <a:prstGeom prst="roundRect">
             <a:avLst>
@@ -16472,8 +16472,8 @@
         </p:nvSpPr>
         <p:spPr>
           <a:xfrm>
-            <a:off x="2350008" y="2739856"/>
-            <a:ext cx="950976" cy="345254"/>
+            <a:off x="2993763" y="1972558"/>
+            <a:ext cx="675460" cy="245227"/>
           </a:xfrm>
           <a:prstGeom prst="rect">
             <a:avLst/>
@@ -16492,7 +16492,7 @@
               <a:buNone/>
             </a:pPr>
             <a:r>
-              <a:rPr lang="en-US" sz="900" b="1" dirty="0">
+              <a:rPr lang="en-US" sz="640" b="1" dirty="0">
                 <a:solidFill>
                   <a:srgbClr val="3A2A00"/>
                 </a:solidFill>
@@ -16502,7 +16502,7 @@
               </a:rPr>
               <a:t>Xe thật</a:t>
             </a:r>
-            <a:endParaRPr lang="en-US" sz="900" dirty="0"/>
+            <a:endParaRPr lang="en-US" sz="640" dirty="0"/>
           </a:p>
           <a:p>
             <a:pPr algn="ctr" indent="0" marL="0">
@@ -16512,7 +16512,7 @@
               <a:buNone/>
             </a:pPr>
             <a:r>
-              <a:rPr lang="en-US" sz="850" dirty="0">
+              <a:rPr lang="en-US" sz="600" dirty="0">
                 <a:solidFill>
                   <a:srgbClr val="3A2A00"/>
                 </a:solidFill>
@@ -16522,7 +16522,7 @@
               </a:rPr>
               <a:t>真車</a:t>
             </a:r>
-            <a:endParaRPr lang="en-US" sz="900" dirty="0"/>
+            <a:endParaRPr lang="en-US" sz="640" dirty="0"/>
           </a:p>
         </p:txBody>
       </p:sp>
@@ -16534,8 +16534,8 @@
         </p:nvSpPr>
         <p:spPr>
           <a:xfrm>
-            <a:off x="3502152" y="2703280"/>
-            <a:ext cx="5138928" cy="454982"/>
+            <a:off x="3812108" y="1946578"/>
+            <a:ext cx="3650080" cy="323165"/>
           </a:xfrm>
           <a:prstGeom prst="rect">
             <a:avLst/>
@@ -16554,7 +16554,7 @@
               <a:buNone/>
             </a:pPr>
             <a:r>
-              <a:rPr lang="en-US" sz="1100" dirty="0">
+              <a:rPr lang="en-US" sz="780" dirty="0">
                 <a:solidFill>
                   <a:srgbClr val="1A2733"/>
                 </a:solidFill>
@@ -16564,7 +16564,7 @@
               </a:rPr>
               <a:t>LiDAR bắn vài trăm nghìn đến vài triệu điểm mỗi giây</a:t>
             </a:r>
-            <a:endParaRPr lang="en-US" sz="1100" dirty="0"/>
+            <a:endParaRPr lang="en-US" sz="780" dirty="0"/>
           </a:p>
           <a:p>
             <a:pPr indent="0" marL="0">
@@ -16574,7 +16574,7 @@
               <a:buNone/>
             </a:pPr>
             <a:r>
-              <a:rPr lang="en-US" sz="1000" dirty="0">
+              <a:rPr lang="en-US" sz="710" dirty="0">
                 <a:solidFill>
                   <a:srgbClr val="5F7183"/>
                 </a:solidFill>
@@ -16584,7 +16584,7 @@
               </a:rPr>
               <a:t>光達每秒打幾十萬到幾百萬個點</a:t>
             </a:r>
-            <a:endParaRPr lang="en-US" sz="1100" dirty="0"/>
+            <a:endParaRPr lang="en-US" sz="780" dirty="0"/>
           </a:p>
         </p:txBody>
       </p:sp>
@@ -16596,8 +16596,8 @@
         </p:nvSpPr>
         <p:spPr>
           <a:xfrm>
-            <a:off x="2295144" y="3222270"/>
-            <a:ext cx="1060704" cy="400118"/>
+            <a:off x="2954794" y="2315207"/>
+            <a:ext cx="753397" cy="284196"/>
           </a:xfrm>
           <a:prstGeom prst="roundRect">
             <a:avLst>
@@ -16618,8 +16618,8 @@
         </p:nvSpPr>
         <p:spPr>
           <a:xfrm>
-            <a:off x="2350008" y="3258846"/>
-            <a:ext cx="950976" cy="345254"/>
+            <a:off x="2993763" y="2341186"/>
+            <a:ext cx="675460" cy="245227"/>
           </a:xfrm>
           <a:prstGeom prst="rect">
             <a:avLst/>
@@ -16638,7 +16638,7 @@
               <a:buNone/>
             </a:pPr>
             <a:r>
-              <a:rPr lang="en-US" sz="900" b="1" dirty="0">
+              <a:rPr lang="en-US" sz="640" b="1" dirty="0">
                 <a:solidFill>
                   <a:srgbClr val="FFFFFF"/>
                 </a:solidFill>
@@ -16648,7 +16648,7 @@
               </a:rPr>
               <a:t>Kéo nhỏ thì sao</a:t>
             </a:r>
-            <a:endParaRPr lang="en-US" sz="900" dirty="0"/>
+            <a:endParaRPr lang="en-US" sz="640" dirty="0"/>
           </a:p>
           <a:p>
             <a:pPr algn="ctr" indent="0" marL="0">
@@ -16658,7 +16658,7 @@
               <a:buNone/>
             </a:pPr>
             <a:r>
-              <a:rPr lang="en-US" sz="850" dirty="0">
+              <a:rPr lang="en-US" sz="600" dirty="0">
                 <a:solidFill>
                   <a:srgbClr val="FFFFFF"/>
                 </a:solidFill>
@@ -16668,7 +16668,7 @@
               </a:rPr>
               <a:t>調小會怎樣</a:t>
             </a:r>
-            <a:endParaRPr lang="en-US" sz="900" dirty="0"/>
+            <a:endParaRPr lang="en-US" sz="640" dirty="0"/>
           </a:p>
         </p:txBody>
       </p:sp>
@@ -16680,8 +16680,8 @@
         </p:nvSpPr>
         <p:spPr>
           <a:xfrm>
-            <a:off x="3502152" y="3222270"/>
-            <a:ext cx="5138928" cy="454982"/>
+            <a:off x="3812108" y="2315207"/>
+            <a:ext cx="3650080" cy="323165"/>
           </a:xfrm>
           <a:prstGeom prst="rect">
             <a:avLst/>
@@ -16700,7 +16700,7 @@
               <a:buNone/>
             </a:pPr>
             <a:r>
-              <a:rPr lang="en-US" sz="1100" dirty="0">
+              <a:rPr lang="en-US" sz="780" dirty="0">
                 <a:solidFill>
                   <a:srgbClr val="1A2733"/>
                 </a:solidFill>
@@ -16710,7 +16710,7 @@
               </a:rPr>
               <a:t>Khe giữa hai tia rộng ra, xe máy lách qua khe thì không thấy</a:t>
             </a:r>
-            <a:endParaRPr lang="en-US" sz="1100" dirty="0"/>
+            <a:endParaRPr lang="en-US" sz="780" dirty="0"/>
           </a:p>
           <a:p>
             <a:pPr indent="0" marL="0">
@@ -16720,7 +16720,7 @@
               <a:buNone/>
             </a:pPr>
             <a:r>
-              <a:rPr lang="en-US" sz="1000" dirty="0">
+              <a:rPr lang="en-US" sz="710" dirty="0">
                 <a:solidFill>
                   <a:srgbClr val="5F7183"/>
                 </a:solidFill>
@@ -16730,7 +16730,7 @@
               </a:rPr>
               <a:t>射線之間的縫變寬，機車從縫裡鑽過去就看不到</a:t>
             </a:r>
-            <a:endParaRPr lang="en-US" sz="1100" dirty="0"/>
+            <a:endParaRPr lang="en-US" sz="780" dirty="0"/>
           </a:p>
         </p:txBody>
       </p:sp>
@@ -16742,8 +16742,8 @@
         </p:nvSpPr>
         <p:spPr>
           <a:xfrm>
-            <a:off x="502920" y="3931920"/>
-            <a:ext cx="8138160" cy="566928"/>
+            <a:off x="1681812" y="2819258"/>
+            <a:ext cx="5780375" cy="402678"/>
           </a:xfrm>
           <a:prstGeom prst="roundRect">
             <a:avLst>
@@ -16769,8 +16769,8 @@
         </p:nvSpPr>
         <p:spPr>
           <a:xfrm>
-            <a:off x="685800" y="3995928"/>
-            <a:ext cx="7772400" cy="457200"/>
+            <a:off x="1811708" y="2864721"/>
+            <a:ext cx="5520583" cy="324740"/>
           </a:xfrm>
           <a:prstGeom prst="rect">
             <a:avLst/>
@@ -16789,7 +16789,7 @@
               <a:buNone/>
             </a:pPr>
             <a:r>
-              <a:rPr lang="en-US" sz="1200" b="1" dirty="0">
+              <a:rPr lang="en-US" sz="850" b="1" dirty="0">
                 <a:solidFill>
                   <a:srgbClr val="7A4E00"/>
                 </a:solidFill>
@@ -16799,7 +16799,7 @@
               </a:rPr>
               <a:t>Tuần trước đã thấy: 3 tia thì xe máy biến mất giữa hai tia.</a:t>
             </a:r>
-            <a:endParaRPr lang="en-US" sz="1200" dirty="0"/>
+            <a:endParaRPr lang="en-US" sz="850" dirty="0"/>
           </a:p>
           <a:p>
             <a:pPr indent="0" marL="0">
@@ -16809,7 +16809,7 @@
               <a:buNone/>
             </a:pPr>
             <a:r>
-              <a:rPr lang="en-US" sz="1100" dirty="0">
+              <a:rPr lang="en-US" sz="780" dirty="0">
                 <a:solidFill>
                   <a:srgbClr val="7A4E00"/>
                 </a:solidFill>
@@ -16819,7 +16819,7 @@
               </a:rPr>
               <a:t>上週各位已經看過：只剩 3 條射線的時候，機車會從兩條線中間消失。</a:t>
             </a:r>
-            <a:endParaRPr lang="en-US" sz="1200" dirty="0"/>
+            <a:endParaRPr lang="en-US" sz="850" dirty="0"/>
           </a:p>
         </p:txBody>
       </p:sp>
@@ -16839,8 +16839,8 @@
         </p:blipFill>
         <p:spPr>
           <a:xfrm>
-            <a:off x="7516368" y="4718304"/>
-            <a:ext cx="1097280" cy="242439"/>
+            <a:off x="6663327" y="3338842"/>
+            <a:ext cx="779376" cy="172200"/>
           </a:xfrm>
           <a:prstGeom prst="rect">
             <a:avLst/>
@@ -16855,8 +16855,8 @@
         </p:nvSpPr>
         <p:spPr>
           <a:xfrm>
-            <a:off x="109728" y="4791456"/>
-            <a:ext cx="822960" cy="256032"/>
+            <a:off x="1402536" y="3390800"/>
+            <a:ext cx="584532" cy="181855"/>
           </a:xfrm>
           <a:prstGeom prst="rect">
             <a:avLst/>
@@ -16872,7 +16872,7 @@
               <a:buNone/>
             </a:pPr>
             <a:r>
-              <a:rPr lang="en-US" sz="900" dirty="0">
+              <a:rPr lang="en-US" sz="640" dirty="0">
                 <a:solidFill>
                   <a:srgbClr val="5F7183"/>
                 </a:solidFill>
@@ -16882,7 +16882,7 @@
               </a:rPr>
               <a:t>4 / 18</a:t>
             </a:r>
-            <a:endParaRPr lang="en-US" sz="900" dirty="0"/>
+            <a:endParaRPr lang="en-US" sz="640" dirty="0"/>
           </a:p>
         </p:txBody>
       </p:sp>
@@ -16894,8 +16894,8 @@
         </p:nvSpPr>
         <p:spPr>
           <a:xfrm>
-            <a:off x="960120" y="4791456"/>
-            <a:ext cx="2011680" cy="256032"/>
+            <a:off x="2006553" y="3390800"/>
+            <a:ext cx="1428857" cy="181855"/>
           </a:xfrm>
           <a:prstGeom prst="rect">
             <a:avLst/>
@@ -16911,7 +16911,7 @@
               <a:buNone/>
             </a:pPr>
             <a:r>
-              <a:rPr lang="en-US" sz="900" dirty="0">
+              <a:rPr lang="en-US" sz="640" dirty="0">
                 <a:solidFill>
                   <a:srgbClr val="5F7183"/>
                 </a:solidFill>
@@ -16921,7 +16921,7 @@
               </a:rPr>
               <a:t>Tiết 1 · 第 1 節</a:t>
             </a:r>
-            <a:endParaRPr lang="en-US" sz="900" dirty="0"/>
+            <a:endParaRPr lang="en-US" sz="640" dirty="0"/>
           </a:p>
         </p:txBody>
       </p:sp>
@@ -16958,8 +16958,8 @@
         </p:nvSpPr>
         <p:spPr>
           <a:xfrm>
-            <a:off x="502920" y="365760"/>
-            <a:ext cx="8138160" cy="274320"/>
+            <a:off x="1681812" y="286284"/>
+            <a:ext cx="5780375" cy="194844"/>
           </a:xfrm>
           <a:prstGeom prst="rect">
             <a:avLst/>
@@ -16975,7 +16975,7 @@
               <a:buNone/>
             </a:pPr>
             <a:r>
-              <a:rPr lang="en-US" sz="1300" b="1" dirty="0">
+              <a:rPr lang="en-US" sz="920" b="1" dirty="0">
                 <a:solidFill>
                   <a:srgbClr val="007F72"/>
                 </a:solidFill>
@@ -16985,7 +16985,7 @@
               </a:rPr>
               <a:t>2 / 3　Chiều dài tia · 射線長度</a:t>
             </a:r>
-            <a:endParaRPr lang="en-US" sz="1300" dirty="0"/>
+            <a:endParaRPr lang="en-US" sz="920" dirty="0"/>
           </a:p>
         </p:txBody>
       </p:sp>
@@ -16997,8 +16997,8 @@
         </p:nvSpPr>
         <p:spPr>
           <a:xfrm>
-            <a:off x="502920" y="877824"/>
-            <a:ext cx="1481328" cy="1920240"/>
+            <a:off x="1681812" y="649993"/>
+            <a:ext cx="1052158" cy="1363909"/>
           </a:xfrm>
           <a:prstGeom prst="roundRect">
             <a:avLst>
@@ -17024,8 +17024,8 @@
         </p:nvSpPr>
         <p:spPr>
           <a:xfrm>
-            <a:off x="659282" y="1868317"/>
-            <a:ext cx="311628" cy="143349"/>
+            <a:off x="1792873" y="1353521"/>
+            <a:ext cx="221343" cy="101818"/>
           </a:xfrm>
           <a:prstGeom prst="roundRect">
             <a:avLst>
@@ -17046,8 +17046,8 @@
         </p:nvSpPr>
         <p:spPr>
           <a:xfrm>
-            <a:off x="777701" y="1896986"/>
-            <a:ext cx="105953" cy="86009"/>
+            <a:off x="1876984" y="1373884"/>
+            <a:ext cx="75257" cy="61091"/>
           </a:xfrm>
           <a:prstGeom prst="roundRect">
             <a:avLst>
@@ -17068,8 +17068,8 @@
         </p:nvSpPr>
         <p:spPr>
           <a:xfrm>
-            <a:off x="1009863" y="1939991"/>
-            <a:ext cx="649224" cy="0"/>
+            <a:off x="2041884" y="1404430"/>
+            <a:ext cx="461131" cy="0"/>
           </a:xfrm>
           <a:prstGeom prst="line">
             <a:avLst/>
@@ -17092,8 +17092,8 @@
         </p:nvSpPr>
         <p:spPr>
           <a:xfrm>
-            <a:off x="1172169" y="1854952"/>
-            <a:ext cx="0" cy="170078"/>
+            <a:off x="2157167" y="1344028"/>
+            <a:ext cx="0" cy="120803"/>
           </a:xfrm>
           <a:prstGeom prst="line">
             <a:avLst/>
@@ -17115,8 +17115,8 @@
         </p:nvSpPr>
         <p:spPr>
           <a:xfrm>
-            <a:off x="1334475" y="1854952"/>
-            <a:ext cx="0" cy="170078"/>
+            <a:off x="2272450" y="1344028"/>
+            <a:ext cx="0" cy="120803"/>
           </a:xfrm>
           <a:prstGeom prst="line">
             <a:avLst/>
@@ -17138,8 +17138,8 @@
         </p:nvSpPr>
         <p:spPr>
           <a:xfrm>
-            <a:off x="1496781" y="1854952"/>
-            <a:ext cx="0" cy="170078"/>
+            <a:off x="2387733" y="1344028"/>
+            <a:ext cx="0" cy="120803"/>
           </a:xfrm>
           <a:prstGeom prst="line">
             <a:avLst/>
@@ -17161,8 +17161,8 @@
         </p:nvSpPr>
         <p:spPr>
           <a:xfrm>
-            <a:off x="1646103" y="1752905"/>
-            <a:ext cx="90891" cy="374172"/>
+            <a:off x="2493793" y="1271546"/>
+            <a:ext cx="64558" cy="265767"/>
           </a:xfrm>
           <a:prstGeom prst="roundRect">
             <a:avLst>
@@ -17183,8 +17183,8 @@
         </p:nvSpPr>
         <p:spPr>
           <a:xfrm>
-            <a:off x="2295144" y="786384"/>
-            <a:ext cx="6345936" cy="522366"/>
+            <a:off x="2954794" y="585045"/>
+            <a:ext cx="4507394" cy="371026"/>
           </a:xfrm>
           <a:prstGeom prst="rect">
             <a:avLst/>
@@ -17203,7 +17203,7 @@
               <a:buNone/>
             </a:pPr>
             <a:r>
-              <a:rPr lang="en-US" sz="1800" b="1" dirty="0">
+              <a:rPr lang="en-US" sz="1280" b="1" dirty="0">
                 <a:solidFill>
                   <a:srgbClr val="0B1F3A"/>
                 </a:solidFill>
@@ -17213,7 +17213,7 @@
               </a:rPr>
               <a:t>Chiều dài tia = tầm đo: nhìn được xa bao nhiêu mét</a:t>
             </a:r>
-            <a:endParaRPr lang="en-US" sz="1800" dirty="0"/>
+            <a:endParaRPr lang="en-US" sz="1280" dirty="0"/>
           </a:p>
           <a:p>
             <a:pPr indent="0" marL="0">
@@ -17223,7 +17223,7 @@
               <a:buNone/>
             </a:pPr>
             <a:r>
-              <a:rPr lang="en-US" sz="1250" dirty="0">
+              <a:rPr lang="en-US" sz="890" dirty="0">
                 <a:solidFill>
                   <a:srgbClr val="007F72"/>
                 </a:solidFill>
@@ -17233,7 +17233,7 @@
               </a:rPr>
               <a:t>射線長度 ＝ 測距範圍：看得到幾公尺</a:t>
             </a:r>
-            <a:endParaRPr lang="en-US" sz="1800" dirty="0"/>
+            <a:endParaRPr lang="en-US" sz="1280" dirty="0"/>
           </a:p>
         </p:txBody>
       </p:sp>
@@ -17245,8 +17245,8 @@
         </p:nvSpPr>
         <p:spPr>
           <a:xfrm>
-            <a:off x="2295144" y="1400190"/>
-            <a:ext cx="1060704" cy="400118"/>
+            <a:off x="2954794" y="1021019"/>
+            <a:ext cx="753397" cy="284196"/>
           </a:xfrm>
           <a:prstGeom prst="roundRect">
             <a:avLst>
@@ -17267,8 +17267,8 @@
         </p:nvSpPr>
         <p:spPr>
           <a:xfrm>
-            <a:off x="2350008" y="1436766"/>
-            <a:ext cx="950976" cy="345254"/>
+            <a:off x="2993763" y="1046998"/>
+            <a:ext cx="675460" cy="245227"/>
           </a:xfrm>
           <a:prstGeom prst="rect">
             <a:avLst/>
@@ -17287,7 +17287,7 @@
               <a:buNone/>
             </a:pPr>
             <a:r>
-              <a:rPr lang="en-US" sz="900" b="1" dirty="0">
+              <a:rPr lang="en-US" sz="640" b="1" dirty="0">
                 <a:solidFill>
                   <a:srgbClr val="FFFFFF"/>
                 </a:solidFill>
@@ -17297,7 +17297,7 @@
               </a:rPr>
               <a:t>Tên thông số</a:t>
             </a:r>
-            <a:endParaRPr lang="en-US" sz="900" dirty="0"/>
+            <a:endParaRPr lang="en-US" sz="640" dirty="0"/>
           </a:p>
           <a:p>
             <a:pPr algn="ctr" indent="0" marL="0">
@@ -17307,7 +17307,7 @@
               <a:buNone/>
             </a:pPr>
             <a:r>
-              <a:rPr lang="en-US" sz="850" dirty="0">
+              <a:rPr lang="en-US" sz="600" dirty="0">
                 <a:solidFill>
                   <a:srgbClr val="FFFFFF"/>
                 </a:solidFill>
@@ -17317,7 +17317,7 @@
               </a:rPr>
               <a:t>規格表上叫</a:t>
             </a:r>
-            <a:endParaRPr lang="en-US" sz="900" dirty="0"/>
+            <a:endParaRPr lang="en-US" sz="640" dirty="0"/>
           </a:p>
         </p:txBody>
       </p:sp>
@@ -17329,8 +17329,8 @@
         </p:nvSpPr>
         <p:spPr>
           <a:xfrm>
-            <a:off x="3502152" y="1400190"/>
-            <a:ext cx="5138928" cy="454982"/>
+            <a:off x="3812108" y="1021019"/>
+            <a:ext cx="3650080" cy="323165"/>
           </a:xfrm>
           <a:prstGeom prst="rect">
             <a:avLst/>
@@ -17349,7 +17349,7 @@
               <a:buNone/>
             </a:pPr>
             <a:r>
-              <a:rPr lang="en-US" sz="1100" dirty="0">
+              <a:rPr lang="en-US" sz="780" dirty="0">
                 <a:solidFill>
                   <a:srgbClr val="1A2733"/>
                 </a:solidFill>
@@ -17359,7 +17359,7 @@
               </a:rPr>
               <a:t>Range · tầm đo</a:t>
             </a:r>
-            <a:endParaRPr lang="en-US" sz="1100" dirty="0"/>
+            <a:endParaRPr lang="en-US" sz="780" dirty="0"/>
           </a:p>
           <a:p>
             <a:pPr indent="0" marL="0">
@@ -17369,7 +17369,7 @@
               <a:buNone/>
             </a:pPr>
             <a:r>
-              <a:rPr lang="en-US" sz="1000" dirty="0">
+              <a:rPr lang="en-US" sz="710" dirty="0">
                 <a:solidFill>
                   <a:srgbClr val="5F7183"/>
                 </a:solidFill>
@@ -17379,7 +17379,7 @@
               </a:rPr>
               <a:t>Range　測距範圍</a:t>
             </a:r>
-            <a:endParaRPr lang="en-US" sz="1100" dirty="0"/>
+            <a:endParaRPr lang="en-US" sz="780" dirty="0"/>
           </a:p>
         </p:txBody>
       </p:sp>
@@ -17391,8 +17391,8 @@
         </p:nvSpPr>
         <p:spPr>
           <a:xfrm>
-            <a:off x="2295144" y="1919180"/>
-            <a:ext cx="1060704" cy="400118"/>
+            <a:off x="2954794" y="1389648"/>
+            <a:ext cx="753397" cy="284196"/>
           </a:xfrm>
           <a:prstGeom prst="roundRect">
             <a:avLst>
@@ -17413,8 +17413,8 @@
         </p:nvSpPr>
         <p:spPr>
           <a:xfrm>
-            <a:off x="2350008" y="1955756"/>
-            <a:ext cx="950976" cy="345254"/>
+            <a:off x="2993763" y="1415627"/>
+            <a:ext cx="675460" cy="245227"/>
           </a:xfrm>
           <a:prstGeom prst="rect">
             <a:avLst/>
@@ -17433,7 +17433,7 @@
               <a:buNone/>
             </a:pPr>
             <a:r>
-              <a:rPr lang="en-US" sz="900" b="1" dirty="0">
+              <a:rPr lang="en-US" sz="640" b="1" dirty="0">
                 <a:solidFill>
                   <a:srgbClr val="FFFFFF"/>
                 </a:solidFill>
@@ -17443,7 +17443,7 @@
               </a:rPr>
               <a:t>Mô phỏng của ta</a:t>
             </a:r>
-            <a:endParaRPr lang="en-US" sz="900" dirty="0"/>
+            <a:endParaRPr lang="en-US" sz="640" dirty="0"/>
           </a:p>
           <a:p>
             <a:pPr algn="ctr" indent="0" marL="0">
@@ -17453,7 +17453,7 @@
               <a:buNone/>
             </a:pPr>
             <a:r>
-              <a:rPr lang="en-US" sz="850" dirty="0">
+              <a:rPr lang="en-US" sz="600" dirty="0">
                 <a:solidFill>
                   <a:srgbClr val="FFFFFF"/>
                 </a:solidFill>
@@ -17463,7 +17463,7 @@
               </a:rPr>
               <a:t>我們的模擬器</a:t>
             </a:r>
-            <a:endParaRPr lang="en-US" sz="900" dirty="0"/>
+            <a:endParaRPr lang="en-US" sz="640" dirty="0"/>
           </a:p>
         </p:txBody>
       </p:sp>
@@ -17475,8 +17475,8 @@
         </p:nvSpPr>
         <p:spPr>
           <a:xfrm>
-            <a:off x="3502152" y="1919180"/>
-            <a:ext cx="5138928" cy="454982"/>
+            <a:off x="3812108" y="1389648"/>
+            <a:ext cx="3650080" cy="323165"/>
           </a:xfrm>
           <a:prstGeom prst="rect">
             <a:avLst/>
@@ -17495,7 +17495,7 @@
               <a:buNone/>
             </a:pPr>
             <a:r>
-              <a:rPr lang="en-US" sz="1100" dirty="0">
+              <a:rPr lang="en-US" sz="780" dirty="0">
                 <a:solidFill>
                   <a:srgbClr val="1A2733"/>
                 </a:solidFill>
@@ -17505,7 +17505,7 @@
               </a:rPr>
               <a:t>10 đến 120 m</a:t>
             </a:r>
-            <a:endParaRPr lang="en-US" sz="1100" dirty="0"/>
+            <a:endParaRPr lang="en-US" sz="780" dirty="0"/>
           </a:p>
           <a:p>
             <a:pPr indent="0" marL="0">
@@ -17515,7 +17515,7 @@
               <a:buNone/>
             </a:pPr>
             <a:r>
-              <a:rPr lang="en-US" sz="1000" dirty="0">
+              <a:rPr lang="en-US" sz="710" dirty="0">
                 <a:solidFill>
                   <a:srgbClr val="5F7183"/>
                 </a:solidFill>
@@ -17525,7 +17525,7 @@
               </a:rPr>
               <a:t>10 到 120 公尺</a:t>
             </a:r>
-            <a:endParaRPr lang="en-US" sz="1100" dirty="0"/>
+            <a:endParaRPr lang="en-US" sz="780" dirty="0"/>
           </a:p>
         </p:txBody>
       </p:sp>
@@ -17537,8 +17537,8 @@
         </p:nvSpPr>
         <p:spPr>
           <a:xfrm>
-            <a:off x="2295144" y="2438170"/>
-            <a:ext cx="1060704" cy="400118"/>
+            <a:off x="2954794" y="1758276"/>
+            <a:ext cx="753397" cy="284196"/>
           </a:xfrm>
           <a:prstGeom prst="roundRect">
             <a:avLst>
@@ -17559,8 +17559,8 @@
         </p:nvSpPr>
         <p:spPr>
           <a:xfrm>
-            <a:off x="2350008" y="2474746"/>
-            <a:ext cx="950976" cy="345254"/>
+            <a:off x="2993763" y="1784255"/>
+            <a:ext cx="675460" cy="245227"/>
           </a:xfrm>
           <a:prstGeom prst="rect">
             <a:avLst/>
@@ -17579,7 +17579,7 @@
               <a:buNone/>
             </a:pPr>
             <a:r>
-              <a:rPr lang="en-US" sz="900" b="1" dirty="0">
+              <a:rPr lang="en-US" sz="640" b="1" dirty="0">
                 <a:solidFill>
                   <a:srgbClr val="3A2A00"/>
                 </a:solidFill>
@@ -17589,7 +17589,7 @@
               </a:rPr>
               <a:t>LiDAR xe thật</a:t>
             </a:r>
-            <a:endParaRPr lang="en-US" sz="900" dirty="0"/>
+            <a:endParaRPr lang="en-US" sz="640" dirty="0"/>
           </a:p>
           <a:p>
             <a:pPr algn="ctr" indent="0" marL="0">
@@ -17599,7 +17599,7 @@
               <a:buNone/>
             </a:pPr>
             <a:r>
-              <a:rPr lang="en-US" sz="850" dirty="0">
+              <a:rPr lang="en-US" sz="600" dirty="0">
                 <a:solidFill>
                   <a:srgbClr val="3A2A00"/>
                 </a:solidFill>
@@ -17609,7 +17609,7 @@
               </a:rPr>
               <a:t>真車的光達</a:t>
             </a:r>
-            <a:endParaRPr lang="en-US" sz="900" dirty="0"/>
+            <a:endParaRPr lang="en-US" sz="640" dirty="0"/>
           </a:p>
         </p:txBody>
       </p:sp>
@@ -17621,8 +17621,8 @@
         </p:nvSpPr>
         <p:spPr>
           <a:xfrm>
-            <a:off x="3502152" y="2438170"/>
-            <a:ext cx="5138928" cy="454982"/>
+            <a:off x="3812108" y="1758276"/>
+            <a:ext cx="3650080" cy="323165"/>
           </a:xfrm>
           <a:prstGeom prst="rect">
             <a:avLst/>
@@ -17641,7 +17641,7 @@
               <a:buNone/>
             </a:pPr>
             <a:r>
-              <a:rPr lang="en-US" sz="1100" dirty="0">
+              <a:rPr lang="en-US" sz="780" dirty="0">
                 <a:solidFill>
                   <a:srgbClr val="1A2733"/>
                 </a:solidFill>
@@ -17651,7 +17651,7 @@
               </a:rPr>
               <a:t>150 đến 300 m</a:t>
             </a:r>
-            <a:endParaRPr lang="en-US" sz="1100" dirty="0"/>
+            <a:endParaRPr lang="en-US" sz="780" dirty="0"/>
           </a:p>
           <a:p>
             <a:pPr indent="0" marL="0">
@@ -17661,7 +17661,7 @@
               <a:buNone/>
             </a:pPr>
             <a:r>
-              <a:rPr lang="en-US" sz="1000" dirty="0">
+              <a:rPr lang="en-US" sz="710" dirty="0">
                 <a:solidFill>
                   <a:srgbClr val="5F7183"/>
                 </a:solidFill>
@@ -17671,7 +17671,7 @@
               </a:rPr>
               <a:t>150 到 300 公尺</a:t>
             </a:r>
-            <a:endParaRPr lang="en-US" sz="1100" dirty="0"/>
+            <a:endParaRPr lang="en-US" sz="780" dirty="0"/>
           </a:p>
         </p:txBody>
       </p:sp>
@@ -17683,8 +17683,8 @@
         </p:nvSpPr>
         <p:spPr>
           <a:xfrm>
-            <a:off x="2295144" y="2957160"/>
-            <a:ext cx="1060704" cy="400118"/>
+            <a:off x="2954794" y="2126905"/>
+            <a:ext cx="753397" cy="284196"/>
           </a:xfrm>
           <a:prstGeom prst="roundRect">
             <a:avLst>
@@ -17705,8 +17705,8 @@
         </p:nvSpPr>
         <p:spPr>
           <a:xfrm>
-            <a:off x="2350008" y="2993736"/>
-            <a:ext cx="950976" cy="345254"/>
+            <a:off x="2993763" y="2152884"/>
+            <a:ext cx="675460" cy="245227"/>
           </a:xfrm>
           <a:prstGeom prst="rect">
             <a:avLst/>
@@ -17725,7 +17725,7 @@
               <a:buNone/>
             </a:pPr>
             <a:r>
-              <a:rPr lang="en-US" sz="900" b="1" dirty="0">
+              <a:rPr lang="en-US" sz="640" b="1" dirty="0">
                 <a:solidFill>
                   <a:srgbClr val="FFFFFF"/>
                 </a:solidFill>
@@ -17735,7 +17735,7 @@
               </a:rPr>
               <a:t>Ngắn quá thì sao</a:t>
             </a:r>
-            <a:endParaRPr lang="en-US" sz="900" dirty="0"/>
+            <a:endParaRPr lang="en-US" sz="640" dirty="0"/>
           </a:p>
           <a:p>
             <a:pPr algn="ctr" indent="0" marL="0">
@@ -17745,7 +17745,7 @@
               <a:buNone/>
             </a:pPr>
             <a:r>
-              <a:rPr lang="en-US" sz="850" dirty="0">
+              <a:rPr lang="en-US" sz="600" dirty="0">
                 <a:solidFill>
                   <a:srgbClr val="FFFFFF"/>
                 </a:solidFill>
@@ -17755,7 +17755,7 @@
               </a:rPr>
               <a:t>太短會怎樣</a:t>
             </a:r>
-            <a:endParaRPr lang="en-US" sz="900" dirty="0"/>
+            <a:endParaRPr lang="en-US" sz="640" dirty="0"/>
           </a:p>
         </p:txBody>
       </p:sp>
@@ -17767,8 +17767,8 @@
         </p:nvSpPr>
         <p:spPr>
           <a:xfrm>
-            <a:off x="3502152" y="2957160"/>
-            <a:ext cx="5138928" cy="454982"/>
+            <a:off x="3812108" y="2126905"/>
+            <a:ext cx="3650080" cy="323165"/>
           </a:xfrm>
           <a:prstGeom prst="rect">
             <a:avLst/>
@@ -17787,7 +17787,7 @@
               <a:buNone/>
             </a:pPr>
             <a:r>
-              <a:rPr lang="en-US" sz="1100" dirty="0">
+              <a:rPr lang="en-US" sz="780" dirty="0">
                 <a:solidFill>
                   <a:srgbClr val="1A2733"/>
                 </a:solidFill>
@@ -17797,7 +17797,7 @@
               </a:rPr>
               <a:t>Thấy rồi cũng phanh không kịp — chắc chắn đâm</a:t>
             </a:r>
-            <a:endParaRPr lang="en-US" sz="1100" dirty="0"/>
+            <a:endParaRPr lang="en-US" sz="780" dirty="0"/>
           </a:p>
           <a:p>
             <a:pPr indent="0" marL="0">
@@ -17807,7 +17807,7 @@
               <a:buNone/>
             </a:pPr>
             <a:r>
-              <a:rPr lang="en-US" sz="1000" dirty="0">
+              <a:rPr lang="en-US" sz="710" dirty="0">
                 <a:solidFill>
                   <a:srgbClr val="5F7183"/>
                 </a:solidFill>
@@ -17817,7 +17817,7 @@
               </a:rPr>
               <a:t>看到了也煞不住——一定撞</a:t>
             </a:r>
-            <a:endParaRPr lang="en-US" sz="1100" dirty="0"/>
+            <a:endParaRPr lang="en-US" sz="780" dirty="0"/>
           </a:p>
         </p:txBody>
       </p:sp>
@@ -17829,8 +17829,8 @@
         </p:nvSpPr>
         <p:spPr>
           <a:xfrm>
-            <a:off x="502920" y="3931920"/>
-            <a:ext cx="8138160" cy="566928"/>
+            <a:off x="1681812" y="2819258"/>
+            <a:ext cx="5780375" cy="402678"/>
           </a:xfrm>
           <a:prstGeom prst="roundRect">
             <a:avLst>
@@ -17856,8 +17856,8 @@
         </p:nvSpPr>
         <p:spPr>
           <a:xfrm>
-            <a:off x="685800" y="3995928"/>
-            <a:ext cx="7772400" cy="457200"/>
+            <a:off x="1811708" y="2864721"/>
+            <a:ext cx="5520583" cy="324740"/>
           </a:xfrm>
           <a:prstGeom prst="rect">
             <a:avLst/>
@@ -17876,7 +17876,7 @@
               <a:buNone/>
             </a:pPr>
             <a:r>
-              <a:rPr lang="en-US" sz="1200" b="1" dirty="0">
+              <a:rPr lang="en-US" sz="850" b="1" dirty="0">
                 <a:solidFill>
                   <a:srgbClr val="7A4E00"/>
                 </a:solidFill>
@@ -17886,7 +17886,7 @@
               </a:rPr>
               <a:t>Con số này không được tự chọn: quãng đường phanh quyết định nó. Trang sau tính.</a:t>
             </a:r>
-            <a:endParaRPr lang="en-US" sz="1200" dirty="0"/>
+            <a:endParaRPr lang="en-US" sz="850" dirty="0"/>
           </a:p>
           <a:p>
             <a:pPr indent="0" marL="0">
@@ -17896,7 +17896,7 @@
               <a:buNone/>
             </a:pPr>
             <a:r>
-              <a:rPr lang="en-US" sz="1100" dirty="0">
+              <a:rPr lang="en-US" sz="780" dirty="0">
                 <a:solidFill>
                   <a:srgbClr val="7A4E00"/>
                 </a:solidFill>
@@ -17906,7 +17906,7 @@
               </a:rPr>
               <a:t>這個數字不能隨便選：煞停距離決定它。下一頁就算給你看。</a:t>
             </a:r>
-            <a:endParaRPr lang="en-US" sz="1200" dirty="0"/>
+            <a:endParaRPr lang="en-US" sz="850" dirty="0"/>
           </a:p>
         </p:txBody>
       </p:sp>
@@ -17926,8 +17926,8 @@
         </p:blipFill>
         <p:spPr>
           <a:xfrm>
-            <a:off x="7516368" y="4718304"/>
-            <a:ext cx="1097280" cy="242439"/>
+            <a:off x="6663327" y="3338842"/>
+            <a:ext cx="779376" cy="172200"/>
           </a:xfrm>
           <a:prstGeom prst="rect">
             <a:avLst/>
@@ -17942,8 +17942,8 @@
         </p:nvSpPr>
         <p:spPr>
           <a:xfrm>
-            <a:off x="109728" y="4791456"/>
-            <a:ext cx="822960" cy="256032"/>
+            <a:off x="1402536" y="3390800"/>
+            <a:ext cx="584532" cy="181855"/>
           </a:xfrm>
           <a:prstGeom prst="rect">
             <a:avLst/>
@@ -17959,7 +17959,7 @@
               <a:buNone/>
             </a:pPr>
             <a:r>
-              <a:rPr lang="en-US" sz="900" dirty="0">
+              <a:rPr lang="en-US" sz="640" dirty="0">
                 <a:solidFill>
                   <a:srgbClr val="5F7183"/>
                 </a:solidFill>
@@ -17969,7 +17969,7 @@
               </a:rPr>
               <a:t>5 / 18</a:t>
             </a:r>
-            <a:endParaRPr lang="en-US" sz="900" dirty="0"/>
+            <a:endParaRPr lang="en-US" sz="640" dirty="0"/>
           </a:p>
         </p:txBody>
       </p:sp>
@@ -17981,8 +17981,8 @@
         </p:nvSpPr>
         <p:spPr>
           <a:xfrm>
-            <a:off x="960120" y="4791456"/>
-            <a:ext cx="2011680" cy="256032"/>
+            <a:off x="2006553" y="3390800"/>
+            <a:ext cx="1428857" cy="181855"/>
           </a:xfrm>
           <a:prstGeom prst="rect">
             <a:avLst/>
@@ -17998,7 +17998,7 @@
               <a:buNone/>
             </a:pPr>
             <a:r>
-              <a:rPr lang="en-US" sz="900" dirty="0">
+              <a:rPr lang="en-US" sz="640" dirty="0">
                 <a:solidFill>
                   <a:srgbClr val="5F7183"/>
                 </a:solidFill>
@@ -18008,7 +18008,7 @@
               </a:rPr>
               <a:t>Tiết 1 · 第 1 節</a:t>
             </a:r>
-            <a:endParaRPr lang="en-US" sz="900" dirty="0"/>
+            <a:endParaRPr lang="en-US" sz="640" dirty="0"/>
           </a:p>
         </p:txBody>
       </p:sp>
@@ -18045,8 +18045,8 @@
         </p:nvSpPr>
         <p:spPr>
           <a:xfrm>
-            <a:off x="502920" y="365760"/>
-            <a:ext cx="8138160" cy="274320"/>
+            <a:off x="1681812" y="286284"/>
+            <a:ext cx="5780375" cy="194844"/>
           </a:xfrm>
           <a:prstGeom prst="rect">
             <a:avLst/>
@@ -18062,7 +18062,7 @@
               <a:buNone/>
             </a:pPr>
             <a:r>
-              <a:rPr lang="en-US" sz="1300" b="1" dirty="0">
+              <a:rPr lang="en-US" sz="920" b="1" dirty="0">
                 <a:solidFill>
                   <a:srgbClr val="007F72"/>
                 </a:solidFill>
@@ -18072,7 +18072,7 @@
               </a:rPr>
               <a:t>3 / 3　Góc quét · 張角</a:t>
             </a:r>
-            <a:endParaRPr lang="en-US" sz="1300" dirty="0"/>
+            <a:endParaRPr lang="en-US" sz="920" dirty="0"/>
           </a:p>
         </p:txBody>
       </p:sp>
@@ -18084,8 +18084,8 @@
         </p:nvSpPr>
         <p:spPr>
           <a:xfrm>
-            <a:off x="502920" y="877824"/>
-            <a:ext cx="1481328" cy="1920240"/>
+            <a:off x="1681812" y="649993"/>
+            <a:ext cx="1052158" cy="1363909"/>
           </a:xfrm>
           <a:prstGeom prst="roundRect">
             <a:avLst>
@@ -18111,8 +18111,8 @@
         </p:nvSpPr>
         <p:spPr>
           <a:xfrm flipH="1" flipV="1">
-            <a:off x="920221" y="1018382"/>
-            <a:ext cx="323363" cy="479405"/>
+            <a:off x="1978213" y="749829"/>
+            <a:ext cx="229678" cy="340512"/>
           </a:xfrm>
           <a:prstGeom prst="line">
             <a:avLst/>
@@ -18134,8 +18134,8 @@
         </p:nvSpPr>
         <p:spPr>
           <a:xfrm flipH="1" flipV="1">
-            <a:off x="1074515" y="944788"/>
-            <a:ext cx="169069" cy="552999"/>
+            <a:off x="2087805" y="697556"/>
+            <a:ext cx="120086" cy="392784"/>
           </a:xfrm>
           <a:prstGeom prst="line">
             <a:avLst/>
@@ -18157,8 +18157,8 @@
         </p:nvSpPr>
         <p:spPr>
           <a:xfrm flipV="1">
-            <a:off x="1243584" y="919521"/>
-            <a:ext cx="0" cy="578267"/>
+            <a:off x="2207891" y="679609"/>
+            <a:ext cx="0" cy="410731"/>
           </a:xfrm>
           <a:prstGeom prst="line">
             <a:avLst/>
@@ -18180,8 +18180,8 @@
         </p:nvSpPr>
         <p:spPr>
           <a:xfrm flipV="1">
-            <a:off x="1243584" y="944788"/>
-            <a:ext cx="169069" cy="552999"/>
+            <a:off x="2207891" y="697556"/>
+            <a:ext cx="120086" cy="392784"/>
           </a:xfrm>
           <a:prstGeom prst="line">
             <a:avLst/>
@@ -18203,8 +18203,8 @@
         </p:nvSpPr>
         <p:spPr>
           <a:xfrm flipV="1">
-            <a:off x="1243584" y="1018382"/>
-            <a:ext cx="323363" cy="479405"/>
+            <a:off x="2207891" y="749829"/>
+            <a:ext cx="229678" cy="340512"/>
           </a:xfrm>
           <a:prstGeom prst="line">
             <a:avLst/>
@@ -18226,8 +18226,8 @@
         </p:nvSpPr>
         <p:spPr>
           <a:xfrm>
-            <a:off x="1207227" y="1461431"/>
-            <a:ext cx="72713" cy="72713"/>
+            <a:off x="2182068" y="1064517"/>
+            <a:ext cx="51647" cy="51647"/>
           </a:xfrm>
           <a:prstGeom prst="ellipse">
             <a:avLst/>
@@ -18246,8 +18246,8 @@
         </p:nvSpPr>
         <p:spPr>
           <a:xfrm flipH="1" flipV="1">
-            <a:off x="677954" y="2193935"/>
-            <a:ext cx="565630" cy="120228"/>
+            <a:off x="1806136" y="1584801"/>
+            <a:ext cx="401756" cy="85396"/>
           </a:xfrm>
           <a:prstGeom prst="line">
             <a:avLst/>
@@ -18269,8 +18269,8 @@
         </p:nvSpPr>
         <p:spPr>
           <a:xfrm flipH="1" flipV="1">
-            <a:off x="879669" y="1864766"/>
-            <a:ext cx="363915" cy="449398"/>
+            <a:off x="1949410" y="1350999"/>
+            <a:ext cx="258482" cy="319198"/>
           </a:xfrm>
           <a:prstGeom prst="line">
             <a:avLst/>
@@ -18292,8 +18292,8 @@
         </p:nvSpPr>
         <p:spPr>
           <a:xfrm flipV="1">
-            <a:off x="1243584" y="1735897"/>
-            <a:ext cx="0" cy="578267"/>
+            <a:off x="2207891" y="1259466"/>
+            <a:ext cx="0" cy="410731"/>
           </a:xfrm>
           <a:prstGeom prst="line">
             <a:avLst/>
@@ -18315,8 +18315,8 @@
         </p:nvSpPr>
         <p:spPr>
           <a:xfrm flipV="1">
-            <a:off x="1243584" y="1864766"/>
-            <a:ext cx="363915" cy="449398"/>
+            <a:off x="2207891" y="1350999"/>
+            <a:ext cx="258482" cy="319198"/>
           </a:xfrm>
           <a:prstGeom prst="line">
             <a:avLst/>
@@ -18338,8 +18338,8 @@
         </p:nvSpPr>
         <p:spPr>
           <a:xfrm flipV="1">
-            <a:off x="1243584" y="2193935"/>
-            <a:ext cx="565630" cy="120228"/>
+            <a:off x="2207891" y="1584801"/>
+            <a:ext cx="401756" cy="85396"/>
           </a:xfrm>
           <a:prstGeom prst="line">
             <a:avLst/>
@@ -18361,8 +18361,8 @@
         </p:nvSpPr>
         <p:spPr>
           <a:xfrm>
-            <a:off x="1207227" y="2277807"/>
-            <a:ext cx="72713" cy="72713"/>
+            <a:off x="2182068" y="1644374"/>
+            <a:ext cx="51647" cy="51647"/>
           </a:xfrm>
           <a:prstGeom prst="ellipse">
             <a:avLst/>
@@ -18381,8 +18381,8 @@
         </p:nvSpPr>
         <p:spPr>
           <a:xfrm>
-            <a:off x="2295144" y="786384"/>
-            <a:ext cx="6345936" cy="787475"/>
+            <a:off x="2954794" y="585045"/>
+            <a:ext cx="4507394" cy="559328"/>
           </a:xfrm>
           <a:prstGeom prst="rect">
             <a:avLst/>
@@ -18401,7 +18401,7 @@
               <a:buNone/>
             </a:pPr>
             <a:r>
-              <a:rPr lang="en-US" sz="1800" b="1" dirty="0">
+              <a:rPr lang="en-US" sz="1280" b="1" dirty="0">
                 <a:solidFill>
                   <a:srgbClr val="0B1F3A"/>
                 </a:solidFill>
@@ -18411,7 +18411,7 @@
               </a:rPr>
               <a:t>Góc quét = góc nhìn: nhìn được rộng bao nhiêu sang hai bên</a:t>
             </a:r>
-            <a:endParaRPr lang="en-US" sz="1800" dirty="0"/>
+            <a:endParaRPr lang="en-US" sz="1280" dirty="0"/>
           </a:p>
           <a:p>
             <a:pPr indent="0" marL="0">
@@ -18421,7 +18421,7 @@
               <a:buNone/>
             </a:pPr>
             <a:r>
-              <a:rPr lang="en-US" sz="1250" dirty="0">
+              <a:rPr lang="en-US" sz="890" dirty="0">
                 <a:solidFill>
                   <a:srgbClr val="007F72"/>
                 </a:solidFill>
@@ -18431,7 +18431,7 @@
               </a:rPr>
               <a:t>張角 ＝ 視野：左右能看多寬</a:t>
             </a:r>
-            <a:endParaRPr lang="en-US" sz="1800" dirty="0"/>
+            <a:endParaRPr lang="en-US" sz="1280" dirty="0"/>
           </a:p>
         </p:txBody>
       </p:sp>
@@ -18443,8 +18443,8 @@
         </p:nvSpPr>
         <p:spPr>
           <a:xfrm>
-            <a:off x="2295144" y="1665299"/>
-            <a:ext cx="1060704" cy="400118"/>
+            <a:off x="2954794" y="1209321"/>
+            <a:ext cx="753397" cy="284196"/>
           </a:xfrm>
           <a:prstGeom prst="roundRect">
             <a:avLst>
@@ -18465,8 +18465,8 @@
         </p:nvSpPr>
         <p:spPr>
           <a:xfrm>
-            <a:off x="2350008" y="1701875"/>
-            <a:ext cx="950976" cy="345254"/>
+            <a:off x="2993763" y="1235301"/>
+            <a:ext cx="675460" cy="245227"/>
           </a:xfrm>
           <a:prstGeom prst="rect">
             <a:avLst/>
@@ -18485,7 +18485,7 @@
               <a:buNone/>
             </a:pPr>
             <a:r>
-              <a:rPr lang="en-US" sz="900" b="1" dirty="0">
+              <a:rPr lang="en-US" sz="640" b="1" dirty="0">
                 <a:solidFill>
                   <a:srgbClr val="FFFFFF"/>
                 </a:solidFill>
@@ -18495,7 +18495,7 @@
               </a:rPr>
               <a:t>Tên thông số</a:t>
             </a:r>
-            <a:endParaRPr lang="en-US" sz="900" dirty="0"/>
+            <a:endParaRPr lang="en-US" sz="640" dirty="0"/>
           </a:p>
           <a:p>
             <a:pPr algn="ctr" indent="0" marL="0">
@@ -18505,7 +18505,7 @@
               <a:buNone/>
             </a:pPr>
             <a:r>
-              <a:rPr lang="en-US" sz="850" dirty="0">
+              <a:rPr lang="en-US" sz="600" dirty="0">
                 <a:solidFill>
                   <a:srgbClr val="FFFFFF"/>
                 </a:solidFill>
@@ -18515,7 +18515,7 @@
               </a:rPr>
               <a:t>規格表上叫</a:t>
             </a:r>
-            <a:endParaRPr lang="en-US" sz="900" dirty="0"/>
+            <a:endParaRPr lang="en-US" sz="640" dirty="0"/>
           </a:p>
         </p:txBody>
       </p:sp>
@@ -18527,8 +18527,8 @@
         </p:nvSpPr>
         <p:spPr>
           <a:xfrm>
-            <a:off x="3502152" y="1665299"/>
-            <a:ext cx="5138928" cy="454982"/>
+            <a:off x="3812108" y="1209321"/>
+            <a:ext cx="3650080" cy="323165"/>
           </a:xfrm>
           <a:prstGeom prst="rect">
             <a:avLst/>
@@ -18547,7 +18547,7 @@
               <a:buNone/>
             </a:pPr>
             <a:r>
-              <a:rPr lang="en-US" sz="1100" dirty="0">
+              <a:rPr lang="en-US" sz="780" dirty="0">
                 <a:solidFill>
                   <a:srgbClr val="1A2733"/>
                 </a:solidFill>
@@ -18557,7 +18557,7 @@
               </a:rPr>
               <a:t>Field of view (FOV) · góc nhìn</a:t>
             </a:r>
-            <a:endParaRPr lang="en-US" sz="1100" dirty="0"/>
+            <a:endParaRPr lang="en-US" sz="780" dirty="0"/>
           </a:p>
           <a:p>
             <a:pPr indent="0" marL="0">
@@ -18567,7 +18567,7 @@
               <a:buNone/>
             </a:pPr>
             <a:r>
-              <a:rPr lang="en-US" sz="1000" dirty="0">
+              <a:rPr lang="en-US" sz="710" dirty="0">
                 <a:solidFill>
                   <a:srgbClr val="5F7183"/>
                 </a:solidFill>
@@ -18577,7 +18577,7 @@
               </a:rPr>
               <a:t>Field of view（FOV）　視野</a:t>
             </a:r>
-            <a:endParaRPr lang="en-US" sz="1100" dirty="0"/>
+            <a:endParaRPr lang="en-US" sz="780" dirty="0"/>
           </a:p>
         </p:txBody>
       </p:sp>
@@ -18589,8 +18589,8 @@
         </p:nvSpPr>
         <p:spPr>
           <a:xfrm>
-            <a:off x="2295144" y="2184289"/>
-            <a:ext cx="1060704" cy="400118"/>
+            <a:off x="2954794" y="1577950"/>
+            <a:ext cx="753397" cy="284196"/>
           </a:xfrm>
           <a:prstGeom prst="roundRect">
             <a:avLst>
@@ -18611,8 +18611,8 @@
         </p:nvSpPr>
         <p:spPr>
           <a:xfrm>
-            <a:off x="2350008" y="2220865"/>
-            <a:ext cx="950976" cy="345254"/>
+            <a:off x="2993763" y="1603929"/>
+            <a:ext cx="675460" cy="245227"/>
           </a:xfrm>
           <a:prstGeom prst="rect">
             <a:avLst/>
@@ -18631,7 +18631,7 @@
               <a:buNone/>
             </a:pPr>
             <a:r>
-              <a:rPr lang="en-US" sz="900" b="1" dirty="0">
+              <a:rPr lang="en-US" sz="640" b="1" dirty="0">
                 <a:solidFill>
                   <a:srgbClr val="FFFFFF"/>
                 </a:solidFill>
@@ -18641,7 +18641,7 @@
               </a:rPr>
               <a:t>Mô phỏng của ta</a:t>
             </a:r>
-            <a:endParaRPr lang="en-US" sz="900" dirty="0"/>
+            <a:endParaRPr lang="en-US" sz="640" dirty="0"/>
           </a:p>
           <a:p>
             <a:pPr algn="ctr" indent="0" marL="0">
@@ -18651,7 +18651,7 @@
               <a:buNone/>
             </a:pPr>
             <a:r>
-              <a:rPr lang="en-US" sz="850" dirty="0">
+              <a:rPr lang="en-US" sz="600" dirty="0">
                 <a:solidFill>
                   <a:srgbClr val="FFFFFF"/>
                 </a:solidFill>
@@ -18661,7 +18661,7 @@
               </a:rPr>
               <a:t>我們的模擬器</a:t>
             </a:r>
-            <a:endParaRPr lang="en-US" sz="900" dirty="0"/>
+            <a:endParaRPr lang="en-US" sz="640" dirty="0"/>
           </a:p>
         </p:txBody>
       </p:sp>
@@ -18673,8 +18673,8 @@
         </p:nvSpPr>
         <p:spPr>
           <a:xfrm>
-            <a:off x="3502152" y="2184289"/>
-            <a:ext cx="5138928" cy="454982"/>
+            <a:off x="3812108" y="1577950"/>
+            <a:ext cx="3650080" cy="323165"/>
           </a:xfrm>
           <a:prstGeom prst="rect">
             <a:avLst/>
@@ -18693,7 +18693,7 @@
               <a:buNone/>
             </a:pPr>
             <a:r>
-              <a:rPr lang="en-US" sz="1100" dirty="0">
+              <a:rPr lang="en-US" sz="780" dirty="0">
                 <a:solidFill>
                   <a:srgbClr val="1A2733"/>
                 </a:solidFill>
@@ -18703,7 +18703,7 @@
               </a:rPr>
               <a:t>20° đến 180°</a:t>
             </a:r>
-            <a:endParaRPr lang="en-US" sz="1100" dirty="0"/>
+            <a:endParaRPr lang="en-US" sz="780" dirty="0"/>
           </a:p>
           <a:p>
             <a:pPr indent="0" marL="0">
@@ -18713,7 +18713,7 @@
               <a:buNone/>
             </a:pPr>
             <a:r>
-              <a:rPr lang="en-US" sz="1000" dirty="0">
+              <a:rPr lang="en-US" sz="710" dirty="0">
                 <a:solidFill>
                   <a:srgbClr val="5F7183"/>
                 </a:solidFill>
@@ -18723,7 +18723,7 @@
               </a:rPr>
               <a:t>20° 到 180°</a:t>
             </a:r>
-            <a:endParaRPr lang="en-US" sz="1100" dirty="0"/>
+            <a:endParaRPr lang="en-US" sz="780" dirty="0"/>
           </a:p>
         </p:txBody>
       </p:sp>
@@ -18735,8 +18735,8 @@
         </p:nvSpPr>
         <p:spPr>
           <a:xfrm>
-            <a:off x="2295144" y="2703280"/>
-            <a:ext cx="1060704" cy="400118"/>
+            <a:off x="2954794" y="1946578"/>
+            <a:ext cx="753397" cy="284196"/>
           </a:xfrm>
           <a:prstGeom prst="roundRect">
             <a:avLst>
@@ -18757,8 +18757,8 @@
         </p:nvSpPr>
         <p:spPr>
           <a:xfrm>
-            <a:off x="2350008" y="2739856"/>
-            <a:ext cx="950976" cy="345254"/>
+            <a:off x="2993763" y="1972558"/>
+            <a:ext cx="675460" cy="245227"/>
           </a:xfrm>
           <a:prstGeom prst="rect">
             <a:avLst/>
@@ -18777,7 +18777,7 @@
               <a:buNone/>
             </a:pPr>
             <a:r>
-              <a:rPr lang="en-US" sz="900" b="1" dirty="0">
+              <a:rPr lang="en-US" sz="640" b="1" dirty="0">
                 <a:solidFill>
                   <a:srgbClr val="3A2A00"/>
                 </a:solidFill>
@@ -18787,7 +18787,7 @@
               </a:rPr>
               <a:t>Kéo hẹp thì sao</a:t>
             </a:r>
-            <a:endParaRPr lang="en-US" sz="900" dirty="0"/>
+            <a:endParaRPr lang="en-US" sz="640" dirty="0"/>
           </a:p>
           <a:p>
             <a:pPr algn="ctr" indent="0" marL="0">
@@ -18797,7 +18797,7 @@
               <a:buNone/>
             </a:pPr>
             <a:r>
-              <a:rPr lang="en-US" sz="850" dirty="0">
+              <a:rPr lang="en-US" sz="600" dirty="0">
                 <a:solidFill>
                   <a:srgbClr val="3A2A00"/>
                 </a:solidFill>
@@ -18807,7 +18807,7 @@
               </a:rPr>
               <a:t>調窄會怎樣</a:t>
             </a:r>
-            <a:endParaRPr lang="en-US" sz="900" dirty="0"/>
+            <a:endParaRPr lang="en-US" sz="640" dirty="0"/>
           </a:p>
         </p:txBody>
       </p:sp>
@@ -18819,8 +18819,8 @@
         </p:nvSpPr>
         <p:spPr>
           <a:xfrm>
-            <a:off x="3502152" y="2703280"/>
-            <a:ext cx="5138928" cy="454982"/>
+            <a:off x="3812108" y="1946578"/>
+            <a:ext cx="3650080" cy="323165"/>
           </a:xfrm>
           <a:prstGeom prst="rect">
             <a:avLst/>
@@ -18839,7 +18839,7 @@
               <a:buNone/>
             </a:pPr>
             <a:r>
-              <a:rPr lang="en-US" sz="1100" dirty="0">
+              <a:rPr lang="en-US" sz="780" dirty="0">
                 <a:solidFill>
                   <a:srgbClr val="1A2733"/>
                 </a:solidFill>
@@ -18849,7 +18849,7 @@
               </a:rPr>
               <a:t>Xe máy tạt từ bên hông vào hoàn toàn không thấy</a:t>
             </a:r>
-            <a:endParaRPr lang="en-US" sz="1100" dirty="0"/>
+            <a:endParaRPr lang="en-US" sz="780" dirty="0"/>
           </a:p>
           <a:p>
             <a:pPr indent="0" marL="0">
@@ -18859,7 +18859,7 @@
               <a:buNone/>
             </a:pPr>
             <a:r>
-              <a:rPr lang="en-US" sz="1000" dirty="0">
+              <a:rPr lang="en-US" sz="710" dirty="0">
                 <a:solidFill>
                   <a:srgbClr val="5F7183"/>
                 </a:solidFill>
@@ -18869,7 +18869,7 @@
               </a:rPr>
               <a:t>從側面切進來的機車完全看不到</a:t>
             </a:r>
-            <a:endParaRPr lang="en-US" sz="1100" dirty="0"/>
+            <a:endParaRPr lang="en-US" sz="780" dirty="0"/>
           </a:p>
         </p:txBody>
       </p:sp>
@@ -18881,8 +18881,8 @@
         </p:nvSpPr>
         <p:spPr>
           <a:xfrm>
-            <a:off x="2295144" y="3222270"/>
-            <a:ext cx="1060704" cy="400118"/>
+            <a:off x="2954794" y="2315207"/>
+            <a:ext cx="753397" cy="284196"/>
           </a:xfrm>
           <a:prstGeom prst="roundRect">
             <a:avLst>
@@ -18903,8 +18903,8 @@
         </p:nvSpPr>
         <p:spPr>
           <a:xfrm>
-            <a:off x="2350008" y="3258846"/>
-            <a:ext cx="950976" cy="345254"/>
+            <a:off x="2993763" y="2341186"/>
+            <a:ext cx="675460" cy="245227"/>
           </a:xfrm>
           <a:prstGeom prst="rect">
             <a:avLst/>
@@ -18923,7 +18923,7 @@
               <a:buNone/>
             </a:pPr>
             <a:r>
-              <a:rPr lang="en-US" sz="900" b="1" dirty="0">
+              <a:rPr lang="en-US" sz="640" b="1" dirty="0">
                 <a:solidFill>
                   <a:srgbClr val="FFFFFF"/>
                 </a:solidFill>
@@ -18933,7 +18933,7 @@
               </a:rPr>
               <a:t>Kéo rộng thì sao</a:t>
             </a:r>
-            <a:endParaRPr lang="en-US" sz="900" dirty="0"/>
+            <a:endParaRPr lang="en-US" sz="640" dirty="0"/>
           </a:p>
           <a:p>
             <a:pPr algn="ctr" indent="0" marL="0">
@@ -18943,7 +18943,7 @@
               <a:buNone/>
             </a:pPr>
             <a:r>
-              <a:rPr lang="en-US" sz="850" dirty="0">
+              <a:rPr lang="en-US" sz="600" dirty="0">
                 <a:solidFill>
                   <a:srgbClr val="FFFFFF"/>
                 </a:solidFill>
@@ -18953,7 +18953,7 @@
               </a:rPr>
               <a:t>調寬會怎樣</a:t>
             </a:r>
-            <a:endParaRPr lang="en-US" sz="900" dirty="0"/>
+            <a:endParaRPr lang="en-US" sz="640" dirty="0"/>
           </a:p>
         </p:txBody>
       </p:sp>
@@ -18965,8 +18965,8 @@
         </p:nvSpPr>
         <p:spPr>
           <a:xfrm>
-            <a:off x="3502152" y="3222270"/>
-            <a:ext cx="5138928" cy="454982"/>
+            <a:off x="3812108" y="2315207"/>
+            <a:ext cx="3650080" cy="323165"/>
           </a:xfrm>
           <a:prstGeom prst="rect">
             <a:avLst/>
@@ -18985,7 +18985,7 @@
               <a:buNone/>
             </a:pPr>
             <a:r>
-              <a:rPr lang="en-US" sz="1100" dirty="0">
+              <a:rPr lang="en-US" sz="780" dirty="0">
                 <a:solidFill>
                   <a:srgbClr val="1A2733"/>
                 </a:solidFill>
@@ -18995,7 +18995,7 @@
               </a:rPr>
               <a:t>Cùng số tia đó bị trải mỏng ra — mỗi hướng thưa hơn</a:t>
             </a:r>
-            <a:endParaRPr lang="en-US" sz="1100" dirty="0"/>
+            <a:endParaRPr lang="en-US" sz="780" dirty="0"/>
           </a:p>
           <a:p>
             <a:pPr indent="0" marL="0">
@@ -19005,7 +19005,7 @@
               <a:buNone/>
             </a:pPr>
             <a:r>
-              <a:rPr lang="en-US" sz="1000" dirty="0">
+              <a:rPr lang="en-US" sz="710" dirty="0">
                 <a:solidFill>
                   <a:srgbClr val="5F7183"/>
                 </a:solidFill>
@@ -19015,7 +19015,7 @@
               </a:rPr>
               <a:t>同樣的射線數被攤開——每個方向變稀</a:t>
             </a:r>
-            <a:endParaRPr lang="en-US" sz="1100" dirty="0"/>
+            <a:endParaRPr lang="en-US" sz="780" dirty="0"/>
           </a:p>
         </p:txBody>
       </p:sp>
@@ -19027,8 +19027,8 @@
         </p:nvSpPr>
         <p:spPr>
           <a:xfrm>
-            <a:off x="502920" y="3931920"/>
-            <a:ext cx="8138160" cy="566928"/>
+            <a:off x="1681812" y="2819258"/>
+            <a:ext cx="5780375" cy="402678"/>
           </a:xfrm>
           <a:prstGeom prst="roundRect">
             <a:avLst>
@@ -19054,8 +19054,8 @@
         </p:nvSpPr>
         <p:spPr>
           <a:xfrm>
-            <a:off x="685800" y="3995928"/>
-            <a:ext cx="7772400" cy="457200"/>
+            <a:off x="1811708" y="2864721"/>
+            <a:ext cx="5520583" cy="324740"/>
           </a:xfrm>
           <a:prstGeom prst="rect">
             <a:avLst/>
@@ -19074,7 +19074,7 @@
               <a:buNone/>
             </a:pPr>
             <a:r>
-              <a:rPr lang="en-US" sz="1200" b="1" dirty="0">
+              <a:rPr lang="en-US" sz="850" b="1" dirty="0">
                 <a:solidFill>
                   <a:srgbClr val="7A4E00"/>
                 </a:solidFill>
@@ -19084,7 +19084,7 @@
               </a:rPr>
               <a:t>Đây chính là bài của tuần 3: cùng một ngân sách, rộng và rõ chỉ chọn được một.</a:t>
             </a:r>
-            <a:endParaRPr lang="en-US" sz="1200" dirty="0"/>
+            <a:endParaRPr lang="en-US" sz="850" dirty="0"/>
           </a:p>
           <a:p>
             <a:pPr indent="0" marL="0">
@@ -19094,7 +19094,7 @@
               <a:buNone/>
             </a:pPr>
             <a:r>
-              <a:rPr lang="en-US" sz="1100" dirty="0">
+              <a:rPr lang="en-US" sz="780" dirty="0">
                 <a:solidFill>
                   <a:srgbClr val="7A4E00"/>
                 </a:solidFill>
@@ -19104,7 +19104,7 @@
               </a:rPr>
               <a:t>這就是第三週那一頁：同一份預算，看得廣和看得清只能選一個。</a:t>
             </a:r>
-            <a:endParaRPr lang="en-US" sz="1200" dirty="0"/>
+            <a:endParaRPr lang="en-US" sz="850" dirty="0"/>
           </a:p>
         </p:txBody>
       </p:sp>
@@ -19124,8 +19124,8 @@
         </p:blipFill>
         <p:spPr>
           <a:xfrm>
-            <a:off x="7516368" y="4718304"/>
-            <a:ext cx="1097280" cy="242439"/>
+            <a:off x="6663327" y="3338842"/>
+            <a:ext cx="779376" cy="172200"/>
           </a:xfrm>
           <a:prstGeom prst="rect">
             <a:avLst/>
@@ -19140,8 +19140,8 @@
         </p:nvSpPr>
         <p:spPr>
           <a:xfrm>
-            <a:off x="109728" y="4791456"/>
-            <a:ext cx="822960" cy="256032"/>
+            <a:off x="1402536" y="3390800"/>
+            <a:ext cx="584532" cy="181855"/>
           </a:xfrm>
           <a:prstGeom prst="rect">
             <a:avLst/>
@@ -19157,7 +19157,7 @@
               <a:buNone/>
             </a:pPr>
             <a:r>
-              <a:rPr lang="en-US" sz="900" dirty="0">
+              <a:rPr lang="en-US" sz="640" dirty="0">
                 <a:solidFill>
                   <a:srgbClr val="5F7183"/>
                 </a:solidFill>
@@ -19167,7 +19167,7 @@
               </a:rPr>
               <a:t>6 / 18</a:t>
             </a:r>
-            <a:endParaRPr lang="en-US" sz="900" dirty="0"/>
+            <a:endParaRPr lang="en-US" sz="640" dirty="0"/>
           </a:p>
         </p:txBody>
       </p:sp>
@@ -19179,8 +19179,8 @@
         </p:nvSpPr>
         <p:spPr>
           <a:xfrm>
-            <a:off x="960120" y="4791456"/>
-            <a:ext cx="2011680" cy="256032"/>
+            <a:off x="2006553" y="3390800"/>
+            <a:ext cx="1428857" cy="181855"/>
           </a:xfrm>
           <a:prstGeom prst="rect">
             <a:avLst/>
@@ -19196,7 +19196,7 @@
               <a:buNone/>
             </a:pPr>
             <a:r>
-              <a:rPr lang="en-US" sz="900" dirty="0">
+              <a:rPr lang="en-US" sz="640" dirty="0">
                 <a:solidFill>
                   <a:srgbClr val="5F7183"/>
                 </a:solidFill>
@@ -19206,7 +19206,7 @@
               </a:rPr>
               <a:t>Tiết 1 · 第 1 節</a:t>
             </a:r>
-            <a:endParaRPr lang="en-US" sz="900" dirty="0"/>
+            <a:endParaRPr lang="en-US" sz="640" dirty="0"/>
           </a:p>
         </p:txBody>
       </p:sp>
@@ -19243,8 +19243,8 @@
         </p:nvSpPr>
         <p:spPr>
           <a:xfrm>
-            <a:off x="502920" y="292608"/>
-            <a:ext cx="8138160" cy="841248"/>
+            <a:off x="1681812" y="234326"/>
+            <a:ext cx="5780375" cy="597522"/>
           </a:xfrm>
           <a:prstGeom prst="rect">
             <a:avLst/>
@@ -19263,7 +19263,7 @@
               <a:buNone/>
             </a:pPr>
             <a:r>
-              <a:rPr lang="en-US" sz="2200" b="1" dirty="0">
+              <a:rPr lang="en-US" sz="1560" b="1" dirty="0">
                 <a:solidFill>
                   <a:srgbClr val="0B1F3A"/>
                 </a:solidFill>
@@ -19273,7 +19273,7 @@
               </a:rPr>
               <a:t>Quãng đường phanh quyết định tia phải dài bao nhiêu</a:t>
             </a:r>
-            <a:endParaRPr lang="en-US" sz="2200" dirty="0"/>
+            <a:endParaRPr lang="en-US" sz="1560" dirty="0"/>
           </a:p>
           <a:p>
             <a:pPr indent="0" marL="0">
@@ -19283,7 +19283,7 @@
               <a:buNone/>
             </a:pPr>
             <a:r>
-              <a:rPr lang="en-US" sz="1350" dirty="0">
+              <a:rPr lang="en-US" sz="960" dirty="0">
                 <a:solidFill>
                   <a:srgbClr val="5F7183"/>
                 </a:solidFill>
@@ -19293,7 +19293,7 @@
               </a:rPr>
               <a:t>煞停距離決定了射線至少要多長</a:t>
             </a:r>
-            <a:endParaRPr lang="en-US" sz="2200" dirty="0"/>
+            <a:endParaRPr lang="en-US" sz="1560" dirty="0"/>
           </a:p>
         </p:txBody>
       </p:sp>
@@ -19305,8 +19305,8 @@
         </p:nvSpPr>
         <p:spPr>
           <a:xfrm>
-            <a:off x="502920" y="1133856"/>
-            <a:ext cx="5029200" cy="2688336"/>
+            <a:off x="1681812" y="831848"/>
+            <a:ext cx="3572142" cy="1909472"/>
           </a:xfrm>
           <a:prstGeom prst="roundRect">
             <a:avLst>
@@ -19332,8 +19332,8 @@
         </p:nvSpPr>
         <p:spPr>
           <a:xfrm>
-            <a:off x="630936" y="3529584"/>
-            <a:ext cx="4773168" cy="0"/>
+            <a:off x="1772740" y="2533486"/>
+            <a:ext cx="3390288" cy="0"/>
           </a:xfrm>
           <a:prstGeom prst="line">
             <a:avLst/>
@@ -19355,8 +19355,8 @@
         </p:nvSpPr>
         <p:spPr>
           <a:xfrm>
-            <a:off x="795528" y="3108960"/>
-            <a:ext cx="329184" cy="146304"/>
+            <a:off x="1889646" y="2234725"/>
+            <a:ext cx="233813" cy="103917"/>
           </a:xfrm>
           <a:prstGeom prst="roundRect">
             <a:avLst>
@@ -19377,8 +19377,8 @@
         </p:nvSpPr>
         <p:spPr>
           <a:xfrm>
-            <a:off x="722376" y="3255264"/>
-            <a:ext cx="475488" cy="274320"/>
+            <a:off x="1837688" y="2338642"/>
+            <a:ext cx="337730" cy="194844"/>
           </a:xfrm>
           <a:prstGeom prst="roundRect">
             <a:avLst>
@@ -19404,8 +19404,8 @@
         </p:nvSpPr>
         <p:spPr>
           <a:xfrm>
-            <a:off x="777240" y="3465576"/>
-            <a:ext cx="128016" cy="128016"/>
+            <a:off x="1876656" y="2488023"/>
+            <a:ext cx="90927" cy="90927"/>
           </a:xfrm>
           <a:prstGeom prst="ellipse">
             <a:avLst/>
@@ -19424,8 +19424,8 @@
         </p:nvSpPr>
         <p:spPr>
           <a:xfrm>
-            <a:off x="1014984" y="3465576"/>
-            <a:ext cx="128016" cy="128016"/>
+            <a:off x="2045521" y="2488023"/>
+            <a:ext cx="90927" cy="90927"/>
           </a:xfrm>
           <a:prstGeom prst="ellipse">
             <a:avLst/>
@@ -19444,8 +19444,8 @@
         </p:nvSpPr>
         <p:spPr>
           <a:xfrm>
-            <a:off x="5184648" y="2991917"/>
-            <a:ext cx="109728" cy="109728"/>
+            <a:off x="5007152" y="2151592"/>
+            <a:ext cx="77938" cy="77938"/>
           </a:xfrm>
           <a:prstGeom prst="ellipse">
             <a:avLst/>
@@ -19464,12 +19464,12 @@
         </p:nvSpPr>
         <p:spPr>
           <a:xfrm>
-            <a:off x="5151730" y="3112618"/>
-            <a:ext cx="175565" cy="197510"/>
+            <a:off x="4983771" y="2237323"/>
+            <a:ext cx="124700" cy="140288"/>
           </a:xfrm>
           <a:prstGeom prst="roundRect">
             <a:avLst>
-              <a:gd name="adj" fmla="val 145833"/>
+              <a:gd name="adj" fmla="val 145834"/>
             </a:avLst>
           </a:prstGeom>
           <a:solidFill>
@@ -19486,8 +19486,8 @@
         </p:nvSpPr>
         <p:spPr>
           <a:xfrm rot="960000">
-            <a:off x="5121554" y="3129077"/>
-            <a:ext cx="43891" cy="142646"/>
+            <a:off x="4962338" y="2249014"/>
+            <a:ext cx="31175" cy="101319"/>
           </a:xfrm>
           <a:prstGeom prst="rect">
             <a:avLst/>
@@ -19506,8 +19506,8 @@
         </p:nvSpPr>
         <p:spPr>
           <a:xfrm rot="-960000">
-            <a:off x="5313578" y="3129077"/>
-            <a:ext cx="43891" cy="142646"/>
+            <a:off x="5098729" y="2249014"/>
+            <a:ext cx="31175" cy="101319"/>
           </a:xfrm>
           <a:prstGeom prst="rect">
             <a:avLst/>
@@ -19526,8 +19526,8 @@
         </p:nvSpPr>
         <p:spPr>
           <a:xfrm rot="300000">
-            <a:off x="5181905" y="3282696"/>
-            <a:ext cx="49378" cy="197510"/>
+            <a:off x="5005203" y="2358127"/>
+            <a:ext cx="35072" cy="140288"/>
           </a:xfrm>
           <a:prstGeom prst="rect">
             <a:avLst/>
@@ -19546,8 +19546,8 @@
         </p:nvSpPr>
         <p:spPr>
           <a:xfrm rot="-300000">
-            <a:off x="5247742" y="3282696"/>
-            <a:ext cx="49378" cy="197510"/>
+            <a:off x="5051966" y="2358127"/>
+            <a:ext cx="35072" cy="140288"/>
           </a:xfrm>
           <a:prstGeom prst="rect">
             <a:avLst/>
@@ -19566,8 +19566,8 @@
         </p:nvSpPr>
         <p:spPr>
           <a:xfrm>
-            <a:off x="1271016" y="1664208"/>
-            <a:ext cx="745394" cy="274320"/>
+            <a:off x="2227376" y="1208546"/>
+            <a:ext cx="529438" cy="194844"/>
           </a:xfrm>
           <a:prstGeom prst="rect">
             <a:avLst/>
@@ -19586,8 +19586,8 @@
         </p:nvSpPr>
         <p:spPr>
           <a:xfrm>
-            <a:off x="1271016" y="1691640"/>
-            <a:ext cx="745394" cy="219456"/>
+            <a:off x="2227376" y="1228031"/>
+            <a:ext cx="529438" cy="155875"/>
           </a:xfrm>
           <a:prstGeom prst="rect">
             <a:avLst/>
@@ -19603,7 +19603,7 @@
               <a:buNone/>
             </a:pPr>
             <a:r>
-              <a:rPr lang="en-US" sz="1150" b="1" dirty="0">
+              <a:rPr lang="en-US" sz="820" b="1" dirty="0">
                 <a:solidFill>
                   <a:srgbClr val="FFFFFF"/>
                 </a:solidFill>
@@ -19613,7 +19613,7 @@
               </a:rPr>
               <a:t>4.2 m</a:t>
             </a:r>
-            <a:endParaRPr lang="en-US" sz="1150" dirty="0"/>
+            <a:endParaRPr lang="en-US" sz="820" dirty="0"/>
           </a:p>
         </p:txBody>
       </p:sp>
@@ -19625,8 +19625,8 @@
         </p:nvSpPr>
         <p:spPr>
           <a:xfrm>
-            <a:off x="1088136" y="1225296"/>
-            <a:ext cx="1111154" cy="402336"/>
+            <a:off x="2097480" y="896796"/>
+            <a:ext cx="789231" cy="285771"/>
           </a:xfrm>
           <a:prstGeom prst="rect">
             <a:avLst/>
@@ -19645,7 +19645,7 @@
               <a:buNone/>
             </a:pPr>
             <a:r>
-              <a:rPr lang="en-US" sz="1050" b="1" dirty="0">
+              <a:rPr lang="en-US" sz="750" b="1" dirty="0">
                 <a:solidFill>
                   <a:srgbClr val="E8A317"/>
                 </a:solidFill>
@@ -19655,7 +19655,7 @@
               </a:rPr>
               <a:t>Phản ứng</a:t>
             </a:r>
-            <a:endParaRPr lang="en-US" sz="1050" dirty="0"/>
+            <a:endParaRPr lang="en-US" sz="750" dirty="0"/>
           </a:p>
           <a:p>
             <a:pPr algn="ctr" indent="0" marL="0">
@@ -19665,7 +19665,7 @@
               <a:buNone/>
             </a:pPr>
             <a:r>
-              <a:rPr lang="en-US" sz="950" dirty="0">
+              <a:rPr lang="en-US" sz="670" dirty="0">
                 <a:solidFill>
                   <a:srgbClr val="E8A317"/>
                 </a:solidFill>
@@ -19675,7 +19675,7 @@
               </a:rPr>
               <a:t>反應距離</a:t>
             </a:r>
-            <a:endParaRPr lang="en-US" sz="1050" dirty="0"/>
+            <a:endParaRPr lang="en-US" sz="750" dirty="0"/>
           </a:p>
         </p:txBody>
       </p:sp>
@@ -19687,8 +19687,8 @@
         </p:nvSpPr>
         <p:spPr>
           <a:xfrm>
-            <a:off x="1033272" y="2011680"/>
-            <a:ext cx="1220882" cy="457200"/>
+            <a:off x="2058511" y="1455349"/>
+            <a:ext cx="867168" cy="324740"/>
           </a:xfrm>
           <a:prstGeom prst="rect">
             <a:avLst/>
@@ -19707,7 +19707,7 @@
               <a:buNone/>
             </a:pPr>
             <a:r>
-              <a:rPr lang="en-US" sz="950" b="1" dirty="0">
+              <a:rPr lang="en-US" sz="670" b="1" dirty="0">
                 <a:solidFill>
                   <a:srgbClr val="5F7183"/>
                 </a:solidFill>
@@ -19717,7 +19717,7 @@
               </a:rPr>
               <a:t>0,3 s — chân chưa chạm phanh</a:t>
             </a:r>
-            <a:endParaRPr lang="en-US" sz="950" dirty="0"/>
+            <a:endParaRPr lang="en-US" sz="670" dirty="0"/>
           </a:p>
           <a:p>
             <a:pPr algn="ctr" indent="0" marL="0">
@@ -19727,7 +19727,7 @@
               <a:buNone/>
             </a:pPr>
             <a:r>
-              <a:rPr lang="en-US" sz="880" dirty="0">
+              <a:rPr lang="en-US" sz="630" dirty="0">
                 <a:solidFill>
                   <a:srgbClr val="5F7183"/>
                 </a:solidFill>
@@ -19737,7 +19737,7 @@
               </a:rPr>
               <a:t>0.3 秒，腳還沒踩到</a:t>
             </a:r>
-            <a:endParaRPr lang="en-US" sz="950" dirty="0"/>
+            <a:endParaRPr lang="en-US" sz="670" dirty="0"/>
           </a:p>
         </p:txBody>
       </p:sp>
@@ -19749,8 +19749,8 @@
         </p:nvSpPr>
         <p:spPr>
           <a:xfrm>
-            <a:off x="2016410" y="1664208"/>
-            <a:ext cx="2857342" cy="274320"/>
+            <a:off x="2756814" y="1208546"/>
+            <a:ext cx="2029514" cy="194844"/>
           </a:xfrm>
           <a:prstGeom prst="rect">
             <a:avLst/>
@@ -19769,8 +19769,8 @@
         </p:nvSpPr>
         <p:spPr>
           <a:xfrm>
-            <a:off x="2016410" y="1691640"/>
-            <a:ext cx="2857342" cy="219456"/>
+            <a:off x="2756814" y="1228031"/>
+            <a:ext cx="2029514" cy="155875"/>
           </a:xfrm>
           <a:prstGeom prst="rect">
             <a:avLst/>
@@ -19786,7 +19786,7 @@
               <a:buNone/>
             </a:pPr>
             <a:r>
-              <a:rPr lang="en-US" sz="1150" b="1" dirty="0">
+              <a:rPr lang="en-US" sz="820" b="1" dirty="0">
                 <a:solidFill>
                   <a:srgbClr val="FFFFFF"/>
                 </a:solidFill>
@@ -19796,7 +19796,7 @@
               </a:rPr>
               <a:t>16.1 m</a:t>
             </a:r>
-            <a:endParaRPr lang="en-US" sz="1150" dirty="0"/>
+            <a:endParaRPr lang="en-US" sz="820" dirty="0"/>
           </a:p>
         </p:txBody>
       </p:sp>
@@ -19808,8 +19808,8 @@
         </p:nvSpPr>
         <p:spPr>
           <a:xfrm>
-            <a:off x="1833530" y="1225296"/>
-            <a:ext cx="3223102" cy="402336"/>
+            <a:off x="2626918" y="896796"/>
+            <a:ext cx="2289306" cy="285771"/>
           </a:xfrm>
           <a:prstGeom prst="rect">
             <a:avLst/>
@@ -19828,7 +19828,7 @@
               <a:buNone/>
             </a:pPr>
             <a:r>
-              <a:rPr lang="en-US" sz="1050" b="1" dirty="0">
+              <a:rPr lang="en-US" sz="750" b="1" dirty="0">
                 <a:solidFill>
                   <a:srgbClr val="D9463E"/>
                 </a:solidFill>
@@ -19838,7 +19838,7 @@
               </a:rPr>
               <a:t>Phanh</a:t>
             </a:r>
-            <a:endParaRPr lang="en-US" sz="1050" dirty="0"/>
+            <a:endParaRPr lang="en-US" sz="750" dirty="0"/>
           </a:p>
           <a:p>
             <a:pPr algn="ctr" indent="0" marL="0">
@@ -19848,7 +19848,7 @@
               <a:buNone/>
             </a:pPr>
             <a:r>
-              <a:rPr lang="en-US" sz="950" dirty="0">
+              <a:rPr lang="en-US" sz="670" dirty="0">
                 <a:solidFill>
                   <a:srgbClr val="D9463E"/>
                 </a:solidFill>
@@ -19858,7 +19858,7 @@
               </a:rPr>
               <a:t>煞車距離</a:t>
             </a:r>
-            <a:endParaRPr lang="en-US" sz="1050" dirty="0"/>
+            <a:endParaRPr lang="en-US" sz="750" dirty="0"/>
           </a:p>
         </p:txBody>
       </p:sp>
@@ -19870,8 +19870,8 @@
         </p:nvSpPr>
         <p:spPr>
           <a:xfrm>
-            <a:off x="1778666" y="2011680"/>
-            <a:ext cx="3332830" cy="457200"/>
+            <a:off x="2587949" y="1455349"/>
+            <a:ext cx="2367244" cy="324740"/>
           </a:xfrm>
           <a:prstGeom prst="rect">
             <a:avLst/>
@@ -19890,7 +19890,7 @@
               <a:buNone/>
             </a:pPr>
             <a:r>
-              <a:rPr lang="en-US" sz="950" b="1" dirty="0">
+              <a:rPr lang="en-US" sz="670" b="1" dirty="0">
                 <a:solidFill>
                   <a:srgbClr val="5F7183"/>
                 </a:solidFill>
@@ -19900,7 +19900,7 @@
               </a:rPr>
               <a:t>Tỉ lệ với BÌNH PHƯƠNG tốc độ</a:t>
             </a:r>
-            <a:endParaRPr lang="en-US" sz="950" dirty="0"/>
+            <a:endParaRPr lang="en-US" sz="670" dirty="0"/>
           </a:p>
           <a:p>
             <a:pPr algn="ctr" indent="0" marL="0">
@@ -19910,7 +19910,7 @@
               <a:buNone/>
             </a:pPr>
             <a:r>
-              <a:rPr lang="en-US" sz="880" dirty="0">
+              <a:rPr lang="en-US" sz="630" dirty="0">
                 <a:solidFill>
                   <a:srgbClr val="5F7183"/>
                 </a:solidFill>
@@ -19920,7 +19920,7 @@
               </a:rPr>
               <a:t>跟速度的平方成正比</a:t>
             </a:r>
-            <a:endParaRPr lang="en-US" sz="950" dirty="0"/>
+            <a:endParaRPr lang="en-US" sz="670" dirty="0"/>
           </a:p>
         </p:txBody>
       </p:sp>
@@ -19932,8 +19932,8 @@
         </p:nvSpPr>
         <p:spPr>
           <a:xfrm>
-            <a:off x="2016410" y="1609344"/>
-            <a:ext cx="0" cy="384048"/>
+            <a:off x="2756814" y="1169577"/>
+            <a:ext cx="0" cy="272782"/>
           </a:xfrm>
           <a:prstGeom prst="line">
             <a:avLst/>
@@ -19955,8 +19955,8 @@
         </p:nvSpPr>
         <p:spPr>
           <a:xfrm>
-            <a:off x="1271016" y="2578608"/>
-            <a:ext cx="3602736" cy="0"/>
+            <a:off x="2227376" y="1858027"/>
+            <a:ext cx="2558953" cy="0"/>
           </a:xfrm>
           <a:prstGeom prst="line">
             <a:avLst/>
@@ -19978,8 +19978,8 @@
         </p:nvSpPr>
         <p:spPr>
           <a:xfrm>
-            <a:off x="996696" y="2615184"/>
-            <a:ext cx="4151376" cy="329184"/>
+            <a:off x="2032532" y="1884006"/>
+            <a:ext cx="2948641" cy="233813"/>
           </a:xfrm>
           <a:prstGeom prst="rect">
             <a:avLst/>
@@ -19998,7 +19998,7 @@
               <a:buNone/>
             </a:pPr>
             <a:r>
-              <a:rPr lang="en-US" sz="1150" b="1" dirty="0">
+              <a:rPr lang="en-US" sz="820" b="1" dirty="0">
                 <a:solidFill>
                   <a:srgbClr val="0B1F3A"/>
                 </a:solidFill>
@@ -20008,7 +20008,7 @@
               </a:rPr>
               <a:t>Tổng 20 m　→　tia phải ≥ 25 m</a:t>
             </a:r>
-            <a:endParaRPr lang="en-US" sz="1150" dirty="0"/>
+            <a:endParaRPr lang="en-US" sz="820" dirty="0"/>
           </a:p>
           <a:p>
             <a:pPr algn="ctr" indent="0" marL="0">
@@ -20018,7 +20018,7 @@
               <a:buNone/>
             </a:pPr>
             <a:r>
-              <a:rPr lang="en-US" sz="1050" dirty="0">
+              <a:rPr lang="en-US" sz="750" dirty="0">
                 <a:solidFill>
                   <a:srgbClr val="0B1F3A"/>
                 </a:solidFill>
@@ -20028,7 +20028,7 @@
               </a:rPr>
               <a:t>合計 20 公尺　→　射線至少 25 公尺</a:t>
             </a:r>
-            <a:endParaRPr lang="en-US" sz="1150" dirty="0"/>
+            <a:endParaRPr lang="en-US" sz="820" dirty="0"/>
           </a:p>
         </p:txBody>
       </p:sp>
@@ -20040,8 +20040,8 @@
         </p:nvSpPr>
         <p:spPr>
           <a:xfrm>
-            <a:off x="5788152" y="1133856"/>
-            <a:ext cx="2852928" cy="621792"/>
+            <a:off x="5435809" y="831848"/>
+            <a:ext cx="2026379" cy="441647"/>
           </a:xfrm>
           <a:prstGeom prst="roundRect">
             <a:avLst>
@@ -20062,8 +20062,8 @@
         </p:nvSpPr>
         <p:spPr>
           <a:xfrm>
-            <a:off x="5916168" y="1207008"/>
-            <a:ext cx="2596896" cy="512064"/>
+            <a:off x="5526736" y="883806"/>
+            <a:ext cx="1844524" cy="363709"/>
           </a:xfrm>
           <a:prstGeom prst="rect">
             <a:avLst/>
@@ -20082,7 +20082,7 @@
               <a:buNone/>
             </a:pPr>
             <a:r>
-              <a:rPr lang="en-US" sz="1200" b="1" dirty="0">
+              <a:rPr lang="en-US" sz="850" b="1" dirty="0">
                 <a:solidFill>
                   <a:srgbClr val="FFFFFF"/>
                 </a:solidFill>
@@ -20092,7 +20092,7 @@
               </a:rPr>
               <a:t>Phanh = v × 0,3 + v² ÷ 12</a:t>
             </a:r>
-            <a:endParaRPr lang="en-US" sz="1200" dirty="0"/>
+            <a:endParaRPr lang="en-US" sz="850" dirty="0"/>
           </a:p>
           <a:p>
             <a:pPr indent="0" marL="0">
@@ -20102,7 +20102,7 @@
               <a:buNone/>
             </a:pPr>
             <a:r>
-              <a:rPr lang="en-US" sz="1000" dirty="0">
+              <a:rPr lang="en-US" sz="710" dirty="0">
                 <a:solidFill>
                   <a:srgbClr val="AFC3D4"/>
                 </a:solidFill>
@@ -20112,7 +20112,7 @@
               </a:rPr>
               <a:t>煞停距離 ＝ v × 0.3 ＋ v² ÷ 12</a:t>
             </a:r>
-            <a:endParaRPr lang="en-US" sz="1200" dirty="0"/>
+            <a:endParaRPr lang="en-US" sz="850" dirty="0"/>
           </a:p>
         </p:txBody>
       </p:sp>
@@ -20124,8 +20124,8 @@
         </p:nvSpPr>
         <p:spPr>
           <a:xfrm>
-            <a:off x="5788152" y="1847088"/>
-            <a:ext cx="2852928" cy="621792"/>
+            <a:off x="5435809" y="1338442"/>
+            <a:ext cx="2026379" cy="441647"/>
           </a:xfrm>
           <a:prstGeom prst="roundRect">
             <a:avLst>
@@ -20146,8 +20146,8 @@
         </p:nvSpPr>
         <p:spPr>
           <a:xfrm>
-            <a:off x="5916168" y="1920240"/>
-            <a:ext cx="2596896" cy="512064"/>
+            <a:off x="5526736" y="1390401"/>
+            <a:ext cx="1844524" cy="363709"/>
           </a:xfrm>
           <a:prstGeom prst="rect">
             <a:avLst/>
@@ -20166,7 +20166,7 @@
               <a:buNone/>
             </a:pPr>
             <a:r>
-              <a:rPr lang="en-US" sz="1200" b="1" dirty="0">
+              <a:rPr lang="en-US" sz="850" b="1" dirty="0">
                 <a:solidFill>
                   <a:srgbClr val="007F72"/>
                 </a:solidFill>
@@ -20176,7 +20176,7 @@
               </a:rPr>
               <a:t>Chia 12 vì giảm tốc lấy 6 m/s²</a:t>
             </a:r>
-            <a:endParaRPr lang="en-US" sz="1200" dirty="0"/>
+            <a:endParaRPr lang="en-US" sz="850" dirty="0"/>
           </a:p>
           <a:p>
             <a:pPr indent="0" marL="0">
@@ -20186,7 +20186,7 @@
               <a:buNone/>
             </a:pPr>
             <a:r>
-              <a:rPr lang="en-US" sz="1000" dirty="0">
+              <a:rPr lang="en-US" sz="710" dirty="0">
                 <a:solidFill>
                   <a:srgbClr val="007F72"/>
                 </a:solidFill>
@@ -20196,7 +20196,7 @@
               </a:rPr>
               <a:t>除以 12：減速度取 6</a:t>
             </a:r>
-            <a:endParaRPr lang="en-US" sz="1200" dirty="0"/>
+            <a:endParaRPr lang="en-US" sz="850" dirty="0"/>
           </a:p>
         </p:txBody>
       </p:sp>
@@ -20208,8 +20208,8 @@
         </p:nvSpPr>
         <p:spPr>
           <a:xfrm>
-            <a:off x="5788152" y="2596896"/>
-            <a:ext cx="2852928" cy="365760"/>
+            <a:off x="5435809" y="1871016"/>
+            <a:ext cx="2026379" cy="259792"/>
           </a:xfrm>
           <a:prstGeom prst="rect">
             <a:avLst/>
@@ -20228,7 +20228,7 @@
               <a:buNone/>
             </a:pPr>
             <a:r>
-              <a:rPr lang="en-US" sz="1050" b="1" dirty="0">
+              <a:rPr lang="en-US" sz="750" b="1" dirty="0">
                 <a:solidFill>
                   <a:srgbClr val="0B1F3A"/>
                 </a:solidFill>
@@ -20238,7 +20238,7 @@
               </a:rPr>
               <a:t>Ví dụ 50 km/h = 13,9 m/s</a:t>
             </a:r>
-            <a:endParaRPr lang="en-US" sz="1050" dirty="0"/>
+            <a:endParaRPr lang="en-US" sz="750" dirty="0"/>
           </a:p>
           <a:p>
             <a:pPr indent="0" marL="0">
@@ -20248,7 +20248,7 @@
               <a:buNone/>
             </a:pPr>
             <a:r>
-              <a:rPr lang="en-US" sz="1000" dirty="0">
+              <a:rPr lang="en-US" sz="710" dirty="0">
                 <a:solidFill>
                   <a:srgbClr val="0B1F3A"/>
                 </a:solidFill>
@@ -20258,7 +20258,7 @@
               </a:rPr>
               <a:t>代數字：時速 50 ＝ 每秒 13.9 公尺</a:t>
             </a:r>
-            <a:endParaRPr lang="en-US" sz="1050" dirty="0"/>
+            <a:endParaRPr lang="en-US" sz="750" dirty="0"/>
           </a:p>
         </p:txBody>
       </p:sp>
@@ -20270,8 +20270,8 @@
         </p:nvSpPr>
         <p:spPr>
           <a:xfrm>
-            <a:off x="5788152" y="2980944"/>
-            <a:ext cx="2852928" cy="246888"/>
+            <a:off x="5435809" y="2143798"/>
+            <a:ext cx="2026379" cy="175360"/>
           </a:xfrm>
           <a:prstGeom prst="rect">
             <a:avLst/>
@@ -20287,7 +20287,7 @@
               <a:buNone/>
             </a:pPr>
             <a:r>
-              <a:rPr lang="en-US" sz="1100" dirty="0">
+              <a:rPr lang="en-US" sz="780" dirty="0">
                 <a:solidFill>
                   <a:srgbClr val="1A2733"/>
                 </a:solidFill>
@@ -20297,7 +20297,7 @@
               </a:rPr>
               <a:t>13,9 × 0,3 = 4,2 m</a:t>
             </a:r>
-            <a:endParaRPr lang="en-US" sz="1100" dirty="0"/>
+            <a:endParaRPr lang="en-US" sz="780" dirty="0"/>
           </a:p>
         </p:txBody>
       </p:sp>
@@ -20309,8 +20309,8 @@
         </p:nvSpPr>
         <p:spPr>
           <a:xfrm>
-            <a:off x="5788152" y="3227832"/>
-            <a:ext cx="2852928" cy="246888"/>
+            <a:off x="5435809" y="2319158"/>
+            <a:ext cx="2026379" cy="175360"/>
           </a:xfrm>
           <a:prstGeom prst="rect">
             <a:avLst/>
@@ -20326,7 +20326,7 @@
               <a:buNone/>
             </a:pPr>
             <a:r>
-              <a:rPr lang="en-US" sz="1100" dirty="0">
+              <a:rPr lang="en-US" sz="780" dirty="0">
                 <a:solidFill>
                   <a:srgbClr val="1A2733"/>
                 </a:solidFill>
@@ -20336,7 +20336,7 @@
               </a:rPr>
               <a:t>13,9² ÷ 12 = 16,1 m</a:t>
             </a:r>
-            <a:endParaRPr lang="en-US" sz="1100" dirty="0"/>
+            <a:endParaRPr lang="en-US" sz="780" dirty="0"/>
           </a:p>
         </p:txBody>
       </p:sp>
@@ -20348,8 +20348,8 @@
         </p:nvSpPr>
         <p:spPr>
           <a:xfrm>
-            <a:off x="5788152" y="3474720"/>
-            <a:ext cx="2852928" cy="246888"/>
+            <a:off x="5435809" y="2494517"/>
+            <a:ext cx="2026379" cy="175360"/>
           </a:xfrm>
           <a:prstGeom prst="rect">
             <a:avLst/>
@@ -20365,7 +20365,7 @@
               <a:buNone/>
             </a:pPr>
             <a:r>
-              <a:rPr lang="en-US" sz="1100" b="1" dirty="0">
+              <a:rPr lang="en-US" sz="780" b="1" dirty="0">
                 <a:solidFill>
                   <a:srgbClr val="D9463E"/>
                 </a:solidFill>
@@ -20375,7 +20375,7 @@
               </a:rPr>
               <a:t>4,2 + 16,1 ≈ 20 m → tia ≥ 25 m</a:t>
             </a:r>
-            <a:endParaRPr lang="en-US" sz="1100" dirty="0"/>
+            <a:endParaRPr lang="en-US" sz="780" dirty="0"/>
           </a:p>
         </p:txBody>
       </p:sp>
@@ -20387,8 +20387,8 @@
         </p:nvSpPr>
         <p:spPr>
           <a:xfrm>
-            <a:off x="502920" y="3913632"/>
-            <a:ext cx="8138160" cy="603504"/>
+            <a:off x="1681812" y="2806268"/>
+            <a:ext cx="5780375" cy="428657"/>
           </a:xfrm>
           <a:prstGeom prst="roundRect">
             <a:avLst>
@@ -20414,8 +20414,8 @@
         </p:nvSpPr>
         <p:spPr>
           <a:xfrm>
-            <a:off x="685800" y="3977640"/>
-            <a:ext cx="7772400" cy="493776"/>
+            <a:off x="1811708" y="2851732"/>
+            <a:ext cx="5520583" cy="350719"/>
           </a:xfrm>
           <a:prstGeom prst="rect">
             <a:avLst/>
@@ -20434,7 +20434,7 @@
               <a:buNone/>
             </a:pPr>
             <a:r>
-              <a:rPr lang="en-US" sz="1200" b="1" dirty="0">
+              <a:rPr lang="en-US" sz="850" b="1" dirty="0">
                 <a:solidFill>
                   <a:srgbClr val="7A4E00"/>
                 </a:solidFill>
@@ -20444,7 +20444,7 @@
               </a:rPr>
               <a:t>Tia ngắn hơn quãng đường phanh thì thấy cũng vô ích. Giới hạn cứng.</a:t>
             </a:r>
-            <a:endParaRPr lang="en-US" sz="1200" dirty="0"/>
+            <a:endParaRPr lang="en-US" sz="850" dirty="0"/>
           </a:p>
           <a:p>
             <a:pPr indent="0" marL="0">
@@ -20454,7 +20454,7 @@
               <a:buNone/>
             </a:pPr>
             <a:r>
-              <a:rPr lang="en-US" sz="1100" dirty="0">
+              <a:rPr lang="en-US" sz="780" dirty="0">
                 <a:solidFill>
                   <a:srgbClr val="7A4E00"/>
                 </a:solidFill>
@@ -20464,7 +20464,7 @@
               </a:rPr>
               <a:t>射線比煞停距離短，看到也沒用。這是硬下限。</a:t>
             </a:r>
-            <a:endParaRPr lang="en-US" sz="1200" dirty="0"/>
+            <a:endParaRPr lang="en-US" sz="850" dirty="0"/>
           </a:p>
         </p:txBody>
       </p:sp>
@@ -20484,8 +20484,8 @@
         </p:blipFill>
         <p:spPr>
           <a:xfrm>
-            <a:off x="7516368" y="4718304"/>
-            <a:ext cx="1097280" cy="242439"/>
+            <a:off x="6663327" y="3338842"/>
+            <a:ext cx="779376" cy="172200"/>
           </a:xfrm>
           <a:prstGeom prst="rect">
             <a:avLst/>
@@ -20500,8 +20500,8 @@
         </p:nvSpPr>
         <p:spPr>
           <a:xfrm>
-            <a:off x="109728" y="4791456"/>
-            <a:ext cx="822960" cy="256032"/>
+            <a:off x="1402536" y="3390800"/>
+            <a:ext cx="584532" cy="181855"/>
           </a:xfrm>
           <a:prstGeom prst="rect">
             <a:avLst/>
@@ -20517,7 +20517,7 @@
               <a:buNone/>
             </a:pPr>
             <a:r>
-              <a:rPr lang="en-US" sz="900" dirty="0">
+              <a:rPr lang="en-US" sz="640" dirty="0">
                 <a:solidFill>
                   <a:srgbClr val="5F7183"/>
                 </a:solidFill>
@@ -20527,7 +20527,7 @@
               </a:rPr>
               <a:t>7 / 18</a:t>
             </a:r>
-            <a:endParaRPr lang="en-US" sz="900" dirty="0"/>
+            <a:endParaRPr lang="en-US" sz="640" dirty="0"/>
           </a:p>
         </p:txBody>
       </p:sp>
@@ -20539,8 +20539,8 @@
         </p:nvSpPr>
         <p:spPr>
           <a:xfrm>
-            <a:off x="960120" y="4791456"/>
-            <a:ext cx="2011680" cy="256032"/>
+            <a:off x="2006553" y="3390800"/>
+            <a:ext cx="1428857" cy="181855"/>
           </a:xfrm>
           <a:prstGeom prst="rect">
             <a:avLst/>
@@ -20556,7 +20556,7 @@
               <a:buNone/>
             </a:pPr>
             <a:r>
-              <a:rPr lang="en-US" sz="900" dirty="0">
+              <a:rPr lang="en-US" sz="640" dirty="0">
                 <a:solidFill>
                   <a:srgbClr val="5F7183"/>
                 </a:solidFill>
@@ -20566,7 +20566,7 @@
               </a:rPr>
               <a:t>Tiết 1 · 第 1 節</a:t>
             </a:r>
-            <a:endParaRPr lang="en-US" sz="900" dirty="0"/>
+            <a:endParaRPr lang="en-US" sz="640" dirty="0"/>
           </a:p>
         </p:txBody>
       </p:sp>
@@ -20603,8 +20603,8 @@
         </p:nvSpPr>
         <p:spPr>
           <a:xfrm>
-            <a:off x="502920" y="365760"/>
-            <a:ext cx="8138160" cy="274320"/>
+            <a:off x="1681812" y="286284"/>
+            <a:ext cx="5780375" cy="194844"/>
           </a:xfrm>
           <a:prstGeom prst="rect">
             <a:avLst/>
@@ -20620,7 +20620,7 @@
               <a:buNone/>
             </a:pPr>
             <a:r>
-              <a:rPr lang="en-US" sz="1300" b="1" dirty="0">
+              <a:rPr lang="en-US" sz="920" b="1" dirty="0">
                 <a:solidFill>
                   <a:srgbClr val="007F72"/>
                 </a:solidFill>
@@ -20630,7 +20630,7 @@
               </a:rPr>
               <a:t>▶ Video · 煞停距離：為什麼看到了還是停不下來</a:t>
             </a:r>
-            <a:endParaRPr lang="en-US" sz="1300" dirty="0"/>
+            <a:endParaRPr lang="en-US" sz="920" dirty="0"/>
           </a:p>
         </p:txBody>
       </p:sp>
@@ -20642,8 +20642,8 @@
         </p:nvSpPr>
         <p:spPr>
           <a:xfrm>
-            <a:off x="502920" y="676656"/>
-            <a:ext cx="8138160" cy="560684"/>
+            <a:off x="1681812" y="507107"/>
+            <a:ext cx="5780375" cy="398243"/>
           </a:xfrm>
           <a:prstGeom prst="rect">
             <a:avLst/>
@@ -20662,7 +20662,7 @@
               <a:buNone/>
             </a:pPr>
             <a:r>
-              <a:rPr lang="en-US" sz="1700" b="1" dirty="0">
+              <a:rPr lang="en-US" sz="1210" b="1" dirty="0">
                 <a:solidFill>
                   <a:srgbClr val="0B1F3A"/>
                 </a:solidFill>
@@ -20672,7 +20672,7 @@
               </a:rPr>
               <a:t>Hai đoạn đó, video này giảng lại một lần nữa</a:t>
             </a:r>
-            <a:endParaRPr lang="en-US" sz="1700" dirty="0"/>
+            <a:endParaRPr lang="en-US" sz="1210" dirty="0"/>
           </a:p>
           <a:p>
             <a:pPr indent="0" marL="0">
@@ -20682,7 +20682,7 @@
               <a:buNone/>
             </a:pPr>
             <a:r>
-              <a:rPr lang="en-US" sz="1250" dirty="0">
+              <a:rPr lang="en-US" sz="890" dirty="0">
                 <a:solidFill>
                   <a:srgbClr val="5F7183"/>
                 </a:solidFill>
@@ -20692,7 +20692,7 @@
               </a:rPr>
               <a:t>剛剛那兩段距離，這支影片再講一次</a:t>
             </a:r>
-            <a:endParaRPr lang="en-US" sz="1700" dirty="0"/>
+            <a:endParaRPr lang="en-US" sz="1210" dirty="0"/>
           </a:p>
         </p:txBody>
       </p:sp>
@@ -20704,8 +20704,8 @@
         </p:nvSpPr>
         <p:spPr>
           <a:xfrm>
-            <a:off x="502920" y="1255628"/>
-            <a:ext cx="3904488" cy="2566564"/>
+            <a:off x="1681812" y="918340"/>
+            <a:ext cx="2773281" cy="1822980"/>
           </a:xfrm>
           <a:prstGeom prst="roundRect">
             <a:avLst>
@@ -20731,8 +20731,8 @@
         </p:nvSpPr>
         <p:spPr>
           <a:xfrm>
-            <a:off x="999622" y="1680177"/>
-            <a:ext cx="1039673" cy="259466"/>
+            <a:off x="2034610" y="1219889"/>
+            <a:ext cx="738459" cy="184294"/>
           </a:xfrm>
           <a:prstGeom prst="rect">
             <a:avLst/>
@@ -20748,7 +20748,7 @@
               <a:buNone/>
             </a:pPr>
             <a:r>
-              <a:rPr lang="en-US" sz="900" b="1" dirty="0">
+              <a:rPr lang="en-US" sz="640" b="1" dirty="0">
                 <a:solidFill>
                   <a:srgbClr val="6FA8DC"/>
                 </a:solidFill>
@@ -20758,7 +20758,7 @@
               </a:rPr>
               <a:t>khô  乾</a:t>
             </a:r>
-            <a:endParaRPr lang="en-US" sz="900" dirty="0"/>
+            <a:endParaRPr lang="en-US" sz="640" dirty="0"/>
           </a:p>
         </p:txBody>
       </p:sp>
@@ -20770,8 +20770,8 @@
         </p:nvSpPr>
         <p:spPr>
           <a:xfrm>
-            <a:off x="999622" y="1944435"/>
-            <a:ext cx="623804" cy="286950"/>
+            <a:off x="2034610" y="1407586"/>
+            <a:ext cx="443076" cy="203815"/>
           </a:xfrm>
           <a:prstGeom prst="roundRect">
             <a:avLst>
@@ -20792,8 +20792,8 @@
         </p:nvSpPr>
         <p:spPr>
           <a:xfrm>
-            <a:off x="1236667" y="2001825"/>
-            <a:ext cx="212093" cy="172170"/>
+            <a:off x="2202979" y="1448349"/>
+            <a:ext cx="150646" cy="122289"/>
           </a:xfrm>
           <a:prstGeom prst="roundRect">
             <a:avLst>
@@ -20814,8 +20814,8 @@
         </p:nvSpPr>
         <p:spPr>
           <a:xfrm>
-            <a:off x="1692737" y="2087910"/>
-            <a:ext cx="1316919" cy="0"/>
+            <a:off x="2526916" y="1509494"/>
+            <a:ext cx="935382" cy="0"/>
           </a:xfrm>
           <a:prstGeom prst="line">
             <a:avLst/>
@@ -20837,8 +20837,8 @@
         </p:nvSpPr>
         <p:spPr>
           <a:xfrm>
-            <a:off x="3009656" y="1921110"/>
-            <a:ext cx="121295" cy="333600"/>
+            <a:off x="3462298" y="1391019"/>
+            <a:ext cx="86154" cy="236949"/>
           </a:xfrm>
           <a:prstGeom prst="roundRect">
             <a:avLst>
@@ -20859,8 +20859,8 @@
         </p:nvSpPr>
         <p:spPr>
           <a:xfrm>
-            <a:off x="999622" y="2347377"/>
-            <a:ext cx="1039673" cy="259466"/>
+            <a:off x="2034610" y="1693788"/>
+            <a:ext cx="738459" cy="184294"/>
           </a:xfrm>
           <a:prstGeom prst="rect">
             <a:avLst/>
@@ -20876,7 +20876,7 @@
               <a:buNone/>
             </a:pPr>
             <a:r>
-              <a:rPr lang="en-US" sz="900" b="1" dirty="0">
+              <a:rPr lang="en-US" sz="640" b="1" dirty="0">
                 <a:solidFill>
                   <a:srgbClr val="D9463E"/>
                 </a:solidFill>
@@ -20886,7 +20886,7 @@
               </a:rPr>
               <a:t>ướt  濕</a:t>
             </a:r>
-            <a:endParaRPr lang="en-US" sz="900" dirty="0"/>
+            <a:endParaRPr lang="en-US" sz="640" dirty="0"/>
           </a:p>
         </p:txBody>
       </p:sp>
@@ -20898,8 +20898,8 @@
         </p:nvSpPr>
         <p:spPr>
           <a:xfrm>
-            <a:off x="999622" y="2611635"/>
-            <a:ext cx="623804" cy="286950"/>
+            <a:off x="2034610" y="1881485"/>
+            <a:ext cx="443076" cy="203815"/>
           </a:xfrm>
           <a:prstGeom prst="roundRect">
             <a:avLst>
@@ -20920,8 +20920,8 @@
         </p:nvSpPr>
         <p:spPr>
           <a:xfrm>
-            <a:off x="1236667" y="2669025"/>
-            <a:ext cx="212093" cy="172170"/>
+            <a:off x="2202979" y="1922248"/>
+            <a:ext cx="150646" cy="122289"/>
           </a:xfrm>
           <a:prstGeom prst="roundRect">
             <a:avLst>
@@ -20942,8 +20942,8 @@
         </p:nvSpPr>
         <p:spPr>
           <a:xfrm>
-            <a:off x="1692737" y="2755110"/>
-            <a:ext cx="2148657" cy="0"/>
+            <a:off x="2526916" y="1983392"/>
+            <a:ext cx="1526149" cy="0"/>
           </a:xfrm>
           <a:prstGeom prst="line">
             <a:avLst/>
@@ -20965,8 +20965,8 @@
         </p:nvSpPr>
         <p:spPr>
           <a:xfrm>
-            <a:off x="3841394" y="2588310"/>
-            <a:ext cx="121295" cy="333600"/>
+            <a:off x="4053065" y="1864918"/>
+            <a:ext cx="86154" cy="236949"/>
           </a:xfrm>
           <a:prstGeom prst="roundRect">
             <a:avLst>
@@ -20987,8 +20987,8 @@
         </p:nvSpPr>
         <p:spPr>
           <a:xfrm>
-            <a:off x="685800" y="3273552"/>
-            <a:ext cx="3538728" cy="475488"/>
+            <a:off x="1811708" y="2351632"/>
+            <a:ext cx="2513489" cy="337730"/>
           </a:xfrm>
           <a:prstGeom prst="rect">
             <a:avLst/>
@@ -21007,7 +21007,7 @@
               <a:buNone/>
             </a:pPr>
             <a:r>
-              <a:rPr lang="en-US" sz="950" dirty="0">
+              <a:rPr lang="en-US" sz="670" dirty="0">
                 <a:solidFill>
                   <a:srgbClr val="5F7183"/>
                 </a:solidFill>
@@ -21017,7 +21017,7 @@
               </a:rPr>
               <a:t>Cùng tốc độ, đường ướt thì quãng đường phanh dài hơn hẳn — tiết 3 các bạn sẽ tự thấy.</a:t>
             </a:r>
-            <a:endParaRPr lang="en-US" sz="950" dirty="0"/>
+            <a:endParaRPr lang="en-US" sz="670" dirty="0"/>
           </a:p>
           <a:p>
             <a:pPr algn="ctr" indent="0" marL="0">
@@ -21027,7 +21027,7 @@
               <a:buNone/>
             </a:pPr>
             <a:r>
-              <a:rPr lang="en-US" sz="900" dirty="0">
+              <a:rPr lang="en-US" sz="640" dirty="0">
                 <a:solidFill>
                   <a:srgbClr val="5F7183"/>
                 </a:solidFill>
@@ -21037,7 +21037,7 @@
               </a:rPr>
               <a:t>同樣的車速，濕路面的煞車距離長得多——第三節各位會自己看到。</a:t>
             </a:r>
-            <a:endParaRPr lang="en-US" sz="950" dirty="0"/>
+            <a:endParaRPr lang="en-US" sz="670" dirty="0"/>
           </a:p>
         </p:txBody>
       </p:sp>
@@ -21049,8 +21049,8 @@
         </p:nvSpPr>
         <p:spPr>
           <a:xfrm>
-            <a:off x="4736592" y="1255628"/>
-            <a:ext cx="3904488" cy="2566564"/>
+            <a:off x="4688906" y="918340"/>
+            <a:ext cx="2773281" cy="1822980"/>
           </a:xfrm>
           <a:prstGeom prst="roundRect">
             <a:avLst>
@@ -21076,8 +21076,8 @@
         </p:nvSpPr>
         <p:spPr>
           <a:xfrm>
-            <a:off x="4919472" y="1420220"/>
-            <a:ext cx="347472" cy="347472"/>
+            <a:off x="4818803" y="1035246"/>
+            <a:ext cx="246803" cy="246803"/>
           </a:xfrm>
           <a:prstGeom prst="ellipse">
             <a:avLst/>
@@ -21096,8 +21096,8 @@
         </p:nvSpPr>
         <p:spPr>
           <a:xfrm>
-            <a:off x="4919472" y="1465940"/>
-            <a:ext cx="347472" cy="256032"/>
+            <a:off x="4818803" y="1067721"/>
+            <a:ext cx="246803" cy="181855"/>
           </a:xfrm>
           <a:prstGeom prst="rect">
             <a:avLst/>
@@ -21113,7 +21113,7 @@
               <a:buNone/>
             </a:pPr>
             <a:r>
-              <a:rPr lang="en-US" sz="1200" b="1" dirty="0">
+              <a:rPr lang="en-US" sz="850" b="1" dirty="0">
                 <a:solidFill>
                   <a:srgbClr val="FFFFFF"/>
                 </a:solidFill>
@@ -21123,7 +21123,7 @@
               </a:rPr>
               <a:t>▶</a:t>
             </a:r>
-            <a:endParaRPr lang="en-US" sz="1200" dirty="0"/>
+            <a:endParaRPr lang="en-US" sz="850" dirty="0"/>
           </a:p>
         </p:txBody>
       </p:sp>
@@ -21135,8 +21135,8 @@
         </p:nvSpPr>
         <p:spPr>
           <a:xfrm>
-            <a:off x="5340096" y="1401932"/>
-            <a:ext cx="3118104" cy="420624"/>
+            <a:off x="5117564" y="1022257"/>
+            <a:ext cx="2214728" cy="298761"/>
           </a:xfrm>
           <a:prstGeom prst="rect">
             <a:avLst/>
@@ -21152,7 +21152,7 @@
               <a:buNone/>
             </a:pPr>
             <a:r>
-              <a:rPr lang="en-US" sz="1050" b="1" dirty="0">
+              <a:rPr lang="en-US" sz="750" b="1" dirty="0">
                 <a:solidFill>
                   <a:srgbClr val="0B1F3A"/>
                 </a:solidFill>
@@ -21162,7 +21162,7 @@
               </a:rPr>
               <a:t>Stopping Distance | Forces &amp; Motion | Physics</a:t>
             </a:r>
-            <a:endParaRPr lang="en-US" sz="1050" dirty="0"/>
+            <a:endParaRPr lang="en-US" sz="750" dirty="0"/>
           </a:p>
         </p:txBody>
       </p:sp>
@@ -21174,8 +21174,8 @@
         </p:nvSpPr>
         <p:spPr>
           <a:xfrm>
-            <a:off x="4919472" y="1859132"/>
-            <a:ext cx="3538728" cy="201168"/>
+            <a:off x="4818803" y="1346997"/>
+            <a:ext cx="2513489" cy="142886"/>
           </a:xfrm>
           <a:prstGeom prst="rect">
             <a:avLst/>
@@ -21191,7 +21191,7 @@
               <a:buNone/>
             </a:pPr>
             <a:r>
-              <a:rPr lang="en-US" sz="900" dirty="0">
+              <a:rPr lang="en-US" sz="640" dirty="0">
                 <a:solidFill>
                   <a:srgbClr val="5F7183"/>
                 </a:solidFill>
@@ -21201,7 +21201,7 @@
               </a:rPr>
               <a:t>FuseSchool（教育頻道）　·　3:44，播到 2:30</a:t>
             </a:r>
-            <a:endParaRPr lang="en-US" sz="900" dirty="0"/>
+            <a:endParaRPr lang="en-US" sz="640" dirty="0"/>
           </a:p>
         </p:txBody>
       </p:sp>
@@ -21215,8 +21215,8 @@
         </p:nvSpPr>
         <p:spPr>
           <a:xfrm>
-            <a:off x="4919472" y="2042012"/>
-            <a:ext cx="3538728" cy="201168"/>
+            <a:off x="4818803" y="1476893"/>
+            <a:ext cx="2513489" cy="142886"/>
           </a:xfrm>
           <a:prstGeom prst="rect">
             <a:avLst/>
@@ -21232,7 +21232,7 @@
               <a:buNone/>
             </a:pPr>
             <a:r>
-              <a:rPr lang="en-US" sz="850" u="sng" dirty="0">
+              <a:rPr lang="en-US" sz="600" u="sng" dirty="0">
                 <a:solidFill>
                   <a:srgbClr val="1F6FBF"/>
                 </a:solidFill>
@@ -21249,7 +21249,7 @@
               </a:rPr>
               <a:t>https://www.youtube.com/watch?v=HTANxqGQcfI</a:t>
             </a:r>
-            <a:endParaRPr lang="en-US" sz="850" dirty="0"/>
+            <a:endParaRPr lang="en-US" sz="600" dirty="0"/>
           </a:p>
         </p:txBody>
       </p:sp>
@@ -21261,8 +21261,8 @@
         </p:nvSpPr>
         <p:spPr>
           <a:xfrm>
-            <a:off x="4919472" y="2316332"/>
-            <a:ext cx="36576" cy="237744"/>
+            <a:off x="4818803" y="1671737"/>
+            <a:ext cx="25979" cy="168865"/>
           </a:xfrm>
           <a:prstGeom prst="rect">
             <a:avLst/>
@@ -21281,8 +21281,8 @@
         </p:nvSpPr>
         <p:spPr>
           <a:xfrm>
-            <a:off x="5047488" y="2279756"/>
-            <a:ext cx="3429000" cy="590919"/>
+            <a:off x="4909730" y="1645758"/>
+            <a:ext cx="2435551" cy="419718"/>
           </a:xfrm>
           <a:prstGeom prst="rect">
             <a:avLst/>
@@ -21301,7 +21301,7 @@
               <a:buNone/>
             </a:pPr>
             <a:r>
-              <a:rPr lang="en-US" sz="950" dirty="0">
+              <a:rPr lang="en-US" sz="670" dirty="0">
                 <a:solidFill>
                   <a:srgbClr val="1A2733"/>
                 </a:solidFill>
@@ -21311,7 +21311,7 @@
               </a:rPr>
               <a:t>0:20–1:20　Quãng đường suy nghĩ: thời gian phản ứng × tốc độ. Mệt, dùng điện thoại thì dài thêm.</a:t>
             </a:r>
-            <a:endParaRPr lang="en-US" sz="950" dirty="0"/>
+            <a:endParaRPr lang="en-US" sz="670" dirty="0"/>
           </a:p>
           <a:p>
             <a:pPr indent="0" marL="0">
@@ -21321,7 +21321,7 @@
               <a:buNone/>
             </a:pPr>
             <a:r>
-              <a:rPr lang="en-US" sz="900" dirty="0">
+              <a:rPr lang="en-US" sz="640" dirty="0">
                 <a:solidFill>
                   <a:srgbClr val="5F7183"/>
                 </a:solidFill>
@@ -21331,7 +21331,7 @@
               </a:rPr>
               <a:t>0:20–1:20　反應距離：反應時間 × 速度。疲勞、滑手機都會變長。</a:t>
             </a:r>
-            <a:endParaRPr lang="en-US" sz="950" dirty="0"/>
+            <a:endParaRPr lang="en-US" sz="670" dirty="0"/>
           </a:p>
         </p:txBody>
       </p:sp>
@@ -21343,8 +21343,8 @@
         </p:nvSpPr>
         <p:spPr>
           <a:xfrm>
-            <a:off x="4919472" y="2943828"/>
-            <a:ext cx="36576" cy="237744"/>
+            <a:off x="4818803" y="2117435"/>
+            <a:ext cx="25979" cy="168865"/>
           </a:xfrm>
           <a:prstGeom prst="rect">
             <a:avLst/>
@@ -21363,8 +21363,8 @@
         </p:nvSpPr>
         <p:spPr>
           <a:xfrm>
-            <a:off x="5047488" y="2907252"/>
-            <a:ext cx="3429000" cy="456079"/>
+            <a:off x="4909730" y="2091456"/>
+            <a:ext cx="2435551" cy="323944"/>
           </a:xfrm>
           <a:prstGeom prst="rect">
             <a:avLst/>
@@ -21383,7 +21383,7 @@
               <a:buNone/>
             </a:pPr>
             <a:r>
-              <a:rPr lang="en-US" sz="950" dirty="0">
+              <a:rPr lang="en-US" sz="670" dirty="0">
                 <a:solidFill>
                   <a:srgbClr val="1A2733"/>
                 </a:solidFill>
@@ -21393,7 +21393,7 @@
               </a:rPr>
               <a:t>1:20–2:10　Quãng đường phanh: nhanh hơn hoặc nặng hơn thì dài hơn; đường ướt cũng dài hơn.</a:t>
             </a:r>
-            <a:endParaRPr lang="en-US" sz="950" dirty="0"/>
+            <a:endParaRPr lang="en-US" sz="670" dirty="0"/>
           </a:p>
           <a:p>
             <a:pPr indent="0" marL="0">
@@ -21403,7 +21403,7 @@
               <a:buNone/>
             </a:pPr>
             <a:r>
-              <a:rPr lang="en-US" sz="900" dirty="0">
+              <a:rPr lang="en-US" sz="640" dirty="0">
                 <a:solidFill>
                   <a:srgbClr val="5F7183"/>
                 </a:solidFill>
@@ -21413,7 +21413,7 @@
               </a:rPr>
               <a:t>1:20–2:10　煞車距離：車速快、車子重就變長；路面濕也變長。</a:t>
             </a:r>
-            <a:endParaRPr lang="en-US" sz="950" dirty="0"/>
+            <a:endParaRPr lang="en-US" sz="670" dirty="0"/>
           </a:p>
         </p:txBody>
       </p:sp>
@@ -21425,8 +21425,8 @@
         </p:nvSpPr>
         <p:spPr>
           <a:xfrm>
-            <a:off x="4919472" y="3436483"/>
-            <a:ext cx="36576" cy="237744"/>
+            <a:off x="4818803" y="2467358"/>
+            <a:ext cx="25979" cy="168865"/>
           </a:xfrm>
           <a:prstGeom prst="rect">
             <a:avLst/>
@@ -21445,8 +21445,8 @@
         </p:nvSpPr>
         <p:spPr>
           <a:xfrm>
-            <a:off x="5047488" y="3399907"/>
-            <a:ext cx="3429000" cy="313748"/>
+            <a:off x="4909730" y="2441379"/>
+            <a:ext cx="2435551" cy="222849"/>
           </a:xfrm>
           <a:prstGeom prst="rect">
             <a:avLst/>
@@ -21465,7 +21465,7 @@
               <a:buNone/>
             </a:pPr>
             <a:r>
-              <a:rPr lang="en-US" sz="950" dirty="0">
+              <a:rPr lang="en-US" sz="670" dirty="0">
                 <a:solidFill>
                   <a:srgbClr val="1A2733"/>
                 </a:solidFill>
@@ -21475,7 +21475,7 @@
               </a:rPr>
               <a:t>Câu hỏi: đoạn nào dài ra theo BÌNH PHƯƠNG của tốc độ?</a:t>
             </a:r>
-            <a:endParaRPr lang="en-US" sz="950" dirty="0"/>
+            <a:endParaRPr lang="en-US" sz="670" dirty="0"/>
           </a:p>
           <a:p>
             <a:pPr indent="0" marL="0">
@@ -21485,7 +21485,7 @@
               <a:buNone/>
             </a:pPr>
             <a:r>
-              <a:rPr lang="en-US" sz="900" dirty="0">
+              <a:rPr lang="en-US" sz="640" dirty="0">
                 <a:solidFill>
                   <a:srgbClr val="5F7183"/>
                 </a:solidFill>
@@ -21495,7 +21495,7 @@
               </a:rPr>
               <a:t>問題：哪一段是跟速度的平方成正比？</a:t>
             </a:r>
-            <a:endParaRPr lang="en-US" sz="950" dirty="0"/>
+            <a:endParaRPr lang="en-US" sz="670" dirty="0"/>
           </a:p>
         </p:txBody>
       </p:sp>
@@ -21507,8 +21507,8 @@
         </p:nvSpPr>
         <p:spPr>
           <a:xfrm>
-            <a:off x="502920" y="3931920"/>
-            <a:ext cx="8138160" cy="548640"/>
+            <a:off x="1681812" y="2819258"/>
+            <a:ext cx="5780375" cy="389688"/>
           </a:xfrm>
           <a:prstGeom prst="roundRect">
             <a:avLst>
@@ -21534,8 +21534,8 @@
         </p:nvSpPr>
         <p:spPr>
           <a:xfrm>
-            <a:off x="685800" y="3995928"/>
-            <a:ext cx="7772400" cy="438912"/>
+            <a:off x="1811708" y="2864721"/>
+            <a:ext cx="5520583" cy="311751"/>
           </a:xfrm>
           <a:prstGeom prst="rect">
             <a:avLst/>
@@ -21554,7 +21554,7 @@
               <a:buNone/>
             </a:pPr>
             <a:r>
-              <a:rPr lang="en-US" sz="1150" b="1" dirty="0">
+              <a:rPr lang="en-US" sz="820" b="1" dirty="0">
                 <a:solidFill>
                   <a:srgbClr val="7A4E00"/>
                 </a:solidFill>
@@ -21564,7 +21564,7 @@
               </a:rPr>
               <a:t>Lời tiếng Anh. Bật phụ đề → Dịch tự động → Tiếng Việt. Dừng ở 2:30.</a:t>
             </a:r>
-            <a:endParaRPr lang="en-US" sz="1150" dirty="0"/>
+            <a:endParaRPr lang="en-US" sz="820" dirty="0"/>
           </a:p>
           <a:p>
             <a:pPr indent="0" marL="0">
@@ -21574,7 +21574,7 @@
               <a:buNone/>
             </a:pPr>
             <a:r>
-              <a:rPr lang="en-US" sz="1050" dirty="0">
+              <a:rPr lang="en-US" sz="750" dirty="0">
                 <a:solidFill>
                   <a:srgbClr val="7A4E00"/>
                 </a:solidFill>
@@ -21584,7 +21584,7 @@
               </a:rPr>
               <a:t>英文旁白。請開字幕 → 自動翻譯 → 越南文。播到 2:30 就停。</a:t>
             </a:r>
-            <a:endParaRPr lang="en-US" sz="1150" dirty="0"/>
+            <a:endParaRPr lang="en-US" sz="820" dirty="0"/>
           </a:p>
         </p:txBody>
       </p:sp>
@@ -21604,8 +21604,8 @@
         </p:blipFill>
         <p:spPr>
           <a:xfrm>
-            <a:off x="7516368" y="4718304"/>
-            <a:ext cx="1097280" cy="242439"/>
+            <a:off x="6663327" y="3338842"/>
+            <a:ext cx="779376" cy="172200"/>
           </a:xfrm>
           <a:prstGeom prst="rect">
             <a:avLst/>
@@ -21620,8 +21620,8 @@
         </p:nvSpPr>
         <p:spPr>
           <a:xfrm>
-            <a:off x="109728" y="4791456"/>
-            <a:ext cx="822960" cy="256032"/>
+            <a:off x="1402536" y="3390800"/>
+            <a:ext cx="584532" cy="181855"/>
           </a:xfrm>
           <a:prstGeom prst="rect">
             <a:avLst/>
@@ -21637,7 +21637,7 @@
               <a:buNone/>
             </a:pPr>
             <a:r>
-              <a:rPr lang="en-US" sz="900" dirty="0">
+              <a:rPr lang="en-US" sz="640" dirty="0">
                 <a:solidFill>
                   <a:srgbClr val="5F7183"/>
                 </a:solidFill>
@@ -21647,7 +21647,7 @@
               </a:rPr>
               <a:t>8 / 18</a:t>
             </a:r>
-            <a:endParaRPr lang="en-US" sz="900" dirty="0"/>
+            <a:endParaRPr lang="en-US" sz="640" dirty="0"/>
           </a:p>
         </p:txBody>
       </p:sp>
@@ -21659,8 +21659,8 @@
         </p:nvSpPr>
         <p:spPr>
           <a:xfrm>
-            <a:off x="960120" y="4791456"/>
-            <a:ext cx="2011680" cy="256032"/>
+            <a:off x="2006553" y="3390800"/>
+            <a:ext cx="1428857" cy="181855"/>
           </a:xfrm>
           <a:prstGeom prst="rect">
             <a:avLst/>
@@ -21676,7 +21676,7 @@
               <a:buNone/>
             </a:pPr>
             <a:r>
-              <a:rPr lang="en-US" sz="900" dirty="0">
+              <a:rPr lang="en-US" sz="640" dirty="0">
                 <a:solidFill>
                   <a:srgbClr val="5F7183"/>
                 </a:solidFill>
@@ -21686,7 +21686,7 @@
               </a:rPr>
               <a:t>Tiết 1 · 第 1 節</a:t>
             </a:r>
-            <a:endParaRPr lang="en-US" sz="900" dirty="0"/>
+            <a:endParaRPr lang="en-US" sz="640" dirty="0"/>
           </a:p>
         </p:txBody>
       </p:sp>
@@ -21723,8 +21723,8 @@
         </p:nvSpPr>
         <p:spPr>
           <a:xfrm>
-            <a:off x="502920" y="292608"/>
-            <a:ext cx="8138160" cy="841248"/>
+            <a:off x="1681812" y="234326"/>
+            <a:ext cx="5780375" cy="597522"/>
           </a:xfrm>
           <a:prstGeom prst="rect">
             <a:avLst/>
@@ -21743,7 +21743,7 @@
               <a:buNone/>
             </a:pPr>
             <a:r>
-              <a:rPr lang="en-US" sz="2200" b="1" dirty="0">
+              <a:rPr lang="en-US" sz="1560" b="1" dirty="0">
                 <a:solidFill>
                   <a:srgbClr val="0B1F3A"/>
                 </a:solidFill>
@@ -21753,7 +21753,7 @@
               </a:rPr>
               <a:t>Bốn tốc độ, bốn yêu cầu tối thiểu cho chiều dài tia</a:t>
             </a:r>
-            <a:endParaRPr lang="en-US" sz="2200" dirty="0"/>
+            <a:endParaRPr lang="en-US" sz="1560" dirty="0"/>
           </a:p>
           <a:p>
             <a:pPr indent="0" marL="0">
@@ -21763,7 +21763,7 @@
               <a:buNone/>
             </a:pPr>
             <a:r>
-              <a:rPr lang="en-US" sz="1350" dirty="0">
+              <a:rPr lang="en-US" sz="960" dirty="0">
                 <a:solidFill>
                   <a:srgbClr val="5F7183"/>
                 </a:solidFill>
@@ -21773,7 +21773,7 @@
               </a:rPr>
               <a:t>四個車速，射線長度的四個最低要求</a:t>
             </a:r>
-            <a:endParaRPr lang="en-US" sz="2200" dirty="0"/>
+            <a:endParaRPr lang="en-US" sz="1560" dirty="0"/>
           </a:p>
         </p:txBody>
       </p:sp>
@@ -21785,8 +21785,8 @@
         </p:nvSpPr>
         <p:spPr>
           <a:xfrm>
-            <a:off x="502920" y="1133856"/>
-            <a:ext cx="8138160" cy="713232"/>
+            <a:off x="1681812" y="831848"/>
+            <a:ext cx="5780375" cy="506595"/>
           </a:xfrm>
           <a:prstGeom prst="roundRect">
             <a:avLst>
@@ -21807,8 +21807,8 @@
         </p:nvSpPr>
         <p:spPr>
           <a:xfrm>
-            <a:off x="649224" y="1207008"/>
-            <a:ext cx="7845552" cy="566928"/>
+            <a:off x="1785729" y="883806"/>
+            <a:ext cx="5572542" cy="402678"/>
           </a:xfrm>
           <a:prstGeom prst="rect">
             <a:avLst/>
@@ -21827,7 +21827,7 @@
               <a:buNone/>
             </a:pPr>
             <a:r>
-              <a:rPr lang="en-US" sz="1150" b="1" dirty="0">
+              <a:rPr lang="en-US" sz="820" b="1" dirty="0">
                 <a:solidFill>
                   <a:srgbClr val="007F72"/>
                 </a:solidFill>
@@ -21837,7 +21837,7 @@
               </a:rPr>
               <a:t>Tính bằng công thức trang trước. Cột cuối đã cộng thêm 5 m dự phòng.</a:t>
             </a:r>
-            <a:endParaRPr lang="en-US" sz="1150" dirty="0"/>
+            <a:endParaRPr lang="en-US" sz="820" dirty="0"/>
           </a:p>
           <a:p>
             <a:pPr indent="0" marL="0">
@@ -21847,7 +21847,7 @@
               <a:buNone/>
             </a:pPr>
             <a:r>
-              <a:rPr lang="en-US" sz="1000" dirty="0">
+              <a:rPr lang="en-US" sz="710" dirty="0">
                 <a:solidFill>
                   <a:srgbClr val="007F72"/>
                 </a:solidFill>
@@ -21857,7 +21857,7 @@
               </a:rPr>
               <a:t>用上一頁那條公式算出來的。最後一欄已經加了 5 公尺餘裕。</a:t>
             </a:r>
-            <a:endParaRPr lang="en-US" sz="1150" dirty="0"/>
+            <a:endParaRPr lang="en-US" sz="820" dirty="0"/>
           </a:p>
         </p:txBody>
       </p:sp>
@@ -21876,19 +21876,19 @@
           </p:nvPr>
         </p:nvGraphicFramePr>
         <p:xfrm>
-          <a:off x="502920" y="1956816"/>
-          <a:ext cx="8138160" cy="914400"/>
+          <a:off x="1681812" y="1416380"/>
+          <a:ext cx="5780375" cy="914400"/>
         </p:xfrm>
         <a:graphic>
           <a:graphicData uri="http://schemas.openxmlformats.org/drawingml/2006/table">
             <a:tbl>
               <a:tblPr/>
               <a:tblGrid>
-                <a:gridCol w="914400"/>
-                <a:gridCol w="914400"/>
-                <a:gridCol w="1005840"/>
-                <a:gridCol w="1051560"/>
-                <a:gridCol w="4251960"/>
+                <a:gridCol w="649480"/>
+                <a:gridCol w="649480"/>
+                <a:gridCol w="714428"/>
+                <a:gridCol w="746902"/>
+                <a:gridCol w="3020084"/>
               </a:tblGrid>
               <a:tr h="420624">
                 <a:tc>
@@ -23673,8 +23673,8 @@
         </p:nvSpPr>
         <p:spPr>
           <a:xfrm>
-            <a:off x="502920" y="4294133"/>
-            <a:ext cx="8138160" cy="457200"/>
+            <a:off x="1681812" y="3076530"/>
+            <a:ext cx="5780375" cy="324740"/>
           </a:xfrm>
           <a:prstGeom prst="rect">
             <a:avLst/>
@@ -23693,7 +23693,7 @@
               <a:buNone/>
             </a:pPr>
             <a:r>
-              <a:rPr lang="en-US" sz="1200" b="1" dirty="0">
+              <a:rPr lang="en-US" sz="850" b="1" dirty="0">
                 <a:solidFill>
                   <a:srgbClr val="007F72"/>
                 </a:solidFill>
@@ -23703,7 +23703,7 @@
               </a:rPr>
               <a:t>Xe thật 100 km/h cần hơn 200 m. Cảm biến nào làm được? Câu hỏi của chương 3.</a:t>
             </a:r>
-            <a:endParaRPr lang="en-US" sz="1200" dirty="0"/>
+            <a:endParaRPr lang="en-US" sz="850" dirty="0"/>
           </a:p>
           <a:p>
             <a:pPr indent="0" marL="0">
@@ -23713,7 +23713,7 @@
               <a:buNone/>
             </a:pPr>
             <a:r>
-              <a:rPr lang="en-US" sz="1100" dirty="0">
+              <a:rPr lang="en-US" sz="780" dirty="0">
                 <a:solidFill>
                   <a:srgbClr val="007F72"/>
                 </a:solidFill>
@@ -23723,7 +23723,7 @@
               </a:rPr>
               <a:t>真車時速 100 需要 200 公尺以上。哪一種感測器做得到？第三章的問題。</a:t>
             </a:r>
-            <a:endParaRPr lang="en-US" sz="1200" dirty="0"/>
+            <a:endParaRPr lang="en-US" sz="850" dirty="0"/>
           </a:p>
         </p:txBody>
       </p:sp>
@@ -23743,8 +23743,8 @@
         </p:blipFill>
         <p:spPr>
           <a:xfrm>
-            <a:off x="7516368" y="4718304"/>
-            <a:ext cx="1097280" cy="242439"/>
+            <a:off x="6663327" y="3338842"/>
+            <a:ext cx="779376" cy="172200"/>
           </a:xfrm>
           <a:prstGeom prst="rect">
             <a:avLst/>
@@ -23759,8 +23759,8 @@
         </p:nvSpPr>
         <p:spPr>
           <a:xfrm>
-            <a:off x="109728" y="4791456"/>
-            <a:ext cx="822960" cy="256032"/>
+            <a:off x="1402536" y="3390800"/>
+            <a:ext cx="584532" cy="181855"/>
           </a:xfrm>
           <a:prstGeom prst="rect">
             <a:avLst/>
@@ -23776,7 +23776,7 @@
               <a:buNone/>
             </a:pPr>
             <a:r>
-              <a:rPr lang="en-US" sz="900" dirty="0">
+              <a:rPr lang="en-US" sz="640" dirty="0">
                 <a:solidFill>
                   <a:srgbClr val="5F7183"/>
                 </a:solidFill>
@@ -23786,7 +23786,7 @@
               </a:rPr>
               <a:t>9 / 18</a:t>
             </a:r>
-            <a:endParaRPr lang="en-US" sz="900" dirty="0"/>
+            <a:endParaRPr lang="en-US" sz="640" dirty="0"/>
           </a:p>
         </p:txBody>
       </p:sp>
@@ -23798,8 +23798,8 @@
         </p:nvSpPr>
         <p:spPr>
           <a:xfrm>
-            <a:off x="960120" y="4791456"/>
-            <a:ext cx="2011680" cy="256032"/>
+            <a:off x="2006553" y="3390800"/>
+            <a:ext cx="1428857" cy="181855"/>
           </a:xfrm>
           <a:prstGeom prst="rect">
             <a:avLst/>
@@ -23815,7 +23815,7 @@
               <a:buNone/>
             </a:pPr>
             <a:r>
-              <a:rPr lang="en-US" sz="900" dirty="0">
+              <a:rPr lang="en-US" sz="640" dirty="0">
                 <a:solidFill>
                   <a:srgbClr val="5F7183"/>
                 </a:solidFill>
@@ -23825,7 +23825,7 @@
               </a:rPr>
               <a:t>Tiết 1 · 第 1 節</a:t>
             </a:r>
-            <a:endParaRPr lang="en-US" sz="900" dirty="0"/>
+            <a:endParaRPr lang="en-US" sz="640" dirty="0"/>
           </a:p>
         </p:txBody>
       </p:sp>

--- a/第四週(10-01)/第四週_第1節_簡報.pptx
+++ b/第四週(10-01)/第四週_第1節_簡報.pptx
@@ -7778,8 +7778,8 @@
       </p:nvGrpSpPr>
       <p:grpSpPr>
         <a:xfrm>
-          <a:off x="0" y="0"/>
-          <a:ext cx="0" cy="0"/>
+          <a:off x="1028250" y="0"/>
+          <a:ext cx="1" cy="1"/>
           <a:chOff x="0" y="0"/>
           <a:chExt cx="0" cy="0"/>
         </a:xfrm>
@@ -7792,8 +7792,8 @@
         </p:nvSpPr>
         <p:spPr>
           <a:xfrm>
-            <a:off x="6130753" y="-947729"/>
-            <a:ext cx="2987610" cy="2987610"/>
+            <a:off x="6273000" y="-1063125"/>
+            <a:ext cx="3260250" cy="3260250"/>
           </a:xfrm>
           <a:prstGeom prst="ellipse">
             <a:avLst/>
@@ -7817,8 +7817,8 @@
         </p:nvSpPr>
         <p:spPr>
           <a:xfrm>
-            <a:off x="7104973" y="1520297"/>
-            <a:ext cx="1688649" cy="1688649"/>
+            <a:off x="7336125" y="1630125"/>
+            <a:ext cx="1842750" cy="1842750"/>
           </a:xfrm>
           <a:prstGeom prst="ellipse">
             <a:avLst/>
@@ -7839,8 +7839,8 @@
         </p:nvSpPr>
         <p:spPr>
           <a:xfrm>
-            <a:off x="1681812" y="883806"/>
-            <a:ext cx="4936051" cy="194844"/>
+            <a:off x="1418063" y="935550"/>
+            <a:ext cx="5386500" cy="212625"/>
           </a:xfrm>
           <a:prstGeom prst="rect">
             <a:avLst/>
@@ -7856,7 +7856,7 @@
               <a:buNone/>
             </a:pPr>
             <a:r>
-              <a:rPr lang="en-US" sz="890" b="1" dirty="0">
+              <a:rPr lang="en-US" sz="970" b="1" dirty="0">
                 <a:solidFill>
                   <a:srgbClr val="00A896"/>
                 </a:solidFill>
@@ -7866,7 +7866,7 @@
               </a:rPr>
               <a:t>MITUST · Nguyên lý xe tự lái · Tuần 4</a:t>
             </a:r>
-            <a:endParaRPr lang="en-US" sz="890" dirty="0"/>
+            <a:endParaRPr lang="en-US" sz="970" dirty="0"/>
           </a:p>
         </p:txBody>
       </p:sp>
@@ -7878,8 +7878,8 @@
         </p:nvSpPr>
         <p:spPr>
           <a:xfrm>
-            <a:off x="1681812" y="1143598"/>
-            <a:ext cx="5325739" cy="884351"/>
+            <a:off x="1418063" y="1219050"/>
+            <a:ext cx="5811750" cy="965055"/>
           </a:xfrm>
           <a:prstGeom prst="rect">
             <a:avLst/>
@@ -7898,7 +7898,7 @@
               <a:buNone/>
             </a:pPr>
             <a:r>
-              <a:rPr lang="en-US" sz="2130" b="1" dirty="0">
+              <a:rPr lang="en-US" sz="2330" b="1" dirty="0">
                 <a:solidFill>
                   <a:srgbClr val="FFFFFF"/>
                 </a:solidFill>
@@ -7908,7 +7908,7 @@
               </a:rPr>
               <a:t>Ba thanh trượt tuần trước</a:t>
             </a:r>
-            <a:endParaRPr lang="en-US" sz="2130" dirty="0"/>
+            <a:endParaRPr lang="en-US" sz="2330" dirty="0"/>
           </a:p>
           <a:p>
             <a:pPr indent="0" marL="0">
@@ -7918,7 +7918,7 @@
               <a:buNone/>
             </a:pPr>
             <a:r>
-              <a:rPr lang="en-US" sz="2130" b="1" dirty="0">
+              <a:rPr lang="en-US" sz="2330" b="1" dirty="0">
                 <a:solidFill>
                   <a:srgbClr val="FFFFFF"/>
                 </a:solidFill>
@@ -7928,7 +7928,7 @@
               </a:rPr>
               <a:t>chính là ba dòng trong bảng thông số</a:t>
             </a:r>
-            <a:endParaRPr lang="en-US" sz="2130" dirty="0"/>
+            <a:endParaRPr lang="en-US" sz="2330" dirty="0"/>
           </a:p>
           <a:p>
             <a:pPr indent="0" marL="0">
@@ -7938,7 +7938,7 @@
               <a:buNone/>
             </a:pPr>
             <a:r>
-              <a:rPr lang="en-US" sz="1210" dirty="0">
+              <a:rPr lang="en-US" sz="1320" dirty="0">
                 <a:solidFill>
                   <a:srgbClr val="C8D6E2"/>
                 </a:solidFill>
@@ -7948,7 +7948,7 @@
               </a:rPr>
               <a:t>上週你們拉的三個滑桿，就是規格表上的三行</a:t>
             </a:r>
-            <a:endParaRPr lang="en-US" sz="2130" dirty="0"/>
+            <a:endParaRPr lang="en-US" sz="2330" dirty="0"/>
           </a:p>
         </p:txBody>
       </p:sp>
@@ -7960,8 +7960,8 @@
         </p:nvSpPr>
         <p:spPr>
           <a:xfrm>
-            <a:off x="1681812" y="2163355"/>
-            <a:ext cx="974221" cy="29227"/>
+            <a:off x="1418063" y="2331867"/>
+            <a:ext cx="1063125" cy="31894"/>
           </a:xfrm>
           <a:prstGeom prst="rect">
             <a:avLst/>
@@ -7980,8 +7980,8 @@
         </p:nvSpPr>
         <p:spPr>
           <a:xfrm>
-            <a:off x="1681812" y="2306241"/>
-            <a:ext cx="5065947" cy="435079"/>
+            <a:off x="1418063" y="2487792"/>
+            <a:ext cx="5528250" cy="474783"/>
           </a:xfrm>
           <a:prstGeom prst="rect">
             <a:avLst/>
@@ -8000,7 +8000,7 @@
               <a:buNone/>
             </a:pPr>
             <a:r>
-              <a:rPr lang="en-US" sz="1030" dirty="0">
+              <a:rPr lang="en-US" sz="1120" dirty="0">
                 <a:solidFill>
                   <a:srgbClr val="C8D6E2"/>
                 </a:solidFill>
@@ -8010,7 +8010,7 @@
               </a:rPr>
               <a:t>Và: vì sao chạy tốt trong mô phỏng không có nghĩa là chạy được ngoài đường</a:t>
             </a:r>
-            <a:endParaRPr lang="en-US" sz="1030" dirty="0"/>
+            <a:endParaRPr lang="en-US" sz="1120" dirty="0"/>
           </a:p>
           <a:p>
             <a:pPr indent="0" marL="0">
@@ -8020,7 +8020,7 @@
               <a:buNone/>
             </a:pPr>
             <a:r>
-              <a:rPr lang="en-US" sz="890" dirty="0">
+              <a:rPr lang="en-US" sz="970" dirty="0">
                 <a:solidFill>
                   <a:srgbClr val="8AA0B4"/>
                 </a:solidFill>
@@ -8030,7 +8030,7 @@
               </a:rPr>
               <a:t>還有：為什麼在模擬裡跑得好，不代表真車上路也可以</a:t>
             </a:r>
-            <a:endParaRPr lang="en-US" sz="1030" dirty="0"/>
+            <a:endParaRPr lang="en-US" sz="1120" dirty="0"/>
           </a:p>
         </p:txBody>
       </p:sp>
@@ -8042,8 +8042,8 @@
         </p:nvSpPr>
         <p:spPr>
           <a:xfrm>
-            <a:off x="1681812" y="2793278"/>
-            <a:ext cx="4221622" cy="272782"/>
+            <a:off x="1418063" y="3019275"/>
+            <a:ext cx="4606875" cy="297675"/>
           </a:xfrm>
           <a:prstGeom prst="roundRect">
             <a:avLst>
@@ -8064,8 +8064,8 @@
         </p:nvSpPr>
         <p:spPr>
           <a:xfrm>
-            <a:off x="1772740" y="2825752"/>
-            <a:ext cx="4039768" cy="207834"/>
+            <a:off x="1517288" y="3054713"/>
+            <a:ext cx="4408425" cy="226800"/>
           </a:xfrm>
           <a:prstGeom prst="rect">
             <a:avLst/>
@@ -8081,7 +8081,7 @@
               <a:buNone/>
             </a:pPr>
             <a:r>
-              <a:rPr lang="en-US" sz="750" b="1" dirty="0">
+              <a:rPr lang="en-US" sz="810" b="1" dirty="0">
                 <a:solidFill>
                   <a:srgbClr val="9FD6CE"/>
                 </a:solidFill>
@@ -8091,7 +8091,7 @@
               </a:rPr>
               <a:t>工具｜Công cụ： ch-neural.github.io/MITUST-Principles-of-Self-Driving-Cars/week4/sim/</a:t>
             </a:r>
-            <a:endParaRPr lang="en-US" sz="750" dirty="0"/>
+            <a:endParaRPr lang="en-US" sz="810" dirty="0"/>
           </a:p>
         </p:txBody>
       </p:sp>
@@ -8103,8 +8103,8 @@
         </p:nvSpPr>
         <p:spPr>
           <a:xfrm>
-            <a:off x="1681812" y="3131008"/>
-            <a:ext cx="4936051" cy="194844"/>
+            <a:off x="1418063" y="3387825"/>
+            <a:ext cx="5386500" cy="212625"/>
           </a:xfrm>
           <a:prstGeom prst="rect">
             <a:avLst/>
@@ -8120,7 +8120,7 @@
               <a:buNone/>
             </a:pPr>
             <a:r>
-              <a:rPr lang="en-US" sz="820" dirty="0">
+              <a:rPr lang="en-US" sz="890" dirty="0">
                 <a:solidFill>
                   <a:srgbClr val="8AA0B4"/>
                 </a:solidFill>
@@ -8130,7 +8130,7 @@
               </a:rPr>
               <a:t>第四週 第 1 節　2026/10/01（四）09:10–10:00　CH Tseng</a:t>
             </a:r>
-            <a:endParaRPr lang="en-US" sz="820" dirty="0"/>
+            <a:endParaRPr lang="en-US" sz="890" dirty="0"/>
           </a:p>
         </p:txBody>
       </p:sp>
@@ -8142,8 +8142,8 @@
         </p:nvSpPr>
         <p:spPr>
           <a:xfrm>
-            <a:off x="1577895" y="247315"/>
-            <a:ext cx="1571743" cy="532574"/>
+            <a:off x="1304663" y="240975"/>
+            <a:ext cx="1715175" cy="581175"/>
           </a:xfrm>
           <a:prstGeom prst="roundRect">
             <a:avLst>
@@ -8172,8 +8172,8 @@
         </p:blipFill>
         <p:spPr>
           <a:xfrm>
-            <a:off x="1681812" y="364222"/>
-            <a:ext cx="1363909" cy="301350"/>
+            <a:off x="502920" y="475488"/>
+            <a:ext cx="1920240" cy="424269"/>
           </a:xfrm>
           <a:prstGeom prst="rect">
             <a:avLst/>
@@ -8199,8 +8199,8 @@
       </p:nvGrpSpPr>
       <p:grpSpPr>
         <a:xfrm>
-          <a:off x="0" y="0"/>
-          <a:ext cx="0" cy="0"/>
+          <a:off x="898071" y="0"/>
+          <a:ext cx="1" cy="1"/>
           <a:chOff x="0" y="0"/>
           <a:chExt cx="0" cy="0"/>
         </a:xfrm>
@@ -8213,8 +8213,8 @@
         </p:nvSpPr>
         <p:spPr>
           <a:xfrm>
-            <a:off x="1681812" y="286284"/>
-            <a:ext cx="5780375" cy="194844"/>
+            <a:off x="1302204" y="293914"/>
+            <a:ext cx="6539593" cy="220436"/>
           </a:xfrm>
           <a:prstGeom prst="rect">
             <a:avLst/>
@@ -8230,7 +8230,7 @@
               <a:buNone/>
             </a:pPr>
             <a:r>
-              <a:rPr lang="en-US" sz="920" b="1" dirty="0">
+              <a:rPr lang="en-US" sz="1040" b="1" dirty="0">
                 <a:solidFill>
                   <a:srgbClr val="007F72"/>
                 </a:solidFill>
@@ -8240,7 +8240,7 @@
               </a:rPr>
               <a:t>▶ Video · 真正的自駕模擬器長什麼樣</a:t>
             </a:r>
-            <a:endParaRPr lang="en-US" sz="920" dirty="0"/>
+            <a:endParaRPr lang="en-US" sz="1040" dirty="0"/>
           </a:p>
         </p:txBody>
       </p:sp>
@@ -8252,8 +8252,8 @@
         </p:nvSpPr>
         <p:spPr>
           <a:xfrm>
-            <a:off x="1681812" y="507107"/>
-            <a:ext cx="5780375" cy="398243"/>
+            <a:off x="1302204" y="543741"/>
+            <a:ext cx="6539593" cy="450550"/>
           </a:xfrm>
           <a:prstGeom prst="rect">
             <a:avLst/>
@@ -8272,7 +8272,7 @@
               <a:buNone/>
             </a:pPr>
             <a:r>
-              <a:rPr lang="en-US" sz="1210" b="1" dirty="0">
+              <a:rPr lang="en-US" sz="1370" b="1" dirty="0">
                 <a:solidFill>
                   <a:srgbClr val="0B1F3A"/>
                 </a:solidFill>
@@ -8282,7 +8282,7 @@
               </a:rPr>
               <a:t>Mô phỏng của ta rất đơn giản — đây là loại mà ngành thật sự dùng</a:t>
             </a:r>
-            <a:endParaRPr lang="en-US" sz="1210" dirty="0"/>
+            <a:endParaRPr lang="en-US" sz="1370" dirty="0"/>
           </a:p>
           <a:p>
             <a:pPr indent="0" marL="0">
@@ -8292,7 +8292,7 @@
               <a:buNone/>
             </a:pPr>
             <a:r>
-              <a:rPr lang="en-US" sz="890" dirty="0">
+              <a:rPr lang="en-US" sz="1000" dirty="0">
                 <a:solidFill>
                   <a:srgbClr val="5F7183"/>
                 </a:solidFill>
@@ -8302,7 +8302,7 @@
               </a:rPr>
               <a:t>我們的模擬器很簡單——這是業界真的在用的那種</a:t>
             </a:r>
-            <a:endParaRPr lang="en-US" sz="1210" dirty="0"/>
+            <a:endParaRPr lang="en-US" sz="1370" dirty="0"/>
           </a:p>
         </p:txBody>
       </p:sp>
@@ -8314,8 +8314,8 @@
         </p:nvSpPr>
         <p:spPr>
           <a:xfrm>
-            <a:off x="1681812" y="918340"/>
-            <a:ext cx="2773281" cy="1822980"/>
+            <a:off x="1302204" y="1008987"/>
+            <a:ext cx="3137535" cy="2062418"/>
           </a:xfrm>
           <a:prstGeom prst="roundRect">
             <a:avLst>
@@ -8341,8 +8341,8 @@
         </p:nvSpPr>
         <p:spPr>
           <a:xfrm>
-            <a:off x="1707792" y="1683992"/>
-            <a:ext cx="2721323" cy="1031349"/>
+            <a:off x="1331595" y="1875202"/>
+            <a:ext cx="3078752" cy="1166811"/>
           </a:xfrm>
           <a:prstGeom prst="rect">
             <a:avLst/>
@@ -8361,8 +8361,8 @@
         </p:nvSpPr>
         <p:spPr>
           <a:xfrm flipH="1">
-            <a:off x="1903675" y="1683992"/>
-            <a:ext cx="1099830" cy="1018360"/>
+            <a:off x="1553206" y="1875202"/>
+            <a:ext cx="1244286" cy="1152115"/>
           </a:xfrm>
           <a:prstGeom prst="line">
             <a:avLst/>
@@ -8386,8 +8386,8 @@
         </p:nvSpPr>
         <p:spPr>
           <a:xfrm>
-            <a:off x="3133401" y="1683992"/>
-            <a:ext cx="1099830" cy="1018360"/>
+            <a:off x="2944450" y="1875202"/>
+            <a:ext cx="1244286" cy="1152115"/>
           </a:xfrm>
           <a:prstGeom prst="line">
             <a:avLst/>
@@ -8411,8 +8411,8 @@
         </p:nvSpPr>
         <p:spPr>
           <a:xfrm>
-            <a:off x="2314417" y="1809442"/>
-            <a:ext cx="102379" cy="102379"/>
+            <a:off x="2017897" y="2017130"/>
+            <a:ext cx="115825" cy="115825"/>
           </a:xfrm>
           <a:prstGeom prst="ellipse">
             <a:avLst/>
@@ -8431,12 +8431,12 @@
         </p:nvSpPr>
         <p:spPr>
           <a:xfrm>
-            <a:off x="2283703" y="1922058"/>
-            <a:ext cx="163806" cy="184281"/>
+            <a:off x="1983149" y="2144538"/>
+            <a:ext cx="185320" cy="208486"/>
           </a:xfrm>
           <a:prstGeom prst="roundRect">
             <a:avLst>
-              <a:gd name="adj" fmla="val 111018"/>
+              <a:gd name="adj" fmla="val 111019"/>
             </a:avLst>
           </a:prstGeom>
           <a:solidFill>
@@ -8453,8 +8453,8 @@
         </p:nvSpPr>
         <p:spPr>
           <a:xfrm rot="960000">
-            <a:off x="2255549" y="1937415"/>
-            <a:ext cx="40951" cy="133092"/>
+            <a:off x="1951297" y="2161911"/>
+            <a:ext cx="46330" cy="150573"/>
           </a:xfrm>
           <a:prstGeom prst="rect">
             <a:avLst/>
@@ -8473,8 +8473,8 @@
         </p:nvSpPr>
         <p:spPr>
           <a:xfrm rot="-960000">
-            <a:off x="2434712" y="1937415"/>
-            <a:ext cx="40951" cy="133092"/>
+            <a:off x="2153992" y="2161911"/>
+            <a:ext cx="46330" cy="150573"/>
           </a:xfrm>
           <a:prstGeom prst="rect">
             <a:avLst/>
@@ -8493,8 +8493,8 @@
         </p:nvSpPr>
         <p:spPr>
           <a:xfrm rot="300000">
-            <a:off x="2311857" y="2080745"/>
-            <a:ext cx="46070" cy="184281"/>
+            <a:off x="2015001" y="2324067"/>
+            <a:ext cx="52121" cy="208486"/>
           </a:xfrm>
           <a:prstGeom prst="rect">
             <a:avLst/>
@@ -8513,8 +8513,8 @@
         </p:nvSpPr>
         <p:spPr>
           <a:xfrm rot="-300000">
-            <a:off x="2373284" y="2080745"/>
-            <a:ext cx="46070" cy="184281"/>
+            <a:off x="2084496" y="2324067"/>
+            <a:ext cx="52121" cy="208486"/>
           </a:xfrm>
           <a:prstGeom prst="rect">
             <a:avLst/>
@@ -8533,8 +8533,8 @@
         </p:nvSpPr>
         <p:spPr>
           <a:xfrm>
-            <a:off x="2014606" y="1720451"/>
-            <a:ext cx="610122" cy="656273"/>
+            <a:off x="1678708" y="1916450"/>
+            <a:ext cx="690257" cy="742470"/>
           </a:xfrm>
           <a:prstGeom prst="rect">
             <a:avLst/>
@@ -8555,8 +8555,8 @@
         </p:nvSpPr>
         <p:spPr>
           <a:xfrm>
-            <a:off x="2014606" y="1597050"/>
-            <a:ext cx="610122" cy="123401"/>
+            <a:off x="1678708" y="1776841"/>
+            <a:ext cx="690257" cy="139609"/>
           </a:xfrm>
           <a:prstGeom prst="rect">
             <a:avLst/>
@@ -8575,8 +8575,8 @@
         </p:nvSpPr>
         <p:spPr>
           <a:xfrm>
-            <a:off x="2034090" y="1600297"/>
-            <a:ext cx="610122" cy="116906"/>
+            <a:off x="1700752" y="1780515"/>
+            <a:ext cx="690257" cy="132261"/>
           </a:xfrm>
           <a:prstGeom prst="rect">
             <a:avLst/>
@@ -8592,7 +8592,7 @@
               <a:buNone/>
             </a:pPr>
             <a:r>
-              <a:rPr lang="en-US" sz="570" b="1" dirty="0">
+              <a:rPr lang="en-US" sz="640" b="1" dirty="0">
                 <a:solidFill>
                   <a:srgbClr val="0B1F3A"/>
                 </a:solidFill>
@@ -8602,7 +8602,7 @@
               </a:rPr>
               <a:t>người 行人</a:t>
             </a:r>
-            <a:endParaRPr lang="en-US" sz="570" dirty="0"/>
+            <a:endParaRPr lang="en-US" sz="640" dirty="0"/>
           </a:p>
         </p:txBody>
       </p:sp>
@@ -8614,8 +8614,8 @@
         </p:nvSpPr>
         <p:spPr>
           <a:xfrm>
-            <a:off x="3482369" y="2063580"/>
-            <a:ext cx="418615" cy="127404"/>
+            <a:off x="3339253" y="2304647"/>
+            <a:ext cx="473597" cy="144138"/>
           </a:xfrm>
           <a:prstGeom prst="roundRect">
             <a:avLst>
@@ -8636,8 +8636,8 @@
         </p:nvSpPr>
         <p:spPr>
           <a:xfrm>
-            <a:off x="3573373" y="1972577"/>
-            <a:ext cx="227508" cy="100103"/>
+            <a:off x="3442209" y="2201691"/>
+            <a:ext cx="257390" cy="113251"/>
           </a:xfrm>
           <a:prstGeom prst="trapezoid">
             <a:avLst/>
@@ -8658,8 +8658,8 @@
         </p:nvSpPr>
         <p:spPr>
           <a:xfrm>
-            <a:off x="3536971" y="2163683"/>
-            <a:ext cx="91003" cy="91003"/>
+            <a:off x="3401027" y="2417898"/>
+            <a:ext cx="102956" cy="102956"/>
           </a:xfrm>
           <a:prstGeom prst="ellipse">
             <a:avLst/>
@@ -8678,8 +8678,8 @@
         </p:nvSpPr>
         <p:spPr>
           <a:xfrm>
-            <a:off x="3755379" y="2163683"/>
-            <a:ext cx="91003" cy="91003"/>
+            <a:off x="3648121" y="2417898"/>
+            <a:ext cx="102956" cy="102956"/>
           </a:xfrm>
           <a:prstGeom prst="ellipse">
             <a:avLst/>
@@ -8698,8 +8698,8 @@
         </p:nvSpPr>
         <p:spPr>
           <a:xfrm>
-            <a:off x="3559722" y="2186434"/>
-            <a:ext cx="45502" cy="45502"/>
+            <a:off x="3426765" y="2443637"/>
+            <a:ext cx="51478" cy="51478"/>
           </a:xfrm>
           <a:prstGeom prst="ellipse">
             <a:avLst/>
@@ -8718,8 +8718,8 @@
         </p:nvSpPr>
         <p:spPr>
           <a:xfrm>
-            <a:off x="3778130" y="2186434"/>
-            <a:ext cx="45502" cy="45502"/>
+            <a:off x="3673859" y="2443637"/>
+            <a:ext cx="51478" cy="51478"/>
           </a:xfrm>
           <a:prstGeom prst="ellipse">
             <a:avLst/>
@@ -8738,8 +8738,8 @@
         </p:nvSpPr>
         <p:spPr>
           <a:xfrm>
-            <a:off x="3234850" y="1793370"/>
-            <a:ext cx="831984" cy="583354"/>
+            <a:off x="3059223" y="1998947"/>
+            <a:ext cx="941260" cy="659973"/>
           </a:xfrm>
           <a:prstGeom prst="rect">
             <a:avLst/>
@@ -8760,8 +8760,8 @@
         </p:nvSpPr>
         <p:spPr>
           <a:xfrm>
-            <a:off x="3234850" y="1669969"/>
-            <a:ext cx="831984" cy="123401"/>
+            <a:off x="3059223" y="1859338"/>
+            <a:ext cx="941260" cy="139609"/>
           </a:xfrm>
           <a:prstGeom prst="rect">
             <a:avLst/>
@@ -8780,8 +8780,8 @@
         </p:nvSpPr>
         <p:spPr>
           <a:xfrm>
-            <a:off x="3254334" y="1673217"/>
-            <a:ext cx="831984" cy="116906"/>
+            <a:off x="3081267" y="1863012"/>
+            <a:ext cx="941260" cy="132261"/>
           </a:xfrm>
           <a:prstGeom prst="rect">
             <a:avLst/>
@@ -8797,7 +8797,7 @@
               <a:buNone/>
             </a:pPr>
             <a:r>
-              <a:rPr lang="en-US" sz="570" b="1" dirty="0">
+              <a:rPr lang="en-US" sz="640" b="1" dirty="0">
                 <a:solidFill>
                   <a:srgbClr val="0B1F3A"/>
                 </a:solidFill>
@@ -8807,7 +8807,7 @@
               </a:rPr>
               <a:t>ô tô 汽車</a:t>
             </a:r>
-            <a:endParaRPr lang="en-US" sz="570" dirty="0"/>
+            <a:endParaRPr lang="en-US" sz="640" dirty="0"/>
           </a:p>
         </p:txBody>
       </p:sp>
@@ -8819,8 +8819,8 @@
         </p:nvSpPr>
         <p:spPr>
           <a:xfrm>
-            <a:off x="2848809" y="1107930"/>
-            <a:ext cx="245158" cy="313553"/>
+            <a:off x="2622479" y="1223478"/>
+            <a:ext cx="277358" cy="354736"/>
           </a:xfrm>
           <a:prstGeom prst="roundRect">
             <a:avLst>
@@ -8841,8 +8841,8 @@
         </p:nvSpPr>
         <p:spPr>
           <a:xfrm>
-            <a:off x="2902744" y="1136150"/>
-            <a:ext cx="137289" cy="137289"/>
+            <a:off x="2683497" y="1255404"/>
+            <a:ext cx="155321" cy="155321"/>
           </a:xfrm>
           <a:prstGeom prst="ellipse">
             <a:avLst/>
@@ -8861,8 +8861,8 @@
         </p:nvSpPr>
         <p:spPr>
           <a:xfrm>
-            <a:off x="2902744" y="1230215"/>
-            <a:ext cx="137289" cy="137289"/>
+            <a:off x="2683497" y="1361825"/>
+            <a:ext cx="155321" cy="155321"/>
           </a:xfrm>
           <a:prstGeom prst="ellipse">
             <a:avLst/>
@@ -8881,8 +8881,8 @@
         </p:nvSpPr>
         <p:spPr>
           <a:xfrm>
-            <a:off x="2902744" y="1324281"/>
-            <a:ext cx="137289" cy="137289"/>
+            <a:off x="2683497" y="1468246"/>
+            <a:ext cx="155321" cy="155321"/>
           </a:xfrm>
           <a:prstGeom prst="ellipse">
             <a:avLst/>
@@ -8901,8 +8901,8 @@
         </p:nvSpPr>
         <p:spPr>
           <a:xfrm>
-            <a:off x="2735659" y="1082408"/>
-            <a:ext cx="471458" cy="364596"/>
+            <a:off x="2494467" y="1194605"/>
+            <a:ext cx="533381" cy="412484"/>
           </a:xfrm>
           <a:prstGeom prst="rect">
             <a:avLst/>
@@ -8923,8 +8923,8 @@
         </p:nvSpPr>
         <p:spPr>
           <a:xfrm>
-            <a:off x="2735659" y="959007"/>
-            <a:ext cx="558553" cy="123401"/>
+            <a:off x="2494467" y="1054995"/>
+            <a:ext cx="631916" cy="139609"/>
           </a:xfrm>
           <a:prstGeom prst="rect">
             <a:avLst/>
@@ -8943,8 +8943,8 @@
         </p:nvSpPr>
         <p:spPr>
           <a:xfrm>
-            <a:off x="2755144" y="962254"/>
-            <a:ext cx="558553" cy="116906"/>
+            <a:off x="2516510" y="1058669"/>
+            <a:ext cx="631916" cy="132261"/>
           </a:xfrm>
           <a:prstGeom prst="rect">
             <a:avLst/>
@@ -8960,7 +8960,7 @@
               <a:buNone/>
             </a:pPr>
             <a:r>
-              <a:rPr lang="en-US" sz="570" b="1" dirty="0">
+              <a:rPr lang="en-US" sz="640" b="1" dirty="0">
                 <a:solidFill>
                   <a:srgbClr val="0B1F3A"/>
                 </a:solidFill>
@@ -8970,7 +8970,7 @@
               </a:rPr>
               <a:t>đèn 號誌</a:t>
             </a:r>
-            <a:endParaRPr lang="en-US" sz="570" dirty="0"/>
+            <a:endParaRPr lang="en-US" sz="640" dirty="0"/>
           </a:p>
         </p:txBody>
       </p:sp>
@@ -8982,8 +8982,8 @@
         </p:nvSpPr>
         <p:spPr>
           <a:xfrm>
-            <a:off x="1707792" y="2377611"/>
-            <a:ext cx="2721323" cy="337730"/>
+            <a:off x="1331595" y="2659924"/>
+            <a:ext cx="3078752" cy="382089"/>
           </a:xfrm>
           <a:prstGeom prst="rect">
             <a:avLst/>
@@ -9004,8 +9004,8 @@
         </p:nvSpPr>
         <p:spPr>
           <a:xfrm>
-            <a:off x="1772740" y="2403590"/>
-            <a:ext cx="2591427" cy="285771"/>
+            <a:off x="1405074" y="2689316"/>
+            <a:ext cx="2931795" cy="323306"/>
           </a:xfrm>
           <a:prstGeom prst="rect">
             <a:avLst/>
@@ -9024,7 +9024,7 @@
               <a:buNone/>
             </a:pPr>
             <a:r>
-              <a:rPr lang="en-US" sz="710" b="1" dirty="0">
+              <a:rPr lang="en-US" sz="800" b="1" dirty="0">
                 <a:solidFill>
                   <a:srgbClr val="FFFFFF"/>
                 </a:solidFill>
@@ -9034,7 +9034,7 @@
               </a:rPr>
               <a:t>Hình minh hoạ. Trong CARLA: thời tiết, ánh sáng, người đi bộ, đèn tín hiệu đều chỉnh được.</a:t>
             </a:r>
-            <a:endParaRPr lang="en-US" sz="710" dirty="0"/>
+            <a:endParaRPr lang="en-US" sz="800" dirty="0"/>
           </a:p>
           <a:p>
             <a:pPr indent="0" marL="0">
@@ -9044,7 +9044,7 @@
               <a:buNone/>
             </a:pPr>
             <a:r>
-              <a:rPr lang="en-US" sz="640" dirty="0">
+              <a:rPr lang="en-US" sz="720" dirty="0">
                 <a:solidFill>
                   <a:srgbClr val="D8E4EC"/>
                 </a:solidFill>
@@ -9054,7 +9054,7 @@
               </a:rPr>
               <a:t>示意圖。在 CARLA 裡，天氣、光線、行人、號誌全都可以調。</a:t>
             </a:r>
-            <a:endParaRPr lang="en-US" sz="710" dirty="0"/>
+            <a:endParaRPr lang="en-US" sz="800" dirty="0"/>
           </a:p>
         </p:txBody>
       </p:sp>
@@ -9066,8 +9066,8 @@
         </p:nvSpPr>
         <p:spPr>
           <a:xfrm>
-            <a:off x="4688906" y="918340"/>
-            <a:ext cx="2773281" cy="1822980"/>
+            <a:off x="4704261" y="1008987"/>
+            <a:ext cx="3137535" cy="2062418"/>
           </a:xfrm>
           <a:prstGeom prst="roundRect">
             <a:avLst>
@@ -9093,8 +9093,8 @@
         </p:nvSpPr>
         <p:spPr>
           <a:xfrm>
-            <a:off x="4818803" y="1035246"/>
-            <a:ext cx="246803" cy="246803"/>
+            <a:off x="4851219" y="1141248"/>
+            <a:ext cx="279219" cy="279219"/>
           </a:xfrm>
           <a:prstGeom prst="ellipse">
             <a:avLst/>
@@ -9113,8 +9113,8 @@
         </p:nvSpPr>
         <p:spPr>
           <a:xfrm>
-            <a:off x="4818803" y="1067721"/>
-            <a:ext cx="246803" cy="181855"/>
+            <a:off x="4851219" y="1177988"/>
+            <a:ext cx="279219" cy="205740"/>
           </a:xfrm>
           <a:prstGeom prst="rect">
             <a:avLst/>
@@ -9130,7 +9130,7 @@
               <a:buNone/>
             </a:pPr>
             <a:r>
-              <a:rPr lang="en-US" sz="850" b="1" dirty="0">
+              <a:rPr lang="en-US" sz="960" b="1" dirty="0">
                 <a:solidFill>
                   <a:srgbClr val="FFFFFF"/>
                 </a:solidFill>
@@ -9140,7 +9140,7 @@
               </a:rPr>
               <a:t>▶</a:t>
             </a:r>
-            <a:endParaRPr lang="en-US" sz="850" dirty="0"/>
+            <a:endParaRPr lang="en-US" sz="960" dirty="0"/>
           </a:p>
         </p:txBody>
       </p:sp>
@@ -9152,8 +9152,8 @@
         </p:nvSpPr>
         <p:spPr>
           <a:xfrm>
-            <a:off x="5117564" y="1022257"/>
-            <a:ext cx="2214728" cy="298761"/>
+            <a:off x="5189220" y="1126553"/>
+            <a:ext cx="2505619" cy="338001"/>
           </a:xfrm>
           <a:prstGeom prst="rect">
             <a:avLst/>
@@ -9169,7 +9169,7 @@
               <a:buNone/>
             </a:pPr>
             <a:r>
-              <a:rPr lang="en-US" sz="750" b="1" dirty="0">
+              <a:rPr lang="en-US" sz="840" b="1" dirty="0">
                 <a:solidFill>
                   <a:srgbClr val="0B1F3A"/>
                 </a:solidFill>
@@ -9179,7 +9179,7 @@
               </a:rPr>
               <a:t>CARLA 0.9.14</a:t>
             </a:r>
-            <a:endParaRPr lang="en-US" sz="750" dirty="0"/>
+            <a:endParaRPr lang="en-US" sz="840" dirty="0"/>
           </a:p>
         </p:txBody>
       </p:sp>
@@ -9191,8 +9191,8 @@
         </p:nvSpPr>
         <p:spPr>
           <a:xfrm>
-            <a:off x="4818803" y="1346997"/>
-            <a:ext cx="2513489" cy="142886"/>
+            <a:off x="4851219" y="1493945"/>
+            <a:ext cx="2843621" cy="161653"/>
           </a:xfrm>
           <a:prstGeom prst="rect">
             <a:avLst/>
@@ -9208,7 +9208,7 @@
               <a:buNone/>
             </a:pPr>
             <a:r>
-              <a:rPr lang="en-US" sz="640" dirty="0">
+              <a:rPr lang="en-US" sz="720" dirty="0">
                 <a:solidFill>
                   <a:srgbClr val="5F7183"/>
                 </a:solidFill>
@@ -9218,7 +9218,7 @@
               </a:rPr>
               <a:t>CARLA Simulator（官方）　·　3:33，播 2 分鐘就夠</a:t>
             </a:r>
-            <a:endParaRPr lang="en-US" sz="640" dirty="0"/>
+            <a:endParaRPr lang="en-US" sz="720" dirty="0"/>
           </a:p>
         </p:txBody>
       </p:sp>
@@ -9232,8 +9232,8 @@
         </p:nvSpPr>
         <p:spPr>
           <a:xfrm>
-            <a:off x="4818803" y="1476893"/>
-            <a:ext cx="2513489" cy="142886"/>
+            <a:off x="4851219" y="1640903"/>
+            <a:ext cx="2843621" cy="161653"/>
           </a:xfrm>
           <a:prstGeom prst="rect">
             <a:avLst/>
@@ -9249,7 +9249,7 @@
               <a:buNone/>
             </a:pPr>
             <a:r>
-              <a:rPr lang="en-US" sz="600" u="sng" dirty="0">
+              <a:rPr lang="en-US" sz="680" u="sng" dirty="0">
                 <a:solidFill>
                   <a:srgbClr val="1F6FBF"/>
                 </a:solidFill>
@@ -9266,7 +9266,7 @@
               </a:rPr>
               <a:t>https://www.youtube.com/watch?v=AZhzZy57XeU</a:t>
             </a:r>
-            <a:endParaRPr lang="en-US" sz="600" dirty="0"/>
+            <a:endParaRPr lang="en-US" sz="680" dirty="0"/>
           </a:p>
         </p:txBody>
       </p:sp>
@@ -9278,8 +9278,8 @@
         </p:nvSpPr>
         <p:spPr>
           <a:xfrm>
-            <a:off x="4818803" y="1671737"/>
-            <a:ext cx="25979" cy="168865"/>
+            <a:off x="4851219" y="1861338"/>
+            <a:ext cx="29391" cy="191044"/>
           </a:xfrm>
           <a:prstGeom prst="rect">
             <a:avLst/>
@@ -9298,8 +9298,8 @@
         </p:nvSpPr>
         <p:spPr>
           <a:xfrm>
-            <a:off x="4909730" y="1645758"/>
-            <a:ext cx="2435551" cy="419718"/>
+            <a:off x="4954089" y="1831947"/>
+            <a:ext cx="2755446" cy="474846"/>
           </a:xfrm>
           <a:prstGeom prst="rect">
             <a:avLst/>
@@ -9318,7 +9318,7 @@
               <a:buNone/>
             </a:pPr>
             <a:r>
-              <a:rPr lang="en-US" sz="670" dirty="0">
+              <a:rPr lang="en-US" sz="760" dirty="0">
                 <a:solidFill>
                   <a:srgbClr val="1A2733"/>
                 </a:solidFill>
@@ -9328,7 +9328,7 @@
               </a:rPr>
               <a:t>Trong CARLA, thời tiết, giờ trong ngày, mật độ xe đều là tham số chỉnh được</a:t>
             </a:r>
-            <a:endParaRPr lang="en-US" sz="670" dirty="0"/>
+            <a:endParaRPr lang="en-US" sz="760" dirty="0"/>
           </a:p>
           <a:p>
             <a:pPr indent="0" marL="0">
@@ -9338,7 +9338,7 @@
               <a:buNone/>
             </a:pPr>
             <a:r>
-              <a:rPr lang="en-US" sz="640" dirty="0">
+              <a:rPr lang="en-US" sz="720" dirty="0">
                 <a:solidFill>
                   <a:srgbClr val="5F7183"/>
                 </a:solidFill>
@@ -9348,7 +9348,7 @@
               </a:rPr>
               <a:t>CARLA 裡的天氣、一天中的時間、車流密度，全部都是可以調的參數</a:t>
             </a:r>
-            <a:endParaRPr lang="en-US" sz="670" dirty="0"/>
+            <a:endParaRPr lang="en-US" sz="760" dirty="0"/>
           </a:p>
         </p:txBody>
       </p:sp>
@@ -9360,8 +9360,8 @@
         </p:nvSpPr>
         <p:spPr>
           <a:xfrm>
-            <a:off x="4818803" y="2117435"/>
-            <a:ext cx="25979" cy="168865"/>
+            <a:off x="4851219" y="2365576"/>
+            <a:ext cx="29391" cy="191044"/>
           </a:xfrm>
           <a:prstGeom prst="rect">
             <a:avLst/>
@@ -9380,8 +9380,8 @@
         </p:nvSpPr>
         <p:spPr>
           <a:xfrm>
-            <a:off x="4909730" y="2091456"/>
-            <a:ext cx="2435551" cy="222849"/>
+            <a:off x="4954089" y="2336185"/>
+            <a:ext cx="2755446" cy="252119"/>
           </a:xfrm>
           <a:prstGeom prst="rect">
             <a:avLst/>
@@ -9400,7 +9400,7 @@
               <a:buNone/>
             </a:pPr>
             <a:r>
-              <a:rPr lang="en-US" sz="670" dirty="0">
+              <a:rPr lang="en-US" sz="760" dirty="0">
                 <a:solidFill>
                   <a:srgbClr val="1A2733"/>
                 </a:solidFill>
@@ -9410,7 +9410,7 @@
               </a:rPr>
               <a:t>CARLA mô phỏng được cả ảnh camera lẫn đám điểm LiDAR</a:t>
             </a:r>
-            <a:endParaRPr lang="en-US" sz="670" dirty="0"/>
+            <a:endParaRPr lang="en-US" sz="760" dirty="0"/>
           </a:p>
           <a:p>
             <a:pPr indent="0" marL="0">
@@ -9420,7 +9420,7 @@
               <a:buNone/>
             </a:pPr>
             <a:r>
-              <a:rPr lang="en-US" sz="640" dirty="0">
+              <a:rPr lang="en-US" sz="720" dirty="0">
                 <a:solidFill>
                   <a:srgbClr val="5F7183"/>
                 </a:solidFill>
@@ -9430,7 +9430,7 @@
               </a:rPr>
               <a:t>CARLA 連相機影像和光達點雲都模擬得出來</a:t>
             </a:r>
-            <a:endParaRPr lang="en-US" sz="670" dirty="0"/>
+            <a:endParaRPr lang="en-US" sz="760" dirty="0"/>
           </a:p>
         </p:txBody>
       </p:sp>
@@ -9442,8 +9442,8 @@
         </p:nvSpPr>
         <p:spPr>
           <a:xfrm>
-            <a:off x="4818803" y="2366263"/>
-            <a:ext cx="25979" cy="168865"/>
+            <a:off x="4851219" y="2647086"/>
+            <a:ext cx="29391" cy="191044"/>
           </a:xfrm>
           <a:prstGeom prst="rect">
             <a:avLst/>
@@ -9462,8 +9462,8 @@
         </p:nvSpPr>
         <p:spPr>
           <a:xfrm>
-            <a:off x="4909730" y="2340284"/>
-            <a:ext cx="2435551" cy="323944"/>
+            <a:off x="4954089" y="2617694"/>
+            <a:ext cx="2755446" cy="366492"/>
           </a:xfrm>
           <a:prstGeom prst="rect">
             <a:avLst/>
@@ -9482,7 +9482,7 @@
               <a:buNone/>
             </a:pPr>
             <a:r>
-              <a:rPr lang="en-US" sz="670" dirty="0">
+              <a:rPr lang="en-US" sz="760" dirty="0">
                 <a:solidFill>
                   <a:srgbClr val="1A2733"/>
                 </a:solidFill>
@@ -9492,7 +9492,7 @@
               </a:rPr>
               <a:t>Câu hỏi: nó khác mô phỏng của ta ở chỗ nào? Và giống ở chỗ nào?</a:t>
             </a:r>
-            <a:endParaRPr lang="en-US" sz="670" dirty="0"/>
+            <a:endParaRPr lang="en-US" sz="760" dirty="0"/>
           </a:p>
           <a:p>
             <a:pPr indent="0" marL="0">
@@ -9502,7 +9502,7 @@
               <a:buNone/>
             </a:pPr>
             <a:r>
-              <a:rPr lang="en-US" sz="640" dirty="0">
+              <a:rPr lang="en-US" sz="720" dirty="0">
                 <a:solidFill>
                   <a:srgbClr val="5F7183"/>
                 </a:solidFill>
@@ -9512,7 +9512,7 @@
               </a:rPr>
               <a:t>問題：它跟我們的模擬器差在哪？又有哪裡是一樣的？</a:t>
             </a:r>
-            <a:endParaRPr lang="en-US" sz="670" dirty="0"/>
+            <a:endParaRPr lang="en-US" sz="760" dirty="0"/>
           </a:p>
         </p:txBody>
       </p:sp>
@@ -9524,8 +9524,8 @@
         </p:nvSpPr>
         <p:spPr>
           <a:xfrm>
-            <a:off x="1681812" y="2819258"/>
-            <a:ext cx="5780375" cy="389688"/>
+            <a:off x="1302204" y="3159579"/>
+            <a:ext cx="6539593" cy="440871"/>
           </a:xfrm>
           <a:prstGeom prst="roundRect">
             <a:avLst>
@@ -9551,8 +9551,8 @@
         </p:nvSpPr>
         <p:spPr>
           <a:xfrm>
-            <a:off x="1811708" y="2864721"/>
-            <a:ext cx="5520583" cy="311751"/>
+            <a:off x="1449161" y="3211014"/>
+            <a:ext cx="6245679" cy="352697"/>
           </a:xfrm>
           <a:prstGeom prst="rect">
             <a:avLst/>
@@ -9571,7 +9571,7 @@
               <a:buNone/>
             </a:pPr>
             <a:r>
-              <a:rPr lang="en-US" sz="820" b="1" dirty="0">
+              <a:rPr lang="en-US" sz="920" b="1" dirty="0">
                 <a:solidFill>
                   <a:srgbClr val="7A4E00"/>
                 </a:solidFill>
@@ -9581,7 +9581,7 @@
               </a:rPr>
               <a:t>CARLA là mã nguồn mở, miễn phí, chạy được trên máy tính cá nhân có card đồ hoạ.</a:t>
             </a:r>
-            <a:endParaRPr lang="en-US" sz="820" dirty="0"/>
+            <a:endParaRPr lang="en-US" sz="920" dirty="0"/>
           </a:p>
           <a:p>
             <a:pPr indent="0" marL="0">
@@ -9591,7 +9591,7 @@
               <a:buNone/>
             </a:pPr>
             <a:r>
-              <a:rPr lang="en-US" sz="750" dirty="0">
+              <a:rPr lang="en-US" sz="840" dirty="0">
                 <a:solidFill>
                   <a:srgbClr val="7A4E00"/>
                 </a:solidFill>
@@ -9601,7 +9601,7 @@
               </a:rPr>
               <a:t>CARLA 是開源免費的，有顯示卡的個人電腦就跑得動。</a:t>
             </a:r>
-            <a:endParaRPr lang="en-US" sz="820" dirty="0"/>
+            <a:endParaRPr lang="en-US" sz="920" dirty="0"/>
           </a:p>
         </p:txBody>
       </p:sp>
@@ -9621,8 +9621,8 @@
         </p:blipFill>
         <p:spPr>
           <a:xfrm>
-            <a:off x="6663327" y="3338842"/>
-            <a:ext cx="779376" cy="172200"/>
+            <a:off x="7882128" y="109728"/>
+            <a:ext cx="1097280" cy="242439"/>
           </a:xfrm>
           <a:prstGeom prst="rect">
             <a:avLst/>
@@ -9637,8 +9637,8 @@
         </p:nvSpPr>
         <p:spPr>
           <a:xfrm>
-            <a:off x="1402536" y="3390800"/>
-            <a:ext cx="584532" cy="181855"/>
+            <a:off x="986246" y="102870"/>
+            <a:ext cx="661307" cy="205740"/>
           </a:xfrm>
           <a:prstGeom prst="rect">
             <a:avLst/>
@@ -9654,7 +9654,7 @@
               <a:buNone/>
             </a:pPr>
             <a:r>
-              <a:rPr lang="en-US" sz="640" dirty="0">
+              <a:rPr lang="en-US" sz="720" dirty="0">
                 <a:solidFill>
                   <a:srgbClr val="5F7183"/>
                 </a:solidFill>
@@ -9664,7 +9664,7 @@
               </a:rPr>
               <a:t>10 / 18</a:t>
             </a:r>
-            <a:endParaRPr lang="en-US" sz="640" dirty="0"/>
+            <a:endParaRPr lang="en-US" sz="720" dirty="0"/>
           </a:p>
         </p:txBody>
       </p:sp>
@@ -9676,8 +9676,8 @@
         </p:nvSpPr>
         <p:spPr>
           <a:xfrm>
-            <a:off x="2006553" y="3390800"/>
-            <a:ext cx="1428857" cy="181855"/>
+            <a:off x="1669596" y="102870"/>
+            <a:ext cx="1616529" cy="205740"/>
           </a:xfrm>
           <a:prstGeom prst="rect">
             <a:avLst/>
@@ -9693,7 +9693,7 @@
               <a:buNone/>
             </a:pPr>
             <a:r>
-              <a:rPr lang="en-US" sz="640" dirty="0">
+              <a:rPr lang="en-US" sz="720" dirty="0">
                 <a:solidFill>
                   <a:srgbClr val="5F7183"/>
                 </a:solidFill>
@@ -9703,7 +9703,7 @@
               </a:rPr>
               <a:t>Tiết 1 · 第 1 節</a:t>
             </a:r>
-            <a:endParaRPr lang="en-US" sz="640" dirty="0"/>
+            <a:endParaRPr lang="en-US" sz="720" dirty="0"/>
           </a:p>
         </p:txBody>
       </p:sp>
@@ -9733,8 +9733,8 @@
       </p:nvGrpSpPr>
       <p:grpSpPr>
         <a:xfrm>
-          <a:off x="0" y="0"/>
-          <a:ext cx="0" cy="0"/>
+          <a:off x="898071" y="0"/>
+          <a:ext cx="1" cy="1"/>
           <a:chOff x="0" y="0"/>
           <a:chExt cx="0" cy="0"/>
         </a:xfrm>
@@ -9747,8 +9747,8 @@
         </p:nvSpPr>
         <p:spPr>
           <a:xfrm>
-            <a:off x="6130753" y="-947729"/>
-            <a:ext cx="2987610" cy="2987610"/>
+            <a:off x="6335486" y="-1102179"/>
+            <a:ext cx="3380014" cy="3380014"/>
           </a:xfrm>
           <a:prstGeom prst="ellipse">
             <a:avLst/>
@@ -9772,8 +9772,8 @@
         </p:nvSpPr>
         <p:spPr>
           <a:xfrm>
-            <a:off x="7104973" y="1520297"/>
-            <a:ext cx="1688649" cy="1688649"/>
+            <a:off x="7437664" y="1690007"/>
+            <a:ext cx="1910443" cy="1910443"/>
           </a:xfrm>
           <a:prstGeom prst="ellipse">
             <a:avLst/>
@@ -9794,8 +9794,8 @@
         </p:nvSpPr>
         <p:spPr>
           <a:xfrm>
-            <a:off x="1681812" y="1228031"/>
-            <a:ext cx="3247402" cy="220823"/>
+            <a:off x="1302204" y="1359354"/>
+            <a:ext cx="3673929" cy="249827"/>
           </a:xfrm>
           <a:prstGeom prst="rect">
             <a:avLst/>
@@ -9810,7 +9810,7 @@
             <a:pPr indent="0" marL="0">
               <a:buNone/>
             </a:pPr>
-            <a:endParaRPr lang="en-US" sz="960" dirty="0"/>
+            <a:endParaRPr lang="en-US" sz="1080" dirty="0"/>
           </a:p>
         </p:txBody>
       </p:sp>
@@ -9822,8 +9822,8 @@
         </p:nvSpPr>
         <p:spPr>
           <a:xfrm>
-            <a:off x="1681812" y="1481328"/>
-            <a:ext cx="5195843" cy="844324"/>
+            <a:off x="1302204" y="1645920"/>
+            <a:ext cx="5878286" cy="955221"/>
           </a:xfrm>
           <a:prstGeom prst="rect">
             <a:avLst/>
@@ -9842,7 +9842,7 @@
               <a:buNone/>
             </a:pPr>
             <a:r>
-              <a:rPr lang="en-US" sz="2060" b="1" dirty="0">
+              <a:rPr lang="en-US" sz="2330" b="1" dirty="0">
                 <a:solidFill>
                   <a:srgbClr val="FFFFFF"/>
                 </a:solidFill>
@@ -9852,7 +9852,7 @@
               </a:rPr>
               <a:t>Vì sao chạy tốt trong mô phỏng vẫn chưa đủ</a:t>
             </a:r>
-            <a:endParaRPr lang="en-US" sz="2060" dirty="0"/>
+            <a:endParaRPr lang="en-US" sz="2330" dirty="0"/>
           </a:p>
           <a:p>
             <a:pPr indent="0" marL="0">
@@ -9862,7 +9862,7 @@
               <a:buNone/>
             </a:pPr>
             <a:r>
-              <a:rPr lang="en-US" sz="1210" dirty="0">
+              <a:rPr lang="en-US" sz="1370" dirty="0">
                 <a:solidFill>
                   <a:srgbClr val="AFC3D4"/>
                 </a:solidFill>
@@ -9872,7 +9872,7 @@
               </a:rPr>
               <a:t>為什麼在模擬裡跑得好還不夠</a:t>
             </a:r>
-            <a:endParaRPr lang="en-US" sz="2060" dirty="0"/>
+            <a:endParaRPr lang="en-US" sz="2330" dirty="0"/>
           </a:p>
         </p:txBody>
       </p:sp>
@@ -9884,8 +9884,8 @@
         </p:nvSpPr>
         <p:spPr>
           <a:xfrm>
-            <a:off x="1402536" y="3390800"/>
-            <a:ext cx="584532" cy="181855"/>
+            <a:off x="986246" y="102870"/>
+            <a:ext cx="661307" cy="205740"/>
           </a:xfrm>
           <a:prstGeom prst="rect">
             <a:avLst/>
@@ -9901,7 +9901,7 @@
               <a:buNone/>
             </a:pPr>
             <a:r>
-              <a:rPr lang="en-US" sz="640" dirty="0">
+              <a:rPr lang="en-US" sz="720" dirty="0">
                 <a:solidFill>
                   <a:srgbClr val="9FB3C8"/>
                 </a:solidFill>
@@ -9911,7 +9911,7 @@
               </a:rPr>
               <a:t>11 / 18</a:t>
             </a:r>
-            <a:endParaRPr lang="en-US" sz="640" dirty="0"/>
+            <a:endParaRPr lang="en-US" sz="720" dirty="0"/>
           </a:p>
         </p:txBody>
       </p:sp>
@@ -9923,8 +9923,8 @@
         </p:nvSpPr>
         <p:spPr>
           <a:xfrm>
-            <a:off x="2006553" y="3390800"/>
-            <a:ext cx="1428857" cy="181855"/>
+            <a:off x="1669596" y="102870"/>
+            <a:ext cx="1616529" cy="205740"/>
           </a:xfrm>
           <a:prstGeom prst="rect">
             <a:avLst/>
@@ -9940,7 +9940,7 @@
               <a:buNone/>
             </a:pPr>
             <a:r>
-              <a:rPr lang="en-US" sz="640" dirty="0">
+              <a:rPr lang="en-US" sz="720" dirty="0">
                 <a:solidFill>
                   <a:srgbClr val="9FB3C8"/>
                 </a:solidFill>
@@ -9950,7 +9950,7 @@
               </a:rPr>
               <a:t>Tiết 1 · 第 1 節</a:t>
             </a:r>
-            <a:endParaRPr lang="en-US" sz="640" dirty="0"/>
+            <a:endParaRPr lang="en-US" sz="720" dirty="0"/>
           </a:p>
         </p:txBody>
       </p:sp>
@@ -9973,8 +9973,8 @@
       </p:nvGrpSpPr>
       <p:grpSpPr>
         <a:xfrm>
-          <a:off x="0" y="0"/>
-          <a:ext cx="0" cy="0"/>
+          <a:off x="942514" y="0"/>
+          <a:ext cx="1" cy="1"/>
           <a:chOff x="0" y="0"/>
           <a:chExt cx="0" cy="0"/>
         </a:xfrm>
@@ -9987,8 +9987,8 @@
         </p:nvSpPr>
         <p:spPr>
           <a:xfrm>
-            <a:off x="1681812" y="325253"/>
-            <a:ext cx="5780375" cy="194844"/>
+            <a:off x="1341758" y="333913"/>
+            <a:ext cx="6460485" cy="217769"/>
           </a:xfrm>
           <a:prstGeom prst="rect">
             <a:avLst/>
@@ -10004,7 +10004,7 @@
               <a:buNone/>
             </a:pPr>
             <a:r>
-              <a:rPr lang="en-US" sz="890" b="1" dirty="0">
+              <a:rPr lang="en-US" sz="990" b="1" dirty="0">
                 <a:solidFill>
                   <a:srgbClr val="007F72"/>
                 </a:solidFill>
@@ -10014,7 +10014,7 @@
               </a:rPr>
               <a:t>Khoảng cách 1 / 3 · 落差之一</a:t>
             </a:r>
-            <a:endParaRPr lang="en-US" sz="890" dirty="0"/>
+            <a:endParaRPr lang="en-US" sz="990" dirty="0"/>
           </a:p>
         </p:txBody>
       </p:sp>
@@ -10026,8 +10026,8 @@
         </p:nvSpPr>
         <p:spPr>
           <a:xfrm>
-            <a:off x="1681812" y="809116"/>
-            <a:ext cx="1753597" cy="1786071"/>
+            <a:off x="1341758" y="874706"/>
+            <a:ext cx="1959922" cy="1996217"/>
           </a:xfrm>
           <a:prstGeom prst="roundRect">
             <a:avLst>
@@ -10053,8 +10053,8 @@
         </p:nvSpPr>
         <p:spPr>
           <a:xfrm>
-            <a:off x="2115665" y="1480679"/>
-            <a:ext cx="885891" cy="503347"/>
+            <a:off x="1826657" y="1625284"/>
+            <a:ext cx="990124" cy="562570"/>
           </a:xfrm>
           <a:prstGeom prst="roundRect">
             <a:avLst>
@@ -10075,8 +10075,8 @@
         </p:nvSpPr>
         <p:spPr>
           <a:xfrm>
-            <a:off x="2317004" y="1380009"/>
-            <a:ext cx="261741" cy="120803"/>
+            <a:off x="2051685" y="1512770"/>
+            <a:ext cx="292536" cy="135017"/>
           </a:xfrm>
           <a:prstGeom prst="roundRect">
             <a:avLst>
@@ -10097,8 +10097,8 @@
         </p:nvSpPr>
         <p:spPr>
           <a:xfrm>
-            <a:off x="2397540" y="1561214"/>
-            <a:ext cx="322142" cy="322142"/>
+            <a:off x="2141696" y="1715295"/>
+            <a:ext cx="360045" cy="360045"/>
           </a:xfrm>
           <a:prstGeom prst="ellipse">
             <a:avLst/>
@@ -10117,8 +10117,8 @@
         </p:nvSpPr>
         <p:spPr>
           <a:xfrm>
-            <a:off x="2468008" y="1631683"/>
-            <a:ext cx="181205" cy="181205"/>
+            <a:off x="2220456" y="1794055"/>
+            <a:ext cx="202526" cy="202526"/>
           </a:xfrm>
           <a:prstGeom prst="ellipse">
             <a:avLst/>
@@ -10139,8 +10139,8 @@
         </p:nvSpPr>
         <p:spPr>
           <a:xfrm>
-            <a:off x="2800218" y="1541080"/>
-            <a:ext cx="100669" cy="100669"/>
+            <a:off x="2591753" y="1692792"/>
+            <a:ext cx="112514" cy="112514"/>
           </a:xfrm>
           <a:prstGeom prst="ellipse">
             <a:avLst/>
@@ -10161,8 +10161,8 @@
         </p:nvSpPr>
         <p:spPr>
           <a:xfrm>
-            <a:off x="3760150" y="838903"/>
-            <a:ext cx="3702038" cy="963171"/>
+            <a:off x="3664629" y="907998"/>
+            <a:ext cx="4137614" cy="1076497"/>
           </a:xfrm>
           <a:prstGeom prst="rect">
             <a:avLst/>
@@ -10181,7 +10181,7 @@
               <a:buNone/>
             </a:pPr>
             <a:r>
-              <a:rPr lang="en-US" sz="1630" b="1" dirty="0">
+              <a:rPr lang="en-US" sz="1830" b="1" dirty="0">
                 <a:solidFill>
                   <a:srgbClr val="0B1F3A"/>
                 </a:solidFill>
@@ -10191,7 +10191,7 @@
               </a:rPr>
               <a:t>Khoảng cách về hình ảnh: ảnh mô phỏng vẽ ra không giống ảnh camera thật chụp</a:t>
             </a:r>
-            <a:endParaRPr lang="en-US" sz="1630" dirty="0"/>
+            <a:endParaRPr lang="en-US" sz="1830" dirty="0"/>
           </a:p>
           <a:p>
             <a:pPr indent="0" marL="0">
@@ -10201,7 +10201,7 @@
               <a:buNone/>
             </a:pPr>
             <a:r>
-              <a:rPr lang="en-US" sz="990" dirty="0">
+              <a:rPr lang="en-US" sz="1110" dirty="0">
                 <a:solidFill>
                   <a:srgbClr val="007F72"/>
                 </a:solidFill>
@@ -10211,7 +10211,7 @@
               </a:rPr>
               <a:t>外觀落差：模擬畫出來的影像，跟真相機拍到的不一樣</a:t>
             </a:r>
-            <a:endParaRPr lang="en-US" sz="1630" dirty="0"/>
+            <a:endParaRPr lang="en-US" sz="1830" dirty="0"/>
           </a:p>
         </p:txBody>
       </p:sp>
@@ -10223,8 +10223,8 @@
         </p:nvSpPr>
         <p:spPr>
           <a:xfrm>
-            <a:off x="3760150" y="1867022"/>
-            <a:ext cx="3702038" cy="763326"/>
+            <a:off x="3664629" y="2057084"/>
+            <a:ext cx="4137614" cy="853137"/>
           </a:xfrm>
           <a:prstGeom prst="rect">
             <a:avLst/>
@@ -10243,7 +10243,7 @@
               <a:buNone/>
             </a:pPr>
             <a:r>
-              <a:rPr lang="en-US" sz="890" dirty="0">
+              <a:rPr lang="en-US" sz="990" dirty="0">
                 <a:solidFill>
                   <a:srgbClr val="5F7183"/>
                 </a:solidFill>
@@ -10253,7 +10253,7 @@
               </a:rPr>
               <a:t>Ánh sáng, chất liệu bề mặt, nhiễu của cảm biến — cả ba đều khác. Một bộ nhận dạng huấn luyện trên ảnh mô phỏng, đem sang xe thật thì độ chính xác tụt xuống.</a:t>
             </a:r>
-            <a:endParaRPr lang="en-US" sz="890" dirty="0"/>
+            <a:endParaRPr lang="en-US" sz="990" dirty="0"/>
           </a:p>
           <a:p>
             <a:pPr indent="0" marL="0">
@@ -10263,7 +10263,7 @@
               <a:buNone/>
             </a:pPr>
             <a:r>
-              <a:rPr lang="en-US" sz="820" dirty="0">
+              <a:rPr lang="en-US" sz="910" dirty="0">
                 <a:solidFill>
                   <a:srgbClr val="5F7183"/>
                 </a:solidFill>
@@ -10273,7 +10273,7 @@
               </a:rPr>
               <a:t>光線、材質表面、感測器的雜訊——三個都不一樣。拿模擬影像訓練出來的偵測器，搬到真車上精度會掉。</a:t>
             </a:r>
-            <a:endParaRPr lang="en-US" sz="890" dirty="0"/>
+            <a:endParaRPr lang="en-US" sz="990" dirty="0"/>
           </a:p>
         </p:txBody>
       </p:sp>
@@ -10285,8 +10285,8 @@
         </p:nvSpPr>
         <p:spPr>
           <a:xfrm>
-            <a:off x="1681812" y="2806268"/>
-            <a:ext cx="5780375" cy="441647"/>
+            <a:off x="1341758" y="3106840"/>
+            <a:ext cx="6460485" cy="493610"/>
           </a:xfrm>
           <a:prstGeom prst="roundRect">
             <a:avLst>
@@ -10312,8 +10312,8 @@
         </p:nvSpPr>
         <p:spPr>
           <a:xfrm>
-            <a:off x="1811708" y="2858226"/>
-            <a:ext cx="5520583" cy="350719"/>
+            <a:off x="1486937" y="3164912"/>
+            <a:ext cx="6170126" cy="391984"/>
           </a:xfrm>
           <a:prstGeom prst="rect">
             <a:avLst/>
@@ -10332,7 +10332,7 @@
               <a:buNone/>
             </a:pPr>
             <a:r>
-              <a:rPr lang="en-US" sz="890" b="1" dirty="0">
+              <a:rPr lang="en-US" sz="990" b="1" dirty="0">
                 <a:solidFill>
                   <a:srgbClr val="7A4E00"/>
                 </a:solidFill>
@@ -10342,7 +10342,7 @@
               </a:rPr>
               <a:t>Cách chữa: domain randomization — đổi loạn ánh sáng, chất liệu trong mô phỏng.</a:t>
             </a:r>
-            <a:endParaRPr lang="en-US" sz="890" dirty="0"/>
+            <a:endParaRPr lang="en-US" sz="990" dirty="0"/>
           </a:p>
           <a:p>
             <a:pPr indent="0" marL="0">
@@ -10352,7 +10352,7 @@
               <a:buNone/>
             </a:pPr>
             <a:r>
-              <a:rPr lang="en-US" sz="820" dirty="0">
+              <a:rPr lang="en-US" sz="910" dirty="0">
                 <a:solidFill>
                   <a:srgbClr val="7A4E00"/>
                 </a:solidFill>
@@ -10362,7 +10362,7 @@
               </a:rPr>
               <a:t>解法叫「域隨機化」：在模擬裡故意把光線和材質亂改。</a:t>
             </a:r>
-            <a:endParaRPr lang="en-US" sz="890" dirty="0"/>
+            <a:endParaRPr lang="en-US" sz="990" dirty="0"/>
           </a:p>
         </p:txBody>
       </p:sp>
@@ -10382,8 +10382,8 @@
         </p:blipFill>
         <p:spPr>
           <a:xfrm>
-            <a:off x="6663327" y="3338842"/>
-            <a:ext cx="779376" cy="172200"/>
+            <a:off x="7882128" y="109728"/>
+            <a:ext cx="1097280" cy="242439"/>
           </a:xfrm>
           <a:prstGeom prst="rect">
             <a:avLst/>
@@ -10398,8 +10398,8 @@
         </p:nvSpPr>
         <p:spPr>
           <a:xfrm>
-            <a:off x="1402536" y="3390800"/>
-            <a:ext cx="584532" cy="181855"/>
+            <a:off x="1029622" y="101626"/>
+            <a:ext cx="653307" cy="203251"/>
           </a:xfrm>
           <a:prstGeom prst="rect">
             <a:avLst/>
@@ -10415,7 +10415,7 @@
               <a:buNone/>
             </a:pPr>
             <a:r>
-              <a:rPr lang="en-US" sz="640" dirty="0">
+              <a:rPr lang="en-US" sz="710" dirty="0">
                 <a:solidFill>
                   <a:srgbClr val="5F7183"/>
                 </a:solidFill>
@@ -10425,7 +10425,7 @@
               </a:rPr>
               <a:t>12 / 18</a:t>
             </a:r>
-            <a:endParaRPr lang="en-US" sz="640" dirty="0"/>
+            <a:endParaRPr lang="en-US" sz="710" dirty="0"/>
           </a:p>
         </p:txBody>
       </p:sp>
@@ -10437,8 +10437,8 @@
         </p:nvSpPr>
         <p:spPr>
           <a:xfrm>
-            <a:off x="2006553" y="3390800"/>
-            <a:ext cx="1428857" cy="181855"/>
+            <a:off x="1704706" y="101626"/>
+            <a:ext cx="1596974" cy="203251"/>
           </a:xfrm>
           <a:prstGeom prst="rect">
             <a:avLst/>
@@ -10454,7 +10454,7 @@
               <a:buNone/>
             </a:pPr>
             <a:r>
-              <a:rPr lang="en-US" sz="640" dirty="0">
+              <a:rPr lang="en-US" sz="710" dirty="0">
                 <a:solidFill>
                   <a:srgbClr val="5F7183"/>
                 </a:solidFill>
@@ -10464,7 +10464,7 @@
               </a:rPr>
               <a:t>Tiết 1 · 第 1 節</a:t>
             </a:r>
-            <a:endParaRPr lang="en-US" sz="640" dirty="0"/>
+            <a:endParaRPr lang="en-US" sz="710" dirty="0"/>
           </a:p>
         </p:txBody>
       </p:sp>
@@ -10487,8 +10487,8 @@
       </p:nvGrpSpPr>
       <p:grpSpPr>
         <a:xfrm>
-          <a:off x="0" y="0"/>
-          <a:ext cx="0" cy="0"/>
+          <a:off x="942514" y="0"/>
+          <a:ext cx="1" cy="1"/>
           <a:chOff x="0" y="0"/>
           <a:chExt cx="0" cy="0"/>
         </a:xfrm>
@@ -10501,8 +10501,8 @@
         </p:nvSpPr>
         <p:spPr>
           <a:xfrm>
-            <a:off x="1681812" y="325253"/>
-            <a:ext cx="5780375" cy="194844"/>
+            <a:off x="1341758" y="333913"/>
+            <a:ext cx="6460485" cy="217769"/>
           </a:xfrm>
           <a:prstGeom prst="rect">
             <a:avLst/>
@@ -10518,7 +10518,7 @@
               <a:buNone/>
             </a:pPr>
             <a:r>
-              <a:rPr lang="en-US" sz="890" b="1" dirty="0">
+              <a:rPr lang="en-US" sz="990" b="1" dirty="0">
                 <a:solidFill>
                   <a:srgbClr val="007F72"/>
                 </a:solidFill>
@@ -10528,7 +10528,7 @@
               </a:rPr>
               <a:t>Khoảng cách 2 / 3 · 落差之二</a:t>
             </a:r>
-            <a:endParaRPr lang="en-US" sz="890" dirty="0"/>
+            <a:endParaRPr lang="en-US" sz="990" dirty="0"/>
           </a:p>
         </p:txBody>
       </p:sp>
@@ -10540,8 +10540,8 @@
         </p:nvSpPr>
         <p:spPr>
           <a:xfrm>
-            <a:off x="1681812" y="809116"/>
-            <a:ext cx="1753597" cy="1786071"/>
+            <a:off x="1341758" y="874706"/>
+            <a:ext cx="1959922" cy="1996217"/>
           </a:xfrm>
           <a:prstGeom prst="roundRect">
             <a:avLst>
@@ -10567,8 +10567,8 @@
         </p:nvSpPr>
         <p:spPr>
           <a:xfrm>
-            <a:off x="1961349" y="1449633"/>
-            <a:ext cx="1194524" cy="0"/>
+            <a:off x="1654184" y="1590586"/>
+            <a:ext cx="1335070" cy="1"/>
           </a:xfrm>
           <a:prstGeom prst="line">
             <a:avLst/>
@@ -10590,8 +10590,8 @@
         </p:nvSpPr>
         <p:spPr>
           <a:xfrm>
-            <a:off x="1961349" y="1639022"/>
-            <a:ext cx="1194524" cy="0"/>
+            <a:off x="1654184" y="1802257"/>
+            <a:ext cx="1335070" cy="1"/>
           </a:xfrm>
           <a:prstGeom prst="line">
             <a:avLst/>
@@ -10613,8 +10613,8 @@
         </p:nvSpPr>
         <p:spPr>
           <a:xfrm>
-            <a:off x="1961349" y="1544328"/>
-            <a:ext cx="1100220" cy="0"/>
+            <a:off x="1654184" y="1696422"/>
+            <a:ext cx="1229670" cy="1"/>
           </a:xfrm>
           <a:prstGeom prst="line">
             <a:avLst/>
@@ -10637,8 +10637,8 @@
         </p:nvSpPr>
         <p:spPr>
           <a:xfrm>
-            <a:off x="1961349" y="2049364"/>
-            <a:ext cx="1194524" cy="0"/>
+            <a:off x="1654184" y="2260879"/>
+            <a:ext cx="1335070" cy="1"/>
           </a:xfrm>
           <a:prstGeom prst="line">
             <a:avLst/>
@@ -10660,8 +10660,8 @@
         </p:nvSpPr>
         <p:spPr>
           <a:xfrm>
-            <a:off x="1961349" y="2238752"/>
-            <a:ext cx="1194524" cy="0"/>
+            <a:off x="1654184" y="2472551"/>
+            <a:ext cx="1335070" cy="1"/>
           </a:xfrm>
           <a:prstGeom prst="line">
             <a:avLst/>
@@ -10683,8 +10683,8 @@
         </p:nvSpPr>
         <p:spPr>
           <a:xfrm flipV="1">
-            <a:off x="1961349" y="2080928"/>
-            <a:ext cx="298631" cy="126259"/>
+            <a:off x="1654184" y="2296158"/>
+            <a:ext cx="333767" cy="141114"/>
           </a:xfrm>
           <a:prstGeom prst="line">
             <a:avLst/>
@@ -10706,8 +10706,8 @@
         </p:nvSpPr>
         <p:spPr>
           <a:xfrm>
-            <a:off x="2259980" y="2080928"/>
-            <a:ext cx="298631" cy="142041"/>
+            <a:off x="1987951" y="2296158"/>
+            <a:ext cx="333767" cy="158753"/>
           </a:xfrm>
           <a:prstGeom prst="line">
             <a:avLst/>
@@ -10729,8 +10729,8 @@
         </p:nvSpPr>
         <p:spPr>
           <a:xfrm flipV="1">
-            <a:off x="2558611" y="2017799"/>
-            <a:ext cx="298631" cy="205171"/>
+            <a:off x="2321719" y="2225600"/>
+            <a:ext cx="333767" cy="229311"/>
           </a:xfrm>
           <a:prstGeom prst="line">
             <a:avLst/>
@@ -10752,8 +10752,8 @@
         </p:nvSpPr>
         <p:spPr>
           <a:xfrm>
-            <a:off x="2857242" y="2017799"/>
-            <a:ext cx="204327" cy="126259"/>
+            <a:off x="2655486" y="2225600"/>
+            <a:ext cx="228367" cy="141114"/>
           </a:xfrm>
           <a:prstGeom prst="line">
             <a:avLst/>
@@ -10776,8 +10776,8 @@
         </p:nvSpPr>
         <p:spPr>
           <a:xfrm>
-            <a:off x="3760150" y="838903"/>
-            <a:ext cx="3702038" cy="963171"/>
+            <a:off x="3664629" y="907998"/>
+            <a:ext cx="4137614" cy="1076497"/>
           </a:xfrm>
           <a:prstGeom prst="rect">
             <a:avLst/>
@@ -10796,7 +10796,7 @@
               <a:buNone/>
             </a:pPr>
             <a:r>
-              <a:rPr lang="en-US" sz="1630" b="1" dirty="0">
+              <a:rPr lang="en-US" sz="1830" b="1" dirty="0">
                 <a:solidFill>
                   <a:srgbClr val="0B1F3A"/>
                 </a:solidFill>
@@ -10806,7 +10806,7 @@
               </a:rPr>
               <a:t>Khoảng cách về hành vi: trong mô phỏng ai cũng đi đúng luật, ngoài đường thì không</a:t>
             </a:r>
-            <a:endParaRPr lang="en-US" sz="1630" dirty="0"/>
+            <a:endParaRPr lang="en-US" sz="1830" dirty="0"/>
           </a:p>
           <a:p>
             <a:pPr indent="0" marL="0">
@@ -10816,7 +10816,7 @@
               <a:buNone/>
             </a:pPr>
             <a:r>
-              <a:rPr lang="en-US" sz="990" dirty="0">
+              <a:rPr lang="en-US" sz="1110" dirty="0">
                 <a:solidFill>
                   <a:srgbClr val="007F72"/>
                 </a:solidFill>
@@ -10826,7 +10826,7 @@
               </a:rPr>
               <a:t>行為落差：模擬裡的車都照規則走，真實世界的人不照規則走</a:t>
             </a:r>
-            <a:endParaRPr lang="en-US" sz="1630" dirty="0"/>
+            <a:endParaRPr lang="en-US" sz="1830" dirty="0"/>
           </a:p>
         </p:txBody>
       </p:sp>
@@ -10838,8 +10838,8 @@
         </p:nvSpPr>
         <p:spPr>
           <a:xfrm>
-            <a:off x="3760150" y="1867022"/>
-            <a:ext cx="3702038" cy="763326"/>
+            <a:off x="3664629" y="2057084"/>
+            <a:ext cx="4137614" cy="853137"/>
           </a:xfrm>
           <a:prstGeom prst="rect">
             <a:avLst/>
@@ -10858,7 +10858,7 @@
               <a:buNone/>
             </a:pPr>
             <a:r>
-              <a:rPr lang="en-US" sz="890" dirty="0">
+              <a:rPr lang="en-US" sz="990" dirty="0">
                 <a:solidFill>
                   <a:srgbClr val="5F7183"/>
                 </a:solidFill>
@@ -10868,7 +10868,7 @@
               </a:rPr>
               <a:t>Xe trong mô phỏng giữ làn, giữ khoảng cách, bật xi-nhan rồi mới chuyển làn. Một chiếc xe tự lái hoàn hảo trong mô phỏng, gặp dòng xe máy thật ở Hà Nội có thể hỏng hoàn toàn.</a:t>
             </a:r>
-            <a:endParaRPr lang="en-US" sz="890" dirty="0"/>
+            <a:endParaRPr lang="en-US" sz="990" dirty="0"/>
           </a:p>
           <a:p>
             <a:pPr indent="0" marL="0">
@@ -10878,7 +10878,7 @@
               <a:buNone/>
             </a:pPr>
             <a:r>
-              <a:rPr lang="en-US" sz="820" dirty="0">
+              <a:rPr lang="en-US" sz="910" dirty="0">
                 <a:solidFill>
                   <a:srgbClr val="5F7183"/>
                 </a:solidFill>
@@ -10888,7 +10888,7 @@
               </a:rPr>
               <a:t>模擬裡的車乖乖待在車道、保持距離、打了方向燈才變換車道。在模擬裡完美的自駕車，遇到真的河內機車流，可能完全失效。</a:t>
             </a:r>
-            <a:endParaRPr lang="en-US" sz="890" dirty="0"/>
+            <a:endParaRPr lang="en-US" sz="990" dirty="0"/>
           </a:p>
         </p:txBody>
       </p:sp>
@@ -10900,8 +10900,8 @@
         </p:nvSpPr>
         <p:spPr>
           <a:xfrm>
-            <a:off x="1681812" y="2806268"/>
-            <a:ext cx="5780375" cy="441647"/>
+            <a:off x="1341758" y="3106840"/>
+            <a:ext cx="6460485" cy="493610"/>
           </a:xfrm>
           <a:prstGeom prst="roundRect">
             <a:avLst>
@@ -10927,8 +10927,8 @@
         </p:nvSpPr>
         <p:spPr>
           <a:xfrm>
-            <a:off x="1811708" y="2858226"/>
-            <a:ext cx="5520583" cy="350719"/>
+            <a:off x="1486937" y="3164912"/>
+            <a:ext cx="6170126" cy="391984"/>
           </a:xfrm>
           <a:prstGeom prst="rect">
             <a:avLst/>
@@ -10947,7 +10947,7 @@
               <a:buNone/>
             </a:pPr>
             <a:r>
-              <a:rPr lang="en-US" sz="890" b="1" dirty="0">
+              <a:rPr lang="en-US" sz="990" b="1" dirty="0">
                 <a:solidFill>
                   <a:srgbClr val="7A4E00"/>
                 </a:solidFill>
@@ -10957,7 +10957,7 @@
               </a:rPr>
               <a:t>Cách chữa: ghi lại quỹ đạo thật ngoài đường rồi phát lại vào trong mô phỏng.</a:t>
             </a:r>
-            <a:endParaRPr lang="en-US" sz="890" dirty="0"/>
+            <a:endParaRPr lang="en-US" sz="990" dirty="0"/>
           </a:p>
           <a:p>
             <a:pPr indent="0" marL="0">
@@ -10967,7 +10967,7 @@
               <a:buNone/>
             </a:pPr>
             <a:r>
-              <a:rPr lang="en-US" sz="820" dirty="0">
+              <a:rPr lang="en-US" sz="910" dirty="0">
                 <a:solidFill>
                   <a:srgbClr val="7A4E00"/>
                 </a:solidFill>
@@ -10977,7 +10977,7 @@
               </a:rPr>
               <a:t>解法：把實際道路上錄到的軌跡，回放進模擬裡。</a:t>
             </a:r>
-            <a:endParaRPr lang="en-US" sz="890" dirty="0"/>
+            <a:endParaRPr lang="en-US" sz="990" dirty="0"/>
           </a:p>
         </p:txBody>
       </p:sp>
@@ -10997,8 +10997,8 @@
         </p:blipFill>
         <p:spPr>
           <a:xfrm>
-            <a:off x="6663327" y="3338842"/>
-            <a:ext cx="779376" cy="172200"/>
+            <a:off x="7882128" y="109728"/>
+            <a:ext cx="1097280" cy="242439"/>
           </a:xfrm>
           <a:prstGeom prst="rect">
             <a:avLst/>
@@ -11013,8 +11013,8 @@
         </p:nvSpPr>
         <p:spPr>
           <a:xfrm>
-            <a:off x="1402536" y="3390800"/>
-            <a:ext cx="584532" cy="181855"/>
+            <a:off x="1029622" y="101626"/>
+            <a:ext cx="653307" cy="203251"/>
           </a:xfrm>
           <a:prstGeom prst="rect">
             <a:avLst/>
@@ -11030,7 +11030,7 @@
               <a:buNone/>
             </a:pPr>
             <a:r>
-              <a:rPr lang="en-US" sz="640" dirty="0">
+              <a:rPr lang="en-US" sz="710" dirty="0">
                 <a:solidFill>
                   <a:srgbClr val="5F7183"/>
                 </a:solidFill>
@@ -11040,7 +11040,7 @@
               </a:rPr>
               <a:t>13 / 18</a:t>
             </a:r>
-            <a:endParaRPr lang="en-US" sz="640" dirty="0"/>
+            <a:endParaRPr lang="en-US" sz="710" dirty="0"/>
           </a:p>
         </p:txBody>
       </p:sp>
@@ -11052,8 +11052,8 @@
         </p:nvSpPr>
         <p:spPr>
           <a:xfrm>
-            <a:off x="2006553" y="3390800"/>
-            <a:ext cx="1428857" cy="181855"/>
+            <a:off x="1704706" y="101626"/>
+            <a:ext cx="1596974" cy="203251"/>
           </a:xfrm>
           <a:prstGeom prst="rect">
             <a:avLst/>
@@ -11069,7 +11069,7 @@
               <a:buNone/>
             </a:pPr>
             <a:r>
-              <a:rPr lang="en-US" sz="640" dirty="0">
+              <a:rPr lang="en-US" sz="710" dirty="0">
                 <a:solidFill>
                   <a:srgbClr val="5F7183"/>
                 </a:solidFill>
@@ -11079,7 +11079,7 @@
               </a:rPr>
               <a:t>Tiết 1 · 第 1 節</a:t>
             </a:r>
-            <a:endParaRPr lang="en-US" sz="640" dirty="0"/>
+            <a:endParaRPr lang="en-US" sz="710" dirty="0"/>
           </a:p>
         </p:txBody>
       </p:sp>
@@ -11102,8 +11102,8 @@
       </p:nvGrpSpPr>
       <p:grpSpPr>
         <a:xfrm>
-          <a:off x="0" y="0"/>
-          <a:ext cx="0" cy="0"/>
+          <a:off x="942514" y="0"/>
+          <a:ext cx="1" cy="1"/>
           <a:chOff x="0" y="0"/>
           <a:chExt cx="0" cy="0"/>
         </a:xfrm>
@@ -11116,8 +11116,8 @@
         </p:nvSpPr>
         <p:spPr>
           <a:xfrm>
-            <a:off x="1681812" y="325253"/>
-            <a:ext cx="5780375" cy="194844"/>
+            <a:off x="1341758" y="333913"/>
+            <a:ext cx="6460485" cy="217769"/>
           </a:xfrm>
           <a:prstGeom prst="rect">
             <a:avLst/>
@@ -11133,7 +11133,7 @@
               <a:buNone/>
             </a:pPr>
             <a:r>
-              <a:rPr lang="en-US" sz="890" b="1" dirty="0">
+              <a:rPr lang="en-US" sz="990" b="1" dirty="0">
                 <a:solidFill>
                   <a:srgbClr val="007F72"/>
                 </a:solidFill>
@@ -11143,7 +11143,7 @@
               </a:rPr>
               <a:t>Khoảng cách 3 / 3 · 落差之三</a:t>
             </a:r>
-            <a:endParaRPr lang="en-US" sz="890" dirty="0"/>
+            <a:endParaRPr lang="en-US" sz="990" dirty="0"/>
           </a:p>
         </p:txBody>
       </p:sp>
@@ -11155,8 +11155,8 @@
         </p:nvSpPr>
         <p:spPr>
           <a:xfrm>
-            <a:off x="1681812" y="809116"/>
-            <a:ext cx="1753597" cy="1786071"/>
+            <a:off x="1341758" y="874706"/>
+            <a:ext cx="1959922" cy="1996217"/>
           </a:xfrm>
           <a:prstGeom prst="roundRect">
             <a:avLst>
@@ -11182,12 +11182,12 @@
         </p:nvSpPr>
         <p:spPr>
           <a:xfrm>
-            <a:off x="2095531" y="1641750"/>
-            <a:ext cx="926159" cy="281874"/>
+            <a:off x="1804154" y="1805306"/>
+            <a:ext cx="1035129" cy="315040"/>
           </a:xfrm>
           <a:prstGeom prst="roundRect">
             <a:avLst>
-              <a:gd name="adj" fmla="val 69125"/>
+              <a:gd name="adj" fmla="val 69124"/>
             </a:avLst>
           </a:prstGeom>
           <a:solidFill>
@@ -11204,8 +11204,8 @@
         </p:nvSpPr>
         <p:spPr>
           <a:xfrm>
-            <a:off x="2296870" y="1440411"/>
-            <a:ext cx="503347" cy="221473"/>
+            <a:off x="2029182" y="1580278"/>
+            <a:ext cx="562570" cy="247531"/>
           </a:xfrm>
           <a:prstGeom prst="trapezoid">
             <a:avLst/>
@@ -11226,8 +11226,8 @@
         </p:nvSpPr>
         <p:spPr>
           <a:xfrm>
-            <a:off x="2216335" y="1863222"/>
-            <a:ext cx="201339" cy="201339"/>
+            <a:off x="1939171" y="2052837"/>
+            <a:ext cx="225028" cy="225028"/>
           </a:xfrm>
           <a:prstGeom prst="ellipse">
             <a:avLst/>
@@ -11246,8 +11246,8 @@
         </p:nvSpPr>
         <p:spPr>
           <a:xfrm>
-            <a:off x="2699548" y="1863222"/>
-            <a:ext cx="201339" cy="201339"/>
+            <a:off x="2479239" y="2052837"/>
+            <a:ext cx="225028" cy="225028"/>
           </a:xfrm>
           <a:prstGeom prst="ellipse">
             <a:avLst/>
@@ -11266,8 +11266,8 @@
         </p:nvSpPr>
         <p:spPr>
           <a:xfrm>
-            <a:off x="2266669" y="1913557"/>
-            <a:ext cx="100669" cy="100669"/>
+            <a:off x="1995428" y="2109094"/>
+            <a:ext cx="112514" cy="112514"/>
           </a:xfrm>
           <a:prstGeom prst="ellipse">
             <a:avLst/>
@@ -11286,8 +11286,8 @@
         </p:nvSpPr>
         <p:spPr>
           <a:xfrm>
-            <a:off x="2749883" y="1913557"/>
-            <a:ext cx="100669" cy="100669"/>
+            <a:off x="2535496" y="2109094"/>
+            <a:ext cx="112514" cy="112514"/>
           </a:xfrm>
           <a:prstGeom prst="ellipse">
             <a:avLst/>
@@ -11306,8 +11306,8 @@
         </p:nvSpPr>
         <p:spPr>
           <a:xfrm>
-            <a:off x="3760150" y="887602"/>
-            <a:ext cx="3702038" cy="865774"/>
+            <a:off x="3664629" y="962427"/>
+            <a:ext cx="4137614" cy="967639"/>
           </a:xfrm>
           <a:prstGeom prst="rect">
             <a:avLst/>
@@ -11326,7 +11326,7 @@
               <a:buNone/>
             </a:pPr>
             <a:r>
-              <a:rPr lang="en-US" sz="1420" b="1" dirty="0">
+              <a:rPr lang="en-US" sz="1590" b="1" dirty="0">
                 <a:solidFill>
                   <a:srgbClr val="0B1F3A"/>
                 </a:solidFill>
@@ -11336,7 +11336,7 @@
               </a:rPr>
               <a:t>Khoảng cách về vật lý: lốp, giảm xóc, độ trễ phanh trong mô phỏng đều chỉ là gần đúng</a:t>
             </a:r>
-            <a:endParaRPr lang="en-US" sz="1420" dirty="0"/>
+            <a:endParaRPr lang="en-US" sz="1590" dirty="0"/>
           </a:p>
           <a:p>
             <a:pPr indent="0" marL="0">
@@ -11346,7 +11346,7 @@
               <a:buNone/>
             </a:pPr>
             <a:r>
-              <a:rPr lang="en-US" sz="990" dirty="0">
+              <a:rPr lang="en-US" sz="1110" dirty="0">
                 <a:solidFill>
                   <a:srgbClr val="007F72"/>
                 </a:solidFill>
@@ -11356,7 +11356,7 @@
               </a:rPr>
               <a:t>物理落差：輪胎、懸吊、煞車延遲，在模擬裡都只是近似值</a:t>
             </a:r>
-            <a:endParaRPr lang="en-US" sz="1420" dirty="0"/>
+            <a:endParaRPr lang="en-US" sz="1590" dirty="0"/>
           </a:p>
         </p:txBody>
       </p:sp>
@@ -11368,8 +11368,8 @@
         </p:nvSpPr>
         <p:spPr>
           <a:xfrm>
-            <a:off x="3760150" y="1818323"/>
-            <a:ext cx="3702038" cy="763326"/>
+            <a:off x="3664629" y="2002655"/>
+            <a:ext cx="4137614" cy="853137"/>
           </a:xfrm>
           <a:prstGeom prst="rect">
             <a:avLst/>
@@ -11388,7 +11388,7 @@
               <a:buNone/>
             </a:pPr>
             <a:r>
-              <a:rPr lang="en-US" sz="890" dirty="0">
+              <a:rPr lang="en-US" sz="990" dirty="0">
                 <a:solidFill>
                   <a:srgbClr val="5F7183"/>
                 </a:solidFill>
@@ -11398,7 +11398,7 @@
               </a:rPr>
               <a:t>Mô phỏng của ta dùng một con số cố định: giảm tốc 6 m/s². Xe thật trên mặt đường ướt chỉ còn một nửa, nên quãng đường phanh dài gần gấp đôi.</a:t>
             </a:r>
-            <a:endParaRPr lang="en-US" sz="890" dirty="0"/>
+            <a:endParaRPr lang="en-US" sz="990" dirty="0"/>
           </a:p>
           <a:p>
             <a:pPr indent="0" marL="0">
@@ -11408,7 +11408,7 @@
               <a:buNone/>
             </a:pPr>
             <a:r>
-              <a:rPr lang="en-US" sz="820" dirty="0">
+              <a:rPr lang="en-US" sz="910" dirty="0">
                 <a:solidFill>
                   <a:srgbClr val="5F7183"/>
                 </a:solidFill>
@@ -11418,7 +11418,7 @@
               </a:rPr>
               <a:t>我們的模擬器用一個固定的數字：減速度 6 m/s²。真車在濕路面上只剩一半，所以煞停距離幾乎加倍。</a:t>
             </a:r>
-            <a:endParaRPr lang="en-US" sz="890" dirty="0"/>
+            <a:endParaRPr lang="en-US" sz="990" dirty="0"/>
           </a:p>
         </p:txBody>
       </p:sp>
@@ -11430,8 +11430,8 @@
         </p:nvSpPr>
         <p:spPr>
           <a:xfrm>
-            <a:off x="1681812" y="2806268"/>
-            <a:ext cx="5780375" cy="441647"/>
+            <a:off x="1341758" y="3106840"/>
+            <a:ext cx="6460485" cy="493610"/>
           </a:xfrm>
           <a:prstGeom prst="roundRect">
             <a:avLst>
@@ -11457,8 +11457,8 @@
         </p:nvSpPr>
         <p:spPr>
           <a:xfrm>
-            <a:off x="1811708" y="2858226"/>
-            <a:ext cx="5520583" cy="350719"/>
+            <a:off x="1486937" y="3164912"/>
+            <a:ext cx="6170126" cy="391984"/>
           </a:xfrm>
           <a:prstGeom prst="rect">
             <a:avLst/>
@@ -11477,7 +11477,7 @@
               <a:buNone/>
             </a:pPr>
             <a:r>
-              <a:rPr lang="en-US" sz="890" b="1" dirty="0">
+              <a:rPr lang="en-US" sz="990" b="1" dirty="0">
                 <a:solidFill>
                   <a:srgbClr val="7A4E00"/>
                 </a:solidFill>
@@ -11487,7 +11487,7 @@
               </a:rPr>
               <a:t>Tiết 3 khi bật mưa, các bạn sẽ gặp đúng chuyện này.</a:t>
             </a:r>
-            <a:endParaRPr lang="en-US" sz="890" dirty="0"/>
+            <a:endParaRPr lang="en-US" sz="990" dirty="0"/>
           </a:p>
           <a:p>
             <a:pPr indent="0" marL="0">
@@ -11497,7 +11497,7 @@
               <a:buNone/>
             </a:pPr>
             <a:r>
-              <a:rPr lang="en-US" sz="820" dirty="0">
+              <a:rPr lang="en-US" sz="910" dirty="0">
                 <a:solidFill>
                   <a:srgbClr val="7A4E00"/>
                 </a:solidFill>
@@ -11507,7 +11507,7 @@
               </a:rPr>
               <a:t>第三節打開雨天的時候，各位就會遇到這件事。</a:t>
             </a:r>
-            <a:endParaRPr lang="en-US" sz="890" dirty="0"/>
+            <a:endParaRPr lang="en-US" sz="990" dirty="0"/>
           </a:p>
         </p:txBody>
       </p:sp>
@@ -11527,8 +11527,8 @@
         </p:blipFill>
         <p:spPr>
           <a:xfrm>
-            <a:off x="6663327" y="3338842"/>
-            <a:ext cx="779376" cy="172200"/>
+            <a:off x="7882128" y="109728"/>
+            <a:ext cx="1097280" cy="242439"/>
           </a:xfrm>
           <a:prstGeom prst="rect">
             <a:avLst/>
@@ -11543,8 +11543,8 @@
         </p:nvSpPr>
         <p:spPr>
           <a:xfrm>
-            <a:off x="1402536" y="3390800"/>
-            <a:ext cx="584532" cy="181855"/>
+            <a:off x="1029622" y="101626"/>
+            <a:ext cx="653307" cy="203251"/>
           </a:xfrm>
           <a:prstGeom prst="rect">
             <a:avLst/>
@@ -11560,7 +11560,7 @@
               <a:buNone/>
             </a:pPr>
             <a:r>
-              <a:rPr lang="en-US" sz="640" dirty="0">
+              <a:rPr lang="en-US" sz="710" dirty="0">
                 <a:solidFill>
                   <a:srgbClr val="5F7183"/>
                 </a:solidFill>
@@ -11570,7 +11570,7 @@
               </a:rPr>
               <a:t>14 / 18</a:t>
             </a:r>
-            <a:endParaRPr lang="en-US" sz="640" dirty="0"/>
+            <a:endParaRPr lang="en-US" sz="710" dirty="0"/>
           </a:p>
         </p:txBody>
       </p:sp>
@@ -11582,8 +11582,8 @@
         </p:nvSpPr>
         <p:spPr>
           <a:xfrm>
-            <a:off x="2006553" y="3390800"/>
-            <a:ext cx="1428857" cy="181855"/>
+            <a:off x="1704706" y="101626"/>
+            <a:ext cx="1596974" cy="203251"/>
           </a:xfrm>
           <a:prstGeom prst="rect">
             <a:avLst/>
@@ -11599,7 +11599,7 @@
               <a:buNone/>
             </a:pPr>
             <a:r>
-              <a:rPr lang="en-US" sz="640" dirty="0">
+              <a:rPr lang="en-US" sz="710" dirty="0">
                 <a:solidFill>
                   <a:srgbClr val="5F7183"/>
                 </a:solidFill>
@@ -11609,7 +11609,7 @@
               </a:rPr>
               <a:t>Tiết 1 · 第 1 節</a:t>
             </a:r>
-            <a:endParaRPr lang="en-US" sz="640" dirty="0"/>
+            <a:endParaRPr lang="en-US" sz="710" dirty="0"/>
           </a:p>
         </p:txBody>
       </p:sp>
@@ -11632,8 +11632,8 @@
       </p:nvGrpSpPr>
       <p:grpSpPr>
         <a:xfrm>
-          <a:off x="0" y="0"/>
-          <a:ext cx="0" cy="0"/>
+          <a:off x="942514" y="0"/>
+          <a:ext cx="1" cy="1"/>
           <a:chOff x="0" y="0"/>
           <a:chExt cx="0" cy="0"/>
         </a:xfrm>
@@ -11646,8 +11646,8 @@
         </p:nvSpPr>
         <p:spPr>
           <a:xfrm>
-            <a:off x="1681812" y="325253"/>
-            <a:ext cx="5780375" cy="194844"/>
+            <a:off x="1341758" y="333913"/>
+            <a:ext cx="6460485" cy="217769"/>
           </a:xfrm>
           <a:prstGeom prst="rect">
             <a:avLst/>
@@ -11663,7 +11663,7 @@
               <a:buNone/>
             </a:pPr>
             <a:r>
-              <a:rPr lang="en-US" sz="890" b="1" dirty="0">
+              <a:rPr lang="en-US" sz="990" b="1" dirty="0">
                 <a:solidFill>
                   <a:srgbClr val="007F72"/>
                 </a:solidFill>
@@ -11673,7 +11673,7 @@
               </a:rPr>
               <a:t>Ngược lại · 反過來看</a:t>
             </a:r>
-            <a:endParaRPr lang="en-US" sz="890" dirty="0"/>
+            <a:endParaRPr lang="en-US" sz="990" dirty="0"/>
           </a:p>
         </p:txBody>
       </p:sp>
@@ -11685,8 +11685,8 @@
         </p:nvSpPr>
         <p:spPr>
           <a:xfrm>
-            <a:off x="1681812" y="809116"/>
-            <a:ext cx="1753597" cy="1786071"/>
+            <a:off x="1341758" y="874706"/>
+            <a:ext cx="1959922" cy="1996217"/>
           </a:xfrm>
           <a:prstGeom prst="roundRect">
             <a:avLst>
@@ -11712,8 +11712,8 @@
         </p:nvSpPr>
         <p:spPr>
           <a:xfrm>
-            <a:off x="2385719" y="1591675"/>
-            <a:ext cx="660132" cy="536601"/>
+            <a:off x="2128485" y="1749340"/>
+            <a:ext cx="737802" cy="599736"/>
           </a:xfrm>
           <a:prstGeom prst="roundRect">
             <a:avLst>
@@ -11739,8 +11739,8 @@
         </p:nvSpPr>
         <p:spPr>
           <a:xfrm>
-            <a:off x="2275697" y="1481198"/>
-            <a:ext cx="660132" cy="536601"/>
+            <a:off x="2005518" y="1625864"/>
+            <a:ext cx="737802" cy="599736"/>
           </a:xfrm>
           <a:prstGeom prst="roundRect">
             <a:avLst>
@@ -11766,8 +11766,8 @@
         </p:nvSpPr>
         <p:spPr>
           <a:xfrm>
-            <a:off x="2165675" y="1370721"/>
-            <a:ext cx="660132" cy="536601"/>
+            <a:off x="1882551" y="1502390"/>
+            <a:ext cx="737802" cy="599736"/>
           </a:xfrm>
           <a:prstGeom prst="roundRect">
             <a:avLst>
@@ -11793,8 +11793,8 @@
         </p:nvSpPr>
         <p:spPr>
           <a:xfrm>
-            <a:off x="2055653" y="1260245"/>
-            <a:ext cx="660132" cy="536601"/>
+            <a:off x="1759584" y="1378914"/>
+            <a:ext cx="737802" cy="599736"/>
           </a:xfrm>
           <a:prstGeom prst="roundRect">
             <a:avLst>
@@ -11820,8 +11820,8 @@
         </p:nvSpPr>
         <p:spPr>
           <a:xfrm>
-            <a:off x="1772740" y="2080928"/>
-            <a:ext cx="1571743" cy="284083"/>
+            <a:off x="1443383" y="2296158"/>
+            <a:ext cx="1756671" cy="317508"/>
           </a:xfrm>
           <a:prstGeom prst="rect">
             <a:avLst/>
@@ -11837,7 +11837,7 @@
               <a:buNone/>
             </a:pPr>
             <a:r>
-              <a:rPr lang="en-US" sz="780" b="1" dirty="0">
+              <a:rPr lang="en-US" sz="870" b="1" dirty="0">
                 <a:solidFill>
                   <a:srgbClr val="00A896"/>
                 </a:solidFill>
@@ -11847,7 +11847,7 @@
               </a:rPr>
               <a:t>× 10 000</a:t>
             </a:r>
-            <a:endParaRPr lang="en-US" sz="780" dirty="0"/>
+            <a:endParaRPr lang="en-US" sz="870" dirty="0"/>
           </a:p>
         </p:txBody>
       </p:sp>
@@ -11859,8 +11859,8 @@
         </p:nvSpPr>
         <p:spPr>
           <a:xfrm>
-            <a:off x="3760150" y="963355"/>
-            <a:ext cx="3702038" cy="714266"/>
+            <a:off x="3664629" y="1047093"/>
+            <a:ext cx="4137614" cy="798305"/>
           </a:xfrm>
           <a:prstGeom prst="rect">
             <a:avLst/>
@@ -11879,7 +11879,7 @@
               <a:buNone/>
             </a:pPr>
             <a:r>
-              <a:rPr lang="en-US" sz="1630" b="1" dirty="0">
+              <a:rPr lang="en-US" sz="1830" b="1" dirty="0">
                 <a:solidFill>
                   <a:srgbClr val="0B1F3A"/>
                 </a:solidFill>
@@ -11889,7 +11889,7 @@
               </a:rPr>
               <a:t>Mô phỏng làm được những việc mà ngoài đường thật không làm được</a:t>
             </a:r>
-            <a:endParaRPr lang="en-US" sz="1630" dirty="0"/>
+            <a:endParaRPr lang="en-US" sz="1830" dirty="0"/>
           </a:p>
           <a:p>
             <a:pPr indent="0" marL="0">
@@ -11899,7 +11899,7 @@
               <a:buNone/>
             </a:pPr>
             <a:r>
-              <a:rPr lang="en-US" sz="990" dirty="0">
+              <a:rPr lang="en-US" sz="1110" dirty="0">
                 <a:solidFill>
                   <a:srgbClr val="007F72"/>
                 </a:solidFill>
@@ -11909,7 +11909,7 @@
               </a:rPr>
               <a:t>模擬能做到一些真實世界做不到的事</a:t>
             </a:r>
-            <a:endParaRPr lang="en-US" sz="1630" dirty="0"/>
+            <a:endParaRPr lang="en-US" sz="1830" dirty="0"/>
           </a:p>
         </p:txBody>
       </p:sp>
@@ -11921,8 +11921,8 @@
         </p:nvSpPr>
         <p:spPr>
           <a:xfrm>
-            <a:off x="3760150" y="1742570"/>
-            <a:ext cx="3702038" cy="763326"/>
+            <a:off x="3664629" y="1917989"/>
+            <a:ext cx="4137614" cy="853137"/>
           </a:xfrm>
           <a:prstGeom prst="rect">
             <a:avLst/>
@@ -11941,7 +11941,7 @@
               <a:buNone/>
             </a:pPr>
             <a:r>
-              <a:rPr lang="en-US" sz="890" dirty="0">
+              <a:rPr lang="en-US" sz="990" dirty="0">
                 <a:solidFill>
                   <a:srgbClr val="5F7183"/>
                 </a:solidFill>
@@ -11951,7 +11951,7 @@
               </a:rPr>
               <a:t>Chạy lại cùng một tình huống mười nghìn lần, mỗi lần đổi một tham số. Cho người đi bộ bước ra đúng vào thời điểm xấu nhất. Ngoài đường thật thì vừa không làm được, vừa không được phép làm.</a:t>
             </a:r>
-            <a:endParaRPr lang="en-US" sz="890" dirty="0"/>
+            <a:endParaRPr lang="en-US" sz="990" dirty="0"/>
           </a:p>
           <a:p>
             <a:pPr indent="0" marL="0">
@@ -11961,7 +11961,7 @@
               <a:buNone/>
             </a:pPr>
             <a:r>
-              <a:rPr lang="en-US" sz="820" dirty="0">
+              <a:rPr lang="en-US" sz="910" dirty="0">
                 <a:solidFill>
                   <a:srgbClr val="5F7183"/>
                 </a:solidFill>
@@ -11971,7 +11971,7 @@
               </a:rPr>
               <a:t>同一個情況重跑一萬次，每次只改一個參數。讓行人剛好在最糟的時間點走出來。這兩件事在真實世界既做不到，也不可以做。</a:t>
             </a:r>
-            <a:endParaRPr lang="en-US" sz="890" dirty="0"/>
+            <a:endParaRPr lang="en-US" sz="990" dirty="0"/>
           </a:p>
         </p:txBody>
       </p:sp>
@@ -11983,8 +11983,8 @@
         </p:nvSpPr>
         <p:spPr>
           <a:xfrm>
-            <a:off x="1681812" y="2806268"/>
-            <a:ext cx="5780375" cy="441647"/>
+            <a:off x="1341758" y="3106840"/>
+            <a:ext cx="6460485" cy="493610"/>
           </a:xfrm>
           <a:prstGeom prst="roundRect">
             <a:avLst>
@@ -12010,8 +12010,8 @@
         </p:nvSpPr>
         <p:spPr>
           <a:xfrm>
-            <a:off x="1811708" y="2858226"/>
-            <a:ext cx="5520583" cy="350719"/>
+            <a:off x="1486937" y="3164912"/>
+            <a:ext cx="6170126" cy="391984"/>
           </a:xfrm>
           <a:prstGeom prst="rect">
             <a:avLst/>
@@ -12030,7 +12030,7 @@
               <a:buNone/>
             </a:pPr>
             <a:r>
-              <a:rPr lang="en-US" sz="890" b="1" dirty="0">
+              <a:rPr lang="en-US" sz="990" b="1" dirty="0">
                 <a:solidFill>
                   <a:srgbClr val="7A4E00"/>
                 </a:solidFill>
@@ -12040,7 +12040,7 @@
               </a:rPr>
               <a:t>Nên đừng nghĩ mô phỏng là bản thay thế kém hơn — nó là một công cụ khác, làm được việc khác.</a:t>
             </a:r>
-            <a:endParaRPr lang="en-US" sz="890" dirty="0"/>
+            <a:endParaRPr lang="en-US" sz="990" dirty="0"/>
           </a:p>
           <a:p>
             <a:pPr indent="0" marL="0">
@@ -12050,7 +12050,7 @@
               <a:buNone/>
             </a:pPr>
             <a:r>
-              <a:rPr lang="en-US" sz="820" dirty="0">
+              <a:rPr lang="en-US" sz="910" dirty="0">
                 <a:solidFill>
                   <a:srgbClr val="7A4E00"/>
                 </a:solidFill>
@@ -12060,7 +12060,7 @@
               </a:rPr>
               <a:t>所以不要把模擬看成「比較差的替代品」——它是另一種工具，做的是另一件事。</a:t>
             </a:r>
-            <a:endParaRPr lang="en-US" sz="890" dirty="0"/>
+            <a:endParaRPr lang="en-US" sz="990" dirty="0"/>
           </a:p>
         </p:txBody>
       </p:sp>
@@ -12080,8 +12080,8 @@
         </p:blipFill>
         <p:spPr>
           <a:xfrm>
-            <a:off x="6663327" y="3338842"/>
-            <a:ext cx="779376" cy="172200"/>
+            <a:off x="7882128" y="109728"/>
+            <a:ext cx="1097280" cy="242439"/>
           </a:xfrm>
           <a:prstGeom prst="rect">
             <a:avLst/>
@@ -12096,8 +12096,8 @@
         </p:nvSpPr>
         <p:spPr>
           <a:xfrm>
-            <a:off x="1402536" y="3390800"/>
-            <a:ext cx="584532" cy="181855"/>
+            <a:off x="1029622" y="101626"/>
+            <a:ext cx="653307" cy="203251"/>
           </a:xfrm>
           <a:prstGeom prst="rect">
             <a:avLst/>
@@ -12113,7 +12113,7 @@
               <a:buNone/>
             </a:pPr>
             <a:r>
-              <a:rPr lang="en-US" sz="640" dirty="0">
+              <a:rPr lang="en-US" sz="710" dirty="0">
                 <a:solidFill>
                   <a:srgbClr val="5F7183"/>
                 </a:solidFill>
@@ -12123,7 +12123,7 @@
               </a:rPr>
               <a:t>15 / 18</a:t>
             </a:r>
-            <a:endParaRPr lang="en-US" sz="640" dirty="0"/>
+            <a:endParaRPr lang="en-US" sz="710" dirty="0"/>
           </a:p>
         </p:txBody>
       </p:sp>
@@ -12135,8 +12135,8 @@
         </p:nvSpPr>
         <p:spPr>
           <a:xfrm>
-            <a:off x="2006553" y="3390800"/>
-            <a:ext cx="1428857" cy="181855"/>
+            <a:off x="1704706" y="101626"/>
+            <a:ext cx="1596974" cy="203251"/>
           </a:xfrm>
           <a:prstGeom prst="rect">
             <a:avLst/>
@@ -12152,7 +12152,7 @@
               <a:buNone/>
             </a:pPr>
             <a:r>
-              <a:rPr lang="en-US" sz="640" dirty="0">
+              <a:rPr lang="en-US" sz="710" dirty="0">
                 <a:solidFill>
                   <a:srgbClr val="5F7183"/>
                 </a:solidFill>
@@ -12162,7 +12162,7 @@
               </a:rPr>
               <a:t>Tiết 1 · 第 1 節</a:t>
             </a:r>
-            <a:endParaRPr lang="en-US" sz="640" dirty="0"/>
+            <a:endParaRPr lang="en-US" sz="710" dirty="0"/>
           </a:p>
         </p:txBody>
       </p:sp>
@@ -12185,8 +12185,8 @@
       </p:nvGrpSpPr>
       <p:grpSpPr>
         <a:xfrm>
-          <a:off x="0" y="0"/>
-          <a:ext cx="0" cy="0"/>
+          <a:off x="951450" y="0"/>
+          <a:ext cx="1" cy="1"/>
           <a:chOff x="0" y="0"/>
           <a:chExt cx="0" cy="0"/>
         </a:xfrm>
@@ -12199,8 +12199,8 @@
         </p:nvSpPr>
         <p:spPr>
           <a:xfrm>
-            <a:off x="1681812" y="234326"/>
-            <a:ext cx="5780375" cy="597522"/>
+            <a:off x="1349711" y="231715"/>
+            <a:ext cx="6444579" cy="666181"/>
           </a:xfrm>
           <a:prstGeom prst="rect">
             <a:avLst/>
@@ -12219,7 +12219,7 @@
               <a:buNone/>
             </a:pPr>
             <a:r>
-              <a:rPr lang="en-US" sz="1560" b="1" dirty="0">
+              <a:rPr lang="en-US" sz="1740" b="1" dirty="0">
                 <a:solidFill>
                   <a:srgbClr val="0B1F3A"/>
                 </a:solidFill>
@@ -12229,7 +12229,7 @@
               </a:rPr>
               <a:t>Ở Đài Loan và Việt Nam, cả ba khoảng cách đều lớn hơn</a:t>
             </a:r>
-            <a:endParaRPr lang="en-US" sz="1560" dirty="0"/>
+            <a:endParaRPr lang="en-US" sz="1740" dirty="0"/>
           </a:p>
           <a:p>
             <a:pPr indent="0" marL="0">
@@ -12239,7 +12239,7 @@
               <a:buNone/>
             </a:pPr>
             <a:r>
-              <a:rPr lang="en-US" sz="960" dirty="0">
+              <a:rPr lang="en-US" sz="1070" dirty="0">
                 <a:solidFill>
                   <a:srgbClr val="5F7183"/>
                 </a:solidFill>
@@ -12249,7 +12249,7 @@
               </a:rPr>
               <a:t>在台灣和越南，這三種落差都更大</a:t>
             </a:r>
-            <a:endParaRPr lang="en-US" sz="1560" dirty="0"/>
+            <a:endParaRPr lang="en-US" sz="1740" dirty="0"/>
           </a:p>
         </p:txBody>
       </p:sp>
@@ -12261,8 +12261,8 @@
         </p:nvSpPr>
         <p:spPr>
           <a:xfrm>
-            <a:off x="1681812" y="831848"/>
-            <a:ext cx="5780375" cy="506595"/>
+            <a:off x="1349711" y="897896"/>
+            <a:ext cx="6444579" cy="564806"/>
           </a:xfrm>
           <a:prstGeom prst="roundRect">
             <a:avLst>
@@ -12283,8 +12283,8 @@
         </p:nvSpPr>
         <p:spPr>
           <a:xfrm>
-            <a:off x="1785729" y="883806"/>
-            <a:ext cx="5572542" cy="402678"/>
+            <a:off x="1465568" y="955825"/>
+            <a:ext cx="6212864" cy="448948"/>
           </a:xfrm>
           <a:prstGeom prst="rect">
             <a:avLst/>
@@ -12303,7 +12303,7 @@
               <a:buNone/>
             </a:pPr>
             <a:r>
-              <a:rPr lang="en-US" sz="820" b="1" dirty="0">
+              <a:rPr lang="en-US" sz="910" b="1" dirty="0">
                 <a:solidFill>
                   <a:srgbClr val="007F72"/>
                 </a:solidFill>
@@ -12313,7 +12313,7 @@
               </a:rPr>
               <a:t>Vì thế giới, xe cộ và hành vi trong các mô phỏng có sẵn đều được làm theo Âu Mỹ.</a:t>
             </a:r>
-            <a:endParaRPr lang="en-US" sz="820" dirty="0"/>
+            <a:endParaRPr lang="en-US" sz="910" dirty="0"/>
           </a:p>
           <a:p>
             <a:pPr indent="0" marL="0">
@@ -12323,7 +12323,7 @@
               <a:buNone/>
             </a:pPr>
             <a:r>
-              <a:rPr lang="en-US" sz="710" dirty="0">
+              <a:rPr lang="en-US" sz="790" dirty="0">
                 <a:solidFill>
                   <a:srgbClr val="007F72"/>
                 </a:solidFill>
@@ -12333,7 +12333,7 @@
               </a:rPr>
               <a:t>因為現成模擬器裡的世界、車輛、行為，都是照歐美做的。</a:t>
             </a:r>
-            <a:endParaRPr lang="en-US" sz="820" dirty="0"/>
+            <a:endParaRPr lang="en-US" sz="910" dirty="0"/>
           </a:p>
         </p:txBody>
       </p:sp>
@@ -12352,17 +12352,17 @@
           </p:nvPr>
         </p:nvGraphicFramePr>
         <p:xfrm>
-          <a:off x="1681812" y="1416380"/>
-          <a:ext cx="5780375" cy="914400"/>
+          <a:off x="1349711" y="1549595"/>
+          <a:ext cx="6444579" cy="724110"/>
         </p:xfrm>
         <a:graphic>
           <a:graphicData uri="http://schemas.openxmlformats.org/drawingml/2006/table">
             <a:tbl>
               <a:tblPr/>
               <a:tblGrid>
-                <a:gridCol w="974221"/>
-                <a:gridCol w="2403077"/>
-                <a:gridCol w="2403077"/>
+                <a:gridCol w="1371600"/>
+                <a:gridCol w="3383280"/>
+                <a:gridCol w="3383280"/>
               </a:tblGrid>
               <a:tr h="457200">
                 <a:tc>
@@ -12374,7 +12374,7 @@
                         <a:buNone/>
                       </a:pPr>
                       <a:r>
-                        <a:rPr lang="en-US" sz="1100" b="1" dirty="0">
+                        <a:rPr lang="en-US" sz="870" b="1" dirty="0">
                           <a:solidFill>
                             <a:srgbClr val="FFFFFF"/>
                           </a:solidFill>
@@ -12384,14 +12384,14 @@
                         </a:rPr>
                         <a:t>Loại</a:t>
                       </a:r>
-                      <a:endParaRPr lang="en-US" sz="1200" dirty="0"/>
+                      <a:endParaRPr lang="en-US" sz="950" dirty="0"/>
                     </a:p>
                     <a:p>
                       <a:pPr algn="l" indent="0" marL="0">
                         <a:buNone/>
                       </a:pPr>
                       <a:r>
-                        <a:rPr lang="en-US" sz="950" dirty="0">
+                        <a:rPr lang="en-US" sz="750" dirty="0">
                           <a:solidFill>
                             <a:srgbClr val="CFE0EC"/>
                           </a:solidFill>
@@ -12401,7 +12401,7 @@
                         </a:rPr>
                         <a:t>哪一種</a:t>
                       </a:r>
-                      <a:endParaRPr lang="en-US" sz="1200" dirty="0"/>
+                      <a:endParaRPr lang="en-US" sz="950" dirty="0"/>
                     </a:p>
                   </a:txBody>
                   <a:tcPr marL="63500" marR="63500" marT="38100" marB="38100" anchor="ctr">
@@ -12455,7 +12455,7 @@
                         <a:buNone/>
                       </a:pPr>
                       <a:r>
-                        <a:rPr lang="en-US" sz="1100" b="1" dirty="0">
+                        <a:rPr lang="en-US" sz="870" b="1" dirty="0">
                           <a:solidFill>
                             <a:srgbClr val="FFFFFF"/>
                           </a:solidFill>
@@ -12465,14 +12465,14 @@
                         </a:rPr>
                         <a:t>Ở Đài Loan</a:t>
                       </a:r>
-                      <a:endParaRPr lang="en-US" sz="1200" dirty="0"/>
+                      <a:endParaRPr lang="en-US" sz="950" dirty="0"/>
                     </a:p>
                     <a:p>
                       <a:pPr algn="l" indent="0" marL="0">
                         <a:buNone/>
                       </a:pPr>
                       <a:r>
-                        <a:rPr lang="en-US" sz="950" dirty="0">
+                        <a:rPr lang="en-US" sz="750" dirty="0">
                           <a:solidFill>
                             <a:srgbClr val="CFE0EC"/>
                           </a:solidFill>
@@ -12482,7 +12482,7 @@
                         </a:rPr>
                         <a:t>台灣</a:t>
                       </a:r>
-                      <a:endParaRPr lang="en-US" sz="1200" dirty="0"/>
+                      <a:endParaRPr lang="en-US" sz="950" dirty="0"/>
                     </a:p>
                   </a:txBody>
                   <a:tcPr marL="63500" marR="63500" marT="38100" marB="38100" anchor="ctr">
@@ -12536,7 +12536,7 @@
                         <a:buNone/>
                       </a:pPr>
                       <a:r>
-                        <a:rPr lang="en-US" sz="1100" b="1" dirty="0">
+                        <a:rPr lang="en-US" sz="870" b="1" dirty="0">
                           <a:solidFill>
                             <a:srgbClr val="FFFFFF"/>
                           </a:solidFill>
@@ -12546,14 +12546,14 @@
                         </a:rPr>
                         <a:t>Ở Việt Nam</a:t>
                       </a:r>
-                      <a:endParaRPr lang="en-US" sz="1200" dirty="0"/>
+                      <a:endParaRPr lang="en-US" sz="950" dirty="0"/>
                     </a:p>
                     <a:p>
                       <a:pPr algn="l" indent="0" marL="0">
                         <a:buNone/>
                       </a:pPr>
                       <a:r>
-                        <a:rPr lang="en-US" sz="950" dirty="0">
+                        <a:rPr lang="en-US" sz="750" dirty="0">
                           <a:solidFill>
                             <a:srgbClr val="CFE0EC"/>
                           </a:solidFill>
@@ -12563,7 +12563,7 @@
                         </a:rPr>
                         <a:t>越南</a:t>
                       </a:r>
-                      <a:endParaRPr lang="en-US" sz="1200" dirty="0"/>
+                      <a:endParaRPr lang="en-US" sz="950" dirty="0"/>
                     </a:p>
                   </a:txBody>
                   <a:tcPr marL="63500" marR="63500" marT="38100" marB="38100" anchor="ctr">
@@ -12619,7 +12619,7 @@
                         <a:buNone/>
                       </a:pPr>
                       <a:r>
-                        <a:rPr lang="en-US" sz="1100" b="1" dirty="0">
+                        <a:rPr lang="en-US" sz="870" b="1" dirty="0">
                           <a:solidFill>
                             <a:srgbClr val="0B1F3A"/>
                           </a:solidFill>
@@ -12629,14 +12629,14 @@
                         </a:rPr>
                         <a:t>Hình ảnh</a:t>
                       </a:r>
-                      <a:endParaRPr lang="en-US" sz="1200" dirty="0"/>
+                      <a:endParaRPr lang="en-US" sz="950" dirty="0"/>
                     </a:p>
                     <a:p>
                       <a:pPr algn="l" indent="0" marL="0">
                         <a:buNone/>
                       </a:pPr>
                       <a:r>
-                        <a:rPr lang="en-US" sz="950" dirty="0">
+                        <a:rPr lang="en-US" sz="750" dirty="0">
                           <a:solidFill>
                             <a:srgbClr val="5F7183"/>
                           </a:solidFill>
@@ -12646,7 +12646,7 @@
                         </a:rPr>
                         <a:t>外觀</a:t>
                       </a:r>
-                      <a:endParaRPr lang="en-US" sz="1200" dirty="0"/>
+                      <a:endParaRPr lang="en-US" sz="950" dirty="0"/>
                     </a:p>
                   </a:txBody>
                   <a:tcPr marL="63500" marR="63500" marT="38100" marB="38100" anchor="ctr">
@@ -12697,7 +12697,7 @@
                         <a:buNone/>
                       </a:pPr>
                       <a:r>
-                        <a:rPr lang="en-US" sz="1100" dirty="0">
+                        <a:rPr lang="en-US" sz="870" dirty="0">
                           <a:solidFill>
                             <a:srgbClr val="1A2733"/>
                           </a:solidFill>
@@ -12707,14 +12707,14 @@
                         </a:rPr>
                         <a:t>Mái hiên, biển hiệu chi chít, ô chờ rẽ trái của xe máy</a:t>
                       </a:r>
-                      <a:endParaRPr lang="en-US" sz="1200" dirty="0"/>
+                      <a:endParaRPr lang="en-US" sz="950" dirty="0"/>
                     </a:p>
                     <a:p>
                       <a:pPr algn="l" indent="0" marL="0">
                         <a:buNone/>
                       </a:pPr>
                       <a:r>
-                        <a:rPr lang="en-US" sz="950" dirty="0">
+                        <a:rPr lang="en-US" sz="750" dirty="0">
                           <a:solidFill>
                             <a:srgbClr val="5F7183"/>
                           </a:solidFill>
@@ -12724,7 +12724,7 @@
                         </a:rPr>
                         <a:t>騎樓、滿街招牌、機車待轉區</a:t>
                       </a:r>
-                      <a:endParaRPr lang="en-US" sz="1200" dirty="0"/>
+                      <a:endParaRPr lang="en-US" sz="950" dirty="0"/>
                     </a:p>
                   </a:txBody>
                   <a:tcPr marL="63500" marR="63500" marT="38100" marB="38100" anchor="ctr">
@@ -12775,7 +12775,7 @@
                         <a:buNone/>
                       </a:pPr>
                       <a:r>
-                        <a:rPr lang="en-US" sz="1100" dirty="0">
+                        <a:rPr lang="en-US" sz="870" dirty="0">
                           <a:solidFill>
                             <a:srgbClr val="1A2733"/>
                           </a:solidFill>
@@ -12785,14 +12785,14 @@
                         </a:rPr>
                         <a:t>Hàng quán vỉa hè, ngã tư không có vạch kẻ</a:t>
                       </a:r>
-                      <a:endParaRPr lang="en-US" sz="1200" dirty="0"/>
+                      <a:endParaRPr lang="en-US" sz="950" dirty="0"/>
                     </a:p>
                     <a:p>
                       <a:pPr algn="l" indent="0" marL="0">
                         <a:buNone/>
                       </a:pPr>
                       <a:r>
-                        <a:rPr lang="en-US" sz="950" dirty="0">
+                        <a:rPr lang="en-US" sz="750" dirty="0">
                           <a:solidFill>
                             <a:srgbClr val="5F7183"/>
                           </a:solidFill>
@@ -12802,7 +12802,7 @@
                         </a:rPr>
                         <a:t>路邊攤、沒有標線的路口</a:t>
                       </a:r>
-                      <a:endParaRPr lang="en-US" sz="1200" dirty="0"/>
+                      <a:endParaRPr lang="en-US" sz="950" dirty="0"/>
                     </a:p>
                   </a:txBody>
                   <a:tcPr marL="63500" marR="63500" marT="38100" marB="38100" anchor="ctr">
@@ -12855,7 +12855,7 @@
                         <a:buNone/>
                       </a:pPr>
                       <a:r>
-                        <a:rPr lang="en-US" sz="1100" b="1" dirty="0">
+                        <a:rPr lang="en-US" sz="870" b="1" dirty="0">
                           <a:solidFill>
                             <a:srgbClr val="0B1F3A"/>
                           </a:solidFill>
@@ -12865,14 +12865,14 @@
                         </a:rPr>
                         <a:t>Hành vi</a:t>
                       </a:r>
-                      <a:endParaRPr lang="en-US" sz="1200" dirty="0"/>
+                      <a:endParaRPr lang="en-US" sz="950" dirty="0"/>
                     </a:p>
                     <a:p>
                       <a:pPr algn="l" indent="0" marL="0">
                         <a:buNone/>
                       </a:pPr>
                       <a:r>
-                        <a:rPr lang="en-US" sz="950" dirty="0">
+                        <a:rPr lang="en-US" sz="750" dirty="0">
                           <a:solidFill>
                             <a:srgbClr val="5F7183"/>
                           </a:solidFill>
@@ -12882,7 +12882,7 @@
                         </a:rPr>
                         <a:t>行為</a:t>
                       </a:r>
-                      <a:endParaRPr lang="en-US" sz="1200" dirty="0"/>
+                      <a:endParaRPr lang="en-US" sz="950" dirty="0"/>
                     </a:p>
                   </a:txBody>
                   <a:tcPr marL="63500" marR="63500" marT="38100" marB="38100" anchor="ctr">
@@ -12933,7 +12933,7 @@
                         <a:buNone/>
                       </a:pPr>
                       <a:r>
-                        <a:rPr lang="en-US" sz="1100" dirty="0">
+                        <a:rPr lang="en-US" sz="870" dirty="0">
                           <a:solidFill>
                             <a:srgbClr val="1A2733"/>
                           </a:solidFill>
@@ -12943,14 +12943,14 @@
                         </a:rPr>
                         <a:t>Đèn xanh, hai mươi xe máy toả ra hình quạt</a:t>
                       </a:r>
-                      <a:endParaRPr lang="en-US" sz="1200" dirty="0"/>
+                      <a:endParaRPr lang="en-US" sz="950" dirty="0"/>
                     </a:p>
                     <a:p>
                       <a:pPr algn="l" indent="0" marL="0">
                         <a:buNone/>
                       </a:pPr>
                       <a:r>
-                        <a:rPr lang="en-US" sz="950" dirty="0">
+                        <a:rPr lang="en-US" sz="750" dirty="0">
                           <a:solidFill>
                             <a:srgbClr val="5F7183"/>
                           </a:solidFill>
@@ -12960,7 +12960,7 @@
                         </a:rPr>
                         <a:t>綠燈起步，二十台機車扇形散開</a:t>
                       </a:r>
-                      <a:endParaRPr lang="en-US" sz="1200" dirty="0"/>
+                      <a:endParaRPr lang="en-US" sz="950" dirty="0"/>
                     </a:p>
                   </a:txBody>
                   <a:tcPr marL="63500" marR="63500" marT="38100" marB="38100" anchor="ctr">
@@ -13011,7 +13011,7 @@
                         <a:buNone/>
                       </a:pPr>
                       <a:r>
-                        <a:rPr lang="en-US" sz="1100" dirty="0">
+                        <a:rPr lang="en-US" sz="870" dirty="0">
                           <a:solidFill>
                             <a:srgbClr val="1A2733"/>
                           </a:solidFill>
@@ -13021,14 +13021,14 @@
                         </a:rPr>
                         <a:t>Trong 5 m có 12 xe máy lách nhau; vòng xuyến đi bằng ánh mắt</a:t>
                       </a:r>
-                      <a:endParaRPr lang="en-US" sz="1200" dirty="0"/>
+                      <a:endParaRPr lang="en-US" sz="950" dirty="0"/>
                     </a:p>
                     <a:p>
                       <a:pPr algn="l" indent="0" marL="0">
                         <a:buNone/>
                       </a:pPr>
                       <a:r>
-                        <a:rPr lang="en-US" sz="950" dirty="0">
+                        <a:rPr lang="en-US" sz="750" dirty="0">
                           <a:solidFill>
                             <a:srgbClr val="5F7183"/>
                           </a:solidFill>
@@ -13038,7 +13038,7 @@
                         </a:rPr>
                         <a:t>五公尺內十二台機車互鑽；圓環靠眼神</a:t>
                       </a:r>
-                      <a:endParaRPr lang="en-US" sz="1200" dirty="0"/>
+                      <a:endParaRPr lang="en-US" sz="950" dirty="0"/>
                     </a:p>
                   </a:txBody>
                   <a:tcPr marL="63500" marR="63500" marT="38100" marB="38100" anchor="ctr">
@@ -13091,7 +13091,7 @@
                         <a:buNone/>
                       </a:pPr>
                       <a:r>
-                        <a:rPr lang="en-US" sz="1100" b="1" dirty="0">
+                        <a:rPr lang="en-US" sz="870" b="1" dirty="0">
                           <a:solidFill>
                             <a:srgbClr val="0B1F3A"/>
                           </a:solidFill>
@@ -13101,14 +13101,14 @@
                         </a:rPr>
                         <a:t>Vật lý</a:t>
                       </a:r>
-                      <a:endParaRPr lang="en-US" sz="1200" dirty="0"/>
+                      <a:endParaRPr lang="en-US" sz="950" dirty="0"/>
                     </a:p>
                     <a:p>
                       <a:pPr algn="l" indent="0" marL="0">
                         <a:buNone/>
                       </a:pPr>
                       <a:r>
-                        <a:rPr lang="en-US" sz="950" dirty="0">
+                        <a:rPr lang="en-US" sz="750" dirty="0">
                           <a:solidFill>
                             <a:srgbClr val="5F7183"/>
                           </a:solidFill>
@@ -13118,7 +13118,7 @@
                         </a:rPr>
                         <a:t>物理</a:t>
                       </a:r>
-                      <a:endParaRPr lang="en-US" sz="1200" dirty="0"/>
+                      <a:endParaRPr lang="en-US" sz="950" dirty="0"/>
                     </a:p>
                   </a:txBody>
                   <a:tcPr marL="63500" marR="63500" marT="38100" marB="38100" anchor="ctr">
@@ -13169,7 +13169,7 @@
                         <a:buNone/>
                       </a:pPr>
                       <a:r>
-                        <a:rPr lang="en-US" sz="1100" dirty="0">
+                        <a:rPr lang="en-US" sz="870" dirty="0">
                           <a:solidFill>
                             <a:srgbClr val="1A2733"/>
                           </a:solidFill>
@@ -13179,14 +13179,14 @@
                         </a:rPr>
                         <a:t>Mặt đường vá chằng chịt, nắp cống</a:t>
                       </a:r>
-                      <a:endParaRPr lang="en-US" sz="1200" dirty="0"/>
+                      <a:endParaRPr lang="en-US" sz="950" dirty="0"/>
                     </a:p>
                     <a:p>
                       <a:pPr algn="l" indent="0" marL="0">
                         <a:buNone/>
                       </a:pPr>
                       <a:r>
-                        <a:rPr lang="en-US" sz="950" dirty="0">
+                        <a:rPr lang="en-US" sz="750" dirty="0">
                           <a:solidFill>
                             <a:srgbClr val="5F7183"/>
                           </a:solidFill>
@@ -13196,7 +13196,7 @@
                         </a:rPr>
                         <a:t>補丁路面、人孔蓋</a:t>
                       </a:r>
-                      <a:endParaRPr lang="en-US" sz="1200" dirty="0"/>
+                      <a:endParaRPr lang="en-US" sz="950" dirty="0"/>
                     </a:p>
                   </a:txBody>
                   <a:tcPr marL="63500" marR="63500" marT="38100" marB="38100" anchor="ctr">
@@ -13247,7 +13247,7 @@
                         <a:buNone/>
                       </a:pPr>
                       <a:r>
-                        <a:rPr lang="en-US" sz="1100" dirty="0">
+                        <a:rPr lang="en-US" sz="870" dirty="0">
                           <a:solidFill>
                             <a:srgbClr val="1A2733"/>
                           </a:solidFill>
@@ -13257,14 +13257,14 @@
                         </a:rPr>
                         <a:t>Đường hỏng, ngập nước sâu nông khác nhau</a:t>
                       </a:r>
-                      <a:endParaRPr lang="en-US" sz="1200" dirty="0"/>
+                      <a:endParaRPr lang="en-US" sz="950" dirty="0"/>
                     </a:p>
                     <a:p>
                       <a:pPr algn="l" indent="0" marL="0">
                         <a:buNone/>
                       </a:pPr>
                       <a:r>
-                        <a:rPr lang="en-US" sz="950" dirty="0">
+                        <a:rPr lang="en-US" sz="750" dirty="0">
                           <a:solidFill>
                             <a:srgbClr val="5F7183"/>
                           </a:solidFill>
@@ -13274,7 +13274,7 @@
                         </a:rPr>
                         <a:t>破損路面、深淺不一的積水</a:t>
                       </a:r>
-                      <a:endParaRPr lang="en-US" sz="1200" dirty="0"/>
+                      <a:endParaRPr lang="en-US" sz="950" dirty="0"/>
                     </a:p>
                   </a:txBody>
                   <a:tcPr marL="63500" marR="63500" marT="38100" marB="38100" anchor="ctr">
@@ -13329,8 +13329,8 @@
         </p:nvSpPr>
         <p:spPr>
           <a:xfrm>
-            <a:off x="1681812" y="2931125"/>
-            <a:ext cx="5780375" cy="324740"/>
+            <a:off x="1349711" y="3238395"/>
+            <a:ext cx="6444579" cy="362055"/>
           </a:xfrm>
           <a:prstGeom prst="rect">
             <a:avLst/>
@@ -13349,7 +13349,7 @@
               <a:buNone/>
             </a:pPr>
             <a:r>
-              <a:rPr lang="en-US" sz="850" b="1" dirty="0">
+              <a:rPr lang="en-US" sz="950" b="1" dirty="0">
                 <a:solidFill>
                   <a:srgbClr val="007F72"/>
                 </a:solidFill>
@@ -13359,7 +13359,7 @@
               </a:rPr>
               <a:t>Mô hình hành vi giao thông Đài Loan / Việt Nam: dữ liệu đó chỉ các bạn thu được.</a:t>
             </a:r>
-            <a:endParaRPr lang="en-US" sz="850" dirty="0"/>
+            <a:endParaRPr lang="en-US" sz="950" dirty="0"/>
           </a:p>
           <a:p>
             <a:pPr indent="0" marL="0">
@@ -13369,7 +13369,7 @@
               <a:buNone/>
             </a:pPr>
             <a:r>
-              <a:rPr lang="en-US" sz="780" dirty="0">
+              <a:rPr lang="en-US" sz="870" dirty="0">
                 <a:solidFill>
                   <a:srgbClr val="007F72"/>
                 </a:solidFill>
@@ -13379,7 +13379,7 @@
               </a:rPr>
               <a:t>台灣或越南的交通行為模型：那份資料只有各位收得到。</a:t>
             </a:r>
-            <a:endParaRPr lang="en-US" sz="850" dirty="0"/>
+            <a:endParaRPr lang="en-US" sz="950" dirty="0"/>
           </a:p>
         </p:txBody>
       </p:sp>
@@ -13399,8 +13399,8 @@
         </p:blipFill>
         <p:spPr>
           <a:xfrm>
-            <a:off x="6663327" y="3338842"/>
-            <a:ext cx="779376" cy="172200"/>
+            <a:off x="7882128" y="109728"/>
+            <a:ext cx="1097280" cy="242439"/>
           </a:xfrm>
           <a:prstGeom prst="rect">
             <a:avLst/>
@@ -13415,8 +13415,8 @@
         </p:nvSpPr>
         <p:spPr>
           <a:xfrm>
-            <a:off x="1402536" y="3390800"/>
-            <a:ext cx="584532" cy="181855"/>
+            <a:off x="1038343" y="101375"/>
+            <a:ext cx="651699" cy="202751"/>
           </a:xfrm>
           <a:prstGeom prst="rect">
             <a:avLst/>
@@ -13432,7 +13432,7 @@
               <a:buNone/>
             </a:pPr>
             <a:r>
-              <a:rPr lang="en-US" sz="640" dirty="0">
+              <a:rPr lang="en-US" sz="710" dirty="0">
                 <a:solidFill>
                   <a:srgbClr val="5F7183"/>
                 </a:solidFill>
@@ -13442,7 +13442,7 @@
               </a:rPr>
               <a:t>16 / 18</a:t>
             </a:r>
-            <a:endParaRPr lang="en-US" sz="640" dirty="0"/>
+            <a:endParaRPr lang="en-US" sz="710" dirty="0"/>
           </a:p>
         </p:txBody>
       </p:sp>
@@ -13454,8 +13454,8 @@
         </p:nvSpPr>
         <p:spPr>
           <a:xfrm>
-            <a:off x="2006553" y="3390800"/>
-            <a:ext cx="1428857" cy="181855"/>
+            <a:off x="1711766" y="101375"/>
+            <a:ext cx="1593042" cy="202751"/>
           </a:xfrm>
           <a:prstGeom prst="rect">
             <a:avLst/>
@@ -13471,7 +13471,7 @@
               <a:buNone/>
             </a:pPr>
             <a:r>
-              <a:rPr lang="en-US" sz="640" dirty="0">
+              <a:rPr lang="en-US" sz="710" dirty="0">
                 <a:solidFill>
                   <a:srgbClr val="5F7183"/>
                 </a:solidFill>
@@ -13481,7 +13481,7 @@
               </a:rPr>
               <a:t>Tiết 1 · 第 1 節</a:t>
             </a:r>
-            <a:endParaRPr lang="en-US" sz="640" dirty="0"/>
+            <a:endParaRPr lang="en-US" sz="710" dirty="0"/>
           </a:p>
         </p:txBody>
       </p:sp>
@@ -13511,8 +13511,8 @@
       </p:nvGrpSpPr>
       <p:grpSpPr>
         <a:xfrm>
-          <a:off x="0" y="0"/>
-          <a:ext cx="0" cy="0"/>
+          <a:off x="925172" y="0"/>
+          <a:ext cx="1" cy="1"/>
           <a:chOff x="0" y="0"/>
           <a:chExt cx="0" cy="0"/>
         </a:xfrm>
@@ -13525,8 +13525,8 @@
         </p:nvSpPr>
         <p:spPr>
           <a:xfrm>
-            <a:off x="6130753" y="-947729"/>
-            <a:ext cx="2987610" cy="2987610"/>
+            <a:off x="6322478" y="-1094048"/>
+            <a:ext cx="3355082" cy="3355082"/>
           </a:xfrm>
           <a:prstGeom prst="ellipse">
             <a:avLst/>
@@ -13550,8 +13550,8 @@
         </p:nvSpPr>
         <p:spPr>
           <a:xfrm>
-            <a:off x="7104973" y="1520297"/>
-            <a:ext cx="1688649" cy="1688649"/>
+            <a:off x="7416526" y="1677541"/>
+            <a:ext cx="1896351" cy="1896351"/>
           </a:xfrm>
           <a:prstGeom prst="ellipse">
             <a:avLst/>
@@ -13572,8 +13572,8 @@
         </p:nvSpPr>
         <p:spPr>
           <a:xfrm>
-            <a:off x="1681812" y="364222"/>
-            <a:ext cx="4806155" cy="194844"/>
+            <a:off x="1326323" y="379270"/>
+            <a:ext cx="5397306" cy="218810"/>
           </a:xfrm>
           <a:prstGeom prst="rect">
             <a:avLst/>
@@ -13589,7 +13589,7 @@
               <a:buNone/>
             </a:pPr>
             <a:r>
-              <a:rPr lang="en-US" sz="890" b="1" dirty="0">
+              <a:rPr lang="en-US" sz="1000" b="1" dirty="0">
                 <a:solidFill>
                   <a:srgbClr val="FFB020"/>
                 </a:solidFill>
@@ -13599,7 +13599,7 @@
               </a:rPr>
               <a:t>Thảo luận · 討論（上週的回家作業）</a:t>
             </a:r>
-            <a:endParaRPr lang="en-US" sz="890" dirty="0"/>
+            <a:endParaRPr lang="en-US" sz="1000" dirty="0"/>
           </a:p>
         </p:txBody>
       </p:sp>
@@ -13611,8 +13611,8 @@
         </p:nvSpPr>
         <p:spPr>
           <a:xfrm>
-            <a:off x="1681812" y="585045"/>
-            <a:ext cx="5715427" cy="870304"/>
+            <a:off x="1326323" y="627254"/>
+            <a:ext cx="6418418" cy="977350"/>
           </a:xfrm>
           <a:prstGeom prst="rect">
             <a:avLst/>
@@ -13631,7 +13631,7 @@
               <a:buNone/>
             </a:pPr>
             <a:r>
-              <a:rPr lang="en-US" sz="1630" b="1" dirty="0">
+              <a:rPr lang="en-US" sz="1830" b="1" dirty="0">
                 <a:solidFill>
                   <a:srgbClr val="FFFFFF"/>
                 </a:solidFill>
@@ -13641,7 +13641,7 @@
               </a:rPr>
               <a:t>Kể một chuyện bạn gặp hằng ngày trên đường, mà trong mô phỏng chắc chắn không có.</a:t>
             </a:r>
-            <a:endParaRPr lang="en-US" sz="1630" dirty="0"/>
+            <a:endParaRPr lang="en-US" sz="1830" dirty="0"/>
           </a:p>
           <a:p>
             <a:pPr indent="0" marL="0">
@@ -13651,7 +13651,7 @@
               <a:buNone/>
             </a:pPr>
             <a:r>
-              <a:rPr lang="en-US" sz="1070" dirty="0">
+              <a:rPr lang="en-US" sz="1200" dirty="0">
                 <a:solidFill>
                   <a:srgbClr val="AFC3D4"/>
                 </a:solidFill>
@@ -13661,7 +13661,7 @@
               </a:rPr>
               <a:t>講一件你每天在路上會遇到、但模擬裡一定不會出現的事。</a:t>
             </a:r>
-            <a:endParaRPr lang="en-US" sz="1630" dirty="0"/>
+            <a:endParaRPr lang="en-US" sz="1830" dirty="0"/>
           </a:p>
         </p:txBody>
       </p:sp>
@@ -13673,8 +13673,8 @@
         </p:nvSpPr>
         <p:spPr>
           <a:xfrm>
-            <a:off x="1681812" y="1362092"/>
-            <a:ext cx="5780375" cy="441647"/>
+            <a:off x="1326323" y="1499877"/>
+            <a:ext cx="6491354" cy="495969"/>
           </a:xfrm>
           <a:prstGeom prst="roundRect">
             <a:avLst>
@@ -13695,8 +13695,8 @@
         </p:nvSpPr>
         <p:spPr>
           <a:xfrm>
-            <a:off x="1798719" y="1466008"/>
-            <a:ext cx="233813" cy="233813"/>
+            <a:off x="1457609" y="1616575"/>
+            <a:ext cx="262572" cy="262572"/>
           </a:xfrm>
           <a:prstGeom prst="ellipse">
             <a:avLst/>
@@ -13715,8 +13715,8 @@
         </p:nvSpPr>
         <p:spPr>
           <a:xfrm>
-            <a:off x="1798719" y="1485493"/>
-            <a:ext cx="233813" cy="194844"/>
+            <a:off x="1457609" y="1638456"/>
+            <a:ext cx="262572" cy="218810"/>
           </a:xfrm>
           <a:prstGeom prst="rect">
             <a:avLst/>
@@ -13732,7 +13732,7 @@
               <a:buNone/>
             </a:pPr>
             <a:r>
-              <a:rPr lang="en-US" sz="850" b="1" dirty="0">
+              <a:rPr lang="en-US" sz="960" b="1" dirty="0">
                 <a:solidFill>
                   <a:srgbClr val="FFFFFF"/>
                 </a:solidFill>
@@ -13742,7 +13742,7 @@
               </a:rPr>
               <a:t>1</a:t>
             </a:r>
-            <a:endParaRPr lang="en-US" sz="850" dirty="0"/>
+            <a:endParaRPr lang="en-US" sz="960" dirty="0"/>
           </a:p>
         </p:txBody>
       </p:sp>
@@ -13754,8 +13754,8 @@
         </p:nvSpPr>
         <p:spPr>
           <a:xfrm>
-            <a:off x="2149438" y="1394566"/>
-            <a:ext cx="5182853" cy="389688"/>
+            <a:off x="1851466" y="1536345"/>
+            <a:ext cx="5820338" cy="437619"/>
           </a:xfrm>
           <a:prstGeom prst="rect">
             <a:avLst/>
@@ -13774,7 +13774,7 @@
               <a:buNone/>
             </a:pPr>
             <a:r>
-              <a:rPr lang="en-US" sz="890" b="1" dirty="0">
+              <a:rPr lang="en-US" sz="1000" b="1" dirty="0">
                 <a:solidFill>
                   <a:srgbClr val="FFFFFF"/>
                 </a:solidFill>
@@ -13784,7 +13784,7 @@
               </a:rPr>
               <a:t>Mỗi nhóm một chuyện. Nói cụ thể, đừng nói chung chung.</a:t>
             </a:r>
-            <a:endParaRPr lang="en-US" sz="890" dirty="0"/>
+            <a:endParaRPr lang="en-US" sz="1000" dirty="0"/>
           </a:p>
           <a:p>
             <a:pPr indent="0" marL="0">
@@ -13794,7 +13794,7 @@
               <a:buNone/>
             </a:pPr>
             <a:r>
-              <a:rPr lang="en-US" sz="820" dirty="0">
+              <a:rPr lang="en-US" sz="920" dirty="0">
                 <a:solidFill>
                   <a:srgbClr val="AFC3D4"/>
                 </a:solidFill>
@@ -13804,7 +13804,7 @@
               </a:rPr>
               <a:t>每組講一件。要講具體的，不要講「交通很亂」這種。</a:t>
             </a:r>
-            <a:endParaRPr lang="en-US" sz="890" dirty="0"/>
+            <a:endParaRPr lang="en-US" sz="1000" dirty="0"/>
           </a:p>
         </p:txBody>
       </p:sp>
@@ -13816,8 +13816,8 @@
         </p:nvSpPr>
         <p:spPr>
           <a:xfrm>
-            <a:off x="1681812" y="1868686"/>
-            <a:ext cx="5780375" cy="441647"/>
+            <a:off x="1326323" y="2068782"/>
+            <a:ext cx="6491354" cy="495969"/>
           </a:xfrm>
           <a:prstGeom prst="roundRect">
             <a:avLst>
@@ -13838,8 +13838,8 @@
         </p:nvSpPr>
         <p:spPr>
           <a:xfrm>
-            <a:off x="1798719" y="1972603"/>
-            <a:ext cx="233813" cy="233813"/>
+            <a:off x="1457609" y="2185481"/>
+            <a:ext cx="262572" cy="262572"/>
           </a:xfrm>
           <a:prstGeom prst="ellipse">
             <a:avLst/>
@@ -13858,8 +13858,8 @@
         </p:nvSpPr>
         <p:spPr>
           <a:xfrm>
-            <a:off x="1798719" y="1992087"/>
-            <a:ext cx="233813" cy="194844"/>
+            <a:off x="1457609" y="2207362"/>
+            <a:ext cx="262572" cy="218810"/>
           </a:xfrm>
           <a:prstGeom prst="rect">
             <a:avLst/>
@@ -13875,7 +13875,7 @@
               <a:buNone/>
             </a:pPr>
             <a:r>
-              <a:rPr lang="en-US" sz="850" b="1" dirty="0">
+              <a:rPr lang="en-US" sz="960" b="1" dirty="0">
                 <a:solidFill>
                   <a:srgbClr val="FFFFFF"/>
                 </a:solidFill>
@@ -13885,7 +13885,7 @@
               </a:rPr>
               <a:t>2</a:t>
             </a:r>
-            <a:endParaRPr lang="en-US" sz="850" dirty="0"/>
+            <a:endParaRPr lang="en-US" sz="960" dirty="0"/>
           </a:p>
         </p:txBody>
       </p:sp>
@@ -13897,8 +13897,8 @@
         </p:nvSpPr>
         <p:spPr>
           <a:xfrm>
-            <a:off x="2149438" y="1901160"/>
-            <a:ext cx="5182853" cy="389688"/>
+            <a:off x="1851466" y="2105250"/>
+            <a:ext cx="5820338" cy="437619"/>
           </a:xfrm>
           <a:prstGeom prst="rect">
             <a:avLst/>
@@ -13917,7 +13917,7 @@
               <a:buNone/>
             </a:pPr>
             <a:r>
-              <a:rPr lang="en-US" sz="890" b="1" dirty="0">
+              <a:rPr lang="en-US" sz="1000" b="1" dirty="0">
                 <a:solidFill>
                   <a:srgbClr val="FFFFFF"/>
                 </a:solidFill>
@@ -13927,7 +13927,7 @@
               </a:rPr>
               <a:t>Thầy sẽ xếp vào ba cột trên bảng: hình ảnh · hành vi · vật lý</a:t>
             </a:r>
-            <a:endParaRPr lang="en-US" sz="890" dirty="0"/>
+            <a:endParaRPr lang="en-US" sz="1000" dirty="0"/>
           </a:p>
           <a:p>
             <a:pPr indent="0" marL="0">
@@ -13937,7 +13937,7 @@
               <a:buNone/>
             </a:pPr>
             <a:r>
-              <a:rPr lang="en-US" sz="820" dirty="0">
+              <a:rPr lang="en-US" sz="920" dirty="0">
                 <a:solidFill>
                   <a:srgbClr val="AFC3D4"/>
                 </a:solidFill>
@@ -13947,7 +13947,7 @@
               </a:rPr>
               <a:t>老師把它寫到白板的三欄裡：外觀・行為・物理</a:t>
             </a:r>
-            <a:endParaRPr lang="en-US" sz="890" dirty="0"/>
+            <a:endParaRPr lang="en-US" sz="1000" dirty="0"/>
           </a:p>
         </p:txBody>
       </p:sp>
@@ -13959,8 +13959,8 @@
         </p:nvSpPr>
         <p:spPr>
           <a:xfrm>
-            <a:off x="1681812" y="2375281"/>
-            <a:ext cx="5780375" cy="441647"/>
+            <a:off x="1326323" y="2637687"/>
+            <a:ext cx="6491354" cy="495969"/>
           </a:xfrm>
           <a:prstGeom prst="roundRect">
             <a:avLst>
@@ -13981,8 +13981,8 @@
         </p:nvSpPr>
         <p:spPr>
           <a:xfrm>
-            <a:off x="1798719" y="2479198"/>
-            <a:ext cx="233813" cy="233813"/>
+            <a:off x="1457609" y="2754386"/>
+            <a:ext cx="262572" cy="262572"/>
           </a:xfrm>
           <a:prstGeom prst="ellipse">
             <a:avLst/>
@@ -14001,8 +14001,8 @@
         </p:nvSpPr>
         <p:spPr>
           <a:xfrm>
-            <a:off x="1798719" y="2498682"/>
-            <a:ext cx="233813" cy="194844"/>
+            <a:off x="1457609" y="2776267"/>
+            <a:ext cx="262572" cy="218810"/>
           </a:xfrm>
           <a:prstGeom prst="rect">
             <a:avLst/>
@@ -14018,7 +14018,7 @@
               <a:buNone/>
             </a:pPr>
             <a:r>
-              <a:rPr lang="en-US" sz="850" b="1" dirty="0">
+              <a:rPr lang="en-US" sz="960" b="1" dirty="0">
                 <a:solidFill>
                   <a:srgbClr val="FFFFFF"/>
                 </a:solidFill>
@@ -14028,7 +14028,7 @@
               </a:rPr>
               <a:t>3</a:t>
             </a:r>
-            <a:endParaRPr lang="en-US" sz="850" dirty="0"/>
+            <a:endParaRPr lang="en-US" sz="960" dirty="0"/>
           </a:p>
         </p:txBody>
       </p:sp>
@@ -14040,8 +14040,8 @@
         </p:nvSpPr>
         <p:spPr>
           <a:xfrm>
-            <a:off x="2149438" y="2407755"/>
-            <a:ext cx="5182853" cy="389688"/>
+            <a:off x="1851466" y="2674156"/>
+            <a:ext cx="5820338" cy="437619"/>
           </a:xfrm>
           <a:prstGeom prst="rect">
             <a:avLst/>
@@ -14060,7 +14060,7 @@
               <a:buNone/>
             </a:pPr>
             <a:r>
-              <a:rPr lang="en-US" sz="890" b="1" dirty="0">
+              <a:rPr lang="en-US" sz="1000" b="1" dirty="0">
                 <a:solidFill>
                   <a:srgbClr val="FFFFFF"/>
                 </a:solidFill>
@@ -14070,7 +14070,7 @@
               </a:rPr>
               <a:t>Cột nào sẽ đầy nhất? Đoán thử trước khi bắt đầu.</a:t>
             </a:r>
-            <a:endParaRPr lang="en-US" sz="890" dirty="0"/>
+            <a:endParaRPr lang="en-US" sz="1000" dirty="0"/>
           </a:p>
           <a:p>
             <a:pPr indent="0" marL="0">
@@ -14080,7 +14080,7 @@
               <a:buNone/>
             </a:pPr>
             <a:r>
-              <a:rPr lang="en-US" sz="820" dirty="0">
+              <a:rPr lang="en-US" sz="920" dirty="0">
                 <a:solidFill>
                   <a:srgbClr val="AFC3D4"/>
                 </a:solidFill>
@@ -14090,7 +14090,7 @@
               </a:rPr>
               <a:t>猜猜看哪一欄會最滿？先猜再開始。</a:t>
             </a:r>
-            <a:endParaRPr lang="en-US" sz="890" dirty="0"/>
+            <a:endParaRPr lang="en-US" sz="1000" dirty="0"/>
           </a:p>
         </p:txBody>
       </p:sp>
@@ -14102,8 +14102,8 @@
         </p:nvSpPr>
         <p:spPr>
           <a:xfrm>
-            <a:off x="1681812" y="2907855"/>
-            <a:ext cx="5715427" cy="324740"/>
+            <a:off x="1326323" y="3235767"/>
+            <a:ext cx="6418418" cy="364683"/>
           </a:xfrm>
           <a:prstGeom prst="rect">
             <a:avLst/>
@@ -14122,7 +14122,7 @@
               <a:buNone/>
             </a:pPr>
             <a:r>
-              <a:rPr lang="en-US" sz="890" b="1" dirty="0">
+              <a:rPr lang="en-US" sz="1000" b="1" dirty="0">
                 <a:solidFill>
                   <a:srgbClr val="FFB020"/>
                 </a:solidFill>
@@ -14132,7 +14132,7 @@
               </a:rPr>
               <a:t>Giữ lại bảng này — làm đề tài cuối kỳ sẽ dùng đến.</a:t>
             </a:r>
-            <a:endParaRPr lang="en-US" sz="890" dirty="0"/>
+            <a:endParaRPr lang="en-US" sz="1000" dirty="0"/>
           </a:p>
           <a:p>
             <a:pPr indent="0" marL="0">
@@ -14142,7 +14142,7 @@
               <a:buNone/>
             </a:pPr>
             <a:r>
-              <a:rPr lang="en-US" sz="820" dirty="0">
+              <a:rPr lang="en-US" sz="920" dirty="0">
                 <a:solidFill>
                   <a:srgbClr val="FFB020"/>
                 </a:solidFill>
@@ -14152,7 +14152,7 @@
               </a:rPr>
               <a:t>這張白板留著，期末專題選題會用到。</a:t>
             </a:r>
-            <a:endParaRPr lang="en-US" sz="890" dirty="0"/>
+            <a:endParaRPr lang="en-US" sz="1000" dirty="0"/>
           </a:p>
         </p:txBody>
       </p:sp>
@@ -14164,8 +14164,8 @@
         </p:nvSpPr>
         <p:spPr>
           <a:xfrm>
-            <a:off x="1402536" y="3390800"/>
-            <a:ext cx="584532" cy="181855"/>
+            <a:off x="1012696" y="102111"/>
+            <a:ext cx="656429" cy="204222"/>
           </a:xfrm>
           <a:prstGeom prst="rect">
             <a:avLst/>
@@ -14181,7 +14181,7 @@
               <a:buNone/>
             </a:pPr>
             <a:r>
-              <a:rPr lang="en-US" sz="640" dirty="0">
+              <a:rPr lang="en-US" sz="720" dirty="0">
                 <a:solidFill>
                   <a:srgbClr val="9FB3C8"/>
                 </a:solidFill>
@@ -14191,7 +14191,7 @@
               </a:rPr>
               <a:t>17 / 18</a:t>
             </a:r>
-            <a:endParaRPr lang="en-US" sz="640" dirty="0"/>
+            <a:endParaRPr lang="en-US" sz="720" dirty="0"/>
           </a:p>
         </p:txBody>
       </p:sp>
@@ -14203,8 +14203,8 @@
         </p:nvSpPr>
         <p:spPr>
           <a:xfrm>
-            <a:off x="2006553" y="3390800"/>
-            <a:ext cx="1428857" cy="181855"/>
+            <a:off x="1691006" y="102111"/>
+            <a:ext cx="1604604" cy="204222"/>
           </a:xfrm>
           <a:prstGeom prst="rect">
             <a:avLst/>
@@ -14220,7 +14220,7 @@
               <a:buNone/>
             </a:pPr>
             <a:r>
-              <a:rPr lang="en-US" sz="640" dirty="0">
+              <a:rPr lang="en-US" sz="720" dirty="0">
                 <a:solidFill>
                   <a:srgbClr val="9FB3C8"/>
                 </a:solidFill>
@@ -14230,7 +14230,7 @@
               </a:rPr>
               <a:t>Tiết 1 · 第 1 節</a:t>
             </a:r>
-            <a:endParaRPr lang="en-US" sz="640" dirty="0"/>
+            <a:endParaRPr lang="en-US" sz="720" dirty="0"/>
           </a:p>
         </p:txBody>
       </p:sp>
@@ -14260,8 +14260,8 @@
       </p:nvGrpSpPr>
       <p:grpSpPr>
         <a:xfrm>
-          <a:off x="0" y="0"/>
-          <a:ext cx="0" cy="0"/>
+          <a:off x="898071" y="0"/>
+          <a:ext cx="1" cy="1"/>
           <a:chOff x="0" y="0"/>
           <a:chExt cx="0" cy="0"/>
         </a:xfrm>
@@ -14274,8 +14274,8 @@
         </p:nvSpPr>
         <p:spPr>
           <a:xfrm>
-            <a:off x="6130753" y="-947729"/>
-            <a:ext cx="2987610" cy="2987610"/>
+            <a:off x="6335486" y="-1102179"/>
+            <a:ext cx="3380014" cy="3380014"/>
           </a:xfrm>
           <a:prstGeom prst="ellipse">
             <a:avLst/>
@@ -14299,8 +14299,8 @@
         </p:nvSpPr>
         <p:spPr>
           <a:xfrm>
-            <a:off x="7104973" y="1520297"/>
-            <a:ext cx="1688649" cy="1688649"/>
+            <a:off x="7437664" y="1690007"/>
+            <a:ext cx="1910443" cy="1910443"/>
           </a:xfrm>
           <a:prstGeom prst="ellipse">
             <a:avLst/>
@@ -14321,8 +14321,8 @@
         </p:nvSpPr>
         <p:spPr>
           <a:xfrm>
-            <a:off x="1681812" y="364222"/>
-            <a:ext cx="4806155" cy="194844"/>
+            <a:off x="1302204" y="382089"/>
+            <a:ext cx="5437414" cy="220436"/>
           </a:xfrm>
           <a:prstGeom prst="rect">
             <a:avLst/>
@@ -14338,7 +14338,7 @@
               <a:buNone/>
             </a:pPr>
             <a:r>
-              <a:rPr lang="en-US" sz="890" b="1" dirty="0">
+              <a:rPr lang="en-US" sz="1000" b="1" dirty="0">
                 <a:solidFill>
                   <a:srgbClr val="FFB020"/>
                 </a:solidFill>
@@ -14348,7 +14348,7 @@
               </a:rPr>
               <a:t>Tiết 1 · 第一節小結</a:t>
             </a:r>
-            <a:endParaRPr lang="en-US" sz="890" dirty="0"/>
+            <a:endParaRPr lang="en-US" sz="1000" dirty="0"/>
           </a:p>
         </p:txBody>
       </p:sp>
@@ -14360,8 +14360,8 @@
         </p:nvSpPr>
         <p:spPr>
           <a:xfrm>
-            <a:off x="1681812" y="611024"/>
-            <a:ext cx="5715427" cy="753397"/>
+            <a:off x="1302204" y="661307"/>
+            <a:ext cx="6466114" cy="852351"/>
           </a:xfrm>
           <a:prstGeom prst="rect">
             <a:avLst/>
@@ -14380,7 +14380,7 @@
               <a:buNone/>
             </a:pPr>
             <a:r>
-              <a:rPr lang="en-US" sz="1780" b="1" dirty="0">
+              <a:rPr lang="en-US" sz="2010" b="1" dirty="0">
                 <a:solidFill>
                   <a:srgbClr val="FFFFFF"/>
                 </a:solidFill>
@@ -14390,7 +14390,7 @@
               </a:rPr>
               <a:t>Mang ba câu này sang tiết 2</a:t>
             </a:r>
-            <a:endParaRPr lang="en-US" sz="1780" dirty="0"/>
+            <a:endParaRPr lang="en-US" sz="2010" dirty="0"/>
           </a:p>
           <a:p>
             <a:pPr indent="0" marL="0">
@@ -14400,7 +14400,7 @@
               <a:buNone/>
             </a:pPr>
             <a:r>
-              <a:rPr lang="en-US" sz="1070" dirty="0">
+              <a:rPr lang="en-US" sz="1210" dirty="0">
                 <a:solidFill>
                   <a:srgbClr val="AFC3D4"/>
                 </a:solidFill>
@@ -14410,7 +14410,7 @@
               </a:rPr>
               <a:t>帶三句話進第二節</a:t>
             </a:r>
-            <a:endParaRPr lang="en-US" sz="1780" dirty="0"/>
+            <a:endParaRPr lang="en-US" sz="2010" dirty="0"/>
           </a:p>
         </p:txBody>
       </p:sp>
@@ -14422,8 +14422,8 @@
         </p:nvSpPr>
         <p:spPr>
           <a:xfrm>
-            <a:off x="1681812" y="1429370"/>
-            <a:ext cx="32474" cy="477815"/>
+            <a:off x="1302204" y="1587137"/>
+            <a:ext cx="36739" cy="540573"/>
           </a:xfrm>
           <a:prstGeom prst="rect">
             <a:avLst/>
@@ -14442,8 +14442,8 @@
         </p:nvSpPr>
         <p:spPr>
           <a:xfrm>
-            <a:off x="1837688" y="1403390"/>
-            <a:ext cx="5585531" cy="555752"/>
+            <a:off x="1478552" y="1557746"/>
+            <a:ext cx="6319157" cy="628747"/>
           </a:xfrm>
           <a:prstGeom prst="rect">
             <a:avLst/>
@@ -14462,7 +14462,7 @@
               <a:buNone/>
             </a:pPr>
             <a:r>
-              <a:rPr lang="en-US" sz="960" b="1" dirty="0">
+              <a:rPr lang="en-US" sz="1080" b="1" dirty="0">
                 <a:solidFill>
                   <a:srgbClr val="FFFFFF"/>
                 </a:solidFill>
@@ -14472,7 +14472,7 @@
               </a:rPr>
               <a:t>Ba thanh trượt = ba thông số: số tia là độ phân giải, chiều dài là tầm đo, góc quét là góc nhìn.</a:t>
             </a:r>
-            <a:endParaRPr lang="en-US" sz="960" dirty="0"/>
+            <a:endParaRPr lang="en-US" sz="1080" dirty="0"/>
           </a:p>
           <a:p>
             <a:pPr indent="0" marL="0">
@@ -14482,7 +14482,7 @@
               <a:buNone/>
             </a:pPr>
             <a:r>
-              <a:rPr lang="en-US" sz="850" dirty="0">
+              <a:rPr lang="en-US" sz="960" dirty="0">
                 <a:solidFill>
                   <a:srgbClr val="AFC3D4"/>
                 </a:solidFill>
@@ -14492,7 +14492,7 @@
               </a:rPr>
               <a:t>三個滑桿就是三個規格：射線數是解析度、長度是測距、張角是視野。</a:t>
             </a:r>
-            <a:endParaRPr lang="en-US" sz="960" dirty="0"/>
+            <a:endParaRPr lang="en-US" sz="1080" dirty="0"/>
           </a:p>
         </p:txBody>
       </p:sp>
@@ -14504,8 +14504,8 @@
         </p:nvSpPr>
         <p:spPr>
           <a:xfrm>
-            <a:off x="1681812" y="2050070"/>
-            <a:ext cx="32474" cy="477815"/>
+            <a:off x="1302204" y="2289363"/>
+            <a:ext cx="36739" cy="540573"/>
           </a:xfrm>
           <a:prstGeom prst="rect">
             <a:avLst/>
@@ -14524,8 +14524,8 @@
         </p:nvSpPr>
         <p:spPr>
           <a:xfrm>
-            <a:off x="1837688" y="2024091"/>
-            <a:ext cx="5585531" cy="555752"/>
+            <a:off x="1478552" y="2259972"/>
+            <a:ext cx="6319157" cy="628747"/>
           </a:xfrm>
           <a:prstGeom prst="rect">
             <a:avLst/>
@@ -14544,7 +14544,7 @@
               <a:buNone/>
             </a:pPr>
             <a:r>
-              <a:rPr lang="en-US" sz="960" b="1" dirty="0">
+              <a:rPr lang="en-US" sz="1080" b="1" dirty="0">
                 <a:solidFill>
                   <a:srgbClr val="FFFFFF"/>
                 </a:solidFill>
@@ -14554,7 +14554,7 @@
               </a:rPr>
               <a:t>Quãng đường phanh quyết định tia phải dài bao nhiêu — 50 km/h thì ít nhất 25 m. Đây là giới hạn cứng.</a:t>
             </a:r>
-            <a:endParaRPr lang="en-US" sz="960" dirty="0"/>
+            <a:endParaRPr lang="en-US" sz="1080" dirty="0"/>
           </a:p>
           <a:p>
             <a:pPr indent="0" marL="0">
@@ -14564,7 +14564,7 @@
               <a:buNone/>
             </a:pPr>
             <a:r>
-              <a:rPr lang="en-US" sz="850" dirty="0">
+              <a:rPr lang="en-US" sz="960" dirty="0">
                 <a:solidFill>
                   <a:srgbClr val="AFC3D4"/>
                 </a:solidFill>
@@ -14574,7 +14574,7 @@
               </a:rPr>
               <a:t>煞停距離決定射線至少要多長——時速 50 至少 25 公尺。這是硬下限。</a:t>
             </a:r>
-            <a:endParaRPr lang="en-US" sz="960" dirty="0"/>
+            <a:endParaRPr lang="en-US" sz="1080" dirty="0"/>
           </a:p>
         </p:txBody>
       </p:sp>
@@ -14586,8 +14586,8 @@
         </p:nvSpPr>
         <p:spPr>
           <a:xfrm>
-            <a:off x="1681812" y="2670770"/>
-            <a:ext cx="32474" cy="477815"/>
+            <a:off x="1302204" y="2991589"/>
+            <a:ext cx="36739" cy="540573"/>
           </a:xfrm>
           <a:prstGeom prst="rect">
             <a:avLst/>
@@ -14606,8 +14606,8 @@
         </p:nvSpPr>
         <p:spPr>
           <a:xfrm>
-            <a:off x="1837688" y="2644791"/>
-            <a:ext cx="5585531" cy="555752"/>
+            <a:off x="1478552" y="2962197"/>
+            <a:ext cx="6319157" cy="628747"/>
           </a:xfrm>
           <a:prstGeom prst="rect">
             <a:avLst/>
@@ -14626,7 +14626,7 @@
               <a:buNone/>
             </a:pPr>
             <a:r>
-              <a:rPr lang="en-US" sz="960" b="1" dirty="0">
+              <a:rPr lang="en-US" sz="1080" b="1" dirty="0">
                 <a:solidFill>
                   <a:srgbClr val="FFFFFF"/>
                 </a:solidFill>
@@ -14636,7 +14636,7 @@
               </a:rPr>
               <a:t>Ba khoảng cách mô phỏng–hiện thực: hình ảnh, hành vi, vật lý. Ở Đài Loan và Việt Nam đều lớn hơn.</a:t>
             </a:r>
-            <a:endParaRPr lang="en-US" sz="960" dirty="0"/>
+            <a:endParaRPr lang="en-US" sz="1080" dirty="0"/>
           </a:p>
           <a:p>
             <a:pPr indent="0" marL="0">
@@ -14646,7 +14646,7 @@
               <a:buNone/>
             </a:pPr>
             <a:r>
-              <a:rPr lang="en-US" sz="850" dirty="0">
+              <a:rPr lang="en-US" sz="960" dirty="0">
                 <a:solidFill>
                   <a:srgbClr val="AFC3D4"/>
                 </a:solidFill>
@@ -14656,7 +14656,7 @@
               </a:rPr>
               <a:t>模擬與現實的三種落差：外觀、行為、物理。在台灣和越南都更大。</a:t>
             </a:r>
-            <a:endParaRPr lang="en-US" sz="960" dirty="0"/>
+            <a:endParaRPr lang="en-US" sz="1080" dirty="0"/>
           </a:p>
         </p:txBody>
       </p:sp>
@@ -14668,8 +14668,8 @@
         </p:nvSpPr>
         <p:spPr>
           <a:xfrm>
-            <a:off x="1402536" y="3390800"/>
-            <a:ext cx="584532" cy="181855"/>
+            <a:off x="986246" y="102870"/>
+            <a:ext cx="661307" cy="205740"/>
           </a:xfrm>
           <a:prstGeom prst="rect">
             <a:avLst/>
@@ -14685,7 +14685,7 @@
               <a:buNone/>
             </a:pPr>
             <a:r>
-              <a:rPr lang="en-US" sz="640" dirty="0">
+              <a:rPr lang="en-US" sz="720" dirty="0">
                 <a:solidFill>
                   <a:srgbClr val="9FB3C8"/>
                 </a:solidFill>
@@ -14695,7 +14695,7 @@
               </a:rPr>
               <a:t>18 / 18</a:t>
             </a:r>
-            <a:endParaRPr lang="en-US" sz="640" dirty="0"/>
+            <a:endParaRPr lang="en-US" sz="720" dirty="0"/>
           </a:p>
         </p:txBody>
       </p:sp>
@@ -14707,8 +14707,8 @@
         </p:nvSpPr>
         <p:spPr>
           <a:xfrm>
-            <a:off x="2006553" y="3390800"/>
-            <a:ext cx="1428857" cy="181855"/>
+            <a:off x="1669596" y="102870"/>
+            <a:ext cx="1616529" cy="205740"/>
           </a:xfrm>
           <a:prstGeom prst="rect">
             <a:avLst/>
@@ -14724,7 +14724,7 @@
               <a:buNone/>
             </a:pPr>
             <a:r>
-              <a:rPr lang="en-US" sz="640" dirty="0">
+              <a:rPr lang="en-US" sz="720" dirty="0">
                 <a:solidFill>
                   <a:srgbClr val="9FB3C8"/>
                 </a:solidFill>
@@ -14734,7 +14734,7 @@
               </a:rPr>
               <a:t>Tiết 1 · 第 1 節</a:t>
             </a:r>
-            <a:endParaRPr lang="en-US" sz="640" dirty="0"/>
+            <a:endParaRPr lang="en-US" sz="720" dirty="0"/>
           </a:p>
         </p:txBody>
       </p:sp>
@@ -14757,8 +14757,8 @@
       </p:nvGrpSpPr>
       <p:grpSpPr>
         <a:xfrm>
-          <a:off x="0" y="0"/>
-          <a:ext cx="0" cy="0"/>
+          <a:off x="927820" y="0"/>
+          <a:ext cx="1" cy="1"/>
           <a:chOff x="0" y="0"/>
           <a:chExt cx="0" cy="0"/>
         </a:xfrm>
@@ -14771,8 +14771,8 @@
         </p:nvSpPr>
         <p:spPr>
           <a:xfrm>
-            <a:off x="1681812" y="234326"/>
-            <a:ext cx="5780375" cy="597522"/>
+            <a:off x="1328680" y="233228"/>
+            <a:ext cx="6486641" cy="670529"/>
           </a:xfrm>
           <a:prstGeom prst="rect">
             <a:avLst/>
@@ -14791,7 +14791,7 @@
               <a:buNone/>
             </a:pPr>
             <a:r>
-              <a:rPr lang="en-US" sz="1560" b="1" dirty="0">
+              <a:rPr lang="en-US" sz="1750" b="1" dirty="0">
                 <a:solidFill>
                   <a:srgbClr val="0B1F3A"/>
                 </a:solidFill>
@@ -14801,7 +14801,7 @@
               </a:rPr>
               <a:t>Mở mô phỏng trên máy tính của bạn</a:t>
             </a:r>
-            <a:endParaRPr lang="en-US" sz="1560" dirty="0"/>
+            <a:endParaRPr lang="en-US" sz="1750" dirty="0"/>
           </a:p>
           <a:p>
             <a:pPr indent="0" marL="0">
@@ -14811,7 +14811,7 @@
               <a:buNone/>
             </a:pPr>
             <a:r>
-              <a:rPr lang="en-US" sz="960" dirty="0">
+              <a:rPr lang="en-US" sz="1080" dirty="0">
                 <a:solidFill>
                   <a:srgbClr val="5F7183"/>
                 </a:solidFill>
@@ -14821,7 +14821,7 @@
               </a:rPr>
               <a:t>在你的筆電上打開模擬器</a:t>
             </a:r>
-            <a:endParaRPr lang="en-US" sz="1560" dirty="0"/>
+            <a:endParaRPr lang="en-US" sz="1750" dirty="0"/>
           </a:p>
         </p:txBody>
       </p:sp>
@@ -14833,8 +14833,8 @@
         </p:nvSpPr>
         <p:spPr>
           <a:xfrm>
-            <a:off x="5844982" y="831848"/>
-            <a:ext cx="1708133" cy="1864009"/>
+            <a:off x="6000519" y="903757"/>
+            <a:ext cx="1916839" cy="2091759"/>
           </a:xfrm>
           <a:prstGeom prst="roundRect">
             <a:avLst>
@@ -14868,8 +14868,8 @@
         </p:blipFill>
         <p:spPr>
           <a:xfrm>
-            <a:off x="5935909" y="909785"/>
-            <a:ext cx="1526279" cy="1526279"/>
+            <a:off x="6492240" y="1243584"/>
+            <a:ext cx="2148840" cy="2148840"/>
           </a:xfrm>
           <a:prstGeom prst="rect">
             <a:avLst/>
@@ -14884,8 +14884,8 @@
         </p:nvSpPr>
         <p:spPr>
           <a:xfrm>
-            <a:off x="5870961" y="2462043"/>
-            <a:ext cx="1656175" cy="220823"/>
+            <a:off x="6029672" y="2733135"/>
+            <a:ext cx="1858532" cy="247804"/>
           </a:xfrm>
           <a:prstGeom prst="rect">
             <a:avLst/>
@@ -14904,7 +14904,7 @@
               <a:buNone/>
             </a:pPr>
             <a:r>
-              <a:rPr lang="en-US" sz="750" b="1" dirty="0">
+              <a:rPr lang="en-US" sz="840" b="1" dirty="0">
                 <a:solidFill>
                   <a:srgbClr val="5F7183"/>
                 </a:solidFill>
@@ -14914,7 +14914,7 @@
               </a:rPr>
               <a:t>Quét mã QR bằng camera điện thoại</a:t>
             </a:r>
-            <a:endParaRPr lang="en-US" sz="750" dirty="0"/>
+            <a:endParaRPr lang="en-US" sz="840" dirty="0"/>
           </a:p>
           <a:p>
             <a:pPr algn="ctr" indent="0" marL="0">
@@ -14924,7 +14924,7 @@
               <a:buNone/>
             </a:pPr>
             <a:r>
-              <a:rPr lang="en-US" sz="670" dirty="0">
+              <a:rPr lang="en-US" sz="760" dirty="0">
                 <a:solidFill>
                   <a:srgbClr val="5F7183"/>
                 </a:solidFill>
@@ -14934,7 +14934,7 @@
               </a:rPr>
               <a:t>用手機相機掃這個 QR</a:t>
             </a:r>
-            <a:endParaRPr lang="en-US" sz="750" dirty="0"/>
+            <a:endParaRPr lang="en-US" sz="840" dirty="0"/>
           </a:p>
         </p:txBody>
       </p:sp>
@@ -14946,8 +14946,8 @@
         </p:nvSpPr>
         <p:spPr>
           <a:xfrm>
-            <a:off x="1681812" y="831848"/>
-            <a:ext cx="4033273" cy="597522"/>
+            <a:off x="1328680" y="903757"/>
+            <a:ext cx="4526072" cy="670529"/>
           </a:xfrm>
           <a:prstGeom prst="roundRect">
             <a:avLst>
@@ -14968,8 +14968,8 @@
         </p:nvSpPr>
         <p:spPr>
           <a:xfrm>
-            <a:off x="1785729" y="896796"/>
-            <a:ext cx="3825439" cy="467626"/>
+            <a:off x="1445293" y="976640"/>
+            <a:ext cx="4292844" cy="524762"/>
           </a:xfrm>
           <a:prstGeom prst="rect">
             <a:avLst/>
@@ -14985,7 +14985,7 @@
               <a:buNone/>
             </a:pPr>
             <a:r>
-              <a:rPr lang="en-US" sz="890" b="1" dirty="0">
+              <a:rPr lang="en-US" sz="1000" b="1" dirty="0">
                 <a:solidFill>
                   <a:srgbClr val="FFFFFF"/>
                 </a:solidFill>
@@ -14995,14 +14995,14 @@
               </a:rPr>
               <a:t>https://ch-neural.github.io/</a:t>
             </a:r>
-            <a:endParaRPr lang="en-US" sz="890" dirty="0"/>
+            <a:endParaRPr lang="en-US" sz="1000" dirty="0"/>
           </a:p>
           <a:p>
             <a:pPr algn="ctr" indent="0" marL="0">
               <a:buNone/>
             </a:pPr>
             <a:r>
-              <a:rPr lang="en-US" sz="890" b="1" dirty="0">
+              <a:rPr lang="en-US" sz="1000" b="1" dirty="0">
                 <a:solidFill>
                   <a:srgbClr val="FFFFFF"/>
                 </a:solidFill>
@@ -15012,7 +15012,7 @@
               </a:rPr>
               <a:t>MITUST-Principles-of-Self-Driving-Cars/week4/sim/</a:t>
             </a:r>
-            <a:endParaRPr lang="en-US" sz="890" dirty="0"/>
+            <a:endParaRPr lang="en-US" sz="1000" dirty="0"/>
           </a:p>
         </p:txBody>
       </p:sp>
@@ -15024,8 +15024,8 @@
         </p:nvSpPr>
         <p:spPr>
           <a:xfrm>
-            <a:off x="1707792" y="1559266"/>
-            <a:ext cx="207834" cy="207834"/>
+            <a:off x="1357833" y="1720053"/>
+            <a:ext cx="233228" cy="233228"/>
           </a:xfrm>
           <a:prstGeom prst="ellipse">
             <a:avLst/>
@@ -15044,8 +15044,8 @@
         </p:nvSpPr>
         <p:spPr>
           <a:xfrm>
-            <a:off x="1707792" y="1565760"/>
-            <a:ext cx="207834" cy="194844"/>
+            <a:off x="1357833" y="1727341"/>
+            <a:ext cx="233228" cy="218651"/>
           </a:xfrm>
           <a:prstGeom prst="rect">
             <a:avLst/>
@@ -15061,7 +15061,7 @@
               <a:buNone/>
             </a:pPr>
             <a:r>
-              <a:rPr lang="en-US" sz="780" b="1" dirty="0">
+              <a:rPr lang="en-US" sz="880" b="1" dirty="0">
                 <a:solidFill>
                   <a:srgbClr val="FFFFFF"/>
                 </a:solidFill>
@@ -15071,7 +15071,7 @@
               </a:rPr>
               <a:t>1</a:t>
             </a:r>
-            <a:endParaRPr lang="en-US" sz="780" dirty="0"/>
+            <a:endParaRPr lang="en-US" sz="880" dirty="0"/>
           </a:p>
         </p:txBody>
       </p:sp>
@@ -15083,8 +15083,8 @@
         </p:nvSpPr>
         <p:spPr>
           <a:xfrm>
-            <a:off x="1993563" y="1533286"/>
-            <a:ext cx="3669564" cy="324740"/>
+            <a:off x="1678521" y="1690900"/>
+            <a:ext cx="4117924" cy="364418"/>
           </a:xfrm>
           <a:prstGeom prst="rect">
             <a:avLst/>
@@ -15103,7 +15103,7 @@
               <a:buNone/>
             </a:pPr>
             <a:r>
-              <a:rPr lang="en-US" sz="820" b="1" dirty="0">
+              <a:rPr lang="en-US" sz="920" b="1" dirty="0">
                 <a:solidFill>
                   <a:srgbClr val="1A2733"/>
                 </a:solidFill>
@@ -15113,7 +15113,7 @@
               </a:rPr>
               <a:t>Tuần này nên dùng máy tính: có bàn phím và màn hình rộng thì chỉnh thanh trượt dễ hơn nhiều</a:t>
             </a:r>
-            <a:endParaRPr lang="en-US" sz="820" dirty="0"/>
+            <a:endParaRPr lang="en-US" sz="920" dirty="0"/>
           </a:p>
           <a:p>
             <a:pPr indent="0" marL="0">
@@ -15123,7 +15123,7 @@
               <a:buNone/>
             </a:pPr>
             <a:r>
-              <a:rPr lang="en-US" sz="750" dirty="0">
+              <a:rPr lang="en-US" sz="840" dirty="0">
                 <a:solidFill>
                   <a:srgbClr val="5F7183"/>
                 </a:solidFill>
@@ -15133,7 +15133,7 @@
               </a:rPr>
               <a:t>這週建議用筆電：有鍵盤和大螢幕，調滑桿容易得多</a:t>
             </a:r>
-            <a:endParaRPr lang="en-US" sz="820" dirty="0"/>
+            <a:endParaRPr lang="en-US" sz="920" dirty="0"/>
           </a:p>
         </p:txBody>
       </p:sp>
@@ -15145,8 +15145,8 @@
         </p:nvSpPr>
         <p:spPr>
           <a:xfrm>
-            <a:off x="1707792" y="1976475"/>
-            <a:ext cx="207834" cy="207834"/>
+            <a:off x="1357833" y="2188239"/>
+            <a:ext cx="233228" cy="233228"/>
           </a:xfrm>
           <a:prstGeom prst="ellipse">
             <a:avLst/>
@@ -15165,8 +15165,8 @@
         </p:nvSpPr>
         <p:spPr>
           <a:xfrm>
-            <a:off x="1707792" y="1982970"/>
-            <a:ext cx="207834" cy="194844"/>
+            <a:off x="1357833" y="2195527"/>
+            <a:ext cx="233228" cy="218651"/>
           </a:xfrm>
           <a:prstGeom prst="rect">
             <a:avLst/>
@@ -15182,7 +15182,7 @@
               <a:buNone/>
             </a:pPr>
             <a:r>
-              <a:rPr lang="en-US" sz="780" b="1" dirty="0">
+              <a:rPr lang="en-US" sz="880" b="1" dirty="0">
                 <a:solidFill>
                   <a:srgbClr val="FFFFFF"/>
                 </a:solidFill>
@@ -15192,7 +15192,7 @@
               </a:rPr>
               <a:t>2</a:t>
             </a:r>
-            <a:endParaRPr lang="en-US" sz="780" dirty="0"/>
+            <a:endParaRPr lang="en-US" sz="880" dirty="0"/>
           </a:p>
         </p:txBody>
       </p:sp>
@@ -15204,8 +15204,8 @@
         </p:nvSpPr>
         <p:spPr>
           <a:xfrm>
-            <a:off x="1993563" y="1950496"/>
-            <a:ext cx="3669564" cy="324740"/>
+            <a:off x="1678521" y="2159085"/>
+            <a:ext cx="4117924" cy="364418"/>
           </a:xfrm>
           <a:prstGeom prst="rect">
             <a:avLst/>
@@ -15224,7 +15224,7 @@
               <a:buNone/>
             </a:pPr>
             <a:r>
-              <a:rPr lang="en-US" sz="820" b="1" dirty="0">
+              <a:rPr lang="en-US" sz="920" b="1" dirty="0">
                 <a:solidFill>
                   <a:srgbClr val="1A2733"/>
                 </a:solidFill>
@@ -15234,7 +15234,7 @@
               </a:rPr>
               <a:t>Mở xong bấm «Bắt đầu» cho xe chạy thử một vòng</a:t>
             </a:r>
-            <a:endParaRPr lang="en-US" sz="820" dirty="0"/>
+            <a:endParaRPr lang="en-US" sz="920" dirty="0"/>
           </a:p>
           <a:p>
             <a:pPr indent="0" marL="0">
@@ -15244,7 +15244,7 @@
               <a:buNone/>
             </a:pPr>
             <a:r>
-              <a:rPr lang="en-US" sz="750" dirty="0">
+              <a:rPr lang="en-US" sz="840" dirty="0">
                 <a:solidFill>
                   <a:srgbClr val="5F7183"/>
                 </a:solidFill>
@@ -15254,7 +15254,7 @@
               </a:rPr>
               <a:t>打開之後按「開始」，先讓車子跑一圈看看</a:t>
             </a:r>
-            <a:endParaRPr lang="en-US" sz="820" dirty="0"/>
+            <a:endParaRPr lang="en-US" sz="920" dirty="0"/>
           </a:p>
         </p:txBody>
       </p:sp>
@@ -15266,8 +15266,8 @@
         </p:nvSpPr>
         <p:spPr>
           <a:xfrm>
-            <a:off x="1707792" y="2327195"/>
-            <a:ext cx="207834" cy="207834"/>
+            <a:off x="1357833" y="2581810"/>
+            <a:ext cx="233228" cy="233228"/>
           </a:xfrm>
           <a:prstGeom prst="ellipse">
             <a:avLst/>
@@ -15286,8 +15286,8 @@
         </p:nvSpPr>
         <p:spPr>
           <a:xfrm>
-            <a:off x="1707792" y="2333689"/>
-            <a:ext cx="207834" cy="194844"/>
+            <a:off x="1357833" y="2589098"/>
+            <a:ext cx="233228" cy="218651"/>
           </a:xfrm>
           <a:prstGeom prst="rect">
             <a:avLst/>
@@ -15303,7 +15303,7 @@
               <a:buNone/>
             </a:pPr>
             <a:r>
-              <a:rPr lang="en-US" sz="780" b="1" dirty="0">
+              <a:rPr lang="en-US" sz="880" b="1" dirty="0">
                 <a:solidFill>
                   <a:srgbClr val="FFFFFF"/>
                 </a:solidFill>
@@ -15313,7 +15313,7 @@
               </a:rPr>
               <a:t>3</a:t>
             </a:r>
-            <a:endParaRPr lang="en-US" sz="780" dirty="0"/>
+            <a:endParaRPr lang="en-US" sz="880" dirty="0"/>
           </a:p>
         </p:txBody>
       </p:sp>
@@ -15325,8 +15325,8 @@
         </p:nvSpPr>
         <p:spPr>
           <a:xfrm>
-            <a:off x="1993563" y="2301215"/>
-            <a:ext cx="3669564" cy="324740"/>
+            <a:off x="1678521" y="2552657"/>
+            <a:ext cx="4117924" cy="364418"/>
           </a:xfrm>
           <a:prstGeom prst="rect">
             <a:avLst/>
@@ -15345,7 +15345,7 @@
               <a:buNone/>
             </a:pPr>
             <a:r>
-              <a:rPr lang="en-US" sz="820" b="1" dirty="0">
+              <a:rPr lang="en-US" sz="920" b="1" dirty="0">
                 <a:solidFill>
                   <a:srgbClr val="1A2733"/>
                 </a:solidFill>
@@ -15355,7 +15355,7 @@
               </a:rPr>
               <a:t>Không cần mạng sau khi đã mở — tiết 3 lên máy sẽ dùng suốt 50 phút</a:t>
             </a:r>
-            <a:endParaRPr lang="en-US" sz="820" dirty="0"/>
+            <a:endParaRPr lang="en-US" sz="920" dirty="0"/>
           </a:p>
           <a:p>
             <a:pPr indent="0" marL="0">
@@ -15365,7 +15365,7 @@
               <a:buNone/>
             </a:pPr>
             <a:r>
-              <a:rPr lang="en-US" sz="750" dirty="0">
+              <a:rPr lang="en-US" sz="840" dirty="0">
                 <a:solidFill>
                   <a:srgbClr val="5F7183"/>
                 </a:solidFill>
@@ -15375,7 +15375,7 @@
               </a:rPr>
               <a:t>打開之後不需要網路——第三節上機會用它整整 50 分鐘</a:t>
             </a:r>
-            <a:endParaRPr lang="en-US" sz="820" dirty="0"/>
+            <a:endParaRPr lang="en-US" sz="920" dirty="0"/>
           </a:p>
         </p:txBody>
       </p:sp>
@@ -15387,8 +15387,8 @@
         </p:nvSpPr>
         <p:spPr>
           <a:xfrm>
-            <a:off x="1681812" y="2806268"/>
-            <a:ext cx="5780375" cy="428657"/>
+            <a:off x="1328680" y="3119418"/>
+            <a:ext cx="6486641" cy="481032"/>
           </a:xfrm>
           <a:prstGeom prst="roundRect">
             <a:avLst>
@@ -15414,8 +15414,8 @@
         </p:nvSpPr>
         <p:spPr>
           <a:xfrm>
-            <a:off x="1811708" y="2851732"/>
-            <a:ext cx="5520583" cy="350719"/>
+            <a:off x="1474447" y="3170437"/>
+            <a:ext cx="6195106" cy="393571"/>
           </a:xfrm>
           <a:prstGeom prst="rect">
             <a:avLst/>
@@ -15434,7 +15434,7 @@
               <a:buNone/>
             </a:pPr>
             <a:r>
-              <a:rPr lang="en-US" sz="850" b="1" dirty="0">
+              <a:rPr lang="en-US" sz="960" b="1" dirty="0">
                 <a:solidFill>
                   <a:srgbClr val="7A4E00"/>
                 </a:solidFill>
@@ -15444,7 +15444,7 @@
               </a:rPr>
               <a:t>Đây là mô phỏng của tuần trước, có thêm một nút mới mà cuối buổi ta sẽ dùng tới.</a:t>
             </a:r>
-            <a:endParaRPr lang="en-US" sz="850" dirty="0"/>
+            <a:endParaRPr lang="en-US" sz="960" dirty="0"/>
           </a:p>
           <a:p>
             <a:pPr indent="0" marL="0">
@@ -15454,7 +15454,7 @@
               <a:buNone/>
             </a:pPr>
             <a:r>
-              <a:rPr lang="en-US" sz="780" dirty="0">
+              <a:rPr lang="en-US" sz="880" dirty="0">
                 <a:solidFill>
                   <a:srgbClr val="7A4E00"/>
                 </a:solidFill>
@@ -15464,7 +15464,7 @@
               </a:rPr>
               <a:t>就是上週那個模擬器，多了一個按鈕，今天最後會用到。</a:t>
             </a:r>
-            <a:endParaRPr lang="en-US" sz="850" dirty="0"/>
+            <a:endParaRPr lang="en-US" sz="960" dirty="0"/>
           </a:p>
         </p:txBody>
       </p:sp>
@@ -15484,8 +15484,8 @@
         </p:blipFill>
         <p:spPr>
           <a:xfrm>
-            <a:off x="6663327" y="3338842"/>
-            <a:ext cx="779376" cy="172200"/>
+            <a:off x="7882128" y="109728"/>
+            <a:ext cx="1097280" cy="242439"/>
           </a:xfrm>
           <a:prstGeom prst="rect">
             <a:avLst/>
@@ -15500,8 +15500,8 @@
         </p:nvSpPr>
         <p:spPr>
           <a:xfrm>
-            <a:off x="1402536" y="3390800"/>
-            <a:ext cx="584532" cy="181855"/>
+            <a:off x="1015280" y="102037"/>
+            <a:ext cx="655952" cy="204074"/>
           </a:xfrm>
           <a:prstGeom prst="rect">
             <a:avLst/>
@@ -15517,7 +15517,7 @@
               <a:buNone/>
             </a:pPr>
             <a:r>
-              <a:rPr lang="en-US" sz="640" dirty="0">
+              <a:rPr lang="en-US" sz="720" dirty="0">
                 <a:solidFill>
                   <a:srgbClr val="5F7183"/>
                 </a:solidFill>
@@ -15527,7 +15527,7 @@
               </a:rPr>
               <a:t>2 / 18</a:t>
             </a:r>
-            <a:endParaRPr lang="en-US" sz="640" dirty="0"/>
+            <a:endParaRPr lang="en-US" sz="720" dirty="0"/>
           </a:p>
         </p:txBody>
       </p:sp>
@@ -15539,8 +15539,8 @@
         </p:nvSpPr>
         <p:spPr>
           <a:xfrm>
-            <a:off x="2006553" y="3390800"/>
-            <a:ext cx="1428857" cy="181855"/>
+            <a:off x="1693098" y="102037"/>
+            <a:ext cx="1603439" cy="204074"/>
           </a:xfrm>
           <a:prstGeom prst="rect">
             <a:avLst/>
@@ -15556,7 +15556,7 @@
               <a:buNone/>
             </a:pPr>
             <a:r>
-              <a:rPr lang="en-US" sz="640" dirty="0">
+              <a:rPr lang="en-US" sz="720" dirty="0">
                 <a:solidFill>
                   <a:srgbClr val="5F7183"/>
                 </a:solidFill>
@@ -15566,7 +15566,7 @@
               </a:rPr>
               <a:t>Tiết 1 · 第 1 節</a:t>
             </a:r>
-            <a:endParaRPr lang="en-US" sz="640" dirty="0"/>
+            <a:endParaRPr lang="en-US" sz="720" dirty="0"/>
           </a:p>
         </p:txBody>
       </p:sp>
@@ -15596,8 +15596,8 @@
       </p:nvGrpSpPr>
       <p:grpSpPr>
         <a:xfrm>
-          <a:off x="0" y="0"/>
-          <a:ext cx="0" cy="0"/>
+          <a:off x="898071" y="0"/>
+          <a:ext cx="1" cy="1"/>
           <a:chOff x="0" y="0"/>
           <a:chExt cx="0" cy="0"/>
         </a:xfrm>
@@ -15610,8 +15610,8 @@
         </p:nvSpPr>
         <p:spPr>
           <a:xfrm>
-            <a:off x="6130753" y="-947729"/>
-            <a:ext cx="2987610" cy="2987610"/>
+            <a:off x="6335486" y="-1102179"/>
+            <a:ext cx="3380014" cy="3380014"/>
           </a:xfrm>
           <a:prstGeom prst="ellipse">
             <a:avLst/>
@@ -15635,8 +15635,8 @@
         </p:nvSpPr>
         <p:spPr>
           <a:xfrm>
-            <a:off x="7104973" y="1520297"/>
-            <a:ext cx="1688649" cy="1688649"/>
+            <a:off x="7437664" y="1690007"/>
+            <a:ext cx="1910443" cy="1910443"/>
           </a:xfrm>
           <a:prstGeom prst="ellipse">
             <a:avLst/>
@@ -15657,8 +15657,8 @@
         </p:nvSpPr>
         <p:spPr>
           <a:xfrm>
-            <a:off x="1681812" y="1228031"/>
-            <a:ext cx="3247402" cy="220823"/>
+            <a:off x="1302204" y="1359354"/>
+            <a:ext cx="3673929" cy="249827"/>
           </a:xfrm>
           <a:prstGeom prst="rect">
             <a:avLst/>
@@ -15673,7 +15673,7 @@
             <a:pPr indent="0" marL="0">
               <a:buNone/>
             </a:pPr>
-            <a:endParaRPr lang="en-US" sz="960" dirty="0"/>
+            <a:endParaRPr lang="en-US" sz="1080" dirty="0"/>
           </a:p>
         </p:txBody>
       </p:sp>
@@ -15685,8 +15685,8 @@
         </p:nvSpPr>
         <p:spPr>
           <a:xfrm>
-            <a:off x="1681812" y="1481328"/>
-            <a:ext cx="5195843" cy="844324"/>
+            <a:off x="1302204" y="1645920"/>
+            <a:ext cx="5878286" cy="955221"/>
           </a:xfrm>
           <a:prstGeom prst="rect">
             <a:avLst/>
@@ -15705,7 +15705,7 @@
               <a:buNone/>
             </a:pPr>
             <a:r>
-              <a:rPr lang="en-US" sz="2060" b="1" dirty="0">
+              <a:rPr lang="en-US" sz="2330" b="1" dirty="0">
                 <a:solidFill>
                   <a:srgbClr val="FFFFFF"/>
                 </a:solidFill>
@@ -15715,7 +15715,7 @@
               </a:rPr>
               <a:t>Ba thanh trượt, ba thông số thật</a:t>
             </a:r>
-            <a:endParaRPr lang="en-US" sz="2060" dirty="0"/>
+            <a:endParaRPr lang="en-US" sz="2330" dirty="0"/>
           </a:p>
           <a:p>
             <a:pPr indent="0" marL="0">
@@ -15725,7 +15725,7 @@
               <a:buNone/>
             </a:pPr>
             <a:r>
-              <a:rPr lang="en-US" sz="1210" dirty="0">
+              <a:rPr lang="en-US" sz="1370" dirty="0">
                 <a:solidFill>
                   <a:srgbClr val="AFC3D4"/>
                 </a:solidFill>
@@ -15735,7 +15735,7 @@
               </a:rPr>
               <a:t>三個滑桿，三個真的規格</a:t>
             </a:r>
-            <a:endParaRPr lang="en-US" sz="2060" dirty="0"/>
+            <a:endParaRPr lang="en-US" sz="2330" dirty="0"/>
           </a:p>
         </p:txBody>
       </p:sp>
@@ -15747,8 +15747,8 @@
         </p:nvSpPr>
         <p:spPr>
           <a:xfrm>
-            <a:off x="1402536" y="3390800"/>
-            <a:ext cx="584532" cy="181855"/>
+            <a:off x="986246" y="102870"/>
+            <a:ext cx="661307" cy="205740"/>
           </a:xfrm>
           <a:prstGeom prst="rect">
             <a:avLst/>
@@ -15764,7 +15764,7 @@
               <a:buNone/>
             </a:pPr>
             <a:r>
-              <a:rPr lang="en-US" sz="640" dirty="0">
+              <a:rPr lang="en-US" sz="720" dirty="0">
                 <a:solidFill>
                   <a:srgbClr val="9FB3C8"/>
                 </a:solidFill>
@@ -15774,7 +15774,7 @@
               </a:rPr>
               <a:t>3 / 18</a:t>
             </a:r>
-            <a:endParaRPr lang="en-US" sz="640" dirty="0"/>
+            <a:endParaRPr lang="en-US" sz="720" dirty="0"/>
           </a:p>
         </p:txBody>
       </p:sp>
@@ -15786,8 +15786,8 @@
         </p:nvSpPr>
         <p:spPr>
           <a:xfrm>
-            <a:off x="2006553" y="3390800"/>
-            <a:ext cx="1428857" cy="181855"/>
+            <a:off x="1669596" y="102870"/>
+            <a:ext cx="1616529" cy="205740"/>
           </a:xfrm>
           <a:prstGeom prst="rect">
             <a:avLst/>
@@ -15803,7 +15803,7 @@
               <a:buNone/>
             </a:pPr>
             <a:r>
-              <a:rPr lang="en-US" sz="640" dirty="0">
+              <a:rPr lang="en-US" sz="720" dirty="0">
                 <a:solidFill>
                   <a:srgbClr val="9FB3C8"/>
                 </a:solidFill>
@@ -15813,7 +15813,7 @@
               </a:rPr>
               <a:t>Tiết 1 · 第 1 節</a:t>
             </a:r>
-            <a:endParaRPr lang="en-US" sz="640" dirty="0"/>
+            <a:endParaRPr lang="en-US" sz="720" dirty="0"/>
           </a:p>
         </p:txBody>
       </p:sp>
@@ -15836,8 +15836,8 @@
       </p:nvGrpSpPr>
       <p:grpSpPr>
         <a:xfrm>
-          <a:off x="0" y="0"/>
-          <a:ext cx="0" cy="0"/>
+          <a:off x="913006" y="0"/>
+          <a:ext cx="1" cy="1"/>
           <a:chOff x="0" y="0"/>
           <a:chExt cx="0" cy="0"/>
         </a:xfrm>
@@ -15850,8 +15850,8 @@
         </p:nvSpPr>
         <p:spPr>
           <a:xfrm>
-            <a:off x="1681812" y="286284"/>
-            <a:ext cx="5780375" cy="194844"/>
+            <a:off x="1315495" y="292720"/>
+            <a:ext cx="6513009" cy="219540"/>
           </a:xfrm>
           <a:prstGeom prst="rect">
             <a:avLst/>
@@ -15867,7 +15867,7 @@
               <a:buNone/>
             </a:pPr>
             <a:r>
-              <a:rPr lang="en-US" sz="920" b="1" dirty="0">
+              <a:rPr lang="en-US" sz="1040" b="1" dirty="0">
                 <a:solidFill>
                   <a:srgbClr val="007F72"/>
                 </a:solidFill>
@@ -15877,7 +15877,7 @@
               </a:rPr>
               <a:t>1 / 3　Số tia · 射線數</a:t>
             </a:r>
-            <a:endParaRPr lang="en-US" sz="920" dirty="0"/>
+            <a:endParaRPr lang="en-US" sz="1040" dirty="0"/>
           </a:p>
         </p:txBody>
       </p:sp>
@@ -15889,8 +15889,8 @@
         </p:nvSpPr>
         <p:spPr>
           <a:xfrm>
-            <a:off x="1681812" y="649993"/>
-            <a:ext cx="1052158" cy="1363909"/>
+            <a:off x="1315495" y="702527"/>
+            <a:ext cx="1185514" cy="1536777"/>
           </a:xfrm>
           <a:prstGeom prst="roundRect">
             <a:avLst>
@@ -15916,8 +15916,8 @@
         </p:nvSpPr>
         <p:spPr>
           <a:xfrm flipV="1">
-            <a:off x="1894322" y="875283"/>
-            <a:ext cx="507177" cy="456664"/>
+            <a:off x="1554940" y="956372"/>
+            <a:ext cx="571459" cy="514544"/>
           </a:xfrm>
           <a:prstGeom prst="line">
             <a:avLst/>
@@ -15939,8 +15939,8 @@
         </p:nvSpPr>
         <p:spPr>
           <a:xfrm flipV="1">
-            <a:off x="1894322" y="1011545"/>
-            <a:ext cx="602589" cy="320402"/>
+            <a:off x="1554940" y="1109904"/>
+            <a:ext cx="678964" cy="361011"/>
           </a:xfrm>
           <a:prstGeom prst="line">
             <a:avLst/>
@@ -15962,8 +15962,8 @@
         </p:nvSpPr>
         <p:spPr>
           <a:xfrm flipV="1">
-            <a:off x="1894322" y="1166842"/>
-            <a:ext cx="662202" cy="165105"/>
+            <a:off x="1554940" y="1284884"/>
+            <a:ext cx="746132" cy="186032"/>
           </a:xfrm>
           <a:prstGeom prst="line">
             <a:avLst/>
@@ -15985,8 +15985,8 @@
         </p:nvSpPr>
         <p:spPr>
           <a:xfrm>
-            <a:off x="1894322" y="1331948"/>
-            <a:ext cx="682474" cy="0"/>
+            <a:off x="1554940" y="1470916"/>
+            <a:ext cx="768975" cy="1"/>
           </a:xfrm>
           <a:prstGeom prst="line">
             <a:avLst/>
@@ -16008,8 +16008,8 @@
         </p:nvSpPr>
         <p:spPr>
           <a:xfrm>
-            <a:off x="1894322" y="1331948"/>
-            <a:ext cx="602589" cy="320402"/>
+            <a:off x="1554940" y="1470916"/>
+            <a:ext cx="678964" cy="361011"/>
           </a:xfrm>
           <a:prstGeom prst="line">
             <a:avLst/>
@@ -16031,8 +16031,8 @@
         </p:nvSpPr>
         <p:spPr>
           <a:xfrm>
-            <a:off x="1894322" y="1331948"/>
-            <a:ext cx="507177" cy="456664"/>
+            <a:off x="1554940" y="1470916"/>
+            <a:ext cx="571459" cy="514544"/>
           </a:xfrm>
           <a:prstGeom prst="line">
             <a:avLst/>
@@ -16054,8 +16054,8 @@
         </p:nvSpPr>
         <p:spPr>
           <a:xfrm>
-            <a:off x="1862043" y="1299668"/>
-            <a:ext cx="64558" cy="64558"/>
+            <a:off x="1518570" y="1434545"/>
+            <a:ext cx="72741" cy="72741"/>
           </a:xfrm>
           <a:prstGeom prst="ellipse">
             <a:avLst/>
@@ -16074,8 +16074,8 @@
         </p:nvSpPr>
         <p:spPr>
           <a:xfrm>
-            <a:off x="2324994" y="1404710"/>
-            <a:ext cx="92226" cy="92226"/>
+            <a:off x="2040198" y="1552900"/>
+            <a:ext cx="103916" cy="103916"/>
           </a:xfrm>
           <a:prstGeom prst="roundRect">
             <a:avLst>
@@ -16096,8 +16096,8 @@
         </p:nvSpPr>
         <p:spPr>
           <a:xfrm>
-            <a:off x="2954794" y="585045"/>
-            <a:ext cx="4507394" cy="559328"/>
+            <a:off x="2749821" y="629347"/>
+            <a:ext cx="5078684" cy="630220"/>
           </a:xfrm>
           <a:prstGeom prst="rect">
             <a:avLst/>
@@ -16116,7 +16116,7 @@
               <a:buNone/>
             </a:pPr>
             <a:r>
-              <a:rPr lang="en-US" sz="1280" b="1" dirty="0">
+              <a:rPr lang="en-US" sz="1440" b="1" dirty="0">
                 <a:solidFill>
                   <a:srgbClr val="0B1F3A"/>
                 </a:solidFill>
@@ -16126,7 +16126,7 @@
               </a:rPr>
               <a:t>Số tia = độ phân giải: cùng một góc nhìn, chia được thành bao nhiêu hướng</a:t>
             </a:r>
-            <a:endParaRPr lang="en-US" sz="1280" dirty="0"/>
+            <a:endParaRPr lang="en-US" sz="1440" dirty="0"/>
           </a:p>
           <a:p>
             <a:pPr indent="0" marL="0">
@@ -16136,7 +16136,7 @@
               <a:buNone/>
             </a:pPr>
             <a:r>
-              <a:rPr lang="en-US" sz="890" dirty="0">
+              <a:rPr lang="en-US" sz="1000" dirty="0">
                 <a:solidFill>
                   <a:srgbClr val="007F72"/>
                 </a:solidFill>
@@ -16146,7 +16146,7 @@
               </a:rPr>
               <a:t>射線數 ＝ 解析度：同樣的視野，切成幾個方向去看</a:t>
             </a:r>
-            <a:endParaRPr lang="en-US" sz="1280" dirty="0"/>
+            <a:endParaRPr lang="en-US" sz="1440" dirty="0"/>
           </a:p>
         </p:txBody>
       </p:sp>
@@ -16158,8 +16158,8 @@
         </p:nvSpPr>
         <p:spPr>
           <a:xfrm>
-            <a:off x="2954794" y="1209321"/>
-            <a:ext cx="753397" cy="284196"/>
+            <a:off x="2749821" y="1332747"/>
+            <a:ext cx="848887" cy="320216"/>
           </a:xfrm>
           <a:prstGeom prst="roundRect">
             <a:avLst>
@@ -16180,8 +16180,8 @@
         </p:nvSpPr>
         <p:spPr>
           <a:xfrm>
-            <a:off x="2993763" y="1235301"/>
-            <a:ext cx="675460" cy="245227"/>
+            <a:off x="2793729" y="1362019"/>
+            <a:ext cx="761071" cy="276308"/>
           </a:xfrm>
           <a:prstGeom prst="rect">
             <a:avLst/>
@@ -16200,7 +16200,7 @@
               <a:buNone/>
             </a:pPr>
             <a:r>
-              <a:rPr lang="en-US" sz="640" b="1" dirty="0">
+              <a:rPr lang="en-US" sz="720" b="1" dirty="0">
                 <a:solidFill>
                   <a:srgbClr val="FFFFFF"/>
                 </a:solidFill>
@@ -16210,7 +16210,7 @@
               </a:rPr>
               <a:t>Tên thông số</a:t>
             </a:r>
-            <a:endParaRPr lang="en-US" sz="640" dirty="0"/>
+            <a:endParaRPr lang="en-US" sz="720" dirty="0"/>
           </a:p>
           <a:p>
             <a:pPr algn="ctr" indent="0" marL="0">
@@ -16220,7 +16220,7 @@
               <a:buNone/>
             </a:pPr>
             <a:r>
-              <a:rPr lang="en-US" sz="600" dirty="0">
+              <a:rPr lang="en-US" sz="680" dirty="0">
                 <a:solidFill>
                   <a:srgbClr val="FFFFFF"/>
                 </a:solidFill>
@@ -16230,7 +16230,7 @@
               </a:rPr>
               <a:t>規格表上叫</a:t>
             </a:r>
-            <a:endParaRPr lang="en-US" sz="640" dirty="0"/>
+            <a:endParaRPr lang="en-US" sz="720" dirty="0"/>
           </a:p>
         </p:txBody>
       </p:sp>
@@ -16242,8 +16242,8 @@
         </p:nvSpPr>
         <p:spPr>
           <a:xfrm>
-            <a:off x="3812108" y="1209321"/>
-            <a:ext cx="3650080" cy="323165"/>
+            <a:off x="3715795" y="1332747"/>
+            <a:ext cx="4112709" cy="364124"/>
           </a:xfrm>
           <a:prstGeom prst="rect">
             <a:avLst/>
@@ -16262,7 +16262,7 @@
               <a:buNone/>
             </a:pPr>
             <a:r>
-              <a:rPr lang="en-US" sz="780" dirty="0">
+              <a:rPr lang="en-US" sz="880" dirty="0">
                 <a:solidFill>
                   <a:srgbClr val="1A2733"/>
                 </a:solidFill>
@@ -16272,7 +16272,7 @@
               </a:rPr>
               <a:t>Resolution · độ phân giải</a:t>
             </a:r>
-            <a:endParaRPr lang="en-US" sz="780" dirty="0"/>
+            <a:endParaRPr lang="en-US" sz="880" dirty="0"/>
           </a:p>
           <a:p>
             <a:pPr indent="0" marL="0">
@@ -16282,7 +16282,7 @@
               <a:buNone/>
             </a:pPr>
             <a:r>
-              <a:rPr lang="en-US" sz="710" dirty="0">
+              <a:rPr lang="en-US" sz="800" dirty="0">
                 <a:solidFill>
                   <a:srgbClr val="5F7183"/>
                 </a:solidFill>
@@ -16292,7 +16292,7 @@
               </a:rPr>
               <a:t>Resolution　解析度</a:t>
             </a:r>
-            <a:endParaRPr lang="en-US" sz="780" dirty="0"/>
+            <a:endParaRPr lang="en-US" sz="880" dirty="0"/>
           </a:p>
         </p:txBody>
       </p:sp>
@@ -16304,8 +16304,8 @@
         </p:nvSpPr>
         <p:spPr>
           <a:xfrm>
-            <a:off x="2954794" y="1577950"/>
-            <a:ext cx="753397" cy="284196"/>
+            <a:off x="2749821" y="1748097"/>
+            <a:ext cx="848887" cy="320216"/>
           </a:xfrm>
           <a:prstGeom prst="roundRect">
             <a:avLst>
@@ -16326,8 +16326,8 @@
         </p:nvSpPr>
         <p:spPr>
           <a:xfrm>
-            <a:off x="2993763" y="1603929"/>
-            <a:ext cx="675460" cy="245227"/>
+            <a:off x="2793729" y="1777369"/>
+            <a:ext cx="761071" cy="276308"/>
           </a:xfrm>
           <a:prstGeom prst="rect">
             <a:avLst/>
@@ -16346,7 +16346,7 @@
               <a:buNone/>
             </a:pPr>
             <a:r>
-              <a:rPr lang="en-US" sz="640" b="1" dirty="0">
+              <a:rPr lang="en-US" sz="720" b="1" dirty="0">
                 <a:solidFill>
                   <a:srgbClr val="FFFFFF"/>
                 </a:solidFill>
@@ -16356,7 +16356,7 @@
               </a:rPr>
               <a:t>Mô phỏng của ta</a:t>
             </a:r>
-            <a:endParaRPr lang="en-US" sz="640" dirty="0"/>
+            <a:endParaRPr lang="en-US" sz="720" dirty="0"/>
           </a:p>
           <a:p>
             <a:pPr algn="ctr" indent="0" marL="0">
@@ -16366,7 +16366,7 @@
               <a:buNone/>
             </a:pPr>
             <a:r>
-              <a:rPr lang="en-US" sz="600" dirty="0">
+              <a:rPr lang="en-US" sz="680" dirty="0">
                 <a:solidFill>
                   <a:srgbClr val="FFFFFF"/>
                 </a:solidFill>
@@ -16376,7 +16376,7 @@
               </a:rPr>
               <a:t>我們的模擬器</a:t>
             </a:r>
-            <a:endParaRPr lang="en-US" sz="640" dirty="0"/>
+            <a:endParaRPr lang="en-US" sz="720" dirty="0"/>
           </a:p>
         </p:txBody>
       </p:sp>
@@ -16388,8 +16388,8 @@
         </p:nvSpPr>
         <p:spPr>
           <a:xfrm>
-            <a:off x="3812108" y="1577950"/>
-            <a:ext cx="3650080" cy="323165"/>
+            <a:off x="3715795" y="1748097"/>
+            <a:ext cx="4112709" cy="364124"/>
           </a:xfrm>
           <a:prstGeom prst="rect">
             <a:avLst/>
@@ -16408,7 +16408,7 @@
               <a:buNone/>
             </a:pPr>
             <a:r>
-              <a:rPr lang="en-US" sz="780" dirty="0">
+              <a:rPr lang="en-US" sz="880" dirty="0">
                 <a:solidFill>
                   <a:srgbClr val="1A2733"/>
                 </a:solidFill>
@@ -16418,7 +16418,7 @@
               </a:rPr>
               <a:t>3 đến 60 tia, bạn tự kéo</a:t>
             </a:r>
-            <a:endParaRPr lang="en-US" sz="780" dirty="0"/>
+            <a:endParaRPr lang="en-US" sz="880" dirty="0"/>
           </a:p>
           <a:p>
             <a:pPr indent="0" marL="0">
@@ -16428,7 +16428,7 @@
               <a:buNone/>
             </a:pPr>
             <a:r>
-              <a:rPr lang="en-US" sz="710" dirty="0">
+              <a:rPr lang="en-US" sz="800" dirty="0">
                 <a:solidFill>
                   <a:srgbClr val="5F7183"/>
                 </a:solidFill>
@@ -16438,7 +16438,7 @@
               </a:rPr>
               <a:t>3 到 60 條，自己拉</a:t>
             </a:r>
-            <a:endParaRPr lang="en-US" sz="780" dirty="0"/>
+            <a:endParaRPr lang="en-US" sz="880" dirty="0"/>
           </a:p>
         </p:txBody>
       </p:sp>
@@ -16450,8 +16450,8 @@
         </p:nvSpPr>
         <p:spPr>
           <a:xfrm>
-            <a:off x="2954794" y="1946578"/>
-            <a:ext cx="753397" cy="284196"/>
+            <a:off x="2749821" y="2163448"/>
+            <a:ext cx="848887" cy="320216"/>
           </a:xfrm>
           <a:prstGeom prst="roundRect">
             <a:avLst>
@@ -16472,8 +16472,8 @@
         </p:nvSpPr>
         <p:spPr>
           <a:xfrm>
-            <a:off x="2993763" y="1972558"/>
-            <a:ext cx="675460" cy="245227"/>
+            <a:off x="2793729" y="2192720"/>
+            <a:ext cx="761071" cy="276308"/>
           </a:xfrm>
           <a:prstGeom prst="rect">
             <a:avLst/>
@@ -16492,7 +16492,7 @@
               <a:buNone/>
             </a:pPr>
             <a:r>
-              <a:rPr lang="en-US" sz="640" b="1" dirty="0">
+              <a:rPr lang="en-US" sz="720" b="1" dirty="0">
                 <a:solidFill>
                   <a:srgbClr val="3A2A00"/>
                 </a:solidFill>
@@ -16502,7 +16502,7 @@
               </a:rPr>
               <a:t>Xe thật</a:t>
             </a:r>
-            <a:endParaRPr lang="en-US" sz="640" dirty="0"/>
+            <a:endParaRPr lang="en-US" sz="720" dirty="0"/>
           </a:p>
           <a:p>
             <a:pPr algn="ctr" indent="0" marL="0">
@@ -16512,7 +16512,7 @@
               <a:buNone/>
             </a:pPr>
             <a:r>
-              <a:rPr lang="en-US" sz="600" dirty="0">
+              <a:rPr lang="en-US" sz="680" dirty="0">
                 <a:solidFill>
                   <a:srgbClr val="3A2A00"/>
                 </a:solidFill>
@@ -16522,7 +16522,7 @@
               </a:rPr>
               <a:t>真車</a:t>
             </a:r>
-            <a:endParaRPr lang="en-US" sz="640" dirty="0"/>
+            <a:endParaRPr lang="en-US" sz="720" dirty="0"/>
           </a:p>
         </p:txBody>
       </p:sp>
@@ -16534,8 +16534,8 @@
         </p:nvSpPr>
         <p:spPr>
           <a:xfrm>
-            <a:off x="3812108" y="1946578"/>
-            <a:ext cx="3650080" cy="323165"/>
+            <a:off x="3715795" y="2163448"/>
+            <a:ext cx="4112709" cy="364124"/>
           </a:xfrm>
           <a:prstGeom prst="rect">
             <a:avLst/>
@@ -16554,7 +16554,7 @@
               <a:buNone/>
             </a:pPr>
             <a:r>
-              <a:rPr lang="en-US" sz="780" dirty="0">
+              <a:rPr lang="en-US" sz="880" dirty="0">
                 <a:solidFill>
                   <a:srgbClr val="1A2733"/>
                 </a:solidFill>
@@ -16564,7 +16564,7 @@
               </a:rPr>
               <a:t>LiDAR bắn vài trăm nghìn đến vài triệu điểm mỗi giây</a:t>
             </a:r>
-            <a:endParaRPr lang="en-US" sz="780" dirty="0"/>
+            <a:endParaRPr lang="en-US" sz="880" dirty="0"/>
           </a:p>
           <a:p>
             <a:pPr indent="0" marL="0">
@@ -16574,7 +16574,7 @@
               <a:buNone/>
             </a:pPr>
             <a:r>
-              <a:rPr lang="en-US" sz="710" dirty="0">
+              <a:rPr lang="en-US" sz="800" dirty="0">
                 <a:solidFill>
                   <a:srgbClr val="5F7183"/>
                 </a:solidFill>
@@ -16584,7 +16584,7 @@
               </a:rPr>
               <a:t>光達每秒打幾十萬到幾百萬個點</a:t>
             </a:r>
-            <a:endParaRPr lang="en-US" sz="780" dirty="0"/>
+            <a:endParaRPr lang="en-US" sz="880" dirty="0"/>
           </a:p>
         </p:txBody>
       </p:sp>
@@ -16596,8 +16596,8 @@
         </p:nvSpPr>
         <p:spPr>
           <a:xfrm>
-            <a:off x="2954794" y="2315207"/>
-            <a:ext cx="753397" cy="284196"/>
+            <a:off x="2749821" y="2578798"/>
+            <a:ext cx="848887" cy="320216"/>
           </a:xfrm>
           <a:prstGeom prst="roundRect">
             <a:avLst>
@@ -16618,8 +16618,8 @@
         </p:nvSpPr>
         <p:spPr>
           <a:xfrm>
-            <a:off x="2993763" y="2341186"/>
-            <a:ext cx="675460" cy="245227"/>
+            <a:off x="2793729" y="2608070"/>
+            <a:ext cx="761071" cy="276308"/>
           </a:xfrm>
           <a:prstGeom prst="rect">
             <a:avLst/>
@@ -16638,7 +16638,7 @@
               <a:buNone/>
             </a:pPr>
             <a:r>
-              <a:rPr lang="en-US" sz="640" b="1" dirty="0">
+              <a:rPr lang="en-US" sz="720" b="1" dirty="0">
                 <a:solidFill>
                   <a:srgbClr val="FFFFFF"/>
                 </a:solidFill>
@@ -16648,7 +16648,7 @@
               </a:rPr>
               <a:t>Kéo nhỏ thì sao</a:t>
             </a:r>
-            <a:endParaRPr lang="en-US" sz="640" dirty="0"/>
+            <a:endParaRPr lang="en-US" sz="720" dirty="0"/>
           </a:p>
           <a:p>
             <a:pPr algn="ctr" indent="0" marL="0">
@@ -16658,7 +16658,7 @@
               <a:buNone/>
             </a:pPr>
             <a:r>
-              <a:rPr lang="en-US" sz="600" dirty="0">
+              <a:rPr lang="en-US" sz="680" dirty="0">
                 <a:solidFill>
                   <a:srgbClr val="FFFFFF"/>
                 </a:solidFill>
@@ -16668,7 +16668,7 @@
               </a:rPr>
               <a:t>調小會怎樣</a:t>
             </a:r>
-            <a:endParaRPr lang="en-US" sz="640" dirty="0"/>
+            <a:endParaRPr lang="en-US" sz="720" dirty="0"/>
           </a:p>
         </p:txBody>
       </p:sp>
@@ -16680,8 +16680,8 @@
         </p:nvSpPr>
         <p:spPr>
           <a:xfrm>
-            <a:off x="3812108" y="2315207"/>
-            <a:ext cx="3650080" cy="323165"/>
+            <a:off x="3715795" y="2578798"/>
+            <a:ext cx="4112709" cy="364124"/>
           </a:xfrm>
           <a:prstGeom prst="rect">
             <a:avLst/>
@@ -16700,7 +16700,7 @@
               <a:buNone/>
             </a:pPr>
             <a:r>
-              <a:rPr lang="en-US" sz="780" dirty="0">
+              <a:rPr lang="en-US" sz="880" dirty="0">
                 <a:solidFill>
                   <a:srgbClr val="1A2733"/>
                 </a:solidFill>
@@ -16710,7 +16710,7 @@
               </a:rPr>
               <a:t>Khe giữa hai tia rộng ra, xe máy lách qua khe thì không thấy</a:t>
             </a:r>
-            <a:endParaRPr lang="en-US" sz="780" dirty="0"/>
+            <a:endParaRPr lang="en-US" sz="880" dirty="0"/>
           </a:p>
           <a:p>
             <a:pPr indent="0" marL="0">
@@ -16720,7 +16720,7 @@
               <a:buNone/>
             </a:pPr>
             <a:r>
-              <a:rPr lang="en-US" sz="710" dirty="0">
+              <a:rPr lang="en-US" sz="800" dirty="0">
                 <a:solidFill>
                   <a:srgbClr val="5F7183"/>
                 </a:solidFill>
@@ -16730,7 +16730,7 @@
               </a:rPr>
               <a:t>射線之間的縫變寬，機車從縫裡鑽過去就看不到</a:t>
             </a:r>
-            <a:endParaRPr lang="en-US" sz="780" dirty="0"/>
+            <a:endParaRPr lang="en-US" sz="880" dirty="0"/>
           </a:p>
         </p:txBody>
       </p:sp>
@@ -16742,8 +16742,8 @@
         </p:nvSpPr>
         <p:spPr>
           <a:xfrm>
-            <a:off x="1681812" y="2819258"/>
-            <a:ext cx="5780375" cy="402678"/>
+            <a:off x="1315495" y="3146735"/>
+            <a:ext cx="6513009" cy="453715"/>
           </a:xfrm>
           <a:prstGeom prst="roundRect">
             <a:avLst>
@@ -16769,8 +16769,8 @@
         </p:nvSpPr>
         <p:spPr>
           <a:xfrm>
-            <a:off x="1811708" y="2864721"/>
-            <a:ext cx="5520583" cy="324740"/>
+            <a:off x="1461855" y="3197961"/>
+            <a:ext cx="6220290" cy="365899"/>
           </a:xfrm>
           <a:prstGeom prst="rect">
             <a:avLst/>
@@ -16789,7 +16789,7 @@
               <a:buNone/>
             </a:pPr>
             <a:r>
-              <a:rPr lang="en-US" sz="850" b="1" dirty="0">
+              <a:rPr lang="en-US" sz="960" b="1" dirty="0">
                 <a:solidFill>
                   <a:srgbClr val="7A4E00"/>
                 </a:solidFill>
@@ -16799,7 +16799,7 @@
               </a:rPr>
               <a:t>Tuần trước đã thấy: 3 tia thì xe máy biến mất giữa hai tia.</a:t>
             </a:r>
-            <a:endParaRPr lang="en-US" sz="850" dirty="0"/>
+            <a:endParaRPr lang="en-US" sz="960" dirty="0"/>
           </a:p>
           <a:p>
             <a:pPr indent="0" marL="0">
@@ -16809,7 +16809,7 @@
               <a:buNone/>
             </a:pPr>
             <a:r>
-              <a:rPr lang="en-US" sz="780" dirty="0">
+              <a:rPr lang="en-US" sz="880" dirty="0">
                 <a:solidFill>
                   <a:srgbClr val="7A4E00"/>
                 </a:solidFill>
@@ -16819,7 +16819,7 @@
               </a:rPr>
               <a:t>上週各位已經看過：只剩 3 條射線的時候，機車會從兩條線中間消失。</a:t>
             </a:r>
-            <a:endParaRPr lang="en-US" sz="850" dirty="0"/>
+            <a:endParaRPr lang="en-US" sz="960" dirty="0"/>
           </a:p>
         </p:txBody>
       </p:sp>
@@ -16839,8 +16839,8 @@
         </p:blipFill>
         <p:spPr>
           <a:xfrm>
-            <a:off x="6663327" y="3338842"/>
-            <a:ext cx="779376" cy="172200"/>
+            <a:off x="7882128" y="109728"/>
+            <a:ext cx="1097280" cy="242439"/>
           </a:xfrm>
           <a:prstGeom prst="rect">
             <a:avLst/>
@@ -16855,8 +16855,8 @@
         </p:nvSpPr>
         <p:spPr>
           <a:xfrm>
-            <a:off x="1402536" y="3390800"/>
-            <a:ext cx="584532" cy="181855"/>
+            <a:off x="1000822" y="102452"/>
+            <a:ext cx="658619" cy="204904"/>
           </a:xfrm>
           <a:prstGeom prst="rect">
             <a:avLst/>
@@ -16872,7 +16872,7 @@
               <a:buNone/>
             </a:pPr>
             <a:r>
-              <a:rPr lang="en-US" sz="640" dirty="0">
+              <a:rPr lang="en-US" sz="720" dirty="0">
                 <a:solidFill>
                   <a:srgbClr val="5F7183"/>
                 </a:solidFill>
@@ -16882,7 +16882,7 @@
               </a:rPr>
               <a:t>4 / 18</a:t>
             </a:r>
-            <a:endParaRPr lang="en-US" sz="640" dirty="0"/>
+            <a:endParaRPr lang="en-US" sz="720" dirty="0"/>
           </a:p>
         </p:txBody>
       </p:sp>
@@ -16894,8 +16894,8 @@
         </p:nvSpPr>
         <p:spPr>
           <a:xfrm>
-            <a:off x="2006553" y="3390800"/>
-            <a:ext cx="1428857" cy="181855"/>
+            <a:off x="1681395" y="102452"/>
+            <a:ext cx="1609957" cy="204904"/>
           </a:xfrm>
           <a:prstGeom prst="rect">
             <a:avLst/>
@@ -16911,7 +16911,7 @@
               <a:buNone/>
             </a:pPr>
             <a:r>
-              <a:rPr lang="en-US" sz="640" dirty="0">
+              <a:rPr lang="en-US" sz="720" dirty="0">
                 <a:solidFill>
                   <a:srgbClr val="5F7183"/>
                 </a:solidFill>
@@ -16921,7 +16921,7 @@
               </a:rPr>
               <a:t>Tiết 1 · 第 1 節</a:t>
             </a:r>
-            <a:endParaRPr lang="en-US" sz="640" dirty="0"/>
+            <a:endParaRPr lang="en-US" sz="720" dirty="0"/>
           </a:p>
         </p:txBody>
       </p:sp>
@@ -16944,8 +16944,8 @@
       </p:nvGrpSpPr>
       <p:grpSpPr>
         <a:xfrm>
-          <a:off x="0" y="0"/>
-          <a:ext cx="0" cy="0"/>
+          <a:off x="913006" y="0"/>
+          <a:ext cx="1" cy="1"/>
           <a:chOff x="0" y="0"/>
           <a:chExt cx="0" cy="0"/>
         </a:xfrm>
@@ -16958,8 +16958,8 @@
         </p:nvSpPr>
         <p:spPr>
           <a:xfrm>
-            <a:off x="1681812" y="286284"/>
-            <a:ext cx="5780375" cy="194844"/>
+            <a:off x="1315495" y="292720"/>
+            <a:ext cx="6513009" cy="219540"/>
           </a:xfrm>
           <a:prstGeom prst="rect">
             <a:avLst/>
@@ -16975,7 +16975,7 @@
               <a:buNone/>
             </a:pPr>
             <a:r>
-              <a:rPr lang="en-US" sz="920" b="1" dirty="0">
+              <a:rPr lang="en-US" sz="1040" b="1" dirty="0">
                 <a:solidFill>
                   <a:srgbClr val="007F72"/>
                 </a:solidFill>
@@ -16985,7 +16985,7 @@
               </a:rPr>
               <a:t>2 / 3　Chiều dài tia · 射線長度</a:t>
             </a:r>
-            <a:endParaRPr lang="en-US" sz="920" dirty="0"/>
+            <a:endParaRPr lang="en-US" sz="1040" dirty="0"/>
           </a:p>
         </p:txBody>
       </p:sp>
@@ -16997,8 +16997,8 @@
         </p:nvSpPr>
         <p:spPr>
           <a:xfrm>
-            <a:off x="1681812" y="649993"/>
-            <a:ext cx="1052158" cy="1363909"/>
+            <a:off x="1315495" y="702527"/>
+            <a:ext cx="1185514" cy="1536777"/>
           </a:xfrm>
           <a:prstGeom prst="roundRect">
             <a:avLst>
@@ -17024,8 +17024,8 @@
         </p:nvSpPr>
         <p:spPr>
           <a:xfrm>
-            <a:off x="1792873" y="1353521"/>
-            <a:ext cx="221343" cy="101818"/>
+            <a:off x="1440633" y="1495223"/>
+            <a:ext cx="249397" cy="114723"/>
           </a:xfrm>
           <a:prstGeom prst="roundRect">
             <a:avLst>
@@ -17046,8 +17046,8 @@
         </p:nvSpPr>
         <p:spPr>
           <a:xfrm>
-            <a:off x="1876984" y="1373884"/>
-            <a:ext cx="75257" cy="61091"/>
+            <a:off x="1535404" y="1518167"/>
+            <a:ext cx="84795" cy="68833"/>
           </a:xfrm>
           <a:prstGeom prst="roundRect">
             <a:avLst>
@@ -17068,8 +17068,8 @@
         </p:nvSpPr>
         <p:spPr>
           <a:xfrm>
-            <a:off x="2041884" y="1404430"/>
-            <a:ext cx="461131" cy="0"/>
+            <a:off x="1721204" y="1552584"/>
+            <a:ext cx="519577" cy="1"/>
           </a:xfrm>
           <a:prstGeom prst="line">
             <a:avLst/>
@@ -17092,8 +17092,8 @@
         </p:nvSpPr>
         <p:spPr>
           <a:xfrm>
-            <a:off x="2157167" y="1344028"/>
-            <a:ext cx="0" cy="120803"/>
+            <a:off x="1851099" y="1484527"/>
+            <a:ext cx="1" cy="136114"/>
           </a:xfrm>
           <a:prstGeom prst="line">
             <a:avLst/>
@@ -17115,8 +17115,8 @@
         </p:nvSpPr>
         <p:spPr>
           <a:xfrm>
-            <a:off x="2272450" y="1344028"/>
-            <a:ext cx="0" cy="120803"/>
+            <a:off x="1980993" y="1484527"/>
+            <a:ext cx="1" cy="136114"/>
           </a:xfrm>
           <a:prstGeom prst="line">
             <a:avLst/>
@@ -17138,8 +17138,8 @@
         </p:nvSpPr>
         <p:spPr>
           <a:xfrm>
-            <a:off x="2387733" y="1344028"/>
-            <a:ext cx="0" cy="120803"/>
+            <a:off x="2110887" y="1484527"/>
+            <a:ext cx="1" cy="136114"/>
           </a:xfrm>
           <a:prstGeom prst="line">
             <a:avLst/>
@@ -17161,8 +17161,8 @@
         </p:nvSpPr>
         <p:spPr>
           <a:xfrm>
-            <a:off x="2493793" y="1271546"/>
-            <a:ext cx="64558" cy="265767"/>
+            <a:off x="2230390" y="1402858"/>
+            <a:ext cx="72741" cy="299452"/>
           </a:xfrm>
           <a:prstGeom prst="roundRect">
             <a:avLst>
@@ -17183,8 +17183,8 @@
         </p:nvSpPr>
         <p:spPr>
           <a:xfrm>
-            <a:off x="2954794" y="585045"/>
-            <a:ext cx="4507394" cy="371026"/>
+            <a:off x="2749821" y="629347"/>
+            <a:ext cx="5078684" cy="418052"/>
           </a:xfrm>
           <a:prstGeom prst="rect">
             <a:avLst/>
@@ -17203,7 +17203,7 @@
               <a:buNone/>
             </a:pPr>
             <a:r>
-              <a:rPr lang="en-US" sz="1280" b="1" dirty="0">
+              <a:rPr lang="en-US" sz="1440" b="1" dirty="0">
                 <a:solidFill>
                   <a:srgbClr val="0B1F3A"/>
                 </a:solidFill>
@@ -17213,7 +17213,7 @@
               </a:rPr>
               <a:t>Chiều dài tia = tầm đo: nhìn được xa bao nhiêu mét</a:t>
             </a:r>
-            <a:endParaRPr lang="en-US" sz="1280" dirty="0"/>
+            <a:endParaRPr lang="en-US" sz="1440" dirty="0"/>
           </a:p>
           <a:p>
             <a:pPr indent="0" marL="0">
@@ -17223,7 +17223,7 @@
               <a:buNone/>
             </a:pPr>
             <a:r>
-              <a:rPr lang="en-US" sz="890" dirty="0">
+              <a:rPr lang="en-US" sz="1000" dirty="0">
                 <a:solidFill>
                   <a:srgbClr val="007F72"/>
                 </a:solidFill>
@@ -17233,7 +17233,7 @@
               </a:rPr>
               <a:t>射線長度 ＝ 測距範圍：看得到幾公尺</a:t>
             </a:r>
-            <a:endParaRPr lang="en-US" sz="1280" dirty="0"/>
+            <a:endParaRPr lang="en-US" sz="1440" dirty="0"/>
           </a:p>
         </p:txBody>
       </p:sp>
@@ -17245,8 +17245,8 @@
         </p:nvSpPr>
         <p:spPr>
           <a:xfrm>
-            <a:off x="2954794" y="1021019"/>
-            <a:ext cx="753397" cy="284196"/>
+            <a:off x="2749821" y="1120579"/>
+            <a:ext cx="848887" cy="320216"/>
           </a:xfrm>
           <a:prstGeom prst="roundRect">
             <a:avLst>
@@ -17267,8 +17267,8 @@
         </p:nvSpPr>
         <p:spPr>
           <a:xfrm>
-            <a:off x="2993763" y="1046998"/>
-            <a:ext cx="675460" cy="245227"/>
+            <a:off x="2793729" y="1149851"/>
+            <a:ext cx="761071" cy="276308"/>
           </a:xfrm>
           <a:prstGeom prst="rect">
             <a:avLst/>
@@ -17287,7 +17287,7 @@
               <a:buNone/>
             </a:pPr>
             <a:r>
-              <a:rPr lang="en-US" sz="640" b="1" dirty="0">
+              <a:rPr lang="en-US" sz="720" b="1" dirty="0">
                 <a:solidFill>
                   <a:srgbClr val="FFFFFF"/>
                 </a:solidFill>
@@ -17297,7 +17297,7 @@
               </a:rPr>
               <a:t>Tên thông số</a:t>
             </a:r>
-            <a:endParaRPr lang="en-US" sz="640" dirty="0"/>
+            <a:endParaRPr lang="en-US" sz="720" dirty="0"/>
           </a:p>
           <a:p>
             <a:pPr algn="ctr" indent="0" marL="0">
@@ -17307,7 +17307,7 @@
               <a:buNone/>
             </a:pPr>
             <a:r>
-              <a:rPr lang="en-US" sz="600" dirty="0">
+              <a:rPr lang="en-US" sz="680" dirty="0">
                 <a:solidFill>
                   <a:srgbClr val="FFFFFF"/>
                 </a:solidFill>
@@ -17317,7 +17317,7 @@
               </a:rPr>
               <a:t>規格表上叫</a:t>
             </a:r>
-            <a:endParaRPr lang="en-US" sz="640" dirty="0"/>
+            <a:endParaRPr lang="en-US" sz="720" dirty="0"/>
           </a:p>
         </p:txBody>
       </p:sp>
@@ -17329,8 +17329,8 @@
         </p:nvSpPr>
         <p:spPr>
           <a:xfrm>
-            <a:off x="3812108" y="1021019"/>
-            <a:ext cx="3650080" cy="323165"/>
+            <a:off x="3715795" y="1120579"/>
+            <a:ext cx="4112709" cy="364124"/>
           </a:xfrm>
           <a:prstGeom prst="rect">
             <a:avLst/>
@@ -17349,7 +17349,7 @@
               <a:buNone/>
             </a:pPr>
             <a:r>
-              <a:rPr lang="en-US" sz="780" dirty="0">
+              <a:rPr lang="en-US" sz="880" dirty="0">
                 <a:solidFill>
                   <a:srgbClr val="1A2733"/>
                 </a:solidFill>
@@ -17359,7 +17359,7 @@
               </a:rPr>
               <a:t>Range · tầm đo</a:t>
             </a:r>
-            <a:endParaRPr lang="en-US" sz="780" dirty="0"/>
+            <a:endParaRPr lang="en-US" sz="880" dirty="0"/>
           </a:p>
           <a:p>
             <a:pPr indent="0" marL="0">
@@ -17369,7 +17369,7 @@
               <a:buNone/>
             </a:pPr>
             <a:r>
-              <a:rPr lang="en-US" sz="710" dirty="0">
+              <a:rPr lang="en-US" sz="800" dirty="0">
                 <a:solidFill>
                   <a:srgbClr val="5F7183"/>
                 </a:solidFill>
@@ -17379,7 +17379,7 @@
               </a:rPr>
               <a:t>Range　測距範圍</a:t>
             </a:r>
-            <a:endParaRPr lang="en-US" sz="780" dirty="0"/>
+            <a:endParaRPr lang="en-US" sz="880" dirty="0"/>
           </a:p>
         </p:txBody>
       </p:sp>
@@ -17391,8 +17391,8 @@
         </p:nvSpPr>
         <p:spPr>
           <a:xfrm>
-            <a:off x="2954794" y="1389648"/>
-            <a:ext cx="753397" cy="284196"/>
+            <a:off x="2749821" y="1535929"/>
+            <a:ext cx="848887" cy="320216"/>
           </a:xfrm>
           <a:prstGeom prst="roundRect">
             <a:avLst>
@@ -17413,8 +17413,8 @@
         </p:nvSpPr>
         <p:spPr>
           <a:xfrm>
-            <a:off x="2993763" y="1415627"/>
-            <a:ext cx="675460" cy="245227"/>
+            <a:off x="2793729" y="1565201"/>
+            <a:ext cx="761071" cy="276308"/>
           </a:xfrm>
           <a:prstGeom prst="rect">
             <a:avLst/>
@@ -17433,7 +17433,7 @@
               <a:buNone/>
             </a:pPr>
             <a:r>
-              <a:rPr lang="en-US" sz="640" b="1" dirty="0">
+              <a:rPr lang="en-US" sz="720" b="1" dirty="0">
                 <a:solidFill>
                   <a:srgbClr val="FFFFFF"/>
                 </a:solidFill>
@@ -17443,7 +17443,7 @@
               </a:rPr>
               <a:t>Mô phỏng của ta</a:t>
             </a:r>
-            <a:endParaRPr lang="en-US" sz="640" dirty="0"/>
+            <a:endParaRPr lang="en-US" sz="720" dirty="0"/>
           </a:p>
           <a:p>
             <a:pPr algn="ctr" indent="0" marL="0">
@@ -17453,7 +17453,7 @@
               <a:buNone/>
             </a:pPr>
             <a:r>
-              <a:rPr lang="en-US" sz="600" dirty="0">
+              <a:rPr lang="en-US" sz="680" dirty="0">
                 <a:solidFill>
                   <a:srgbClr val="FFFFFF"/>
                 </a:solidFill>
@@ -17463,7 +17463,7 @@
               </a:rPr>
               <a:t>我們的模擬器</a:t>
             </a:r>
-            <a:endParaRPr lang="en-US" sz="640" dirty="0"/>
+            <a:endParaRPr lang="en-US" sz="720" dirty="0"/>
           </a:p>
         </p:txBody>
       </p:sp>
@@ -17475,8 +17475,8 @@
         </p:nvSpPr>
         <p:spPr>
           <a:xfrm>
-            <a:off x="3812108" y="1389648"/>
-            <a:ext cx="3650080" cy="323165"/>
+            <a:off x="3715795" y="1535929"/>
+            <a:ext cx="4112709" cy="364124"/>
           </a:xfrm>
           <a:prstGeom prst="rect">
             <a:avLst/>
@@ -17495,7 +17495,7 @@
               <a:buNone/>
             </a:pPr>
             <a:r>
-              <a:rPr lang="en-US" sz="780" dirty="0">
+              <a:rPr lang="en-US" sz="880" dirty="0">
                 <a:solidFill>
                   <a:srgbClr val="1A2733"/>
                 </a:solidFill>
@@ -17505,7 +17505,7 @@
               </a:rPr>
               <a:t>10 đến 120 m</a:t>
             </a:r>
-            <a:endParaRPr lang="en-US" sz="780" dirty="0"/>
+            <a:endParaRPr lang="en-US" sz="880" dirty="0"/>
           </a:p>
           <a:p>
             <a:pPr indent="0" marL="0">
@@ -17515,7 +17515,7 @@
               <a:buNone/>
             </a:pPr>
             <a:r>
-              <a:rPr lang="en-US" sz="710" dirty="0">
+              <a:rPr lang="en-US" sz="800" dirty="0">
                 <a:solidFill>
                   <a:srgbClr val="5F7183"/>
                 </a:solidFill>
@@ -17525,7 +17525,7 @@
               </a:rPr>
               <a:t>10 到 120 公尺</a:t>
             </a:r>
-            <a:endParaRPr lang="en-US" sz="780" dirty="0"/>
+            <a:endParaRPr lang="en-US" sz="880" dirty="0"/>
           </a:p>
         </p:txBody>
       </p:sp>
@@ -17537,8 +17537,8 @@
         </p:nvSpPr>
         <p:spPr>
           <a:xfrm>
-            <a:off x="2954794" y="1758276"/>
-            <a:ext cx="753397" cy="284196"/>
+            <a:off x="2749821" y="1951279"/>
+            <a:ext cx="848887" cy="320216"/>
           </a:xfrm>
           <a:prstGeom prst="roundRect">
             <a:avLst>
@@ -17559,8 +17559,8 @@
         </p:nvSpPr>
         <p:spPr>
           <a:xfrm>
-            <a:off x="2993763" y="1784255"/>
-            <a:ext cx="675460" cy="245227"/>
+            <a:off x="2793729" y="1980551"/>
+            <a:ext cx="761071" cy="276308"/>
           </a:xfrm>
           <a:prstGeom prst="rect">
             <a:avLst/>
@@ -17579,7 +17579,7 @@
               <a:buNone/>
             </a:pPr>
             <a:r>
-              <a:rPr lang="en-US" sz="640" b="1" dirty="0">
+              <a:rPr lang="en-US" sz="720" b="1" dirty="0">
                 <a:solidFill>
                   <a:srgbClr val="3A2A00"/>
                 </a:solidFill>
@@ -17589,7 +17589,7 @@
               </a:rPr>
               <a:t>LiDAR xe thật</a:t>
             </a:r>
-            <a:endParaRPr lang="en-US" sz="640" dirty="0"/>
+            <a:endParaRPr lang="en-US" sz="720" dirty="0"/>
           </a:p>
           <a:p>
             <a:pPr algn="ctr" indent="0" marL="0">
@@ -17599,7 +17599,7 @@
               <a:buNone/>
             </a:pPr>
             <a:r>
-              <a:rPr lang="en-US" sz="600" dirty="0">
+              <a:rPr lang="en-US" sz="680" dirty="0">
                 <a:solidFill>
                   <a:srgbClr val="3A2A00"/>
                 </a:solidFill>
@@ -17609,7 +17609,7 @@
               </a:rPr>
               <a:t>真車的光達</a:t>
             </a:r>
-            <a:endParaRPr lang="en-US" sz="640" dirty="0"/>
+            <a:endParaRPr lang="en-US" sz="720" dirty="0"/>
           </a:p>
         </p:txBody>
       </p:sp>
@@ -17621,8 +17621,8 @@
         </p:nvSpPr>
         <p:spPr>
           <a:xfrm>
-            <a:off x="3812108" y="1758276"/>
-            <a:ext cx="3650080" cy="323165"/>
+            <a:off x="3715795" y="1951279"/>
+            <a:ext cx="4112709" cy="364124"/>
           </a:xfrm>
           <a:prstGeom prst="rect">
             <a:avLst/>
@@ -17641,7 +17641,7 @@
               <a:buNone/>
             </a:pPr>
             <a:r>
-              <a:rPr lang="en-US" sz="780" dirty="0">
+              <a:rPr lang="en-US" sz="880" dirty="0">
                 <a:solidFill>
                   <a:srgbClr val="1A2733"/>
                 </a:solidFill>
@@ -17651,7 +17651,7 @@
               </a:rPr>
               <a:t>150 đến 300 m</a:t>
             </a:r>
-            <a:endParaRPr lang="en-US" sz="780" dirty="0"/>
+            <a:endParaRPr lang="en-US" sz="880" dirty="0"/>
           </a:p>
           <a:p>
             <a:pPr indent="0" marL="0">
@@ -17661,7 +17661,7 @@
               <a:buNone/>
             </a:pPr>
             <a:r>
-              <a:rPr lang="en-US" sz="710" dirty="0">
+              <a:rPr lang="en-US" sz="800" dirty="0">
                 <a:solidFill>
                   <a:srgbClr val="5F7183"/>
                 </a:solidFill>
@@ -17671,7 +17671,7 @@
               </a:rPr>
               <a:t>150 到 300 公尺</a:t>
             </a:r>
-            <a:endParaRPr lang="en-US" sz="780" dirty="0"/>
+            <a:endParaRPr lang="en-US" sz="880" dirty="0"/>
           </a:p>
         </p:txBody>
       </p:sp>
@@ -17683,8 +17683,8 @@
         </p:nvSpPr>
         <p:spPr>
           <a:xfrm>
-            <a:off x="2954794" y="2126905"/>
-            <a:ext cx="753397" cy="284196"/>
+            <a:off x="2749821" y="2366630"/>
+            <a:ext cx="848887" cy="320216"/>
           </a:xfrm>
           <a:prstGeom prst="roundRect">
             <a:avLst>
@@ -17705,8 +17705,8 @@
         </p:nvSpPr>
         <p:spPr>
           <a:xfrm>
-            <a:off x="2993763" y="2152884"/>
-            <a:ext cx="675460" cy="245227"/>
+            <a:off x="2793729" y="2395902"/>
+            <a:ext cx="761071" cy="276308"/>
           </a:xfrm>
           <a:prstGeom prst="rect">
             <a:avLst/>
@@ -17725,7 +17725,7 @@
               <a:buNone/>
             </a:pPr>
             <a:r>
-              <a:rPr lang="en-US" sz="640" b="1" dirty="0">
+              <a:rPr lang="en-US" sz="720" b="1" dirty="0">
                 <a:solidFill>
                   <a:srgbClr val="FFFFFF"/>
                 </a:solidFill>
@@ -17735,7 +17735,7 @@
               </a:rPr>
               <a:t>Ngắn quá thì sao</a:t>
             </a:r>
-            <a:endParaRPr lang="en-US" sz="640" dirty="0"/>
+            <a:endParaRPr lang="en-US" sz="720" dirty="0"/>
           </a:p>
           <a:p>
             <a:pPr algn="ctr" indent="0" marL="0">
@@ -17745,7 +17745,7 @@
               <a:buNone/>
             </a:pPr>
             <a:r>
-              <a:rPr lang="en-US" sz="600" dirty="0">
+              <a:rPr lang="en-US" sz="680" dirty="0">
                 <a:solidFill>
                   <a:srgbClr val="FFFFFF"/>
                 </a:solidFill>
@@ -17755,7 +17755,7 @@
               </a:rPr>
               <a:t>太短會怎樣</a:t>
             </a:r>
-            <a:endParaRPr lang="en-US" sz="640" dirty="0"/>
+            <a:endParaRPr lang="en-US" sz="720" dirty="0"/>
           </a:p>
         </p:txBody>
       </p:sp>
@@ -17767,8 +17767,8 @@
         </p:nvSpPr>
         <p:spPr>
           <a:xfrm>
-            <a:off x="3812108" y="2126905"/>
-            <a:ext cx="3650080" cy="323165"/>
+            <a:off x="3715795" y="2366630"/>
+            <a:ext cx="4112709" cy="364124"/>
           </a:xfrm>
           <a:prstGeom prst="rect">
             <a:avLst/>
@@ -17787,7 +17787,7 @@
               <a:buNone/>
             </a:pPr>
             <a:r>
-              <a:rPr lang="en-US" sz="780" dirty="0">
+              <a:rPr lang="en-US" sz="880" dirty="0">
                 <a:solidFill>
                   <a:srgbClr val="1A2733"/>
                 </a:solidFill>
@@ -17797,7 +17797,7 @@
               </a:rPr>
               <a:t>Thấy rồi cũng phanh không kịp — chắc chắn đâm</a:t>
             </a:r>
-            <a:endParaRPr lang="en-US" sz="780" dirty="0"/>
+            <a:endParaRPr lang="en-US" sz="880" dirty="0"/>
           </a:p>
           <a:p>
             <a:pPr indent="0" marL="0">
@@ -17807,7 +17807,7 @@
               <a:buNone/>
             </a:pPr>
             <a:r>
-              <a:rPr lang="en-US" sz="710" dirty="0">
+              <a:rPr lang="en-US" sz="800" dirty="0">
                 <a:solidFill>
                   <a:srgbClr val="5F7183"/>
                 </a:solidFill>
@@ -17817,7 +17817,7 @@
               </a:rPr>
               <a:t>看到了也煞不住——一定撞</a:t>
             </a:r>
-            <a:endParaRPr lang="en-US" sz="780" dirty="0"/>
+            <a:endParaRPr lang="en-US" sz="880" dirty="0"/>
           </a:p>
         </p:txBody>
       </p:sp>
@@ -17829,8 +17829,8 @@
         </p:nvSpPr>
         <p:spPr>
           <a:xfrm>
-            <a:off x="1681812" y="2819258"/>
-            <a:ext cx="5780375" cy="402678"/>
+            <a:off x="1315495" y="3146735"/>
+            <a:ext cx="6513009" cy="453715"/>
           </a:xfrm>
           <a:prstGeom prst="roundRect">
             <a:avLst>
@@ -17856,8 +17856,8 @@
         </p:nvSpPr>
         <p:spPr>
           <a:xfrm>
-            <a:off x="1811708" y="2864721"/>
-            <a:ext cx="5520583" cy="324740"/>
+            <a:off x="1461855" y="3197961"/>
+            <a:ext cx="6220290" cy="365899"/>
           </a:xfrm>
           <a:prstGeom prst="rect">
             <a:avLst/>
@@ -17876,7 +17876,7 @@
               <a:buNone/>
             </a:pPr>
             <a:r>
-              <a:rPr lang="en-US" sz="850" b="1" dirty="0">
+              <a:rPr lang="en-US" sz="960" b="1" dirty="0">
                 <a:solidFill>
                   <a:srgbClr val="7A4E00"/>
                 </a:solidFill>
@@ -17886,7 +17886,7 @@
               </a:rPr>
               <a:t>Con số này không được tự chọn: quãng đường phanh quyết định nó. Trang sau tính.</a:t>
             </a:r>
-            <a:endParaRPr lang="en-US" sz="850" dirty="0"/>
+            <a:endParaRPr lang="en-US" sz="960" dirty="0"/>
           </a:p>
           <a:p>
             <a:pPr indent="0" marL="0">
@@ -17896,7 +17896,7 @@
               <a:buNone/>
             </a:pPr>
             <a:r>
-              <a:rPr lang="en-US" sz="780" dirty="0">
+              <a:rPr lang="en-US" sz="880" dirty="0">
                 <a:solidFill>
                   <a:srgbClr val="7A4E00"/>
                 </a:solidFill>
@@ -17906,7 +17906,7 @@
               </a:rPr>
               <a:t>這個數字不能隨便選：煞停距離決定它。下一頁就算給你看。</a:t>
             </a:r>
-            <a:endParaRPr lang="en-US" sz="850" dirty="0"/>
+            <a:endParaRPr lang="en-US" sz="960" dirty="0"/>
           </a:p>
         </p:txBody>
       </p:sp>
@@ -17926,8 +17926,8 @@
         </p:blipFill>
         <p:spPr>
           <a:xfrm>
-            <a:off x="6663327" y="3338842"/>
-            <a:ext cx="779376" cy="172200"/>
+            <a:off x="7882128" y="109728"/>
+            <a:ext cx="1097280" cy="242439"/>
           </a:xfrm>
           <a:prstGeom prst="rect">
             <a:avLst/>
@@ -17942,8 +17942,8 @@
         </p:nvSpPr>
         <p:spPr>
           <a:xfrm>
-            <a:off x="1402536" y="3390800"/>
-            <a:ext cx="584532" cy="181855"/>
+            <a:off x="1000822" y="102452"/>
+            <a:ext cx="658619" cy="204904"/>
           </a:xfrm>
           <a:prstGeom prst="rect">
             <a:avLst/>
@@ -17959,7 +17959,7 @@
               <a:buNone/>
             </a:pPr>
             <a:r>
-              <a:rPr lang="en-US" sz="640" dirty="0">
+              <a:rPr lang="en-US" sz="720" dirty="0">
                 <a:solidFill>
                   <a:srgbClr val="5F7183"/>
                 </a:solidFill>
@@ -17969,7 +17969,7 @@
               </a:rPr>
               <a:t>5 / 18</a:t>
             </a:r>
-            <a:endParaRPr lang="en-US" sz="640" dirty="0"/>
+            <a:endParaRPr lang="en-US" sz="720" dirty="0"/>
           </a:p>
         </p:txBody>
       </p:sp>
@@ -17981,8 +17981,8 @@
         </p:nvSpPr>
         <p:spPr>
           <a:xfrm>
-            <a:off x="2006553" y="3390800"/>
-            <a:ext cx="1428857" cy="181855"/>
+            <a:off x="1681395" y="102452"/>
+            <a:ext cx="1609957" cy="204904"/>
           </a:xfrm>
           <a:prstGeom prst="rect">
             <a:avLst/>
@@ -17998,7 +17998,7 @@
               <a:buNone/>
             </a:pPr>
             <a:r>
-              <a:rPr lang="en-US" sz="640" dirty="0">
+              <a:rPr lang="en-US" sz="720" dirty="0">
                 <a:solidFill>
                   <a:srgbClr val="5F7183"/>
                 </a:solidFill>
@@ -18008,7 +18008,7 @@
               </a:rPr>
               <a:t>Tiết 1 · 第 1 節</a:t>
             </a:r>
-            <a:endParaRPr lang="en-US" sz="640" dirty="0"/>
+            <a:endParaRPr lang="en-US" sz="720" dirty="0"/>
           </a:p>
         </p:txBody>
       </p:sp>
@@ -18031,8 +18031,8 @@
       </p:nvGrpSpPr>
       <p:grpSpPr>
         <a:xfrm>
-          <a:off x="0" y="0"/>
-          <a:ext cx="0" cy="0"/>
+          <a:off x="913006" y="0"/>
+          <a:ext cx="1" cy="1"/>
           <a:chOff x="0" y="0"/>
           <a:chExt cx="0" cy="0"/>
         </a:xfrm>
@@ -18045,8 +18045,8 @@
         </p:nvSpPr>
         <p:spPr>
           <a:xfrm>
-            <a:off x="1681812" y="286284"/>
-            <a:ext cx="5780375" cy="194844"/>
+            <a:off x="1315495" y="292720"/>
+            <a:ext cx="6513009" cy="219540"/>
           </a:xfrm>
           <a:prstGeom prst="rect">
             <a:avLst/>
@@ -18062,7 +18062,7 @@
               <a:buNone/>
             </a:pPr>
             <a:r>
-              <a:rPr lang="en-US" sz="920" b="1" dirty="0">
+              <a:rPr lang="en-US" sz="1040" b="1" dirty="0">
                 <a:solidFill>
                   <a:srgbClr val="007F72"/>
                 </a:solidFill>
@@ -18072,7 +18072,7 @@
               </a:rPr>
               <a:t>3 / 3　Góc quét · 張角</a:t>
             </a:r>
-            <a:endParaRPr lang="en-US" sz="920" dirty="0"/>
+            <a:endParaRPr lang="en-US" sz="1040" dirty="0"/>
           </a:p>
         </p:txBody>
       </p:sp>
@@ -18084,8 +18084,8 @@
         </p:nvSpPr>
         <p:spPr>
           <a:xfrm>
-            <a:off x="1681812" y="649993"/>
-            <a:ext cx="1052158" cy="1363909"/>
+            <a:off x="1315495" y="702527"/>
+            <a:ext cx="1185514" cy="1536777"/>
           </a:xfrm>
           <a:prstGeom prst="roundRect">
             <a:avLst>
@@ -18111,8 +18111,8 @@
         </p:nvSpPr>
         <p:spPr>
           <a:xfrm flipH="1" flipV="1">
-            <a:off x="1978213" y="749829"/>
-            <a:ext cx="229678" cy="340512"/>
+            <a:off x="1649463" y="815016"/>
+            <a:ext cx="258789" cy="383670"/>
           </a:xfrm>
           <a:prstGeom prst="line">
             <a:avLst/>
@@ -18134,8 +18134,8 @@
         </p:nvSpPr>
         <p:spPr>
           <a:xfrm flipH="1" flipV="1">
-            <a:off x="2087805" y="697556"/>
-            <a:ext cx="120086" cy="392784"/>
+            <a:off x="1772946" y="756118"/>
+            <a:ext cx="135307" cy="442568"/>
           </a:xfrm>
           <a:prstGeom prst="line">
             <a:avLst/>
@@ -18157,8 +18157,8 @@
         </p:nvSpPr>
         <p:spPr>
           <a:xfrm flipV="1">
-            <a:off x="2207891" y="679609"/>
-            <a:ext cx="0" cy="410731"/>
+            <a:off x="1908252" y="735897"/>
+            <a:ext cx="1" cy="462790"/>
           </a:xfrm>
           <a:prstGeom prst="line">
             <a:avLst/>
@@ -18180,8 +18180,8 @@
         </p:nvSpPr>
         <p:spPr>
           <a:xfrm flipV="1">
-            <a:off x="2207891" y="697556"/>
-            <a:ext cx="120086" cy="392784"/>
+            <a:off x="1908252" y="756118"/>
+            <a:ext cx="135307" cy="442568"/>
           </a:xfrm>
           <a:prstGeom prst="line">
             <a:avLst/>
@@ -18203,8 +18203,8 @@
         </p:nvSpPr>
         <p:spPr>
           <a:xfrm flipV="1">
-            <a:off x="2207891" y="749829"/>
-            <a:ext cx="229678" cy="340512"/>
+            <a:off x="1908252" y="815016"/>
+            <a:ext cx="258789" cy="383670"/>
           </a:xfrm>
           <a:prstGeom prst="line">
             <a:avLst/>
@@ -18226,8 +18226,8 @@
         </p:nvSpPr>
         <p:spPr>
           <a:xfrm>
-            <a:off x="2182068" y="1064517"/>
-            <a:ext cx="51647" cy="51647"/>
+            <a:off x="1879156" y="1169590"/>
+            <a:ext cx="58193" cy="58193"/>
           </a:xfrm>
           <a:prstGeom prst="ellipse">
             <a:avLst/>
@@ -18246,8 +18246,8 @@
         </p:nvSpPr>
         <p:spPr>
           <a:xfrm flipH="1" flipV="1">
-            <a:off x="1806136" y="1584801"/>
-            <a:ext cx="401756" cy="85396"/>
+            <a:off x="1455576" y="1755817"/>
+            <a:ext cx="452676" cy="96219"/>
           </a:xfrm>
           <a:prstGeom prst="line">
             <a:avLst/>
@@ -18269,8 +18269,8 @@
         </p:nvSpPr>
         <p:spPr>
           <a:xfrm flipH="1" flipV="1">
-            <a:off x="1949410" y="1350999"/>
-            <a:ext cx="258482" cy="319198"/>
+            <a:off x="1617009" y="1492381"/>
+            <a:ext cx="291243" cy="359655"/>
           </a:xfrm>
           <a:prstGeom prst="line">
             <a:avLst/>
@@ -18292,8 +18292,8 @@
         </p:nvSpPr>
         <p:spPr>
           <a:xfrm flipV="1">
-            <a:off x="2207891" y="1259466"/>
-            <a:ext cx="0" cy="410731"/>
+            <a:off x="1908252" y="1389247"/>
+            <a:ext cx="1" cy="462790"/>
           </a:xfrm>
           <a:prstGeom prst="line">
             <a:avLst/>
@@ -18315,8 +18315,8 @@
         </p:nvSpPr>
         <p:spPr>
           <a:xfrm flipV="1">
-            <a:off x="2207891" y="1350999"/>
-            <a:ext cx="258482" cy="319198"/>
+            <a:off x="1908252" y="1492381"/>
+            <a:ext cx="291243" cy="359655"/>
           </a:xfrm>
           <a:prstGeom prst="line">
             <a:avLst/>
@@ -18338,8 +18338,8 @@
         </p:nvSpPr>
         <p:spPr>
           <a:xfrm flipV="1">
-            <a:off x="2207891" y="1584801"/>
-            <a:ext cx="401756" cy="85396"/>
+            <a:off x="1908252" y="1755817"/>
+            <a:ext cx="452676" cy="96219"/>
           </a:xfrm>
           <a:prstGeom prst="line">
             <a:avLst/>
@@ -18361,8 +18361,8 @@
         </p:nvSpPr>
         <p:spPr>
           <a:xfrm>
-            <a:off x="2182068" y="1644374"/>
-            <a:ext cx="51647" cy="51647"/>
+            <a:off x="1879156" y="1822940"/>
+            <a:ext cx="58193" cy="58193"/>
           </a:xfrm>
           <a:prstGeom prst="ellipse">
             <a:avLst/>
@@ -18381,8 +18381,8 @@
         </p:nvSpPr>
         <p:spPr>
           <a:xfrm>
-            <a:off x="2954794" y="585045"/>
-            <a:ext cx="4507394" cy="559328"/>
+            <a:off x="2749821" y="629347"/>
+            <a:ext cx="5078684" cy="630220"/>
           </a:xfrm>
           <a:prstGeom prst="rect">
             <a:avLst/>
@@ -18401,7 +18401,7 @@
               <a:buNone/>
             </a:pPr>
             <a:r>
-              <a:rPr lang="en-US" sz="1280" b="1" dirty="0">
+              <a:rPr lang="en-US" sz="1440" b="1" dirty="0">
                 <a:solidFill>
                   <a:srgbClr val="0B1F3A"/>
                 </a:solidFill>
@@ -18411,7 +18411,7 @@
               </a:rPr>
               <a:t>Góc quét = góc nhìn: nhìn được rộng bao nhiêu sang hai bên</a:t>
             </a:r>
-            <a:endParaRPr lang="en-US" sz="1280" dirty="0"/>
+            <a:endParaRPr lang="en-US" sz="1440" dirty="0"/>
           </a:p>
           <a:p>
             <a:pPr indent="0" marL="0">
@@ -18421,7 +18421,7 @@
               <a:buNone/>
             </a:pPr>
             <a:r>
-              <a:rPr lang="en-US" sz="890" dirty="0">
+              <a:rPr lang="en-US" sz="1000" dirty="0">
                 <a:solidFill>
                   <a:srgbClr val="007F72"/>
                 </a:solidFill>
@@ -18431,7 +18431,7 @@
               </a:rPr>
               <a:t>張角 ＝ 視野：左右能看多寬</a:t>
             </a:r>
-            <a:endParaRPr lang="en-US" sz="1280" dirty="0"/>
+            <a:endParaRPr lang="en-US" sz="1440" dirty="0"/>
           </a:p>
         </p:txBody>
       </p:sp>
@@ -18443,8 +18443,8 @@
         </p:nvSpPr>
         <p:spPr>
           <a:xfrm>
-            <a:off x="2954794" y="1209321"/>
-            <a:ext cx="753397" cy="284196"/>
+            <a:off x="2749821" y="1332747"/>
+            <a:ext cx="848887" cy="320216"/>
           </a:xfrm>
           <a:prstGeom prst="roundRect">
             <a:avLst>
@@ -18465,8 +18465,8 @@
         </p:nvSpPr>
         <p:spPr>
           <a:xfrm>
-            <a:off x="2993763" y="1235301"/>
-            <a:ext cx="675460" cy="245227"/>
+            <a:off x="2793729" y="1362019"/>
+            <a:ext cx="761071" cy="276308"/>
           </a:xfrm>
           <a:prstGeom prst="rect">
             <a:avLst/>
@@ -18485,7 +18485,7 @@
               <a:buNone/>
             </a:pPr>
             <a:r>
-              <a:rPr lang="en-US" sz="640" b="1" dirty="0">
+              <a:rPr lang="en-US" sz="720" b="1" dirty="0">
                 <a:solidFill>
                   <a:srgbClr val="FFFFFF"/>
                 </a:solidFill>
@@ -18495,7 +18495,7 @@
               </a:rPr>
               <a:t>Tên thông số</a:t>
             </a:r>
-            <a:endParaRPr lang="en-US" sz="640" dirty="0"/>
+            <a:endParaRPr lang="en-US" sz="720" dirty="0"/>
           </a:p>
           <a:p>
             <a:pPr algn="ctr" indent="0" marL="0">
@@ -18505,7 +18505,7 @@
               <a:buNone/>
             </a:pPr>
             <a:r>
-              <a:rPr lang="en-US" sz="600" dirty="0">
+              <a:rPr lang="en-US" sz="680" dirty="0">
                 <a:solidFill>
                   <a:srgbClr val="FFFFFF"/>
                 </a:solidFill>
@@ -18515,7 +18515,7 @@
               </a:rPr>
               <a:t>規格表上叫</a:t>
             </a:r>
-            <a:endParaRPr lang="en-US" sz="640" dirty="0"/>
+            <a:endParaRPr lang="en-US" sz="720" dirty="0"/>
           </a:p>
         </p:txBody>
       </p:sp>
@@ -18527,8 +18527,8 @@
         </p:nvSpPr>
         <p:spPr>
           <a:xfrm>
-            <a:off x="3812108" y="1209321"/>
-            <a:ext cx="3650080" cy="323165"/>
+            <a:off x="3715795" y="1332747"/>
+            <a:ext cx="4112709" cy="364124"/>
           </a:xfrm>
           <a:prstGeom prst="rect">
             <a:avLst/>
@@ -18547,7 +18547,7 @@
               <a:buNone/>
             </a:pPr>
             <a:r>
-              <a:rPr lang="en-US" sz="780" dirty="0">
+              <a:rPr lang="en-US" sz="880" dirty="0">
                 <a:solidFill>
                   <a:srgbClr val="1A2733"/>
                 </a:solidFill>
@@ -18557,7 +18557,7 @@
               </a:rPr>
               <a:t>Field of view (FOV) · góc nhìn</a:t>
             </a:r>
-            <a:endParaRPr lang="en-US" sz="780" dirty="0"/>
+            <a:endParaRPr lang="en-US" sz="880" dirty="0"/>
           </a:p>
           <a:p>
             <a:pPr indent="0" marL="0">
@@ -18567,7 +18567,7 @@
               <a:buNone/>
             </a:pPr>
             <a:r>
-              <a:rPr lang="en-US" sz="710" dirty="0">
+              <a:rPr lang="en-US" sz="800" dirty="0">
                 <a:solidFill>
                   <a:srgbClr val="5F7183"/>
                 </a:solidFill>
@@ -18577,7 +18577,7 @@
               </a:rPr>
               <a:t>Field of view（FOV）　視野</a:t>
             </a:r>
-            <a:endParaRPr lang="en-US" sz="780" dirty="0"/>
+            <a:endParaRPr lang="en-US" sz="880" dirty="0"/>
           </a:p>
         </p:txBody>
       </p:sp>
@@ -18589,8 +18589,8 @@
         </p:nvSpPr>
         <p:spPr>
           <a:xfrm>
-            <a:off x="2954794" y="1577950"/>
-            <a:ext cx="753397" cy="284196"/>
+            <a:off x="2749821" y="1748097"/>
+            <a:ext cx="848887" cy="320216"/>
           </a:xfrm>
           <a:prstGeom prst="roundRect">
             <a:avLst>
@@ -18611,8 +18611,8 @@
         </p:nvSpPr>
         <p:spPr>
           <a:xfrm>
-            <a:off x="2993763" y="1603929"/>
-            <a:ext cx="675460" cy="245227"/>
+            <a:off x="2793729" y="1777369"/>
+            <a:ext cx="761071" cy="276308"/>
           </a:xfrm>
           <a:prstGeom prst="rect">
             <a:avLst/>
@@ -18631,7 +18631,7 @@
               <a:buNone/>
             </a:pPr>
             <a:r>
-              <a:rPr lang="en-US" sz="640" b="1" dirty="0">
+              <a:rPr lang="en-US" sz="720" b="1" dirty="0">
                 <a:solidFill>
                   <a:srgbClr val="FFFFFF"/>
                 </a:solidFill>
@@ -18641,7 +18641,7 @@
               </a:rPr>
               <a:t>Mô phỏng của ta</a:t>
             </a:r>
-            <a:endParaRPr lang="en-US" sz="640" dirty="0"/>
+            <a:endParaRPr lang="en-US" sz="720" dirty="0"/>
           </a:p>
           <a:p>
             <a:pPr algn="ctr" indent="0" marL="0">
@@ -18651,7 +18651,7 @@
               <a:buNone/>
             </a:pPr>
             <a:r>
-              <a:rPr lang="en-US" sz="600" dirty="0">
+              <a:rPr lang="en-US" sz="680" dirty="0">
                 <a:solidFill>
                   <a:srgbClr val="FFFFFF"/>
                 </a:solidFill>
@@ -18661,7 +18661,7 @@
               </a:rPr>
               <a:t>我們的模擬器</a:t>
             </a:r>
-            <a:endParaRPr lang="en-US" sz="640" dirty="0"/>
+            <a:endParaRPr lang="en-US" sz="720" dirty="0"/>
           </a:p>
         </p:txBody>
       </p:sp>
@@ -18673,8 +18673,8 @@
         </p:nvSpPr>
         <p:spPr>
           <a:xfrm>
-            <a:off x="3812108" y="1577950"/>
-            <a:ext cx="3650080" cy="323165"/>
+            <a:off x="3715795" y="1748097"/>
+            <a:ext cx="4112709" cy="364124"/>
           </a:xfrm>
           <a:prstGeom prst="rect">
             <a:avLst/>
@@ -18693,7 +18693,7 @@
               <a:buNone/>
             </a:pPr>
             <a:r>
-              <a:rPr lang="en-US" sz="780" dirty="0">
+              <a:rPr lang="en-US" sz="880" dirty="0">
                 <a:solidFill>
                   <a:srgbClr val="1A2733"/>
                 </a:solidFill>
@@ -18703,7 +18703,7 @@
               </a:rPr>
               <a:t>20° đến 180°</a:t>
             </a:r>
-            <a:endParaRPr lang="en-US" sz="780" dirty="0"/>
+            <a:endParaRPr lang="en-US" sz="880" dirty="0"/>
           </a:p>
           <a:p>
             <a:pPr indent="0" marL="0">
@@ -18713,7 +18713,7 @@
               <a:buNone/>
             </a:pPr>
             <a:r>
-              <a:rPr lang="en-US" sz="710" dirty="0">
+              <a:rPr lang="en-US" sz="800" dirty="0">
                 <a:solidFill>
                   <a:srgbClr val="5F7183"/>
                 </a:solidFill>
@@ -18723,7 +18723,7 @@
               </a:rPr>
               <a:t>20° 到 180°</a:t>
             </a:r>
-            <a:endParaRPr lang="en-US" sz="780" dirty="0"/>
+            <a:endParaRPr lang="en-US" sz="880" dirty="0"/>
           </a:p>
         </p:txBody>
       </p:sp>
@@ -18735,8 +18735,8 @@
         </p:nvSpPr>
         <p:spPr>
           <a:xfrm>
-            <a:off x="2954794" y="1946578"/>
-            <a:ext cx="753397" cy="284196"/>
+            <a:off x="2749821" y="2163448"/>
+            <a:ext cx="848887" cy="320216"/>
           </a:xfrm>
           <a:prstGeom prst="roundRect">
             <a:avLst>
@@ -18757,8 +18757,8 @@
         </p:nvSpPr>
         <p:spPr>
           <a:xfrm>
-            <a:off x="2993763" y="1972558"/>
-            <a:ext cx="675460" cy="245227"/>
+            <a:off x="2793729" y="2192720"/>
+            <a:ext cx="761071" cy="276308"/>
           </a:xfrm>
           <a:prstGeom prst="rect">
             <a:avLst/>
@@ -18777,7 +18777,7 @@
               <a:buNone/>
             </a:pPr>
             <a:r>
-              <a:rPr lang="en-US" sz="640" b="1" dirty="0">
+              <a:rPr lang="en-US" sz="720" b="1" dirty="0">
                 <a:solidFill>
                   <a:srgbClr val="3A2A00"/>
                 </a:solidFill>
@@ -18787,7 +18787,7 @@
               </a:rPr>
               <a:t>Kéo hẹp thì sao</a:t>
             </a:r>
-            <a:endParaRPr lang="en-US" sz="640" dirty="0"/>
+            <a:endParaRPr lang="en-US" sz="720" dirty="0"/>
           </a:p>
           <a:p>
             <a:pPr algn="ctr" indent="0" marL="0">
@@ -18797,7 +18797,7 @@
               <a:buNone/>
             </a:pPr>
             <a:r>
-              <a:rPr lang="en-US" sz="600" dirty="0">
+              <a:rPr lang="en-US" sz="680" dirty="0">
                 <a:solidFill>
                   <a:srgbClr val="3A2A00"/>
                 </a:solidFill>
@@ -18807,7 +18807,7 @@
               </a:rPr>
               <a:t>調窄會怎樣</a:t>
             </a:r>
-            <a:endParaRPr lang="en-US" sz="640" dirty="0"/>
+            <a:endParaRPr lang="en-US" sz="720" dirty="0"/>
           </a:p>
         </p:txBody>
       </p:sp>
@@ -18819,8 +18819,8 @@
         </p:nvSpPr>
         <p:spPr>
           <a:xfrm>
-            <a:off x="3812108" y="1946578"/>
-            <a:ext cx="3650080" cy="323165"/>
+            <a:off x="3715795" y="2163448"/>
+            <a:ext cx="4112709" cy="364124"/>
           </a:xfrm>
           <a:prstGeom prst="rect">
             <a:avLst/>
@@ -18839,7 +18839,7 @@
               <a:buNone/>
             </a:pPr>
             <a:r>
-              <a:rPr lang="en-US" sz="780" dirty="0">
+              <a:rPr lang="en-US" sz="880" dirty="0">
                 <a:solidFill>
                   <a:srgbClr val="1A2733"/>
                 </a:solidFill>
@@ -18849,7 +18849,7 @@
               </a:rPr>
               <a:t>Xe máy tạt từ bên hông vào hoàn toàn không thấy</a:t>
             </a:r>
-            <a:endParaRPr lang="en-US" sz="780" dirty="0"/>
+            <a:endParaRPr lang="en-US" sz="880" dirty="0"/>
           </a:p>
           <a:p>
             <a:pPr indent="0" marL="0">
@@ -18859,7 +18859,7 @@
               <a:buNone/>
             </a:pPr>
             <a:r>
-              <a:rPr lang="en-US" sz="710" dirty="0">
+              <a:rPr lang="en-US" sz="800" dirty="0">
                 <a:solidFill>
                   <a:srgbClr val="5F7183"/>
                 </a:solidFill>
@@ -18869,7 +18869,7 @@
               </a:rPr>
               <a:t>從側面切進來的機車完全看不到</a:t>
             </a:r>
-            <a:endParaRPr lang="en-US" sz="780" dirty="0"/>
+            <a:endParaRPr lang="en-US" sz="880" dirty="0"/>
           </a:p>
         </p:txBody>
       </p:sp>
@@ -18881,8 +18881,8 @@
         </p:nvSpPr>
         <p:spPr>
           <a:xfrm>
-            <a:off x="2954794" y="2315207"/>
-            <a:ext cx="753397" cy="284196"/>
+            <a:off x="2749821" y="2578798"/>
+            <a:ext cx="848887" cy="320216"/>
           </a:xfrm>
           <a:prstGeom prst="roundRect">
             <a:avLst>
@@ -18903,8 +18903,8 @@
         </p:nvSpPr>
         <p:spPr>
           <a:xfrm>
-            <a:off x="2993763" y="2341186"/>
-            <a:ext cx="675460" cy="245227"/>
+            <a:off x="2793729" y="2608070"/>
+            <a:ext cx="761071" cy="276308"/>
           </a:xfrm>
           <a:prstGeom prst="rect">
             <a:avLst/>
@@ -18923,7 +18923,7 @@
               <a:buNone/>
             </a:pPr>
             <a:r>
-              <a:rPr lang="en-US" sz="640" b="1" dirty="0">
+              <a:rPr lang="en-US" sz="720" b="1" dirty="0">
                 <a:solidFill>
                   <a:srgbClr val="FFFFFF"/>
                 </a:solidFill>
@@ -18933,7 +18933,7 @@
               </a:rPr>
               <a:t>Kéo rộng thì sao</a:t>
             </a:r>
-            <a:endParaRPr lang="en-US" sz="640" dirty="0"/>
+            <a:endParaRPr lang="en-US" sz="720" dirty="0"/>
           </a:p>
           <a:p>
             <a:pPr algn="ctr" indent="0" marL="0">
@@ -18943,7 +18943,7 @@
               <a:buNone/>
             </a:pPr>
             <a:r>
-              <a:rPr lang="en-US" sz="600" dirty="0">
+              <a:rPr lang="en-US" sz="680" dirty="0">
                 <a:solidFill>
                   <a:srgbClr val="FFFFFF"/>
                 </a:solidFill>
@@ -18953,7 +18953,7 @@
               </a:rPr>
               <a:t>調寬會怎樣</a:t>
             </a:r>
-            <a:endParaRPr lang="en-US" sz="640" dirty="0"/>
+            <a:endParaRPr lang="en-US" sz="720" dirty="0"/>
           </a:p>
         </p:txBody>
       </p:sp>
@@ -18965,8 +18965,8 @@
         </p:nvSpPr>
         <p:spPr>
           <a:xfrm>
-            <a:off x="3812108" y="2315207"/>
-            <a:ext cx="3650080" cy="323165"/>
+            <a:off x="3715795" y="2578798"/>
+            <a:ext cx="4112709" cy="364124"/>
           </a:xfrm>
           <a:prstGeom prst="rect">
             <a:avLst/>
@@ -18985,7 +18985,7 @@
               <a:buNone/>
             </a:pPr>
             <a:r>
-              <a:rPr lang="en-US" sz="780" dirty="0">
+              <a:rPr lang="en-US" sz="880" dirty="0">
                 <a:solidFill>
                   <a:srgbClr val="1A2733"/>
                 </a:solidFill>
@@ -18995,7 +18995,7 @@
               </a:rPr>
               <a:t>Cùng số tia đó bị trải mỏng ra — mỗi hướng thưa hơn</a:t>
             </a:r>
-            <a:endParaRPr lang="en-US" sz="780" dirty="0"/>
+            <a:endParaRPr lang="en-US" sz="880" dirty="0"/>
           </a:p>
           <a:p>
             <a:pPr indent="0" marL="0">
@@ -19005,7 +19005,7 @@
               <a:buNone/>
             </a:pPr>
             <a:r>
-              <a:rPr lang="en-US" sz="710" dirty="0">
+              <a:rPr lang="en-US" sz="800" dirty="0">
                 <a:solidFill>
                   <a:srgbClr val="5F7183"/>
                 </a:solidFill>
@@ -19015,7 +19015,7 @@
               </a:rPr>
               <a:t>同樣的射線數被攤開——每個方向變稀</a:t>
             </a:r>
-            <a:endParaRPr lang="en-US" sz="780" dirty="0"/>
+            <a:endParaRPr lang="en-US" sz="880" dirty="0"/>
           </a:p>
         </p:txBody>
       </p:sp>
@@ -19027,8 +19027,8 @@
         </p:nvSpPr>
         <p:spPr>
           <a:xfrm>
-            <a:off x="1681812" y="2819258"/>
-            <a:ext cx="5780375" cy="402678"/>
+            <a:off x="1315495" y="3146735"/>
+            <a:ext cx="6513009" cy="453715"/>
           </a:xfrm>
           <a:prstGeom prst="roundRect">
             <a:avLst>
@@ -19054,8 +19054,8 @@
         </p:nvSpPr>
         <p:spPr>
           <a:xfrm>
-            <a:off x="1811708" y="2864721"/>
-            <a:ext cx="5520583" cy="324740"/>
+            <a:off x="1461855" y="3197961"/>
+            <a:ext cx="6220290" cy="365899"/>
           </a:xfrm>
           <a:prstGeom prst="rect">
             <a:avLst/>
@@ -19074,7 +19074,7 @@
               <a:buNone/>
             </a:pPr>
             <a:r>
-              <a:rPr lang="en-US" sz="850" b="1" dirty="0">
+              <a:rPr lang="en-US" sz="960" b="1" dirty="0">
                 <a:solidFill>
                   <a:srgbClr val="7A4E00"/>
                 </a:solidFill>
@@ -19084,7 +19084,7 @@
               </a:rPr>
               <a:t>Đây chính là bài của tuần 3: cùng một ngân sách, rộng và rõ chỉ chọn được một.</a:t>
             </a:r>
-            <a:endParaRPr lang="en-US" sz="850" dirty="0"/>
+            <a:endParaRPr lang="en-US" sz="960" dirty="0"/>
           </a:p>
           <a:p>
             <a:pPr indent="0" marL="0">
@@ -19094,7 +19094,7 @@
               <a:buNone/>
             </a:pPr>
             <a:r>
-              <a:rPr lang="en-US" sz="780" dirty="0">
+              <a:rPr lang="en-US" sz="880" dirty="0">
                 <a:solidFill>
                   <a:srgbClr val="7A4E00"/>
                 </a:solidFill>
@@ -19104,7 +19104,7 @@
               </a:rPr>
               <a:t>這就是第三週那一頁：同一份預算，看得廣和看得清只能選一個。</a:t>
             </a:r>
-            <a:endParaRPr lang="en-US" sz="850" dirty="0"/>
+            <a:endParaRPr lang="en-US" sz="960" dirty="0"/>
           </a:p>
         </p:txBody>
       </p:sp>
@@ -19124,8 +19124,8 @@
         </p:blipFill>
         <p:spPr>
           <a:xfrm>
-            <a:off x="6663327" y="3338842"/>
-            <a:ext cx="779376" cy="172200"/>
+            <a:off x="7882128" y="109728"/>
+            <a:ext cx="1097280" cy="242439"/>
           </a:xfrm>
           <a:prstGeom prst="rect">
             <a:avLst/>
@@ -19140,8 +19140,8 @@
         </p:nvSpPr>
         <p:spPr>
           <a:xfrm>
-            <a:off x="1402536" y="3390800"/>
-            <a:ext cx="584532" cy="181855"/>
+            <a:off x="1000822" y="102452"/>
+            <a:ext cx="658619" cy="204904"/>
           </a:xfrm>
           <a:prstGeom prst="rect">
             <a:avLst/>
@@ -19157,7 +19157,7 @@
               <a:buNone/>
             </a:pPr>
             <a:r>
-              <a:rPr lang="en-US" sz="640" dirty="0">
+              <a:rPr lang="en-US" sz="720" dirty="0">
                 <a:solidFill>
                   <a:srgbClr val="5F7183"/>
                 </a:solidFill>
@@ -19167,7 +19167,7 @@
               </a:rPr>
               <a:t>6 / 18</a:t>
             </a:r>
-            <a:endParaRPr lang="en-US" sz="640" dirty="0"/>
+            <a:endParaRPr lang="en-US" sz="720" dirty="0"/>
           </a:p>
         </p:txBody>
       </p:sp>
@@ -19179,8 +19179,8 @@
         </p:nvSpPr>
         <p:spPr>
           <a:xfrm>
-            <a:off x="2006553" y="3390800"/>
-            <a:ext cx="1428857" cy="181855"/>
+            <a:off x="1681395" y="102452"/>
+            <a:ext cx="1609957" cy="204904"/>
           </a:xfrm>
           <a:prstGeom prst="rect">
             <a:avLst/>
@@ -19196,7 +19196,7 @@
               <a:buNone/>
             </a:pPr>
             <a:r>
-              <a:rPr lang="en-US" sz="640" dirty="0">
+              <a:rPr lang="en-US" sz="720" dirty="0">
                 <a:solidFill>
                   <a:srgbClr val="5F7183"/>
                 </a:solidFill>
@@ -19206,7 +19206,7 @@
               </a:rPr>
               <a:t>Tiết 1 · 第 1 節</a:t>
             </a:r>
-            <a:endParaRPr lang="en-US" sz="640" dirty="0"/>
+            <a:endParaRPr lang="en-US" sz="720" dirty="0"/>
           </a:p>
         </p:txBody>
       </p:sp>
@@ -19229,8 +19229,8 @@
       </p:nvGrpSpPr>
       <p:grpSpPr>
         <a:xfrm>
-          <a:off x="0" y="0"/>
-          <a:ext cx="0" cy="0"/>
+          <a:off x="927820" y="0"/>
+          <a:ext cx="1" cy="1"/>
           <a:chOff x="0" y="0"/>
           <a:chExt cx="0" cy="0"/>
         </a:xfrm>
@@ -19243,8 +19243,8 @@
         </p:nvSpPr>
         <p:spPr>
           <a:xfrm>
-            <a:off x="1681812" y="234326"/>
-            <a:ext cx="5780375" cy="597522"/>
+            <a:off x="1328680" y="233228"/>
+            <a:ext cx="6486641" cy="670529"/>
           </a:xfrm>
           <a:prstGeom prst="rect">
             <a:avLst/>
@@ -19263,7 +19263,7 @@
               <a:buNone/>
             </a:pPr>
             <a:r>
-              <a:rPr lang="en-US" sz="1560" b="1" dirty="0">
+              <a:rPr lang="en-US" sz="1750" b="1" dirty="0">
                 <a:solidFill>
                   <a:srgbClr val="0B1F3A"/>
                 </a:solidFill>
@@ -19273,7 +19273,7 @@
               </a:rPr>
               <a:t>Quãng đường phanh quyết định tia phải dài bao nhiêu</a:t>
             </a:r>
-            <a:endParaRPr lang="en-US" sz="1560" dirty="0"/>
+            <a:endParaRPr lang="en-US" sz="1750" dirty="0"/>
           </a:p>
           <a:p>
             <a:pPr indent="0" marL="0">
@@ -19283,7 +19283,7 @@
               <a:buNone/>
             </a:pPr>
             <a:r>
-              <a:rPr lang="en-US" sz="960" dirty="0">
+              <a:rPr lang="en-US" sz="1080" dirty="0">
                 <a:solidFill>
                   <a:srgbClr val="5F7183"/>
                 </a:solidFill>
@@ -19293,7 +19293,7 @@
               </a:rPr>
               <a:t>煞停距離決定了射線至少要多長</a:t>
             </a:r>
-            <a:endParaRPr lang="en-US" sz="1560" dirty="0"/>
+            <a:endParaRPr lang="en-US" sz="1750" dirty="0"/>
           </a:p>
         </p:txBody>
       </p:sp>
@@ -19305,8 +19305,8 @@
         </p:nvSpPr>
         <p:spPr>
           <a:xfrm>
-            <a:off x="1681812" y="831848"/>
-            <a:ext cx="3572142" cy="1909472"/>
+            <a:off x="1328680" y="903757"/>
+            <a:ext cx="4008598" cy="2142778"/>
           </a:xfrm>
           <a:prstGeom prst="roundRect">
             <a:avLst>
@@ -19332,8 +19332,8 @@
         </p:nvSpPr>
         <p:spPr>
           <a:xfrm>
-            <a:off x="1772740" y="2533486"/>
-            <a:ext cx="3390288" cy="0"/>
+            <a:off x="1430717" y="2813307"/>
+            <a:ext cx="3804524" cy="1"/>
           </a:xfrm>
           <a:prstGeom prst="line">
             <a:avLst/>
@@ -19355,8 +19355,8 @@
         </p:nvSpPr>
         <p:spPr>
           <a:xfrm>
-            <a:off x="1889646" y="2234725"/>
-            <a:ext cx="233813" cy="103917"/>
+            <a:off x="1561907" y="2478043"/>
+            <a:ext cx="262381" cy="116614"/>
           </a:xfrm>
           <a:prstGeom prst="roundRect">
             <a:avLst>
@@ -19377,8 +19377,8 @@
         </p:nvSpPr>
         <p:spPr>
           <a:xfrm>
-            <a:off x="1837688" y="2338642"/>
-            <a:ext cx="337730" cy="194844"/>
+            <a:off x="1503600" y="2594656"/>
+            <a:ext cx="378995" cy="218651"/>
           </a:xfrm>
           <a:prstGeom prst="roundRect">
             <a:avLst>
@@ -19404,8 +19404,8 @@
         </p:nvSpPr>
         <p:spPr>
           <a:xfrm>
-            <a:off x="1876656" y="2488023"/>
-            <a:ext cx="90927" cy="90927"/>
+            <a:off x="1547330" y="2762289"/>
+            <a:ext cx="102037" cy="102037"/>
           </a:xfrm>
           <a:prstGeom prst="ellipse">
             <a:avLst/>
@@ -19424,8 +19424,8 @@
         </p:nvSpPr>
         <p:spPr>
           <a:xfrm>
-            <a:off x="2045521" y="2488023"/>
-            <a:ext cx="90927" cy="90927"/>
+            <a:off x="1736828" y="2762289"/>
+            <a:ext cx="102037" cy="102037"/>
           </a:xfrm>
           <a:prstGeom prst="ellipse">
             <a:avLst/>
@@ -19444,8 +19444,8 @@
         </p:nvSpPr>
         <p:spPr>
           <a:xfrm>
-            <a:off x="5007152" y="2151592"/>
-            <a:ext cx="77938" cy="77938"/>
+            <a:off x="5060320" y="2384752"/>
+            <a:ext cx="87460" cy="87460"/>
           </a:xfrm>
           <a:prstGeom prst="ellipse">
             <a:avLst/>
@@ -19464,12 +19464,12 @@
         </p:nvSpPr>
         <p:spPr>
           <a:xfrm>
-            <a:off x="4983771" y="2237323"/>
-            <a:ext cx="124700" cy="140288"/>
+            <a:off x="5034082" y="2480958"/>
+            <a:ext cx="139937" cy="157428"/>
           </a:xfrm>
           <a:prstGeom prst="roundRect">
             <a:avLst>
-              <a:gd name="adj" fmla="val 145834"/>
+              <a:gd name="adj" fmla="val 145833"/>
             </a:avLst>
           </a:prstGeom>
           <a:solidFill>
@@ -19486,8 +19486,8 @@
         </p:nvSpPr>
         <p:spPr>
           <a:xfrm rot="960000">
-            <a:off x="4962338" y="2249014"/>
-            <a:ext cx="31175" cy="101319"/>
+            <a:off x="5010030" y="2494077"/>
+            <a:ext cx="34984" cy="113698"/>
           </a:xfrm>
           <a:prstGeom prst="rect">
             <a:avLst/>
@@ -19506,8 +19506,8 @@
         </p:nvSpPr>
         <p:spPr>
           <a:xfrm rot="-960000">
-            <a:off x="5098729" y="2249014"/>
-            <a:ext cx="31175" cy="101319"/>
+            <a:off x="5163086" y="2494077"/>
+            <a:ext cx="34984" cy="113698"/>
           </a:xfrm>
           <a:prstGeom prst="rect">
             <a:avLst/>
@@ -19526,8 +19526,8 @@
         </p:nvSpPr>
         <p:spPr>
           <a:xfrm rot="300000">
-            <a:off x="5005203" y="2358127"/>
-            <a:ext cx="35072" cy="140288"/>
+            <a:off x="5058134" y="2616521"/>
+            <a:ext cx="39357" cy="157428"/>
           </a:xfrm>
           <a:prstGeom prst="rect">
             <a:avLst/>
@@ -19546,8 +19546,8 @@
         </p:nvSpPr>
         <p:spPr>
           <a:xfrm rot="-300000">
-            <a:off x="5051966" y="2358127"/>
-            <a:ext cx="35072" cy="140288"/>
+            <a:off x="5110610" y="2616521"/>
+            <a:ext cx="39357" cy="157428"/>
           </a:xfrm>
           <a:prstGeom prst="rect">
             <a:avLst/>
@@ -19566,8 +19566,8 @@
         </p:nvSpPr>
         <p:spPr>
           <a:xfrm>
-            <a:off x="2227376" y="1208546"/>
-            <a:ext cx="529438" cy="194844"/>
+            <a:off x="1940902" y="1326482"/>
+            <a:ext cx="594127" cy="218651"/>
           </a:xfrm>
           <a:prstGeom prst="rect">
             <a:avLst/>
@@ -19586,8 +19586,8 @@
         </p:nvSpPr>
         <p:spPr>
           <a:xfrm>
-            <a:off x="2227376" y="1228031"/>
-            <a:ext cx="529438" cy="155875"/>
+            <a:off x="1940902" y="1348347"/>
+            <a:ext cx="594127" cy="174921"/>
           </a:xfrm>
           <a:prstGeom prst="rect">
             <a:avLst/>
@@ -19603,7 +19603,7 @@
               <a:buNone/>
             </a:pPr>
             <a:r>
-              <a:rPr lang="en-US" sz="820" b="1" dirty="0">
+              <a:rPr lang="en-US" sz="920" b="1" dirty="0">
                 <a:solidFill>
                   <a:srgbClr val="FFFFFF"/>
                 </a:solidFill>
@@ -19613,7 +19613,7 @@
               </a:rPr>
               <a:t>4.2 m</a:t>
             </a:r>
-            <a:endParaRPr lang="en-US" sz="820" dirty="0"/>
+            <a:endParaRPr lang="en-US" sz="920" dirty="0"/>
           </a:p>
         </p:txBody>
       </p:sp>
@@ -19625,8 +19625,8 @@
         </p:nvSpPr>
         <p:spPr>
           <a:xfrm>
-            <a:off x="2097480" y="896796"/>
-            <a:ext cx="789231" cy="285771"/>
+            <a:off x="1795135" y="976640"/>
+            <a:ext cx="885662" cy="320688"/>
           </a:xfrm>
           <a:prstGeom prst="rect">
             <a:avLst/>
@@ -19645,7 +19645,7 @@
               <a:buNone/>
             </a:pPr>
             <a:r>
-              <a:rPr lang="en-US" sz="750" b="1" dirty="0">
+              <a:rPr lang="en-US" sz="840" b="1" dirty="0">
                 <a:solidFill>
                   <a:srgbClr val="E8A317"/>
                 </a:solidFill>
@@ -19655,7 +19655,7 @@
               </a:rPr>
               <a:t>Phản ứng</a:t>
             </a:r>
-            <a:endParaRPr lang="en-US" sz="750" dirty="0"/>
+            <a:endParaRPr lang="en-US" sz="840" dirty="0"/>
           </a:p>
           <a:p>
             <a:pPr algn="ctr" indent="0" marL="0">
@@ -19665,7 +19665,7 @@
               <a:buNone/>
             </a:pPr>
             <a:r>
-              <a:rPr lang="en-US" sz="670" dirty="0">
+              <a:rPr lang="en-US" sz="760" dirty="0">
                 <a:solidFill>
                   <a:srgbClr val="E8A317"/>
                 </a:solidFill>
@@ -19675,7 +19675,7 @@
               </a:rPr>
               <a:t>反應距離</a:t>
             </a:r>
-            <a:endParaRPr lang="en-US" sz="750" dirty="0"/>
+            <a:endParaRPr lang="en-US" sz="840" dirty="0"/>
           </a:p>
         </p:txBody>
       </p:sp>
@@ -19687,8 +19687,8 @@
         </p:nvSpPr>
         <p:spPr>
           <a:xfrm>
-            <a:off x="2058511" y="1455349"/>
-            <a:ext cx="867168" cy="324740"/>
+            <a:off x="1751405" y="1603439"/>
+            <a:ext cx="973122" cy="364418"/>
           </a:xfrm>
           <a:prstGeom prst="rect">
             <a:avLst/>
@@ -19707,7 +19707,7 @@
               <a:buNone/>
             </a:pPr>
             <a:r>
-              <a:rPr lang="en-US" sz="670" b="1" dirty="0">
+              <a:rPr lang="en-US" sz="760" b="1" dirty="0">
                 <a:solidFill>
                   <a:srgbClr val="5F7183"/>
                 </a:solidFill>
@@ -19717,7 +19717,7 @@
               </a:rPr>
               <a:t>0,3 s — chân chưa chạm phanh</a:t>
             </a:r>
-            <a:endParaRPr lang="en-US" sz="670" dirty="0"/>
+            <a:endParaRPr lang="en-US" sz="760" dirty="0"/>
           </a:p>
           <a:p>
             <a:pPr algn="ctr" indent="0" marL="0">
@@ -19727,7 +19727,7 @@
               <a:buNone/>
             </a:pPr>
             <a:r>
-              <a:rPr lang="en-US" sz="630" dirty="0">
+              <a:rPr lang="en-US" sz="700" dirty="0">
                 <a:solidFill>
                   <a:srgbClr val="5F7183"/>
                 </a:solidFill>
@@ -19737,7 +19737,7 @@
               </a:rPr>
               <a:t>0.3 秒，腳還沒踩到</a:t>
             </a:r>
-            <a:endParaRPr lang="en-US" sz="670" dirty="0"/>
+            <a:endParaRPr lang="en-US" sz="760" dirty="0"/>
           </a:p>
         </p:txBody>
       </p:sp>
@@ -19749,8 +19749,8 @@
         </p:nvSpPr>
         <p:spPr>
           <a:xfrm>
-            <a:off x="2756814" y="1208546"/>
-            <a:ext cx="2029514" cy="194844"/>
+            <a:off x="2535029" y="1326482"/>
+            <a:ext cx="2277487" cy="218651"/>
           </a:xfrm>
           <a:prstGeom prst="rect">
             <a:avLst/>
@@ -19769,8 +19769,8 @@
         </p:nvSpPr>
         <p:spPr>
           <a:xfrm>
-            <a:off x="2756814" y="1228031"/>
-            <a:ext cx="2029514" cy="155875"/>
+            <a:off x="2535029" y="1348347"/>
+            <a:ext cx="2277487" cy="174921"/>
           </a:xfrm>
           <a:prstGeom prst="rect">
             <a:avLst/>
@@ -19786,7 +19786,7 @@
               <a:buNone/>
             </a:pPr>
             <a:r>
-              <a:rPr lang="en-US" sz="820" b="1" dirty="0">
+              <a:rPr lang="en-US" sz="920" b="1" dirty="0">
                 <a:solidFill>
                   <a:srgbClr val="FFFFFF"/>
                 </a:solidFill>
@@ -19796,7 +19796,7 @@
               </a:rPr>
               <a:t>16.1 m</a:t>
             </a:r>
-            <a:endParaRPr lang="en-US" sz="820" dirty="0"/>
+            <a:endParaRPr lang="en-US" sz="920" dirty="0"/>
           </a:p>
         </p:txBody>
       </p:sp>
@@ -19808,8 +19808,8 @@
         </p:nvSpPr>
         <p:spPr>
           <a:xfrm>
-            <a:off x="2626918" y="896796"/>
-            <a:ext cx="2289306" cy="285771"/>
+            <a:off x="2389262" y="976640"/>
+            <a:ext cx="2569021" cy="320688"/>
           </a:xfrm>
           <a:prstGeom prst="rect">
             <a:avLst/>
@@ -19828,7 +19828,7 @@
               <a:buNone/>
             </a:pPr>
             <a:r>
-              <a:rPr lang="en-US" sz="750" b="1" dirty="0">
+              <a:rPr lang="en-US" sz="840" b="1" dirty="0">
                 <a:solidFill>
                   <a:srgbClr val="D9463E"/>
                 </a:solidFill>
@@ -19838,7 +19838,7 @@
               </a:rPr>
               <a:t>Phanh</a:t>
             </a:r>
-            <a:endParaRPr lang="en-US" sz="750" dirty="0"/>
+            <a:endParaRPr lang="en-US" sz="840" dirty="0"/>
           </a:p>
           <a:p>
             <a:pPr algn="ctr" indent="0" marL="0">
@@ -19848,7 +19848,7 @@
               <a:buNone/>
             </a:pPr>
             <a:r>
-              <a:rPr lang="en-US" sz="670" dirty="0">
+              <a:rPr lang="en-US" sz="760" dirty="0">
                 <a:solidFill>
                   <a:srgbClr val="D9463E"/>
                 </a:solidFill>
@@ -19858,7 +19858,7 @@
               </a:rPr>
               <a:t>煞車距離</a:t>
             </a:r>
-            <a:endParaRPr lang="en-US" sz="750" dirty="0"/>
+            <a:endParaRPr lang="en-US" sz="840" dirty="0"/>
           </a:p>
         </p:txBody>
       </p:sp>
@@ -19870,8 +19870,8 @@
         </p:nvSpPr>
         <p:spPr>
           <a:xfrm>
-            <a:off x="2587949" y="1455349"/>
-            <a:ext cx="2367244" cy="324740"/>
+            <a:off x="2345532" y="1603439"/>
+            <a:ext cx="2656481" cy="364418"/>
           </a:xfrm>
           <a:prstGeom prst="rect">
             <a:avLst/>
@@ -19890,7 +19890,7 @@
               <a:buNone/>
             </a:pPr>
             <a:r>
-              <a:rPr lang="en-US" sz="670" b="1" dirty="0">
+              <a:rPr lang="en-US" sz="760" b="1" dirty="0">
                 <a:solidFill>
                   <a:srgbClr val="5F7183"/>
                 </a:solidFill>
@@ -19900,7 +19900,7 @@
               </a:rPr>
               <a:t>Tỉ lệ với BÌNH PHƯƠNG tốc độ</a:t>
             </a:r>
-            <a:endParaRPr lang="en-US" sz="670" dirty="0"/>
+            <a:endParaRPr lang="en-US" sz="760" dirty="0"/>
           </a:p>
           <a:p>
             <a:pPr algn="ctr" indent="0" marL="0">
@@ -19910,7 +19910,7 @@
               <a:buNone/>
             </a:pPr>
             <a:r>
-              <a:rPr lang="en-US" sz="630" dirty="0">
+              <a:rPr lang="en-US" sz="700" dirty="0">
                 <a:solidFill>
                   <a:srgbClr val="5F7183"/>
                 </a:solidFill>
@@ -19920,7 +19920,7 @@
               </a:rPr>
               <a:t>跟速度的平方成正比</a:t>
             </a:r>
-            <a:endParaRPr lang="en-US" sz="670" dirty="0"/>
+            <a:endParaRPr lang="en-US" sz="760" dirty="0"/>
           </a:p>
         </p:txBody>
       </p:sp>
@@ -19932,8 +19932,8 @@
         </p:nvSpPr>
         <p:spPr>
           <a:xfrm>
-            <a:off x="2756814" y="1169577"/>
-            <a:ext cx="0" cy="272782"/>
+            <a:off x="2535029" y="1282751"/>
+            <a:ext cx="1" cy="306111"/>
           </a:xfrm>
           <a:prstGeom prst="line">
             <a:avLst/>
@@ -19955,8 +19955,8 @@
         </p:nvSpPr>
         <p:spPr>
           <a:xfrm>
-            <a:off x="2227376" y="1858027"/>
-            <a:ext cx="2558953" cy="0"/>
+            <a:off x="1940902" y="2055318"/>
+            <a:ext cx="2871614" cy="1"/>
           </a:xfrm>
           <a:prstGeom prst="line">
             <a:avLst/>
@@ -19978,8 +19978,8 @@
         </p:nvSpPr>
         <p:spPr>
           <a:xfrm>
-            <a:off x="2032532" y="1884006"/>
-            <a:ext cx="2948641" cy="233813"/>
+            <a:off x="1722251" y="2084471"/>
+            <a:ext cx="3308916" cy="262381"/>
           </a:xfrm>
           <a:prstGeom prst="rect">
             <a:avLst/>
@@ -19998,7 +19998,7 @@
               <a:buNone/>
             </a:pPr>
             <a:r>
-              <a:rPr lang="en-US" sz="820" b="1" dirty="0">
+              <a:rPr lang="en-US" sz="920" b="1" dirty="0">
                 <a:solidFill>
                   <a:srgbClr val="0B1F3A"/>
                 </a:solidFill>
@@ -20008,7 +20008,7 @@
               </a:rPr>
               <a:t>Tổng 20 m　→　tia phải ≥ 25 m</a:t>
             </a:r>
-            <a:endParaRPr lang="en-US" sz="820" dirty="0"/>
+            <a:endParaRPr lang="en-US" sz="920" dirty="0"/>
           </a:p>
           <a:p>
             <a:pPr algn="ctr" indent="0" marL="0">
@@ -20018,7 +20018,7 @@
               <a:buNone/>
             </a:pPr>
             <a:r>
-              <a:rPr lang="en-US" sz="750" dirty="0">
+              <a:rPr lang="en-US" sz="840" dirty="0">
                 <a:solidFill>
                   <a:srgbClr val="0B1F3A"/>
                 </a:solidFill>
@@ -20028,7 +20028,7 @@
               </a:rPr>
               <a:t>合計 20 公尺　→　射線至少 25 公尺</a:t>
             </a:r>
-            <a:endParaRPr lang="en-US" sz="820" dirty="0"/>
+            <a:endParaRPr lang="en-US" sz="920" dirty="0"/>
           </a:p>
         </p:txBody>
       </p:sp>
@@ -20040,8 +20040,8 @@
         </p:nvSpPr>
         <p:spPr>
           <a:xfrm>
-            <a:off x="5435809" y="831848"/>
-            <a:ext cx="2026379" cy="441647"/>
+            <a:off x="5541352" y="903757"/>
+            <a:ext cx="2273968" cy="495609"/>
           </a:xfrm>
           <a:prstGeom prst="roundRect">
             <a:avLst>
@@ -20062,8 +20062,8 @@
         </p:nvSpPr>
         <p:spPr>
           <a:xfrm>
-            <a:off x="5526736" y="883806"/>
-            <a:ext cx="1844524" cy="363709"/>
+            <a:off x="5643389" y="962064"/>
+            <a:ext cx="2069894" cy="408148"/>
           </a:xfrm>
           <a:prstGeom prst="rect">
             <a:avLst/>
@@ -20082,7 +20082,7 @@
               <a:buNone/>
             </a:pPr>
             <a:r>
-              <a:rPr lang="en-US" sz="850" b="1" dirty="0">
+              <a:rPr lang="en-US" sz="960" b="1" dirty="0">
                 <a:solidFill>
                   <a:srgbClr val="FFFFFF"/>
                 </a:solidFill>
@@ -20092,7 +20092,7 @@
               </a:rPr>
               <a:t>Phanh = v × 0,3 + v² ÷ 12</a:t>
             </a:r>
-            <a:endParaRPr lang="en-US" sz="850" dirty="0"/>
+            <a:endParaRPr lang="en-US" sz="960" dirty="0"/>
           </a:p>
           <a:p>
             <a:pPr indent="0" marL="0">
@@ -20102,7 +20102,7 @@
               <a:buNone/>
             </a:pPr>
             <a:r>
-              <a:rPr lang="en-US" sz="710" dirty="0">
+              <a:rPr lang="en-US" sz="800" dirty="0">
                 <a:solidFill>
                   <a:srgbClr val="AFC3D4"/>
                 </a:solidFill>
@@ -20112,7 +20112,7 @@
               </a:rPr>
               <a:t>煞停距離 ＝ v × 0.3 ＋ v² ÷ 12</a:t>
             </a:r>
-            <a:endParaRPr lang="en-US" sz="850" dirty="0"/>
+            <a:endParaRPr lang="en-US" sz="960" dirty="0"/>
           </a:p>
         </p:txBody>
       </p:sp>
@@ -20124,8 +20124,8 @@
         </p:nvSpPr>
         <p:spPr>
           <a:xfrm>
-            <a:off x="5435809" y="1338442"/>
-            <a:ext cx="2026379" cy="441647"/>
+            <a:off x="5541352" y="1472249"/>
+            <a:ext cx="2273968" cy="495609"/>
           </a:xfrm>
           <a:prstGeom prst="roundRect">
             <a:avLst>
@@ -20146,8 +20146,8 @@
         </p:nvSpPr>
         <p:spPr>
           <a:xfrm>
-            <a:off x="5526736" y="1390401"/>
-            <a:ext cx="1844524" cy="363709"/>
+            <a:off x="5643389" y="1530556"/>
+            <a:ext cx="2069894" cy="408148"/>
           </a:xfrm>
           <a:prstGeom prst="rect">
             <a:avLst/>
@@ -20166,7 +20166,7 @@
               <a:buNone/>
             </a:pPr>
             <a:r>
-              <a:rPr lang="en-US" sz="850" b="1" dirty="0">
+              <a:rPr lang="en-US" sz="960" b="1" dirty="0">
                 <a:solidFill>
                   <a:srgbClr val="007F72"/>
                 </a:solidFill>
@@ -20176,7 +20176,7 @@
               </a:rPr>
               <a:t>Chia 12 vì giảm tốc lấy 6 m/s²</a:t>
             </a:r>
-            <a:endParaRPr lang="en-US" sz="850" dirty="0"/>
+            <a:endParaRPr lang="en-US" sz="960" dirty="0"/>
           </a:p>
           <a:p>
             <a:pPr indent="0" marL="0">
@@ -20186,7 +20186,7 @@
               <a:buNone/>
             </a:pPr>
             <a:r>
-              <a:rPr lang="en-US" sz="710" dirty="0">
+              <a:rPr lang="en-US" sz="800" dirty="0">
                 <a:solidFill>
                   <a:srgbClr val="007F72"/>
                 </a:solidFill>
@@ -20196,7 +20196,7 @@
               </a:rPr>
               <a:t>除以 12：減速度取 6</a:t>
             </a:r>
-            <a:endParaRPr lang="en-US" sz="850" dirty="0"/>
+            <a:endParaRPr lang="en-US" sz="960" dirty="0"/>
           </a:p>
         </p:txBody>
       </p:sp>
@@ -20208,8 +20208,8 @@
         </p:nvSpPr>
         <p:spPr>
           <a:xfrm>
-            <a:off x="5435809" y="1871016"/>
-            <a:ext cx="2026379" cy="259792"/>
+            <a:off x="5541352" y="2069894"/>
+            <a:ext cx="2273968" cy="291534"/>
           </a:xfrm>
           <a:prstGeom prst="rect">
             <a:avLst/>
@@ -20228,7 +20228,7 @@
               <a:buNone/>
             </a:pPr>
             <a:r>
-              <a:rPr lang="en-US" sz="750" b="1" dirty="0">
+              <a:rPr lang="en-US" sz="840" b="1" dirty="0">
                 <a:solidFill>
                   <a:srgbClr val="0B1F3A"/>
                 </a:solidFill>
@@ -20238,7 +20238,7 @@
               </a:rPr>
               <a:t>Ví dụ 50 km/h = 13,9 m/s</a:t>
             </a:r>
-            <a:endParaRPr lang="en-US" sz="750" dirty="0"/>
+            <a:endParaRPr lang="en-US" sz="840" dirty="0"/>
           </a:p>
           <a:p>
             <a:pPr indent="0" marL="0">
@@ -20248,7 +20248,7 @@
               <a:buNone/>
             </a:pPr>
             <a:r>
-              <a:rPr lang="en-US" sz="710" dirty="0">
+              <a:rPr lang="en-US" sz="800" dirty="0">
                 <a:solidFill>
                   <a:srgbClr val="0B1F3A"/>
                 </a:solidFill>
@@ -20258,7 +20258,7 @@
               </a:rPr>
               <a:t>代數字：時速 50 ＝ 每秒 13.9 公尺</a:t>
             </a:r>
-            <a:endParaRPr lang="en-US" sz="750" dirty="0"/>
+            <a:endParaRPr lang="en-US" sz="840" dirty="0"/>
           </a:p>
         </p:txBody>
       </p:sp>
@@ -20270,8 +20270,8 @@
         </p:nvSpPr>
         <p:spPr>
           <a:xfrm>
-            <a:off x="5435809" y="2143798"/>
-            <a:ext cx="2026379" cy="175360"/>
+            <a:off x="5541352" y="2376005"/>
+            <a:ext cx="2273968" cy="196786"/>
           </a:xfrm>
           <a:prstGeom prst="rect">
             <a:avLst/>
@@ -20287,7 +20287,7 @@
               <a:buNone/>
             </a:pPr>
             <a:r>
-              <a:rPr lang="en-US" sz="780" dirty="0">
+              <a:rPr lang="en-US" sz="880" dirty="0">
                 <a:solidFill>
                   <a:srgbClr val="1A2733"/>
                 </a:solidFill>
@@ -20297,7 +20297,7 @@
               </a:rPr>
               <a:t>13,9 × 0,3 = 4,2 m</a:t>
             </a:r>
-            <a:endParaRPr lang="en-US" sz="780" dirty="0"/>
+            <a:endParaRPr lang="en-US" sz="880" dirty="0"/>
           </a:p>
         </p:txBody>
       </p:sp>
@@ -20309,8 +20309,8 @@
         </p:nvSpPr>
         <p:spPr>
           <a:xfrm>
-            <a:off x="5435809" y="2319158"/>
-            <a:ext cx="2026379" cy="175360"/>
+            <a:off x="5541352" y="2572791"/>
+            <a:ext cx="2273968" cy="196786"/>
           </a:xfrm>
           <a:prstGeom prst="rect">
             <a:avLst/>
@@ -20326,7 +20326,7 @@
               <a:buNone/>
             </a:pPr>
             <a:r>
-              <a:rPr lang="en-US" sz="780" dirty="0">
+              <a:rPr lang="en-US" sz="880" dirty="0">
                 <a:solidFill>
                   <a:srgbClr val="1A2733"/>
                 </a:solidFill>
@@ -20336,7 +20336,7 @@
               </a:rPr>
               <a:t>13,9² ÷ 12 = 16,1 m</a:t>
             </a:r>
-            <a:endParaRPr lang="en-US" sz="780" dirty="0"/>
+            <a:endParaRPr lang="en-US" sz="880" dirty="0"/>
           </a:p>
         </p:txBody>
       </p:sp>
@@ -20348,8 +20348,8 @@
         </p:nvSpPr>
         <p:spPr>
           <a:xfrm>
-            <a:off x="5435809" y="2494517"/>
-            <a:ext cx="2026379" cy="175360"/>
+            <a:off x="5541352" y="2769577"/>
+            <a:ext cx="2273968" cy="196786"/>
           </a:xfrm>
           <a:prstGeom prst="rect">
             <a:avLst/>
@@ -20365,7 +20365,7 @@
               <a:buNone/>
             </a:pPr>
             <a:r>
-              <a:rPr lang="en-US" sz="780" b="1" dirty="0">
+              <a:rPr lang="en-US" sz="880" b="1" dirty="0">
                 <a:solidFill>
                   <a:srgbClr val="D9463E"/>
                 </a:solidFill>
@@ -20375,7 +20375,7 @@
               </a:rPr>
               <a:t>4,2 + 16,1 ≈ 20 m → tia ≥ 25 m</a:t>
             </a:r>
-            <a:endParaRPr lang="en-US" sz="780" dirty="0"/>
+            <a:endParaRPr lang="en-US" sz="880" dirty="0"/>
           </a:p>
         </p:txBody>
       </p:sp>
@@ -20387,8 +20387,8 @@
         </p:nvSpPr>
         <p:spPr>
           <a:xfrm>
-            <a:off x="1681812" y="2806268"/>
-            <a:ext cx="5780375" cy="428657"/>
+            <a:off x="1328680" y="3119418"/>
+            <a:ext cx="6486641" cy="481032"/>
           </a:xfrm>
           <a:prstGeom prst="roundRect">
             <a:avLst>
@@ -20414,8 +20414,8 @@
         </p:nvSpPr>
         <p:spPr>
           <a:xfrm>
-            <a:off x="1811708" y="2851732"/>
-            <a:ext cx="5520583" cy="350719"/>
+            <a:off x="1474447" y="3170437"/>
+            <a:ext cx="6195106" cy="393571"/>
           </a:xfrm>
           <a:prstGeom prst="rect">
             <a:avLst/>
@@ -20434,7 +20434,7 @@
               <a:buNone/>
             </a:pPr>
             <a:r>
-              <a:rPr lang="en-US" sz="850" b="1" dirty="0">
+              <a:rPr lang="en-US" sz="960" b="1" dirty="0">
                 <a:solidFill>
                   <a:srgbClr val="7A4E00"/>
                 </a:solidFill>
@@ -20444,7 +20444,7 @@
               </a:rPr>
               <a:t>Tia ngắn hơn quãng đường phanh thì thấy cũng vô ích. Giới hạn cứng.</a:t>
             </a:r>
-            <a:endParaRPr lang="en-US" sz="850" dirty="0"/>
+            <a:endParaRPr lang="en-US" sz="960" dirty="0"/>
           </a:p>
           <a:p>
             <a:pPr indent="0" marL="0">
@@ -20454,7 +20454,7 @@
               <a:buNone/>
             </a:pPr>
             <a:r>
-              <a:rPr lang="en-US" sz="780" dirty="0">
+              <a:rPr lang="en-US" sz="880" dirty="0">
                 <a:solidFill>
                   <a:srgbClr val="7A4E00"/>
                 </a:solidFill>
@@ -20464,7 +20464,7 @@
               </a:rPr>
               <a:t>射線比煞停距離短，看到也沒用。這是硬下限。</a:t>
             </a:r>
-            <a:endParaRPr lang="en-US" sz="850" dirty="0"/>
+            <a:endParaRPr lang="en-US" sz="960" dirty="0"/>
           </a:p>
         </p:txBody>
       </p:sp>
@@ -20484,8 +20484,8 @@
         </p:blipFill>
         <p:spPr>
           <a:xfrm>
-            <a:off x="6663327" y="3338842"/>
-            <a:ext cx="779376" cy="172200"/>
+            <a:off x="7882128" y="109728"/>
+            <a:ext cx="1097280" cy="242439"/>
           </a:xfrm>
           <a:prstGeom prst="rect">
             <a:avLst/>
@@ -20500,8 +20500,8 @@
         </p:nvSpPr>
         <p:spPr>
           <a:xfrm>
-            <a:off x="1402536" y="3390800"/>
-            <a:ext cx="584532" cy="181855"/>
+            <a:off x="1015280" y="102037"/>
+            <a:ext cx="655952" cy="204074"/>
           </a:xfrm>
           <a:prstGeom prst="rect">
             <a:avLst/>
@@ -20517,7 +20517,7 @@
               <a:buNone/>
             </a:pPr>
             <a:r>
-              <a:rPr lang="en-US" sz="640" dirty="0">
+              <a:rPr lang="en-US" sz="720" dirty="0">
                 <a:solidFill>
                   <a:srgbClr val="5F7183"/>
                 </a:solidFill>
@@ -20527,7 +20527,7 @@
               </a:rPr>
               <a:t>7 / 18</a:t>
             </a:r>
-            <a:endParaRPr lang="en-US" sz="640" dirty="0"/>
+            <a:endParaRPr lang="en-US" sz="720" dirty="0"/>
           </a:p>
         </p:txBody>
       </p:sp>
@@ -20539,8 +20539,8 @@
         </p:nvSpPr>
         <p:spPr>
           <a:xfrm>
-            <a:off x="2006553" y="3390800"/>
-            <a:ext cx="1428857" cy="181855"/>
+            <a:off x="1693098" y="102037"/>
+            <a:ext cx="1603439" cy="204074"/>
           </a:xfrm>
           <a:prstGeom prst="rect">
             <a:avLst/>
@@ -20556,7 +20556,7 @@
               <a:buNone/>
             </a:pPr>
             <a:r>
-              <a:rPr lang="en-US" sz="640" dirty="0">
+              <a:rPr lang="en-US" sz="720" dirty="0">
                 <a:solidFill>
                   <a:srgbClr val="5F7183"/>
                 </a:solidFill>
@@ -20566,7 +20566,7 @@
               </a:rPr>
               <a:t>Tiết 1 · 第 1 節</a:t>
             </a:r>
-            <a:endParaRPr lang="en-US" sz="640" dirty="0"/>
+            <a:endParaRPr lang="en-US" sz="720" dirty="0"/>
           </a:p>
         </p:txBody>
       </p:sp>
@@ -20589,8 +20589,8 @@
       </p:nvGrpSpPr>
       <p:grpSpPr>
         <a:xfrm>
-          <a:off x="0" y="0"/>
-          <a:ext cx="0" cy="0"/>
+          <a:off x="898071" y="0"/>
+          <a:ext cx="1" cy="1"/>
           <a:chOff x="0" y="0"/>
           <a:chExt cx="0" cy="0"/>
         </a:xfrm>
@@ -20603,8 +20603,8 @@
         </p:nvSpPr>
         <p:spPr>
           <a:xfrm>
-            <a:off x="1681812" y="286284"/>
-            <a:ext cx="5780375" cy="194844"/>
+            <a:off x="1302204" y="293914"/>
+            <a:ext cx="6539593" cy="220436"/>
           </a:xfrm>
           <a:prstGeom prst="rect">
             <a:avLst/>
@@ -20620,7 +20620,7 @@
               <a:buNone/>
             </a:pPr>
             <a:r>
-              <a:rPr lang="en-US" sz="920" b="1" dirty="0">
+              <a:rPr lang="en-US" sz="1040" b="1" dirty="0">
                 <a:solidFill>
                   <a:srgbClr val="007F72"/>
                 </a:solidFill>
@@ -20630,7 +20630,7 @@
               </a:rPr>
               <a:t>▶ Video · 煞停距離：為什麼看到了還是停不下來</a:t>
             </a:r>
-            <a:endParaRPr lang="en-US" sz="920" dirty="0"/>
+            <a:endParaRPr lang="en-US" sz="1040" dirty="0"/>
           </a:p>
         </p:txBody>
       </p:sp>
@@ -20642,8 +20642,8 @@
         </p:nvSpPr>
         <p:spPr>
           <a:xfrm>
-            <a:off x="1681812" y="507107"/>
-            <a:ext cx="5780375" cy="398243"/>
+            <a:off x="1302204" y="543741"/>
+            <a:ext cx="6539593" cy="450550"/>
           </a:xfrm>
           <a:prstGeom prst="rect">
             <a:avLst/>
@@ -20662,7 +20662,7 @@
               <a:buNone/>
             </a:pPr>
             <a:r>
-              <a:rPr lang="en-US" sz="1210" b="1" dirty="0">
+              <a:rPr lang="en-US" sz="1370" b="1" dirty="0">
                 <a:solidFill>
                   <a:srgbClr val="0B1F3A"/>
                 </a:solidFill>
@@ -20672,7 +20672,7 @@
               </a:rPr>
               <a:t>Hai đoạn đó, video này giảng lại một lần nữa</a:t>
             </a:r>
-            <a:endParaRPr lang="en-US" sz="1210" dirty="0"/>
+            <a:endParaRPr lang="en-US" sz="1370" dirty="0"/>
           </a:p>
           <a:p>
             <a:pPr indent="0" marL="0">
@@ -20682,7 +20682,7 @@
               <a:buNone/>
             </a:pPr>
             <a:r>
-              <a:rPr lang="en-US" sz="890" dirty="0">
+              <a:rPr lang="en-US" sz="1000" dirty="0">
                 <a:solidFill>
                   <a:srgbClr val="5F7183"/>
                 </a:solidFill>
@@ -20692,7 +20692,7 @@
               </a:rPr>
               <a:t>剛剛那兩段距離，這支影片再講一次</a:t>
             </a:r>
-            <a:endParaRPr lang="en-US" sz="1210" dirty="0"/>
+            <a:endParaRPr lang="en-US" sz="1370" dirty="0"/>
           </a:p>
         </p:txBody>
       </p:sp>
@@ -20704,8 +20704,8 @@
         </p:nvSpPr>
         <p:spPr>
           <a:xfrm>
-            <a:off x="1681812" y="918340"/>
-            <a:ext cx="2773281" cy="1822980"/>
+            <a:off x="1302204" y="1008987"/>
+            <a:ext cx="3137535" cy="2062418"/>
           </a:xfrm>
           <a:prstGeom prst="roundRect">
             <a:avLst>
@@ -20731,8 +20731,8 @@
         </p:nvSpPr>
         <p:spPr>
           <a:xfrm>
-            <a:off x="2034610" y="1219889"/>
-            <a:ext cx="738459" cy="184294"/>
+            <a:off x="1701339" y="1350142"/>
+            <a:ext cx="835452" cy="208499"/>
           </a:xfrm>
           <a:prstGeom prst="rect">
             <a:avLst/>
@@ -20748,7 +20748,7 @@
               <a:buNone/>
             </a:pPr>
             <a:r>
-              <a:rPr lang="en-US" sz="640" b="1" dirty="0">
+              <a:rPr lang="en-US" sz="720" b="1" dirty="0">
                 <a:solidFill>
                   <a:srgbClr val="6FA8DC"/>
                 </a:solidFill>
@@ -20758,7 +20758,7 @@
               </a:rPr>
               <a:t>khô  乾</a:t>
             </a:r>
-            <a:endParaRPr lang="en-US" sz="640" dirty="0"/>
+            <a:endParaRPr lang="en-US" sz="720" dirty="0"/>
           </a:p>
         </p:txBody>
       </p:sp>
@@ -20770,8 +20770,8 @@
         </p:nvSpPr>
         <p:spPr>
           <a:xfrm>
-            <a:off x="2034610" y="1407586"/>
-            <a:ext cx="443076" cy="203815"/>
+            <a:off x="1701339" y="1562492"/>
+            <a:ext cx="501271" cy="230585"/>
           </a:xfrm>
           <a:prstGeom prst="roundRect">
             <a:avLst>
@@ -20792,8 +20792,8 @@
         </p:nvSpPr>
         <p:spPr>
           <a:xfrm>
-            <a:off x="2202979" y="1448349"/>
-            <a:ext cx="150646" cy="122289"/>
+            <a:off x="1891822" y="1608609"/>
+            <a:ext cx="170432" cy="138351"/>
           </a:xfrm>
           <a:prstGeom prst="roundRect">
             <a:avLst>
@@ -20814,8 +20814,8 @@
         </p:nvSpPr>
         <p:spPr>
           <a:xfrm>
-            <a:off x="2526916" y="1509494"/>
-            <a:ext cx="935382" cy="0"/>
+            <a:off x="2258307" y="1677785"/>
+            <a:ext cx="1058238" cy="1"/>
           </a:xfrm>
           <a:prstGeom prst="line">
             <a:avLst/>
@@ -20837,8 +20837,8 @@
         </p:nvSpPr>
         <p:spPr>
           <a:xfrm>
-            <a:off x="3462298" y="1391019"/>
-            <a:ext cx="86154" cy="236949"/>
+            <a:off x="3316545" y="1543749"/>
+            <a:ext cx="97469" cy="268071"/>
           </a:xfrm>
           <a:prstGeom prst="roundRect">
             <a:avLst>
@@ -20859,8 +20859,8 @@
         </p:nvSpPr>
         <p:spPr>
           <a:xfrm>
-            <a:off x="2034610" y="1693788"/>
-            <a:ext cx="738459" cy="184294"/>
+            <a:off x="1701339" y="1886285"/>
+            <a:ext cx="835452" cy="208499"/>
           </a:xfrm>
           <a:prstGeom prst="rect">
             <a:avLst/>
@@ -20876,7 +20876,7 @@
               <a:buNone/>
             </a:pPr>
             <a:r>
-              <a:rPr lang="en-US" sz="640" b="1" dirty="0">
+              <a:rPr lang="en-US" sz="720" b="1" dirty="0">
                 <a:solidFill>
                   <a:srgbClr val="D9463E"/>
                 </a:solidFill>
@@ -20886,7 +20886,7 @@
               </a:rPr>
               <a:t>ướt  濕</a:t>
             </a:r>
-            <a:endParaRPr lang="en-US" sz="640" dirty="0"/>
+            <a:endParaRPr lang="en-US" sz="720" dirty="0"/>
           </a:p>
         </p:txBody>
       </p:sp>
@@ -20898,8 +20898,8 @@
         </p:nvSpPr>
         <p:spPr>
           <a:xfrm>
-            <a:off x="2034610" y="1881485"/>
-            <a:ext cx="443076" cy="203815"/>
+            <a:off x="1701339" y="2098635"/>
+            <a:ext cx="501271" cy="230585"/>
           </a:xfrm>
           <a:prstGeom prst="roundRect">
             <a:avLst>
@@ -20920,8 +20920,8 @@
         </p:nvSpPr>
         <p:spPr>
           <a:xfrm>
-            <a:off x="2202979" y="1922248"/>
-            <a:ext cx="150646" cy="122289"/>
+            <a:off x="1891822" y="2144752"/>
+            <a:ext cx="170432" cy="138351"/>
           </a:xfrm>
           <a:prstGeom prst="roundRect">
             <a:avLst>
@@ -20942,8 +20942,8 @@
         </p:nvSpPr>
         <p:spPr>
           <a:xfrm>
-            <a:off x="2526916" y="1983392"/>
-            <a:ext cx="1526149" cy="0"/>
+            <a:off x="2258307" y="2213928"/>
+            <a:ext cx="1726599" cy="1"/>
           </a:xfrm>
           <a:prstGeom prst="line">
             <a:avLst/>
@@ -20965,8 +20965,8 @@
         </p:nvSpPr>
         <p:spPr>
           <a:xfrm>
-            <a:off x="4053065" y="1864918"/>
-            <a:ext cx="86154" cy="236949"/>
+            <a:off x="3984906" y="2079892"/>
+            <a:ext cx="97469" cy="268071"/>
           </a:xfrm>
           <a:prstGeom prst="roundRect">
             <a:avLst>
@@ -20987,8 +20987,8 @@
         </p:nvSpPr>
         <p:spPr>
           <a:xfrm>
-            <a:off x="1811708" y="2351632"/>
-            <a:ext cx="2513489" cy="337730"/>
+            <a:off x="1449161" y="2630533"/>
+            <a:ext cx="2843621" cy="382089"/>
           </a:xfrm>
           <a:prstGeom prst="rect">
             <a:avLst/>
@@ -21007,7 +21007,7 @@
               <a:buNone/>
             </a:pPr>
             <a:r>
-              <a:rPr lang="en-US" sz="670" dirty="0">
+              <a:rPr lang="en-US" sz="760" dirty="0">
                 <a:solidFill>
                   <a:srgbClr val="5F7183"/>
                 </a:solidFill>
@@ -21017,7 +21017,7 @@
               </a:rPr>
               <a:t>Cùng tốc độ, đường ướt thì quãng đường phanh dài hơn hẳn — tiết 3 các bạn sẽ tự thấy.</a:t>
             </a:r>
-            <a:endParaRPr lang="en-US" sz="670" dirty="0"/>
+            <a:endParaRPr lang="en-US" sz="760" dirty="0"/>
           </a:p>
           <a:p>
             <a:pPr algn="ctr" indent="0" marL="0">
@@ -21027,7 +21027,7 @@
               <a:buNone/>
             </a:pPr>
             <a:r>
-              <a:rPr lang="en-US" sz="640" dirty="0">
+              <a:rPr lang="en-US" sz="720" dirty="0">
                 <a:solidFill>
                   <a:srgbClr val="5F7183"/>
                 </a:solidFill>
@@ -21037,7 +21037,7 @@
               </a:rPr>
               <a:t>同樣的車速，濕路面的煞車距離長得多——第三節各位會自己看到。</a:t>
             </a:r>
-            <a:endParaRPr lang="en-US" sz="670" dirty="0"/>
+            <a:endParaRPr lang="en-US" sz="760" dirty="0"/>
           </a:p>
         </p:txBody>
       </p:sp>
@@ -21049,8 +21049,8 @@
         </p:nvSpPr>
         <p:spPr>
           <a:xfrm>
-            <a:off x="4688906" y="918340"/>
-            <a:ext cx="2773281" cy="1822980"/>
+            <a:off x="4704261" y="1008987"/>
+            <a:ext cx="3137535" cy="2062418"/>
           </a:xfrm>
           <a:prstGeom prst="roundRect">
             <a:avLst>
@@ -21076,8 +21076,8 @@
         </p:nvSpPr>
         <p:spPr>
           <a:xfrm>
-            <a:off x="4818803" y="1035246"/>
-            <a:ext cx="246803" cy="246803"/>
+            <a:off x="4851219" y="1141248"/>
+            <a:ext cx="279219" cy="279219"/>
           </a:xfrm>
           <a:prstGeom prst="ellipse">
             <a:avLst/>
@@ -21096,8 +21096,8 @@
         </p:nvSpPr>
         <p:spPr>
           <a:xfrm>
-            <a:off x="4818803" y="1067721"/>
-            <a:ext cx="246803" cy="181855"/>
+            <a:off x="4851219" y="1177988"/>
+            <a:ext cx="279219" cy="205740"/>
           </a:xfrm>
           <a:prstGeom prst="rect">
             <a:avLst/>
@@ -21113,7 +21113,7 @@
               <a:buNone/>
             </a:pPr>
             <a:r>
-              <a:rPr lang="en-US" sz="850" b="1" dirty="0">
+              <a:rPr lang="en-US" sz="960" b="1" dirty="0">
                 <a:solidFill>
                   <a:srgbClr val="FFFFFF"/>
                 </a:solidFill>
@@ -21123,7 +21123,7 @@
               </a:rPr>
               <a:t>▶</a:t>
             </a:r>
-            <a:endParaRPr lang="en-US" sz="850" dirty="0"/>
+            <a:endParaRPr lang="en-US" sz="960" dirty="0"/>
           </a:p>
         </p:txBody>
       </p:sp>
@@ -21135,8 +21135,8 @@
         </p:nvSpPr>
         <p:spPr>
           <a:xfrm>
-            <a:off x="5117564" y="1022257"/>
-            <a:ext cx="2214728" cy="298761"/>
+            <a:off x="5189220" y="1126553"/>
+            <a:ext cx="2505619" cy="338001"/>
           </a:xfrm>
           <a:prstGeom prst="rect">
             <a:avLst/>
@@ -21152,7 +21152,7 @@
               <a:buNone/>
             </a:pPr>
             <a:r>
-              <a:rPr lang="en-US" sz="750" b="1" dirty="0">
+              <a:rPr lang="en-US" sz="840" b="1" dirty="0">
                 <a:solidFill>
                   <a:srgbClr val="0B1F3A"/>
                 </a:solidFill>
@@ -21162,7 +21162,7 @@
               </a:rPr>
               <a:t>Stopping Distance | Forces &amp; Motion | Physics</a:t>
             </a:r>
-            <a:endParaRPr lang="en-US" sz="750" dirty="0"/>
+            <a:endParaRPr lang="en-US" sz="840" dirty="0"/>
           </a:p>
         </p:txBody>
       </p:sp>
@@ -21174,8 +21174,8 @@
         </p:nvSpPr>
         <p:spPr>
           <a:xfrm>
-            <a:off x="4818803" y="1346997"/>
-            <a:ext cx="2513489" cy="142886"/>
+            <a:off x="4851219" y="1493945"/>
+            <a:ext cx="2843621" cy="161653"/>
           </a:xfrm>
           <a:prstGeom prst="rect">
             <a:avLst/>
@@ -21191,7 +21191,7 @@
               <a:buNone/>
             </a:pPr>
             <a:r>
-              <a:rPr lang="en-US" sz="640" dirty="0">
+              <a:rPr lang="en-US" sz="720" dirty="0">
                 <a:solidFill>
                   <a:srgbClr val="5F7183"/>
                 </a:solidFill>
@@ -21201,7 +21201,7 @@
               </a:rPr>
               <a:t>FuseSchool（教育頻道）　·　3:44，播到 2:30</a:t>
             </a:r>
-            <a:endParaRPr lang="en-US" sz="640" dirty="0"/>
+            <a:endParaRPr lang="en-US" sz="720" dirty="0"/>
           </a:p>
         </p:txBody>
       </p:sp>
@@ -21215,8 +21215,8 @@
         </p:nvSpPr>
         <p:spPr>
           <a:xfrm>
-            <a:off x="4818803" y="1476893"/>
-            <a:ext cx="2513489" cy="142886"/>
+            <a:off x="4851219" y="1640903"/>
+            <a:ext cx="2843621" cy="161653"/>
           </a:xfrm>
           <a:prstGeom prst="rect">
             <a:avLst/>
@@ -21232,7 +21232,7 @@
               <a:buNone/>
             </a:pPr>
             <a:r>
-              <a:rPr lang="en-US" sz="600" u="sng" dirty="0">
+              <a:rPr lang="en-US" sz="680" u="sng" dirty="0">
                 <a:solidFill>
                   <a:srgbClr val="1F6FBF"/>
                 </a:solidFill>
@@ -21249,7 +21249,7 @@
               </a:rPr>
               <a:t>https://www.youtube.com/watch?v=HTANxqGQcfI</a:t>
             </a:r>
-            <a:endParaRPr lang="en-US" sz="600" dirty="0"/>
+            <a:endParaRPr lang="en-US" sz="680" dirty="0"/>
           </a:p>
         </p:txBody>
       </p:sp>
@@ -21261,8 +21261,8 @@
         </p:nvSpPr>
         <p:spPr>
           <a:xfrm>
-            <a:off x="4818803" y="1671737"/>
-            <a:ext cx="25979" cy="168865"/>
+            <a:off x="4851219" y="1861338"/>
+            <a:ext cx="29391" cy="191044"/>
           </a:xfrm>
           <a:prstGeom prst="rect">
             <a:avLst/>
@@ -21281,8 +21281,8 @@
         </p:nvSpPr>
         <p:spPr>
           <a:xfrm>
-            <a:off x="4909730" y="1645758"/>
-            <a:ext cx="2435551" cy="419718"/>
+            <a:off x="4954089" y="1831947"/>
+            <a:ext cx="2755446" cy="474846"/>
           </a:xfrm>
           <a:prstGeom prst="rect">
             <a:avLst/>
@@ -21301,7 +21301,7 @@
               <a:buNone/>
             </a:pPr>
             <a:r>
-              <a:rPr lang="en-US" sz="670" dirty="0">
+              <a:rPr lang="en-US" sz="760" dirty="0">
                 <a:solidFill>
                   <a:srgbClr val="1A2733"/>
                 </a:solidFill>
@@ -21311,7 +21311,7 @@
               </a:rPr>
               <a:t>0:20–1:20　Quãng đường suy nghĩ: thời gian phản ứng × tốc độ. Mệt, dùng điện thoại thì dài thêm.</a:t>
             </a:r>
-            <a:endParaRPr lang="en-US" sz="670" dirty="0"/>
+            <a:endParaRPr lang="en-US" sz="760" dirty="0"/>
           </a:p>
           <a:p>
             <a:pPr indent="0" marL="0">
@@ -21321,7 +21321,7 @@
               <a:buNone/>
             </a:pPr>
             <a:r>
-              <a:rPr lang="en-US" sz="640" dirty="0">
+              <a:rPr lang="en-US" sz="720" dirty="0">
                 <a:solidFill>
                   <a:srgbClr val="5F7183"/>
                 </a:solidFill>
@@ -21331,7 +21331,7 @@
               </a:rPr>
               <a:t>0:20–1:20　反應距離：反應時間 × 速度。疲勞、滑手機都會變長。</a:t>
             </a:r>
-            <a:endParaRPr lang="en-US" sz="670" dirty="0"/>
+            <a:endParaRPr lang="en-US" sz="760" dirty="0"/>
           </a:p>
         </p:txBody>
       </p:sp>
@@ -21343,8 +21343,8 @@
         </p:nvSpPr>
         <p:spPr>
           <a:xfrm>
-            <a:off x="4818803" y="2117435"/>
-            <a:ext cx="25979" cy="168865"/>
+            <a:off x="4851219" y="2365576"/>
+            <a:ext cx="29391" cy="191044"/>
           </a:xfrm>
           <a:prstGeom prst="rect">
             <a:avLst/>
@@ -21363,8 +21363,8 @@
         </p:nvSpPr>
         <p:spPr>
           <a:xfrm>
-            <a:off x="4909730" y="2091456"/>
-            <a:ext cx="2435551" cy="323944"/>
+            <a:off x="4954089" y="2336185"/>
+            <a:ext cx="2755446" cy="366492"/>
           </a:xfrm>
           <a:prstGeom prst="rect">
             <a:avLst/>
@@ -21383,7 +21383,7 @@
               <a:buNone/>
             </a:pPr>
             <a:r>
-              <a:rPr lang="en-US" sz="670" dirty="0">
+              <a:rPr lang="en-US" sz="760" dirty="0">
                 <a:solidFill>
                   <a:srgbClr val="1A2733"/>
                 </a:solidFill>
@@ -21393,7 +21393,7 @@
               </a:rPr>
               <a:t>1:20–2:10　Quãng đường phanh: nhanh hơn hoặc nặng hơn thì dài hơn; đường ướt cũng dài hơn.</a:t>
             </a:r>
-            <a:endParaRPr lang="en-US" sz="670" dirty="0"/>
+            <a:endParaRPr lang="en-US" sz="760" dirty="0"/>
           </a:p>
           <a:p>
             <a:pPr indent="0" marL="0">
@@ -21403,7 +21403,7 @@
               <a:buNone/>
             </a:pPr>
             <a:r>
-              <a:rPr lang="en-US" sz="640" dirty="0">
+              <a:rPr lang="en-US" sz="720" dirty="0">
                 <a:solidFill>
                   <a:srgbClr val="5F7183"/>
                 </a:solidFill>
@@ -21413,7 +21413,7 @@
               </a:rPr>
               <a:t>1:20–2:10　煞車距離：車速快、車子重就變長；路面濕也變長。</a:t>
             </a:r>
-            <a:endParaRPr lang="en-US" sz="670" dirty="0"/>
+            <a:endParaRPr lang="en-US" sz="760" dirty="0"/>
           </a:p>
         </p:txBody>
       </p:sp>
@@ -21425,8 +21425,8 @@
         </p:nvSpPr>
         <p:spPr>
           <a:xfrm>
-            <a:off x="4818803" y="2467358"/>
-            <a:ext cx="25979" cy="168865"/>
+            <a:off x="4851219" y="2761460"/>
+            <a:ext cx="29391" cy="191044"/>
           </a:xfrm>
           <a:prstGeom prst="rect">
             <a:avLst/>
@@ -21445,8 +21445,8 @@
         </p:nvSpPr>
         <p:spPr>
           <a:xfrm>
-            <a:off x="4909730" y="2441379"/>
-            <a:ext cx="2435551" cy="222849"/>
+            <a:off x="4954089" y="2732068"/>
+            <a:ext cx="2755446" cy="252119"/>
           </a:xfrm>
           <a:prstGeom prst="rect">
             <a:avLst/>
@@ -21465,7 +21465,7 @@
               <a:buNone/>
             </a:pPr>
             <a:r>
-              <a:rPr lang="en-US" sz="670" dirty="0">
+              <a:rPr lang="en-US" sz="760" dirty="0">
                 <a:solidFill>
                   <a:srgbClr val="1A2733"/>
                 </a:solidFill>
@@ -21475,7 +21475,7 @@
               </a:rPr>
               <a:t>Câu hỏi: đoạn nào dài ra theo BÌNH PHƯƠNG của tốc độ?</a:t>
             </a:r>
-            <a:endParaRPr lang="en-US" sz="670" dirty="0"/>
+            <a:endParaRPr lang="en-US" sz="760" dirty="0"/>
           </a:p>
           <a:p>
             <a:pPr indent="0" marL="0">
@@ -21485,7 +21485,7 @@
               <a:buNone/>
             </a:pPr>
             <a:r>
-              <a:rPr lang="en-US" sz="640" dirty="0">
+              <a:rPr lang="en-US" sz="720" dirty="0">
                 <a:solidFill>
                   <a:srgbClr val="5F7183"/>
                 </a:solidFill>
@@ -21495,7 +21495,7 @@
               </a:rPr>
               <a:t>問題：哪一段是跟速度的平方成正比？</a:t>
             </a:r>
-            <a:endParaRPr lang="en-US" sz="670" dirty="0"/>
+            <a:endParaRPr lang="en-US" sz="760" dirty="0"/>
           </a:p>
         </p:txBody>
       </p:sp>
@@ -21507,8 +21507,8 @@
         </p:nvSpPr>
         <p:spPr>
           <a:xfrm>
-            <a:off x="1681812" y="2819258"/>
-            <a:ext cx="5780375" cy="389688"/>
+            <a:off x="1302204" y="3159579"/>
+            <a:ext cx="6539593" cy="440871"/>
           </a:xfrm>
           <a:prstGeom prst="roundRect">
             <a:avLst>
@@ -21534,8 +21534,8 @@
         </p:nvSpPr>
         <p:spPr>
           <a:xfrm>
-            <a:off x="1811708" y="2864721"/>
-            <a:ext cx="5520583" cy="311751"/>
+            <a:off x="1449161" y="3211014"/>
+            <a:ext cx="6245679" cy="352697"/>
           </a:xfrm>
           <a:prstGeom prst="rect">
             <a:avLst/>
@@ -21554,7 +21554,7 @@
               <a:buNone/>
             </a:pPr>
             <a:r>
-              <a:rPr lang="en-US" sz="820" b="1" dirty="0">
+              <a:rPr lang="en-US" sz="920" b="1" dirty="0">
                 <a:solidFill>
                   <a:srgbClr val="7A4E00"/>
                 </a:solidFill>
@@ -21564,7 +21564,7 @@
               </a:rPr>
               <a:t>Lời tiếng Anh. Bật phụ đề → Dịch tự động → Tiếng Việt. Dừng ở 2:30.</a:t>
             </a:r>
-            <a:endParaRPr lang="en-US" sz="820" dirty="0"/>
+            <a:endParaRPr lang="en-US" sz="920" dirty="0"/>
           </a:p>
           <a:p>
             <a:pPr indent="0" marL="0">
@@ -21574,7 +21574,7 @@
               <a:buNone/>
             </a:pPr>
             <a:r>
-              <a:rPr lang="en-US" sz="750" dirty="0">
+              <a:rPr lang="en-US" sz="840" dirty="0">
                 <a:solidFill>
                   <a:srgbClr val="7A4E00"/>
                 </a:solidFill>
@@ -21584,7 +21584,7 @@
               </a:rPr>
               <a:t>英文旁白。請開字幕 → 自動翻譯 → 越南文。播到 2:30 就停。</a:t>
             </a:r>
-            <a:endParaRPr lang="en-US" sz="820" dirty="0"/>
+            <a:endParaRPr lang="en-US" sz="920" dirty="0"/>
           </a:p>
         </p:txBody>
       </p:sp>
@@ -21604,8 +21604,8 @@
         </p:blipFill>
         <p:spPr>
           <a:xfrm>
-            <a:off x="6663327" y="3338842"/>
-            <a:ext cx="779376" cy="172200"/>
+            <a:off x="7882128" y="109728"/>
+            <a:ext cx="1097280" cy="242439"/>
           </a:xfrm>
           <a:prstGeom prst="rect">
             <a:avLst/>
@@ -21620,8 +21620,8 @@
         </p:nvSpPr>
         <p:spPr>
           <a:xfrm>
-            <a:off x="1402536" y="3390800"/>
-            <a:ext cx="584532" cy="181855"/>
+            <a:off x="986246" y="102870"/>
+            <a:ext cx="661307" cy="205740"/>
           </a:xfrm>
           <a:prstGeom prst="rect">
             <a:avLst/>
@@ -21637,7 +21637,7 @@
               <a:buNone/>
             </a:pPr>
             <a:r>
-              <a:rPr lang="en-US" sz="640" dirty="0">
+              <a:rPr lang="en-US" sz="720" dirty="0">
                 <a:solidFill>
                   <a:srgbClr val="5F7183"/>
                 </a:solidFill>
@@ -21647,7 +21647,7 @@
               </a:rPr>
               <a:t>8 / 18</a:t>
             </a:r>
-            <a:endParaRPr lang="en-US" sz="640" dirty="0"/>
+            <a:endParaRPr lang="en-US" sz="720" dirty="0"/>
           </a:p>
         </p:txBody>
       </p:sp>
@@ -21659,8 +21659,8 @@
         </p:nvSpPr>
         <p:spPr>
           <a:xfrm>
-            <a:off x="2006553" y="3390800"/>
-            <a:ext cx="1428857" cy="181855"/>
+            <a:off x="1669596" y="102870"/>
+            <a:ext cx="1616529" cy="205740"/>
           </a:xfrm>
           <a:prstGeom prst="rect">
             <a:avLst/>
@@ -21676,7 +21676,7 @@
               <a:buNone/>
             </a:pPr>
             <a:r>
-              <a:rPr lang="en-US" sz="640" dirty="0">
+              <a:rPr lang="en-US" sz="720" dirty="0">
                 <a:solidFill>
                   <a:srgbClr val="5F7183"/>
                 </a:solidFill>
@@ -21686,7 +21686,7 @@
               </a:rPr>
               <a:t>Tiết 1 · 第 1 節</a:t>
             </a:r>
-            <a:endParaRPr lang="en-US" sz="640" dirty="0"/>
+            <a:endParaRPr lang="en-US" sz="720" dirty="0"/>
           </a:p>
         </p:txBody>
       </p:sp>
@@ -21709,8 +21709,8 @@
       </p:nvGrpSpPr>
       <p:grpSpPr>
         <a:xfrm>
-          <a:off x="0" y="0"/>
-          <a:ext cx="0" cy="0"/>
+          <a:off x="1107444" y="0"/>
+          <a:ext cx="1" cy="1"/>
           <a:chOff x="0" y="0"/>
           <a:chExt cx="0" cy="0"/>
         </a:xfrm>
@@ -21723,8 +21723,8 @@
         </p:nvSpPr>
         <p:spPr>
           <a:xfrm>
-            <a:off x="1681812" y="234326"/>
-            <a:ext cx="5780375" cy="597522"/>
+            <a:off x="1488546" y="221732"/>
+            <a:ext cx="6166909" cy="637478"/>
           </a:xfrm>
           <a:prstGeom prst="rect">
             <a:avLst/>
@@ -21743,7 +21743,7 @@
               <a:buNone/>
             </a:pPr>
             <a:r>
-              <a:rPr lang="en-US" sz="1560" b="1" dirty="0">
+              <a:rPr lang="en-US" sz="1670" b="1" dirty="0">
                 <a:solidFill>
                   <a:srgbClr val="0B1F3A"/>
                 </a:solidFill>
@@ -21753,7 +21753,7 @@
               </a:rPr>
               <a:t>Bốn tốc độ, bốn yêu cầu tối thiểu cho chiều dài tia</a:t>
             </a:r>
-            <a:endParaRPr lang="en-US" sz="1560" dirty="0"/>
+            <a:endParaRPr lang="en-US" sz="1670" dirty="0"/>
           </a:p>
           <a:p>
             <a:pPr indent="0" marL="0">
@@ -21763,7 +21763,7 @@
               <a:buNone/>
             </a:pPr>
             <a:r>
-              <a:rPr lang="en-US" sz="960" dirty="0">
+              <a:rPr lang="en-US" sz="1020" dirty="0">
                 <a:solidFill>
                   <a:srgbClr val="5F7183"/>
                 </a:solidFill>
@@ -21773,7 +21773,7 @@
               </a:rPr>
               <a:t>四個車速，射線長度的四個最低要求</a:t>
             </a:r>
-            <a:endParaRPr lang="en-US" sz="1560" dirty="0"/>
+            <a:endParaRPr lang="en-US" sz="1670" dirty="0"/>
           </a:p>
         </p:txBody>
       </p:sp>
@@ -21785,8 +21785,8 @@
         </p:nvSpPr>
         <p:spPr>
           <a:xfrm>
-            <a:off x="1681812" y="831848"/>
-            <a:ext cx="5780375" cy="506595"/>
+            <a:off x="1488546" y="859210"/>
+            <a:ext cx="6166909" cy="540471"/>
           </a:xfrm>
           <a:prstGeom prst="roundRect">
             <a:avLst>
@@ -21807,8 +21807,8 @@
         </p:nvSpPr>
         <p:spPr>
           <a:xfrm>
-            <a:off x="1785729" y="883806"/>
-            <a:ext cx="5572542" cy="402678"/>
+            <a:off x="1599411" y="914643"/>
+            <a:ext cx="5945177" cy="429605"/>
           </a:xfrm>
           <a:prstGeom prst="rect">
             <a:avLst/>
@@ -21827,7 +21827,7 @@
               <a:buNone/>
             </a:pPr>
             <a:r>
-              <a:rPr lang="en-US" sz="820" b="1" dirty="0">
+              <a:rPr lang="en-US" sz="870" b="1" dirty="0">
                 <a:solidFill>
                   <a:srgbClr val="007F72"/>
                 </a:solidFill>
@@ -21837,7 +21837,7 @@
               </a:rPr>
               <a:t>Tính bằng công thức trang trước. Cột cuối đã cộng thêm 5 m dự phòng.</a:t>
             </a:r>
-            <a:endParaRPr lang="en-US" sz="820" dirty="0"/>
+            <a:endParaRPr lang="en-US" sz="870" dirty="0"/>
           </a:p>
           <a:p>
             <a:pPr indent="0" marL="0">
@@ -21847,7 +21847,7 @@
               <a:buNone/>
             </a:pPr>
             <a:r>
-              <a:rPr lang="en-US" sz="710" dirty="0">
+              <a:rPr lang="en-US" sz="760" dirty="0">
                 <a:solidFill>
                   <a:srgbClr val="007F72"/>
                 </a:solidFill>
@@ -21857,7 +21857,7 @@
               </a:rPr>
               <a:t>用上一頁那條公式算出來的。最後一欄已經加了 5 公尺餘裕。</a:t>
             </a:r>
-            <a:endParaRPr lang="en-US" sz="820" dirty="0"/>
+            <a:endParaRPr lang="en-US" sz="870" dirty="0"/>
           </a:p>
         </p:txBody>
       </p:sp>
@@ -21876,19 +21876,19 @@
           </p:nvPr>
         </p:nvGraphicFramePr>
         <p:xfrm>
-          <a:off x="1681812" y="1416380"/>
-          <a:ext cx="5780375" cy="914400"/>
+          <a:off x="1488546" y="1482830"/>
+          <a:ext cx="6166909" cy="692911"/>
         </p:xfrm>
         <a:graphic>
           <a:graphicData uri="http://schemas.openxmlformats.org/drawingml/2006/table">
             <a:tbl>
               <a:tblPr/>
               <a:tblGrid>
-                <a:gridCol w="649480"/>
-                <a:gridCol w="649480"/>
-                <a:gridCol w="714428"/>
-                <a:gridCol w="746902"/>
-                <a:gridCol w="3020084"/>
+                <a:gridCol w="914400"/>
+                <a:gridCol w="914400"/>
+                <a:gridCol w="1005840"/>
+                <a:gridCol w="1051560"/>
+                <a:gridCol w="4251960"/>
               </a:tblGrid>
               <a:tr h="420624">
                 <a:tc>
@@ -21900,7 +21900,7 @@
                         <a:buNone/>
                       </a:pPr>
                       <a:r>
-                        <a:rPr lang="en-US" sz="1100" b="1" dirty="0">
+                        <a:rPr lang="en-US" sz="830" b="1" dirty="0">
                           <a:solidFill>
                             <a:srgbClr val="FFFFFF"/>
                           </a:solidFill>
@@ -21910,14 +21910,14 @@
                         </a:rPr>
                         <a:t>Tốc độ</a:t>
                       </a:r>
-                      <a:endParaRPr lang="en-US" sz="1200" dirty="0"/>
+                      <a:endParaRPr lang="en-US" sz="910" dirty="0"/>
                     </a:p>
                     <a:p>
                       <a:pPr algn="l" indent="0" marL="0">
                         <a:buNone/>
                       </a:pPr>
                       <a:r>
-                        <a:rPr lang="en-US" sz="950" dirty="0">
+                        <a:rPr lang="en-US" sz="720" dirty="0">
                           <a:solidFill>
                             <a:srgbClr val="CFE0EC"/>
                           </a:solidFill>
@@ -21927,7 +21927,7 @@
                         </a:rPr>
                         <a:t>車速</a:t>
                       </a:r>
-                      <a:endParaRPr lang="en-US" sz="1200" dirty="0"/>
+                      <a:endParaRPr lang="en-US" sz="910" dirty="0"/>
                     </a:p>
                   </a:txBody>
                   <a:tcPr marL="63500" marR="63500" marT="38100" marB="38100" anchor="ctr">
@@ -21981,7 +21981,7 @@
                         <a:buNone/>
                       </a:pPr>
                       <a:r>
-                        <a:rPr lang="en-US" sz="1100" b="1" dirty="0">
+                        <a:rPr lang="en-US" sz="830" b="1" dirty="0">
                           <a:solidFill>
                             <a:srgbClr val="FFFFFF"/>
                           </a:solidFill>
@@ -21991,14 +21991,14 @@
                         </a:rPr>
                         <a:t>m/s</a:t>
                       </a:r>
-                      <a:endParaRPr lang="en-US" sz="1200" dirty="0"/>
+                      <a:endParaRPr lang="en-US" sz="910" dirty="0"/>
                     </a:p>
                     <a:p>
                       <a:pPr algn="l" indent="0" marL="0">
                         <a:buNone/>
                       </a:pPr>
                       <a:r>
-                        <a:rPr lang="en-US" sz="950" dirty="0">
+                        <a:rPr lang="en-US" sz="720" dirty="0">
                           <a:solidFill>
                             <a:srgbClr val="CFE0EC"/>
                           </a:solidFill>
@@ -22008,7 +22008,7 @@
                         </a:rPr>
                         <a:t>每秒公尺</a:t>
                       </a:r>
-                      <a:endParaRPr lang="en-US" sz="1200" dirty="0"/>
+                      <a:endParaRPr lang="en-US" sz="910" dirty="0"/>
                     </a:p>
                   </a:txBody>
                   <a:tcPr marL="63500" marR="63500" marT="38100" marB="38100" anchor="ctr">
@@ -22062,7 +22062,7 @@
                         <a:buNone/>
                       </a:pPr>
                       <a:r>
-                        <a:rPr lang="en-US" sz="1100" b="1" dirty="0">
+                        <a:rPr lang="en-US" sz="830" b="1" dirty="0">
                           <a:solidFill>
                             <a:srgbClr val="FFFFFF"/>
                           </a:solidFill>
@@ -22072,14 +22072,14 @@
                         </a:rPr>
                         <a:t>Phanh</a:t>
                       </a:r>
-                      <a:endParaRPr lang="en-US" sz="1200" dirty="0"/>
+                      <a:endParaRPr lang="en-US" sz="910" dirty="0"/>
                     </a:p>
                     <a:p>
                       <a:pPr algn="l" indent="0" marL="0">
                         <a:buNone/>
                       </a:pPr>
                       <a:r>
-                        <a:rPr lang="en-US" sz="950" dirty="0">
+                        <a:rPr lang="en-US" sz="720" dirty="0">
                           <a:solidFill>
                             <a:srgbClr val="CFE0EC"/>
                           </a:solidFill>
@@ -22089,7 +22089,7 @@
                         </a:rPr>
                         <a:t>煞停距離</a:t>
                       </a:r>
-                      <a:endParaRPr lang="en-US" sz="1200" dirty="0"/>
+                      <a:endParaRPr lang="en-US" sz="910" dirty="0"/>
                     </a:p>
                   </a:txBody>
                   <a:tcPr marL="63500" marR="63500" marT="38100" marB="38100" anchor="ctr">
@@ -22143,7 +22143,7 @@
                         <a:buNone/>
                       </a:pPr>
                       <a:r>
-                        <a:rPr lang="en-US" sz="1100" b="1" dirty="0">
+                        <a:rPr lang="en-US" sz="830" b="1" dirty="0">
                           <a:solidFill>
                             <a:srgbClr val="FFFFFF"/>
                           </a:solidFill>
@@ -22153,14 +22153,14 @@
                         </a:rPr>
                         <a:t>Tia tối thiểu</a:t>
                       </a:r>
-                      <a:endParaRPr lang="en-US" sz="1200" dirty="0"/>
+                      <a:endParaRPr lang="en-US" sz="910" dirty="0"/>
                     </a:p>
                     <a:p>
                       <a:pPr algn="l" indent="0" marL="0">
                         <a:buNone/>
                       </a:pPr>
                       <a:r>
-                        <a:rPr lang="en-US" sz="950" dirty="0">
+                        <a:rPr lang="en-US" sz="720" dirty="0">
                           <a:solidFill>
                             <a:srgbClr val="CFE0EC"/>
                           </a:solidFill>
@@ -22170,7 +22170,7 @@
                         </a:rPr>
                         <a:t>射線至少</a:t>
                       </a:r>
-                      <a:endParaRPr lang="en-US" sz="1200" dirty="0"/>
+                      <a:endParaRPr lang="en-US" sz="910" dirty="0"/>
                     </a:p>
                   </a:txBody>
                   <a:tcPr marL="63500" marR="63500" marT="38100" marB="38100" anchor="ctr">
@@ -22224,7 +22224,7 @@
                         <a:buNone/>
                       </a:pPr>
                       <a:r>
-                        <a:rPr lang="en-US" sz="1100" b="1" dirty="0">
+                        <a:rPr lang="en-US" sz="830" b="1" dirty="0">
                           <a:solidFill>
                             <a:srgbClr val="FFFFFF"/>
                           </a:solidFill>
@@ -22234,14 +22234,14 @@
                         </a:rPr>
                         <a:t>Ở đâu gặp tốc độ này</a:t>
                       </a:r>
-                      <a:endParaRPr lang="en-US" sz="1200" dirty="0"/>
+                      <a:endParaRPr lang="en-US" sz="910" dirty="0"/>
                     </a:p>
                     <a:p>
                       <a:pPr algn="l" indent="0" marL="0">
                         <a:buNone/>
                       </a:pPr>
                       <a:r>
-                        <a:rPr lang="en-US" sz="950" dirty="0">
+                        <a:rPr lang="en-US" sz="720" dirty="0">
                           <a:solidFill>
                             <a:srgbClr val="CFE0EC"/>
                           </a:solidFill>
@@ -22251,7 +22251,7 @@
                         </a:rPr>
                         <a:t>什麼地方會開到這個速度</a:t>
                       </a:r>
-                      <a:endParaRPr lang="en-US" sz="1200" dirty="0"/>
+                      <a:endParaRPr lang="en-US" sz="910" dirty="0"/>
                     </a:p>
                   </a:txBody>
                   <a:tcPr marL="63500" marR="63500" marT="38100" marB="38100" anchor="ctr">
@@ -22307,7 +22307,7 @@
                         <a:buNone/>
                       </a:pPr>
                       <a:r>
-                        <a:rPr lang="en-US" sz="1100" b="1" dirty="0">
+                        <a:rPr lang="en-US" sz="830" b="1" dirty="0">
                           <a:solidFill>
                             <a:srgbClr val="0B1F3A"/>
                           </a:solidFill>
@@ -22317,14 +22317,14 @@
                         </a:rPr>
                         <a:t>30 km/h</a:t>
                       </a:r>
-                      <a:endParaRPr lang="en-US" sz="1200" dirty="0"/>
+                      <a:endParaRPr lang="en-US" sz="910" dirty="0"/>
                     </a:p>
                     <a:p>
                       <a:pPr algn="l" indent="0" marL="0">
                         <a:buNone/>
                       </a:pPr>
                       <a:r>
-                        <a:rPr lang="en-US" sz="950" dirty="0">
+                        <a:rPr lang="en-US" sz="720" dirty="0">
                           <a:solidFill>
                             <a:srgbClr val="5F7183"/>
                           </a:solidFill>
@@ -22334,7 +22334,7 @@
                         </a:rPr>
                         <a:t>時速 30</a:t>
                       </a:r>
-                      <a:endParaRPr lang="en-US" sz="1200" dirty="0"/>
+                      <a:endParaRPr lang="en-US" sz="910" dirty="0"/>
                     </a:p>
                   </a:txBody>
                   <a:tcPr marL="63500" marR="63500" marT="38100" marB="38100" anchor="ctr">
@@ -22385,7 +22385,7 @@
                         <a:buNone/>
                       </a:pPr>
                       <a:r>
-                        <a:rPr lang="en-US" sz="1100" dirty="0">
+                        <a:rPr lang="en-US" sz="830" dirty="0">
                           <a:solidFill>
                             <a:srgbClr val="1A2733"/>
                           </a:solidFill>
@@ -22395,7 +22395,7 @@
                         </a:rPr>
                         <a:t>8,3</a:t>
                       </a:r>
-                      <a:endParaRPr lang="en-US" sz="1200" dirty="0"/>
+                      <a:endParaRPr lang="en-US" sz="910" dirty="0"/>
                     </a:p>
                   </a:txBody>
                   <a:tcPr marL="63500" marR="63500" marT="38100" marB="38100" anchor="ctr">
@@ -22446,7 +22446,7 @@
                         <a:buNone/>
                       </a:pPr>
                       <a:r>
-                        <a:rPr lang="en-US" sz="1100" dirty="0">
+                        <a:rPr lang="en-US" sz="830" dirty="0">
                           <a:solidFill>
                             <a:srgbClr val="1A2733"/>
                           </a:solidFill>
@@ -22456,7 +22456,7 @@
                         </a:rPr>
                         <a:t>8 m</a:t>
                       </a:r>
-                      <a:endParaRPr lang="en-US" sz="1200" dirty="0"/>
+                      <a:endParaRPr lang="en-US" sz="910" dirty="0"/>
                     </a:p>
                   </a:txBody>
                   <a:tcPr marL="63500" marR="63500" marT="38100" marB="38100" anchor="ctr">
@@ -22507,7 +22507,7 @@
                         <a:buNone/>
                       </a:pPr>
                       <a:r>
-                        <a:rPr lang="en-US" sz="1100" dirty="0">
+                        <a:rPr lang="en-US" sz="830" dirty="0">
                           <a:solidFill>
                             <a:srgbClr val="1A2733"/>
                           </a:solidFill>
@@ -22517,7 +22517,7 @@
                         </a:rPr>
                         <a:t>10 m</a:t>
                       </a:r>
-                      <a:endParaRPr lang="en-US" sz="1200" dirty="0"/>
+                      <a:endParaRPr lang="en-US" sz="910" dirty="0"/>
                     </a:p>
                   </a:txBody>
                   <a:tcPr marL="63500" marR="63500" marT="38100" marB="38100" anchor="ctr">
@@ -22568,7 +22568,7 @@
                         <a:buNone/>
                       </a:pPr>
                       <a:r>
-                        <a:rPr lang="en-US" sz="1100" dirty="0">
+                        <a:rPr lang="en-US" sz="830" dirty="0">
                           <a:solidFill>
                             <a:srgbClr val="1A2733"/>
                           </a:solidFill>
@@ -22578,14 +22578,14 @@
                         </a:rPr>
                         <a:t>Trong ngõ, khu dân cư, trường học</a:t>
                       </a:r>
-                      <a:endParaRPr lang="en-US" sz="1200" dirty="0"/>
+                      <a:endParaRPr lang="en-US" sz="910" dirty="0"/>
                     </a:p>
                     <a:p>
                       <a:pPr algn="l" indent="0" marL="0">
                         <a:buNone/>
                       </a:pPr>
                       <a:r>
-                        <a:rPr lang="en-US" sz="950" dirty="0">
+                        <a:rPr lang="en-US" sz="720" dirty="0">
                           <a:solidFill>
                             <a:srgbClr val="5F7183"/>
                           </a:solidFill>
@@ -22595,7 +22595,7 @@
                         </a:rPr>
                         <a:t>巷弄、社區、學校周邊</a:t>
                       </a:r>
-                      <a:endParaRPr lang="en-US" sz="1200" dirty="0"/>
+                      <a:endParaRPr lang="en-US" sz="910" dirty="0"/>
                     </a:p>
                   </a:txBody>
                   <a:tcPr marL="63500" marR="63500" marT="38100" marB="38100" anchor="ctr">
@@ -22648,7 +22648,7 @@
                         <a:buNone/>
                       </a:pPr>
                       <a:r>
-                        <a:rPr lang="en-US" sz="1100" b="1" dirty="0">
+                        <a:rPr lang="en-US" sz="830" b="1" dirty="0">
                           <a:solidFill>
                             <a:srgbClr val="0B1F3A"/>
                           </a:solidFill>
@@ -22658,14 +22658,14 @@
                         </a:rPr>
                         <a:t>50 km/h</a:t>
                       </a:r>
-                      <a:endParaRPr lang="en-US" sz="1200" dirty="0"/>
+                      <a:endParaRPr lang="en-US" sz="910" dirty="0"/>
                     </a:p>
                     <a:p>
                       <a:pPr algn="l" indent="0" marL="0">
                         <a:buNone/>
                       </a:pPr>
                       <a:r>
-                        <a:rPr lang="en-US" sz="950" dirty="0">
+                        <a:rPr lang="en-US" sz="720" dirty="0">
                           <a:solidFill>
                             <a:srgbClr val="5F7183"/>
                           </a:solidFill>
@@ -22675,7 +22675,7 @@
                         </a:rPr>
                         <a:t>時速 50</a:t>
                       </a:r>
-                      <a:endParaRPr lang="en-US" sz="1200" dirty="0"/>
+                      <a:endParaRPr lang="en-US" sz="910" dirty="0"/>
                     </a:p>
                   </a:txBody>
                   <a:tcPr marL="63500" marR="63500" marT="38100" marB="38100" anchor="ctr">
@@ -22726,7 +22726,7 @@
                         <a:buNone/>
                       </a:pPr>
                       <a:r>
-                        <a:rPr lang="en-US" sz="1100" dirty="0">
+                        <a:rPr lang="en-US" sz="830" dirty="0">
                           <a:solidFill>
                             <a:srgbClr val="1A2733"/>
                           </a:solidFill>
@@ -22736,7 +22736,7 @@
                         </a:rPr>
                         <a:t>13,9</a:t>
                       </a:r>
-                      <a:endParaRPr lang="en-US" sz="1200" dirty="0"/>
+                      <a:endParaRPr lang="en-US" sz="910" dirty="0"/>
                     </a:p>
                   </a:txBody>
                   <a:tcPr marL="63500" marR="63500" marT="38100" marB="38100" anchor="ctr">
@@ -22787,7 +22787,7 @@
                         <a:buNone/>
                       </a:pPr>
                       <a:r>
-                        <a:rPr lang="en-US" sz="1100" dirty="0">
+                        <a:rPr lang="en-US" sz="830" dirty="0">
                           <a:solidFill>
                             <a:srgbClr val="1A2733"/>
                           </a:solidFill>
@@ -22797,7 +22797,7 @@
                         </a:rPr>
                         <a:t>20 m</a:t>
                       </a:r>
-                      <a:endParaRPr lang="en-US" sz="1200" dirty="0"/>
+                      <a:endParaRPr lang="en-US" sz="910" dirty="0"/>
                     </a:p>
                   </a:txBody>
                   <a:tcPr marL="63500" marR="63500" marT="38100" marB="38100" anchor="ctr">
@@ -22848,7 +22848,7 @@
                         <a:buNone/>
                       </a:pPr>
                       <a:r>
-                        <a:rPr lang="en-US" sz="1100" dirty="0">
+                        <a:rPr lang="en-US" sz="830" dirty="0">
                           <a:solidFill>
                             <a:srgbClr val="1A2733"/>
                           </a:solidFill>
@@ -22858,7 +22858,7 @@
                         </a:rPr>
                         <a:t>25 m</a:t>
                       </a:r>
-                      <a:endParaRPr lang="en-US" sz="1200" dirty="0"/>
+                      <a:endParaRPr lang="en-US" sz="910" dirty="0"/>
                     </a:p>
                   </a:txBody>
                   <a:tcPr marL="63500" marR="63500" marT="38100" marB="38100" anchor="ctr">
@@ -22909,7 +22909,7 @@
                         <a:buNone/>
                       </a:pPr>
                       <a:r>
-                        <a:rPr lang="en-US" sz="1100" dirty="0">
+                        <a:rPr lang="en-US" sz="830" dirty="0">
                           <a:solidFill>
                             <a:srgbClr val="1A2733"/>
                           </a:solidFill>
@@ -22919,14 +22919,14 @@
                         </a:rPr>
                         <a:t>Đường phố bình thường — tốc độ của bài tập hôm nay</a:t>
                       </a:r>
-                      <a:endParaRPr lang="en-US" sz="1200" dirty="0"/>
+                      <a:endParaRPr lang="en-US" sz="910" dirty="0"/>
                     </a:p>
                     <a:p>
                       <a:pPr algn="l" indent="0" marL="0">
                         <a:buNone/>
                       </a:pPr>
                       <a:r>
-                        <a:rPr lang="en-US" sz="950" dirty="0">
+                        <a:rPr lang="en-US" sz="720" dirty="0">
                           <a:solidFill>
                             <a:srgbClr val="5F7183"/>
                           </a:solidFill>
@@ -22936,7 +22936,7 @@
                         </a:rPr>
                         <a:t>一般市區道路——今天上機用的就是這個</a:t>
                       </a:r>
-                      <a:endParaRPr lang="en-US" sz="1200" dirty="0"/>
+                      <a:endParaRPr lang="en-US" sz="910" dirty="0"/>
                     </a:p>
                   </a:txBody>
                   <a:tcPr marL="63500" marR="63500" marT="38100" marB="38100" anchor="ctr">
@@ -22989,7 +22989,7 @@
                         <a:buNone/>
                       </a:pPr>
                       <a:r>
-                        <a:rPr lang="en-US" sz="1100" b="1" dirty="0">
+                        <a:rPr lang="en-US" sz="830" b="1" dirty="0">
                           <a:solidFill>
                             <a:srgbClr val="0B1F3A"/>
                           </a:solidFill>
@@ -22999,14 +22999,14 @@
                         </a:rPr>
                         <a:t>60 km/h</a:t>
                       </a:r>
-                      <a:endParaRPr lang="en-US" sz="1200" dirty="0"/>
+                      <a:endParaRPr lang="en-US" sz="910" dirty="0"/>
                     </a:p>
                     <a:p>
                       <a:pPr algn="l" indent="0" marL="0">
                         <a:buNone/>
                       </a:pPr>
                       <a:r>
-                        <a:rPr lang="en-US" sz="950" dirty="0">
+                        <a:rPr lang="en-US" sz="720" dirty="0">
                           <a:solidFill>
                             <a:srgbClr val="5F7183"/>
                           </a:solidFill>
@@ -23016,7 +23016,7 @@
                         </a:rPr>
                         <a:t>時速 60</a:t>
                       </a:r>
-                      <a:endParaRPr lang="en-US" sz="1200" dirty="0"/>
+                      <a:endParaRPr lang="en-US" sz="910" dirty="0"/>
                     </a:p>
                   </a:txBody>
                   <a:tcPr marL="63500" marR="63500" marT="38100" marB="38100" anchor="ctr">
@@ -23067,7 +23067,7 @@
                         <a:buNone/>
                       </a:pPr>
                       <a:r>
-                        <a:rPr lang="en-US" sz="1100" dirty="0">
+                        <a:rPr lang="en-US" sz="830" dirty="0">
                           <a:solidFill>
                             <a:srgbClr val="1A2733"/>
                           </a:solidFill>
@@ -23077,7 +23077,7 @@
                         </a:rPr>
                         <a:t>16,7</a:t>
                       </a:r>
-                      <a:endParaRPr lang="en-US" sz="1200" dirty="0"/>
+                      <a:endParaRPr lang="en-US" sz="910" dirty="0"/>
                     </a:p>
                   </a:txBody>
                   <a:tcPr marL="63500" marR="63500" marT="38100" marB="38100" anchor="ctr">
@@ -23128,7 +23128,7 @@
                         <a:buNone/>
                       </a:pPr>
                       <a:r>
-                        <a:rPr lang="en-US" sz="1100" dirty="0">
+                        <a:rPr lang="en-US" sz="830" dirty="0">
                           <a:solidFill>
                             <a:srgbClr val="1A2733"/>
                           </a:solidFill>
@@ -23138,7 +23138,7 @@
                         </a:rPr>
                         <a:t>28 m</a:t>
                       </a:r>
-                      <a:endParaRPr lang="en-US" sz="1200" dirty="0"/>
+                      <a:endParaRPr lang="en-US" sz="910" dirty="0"/>
                     </a:p>
                   </a:txBody>
                   <a:tcPr marL="63500" marR="63500" marT="38100" marB="38100" anchor="ctr">
@@ -23189,7 +23189,7 @@
                         <a:buNone/>
                       </a:pPr>
                       <a:r>
-                        <a:rPr lang="en-US" sz="1100" dirty="0">
+                        <a:rPr lang="en-US" sz="830" dirty="0">
                           <a:solidFill>
                             <a:srgbClr val="1A2733"/>
                           </a:solidFill>
@@ -23199,7 +23199,7 @@
                         </a:rPr>
                         <a:t>35 m</a:t>
                       </a:r>
-                      <a:endParaRPr lang="en-US" sz="1200" dirty="0"/>
+                      <a:endParaRPr lang="en-US" sz="910" dirty="0"/>
                     </a:p>
                   </a:txBody>
                   <a:tcPr marL="63500" marR="63500" marT="38100" marB="38100" anchor="ctr">
@@ -23250,7 +23250,7 @@
                         <a:buNone/>
                       </a:pPr>
                       <a:r>
-                        <a:rPr lang="en-US" sz="1100" dirty="0">
+                        <a:rPr lang="en-US" sz="830" dirty="0">
                           <a:solidFill>
                             <a:srgbClr val="1A2733"/>
                           </a:solidFill>
@@ -23260,14 +23260,14 @@
                         </a:rPr>
                         <a:t>Đường lớn, đường vành đai</a:t>
                       </a:r>
-                      <a:endParaRPr lang="en-US" sz="1200" dirty="0"/>
+                      <a:endParaRPr lang="en-US" sz="910" dirty="0"/>
                     </a:p>
                     <a:p>
                       <a:pPr algn="l" indent="0" marL="0">
                         <a:buNone/>
                       </a:pPr>
                       <a:r>
-                        <a:rPr lang="en-US" sz="950" dirty="0">
+                        <a:rPr lang="en-US" sz="720" dirty="0">
                           <a:solidFill>
                             <a:srgbClr val="5F7183"/>
                           </a:solidFill>
@@ -23277,7 +23277,7 @@
                         </a:rPr>
                         <a:t>大馬路、外環道</a:t>
                       </a:r>
-                      <a:endParaRPr lang="en-US" sz="1200" dirty="0"/>
+                      <a:endParaRPr lang="en-US" sz="910" dirty="0"/>
                     </a:p>
                   </a:txBody>
                   <a:tcPr marL="63500" marR="63500" marT="38100" marB="38100" anchor="ctr">
@@ -23330,7 +23330,7 @@
                         <a:buNone/>
                       </a:pPr>
                       <a:r>
-                        <a:rPr lang="en-US" sz="1100" b="1" dirty="0">
+                        <a:rPr lang="en-US" sz="830" b="1" dirty="0">
                           <a:solidFill>
                             <a:srgbClr val="0B1F3A"/>
                           </a:solidFill>
@@ -23340,14 +23340,14 @@
                         </a:rPr>
                         <a:t>80 km/h</a:t>
                       </a:r>
-                      <a:endParaRPr lang="en-US" sz="1200" dirty="0"/>
+                      <a:endParaRPr lang="en-US" sz="910" dirty="0"/>
                     </a:p>
                     <a:p>
                       <a:pPr algn="l" indent="0" marL="0">
                         <a:buNone/>
                       </a:pPr>
                       <a:r>
-                        <a:rPr lang="en-US" sz="950" dirty="0">
+                        <a:rPr lang="en-US" sz="720" dirty="0">
                           <a:solidFill>
                             <a:srgbClr val="5F7183"/>
                           </a:solidFill>
@@ -23357,7 +23357,7 @@
                         </a:rPr>
                         <a:t>時速 80</a:t>
                       </a:r>
-                      <a:endParaRPr lang="en-US" sz="1200" dirty="0"/>
+                      <a:endParaRPr lang="en-US" sz="910" dirty="0"/>
                     </a:p>
                   </a:txBody>
                   <a:tcPr marL="63500" marR="63500" marT="38100" marB="38100" anchor="ctr">
@@ -23408,7 +23408,7 @@
                         <a:buNone/>
                       </a:pPr>
                       <a:r>
-                        <a:rPr lang="en-US" sz="1100" dirty="0">
+                        <a:rPr lang="en-US" sz="830" dirty="0">
                           <a:solidFill>
                             <a:srgbClr val="1A2733"/>
                           </a:solidFill>
@@ -23418,7 +23418,7 @@
                         </a:rPr>
                         <a:t>22,2</a:t>
                       </a:r>
-                      <a:endParaRPr lang="en-US" sz="1200" dirty="0"/>
+                      <a:endParaRPr lang="en-US" sz="910" dirty="0"/>
                     </a:p>
                   </a:txBody>
                   <a:tcPr marL="63500" marR="63500" marT="38100" marB="38100" anchor="ctr">
@@ -23469,7 +23469,7 @@
                         <a:buNone/>
                       </a:pPr>
                       <a:r>
-                        <a:rPr lang="en-US" sz="1100" dirty="0">
+                        <a:rPr lang="en-US" sz="830" dirty="0">
                           <a:solidFill>
                             <a:srgbClr val="1A2733"/>
                           </a:solidFill>
@@ -23479,7 +23479,7 @@
                         </a:rPr>
                         <a:t>48 m</a:t>
                       </a:r>
-                      <a:endParaRPr lang="en-US" sz="1200" dirty="0"/>
+                      <a:endParaRPr lang="en-US" sz="910" dirty="0"/>
                     </a:p>
                   </a:txBody>
                   <a:tcPr marL="63500" marR="63500" marT="38100" marB="38100" anchor="ctr">
@@ -23530,7 +23530,7 @@
                         <a:buNone/>
                       </a:pPr>
                       <a:r>
-                        <a:rPr lang="en-US" sz="1100" dirty="0">
+                        <a:rPr lang="en-US" sz="830" dirty="0">
                           <a:solidFill>
                             <a:srgbClr val="1A2733"/>
                           </a:solidFill>
@@ -23540,7 +23540,7 @@
                         </a:rPr>
                         <a:t>60 m</a:t>
                       </a:r>
-                      <a:endParaRPr lang="en-US" sz="1200" dirty="0"/>
+                      <a:endParaRPr lang="en-US" sz="910" dirty="0"/>
                     </a:p>
                   </a:txBody>
                   <a:tcPr marL="63500" marR="63500" marT="38100" marB="38100" anchor="ctr">
@@ -23591,7 +23591,7 @@
                         <a:buNone/>
                       </a:pPr>
                       <a:r>
-                        <a:rPr lang="en-US" sz="1100" dirty="0">
+                        <a:rPr lang="en-US" sz="830" dirty="0">
                           <a:solidFill>
                             <a:srgbClr val="1A2733"/>
                           </a:solidFill>
@@ -23601,14 +23601,14 @@
                         </a:rPr>
                         <a:t>Đường cao tốc chậm</a:t>
                       </a:r>
-                      <a:endParaRPr lang="en-US" sz="1200" dirty="0"/>
+                      <a:endParaRPr lang="en-US" sz="910" dirty="0"/>
                     </a:p>
                     <a:p>
                       <a:pPr algn="l" indent="0" marL="0">
                         <a:buNone/>
                       </a:pPr>
                       <a:r>
-                        <a:rPr lang="en-US" sz="950" dirty="0">
+                        <a:rPr lang="en-US" sz="720" dirty="0">
                           <a:solidFill>
                             <a:srgbClr val="5F7183"/>
                           </a:solidFill>
@@ -23618,7 +23618,7 @@
                         </a:rPr>
                         <a:t>快速道路</a:t>
                       </a:r>
-                      <a:endParaRPr lang="en-US" sz="1200" dirty="0"/>
+                      <a:endParaRPr lang="en-US" sz="910" dirty="0"/>
                     </a:p>
                   </a:txBody>
                   <a:tcPr marL="63500" marR="63500" marT="38100" marB="38100" anchor="ctr">
@@ -23673,8 +23673,8 @@
         </p:nvSpPr>
         <p:spPr>
           <a:xfrm>
-            <a:off x="1681812" y="3076530"/>
-            <a:ext cx="5780375" cy="324740"/>
+            <a:off x="1488546" y="3253994"/>
+            <a:ext cx="6166909" cy="346456"/>
           </a:xfrm>
           <a:prstGeom prst="rect">
             <a:avLst/>
@@ -23693,7 +23693,7 @@
               <a:buNone/>
             </a:pPr>
             <a:r>
-              <a:rPr lang="en-US" sz="850" b="1" dirty="0">
+              <a:rPr lang="en-US" sz="910" b="1" dirty="0">
                 <a:solidFill>
                   <a:srgbClr val="007F72"/>
                 </a:solidFill>
@@ -23703,7 +23703,7 @@
               </a:rPr>
               <a:t>Xe thật 100 km/h cần hơn 200 m. Cảm biến nào làm được? Câu hỏi của chương 3.</a:t>
             </a:r>
-            <a:endParaRPr lang="en-US" sz="850" dirty="0"/>
+            <a:endParaRPr lang="en-US" sz="910" dirty="0"/>
           </a:p>
           <a:p>
             <a:pPr indent="0" marL="0">
@@ -23713,7 +23713,7 @@
               <a:buNone/>
             </a:pPr>
             <a:r>
-              <a:rPr lang="en-US" sz="780" dirty="0">
+              <a:rPr lang="en-US" sz="830" dirty="0">
                 <a:solidFill>
                   <a:srgbClr val="007F72"/>
                 </a:solidFill>
@@ -23723,7 +23723,7 @@
               </a:rPr>
               <a:t>真車時速 100 需要 200 公尺以上。哪一種感測器做得到？第三章的問題。</a:t>
             </a:r>
-            <a:endParaRPr lang="en-US" sz="850" dirty="0"/>
+            <a:endParaRPr lang="en-US" sz="910" dirty="0"/>
           </a:p>
         </p:txBody>
       </p:sp>
@@ -23743,8 +23743,8 @@
         </p:blipFill>
         <p:spPr>
           <a:xfrm>
-            <a:off x="6663327" y="3338842"/>
-            <a:ext cx="779376" cy="172200"/>
+            <a:off x="7882128" y="109728"/>
+            <a:ext cx="1097280" cy="242439"/>
           </a:xfrm>
           <a:prstGeom prst="rect">
             <a:avLst/>
@@ -23759,8 +23759,8 @@
         </p:nvSpPr>
         <p:spPr>
           <a:xfrm>
-            <a:off x="1402536" y="3390800"/>
-            <a:ext cx="584532" cy="181855"/>
+            <a:off x="1190594" y="97008"/>
+            <a:ext cx="623620" cy="194015"/>
           </a:xfrm>
           <a:prstGeom prst="rect">
             <a:avLst/>
@@ -23776,7 +23776,7 @@
               <a:buNone/>
             </a:pPr>
             <a:r>
-              <a:rPr lang="en-US" sz="640" dirty="0">
+              <a:rPr lang="en-US" sz="680" dirty="0">
                 <a:solidFill>
                   <a:srgbClr val="5F7183"/>
                 </a:solidFill>
@@ -23786,7 +23786,7 @@
               </a:rPr>
               <a:t>9 / 18</a:t>
             </a:r>
-            <a:endParaRPr lang="en-US" sz="640" dirty="0"/>
+            <a:endParaRPr lang="en-US" sz="680" dirty="0"/>
           </a:p>
         </p:txBody>
       </p:sp>
@@ -23798,8 +23798,8 @@
         </p:nvSpPr>
         <p:spPr>
           <a:xfrm>
-            <a:off x="2006553" y="3390800"/>
-            <a:ext cx="1428857" cy="181855"/>
+            <a:off x="1835001" y="97008"/>
+            <a:ext cx="1524404" cy="194015"/>
           </a:xfrm>
           <a:prstGeom prst="rect">
             <a:avLst/>
@@ -23815,7 +23815,7 @@
               <a:buNone/>
             </a:pPr>
             <a:r>
-              <a:rPr lang="en-US" sz="640" dirty="0">
+              <a:rPr lang="en-US" sz="680" dirty="0">
                 <a:solidFill>
                   <a:srgbClr val="5F7183"/>
                 </a:solidFill>
@@ -23825,7 +23825,7 @@
               </a:rPr>
               <a:t>Tiết 1 · 第 1 節</a:t>
             </a:r>
-            <a:endParaRPr lang="en-US" sz="640" dirty="0"/>
+            <a:endParaRPr lang="en-US" sz="680" dirty="0"/>
           </a:p>
         </p:txBody>
       </p:sp>

--- a/第四週(10-01)/第四週_第1節_簡報.pptx
+++ b/第四週(10-01)/第四週_第1節_簡報.pptx
@@ -444,11 +444,154 @@
                 <a:spcPct val="115000"/>
               </a:lnSpc>
               <a:spcAft>
-                <a:spcPts val="600"/>
-              </a:spcAft>
-            </a:pPr>
-            <a:r>
-              <a:rPr sz="1200" lang="zh-TW" dirty="0">
+                <a:spcPts val="500"/>
+              </a:spcAft>
+            </a:pPr>
+            <a:r>
+              <a:rPr sz="1000" b="1" lang="zh-TW" dirty="0">
+                <a:solidFill>
+                  <a:srgbClr val="000000"/>
+                </a:solidFill>
+                <a:latin typeface="Arial Unicode MS"/>
+                <a:ea typeface="Arial Unicode MS"/>
+                <a:cs typeface="Arial Unicode MS"/>
+              </a:rPr>
+              <a:t>▍這一張要做什麼</a:t>
+            </a:r>
+            <a:r>
+              <a:rPr sz="1000" lang="zh-TW" dirty="0">
+                <a:solidFill>
+                  <a:srgbClr val="000000"/>
+                </a:solidFill>
+                <a:latin typeface="Arial Unicode MS"/>
+                <a:ea typeface="Arial Unicode MS"/>
+                <a:cs typeface="Arial Unicode MS"/>
+              </a:rPr>
+              <a:t>
+</a:t>
+            </a:r>
+          </a:p>
+          <a:p>
+            <a:pPr algn="l">
+              <a:lnSpc>
+                <a:spcPct val="115000"/>
+              </a:lnSpc>
+              <a:spcAft>
+                <a:spcPts val="500"/>
+              </a:spcAft>
+            </a:pPr>
+            <a:r>
+              <a:rPr sz="1000" lang="zh-TW" dirty="0">
+                <a:solidFill>
+                  <a:srgbClr val="000000"/>
+                </a:solidFill>
+                <a:latin typeface="Arial Unicode MS"/>
+                <a:ea typeface="Arial Unicode MS"/>
+                <a:cs typeface="Arial Unicode MS"/>
+              </a:rPr>
+              <a:t>開場定調。這一週要做的事只有一句：上週各位用手拉的三個滑桿，就是真規格表上的三行。
+</a:t>
+            </a:r>
+          </a:p>
+          <a:p>
+            <a:pPr algn="l">
+              <a:lnSpc>
+                <a:spcPct val="115000"/>
+              </a:lnSpc>
+              <a:spcAft>
+                <a:spcPts val="500"/>
+              </a:spcAft>
+            </a:pPr>
+            <a:r>
+              <a:rPr sz="1000" b="1" lang="zh-TW" dirty="0">
+                <a:solidFill>
+                  <a:srgbClr val="000000"/>
+                </a:solidFill>
+                <a:latin typeface="Arial Unicode MS"/>
+                <a:ea typeface="Arial Unicode MS"/>
+                <a:cs typeface="Arial Unicode MS"/>
+              </a:rPr>
+              <a:t>▍畫面上圈這裡</a:t>
+            </a:r>
+            <a:r>
+              <a:rPr sz="1000" lang="zh-TW" dirty="0">
+                <a:solidFill>
+                  <a:srgbClr val="000000"/>
+                </a:solidFill>
+                <a:latin typeface="Arial Unicode MS"/>
+                <a:ea typeface="Arial Unicode MS"/>
+                <a:cs typeface="Arial Unicode MS"/>
+              </a:rPr>
+              <a:t>
+</a:t>
+            </a:r>
+          </a:p>
+          <a:p>
+            <a:pPr algn="l">
+              <a:lnSpc>
+                <a:spcPct val="115000"/>
+              </a:lnSpc>
+              <a:spcAft>
+                <a:spcPts val="500"/>
+              </a:spcAft>
+            </a:pPr>
+            <a:r>
+              <a:rPr sz="1000" lang="zh-TW" dirty="0">
+                <a:solidFill>
+                  <a:srgbClr val="000000"/>
+                </a:solidFill>
+                <a:latin typeface="Arial Unicode MS"/>
+                <a:ea typeface="Arial Unicode MS"/>
+                <a:cs typeface="Arial Unicode MS"/>
+              </a:rPr>
+              <a:t>圈主標裡的「三個滑桿」和「規格表上的三行」，告訴全班這兩件事今天要接起來。
+</a:t>
+            </a:r>
+          </a:p>
+          <a:p>
+            <a:pPr algn="l">
+              <a:lnSpc>
+                <a:spcPct val="115000"/>
+              </a:lnSpc>
+              <a:spcAft>
+                <a:spcPts val="500"/>
+              </a:spcAft>
+            </a:pPr>
+            <a:r>
+              <a:rPr sz="1000" b="1" lang="zh-TW" dirty="0">
+                <a:solidFill>
+                  <a:srgbClr val="000000"/>
+                </a:solidFill>
+                <a:latin typeface="Arial Unicode MS"/>
+                <a:ea typeface="Arial Unicode MS"/>
+                <a:cs typeface="Arial Unicode MS"/>
+              </a:rPr>
+              <a:t>▍以下照著唸</a:t>
+            </a:r>
+            <a:r>
+              <a:rPr sz="1000" lang="zh-TW" dirty="0">
+                <a:solidFill>
+                  <a:srgbClr val="000000"/>
+                </a:solidFill>
+                <a:latin typeface="Arial Unicode MS"/>
+                <a:ea typeface="Arial Unicode MS"/>
+                <a:cs typeface="Arial Unicode MS"/>
+              </a:rPr>
+              <a:t>
+</a:t>
+            </a:r>
+          </a:p>
+          <a:p>
+            <a:pPr algn="l">
+              <a:lnSpc>
+                <a:spcPct val="115000"/>
+              </a:lnSpc>
+              <a:spcAft>
+                <a:spcPts val="500"/>
+              </a:spcAft>
+            </a:pPr>
+            <a:r>
+              <a:rPr sz="1000" lang="zh-TW" dirty="0">
                 <a:solidFill>
                   <a:srgbClr val="000000"/>
                 </a:solidFill>
@@ -466,11 +609,11 @@
                 <a:spcPct val="115000"/>
               </a:lnSpc>
               <a:spcAft>
-                <a:spcPts val="600"/>
-              </a:spcAft>
-            </a:pPr>
-            <a:r>
-              <a:rPr sz="1200" lang="zh-TW" dirty="0">
+                <a:spcPts val="500"/>
+              </a:spcAft>
+            </a:pPr>
+            <a:r>
+              <a:rPr sz="1000" lang="zh-TW" dirty="0">
                 <a:solidFill>
                   <a:srgbClr val="000000"/>
                 </a:solidFill>
@@ -481,7 +624,7 @@
               <a:t>上週各位第一次讓車子在模擬器裡跑起來，也發現了一件怪事：</a:t>
             </a:r>
             <a:r>
-              <a:rPr sz="1200" b="1" lang="zh-TW" dirty="0">
+              <a:rPr sz="1000" b="1" lang="zh-TW" dirty="0">
                 <a:solidFill>
                   <a:srgbClr val="000000"/>
                 </a:solidFill>
@@ -492,7 +635,7 @@
               <a:t>同一組參數，有時候撞、有時候不撞</a:t>
             </a:r>
             <a:r>
-              <a:rPr sz="1200" lang="zh-TW" dirty="0">
+              <a:rPr sz="1000" lang="zh-TW" dirty="0">
                 <a:solidFill>
                   <a:srgbClr val="000000"/>
                 </a:solidFill>
@@ -510,11 +653,11 @@
                 <a:spcPct val="115000"/>
               </a:lnSpc>
               <a:spcAft>
-                <a:spcPts val="600"/>
-              </a:spcAft>
-            </a:pPr>
-            <a:r>
-              <a:rPr sz="1200" lang="zh-TW" dirty="0">
+                <a:spcPts val="500"/>
+              </a:spcAft>
+            </a:pPr>
+            <a:r>
+              <a:rPr sz="1000" lang="zh-TW" dirty="0">
                 <a:solidFill>
                   <a:srgbClr val="000000"/>
                 </a:solidFill>
@@ -532,11 +675,11 @@
                 <a:spcPct val="115000"/>
               </a:lnSpc>
               <a:spcAft>
-                <a:spcPts val="600"/>
-              </a:spcAft>
-            </a:pPr>
-            <a:r>
-              <a:rPr sz="1200" lang="zh-TW" dirty="0">
+                <a:spcPts val="500"/>
+              </a:spcAft>
+            </a:pPr>
+            <a:r>
+              <a:rPr sz="1000" lang="zh-TW" dirty="0">
                 <a:solidFill>
                   <a:srgbClr val="000000"/>
                 </a:solidFill>
@@ -554,11 +697,11 @@
                 <a:spcPct val="115000"/>
               </a:lnSpc>
               <a:spcAft>
-                <a:spcPts val="600"/>
-              </a:spcAft>
-            </a:pPr>
-            <a:r>
-              <a:rPr sz="1200" lang="zh-TW" dirty="0">
+                <a:spcPts val="500"/>
+              </a:spcAft>
+            </a:pPr>
+            <a:r>
+              <a:rPr sz="1000" lang="zh-TW" dirty="0">
                 <a:solidFill>
                   <a:srgbClr val="000000"/>
                 </a:solidFill>
@@ -576,11 +719,11 @@
                 <a:spcPct val="115000"/>
               </a:lnSpc>
               <a:spcAft>
-                <a:spcPts val="600"/>
-              </a:spcAft>
-            </a:pPr>
-            <a:r>
-              <a:rPr sz="1200" lang="zh-TW" dirty="0">
+                <a:spcPts val="500"/>
+              </a:spcAft>
+            </a:pPr>
+            <a:r>
+              <a:rPr sz="1000" lang="zh-TW" dirty="0">
                 <a:solidFill>
                   <a:srgbClr val="000000"/>
                 </a:solidFill>
@@ -598,11 +741,11 @@
                 <a:spcPct val="115000"/>
               </a:lnSpc>
               <a:spcAft>
-                <a:spcPts val="600"/>
-              </a:spcAft>
-            </a:pPr>
-            <a:r>
-              <a:rPr sz="1200" lang="zh-TW" dirty="0">
+                <a:spcPts val="500"/>
+              </a:spcAft>
+            </a:pPr>
+            <a:r>
+              <a:rPr sz="1000" lang="zh-TW" dirty="0">
                 <a:solidFill>
                   <a:srgbClr val="000000"/>
                 </a:solidFill>
@@ -620,11 +763,11 @@
                 <a:spcPct val="115000"/>
               </a:lnSpc>
               <a:spcAft>
-                <a:spcPts val="600"/>
-              </a:spcAft>
-            </a:pPr>
-            <a:r>
-              <a:rPr sz="1200" lang="zh-TW" dirty="0">
+                <a:spcPts val="500"/>
+              </a:spcAft>
+            </a:pPr>
+            <a:r>
+              <a:rPr sz="1000" lang="zh-TW" dirty="0">
                 <a:solidFill>
                   <a:srgbClr val="000000"/>
                 </a:solidFill>
@@ -745,6 +888,149 @@
               </a:spcAft>
             </a:pPr>
             <a:r>
+              <a:rPr sz="1000" b="1" lang="zh-TW" dirty="0">
+                <a:solidFill>
+                  <a:srgbClr val="000000"/>
+                </a:solidFill>
+                <a:latin typeface="Arial Unicode MS"/>
+                <a:ea typeface="Arial Unicode MS"/>
+                <a:cs typeface="Arial Unicode MS"/>
+              </a:rPr>
+              <a:t>▍這一張要做什麼</a:t>
+            </a:r>
+            <a:r>
+              <a:rPr sz="1000" lang="zh-TW" dirty="0">
+                <a:solidFill>
+                  <a:srgbClr val="000000"/>
+                </a:solidFill>
+                <a:latin typeface="Arial Unicode MS"/>
+                <a:ea typeface="Arial Unicode MS"/>
+                <a:cs typeface="Arial Unicode MS"/>
+              </a:rPr>
+              <a:t>
+</a:t>
+            </a:r>
+          </a:p>
+          <a:p>
+            <a:pPr algn="l">
+              <a:lnSpc>
+                <a:spcPct val="115000"/>
+              </a:lnSpc>
+              <a:spcAft>
+                <a:spcPts val="500"/>
+              </a:spcAft>
+            </a:pPr>
+            <a:r>
+              <a:rPr sz="1000" lang="zh-TW" dirty="0">
+                <a:solidFill>
+                  <a:srgbClr val="000000"/>
+                </a:solidFill>
+                <a:latin typeface="Arial Unicode MS"/>
+                <a:ea typeface="Arial Unicode MS"/>
+                <a:cs typeface="Arial Unicode MS"/>
+              </a:rPr>
+              <a:t>讓學生看業界真的在用的模擬器，再回頭問我們的差在哪、哪裡是一樣的。
+</a:t>
+            </a:r>
+          </a:p>
+          <a:p>
+            <a:pPr algn="l">
+              <a:lnSpc>
+                <a:spcPct val="115000"/>
+              </a:lnSpc>
+              <a:spcAft>
+                <a:spcPts val="500"/>
+              </a:spcAft>
+            </a:pPr>
+            <a:r>
+              <a:rPr sz="1000" b="1" lang="zh-TW" dirty="0">
+                <a:solidFill>
+                  <a:srgbClr val="000000"/>
+                </a:solidFill>
+                <a:latin typeface="Arial Unicode MS"/>
+                <a:ea typeface="Arial Unicode MS"/>
+                <a:cs typeface="Arial Unicode MS"/>
+              </a:rPr>
+              <a:t>▍畫面上圈這裡</a:t>
+            </a:r>
+            <a:r>
+              <a:rPr sz="1000" lang="zh-TW" dirty="0">
+                <a:solidFill>
+                  <a:srgbClr val="000000"/>
+                </a:solidFill>
+                <a:latin typeface="Arial Unicode MS"/>
+                <a:ea typeface="Arial Unicode MS"/>
+                <a:cs typeface="Arial Unicode MS"/>
+              </a:rPr>
+              <a:t>
+</a:t>
+            </a:r>
+          </a:p>
+          <a:p>
+            <a:pPr algn="l">
+              <a:lnSpc>
+                <a:spcPct val="115000"/>
+              </a:lnSpc>
+              <a:spcAft>
+                <a:spcPts val="500"/>
+              </a:spcAft>
+            </a:pPr>
+            <a:r>
+              <a:rPr sz="1000" lang="zh-TW" dirty="0">
+                <a:solidFill>
+                  <a:srgbClr val="000000"/>
+                </a:solidFill>
+                <a:latin typeface="Arial Unicode MS"/>
+                <a:ea typeface="Arial Unicode MS"/>
+                <a:cs typeface="Arial Unicode MS"/>
+              </a:rPr>
+              <a:t>播之前圈右邊的三條看點，特別是第三條「它一樣是假的」。
+</a:t>
+            </a:r>
+          </a:p>
+          <a:p>
+            <a:pPr algn="l">
+              <a:lnSpc>
+                <a:spcPct val="115000"/>
+              </a:lnSpc>
+              <a:spcAft>
+                <a:spcPts val="500"/>
+              </a:spcAft>
+            </a:pPr>
+            <a:r>
+              <a:rPr sz="1000" b="1" lang="zh-TW" dirty="0">
+                <a:solidFill>
+                  <a:srgbClr val="000000"/>
+                </a:solidFill>
+                <a:latin typeface="Arial Unicode MS"/>
+                <a:ea typeface="Arial Unicode MS"/>
+                <a:cs typeface="Arial Unicode MS"/>
+              </a:rPr>
+              <a:t>▍以下照著唸</a:t>
+            </a:r>
+            <a:r>
+              <a:rPr sz="1000" lang="zh-TW" dirty="0">
+                <a:solidFill>
+                  <a:srgbClr val="000000"/>
+                </a:solidFill>
+                <a:latin typeface="Arial Unicode MS"/>
+                <a:ea typeface="Arial Unicode MS"/>
+                <a:cs typeface="Arial Unicode MS"/>
+              </a:rPr>
+              <a:t>
+</a:t>
+            </a:r>
+          </a:p>
+          <a:p>
+            <a:pPr algn="l">
+              <a:lnSpc>
+                <a:spcPct val="115000"/>
+              </a:lnSpc>
+              <a:spcAft>
+                <a:spcPts val="500"/>
+              </a:spcAft>
+            </a:pPr>
+            <a:r>
               <a:rPr sz="1000" lang="zh-TW" dirty="0">
                 <a:solidFill>
                   <a:srgbClr val="000000"/>
@@ -1251,6 +1537,149 @@
               </a:spcAft>
             </a:pPr>
             <a:r>
+              <a:rPr sz="1200" b="1" lang="zh-TW" dirty="0">
+                <a:solidFill>
+                  <a:srgbClr val="000000"/>
+                </a:solidFill>
+                <a:latin typeface="Arial Unicode MS"/>
+                <a:ea typeface="Arial Unicode MS"/>
+                <a:cs typeface="Arial Unicode MS"/>
+              </a:rPr>
+              <a:t>▍這一張要做什麼</a:t>
+            </a:r>
+            <a:r>
+              <a:rPr sz="1200" lang="zh-TW" dirty="0">
+                <a:solidFill>
+                  <a:srgbClr val="000000"/>
+                </a:solidFill>
+                <a:latin typeface="Arial Unicode MS"/>
+                <a:ea typeface="Arial Unicode MS"/>
+                <a:cs typeface="Arial Unicode MS"/>
+              </a:rPr>
+              <a:t>
+</a:t>
+            </a:r>
+          </a:p>
+          <a:p>
+            <a:pPr algn="l">
+              <a:lnSpc>
+                <a:spcPct val="115000"/>
+              </a:lnSpc>
+              <a:spcAft>
+                <a:spcPts val="600"/>
+              </a:spcAft>
+            </a:pPr>
+            <a:r>
+              <a:rPr sz="1200" lang="zh-TW" dirty="0">
+                <a:solidFill>
+                  <a:srgbClr val="000000"/>
+                </a:solidFill>
+                <a:latin typeface="Arial Unicode MS"/>
+                <a:ea typeface="Arial Unicode MS"/>
+                <a:cs typeface="Arial Unicode MS"/>
+              </a:rPr>
+              <a:t>段落分隔。從「怎麼調參數」切換到「模擬到底能不能信」。
+</a:t>
+            </a:r>
+          </a:p>
+          <a:p>
+            <a:pPr algn="l">
+              <a:lnSpc>
+                <a:spcPct val="115000"/>
+              </a:lnSpc>
+              <a:spcAft>
+                <a:spcPts val="600"/>
+              </a:spcAft>
+            </a:pPr>
+            <a:r>
+              <a:rPr sz="1200" b="1" lang="zh-TW" dirty="0">
+                <a:solidFill>
+                  <a:srgbClr val="000000"/>
+                </a:solidFill>
+                <a:latin typeface="Arial Unicode MS"/>
+                <a:ea typeface="Arial Unicode MS"/>
+                <a:cs typeface="Arial Unicode MS"/>
+              </a:rPr>
+              <a:t>▍畫面上圈這裡</a:t>
+            </a:r>
+            <a:r>
+              <a:rPr sz="1200" lang="zh-TW" dirty="0">
+                <a:solidFill>
+                  <a:srgbClr val="000000"/>
+                </a:solidFill>
+                <a:latin typeface="Arial Unicode MS"/>
+                <a:ea typeface="Arial Unicode MS"/>
+                <a:cs typeface="Arial Unicode MS"/>
+              </a:rPr>
+              <a:t>
+</a:t>
+            </a:r>
+          </a:p>
+          <a:p>
+            <a:pPr algn="l">
+              <a:lnSpc>
+                <a:spcPct val="115000"/>
+              </a:lnSpc>
+              <a:spcAft>
+                <a:spcPts val="600"/>
+              </a:spcAft>
+            </a:pPr>
+            <a:r>
+              <a:rPr sz="1200" lang="zh-TW" dirty="0">
+                <a:solidFill>
+                  <a:srgbClr val="000000"/>
+                </a:solidFill>
+                <a:latin typeface="Arial Unicode MS"/>
+                <a:ea typeface="Arial Unicode MS"/>
+                <a:cs typeface="Arial Unicode MS"/>
+              </a:rPr>
+              <a:t>不用圈。這裡語氣要放慢，這一段是今天的核心。
+</a:t>
+            </a:r>
+          </a:p>
+          <a:p>
+            <a:pPr algn="l">
+              <a:lnSpc>
+                <a:spcPct val="115000"/>
+              </a:lnSpc>
+              <a:spcAft>
+                <a:spcPts val="600"/>
+              </a:spcAft>
+            </a:pPr>
+            <a:r>
+              <a:rPr sz="1200" b="1" lang="zh-TW" dirty="0">
+                <a:solidFill>
+                  <a:srgbClr val="000000"/>
+                </a:solidFill>
+                <a:latin typeface="Arial Unicode MS"/>
+                <a:ea typeface="Arial Unicode MS"/>
+                <a:cs typeface="Arial Unicode MS"/>
+              </a:rPr>
+              <a:t>▍以下照著唸</a:t>
+            </a:r>
+            <a:r>
+              <a:rPr sz="1200" lang="zh-TW" dirty="0">
+                <a:solidFill>
+                  <a:srgbClr val="000000"/>
+                </a:solidFill>
+                <a:latin typeface="Arial Unicode MS"/>
+                <a:ea typeface="Arial Unicode MS"/>
+                <a:cs typeface="Arial Unicode MS"/>
+              </a:rPr>
+              <a:t>
+</a:t>
+            </a:r>
+          </a:p>
+          <a:p>
+            <a:pPr algn="l">
+              <a:lnSpc>
+                <a:spcPct val="115000"/>
+              </a:lnSpc>
+              <a:spcAft>
+                <a:spcPts val="600"/>
+              </a:spcAft>
+            </a:pPr>
+            <a:r>
               <a:rPr sz="1200" lang="zh-TW" dirty="0">
                 <a:solidFill>
                   <a:srgbClr val="000000"/>
@@ -1460,6 +1889,149 @@
               </a:spcAft>
             </a:pPr>
             <a:r>
+              <a:rPr sz="1000" b="1" lang="zh-TW" dirty="0">
+                <a:solidFill>
+                  <a:srgbClr val="000000"/>
+                </a:solidFill>
+                <a:latin typeface="Arial Unicode MS"/>
+                <a:ea typeface="Arial Unicode MS"/>
+                <a:cs typeface="Arial Unicode MS"/>
+              </a:rPr>
+              <a:t>▍這一張要做什麼</a:t>
+            </a:r>
+            <a:r>
+              <a:rPr sz="1000" lang="zh-TW" dirty="0">
+                <a:solidFill>
+                  <a:srgbClr val="000000"/>
+                </a:solidFill>
+                <a:latin typeface="Arial Unicode MS"/>
+                <a:ea typeface="Arial Unicode MS"/>
+                <a:cs typeface="Arial Unicode MS"/>
+              </a:rPr>
+              <a:t>
+</a:t>
+            </a:r>
+          </a:p>
+          <a:p>
+            <a:pPr algn="l">
+              <a:lnSpc>
+                <a:spcPct val="115000"/>
+              </a:lnSpc>
+              <a:spcAft>
+                <a:spcPts val="500"/>
+              </a:spcAft>
+            </a:pPr>
+            <a:r>
+              <a:rPr sz="1000" lang="zh-TW" dirty="0">
+                <a:solidFill>
+                  <a:srgbClr val="000000"/>
+                </a:solidFill>
+                <a:latin typeface="Arial Unicode MS"/>
+                <a:ea typeface="Arial Unicode MS"/>
+                <a:cs typeface="Arial Unicode MS"/>
+              </a:rPr>
+              <a:t>三種落差的第一種：外觀。模擬畫出來的影像跟真相機拍到的不一樣。
+</a:t>
+            </a:r>
+          </a:p>
+          <a:p>
+            <a:pPr algn="l">
+              <a:lnSpc>
+                <a:spcPct val="115000"/>
+              </a:lnSpc>
+              <a:spcAft>
+                <a:spcPts val="500"/>
+              </a:spcAft>
+            </a:pPr>
+            <a:r>
+              <a:rPr sz="1000" b="1" lang="zh-TW" dirty="0">
+                <a:solidFill>
+                  <a:srgbClr val="000000"/>
+                </a:solidFill>
+                <a:latin typeface="Arial Unicode MS"/>
+                <a:ea typeface="Arial Unicode MS"/>
+                <a:cs typeface="Arial Unicode MS"/>
+              </a:rPr>
+              <a:t>▍畫面上圈這裡</a:t>
+            </a:r>
+            <a:r>
+              <a:rPr sz="1000" lang="zh-TW" dirty="0">
+                <a:solidFill>
+                  <a:srgbClr val="000000"/>
+                </a:solidFill>
+                <a:latin typeface="Arial Unicode MS"/>
+                <a:ea typeface="Arial Unicode MS"/>
+                <a:cs typeface="Arial Unicode MS"/>
+              </a:rPr>
+              <a:t>
+</a:t>
+            </a:r>
+          </a:p>
+          <a:p>
+            <a:pPr algn="l">
+              <a:lnSpc>
+                <a:spcPct val="115000"/>
+              </a:lnSpc>
+              <a:spcAft>
+                <a:spcPts val="500"/>
+              </a:spcAft>
+            </a:pPr>
+            <a:r>
+              <a:rPr sz="1000" lang="zh-TW" dirty="0">
+                <a:solidFill>
+                  <a:srgbClr val="000000"/>
+                </a:solidFill>
+                <a:latin typeface="Arial Unicode MS"/>
+                <a:ea typeface="Arial Unicode MS"/>
+                <a:cs typeface="Arial Unicode MS"/>
+              </a:rPr>
+              <a:t>圈主標上的「外觀落差」，再圈下方說明裡的具體例子。
+</a:t>
+            </a:r>
+          </a:p>
+          <a:p>
+            <a:pPr algn="l">
+              <a:lnSpc>
+                <a:spcPct val="115000"/>
+              </a:lnSpc>
+              <a:spcAft>
+                <a:spcPts val="500"/>
+              </a:spcAft>
+            </a:pPr>
+            <a:r>
+              <a:rPr sz="1000" b="1" lang="zh-TW" dirty="0">
+                <a:solidFill>
+                  <a:srgbClr val="000000"/>
+                </a:solidFill>
+                <a:latin typeface="Arial Unicode MS"/>
+                <a:ea typeface="Arial Unicode MS"/>
+                <a:cs typeface="Arial Unicode MS"/>
+              </a:rPr>
+              <a:t>▍以下照著唸</a:t>
+            </a:r>
+            <a:r>
+              <a:rPr sz="1000" lang="zh-TW" dirty="0">
+                <a:solidFill>
+                  <a:srgbClr val="000000"/>
+                </a:solidFill>
+                <a:latin typeface="Arial Unicode MS"/>
+                <a:ea typeface="Arial Unicode MS"/>
+                <a:cs typeface="Arial Unicode MS"/>
+              </a:rPr>
+              <a:t>
+</a:t>
+            </a:r>
+          </a:p>
+          <a:p>
+            <a:pPr algn="l">
+              <a:lnSpc>
+                <a:spcPct val="115000"/>
+              </a:lnSpc>
+              <a:spcAft>
+                <a:spcPts val="500"/>
+              </a:spcAft>
+            </a:pPr>
+            <a:r>
               <a:rPr sz="1000" lang="zh-TW" dirty="0">
                 <a:solidFill>
                   <a:srgbClr val="000000"/>
@@ -1896,11 +2468,154 @@
                 <a:spcPct val="115000"/>
               </a:lnSpc>
               <a:spcAft>
-                <a:spcPts val="575"/>
-              </a:spcAft>
-            </a:pPr>
-            <a:r>
-              <a:rPr sz="1150" lang="zh-TW" dirty="0">
+                <a:spcPts val="500"/>
+              </a:spcAft>
+            </a:pPr>
+            <a:r>
+              <a:rPr sz="1000" b="1" lang="zh-TW" dirty="0">
+                <a:solidFill>
+                  <a:srgbClr val="000000"/>
+                </a:solidFill>
+                <a:latin typeface="Arial Unicode MS"/>
+                <a:ea typeface="Arial Unicode MS"/>
+                <a:cs typeface="Arial Unicode MS"/>
+              </a:rPr>
+              <a:t>▍這一張要做什麼</a:t>
+            </a:r>
+            <a:r>
+              <a:rPr sz="1000" lang="zh-TW" dirty="0">
+                <a:solidFill>
+                  <a:srgbClr val="000000"/>
+                </a:solidFill>
+                <a:latin typeface="Arial Unicode MS"/>
+                <a:ea typeface="Arial Unicode MS"/>
+                <a:cs typeface="Arial Unicode MS"/>
+              </a:rPr>
+              <a:t>
+</a:t>
+            </a:r>
+          </a:p>
+          <a:p>
+            <a:pPr algn="l">
+              <a:lnSpc>
+                <a:spcPct val="115000"/>
+              </a:lnSpc>
+              <a:spcAft>
+                <a:spcPts val="500"/>
+              </a:spcAft>
+            </a:pPr>
+            <a:r>
+              <a:rPr sz="1000" lang="zh-TW" dirty="0">
+                <a:solidFill>
+                  <a:srgbClr val="000000"/>
+                </a:solidFill>
+                <a:latin typeface="Arial Unicode MS"/>
+                <a:ea typeface="Arial Unicode MS"/>
+                <a:cs typeface="Arial Unicode MS"/>
+              </a:rPr>
+              <a:t>第二種：行為。模擬裡的車照規則走，真實世界的人不照規則走。
+</a:t>
+            </a:r>
+          </a:p>
+          <a:p>
+            <a:pPr algn="l">
+              <a:lnSpc>
+                <a:spcPct val="115000"/>
+              </a:lnSpc>
+              <a:spcAft>
+                <a:spcPts val="500"/>
+              </a:spcAft>
+            </a:pPr>
+            <a:r>
+              <a:rPr sz="1000" b="1" lang="zh-TW" dirty="0">
+                <a:solidFill>
+                  <a:srgbClr val="000000"/>
+                </a:solidFill>
+                <a:latin typeface="Arial Unicode MS"/>
+                <a:ea typeface="Arial Unicode MS"/>
+                <a:cs typeface="Arial Unicode MS"/>
+              </a:rPr>
+              <a:t>▍畫面上圈這裡</a:t>
+            </a:r>
+            <a:r>
+              <a:rPr sz="1000" lang="zh-TW" dirty="0">
+                <a:solidFill>
+                  <a:srgbClr val="000000"/>
+                </a:solidFill>
+                <a:latin typeface="Arial Unicode MS"/>
+                <a:ea typeface="Arial Unicode MS"/>
+                <a:cs typeface="Arial Unicode MS"/>
+              </a:rPr>
+              <a:t>
+</a:t>
+            </a:r>
+          </a:p>
+          <a:p>
+            <a:pPr algn="l">
+              <a:lnSpc>
+                <a:spcPct val="115000"/>
+              </a:lnSpc>
+              <a:spcAft>
+                <a:spcPts val="500"/>
+              </a:spcAft>
+            </a:pPr>
+            <a:r>
+              <a:rPr sz="1000" lang="zh-TW" dirty="0">
+                <a:solidFill>
+                  <a:srgbClr val="000000"/>
+                </a:solidFill>
+                <a:latin typeface="Arial Unicode MS"/>
+                <a:ea typeface="Arial Unicode MS"/>
+                <a:cs typeface="Arial Unicode MS"/>
+              </a:rPr>
+              <a:t>圈「不照規則走」這幾個字。這一條越南班最有感，可以停下來讓他們舉例。
+</a:t>
+            </a:r>
+          </a:p>
+          <a:p>
+            <a:pPr algn="l">
+              <a:lnSpc>
+                <a:spcPct val="115000"/>
+              </a:lnSpc>
+              <a:spcAft>
+                <a:spcPts val="500"/>
+              </a:spcAft>
+            </a:pPr>
+            <a:r>
+              <a:rPr sz="1000" b="1" lang="zh-TW" dirty="0">
+                <a:solidFill>
+                  <a:srgbClr val="000000"/>
+                </a:solidFill>
+                <a:latin typeface="Arial Unicode MS"/>
+                <a:ea typeface="Arial Unicode MS"/>
+                <a:cs typeface="Arial Unicode MS"/>
+              </a:rPr>
+              <a:t>▍以下照著唸</a:t>
+            </a:r>
+            <a:r>
+              <a:rPr sz="1000" lang="zh-TW" dirty="0">
+                <a:solidFill>
+                  <a:srgbClr val="000000"/>
+                </a:solidFill>
+                <a:latin typeface="Arial Unicode MS"/>
+                <a:ea typeface="Arial Unicode MS"/>
+                <a:cs typeface="Arial Unicode MS"/>
+              </a:rPr>
+              <a:t>
+</a:t>
+            </a:r>
+          </a:p>
+          <a:p>
+            <a:pPr algn="l">
+              <a:lnSpc>
+                <a:spcPct val="115000"/>
+              </a:lnSpc>
+              <a:spcAft>
+                <a:spcPts val="500"/>
+              </a:spcAft>
+            </a:pPr>
+            <a:r>
+              <a:rPr sz="1000" lang="zh-TW" dirty="0">
                 <a:solidFill>
                   <a:srgbClr val="000000"/>
                 </a:solidFill>
@@ -1911,7 +2626,7 @@
               <a:t>第二種：</a:t>
             </a:r>
             <a:r>
-              <a:rPr sz="1150" b="1" lang="zh-TW" dirty="0">
+              <a:rPr sz="1000" b="1" lang="zh-TW" dirty="0">
                 <a:solidFill>
                   <a:srgbClr val="000000"/>
                 </a:solidFill>
@@ -1922,7 +2637,7 @@
               <a:t>行為落差</a:t>
             </a:r>
             <a:r>
-              <a:rPr sz="1150" lang="zh-TW" dirty="0">
+              <a:rPr sz="1000" lang="zh-TW" dirty="0">
                 <a:solidFill>
                   <a:srgbClr val="000000"/>
                 </a:solidFill>
@@ -1940,11 +2655,11 @@
                 <a:spcPct val="115000"/>
               </a:lnSpc>
               <a:spcAft>
-                <a:spcPts val="575"/>
-              </a:spcAft>
-            </a:pPr>
-            <a:r>
-              <a:rPr sz="1150" lang="zh-TW" dirty="0">
+                <a:spcPts val="500"/>
+              </a:spcAft>
+            </a:pPr>
+            <a:r>
+              <a:rPr sz="1000" lang="zh-TW" dirty="0">
                 <a:solidFill>
                   <a:srgbClr val="000000"/>
                 </a:solidFill>
@@ -1962,11 +2677,11 @@
                 <a:spcPct val="115000"/>
               </a:lnSpc>
               <a:spcAft>
-                <a:spcPts val="575"/>
-              </a:spcAft>
-            </a:pPr>
-            <a:r>
-              <a:rPr sz="1150" lang="zh-TW" dirty="0">
+                <a:spcPts val="500"/>
+              </a:spcAft>
+            </a:pPr>
+            <a:r>
+              <a:rPr sz="1000" lang="zh-TW" dirty="0">
                 <a:solidFill>
                   <a:srgbClr val="000000"/>
                 </a:solidFill>
@@ -1984,11 +2699,11 @@
                 <a:spcPct val="115000"/>
               </a:lnSpc>
               <a:spcAft>
-                <a:spcPts val="575"/>
-              </a:spcAft>
-            </a:pPr>
-            <a:r>
-              <a:rPr sz="1150" lang="zh-TW" dirty="0">
+                <a:spcPts val="500"/>
+              </a:spcAft>
+            </a:pPr>
+            <a:r>
+              <a:rPr sz="1000" lang="zh-TW" dirty="0">
                 <a:solidFill>
                   <a:srgbClr val="000000"/>
                 </a:solidFill>
@@ -2006,11 +2721,11 @@
                 <a:spcPct val="115000"/>
               </a:lnSpc>
               <a:spcAft>
-                <a:spcPts val="575"/>
-              </a:spcAft>
-            </a:pPr>
-            <a:r>
-              <a:rPr sz="1150" lang="zh-TW" dirty="0">
+                <a:spcPts val="500"/>
+              </a:spcAft>
+            </a:pPr>
+            <a:r>
+              <a:rPr sz="1000" lang="zh-TW" dirty="0">
                 <a:solidFill>
                   <a:srgbClr val="000000"/>
                 </a:solidFill>
@@ -2021,7 +2736,7 @@
               <a:t>所以會發生一件很諷刺的事：</a:t>
             </a:r>
             <a:r>
-              <a:rPr sz="1150" b="1" lang="zh-TW" dirty="0">
+              <a:rPr sz="1000" b="1" lang="zh-TW" dirty="0">
                 <a:solidFill>
                   <a:srgbClr val="000000"/>
                 </a:solidFill>
@@ -2032,7 +2747,7 @@
               <a:t>一台在模擬裡表現完美的自駕車，丟到真的河內街頭，可能完全動不了</a:t>
             </a:r>
             <a:r>
-              <a:rPr sz="1150" lang="zh-TW" dirty="0">
+              <a:rPr sz="1000" lang="zh-TW" dirty="0">
                 <a:solidFill>
                   <a:srgbClr val="000000"/>
                 </a:solidFill>
@@ -2050,11 +2765,11 @@
                 <a:spcPct val="115000"/>
               </a:lnSpc>
               <a:spcAft>
-                <a:spcPts val="575"/>
-              </a:spcAft>
-            </a:pPr>
-            <a:r>
-              <a:rPr sz="1150" lang="zh-TW" dirty="0">
+                <a:spcPts val="500"/>
+              </a:spcAft>
+            </a:pPr>
+            <a:r>
+              <a:rPr sz="1000" lang="zh-TW" dirty="0">
                 <a:solidFill>
                   <a:srgbClr val="000000"/>
                 </a:solidFill>
@@ -2065,7 +2780,7 @@
               <a:t>解法是什麼？把</a:t>
             </a:r>
             <a:r>
-              <a:rPr sz="1150" b="1" lang="zh-TW" dirty="0">
+              <a:rPr sz="1000" b="1" lang="zh-TW" dirty="0">
                 <a:solidFill>
                   <a:srgbClr val="000000"/>
                 </a:solidFill>
@@ -2076,7 +2791,7 @@
               <a:t>真實道路上錄到的軌跡回放進模擬</a:t>
             </a:r>
             <a:r>
-              <a:rPr sz="1150" lang="zh-TW" dirty="0">
+              <a:rPr sz="1000" lang="zh-TW" dirty="0">
                 <a:solidFill>
                   <a:srgbClr val="000000"/>
                 </a:solidFill>
@@ -2094,11 +2809,11 @@
                 <a:spcPct val="115000"/>
               </a:lnSpc>
               <a:spcAft>
-                <a:spcPts val="575"/>
-              </a:spcAft>
-            </a:pPr>
-            <a:r>
-              <a:rPr sz="1150" lang="zh-TW" dirty="0">
+                <a:spcPts val="500"/>
+              </a:spcAft>
+            </a:pPr>
+            <a:r>
+              <a:rPr sz="1000" lang="zh-TW" dirty="0">
                 <a:solidFill>
                   <a:srgbClr val="000000"/>
                 </a:solidFill>
@@ -2109,7 +2824,7 @@
               <a:t>但這裡有個問題留給各位想：</a:t>
             </a:r>
             <a:r>
-              <a:rPr sz="1150" b="1" lang="zh-TW" dirty="0">
+              <a:rPr sz="1000" b="1" lang="zh-TW" dirty="0">
                 <a:solidFill>
                   <a:srgbClr val="000000"/>
                 </a:solidFill>
@@ -2120,7 +2835,7 @@
               <a:t>要回放河內的軌跡，你得先有河內的軌跡。</a:t>
             </a:r>
             <a:r>
-              <a:rPr sz="1150" lang="zh-TW" dirty="0">
+              <a:rPr sz="1000" lang="zh-TW" dirty="0">
                 <a:solidFill>
                   <a:srgbClr val="000000"/>
                 </a:solidFill>
@@ -2138,11 +2853,11 @@
                 <a:spcPct val="115000"/>
               </a:lnSpc>
               <a:spcAft>
-                <a:spcPts val="575"/>
-              </a:spcAft>
-            </a:pPr>
-            <a:r>
-              <a:rPr sz="1150" lang="zh-TW" dirty="0">
+                <a:spcPts val="500"/>
+              </a:spcAft>
+            </a:pPr>
+            <a:r>
+              <a:rPr sz="1000" lang="zh-TW" dirty="0">
                 <a:solidFill>
                   <a:srgbClr val="000000"/>
                 </a:solidFill>
@@ -2160,11 +2875,11 @@
                 <a:spcPct val="115000"/>
               </a:lnSpc>
               <a:spcAft>
-                <a:spcPts val="575"/>
-              </a:spcAft>
-            </a:pPr>
-            <a:r>
-              <a:rPr sz="1150" lang="zh-TW" dirty="0">
+                <a:spcPts val="500"/>
+              </a:spcAft>
+            </a:pPr>
+            <a:r>
+              <a:rPr sz="1000" lang="zh-TW" dirty="0">
                 <a:solidFill>
                   <a:srgbClr val="000000"/>
                 </a:solidFill>
@@ -2175,7 +2890,7 @@
               <a:t>對。這就是為什麼「做一個台灣或越南的交通行為模型」是很有價值的題目——</a:t>
             </a:r>
             <a:r>
-              <a:rPr sz="1150" b="1" lang="zh-TW" dirty="0">
+              <a:rPr sz="1000" b="1" lang="zh-TW" dirty="0">
                 <a:solidFill>
                   <a:srgbClr val="000000"/>
                 </a:solidFill>
@@ -2292,11 +3007,154 @@
                 <a:spcPct val="115000"/>
               </a:lnSpc>
               <a:spcAft>
-                <a:spcPts val="550"/>
-              </a:spcAft>
-            </a:pPr>
-            <a:r>
-              <a:rPr sz="1100" lang="zh-TW" dirty="0">
+                <a:spcPts val="500"/>
+              </a:spcAft>
+            </a:pPr>
+            <a:r>
+              <a:rPr sz="1000" b="1" lang="zh-TW" dirty="0">
+                <a:solidFill>
+                  <a:srgbClr val="000000"/>
+                </a:solidFill>
+                <a:latin typeface="Arial Unicode MS"/>
+                <a:ea typeface="Arial Unicode MS"/>
+                <a:cs typeface="Arial Unicode MS"/>
+              </a:rPr>
+              <a:t>▍這一張要做什麼</a:t>
+            </a:r>
+            <a:r>
+              <a:rPr sz="1000" lang="zh-TW" dirty="0">
+                <a:solidFill>
+                  <a:srgbClr val="000000"/>
+                </a:solidFill>
+                <a:latin typeface="Arial Unicode MS"/>
+                <a:ea typeface="Arial Unicode MS"/>
+                <a:cs typeface="Arial Unicode MS"/>
+              </a:rPr>
+              <a:t>
+</a:t>
+            </a:r>
+          </a:p>
+          <a:p>
+            <a:pPr algn="l">
+              <a:lnSpc>
+                <a:spcPct val="115000"/>
+              </a:lnSpc>
+              <a:spcAft>
+                <a:spcPts val="500"/>
+              </a:spcAft>
+            </a:pPr>
+            <a:r>
+              <a:rPr sz="1000" lang="zh-TW" dirty="0">
+                <a:solidFill>
+                  <a:srgbClr val="000000"/>
+                </a:solidFill>
+                <a:latin typeface="Arial Unicode MS"/>
+                <a:ea typeface="Arial Unicode MS"/>
+                <a:cs typeface="Arial Unicode MS"/>
+              </a:rPr>
+              <a:t>第三種：物理。輪胎、懸吊、煞車延遲在模擬裡都只是近似值。
+</a:t>
+            </a:r>
+          </a:p>
+          <a:p>
+            <a:pPr algn="l">
+              <a:lnSpc>
+                <a:spcPct val="115000"/>
+              </a:lnSpc>
+              <a:spcAft>
+                <a:spcPts val="500"/>
+              </a:spcAft>
+            </a:pPr>
+            <a:r>
+              <a:rPr sz="1000" b="1" lang="zh-TW" dirty="0">
+                <a:solidFill>
+                  <a:srgbClr val="000000"/>
+                </a:solidFill>
+                <a:latin typeface="Arial Unicode MS"/>
+                <a:ea typeface="Arial Unicode MS"/>
+                <a:cs typeface="Arial Unicode MS"/>
+              </a:rPr>
+              <a:t>▍畫面上圈這裡</a:t>
+            </a:r>
+            <a:r>
+              <a:rPr sz="1000" lang="zh-TW" dirty="0">
+                <a:solidFill>
+                  <a:srgbClr val="000000"/>
+                </a:solidFill>
+                <a:latin typeface="Arial Unicode MS"/>
+                <a:ea typeface="Arial Unicode MS"/>
+                <a:cs typeface="Arial Unicode MS"/>
+              </a:rPr>
+              <a:t>
+</a:t>
+            </a:r>
+          </a:p>
+          <a:p>
+            <a:pPr algn="l">
+              <a:lnSpc>
+                <a:spcPct val="115000"/>
+              </a:lnSpc>
+              <a:spcAft>
+                <a:spcPts val="500"/>
+              </a:spcAft>
+            </a:pPr>
+            <a:r>
+              <a:rPr sz="1000" lang="zh-TW" dirty="0">
+                <a:solidFill>
+                  <a:srgbClr val="000000"/>
+                </a:solidFill>
+                <a:latin typeface="Arial Unicode MS"/>
+                <a:ea typeface="Arial Unicode MS"/>
+                <a:cs typeface="Arial Unicode MS"/>
+              </a:rPr>
+              <a:t>圈「近似值」三個字，並回頭指第 7 張那條煞停公式——那也是近似的。
+</a:t>
+            </a:r>
+          </a:p>
+          <a:p>
+            <a:pPr algn="l">
+              <a:lnSpc>
+                <a:spcPct val="115000"/>
+              </a:lnSpc>
+              <a:spcAft>
+                <a:spcPts val="500"/>
+              </a:spcAft>
+            </a:pPr>
+            <a:r>
+              <a:rPr sz="1000" b="1" lang="zh-TW" dirty="0">
+                <a:solidFill>
+                  <a:srgbClr val="000000"/>
+                </a:solidFill>
+                <a:latin typeface="Arial Unicode MS"/>
+                <a:ea typeface="Arial Unicode MS"/>
+                <a:cs typeface="Arial Unicode MS"/>
+              </a:rPr>
+              <a:t>▍以下照著唸</a:t>
+            </a:r>
+            <a:r>
+              <a:rPr sz="1000" lang="zh-TW" dirty="0">
+                <a:solidFill>
+                  <a:srgbClr val="000000"/>
+                </a:solidFill>
+                <a:latin typeface="Arial Unicode MS"/>
+                <a:ea typeface="Arial Unicode MS"/>
+                <a:cs typeface="Arial Unicode MS"/>
+              </a:rPr>
+              <a:t>
+</a:t>
+            </a:r>
+          </a:p>
+          <a:p>
+            <a:pPr algn="l">
+              <a:lnSpc>
+                <a:spcPct val="115000"/>
+              </a:lnSpc>
+              <a:spcAft>
+                <a:spcPts val="500"/>
+              </a:spcAft>
+            </a:pPr>
+            <a:r>
+              <a:rPr sz="1000" lang="zh-TW" dirty="0">
                 <a:solidFill>
                   <a:srgbClr val="000000"/>
                 </a:solidFill>
@@ -2307,7 +3165,7 @@
               <a:t>第三種：</a:t>
             </a:r>
             <a:r>
-              <a:rPr sz="1100" b="1" lang="zh-TW" dirty="0">
+              <a:rPr sz="1000" b="1" lang="zh-TW" dirty="0">
                 <a:solidFill>
                   <a:srgbClr val="000000"/>
                 </a:solidFill>
@@ -2318,7 +3176,7 @@
               <a:t>物理落差</a:t>
             </a:r>
             <a:r>
-              <a:rPr sz="1100" lang="zh-TW" dirty="0">
+              <a:rPr sz="1000" lang="zh-TW" dirty="0">
                 <a:solidFill>
                   <a:srgbClr val="000000"/>
                 </a:solidFill>
@@ -2336,11 +3194,11 @@
                 <a:spcPct val="115000"/>
               </a:lnSpc>
               <a:spcAft>
-                <a:spcPts val="550"/>
-              </a:spcAft>
-            </a:pPr>
-            <a:r>
-              <a:rPr sz="1100" lang="zh-TW" dirty="0">
+                <a:spcPts val="500"/>
+              </a:spcAft>
+            </a:pPr>
+            <a:r>
+              <a:rPr sz="1000" lang="zh-TW" dirty="0">
                 <a:solidFill>
                   <a:srgbClr val="000000"/>
                 </a:solidFill>
@@ -2351,7 +3209,7 @@
               <a:t>輪胎怎麼抓地、懸吊怎麼吸收震動、煞車踩下去到真的減速中間有多少延遲——這些在模擬裡都是</a:t>
             </a:r>
             <a:r>
-              <a:rPr sz="1100" b="1" lang="zh-TW" dirty="0">
+              <a:rPr sz="1000" b="1" lang="zh-TW" dirty="0">
                 <a:solidFill>
                   <a:srgbClr val="000000"/>
                 </a:solidFill>
@@ -2362,7 +3220,7 @@
               <a:t>近似值</a:t>
             </a:r>
             <a:r>
-              <a:rPr sz="1100" lang="zh-TW" dirty="0">
+              <a:rPr sz="1000" lang="zh-TW" dirty="0">
                 <a:solidFill>
                   <a:srgbClr val="000000"/>
                 </a:solidFill>
@@ -2380,11 +3238,11 @@
                 <a:spcPct val="115000"/>
               </a:lnSpc>
               <a:spcAft>
-                <a:spcPts val="550"/>
-              </a:spcAft>
-            </a:pPr>
-            <a:r>
-              <a:rPr sz="1100" lang="zh-TW" dirty="0">
+                <a:spcPts val="500"/>
+              </a:spcAft>
+            </a:pPr>
+            <a:r>
+              <a:rPr sz="1000" lang="zh-TW" dirty="0">
                 <a:solidFill>
                   <a:srgbClr val="000000"/>
                 </a:solidFill>
@@ -2395,7 +3253,7 @@
               <a:t>我們的模擬器更簡化：減速度就是一個固定的數字，</a:t>
             </a:r>
             <a:r>
-              <a:rPr sz="1100" b="1" lang="zh-TW" dirty="0">
+              <a:rPr sz="1000" b="1" lang="zh-TW" dirty="0">
                 <a:solidFill>
                   <a:srgbClr val="000000"/>
                 </a:solidFill>
@@ -2406,7 +3264,7 @@
               <a:t>六</a:t>
             </a:r>
             <a:r>
-              <a:rPr sz="1100" lang="zh-TW" dirty="0">
+              <a:rPr sz="1000" lang="zh-TW" dirty="0">
                 <a:solidFill>
                   <a:srgbClr val="000000"/>
                 </a:solidFill>
@@ -2424,11 +3282,11 @@
                 <a:spcPct val="115000"/>
               </a:lnSpc>
               <a:spcAft>
-                <a:spcPts val="550"/>
-              </a:spcAft>
-            </a:pPr>
-            <a:r>
-              <a:rPr sz="1100" lang="zh-TW" dirty="0">
+                <a:spcPts val="500"/>
+              </a:spcAft>
+            </a:pPr>
+            <a:r>
+              <a:rPr sz="1000" lang="zh-TW" dirty="0">
                 <a:solidFill>
                   <a:srgbClr val="000000"/>
                 </a:solidFill>
@@ -2446,11 +3304,11 @@
                 <a:spcPct val="115000"/>
               </a:lnSpc>
               <a:spcAft>
-                <a:spcPts val="550"/>
-              </a:spcAft>
-            </a:pPr>
-            <a:r>
-              <a:rPr sz="1100" lang="zh-TW" dirty="0">
+                <a:spcPts val="500"/>
+              </a:spcAft>
+            </a:pPr>
+            <a:r>
+              <a:rPr sz="1000" lang="zh-TW" dirty="0">
                 <a:solidFill>
                   <a:srgbClr val="000000"/>
                 </a:solidFill>
@@ -2468,11 +3326,11 @@
                 <a:spcPct val="115000"/>
               </a:lnSpc>
               <a:spcAft>
-                <a:spcPts val="550"/>
-              </a:spcAft>
-            </a:pPr>
-            <a:r>
-              <a:rPr sz="1100" lang="zh-TW" dirty="0">
+                <a:spcPts val="500"/>
+              </a:spcAft>
+            </a:pPr>
+            <a:r>
+              <a:rPr sz="1000" lang="zh-TW" dirty="0">
                 <a:solidFill>
                   <a:srgbClr val="000000"/>
                 </a:solidFill>
@@ -2490,11 +3348,11 @@
                 <a:spcPct val="115000"/>
               </a:lnSpc>
               <a:spcAft>
-                <a:spcPts val="550"/>
-              </a:spcAft>
-            </a:pPr>
-            <a:r>
-              <a:rPr sz="1100" b="1" lang="zh-TW" dirty="0">
+                <a:spcPts val="500"/>
+              </a:spcAft>
+            </a:pPr>
+            <a:r>
+              <a:rPr sz="1000" b="1" lang="zh-TW" dirty="0">
                 <a:solidFill>
                   <a:srgbClr val="000000"/>
                 </a:solidFill>
@@ -2505,7 +3363,7 @@
               <a:t>濕路面的減速度大約只剩一半。</a:t>
             </a:r>
             <a:r>
-              <a:rPr sz="1100" lang="zh-TW" dirty="0">
+              <a:rPr sz="1000" lang="zh-TW" dirty="0">
                 <a:solidFill>
                   <a:srgbClr val="000000"/>
                 </a:solidFill>
@@ -2523,11 +3381,11 @@
                 <a:spcPct val="115000"/>
               </a:lnSpc>
               <a:spcAft>
-                <a:spcPts val="550"/>
-              </a:spcAft>
-            </a:pPr>
-            <a:r>
-              <a:rPr sz="1100" lang="zh-TW" dirty="0">
+                <a:spcPts val="500"/>
+              </a:spcAft>
+            </a:pPr>
+            <a:r>
+              <a:rPr sz="1000" lang="zh-TW" dirty="0">
                 <a:solidFill>
                   <a:srgbClr val="000000"/>
                 </a:solidFill>
@@ -2538,7 +3396,7 @@
               <a:t>我們回頭看剛剛那張表。所以那張表的數字，只在</a:t>
             </a:r>
             <a:r>
-              <a:rPr sz="1100" b="1" lang="zh-TW" dirty="0">
+              <a:rPr sz="1000" b="1" lang="zh-TW" dirty="0">
                 <a:solidFill>
                   <a:srgbClr val="000000"/>
                 </a:solidFill>
@@ -2549,7 +3407,7 @@
               <a:t>乾的柏油路</a:t>
             </a:r>
             <a:r>
-              <a:rPr sz="1100" lang="zh-TW" dirty="0">
+              <a:rPr sz="1000" lang="zh-TW" dirty="0">
                 <a:solidFill>
                   <a:srgbClr val="000000"/>
                 </a:solidFill>
@@ -2567,11 +3425,11 @@
                 <a:spcPct val="115000"/>
               </a:lnSpc>
               <a:spcAft>
-                <a:spcPts val="550"/>
-              </a:spcAft>
-            </a:pPr>
-            <a:r>
-              <a:rPr sz="1100" lang="zh-TW" dirty="0">
+                <a:spcPts val="500"/>
+              </a:spcAft>
+            </a:pPr>
+            <a:r>
+              <a:rPr sz="1000" lang="zh-TW" dirty="0">
                 <a:solidFill>
                   <a:srgbClr val="000000"/>
                 </a:solidFill>
@@ -2582,7 +3440,7 @@
               <a:t>第三節各位打開雨天的時候會親眼看到這件事——而且會發現一個陷阱：</a:t>
             </a:r>
             <a:r>
-              <a:rPr sz="1100" b="1" lang="zh-TW" dirty="0">
+              <a:rPr sz="1000" b="1" lang="zh-TW" dirty="0">
                 <a:solidFill>
                   <a:srgbClr val="000000"/>
                 </a:solidFill>
@@ -2699,11 +3557,154 @@
                 <a:spcPct val="115000"/>
               </a:lnSpc>
               <a:spcAft>
-                <a:spcPts val="575"/>
-              </a:spcAft>
-            </a:pPr>
-            <a:r>
-              <a:rPr sz="1150" lang="zh-TW" dirty="0">
+                <a:spcPts val="500"/>
+              </a:spcAft>
+            </a:pPr>
+            <a:r>
+              <a:rPr sz="1000" b="1" lang="zh-TW" dirty="0">
+                <a:solidFill>
+                  <a:srgbClr val="000000"/>
+                </a:solidFill>
+                <a:latin typeface="Arial Unicode MS"/>
+                <a:ea typeface="Arial Unicode MS"/>
+                <a:cs typeface="Arial Unicode MS"/>
+              </a:rPr>
+              <a:t>▍這一張要做什麼</a:t>
+            </a:r>
+            <a:r>
+              <a:rPr sz="1000" lang="zh-TW" dirty="0">
+                <a:solidFill>
+                  <a:srgbClr val="000000"/>
+                </a:solidFill>
+                <a:latin typeface="Arial Unicode MS"/>
+                <a:ea typeface="Arial Unicode MS"/>
+                <a:cs typeface="Arial Unicode MS"/>
+              </a:rPr>
+              <a:t>
+</a:t>
+            </a:r>
+          </a:p>
+          <a:p>
+            <a:pPr algn="l">
+              <a:lnSpc>
+                <a:spcPct val="115000"/>
+              </a:lnSpc>
+              <a:spcAft>
+                <a:spcPts val="500"/>
+              </a:spcAft>
+            </a:pPr>
+            <a:r>
+              <a:rPr sz="1000" lang="zh-TW" dirty="0">
+                <a:solidFill>
+                  <a:srgbClr val="000000"/>
+                </a:solidFill>
+                <a:latin typeface="Arial Unicode MS"/>
+                <a:ea typeface="Arial Unicode MS"/>
+                <a:cs typeface="Arial Unicode MS"/>
+              </a:rPr>
+              <a:t>平衡一下：不是要否定模擬。模擬能做真實世界做不到的事。
+</a:t>
+            </a:r>
+          </a:p>
+          <a:p>
+            <a:pPr algn="l">
+              <a:lnSpc>
+                <a:spcPct val="115000"/>
+              </a:lnSpc>
+              <a:spcAft>
+                <a:spcPts val="500"/>
+              </a:spcAft>
+            </a:pPr>
+            <a:r>
+              <a:rPr sz="1000" b="1" lang="zh-TW" dirty="0">
+                <a:solidFill>
+                  <a:srgbClr val="000000"/>
+                </a:solidFill>
+                <a:latin typeface="Arial Unicode MS"/>
+                <a:ea typeface="Arial Unicode MS"/>
+                <a:cs typeface="Arial Unicode MS"/>
+              </a:rPr>
+              <a:t>▍畫面上圈這裡</a:t>
+            </a:r>
+            <a:r>
+              <a:rPr sz="1000" lang="zh-TW" dirty="0">
+                <a:solidFill>
+                  <a:srgbClr val="000000"/>
+                </a:solidFill>
+                <a:latin typeface="Arial Unicode MS"/>
+                <a:ea typeface="Arial Unicode MS"/>
+                <a:cs typeface="Arial Unicode MS"/>
+              </a:rPr>
+              <a:t>
+</a:t>
+            </a:r>
+          </a:p>
+          <a:p>
+            <a:pPr algn="l">
+              <a:lnSpc>
+                <a:spcPct val="115000"/>
+              </a:lnSpc>
+              <a:spcAft>
+                <a:spcPts val="500"/>
+              </a:spcAft>
+            </a:pPr>
+            <a:r>
+              <a:rPr sz="1000" lang="zh-TW" dirty="0">
+                <a:solidFill>
+                  <a:srgbClr val="000000"/>
+                </a:solidFill>
+                <a:latin typeface="Arial Unicode MS"/>
+                <a:ea typeface="Arial Unicode MS"/>
+                <a:cs typeface="Arial Unicode MS"/>
+              </a:rPr>
+              <a:t>圈主標「做不到的事」，再圈下方舉的例子，例如危險場景可以重複跑一千次。
+</a:t>
+            </a:r>
+          </a:p>
+          <a:p>
+            <a:pPr algn="l">
+              <a:lnSpc>
+                <a:spcPct val="115000"/>
+              </a:lnSpc>
+              <a:spcAft>
+                <a:spcPts val="500"/>
+              </a:spcAft>
+            </a:pPr>
+            <a:r>
+              <a:rPr sz="1000" b="1" lang="zh-TW" dirty="0">
+                <a:solidFill>
+                  <a:srgbClr val="000000"/>
+                </a:solidFill>
+                <a:latin typeface="Arial Unicode MS"/>
+                <a:ea typeface="Arial Unicode MS"/>
+                <a:cs typeface="Arial Unicode MS"/>
+              </a:rPr>
+              <a:t>▍以下照著唸</a:t>
+            </a:r>
+            <a:r>
+              <a:rPr sz="1000" lang="zh-TW" dirty="0">
+                <a:solidFill>
+                  <a:srgbClr val="000000"/>
+                </a:solidFill>
+                <a:latin typeface="Arial Unicode MS"/>
+                <a:ea typeface="Arial Unicode MS"/>
+                <a:cs typeface="Arial Unicode MS"/>
+              </a:rPr>
+              <a:t>
+</a:t>
+            </a:r>
+          </a:p>
+          <a:p>
+            <a:pPr algn="l">
+              <a:lnSpc>
+                <a:spcPct val="115000"/>
+              </a:lnSpc>
+              <a:spcAft>
+                <a:spcPts val="500"/>
+              </a:spcAft>
+            </a:pPr>
+            <a:r>
+              <a:rPr sz="1000" lang="zh-TW" dirty="0">
                 <a:solidFill>
                   <a:srgbClr val="000000"/>
                 </a:solidFill>
@@ -2721,11 +3722,11 @@
                 <a:spcPct val="115000"/>
               </a:lnSpc>
               <a:spcAft>
-                <a:spcPts val="575"/>
-              </a:spcAft>
-            </a:pPr>
-            <a:r>
-              <a:rPr sz="1150" b="1" lang="zh-TW" dirty="0">
+                <a:spcPts val="500"/>
+              </a:spcAft>
+            </a:pPr>
+            <a:r>
+              <a:rPr sz="1000" b="1" lang="zh-TW" dirty="0">
                 <a:solidFill>
                   <a:srgbClr val="000000"/>
                 </a:solidFill>
@@ -2736,7 +3737,7 @@
               <a:t>模擬能做兩件真實世界做不到的事。</a:t>
             </a:r>
             <a:r>
-              <a:rPr sz="1150" lang="zh-TW" dirty="0">
+              <a:rPr sz="1000" lang="zh-TW" dirty="0">
                 <a:solidFill>
                   <a:srgbClr val="000000"/>
                 </a:solidFill>
@@ -2754,11 +3755,11 @@
                 <a:spcPct val="115000"/>
               </a:lnSpc>
               <a:spcAft>
-                <a:spcPts val="575"/>
-              </a:spcAft>
-            </a:pPr>
-            <a:r>
-              <a:rPr sz="1150" lang="zh-TW" dirty="0">
+                <a:spcPts val="500"/>
+              </a:spcAft>
+            </a:pPr>
+            <a:r>
+              <a:rPr sz="1000" lang="zh-TW" dirty="0">
                 <a:solidFill>
                   <a:srgbClr val="000000"/>
                 </a:solidFill>
@@ -2769,7 +3770,7 @@
               <a:t>第一件：</a:t>
             </a:r>
             <a:r>
-              <a:rPr sz="1150" b="1" lang="zh-TW" dirty="0">
+              <a:rPr sz="1000" b="1" lang="zh-TW" dirty="0">
                 <a:solidFill>
                   <a:srgbClr val="000000"/>
                 </a:solidFill>
@@ -2780,7 +3781,7 @@
               <a:t>同一個情況重跑一萬次，每次只改一個參數。</a:t>
             </a:r>
             <a:r>
-              <a:rPr sz="1150" lang="zh-TW" dirty="0">
+              <a:rPr sz="1000" lang="zh-TW" dirty="0">
                 <a:solidFill>
                   <a:srgbClr val="000000"/>
                 </a:solidFill>
@@ -2798,11 +3799,11 @@
                 <a:spcPct val="115000"/>
               </a:lnSpc>
               <a:spcAft>
-                <a:spcPts val="575"/>
-              </a:spcAft>
-            </a:pPr>
-            <a:r>
-              <a:rPr sz="1150" lang="zh-TW" dirty="0">
+                <a:spcPts val="500"/>
+              </a:spcAft>
+            </a:pPr>
+            <a:r>
+              <a:rPr sz="1000" lang="zh-TW" dirty="0">
                 <a:solidFill>
                   <a:srgbClr val="000000"/>
                 </a:solidFill>
@@ -2820,11 +3821,11 @@
                 <a:spcPct val="115000"/>
               </a:lnSpc>
               <a:spcAft>
-                <a:spcPts val="575"/>
-              </a:spcAft>
-            </a:pPr>
-            <a:r>
-              <a:rPr sz="1150" lang="zh-TW" dirty="0">
+                <a:spcPts val="500"/>
+              </a:spcAft>
+            </a:pPr>
+            <a:r>
+              <a:rPr sz="1000" lang="zh-TW" dirty="0">
                 <a:solidFill>
                   <a:srgbClr val="000000"/>
                 </a:solidFill>
@@ -2842,11 +3843,11 @@
                 <a:spcPct val="115000"/>
               </a:lnSpc>
               <a:spcAft>
-                <a:spcPts val="575"/>
-              </a:spcAft>
-            </a:pPr>
-            <a:r>
-              <a:rPr sz="1150" lang="zh-TW" dirty="0">
+                <a:spcPts val="500"/>
+              </a:spcAft>
+            </a:pPr>
+            <a:r>
+              <a:rPr sz="1000" lang="zh-TW" dirty="0">
                 <a:solidFill>
                   <a:srgbClr val="000000"/>
                 </a:solidFill>
@@ -2857,7 +3858,7 @@
               <a:t>第二件，這件更重要：</a:t>
             </a:r>
             <a:r>
-              <a:rPr sz="1150" b="1" lang="zh-TW" dirty="0">
+              <a:rPr sz="1000" b="1" lang="zh-TW" dirty="0">
                 <a:solidFill>
                   <a:srgbClr val="000000"/>
                 </a:solidFill>
@@ -2868,7 +3869,7 @@
               <a:t>讓行人剛好在最糟的時間點走出來。</a:t>
             </a:r>
             <a:r>
-              <a:rPr sz="1150" lang="zh-TW" dirty="0">
+              <a:rPr sz="1000" lang="zh-TW" dirty="0">
                 <a:solidFill>
                   <a:srgbClr val="000000"/>
                 </a:solidFill>
@@ -2886,11 +3887,11 @@
                 <a:spcPct val="115000"/>
               </a:lnSpc>
               <a:spcAft>
-                <a:spcPts val="575"/>
-              </a:spcAft>
-            </a:pPr>
-            <a:r>
-              <a:rPr sz="1150" lang="zh-TW" dirty="0">
+                <a:spcPts val="500"/>
+              </a:spcAft>
+            </a:pPr>
+            <a:r>
+              <a:rPr sz="1000" lang="zh-TW" dirty="0">
                 <a:solidFill>
                   <a:srgbClr val="000000"/>
                 </a:solidFill>
@@ -2908,11 +3909,11 @@
                 <a:spcPct val="115000"/>
               </a:lnSpc>
               <a:spcAft>
-                <a:spcPts val="575"/>
-              </a:spcAft>
-            </a:pPr>
-            <a:r>
-              <a:rPr sz="1150" lang="zh-TW" dirty="0">
+                <a:spcPts val="500"/>
+              </a:spcAft>
+            </a:pPr>
+            <a:r>
+              <a:rPr sz="1000" lang="zh-TW" dirty="0">
                 <a:solidFill>
                   <a:srgbClr val="000000"/>
                 </a:solidFill>
@@ -2930,11 +3931,11 @@
                 <a:spcPct val="115000"/>
               </a:lnSpc>
               <a:spcAft>
-                <a:spcPts val="575"/>
-              </a:spcAft>
-            </a:pPr>
-            <a:r>
-              <a:rPr sz="1150" lang="zh-TW" dirty="0">
+                <a:spcPts val="500"/>
+              </a:spcAft>
+            </a:pPr>
+            <a:r>
+              <a:rPr sz="1000" lang="zh-TW" dirty="0">
                 <a:solidFill>
                   <a:srgbClr val="000000"/>
                 </a:solidFill>
@@ -2945,7 +3946,7 @@
               <a:t>技術上做得到，但</a:t>
             </a:r>
             <a:r>
-              <a:rPr sz="1150" b="1" lang="zh-TW" dirty="0">
+              <a:rPr sz="1000" b="1" lang="zh-TW" dirty="0">
                 <a:solidFill>
                   <a:srgbClr val="000000"/>
                 </a:solidFill>
@@ -2956,7 +3957,7 @@
               <a:t>不可以做</a:t>
             </a:r>
             <a:r>
-              <a:rPr sz="1150" lang="zh-TW" dirty="0">
+              <a:rPr sz="1000" lang="zh-TW" dirty="0">
                 <a:solidFill>
                   <a:srgbClr val="000000"/>
                 </a:solidFill>
@@ -2974,11 +3975,11 @@
                 <a:spcPct val="115000"/>
               </a:lnSpc>
               <a:spcAft>
-                <a:spcPts val="575"/>
-              </a:spcAft>
-            </a:pPr>
-            <a:r>
-              <a:rPr sz="1150" lang="zh-TW" dirty="0">
+                <a:spcPts val="500"/>
+              </a:spcAft>
+            </a:pPr>
+            <a:r>
+              <a:rPr sz="1000" lang="zh-TW" dirty="0">
                 <a:solidFill>
                   <a:srgbClr val="000000"/>
                 </a:solidFill>
@@ -2989,7 +3990,7 @@
               <a:t>所以模擬不是「比較差的真實」，它是</a:t>
             </a:r>
             <a:r>
-              <a:rPr sz="1150" b="1" lang="zh-TW" dirty="0">
+              <a:rPr sz="1000" b="1" lang="zh-TW" dirty="0">
                 <a:solidFill>
                   <a:srgbClr val="000000"/>
                 </a:solidFill>
@@ -3000,7 +4001,7 @@
               <a:t>另一種工具</a:t>
             </a:r>
             <a:r>
-              <a:rPr sz="1150" lang="zh-TW" dirty="0">
+              <a:rPr sz="1000" lang="zh-TW" dirty="0">
                 <a:solidFill>
                   <a:srgbClr val="000000"/>
                 </a:solidFill>
@@ -3018,11 +4019,11 @@
                 <a:spcPct val="115000"/>
               </a:lnSpc>
               <a:spcAft>
-                <a:spcPts val="575"/>
-              </a:spcAft>
-            </a:pPr>
-            <a:r>
-              <a:rPr sz="1150" lang="zh-TW" dirty="0">
+                <a:spcPts val="500"/>
+              </a:spcAft>
+            </a:pPr>
+            <a:r>
+              <a:rPr sz="1000" lang="zh-TW" dirty="0">
                 <a:solidFill>
                   <a:srgbClr val="000000"/>
                 </a:solidFill>
@@ -3139,11 +4140,154 @@
                 <a:spcPct val="115000"/>
               </a:lnSpc>
               <a:spcAft>
-                <a:spcPts val="550"/>
-              </a:spcAft>
-            </a:pPr>
-            <a:r>
-              <a:rPr sz="1100" lang="zh-TW" dirty="0">
+                <a:spcPts val="500"/>
+              </a:spcAft>
+            </a:pPr>
+            <a:r>
+              <a:rPr sz="1000" b="1" lang="zh-TW" dirty="0">
+                <a:solidFill>
+                  <a:srgbClr val="000000"/>
+                </a:solidFill>
+                <a:latin typeface="Arial Unicode MS"/>
+                <a:ea typeface="Arial Unicode MS"/>
+                <a:cs typeface="Arial Unicode MS"/>
+              </a:rPr>
+              <a:t>▍這一張要做什麼</a:t>
+            </a:r>
+            <a:r>
+              <a:rPr sz="1000" lang="zh-TW" dirty="0">
+                <a:solidFill>
+                  <a:srgbClr val="000000"/>
+                </a:solidFill>
+                <a:latin typeface="Arial Unicode MS"/>
+                <a:ea typeface="Arial Unicode MS"/>
+                <a:cs typeface="Arial Unicode MS"/>
+              </a:rPr>
+              <a:t>
+</a:t>
+            </a:r>
+          </a:p>
+          <a:p>
+            <a:pPr algn="l">
+              <a:lnSpc>
+                <a:spcPct val="115000"/>
+              </a:lnSpc>
+              <a:spcAft>
+                <a:spcPts val="500"/>
+              </a:spcAft>
+            </a:pPr>
+            <a:r>
+              <a:rPr sz="1000" lang="zh-TW" dirty="0">
+                <a:solidFill>
+                  <a:srgbClr val="000000"/>
+                </a:solidFill>
+                <a:latin typeface="Arial Unicode MS"/>
+                <a:ea typeface="Arial Unicode MS"/>
+                <a:cs typeface="Arial Unicode MS"/>
+              </a:rPr>
+              <a:t>把三種落差拉回台灣與越南的路況，讓它變成跟學生有關的事。
+</a:t>
+            </a:r>
+          </a:p>
+          <a:p>
+            <a:pPr algn="l">
+              <a:lnSpc>
+                <a:spcPct val="115000"/>
+              </a:lnSpc>
+              <a:spcAft>
+                <a:spcPts val="500"/>
+              </a:spcAft>
+            </a:pPr>
+            <a:r>
+              <a:rPr sz="1000" b="1" lang="zh-TW" dirty="0">
+                <a:solidFill>
+                  <a:srgbClr val="000000"/>
+                </a:solidFill>
+                <a:latin typeface="Arial Unicode MS"/>
+                <a:ea typeface="Arial Unicode MS"/>
+                <a:cs typeface="Arial Unicode MS"/>
+              </a:rPr>
+              <a:t>▍畫面上圈這裡</a:t>
+            </a:r>
+            <a:r>
+              <a:rPr sz="1000" lang="zh-TW" dirty="0">
+                <a:solidFill>
+                  <a:srgbClr val="000000"/>
+                </a:solidFill>
+                <a:latin typeface="Arial Unicode MS"/>
+                <a:ea typeface="Arial Unicode MS"/>
+                <a:cs typeface="Arial Unicode MS"/>
+              </a:rPr>
+              <a:t>
+</a:t>
+            </a:r>
+          </a:p>
+          <a:p>
+            <a:pPr algn="l">
+              <a:lnSpc>
+                <a:spcPct val="115000"/>
+              </a:lnSpc>
+              <a:spcAft>
+                <a:spcPts val="500"/>
+              </a:spcAft>
+            </a:pPr>
+            <a:r>
+              <a:rPr sz="1000" lang="zh-TW" dirty="0">
+                <a:solidFill>
+                  <a:srgbClr val="000000"/>
+                </a:solidFill>
+                <a:latin typeface="Arial Unicode MS"/>
+                <a:ea typeface="Arial Unicode MS"/>
+                <a:cs typeface="Arial Unicode MS"/>
+              </a:rPr>
+              <a:t>一列一列圈，每圈一列問一次「你們覺得這裡是不是更嚴重」。
+</a:t>
+            </a:r>
+          </a:p>
+          <a:p>
+            <a:pPr algn="l">
+              <a:lnSpc>
+                <a:spcPct val="115000"/>
+              </a:lnSpc>
+              <a:spcAft>
+                <a:spcPts val="500"/>
+              </a:spcAft>
+            </a:pPr>
+            <a:r>
+              <a:rPr sz="1000" b="1" lang="zh-TW" dirty="0">
+                <a:solidFill>
+                  <a:srgbClr val="000000"/>
+                </a:solidFill>
+                <a:latin typeface="Arial Unicode MS"/>
+                <a:ea typeface="Arial Unicode MS"/>
+                <a:cs typeface="Arial Unicode MS"/>
+              </a:rPr>
+              <a:t>▍以下照著唸</a:t>
+            </a:r>
+            <a:r>
+              <a:rPr sz="1000" lang="zh-TW" dirty="0">
+                <a:solidFill>
+                  <a:srgbClr val="000000"/>
+                </a:solidFill>
+                <a:latin typeface="Arial Unicode MS"/>
+                <a:ea typeface="Arial Unicode MS"/>
+                <a:cs typeface="Arial Unicode MS"/>
+              </a:rPr>
+              <a:t>
+</a:t>
+            </a:r>
+          </a:p>
+          <a:p>
+            <a:pPr algn="l">
+              <a:lnSpc>
+                <a:spcPct val="115000"/>
+              </a:lnSpc>
+              <a:spcAft>
+                <a:spcPts val="500"/>
+              </a:spcAft>
+            </a:pPr>
+            <a:r>
+              <a:rPr sz="1000" lang="zh-TW" dirty="0">
                 <a:solidFill>
                   <a:srgbClr val="000000"/>
                 </a:solidFill>
@@ -3154,7 +4298,7 @@
               <a:t>剛剛那三種落差，在台灣和越南</a:t>
             </a:r>
             <a:r>
-              <a:rPr sz="1100" b="1" lang="zh-TW" dirty="0">
+              <a:rPr sz="1000" b="1" lang="zh-TW" dirty="0">
                 <a:solidFill>
                   <a:srgbClr val="000000"/>
                 </a:solidFill>
@@ -3165,7 +4309,7 @@
               <a:t>更大</a:t>
             </a:r>
             <a:r>
-              <a:rPr sz="1100" lang="zh-TW" dirty="0">
+              <a:rPr sz="1000" lang="zh-TW" dirty="0">
                 <a:solidFill>
                   <a:srgbClr val="000000"/>
                 </a:solidFill>
@@ -3183,11 +4327,11 @@
                 <a:spcPct val="115000"/>
               </a:lnSpc>
               <a:spcAft>
-                <a:spcPts val="550"/>
-              </a:spcAft>
-            </a:pPr>
-            <a:r>
-              <a:rPr sz="1100" lang="zh-TW" dirty="0">
+                <a:spcPts val="500"/>
+              </a:spcAft>
+            </a:pPr>
+            <a:r>
+              <a:rPr sz="1000" lang="zh-TW" dirty="0">
                 <a:solidFill>
                   <a:srgbClr val="000000"/>
                 </a:solidFill>
@@ -3198,7 +4342,7 @@
               <a:t>現成的模擬器，裡面的世界、車輛、行為，</a:t>
             </a:r>
             <a:r>
-              <a:rPr sz="1100" b="1" lang="zh-TW" dirty="0">
+              <a:rPr sz="1000" b="1" lang="zh-TW" dirty="0">
                 <a:solidFill>
                   <a:srgbClr val="000000"/>
                 </a:solidFill>
@@ -3209,7 +4353,7 @@
               <a:t>都是照歐美做的</a:t>
             </a:r>
             <a:r>
-              <a:rPr sz="1100" lang="zh-TW" dirty="0">
+              <a:rPr sz="1000" lang="zh-TW" dirty="0">
                 <a:solidFill>
                   <a:srgbClr val="000000"/>
                 </a:solidFill>
@@ -3227,11 +4371,11 @@
                 <a:spcPct val="115000"/>
               </a:lnSpc>
               <a:spcAft>
-                <a:spcPts val="550"/>
-              </a:spcAft>
-            </a:pPr>
-            <a:r>
-              <a:rPr sz="1100" lang="zh-TW" dirty="0">
+                <a:spcPts val="500"/>
+              </a:spcAft>
+            </a:pPr>
+            <a:r>
+              <a:rPr sz="1000" lang="zh-TW" dirty="0">
                 <a:solidFill>
                   <a:srgbClr val="000000"/>
                 </a:solidFill>
@@ -3249,11 +4393,11 @@
                 <a:spcPct val="115000"/>
               </a:lnSpc>
               <a:spcAft>
-                <a:spcPts val="550"/>
-              </a:spcAft>
-            </a:pPr>
-            <a:r>
-              <a:rPr sz="1100" b="1" lang="zh-TW" dirty="0">
+                <a:spcPts val="500"/>
+              </a:spcAft>
+            </a:pPr>
+            <a:r>
+              <a:rPr sz="1000" b="1" lang="zh-TW" dirty="0">
                 <a:solidFill>
                   <a:srgbClr val="000000"/>
                 </a:solidFill>
@@ -3264,7 +4408,7 @@
               <a:t>外觀</a:t>
             </a:r>
             <a:r>
-              <a:rPr sz="1100" lang="zh-TW" dirty="0">
+              <a:rPr sz="1000" lang="zh-TW" dirty="0">
                 <a:solidFill>
                   <a:srgbClr val="000000"/>
                 </a:solidFill>
@@ -3282,11 +4426,11 @@
                 <a:spcPct val="115000"/>
               </a:lnSpc>
               <a:spcAft>
-                <a:spcPts val="550"/>
-              </a:spcAft>
-            </a:pPr>
-            <a:r>
-              <a:rPr sz="1100" b="1" lang="zh-TW" dirty="0">
+                <a:spcPts val="500"/>
+              </a:spcAft>
+            </a:pPr>
+            <a:r>
+              <a:rPr sz="1000" b="1" lang="zh-TW" dirty="0">
                 <a:solidFill>
                   <a:srgbClr val="000000"/>
                 </a:solidFill>
@@ -3297,7 +4441,7 @@
               <a:t>行為</a:t>
             </a:r>
             <a:r>
-              <a:rPr sz="1100" lang="zh-TW" dirty="0">
+              <a:rPr sz="1000" lang="zh-TW" dirty="0">
                 <a:solidFill>
                   <a:srgbClr val="000000"/>
                 </a:solidFill>
@@ -3308,7 +4452,7 @@
               <a:t>這一欄。這是差最多的。歐美的模擬器裡，機車是「偶爾出現的一台」。台灣綠燈起步是二十台機車扇形散開；越南是五公尺內十二台互相鑽，圓環靠眼神決定誰先走。</a:t>
             </a:r>
             <a:r>
-              <a:rPr sz="1100" b="1" lang="zh-TW" dirty="0">
+              <a:rPr sz="1000" b="1" lang="zh-TW" dirty="0">
                 <a:solidFill>
                   <a:srgbClr val="000000"/>
                 </a:solidFill>
@@ -3319,7 +4463,7 @@
               <a:t>這種行為模型，現成的模擬器裡根本沒有。</a:t>
             </a:r>
             <a:r>
-              <a:rPr sz="1100" lang="zh-TW" dirty="0">
+              <a:rPr sz="1000" lang="zh-TW" dirty="0">
                 <a:solidFill>
                   <a:srgbClr val="000000"/>
                 </a:solidFill>
@@ -3337,11 +4481,11 @@
                 <a:spcPct val="115000"/>
               </a:lnSpc>
               <a:spcAft>
-                <a:spcPts val="550"/>
-              </a:spcAft>
-            </a:pPr>
-            <a:r>
-              <a:rPr sz="1100" b="1" lang="zh-TW" dirty="0">
+                <a:spcPts val="500"/>
+              </a:spcAft>
+            </a:pPr>
+            <a:r>
+              <a:rPr sz="1000" b="1" lang="zh-TW" dirty="0">
                 <a:solidFill>
                   <a:srgbClr val="000000"/>
                 </a:solidFill>
@@ -3352,7 +4496,7 @@
               <a:t>物理</a:t>
             </a:r>
             <a:r>
-              <a:rPr sz="1100" lang="zh-TW" dirty="0">
+              <a:rPr sz="1000" lang="zh-TW" dirty="0">
                 <a:solidFill>
                   <a:srgbClr val="000000"/>
                 </a:solidFill>
@@ -3370,11 +4514,11 @@
                 <a:spcPct val="115000"/>
               </a:lnSpc>
               <a:spcAft>
-                <a:spcPts val="550"/>
-              </a:spcAft>
-            </a:pPr>
-            <a:r>
-              <a:rPr sz="1100" lang="zh-TW" dirty="0">
+                <a:spcPts val="500"/>
+              </a:spcAft>
+            </a:pPr>
+            <a:r>
+              <a:rPr sz="1000" lang="zh-TW" dirty="0">
                 <a:solidFill>
                   <a:srgbClr val="000000"/>
                 </a:solidFill>
@@ -3392,11 +4536,11 @@
                 <a:spcPct val="115000"/>
               </a:lnSpc>
               <a:spcAft>
-                <a:spcPts val="550"/>
-              </a:spcAft>
-            </a:pPr>
-            <a:r>
-              <a:rPr sz="1100" lang="zh-TW" dirty="0">
+                <a:spcPts val="500"/>
+              </a:spcAft>
+            </a:pPr>
+            <a:r>
+              <a:rPr sz="1000" lang="zh-TW" dirty="0">
                 <a:solidFill>
                   <a:srgbClr val="000000"/>
                 </a:solidFill>
@@ -3407,7 +4551,7 @@
               <a:t>所以看最下面那句話。這不是抱怨，這是機會：</a:t>
             </a:r>
             <a:r>
-              <a:rPr sz="1100" b="1" lang="zh-TW" dirty="0">
+              <a:rPr sz="1000" b="1" lang="zh-TW" dirty="0">
                 <a:solidFill>
                   <a:srgbClr val="000000"/>
                 </a:solidFill>
@@ -3418,7 +4562,7 @@
               <a:t>「做一個台灣或越南的交通行為模型」是很有價值的題目，因為那份資料只有各位收得到。</a:t>
             </a:r>
             <a:r>
-              <a:rPr sz="1100" lang="zh-TW" dirty="0">
+              <a:rPr sz="1000" lang="zh-TW" dirty="0">
                 <a:solidFill>
                   <a:srgbClr val="000000"/>
                 </a:solidFill>
@@ -3436,11 +4580,11 @@
                 <a:spcPct val="115000"/>
               </a:lnSpc>
               <a:spcAft>
-                <a:spcPts val="550"/>
-              </a:spcAft>
-            </a:pPr>
-            <a:r>
-              <a:rPr sz="1100" lang="zh-TW" dirty="0">
+                <a:spcPts val="500"/>
+              </a:spcAft>
+            </a:pPr>
+            <a:r>
+              <a:rPr sz="1000" lang="zh-TW" dirty="0">
                 <a:solidFill>
                   <a:srgbClr val="000000"/>
                 </a:solidFill>
@@ -3557,11 +4701,154 @@
                 <a:spcPct val="115000"/>
               </a:lnSpc>
               <a:spcAft>
-                <a:spcPts val="525"/>
-              </a:spcAft>
-            </a:pPr>
-            <a:r>
-              <a:rPr sz="1050" lang="zh-TW" dirty="0">
+                <a:spcPts val="500"/>
+              </a:spcAft>
+            </a:pPr>
+            <a:r>
+              <a:rPr sz="1000" b="1" lang="zh-TW" dirty="0">
+                <a:solidFill>
+                  <a:srgbClr val="000000"/>
+                </a:solidFill>
+                <a:latin typeface="Arial Unicode MS"/>
+                <a:ea typeface="Arial Unicode MS"/>
+                <a:cs typeface="Arial Unicode MS"/>
+              </a:rPr>
+              <a:t>▍這一張要做什麼</a:t>
+            </a:r>
+            <a:r>
+              <a:rPr sz="1000" lang="zh-TW" dirty="0">
+                <a:solidFill>
+                  <a:srgbClr val="000000"/>
+                </a:solidFill>
+                <a:latin typeface="Arial Unicode MS"/>
+                <a:ea typeface="Arial Unicode MS"/>
+                <a:cs typeface="Arial Unicode MS"/>
+              </a:rPr>
+              <a:t>
+</a:t>
+            </a:r>
+          </a:p>
+          <a:p>
+            <a:pPr algn="l">
+              <a:lnSpc>
+                <a:spcPct val="115000"/>
+              </a:lnSpc>
+              <a:spcAft>
+                <a:spcPts val="500"/>
+              </a:spcAft>
+            </a:pPr>
+            <a:r>
+              <a:rPr sz="1000" lang="zh-TW" dirty="0">
+                <a:solidFill>
+                  <a:srgbClr val="000000"/>
+                </a:solidFill>
+                <a:latin typeface="Arial Unicode MS"/>
+                <a:ea typeface="Arial Unicode MS"/>
+                <a:cs typeface="Arial Unicode MS"/>
+              </a:rPr>
+              <a:t>上週回家作業的討論。讓學生自己說出模擬裡不會出現的東西。
+</a:t>
+            </a:r>
+          </a:p>
+          <a:p>
+            <a:pPr algn="l">
+              <a:lnSpc>
+                <a:spcPct val="115000"/>
+              </a:lnSpc>
+              <a:spcAft>
+                <a:spcPts val="500"/>
+              </a:spcAft>
+            </a:pPr>
+            <a:r>
+              <a:rPr sz="1000" b="1" lang="zh-TW" dirty="0">
+                <a:solidFill>
+                  <a:srgbClr val="000000"/>
+                </a:solidFill>
+                <a:latin typeface="Arial Unicode MS"/>
+                <a:ea typeface="Arial Unicode MS"/>
+                <a:cs typeface="Arial Unicode MS"/>
+              </a:rPr>
+              <a:t>▍畫面上圈這裡</a:t>
+            </a:r>
+            <a:r>
+              <a:rPr sz="1000" lang="zh-TW" dirty="0">
+                <a:solidFill>
+                  <a:srgbClr val="000000"/>
+                </a:solidFill>
+                <a:latin typeface="Arial Unicode MS"/>
+                <a:ea typeface="Arial Unicode MS"/>
+                <a:cs typeface="Arial Unicode MS"/>
+              </a:rPr>
+              <a:t>
+</a:t>
+            </a:r>
+          </a:p>
+          <a:p>
+            <a:pPr algn="l">
+              <a:lnSpc>
+                <a:spcPct val="115000"/>
+              </a:lnSpc>
+              <a:spcAft>
+                <a:spcPts val="500"/>
+              </a:spcAft>
+            </a:pPr>
+            <a:r>
+              <a:rPr sz="1000" lang="zh-TW" dirty="0">
+                <a:solidFill>
+                  <a:srgbClr val="000000"/>
+                </a:solidFill>
+                <a:latin typeface="Arial Unicode MS"/>
+                <a:ea typeface="Arial Unicode MS"/>
+                <a:cs typeface="Arial Unicode MS"/>
+              </a:rPr>
+              <a:t>圈題目那一句，再圈第三條「猜猜看哪一欄會最滿」。白板分三欄記，這張白板要拍照留著。
+</a:t>
+            </a:r>
+          </a:p>
+          <a:p>
+            <a:pPr algn="l">
+              <a:lnSpc>
+                <a:spcPct val="115000"/>
+              </a:lnSpc>
+              <a:spcAft>
+                <a:spcPts val="500"/>
+              </a:spcAft>
+            </a:pPr>
+            <a:r>
+              <a:rPr sz="1000" b="1" lang="zh-TW" dirty="0">
+                <a:solidFill>
+                  <a:srgbClr val="000000"/>
+                </a:solidFill>
+                <a:latin typeface="Arial Unicode MS"/>
+                <a:ea typeface="Arial Unicode MS"/>
+                <a:cs typeface="Arial Unicode MS"/>
+              </a:rPr>
+              <a:t>▍以下照著唸</a:t>
+            </a:r>
+            <a:r>
+              <a:rPr sz="1000" lang="zh-TW" dirty="0">
+                <a:solidFill>
+                  <a:srgbClr val="000000"/>
+                </a:solidFill>
+                <a:latin typeface="Arial Unicode MS"/>
+                <a:ea typeface="Arial Unicode MS"/>
+                <a:cs typeface="Arial Unicode MS"/>
+              </a:rPr>
+              <a:t>
+</a:t>
+            </a:r>
+          </a:p>
+          <a:p>
+            <a:pPr algn="l">
+              <a:lnSpc>
+                <a:spcPct val="115000"/>
+              </a:lnSpc>
+              <a:spcAft>
+                <a:spcPts val="500"/>
+              </a:spcAft>
+            </a:pPr>
+            <a:r>
+              <a:rPr sz="1000" lang="zh-TW" dirty="0">
                 <a:solidFill>
                   <a:srgbClr val="000000"/>
                 </a:solidFill>
@@ -3579,11 +4866,11 @@
                 <a:spcPct val="115000"/>
               </a:lnSpc>
               <a:spcAft>
-                <a:spcPts val="525"/>
-              </a:spcAft>
-            </a:pPr>
-            <a:r>
-              <a:rPr sz="1050" lang="zh-TW" dirty="0">
+                <a:spcPts val="500"/>
+              </a:spcAft>
+            </a:pPr>
+            <a:r>
+              <a:rPr sz="1000" lang="zh-TW" dirty="0">
                 <a:solidFill>
                   <a:srgbClr val="000000"/>
                 </a:solidFill>
@@ -3601,11 +4888,11 @@
                 <a:spcPct val="115000"/>
               </a:lnSpc>
               <a:spcAft>
-                <a:spcPts val="525"/>
-              </a:spcAft>
-            </a:pPr>
-            <a:r>
-              <a:rPr sz="1050" lang="zh-TW" dirty="0">
+                <a:spcPts val="500"/>
+              </a:spcAft>
+            </a:pPr>
+            <a:r>
+              <a:rPr sz="1000" lang="zh-TW" dirty="0">
                 <a:solidFill>
                   <a:srgbClr val="000000"/>
                 </a:solidFill>
@@ -3616,7 +4903,7 @@
               <a:t>先讓全班猜一下：</a:t>
             </a:r>
             <a:r>
-              <a:rPr sz="1050" b="1" lang="zh-TW" dirty="0">
+              <a:rPr sz="1000" b="1" lang="zh-TW" dirty="0">
                 <a:solidFill>
                   <a:srgbClr val="000000"/>
                 </a:solidFill>
@@ -3627,7 +4914,7 @@
               <a:t>哪一欄會最滿？</a:t>
             </a:r>
             <a:r>
-              <a:rPr sz="1050" lang="zh-TW" dirty="0">
+              <a:rPr sz="1000" lang="zh-TW" dirty="0">
                 <a:solidFill>
                   <a:srgbClr val="000000"/>
                 </a:solidFill>
@@ -3645,11 +4932,11 @@
                 <a:spcPct val="115000"/>
               </a:lnSpc>
               <a:spcAft>
-                <a:spcPts val="525"/>
-              </a:spcAft>
-            </a:pPr>
-            <a:r>
-              <a:rPr sz="1050" lang="zh-TW" dirty="0">
+                <a:spcPts val="500"/>
+              </a:spcAft>
+            </a:pPr>
+            <a:r>
+              <a:rPr sz="1000" lang="zh-TW" dirty="0">
                 <a:solidFill>
                   <a:srgbClr val="000000"/>
                 </a:solidFill>
@@ -3667,11 +4954,11 @@
                 <a:spcPct val="115000"/>
               </a:lnSpc>
               <a:spcAft>
-                <a:spcPts val="525"/>
-              </a:spcAft>
-            </a:pPr>
-            <a:r>
-              <a:rPr sz="1050" lang="zh-TW" dirty="0">
+                <a:spcPts val="500"/>
+              </a:spcAft>
+            </a:pPr>
+            <a:r>
+              <a:rPr sz="1000" lang="zh-TW" dirty="0">
                 <a:solidFill>
                   <a:srgbClr val="000000"/>
                 </a:solidFill>
@@ -3689,11 +4976,11 @@
                 <a:spcPct val="115000"/>
               </a:lnSpc>
               <a:spcAft>
-                <a:spcPts val="525"/>
-              </a:spcAft>
-            </a:pPr>
-            <a:r>
-              <a:rPr sz="1050" lang="zh-TW" dirty="0">
+                <a:spcPts val="500"/>
+              </a:spcAft>
+            </a:pPr>
+            <a:r>
+              <a:rPr sz="1000" lang="zh-TW" dirty="0">
                 <a:solidFill>
                   <a:srgbClr val="000000"/>
                 </a:solidFill>
@@ -3711,11 +4998,11 @@
                 <a:spcPct val="115000"/>
               </a:lnSpc>
               <a:spcAft>
-                <a:spcPts val="525"/>
-              </a:spcAft>
-            </a:pPr>
-            <a:r>
-              <a:rPr sz="1050" b="1" lang="zh-TW" dirty="0">
+                <a:spcPts val="500"/>
+              </a:spcAft>
+            </a:pPr>
+            <a:r>
+              <a:rPr sz="1000" b="1" lang="zh-TW" dirty="0">
                 <a:solidFill>
                   <a:srgbClr val="000000"/>
                 </a:solidFill>
@@ -3726,7 +5013,7 @@
               <a:t>老師要主動補一到兩個「物理」的例子</a:t>
             </a:r>
             <a:r>
-              <a:rPr sz="1050" lang="zh-TW" dirty="0">
+              <a:rPr sz="1000" lang="zh-TW" dirty="0">
                 <a:solidFill>
                   <a:srgbClr val="000000"/>
                 </a:solidFill>
@@ -3744,11 +5031,11 @@
                 <a:spcPct val="115000"/>
               </a:lnSpc>
               <a:spcAft>
-                <a:spcPts val="525"/>
-              </a:spcAft>
-            </a:pPr>
-            <a:r>
-              <a:rPr sz="1050" lang="zh-TW" dirty="0">
+                <a:spcPts val="500"/>
+              </a:spcAft>
+            </a:pPr>
+            <a:r>
+              <a:rPr sz="1000" lang="zh-TW" dirty="0">
                 <a:solidFill>
                   <a:srgbClr val="000000"/>
                 </a:solidFill>
@@ -3766,11 +5053,11 @@
                 <a:spcPct val="115000"/>
               </a:lnSpc>
               <a:spcAft>
-                <a:spcPts val="525"/>
-              </a:spcAft>
-            </a:pPr>
-            <a:r>
-              <a:rPr sz="1050" lang="zh-TW" dirty="0">
+                <a:spcPts val="500"/>
+              </a:spcAft>
+            </a:pPr>
+            <a:r>
+              <a:rPr sz="1000" lang="zh-TW" dirty="0">
                 <a:solidFill>
                   <a:srgbClr val="000000"/>
                 </a:solidFill>
@@ -3788,11 +5075,11 @@
                 <a:spcPct val="115000"/>
               </a:lnSpc>
               <a:spcAft>
-                <a:spcPts val="525"/>
-              </a:spcAft>
-            </a:pPr>
-            <a:r>
-              <a:rPr sz="1050" lang="zh-TW" dirty="0">
+                <a:spcPts val="500"/>
+              </a:spcAft>
+            </a:pPr>
+            <a:r>
+              <a:rPr sz="1000" lang="zh-TW" dirty="0">
                 <a:solidFill>
                   <a:srgbClr val="000000"/>
                 </a:solidFill>
@@ -3803,7 +5090,7 @@
               <a:t>（補完之後說）看白板：三欄都有東西，而且都是各位自己講出來的。</a:t>
             </a:r>
             <a:r>
-              <a:rPr sz="1050" b="1" lang="zh-TW" dirty="0">
+              <a:rPr sz="1000" b="1" lang="zh-TW" dirty="0">
                 <a:solidFill>
                   <a:srgbClr val="000000"/>
                 </a:solidFill>
@@ -3814,7 +5101,7 @@
               <a:t>這張白板就是台灣和越南版模擬器缺的東西清單。</a:t>
             </a:r>
             <a:r>
-              <a:rPr sz="1050" lang="zh-TW" dirty="0">
+              <a:rPr sz="1000" lang="zh-TW" dirty="0">
                 <a:solidFill>
                   <a:srgbClr val="000000"/>
                 </a:solidFill>
@@ -3931,11 +5218,154 @@
                 <a:spcPct val="115000"/>
               </a:lnSpc>
               <a:spcAft>
-                <a:spcPts val="600"/>
-              </a:spcAft>
-            </a:pPr>
-            <a:r>
-              <a:rPr sz="1200" lang="zh-TW" dirty="0">
+                <a:spcPts val="500"/>
+              </a:spcAft>
+            </a:pPr>
+            <a:r>
+              <a:rPr sz="1000" b="1" lang="zh-TW" dirty="0">
+                <a:solidFill>
+                  <a:srgbClr val="000000"/>
+                </a:solidFill>
+                <a:latin typeface="Arial Unicode MS"/>
+                <a:ea typeface="Arial Unicode MS"/>
+                <a:cs typeface="Arial Unicode MS"/>
+              </a:rPr>
+              <a:t>▍這一張要做什麼</a:t>
+            </a:r>
+            <a:r>
+              <a:rPr sz="1000" lang="zh-TW" dirty="0">
+                <a:solidFill>
+                  <a:srgbClr val="000000"/>
+                </a:solidFill>
+                <a:latin typeface="Arial Unicode MS"/>
+                <a:ea typeface="Arial Unicode MS"/>
+                <a:cs typeface="Arial Unicode MS"/>
+              </a:rPr>
+              <a:t>
+</a:t>
+            </a:r>
+          </a:p>
+          <a:p>
+            <a:pPr algn="l">
+              <a:lnSpc>
+                <a:spcPct val="115000"/>
+              </a:lnSpc>
+              <a:spcAft>
+                <a:spcPts val="500"/>
+              </a:spcAft>
+            </a:pPr>
+            <a:r>
+              <a:rPr sz="1000" lang="zh-TW" dirty="0">
+                <a:solidFill>
+                  <a:srgbClr val="000000"/>
+                </a:solidFill>
+                <a:latin typeface="Arial Unicode MS"/>
+                <a:ea typeface="Arial Unicode MS"/>
+                <a:cs typeface="Arial Unicode MS"/>
+              </a:rPr>
+              <a:t>第一節小結。三句話帶進第二節。
+</a:t>
+            </a:r>
+          </a:p>
+          <a:p>
+            <a:pPr algn="l">
+              <a:lnSpc>
+                <a:spcPct val="115000"/>
+              </a:lnSpc>
+              <a:spcAft>
+                <a:spcPts val="500"/>
+              </a:spcAft>
+            </a:pPr>
+            <a:r>
+              <a:rPr sz="1000" b="1" lang="zh-TW" dirty="0">
+                <a:solidFill>
+                  <a:srgbClr val="000000"/>
+                </a:solidFill>
+                <a:latin typeface="Arial Unicode MS"/>
+                <a:ea typeface="Arial Unicode MS"/>
+                <a:cs typeface="Arial Unicode MS"/>
+              </a:rPr>
+              <a:t>▍畫面上圈這裡</a:t>
+            </a:r>
+            <a:r>
+              <a:rPr sz="1000" lang="zh-TW" dirty="0">
+                <a:solidFill>
+                  <a:srgbClr val="000000"/>
+                </a:solidFill>
+                <a:latin typeface="Arial Unicode MS"/>
+                <a:ea typeface="Arial Unicode MS"/>
+                <a:cs typeface="Arial Unicode MS"/>
+              </a:rPr>
+              <a:t>
+</a:t>
+            </a:r>
+          </a:p>
+          <a:p>
+            <a:pPr algn="l">
+              <a:lnSpc>
+                <a:spcPct val="115000"/>
+              </a:lnSpc>
+              <a:spcAft>
+                <a:spcPts val="500"/>
+              </a:spcAft>
+            </a:pPr>
+            <a:r>
+              <a:rPr sz="1000" lang="zh-TW" dirty="0">
+                <a:solidFill>
+                  <a:srgbClr val="000000"/>
+                </a:solidFill>
+                <a:latin typeface="Arial Unicode MS"/>
+                <a:ea typeface="Arial Unicode MS"/>
+                <a:cs typeface="Arial Unicode MS"/>
+              </a:rPr>
+              <a:t>三條一條一條圈，圈完念一次。特別停在第二條的「二十五公尺」。
+</a:t>
+            </a:r>
+          </a:p>
+          <a:p>
+            <a:pPr algn="l">
+              <a:lnSpc>
+                <a:spcPct val="115000"/>
+              </a:lnSpc>
+              <a:spcAft>
+                <a:spcPts val="500"/>
+              </a:spcAft>
+            </a:pPr>
+            <a:r>
+              <a:rPr sz="1000" b="1" lang="zh-TW" dirty="0">
+                <a:solidFill>
+                  <a:srgbClr val="000000"/>
+                </a:solidFill>
+                <a:latin typeface="Arial Unicode MS"/>
+                <a:ea typeface="Arial Unicode MS"/>
+                <a:cs typeface="Arial Unicode MS"/>
+              </a:rPr>
+              <a:t>▍以下照著唸</a:t>
+            </a:r>
+            <a:r>
+              <a:rPr sz="1000" lang="zh-TW" dirty="0">
+                <a:solidFill>
+                  <a:srgbClr val="000000"/>
+                </a:solidFill>
+                <a:latin typeface="Arial Unicode MS"/>
+                <a:ea typeface="Arial Unicode MS"/>
+                <a:cs typeface="Arial Unicode MS"/>
+              </a:rPr>
+              <a:t>
+</a:t>
+            </a:r>
+          </a:p>
+          <a:p>
+            <a:pPr algn="l">
+              <a:lnSpc>
+                <a:spcPct val="115000"/>
+              </a:lnSpc>
+              <a:spcAft>
+                <a:spcPts val="500"/>
+              </a:spcAft>
+            </a:pPr>
+            <a:r>
+              <a:rPr sz="1000" lang="zh-TW" dirty="0">
                 <a:solidFill>
                   <a:srgbClr val="000000"/>
                 </a:solidFill>
@@ -3953,11 +5383,11 @@
                 <a:spcPct val="115000"/>
               </a:lnSpc>
               <a:spcAft>
-                <a:spcPts val="600"/>
-              </a:spcAft>
-            </a:pPr>
-            <a:r>
-              <a:rPr sz="1200" lang="zh-TW" dirty="0">
+                <a:spcPts val="500"/>
+              </a:spcAft>
+            </a:pPr>
+            <a:r>
+              <a:rPr sz="1000" lang="zh-TW" dirty="0">
                 <a:solidFill>
                   <a:srgbClr val="000000"/>
                 </a:solidFill>
@@ -3968,7 +5398,7 @@
               <a:t>第一句，</a:t>
             </a:r>
             <a:r>
-              <a:rPr sz="1200" b="1" lang="zh-TW" dirty="0">
+              <a:rPr sz="1000" b="1" lang="zh-TW" dirty="0">
                 <a:solidFill>
                   <a:srgbClr val="000000"/>
                 </a:solidFill>
@@ -3979,7 +5409,7 @@
               <a:t>三個滑桿就是三個規格</a:t>
             </a:r>
             <a:r>
-              <a:rPr sz="1200" lang="zh-TW" dirty="0">
+              <a:rPr sz="1000" lang="zh-TW" dirty="0">
                 <a:solidFill>
                   <a:srgbClr val="000000"/>
                 </a:solidFill>
@@ -3997,11 +5427,11 @@
                 <a:spcPct val="115000"/>
               </a:lnSpc>
               <a:spcAft>
-                <a:spcPts val="600"/>
-              </a:spcAft>
-            </a:pPr>
-            <a:r>
-              <a:rPr sz="1200" lang="zh-TW" dirty="0">
+                <a:spcPts val="500"/>
+              </a:spcAft>
+            </a:pPr>
+            <a:r>
+              <a:rPr sz="1000" lang="zh-TW" dirty="0">
                 <a:solidFill>
                   <a:srgbClr val="000000"/>
                 </a:solidFill>
@@ -4012,7 +5442,7 @@
               <a:t>第二句，</a:t>
             </a:r>
             <a:r>
-              <a:rPr sz="1200" b="1" lang="zh-TW" dirty="0">
+              <a:rPr sz="1000" b="1" lang="zh-TW" dirty="0">
                 <a:solidFill>
                   <a:srgbClr val="000000"/>
                 </a:solidFill>
@@ -4023,7 +5453,7 @@
               <a:t>煞停距離決定射線至少要多長</a:t>
             </a:r>
             <a:r>
-              <a:rPr sz="1200" lang="zh-TW" dirty="0">
+              <a:rPr sz="1000" lang="zh-TW" dirty="0">
                 <a:solidFill>
                   <a:srgbClr val="000000"/>
                 </a:solidFill>
@@ -4041,11 +5471,11 @@
                 <a:spcPct val="115000"/>
               </a:lnSpc>
               <a:spcAft>
-                <a:spcPts val="600"/>
-              </a:spcAft>
-            </a:pPr>
-            <a:r>
-              <a:rPr sz="1200" lang="zh-TW" dirty="0">
+                <a:spcPts val="500"/>
+              </a:spcAft>
+            </a:pPr>
+            <a:r>
+              <a:rPr sz="1000" lang="zh-TW" dirty="0">
                 <a:solidFill>
                   <a:srgbClr val="000000"/>
                 </a:solidFill>
@@ -4056,7 +5486,7 @@
               <a:t>第三句，</a:t>
             </a:r>
             <a:r>
-              <a:rPr sz="1200" b="1" lang="zh-TW" dirty="0">
+              <a:rPr sz="1000" b="1" lang="zh-TW" dirty="0">
                 <a:solidFill>
                   <a:srgbClr val="000000"/>
                 </a:solidFill>
@@ -4067,7 +5497,7 @@
               <a:t>三種落差：外觀、行為、物理</a:t>
             </a:r>
             <a:r>
-              <a:rPr sz="1200" lang="zh-TW" dirty="0">
+              <a:rPr sz="1000" lang="zh-TW" dirty="0">
                 <a:solidFill>
                   <a:srgbClr val="000000"/>
                 </a:solidFill>
@@ -4085,11 +5515,11 @@
                 <a:spcPct val="115000"/>
               </a:lnSpc>
               <a:spcAft>
-                <a:spcPts val="600"/>
-              </a:spcAft>
-            </a:pPr>
-            <a:r>
-              <a:rPr sz="1200" lang="zh-TW" dirty="0">
+                <a:spcPts val="500"/>
+              </a:spcAft>
+            </a:pPr>
+            <a:r>
+              <a:rPr sz="1000" lang="zh-TW" dirty="0">
                 <a:solidFill>
                   <a:srgbClr val="000000"/>
                 </a:solidFill>
@@ -4107,11 +5537,11 @@
                 <a:spcPct val="115000"/>
               </a:lnSpc>
               <a:spcAft>
-                <a:spcPts val="600"/>
-              </a:spcAft>
-            </a:pPr>
-            <a:r>
-              <a:rPr sz="1200" lang="zh-TW" dirty="0">
+                <a:spcPts val="500"/>
+              </a:spcAft>
+            </a:pPr>
+            <a:r>
+              <a:rPr sz="1000" lang="zh-TW" dirty="0">
                 <a:solidFill>
                   <a:srgbClr val="000000"/>
                 </a:solidFill>
@@ -4129,11 +5559,11 @@
                 <a:spcPct val="115000"/>
               </a:lnSpc>
               <a:spcAft>
-                <a:spcPts val="600"/>
-              </a:spcAft>
-            </a:pPr>
-            <a:r>
-              <a:rPr sz="1200" lang="zh-TW" dirty="0">
+                <a:spcPts val="500"/>
+              </a:spcAft>
+            </a:pPr>
+            <a:r>
+              <a:rPr sz="1000" lang="zh-TW" dirty="0">
                 <a:solidFill>
                   <a:srgbClr val="000000"/>
                 </a:solidFill>
@@ -4254,6 +5684,149 @@
               </a:spcAft>
             </a:pPr>
             <a:r>
+              <a:rPr sz="1200" b="1" lang="zh-TW" dirty="0">
+                <a:solidFill>
+                  <a:srgbClr val="000000"/>
+                </a:solidFill>
+                <a:latin typeface="Arial Unicode MS"/>
+                <a:ea typeface="Arial Unicode MS"/>
+                <a:cs typeface="Arial Unicode MS"/>
+              </a:rPr>
+              <a:t>▍這一張要做什麼</a:t>
+            </a:r>
+            <a:r>
+              <a:rPr sz="1200" lang="zh-TW" dirty="0">
+                <a:solidFill>
+                  <a:srgbClr val="000000"/>
+                </a:solidFill>
+                <a:latin typeface="Arial Unicode MS"/>
+                <a:ea typeface="Arial Unicode MS"/>
+                <a:cs typeface="Arial Unicode MS"/>
+              </a:rPr>
+              <a:t>
+</a:t>
+            </a:r>
+          </a:p>
+          <a:p>
+            <a:pPr algn="l">
+              <a:lnSpc>
+                <a:spcPct val="115000"/>
+              </a:lnSpc>
+              <a:spcAft>
+                <a:spcPts val="600"/>
+              </a:spcAft>
+            </a:pPr>
+            <a:r>
+              <a:rPr sz="1200" lang="zh-TW" dirty="0">
+                <a:solidFill>
+                  <a:srgbClr val="000000"/>
+                </a:solidFill>
+                <a:latin typeface="Arial Unicode MS"/>
+                <a:ea typeface="Arial Unicode MS"/>
+                <a:cs typeface="Arial Unicode MS"/>
+              </a:rPr>
+              <a:t>讓每個人先把模擬器打開，確認全班畫面一致再往下走。這一頁不要趕。
+</a:t>
+            </a:r>
+          </a:p>
+          <a:p>
+            <a:pPr algn="l">
+              <a:lnSpc>
+                <a:spcPct val="115000"/>
+              </a:lnSpc>
+              <a:spcAft>
+                <a:spcPts val="600"/>
+              </a:spcAft>
+            </a:pPr>
+            <a:r>
+              <a:rPr sz="1200" b="1" lang="zh-TW" dirty="0">
+                <a:solidFill>
+                  <a:srgbClr val="000000"/>
+                </a:solidFill>
+                <a:latin typeface="Arial Unicode MS"/>
+                <a:ea typeface="Arial Unicode MS"/>
+                <a:cs typeface="Arial Unicode MS"/>
+              </a:rPr>
+              <a:t>▍畫面上圈這裡</a:t>
+            </a:r>
+            <a:r>
+              <a:rPr sz="1200" lang="zh-TW" dirty="0">
+                <a:solidFill>
+                  <a:srgbClr val="000000"/>
+                </a:solidFill>
+                <a:latin typeface="Arial Unicode MS"/>
+                <a:ea typeface="Arial Unicode MS"/>
+                <a:cs typeface="Arial Unicode MS"/>
+              </a:rPr>
+              <a:t>
+</a:t>
+            </a:r>
+          </a:p>
+          <a:p>
+            <a:pPr algn="l">
+              <a:lnSpc>
+                <a:spcPct val="115000"/>
+              </a:lnSpc>
+              <a:spcAft>
+                <a:spcPts val="600"/>
+              </a:spcAft>
+            </a:pPr>
+            <a:r>
+              <a:rPr sz="1200" lang="zh-TW" dirty="0">
+                <a:solidFill>
+                  <a:srgbClr val="000000"/>
+                </a:solidFill>
+                <a:latin typeface="Arial Unicode MS"/>
+                <a:ea typeface="Arial Unicode MS"/>
+                <a:cs typeface="Arial Unicode MS"/>
+              </a:rPr>
+              <a:t>圈網址與 QR 碼，再圈下方的操作步驟。等到全班都舉手示意打開了才翻頁。
+</a:t>
+            </a:r>
+          </a:p>
+          <a:p>
+            <a:pPr algn="l">
+              <a:lnSpc>
+                <a:spcPct val="115000"/>
+              </a:lnSpc>
+              <a:spcAft>
+                <a:spcPts val="600"/>
+              </a:spcAft>
+            </a:pPr>
+            <a:r>
+              <a:rPr sz="1200" b="1" lang="zh-TW" dirty="0">
+                <a:solidFill>
+                  <a:srgbClr val="000000"/>
+                </a:solidFill>
+                <a:latin typeface="Arial Unicode MS"/>
+                <a:ea typeface="Arial Unicode MS"/>
+                <a:cs typeface="Arial Unicode MS"/>
+              </a:rPr>
+              <a:t>▍以下照著唸</a:t>
+            </a:r>
+            <a:r>
+              <a:rPr sz="1200" lang="zh-TW" dirty="0">
+                <a:solidFill>
+                  <a:srgbClr val="000000"/>
+                </a:solidFill>
+                <a:latin typeface="Arial Unicode MS"/>
+                <a:ea typeface="Arial Unicode MS"/>
+                <a:cs typeface="Arial Unicode MS"/>
+              </a:rPr>
+              <a:t>
+</a:t>
+            </a:r>
+          </a:p>
+          <a:p>
+            <a:pPr algn="l">
+              <a:lnSpc>
+                <a:spcPct val="115000"/>
+              </a:lnSpc>
+              <a:spcAft>
+                <a:spcPts val="600"/>
+              </a:spcAft>
+            </a:pPr>
+            <a:r>
               <a:rPr sz="1200" lang="zh-TW" dirty="0">
                 <a:solidFill>
                   <a:srgbClr val="000000"/>
@@ -4485,6 +6058,149 @@
               </a:spcAft>
             </a:pPr>
             <a:r>
+              <a:rPr sz="1200" b="1" lang="zh-TW" dirty="0">
+                <a:solidFill>
+                  <a:srgbClr val="000000"/>
+                </a:solidFill>
+                <a:latin typeface="Arial Unicode MS"/>
+                <a:ea typeface="Arial Unicode MS"/>
+                <a:cs typeface="Arial Unicode MS"/>
+              </a:rPr>
+              <a:t>▍這一張要做什麼</a:t>
+            </a:r>
+            <a:r>
+              <a:rPr sz="1200" lang="zh-TW" dirty="0">
+                <a:solidFill>
+                  <a:srgbClr val="000000"/>
+                </a:solidFill>
+                <a:latin typeface="Arial Unicode MS"/>
+                <a:ea typeface="Arial Unicode MS"/>
+                <a:cs typeface="Arial Unicode MS"/>
+              </a:rPr>
+              <a:t>
+</a:t>
+            </a:r>
+          </a:p>
+          <a:p>
+            <a:pPr algn="l">
+              <a:lnSpc>
+                <a:spcPct val="115000"/>
+              </a:lnSpc>
+              <a:spcAft>
+                <a:spcPts val="600"/>
+              </a:spcAft>
+            </a:pPr>
+            <a:r>
+              <a:rPr sz="1200" lang="zh-TW" dirty="0">
+                <a:solidFill>
+                  <a:srgbClr val="000000"/>
+                </a:solidFill>
+                <a:latin typeface="Arial Unicode MS"/>
+                <a:ea typeface="Arial Unicode MS"/>
+                <a:cs typeface="Arial Unicode MS"/>
+              </a:rPr>
+              <a:t>段落分隔。宣告第一段要處理的問題。
+</a:t>
+            </a:r>
+          </a:p>
+          <a:p>
+            <a:pPr algn="l">
+              <a:lnSpc>
+                <a:spcPct val="115000"/>
+              </a:lnSpc>
+              <a:spcAft>
+                <a:spcPts val="600"/>
+              </a:spcAft>
+            </a:pPr>
+            <a:r>
+              <a:rPr sz="1200" b="1" lang="zh-TW" dirty="0">
+                <a:solidFill>
+                  <a:srgbClr val="000000"/>
+                </a:solidFill>
+                <a:latin typeface="Arial Unicode MS"/>
+                <a:ea typeface="Arial Unicode MS"/>
+                <a:cs typeface="Arial Unicode MS"/>
+              </a:rPr>
+              <a:t>▍畫面上圈這裡</a:t>
+            </a:r>
+            <a:r>
+              <a:rPr sz="1200" lang="zh-TW" dirty="0">
+                <a:solidFill>
+                  <a:srgbClr val="000000"/>
+                </a:solidFill>
+                <a:latin typeface="Arial Unicode MS"/>
+                <a:ea typeface="Arial Unicode MS"/>
+                <a:cs typeface="Arial Unicode MS"/>
+              </a:rPr>
+              <a:t>
+</a:t>
+            </a:r>
+          </a:p>
+          <a:p>
+            <a:pPr algn="l">
+              <a:lnSpc>
+                <a:spcPct val="115000"/>
+              </a:lnSpc>
+              <a:spcAft>
+                <a:spcPts val="600"/>
+              </a:spcAft>
+            </a:pPr>
+            <a:r>
+              <a:rPr sz="1200" lang="zh-TW" dirty="0">
+                <a:solidFill>
+                  <a:srgbClr val="000000"/>
+                </a:solidFill>
+                <a:latin typeface="Arial Unicode MS"/>
+                <a:ea typeface="Arial Unicode MS"/>
+                <a:cs typeface="Arial Unicode MS"/>
+              </a:rPr>
+              <a:t>不用圈。停兩秒，讓大家換一個檔。
+</a:t>
+            </a:r>
+          </a:p>
+          <a:p>
+            <a:pPr algn="l">
+              <a:lnSpc>
+                <a:spcPct val="115000"/>
+              </a:lnSpc>
+              <a:spcAft>
+                <a:spcPts val="600"/>
+              </a:spcAft>
+            </a:pPr>
+            <a:r>
+              <a:rPr sz="1200" b="1" lang="zh-TW" dirty="0">
+                <a:solidFill>
+                  <a:srgbClr val="000000"/>
+                </a:solidFill>
+                <a:latin typeface="Arial Unicode MS"/>
+                <a:ea typeface="Arial Unicode MS"/>
+                <a:cs typeface="Arial Unicode MS"/>
+              </a:rPr>
+              <a:t>▍以下照著唸</a:t>
+            </a:r>
+            <a:r>
+              <a:rPr sz="1200" lang="zh-TW" dirty="0">
+                <a:solidFill>
+                  <a:srgbClr val="000000"/>
+                </a:solidFill>
+                <a:latin typeface="Arial Unicode MS"/>
+                <a:ea typeface="Arial Unicode MS"/>
+                <a:cs typeface="Arial Unicode MS"/>
+              </a:rPr>
+              <a:t>
+</a:t>
+            </a:r>
+          </a:p>
+          <a:p>
+            <a:pPr algn="l">
+              <a:lnSpc>
+                <a:spcPct val="115000"/>
+              </a:lnSpc>
+              <a:spcAft>
+                <a:spcPts val="600"/>
+              </a:spcAft>
+            </a:pPr>
+            <a:r>
               <a:rPr sz="1200" lang="zh-TW" dirty="0">
                 <a:solidFill>
                   <a:srgbClr val="000000"/>
@@ -4624,11 +6340,154 @@
                 <a:spcPct val="115000"/>
               </a:lnSpc>
               <a:spcAft>
-                <a:spcPts val="600"/>
-              </a:spcAft>
-            </a:pPr>
-            <a:r>
-              <a:rPr sz="1200" lang="zh-TW" dirty="0">
+                <a:spcPts val="500"/>
+              </a:spcAft>
+            </a:pPr>
+            <a:r>
+              <a:rPr sz="1000" b="1" lang="zh-TW" dirty="0">
+                <a:solidFill>
+                  <a:srgbClr val="000000"/>
+                </a:solidFill>
+                <a:latin typeface="Arial Unicode MS"/>
+                <a:ea typeface="Arial Unicode MS"/>
+                <a:cs typeface="Arial Unicode MS"/>
+              </a:rPr>
+              <a:t>▍這一張要做什麼</a:t>
+            </a:r>
+            <a:r>
+              <a:rPr sz="1000" lang="zh-TW" dirty="0">
+                <a:solidFill>
+                  <a:srgbClr val="000000"/>
+                </a:solidFill>
+                <a:latin typeface="Arial Unicode MS"/>
+                <a:ea typeface="Arial Unicode MS"/>
+                <a:cs typeface="Arial Unicode MS"/>
+              </a:rPr>
+              <a:t>
+</a:t>
+            </a:r>
+          </a:p>
+          <a:p>
+            <a:pPr algn="l">
+              <a:lnSpc>
+                <a:spcPct val="115000"/>
+              </a:lnSpc>
+              <a:spcAft>
+                <a:spcPts val="500"/>
+              </a:spcAft>
+            </a:pPr>
+            <a:r>
+              <a:rPr sz="1000" lang="zh-TW" dirty="0">
+                <a:solidFill>
+                  <a:srgbClr val="000000"/>
+                </a:solidFill>
+                <a:latin typeface="Arial Unicode MS"/>
+                <a:ea typeface="Arial Unicode MS"/>
+                <a:cs typeface="Arial Unicode MS"/>
+              </a:rPr>
+              <a:t>把模擬器的「射線數」對到規格表上的 Resolution，並帶出「射線之間有縫」這個關鍵。
+</a:t>
+            </a:r>
+          </a:p>
+          <a:p>
+            <a:pPr algn="l">
+              <a:lnSpc>
+                <a:spcPct val="115000"/>
+              </a:lnSpc>
+              <a:spcAft>
+                <a:spcPts val="500"/>
+              </a:spcAft>
+            </a:pPr>
+            <a:r>
+              <a:rPr sz="1000" b="1" lang="zh-TW" dirty="0">
+                <a:solidFill>
+                  <a:srgbClr val="000000"/>
+                </a:solidFill>
+                <a:latin typeface="Arial Unicode MS"/>
+                <a:ea typeface="Arial Unicode MS"/>
+                <a:cs typeface="Arial Unicode MS"/>
+              </a:rPr>
+              <a:t>▍畫面上圈這裡</a:t>
+            </a:r>
+            <a:r>
+              <a:rPr sz="1000" lang="zh-TW" dirty="0">
+                <a:solidFill>
+                  <a:srgbClr val="000000"/>
+                </a:solidFill>
+                <a:latin typeface="Arial Unicode MS"/>
+                <a:ea typeface="Arial Unicode MS"/>
+                <a:cs typeface="Arial Unicode MS"/>
+              </a:rPr>
+              <a:t>
+</a:t>
+            </a:r>
+          </a:p>
+          <a:p>
+            <a:pPr algn="l">
+              <a:lnSpc>
+                <a:spcPct val="115000"/>
+              </a:lnSpc>
+              <a:spcAft>
+                <a:spcPts val="500"/>
+              </a:spcAft>
+            </a:pPr>
+            <a:r>
+              <a:rPr sz="1000" lang="zh-TW" dirty="0">
+                <a:solidFill>
+                  <a:srgbClr val="000000"/>
+                </a:solidFill>
+                <a:latin typeface="Arial Unicode MS"/>
+                <a:ea typeface="Arial Unicode MS"/>
+                <a:cs typeface="Arial Unicode MS"/>
+              </a:rPr>
+              <a:t>圈左邊扇形圖裡兩條射線之間的空隙，再圈右邊最後一列「調小會怎樣」。
+</a:t>
+            </a:r>
+          </a:p>
+          <a:p>
+            <a:pPr algn="l">
+              <a:lnSpc>
+                <a:spcPct val="115000"/>
+              </a:lnSpc>
+              <a:spcAft>
+                <a:spcPts val="500"/>
+              </a:spcAft>
+            </a:pPr>
+            <a:r>
+              <a:rPr sz="1000" b="1" lang="zh-TW" dirty="0">
+                <a:solidFill>
+                  <a:srgbClr val="000000"/>
+                </a:solidFill>
+                <a:latin typeface="Arial Unicode MS"/>
+                <a:ea typeface="Arial Unicode MS"/>
+                <a:cs typeface="Arial Unicode MS"/>
+              </a:rPr>
+              <a:t>▍以下照著唸</a:t>
+            </a:r>
+            <a:r>
+              <a:rPr sz="1000" lang="zh-TW" dirty="0">
+                <a:solidFill>
+                  <a:srgbClr val="000000"/>
+                </a:solidFill>
+                <a:latin typeface="Arial Unicode MS"/>
+                <a:ea typeface="Arial Unicode MS"/>
+                <a:cs typeface="Arial Unicode MS"/>
+              </a:rPr>
+              <a:t>
+</a:t>
+            </a:r>
+          </a:p>
+          <a:p>
+            <a:pPr algn="l">
+              <a:lnSpc>
+                <a:spcPct val="115000"/>
+              </a:lnSpc>
+              <a:spcAft>
+                <a:spcPts val="500"/>
+              </a:spcAft>
+            </a:pPr>
+            <a:r>
+              <a:rPr sz="1000" lang="zh-TW" dirty="0">
                 <a:solidFill>
                   <a:srgbClr val="000000"/>
                 </a:solidFill>
@@ -4639,7 +6498,7 @@
               <a:t>第一個滑桿：</a:t>
             </a:r>
             <a:r>
-              <a:rPr sz="1200" b="1" lang="zh-TW" dirty="0">
+              <a:rPr sz="1000" b="1" lang="zh-TW" dirty="0">
                 <a:solidFill>
                   <a:srgbClr val="000000"/>
                 </a:solidFill>
@@ -4650,7 +6509,7 @@
               <a:t>射線數</a:t>
             </a:r>
             <a:r>
-              <a:rPr sz="1200" lang="zh-TW" dirty="0">
+              <a:rPr sz="1000" lang="zh-TW" dirty="0">
                 <a:solidFill>
                   <a:srgbClr val="000000"/>
                 </a:solidFill>
@@ -4668,11 +6527,11 @@
                 <a:spcPct val="115000"/>
               </a:lnSpc>
               <a:spcAft>
-                <a:spcPts val="600"/>
-              </a:spcAft>
-            </a:pPr>
-            <a:r>
-              <a:rPr sz="1200" lang="zh-TW" dirty="0">
+                <a:spcPts val="500"/>
+              </a:spcAft>
+            </a:pPr>
+            <a:r>
+              <a:rPr sz="1000" lang="zh-TW" dirty="0">
                 <a:solidFill>
                   <a:srgbClr val="000000"/>
                 </a:solidFill>
@@ -4683,7 +6542,7 @@
               <a:t>規格表上它叫 </a:t>
             </a:r>
             <a:r>
-              <a:rPr sz="1200" b="1" lang="zh-TW" dirty="0">
+              <a:rPr sz="1000" b="1" lang="zh-TW" dirty="0">
                 <a:solidFill>
                   <a:srgbClr val="000000"/>
                 </a:solidFill>
@@ -4694,7 +6553,7 @@
               <a:t>Resolution，解析度</a:t>
             </a:r>
             <a:r>
-              <a:rPr sz="1200" lang="zh-TW" dirty="0">
+              <a:rPr sz="1000" lang="zh-TW" dirty="0">
                 <a:solidFill>
                   <a:srgbClr val="000000"/>
                 </a:solidFill>
@@ -4712,11 +6571,11 @@
                 <a:spcPct val="115000"/>
               </a:lnSpc>
               <a:spcAft>
-                <a:spcPts val="600"/>
-              </a:spcAft>
-            </a:pPr>
-            <a:r>
-              <a:rPr sz="1200" lang="zh-TW" dirty="0">
+                <a:spcPts val="500"/>
+              </a:spcAft>
+            </a:pPr>
+            <a:r>
+              <a:rPr sz="1000" lang="zh-TW" dirty="0">
                 <a:solidFill>
                   <a:srgbClr val="000000"/>
                 </a:solidFill>
@@ -4734,11 +6593,11 @@
                 <a:spcPct val="115000"/>
               </a:lnSpc>
               <a:spcAft>
-                <a:spcPts val="600"/>
-              </a:spcAft>
-            </a:pPr>
-            <a:r>
-              <a:rPr sz="1200" lang="zh-TW" dirty="0">
+                <a:spcPts val="500"/>
+              </a:spcAft>
+            </a:pPr>
+            <a:r>
+              <a:rPr sz="1000" lang="zh-TW" dirty="0">
                 <a:solidFill>
                   <a:srgbClr val="000000"/>
                 </a:solidFill>
@@ -4749,7 +6608,7 @@
               <a:t>我們的模擬器可以從一條拉到六十條。真車的光達呢？</a:t>
             </a:r>
             <a:r>
-              <a:rPr sz="1200" b="1" lang="zh-TW" dirty="0">
+              <a:rPr sz="1000" b="1" lang="zh-TW" dirty="0">
                 <a:solidFill>
                   <a:srgbClr val="000000"/>
                 </a:solidFill>
@@ -4760,7 +6619,7 @@
               <a:t>每秒幾十萬到幾百萬個點</a:t>
             </a:r>
             <a:r>
-              <a:rPr sz="1200" lang="zh-TW" dirty="0">
+              <a:rPr sz="1000" lang="zh-TW" dirty="0">
                 <a:solidFill>
                   <a:srgbClr val="000000"/>
                 </a:solidFill>
@@ -4778,11 +6637,11 @@
                 <a:spcPct val="115000"/>
               </a:lnSpc>
               <a:spcAft>
-                <a:spcPts val="600"/>
-              </a:spcAft>
-            </a:pPr>
-            <a:r>
-              <a:rPr sz="1200" lang="zh-TW" dirty="0">
+                <a:spcPts val="500"/>
+              </a:spcAft>
+            </a:pPr>
+            <a:r>
+              <a:rPr sz="1000" lang="zh-TW" dirty="0">
                 <a:solidFill>
                   <a:srgbClr val="000000"/>
                 </a:solidFill>
@@ -4800,11 +6659,11 @@
                 <a:spcPct val="115000"/>
               </a:lnSpc>
               <a:spcAft>
-                <a:spcPts val="600"/>
-              </a:spcAft>
-            </a:pPr>
-            <a:r>
-              <a:rPr sz="1200" lang="zh-TW" dirty="0">
+                <a:spcPts val="500"/>
+              </a:spcAft>
+            </a:pPr>
+            <a:r>
+              <a:rPr sz="1000" lang="zh-TW" dirty="0">
                 <a:solidFill>
                   <a:srgbClr val="000000"/>
                 </a:solidFill>
@@ -4822,11 +6681,11 @@
                 <a:spcPct val="115000"/>
               </a:lnSpc>
               <a:spcAft>
-                <a:spcPts val="600"/>
-              </a:spcAft>
-            </a:pPr>
-            <a:r>
-              <a:rPr sz="1200" lang="zh-TW" dirty="0">
+                <a:spcPts val="500"/>
+              </a:spcAft>
+            </a:pPr>
+            <a:r>
+              <a:rPr sz="1000" lang="zh-TW" dirty="0">
                 <a:solidFill>
                   <a:srgbClr val="000000"/>
                 </a:solidFill>
@@ -4844,11 +6703,11 @@
                 <a:spcPct val="115000"/>
               </a:lnSpc>
               <a:spcAft>
-                <a:spcPts val="600"/>
-              </a:spcAft>
-            </a:pPr>
-            <a:r>
-              <a:rPr sz="1200" lang="zh-TW" dirty="0">
+                <a:spcPts val="500"/>
+              </a:spcAft>
+            </a:pPr>
+            <a:r>
+              <a:rPr sz="1000" lang="zh-TW" dirty="0">
                 <a:solidFill>
                   <a:srgbClr val="000000"/>
                 </a:solidFill>
@@ -4965,11 +6824,154 @@
                 <a:spcPct val="115000"/>
               </a:lnSpc>
               <a:spcAft>
-                <a:spcPts val="600"/>
-              </a:spcAft>
-            </a:pPr>
-            <a:r>
-              <a:rPr sz="1200" lang="zh-TW" dirty="0">
+                <a:spcPts val="550"/>
+              </a:spcAft>
+            </a:pPr>
+            <a:r>
+              <a:rPr sz="1100" b="1" lang="zh-TW" dirty="0">
+                <a:solidFill>
+                  <a:srgbClr val="000000"/>
+                </a:solidFill>
+                <a:latin typeface="Arial Unicode MS"/>
+                <a:ea typeface="Arial Unicode MS"/>
+                <a:cs typeface="Arial Unicode MS"/>
+              </a:rPr>
+              <a:t>▍這一張要做什麼</a:t>
+            </a:r>
+            <a:r>
+              <a:rPr sz="1100" lang="zh-TW" dirty="0">
+                <a:solidFill>
+                  <a:srgbClr val="000000"/>
+                </a:solidFill>
+                <a:latin typeface="Arial Unicode MS"/>
+                <a:ea typeface="Arial Unicode MS"/>
+                <a:cs typeface="Arial Unicode MS"/>
+              </a:rPr>
+              <a:t>
+</a:t>
+            </a:r>
+          </a:p>
+          <a:p>
+            <a:pPr algn="l">
+              <a:lnSpc>
+                <a:spcPct val="115000"/>
+              </a:lnSpc>
+              <a:spcAft>
+                <a:spcPts val="550"/>
+              </a:spcAft>
+            </a:pPr>
+            <a:r>
+              <a:rPr sz="1100" lang="zh-TW" dirty="0">
+                <a:solidFill>
+                  <a:srgbClr val="000000"/>
+                </a:solidFill>
+                <a:latin typeface="Arial Unicode MS"/>
+                <a:ea typeface="Arial Unicode MS"/>
+                <a:cs typeface="Arial Unicode MS"/>
+              </a:rPr>
+              <a:t>把「射線長度」對到 Range，並且先埋下伏筆：這個數字有一個不能自己決定的下限。
+</a:t>
+            </a:r>
+          </a:p>
+          <a:p>
+            <a:pPr algn="l">
+              <a:lnSpc>
+                <a:spcPct val="115000"/>
+              </a:lnSpc>
+              <a:spcAft>
+                <a:spcPts val="550"/>
+              </a:spcAft>
+            </a:pPr>
+            <a:r>
+              <a:rPr sz="1100" b="1" lang="zh-TW" dirty="0">
+                <a:solidFill>
+                  <a:srgbClr val="000000"/>
+                </a:solidFill>
+                <a:latin typeface="Arial Unicode MS"/>
+                <a:ea typeface="Arial Unicode MS"/>
+                <a:cs typeface="Arial Unicode MS"/>
+              </a:rPr>
+              <a:t>▍畫面上圈這裡</a:t>
+            </a:r>
+            <a:r>
+              <a:rPr sz="1100" lang="zh-TW" dirty="0">
+                <a:solidFill>
+                  <a:srgbClr val="000000"/>
+                </a:solidFill>
+                <a:latin typeface="Arial Unicode MS"/>
+                <a:ea typeface="Arial Unicode MS"/>
+                <a:cs typeface="Arial Unicode MS"/>
+              </a:rPr>
+              <a:t>
+</a:t>
+            </a:r>
+          </a:p>
+          <a:p>
+            <a:pPr algn="l">
+              <a:lnSpc>
+                <a:spcPct val="115000"/>
+              </a:lnSpc>
+              <a:spcAft>
+                <a:spcPts val="550"/>
+              </a:spcAft>
+            </a:pPr>
+            <a:r>
+              <a:rPr sz="1100" lang="zh-TW" dirty="0">
+                <a:solidFill>
+                  <a:srgbClr val="000000"/>
+                </a:solidFill>
+                <a:latin typeface="Arial Unicode MS"/>
+                <a:ea typeface="Arial Unicode MS"/>
+                <a:cs typeface="Arial Unicode MS"/>
+              </a:rPr>
+              <a:t>圈右邊「我們的模擬器」與「真車的光達」兩列的數字，讓大家看到差了一個數量級。
+</a:t>
+            </a:r>
+          </a:p>
+          <a:p>
+            <a:pPr algn="l">
+              <a:lnSpc>
+                <a:spcPct val="115000"/>
+              </a:lnSpc>
+              <a:spcAft>
+                <a:spcPts val="550"/>
+              </a:spcAft>
+            </a:pPr>
+            <a:r>
+              <a:rPr sz="1100" b="1" lang="zh-TW" dirty="0">
+                <a:solidFill>
+                  <a:srgbClr val="000000"/>
+                </a:solidFill>
+                <a:latin typeface="Arial Unicode MS"/>
+                <a:ea typeface="Arial Unicode MS"/>
+                <a:cs typeface="Arial Unicode MS"/>
+              </a:rPr>
+              <a:t>▍以下照著唸</a:t>
+            </a:r>
+            <a:r>
+              <a:rPr sz="1100" lang="zh-TW" dirty="0">
+                <a:solidFill>
+                  <a:srgbClr val="000000"/>
+                </a:solidFill>
+                <a:latin typeface="Arial Unicode MS"/>
+                <a:ea typeface="Arial Unicode MS"/>
+                <a:cs typeface="Arial Unicode MS"/>
+              </a:rPr>
+              <a:t>
+</a:t>
+            </a:r>
+          </a:p>
+          <a:p>
+            <a:pPr algn="l">
+              <a:lnSpc>
+                <a:spcPct val="115000"/>
+              </a:lnSpc>
+              <a:spcAft>
+                <a:spcPts val="550"/>
+              </a:spcAft>
+            </a:pPr>
+            <a:r>
+              <a:rPr sz="1100" lang="zh-TW" dirty="0">
                 <a:solidFill>
                   <a:srgbClr val="000000"/>
                 </a:solidFill>
@@ -4980,7 +6982,7 @@
               <a:t>第二個滑桿：</a:t>
             </a:r>
             <a:r>
-              <a:rPr sz="1200" b="1" lang="zh-TW" dirty="0">
+              <a:rPr sz="1100" b="1" lang="zh-TW" dirty="0">
                 <a:solidFill>
                   <a:srgbClr val="000000"/>
                 </a:solidFill>
@@ -4991,7 +6993,7 @@
               <a:t>射線長度</a:t>
             </a:r>
             <a:r>
-              <a:rPr sz="1200" lang="zh-TW" dirty="0">
+              <a:rPr sz="1100" lang="zh-TW" dirty="0">
                 <a:solidFill>
                   <a:srgbClr val="000000"/>
                 </a:solidFill>
@@ -5009,11 +7011,11 @@
                 <a:spcPct val="115000"/>
               </a:lnSpc>
               <a:spcAft>
-                <a:spcPts val="600"/>
-              </a:spcAft>
-            </a:pPr>
-            <a:r>
-              <a:rPr sz="1200" lang="zh-TW" dirty="0">
+                <a:spcPts val="550"/>
+              </a:spcAft>
+            </a:pPr>
+            <a:r>
+              <a:rPr sz="1100" lang="zh-TW" dirty="0">
                 <a:solidFill>
                   <a:srgbClr val="000000"/>
                 </a:solidFill>
@@ -5024,7 +7026,7 @@
               <a:t>規格表上叫 </a:t>
             </a:r>
             <a:r>
-              <a:rPr sz="1200" b="1" lang="zh-TW" dirty="0">
+              <a:rPr sz="1100" b="1" lang="zh-TW" dirty="0">
                 <a:solidFill>
                   <a:srgbClr val="000000"/>
                 </a:solidFill>
@@ -5035,7 +7037,7 @@
               <a:t>Range，測距範圍</a:t>
             </a:r>
             <a:r>
-              <a:rPr sz="1200" lang="zh-TW" dirty="0">
+              <a:rPr sz="1100" lang="zh-TW" dirty="0">
                 <a:solidFill>
                   <a:srgbClr val="000000"/>
                 </a:solidFill>
@@ -5053,11 +7055,11 @@
                 <a:spcPct val="115000"/>
               </a:lnSpc>
               <a:spcAft>
-                <a:spcPts val="600"/>
-              </a:spcAft>
-            </a:pPr>
-            <a:r>
-              <a:rPr sz="1200" lang="zh-TW" dirty="0">
+                <a:spcPts val="550"/>
+              </a:spcAft>
+            </a:pPr>
+            <a:r>
+              <a:rPr sz="1100" lang="zh-TW" dirty="0">
                 <a:solidFill>
                   <a:srgbClr val="000000"/>
                 </a:solidFill>
@@ -5075,11 +7077,11 @@
                 <a:spcPct val="115000"/>
               </a:lnSpc>
               <a:spcAft>
-                <a:spcPts val="600"/>
-              </a:spcAft>
-            </a:pPr>
-            <a:r>
-              <a:rPr sz="1200" lang="zh-TW" dirty="0">
+                <a:spcPts val="550"/>
+              </a:spcAft>
+            </a:pPr>
+            <a:r>
+              <a:rPr sz="1100" lang="zh-TW" dirty="0">
                 <a:solidFill>
                   <a:srgbClr val="000000"/>
                 </a:solidFill>
@@ -5090,7 +7092,7 @@
               <a:t>這個數字有一個很硬的下限，</a:t>
             </a:r>
             <a:r>
-              <a:rPr sz="1200" b="1" lang="zh-TW" dirty="0">
+              <a:rPr sz="1100" b="1" lang="zh-TW" dirty="0">
                 <a:solidFill>
                   <a:srgbClr val="000000"/>
                 </a:solidFill>
@@ -5101,7 +7103,7 @@
               <a:t>不是你想選多少就多少</a:t>
             </a:r>
             <a:r>
-              <a:rPr sz="1200" lang="zh-TW" dirty="0">
+              <a:rPr sz="1100" lang="zh-TW" dirty="0">
                 <a:solidFill>
                   <a:srgbClr val="000000"/>
                 </a:solidFill>
@@ -5119,11 +7121,11 @@
                 <a:spcPct val="115000"/>
               </a:lnSpc>
               <a:spcAft>
-                <a:spcPts val="600"/>
-              </a:spcAft>
-            </a:pPr>
-            <a:r>
-              <a:rPr sz="1200" lang="zh-TW" dirty="0">
+                <a:spcPts val="550"/>
+              </a:spcAft>
+            </a:pPr>
+            <a:r>
+              <a:rPr sz="1100" lang="zh-TW" dirty="0">
                 <a:solidFill>
                   <a:srgbClr val="000000"/>
                 </a:solidFill>
@@ -5141,11 +7143,11 @@
                 <a:spcPct val="115000"/>
               </a:lnSpc>
               <a:spcAft>
-                <a:spcPts val="600"/>
-              </a:spcAft>
-            </a:pPr>
-            <a:r>
-              <a:rPr sz="1200" lang="zh-TW" dirty="0">
+                <a:spcPts val="550"/>
+              </a:spcAft>
+            </a:pPr>
+            <a:r>
+              <a:rPr sz="1100" lang="zh-TW" dirty="0">
                 <a:solidFill>
                   <a:srgbClr val="000000"/>
                 </a:solidFill>
@@ -5163,11 +7165,11 @@
                 <a:spcPct val="115000"/>
               </a:lnSpc>
               <a:spcAft>
-                <a:spcPts val="600"/>
-              </a:spcAft>
-            </a:pPr>
-            <a:r>
-              <a:rPr sz="1200" lang="zh-TW" dirty="0">
+                <a:spcPts val="550"/>
+              </a:spcAft>
+            </a:pPr>
+            <a:r>
+              <a:rPr sz="1100" lang="zh-TW" dirty="0">
                 <a:solidFill>
                   <a:srgbClr val="000000"/>
                 </a:solidFill>
@@ -5284,11 +7286,154 @@
                 <a:spcPct val="115000"/>
               </a:lnSpc>
               <a:spcAft>
-                <a:spcPts val="600"/>
-              </a:spcAft>
-            </a:pPr>
-            <a:r>
-              <a:rPr sz="1200" lang="zh-TW" dirty="0">
+                <a:spcPts val="500"/>
+              </a:spcAft>
+            </a:pPr>
+            <a:r>
+              <a:rPr sz="1000" b="1" lang="zh-TW" dirty="0">
+                <a:solidFill>
+                  <a:srgbClr val="000000"/>
+                </a:solidFill>
+                <a:latin typeface="Arial Unicode MS"/>
+                <a:ea typeface="Arial Unicode MS"/>
+                <a:cs typeface="Arial Unicode MS"/>
+              </a:rPr>
+              <a:t>▍這一張要做什麼</a:t>
+            </a:r>
+            <a:r>
+              <a:rPr sz="1000" lang="zh-TW" dirty="0">
+                <a:solidFill>
+                  <a:srgbClr val="000000"/>
+                </a:solidFill>
+                <a:latin typeface="Arial Unicode MS"/>
+                <a:ea typeface="Arial Unicode MS"/>
+                <a:cs typeface="Arial Unicode MS"/>
+              </a:rPr>
+              <a:t>
+</a:t>
+            </a:r>
+          </a:p>
+          <a:p>
+            <a:pPr algn="l">
+              <a:lnSpc>
+                <a:spcPct val="115000"/>
+              </a:lnSpc>
+              <a:spcAft>
+                <a:spcPts val="500"/>
+              </a:spcAft>
+            </a:pPr>
+            <a:r>
+              <a:rPr sz="1000" lang="zh-TW" dirty="0">
+                <a:solidFill>
+                  <a:srgbClr val="000000"/>
+                </a:solidFill>
+                <a:latin typeface="Arial Unicode MS"/>
+                <a:ea typeface="Arial Unicode MS"/>
+                <a:cs typeface="Arial Unicode MS"/>
+              </a:rPr>
+              <a:t>把「張角」對到 FOV，並帶出「同樣的射線攤得愈廣就愈稀」。
+</a:t>
+            </a:r>
+          </a:p>
+          <a:p>
+            <a:pPr algn="l">
+              <a:lnSpc>
+                <a:spcPct val="115000"/>
+              </a:lnSpc>
+              <a:spcAft>
+                <a:spcPts val="500"/>
+              </a:spcAft>
+            </a:pPr>
+            <a:r>
+              <a:rPr sz="1000" b="1" lang="zh-TW" dirty="0">
+                <a:solidFill>
+                  <a:srgbClr val="000000"/>
+                </a:solidFill>
+                <a:latin typeface="Arial Unicode MS"/>
+                <a:ea typeface="Arial Unicode MS"/>
+                <a:cs typeface="Arial Unicode MS"/>
+              </a:rPr>
+              <a:t>▍畫面上圈這裡</a:t>
+            </a:r>
+            <a:r>
+              <a:rPr sz="1000" lang="zh-TW" dirty="0">
+                <a:solidFill>
+                  <a:srgbClr val="000000"/>
+                </a:solidFill>
+                <a:latin typeface="Arial Unicode MS"/>
+                <a:ea typeface="Arial Unicode MS"/>
+                <a:cs typeface="Arial Unicode MS"/>
+              </a:rPr>
+              <a:t>
+</a:t>
+            </a:r>
+          </a:p>
+          <a:p>
+            <a:pPr algn="l">
+              <a:lnSpc>
+                <a:spcPct val="115000"/>
+              </a:lnSpc>
+              <a:spcAft>
+                <a:spcPts val="500"/>
+              </a:spcAft>
+            </a:pPr>
+            <a:r>
+              <a:rPr sz="1000" lang="zh-TW" dirty="0">
+                <a:solidFill>
+                  <a:srgbClr val="000000"/>
+                </a:solidFill>
+                <a:latin typeface="Arial Unicode MS"/>
+                <a:ea typeface="Arial Unicode MS"/>
+                <a:cs typeface="Arial Unicode MS"/>
+              </a:rPr>
+              <a:t>圈「調寬會怎樣」那一列，再回頭指左邊圖上射線之間變寬的縫。
+</a:t>
+            </a:r>
+          </a:p>
+          <a:p>
+            <a:pPr algn="l">
+              <a:lnSpc>
+                <a:spcPct val="115000"/>
+              </a:lnSpc>
+              <a:spcAft>
+                <a:spcPts val="500"/>
+              </a:spcAft>
+            </a:pPr>
+            <a:r>
+              <a:rPr sz="1000" b="1" lang="zh-TW" dirty="0">
+                <a:solidFill>
+                  <a:srgbClr val="000000"/>
+                </a:solidFill>
+                <a:latin typeface="Arial Unicode MS"/>
+                <a:ea typeface="Arial Unicode MS"/>
+                <a:cs typeface="Arial Unicode MS"/>
+              </a:rPr>
+              <a:t>▍以下照著唸</a:t>
+            </a:r>
+            <a:r>
+              <a:rPr sz="1000" lang="zh-TW" dirty="0">
+                <a:solidFill>
+                  <a:srgbClr val="000000"/>
+                </a:solidFill>
+                <a:latin typeface="Arial Unicode MS"/>
+                <a:ea typeface="Arial Unicode MS"/>
+                <a:cs typeface="Arial Unicode MS"/>
+              </a:rPr>
+              <a:t>
+</a:t>
+            </a:r>
+          </a:p>
+          <a:p>
+            <a:pPr algn="l">
+              <a:lnSpc>
+                <a:spcPct val="115000"/>
+              </a:lnSpc>
+              <a:spcAft>
+                <a:spcPts val="500"/>
+              </a:spcAft>
+            </a:pPr>
+            <a:r>
+              <a:rPr sz="1000" lang="zh-TW" dirty="0">
                 <a:solidFill>
                   <a:srgbClr val="000000"/>
                 </a:solidFill>
@@ -5299,7 +7444,7 @@
               <a:t>第三個滑桿：</a:t>
             </a:r>
             <a:r>
-              <a:rPr sz="1200" b="1" lang="zh-TW" dirty="0">
+              <a:rPr sz="1000" b="1" lang="zh-TW" dirty="0">
                 <a:solidFill>
                   <a:srgbClr val="000000"/>
                 </a:solidFill>
@@ -5310,7 +7455,7 @@
               <a:t>張角</a:t>
             </a:r>
             <a:r>
-              <a:rPr sz="1200" lang="zh-TW" dirty="0">
+              <a:rPr sz="1000" lang="zh-TW" dirty="0">
                 <a:solidFill>
                   <a:srgbClr val="000000"/>
                 </a:solidFill>
@@ -5328,11 +7473,11 @@
                 <a:spcPct val="115000"/>
               </a:lnSpc>
               <a:spcAft>
-                <a:spcPts val="600"/>
-              </a:spcAft>
-            </a:pPr>
-            <a:r>
-              <a:rPr sz="1200" lang="zh-TW" dirty="0">
+                <a:spcPts val="500"/>
+              </a:spcAft>
+            </a:pPr>
+            <a:r>
+              <a:rPr sz="1000" lang="zh-TW" dirty="0">
                 <a:solidFill>
                   <a:srgbClr val="000000"/>
                 </a:solidFill>
@@ -5343,7 +7488,7 @@
               <a:t>規格表上叫 </a:t>
             </a:r>
             <a:r>
-              <a:rPr sz="1200" b="1" lang="zh-TW" dirty="0">
+              <a:rPr sz="1000" b="1" lang="zh-TW" dirty="0">
                 <a:solidFill>
                   <a:srgbClr val="000000"/>
                 </a:solidFill>
@@ -5354,7 +7499,7 @@
               <a:t>Field of view，視野</a:t>
             </a:r>
             <a:r>
-              <a:rPr sz="1200" lang="zh-TW" dirty="0">
+              <a:rPr sz="1000" lang="zh-TW" dirty="0">
                 <a:solidFill>
                   <a:srgbClr val="000000"/>
                 </a:solidFill>
@@ -5372,11 +7517,11 @@
                 <a:spcPct val="115000"/>
               </a:lnSpc>
               <a:spcAft>
-                <a:spcPts val="600"/>
-              </a:spcAft>
-            </a:pPr>
-            <a:r>
-              <a:rPr sz="1200" lang="zh-TW" dirty="0">
+                <a:spcPts val="500"/>
+              </a:spcAft>
+            </a:pPr>
+            <a:r>
+              <a:rPr sz="1000" lang="zh-TW" dirty="0">
                 <a:solidFill>
                   <a:srgbClr val="000000"/>
                 </a:solidFill>
@@ -5394,11 +7539,11 @@
                 <a:spcPct val="115000"/>
               </a:lnSpc>
               <a:spcAft>
-                <a:spcPts val="600"/>
-              </a:spcAft>
-            </a:pPr>
-            <a:r>
-              <a:rPr sz="1200" lang="zh-TW" dirty="0">
+                <a:spcPts val="500"/>
+              </a:spcAft>
+            </a:pPr>
+            <a:r>
+              <a:rPr sz="1000" lang="zh-TW" dirty="0">
                 <a:solidFill>
                   <a:srgbClr val="000000"/>
                 </a:solidFill>
@@ -5416,11 +7561,11 @@
                 <a:spcPct val="115000"/>
               </a:lnSpc>
               <a:spcAft>
-                <a:spcPts val="600"/>
-              </a:spcAft>
-            </a:pPr>
-            <a:r>
-              <a:rPr sz="1200" lang="zh-TW" dirty="0">
+                <a:spcPts val="500"/>
+              </a:spcAft>
+            </a:pPr>
+            <a:r>
+              <a:rPr sz="1000" lang="zh-TW" dirty="0">
                 <a:solidFill>
                   <a:srgbClr val="000000"/>
                 </a:solidFill>
@@ -5431,7 +7576,7 @@
               <a:t>對——</a:t>
             </a:r>
             <a:r>
-              <a:rPr sz="1200" b="1" lang="zh-TW" dirty="0">
+              <a:rPr sz="1000" b="1" lang="zh-TW" dirty="0">
                 <a:solidFill>
                   <a:srgbClr val="000000"/>
                 </a:solidFill>
@@ -5442,7 +7587,7 @@
               <a:t>同樣的射線數被攤開，每個方向就變稀</a:t>
             </a:r>
             <a:r>
-              <a:rPr sz="1200" lang="zh-TW" dirty="0">
+              <a:rPr sz="1000" lang="zh-TW" dirty="0">
                 <a:solidFill>
                   <a:srgbClr val="000000"/>
                 </a:solidFill>
@@ -5460,11 +7605,11 @@
                 <a:spcPct val="115000"/>
               </a:lnSpc>
               <a:spcAft>
-                <a:spcPts val="600"/>
-              </a:spcAft>
-            </a:pPr>
-            <a:r>
-              <a:rPr sz="1200" lang="zh-TW" dirty="0">
+                <a:spcPts val="500"/>
+              </a:spcAft>
+            </a:pPr>
+            <a:r>
+              <a:rPr sz="1000" lang="zh-TW" dirty="0">
                 <a:solidFill>
                   <a:srgbClr val="000000"/>
                 </a:solidFill>
@@ -5482,11 +7627,11 @@
                 <a:spcPct val="115000"/>
               </a:lnSpc>
               <a:spcAft>
-                <a:spcPts val="600"/>
-              </a:spcAft>
-            </a:pPr>
-            <a:r>
-              <a:rPr sz="1200" lang="zh-TW" dirty="0">
+                <a:spcPts val="500"/>
+              </a:spcAft>
+            </a:pPr>
+            <a:r>
+              <a:rPr sz="1000" lang="zh-TW" dirty="0">
                 <a:solidFill>
                   <a:srgbClr val="000000"/>
                 </a:solidFill>
@@ -5504,11 +7649,11 @@
                 <a:spcPct val="115000"/>
               </a:lnSpc>
               <a:spcAft>
-                <a:spcPts val="600"/>
-              </a:spcAft>
-            </a:pPr>
-            <a:r>
-              <a:rPr sz="1200" lang="zh-TW" dirty="0">
+                <a:spcPts val="500"/>
+              </a:spcAft>
+            </a:pPr>
+            <a:r>
+              <a:rPr sz="1000" lang="zh-TW" dirty="0">
                 <a:solidFill>
                   <a:srgbClr val="000000"/>
                 </a:solidFill>
@@ -5526,11 +7671,11 @@
                 <a:spcPct val="115000"/>
               </a:lnSpc>
               <a:spcAft>
-                <a:spcPts val="600"/>
-              </a:spcAft>
-            </a:pPr>
-            <a:r>
-              <a:rPr sz="1200" b="1" lang="zh-TW" dirty="0">
+                <a:spcPts val="500"/>
+              </a:spcAft>
+            </a:pPr>
+            <a:r>
+              <a:rPr sz="1000" b="1" lang="zh-TW" dirty="0">
                 <a:solidFill>
                   <a:srgbClr val="000000"/>
                 </a:solidFill>
@@ -5541,7 +7686,7 @@
               <a:t>第五週我會拿真正的光達規格表來讀給各位看。</a:t>
             </a:r>
             <a:r>
-              <a:rPr sz="1200" lang="zh-TW" dirty="0">
+              <a:rPr sz="1000" lang="zh-TW" dirty="0">
                 <a:solidFill>
                   <a:srgbClr val="000000"/>
                 </a:solidFill>
@@ -5662,6 +7807,149 @@
               </a:spcAft>
             </a:pPr>
             <a:r>
+              <a:rPr sz="1000" b="1" lang="zh-TW" dirty="0">
+                <a:solidFill>
+                  <a:srgbClr val="000000"/>
+                </a:solidFill>
+                <a:latin typeface="Arial Unicode MS"/>
+                <a:ea typeface="Arial Unicode MS"/>
+                <a:cs typeface="Arial Unicode MS"/>
+              </a:rPr>
+              <a:t>▍這一張要做什麼</a:t>
+            </a:r>
+            <a:r>
+              <a:rPr sz="1000" lang="zh-TW" dirty="0">
+                <a:solidFill>
+                  <a:srgbClr val="000000"/>
+                </a:solidFill>
+                <a:latin typeface="Arial Unicode MS"/>
+                <a:ea typeface="Arial Unicode MS"/>
+                <a:cs typeface="Arial Unicode MS"/>
+              </a:rPr>
+              <a:t>
+</a:t>
+            </a:r>
+          </a:p>
+          <a:p>
+            <a:pPr algn="l">
+              <a:lnSpc>
+                <a:spcPct val="115000"/>
+              </a:lnSpc>
+              <a:spcAft>
+                <a:spcPts val="500"/>
+              </a:spcAft>
+            </a:pPr>
+            <a:r>
+              <a:rPr sz="1000" lang="zh-TW" dirty="0">
+                <a:solidFill>
+                  <a:srgbClr val="000000"/>
+                </a:solidFill>
+                <a:latin typeface="Arial Unicode MS"/>
+                <a:ea typeface="Arial Unicode MS"/>
+                <a:cs typeface="Arial Unicode MS"/>
+              </a:rPr>
+              <a:t>本節的重點頁。用煞停距離算出射線長度的硬下限——這不是設計選擇，是物理逼出來的。
+</a:t>
+            </a:r>
+          </a:p>
+          <a:p>
+            <a:pPr algn="l">
+              <a:lnSpc>
+                <a:spcPct val="115000"/>
+              </a:lnSpc>
+              <a:spcAft>
+                <a:spcPts val="500"/>
+              </a:spcAft>
+            </a:pPr>
+            <a:r>
+              <a:rPr sz="1000" b="1" lang="zh-TW" dirty="0">
+                <a:solidFill>
+                  <a:srgbClr val="000000"/>
+                </a:solidFill>
+                <a:latin typeface="Arial Unicode MS"/>
+                <a:ea typeface="Arial Unicode MS"/>
+                <a:cs typeface="Arial Unicode MS"/>
+              </a:rPr>
+              <a:t>▍畫面上圈這裡</a:t>
+            </a:r>
+            <a:r>
+              <a:rPr sz="1000" lang="zh-TW" dirty="0">
+                <a:solidFill>
+                  <a:srgbClr val="000000"/>
+                </a:solidFill>
+                <a:latin typeface="Arial Unicode MS"/>
+                <a:ea typeface="Arial Unicode MS"/>
+                <a:cs typeface="Arial Unicode MS"/>
+              </a:rPr>
+              <a:t>
+</a:t>
+            </a:r>
+          </a:p>
+          <a:p>
+            <a:pPr algn="l">
+              <a:lnSpc>
+                <a:spcPct val="115000"/>
+              </a:lnSpc>
+              <a:spcAft>
+                <a:spcPts val="500"/>
+              </a:spcAft>
+            </a:pPr>
+            <a:r>
+              <a:rPr sz="1000" lang="zh-TW" dirty="0">
+                <a:solidFill>
+                  <a:srgbClr val="000000"/>
+                </a:solidFill>
+                <a:latin typeface="Arial Unicode MS"/>
+                <a:ea typeface="Arial Unicode MS"/>
+                <a:cs typeface="Arial Unicode MS"/>
+              </a:rPr>
+              <a:t>先圈公式裡的反應距離那一段，再圈煞車距離那一段，最後圈總和那個數字。
+</a:t>
+            </a:r>
+          </a:p>
+          <a:p>
+            <a:pPr algn="l">
+              <a:lnSpc>
+                <a:spcPct val="115000"/>
+              </a:lnSpc>
+              <a:spcAft>
+                <a:spcPts val="500"/>
+              </a:spcAft>
+            </a:pPr>
+            <a:r>
+              <a:rPr sz="1000" b="1" lang="zh-TW" dirty="0">
+                <a:solidFill>
+                  <a:srgbClr val="000000"/>
+                </a:solidFill>
+                <a:latin typeface="Arial Unicode MS"/>
+                <a:ea typeface="Arial Unicode MS"/>
+                <a:cs typeface="Arial Unicode MS"/>
+              </a:rPr>
+              <a:t>▍以下照著唸</a:t>
+            </a:r>
+            <a:r>
+              <a:rPr sz="1000" lang="zh-TW" dirty="0">
+                <a:solidFill>
+                  <a:srgbClr val="000000"/>
+                </a:solidFill>
+                <a:latin typeface="Arial Unicode MS"/>
+                <a:ea typeface="Arial Unicode MS"/>
+                <a:cs typeface="Arial Unicode MS"/>
+              </a:rPr>
+              <a:t>
+</a:t>
+            </a:r>
+          </a:p>
+          <a:p>
+            <a:pPr algn="l">
+              <a:lnSpc>
+                <a:spcPct val="115000"/>
+              </a:lnSpc>
+              <a:spcAft>
+                <a:spcPts val="500"/>
+              </a:spcAft>
+            </a:pPr>
+            <a:r>
               <a:rPr sz="1000" lang="zh-TW" dirty="0">
                 <a:solidFill>
                   <a:srgbClr val="000000"/>
@@ -6454,6 +8742,149 @@
               </a:spcAft>
             </a:pPr>
             <a:r>
+              <a:rPr sz="1000" b="1" lang="zh-TW" dirty="0">
+                <a:solidFill>
+                  <a:srgbClr val="000000"/>
+                </a:solidFill>
+                <a:latin typeface="Arial Unicode MS"/>
+                <a:ea typeface="Arial Unicode MS"/>
+                <a:cs typeface="Arial Unicode MS"/>
+              </a:rPr>
+              <a:t>▍這一張要做什麼</a:t>
+            </a:r>
+            <a:r>
+              <a:rPr sz="1000" lang="zh-TW" dirty="0">
+                <a:solidFill>
+                  <a:srgbClr val="000000"/>
+                </a:solidFill>
+                <a:latin typeface="Arial Unicode MS"/>
+                <a:ea typeface="Arial Unicode MS"/>
+                <a:cs typeface="Arial Unicode MS"/>
+              </a:rPr>
+              <a:t>
+</a:t>
+            </a:r>
+          </a:p>
+          <a:p>
+            <a:pPr algn="l">
+              <a:lnSpc>
+                <a:spcPct val="115000"/>
+              </a:lnSpc>
+              <a:spcAft>
+                <a:spcPts val="500"/>
+              </a:spcAft>
+            </a:pPr>
+            <a:r>
+              <a:rPr sz="1000" lang="zh-TW" dirty="0">
+                <a:solidFill>
+                  <a:srgbClr val="000000"/>
+                </a:solidFill>
+                <a:latin typeface="Arial Unicode MS"/>
+                <a:ea typeface="Arial Unicode MS"/>
+                <a:cs typeface="Arial Unicode MS"/>
+              </a:rPr>
+              <a:t>用一支教育頻道的影片，把剛剛拆的兩段距離再講一次，並帶到路面濕會更長。
+</a:t>
+            </a:r>
+          </a:p>
+          <a:p>
+            <a:pPr algn="l">
+              <a:lnSpc>
+                <a:spcPct val="115000"/>
+              </a:lnSpc>
+              <a:spcAft>
+                <a:spcPts val="500"/>
+              </a:spcAft>
+            </a:pPr>
+            <a:r>
+              <a:rPr sz="1000" b="1" lang="zh-TW" dirty="0">
+                <a:solidFill>
+                  <a:srgbClr val="000000"/>
+                </a:solidFill>
+                <a:latin typeface="Arial Unicode MS"/>
+                <a:ea typeface="Arial Unicode MS"/>
+                <a:cs typeface="Arial Unicode MS"/>
+              </a:rPr>
+              <a:t>▍畫面上圈這裡</a:t>
+            </a:r>
+            <a:r>
+              <a:rPr sz="1000" lang="zh-TW" dirty="0">
+                <a:solidFill>
+                  <a:srgbClr val="000000"/>
+                </a:solidFill>
+                <a:latin typeface="Arial Unicode MS"/>
+                <a:ea typeface="Arial Unicode MS"/>
+                <a:cs typeface="Arial Unicode MS"/>
+              </a:rPr>
+              <a:t>
+</a:t>
+            </a:r>
+          </a:p>
+          <a:p>
+            <a:pPr algn="l">
+              <a:lnSpc>
+                <a:spcPct val="115000"/>
+              </a:lnSpc>
+              <a:spcAft>
+                <a:spcPts val="500"/>
+              </a:spcAft>
+            </a:pPr>
+            <a:r>
+              <a:rPr sz="1000" lang="zh-TW" dirty="0">
+                <a:solidFill>
+                  <a:srgbClr val="000000"/>
+                </a:solidFill>
+                <a:latin typeface="Arial Unicode MS"/>
+                <a:ea typeface="Arial Unicode MS"/>
+                <a:cs typeface="Arial Unicode MS"/>
+              </a:rPr>
+              <a:t>播之前圈右邊的三條看點。播到 2:30 就停，回來對答案。
+</a:t>
+            </a:r>
+          </a:p>
+          <a:p>
+            <a:pPr algn="l">
+              <a:lnSpc>
+                <a:spcPct val="115000"/>
+              </a:lnSpc>
+              <a:spcAft>
+                <a:spcPts val="500"/>
+              </a:spcAft>
+            </a:pPr>
+            <a:r>
+              <a:rPr sz="1000" b="1" lang="zh-TW" dirty="0">
+                <a:solidFill>
+                  <a:srgbClr val="000000"/>
+                </a:solidFill>
+                <a:latin typeface="Arial Unicode MS"/>
+                <a:ea typeface="Arial Unicode MS"/>
+                <a:cs typeface="Arial Unicode MS"/>
+              </a:rPr>
+              <a:t>▍以下照著唸</a:t>
+            </a:r>
+            <a:r>
+              <a:rPr sz="1000" lang="zh-TW" dirty="0">
+                <a:solidFill>
+                  <a:srgbClr val="000000"/>
+                </a:solidFill>
+                <a:latin typeface="Arial Unicode MS"/>
+                <a:ea typeface="Arial Unicode MS"/>
+                <a:cs typeface="Arial Unicode MS"/>
+              </a:rPr>
+              <a:t>
+</a:t>
+            </a:r>
+          </a:p>
+          <a:p>
+            <a:pPr algn="l">
+              <a:lnSpc>
+                <a:spcPct val="115000"/>
+              </a:lnSpc>
+              <a:spcAft>
+                <a:spcPts val="500"/>
+              </a:spcAft>
+            </a:pPr>
+            <a:r>
               <a:rPr sz="1000" lang="zh-TW" dirty="0">
                 <a:solidFill>
                   <a:srgbClr val="000000"/>
@@ -7122,11 +9553,154 @@
                 <a:spcPct val="115000"/>
               </a:lnSpc>
               <a:spcAft>
-                <a:spcPts val="600"/>
-              </a:spcAft>
-            </a:pPr>
-            <a:r>
-              <a:rPr sz="1200" lang="zh-TW" dirty="0">
+                <a:spcPts val="500"/>
+              </a:spcAft>
+            </a:pPr>
+            <a:r>
+              <a:rPr sz="1000" b="1" lang="zh-TW" dirty="0">
+                <a:solidFill>
+                  <a:srgbClr val="000000"/>
+                </a:solidFill>
+                <a:latin typeface="Arial Unicode MS"/>
+                <a:ea typeface="Arial Unicode MS"/>
+                <a:cs typeface="Arial Unicode MS"/>
+              </a:rPr>
+              <a:t>▍這一張要做什麼</a:t>
+            </a:r>
+            <a:r>
+              <a:rPr sz="1000" lang="zh-TW" dirty="0">
+                <a:solidFill>
+                  <a:srgbClr val="000000"/>
+                </a:solidFill>
+                <a:latin typeface="Arial Unicode MS"/>
+                <a:ea typeface="Arial Unicode MS"/>
+                <a:cs typeface="Arial Unicode MS"/>
+              </a:rPr>
+              <a:t>
+</a:t>
+            </a:r>
+          </a:p>
+          <a:p>
+            <a:pPr algn="l">
+              <a:lnSpc>
+                <a:spcPct val="115000"/>
+              </a:lnSpc>
+              <a:spcAft>
+                <a:spcPts val="500"/>
+              </a:spcAft>
+            </a:pPr>
+            <a:r>
+              <a:rPr sz="1000" lang="zh-TW" dirty="0">
+                <a:solidFill>
+                  <a:srgbClr val="000000"/>
+                </a:solidFill>
+                <a:latin typeface="Arial Unicode MS"/>
+                <a:ea typeface="Arial Unicode MS"/>
+                <a:cs typeface="Arial Unicode MS"/>
+              </a:rPr>
+              <a:t>把公式變成一張可以直接查的表，讓學生知道自己等一下該把長度調到多少。
+</a:t>
+            </a:r>
+          </a:p>
+          <a:p>
+            <a:pPr algn="l">
+              <a:lnSpc>
+                <a:spcPct val="115000"/>
+              </a:lnSpc>
+              <a:spcAft>
+                <a:spcPts val="500"/>
+              </a:spcAft>
+            </a:pPr>
+            <a:r>
+              <a:rPr sz="1000" b="1" lang="zh-TW" dirty="0">
+                <a:solidFill>
+                  <a:srgbClr val="000000"/>
+                </a:solidFill>
+                <a:latin typeface="Arial Unicode MS"/>
+                <a:ea typeface="Arial Unicode MS"/>
+                <a:cs typeface="Arial Unicode MS"/>
+              </a:rPr>
+              <a:t>▍畫面上圈這裡</a:t>
+            </a:r>
+            <a:r>
+              <a:rPr sz="1000" lang="zh-TW" dirty="0">
+                <a:solidFill>
+                  <a:srgbClr val="000000"/>
+                </a:solidFill>
+                <a:latin typeface="Arial Unicode MS"/>
+                <a:ea typeface="Arial Unicode MS"/>
+                <a:cs typeface="Arial Unicode MS"/>
+              </a:rPr>
+              <a:t>
+</a:t>
+            </a:r>
+          </a:p>
+          <a:p>
+            <a:pPr algn="l">
+              <a:lnSpc>
+                <a:spcPct val="115000"/>
+              </a:lnSpc>
+              <a:spcAft>
+                <a:spcPts val="500"/>
+              </a:spcAft>
+            </a:pPr>
+            <a:r>
+              <a:rPr sz="1000" lang="zh-TW" dirty="0">
+                <a:solidFill>
+                  <a:srgbClr val="000000"/>
+                </a:solidFill>
+                <a:latin typeface="Arial Unicode MS"/>
+                <a:ea typeface="Arial Unicode MS"/>
+                <a:cs typeface="Arial Unicode MS"/>
+              </a:rPr>
+              <a:t>圈時速 50 那一列——那是模擬器的預設值；再圈最右邊那一欄的最低要求。
+</a:t>
+            </a:r>
+          </a:p>
+          <a:p>
+            <a:pPr algn="l">
+              <a:lnSpc>
+                <a:spcPct val="115000"/>
+              </a:lnSpc>
+              <a:spcAft>
+                <a:spcPts val="500"/>
+              </a:spcAft>
+            </a:pPr>
+            <a:r>
+              <a:rPr sz="1000" b="1" lang="zh-TW" dirty="0">
+                <a:solidFill>
+                  <a:srgbClr val="000000"/>
+                </a:solidFill>
+                <a:latin typeface="Arial Unicode MS"/>
+                <a:ea typeface="Arial Unicode MS"/>
+                <a:cs typeface="Arial Unicode MS"/>
+              </a:rPr>
+              <a:t>▍以下照著唸</a:t>
+            </a:r>
+            <a:r>
+              <a:rPr sz="1000" lang="zh-TW" dirty="0">
+                <a:solidFill>
+                  <a:srgbClr val="000000"/>
+                </a:solidFill>
+                <a:latin typeface="Arial Unicode MS"/>
+                <a:ea typeface="Arial Unicode MS"/>
+                <a:cs typeface="Arial Unicode MS"/>
+              </a:rPr>
+              <a:t>
+</a:t>
+            </a:r>
+          </a:p>
+          <a:p>
+            <a:pPr algn="l">
+              <a:lnSpc>
+                <a:spcPct val="115000"/>
+              </a:lnSpc>
+              <a:spcAft>
+                <a:spcPts val="500"/>
+              </a:spcAft>
+            </a:pPr>
+            <a:r>
+              <a:rPr sz="1000" lang="zh-TW" dirty="0">
                 <a:solidFill>
                   <a:srgbClr val="000000"/>
                 </a:solidFill>
@@ -7144,11 +9718,11 @@
                 <a:spcPct val="115000"/>
               </a:lnSpc>
               <a:spcAft>
-                <a:spcPts val="600"/>
-              </a:spcAft>
-            </a:pPr>
-            <a:r>
-              <a:rPr sz="1200" lang="zh-TW" dirty="0">
+                <a:spcPts val="500"/>
+              </a:spcAft>
+            </a:pPr>
+            <a:r>
+              <a:rPr sz="1000" lang="zh-TW" dirty="0">
                 <a:solidFill>
                   <a:srgbClr val="000000"/>
                 </a:solidFill>
@@ -7166,11 +9740,11 @@
                 <a:spcPct val="115000"/>
               </a:lnSpc>
               <a:spcAft>
-                <a:spcPts val="600"/>
-              </a:spcAft>
-            </a:pPr>
-            <a:r>
-              <a:rPr sz="1200" lang="zh-TW" dirty="0">
+                <a:spcPts val="500"/>
+              </a:spcAft>
+            </a:pPr>
+            <a:r>
+              <a:rPr sz="1000" lang="zh-TW" dirty="0">
                 <a:solidFill>
                   <a:srgbClr val="000000"/>
                 </a:solidFill>
@@ -7181,7 +9755,7 @@
               <a:t>請看</a:t>
             </a:r>
             <a:r>
-              <a:rPr sz="1200" b="1" lang="zh-TW" dirty="0">
+              <a:rPr sz="1000" b="1" lang="zh-TW" dirty="0">
                 <a:solidFill>
                   <a:srgbClr val="000000"/>
                 </a:solidFill>
@@ -7192,7 +9766,7 @@
               <a:t>從時速三十到時速八十</a:t>
             </a:r>
             <a:r>
-              <a:rPr sz="1200" lang="zh-TW" dirty="0">
+              <a:rPr sz="1000" lang="zh-TW" dirty="0">
                 <a:solidFill>
                   <a:srgbClr val="000000"/>
                 </a:solidFill>
@@ -7203,7 +9777,7 @@
               <a:t>：速度增加不到三倍，煞停距離從八公尺變成四十八公尺，</a:t>
             </a:r>
             <a:r>
-              <a:rPr sz="1200" b="1" lang="zh-TW" dirty="0">
+              <a:rPr sz="1000" b="1" lang="zh-TW" dirty="0">
                 <a:solidFill>
                   <a:srgbClr val="000000"/>
                 </a:solidFill>
@@ -7214,7 +9788,7 @@
               <a:t>六倍</a:t>
             </a:r>
             <a:r>
-              <a:rPr sz="1200" lang="zh-TW" dirty="0">
+              <a:rPr sz="1000" lang="zh-TW" dirty="0">
                 <a:solidFill>
                   <a:srgbClr val="000000"/>
                 </a:solidFill>
@@ -7232,11 +9806,11 @@
                 <a:spcPct val="115000"/>
               </a:lnSpc>
               <a:spcAft>
-                <a:spcPts val="600"/>
-              </a:spcAft>
-            </a:pPr>
-            <a:r>
-              <a:rPr sz="1200" lang="zh-TW" dirty="0">
+                <a:spcPts val="500"/>
+              </a:spcAft>
+            </a:pPr>
+            <a:r>
+              <a:rPr sz="1000" lang="zh-TW" dirty="0">
                 <a:solidFill>
                   <a:srgbClr val="000000"/>
                 </a:solidFill>
@@ -7254,11 +9828,11 @@
                 <a:spcPct val="115000"/>
               </a:lnSpc>
               <a:spcAft>
-                <a:spcPts val="600"/>
-              </a:spcAft>
-            </a:pPr>
-            <a:r>
-              <a:rPr sz="1200" lang="zh-TW" dirty="0">
+                <a:spcPts val="500"/>
+              </a:spcAft>
+            </a:pPr>
+            <a:r>
+              <a:rPr sz="1000" lang="zh-TW" dirty="0">
                 <a:solidFill>
                   <a:srgbClr val="000000"/>
                 </a:solidFill>
@@ -7269,7 +9843,7 @@
               <a:t>今天上機用的是時速五十那一列，射線至少二十五公尺。各位等一下調參數的時候，</a:t>
             </a:r>
             <a:r>
-              <a:rPr sz="1200" b="1" lang="zh-TW" dirty="0">
+              <a:rPr sz="1000" b="1" lang="zh-TW" dirty="0">
                 <a:solidFill>
                   <a:srgbClr val="000000"/>
                 </a:solidFill>
@@ -7280,7 +9854,7 @@
               <a:t>射線長度不要低於二十五</a:t>
             </a:r>
             <a:r>
-              <a:rPr sz="1200" lang="zh-TW" dirty="0">
+              <a:rPr sz="1000" lang="zh-TW" dirty="0">
                 <a:solidFill>
                   <a:srgbClr val="000000"/>
                 </a:solidFill>
@@ -7298,11 +9872,11 @@
                 <a:spcPct val="115000"/>
               </a:lnSpc>
               <a:spcAft>
-                <a:spcPts val="600"/>
-              </a:spcAft>
-            </a:pPr>
-            <a:r>
-              <a:rPr sz="1200" lang="zh-TW" dirty="0">
+                <a:spcPts val="500"/>
+              </a:spcAft>
+            </a:pPr>
+            <a:r>
+              <a:rPr sz="1000" lang="zh-TW" dirty="0">
                 <a:solidFill>
                   <a:srgbClr val="000000"/>
                 </a:solidFill>
@@ -7320,11 +9894,11 @@
                 <a:spcPct val="115000"/>
               </a:lnSpc>
               <a:spcAft>
-                <a:spcPts val="600"/>
-              </a:spcAft>
-            </a:pPr>
-            <a:r>
-              <a:rPr sz="1200" lang="zh-TW" dirty="0">
+                <a:spcPts val="500"/>
+              </a:spcAft>
+            </a:pPr>
+            <a:r>
+              <a:rPr sz="1000" lang="zh-TW" dirty="0">
                 <a:solidFill>
                   <a:srgbClr val="000000"/>
                 </a:solidFill>
@@ -7342,11 +9916,11 @@
                 <a:spcPct val="115000"/>
               </a:lnSpc>
               <a:spcAft>
-                <a:spcPts val="600"/>
-              </a:spcAft>
-            </a:pPr>
-            <a:r>
-              <a:rPr sz="1200" lang="zh-TW" dirty="0">
+                <a:spcPts val="500"/>
+              </a:spcAft>
+            </a:pPr>
+            <a:r>
+              <a:rPr sz="1000" lang="zh-TW" dirty="0">
                 <a:solidFill>
                   <a:srgbClr val="000000"/>
                 </a:solidFill>
@@ -7364,11 +9938,11 @@
                 <a:spcPct val="115000"/>
               </a:lnSpc>
               <a:spcAft>
-                <a:spcPts val="600"/>
-              </a:spcAft>
-            </a:pPr>
-            <a:r>
-              <a:rPr sz="1200" lang="zh-TW" dirty="0">
+                <a:spcPts val="500"/>
+              </a:spcAft>
+            </a:pPr>
+            <a:r>
+              <a:rPr sz="1000" lang="zh-TW" dirty="0">
                 <a:solidFill>
                   <a:srgbClr val="000000"/>
                 </a:solidFill>
@@ -7379,7 +9953,7 @@
               <a:t>還有一件事要補：</a:t>
             </a:r>
             <a:r>
-              <a:rPr sz="1200" b="1" lang="zh-TW" dirty="0">
+              <a:rPr sz="1000" b="1" lang="zh-TW" dirty="0">
                 <a:solidFill>
                   <a:srgbClr val="000000"/>
                 </a:solidFill>
@@ -7390,7 +9964,7 @@
               <a:t>濕路面的減速度只有一半</a:t>
             </a:r>
             <a:r>
-              <a:rPr sz="1200" lang="zh-TW" dirty="0">
+              <a:rPr sz="1000" lang="zh-TW" dirty="0">
                 <a:solidFill>
                   <a:srgbClr val="000000"/>
                 </a:solidFill>

--- a/第四週(10-01)/第四週_第1節_簡報.pptx
+++ b/第四週(10-01)/第四週_第1節_簡報.pptx
@@ -12627,16 +12627,16 @@
         </p:nvSpPr>
         <p:spPr>
           <a:xfrm>
-            <a:off x="1826657" y="1625284"/>
-            <a:ext cx="990124" cy="562570"/>
+            <a:off x="1513650" y="1378914"/>
+            <a:ext cx="667535" cy="740851"/>
           </a:xfrm>
           <a:prstGeom prst="roundRect">
             <a:avLst>
-              <a:gd name="adj" fmla="val 18065"/>
+              <a:gd name="adj" fmla="val 5285"/>
             </a:avLst>
           </a:prstGeom>
           <a:solidFill>
-            <a:srgbClr val="4FA8FF"/>
+            <a:srgbClr val="9FB6C9"/>
           </a:solidFill>
           <a:ln/>
         </p:spPr>
@@ -12649,16 +12649,16 @@
         </p:nvSpPr>
         <p:spPr>
           <a:xfrm>
-            <a:off x="2051685" y="1512770"/>
-            <a:ext cx="292536" cy="135017"/>
+            <a:off x="1593754" y="1764156"/>
+            <a:ext cx="200261" cy="251889"/>
           </a:xfrm>
           <a:prstGeom prst="roundRect">
             <a:avLst>
-              <a:gd name="adj" fmla="val 161291"/>
+              <a:gd name="adj" fmla="val 13212"/>
             </a:avLst>
           </a:prstGeom>
           <a:solidFill>
-            <a:srgbClr val="4FA8FF"/>
+            <a:srgbClr val="C8D6E2"/>
           </a:solidFill>
           <a:ln/>
         </p:spPr>
@@ -12671,39 +12671,58 @@
         </p:nvSpPr>
         <p:spPr>
           <a:xfrm>
-            <a:off x="2141696" y="1715295"/>
-            <a:ext cx="360045" cy="360045"/>
-          </a:xfrm>
-          <a:prstGeom prst="ellipse">
-            <a:avLst/>
+            <a:off x="1874119" y="1675255"/>
+            <a:ext cx="200261" cy="340791"/>
+          </a:xfrm>
+          <a:prstGeom prst="roundRect">
+            <a:avLst>
+              <a:gd name="adj" fmla="val 13212"/>
+            </a:avLst>
           </a:prstGeom>
           <a:solidFill>
-            <a:srgbClr val="FFFFFF"/>
+            <a:srgbClr val="D8E3EC"/>
           </a:solidFill>
           <a:ln/>
         </p:spPr>
       </p:sp>
       <p:sp>
         <p:nvSpPr>
-          <p:cNvPr id="7" name="Shape 5"/>
-          <p:cNvSpPr/>
-          <p:nvPr/>
-        </p:nvSpPr>
-        <p:spPr>
-          <a:xfrm>
-            <a:off x="2220456" y="1794055"/>
-            <a:ext cx="202526" cy="202526"/>
-          </a:xfrm>
-          <a:prstGeom prst="ellipse">
-            <a:avLst/>
-          </a:prstGeom>
-          <a:solidFill>
-            <a:srgbClr val="4FA8FF">
-              <a:alpha val="70000"/>
-            </a:srgbClr>
-          </a:solidFill>
-          <a:ln/>
-        </p:spPr>
+          <p:cNvPr id="7" name="Text 5"/>
+          <p:cNvSpPr txBox="1"/>
+          <p:nvPr/>
+        </p:nvSpPr>
+        <p:spPr>
+          <a:xfrm>
+            <a:off x="1513650" y="2155044"/>
+            <a:ext cx="667535" cy="246950"/>
+          </a:xfrm>
+          <a:prstGeom prst="rect">
+            <a:avLst/>
+          </a:prstGeom>
+          <a:noFill/>
+          <a:ln/>
+        </p:spPr>
+        <p:txBody>
+          <a:bodyPr wrap="square" lIns="0" tIns="0" rIns="0" bIns="0" rtlCol="0" anchor="ctr"/>
+          <a:lstStyle/>
+          <a:p>
+            <a:pPr algn="ctr" indent="0" marL="0">
+              <a:buNone/>
+            </a:pPr>
+            <a:r>
+              <a:rPr lang="en-US" sz="600" b="1" dirty="0">
+                <a:solidFill>
+                  <a:srgbClr val="4FA8FF"/>
+                </a:solidFill>
+                <a:latin typeface="Arial" pitchFamily="34" charset="0"/>
+                <a:ea typeface="Arial" pitchFamily="34" charset="-122"/>
+                <a:cs typeface="Arial" pitchFamily="34" charset="-120"/>
+              </a:rPr>
+              <a:t>模擬</a:t>
+            </a:r>
+            <a:endParaRPr lang="en-US" sz="600" dirty="0"/>
+          </a:p>
+        </p:txBody>
       </p:sp>
       <p:sp>
         <p:nvSpPr>
@@ -12713,23 +12732,524 @@
         </p:nvSpPr>
         <p:spPr>
           <a:xfrm>
-            <a:off x="2591753" y="1692792"/>
-            <a:ext cx="112514" cy="112514"/>
+            <a:off x="2462253" y="1378914"/>
+            <a:ext cx="667535" cy="740851"/>
+          </a:xfrm>
+          <a:prstGeom prst="roundRect">
+            <a:avLst>
+              <a:gd name="adj" fmla="val 5285"/>
+            </a:avLst>
+          </a:prstGeom>
+          <a:solidFill>
+            <a:srgbClr val="6E7E8C"/>
+          </a:solidFill>
+          <a:ln/>
+        </p:spPr>
+      </p:sp>
+      <p:sp>
+        <p:nvSpPr>
+          <p:cNvPr id="9" name="Shape 7"/>
+          <p:cNvSpPr/>
+          <p:nvPr/>
+        </p:nvSpPr>
+        <p:spPr>
+          <a:xfrm>
+            <a:off x="2542357" y="1764156"/>
+            <a:ext cx="200261" cy="251889"/>
+          </a:xfrm>
+          <a:prstGeom prst="roundRect">
+            <a:avLst>
+              <a:gd name="adj" fmla="val 13212"/>
+            </a:avLst>
+          </a:prstGeom>
+          <a:solidFill>
+            <a:srgbClr val="8A97A2"/>
+          </a:solidFill>
+          <a:ln/>
+        </p:spPr>
+      </p:sp>
+      <p:sp>
+        <p:nvSpPr>
+          <p:cNvPr id="10" name="Shape 8"/>
+          <p:cNvSpPr/>
+          <p:nvPr/>
+        </p:nvSpPr>
+        <p:spPr>
+          <a:xfrm>
+            <a:off x="2822721" y="1675255"/>
+            <a:ext cx="200261" cy="340791"/>
+          </a:xfrm>
+          <a:prstGeom prst="roundRect">
+            <a:avLst>
+              <a:gd name="adj" fmla="val 13212"/>
+            </a:avLst>
+          </a:prstGeom>
+          <a:solidFill>
+            <a:srgbClr val="94A2AE"/>
+          </a:solidFill>
+          <a:ln/>
+        </p:spPr>
+      </p:sp>
+      <p:sp>
+        <p:nvSpPr>
+          <p:cNvPr id="11" name="Shape 9"/>
+          <p:cNvSpPr/>
+          <p:nvPr/>
+        </p:nvSpPr>
+        <p:spPr>
+          <a:xfrm>
+            <a:off x="2501602" y="1438946"/>
+            <a:ext cx="28107" cy="28107"/>
           </a:xfrm>
           <a:prstGeom prst="ellipse">
             <a:avLst/>
           </a:prstGeom>
           <a:solidFill>
-            <a:srgbClr val="FFFFFF">
-              <a:alpha val="60000"/>
-            </a:srgbClr>
+            <a:srgbClr val="E8EEF3"/>
           </a:solidFill>
           <a:ln/>
         </p:spPr>
       </p:sp>
       <p:sp>
         <p:nvSpPr>
-          <p:cNvPr id="9" name="Text 7"/>
+          <p:cNvPr id="12" name="Shape 10"/>
+          <p:cNvSpPr/>
+          <p:nvPr/>
+        </p:nvSpPr>
+        <p:spPr>
+          <a:xfrm>
+            <a:off x="2858429" y="1768213"/>
+            <a:ext cx="28107" cy="28107"/>
+          </a:xfrm>
+          <a:prstGeom prst="ellipse">
+            <a:avLst/>
+          </a:prstGeom>
+          <a:solidFill>
+            <a:srgbClr val="E8EEF3"/>
+          </a:solidFill>
+          <a:ln/>
+        </p:spPr>
+      </p:sp>
+      <p:sp>
+        <p:nvSpPr>
+          <p:cNvPr id="13" name="Shape 11"/>
+          <p:cNvSpPr/>
+          <p:nvPr/>
+        </p:nvSpPr>
+        <p:spPr>
+          <a:xfrm>
+            <a:off x="2654528" y="1504799"/>
+            <a:ext cx="28107" cy="28107"/>
+          </a:xfrm>
+          <a:prstGeom prst="ellipse">
+            <a:avLst/>
+          </a:prstGeom>
+          <a:solidFill>
+            <a:srgbClr val="E8EEF3"/>
+          </a:solidFill>
+          <a:ln/>
+        </p:spPr>
+      </p:sp>
+      <p:sp>
+        <p:nvSpPr>
+          <p:cNvPr id="14" name="Shape 12"/>
+          <p:cNvSpPr/>
+          <p:nvPr/>
+        </p:nvSpPr>
+        <p:spPr>
+          <a:xfrm>
+            <a:off x="3011356" y="1834066"/>
+            <a:ext cx="28107" cy="28107"/>
+          </a:xfrm>
+          <a:prstGeom prst="ellipse">
+            <a:avLst/>
+          </a:prstGeom>
+          <a:solidFill>
+            <a:srgbClr val="E8EEF3"/>
+          </a:solidFill>
+          <a:ln/>
+        </p:spPr>
+      </p:sp>
+      <p:sp>
+        <p:nvSpPr>
+          <p:cNvPr id="15" name="Shape 13"/>
+          <p:cNvSpPr/>
+          <p:nvPr/>
+        </p:nvSpPr>
+        <p:spPr>
+          <a:xfrm>
+            <a:off x="2807455" y="1570653"/>
+            <a:ext cx="28107" cy="28107"/>
+          </a:xfrm>
+          <a:prstGeom prst="ellipse">
+            <a:avLst/>
+          </a:prstGeom>
+          <a:solidFill>
+            <a:srgbClr val="E8EEF3"/>
+          </a:solidFill>
+          <a:ln/>
+        </p:spPr>
+      </p:sp>
+      <p:sp>
+        <p:nvSpPr>
+          <p:cNvPr id="16" name="Shape 14"/>
+          <p:cNvSpPr/>
+          <p:nvPr/>
+        </p:nvSpPr>
+        <p:spPr>
+          <a:xfrm>
+            <a:off x="2603552" y="1899920"/>
+            <a:ext cx="28107" cy="28107"/>
+          </a:xfrm>
+          <a:prstGeom prst="ellipse">
+            <a:avLst/>
+          </a:prstGeom>
+          <a:solidFill>
+            <a:srgbClr val="E8EEF3"/>
+          </a:solidFill>
+          <a:ln/>
+        </p:spPr>
+      </p:sp>
+      <p:sp>
+        <p:nvSpPr>
+          <p:cNvPr id="17" name="Shape 15"/>
+          <p:cNvSpPr/>
+          <p:nvPr/>
+        </p:nvSpPr>
+        <p:spPr>
+          <a:xfrm>
+            <a:off x="2960380" y="1636506"/>
+            <a:ext cx="28107" cy="28107"/>
+          </a:xfrm>
+          <a:prstGeom prst="ellipse">
+            <a:avLst/>
+          </a:prstGeom>
+          <a:solidFill>
+            <a:srgbClr val="E8EEF3"/>
+          </a:solidFill>
+          <a:ln/>
+        </p:spPr>
+      </p:sp>
+      <p:sp>
+        <p:nvSpPr>
+          <p:cNvPr id="18" name="Shape 16"/>
+          <p:cNvSpPr/>
+          <p:nvPr/>
+        </p:nvSpPr>
+        <p:spPr>
+          <a:xfrm>
+            <a:off x="2756479" y="1965773"/>
+            <a:ext cx="28107" cy="28107"/>
+          </a:xfrm>
+          <a:prstGeom prst="ellipse">
+            <a:avLst/>
+          </a:prstGeom>
+          <a:solidFill>
+            <a:srgbClr val="E8EEF3"/>
+          </a:solidFill>
+          <a:ln/>
+        </p:spPr>
+      </p:sp>
+      <p:sp>
+        <p:nvSpPr>
+          <p:cNvPr id="19" name="Shape 17"/>
+          <p:cNvSpPr/>
+          <p:nvPr/>
+        </p:nvSpPr>
+        <p:spPr>
+          <a:xfrm>
+            <a:off x="2552577" y="1702360"/>
+            <a:ext cx="28107" cy="28107"/>
+          </a:xfrm>
+          <a:prstGeom prst="ellipse">
+            <a:avLst/>
+          </a:prstGeom>
+          <a:solidFill>
+            <a:srgbClr val="E8EEF3"/>
+          </a:solidFill>
+          <a:ln/>
+        </p:spPr>
+      </p:sp>
+      <p:sp>
+        <p:nvSpPr>
+          <p:cNvPr id="20" name="Shape 18"/>
+          <p:cNvSpPr/>
+          <p:nvPr/>
+        </p:nvSpPr>
+        <p:spPr>
+          <a:xfrm>
+            <a:off x="2909405" y="1438946"/>
+            <a:ext cx="28107" cy="28107"/>
+          </a:xfrm>
+          <a:prstGeom prst="ellipse">
+            <a:avLst/>
+          </a:prstGeom>
+          <a:solidFill>
+            <a:srgbClr val="E8EEF3"/>
+          </a:solidFill>
+          <a:ln/>
+        </p:spPr>
+      </p:sp>
+      <p:sp>
+        <p:nvSpPr>
+          <p:cNvPr id="21" name="Shape 19"/>
+          <p:cNvSpPr/>
+          <p:nvPr/>
+        </p:nvSpPr>
+        <p:spPr>
+          <a:xfrm>
+            <a:off x="2705504" y="1768213"/>
+            <a:ext cx="28107" cy="28107"/>
+          </a:xfrm>
+          <a:prstGeom prst="ellipse">
+            <a:avLst/>
+          </a:prstGeom>
+          <a:solidFill>
+            <a:srgbClr val="E8EEF3"/>
+          </a:solidFill>
+          <a:ln/>
+        </p:spPr>
+      </p:sp>
+      <p:sp>
+        <p:nvSpPr>
+          <p:cNvPr id="22" name="Shape 20"/>
+          <p:cNvSpPr/>
+          <p:nvPr/>
+        </p:nvSpPr>
+        <p:spPr>
+          <a:xfrm>
+            <a:off x="2501602" y="1504799"/>
+            <a:ext cx="28107" cy="28107"/>
+          </a:xfrm>
+          <a:prstGeom prst="ellipse">
+            <a:avLst/>
+          </a:prstGeom>
+          <a:solidFill>
+            <a:srgbClr val="E8EEF3"/>
+          </a:solidFill>
+          <a:ln/>
+        </p:spPr>
+      </p:sp>
+      <p:sp>
+        <p:nvSpPr>
+          <p:cNvPr id="23" name="Shape 21"/>
+          <p:cNvSpPr/>
+          <p:nvPr/>
+        </p:nvSpPr>
+        <p:spPr>
+          <a:xfrm>
+            <a:off x="2858429" y="1834066"/>
+            <a:ext cx="28107" cy="28107"/>
+          </a:xfrm>
+          <a:prstGeom prst="ellipse">
+            <a:avLst/>
+          </a:prstGeom>
+          <a:solidFill>
+            <a:srgbClr val="E8EEF3"/>
+          </a:solidFill>
+          <a:ln/>
+        </p:spPr>
+      </p:sp>
+      <p:sp>
+        <p:nvSpPr>
+          <p:cNvPr id="24" name="Shape 22"/>
+          <p:cNvSpPr/>
+          <p:nvPr/>
+        </p:nvSpPr>
+        <p:spPr>
+          <a:xfrm>
+            <a:off x="2654528" y="1570653"/>
+            <a:ext cx="28107" cy="28107"/>
+          </a:xfrm>
+          <a:prstGeom prst="ellipse">
+            <a:avLst/>
+          </a:prstGeom>
+          <a:solidFill>
+            <a:srgbClr val="E8EEF3"/>
+          </a:solidFill>
+          <a:ln/>
+        </p:spPr>
+      </p:sp>
+      <p:sp>
+        <p:nvSpPr>
+          <p:cNvPr id="25" name="Shape 23"/>
+          <p:cNvSpPr/>
+          <p:nvPr/>
+        </p:nvSpPr>
+        <p:spPr>
+          <a:xfrm>
+            <a:off x="3011356" y="1899920"/>
+            <a:ext cx="28107" cy="28107"/>
+          </a:xfrm>
+          <a:prstGeom prst="ellipse">
+            <a:avLst/>
+          </a:prstGeom>
+          <a:solidFill>
+            <a:srgbClr val="E8EEF3"/>
+          </a:solidFill>
+          <a:ln/>
+        </p:spPr>
+      </p:sp>
+      <p:sp>
+        <p:nvSpPr>
+          <p:cNvPr id="26" name="Shape 24"/>
+          <p:cNvSpPr/>
+          <p:nvPr/>
+        </p:nvSpPr>
+        <p:spPr>
+          <a:xfrm>
+            <a:off x="2807455" y="1636506"/>
+            <a:ext cx="28107" cy="28107"/>
+          </a:xfrm>
+          <a:prstGeom prst="ellipse">
+            <a:avLst/>
+          </a:prstGeom>
+          <a:solidFill>
+            <a:srgbClr val="E8EEF3"/>
+          </a:solidFill>
+          <a:ln/>
+        </p:spPr>
+      </p:sp>
+      <p:sp>
+        <p:nvSpPr>
+          <p:cNvPr id="27" name="Shape 25"/>
+          <p:cNvSpPr/>
+          <p:nvPr/>
+        </p:nvSpPr>
+        <p:spPr>
+          <a:xfrm>
+            <a:off x="2895097" y="1424433"/>
+            <a:ext cx="175667" cy="175667"/>
+          </a:xfrm>
+          <a:prstGeom prst="ellipse">
+            <a:avLst/>
+          </a:prstGeom>
+          <a:solidFill>
+            <a:srgbClr val="F3E2A8"/>
+          </a:solidFill>
+          <a:ln/>
+        </p:spPr>
+      </p:sp>
+      <p:sp>
+        <p:nvSpPr>
+          <p:cNvPr id="28" name="Text 26"/>
+          <p:cNvSpPr txBox="1"/>
+          <p:nvPr/>
+        </p:nvSpPr>
+        <p:spPr>
+          <a:xfrm>
+            <a:off x="2462253" y="2155044"/>
+            <a:ext cx="667535" cy="246950"/>
+          </a:xfrm>
+          <a:prstGeom prst="rect">
+            <a:avLst/>
+          </a:prstGeom>
+          <a:noFill/>
+          <a:ln/>
+        </p:spPr>
+        <p:txBody>
+          <a:bodyPr wrap="square" lIns="0" tIns="0" rIns="0" bIns="0" rtlCol="0" anchor="ctr"/>
+          <a:lstStyle/>
+          <a:p>
+            <a:pPr algn="ctr" indent="0" marL="0">
+              <a:buNone/>
+            </a:pPr>
+            <a:r>
+              <a:rPr lang="en-US" sz="600" b="1" dirty="0">
+                <a:solidFill>
+                  <a:srgbClr val="4FA8FF"/>
+                </a:solidFill>
+                <a:latin typeface="Arial" pitchFamily="34" charset="0"/>
+                <a:ea typeface="Arial" pitchFamily="34" charset="-122"/>
+                <a:cs typeface="Arial" pitchFamily="34" charset="-120"/>
+              </a:rPr>
+              <a:t>真車</a:t>
+            </a:r>
+            <a:endParaRPr lang="en-US" sz="600" dirty="0"/>
+          </a:p>
+        </p:txBody>
+      </p:sp>
+      <p:sp>
+        <p:nvSpPr>
+          <p:cNvPr id="29" name="Text 27"/>
+          <p:cNvSpPr txBox="1"/>
+          <p:nvPr/>
+        </p:nvSpPr>
+        <p:spPr>
+          <a:xfrm>
+            <a:off x="2181185" y="1601169"/>
+            <a:ext cx="281068" cy="352786"/>
+          </a:xfrm>
+          <a:prstGeom prst="rect">
+            <a:avLst/>
+          </a:prstGeom>
+          <a:noFill/>
+          <a:ln/>
+        </p:spPr>
+        <p:txBody>
+          <a:bodyPr wrap="square" lIns="0" tIns="0" rIns="0" bIns="0" rtlCol="0" anchor="ctr"/>
+          <a:lstStyle/>
+          <a:p>
+            <a:pPr algn="ctr" indent="0" marL="0">
+              <a:buNone/>
+            </a:pPr>
+            <a:r>
+              <a:rPr lang="en-US" sz="1110" b="1" dirty="0">
+                <a:solidFill>
+                  <a:srgbClr val="D9463E"/>
+                </a:solidFill>
+                <a:latin typeface="Arial" pitchFamily="34" charset="0"/>
+                <a:ea typeface="Arial" pitchFamily="34" charset="-122"/>
+                <a:cs typeface="Arial" pitchFamily="34" charset="-120"/>
+              </a:rPr>
+              <a:t>≠</a:t>
+            </a:r>
+            <a:endParaRPr lang="en-US" sz="1110" dirty="0"/>
+          </a:p>
+        </p:txBody>
+      </p:sp>
+      <p:sp>
+        <p:nvSpPr>
+          <p:cNvPr id="30" name="Text 28"/>
+          <p:cNvSpPr txBox="1"/>
+          <p:nvPr/>
+        </p:nvSpPr>
+        <p:spPr>
+          <a:xfrm>
+            <a:off x="1443383" y="2437272"/>
+            <a:ext cx="1756671" cy="246950"/>
+          </a:xfrm>
+          <a:prstGeom prst="rect">
+            <a:avLst/>
+          </a:prstGeom>
+          <a:noFill/>
+          <a:ln/>
+        </p:spPr>
+        <p:txBody>
+          <a:bodyPr wrap="square" lIns="0" tIns="0" rIns="0" bIns="0" rtlCol="0" anchor="ctr"/>
+          <a:lstStyle/>
+          <a:p>
+            <a:pPr algn="ctr" indent="0" marL="0">
+              <a:buNone/>
+            </a:pPr>
+            <a:r>
+              <a:rPr lang="en-US" sz="560" b="1" dirty="0">
+                <a:solidFill>
+                  <a:srgbClr val="4FA8FF"/>
+                </a:solidFill>
+                <a:latin typeface="Arial" pitchFamily="34" charset="0"/>
+                <a:ea typeface="Arial" pitchFamily="34" charset="-122"/>
+                <a:cs typeface="Arial" pitchFamily="34" charset="-120"/>
+              </a:rPr>
+              <a:t>同一個路口，兩種畫面</a:t>
+            </a:r>
+            <a:endParaRPr lang="en-US" sz="560" dirty="0"/>
+          </a:p>
+        </p:txBody>
+      </p:sp>
+      <p:sp>
+        <p:nvSpPr>
+          <p:cNvPr id="31" name="Text 29"/>
           <p:cNvSpPr txBox="1"/>
           <p:nvPr/>
         </p:nvSpPr>
@@ -12791,7 +13311,7 @@
       </p:sp>
       <p:sp>
         <p:nvSpPr>
-          <p:cNvPr id="10" name="Text 8"/>
+          <p:cNvPr id="32" name="Text 30"/>
           <p:cNvSpPr txBox="1"/>
           <p:nvPr/>
         </p:nvSpPr>
@@ -12853,7 +13373,7 @@
       </p:sp>
       <p:sp>
         <p:nvSpPr>
-          <p:cNvPr id="11" name="Shape 9"/>
+          <p:cNvPr id="33" name="Shape 31"/>
           <p:cNvSpPr/>
           <p:nvPr/>
         </p:nvSpPr>
@@ -12880,7 +13400,7 @@
       </p:sp>
       <p:sp>
         <p:nvSpPr>
-          <p:cNvPr id="12" name="Text 10"/>
+          <p:cNvPr id="34" name="Text 32"/>
           <p:cNvSpPr txBox="1"/>
           <p:nvPr/>
         </p:nvSpPr>
@@ -12942,7 +13462,7 @@
       </p:sp>
       <p:pic>
         <p:nvPicPr>
-          <p:cNvPr id="14" name="Image 0" descr="/Users/tsengchenghsun/Class/carClass/Claude outputs/第四週(10-1)/src/logo.png">    </p:cNvPr>
+          <p:cNvPr id="36" name="Image 0" descr="/Users/tsengchenghsun/Class/carClass/Claude outputs/第四週(10-1)/src/logo.png">    </p:cNvPr>
           <p:cNvPicPr>
             <a:picLocks noChangeAspect="1"/>
           </p:cNvPicPr>
@@ -12966,7 +13486,7 @@
       </p:pic>
       <p:sp>
         <p:nvSpPr>
-          <p:cNvPr id="15" name="Text 11"/>
+          <p:cNvPr id="37" name="Text 33"/>
           <p:cNvSpPr txBox="1"/>
           <p:nvPr/>
         </p:nvSpPr>
@@ -13005,7 +13525,7 @@
       </p:sp>
       <p:sp>
         <p:nvSpPr>
-          <p:cNvPr id="16" name="Text 12"/>
+          <p:cNvPr id="38" name="Text 34"/>
           <p:cNvSpPr txBox="1"/>
           <p:nvPr/>
         </p:nvSpPr>
@@ -13756,18 +14276,19 @@
         </p:nvSpPr>
         <p:spPr>
           <a:xfrm>
-            <a:off x="1804154" y="1805306"/>
-            <a:ext cx="1035129" cy="315040"/>
-          </a:xfrm>
-          <a:prstGeom prst="roundRect">
-            <a:avLst>
-              <a:gd name="adj" fmla="val 69124"/>
-            </a:avLst>
-          </a:prstGeom>
-          <a:solidFill>
-            <a:srgbClr val="9FB0BE"/>
-          </a:solidFill>
-          <a:ln/>
+            <a:off x="1724451" y="2260879"/>
+            <a:ext cx="1299937" cy="1"/>
+          </a:xfrm>
+          <a:prstGeom prst="line">
+            <a:avLst/>
+          </a:prstGeom>
+          <a:noFill/>
+          <a:ln w="12700">
+            <a:solidFill>
+              <a:srgbClr val="8FA3B5"/>
+            </a:solidFill>
+            <a:prstDash val="solid"/>
+          </a:ln>
         </p:spPr>
       </p:sp>
       <p:sp>
@@ -13777,60 +14298,99 @@
           <p:nvPr/>
         </p:nvSpPr>
         <p:spPr>
-          <a:xfrm>
-            <a:off x="2029182" y="1580278"/>
-            <a:ext cx="562570" cy="247531"/>
-          </a:xfrm>
-          <a:prstGeom prst="trapezoid">
-            <a:avLst/>
-          </a:prstGeom>
-          <a:solidFill>
-            <a:srgbClr val="9FB0BE">
-              <a:alpha val="70000"/>
-            </a:srgbClr>
-          </a:solidFill>
-          <a:ln/>
-        </p:spPr>
-      </p:sp>
-      <p:sp>
-        <p:nvSpPr>
-          <p:cNvPr id="6" name="Shape 4"/>
-          <p:cNvSpPr/>
-          <p:nvPr/>
-        </p:nvSpPr>
-        <p:spPr>
-          <a:xfrm>
-            <a:off x="1939171" y="2052837"/>
-            <a:ext cx="225028" cy="225028"/>
-          </a:xfrm>
-          <a:prstGeom prst="ellipse">
-            <a:avLst/>
-          </a:prstGeom>
-          <a:solidFill>
-            <a:srgbClr val="9FB0BE"/>
-          </a:solidFill>
-          <a:ln/>
-        </p:spPr>
-      </p:sp>
-      <p:sp>
-        <p:nvSpPr>
-          <p:cNvPr id="7" name="Shape 5"/>
-          <p:cNvSpPr/>
-          <p:nvPr/>
-        </p:nvSpPr>
-        <p:spPr>
-          <a:xfrm>
-            <a:off x="2479239" y="2052837"/>
-            <a:ext cx="225028" cy="225028"/>
-          </a:xfrm>
-          <a:prstGeom prst="ellipse">
-            <a:avLst/>
-          </a:prstGeom>
-          <a:solidFill>
-            <a:srgbClr val="9FB0BE"/>
-          </a:solidFill>
-          <a:ln/>
-        </p:spPr>
+          <a:xfrm flipV="1">
+            <a:off x="1724451" y="1449472"/>
+            <a:ext cx="1" cy="811408"/>
+          </a:xfrm>
+          <a:prstGeom prst="line">
+            <a:avLst/>
+          </a:prstGeom>
+          <a:noFill/>
+          <a:ln w="12700">
+            <a:solidFill>
+              <a:srgbClr val="8FA3B5"/>
+            </a:solidFill>
+            <a:prstDash val="solid"/>
+          </a:ln>
+        </p:spPr>
+      </p:sp>
+      <p:sp>
+        <p:nvSpPr>
+          <p:cNvPr id="6" name="Text 4"/>
+          <p:cNvSpPr txBox="1"/>
+          <p:nvPr/>
+        </p:nvSpPr>
+        <p:spPr>
+          <a:xfrm>
+            <a:off x="1724451" y="2313797"/>
+            <a:ext cx="1299937" cy="211672"/>
+          </a:xfrm>
+          <a:prstGeom prst="rect">
+            <a:avLst/>
+          </a:prstGeom>
+          <a:noFill/>
+          <a:ln/>
+        </p:spPr>
+        <p:txBody>
+          <a:bodyPr wrap="square" lIns="0" tIns="0" rIns="0" bIns="0" rtlCol="0" anchor="ctr"/>
+          <a:lstStyle/>
+          <a:p>
+            <a:pPr algn="ctr" indent="0" marL="0">
+              <a:buNone/>
+            </a:pPr>
+            <a:r>
+              <a:rPr lang="en-US" sz="520" b="1" dirty="0">
+                <a:solidFill>
+                  <a:srgbClr val="8FA3B5"/>
+                </a:solidFill>
+                <a:latin typeface="Arial" pitchFamily="34" charset="0"/>
+                <a:ea typeface="Arial" pitchFamily="34" charset="-122"/>
+                <a:cs typeface="Arial" pitchFamily="34" charset="-120"/>
+              </a:rPr>
+              <a:t>時間</a:t>
+            </a:r>
+            <a:endParaRPr lang="en-US" sz="520" dirty="0"/>
+          </a:p>
+        </p:txBody>
+      </p:sp>
+      <p:sp>
+        <p:nvSpPr>
+          <p:cNvPr id="7" name="Text 5"/>
+          <p:cNvSpPr txBox="1"/>
+          <p:nvPr/>
+        </p:nvSpPr>
+        <p:spPr>
+          <a:xfrm>
+            <a:off x="1443383" y="1220161"/>
+            <a:ext cx="878336" cy="211672"/>
+          </a:xfrm>
+          <a:prstGeom prst="rect">
+            <a:avLst/>
+          </a:prstGeom>
+          <a:noFill/>
+          <a:ln/>
+        </p:spPr>
+        <p:txBody>
+          <a:bodyPr wrap="square" lIns="0" tIns="0" rIns="0" bIns="0" rtlCol="0" anchor="ctr"/>
+          <a:lstStyle/>
+          <a:p>
+            <a:pPr algn="l" indent="0" marL="0">
+              <a:buNone/>
+            </a:pPr>
+            <a:r>
+              <a:rPr lang="en-US" sz="520" b="1" dirty="0">
+                <a:solidFill>
+                  <a:srgbClr val="8FA3B5"/>
+                </a:solidFill>
+                <a:latin typeface="Arial" pitchFamily="34" charset="0"/>
+                <a:ea typeface="Arial" pitchFamily="34" charset="-122"/>
+                <a:cs typeface="Arial" pitchFamily="34" charset="-120"/>
+              </a:rPr>
+              <a:t>減速度</a:t>
+            </a:r>
+            <a:endParaRPr lang="en-US" sz="520" dirty="0"/>
+          </a:p>
+        </p:txBody>
       </p:sp>
       <p:sp>
         <p:nvSpPr>
@@ -13839,17 +14399,20 @@
           <p:nvPr/>
         </p:nvSpPr>
         <p:spPr>
-          <a:xfrm>
-            <a:off x="1995428" y="2109094"/>
-            <a:ext cx="112514" cy="112514"/>
-          </a:xfrm>
-          <a:prstGeom prst="ellipse">
-            <a:avLst/>
-          </a:prstGeom>
-          <a:solidFill>
-            <a:srgbClr val="FFFFFF"/>
-          </a:solidFill>
-          <a:ln/>
+          <a:xfrm flipV="1">
+            <a:off x="1828445" y="1595525"/>
+            <a:ext cx="1" cy="665354"/>
+          </a:xfrm>
+          <a:prstGeom prst="line">
+            <a:avLst/>
+          </a:prstGeom>
+          <a:noFill/>
+          <a:ln w="20320">
+            <a:solidFill>
+              <a:srgbClr val="9FB0BE"/>
+            </a:solidFill>
+            <a:prstDash val="solid"/>
+          </a:ln>
         </p:spPr>
       </p:sp>
       <p:sp>
@@ -13860,21 +14423,171 @@
         </p:nvSpPr>
         <p:spPr>
           <a:xfrm>
-            <a:off x="2535496" y="2109094"/>
-            <a:ext cx="112514" cy="112514"/>
-          </a:xfrm>
-          <a:prstGeom prst="ellipse">
-            <a:avLst/>
-          </a:prstGeom>
-          <a:solidFill>
-            <a:srgbClr val="FFFFFF"/>
-          </a:solidFill>
-          <a:ln/>
+            <a:off x="1828445" y="1595525"/>
+            <a:ext cx="1091947" cy="1"/>
+          </a:xfrm>
+          <a:prstGeom prst="line">
+            <a:avLst/>
+          </a:prstGeom>
+          <a:noFill/>
+          <a:ln w="20320">
+            <a:solidFill>
+              <a:srgbClr val="9FB0BE"/>
+            </a:solidFill>
+            <a:prstDash val="solid"/>
+          </a:ln>
         </p:spPr>
       </p:sp>
       <p:sp>
         <p:nvSpPr>
           <p:cNvPr id="10" name="Text 8"/>
+          <p:cNvSpPr txBox="1"/>
+          <p:nvPr/>
+        </p:nvSpPr>
+        <p:spPr>
+          <a:xfrm>
+            <a:off x="1984438" y="1465699"/>
+            <a:ext cx="1039949" cy="211672"/>
+          </a:xfrm>
+          <a:prstGeom prst="rect">
+            <a:avLst/>
+          </a:prstGeom>
+          <a:noFill/>
+          <a:ln/>
+        </p:spPr>
+        <p:txBody>
+          <a:bodyPr wrap="square" lIns="0" tIns="0" rIns="0" bIns="0" rtlCol="0" anchor="ctr"/>
+          <a:lstStyle/>
+          <a:p>
+            <a:pPr algn="l" indent="0" marL="0">
+              <a:buNone/>
+            </a:pPr>
+            <a:r>
+              <a:rPr lang="en-US" sz="520" b="1" dirty="0">
+                <a:solidFill>
+                  <a:srgbClr val="9FB0BE"/>
+                </a:solidFill>
+                <a:latin typeface="Arial" pitchFamily="34" charset="0"/>
+                <a:ea typeface="Arial" pitchFamily="34" charset="-122"/>
+                <a:cs typeface="Arial" pitchFamily="34" charset="-120"/>
+              </a:rPr>
+              <a:t>模擬 6 m/s²</a:t>
+            </a:r>
+            <a:endParaRPr lang="en-US" sz="520" dirty="0"/>
+          </a:p>
+        </p:txBody>
+      </p:sp>
+      <p:sp>
+        <p:nvSpPr>
+          <p:cNvPr id="11" name="Shape 9"/>
+          <p:cNvSpPr/>
+          <p:nvPr/>
+        </p:nvSpPr>
+        <p:spPr>
+          <a:xfrm>
+            <a:off x="1828445" y="2260879"/>
+            <a:ext cx="259988" cy="1"/>
+          </a:xfrm>
+          <a:prstGeom prst="line">
+            <a:avLst/>
+          </a:prstGeom>
+          <a:noFill/>
+          <a:ln w="20320">
+            <a:solidFill>
+              <a:srgbClr val="D9463E"/>
+            </a:solidFill>
+            <a:prstDash val="solid"/>
+          </a:ln>
+        </p:spPr>
+      </p:sp>
+      <p:sp>
+        <p:nvSpPr>
+          <p:cNvPr id="12" name="Shape 10"/>
+          <p:cNvSpPr/>
+          <p:nvPr/>
+        </p:nvSpPr>
+        <p:spPr>
+          <a:xfrm flipV="1">
+            <a:off x="2088433" y="1790263"/>
+            <a:ext cx="337984" cy="470616"/>
+          </a:xfrm>
+          <a:prstGeom prst="line">
+            <a:avLst/>
+          </a:prstGeom>
+          <a:noFill/>
+          <a:ln w="20320">
+            <a:solidFill>
+              <a:srgbClr val="D9463E"/>
+            </a:solidFill>
+            <a:prstDash val="solid"/>
+          </a:ln>
+        </p:spPr>
+      </p:sp>
+      <p:sp>
+        <p:nvSpPr>
+          <p:cNvPr id="13" name="Shape 11"/>
+          <p:cNvSpPr/>
+          <p:nvPr/>
+        </p:nvSpPr>
+        <p:spPr>
+          <a:xfrm>
+            <a:off x="2426417" y="1790263"/>
+            <a:ext cx="493976" cy="1"/>
+          </a:xfrm>
+          <a:prstGeom prst="line">
+            <a:avLst/>
+          </a:prstGeom>
+          <a:noFill/>
+          <a:ln w="20320">
+            <a:solidFill>
+              <a:srgbClr val="D9463E"/>
+            </a:solidFill>
+            <a:prstDash val="solid"/>
+          </a:ln>
+        </p:spPr>
+      </p:sp>
+      <p:sp>
+        <p:nvSpPr>
+          <p:cNvPr id="14" name="Text 12"/>
+          <p:cNvSpPr txBox="1"/>
+          <p:nvPr/>
+        </p:nvSpPr>
+        <p:spPr>
+          <a:xfrm>
+            <a:off x="1724451" y="1903860"/>
+            <a:ext cx="1299937" cy="211672"/>
+          </a:xfrm>
+          <a:prstGeom prst="rect">
+            <a:avLst/>
+          </a:prstGeom>
+          <a:noFill/>
+          <a:ln/>
+        </p:spPr>
+        <p:txBody>
+          <a:bodyPr wrap="square" lIns="0" tIns="0" rIns="0" bIns="0" rtlCol="0" anchor="ctr"/>
+          <a:lstStyle/>
+          <a:p>
+            <a:pPr algn="l" indent="0" marL="0">
+              <a:buNone/>
+            </a:pPr>
+            <a:r>
+              <a:rPr lang="en-US" sz="520" b="1" dirty="0">
+                <a:solidFill>
+                  <a:srgbClr val="D9463E"/>
+                </a:solidFill>
+                <a:latin typeface="Arial" pitchFamily="34" charset="0"/>
+                <a:ea typeface="Arial" pitchFamily="34" charset="-122"/>
+                <a:cs typeface="Arial" pitchFamily="34" charset="-120"/>
+              </a:rPr>
+              <a:t>真車：有延遲，而且到不了</a:t>
+            </a:r>
+            <a:endParaRPr lang="en-US" sz="520" dirty="0"/>
+          </a:p>
+        </p:txBody>
+      </p:sp>
+      <p:sp>
+        <p:nvSpPr>
+          <p:cNvPr id="15" name="Text 13"/>
           <p:cNvSpPr txBox="1"/>
           <p:nvPr/>
         </p:nvSpPr>
@@ -13936,7 +14649,7 @@
       </p:sp>
       <p:sp>
         <p:nvSpPr>
-          <p:cNvPr id="11" name="Text 9"/>
+          <p:cNvPr id="16" name="Text 14"/>
           <p:cNvSpPr txBox="1"/>
           <p:nvPr/>
         </p:nvSpPr>
@@ -13998,7 +14711,7 @@
       </p:sp>
       <p:sp>
         <p:nvSpPr>
-          <p:cNvPr id="12" name="Shape 10"/>
+          <p:cNvPr id="17" name="Shape 15"/>
           <p:cNvSpPr/>
           <p:nvPr/>
         </p:nvSpPr>
@@ -14025,7 +14738,7 @@
       </p:sp>
       <p:sp>
         <p:nvSpPr>
-          <p:cNvPr id="13" name="Text 11"/>
+          <p:cNvPr id="18" name="Text 16"/>
           <p:cNvSpPr txBox="1"/>
           <p:nvPr/>
         </p:nvSpPr>
@@ -14087,7 +14800,7 @@
       </p:sp>
       <p:pic>
         <p:nvPicPr>
-          <p:cNvPr id="15" name="Image 0" descr="/Users/tsengchenghsun/Class/carClass/Claude outputs/第四週(10-1)/src/logo.png">    </p:cNvPr>
+          <p:cNvPr id="20" name="Image 0" descr="/Users/tsengchenghsun/Class/carClass/Claude outputs/第四週(10-1)/src/logo.png">    </p:cNvPr>
           <p:cNvPicPr>
             <a:picLocks noChangeAspect="1"/>
           </p:cNvPicPr>
@@ -14111,7 +14824,7 @@
       </p:pic>
       <p:sp>
         <p:nvSpPr>
-          <p:cNvPr id="16" name="Text 12"/>
+          <p:cNvPr id="21" name="Text 17"/>
           <p:cNvSpPr txBox="1"/>
           <p:nvPr/>
         </p:nvSpPr>
@@ -14150,7 +14863,7 @@
       </p:sp>
       <p:sp>
         <p:nvSpPr>
-          <p:cNvPr id="17" name="Text 13"/>
+          <p:cNvPr id="22" name="Text 18"/>
           <p:cNvSpPr txBox="1"/>
           <p:nvPr/>
         </p:nvSpPr>
@@ -14759,7 +15472,7 @@
       </p:nvGrpSpPr>
       <p:grpSpPr>
         <a:xfrm>
-          <a:off x="951450" y="0"/>
+          <a:off x="982752" y="0"/>
           <a:ext cx="1" cy="1"/>
           <a:chOff x="0" y="0"/>
           <a:chExt cx="0" cy="0"/>
@@ -14773,8 +15486,8 @@
         </p:nvSpPr>
         <p:spPr>
           <a:xfrm>
-            <a:off x="1349711" y="231715"/>
-            <a:ext cx="6444579" cy="666181"/>
+            <a:off x="1377569" y="229712"/>
+            <a:ext cx="6388862" cy="660422"/>
           </a:xfrm>
           <a:prstGeom prst="rect">
             <a:avLst/>
@@ -14793,7 +15506,7 @@
               <a:buNone/>
             </a:pPr>
             <a:r>
-              <a:rPr lang="en-US" sz="1740" b="1" dirty="0">
+              <a:rPr lang="en-US" sz="1730" b="1" dirty="0">
                 <a:solidFill>
                   <a:srgbClr val="0B1F3A"/>
                 </a:solidFill>
@@ -14803,7 +15516,7 @@
               </a:rPr>
               <a:t>Ở Đài Loan và Việt Nam, cả ba khoảng cách đều lớn hơn</a:t>
             </a:r>
-            <a:endParaRPr lang="en-US" sz="1740" dirty="0"/>
+            <a:endParaRPr lang="en-US" sz="1730" dirty="0"/>
           </a:p>
           <a:p>
             <a:pPr indent="0" marL="0">
@@ -14813,7 +15526,7 @@
               <a:buNone/>
             </a:pPr>
             <a:r>
-              <a:rPr lang="en-US" sz="1070" dirty="0">
+              <a:rPr lang="en-US" sz="1060" dirty="0">
                 <a:solidFill>
                   <a:srgbClr val="5F7183"/>
                 </a:solidFill>
@@ -14823,7 +15536,7 @@
               </a:rPr>
               <a:t>在台灣和越南，這三種落差都更大</a:t>
             </a:r>
-            <a:endParaRPr lang="en-US" sz="1740" dirty="0"/>
+            <a:endParaRPr lang="en-US" sz="1730" dirty="0"/>
           </a:p>
         </p:txBody>
       </p:sp>
@@ -14835,8 +15548,8 @@
         </p:nvSpPr>
         <p:spPr>
           <a:xfrm>
-            <a:off x="1349711" y="897896"/>
-            <a:ext cx="6444579" cy="564806"/>
+            <a:off x="1377569" y="890134"/>
+            <a:ext cx="6388862" cy="559923"/>
           </a:xfrm>
           <a:prstGeom prst="roundRect">
             <a:avLst>
@@ -14857,8 +15570,8 @@
         </p:nvSpPr>
         <p:spPr>
           <a:xfrm>
-            <a:off x="1465568" y="955825"/>
-            <a:ext cx="6212864" cy="448948"/>
+            <a:off x="1492425" y="947562"/>
+            <a:ext cx="6159150" cy="445067"/>
           </a:xfrm>
           <a:prstGeom prst="rect">
             <a:avLst/>
@@ -14877,7 +15590,7 @@
               <a:buNone/>
             </a:pPr>
             <a:r>
-              <a:rPr lang="en-US" sz="910" b="1" dirty="0">
+              <a:rPr lang="en-US" sz="900" b="1" dirty="0">
                 <a:solidFill>
                   <a:srgbClr val="007F72"/>
                 </a:solidFill>
@@ -14887,7 +15600,7 @@
               </a:rPr>
               <a:t>Vì thế giới, xe cộ và hành vi trong các mô phỏng có sẵn đều được làm theo Âu Mỹ.</a:t>
             </a:r>
-            <a:endParaRPr lang="en-US" sz="910" dirty="0"/>
+            <a:endParaRPr lang="en-US" sz="900" dirty="0"/>
           </a:p>
           <a:p>
             <a:pPr indent="0" marL="0">
@@ -14907,7 +15620,7 @@
               </a:rPr>
               <a:t>因為現成模擬器裡的世界、車輛、行為，都是照歐美做的。</a:t>
             </a:r>
-            <a:endParaRPr lang="en-US" sz="910" dirty="0"/>
+            <a:endParaRPr lang="en-US" sz="900" dirty="0"/>
           </a:p>
         </p:txBody>
       </p:sp>
@@ -14926,19 +15639,19 @@
           </p:nvPr>
         </p:nvGraphicFramePr>
         <p:xfrm>
-          <a:off x="1349711" y="1549595"/>
-          <a:ext cx="6444579" cy="724110"/>
+          <a:off x="1377569" y="1536198"/>
+          <a:ext cx="6388862" cy="717850"/>
         </p:xfrm>
         <a:graphic>
           <a:graphicData uri="http://schemas.openxmlformats.org/drawingml/2006/table">
             <a:tbl>
               <a:tblPr/>
               <a:tblGrid>
-                <a:gridCol w="1371600"/>
-                <a:gridCol w="3383280"/>
-                <a:gridCol w="3383280"/>
+                <a:gridCol w="1076774"/>
+                <a:gridCol w="2656044"/>
+                <a:gridCol w="2656044"/>
               </a:tblGrid>
-              <a:tr h="457200">
+              <a:tr h="315854">
                 <a:tc>
                   <a:txBody>
                     <a:bodyPr/>
@@ -14948,7 +15661,7 @@
                         <a:buNone/>
                       </a:pPr>
                       <a:r>
-                        <a:rPr lang="en-US" sz="870" b="1" dirty="0">
+                        <a:rPr lang="en-US" sz="790" b="1" dirty="0">
                           <a:solidFill>
                             <a:srgbClr val="FFFFFF"/>
                           </a:solidFill>
@@ -14958,14 +15671,14 @@
                         </a:rPr>
                         <a:t>Loại</a:t>
                       </a:r>
-                      <a:endParaRPr lang="en-US" sz="950" dirty="0"/>
+                      <a:endParaRPr lang="en-US" sz="940" dirty="0"/>
                     </a:p>
                     <a:p>
                       <a:pPr algn="l" indent="0" marL="0">
                         <a:buNone/>
                       </a:pPr>
                       <a:r>
-                        <a:rPr lang="en-US" sz="750" dirty="0">
+                        <a:rPr lang="en-US" sz="670" dirty="0">
                           <a:solidFill>
                             <a:srgbClr val="CFE0EC"/>
                           </a:solidFill>
@@ -14975,7 +15688,7 @@
                         </a:rPr>
                         <a:t>哪一種</a:t>
                       </a:r>
-                      <a:endParaRPr lang="en-US" sz="950" dirty="0"/>
+                      <a:endParaRPr lang="en-US" sz="940" dirty="0"/>
                     </a:p>
                   </a:txBody>
                   <a:tcPr marL="63500" marR="63500" marT="38100" marB="38100" anchor="ctr">
@@ -15029,7 +15742,7 @@
                         <a:buNone/>
                       </a:pPr>
                       <a:r>
-                        <a:rPr lang="en-US" sz="870" b="1" dirty="0">
+                        <a:rPr lang="en-US" sz="790" b="1" dirty="0">
                           <a:solidFill>
                             <a:srgbClr val="FFFFFF"/>
                           </a:solidFill>
@@ -15039,14 +15752,14 @@
                         </a:rPr>
                         <a:t>Ở Đài Loan</a:t>
                       </a:r>
-                      <a:endParaRPr lang="en-US" sz="950" dirty="0"/>
+                      <a:endParaRPr lang="en-US" sz="940" dirty="0"/>
                     </a:p>
                     <a:p>
                       <a:pPr algn="l" indent="0" marL="0">
                         <a:buNone/>
                       </a:pPr>
                       <a:r>
-                        <a:rPr lang="en-US" sz="750" dirty="0">
+                        <a:rPr lang="en-US" sz="670" dirty="0">
                           <a:solidFill>
                             <a:srgbClr val="CFE0EC"/>
                           </a:solidFill>
@@ -15056,7 +15769,7 @@
                         </a:rPr>
                         <a:t>台灣</a:t>
                       </a:r>
-                      <a:endParaRPr lang="en-US" sz="950" dirty="0"/>
+                      <a:endParaRPr lang="en-US" sz="940" dirty="0"/>
                     </a:p>
                   </a:txBody>
                   <a:tcPr marL="63500" marR="63500" marT="38100" marB="38100" anchor="ctr">
@@ -15110,7 +15823,7 @@
                         <a:buNone/>
                       </a:pPr>
                       <a:r>
-                        <a:rPr lang="en-US" sz="870" b="1" dirty="0">
+                        <a:rPr lang="en-US" sz="790" b="1" dirty="0">
                           <a:solidFill>
                             <a:srgbClr val="FFFFFF"/>
                           </a:solidFill>
@@ -15120,14 +15833,14 @@
                         </a:rPr>
                         <a:t>Ở Việt Nam</a:t>
                       </a:r>
-                      <a:endParaRPr lang="en-US" sz="950" dirty="0"/>
+                      <a:endParaRPr lang="en-US" sz="940" dirty="0"/>
                     </a:p>
                     <a:p>
                       <a:pPr algn="l" indent="0" marL="0">
                         <a:buNone/>
                       </a:pPr>
                       <a:r>
-                        <a:rPr lang="en-US" sz="750" dirty="0">
+                        <a:rPr lang="en-US" sz="670" dirty="0">
                           <a:solidFill>
                             <a:srgbClr val="CFE0EC"/>
                           </a:solidFill>
@@ -15137,7 +15850,7 @@
                         </a:rPr>
                         <a:t>越南</a:t>
                       </a:r>
-                      <a:endParaRPr lang="en-US" sz="950" dirty="0"/>
+                      <a:endParaRPr lang="en-US" sz="940" dirty="0"/>
                     </a:p>
                   </a:txBody>
                   <a:tcPr marL="63500" marR="63500" marT="38100" marB="38100" anchor="ctr">
@@ -15183,7 +15896,7 @@
                   </a:tcPr>
                 </a:tc>
               </a:tr>
-              <a:tr h="457200">
+              <a:tr h="315854">
                 <a:tc>
                   <a:txBody>
                     <a:bodyPr/>
@@ -15193,7 +15906,7 @@
                         <a:buNone/>
                       </a:pPr>
                       <a:r>
-                        <a:rPr lang="en-US" sz="870" b="1" dirty="0">
+                        <a:rPr lang="en-US" sz="790" b="1" dirty="0">
                           <a:solidFill>
                             <a:srgbClr val="0B1F3A"/>
                           </a:solidFill>
@@ -15203,14 +15916,14 @@
                         </a:rPr>
                         <a:t>Hình ảnh</a:t>
                       </a:r>
-                      <a:endParaRPr lang="en-US" sz="950" dirty="0"/>
+                      <a:endParaRPr lang="en-US" sz="940" dirty="0"/>
                     </a:p>
                     <a:p>
                       <a:pPr algn="l" indent="0" marL="0">
                         <a:buNone/>
                       </a:pPr>
                       <a:r>
-                        <a:rPr lang="en-US" sz="750" dirty="0">
+                        <a:rPr lang="en-US" sz="670" dirty="0">
                           <a:solidFill>
                             <a:srgbClr val="5F7183"/>
                           </a:solidFill>
@@ -15220,7 +15933,7 @@
                         </a:rPr>
                         <a:t>外觀</a:t>
                       </a:r>
-                      <a:endParaRPr lang="en-US" sz="950" dirty="0"/>
+                      <a:endParaRPr lang="en-US" sz="940" dirty="0"/>
                     </a:p>
                   </a:txBody>
                   <a:tcPr marL="63500" marR="63500" marT="38100" marB="38100" anchor="ctr">
@@ -15271,7 +15984,7 @@
                         <a:buNone/>
                       </a:pPr>
                       <a:r>
-                        <a:rPr lang="en-US" sz="870" dirty="0">
+                        <a:rPr lang="en-US" sz="790" dirty="0">
                           <a:solidFill>
                             <a:srgbClr val="1A2733"/>
                           </a:solidFill>
@@ -15281,14 +15994,14 @@
                         </a:rPr>
                         <a:t>Mái hiên, biển hiệu chi chít, ô chờ rẽ trái của xe máy</a:t>
                       </a:r>
-                      <a:endParaRPr lang="en-US" sz="950" dirty="0"/>
+                      <a:endParaRPr lang="en-US" sz="940" dirty="0"/>
                     </a:p>
                     <a:p>
                       <a:pPr algn="l" indent="0" marL="0">
                         <a:buNone/>
                       </a:pPr>
                       <a:r>
-                        <a:rPr lang="en-US" sz="750" dirty="0">
+                        <a:rPr lang="en-US" sz="670" dirty="0">
                           <a:solidFill>
                             <a:srgbClr val="5F7183"/>
                           </a:solidFill>
@@ -15298,7 +16011,7 @@
                         </a:rPr>
                         <a:t>騎樓、滿街招牌、機車待轉區</a:t>
                       </a:r>
-                      <a:endParaRPr lang="en-US" sz="950" dirty="0"/>
+                      <a:endParaRPr lang="en-US" sz="940" dirty="0"/>
                     </a:p>
                   </a:txBody>
                   <a:tcPr marL="63500" marR="63500" marT="38100" marB="38100" anchor="ctr">
@@ -15349,7 +16062,7 @@
                         <a:buNone/>
                       </a:pPr>
                       <a:r>
-                        <a:rPr lang="en-US" sz="870" dirty="0">
+                        <a:rPr lang="en-US" sz="790" dirty="0">
                           <a:solidFill>
                             <a:srgbClr val="1A2733"/>
                           </a:solidFill>
@@ -15359,14 +16072,14 @@
                         </a:rPr>
                         <a:t>Hàng quán vỉa hè, ngã tư không có vạch kẻ</a:t>
                       </a:r>
-                      <a:endParaRPr lang="en-US" sz="950" dirty="0"/>
+                      <a:endParaRPr lang="en-US" sz="940" dirty="0"/>
                     </a:p>
                     <a:p>
                       <a:pPr algn="l" indent="0" marL="0">
                         <a:buNone/>
                       </a:pPr>
                       <a:r>
-                        <a:rPr lang="en-US" sz="750" dirty="0">
+                        <a:rPr lang="en-US" sz="670" dirty="0">
                           <a:solidFill>
                             <a:srgbClr val="5F7183"/>
                           </a:solidFill>
@@ -15376,7 +16089,7 @@
                         </a:rPr>
                         <a:t>路邊攤、沒有標線的路口</a:t>
                       </a:r>
-                      <a:endParaRPr lang="en-US" sz="950" dirty="0"/>
+                      <a:endParaRPr lang="en-US" sz="940" dirty="0"/>
                     </a:p>
                   </a:txBody>
                   <a:tcPr marL="63500" marR="63500" marT="38100" marB="38100" anchor="ctr">
@@ -15419,7 +16132,7 @@
                   </a:tcPr>
                 </a:tc>
               </a:tr>
-              <a:tr h="457200">
+              <a:tr h="315854">
                 <a:tc>
                   <a:txBody>
                     <a:bodyPr/>
@@ -15429,7 +16142,7 @@
                         <a:buNone/>
                       </a:pPr>
                       <a:r>
-                        <a:rPr lang="en-US" sz="870" b="1" dirty="0">
+                        <a:rPr lang="en-US" sz="790" b="1" dirty="0">
                           <a:solidFill>
                             <a:srgbClr val="0B1F3A"/>
                           </a:solidFill>
@@ -15439,14 +16152,14 @@
                         </a:rPr>
                         <a:t>Hành vi</a:t>
                       </a:r>
-                      <a:endParaRPr lang="en-US" sz="950" dirty="0"/>
+                      <a:endParaRPr lang="en-US" sz="940" dirty="0"/>
                     </a:p>
                     <a:p>
                       <a:pPr algn="l" indent="0" marL="0">
                         <a:buNone/>
                       </a:pPr>
                       <a:r>
-                        <a:rPr lang="en-US" sz="750" dirty="0">
+                        <a:rPr lang="en-US" sz="670" dirty="0">
                           <a:solidFill>
                             <a:srgbClr val="5F7183"/>
                           </a:solidFill>
@@ -15456,7 +16169,7 @@
                         </a:rPr>
                         <a:t>行為</a:t>
                       </a:r>
-                      <a:endParaRPr lang="en-US" sz="950" dirty="0"/>
+                      <a:endParaRPr lang="en-US" sz="940" dirty="0"/>
                     </a:p>
                   </a:txBody>
                   <a:tcPr marL="63500" marR="63500" marT="38100" marB="38100" anchor="ctr">
@@ -15507,7 +16220,7 @@
                         <a:buNone/>
                       </a:pPr>
                       <a:r>
-                        <a:rPr lang="en-US" sz="870" dirty="0">
+                        <a:rPr lang="en-US" sz="790" dirty="0">
                           <a:solidFill>
                             <a:srgbClr val="1A2733"/>
                           </a:solidFill>
@@ -15517,14 +16230,14 @@
                         </a:rPr>
                         <a:t>Đèn xanh, hai mươi xe máy toả ra hình quạt</a:t>
                       </a:r>
-                      <a:endParaRPr lang="en-US" sz="950" dirty="0"/>
+                      <a:endParaRPr lang="en-US" sz="940" dirty="0"/>
                     </a:p>
                     <a:p>
                       <a:pPr algn="l" indent="0" marL="0">
                         <a:buNone/>
                       </a:pPr>
                       <a:r>
-                        <a:rPr lang="en-US" sz="750" dirty="0">
+                        <a:rPr lang="en-US" sz="670" dirty="0">
                           <a:solidFill>
                             <a:srgbClr val="5F7183"/>
                           </a:solidFill>
@@ -15534,7 +16247,7 @@
                         </a:rPr>
                         <a:t>綠燈起步，二十台機車扇形散開</a:t>
                       </a:r>
-                      <a:endParaRPr lang="en-US" sz="950" dirty="0"/>
+                      <a:endParaRPr lang="en-US" sz="940" dirty="0"/>
                     </a:p>
                   </a:txBody>
                   <a:tcPr marL="63500" marR="63500" marT="38100" marB="38100" anchor="ctr">
@@ -15585,7 +16298,7 @@
                         <a:buNone/>
                       </a:pPr>
                       <a:r>
-                        <a:rPr lang="en-US" sz="870" dirty="0">
+                        <a:rPr lang="en-US" sz="790" dirty="0">
                           <a:solidFill>
                             <a:srgbClr val="1A2733"/>
                           </a:solidFill>
@@ -15595,14 +16308,14 @@
                         </a:rPr>
                         <a:t>Trong 5 m có 12 xe máy lách nhau; vòng xuyến đi bằng ánh mắt</a:t>
                       </a:r>
-                      <a:endParaRPr lang="en-US" sz="950" dirty="0"/>
+                      <a:endParaRPr lang="en-US" sz="940" dirty="0"/>
                     </a:p>
                     <a:p>
                       <a:pPr algn="l" indent="0" marL="0">
                         <a:buNone/>
                       </a:pPr>
                       <a:r>
-                        <a:rPr lang="en-US" sz="750" dirty="0">
+                        <a:rPr lang="en-US" sz="670" dirty="0">
                           <a:solidFill>
                             <a:srgbClr val="5F7183"/>
                           </a:solidFill>
@@ -15612,7 +16325,7 @@
                         </a:rPr>
                         <a:t>五公尺內十二台機車互鑽；圓環靠眼神</a:t>
                       </a:r>
-                      <a:endParaRPr lang="en-US" sz="950" dirty="0"/>
+                      <a:endParaRPr lang="en-US" sz="940" dirty="0"/>
                     </a:p>
                   </a:txBody>
                   <a:tcPr marL="63500" marR="63500" marT="38100" marB="38100" anchor="ctr">
@@ -15655,7 +16368,7 @@
                   </a:tcPr>
                 </a:tc>
               </a:tr>
-              <a:tr h="457200">
+              <a:tr h="315854">
                 <a:tc>
                   <a:txBody>
                     <a:bodyPr/>
@@ -15665,7 +16378,7 @@
                         <a:buNone/>
                       </a:pPr>
                       <a:r>
-                        <a:rPr lang="en-US" sz="870" b="1" dirty="0">
+                        <a:rPr lang="en-US" sz="790" b="1" dirty="0">
                           <a:solidFill>
                             <a:srgbClr val="0B1F3A"/>
                           </a:solidFill>
@@ -15675,14 +16388,14 @@
                         </a:rPr>
                         <a:t>Vật lý</a:t>
                       </a:r>
-                      <a:endParaRPr lang="en-US" sz="950" dirty="0"/>
+                      <a:endParaRPr lang="en-US" sz="940" dirty="0"/>
                     </a:p>
                     <a:p>
                       <a:pPr algn="l" indent="0" marL="0">
                         <a:buNone/>
                       </a:pPr>
                       <a:r>
-                        <a:rPr lang="en-US" sz="750" dirty="0">
+                        <a:rPr lang="en-US" sz="670" dirty="0">
                           <a:solidFill>
                             <a:srgbClr val="5F7183"/>
                           </a:solidFill>
@@ -15692,7 +16405,7 @@
                         </a:rPr>
                         <a:t>物理</a:t>
                       </a:r>
-                      <a:endParaRPr lang="en-US" sz="950" dirty="0"/>
+                      <a:endParaRPr lang="en-US" sz="940" dirty="0"/>
                     </a:p>
                   </a:txBody>
                   <a:tcPr marL="63500" marR="63500" marT="38100" marB="38100" anchor="ctr">
@@ -15743,7 +16456,7 @@
                         <a:buNone/>
                       </a:pPr>
                       <a:r>
-                        <a:rPr lang="en-US" sz="870" dirty="0">
+                        <a:rPr lang="en-US" sz="790" dirty="0">
                           <a:solidFill>
                             <a:srgbClr val="1A2733"/>
                           </a:solidFill>
@@ -15753,14 +16466,14 @@
                         </a:rPr>
                         <a:t>Mặt đường vá chằng chịt, nắp cống</a:t>
                       </a:r>
-                      <a:endParaRPr lang="en-US" sz="950" dirty="0"/>
+                      <a:endParaRPr lang="en-US" sz="940" dirty="0"/>
                     </a:p>
                     <a:p>
                       <a:pPr algn="l" indent="0" marL="0">
                         <a:buNone/>
                       </a:pPr>
                       <a:r>
-                        <a:rPr lang="en-US" sz="750" dirty="0">
+                        <a:rPr lang="en-US" sz="670" dirty="0">
                           <a:solidFill>
                             <a:srgbClr val="5F7183"/>
                           </a:solidFill>
@@ -15770,7 +16483,7 @@
                         </a:rPr>
                         <a:t>補丁路面、人孔蓋</a:t>
                       </a:r>
-                      <a:endParaRPr lang="en-US" sz="950" dirty="0"/>
+                      <a:endParaRPr lang="en-US" sz="940" dirty="0"/>
                     </a:p>
                   </a:txBody>
                   <a:tcPr marL="63500" marR="63500" marT="38100" marB="38100" anchor="ctr">
@@ -15821,7 +16534,7 @@
                         <a:buNone/>
                       </a:pPr>
                       <a:r>
-                        <a:rPr lang="en-US" sz="870" dirty="0">
+                        <a:rPr lang="en-US" sz="790" dirty="0">
                           <a:solidFill>
                             <a:srgbClr val="1A2733"/>
                           </a:solidFill>
@@ -15831,14 +16544,14 @@
                         </a:rPr>
                         <a:t>Đường hỏng, ngập nước sâu nông khác nhau</a:t>
                       </a:r>
-                      <a:endParaRPr lang="en-US" sz="950" dirty="0"/>
+                      <a:endParaRPr lang="en-US" sz="940" dirty="0"/>
                     </a:p>
                     <a:p>
                       <a:pPr algn="l" indent="0" marL="0">
                         <a:buNone/>
                       </a:pPr>
                       <a:r>
-                        <a:rPr lang="en-US" sz="750" dirty="0">
+                        <a:rPr lang="en-US" sz="670" dirty="0">
                           <a:solidFill>
                             <a:srgbClr val="5F7183"/>
                           </a:solidFill>
@@ -15848,7 +16561,7 @@
                         </a:rPr>
                         <a:t>破損路面、深淺不一的積水</a:t>
                       </a:r>
-                      <a:endParaRPr lang="en-US" sz="950" dirty="0"/>
+                      <a:endParaRPr lang="en-US" sz="940" dirty="0"/>
                     </a:p>
                   </a:txBody>
                   <a:tcPr marL="63500" marR="63500" marT="38100" marB="38100" anchor="ctr">
@@ -15903,8 +16616,8 @@
         </p:nvSpPr>
         <p:spPr>
           <a:xfrm>
-            <a:off x="1349711" y="3238395"/>
-            <a:ext cx="6444579" cy="362055"/>
+            <a:off x="1377569" y="3241525"/>
+            <a:ext cx="6388862" cy="358925"/>
           </a:xfrm>
           <a:prstGeom prst="rect">
             <a:avLst/>
@@ -15923,7 +16636,7 @@
               <a:buNone/>
             </a:pPr>
             <a:r>
-              <a:rPr lang="en-US" sz="950" b="1" dirty="0">
+              <a:rPr lang="en-US" sz="940" b="1" dirty="0">
                 <a:solidFill>
                   <a:srgbClr val="007F72"/>
                 </a:solidFill>
@@ -15933,7 +16646,7 @@
               </a:rPr>
               <a:t>Mô hình hành vi giao thông Đài Loan / Việt Nam: dữ liệu đó chỉ các bạn thu được.</a:t>
             </a:r>
-            <a:endParaRPr lang="en-US" sz="950" dirty="0"/>
+            <a:endParaRPr lang="en-US" sz="940" dirty="0"/>
           </a:p>
           <a:p>
             <a:pPr indent="0" marL="0">
@@ -15943,7 +16656,7 @@
               <a:buNone/>
             </a:pPr>
             <a:r>
-              <a:rPr lang="en-US" sz="870" dirty="0">
+              <a:rPr lang="en-US" sz="860" dirty="0">
                 <a:solidFill>
                   <a:srgbClr val="007F72"/>
                 </a:solidFill>
@@ -15953,7 +16666,7 @@
               </a:rPr>
               <a:t>台灣或越南的交通行為模型：那份資料只有各位收得到。</a:t>
             </a:r>
-            <a:endParaRPr lang="en-US" sz="950" dirty="0"/>
+            <a:endParaRPr lang="en-US" sz="940" dirty="0"/>
           </a:p>
         </p:txBody>
       </p:sp>
@@ -15989,8 +16702,8 @@
         </p:nvSpPr>
         <p:spPr>
           <a:xfrm>
-            <a:off x="1038343" y="101375"/>
-            <a:ext cx="651699" cy="202751"/>
+            <a:off x="1068894" y="100499"/>
+            <a:ext cx="646065" cy="200998"/>
           </a:xfrm>
           <a:prstGeom prst="rect">
             <a:avLst/>
@@ -16028,8 +16741,8 @@
         </p:nvSpPr>
         <p:spPr>
           <a:xfrm>
-            <a:off x="1711766" y="101375"/>
-            <a:ext cx="1593042" cy="202751"/>
+            <a:off x="1736494" y="100499"/>
+            <a:ext cx="1579269" cy="200998"/>
           </a:xfrm>
           <a:prstGeom prst="rect">
             <a:avLst/>
@@ -18490,14 +19203,14 @@
         </p:nvSpPr>
         <p:spPr>
           <a:xfrm flipV="1">
-            <a:off x="1554940" y="956372"/>
-            <a:ext cx="571459" cy="514544"/>
+            <a:off x="1617290" y="902752"/>
+            <a:ext cx="523032" cy="255100"/>
           </a:xfrm>
           <a:prstGeom prst="line">
             <a:avLst/>
           </a:prstGeom>
           <a:noFill/>
-          <a:ln w="17780">
+          <a:ln w="13970">
             <a:solidFill>
               <a:srgbClr val="2E6E4E"/>
             </a:solidFill>
@@ -18513,14 +19226,14 @@
         </p:nvSpPr>
         <p:spPr>
           <a:xfrm flipV="1">
-            <a:off x="1554940" y="1109904"/>
-            <a:ext cx="678964" cy="361011"/>
+            <a:off x="1617290" y="1070164"/>
+            <a:ext cx="575282" cy="87688"/>
           </a:xfrm>
           <a:prstGeom prst="line">
             <a:avLst/>
           </a:prstGeom>
           <a:noFill/>
-          <a:ln w="17780">
+          <a:ln w="13970">
             <a:solidFill>
               <a:srgbClr val="2E6E4E"/>
             </a:solidFill>
@@ -18535,15 +19248,15 @@
           <p:nvPr/>
         </p:nvSpPr>
         <p:spPr>
-          <a:xfrm flipV="1">
-            <a:off x="1554940" y="1284884"/>
-            <a:ext cx="746132" cy="186032"/>
+          <a:xfrm>
+            <a:off x="1617290" y="1157852"/>
+            <a:ext cx="575282" cy="87688"/>
           </a:xfrm>
           <a:prstGeom prst="line">
             <a:avLst/>
           </a:prstGeom>
           <a:noFill/>
-          <a:ln w="17780">
+          <a:ln w="13970">
             <a:solidFill>
               <a:srgbClr val="2E6E4E"/>
             </a:solidFill>
@@ -18559,14 +19272,14 @@
         </p:nvSpPr>
         <p:spPr>
           <a:xfrm>
-            <a:off x="1554940" y="1470916"/>
-            <a:ext cx="768975" cy="1"/>
+            <a:off x="1617290" y="1157852"/>
+            <a:ext cx="523032" cy="255100"/>
           </a:xfrm>
           <a:prstGeom prst="line">
             <a:avLst/>
           </a:prstGeom>
           <a:noFill/>
-          <a:ln w="17780">
+          <a:ln w="13970">
             <a:solidFill>
               <a:srgbClr val="2E6E4E"/>
             </a:solidFill>
@@ -18582,14 +19295,134 @@
         </p:nvSpPr>
         <p:spPr>
           <a:xfrm>
-            <a:off x="1554940" y="1470916"/>
-            <a:ext cx="678964" cy="361011"/>
+            <a:off x="1588193" y="1128756"/>
+            <a:ext cx="58193" cy="58193"/>
+          </a:xfrm>
+          <a:prstGeom prst="ellipse">
+            <a:avLst/>
+          </a:prstGeom>
+          <a:solidFill>
+            <a:srgbClr val="2E6E4E"/>
+          </a:solidFill>
+          <a:ln/>
+        </p:spPr>
+      </p:sp>
+      <p:sp>
+        <p:nvSpPr>
+          <p:cNvPr id="9" name="Shape 7"/>
+          <p:cNvSpPr/>
+          <p:nvPr/>
+        </p:nvSpPr>
+        <p:spPr>
+          <a:xfrm>
+            <a:off x="2047707" y="1111090"/>
+            <a:ext cx="93524" cy="93524"/>
+          </a:xfrm>
+          <a:prstGeom prst="roundRect">
+            <a:avLst>
+              <a:gd name="adj" fmla="val 22222"/>
+            </a:avLst>
+          </a:prstGeom>
+          <a:solidFill>
+            <a:srgbClr val="D9463E"/>
+          </a:solidFill>
+          <a:ln/>
+        </p:spPr>
+      </p:sp>
+      <p:sp>
+        <p:nvSpPr>
+          <p:cNvPr id="10" name="Text 8"/>
+          <p:cNvSpPr txBox="1"/>
+          <p:nvPr/>
+        </p:nvSpPr>
+        <p:spPr>
+          <a:xfrm>
+            <a:off x="1388675" y="1021737"/>
+            <a:ext cx="207831" cy="272229"/>
+          </a:xfrm>
+          <a:prstGeom prst="rect">
+            <a:avLst/>
+          </a:prstGeom>
+          <a:noFill/>
+          <a:ln/>
+        </p:spPr>
+        <p:txBody>
+          <a:bodyPr wrap="square" lIns="0" tIns="0" rIns="0" bIns="0" rtlCol="0" anchor="ctr"/>
+          <a:lstStyle/>
+          <a:p>
+            <a:pPr algn="ctr" indent="0" marL="0">
+              <a:buNone/>
+            </a:pPr>
+            <a:r>
+              <a:rPr lang="en-US" sz="560" b="1" dirty="0">
+                <a:solidFill>
+                  <a:srgbClr val="2E6E4E"/>
+                </a:solidFill>
+                <a:latin typeface="Arial" pitchFamily="34" charset="0"/>
+                <a:ea typeface="Arial" pitchFamily="34" charset="-122"/>
+                <a:cs typeface="Arial" pitchFamily="34" charset="-120"/>
+              </a:rPr>
+              <a:t>4 條</a:t>
+            </a:r>
+            <a:endParaRPr lang="en-US" sz="560" dirty="0"/>
+          </a:p>
+        </p:txBody>
+      </p:sp>
+      <p:sp>
+        <p:nvSpPr>
+          <p:cNvPr id="11" name="Text 9"/>
+          <p:cNvSpPr txBox="1"/>
+          <p:nvPr/>
+        </p:nvSpPr>
+        <p:spPr>
+          <a:xfrm>
+            <a:off x="2125643" y="1035349"/>
+            <a:ext cx="249397" cy="245006"/>
+          </a:xfrm>
+          <a:prstGeom prst="rect">
+            <a:avLst/>
+          </a:prstGeom>
+          <a:noFill/>
+          <a:ln/>
+        </p:spPr>
+        <p:txBody>
+          <a:bodyPr wrap="square" lIns="0" tIns="0" rIns="0" bIns="0" rtlCol="0" anchor="ctr"/>
+          <a:lstStyle/>
+          <a:p>
+            <a:pPr algn="l" indent="0" marL="0">
+              <a:buNone/>
+            </a:pPr>
+            <a:r>
+              <a:rPr lang="en-US" sz="560" b="1" dirty="0">
+                <a:solidFill>
+                  <a:srgbClr val="D9463E"/>
+                </a:solidFill>
+                <a:latin typeface="Arial" pitchFamily="34" charset="0"/>
+                <a:ea typeface="Arial" pitchFamily="34" charset="-122"/>
+                <a:cs typeface="Arial" pitchFamily="34" charset="-120"/>
+              </a:rPr>
+              <a:t>漏掉</a:t>
+            </a:r>
+            <a:endParaRPr lang="en-US" sz="560" dirty="0"/>
+          </a:p>
+        </p:txBody>
+      </p:sp>
+      <p:sp>
+        <p:nvSpPr>
+          <p:cNvPr id="12" name="Shape 10"/>
+          <p:cNvSpPr/>
+          <p:nvPr/>
+        </p:nvSpPr>
+        <p:spPr>
+          <a:xfrm flipV="1">
+            <a:off x="1617290" y="1528879"/>
+            <a:ext cx="523032" cy="255100"/>
           </a:xfrm>
           <a:prstGeom prst="line">
             <a:avLst/>
           </a:prstGeom>
           <a:noFill/>
-          <a:ln w="17780">
+          <a:ln w="13970">
             <a:solidFill>
               <a:srgbClr val="2E6E4E"/>
             </a:solidFill>
@@ -18599,20 +19432,20 @@
       </p:sp>
       <p:sp>
         <p:nvSpPr>
-          <p:cNvPr id="9" name="Shape 7"/>
+          <p:cNvPr id="13" name="Shape 11"/>
           <p:cNvSpPr/>
           <p:nvPr/>
         </p:nvSpPr>
         <p:spPr>
-          <a:xfrm>
-            <a:off x="1554940" y="1470916"/>
-            <a:ext cx="571459" cy="514544"/>
+          <a:xfrm flipV="1">
+            <a:off x="1617290" y="1589728"/>
+            <a:ext cx="548548" cy="194251"/>
           </a:xfrm>
           <a:prstGeom prst="line">
             <a:avLst/>
           </a:prstGeom>
           <a:noFill/>
-          <a:ln w="17780">
+          <a:ln w="13970">
             <a:solidFill>
               <a:srgbClr val="2E6E4E"/>
             </a:solidFill>
@@ -18622,14 +19455,175 @@
       </p:sp>
       <p:sp>
         <p:nvSpPr>
-          <p:cNvPr id="10" name="Shape 8"/>
+          <p:cNvPr id="14" name="Shape 12"/>
           <p:cNvSpPr/>
           <p:nvPr/>
         </p:nvSpPr>
         <p:spPr>
-          <a:xfrm>
-            <a:off x="1518570" y="1434545"/>
-            <a:ext cx="72741" cy="72741"/>
+          <a:xfrm flipV="1">
+            <a:off x="1617290" y="1653074"/>
+            <a:ext cx="567012" cy="130905"/>
+          </a:xfrm>
+          <a:prstGeom prst="line">
+            <a:avLst/>
+          </a:prstGeom>
+          <a:noFill/>
+          <a:ln w="13970">
+            <a:solidFill>
+              <a:srgbClr val="2E6E4E"/>
+            </a:solidFill>
+            <a:prstDash val="solid"/>
+          </a:ln>
+        </p:spPr>
+      </p:sp>
+      <p:sp>
+        <p:nvSpPr>
+          <p:cNvPr id="15" name="Shape 13"/>
+          <p:cNvSpPr/>
+          <p:nvPr/>
+        </p:nvSpPr>
+        <p:spPr>
+          <a:xfrm flipV="1">
+            <a:off x="1617290" y="1718103"/>
+            <a:ext cx="578186" cy="65876"/>
+          </a:xfrm>
+          <a:prstGeom prst="line">
+            <a:avLst/>
+          </a:prstGeom>
+          <a:noFill/>
+          <a:ln w="13970">
+            <a:solidFill>
+              <a:srgbClr val="2E6E4E"/>
+            </a:solidFill>
+            <a:prstDash val="solid"/>
+          </a:ln>
+        </p:spPr>
+      </p:sp>
+      <p:sp>
+        <p:nvSpPr>
+          <p:cNvPr id="16" name="Shape 14"/>
+          <p:cNvSpPr/>
+          <p:nvPr/>
+        </p:nvSpPr>
+        <p:spPr>
+          <a:xfrm>
+            <a:off x="1617290" y="1783979"/>
+            <a:ext cx="581926" cy="1"/>
+          </a:xfrm>
+          <a:prstGeom prst="line">
+            <a:avLst/>
+          </a:prstGeom>
+          <a:noFill/>
+          <a:ln w="13970">
+            <a:solidFill>
+              <a:srgbClr val="2E6E4E"/>
+            </a:solidFill>
+            <a:prstDash val="solid"/>
+          </a:ln>
+        </p:spPr>
+      </p:sp>
+      <p:sp>
+        <p:nvSpPr>
+          <p:cNvPr id="17" name="Shape 15"/>
+          <p:cNvSpPr/>
+          <p:nvPr/>
+        </p:nvSpPr>
+        <p:spPr>
+          <a:xfrm>
+            <a:off x="1617290" y="1783979"/>
+            <a:ext cx="578186" cy="65876"/>
+          </a:xfrm>
+          <a:prstGeom prst="line">
+            <a:avLst/>
+          </a:prstGeom>
+          <a:noFill/>
+          <a:ln w="13970">
+            <a:solidFill>
+              <a:srgbClr val="2E6E4E"/>
+            </a:solidFill>
+            <a:prstDash val="solid"/>
+          </a:ln>
+        </p:spPr>
+      </p:sp>
+      <p:sp>
+        <p:nvSpPr>
+          <p:cNvPr id="18" name="Shape 16"/>
+          <p:cNvSpPr/>
+          <p:nvPr/>
+        </p:nvSpPr>
+        <p:spPr>
+          <a:xfrm>
+            <a:off x="1617290" y="1783979"/>
+            <a:ext cx="567012" cy="130905"/>
+          </a:xfrm>
+          <a:prstGeom prst="line">
+            <a:avLst/>
+          </a:prstGeom>
+          <a:noFill/>
+          <a:ln w="13970">
+            <a:solidFill>
+              <a:srgbClr val="2E6E4E"/>
+            </a:solidFill>
+            <a:prstDash val="solid"/>
+          </a:ln>
+        </p:spPr>
+      </p:sp>
+      <p:sp>
+        <p:nvSpPr>
+          <p:cNvPr id="19" name="Shape 17"/>
+          <p:cNvSpPr/>
+          <p:nvPr/>
+        </p:nvSpPr>
+        <p:spPr>
+          <a:xfrm>
+            <a:off x="1617290" y="1783979"/>
+            <a:ext cx="548548" cy="194251"/>
+          </a:xfrm>
+          <a:prstGeom prst="line">
+            <a:avLst/>
+          </a:prstGeom>
+          <a:noFill/>
+          <a:ln w="13970">
+            <a:solidFill>
+              <a:srgbClr val="2E6E4E"/>
+            </a:solidFill>
+            <a:prstDash val="solid"/>
+          </a:ln>
+        </p:spPr>
+      </p:sp>
+      <p:sp>
+        <p:nvSpPr>
+          <p:cNvPr id="20" name="Shape 18"/>
+          <p:cNvSpPr/>
+          <p:nvPr/>
+        </p:nvSpPr>
+        <p:spPr>
+          <a:xfrm>
+            <a:off x="1617290" y="1783979"/>
+            <a:ext cx="523032" cy="255100"/>
+          </a:xfrm>
+          <a:prstGeom prst="line">
+            <a:avLst/>
+          </a:prstGeom>
+          <a:noFill/>
+          <a:ln w="13970">
+            <a:solidFill>
+              <a:srgbClr val="2E6E4E"/>
+            </a:solidFill>
+            <a:prstDash val="solid"/>
+          </a:ln>
+        </p:spPr>
+      </p:sp>
+      <p:sp>
+        <p:nvSpPr>
+          <p:cNvPr id="21" name="Shape 19"/>
+          <p:cNvSpPr/>
+          <p:nvPr/>
+        </p:nvSpPr>
+        <p:spPr>
+          <a:xfrm>
+            <a:off x="1588193" y="1754883"/>
+            <a:ext cx="58193" cy="58193"/>
           </a:xfrm>
           <a:prstGeom prst="ellipse">
             <a:avLst/>
@@ -18642,29 +19636,107 @@
       </p:sp>
       <p:sp>
         <p:nvSpPr>
-          <p:cNvPr id="11" name="Shape 9"/>
+          <p:cNvPr id="22" name="Shape 20"/>
           <p:cNvSpPr/>
           <p:nvPr/>
         </p:nvSpPr>
         <p:spPr>
           <a:xfrm>
-            <a:off x="2040198" y="1552900"/>
-            <a:ext cx="103916" cy="103916"/>
+            <a:off x="2047707" y="1737217"/>
+            <a:ext cx="93524" cy="93524"/>
           </a:xfrm>
           <a:prstGeom prst="roundRect">
             <a:avLst>
-              <a:gd name="adj" fmla="val 20000"/>
+              <a:gd name="adj" fmla="val 22222"/>
             </a:avLst>
           </a:prstGeom>
           <a:solidFill>
-            <a:srgbClr val="D9463E"/>
+            <a:srgbClr val="2E9E6B"/>
           </a:solidFill>
           <a:ln/>
         </p:spPr>
       </p:sp>
       <p:sp>
         <p:nvSpPr>
-          <p:cNvPr id="12" name="Text 10"/>
+          <p:cNvPr id="23" name="Text 21"/>
+          <p:cNvSpPr txBox="1"/>
+          <p:nvPr/>
+        </p:nvSpPr>
+        <p:spPr>
+          <a:xfrm>
+            <a:off x="1388675" y="1647865"/>
+            <a:ext cx="207831" cy="272229"/>
+          </a:xfrm>
+          <a:prstGeom prst="rect">
+            <a:avLst/>
+          </a:prstGeom>
+          <a:noFill/>
+          <a:ln/>
+        </p:spPr>
+        <p:txBody>
+          <a:bodyPr wrap="square" lIns="0" tIns="0" rIns="0" bIns="0" rtlCol="0" anchor="ctr"/>
+          <a:lstStyle/>
+          <a:p>
+            <a:pPr algn="ctr" indent="0" marL="0">
+              <a:buNone/>
+            </a:pPr>
+            <a:r>
+              <a:rPr lang="en-US" sz="560" b="1" dirty="0">
+                <a:solidFill>
+                  <a:srgbClr val="2E6E4E"/>
+                </a:solidFill>
+                <a:latin typeface="Arial" pitchFamily="34" charset="0"/>
+                <a:ea typeface="Arial" pitchFamily="34" charset="-122"/>
+                <a:cs typeface="Arial" pitchFamily="34" charset="-120"/>
+              </a:rPr>
+              <a:t>9 條</a:t>
+            </a:r>
+            <a:endParaRPr lang="en-US" sz="560" dirty="0"/>
+          </a:p>
+        </p:txBody>
+      </p:sp>
+      <p:sp>
+        <p:nvSpPr>
+          <p:cNvPr id="24" name="Text 22"/>
+          <p:cNvSpPr txBox="1"/>
+          <p:nvPr/>
+        </p:nvSpPr>
+        <p:spPr>
+          <a:xfrm>
+            <a:off x="2125643" y="1661476"/>
+            <a:ext cx="249397" cy="245006"/>
+          </a:xfrm>
+          <a:prstGeom prst="rect">
+            <a:avLst/>
+          </a:prstGeom>
+          <a:noFill/>
+          <a:ln/>
+        </p:spPr>
+        <p:txBody>
+          <a:bodyPr wrap="square" lIns="0" tIns="0" rIns="0" bIns="0" rtlCol="0" anchor="ctr"/>
+          <a:lstStyle/>
+          <a:p>
+            <a:pPr algn="l" indent="0" marL="0">
+              <a:buNone/>
+            </a:pPr>
+            <a:r>
+              <a:rPr lang="en-US" sz="560" b="1" dirty="0">
+                <a:solidFill>
+                  <a:srgbClr val="2E9E6B"/>
+                </a:solidFill>
+                <a:latin typeface="Arial" pitchFamily="34" charset="0"/>
+                <a:ea typeface="Arial" pitchFamily="34" charset="-122"/>
+                <a:cs typeface="Arial" pitchFamily="34" charset="-120"/>
+              </a:rPr>
+              <a:t>打到</a:t>
+            </a:r>
+            <a:endParaRPr lang="en-US" sz="560" dirty="0"/>
+          </a:p>
+        </p:txBody>
+      </p:sp>
+      <p:sp>
+        <p:nvSpPr>
+          <p:cNvPr id="25" name="Text 23"/>
           <p:cNvSpPr txBox="1"/>
           <p:nvPr/>
         </p:nvSpPr>
@@ -18726,7 +19798,7 @@
       </p:sp>
       <p:sp>
         <p:nvSpPr>
-          <p:cNvPr id="13" name="Shape 11"/>
+          <p:cNvPr id="26" name="Shape 24"/>
           <p:cNvSpPr/>
           <p:nvPr/>
         </p:nvSpPr>
@@ -18748,7 +19820,7 @@
       </p:sp>
       <p:sp>
         <p:nvSpPr>
-          <p:cNvPr id="14" name="Text 12"/>
+          <p:cNvPr id="27" name="Text 25"/>
           <p:cNvSpPr txBox="1"/>
           <p:nvPr/>
         </p:nvSpPr>
@@ -18810,7 +19882,7 @@
       </p:sp>
       <p:sp>
         <p:nvSpPr>
-          <p:cNvPr id="15" name="Text 13"/>
+          <p:cNvPr id="28" name="Text 26"/>
           <p:cNvSpPr txBox="1"/>
           <p:nvPr/>
         </p:nvSpPr>
@@ -18872,7 +19944,7 @@
       </p:sp>
       <p:sp>
         <p:nvSpPr>
-          <p:cNvPr id="16" name="Shape 14"/>
+          <p:cNvPr id="29" name="Shape 27"/>
           <p:cNvSpPr/>
           <p:nvPr/>
         </p:nvSpPr>
@@ -18894,7 +19966,7 @@
       </p:sp>
       <p:sp>
         <p:nvSpPr>
-          <p:cNvPr id="17" name="Text 15"/>
+          <p:cNvPr id="30" name="Text 28"/>
           <p:cNvSpPr txBox="1"/>
           <p:nvPr/>
         </p:nvSpPr>
@@ -18956,7 +20028,7 @@
       </p:sp>
       <p:sp>
         <p:nvSpPr>
-          <p:cNvPr id="18" name="Text 16"/>
+          <p:cNvPr id="31" name="Text 29"/>
           <p:cNvSpPr txBox="1"/>
           <p:nvPr/>
         </p:nvSpPr>
@@ -19018,7 +20090,7 @@
       </p:sp>
       <p:sp>
         <p:nvSpPr>
-          <p:cNvPr id="19" name="Shape 17"/>
+          <p:cNvPr id="32" name="Shape 30"/>
           <p:cNvSpPr/>
           <p:nvPr/>
         </p:nvSpPr>
@@ -19040,7 +20112,7 @@
       </p:sp>
       <p:sp>
         <p:nvSpPr>
-          <p:cNvPr id="20" name="Text 18"/>
+          <p:cNvPr id="33" name="Text 31"/>
           <p:cNvSpPr txBox="1"/>
           <p:nvPr/>
         </p:nvSpPr>
@@ -19102,7 +20174,7 @@
       </p:sp>
       <p:sp>
         <p:nvSpPr>
-          <p:cNvPr id="21" name="Text 19"/>
+          <p:cNvPr id="34" name="Text 32"/>
           <p:cNvSpPr txBox="1"/>
           <p:nvPr/>
         </p:nvSpPr>
@@ -19164,7 +20236,7 @@
       </p:sp>
       <p:sp>
         <p:nvSpPr>
-          <p:cNvPr id="22" name="Shape 20"/>
+          <p:cNvPr id="35" name="Shape 33"/>
           <p:cNvSpPr/>
           <p:nvPr/>
         </p:nvSpPr>
@@ -19186,7 +20258,7 @@
       </p:sp>
       <p:sp>
         <p:nvSpPr>
-          <p:cNvPr id="23" name="Text 21"/>
+          <p:cNvPr id="36" name="Text 34"/>
           <p:cNvSpPr txBox="1"/>
           <p:nvPr/>
         </p:nvSpPr>
@@ -19248,7 +20320,7 @@
       </p:sp>
       <p:sp>
         <p:nvSpPr>
-          <p:cNvPr id="24" name="Text 22"/>
+          <p:cNvPr id="37" name="Text 35"/>
           <p:cNvSpPr txBox="1"/>
           <p:nvPr/>
         </p:nvSpPr>
@@ -19310,7 +20382,7 @@
       </p:sp>
       <p:sp>
         <p:nvSpPr>
-          <p:cNvPr id="25" name="Shape 23"/>
+          <p:cNvPr id="38" name="Shape 36"/>
           <p:cNvSpPr/>
           <p:nvPr/>
         </p:nvSpPr>
@@ -19337,7 +20409,7 @@
       </p:sp>
       <p:sp>
         <p:nvSpPr>
-          <p:cNvPr id="26" name="Text 24"/>
+          <p:cNvPr id="39" name="Text 37"/>
           <p:cNvSpPr txBox="1"/>
           <p:nvPr/>
         </p:nvSpPr>
@@ -19399,7 +20471,7 @@
       </p:sp>
       <p:pic>
         <p:nvPicPr>
-          <p:cNvPr id="28" name="Image 0" descr="/Users/tsengchenghsun/Class/carClass/Claude outputs/第四週(10-1)/src/logo.png">    </p:cNvPr>
+          <p:cNvPr id="41" name="Image 0" descr="/Users/tsengchenghsun/Class/carClass/Claude outputs/第四週(10-1)/src/logo.png">    </p:cNvPr>
           <p:cNvPicPr>
             <a:picLocks noChangeAspect="1"/>
           </p:cNvPicPr>
@@ -19423,7 +20495,7 @@
       </p:pic>
       <p:sp>
         <p:nvSpPr>
-          <p:cNvPr id="29" name="Text 25"/>
+          <p:cNvPr id="42" name="Text 38"/>
           <p:cNvSpPr txBox="1"/>
           <p:nvPr/>
         </p:nvSpPr>
@@ -19462,7 +20534,7 @@
       </p:sp>
       <p:sp>
         <p:nvSpPr>
-          <p:cNvPr id="30" name="Text 26"/>
+          <p:cNvPr id="43" name="Text 39"/>
           <p:cNvSpPr txBox="1"/>
           <p:nvPr/>
         </p:nvSpPr>
@@ -19598,8 +20670,8 @@
         </p:nvSpPr>
         <p:spPr>
           <a:xfrm>
-            <a:off x="1440633" y="1495223"/>
-            <a:ext cx="249397" cy="114723"/>
+            <a:off x="1409458" y="1051554"/>
+            <a:ext cx="166265" cy="76482"/>
           </a:xfrm>
           <a:prstGeom prst="roundRect">
             <a:avLst>
@@ -19620,12 +20692,12 @@
         </p:nvSpPr>
         <p:spPr>
           <a:xfrm>
-            <a:off x="1535404" y="1518167"/>
-            <a:ext cx="84795" cy="68833"/>
+            <a:off x="1472639" y="1066850"/>
+            <a:ext cx="56530" cy="45889"/>
           </a:xfrm>
           <a:prstGeom prst="roundRect">
             <a:avLst>
-              <a:gd name="adj" fmla="val 23333"/>
+              <a:gd name="adj" fmla="val 23334"/>
             </a:avLst>
           </a:prstGeom>
           <a:solidFill>
@@ -19642,44 +20714,58 @@
         </p:nvSpPr>
         <p:spPr>
           <a:xfrm>
-            <a:off x="1721204" y="1552584"/>
-            <a:ext cx="519577" cy="1"/>
-          </a:xfrm>
-          <a:prstGeom prst="line">
+            <a:off x="1575723" y="1014931"/>
+            <a:ext cx="254385" cy="74863"/>
+          </a:xfrm>
+          <a:prstGeom prst="roundRect">
+            <a:avLst>
+              <a:gd name="adj" fmla="val 21818"/>
+            </a:avLst>
+          </a:prstGeom>
+          <a:solidFill>
+            <a:srgbClr val="8A5A00"/>
+          </a:solidFill>
+          <a:ln/>
+        </p:spPr>
+      </p:sp>
+      <p:sp>
+        <p:nvSpPr>
+          <p:cNvPr id="7" name="Text 5"/>
+          <p:cNvSpPr txBox="1"/>
+          <p:nvPr/>
+        </p:nvSpPr>
+        <p:spPr>
+          <a:xfrm>
+            <a:off x="1575723" y="878817"/>
+            <a:ext cx="311746" cy="136114"/>
+          </a:xfrm>
+          <a:prstGeom prst="rect">
             <a:avLst/>
           </a:prstGeom>
           <a:noFill/>
-          <a:ln w="20320">
-            <a:solidFill>
-              <a:srgbClr val="8A5A00"/>
-            </a:solidFill>
-            <a:prstDash val="solid"/>
-            <a:tailEnd type="triangle"/>
-          </a:ln>
-        </p:spPr>
-      </p:sp>
-      <p:sp>
-        <p:nvSpPr>
-          <p:cNvPr id="7" name="Shape 5"/>
-          <p:cNvSpPr/>
-          <p:nvPr/>
-        </p:nvSpPr>
-        <p:spPr>
-          <a:xfrm>
-            <a:off x="1851099" y="1484527"/>
-            <a:ext cx="1" cy="136114"/>
-          </a:xfrm>
-          <a:prstGeom prst="line">
-            <a:avLst/>
-          </a:prstGeom>
-          <a:noFill/>
-          <a:ln w="12700">
-            <a:solidFill>
-              <a:srgbClr val="8A5A00"/>
-            </a:solidFill>
-            <a:prstDash val="solid"/>
-          </a:ln>
-        </p:spPr>
+          <a:ln/>
+        </p:spPr>
+        <p:txBody>
+          <a:bodyPr wrap="square" lIns="0" tIns="0" rIns="0" bIns="0" rtlCol="0" anchor="ctr"/>
+          <a:lstStyle/>
+          <a:p>
+            <a:pPr algn="l" indent="0" marL="0">
+              <a:buNone/>
+            </a:pPr>
+            <a:r>
+              <a:rPr lang="en-US" sz="520" b="1" dirty="0">
+                <a:solidFill>
+                  <a:srgbClr val="8A5A00"/>
+                </a:solidFill>
+                <a:latin typeface="Arial" pitchFamily="34" charset="0"/>
+                <a:ea typeface="Arial" pitchFamily="34" charset="-122"/>
+                <a:cs typeface="Arial" pitchFamily="34" charset="-120"/>
+              </a:rPr>
+              <a:t>射線</a:t>
+            </a:r>
+            <a:endParaRPr lang="en-US" sz="520" dirty="0"/>
+          </a:p>
+        </p:txBody>
       </p:sp>
       <p:sp>
         <p:nvSpPr>
@@ -19689,58 +20775,12 @@
         </p:nvSpPr>
         <p:spPr>
           <a:xfrm>
-            <a:off x="1980993" y="1484527"/>
-            <a:ext cx="1" cy="136114"/>
-          </a:xfrm>
-          <a:prstGeom prst="line">
-            <a:avLst/>
-          </a:prstGeom>
-          <a:noFill/>
-          <a:ln w="12700">
-            <a:solidFill>
-              <a:srgbClr val="8A5A00"/>
-            </a:solidFill>
-            <a:prstDash val="solid"/>
-          </a:ln>
-        </p:spPr>
-      </p:sp>
-      <p:sp>
-        <p:nvSpPr>
-          <p:cNvPr id="9" name="Shape 7"/>
-          <p:cNvSpPr/>
-          <p:nvPr/>
-        </p:nvSpPr>
-        <p:spPr>
-          <a:xfrm>
-            <a:off x="2110887" y="1484527"/>
-            <a:ext cx="1" cy="136114"/>
-          </a:xfrm>
-          <a:prstGeom prst="line">
-            <a:avLst/>
-          </a:prstGeom>
-          <a:noFill/>
-          <a:ln w="12700">
-            <a:solidFill>
-              <a:srgbClr val="8A5A00"/>
-            </a:solidFill>
-            <a:prstDash val="solid"/>
-          </a:ln>
-        </p:spPr>
-      </p:sp>
-      <p:sp>
-        <p:nvSpPr>
-          <p:cNvPr id="10" name="Shape 8"/>
-          <p:cNvSpPr/>
-          <p:nvPr/>
-        </p:nvSpPr>
-        <p:spPr>
-          <a:xfrm>
-            <a:off x="2230390" y="1402858"/>
-            <a:ext cx="72741" cy="299452"/>
+            <a:off x="1575723" y="1110212"/>
+            <a:ext cx="418987" cy="61251"/>
           </a:xfrm>
           <a:prstGeom prst="roundRect">
             <a:avLst>
-              <a:gd name="adj" fmla="val 21429"/>
+              <a:gd name="adj" fmla="val 26667"/>
             </a:avLst>
           </a:prstGeom>
           <a:solidFill>
@@ -19751,7 +20791,290 @@
       </p:sp>
       <p:sp>
         <p:nvSpPr>
-          <p:cNvPr id="11" name="Text 9"/>
+          <p:cNvPr id="9" name="Text 7"/>
+          <p:cNvSpPr txBox="1"/>
+          <p:nvPr/>
+        </p:nvSpPr>
+        <p:spPr>
+          <a:xfrm>
+            <a:off x="1575723" y="1191880"/>
+            <a:ext cx="311746" cy="136114"/>
+          </a:xfrm>
+          <a:prstGeom prst="rect">
+            <a:avLst/>
+          </a:prstGeom>
+          <a:noFill/>
+          <a:ln/>
+        </p:spPr>
+        <p:txBody>
+          <a:bodyPr wrap="square" lIns="0" tIns="0" rIns="0" bIns="0" rtlCol="0" anchor="ctr"/>
+          <a:lstStyle/>
+          <a:p>
+            <a:pPr algn="l" indent="0" marL="0">
+              <a:buNone/>
+            </a:pPr>
+            <a:r>
+              <a:rPr lang="en-US" sz="520" b="1" dirty="0">
+                <a:solidFill>
+                  <a:srgbClr val="D9463E"/>
+                </a:solidFill>
+                <a:latin typeface="Arial" pitchFamily="34" charset="0"/>
+                <a:ea typeface="Arial" pitchFamily="34" charset="-122"/>
+                <a:cs typeface="Arial" pitchFamily="34" charset="-120"/>
+              </a:rPr>
+              <a:t>煞停</a:t>
+            </a:r>
+            <a:endParaRPr lang="en-US" sz="520" dirty="0"/>
+          </a:p>
+        </p:txBody>
+      </p:sp>
+      <p:sp>
+        <p:nvSpPr>
+          <p:cNvPr id="10" name="Text 8"/>
+          <p:cNvSpPr txBox="1"/>
+          <p:nvPr/>
+        </p:nvSpPr>
+        <p:spPr>
+          <a:xfrm>
+            <a:off x="2282348" y="1008126"/>
+            <a:ext cx="145482" cy="163337"/>
+          </a:xfrm>
+          <a:prstGeom prst="rect">
+            <a:avLst/>
+          </a:prstGeom>
+          <a:noFill/>
+          <a:ln/>
+        </p:spPr>
+        <p:txBody>
+          <a:bodyPr wrap="square" lIns="0" tIns="0" rIns="0" bIns="0" rtlCol="0" anchor="ctr"/>
+          <a:lstStyle/>
+          <a:p>
+            <a:pPr algn="ctr" indent="0" marL="0">
+              <a:buNone/>
+            </a:pPr>
+            <a:r>
+              <a:rPr lang="en-US" sz="600" b="1" dirty="0">
+                <a:solidFill>
+                  <a:srgbClr val="D9463E"/>
+                </a:solidFill>
+                <a:latin typeface="Arial" pitchFamily="34" charset="0"/>
+                <a:ea typeface="Arial" pitchFamily="34" charset="-122"/>
+                <a:cs typeface="Arial" pitchFamily="34" charset="-120"/>
+              </a:rPr>
+              <a:t>不夠</a:t>
+            </a:r>
+            <a:endParaRPr lang="en-US" sz="600" dirty="0"/>
+          </a:p>
+        </p:txBody>
+      </p:sp>
+      <p:sp>
+        <p:nvSpPr>
+          <p:cNvPr id="11" name="Shape 9"/>
+          <p:cNvSpPr/>
+          <p:nvPr/>
+        </p:nvSpPr>
+        <p:spPr>
+          <a:xfrm>
+            <a:off x="1409458" y="1650458"/>
+            <a:ext cx="166265" cy="76482"/>
+          </a:xfrm>
+          <a:prstGeom prst="roundRect">
+            <a:avLst>
+              <a:gd name="adj" fmla="val 22000"/>
+            </a:avLst>
+          </a:prstGeom>
+          <a:solidFill>
+            <a:srgbClr val="8FA3B5"/>
+          </a:solidFill>
+          <a:ln/>
+        </p:spPr>
+      </p:sp>
+      <p:sp>
+        <p:nvSpPr>
+          <p:cNvPr id="12" name="Shape 10"/>
+          <p:cNvSpPr/>
+          <p:nvPr/>
+        </p:nvSpPr>
+        <p:spPr>
+          <a:xfrm>
+            <a:off x="1472639" y="1665755"/>
+            <a:ext cx="56530" cy="45889"/>
+          </a:xfrm>
+          <a:prstGeom prst="roundRect">
+            <a:avLst>
+              <a:gd name="adj" fmla="val 23334"/>
+            </a:avLst>
+          </a:prstGeom>
+          <a:solidFill>
+            <a:srgbClr val="FFFFFF"/>
+          </a:solidFill>
+          <a:ln/>
+        </p:spPr>
+      </p:sp>
+      <p:sp>
+        <p:nvSpPr>
+          <p:cNvPr id="13" name="Shape 11"/>
+          <p:cNvSpPr/>
+          <p:nvPr/>
+        </p:nvSpPr>
+        <p:spPr>
+          <a:xfrm>
+            <a:off x="1575723" y="1613836"/>
+            <a:ext cx="538697" cy="74863"/>
+          </a:xfrm>
+          <a:prstGeom prst="roundRect">
+            <a:avLst>
+              <a:gd name="adj" fmla="val 21818"/>
+            </a:avLst>
+          </a:prstGeom>
+          <a:solidFill>
+            <a:srgbClr val="8A5A00"/>
+          </a:solidFill>
+          <a:ln/>
+        </p:spPr>
+      </p:sp>
+      <p:sp>
+        <p:nvSpPr>
+          <p:cNvPr id="14" name="Text 12"/>
+          <p:cNvSpPr txBox="1"/>
+          <p:nvPr/>
+        </p:nvSpPr>
+        <p:spPr>
+          <a:xfrm>
+            <a:off x="1575723" y="1477721"/>
+            <a:ext cx="311746" cy="136114"/>
+          </a:xfrm>
+          <a:prstGeom prst="rect">
+            <a:avLst/>
+          </a:prstGeom>
+          <a:noFill/>
+          <a:ln/>
+        </p:spPr>
+        <p:txBody>
+          <a:bodyPr wrap="square" lIns="0" tIns="0" rIns="0" bIns="0" rtlCol="0" anchor="ctr"/>
+          <a:lstStyle/>
+          <a:p>
+            <a:pPr algn="l" indent="0" marL="0">
+              <a:buNone/>
+            </a:pPr>
+            <a:r>
+              <a:rPr lang="en-US" sz="520" b="1" dirty="0">
+                <a:solidFill>
+                  <a:srgbClr val="8A5A00"/>
+                </a:solidFill>
+                <a:latin typeface="Arial" pitchFamily="34" charset="0"/>
+                <a:ea typeface="Arial" pitchFamily="34" charset="-122"/>
+                <a:cs typeface="Arial" pitchFamily="34" charset="-120"/>
+              </a:rPr>
+              <a:t>射線</a:t>
+            </a:r>
+            <a:endParaRPr lang="en-US" sz="520" dirty="0"/>
+          </a:p>
+        </p:txBody>
+      </p:sp>
+      <p:sp>
+        <p:nvSpPr>
+          <p:cNvPr id="15" name="Shape 13"/>
+          <p:cNvSpPr/>
+          <p:nvPr/>
+        </p:nvSpPr>
+        <p:spPr>
+          <a:xfrm>
+            <a:off x="1575723" y="1709116"/>
+            <a:ext cx="418987" cy="61251"/>
+          </a:xfrm>
+          <a:prstGeom prst="roundRect">
+            <a:avLst>
+              <a:gd name="adj" fmla="val 26667"/>
+            </a:avLst>
+          </a:prstGeom>
+          <a:solidFill>
+            <a:srgbClr val="D9463E"/>
+          </a:solidFill>
+          <a:ln/>
+        </p:spPr>
+      </p:sp>
+      <p:sp>
+        <p:nvSpPr>
+          <p:cNvPr id="16" name="Text 14"/>
+          <p:cNvSpPr txBox="1"/>
+          <p:nvPr/>
+        </p:nvSpPr>
+        <p:spPr>
+          <a:xfrm>
+            <a:off x="1575723" y="1790785"/>
+            <a:ext cx="311746" cy="136114"/>
+          </a:xfrm>
+          <a:prstGeom prst="rect">
+            <a:avLst/>
+          </a:prstGeom>
+          <a:noFill/>
+          <a:ln/>
+        </p:spPr>
+        <p:txBody>
+          <a:bodyPr wrap="square" lIns="0" tIns="0" rIns="0" bIns="0" rtlCol="0" anchor="ctr"/>
+          <a:lstStyle/>
+          <a:p>
+            <a:pPr algn="l" indent="0" marL="0">
+              <a:buNone/>
+            </a:pPr>
+            <a:r>
+              <a:rPr lang="en-US" sz="520" b="1" dirty="0">
+                <a:solidFill>
+                  <a:srgbClr val="D9463E"/>
+                </a:solidFill>
+                <a:latin typeface="Arial" pitchFamily="34" charset="0"/>
+                <a:ea typeface="Arial" pitchFamily="34" charset="-122"/>
+                <a:cs typeface="Arial" pitchFamily="34" charset="-120"/>
+              </a:rPr>
+              <a:t>煞停</a:t>
+            </a:r>
+            <a:endParaRPr lang="en-US" sz="520" dirty="0"/>
+          </a:p>
+        </p:txBody>
+      </p:sp>
+      <p:sp>
+        <p:nvSpPr>
+          <p:cNvPr id="17" name="Text 15"/>
+          <p:cNvSpPr txBox="1"/>
+          <p:nvPr/>
+        </p:nvSpPr>
+        <p:spPr>
+          <a:xfrm>
+            <a:off x="2282348" y="1607030"/>
+            <a:ext cx="145482" cy="163337"/>
+          </a:xfrm>
+          <a:prstGeom prst="rect">
+            <a:avLst/>
+          </a:prstGeom>
+          <a:noFill/>
+          <a:ln/>
+        </p:spPr>
+        <p:txBody>
+          <a:bodyPr wrap="square" lIns="0" tIns="0" rIns="0" bIns="0" rtlCol="0" anchor="ctr"/>
+          <a:lstStyle/>
+          <a:p>
+            <a:pPr algn="ctr" indent="0" marL="0">
+              <a:buNone/>
+            </a:pPr>
+            <a:r>
+              <a:rPr lang="en-US" sz="600" b="1" dirty="0">
+                <a:solidFill>
+                  <a:srgbClr val="2E9E6B"/>
+                </a:solidFill>
+                <a:latin typeface="Arial" pitchFamily="34" charset="0"/>
+                <a:ea typeface="Arial" pitchFamily="34" charset="-122"/>
+                <a:cs typeface="Arial" pitchFamily="34" charset="-120"/>
+              </a:rPr>
+              <a:t>夠</a:t>
+            </a:r>
+            <a:endParaRPr lang="en-US" sz="600" dirty="0"/>
+          </a:p>
+        </p:txBody>
+      </p:sp>
+      <p:sp>
+        <p:nvSpPr>
+          <p:cNvPr id="18" name="Text 16"/>
           <p:cNvSpPr txBox="1"/>
           <p:nvPr/>
         </p:nvSpPr>
@@ -19813,7 +21136,7 @@
       </p:sp>
       <p:sp>
         <p:nvSpPr>
-          <p:cNvPr id="12" name="Shape 10"/>
+          <p:cNvPr id="19" name="Shape 17"/>
           <p:cNvSpPr/>
           <p:nvPr/>
         </p:nvSpPr>
@@ -19835,7 +21158,7 @@
       </p:sp>
       <p:sp>
         <p:nvSpPr>
-          <p:cNvPr id="13" name="Text 11"/>
+          <p:cNvPr id="20" name="Text 18"/>
           <p:cNvSpPr txBox="1"/>
           <p:nvPr/>
         </p:nvSpPr>
@@ -19897,7 +21220,7 @@
       </p:sp>
       <p:sp>
         <p:nvSpPr>
-          <p:cNvPr id="14" name="Text 12"/>
+          <p:cNvPr id="21" name="Text 19"/>
           <p:cNvSpPr txBox="1"/>
           <p:nvPr/>
         </p:nvSpPr>
@@ -19959,7 +21282,7 @@
       </p:sp>
       <p:sp>
         <p:nvSpPr>
-          <p:cNvPr id="15" name="Shape 13"/>
+          <p:cNvPr id="22" name="Shape 20"/>
           <p:cNvSpPr/>
           <p:nvPr/>
         </p:nvSpPr>
@@ -19981,7 +21304,7 @@
       </p:sp>
       <p:sp>
         <p:nvSpPr>
-          <p:cNvPr id="16" name="Text 14"/>
+          <p:cNvPr id="23" name="Text 21"/>
           <p:cNvSpPr txBox="1"/>
           <p:nvPr/>
         </p:nvSpPr>
@@ -20043,7 +21366,7 @@
       </p:sp>
       <p:sp>
         <p:nvSpPr>
-          <p:cNvPr id="17" name="Text 15"/>
+          <p:cNvPr id="24" name="Text 22"/>
           <p:cNvSpPr txBox="1"/>
           <p:nvPr/>
         </p:nvSpPr>
@@ -20105,7 +21428,7 @@
       </p:sp>
       <p:sp>
         <p:nvSpPr>
-          <p:cNvPr id="18" name="Shape 16"/>
+          <p:cNvPr id="25" name="Shape 23"/>
           <p:cNvSpPr/>
           <p:nvPr/>
         </p:nvSpPr>
@@ -20127,7 +21450,7 @@
       </p:sp>
       <p:sp>
         <p:nvSpPr>
-          <p:cNvPr id="19" name="Text 17"/>
+          <p:cNvPr id="26" name="Text 24"/>
           <p:cNvSpPr txBox="1"/>
           <p:nvPr/>
         </p:nvSpPr>
@@ -20189,7 +21512,7 @@
       </p:sp>
       <p:sp>
         <p:nvSpPr>
-          <p:cNvPr id="20" name="Text 18"/>
+          <p:cNvPr id="27" name="Text 25"/>
           <p:cNvSpPr txBox="1"/>
           <p:nvPr/>
         </p:nvSpPr>
@@ -20251,7 +21574,7 @@
       </p:sp>
       <p:sp>
         <p:nvSpPr>
-          <p:cNvPr id="21" name="Shape 19"/>
+          <p:cNvPr id="28" name="Shape 26"/>
           <p:cNvSpPr/>
           <p:nvPr/>
         </p:nvSpPr>
@@ -20273,7 +21596,7 @@
       </p:sp>
       <p:sp>
         <p:nvSpPr>
-          <p:cNvPr id="22" name="Text 20"/>
+          <p:cNvPr id="29" name="Text 27"/>
           <p:cNvSpPr txBox="1"/>
           <p:nvPr/>
         </p:nvSpPr>
@@ -20335,7 +21658,7 @@
       </p:sp>
       <p:sp>
         <p:nvSpPr>
-          <p:cNvPr id="23" name="Text 21"/>
+          <p:cNvPr id="30" name="Text 28"/>
           <p:cNvSpPr txBox="1"/>
           <p:nvPr/>
         </p:nvSpPr>
@@ -20397,7 +21720,7 @@
       </p:sp>
       <p:sp>
         <p:nvSpPr>
-          <p:cNvPr id="24" name="Shape 22"/>
+          <p:cNvPr id="31" name="Shape 29"/>
           <p:cNvSpPr/>
           <p:nvPr/>
         </p:nvSpPr>
@@ -20424,7 +21747,7 @@
       </p:sp>
       <p:sp>
         <p:nvSpPr>
-          <p:cNvPr id="25" name="Text 23"/>
+          <p:cNvPr id="32" name="Text 30"/>
           <p:cNvSpPr txBox="1"/>
           <p:nvPr/>
         </p:nvSpPr>
@@ -20486,7 +21809,7 @@
       </p:sp>
       <p:pic>
         <p:nvPicPr>
-          <p:cNvPr id="27" name="Image 0" descr="/Users/tsengchenghsun/Class/carClass/Claude outputs/第四週(10-1)/src/logo.png">    </p:cNvPr>
+          <p:cNvPr id="34" name="Image 0" descr="/Users/tsengchenghsun/Class/carClass/Claude outputs/第四週(10-1)/src/logo.png">    </p:cNvPr>
           <p:cNvPicPr>
             <a:picLocks noChangeAspect="1"/>
           </p:cNvPicPr>
@@ -20510,7 +21833,7 @@
       </p:pic>
       <p:sp>
         <p:nvSpPr>
-          <p:cNvPr id="28" name="Text 24"/>
+          <p:cNvPr id="35" name="Text 31"/>
           <p:cNvSpPr txBox="1"/>
           <p:nvPr/>
         </p:nvSpPr>
@@ -20549,7 +21872,7 @@
       </p:sp>
       <p:sp>
         <p:nvSpPr>
-          <p:cNvPr id="29" name="Text 25"/>
+          <p:cNvPr id="36" name="Text 32"/>
           <p:cNvSpPr txBox="1"/>
           <p:nvPr/>
         </p:nvSpPr>
@@ -20684,15 +22007,15 @@
           <p:nvPr/>
         </p:nvSpPr>
         <p:spPr>
-          <a:xfrm flipH="1" flipV="1">
-            <a:off x="1649463" y="815016"/>
-            <a:ext cx="258789" cy="383670"/>
+          <a:xfrm flipV="1">
+            <a:off x="1638073" y="990872"/>
+            <a:ext cx="513913" cy="166980"/>
           </a:xfrm>
           <a:prstGeom prst="line">
             <a:avLst/>
           </a:prstGeom>
           <a:noFill/>
-          <a:ln w="15240">
+          <a:ln w="13970">
             <a:solidFill>
               <a:srgbClr val="1F4E79"/>
             </a:solidFill>
@@ -20707,15 +22030,15 @@
           <p:nvPr/>
         </p:nvSpPr>
         <p:spPr>
-          <a:xfrm flipH="1" flipV="1">
-            <a:off x="1772946" y="756118"/>
-            <a:ext cx="135307" cy="442568"/>
+          <a:xfrm flipV="1">
+            <a:off x="1638073" y="1045505"/>
+            <a:ext cx="528552" cy="112348"/>
           </a:xfrm>
           <a:prstGeom prst="line">
             <a:avLst/>
           </a:prstGeom>
           <a:noFill/>
-          <a:ln w="15240">
+          <a:ln w="13970">
             <a:solidFill>
               <a:srgbClr val="1F4E79"/>
             </a:solidFill>
@@ -20731,14 +22054,14 @@
         </p:nvSpPr>
         <p:spPr>
           <a:xfrm flipV="1">
-            <a:off x="1908252" y="735897"/>
-            <a:ext cx="1" cy="462790"/>
+            <a:off x="1638073" y="1101369"/>
+            <a:ext cx="537400" cy="56483"/>
           </a:xfrm>
           <a:prstGeom prst="line">
             <a:avLst/>
           </a:prstGeom>
           <a:noFill/>
-          <a:ln w="15240">
+          <a:ln w="13970">
             <a:solidFill>
               <a:srgbClr val="1F4E79"/>
             </a:solidFill>
@@ -20753,15 +22076,15 @@
           <p:nvPr/>
         </p:nvSpPr>
         <p:spPr>
-          <a:xfrm flipV="1">
-            <a:off x="1908252" y="756118"/>
-            <a:ext cx="135307" cy="442568"/>
+          <a:xfrm>
+            <a:off x="1638073" y="1157852"/>
+            <a:ext cx="540360" cy="1"/>
           </a:xfrm>
           <a:prstGeom prst="line">
             <a:avLst/>
           </a:prstGeom>
           <a:noFill/>
-          <a:ln w="15240">
+          <a:ln w="13970">
             <a:solidFill>
               <a:srgbClr val="1F4E79"/>
             </a:solidFill>
@@ -20776,15 +22099,15 @@
           <p:nvPr/>
         </p:nvSpPr>
         <p:spPr>
-          <a:xfrm flipV="1">
-            <a:off x="1908252" y="815016"/>
-            <a:ext cx="258789" cy="383670"/>
+          <a:xfrm>
+            <a:off x="1638073" y="1157852"/>
+            <a:ext cx="537400" cy="56483"/>
           </a:xfrm>
           <a:prstGeom prst="line">
             <a:avLst/>
           </a:prstGeom>
           <a:noFill/>
-          <a:ln w="15240">
+          <a:ln w="13970">
             <a:solidFill>
               <a:srgbClr val="1F4E79"/>
             </a:solidFill>
@@ -20800,34 +22123,14 @@
         </p:nvSpPr>
         <p:spPr>
           <a:xfrm>
-            <a:off x="1879156" y="1169590"/>
-            <a:ext cx="58193" cy="58193"/>
-          </a:xfrm>
-          <a:prstGeom prst="ellipse">
-            <a:avLst/>
-          </a:prstGeom>
-          <a:solidFill>
-            <a:srgbClr val="1F4E79"/>
-          </a:solidFill>
-          <a:ln/>
-        </p:spPr>
-      </p:sp>
-      <p:sp>
-        <p:nvSpPr>
-          <p:cNvPr id="10" name="Shape 8"/>
-          <p:cNvSpPr/>
-          <p:nvPr/>
-        </p:nvSpPr>
-        <p:spPr>
-          <a:xfrm flipH="1" flipV="1">
-            <a:off x="1455576" y="1755817"/>
-            <a:ext cx="452676" cy="96219"/>
+            <a:off x="1638073" y="1157852"/>
+            <a:ext cx="528552" cy="112348"/>
           </a:xfrm>
           <a:prstGeom prst="line">
             <a:avLst/>
           </a:prstGeom>
           <a:noFill/>
-          <a:ln w="15240">
+          <a:ln w="13970">
             <a:solidFill>
               <a:srgbClr val="1F4E79"/>
             </a:solidFill>
@@ -20837,20 +22140,20 @@
       </p:sp>
       <p:sp>
         <p:nvSpPr>
-          <p:cNvPr id="11" name="Shape 9"/>
+          <p:cNvPr id="10" name="Shape 8"/>
           <p:cNvSpPr/>
           <p:nvPr/>
         </p:nvSpPr>
         <p:spPr>
-          <a:xfrm flipH="1" flipV="1">
-            <a:off x="1617009" y="1492381"/>
-            <a:ext cx="291243" cy="359655"/>
+          <a:xfrm>
+            <a:off x="1638073" y="1157852"/>
+            <a:ext cx="513913" cy="166980"/>
           </a:xfrm>
           <a:prstGeom prst="line">
             <a:avLst/>
           </a:prstGeom>
           <a:noFill/>
-          <a:ln w="15240">
+          <a:ln w="13970">
             <a:solidFill>
               <a:srgbClr val="1F4E79"/>
             </a:solidFill>
@@ -20860,20 +22163,79 @@
       </p:sp>
       <p:sp>
         <p:nvSpPr>
-          <p:cNvPr id="12" name="Shape 10"/>
+          <p:cNvPr id="11" name="Shape 9"/>
           <p:cNvSpPr/>
           <p:nvPr/>
         </p:nvSpPr>
         <p:spPr>
+          <a:xfrm>
+            <a:off x="1608976" y="1128756"/>
+            <a:ext cx="58193" cy="58193"/>
+          </a:xfrm>
+          <a:prstGeom prst="ellipse">
+            <a:avLst/>
+          </a:prstGeom>
+          <a:solidFill>
+            <a:srgbClr val="1F4E79"/>
+          </a:solidFill>
+          <a:ln/>
+        </p:spPr>
+      </p:sp>
+      <p:sp>
+        <p:nvSpPr>
+          <p:cNvPr id="12" name="Text 10"/>
+          <p:cNvSpPr txBox="1"/>
+          <p:nvPr/>
+        </p:nvSpPr>
+        <p:spPr>
+          <a:xfrm>
+            <a:off x="1388675" y="1035349"/>
+            <a:ext cx="187048" cy="245006"/>
+          </a:xfrm>
+          <a:prstGeom prst="rect">
+            <a:avLst/>
+          </a:prstGeom>
+          <a:noFill/>
+          <a:ln/>
+        </p:spPr>
+        <p:txBody>
+          <a:bodyPr wrap="square" lIns="0" tIns="0" rIns="0" bIns="0" rtlCol="0" anchor="ctr"/>
+          <a:lstStyle/>
+          <a:p>
+            <a:pPr algn="ctr" indent="0" marL="0">
+              <a:buNone/>
+            </a:pPr>
+            <a:r>
+              <a:rPr lang="en-US" sz="600" b="1" dirty="0">
+                <a:solidFill>
+                  <a:srgbClr val="1F4E79"/>
+                </a:solidFill>
+                <a:latin typeface="Arial" pitchFamily="34" charset="0"/>
+                <a:ea typeface="Arial" pitchFamily="34" charset="-122"/>
+                <a:cs typeface="Arial" pitchFamily="34" charset="-120"/>
+              </a:rPr>
+              <a:t>窄</a:t>
+            </a:r>
+            <a:endParaRPr lang="en-US" sz="600" dirty="0"/>
+          </a:p>
+        </p:txBody>
+      </p:sp>
+      <p:sp>
+        <p:nvSpPr>
+          <p:cNvPr id="13" name="Shape 11"/>
+          <p:cNvSpPr/>
+          <p:nvPr/>
+        </p:nvSpPr>
+        <p:spPr>
           <a:xfrm flipV="1">
-            <a:off x="1908252" y="1389247"/>
-            <a:ext cx="1" cy="462790"/>
+            <a:off x="1638073" y="1306869"/>
+            <a:ext cx="253684" cy="477110"/>
           </a:xfrm>
           <a:prstGeom prst="line">
             <a:avLst/>
           </a:prstGeom>
           <a:noFill/>
-          <a:ln w="15240">
+          <a:ln w="13970">
             <a:solidFill>
               <a:srgbClr val="1F4E79"/>
             </a:solidFill>
@@ -20883,20 +22245,20 @@
       </p:sp>
       <p:sp>
         <p:nvSpPr>
-          <p:cNvPr id="13" name="Shape 11"/>
+          <p:cNvPr id="14" name="Shape 12"/>
           <p:cNvSpPr/>
           <p:nvPr/>
         </p:nvSpPr>
         <p:spPr>
           <a:xfrm flipV="1">
-            <a:off x="1908252" y="1492381"/>
-            <a:ext cx="291243" cy="359655"/>
+            <a:off x="1638073" y="1427104"/>
+            <a:ext cx="405746" cy="356875"/>
           </a:xfrm>
           <a:prstGeom prst="line">
             <a:avLst/>
           </a:prstGeom>
           <a:noFill/>
-          <a:ln w="15240">
+          <a:ln w="13970">
             <a:solidFill>
               <a:srgbClr val="1F4E79"/>
             </a:solidFill>
@@ -20906,20 +22268,20 @@
       </p:sp>
       <p:sp>
         <p:nvSpPr>
-          <p:cNvPr id="14" name="Shape 12"/>
+          <p:cNvPr id="15" name="Shape 13"/>
           <p:cNvSpPr/>
           <p:nvPr/>
         </p:nvSpPr>
         <p:spPr>
           <a:xfrm flipV="1">
-            <a:off x="1908252" y="1755817"/>
-            <a:ext cx="452676" cy="96219"/>
+            <a:off x="1638073" y="1593269"/>
+            <a:ext cx="505588" cy="190709"/>
           </a:xfrm>
           <a:prstGeom prst="line">
             <a:avLst/>
           </a:prstGeom>
           <a:noFill/>
-          <a:ln w="15240">
+          <a:ln w="13970">
             <a:solidFill>
               <a:srgbClr val="1F4E79"/>
             </a:solidFill>
@@ -20929,13 +22291,105 @@
       </p:sp>
       <p:sp>
         <p:nvSpPr>
-          <p:cNvPr id="15" name="Shape 13"/>
+          <p:cNvPr id="16" name="Shape 14"/>
           <p:cNvSpPr/>
           <p:nvPr/>
         </p:nvSpPr>
         <p:spPr>
           <a:xfrm>
-            <a:off x="1879156" y="1822940"/>
+            <a:off x="1638073" y="1783979"/>
+            <a:ext cx="540360" cy="1"/>
+          </a:xfrm>
+          <a:prstGeom prst="line">
+            <a:avLst/>
+          </a:prstGeom>
+          <a:noFill/>
+          <a:ln w="13970">
+            <a:solidFill>
+              <a:srgbClr val="1F4E79"/>
+            </a:solidFill>
+            <a:prstDash val="solid"/>
+          </a:ln>
+        </p:spPr>
+      </p:sp>
+      <p:sp>
+        <p:nvSpPr>
+          <p:cNvPr id="17" name="Shape 15"/>
+          <p:cNvSpPr/>
+          <p:nvPr/>
+        </p:nvSpPr>
+        <p:spPr>
+          <a:xfrm>
+            <a:off x="1638073" y="1783979"/>
+            <a:ext cx="505588" cy="190709"/>
+          </a:xfrm>
+          <a:prstGeom prst="line">
+            <a:avLst/>
+          </a:prstGeom>
+          <a:noFill/>
+          <a:ln w="13970">
+            <a:solidFill>
+              <a:srgbClr val="1F4E79"/>
+            </a:solidFill>
+            <a:prstDash val="solid"/>
+          </a:ln>
+        </p:spPr>
+      </p:sp>
+      <p:sp>
+        <p:nvSpPr>
+          <p:cNvPr id="18" name="Shape 16"/>
+          <p:cNvSpPr/>
+          <p:nvPr/>
+        </p:nvSpPr>
+        <p:spPr>
+          <a:xfrm>
+            <a:off x="1638073" y="1783979"/>
+            <a:ext cx="405746" cy="356875"/>
+          </a:xfrm>
+          <a:prstGeom prst="line">
+            <a:avLst/>
+          </a:prstGeom>
+          <a:noFill/>
+          <a:ln w="13970">
+            <a:solidFill>
+              <a:srgbClr val="1F4E79"/>
+            </a:solidFill>
+            <a:prstDash val="solid"/>
+          </a:ln>
+        </p:spPr>
+      </p:sp>
+      <p:sp>
+        <p:nvSpPr>
+          <p:cNvPr id="19" name="Shape 17"/>
+          <p:cNvSpPr/>
+          <p:nvPr/>
+        </p:nvSpPr>
+        <p:spPr>
+          <a:xfrm>
+            <a:off x="1638073" y="1783979"/>
+            <a:ext cx="253684" cy="477110"/>
+          </a:xfrm>
+          <a:prstGeom prst="line">
+            <a:avLst/>
+          </a:prstGeom>
+          <a:noFill/>
+          <a:ln w="13970">
+            <a:solidFill>
+              <a:srgbClr val="1F4E79"/>
+            </a:solidFill>
+            <a:prstDash val="solid"/>
+          </a:ln>
+        </p:spPr>
+      </p:sp>
+      <p:sp>
+        <p:nvSpPr>
+          <p:cNvPr id="20" name="Shape 18"/>
+          <p:cNvSpPr/>
+          <p:nvPr/>
+        </p:nvSpPr>
+        <p:spPr>
+          <a:xfrm>
+            <a:off x="1608976" y="1754883"/>
             <a:ext cx="58193" cy="58193"/>
           </a:xfrm>
           <a:prstGeom prst="ellipse">
@@ -20949,7 +22403,107 @@
       </p:sp>
       <p:sp>
         <p:nvSpPr>
-          <p:cNvPr id="16" name="Text 14"/>
+          <p:cNvPr id="21" name="Text 19"/>
+          <p:cNvSpPr txBox="1"/>
+          <p:nvPr/>
+        </p:nvSpPr>
+        <p:spPr>
+          <a:xfrm>
+            <a:off x="1388675" y="1661476"/>
+            <a:ext cx="187048" cy="245006"/>
+          </a:xfrm>
+          <a:prstGeom prst="rect">
+            <a:avLst/>
+          </a:prstGeom>
+          <a:noFill/>
+          <a:ln/>
+        </p:spPr>
+        <p:txBody>
+          <a:bodyPr wrap="square" lIns="0" tIns="0" rIns="0" bIns="0" rtlCol="0" anchor="ctr"/>
+          <a:lstStyle/>
+          <a:p>
+            <a:pPr algn="ctr" indent="0" marL="0">
+              <a:buNone/>
+            </a:pPr>
+            <a:r>
+              <a:rPr lang="en-US" sz="600" b="1" dirty="0">
+                <a:solidFill>
+                  <a:srgbClr val="1F4E79"/>
+                </a:solidFill>
+                <a:latin typeface="Arial" pitchFamily="34" charset="0"/>
+                <a:ea typeface="Arial" pitchFamily="34" charset="-122"/>
+                <a:cs typeface="Arial" pitchFamily="34" charset="-120"/>
+              </a:rPr>
+              <a:t>寬</a:t>
+            </a:r>
+            <a:endParaRPr lang="en-US" sz="600" dirty="0"/>
+          </a:p>
+        </p:txBody>
+      </p:sp>
+      <p:sp>
+        <p:nvSpPr>
+          <p:cNvPr id="22" name="Shape 20"/>
+          <p:cNvSpPr/>
+          <p:nvPr/>
+        </p:nvSpPr>
+        <p:spPr>
+          <a:xfrm>
+            <a:off x="2021783" y="1819954"/>
+            <a:ext cx="83132" cy="83132"/>
+          </a:xfrm>
+          <a:prstGeom prst="roundRect">
+            <a:avLst>
+              <a:gd name="adj" fmla="val 22500"/>
+            </a:avLst>
+          </a:prstGeom>
+          <a:solidFill>
+            <a:srgbClr val="D9463E"/>
+          </a:solidFill>
+          <a:ln/>
+        </p:spPr>
+      </p:sp>
+      <p:sp>
+        <p:nvSpPr>
+          <p:cNvPr id="23" name="Text 21"/>
+          <p:cNvSpPr txBox="1"/>
+          <p:nvPr/>
+        </p:nvSpPr>
+        <p:spPr>
+          <a:xfrm>
+            <a:off x="2032951" y="1974539"/>
+            <a:ext cx="394878" cy="190561"/>
+          </a:xfrm>
+          <a:prstGeom prst="rect">
+            <a:avLst/>
+          </a:prstGeom>
+          <a:noFill/>
+          <a:ln/>
+        </p:spPr>
+        <p:txBody>
+          <a:bodyPr wrap="square" lIns="0" tIns="0" rIns="0" bIns="0" rtlCol="0" anchor="ctr"/>
+          <a:lstStyle/>
+          <a:p>
+            <a:pPr algn="ctr" indent="0" marL="0">
+              <a:buNone/>
+            </a:pPr>
+            <a:r>
+              <a:rPr lang="en-US" sz="520" b="1" dirty="0">
+                <a:solidFill>
+                  <a:srgbClr val="D9463E"/>
+                </a:solidFill>
+                <a:latin typeface="Arial" pitchFamily="34" charset="0"/>
+                <a:ea typeface="Arial" pitchFamily="34" charset="-122"/>
+                <a:cs typeface="Arial" pitchFamily="34" charset="-120"/>
+              </a:rPr>
+              <a:t>縫變寬</a:t>
+            </a:r>
+            <a:endParaRPr lang="en-US" sz="520" dirty="0"/>
+          </a:p>
+        </p:txBody>
+      </p:sp>
+      <p:sp>
+        <p:nvSpPr>
+          <p:cNvPr id="24" name="Text 22"/>
           <p:cNvSpPr txBox="1"/>
           <p:nvPr/>
         </p:nvSpPr>
@@ -21011,7 +22565,7 @@
       </p:sp>
       <p:sp>
         <p:nvSpPr>
-          <p:cNvPr id="17" name="Shape 15"/>
+          <p:cNvPr id="25" name="Shape 23"/>
           <p:cNvSpPr/>
           <p:nvPr/>
         </p:nvSpPr>
@@ -21033,7 +22587,7 @@
       </p:sp>
       <p:sp>
         <p:nvSpPr>
-          <p:cNvPr id="18" name="Text 16"/>
+          <p:cNvPr id="26" name="Text 24"/>
           <p:cNvSpPr txBox="1"/>
           <p:nvPr/>
         </p:nvSpPr>
@@ -21095,7 +22649,7 @@
       </p:sp>
       <p:sp>
         <p:nvSpPr>
-          <p:cNvPr id="19" name="Text 17"/>
+          <p:cNvPr id="27" name="Text 25"/>
           <p:cNvSpPr txBox="1"/>
           <p:nvPr/>
         </p:nvSpPr>
@@ -21157,7 +22711,7 @@
       </p:sp>
       <p:sp>
         <p:nvSpPr>
-          <p:cNvPr id="20" name="Shape 18"/>
+          <p:cNvPr id="28" name="Shape 26"/>
           <p:cNvSpPr/>
           <p:nvPr/>
         </p:nvSpPr>
@@ -21179,7 +22733,7 @@
       </p:sp>
       <p:sp>
         <p:nvSpPr>
-          <p:cNvPr id="21" name="Text 19"/>
+          <p:cNvPr id="29" name="Text 27"/>
           <p:cNvSpPr txBox="1"/>
           <p:nvPr/>
         </p:nvSpPr>
@@ -21241,7 +22795,7 @@
       </p:sp>
       <p:sp>
         <p:nvSpPr>
-          <p:cNvPr id="22" name="Text 20"/>
+          <p:cNvPr id="30" name="Text 28"/>
           <p:cNvSpPr txBox="1"/>
           <p:nvPr/>
         </p:nvSpPr>
@@ -21303,7 +22857,7 @@
       </p:sp>
       <p:sp>
         <p:nvSpPr>
-          <p:cNvPr id="23" name="Shape 21"/>
+          <p:cNvPr id="31" name="Shape 29"/>
           <p:cNvSpPr/>
           <p:nvPr/>
         </p:nvSpPr>
@@ -21325,7 +22879,7 @@
       </p:sp>
       <p:sp>
         <p:nvSpPr>
-          <p:cNvPr id="24" name="Text 22"/>
+          <p:cNvPr id="32" name="Text 30"/>
           <p:cNvSpPr txBox="1"/>
           <p:nvPr/>
         </p:nvSpPr>
@@ -21387,7 +22941,7 @@
       </p:sp>
       <p:sp>
         <p:nvSpPr>
-          <p:cNvPr id="25" name="Text 23"/>
+          <p:cNvPr id="33" name="Text 31"/>
           <p:cNvSpPr txBox="1"/>
           <p:nvPr/>
         </p:nvSpPr>
@@ -21449,7 +23003,7 @@
       </p:sp>
       <p:sp>
         <p:nvSpPr>
-          <p:cNvPr id="26" name="Shape 24"/>
+          <p:cNvPr id="34" name="Shape 32"/>
           <p:cNvSpPr/>
           <p:nvPr/>
         </p:nvSpPr>
@@ -21471,7 +23025,7 @@
       </p:sp>
       <p:sp>
         <p:nvSpPr>
-          <p:cNvPr id="27" name="Text 25"/>
+          <p:cNvPr id="35" name="Text 33"/>
           <p:cNvSpPr txBox="1"/>
           <p:nvPr/>
         </p:nvSpPr>
@@ -21533,7 +23087,7 @@
       </p:sp>
       <p:sp>
         <p:nvSpPr>
-          <p:cNvPr id="28" name="Text 26"/>
+          <p:cNvPr id="36" name="Text 34"/>
           <p:cNvSpPr txBox="1"/>
           <p:nvPr/>
         </p:nvSpPr>
@@ -21595,7 +23149,7 @@
       </p:sp>
       <p:sp>
         <p:nvSpPr>
-          <p:cNvPr id="29" name="Shape 27"/>
+          <p:cNvPr id="37" name="Shape 35"/>
           <p:cNvSpPr/>
           <p:nvPr/>
         </p:nvSpPr>
@@ -21622,7 +23176,7 @@
       </p:sp>
       <p:sp>
         <p:nvSpPr>
-          <p:cNvPr id="30" name="Text 28"/>
+          <p:cNvPr id="38" name="Text 36"/>
           <p:cNvSpPr txBox="1"/>
           <p:nvPr/>
         </p:nvSpPr>
@@ -21684,7 +23238,7 @@
       </p:sp>
       <p:pic>
         <p:nvPicPr>
-          <p:cNvPr id="32" name="Image 0" descr="/Users/tsengchenghsun/Class/carClass/Claude outputs/第四週(10-1)/src/logo.png">    </p:cNvPr>
+          <p:cNvPr id="40" name="Image 0" descr="/Users/tsengchenghsun/Class/carClass/Claude outputs/第四週(10-1)/src/logo.png">    </p:cNvPr>
           <p:cNvPicPr>
             <a:picLocks noChangeAspect="1"/>
           </p:cNvPicPr>
@@ -21708,7 +23262,7 @@
       </p:pic>
       <p:sp>
         <p:nvSpPr>
-          <p:cNvPr id="33" name="Text 29"/>
+          <p:cNvPr id="41" name="Text 37"/>
           <p:cNvSpPr txBox="1"/>
           <p:nvPr/>
         </p:nvSpPr>
@@ -21747,7 +23301,7 @@
       </p:sp>
       <p:sp>
         <p:nvSpPr>
-          <p:cNvPr id="34" name="Text 30"/>
+          <p:cNvPr id="42" name="Text 38"/>
           <p:cNvSpPr txBox="1"/>
           <p:nvPr/>
         </p:nvSpPr>
@@ -24283,7 +25837,7 @@
       </p:nvGrpSpPr>
       <p:grpSpPr>
         <a:xfrm>
-          <a:off x="1107444" y="0"/>
+          <a:off x="984082" y="0"/>
           <a:ext cx="1" cy="1"/>
           <a:chOff x="0" y="0"/>
           <a:chExt cx="0" cy="0"/>
@@ -24297,8 +25851,8 @@
         </p:nvSpPr>
         <p:spPr>
           <a:xfrm>
-            <a:off x="1488546" y="221732"/>
-            <a:ext cx="6166909" cy="637478"/>
+            <a:off x="1378753" y="229627"/>
+            <a:ext cx="6386494" cy="660177"/>
           </a:xfrm>
           <a:prstGeom prst="rect">
             <a:avLst/>
@@ -24317,7 +25871,7 @@
               <a:buNone/>
             </a:pPr>
             <a:r>
-              <a:rPr lang="en-US" sz="1670" b="1" dirty="0">
+              <a:rPr lang="en-US" sz="1730" b="1" dirty="0">
                 <a:solidFill>
                   <a:srgbClr val="0B1F3A"/>
                 </a:solidFill>
@@ -24327,7 +25881,7 @@
               </a:rPr>
               <a:t>Bốn tốc độ, bốn yêu cầu tối thiểu cho chiều dài tia</a:t>
             </a:r>
-            <a:endParaRPr lang="en-US" sz="1670" dirty="0"/>
+            <a:endParaRPr lang="en-US" sz="1730" dirty="0"/>
           </a:p>
           <a:p>
             <a:pPr indent="0" marL="0">
@@ -24337,7 +25891,7 @@
               <a:buNone/>
             </a:pPr>
             <a:r>
-              <a:rPr lang="en-US" sz="1020" dirty="0">
+              <a:rPr lang="en-US" sz="1060" dirty="0">
                 <a:solidFill>
                   <a:srgbClr val="5F7183"/>
                 </a:solidFill>
@@ -24347,7 +25901,7 @@
               </a:rPr>
               <a:t>四個車速，射線長度的四個最低要求</a:t>
             </a:r>
-            <a:endParaRPr lang="en-US" sz="1670" dirty="0"/>
+            <a:endParaRPr lang="en-US" sz="1730" dirty="0"/>
           </a:p>
         </p:txBody>
       </p:sp>
@@ -24359,8 +25913,8 @@
         </p:nvSpPr>
         <p:spPr>
           <a:xfrm>
-            <a:off x="1488546" y="859210"/>
-            <a:ext cx="6166909" cy="540471"/>
+            <a:off x="1378753" y="889804"/>
+            <a:ext cx="6386494" cy="559715"/>
           </a:xfrm>
           <a:prstGeom prst="roundRect">
             <a:avLst>
@@ -24381,8 +25935,8 @@
         </p:nvSpPr>
         <p:spPr>
           <a:xfrm>
-            <a:off x="1599411" y="914643"/>
-            <a:ext cx="5945177" cy="429605"/>
+            <a:off x="1493566" y="947210"/>
+            <a:ext cx="6156868" cy="444902"/>
           </a:xfrm>
           <a:prstGeom prst="rect">
             <a:avLst/>
@@ -24401,7 +25955,7 @@
               <a:buNone/>
             </a:pPr>
             <a:r>
-              <a:rPr lang="en-US" sz="870" b="1" dirty="0">
+              <a:rPr lang="en-US" sz="900" b="1" dirty="0">
                 <a:solidFill>
                   <a:srgbClr val="007F72"/>
                 </a:solidFill>
@@ -24411,7 +25965,7 @@
               </a:rPr>
               <a:t>Tính bằng công thức trang trước. Cột cuối đã cộng thêm 5 m dự phòng.</a:t>
             </a:r>
-            <a:endParaRPr lang="en-US" sz="870" dirty="0"/>
+            <a:endParaRPr lang="en-US" sz="900" dirty="0"/>
           </a:p>
           <a:p>
             <a:pPr indent="0" marL="0">
@@ -24421,7 +25975,7 @@
               <a:buNone/>
             </a:pPr>
             <a:r>
-              <a:rPr lang="en-US" sz="760" dirty="0">
+              <a:rPr lang="en-US" sz="780" dirty="0">
                 <a:solidFill>
                   <a:srgbClr val="007F72"/>
                 </a:solidFill>
@@ -24431,7 +25985,7 @@
               </a:rPr>
               <a:t>用上一頁那條公式算出來的。最後一欄已經加了 5 公尺餘裕。</a:t>
             </a:r>
-            <a:endParaRPr lang="en-US" sz="870" dirty="0"/>
+            <a:endParaRPr lang="en-US" sz="900" dirty="0"/>
           </a:p>
         </p:txBody>
       </p:sp>
@@ -24450,21 +26004,21 @@
           </p:nvPr>
         </p:nvGraphicFramePr>
         <p:xfrm>
-          <a:off x="1488546" y="1482830"/>
-          <a:ext cx="6166909" cy="692911"/>
+          <a:off x="1378753" y="1535629"/>
+          <a:ext cx="6386494" cy="717584"/>
         </p:xfrm>
         <a:graphic>
           <a:graphicData uri="http://schemas.openxmlformats.org/drawingml/2006/table">
             <a:tbl>
               <a:tblPr/>
               <a:tblGrid>
-                <a:gridCol w="914400"/>
-                <a:gridCol w="914400"/>
-                <a:gridCol w="1005840"/>
-                <a:gridCol w="1051560"/>
-                <a:gridCol w="4251960"/>
+                <a:gridCol w="717584"/>
+                <a:gridCol w="717584"/>
+                <a:gridCol w="789342"/>
+                <a:gridCol w="825221"/>
+                <a:gridCol w="3336764"/>
               </a:tblGrid>
-              <a:tr h="420624">
+              <a:tr h="272682">
                 <a:tc>
                   <a:txBody>
                     <a:bodyPr/>
@@ -24474,7 +26028,7 @@
                         <a:buNone/>
                       </a:pPr>
                       <a:r>
-                        <a:rPr lang="en-US" sz="830" b="1" dirty="0">
+                        <a:rPr lang="en-US" sz="780" b="1" dirty="0">
                           <a:solidFill>
                             <a:srgbClr val="FFFFFF"/>
                           </a:solidFill>
@@ -24484,14 +26038,14 @@
                         </a:rPr>
                         <a:t>Tốc độ</a:t>
                       </a:r>
-                      <a:endParaRPr lang="en-US" sz="910" dirty="0"/>
+                      <a:endParaRPr lang="en-US" sz="940" dirty="0"/>
                     </a:p>
                     <a:p>
                       <a:pPr algn="l" indent="0" marL="0">
                         <a:buNone/>
                       </a:pPr>
                       <a:r>
-                        <a:rPr lang="en-US" sz="720" dirty="0">
+                        <a:rPr lang="en-US" sz="670" dirty="0">
                           <a:solidFill>
                             <a:srgbClr val="CFE0EC"/>
                           </a:solidFill>
@@ -24501,7 +26055,7 @@
                         </a:rPr>
                         <a:t>車速</a:t>
                       </a:r>
-                      <a:endParaRPr lang="en-US" sz="910" dirty="0"/>
+                      <a:endParaRPr lang="en-US" sz="940" dirty="0"/>
                     </a:p>
                   </a:txBody>
                   <a:tcPr marL="63500" marR="63500" marT="38100" marB="38100" anchor="ctr">
@@ -24555,7 +26109,7 @@
                         <a:buNone/>
                       </a:pPr>
                       <a:r>
-                        <a:rPr lang="en-US" sz="830" b="1" dirty="0">
+                        <a:rPr lang="en-US" sz="780" b="1" dirty="0">
                           <a:solidFill>
                             <a:srgbClr val="FFFFFF"/>
                           </a:solidFill>
@@ -24565,14 +26119,14 @@
                         </a:rPr>
                         <a:t>m/s</a:t>
                       </a:r>
-                      <a:endParaRPr lang="en-US" sz="910" dirty="0"/>
+                      <a:endParaRPr lang="en-US" sz="940" dirty="0"/>
                     </a:p>
                     <a:p>
                       <a:pPr algn="l" indent="0" marL="0">
                         <a:buNone/>
                       </a:pPr>
                       <a:r>
-                        <a:rPr lang="en-US" sz="720" dirty="0">
+                        <a:rPr lang="en-US" sz="670" dirty="0">
                           <a:solidFill>
                             <a:srgbClr val="CFE0EC"/>
                           </a:solidFill>
@@ -24582,7 +26136,7 @@
                         </a:rPr>
                         <a:t>每秒公尺</a:t>
                       </a:r>
-                      <a:endParaRPr lang="en-US" sz="910" dirty="0"/>
+                      <a:endParaRPr lang="en-US" sz="940" dirty="0"/>
                     </a:p>
                   </a:txBody>
                   <a:tcPr marL="63500" marR="63500" marT="38100" marB="38100" anchor="ctr">
@@ -24636,7 +26190,7 @@
                         <a:buNone/>
                       </a:pPr>
                       <a:r>
-                        <a:rPr lang="en-US" sz="830" b="1" dirty="0">
+                        <a:rPr lang="en-US" sz="780" b="1" dirty="0">
                           <a:solidFill>
                             <a:srgbClr val="FFFFFF"/>
                           </a:solidFill>
@@ -24646,14 +26200,14 @@
                         </a:rPr>
                         <a:t>Phanh</a:t>
                       </a:r>
-                      <a:endParaRPr lang="en-US" sz="910" dirty="0"/>
+                      <a:endParaRPr lang="en-US" sz="940" dirty="0"/>
                     </a:p>
                     <a:p>
                       <a:pPr algn="l" indent="0" marL="0">
                         <a:buNone/>
                       </a:pPr>
                       <a:r>
-                        <a:rPr lang="en-US" sz="720" dirty="0">
+                        <a:rPr lang="en-US" sz="670" dirty="0">
                           <a:solidFill>
                             <a:srgbClr val="CFE0EC"/>
                           </a:solidFill>
@@ -24663,7 +26217,7 @@
                         </a:rPr>
                         <a:t>煞停距離</a:t>
                       </a:r>
-                      <a:endParaRPr lang="en-US" sz="910" dirty="0"/>
+                      <a:endParaRPr lang="en-US" sz="940" dirty="0"/>
                     </a:p>
                   </a:txBody>
                   <a:tcPr marL="63500" marR="63500" marT="38100" marB="38100" anchor="ctr">
@@ -24717,7 +26271,7 @@
                         <a:buNone/>
                       </a:pPr>
                       <a:r>
-                        <a:rPr lang="en-US" sz="830" b="1" dirty="0">
+                        <a:rPr lang="en-US" sz="780" b="1" dirty="0">
                           <a:solidFill>
                             <a:srgbClr val="FFFFFF"/>
                           </a:solidFill>
@@ -24727,14 +26281,14 @@
                         </a:rPr>
                         <a:t>Tia tối thiểu</a:t>
                       </a:r>
-                      <a:endParaRPr lang="en-US" sz="910" dirty="0"/>
+                      <a:endParaRPr lang="en-US" sz="940" dirty="0"/>
                     </a:p>
                     <a:p>
                       <a:pPr algn="l" indent="0" marL="0">
                         <a:buNone/>
                       </a:pPr>
                       <a:r>
-                        <a:rPr lang="en-US" sz="720" dirty="0">
+                        <a:rPr lang="en-US" sz="670" dirty="0">
                           <a:solidFill>
                             <a:srgbClr val="CFE0EC"/>
                           </a:solidFill>
@@ -24744,7 +26298,7 @@
                         </a:rPr>
                         <a:t>射線至少</a:t>
                       </a:r>
-                      <a:endParaRPr lang="en-US" sz="910" dirty="0"/>
+                      <a:endParaRPr lang="en-US" sz="940" dirty="0"/>
                     </a:p>
                   </a:txBody>
                   <a:tcPr marL="63500" marR="63500" marT="38100" marB="38100" anchor="ctr">
@@ -24798,7 +26352,7 @@
                         <a:buNone/>
                       </a:pPr>
                       <a:r>
-                        <a:rPr lang="en-US" sz="830" b="1" dirty="0">
+                        <a:rPr lang="en-US" sz="780" b="1" dirty="0">
                           <a:solidFill>
                             <a:srgbClr val="FFFFFF"/>
                           </a:solidFill>
@@ -24808,14 +26362,14 @@
                         </a:rPr>
                         <a:t>Ở đâu gặp tốc độ này</a:t>
                       </a:r>
-                      <a:endParaRPr lang="en-US" sz="910" dirty="0"/>
+                      <a:endParaRPr lang="en-US" sz="940" dirty="0"/>
                     </a:p>
                     <a:p>
                       <a:pPr algn="l" indent="0" marL="0">
                         <a:buNone/>
                       </a:pPr>
                       <a:r>
-                        <a:rPr lang="en-US" sz="720" dirty="0">
+                        <a:rPr lang="en-US" sz="670" dirty="0">
                           <a:solidFill>
                             <a:srgbClr val="CFE0EC"/>
                           </a:solidFill>
@@ -24825,7 +26379,7 @@
                         </a:rPr>
                         <a:t>什麼地方會開到這個速度</a:t>
                       </a:r>
-                      <a:endParaRPr lang="en-US" sz="910" dirty="0"/>
+                      <a:endParaRPr lang="en-US" sz="940" dirty="0"/>
                     </a:p>
                   </a:txBody>
                   <a:tcPr marL="63500" marR="63500" marT="38100" marB="38100" anchor="ctr">
@@ -24871,7 +26425,7 @@
                   </a:tcPr>
                 </a:tc>
               </a:tr>
-              <a:tr h="420624">
+              <a:tr h="272682">
                 <a:tc>
                   <a:txBody>
                     <a:bodyPr/>
@@ -24881,7 +26435,7 @@
                         <a:buNone/>
                       </a:pPr>
                       <a:r>
-                        <a:rPr lang="en-US" sz="830" b="1" dirty="0">
+                        <a:rPr lang="en-US" sz="780" b="1" dirty="0">
                           <a:solidFill>
                             <a:srgbClr val="0B1F3A"/>
                           </a:solidFill>
@@ -24891,14 +26445,14 @@
                         </a:rPr>
                         <a:t>30 km/h</a:t>
                       </a:r>
-                      <a:endParaRPr lang="en-US" sz="910" dirty="0"/>
+                      <a:endParaRPr lang="en-US" sz="940" dirty="0"/>
                     </a:p>
                     <a:p>
                       <a:pPr algn="l" indent="0" marL="0">
                         <a:buNone/>
                       </a:pPr>
                       <a:r>
-                        <a:rPr lang="en-US" sz="720" dirty="0">
+                        <a:rPr lang="en-US" sz="670" dirty="0">
                           <a:solidFill>
                             <a:srgbClr val="5F7183"/>
                           </a:solidFill>
@@ -24908,7 +26462,7 @@
                         </a:rPr>
                         <a:t>時速 30</a:t>
                       </a:r>
-                      <a:endParaRPr lang="en-US" sz="910" dirty="0"/>
+                      <a:endParaRPr lang="en-US" sz="940" dirty="0"/>
                     </a:p>
                   </a:txBody>
                   <a:tcPr marL="63500" marR="63500" marT="38100" marB="38100" anchor="ctr">
@@ -24959,7 +26513,7 @@
                         <a:buNone/>
                       </a:pPr>
                       <a:r>
-                        <a:rPr lang="en-US" sz="830" dirty="0">
+                        <a:rPr lang="en-US" sz="780" dirty="0">
                           <a:solidFill>
                             <a:srgbClr val="1A2733"/>
                           </a:solidFill>
@@ -24969,7 +26523,7 @@
                         </a:rPr>
                         <a:t>8,3</a:t>
                       </a:r>
-                      <a:endParaRPr lang="en-US" sz="910" dirty="0"/>
+                      <a:endParaRPr lang="en-US" sz="940" dirty="0"/>
                     </a:p>
                   </a:txBody>
                   <a:tcPr marL="63500" marR="63500" marT="38100" marB="38100" anchor="ctr">
@@ -25020,7 +26574,7 @@
                         <a:buNone/>
                       </a:pPr>
                       <a:r>
-                        <a:rPr lang="en-US" sz="830" dirty="0">
+                        <a:rPr lang="en-US" sz="780" dirty="0">
                           <a:solidFill>
                             <a:srgbClr val="1A2733"/>
                           </a:solidFill>
@@ -25030,7 +26584,7 @@
                         </a:rPr>
                         <a:t>8 m</a:t>
                       </a:r>
-                      <a:endParaRPr lang="en-US" sz="910" dirty="0"/>
+                      <a:endParaRPr lang="en-US" sz="940" dirty="0"/>
                     </a:p>
                   </a:txBody>
                   <a:tcPr marL="63500" marR="63500" marT="38100" marB="38100" anchor="ctr">
@@ -25081,7 +26635,7 @@
                         <a:buNone/>
                       </a:pPr>
                       <a:r>
-                        <a:rPr lang="en-US" sz="830" dirty="0">
+                        <a:rPr lang="en-US" sz="780" dirty="0">
                           <a:solidFill>
                             <a:srgbClr val="1A2733"/>
                           </a:solidFill>
@@ -25091,7 +26645,7 @@
                         </a:rPr>
                         <a:t>10 m</a:t>
                       </a:r>
-                      <a:endParaRPr lang="en-US" sz="910" dirty="0"/>
+                      <a:endParaRPr lang="en-US" sz="940" dirty="0"/>
                     </a:p>
                   </a:txBody>
                   <a:tcPr marL="63500" marR="63500" marT="38100" marB="38100" anchor="ctr">
@@ -25142,7 +26696,7 @@
                         <a:buNone/>
                       </a:pPr>
                       <a:r>
-                        <a:rPr lang="en-US" sz="830" dirty="0">
+                        <a:rPr lang="en-US" sz="780" dirty="0">
                           <a:solidFill>
                             <a:srgbClr val="1A2733"/>
                           </a:solidFill>
@@ -25152,14 +26706,14 @@
                         </a:rPr>
                         <a:t>Trong ngõ, khu dân cư, trường học</a:t>
                       </a:r>
-                      <a:endParaRPr lang="en-US" sz="910" dirty="0"/>
+                      <a:endParaRPr lang="en-US" sz="940" dirty="0"/>
                     </a:p>
                     <a:p>
                       <a:pPr algn="l" indent="0" marL="0">
                         <a:buNone/>
                       </a:pPr>
                       <a:r>
-                        <a:rPr lang="en-US" sz="720" dirty="0">
+                        <a:rPr lang="en-US" sz="670" dirty="0">
                           <a:solidFill>
                             <a:srgbClr val="5F7183"/>
                           </a:solidFill>
@@ -25169,7 +26723,7 @@
                         </a:rPr>
                         <a:t>巷弄、社區、學校周邊</a:t>
                       </a:r>
-                      <a:endParaRPr lang="en-US" sz="910" dirty="0"/>
+                      <a:endParaRPr lang="en-US" sz="940" dirty="0"/>
                     </a:p>
                   </a:txBody>
                   <a:tcPr marL="63500" marR="63500" marT="38100" marB="38100" anchor="ctr">
@@ -25212,7 +26766,7 @@
                   </a:tcPr>
                 </a:tc>
               </a:tr>
-              <a:tr h="420624">
+              <a:tr h="272682">
                 <a:tc>
                   <a:txBody>
                     <a:bodyPr/>
@@ -25222,7 +26776,7 @@
                         <a:buNone/>
                       </a:pPr>
                       <a:r>
-                        <a:rPr lang="en-US" sz="830" b="1" dirty="0">
+                        <a:rPr lang="en-US" sz="780" b="1" dirty="0">
                           <a:solidFill>
                             <a:srgbClr val="0B1F3A"/>
                           </a:solidFill>
@@ -25232,14 +26786,14 @@
                         </a:rPr>
                         <a:t>50 km/h</a:t>
                       </a:r>
-                      <a:endParaRPr lang="en-US" sz="910" dirty="0"/>
+                      <a:endParaRPr lang="en-US" sz="940" dirty="0"/>
                     </a:p>
                     <a:p>
                       <a:pPr algn="l" indent="0" marL="0">
                         <a:buNone/>
                       </a:pPr>
                       <a:r>
-                        <a:rPr lang="en-US" sz="720" dirty="0">
+                        <a:rPr lang="en-US" sz="670" dirty="0">
                           <a:solidFill>
                             <a:srgbClr val="5F7183"/>
                           </a:solidFill>
@@ -25249,7 +26803,7 @@
                         </a:rPr>
                         <a:t>時速 50</a:t>
                       </a:r>
-                      <a:endParaRPr lang="en-US" sz="910" dirty="0"/>
+                      <a:endParaRPr lang="en-US" sz="940" dirty="0"/>
                     </a:p>
                   </a:txBody>
                   <a:tcPr marL="63500" marR="63500" marT="38100" marB="38100" anchor="ctr">
@@ -25300,7 +26854,7 @@
                         <a:buNone/>
                       </a:pPr>
                       <a:r>
-                        <a:rPr lang="en-US" sz="830" dirty="0">
+                        <a:rPr lang="en-US" sz="780" dirty="0">
                           <a:solidFill>
                             <a:srgbClr val="1A2733"/>
                           </a:solidFill>
@@ -25310,7 +26864,7 @@
                         </a:rPr>
                         <a:t>13,9</a:t>
                       </a:r>
-                      <a:endParaRPr lang="en-US" sz="910" dirty="0"/>
+                      <a:endParaRPr lang="en-US" sz="940" dirty="0"/>
                     </a:p>
                   </a:txBody>
                   <a:tcPr marL="63500" marR="63500" marT="38100" marB="38100" anchor="ctr">
@@ -25361,7 +26915,7 @@
                         <a:buNone/>
                       </a:pPr>
                       <a:r>
-                        <a:rPr lang="en-US" sz="830" dirty="0">
+                        <a:rPr lang="en-US" sz="780" dirty="0">
                           <a:solidFill>
                             <a:srgbClr val="1A2733"/>
                           </a:solidFill>
@@ -25371,7 +26925,7 @@
                         </a:rPr>
                         <a:t>20 m</a:t>
                       </a:r>
-                      <a:endParaRPr lang="en-US" sz="910" dirty="0"/>
+                      <a:endParaRPr lang="en-US" sz="940" dirty="0"/>
                     </a:p>
                   </a:txBody>
                   <a:tcPr marL="63500" marR="63500" marT="38100" marB="38100" anchor="ctr">
@@ -25422,7 +26976,7 @@
                         <a:buNone/>
                       </a:pPr>
                       <a:r>
-                        <a:rPr lang="en-US" sz="830" dirty="0">
+                        <a:rPr lang="en-US" sz="780" dirty="0">
                           <a:solidFill>
                             <a:srgbClr val="1A2733"/>
                           </a:solidFill>
@@ -25432,7 +26986,7 @@
                         </a:rPr>
                         <a:t>25 m</a:t>
                       </a:r>
-                      <a:endParaRPr lang="en-US" sz="910" dirty="0"/>
+                      <a:endParaRPr lang="en-US" sz="940" dirty="0"/>
                     </a:p>
                   </a:txBody>
                   <a:tcPr marL="63500" marR="63500" marT="38100" marB="38100" anchor="ctr">
@@ -25483,7 +27037,7 @@
                         <a:buNone/>
                       </a:pPr>
                       <a:r>
-                        <a:rPr lang="en-US" sz="830" dirty="0">
+                        <a:rPr lang="en-US" sz="780" dirty="0">
                           <a:solidFill>
                             <a:srgbClr val="1A2733"/>
                           </a:solidFill>
@@ -25493,14 +27047,14 @@
                         </a:rPr>
                         <a:t>Đường phố bình thường — tốc độ của bài tập hôm nay</a:t>
                       </a:r>
-                      <a:endParaRPr lang="en-US" sz="910" dirty="0"/>
+                      <a:endParaRPr lang="en-US" sz="940" dirty="0"/>
                     </a:p>
                     <a:p>
                       <a:pPr algn="l" indent="0" marL="0">
                         <a:buNone/>
                       </a:pPr>
                       <a:r>
-                        <a:rPr lang="en-US" sz="720" dirty="0">
+                        <a:rPr lang="en-US" sz="670" dirty="0">
                           <a:solidFill>
                             <a:srgbClr val="5F7183"/>
                           </a:solidFill>
@@ -25510,7 +27064,7 @@
                         </a:rPr>
                         <a:t>一般市區道路——今天上機用的就是這個</a:t>
                       </a:r>
-                      <a:endParaRPr lang="en-US" sz="910" dirty="0"/>
+                      <a:endParaRPr lang="en-US" sz="940" dirty="0"/>
                     </a:p>
                   </a:txBody>
                   <a:tcPr marL="63500" marR="63500" marT="38100" marB="38100" anchor="ctr">
@@ -25553,7 +27107,7 @@
                   </a:tcPr>
                 </a:tc>
               </a:tr>
-              <a:tr h="420624">
+              <a:tr h="272682">
                 <a:tc>
                   <a:txBody>
                     <a:bodyPr/>
@@ -25563,7 +27117,7 @@
                         <a:buNone/>
                       </a:pPr>
                       <a:r>
-                        <a:rPr lang="en-US" sz="830" b="1" dirty="0">
+                        <a:rPr lang="en-US" sz="780" b="1" dirty="0">
                           <a:solidFill>
                             <a:srgbClr val="0B1F3A"/>
                           </a:solidFill>
@@ -25573,14 +27127,14 @@
                         </a:rPr>
                         <a:t>60 km/h</a:t>
                       </a:r>
-                      <a:endParaRPr lang="en-US" sz="910" dirty="0"/>
+                      <a:endParaRPr lang="en-US" sz="940" dirty="0"/>
                     </a:p>
                     <a:p>
                       <a:pPr algn="l" indent="0" marL="0">
                         <a:buNone/>
                       </a:pPr>
                       <a:r>
-                        <a:rPr lang="en-US" sz="720" dirty="0">
+                        <a:rPr lang="en-US" sz="670" dirty="0">
                           <a:solidFill>
                             <a:srgbClr val="5F7183"/>
                           </a:solidFill>
@@ -25590,7 +27144,7 @@
                         </a:rPr>
                         <a:t>時速 60</a:t>
                       </a:r>
-                      <a:endParaRPr lang="en-US" sz="910" dirty="0"/>
+                      <a:endParaRPr lang="en-US" sz="940" dirty="0"/>
                     </a:p>
                   </a:txBody>
                   <a:tcPr marL="63500" marR="63500" marT="38100" marB="38100" anchor="ctr">
@@ -25641,7 +27195,7 @@
                         <a:buNone/>
                       </a:pPr>
                       <a:r>
-                        <a:rPr lang="en-US" sz="830" dirty="0">
+                        <a:rPr lang="en-US" sz="780" dirty="0">
                           <a:solidFill>
                             <a:srgbClr val="1A2733"/>
                           </a:solidFill>
@@ -25651,7 +27205,7 @@
                         </a:rPr>
                         <a:t>16,7</a:t>
                       </a:r>
-                      <a:endParaRPr lang="en-US" sz="910" dirty="0"/>
+                      <a:endParaRPr lang="en-US" sz="940" dirty="0"/>
                     </a:p>
                   </a:txBody>
                   <a:tcPr marL="63500" marR="63500" marT="38100" marB="38100" anchor="ctr">
@@ -25702,7 +27256,7 @@
                         <a:buNone/>
                       </a:pPr>
                       <a:r>
-                        <a:rPr lang="en-US" sz="830" dirty="0">
+                        <a:rPr lang="en-US" sz="780" dirty="0">
                           <a:solidFill>
                             <a:srgbClr val="1A2733"/>
                           </a:solidFill>
@@ -25712,7 +27266,7 @@
                         </a:rPr>
                         <a:t>28 m</a:t>
                       </a:r>
-                      <a:endParaRPr lang="en-US" sz="910" dirty="0"/>
+                      <a:endParaRPr lang="en-US" sz="940" dirty="0"/>
                     </a:p>
                   </a:txBody>
                   <a:tcPr marL="63500" marR="63500" marT="38100" marB="38100" anchor="ctr">
@@ -25763,7 +27317,7 @@
                         <a:buNone/>
                       </a:pPr>
                       <a:r>
-                        <a:rPr lang="en-US" sz="830" dirty="0">
+                        <a:rPr lang="en-US" sz="780" dirty="0">
                           <a:solidFill>
                             <a:srgbClr val="1A2733"/>
                           </a:solidFill>
@@ -25773,7 +27327,7 @@
                         </a:rPr>
                         <a:t>35 m</a:t>
                       </a:r>
-                      <a:endParaRPr lang="en-US" sz="910" dirty="0"/>
+                      <a:endParaRPr lang="en-US" sz="940" dirty="0"/>
                     </a:p>
                   </a:txBody>
                   <a:tcPr marL="63500" marR="63500" marT="38100" marB="38100" anchor="ctr">
@@ -25824,7 +27378,7 @@
                         <a:buNone/>
                       </a:pPr>
                       <a:r>
-                        <a:rPr lang="en-US" sz="830" dirty="0">
+                        <a:rPr lang="en-US" sz="780" dirty="0">
                           <a:solidFill>
                             <a:srgbClr val="1A2733"/>
                           </a:solidFill>
@@ -25834,14 +27388,14 @@
                         </a:rPr>
                         <a:t>Đường lớn, đường vành đai</a:t>
                       </a:r>
-                      <a:endParaRPr lang="en-US" sz="910" dirty="0"/>
+                      <a:endParaRPr lang="en-US" sz="940" dirty="0"/>
                     </a:p>
                     <a:p>
                       <a:pPr algn="l" indent="0" marL="0">
                         <a:buNone/>
                       </a:pPr>
                       <a:r>
-                        <a:rPr lang="en-US" sz="720" dirty="0">
+                        <a:rPr lang="en-US" sz="670" dirty="0">
                           <a:solidFill>
                             <a:srgbClr val="5F7183"/>
                           </a:solidFill>
@@ -25851,7 +27405,7 @@
                         </a:rPr>
                         <a:t>大馬路、外環道</a:t>
                       </a:r>
-                      <a:endParaRPr lang="en-US" sz="910" dirty="0"/>
+                      <a:endParaRPr lang="en-US" sz="940" dirty="0"/>
                     </a:p>
                   </a:txBody>
                   <a:tcPr marL="63500" marR="63500" marT="38100" marB="38100" anchor="ctr">
@@ -25894,7 +27448,7 @@
                   </a:tcPr>
                 </a:tc>
               </a:tr>
-              <a:tr h="420624">
+              <a:tr h="272682">
                 <a:tc>
                   <a:txBody>
                     <a:bodyPr/>
@@ -25904,7 +27458,7 @@
                         <a:buNone/>
                       </a:pPr>
                       <a:r>
-                        <a:rPr lang="en-US" sz="830" b="1" dirty="0">
+                        <a:rPr lang="en-US" sz="780" b="1" dirty="0">
                           <a:solidFill>
                             <a:srgbClr val="0B1F3A"/>
                           </a:solidFill>
@@ -25914,14 +27468,14 @@
                         </a:rPr>
                         <a:t>80 km/h</a:t>
                       </a:r>
-                      <a:endParaRPr lang="en-US" sz="910" dirty="0"/>
+                      <a:endParaRPr lang="en-US" sz="940" dirty="0"/>
                     </a:p>
                     <a:p>
                       <a:pPr algn="l" indent="0" marL="0">
                         <a:buNone/>
                       </a:pPr>
                       <a:r>
-                        <a:rPr lang="en-US" sz="720" dirty="0">
+                        <a:rPr lang="en-US" sz="670" dirty="0">
                           <a:solidFill>
                             <a:srgbClr val="5F7183"/>
                           </a:solidFill>
@@ -25931,7 +27485,7 @@
                         </a:rPr>
                         <a:t>時速 80</a:t>
                       </a:r>
-                      <a:endParaRPr lang="en-US" sz="910" dirty="0"/>
+                      <a:endParaRPr lang="en-US" sz="940" dirty="0"/>
                     </a:p>
                   </a:txBody>
                   <a:tcPr marL="63500" marR="63500" marT="38100" marB="38100" anchor="ctr">
@@ -25982,7 +27536,7 @@
                         <a:buNone/>
                       </a:pPr>
                       <a:r>
-                        <a:rPr lang="en-US" sz="830" dirty="0">
+                        <a:rPr lang="en-US" sz="780" dirty="0">
                           <a:solidFill>
                             <a:srgbClr val="1A2733"/>
                           </a:solidFill>
@@ -25992,7 +27546,7 @@
                         </a:rPr>
                         <a:t>22,2</a:t>
                       </a:r>
-                      <a:endParaRPr lang="en-US" sz="910" dirty="0"/>
+                      <a:endParaRPr lang="en-US" sz="940" dirty="0"/>
                     </a:p>
                   </a:txBody>
                   <a:tcPr marL="63500" marR="63500" marT="38100" marB="38100" anchor="ctr">
@@ -26043,7 +27597,7 @@
                         <a:buNone/>
                       </a:pPr>
                       <a:r>
-                        <a:rPr lang="en-US" sz="830" dirty="0">
+                        <a:rPr lang="en-US" sz="780" dirty="0">
                           <a:solidFill>
                             <a:srgbClr val="1A2733"/>
                           </a:solidFill>
@@ -26053,7 +27607,7 @@
                         </a:rPr>
                         <a:t>48 m</a:t>
                       </a:r>
-                      <a:endParaRPr lang="en-US" sz="910" dirty="0"/>
+                      <a:endParaRPr lang="en-US" sz="940" dirty="0"/>
                     </a:p>
                   </a:txBody>
                   <a:tcPr marL="63500" marR="63500" marT="38100" marB="38100" anchor="ctr">
@@ -26104,7 +27658,7 @@
                         <a:buNone/>
                       </a:pPr>
                       <a:r>
-                        <a:rPr lang="en-US" sz="830" dirty="0">
+                        <a:rPr lang="en-US" sz="780" dirty="0">
                           <a:solidFill>
                             <a:srgbClr val="1A2733"/>
                           </a:solidFill>
@@ -26114,7 +27668,7 @@
                         </a:rPr>
                         <a:t>60 m</a:t>
                       </a:r>
-                      <a:endParaRPr lang="en-US" sz="910" dirty="0"/>
+                      <a:endParaRPr lang="en-US" sz="940" dirty="0"/>
                     </a:p>
                   </a:txBody>
                   <a:tcPr marL="63500" marR="63500" marT="38100" marB="38100" anchor="ctr">
@@ -26165,7 +27719,7 @@
                         <a:buNone/>
                       </a:pPr>
                       <a:r>
-                        <a:rPr lang="en-US" sz="830" dirty="0">
+                        <a:rPr lang="en-US" sz="780" dirty="0">
                           <a:solidFill>
                             <a:srgbClr val="1A2733"/>
                           </a:solidFill>
@@ -26175,14 +27729,14 @@
                         </a:rPr>
                         <a:t>Đường cao tốc chậm</a:t>
                       </a:r>
-                      <a:endParaRPr lang="en-US" sz="910" dirty="0"/>
+                      <a:endParaRPr lang="en-US" sz="940" dirty="0"/>
                     </a:p>
                     <a:p>
                       <a:pPr algn="l" indent="0" marL="0">
                         <a:buNone/>
                       </a:pPr>
                       <a:r>
-                        <a:rPr lang="en-US" sz="720" dirty="0">
+                        <a:rPr lang="en-US" sz="670" dirty="0">
                           <a:solidFill>
                             <a:srgbClr val="5F7183"/>
                           </a:solidFill>
@@ -26192,7 +27746,7 @@
                         </a:rPr>
                         <a:t>快速道路</a:t>
                       </a:r>
-                      <a:endParaRPr lang="en-US" sz="910" dirty="0"/>
+                      <a:endParaRPr lang="en-US" sz="940" dirty="0"/>
                     </a:p>
                   </a:txBody>
                   <a:tcPr marL="63500" marR="63500" marT="38100" marB="38100" anchor="ctr">
@@ -26247,8 +27801,8 @@
         </p:nvSpPr>
         <p:spPr>
           <a:xfrm>
-            <a:off x="1488546" y="3253994"/>
-            <a:ext cx="6166909" cy="346456"/>
+            <a:off x="1378753" y="3241658"/>
+            <a:ext cx="6386494" cy="358792"/>
           </a:xfrm>
           <a:prstGeom prst="rect">
             <a:avLst/>
@@ -26267,7 +27821,7 @@
               <a:buNone/>
             </a:pPr>
             <a:r>
-              <a:rPr lang="en-US" sz="910" b="1" dirty="0">
+              <a:rPr lang="en-US" sz="940" b="1" dirty="0">
                 <a:solidFill>
                   <a:srgbClr val="007F72"/>
                 </a:solidFill>
@@ -26277,7 +27831,7 @@
               </a:rPr>
               <a:t>Xe thật 100 km/h cần hơn 200 m. Cảm biến nào làm được? Câu hỏi của chương 3.</a:t>
             </a:r>
-            <a:endParaRPr lang="en-US" sz="910" dirty="0"/>
+            <a:endParaRPr lang="en-US" sz="940" dirty="0"/>
           </a:p>
           <a:p>
             <a:pPr indent="0" marL="0">
@@ -26287,7 +27841,7 @@
               <a:buNone/>
             </a:pPr>
             <a:r>
-              <a:rPr lang="en-US" sz="830" dirty="0">
+              <a:rPr lang="en-US" sz="860" dirty="0">
                 <a:solidFill>
                   <a:srgbClr val="007F72"/>
                 </a:solidFill>
@@ -26297,7 +27851,7 @@
               </a:rPr>
               <a:t>真車時速 100 需要 200 公尺以上。哪一種感測器做得到？第三章的問題。</a:t>
             </a:r>
-            <a:endParaRPr lang="en-US" sz="910" dirty="0"/>
+            <a:endParaRPr lang="en-US" sz="940" dirty="0"/>
           </a:p>
         </p:txBody>
       </p:sp>
@@ -26333,8 +27887,8 @@
         </p:nvSpPr>
         <p:spPr>
           <a:xfrm>
-            <a:off x="1190594" y="97008"/>
-            <a:ext cx="623620" cy="194015"/>
+            <a:off x="1070192" y="100462"/>
+            <a:ext cx="645825" cy="200923"/>
           </a:xfrm>
           <a:prstGeom prst="rect">
             <a:avLst/>
@@ -26350,7 +27904,7 @@
               <a:buNone/>
             </a:pPr>
             <a:r>
-              <a:rPr lang="en-US" sz="680" dirty="0">
+              <a:rPr lang="en-US" sz="710" dirty="0">
                 <a:solidFill>
                   <a:srgbClr val="5F7183"/>
                 </a:solidFill>
@@ -26360,7 +27914,7 @@
               </a:rPr>
               <a:t>9 / 18</a:t>
             </a:r>
-            <a:endParaRPr lang="en-US" sz="680" dirty="0"/>
+            <a:endParaRPr lang="en-US" sz="710" dirty="0"/>
           </a:p>
         </p:txBody>
       </p:sp>
@@ -26372,8 +27926,8 @@
         </p:nvSpPr>
         <p:spPr>
           <a:xfrm>
-            <a:off x="1835001" y="97008"/>
-            <a:ext cx="1524404" cy="194015"/>
+            <a:off x="1737545" y="100462"/>
+            <a:ext cx="1578684" cy="200923"/>
           </a:xfrm>
           <a:prstGeom prst="rect">
             <a:avLst/>
@@ -26389,7 +27943,7 @@
               <a:buNone/>
             </a:pPr>
             <a:r>
-              <a:rPr lang="en-US" sz="680" dirty="0">
+              <a:rPr lang="en-US" sz="710" dirty="0">
                 <a:solidFill>
                   <a:srgbClr val="5F7183"/>
                 </a:solidFill>
@@ -26399,7 +27953,7 @@
               </a:rPr>
               <a:t>Tiết 1 · 第 1 節</a:t>
             </a:r>
-            <a:endParaRPr lang="en-US" sz="680" dirty="0"/>
+            <a:endParaRPr lang="en-US" sz="710" dirty="0"/>
           </a:p>
         </p:txBody>
       </p:sp>

--- a/第四週(10-01)/第四週_第1節_簡報.pptx
+++ b/第四週(10-01)/第四週_第1節_簡報.pptx
@@ -6054,11 +6054,11 @@
                 <a:spcPct val="115000"/>
               </a:lnSpc>
               <a:spcAft>
-                <a:spcPts val="600"/>
+                <a:spcPts val="575"/>
               </a:spcAft>
             </a:pPr>
             <a:r>
-              <a:rPr sz="1200" b="1" lang="zh-TW" dirty="0">
+              <a:rPr sz="1150" b="1" lang="zh-TW" dirty="0">
                 <a:solidFill>
                   <a:srgbClr val="000000"/>
                 </a:solidFill>
@@ -6069,7 +6069,7 @@
               <a:t>▍這一張要做什麼</a:t>
             </a:r>
             <a:r>
-              <a:rPr sz="1200" lang="zh-TW" dirty="0">
+              <a:rPr sz="1150" lang="zh-TW" dirty="0">
                 <a:solidFill>
                   <a:srgbClr val="000000"/>
                 </a:solidFill>
@@ -6087,19 +6087,19 @@
                 <a:spcPct val="115000"/>
               </a:lnSpc>
               <a:spcAft>
-                <a:spcPts val="600"/>
+                <a:spcPts val="575"/>
               </a:spcAft>
             </a:pPr>
             <a:r>
-              <a:rPr sz="1200" lang="zh-TW" dirty="0">
-                <a:solidFill>
-                  <a:srgbClr val="000000"/>
-                </a:solidFill>
-                <a:latin typeface="Arial Unicode MS"/>
-                <a:ea typeface="Arial Unicode MS"/>
-                <a:cs typeface="Arial Unicode MS"/>
-              </a:rPr>
-              <a:t>段落分隔。宣告第一段要處理的問題。
+              <a:rPr sz="1150" lang="zh-TW" dirty="0">
+                <a:solidFill>
+                  <a:srgbClr val="000000"/>
+                </a:solidFill>
+                <a:latin typeface="Arial Unicode MS"/>
+                <a:ea typeface="Arial Unicode MS"/>
+                <a:cs typeface="Arial Unicode MS"/>
+              </a:rPr>
+              <a:t>段落分隔，同時把「射線＝光達」一次交代掉——接下來三張都建立在這句話上。
 </a:t>
             </a:r>
           </a:p>
@@ -6109,11 +6109,11 @@
                 <a:spcPct val="115000"/>
               </a:lnSpc>
               <a:spcAft>
-                <a:spcPts val="600"/>
+                <a:spcPts val="575"/>
               </a:spcAft>
             </a:pPr>
             <a:r>
-              <a:rPr sz="1200" b="1" lang="zh-TW" dirty="0">
+              <a:rPr sz="1150" b="1" lang="zh-TW" dirty="0">
                 <a:solidFill>
                   <a:srgbClr val="000000"/>
                 </a:solidFill>
@@ -6124,7 +6124,7 @@
               <a:t>▍畫面上圈這裡</a:t>
             </a:r>
             <a:r>
-              <a:rPr sz="1200" lang="zh-TW" dirty="0">
+              <a:rPr sz="1150" lang="zh-TW" dirty="0">
                 <a:solidFill>
                   <a:srgbClr val="000000"/>
                 </a:solidFill>
@@ -6142,19 +6142,19 @@
                 <a:spcPct val="115000"/>
               </a:lnSpc>
               <a:spcAft>
-                <a:spcPts val="600"/>
+                <a:spcPts val="575"/>
               </a:spcAft>
             </a:pPr>
             <a:r>
-              <a:rPr sz="1200" lang="zh-TW" dirty="0">
-                <a:solidFill>
-                  <a:srgbClr val="000000"/>
-                </a:solidFill>
-                <a:latin typeface="Arial Unicode MS"/>
-                <a:ea typeface="Arial Unicode MS"/>
-                <a:cs typeface="Arial Unicode MS"/>
-              </a:rPr>
-              <a:t>不用圈。停兩秒，讓大家換一個檔。
+              <a:rPr sz="1150" lang="zh-TW" dirty="0">
+                <a:solidFill>
+                  <a:srgbClr val="000000"/>
+                </a:solidFill>
+                <a:latin typeface="Arial Unicode MS"/>
+                <a:ea typeface="Arial Unicode MS"/>
+                <a:cs typeface="Arial Unicode MS"/>
+              </a:rPr>
+              <a:t>圈副標裡的「光達」兩個字。這是第一節唯一一次點名，後面三張不會再說。
 </a:t>
             </a:r>
           </a:p>
@@ -6164,11 +6164,11 @@
                 <a:spcPct val="115000"/>
               </a:lnSpc>
               <a:spcAft>
-                <a:spcPts val="600"/>
+                <a:spcPts val="575"/>
               </a:spcAft>
             </a:pPr>
             <a:r>
-              <a:rPr sz="1200" b="1" lang="zh-TW" dirty="0">
+              <a:rPr sz="1150" b="1" lang="zh-TW" dirty="0">
                 <a:solidFill>
                   <a:srgbClr val="000000"/>
                 </a:solidFill>
@@ -6179,7 +6179,7 @@
               <a:t>▍以下照著唸</a:t>
             </a:r>
             <a:r>
-              <a:rPr sz="1200" lang="zh-TW" dirty="0">
+              <a:rPr sz="1150" lang="zh-TW" dirty="0">
                 <a:solidFill>
                   <a:srgbClr val="000000"/>
                 </a:solidFill>
@@ -6197,11 +6197,11 @@
                 <a:spcPct val="115000"/>
               </a:lnSpc>
               <a:spcAft>
-                <a:spcPts val="600"/>
+                <a:spcPts val="575"/>
               </a:spcAft>
             </a:pPr>
             <a:r>
-              <a:rPr sz="1200" lang="zh-TW" dirty="0">
+              <a:rPr sz="1150" lang="zh-TW" dirty="0">
                 <a:solidFill>
                   <a:srgbClr val="000000"/>
                 </a:solidFill>
@@ -6219,11 +6219,110 @@
                 <a:spcPct val="115000"/>
               </a:lnSpc>
               <a:spcAft>
-                <a:spcPts val="600"/>
+                <a:spcPts val="575"/>
               </a:spcAft>
             </a:pPr>
             <a:r>
-              <a:rPr sz="1200" lang="zh-TW" dirty="0">
+              <a:rPr sz="1150" lang="zh-TW" dirty="0">
+                <a:solidFill>
+                  <a:srgbClr val="000000"/>
+                </a:solidFill>
+                <a:latin typeface="Arial Unicode MS"/>
+                <a:ea typeface="Arial Unicode MS"/>
+                <a:cs typeface="Arial Unicode MS"/>
+              </a:rPr>
+              <a:t>在開始之前，我要先把一件事講清楚，因為後面三張都建立在這句話上面。
+</a:t>
+            </a:r>
+          </a:p>
+          <a:p>
+            <a:pPr algn="l">
+              <a:lnSpc>
+                <a:spcPct val="115000"/>
+              </a:lnSpc>
+              <a:spcAft>
+                <a:spcPts val="575"/>
+              </a:spcAft>
+            </a:pPr>
+            <a:r>
+              <a:rPr sz="1150" b="1" lang="zh-TW" dirty="0">
+                <a:solidFill>
+                  <a:srgbClr val="000000"/>
+                </a:solidFill>
+                <a:latin typeface="Arial Unicode MS"/>
+                <a:ea typeface="Arial Unicode MS"/>
+                <a:cs typeface="Arial Unicode MS"/>
+              </a:rPr>
+              <a:t>模擬器裡那幾條射線，畫的是一顆光達。</a:t>
+            </a:r>
+            <a:r>
+              <a:rPr sz="1150" lang="zh-TW" dirty="0">
+                <a:solidFill>
+                  <a:srgbClr val="000000"/>
+                </a:solidFill>
+                <a:latin typeface="Arial Unicode MS"/>
+                <a:ea typeface="Arial Unicode MS"/>
+                <a:cs typeface="Arial Unicode MS"/>
+              </a:rPr>
+              <a:t>
+</a:t>
+            </a:r>
+          </a:p>
+          <a:p>
+            <a:pPr algn="l">
+              <a:lnSpc>
+                <a:spcPct val="115000"/>
+              </a:lnSpc>
+              <a:spcAft>
+                <a:spcPts val="575"/>
+              </a:spcAft>
+            </a:pPr>
+            <a:r>
+              <a:rPr sz="1150" lang="zh-TW" dirty="0">
+                <a:solidFill>
+                  <a:srgbClr val="000000"/>
+                </a:solidFill>
+                <a:latin typeface="Arial Unicode MS"/>
+                <a:ea typeface="Arial Unicode MS"/>
+                <a:cs typeface="Arial Unicode MS"/>
+              </a:rPr>
+              <a:t>上週第三週我們花了一整節課在講光達：它打一發雷射出去，計時，等它彈回來。模擬器把這件事簡化成一條一條的射線，可是它模擬的就是光達。
+</a:t>
+            </a:r>
+          </a:p>
+          <a:p>
+            <a:pPr algn="l">
+              <a:lnSpc>
+                <a:spcPct val="115000"/>
+              </a:lnSpc>
+              <a:spcAft>
+                <a:spcPts val="575"/>
+              </a:spcAft>
+            </a:pPr>
+            <a:r>
+              <a:rPr sz="1150" lang="zh-TW" dirty="0">
+                <a:solidFill>
+                  <a:srgbClr val="000000"/>
+                </a:solidFill>
+                <a:latin typeface="Arial Unicode MS"/>
+                <a:ea typeface="Arial Unicode MS"/>
+                <a:cs typeface="Arial Unicode MS"/>
+              </a:rPr>
+              <a:t>所以接下來這三張，講的都是同一顆感測器的三行規格。
+</a:t>
+            </a:r>
+          </a:p>
+          <a:p>
+            <a:pPr algn="l">
+              <a:lnSpc>
+                <a:spcPct val="115000"/>
+              </a:lnSpc>
+              <a:spcAft>
+                <a:spcPts val="575"/>
+              </a:spcAft>
+            </a:pPr>
+            <a:r>
+              <a:rPr sz="1150" lang="zh-TW" dirty="0">
                 <a:solidFill>
                   <a:srgbClr val="000000"/>
                 </a:solidFill>
@@ -6517,7 +6616,7 @@
                 <a:ea typeface="Arial Unicode MS"/>
                 <a:cs typeface="Arial Unicode MS"/>
               </a:rPr>
-              <a:t>。
+              <a:t>。剛剛講過，這幾條射線就是光達。
 </a:t>
             </a:r>
           </a:p>
@@ -19028,7 +19127,69 @@
       </p:sp>
       <p:sp>
         <p:nvSpPr>
-          <p:cNvPr id="7" name="Text 4"/>
+          <p:cNvPr id="6" name="Text 4"/>
+          <p:cNvSpPr txBox="1"/>
+          <p:nvPr/>
+        </p:nvSpPr>
+        <p:spPr>
+          <a:xfrm>
+            <a:off x="1302204" y="2689316"/>
+            <a:ext cx="5878286" cy="514350"/>
+          </a:xfrm>
+          <a:prstGeom prst="rect">
+            <a:avLst/>
+          </a:prstGeom>
+          <a:noFill/>
+          <a:ln/>
+        </p:spPr>
+        <p:txBody>
+          <a:bodyPr wrap="square" lIns="0" tIns="0" rIns="0" bIns="0" rtlCol="0" anchor="t"/>
+          <a:lstStyle/>
+          <a:p>
+            <a:pPr indent="0" marL="0">
+              <a:lnSpc>
+                <a:spcPct val="120000"/>
+              </a:lnSpc>
+              <a:buNone/>
+            </a:pPr>
+            <a:r>
+              <a:rPr lang="en-US" sz="1080" dirty="0">
+                <a:solidFill>
+                  <a:srgbClr val="AFC3D4"/>
+                </a:solidFill>
+                <a:latin typeface="Arial" pitchFamily="34" charset="0"/>
+                <a:ea typeface="Arial" pitchFamily="34" charset="-122"/>
+                <a:cs typeface="Arial" pitchFamily="34" charset="-120"/>
+              </a:rPr>
+              <a:t>Mấy tia trong mô phỏng chính là một con LiDAR — ba trang sau là ba dòng trên datasheet của nó.</a:t>
+            </a:r>
+            <a:endParaRPr lang="en-US" sz="1080" dirty="0"/>
+          </a:p>
+          <a:p>
+            <a:pPr indent="0" marL="0">
+              <a:lnSpc>
+                <a:spcPct val="120000"/>
+              </a:lnSpc>
+              <a:buNone/>
+            </a:pPr>
+            <a:r>
+              <a:rPr lang="en-US" sz="960" dirty="0">
+                <a:solidFill>
+                  <a:srgbClr val="8AA0B4"/>
+                </a:solidFill>
+                <a:latin typeface="微軟正黑體" pitchFamily="34" charset="0"/>
+                <a:ea typeface="微軟正黑體" pitchFamily="34" charset="-122"/>
+                <a:cs typeface="微軟正黑體" pitchFamily="34" charset="-120"/>
+              </a:rPr>
+              <a:t>模擬器裡那幾條射線，畫的是一顆光達。接下來三張，就是它規格表上的三行。</a:t>
+            </a:r>
+            <a:endParaRPr lang="en-US" sz="1080" dirty="0"/>
+          </a:p>
+        </p:txBody>
+      </p:sp>
+      <p:sp>
+        <p:nvSpPr>
+          <p:cNvPr id="8" name="Text 5"/>
           <p:cNvSpPr txBox="1"/>
           <p:nvPr/>
         </p:nvSpPr>
@@ -19067,7 +19228,7 @@
       </p:sp>
       <p:sp>
         <p:nvSpPr>
-          <p:cNvPr id="8" name="Text 5"/>
+          <p:cNvPr id="9" name="Text 6"/>
           <p:cNvSpPr txBox="1"/>
           <p:nvPr/>
         </p:nvSpPr>

--- a/第四週(10-01)/第四週_第1節_簡報.pptx
+++ b/第四週(10-01)/第四週_第1節_簡報.pptx
@@ -7748,7 +7748,7 @@
                 <a:ea typeface="Arial Unicode MS"/>
                 <a:cs typeface="Arial Unicode MS"/>
               </a:rPr>
-              <a:t>一句話交代過去：</a:t>
+              <a:t>先交代一件事：</a:t>
             </a:r>
             <a:r>
               <a:rPr sz="1200" b="1" lang="zh-TW" dirty="0">
@@ -7759,7 +7759,7 @@
                 <a:ea typeface="Arial Unicode MS"/>
                 <a:cs typeface="Arial Unicode MS"/>
               </a:rPr>
-              <a:t>這幾條射線就是上週講的光達</a:t>
+              <a:t>這幾條射線是上週那個光達的簡化版</a:t>
             </a:r>
             <a:r>
               <a:rPr sz="1200" lang="zh-TW" dirty="0">
@@ -7770,7 +7770,29 @@
                 <a:ea typeface="Arial Unicode MS"/>
                 <a:cs typeface="Arial Unicode MS"/>
               </a:rPr>
-              <a:t>。
+              <a:t>——真光達上下分好幾層、一層打幾百個點，我們只留</a:t>
+            </a:r>
+            <a:r>
+              <a:rPr sz="1200" b="1" lang="zh-TW" dirty="0">
+                <a:solidFill>
+                  <a:srgbClr val="000000"/>
+                </a:solidFill>
+                <a:latin typeface="Arial Unicode MS"/>
+                <a:ea typeface="Arial Unicode MS"/>
+                <a:cs typeface="Arial Unicode MS"/>
+              </a:rPr>
+              <a:t>一層、幾條</a:t>
+            </a:r>
+            <a:r>
+              <a:rPr sz="1200" lang="zh-TW" dirty="0">
+                <a:solidFill>
+                  <a:srgbClr val="000000"/>
+                </a:solidFill>
+                <a:latin typeface="Arial Unicode MS"/>
+                <a:ea typeface="Arial Unicode MS"/>
+                <a:cs typeface="Arial Unicode MS"/>
+              </a:rPr>
+              <a:t>，為的是讓各位拉得動、算得出來。
 </a:t>
             </a:r>
           </a:p>
@@ -7792,7 +7814,7 @@
                 <a:ea typeface="Arial Unicode MS"/>
                 <a:cs typeface="Arial Unicode MS"/>
               </a:rPr>
-              <a:t>但我要先講清楚一件事，免得各位誤會：</a:t>
+              <a:t>免得誤會，還要講清楚：</a:t>
             </a:r>
             <a:r>
               <a:rPr sz="1200" b="1" lang="zh-TW" dirty="0">
@@ -7814,7 +7836,29 @@
                 <a:ea typeface="Arial Unicode MS"/>
                 <a:cs typeface="Arial Unicode MS"/>
               </a:rPr>
-              <a:t>看多遠、看多寬、看多細——相機、雷達也都要回答，只是規格表上的名字不一樣。所以今天學的不是「光達怎麼看」，是「任何感測器都要交代的三個數字」。
+              <a:t>看多遠、看多寬、看多細——相機、雷達也都要回答，只是規格表上名字不一樣。今天學的不是「光達怎麼看」，是「</a:t>
+            </a:r>
+            <a:r>
+              <a:rPr sz="1200" b="1" lang="zh-TW" dirty="0">
+                <a:solidFill>
+                  <a:srgbClr val="000000"/>
+                </a:solidFill>
+                <a:latin typeface="Arial Unicode MS"/>
+                <a:ea typeface="Arial Unicode MS"/>
+                <a:cs typeface="Arial Unicode MS"/>
+              </a:rPr>
+              <a:t>任何感測器都要交代的三個數字</a:t>
+            </a:r>
+            <a:r>
+              <a:rPr sz="1200" lang="zh-TW" dirty="0">
+                <a:solidFill>
+                  <a:srgbClr val="000000"/>
+                </a:solidFill>
+                <a:latin typeface="Arial Unicode MS"/>
+                <a:ea typeface="Arial Unicode MS"/>
+                <a:cs typeface="Arial Unicode MS"/>
+              </a:rPr>
+              <a:t>」。
 </a:t>
             </a:r>
           </a:p>
@@ -7836,7 +7880,7 @@
                 <a:ea typeface="Arial Unicode MS"/>
                 <a:cs typeface="Arial Unicode MS"/>
               </a:rPr>
-              <a:t>那為什麼先挑光達？因為它的規格最乾淨——三個數字，每一個都拉得動、算得出來。相機和雷達沒這麼直白，要等第三章，也就是</a:t>
+              <a:t>為什麼先挑光達？因為它的規格最乾淨——三個數字都拉得動、算得出來。相機和雷達沒這麼直白，要等第三章，也就是</a:t>
             </a:r>
             <a:r>
               <a:rPr sz="1200" b="1" lang="zh-TW" dirty="0">

--- a/第四週(10-01)/第四週_第1節_簡報.pptx
+++ b/第四週(10-01)/第四週_第1節_簡報.pptx
@@ -1621,7 +1621,7 @@
                 <a:ea typeface="Arial Unicode MS"/>
                 <a:cs typeface="Arial Unicode MS"/>
               </a:rPr>
-              <a:t>上全力煞車的值，大約零點六個重力加速度。</a:t>
+              <a:t>上踩得夠用力的值。</a:t>
             </a:r>
             <a:r>
               <a:rPr sz="1200" b="1" lang="zh-TW" dirty="0">

--- a/第四週(10-01)/第四週_第1節_簡報.pptx
+++ b/第四週(10-01)/第四週_第1節_簡報.pptx
@@ -1819,7 +1819,7 @@
                 <a:ea typeface="Arial Unicode MS"/>
                 <a:cs typeface="Arial Unicode MS"/>
               </a:rPr>
-              <a:t>時速五十是每秒十三點九公尺，每過一秒減掉六——就是上一頁那個減速度——所以大約</a:t>
+              <a:t>時速五十是每秒十三點九公尺，每過一秒減掉六——就是上一頁那個減速度。跟著螢幕上那一行數一次：十三點九、</a:t>
             </a:r>
             <a:r>
               <a:rPr sz="1200" b="1" lang="zh-TW" dirty="0">
@@ -1830,6 +1830,50 @@
                 <a:ea typeface="Arial Unicode MS"/>
                 <a:cs typeface="Arial Unicode MS"/>
               </a:rPr>
+              <a:t>七點九</a:t>
+            </a:r>
+            <a:r>
+              <a:rPr sz="1200" lang="zh-TW" dirty="0">
+                <a:solidFill>
+                  <a:srgbClr val="000000"/>
+                </a:solidFill>
+                <a:latin typeface="Arial Unicode MS"/>
+                <a:ea typeface="Arial Unicode MS"/>
+                <a:cs typeface="Arial Unicode MS"/>
+              </a:rPr>
+              <a:t>、</a:t>
+            </a:r>
+            <a:r>
+              <a:rPr sz="1200" b="1" lang="zh-TW" dirty="0">
+                <a:solidFill>
+                  <a:srgbClr val="000000"/>
+                </a:solidFill>
+                <a:latin typeface="Arial Unicode MS"/>
+                <a:ea typeface="Arial Unicode MS"/>
+                <a:cs typeface="Arial Unicode MS"/>
+              </a:rPr>
+              <a:t>一點九</a:t>
+            </a:r>
+            <a:r>
+              <a:rPr sz="1200" lang="zh-TW" dirty="0">
+                <a:solidFill>
+                  <a:srgbClr val="000000"/>
+                </a:solidFill>
+                <a:latin typeface="Arial Unicode MS"/>
+                <a:ea typeface="Arial Unicode MS"/>
+                <a:cs typeface="Arial Unicode MS"/>
+              </a:rPr>
+              <a:t>、零。</a:t>
+            </a:r>
+            <a:r>
+              <a:rPr sz="1200" b="1" lang="zh-TW" dirty="0">
+                <a:solidFill>
+                  <a:srgbClr val="000000"/>
+                </a:solidFill>
+                <a:latin typeface="Arial Unicode MS"/>
+                <a:ea typeface="Arial Unicode MS"/>
+                <a:cs typeface="Arial Unicode MS"/>
+              </a:rPr>
               <a:t>兩點三秒</a:t>
             </a:r>
             <a:r>
@@ -1841,7 +1885,7 @@
                 <a:ea typeface="Arial Unicode MS"/>
                 <a:cs typeface="Arial Unicode MS"/>
               </a:rPr>
-              <a:t>。
+              <a:t>就停住了，也就是十三點九除以六。
 </a:t>
             </a:r>
           </a:p>
@@ -1896,7 +1940,7 @@
                 <a:ea typeface="Arial Unicode MS"/>
                 <a:cs typeface="Arial Unicode MS"/>
               </a:rPr>
-              <a:t>，是從十三點九一路掉到零。所以要用</a:t>
+              <a:t>，是一路掉到零，所以要用</a:t>
             </a:r>
             <a:r>
               <a:rPr sz="1200" b="1" lang="zh-TW" dirty="0">
@@ -1918,7 +1962,7 @@
                 <a:ea typeface="Arial Unicode MS"/>
                 <a:cs typeface="Arial Unicode MS"/>
               </a:rPr>
-              <a:t>。速度是</a:t>
+              <a:t>。而且它是</a:t>
             </a:r>
             <a:r>
               <a:rPr sz="1200" b="1" lang="zh-TW" dirty="0">
@@ -1940,7 +1984,7 @@
                 <a:ea typeface="Arial Unicode MS"/>
                 <a:cs typeface="Arial Unicode MS"/>
               </a:rPr>
-              <a:t>從十三點九掉到零，所以平均就是頭尾相加除以二——十三點九加零，再除以二，大約</a:t>
+              <a:t>掉下來的，所以平均就是頭尾相加除以二，大約</a:t>
             </a:r>
             <a:r>
               <a:rPr sz="1200" b="1" lang="zh-TW" dirty="0">
@@ -1984,7 +2028,7 @@
                 <a:ea typeface="Arial Unicode MS"/>
                 <a:cs typeface="Arial Unicode MS"/>
               </a:rPr>
-              <a:t>注意那個除以二</a:t>
+              <a:t>那個除以二</a:t>
             </a:r>
             <a:r>
               <a:rPr sz="1200" b="1" lang="zh-TW" dirty="0">
@@ -2072,7 +2116,7 @@
                 <a:ea typeface="Arial Unicode MS"/>
                 <a:cs typeface="Arial Unicode MS"/>
               </a:rPr>
-              <a:t>時速五十要先除以三點六變成十三點九，再代進去。直接把五十代進去會算出兩百公尺，那是錯的。
+              <a:t>時速五十要先除以三點六變成十三點九再代進去；直接代五十會算出兩百公尺，那是錯的。
 </a:t>
             </a:r>
           </a:p>
@@ -2094,29 +2138,7 @@
                 <a:ea typeface="Arial Unicode MS"/>
                 <a:cs typeface="Arial Unicode MS"/>
               </a:rPr>
-              <a:t>合起來就是速度除以二、再乘速度除以六，也就是平方除以十二。
-</a:t>
-            </a:r>
-          </a:p>
-          <a:p>
-            <a:pPr algn="l">
-              <a:lnSpc>
-                <a:spcPct val="100000"/>
-              </a:lnSpc>
-              <a:spcAft>
-                <a:spcPts val="400"/>
-              </a:spcAft>
-            </a:pPr>
-            <a:r>
-              <a:rPr sz="1200" lang="zh-TW" dirty="0">
-                <a:solidFill>
-                  <a:srgbClr val="000000"/>
-                </a:solidFill>
-                <a:latin typeface="Arial Unicode MS"/>
-                <a:ea typeface="Arial Unicode MS"/>
-                <a:cs typeface="Arial Unicode MS"/>
-              </a:rPr>
-              <a:t>如果有人問為什麼是平方：速度變兩倍，煞的時間變兩倍、平均速度也變兩倍，兩個都變兩倍，所以距離變四倍。</a:t>
+              <a:t>合起來就是速度除以二、再乘速度除以六，也就是平方除以十二。</a:t>
             </a:r>
           </a:p>
         </p:txBody>
@@ -12926,7 +12948,7 @@
                 <a:ea typeface="Arial" pitchFamily="34" charset="-122"/>
                 <a:cs typeface="Arial" pitchFamily="34" charset="-120"/>
               </a:rPr>
-              <a:t>50 km/h = 13,9 m/s.</a:t>
+              <a:t>50 km/h = 13,9 m/s</a:t>
             </a:r>
             <a:endParaRPr lang="en-US" sz="900" dirty="0"/>
           </a:p>
@@ -12946,7 +12968,7 @@
                 <a:ea typeface="Arial" pitchFamily="34" charset="-122"/>
                 <a:cs typeface="Arial" pitchFamily="34" charset="-120"/>
               </a:rPr>
-              <a:t>Mỗi giây giảm 6 (trang trước).</a:t>
+              <a:t>Mỗi giây giảm 6:</a:t>
             </a:r>
             <a:endParaRPr lang="en-US" sz="900" dirty="0"/>
           </a:p>
@@ -12966,7 +12988,7 @@
                 <a:ea typeface="Arial" pitchFamily="34" charset="-122"/>
                 <a:cs typeface="Arial" pitchFamily="34" charset="-120"/>
               </a:rPr>
-              <a:t>13,9 ÷ 6 ≈ 2,3 giây</a:t>
+              <a:t>13,9 → 7,9 → 1,9 → 0 (2,3 s)</a:t>
             </a:r>
             <a:endParaRPr lang="en-US" sz="900" dirty="0"/>
           </a:p>
@@ -12986,7 +13008,7 @@
                 <a:ea typeface="微軟正黑體" pitchFamily="34" charset="-122"/>
                 <a:cs typeface="微軟正黑體" pitchFamily="34" charset="-120"/>
               </a:rPr>
-              <a:t>時速 50 ＝ 每秒 13.9 公尺。</a:t>
+              <a:t>時速 50 ＝ 每秒 13.9 公尺</a:t>
             </a:r>
             <a:endParaRPr lang="en-US" sz="900" dirty="0"/>
           </a:p>
@@ -13006,7 +13028,7 @@
                 <a:ea typeface="微軟正黑體" pitchFamily="34" charset="-122"/>
                 <a:cs typeface="微軟正黑體" pitchFamily="34" charset="-120"/>
               </a:rPr>
-              <a:t>每秒減掉 6（上一頁那個數字）。</a:t>
+              <a:t>每秒減掉 6：</a:t>
             </a:r>
             <a:endParaRPr lang="en-US" sz="900" dirty="0"/>
           </a:p>
@@ -13026,7 +13048,7 @@
                 <a:ea typeface="微軟正黑體" pitchFamily="34" charset="-122"/>
                 <a:cs typeface="微軟正黑體" pitchFamily="34" charset="-120"/>
               </a:rPr>
-              <a:t>13.9 ÷ 6 ≈ 2.3 秒</a:t>
+              <a:t>13.9 → 7.9 → 1.9 → 0（2.3 秒）</a:t>
             </a:r>
             <a:endParaRPr lang="en-US" sz="900" dirty="0"/>
           </a:p>

--- a/第四週(10-01)/第四週_第1節_簡報.pptx
+++ b/第四週(10-01)/第四週_第1節_簡報.pptx
@@ -5,7 +5,7 @@
     <p:sldMasterId id="2147483648" r:id="rId1"/>
   </p:sldMasterIdLst>
   <p:notesMasterIdLst>
-    <p:notesMasterId r:id="rId30"/>
+    <p:notesMasterId r:id="rId31"/>
   </p:notesMasterIdLst>
   <p:sldIdLst>
     <p:sldId id="256" r:id="rId2"/>
@@ -36,6 +36,7 @@
     <p:sldId id="281" r:id="rId27"/>
     <p:sldId id="282" r:id="rId28"/>
     <p:sldId id="283" r:id="rId29"/>
+    <p:sldId id="284" r:id="rId30"/>
   </p:sldIdLst>
   <p:sldSz cx="9144000" cy="5143500"/>
   <p:notesSz cx="7560000" cy="10692000"/>
@@ -6945,7 +6946,7 @@
                 <a:ea typeface="Arial Unicode MS"/>
                 <a:cs typeface="Arial Unicode MS"/>
               </a:rPr>
-              <a:t>拍張照留著——上面每一條，都是一個還沒有人做過的題目。</a:t>
+              <a:t>下一頁我把常見的答案列出來，各位對照一下自己講的。</a:t>
             </a:r>
           </a:p>
         </p:txBody>
@@ -7066,7 +7067,7 @@
                 <a:ea typeface="Arial Unicode MS"/>
                 <a:cs typeface="Arial Unicode MS"/>
               </a:rPr>
-              <a:t>第一節到這裡。三句話帶走。
+              <a:t>（討論結束）看這一頁，我把常見的答案列出來了，各位剛剛講的大部分都在裡面。
 </a:t>
             </a:r>
           </a:p>
@@ -7088,7 +7089,7 @@
                 <a:ea typeface="Arial Unicode MS"/>
                 <a:cs typeface="Arial Unicode MS"/>
               </a:rPr>
-              <a:t>第一句，</a:t>
+              <a:t>回頭看白板：</a:t>
             </a:r>
             <a:r>
               <a:rPr sz="1200" b="1" lang="zh-TW" dirty="0">
@@ -7099,7 +7100,7 @@
                 <a:ea typeface="Arial Unicode MS"/>
                 <a:cs typeface="Arial Unicode MS"/>
               </a:rPr>
-              <a:t>三個滑桿就是三個規格</a:t>
+              <a:t>哪一欄最滿？行為。</a:t>
             </a:r>
             <a:r>
               <a:rPr sz="1200" lang="zh-TW" dirty="0">
@@ -7110,7 +7111,29 @@
                 <a:ea typeface="Arial Unicode MS"/>
                 <a:cs typeface="Arial Unicode MS"/>
               </a:rPr>
-              <a:t>：射線數是解析度、長度是測距範圍、張角是視野。第五週我拿真的規格表來，各位會發現上面就是這三個數字。
+              <a:t>跟一開始猜的一樣。這不是巧合——外觀可以拍照建模，物理可以量，</a:t>
+            </a:r>
+            <a:r>
+              <a:rPr sz="1200" b="1" lang="zh-TW" dirty="0">
+                <a:solidFill>
+                  <a:srgbClr val="000000"/>
+                </a:solidFill>
+                <a:latin typeface="Arial Unicode MS"/>
+                <a:ea typeface="Arial Unicode MS"/>
+                <a:cs typeface="Arial Unicode MS"/>
+              </a:rPr>
+              <a:t>行為要先有人去收，而台灣和越南的沒有人收過。</a:t>
+            </a:r>
+            <a:r>
+              <a:rPr sz="1200" lang="zh-TW" dirty="0">
+                <a:solidFill>
+                  <a:srgbClr val="000000"/>
+                </a:solidFill>
+                <a:latin typeface="Arial Unicode MS"/>
+                <a:ea typeface="Arial Unicode MS"/>
+                <a:cs typeface="Arial Unicode MS"/>
+              </a:rPr>
+              <a:t>
 </a:t>
             </a:r>
           </a:p>
@@ -7132,7 +7155,7 @@
                 <a:ea typeface="Arial Unicode MS"/>
                 <a:cs typeface="Arial Unicode MS"/>
               </a:rPr>
-              <a:t>第二句，</a:t>
+              <a:t>物理那一欄我多列了幾條，因為剛剛比較少人講到。這一頁拍下來，上面每一條都是一個</a:t>
             </a:r>
             <a:r>
               <a:rPr sz="1200" b="1" lang="zh-TW" dirty="0">
@@ -7143,7 +7166,7 @@
                 <a:ea typeface="Arial Unicode MS"/>
                 <a:cs typeface="Arial Unicode MS"/>
               </a:rPr>
-              <a:t>煞停距離決定射線至少要多長</a:t>
+              <a:t>還沒有人做過</a:t>
             </a:r>
             <a:r>
               <a:rPr sz="1200" lang="zh-TW" dirty="0">
@@ -7154,139 +7177,7 @@
                 <a:ea typeface="Arial Unicode MS"/>
                 <a:cs typeface="Arial Unicode MS"/>
               </a:rPr>
-              <a:t>。時速五十，至少二十五公尺。這是被物理逼出來的下限，不是喜好問題。
-</a:t>
-            </a:r>
-          </a:p>
-          <a:p>
-            <a:pPr algn="l">
-              <a:lnSpc>
-                <a:spcPct val="100000"/>
-              </a:lnSpc>
-              <a:spcAft>
-                <a:spcPts val="400"/>
-              </a:spcAft>
-            </a:pPr>
-            <a:r>
-              <a:rPr sz="1200" lang="zh-TW" dirty="0">
-                <a:solidFill>
-                  <a:srgbClr val="000000"/>
-                </a:solidFill>
-                <a:latin typeface="Arial Unicode MS"/>
-                <a:ea typeface="Arial Unicode MS"/>
-                <a:cs typeface="Arial Unicode MS"/>
-              </a:rPr>
-              <a:t>第三句，</a:t>
-            </a:r>
-            <a:r>
-              <a:rPr sz="1200" b="1" lang="zh-TW" dirty="0">
-                <a:solidFill>
-                  <a:srgbClr val="000000"/>
-                </a:solidFill>
-                <a:latin typeface="Arial Unicode MS"/>
-                <a:ea typeface="Arial Unicode MS"/>
-                <a:cs typeface="Arial Unicode MS"/>
-              </a:rPr>
-              <a:t>三種落差：外觀、行為、物理</a:t>
-            </a:r>
-            <a:r>
-              <a:rPr sz="1200" lang="zh-TW" dirty="0">
-                <a:solidFill>
-                  <a:srgbClr val="000000"/>
-                </a:solidFill>
-                <a:latin typeface="Arial Unicode MS"/>
-                <a:ea typeface="Arial Unicode MS"/>
-                <a:cs typeface="Arial Unicode MS"/>
-              </a:rPr>
-              <a:t>。而且在台灣和越南都更大，因為現成的模擬器是照歐美做的。
-</a:t>
-            </a:r>
-          </a:p>
-          <a:p>
-            <a:pPr algn="l">
-              <a:lnSpc>
-                <a:spcPct val="100000"/>
-              </a:lnSpc>
-              <a:spcAft>
-                <a:spcPts val="400"/>
-              </a:spcAft>
-            </a:pPr>
-            <a:r>
-              <a:rPr sz="1200" lang="zh-TW" dirty="0">
-                <a:solidFill>
-                  <a:srgbClr val="000000"/>
-                </a:solidFill>
-                <a:latin typeface="Arial Unicode MS"/>
-                <a:ea typeface="Arial Unicode MS"/>
-                <a:cs typeface="Arial Unicode MS"/>
-              </a:rPr>
-              <a:t>休息十分鐘。</a:t>
-            </a:r>
-            <a:r>
-              <a:rPr sz="1200" b="1" lang="zh-TW" dirty="0">
-                <a:solidFill>
-                  <a:srgbClr val="000000"/>
-                </a:solidFill>
-                <a:latin typeface="Arial Unicode MS"/>
-                <a:ea typeface="Arial Unicode MS"/>
-                <a:cs typeface="Arial Unicode MS"/>
-              </a:rPr>
-              <a:t>模擬器那個分頁先不要關</a:t>
-            </a:r>
-            <a:r>
-              <a:rPr sz="1200" lang="zh-TW" dirty="0">
-                <a:solidFill>
-                  <a:srgbClr val="000000"/>
-                </a:solidFill>
-                <a:latin typeface="Arial Unicode MS"/>
-                <a:ea typeface="Arial Unicode MS"/>
-                <a:cs typeface="Arial Unicode MS"/>
-              </a:rPr>
-              <a:t>——第二節中間會用到一次，第三節整整五十分鐘都在用它。
-</a:t>
-            </a:r>
-          </a:p>
-          <a:p>
-            <a:pPr algn="l">
-              <a:lnSpc>
-                <a:spcPct val="100000"/>
-              </a:lnSpc>
-              <a:spcAft>
-                <a:spcPts val="400"/>
-              </a:spcAft>
-            </a:pPr>
-            <a:r>
-              <a:rPr sz="1200" lang="zh-TW" dirty="0">
-                <a:solidFill>
-                  <a:srgbClr val="000000"/>
-                </a:solidFill>
-                <a:latin typeface="Arial Unicode MS"/>
-                <a:ea typeface="Arial Unicode MS"/>
-                <a:cs typeface="Arial Unicode MS"/>
-              </a:rPr>
-              <a:t>第二節我要問各位一個問題：如果「跑了幾公里」不是一個好的測試單位，那什麼才是？
-</a:t>
-            </a:r>
-          </a:p>
-          <a:p>
-            <a:pPr algn="l">
-              <a:lnSpc>
-                <a:spcPct val="100000"/>
-              </a:lnSpc>
-              <a:spcAft>
-                <a:spcPts val="400"/>
-              </a:spcAft>
-            </a:pPr>
-            <a:r>
-              <a:rPr sz="1200" lang="zh-TW" dirty="0">
-                <a:solidFill>
-                  <a:srgbClr val="000000"/>
-                </a:solidFill>
-                <a:latin typeface="Arial Unicode MS"/>
-                <a:ea typeface="Arial Unicode MS"/>
-                <a:cs typeface="Arial Unicode MS"/>
-              </a:rPr>
-              <a:t>第二節的主題就是「場景」。</a:t>
+              <a:t>的題目。</a:t>
             </a:r>
           </a:p>
         </p:txBody>
@@ -7329,6 +7220,347 @@
                 <a:cs typeface="Arial Unicode MS"/>
               </a:rPr>
               <a:t>28</a:t>
+            </a:r>
+          </a:p>
+        </p:txBody>
+      </p:sp>
+    </p:spTree>
+  </p:cSld>
+  <p:clrMapOvr>
+    <a:masterClrMapping/>
+  </p:clrMapOvr>
+</p:notes>
+</file>
+
+<file path=ppt/notesSlides/notesSlide29.xml><?xml version="1.0" encoding="utf-8"?>
+<p:notes xmlns:a="http://schemas.openxmlformats.org/drawingml/2006/main" xmlns:p="http://schemas.openxmlformats.org/presentationml/2006/main">
+  <p:cSld>
+    <p:spTree>
+      <p:nvGrpSpPr>
+        <p:cNvPr id="1" name=""/>
+        <p:cNvGrpSpPr/>
+        <p:nvPr/>
+      </p:nvGrpSpPr>
+      <p:grpSpPr>
+        <a:xfrm/>
+      </p:grpSpPr>
+      <p:sp>
+        <p:nvSpPr>
+          <p:cNvPr id="2" name="Slide Image Placeholder 1"/>
+          <p:cNvSpPr>
+            <a:spLocks noGrp="1"/>
+          </p:cNvSpPr>
+          <p:nvPr>
+            <p:ph type="sldImg" idx="2"/>
+          </p:nvPr>
+        </p:nvSpPr>
+        <p:spPr>
+          <a:xfrm>
+            <a:off x="540000" y="540000"/>
+            <a:ext cx="6480000" cy="3645000"/>
+          </a:xfrm>
+        </p:spPr>
+      </p:sp>
+      <p:sp>
+        <p:nvSpPr>
+          <p:cNvPr id="3" name="Notes Placeholder 2"/>
+          <p:cNvSpPr>
+            <a:spLocks noGrp="1"/>
+          </p:cNvSpPr>
+          <p:nvPr>
+            <p:ph type="body" idx="3"/>
+          </p:nvPr>
+        </p:nvSpPr>
+        <p:spPr>
+          <a:xfrm>
+            <a:off x="540000" y="4440000"/>
+            <a:ext cx="6480000" cy="5500000"/>
+          </a:xfrm>
+        </p:spPr>
+        <p:txBody>
+          <a:bodyPr vert="horz" wrap="square" anchor="t" lIns="91440" rIns="91440" tIns="45720" bIns="45720"/>
+          <a:lstStyle/>
+          <a:p>
+            <a:pPr algn="l">
+              <a:lnSpc>
+                <a:spcPct val="100000"/>
+              </a:lnSpc>
+              <a:spcAft>
+                <a:spcPts val="400"/>
+              </a:spcAft>
+            </a:pPr>
+            <a:r>
+              <a:rPr sz="1200" lang="zh-TW" dirty="0">
+                <a:solidFill>
+                  <a:srgbClr val="000000"/>
+                </a:solidFill>
+                <a:latin typeface="Arial Unicode MS"/>
+                <a:ea typeface="Arial Unicode MS"/>
+                <a:cs typeface="Arial Unicode MS"/>
+              </a:rPr>
+              <a:t>第一節到這裡。三句話帶走。
+</a:t>
+            </a:r>
+          </a:p>
+          <a:p>
+            <a:pPr algn="l">
+              <a:lnSpc>
+                <a:spcPct val="100000"/>
+              </a:lnSpc>
+              <a:spcAft>
+                <a:spcPts val="400"/>
+              </a:spcAft>
+            </a:pPr>
+            <a:r>
+              <a:rPr sz="1200" lang="zh-TW" dirty="0">
+                <a:solidFill>
+                  <a:srgbClr val="000000"/>
+                </a:solidFill>
+                <a:latin typeface="Arial Unicode MS"/>
+                <a:ea typeface="Arial Unicode MS"/>
+                <a:cs typeface="Arial Unicode MS"/>
+              </a:rPr>
+              <a:t>第一句，</a:t>
+            </a:r>
+            <a:r>
+              <a:rPr sz="1200" b="1" lang="zh-TW" dirty="0">
+                <a:solidFill>
+                  <a:srgbClr val="000000"/>
+                </a:solidFill>
+                <a:latin typeface="Arial Unicode MS"/>
+                <a:ea typeface="Arial Unicode MS"/>
+                <a:cs typeface="Arial Unicode MS"/>
+              </a:rPr>
+              <a:t>三個滑桿就是三個規格</a:t>
+            </a:r>
+            <a:r>
+              <a:rPr sz="1200" lang="zh-TW" dirty="0">
+                <a:solidFill>
+                  <a:srgbClr val="000000"/>
+                </a:solidFill>
+                <a:latin typeface="Arial Unicode MS"/>
+                <a:ea typeface="Arial Unicode MS"/>
+                <a:cs typeface="Arial Unicode MS"/>
+              </a:rPr>
+              <a:t>：射線數是解析度、長度是測距範圍、張角是視野。第五週我拿真的規格表來，各位會發現上面就是這三個數字。
+</a:t>
+            </a:r>
+          </a:p>
+          <a:p>
+            <a:pPr algn="l">
+              <a:lnSpc>
+                <a:spcPct val="100000"/>
+              </a:lnSpc>
+              <a:spcAft>
+                <a:spcPts val="400"/>
+              </a:spcAft>
+            </a:pPr>
+            <a:r>
+              <a:rPr sz="1200" lang="zh-TW" dirty="0">
+                <a:solidFill>
+                  <a:srgbClr val="000000"/>
+                </a:solidFill>
+                <a:latin typeface="Arial Unicode MS"/>
+                <a:ea typeface="Arial Unicode MS"/>
+                <a:cs typeface="Arial Unicode MS"/>
+              </a:rPr>
+              <a:t>第二句，</a:t>
+            </a:r>
+            <a:r>
+              <a:rPr sz="1200" b="1" lang="zh-TW" dirty="0">
+                <a:solidFill>
+                  <a:srgbClr val="000000"/>
+                </a:solidFill>
+                <a:latin typeface="Arial Unicode MS"/>
+                <a:ea typeface="Arial Unicode MS"/>
+                <a:cs typeface="Arial Unicode MS"/>
+              </a:rPr>
+              <a:t>煞停距離決定射線至少要多長</a:t>
+            </a:r>
+            <a:r>
+              <a:rPr sz="1200" lang="zh-TW" dirty="0">
+                <a:solidFill>
+                  <a:srgbClr val="000000"/>
+                </a:solidFill>
+                <a:latin typeface="Arial Unicode MS"/>
+                <a:ea typeface="Arial Unicode MS"/>
+                <a:cs typeface="Arial Unicode MS"/>
+              </a:rPr>
+              <a:t>。時速五十，至少二十五公尺。這是被物理逼出來的下限，不是喜好問題。
+</a:t>
+            </a:r>
+          </a:p>
+          <a:p>
+            <a:pPr algn="l">
+              <a:lnSpc>
+                <a:spcPct val="100000"/>
+              </a:lnSpc>
+              <a:spcAft>
+                <a:spcPts val="400"/>
+              </a:spcAft>
+            </a:pPr>
+            <a:r>
+              <a:rPr sz="1200" lang="zh-TW" dirty="0">
+                <a:solidFill>
+                  <a:srgbClr val="000000"/>
+                </a:solidFill>
+                <a:latin typeface="Arial Unicode MS"/>
+                <a:ea typeface="Arial Unicode MS"/>
+                <a:cs typeface="Arial Unicode MS"/>
+              </a:rPr>
+              <a:t>第三句，</a:t>
+            </a:r>
+            <a:r>
+              <a:rPr sz="1200" b="1" lang="zh-TW" dirty="0">
+                <a:solidFill>
+                  <a:srgbClr val="000000"/>
+                </a:solidFill>
+                <a:latin typeface="Arial Unicode MS"/>
+                <a:ea typeface="Arial Unicode MS"/>
+                <a:cs typeface="Arial Unicode MS"/>
+              </a:rPr>
+              <a:t>三種落差：外觀、行為、物理</a:t>
+            </a:r>
+            <a:r>
+              <a:rPr sz="1200" lang="zh-TW" dirty="0">
+                <a:solidFill>
+                  <a:srgbClr val="000000"/>
+                </a:solidFill>
+                <a:latin typeface="Arial Unicode MS"/>
+                <a:ea typeface="Arial Unicode MS"/>
+                <a:cs typeface="Arial Unicode MS"/>
+              </a:rPr>
+              <a:t>。而且在台灣和越南都更大，因為現成的模擬器是照歐美做的。
+</a:t>
+            </a:r>
+          </a:p>
+          <a:p>
+            <a:pPr algn="l">
+              <a:lnSpc>
+                <a:spcPct val="100000"/>
+              </a:lnSpc>
+              <a:spcAft>
+                <a:spcPts val="400"/>
+              </a:spcAft>
+            </a:pPr>
+            <a:r>
+              <a:rPr sz="1200" lang="zh-TW" dirty="0">
+                <a:solidFill>
+                  <a:srgbClr val="000000"/>
+                </a:solidFill>
+                <a:latin typeface="Arial Unicode MS"/>
+                <a:ea typeface="Arial Unicode MS"/>
+                <a:cs typeface="Arial Unicode MS"/>
+              </a:rPr>
+              <a:t>休息十分鐘。</a:t>
+            </a:r>
+            <a:r>
+              <a:rPr sz="1200" b="1" lang="zh-TW" dirty="0">
+                <a:solidFill>
+                  <a:srgbClr val="000000"/>
+                </a:solidFill>
+                <a:latin typeface="Arial Unicode MS"/>
+                <a:ea typeface="Arial Unicode MS"/>
+                <a:cs typeface="Arial Unicode MS"/>
+              </a:rPr>
+              <a:t>模擬器那個分頁先不要關</a:t>
+            </a:r>
+            <a:r>
+              <a:rPr sz="1200" lang="zh-TW" dirty="0">
+                <a:solidFill>
+                  <a:srgbClr val="000000"/>
+                </a:solidFill>
+                <a:latin typeface="Arial Unicode MS"/>
+                <a:ea typeface="Arial Unicode MS"/>
+                <a:cs typeface="Arial Unicode MS"/>
+              </a:rPr>
+              <a:t>——第二節中間會用到一次，第三節整整五十分鐘都在用它。
+</a:t>
+            </a:r>
+          </a:p>
+          <a:p>
+            <a:pPr algn="l">
+              <a:lnSpc>
+                <a:spcPct val="100000"/>
+              </a:lnSpc>
+              <a:spcAft>
+                <a:spcPts val="400"/>
+              </a:spcAft>
+            </a:pPr>
+            <a:r>
+              <a:rPr sz="1200" lang="zh-TW" dirty="0">
+                <a:solidFill>
+                  <a:srgbClr val="000000"/>
+                </a:solidFill>
+                <a:latin typeface="Arial Unicode MS"/>
+                <a:ea typeface="Arial Unicode MS"/>
+                <a:cs typeface="Arial Unicode MS"/>
+              </a:rPr>
+              <a:t>第二節我要問各位一個問題：如果「跑了幾公里」不是一個好的測試單位，那什麼才是？
+</a:t>
+            </a:r>
+          </a:p>
+          <a:p>
+            <a:pPr algn="l">
+              <a:lnSpc>
+                <a:spcPct val="100000"/>
+              </a:lnSpc>
+              <a:spcAft>
+                <a:spcPts val="400"/>
+              </a:spcAft>
+            </a:pPr>
+            <a:r>
+              <a:rPr sz="1200" lang="zh-TW" dirty="0">
+                <a:solidFill>
+                  <a:srgbClr val="000000"/>
+                </a:solidFill>
+                <a:latin typeface="Arial Unicode MS"/>
+                <a:ea typeface="Arial Unicode MS"/>
+                <a:cs typeface="Arial Unicode MS"/>
+              </a:rPr>
+              <a:t>第二節的主題就是「場景」。</a:t>
+            </a:r>
+          </a:p>
+        </p:txBody>
+      </p:sp>
+      <p:sp>
+        <p:nvSpPr>
+          <p:cNvPr id="4" name="Slide Number Placeholder 3"/>
+          <p:cNvSpPr>
+            <a:spLocks noGrp="1"/>
+          </p:cNvSpPr>
+          <p:nvPr>
+            <p:ph type="sldNum" idx="5"/>
+          </p:nvPr>
+        </p:nvSpPr>
+        <p:spPr>
+          <a:xfrm>
+            <a:off x="6500000" y="10200000"/>
+            <a:ext cx="500000" cy="300000"/>
+          </a:xfrm>
+        </p:spPr>
+        <p:txBody>
+          <a:bodyPr vert="horz" wrap="square" anchor="t" lIns="91440" rIns="91440" tIns="45720" bIns="45720"/>
+          <a:lstStyle/>
+          <a:p>
+            <a:pPr algn="l">
+              <a:lnSpc>
+                <a:spcPct val="100000"/>
+              </a:lnSpc>
+              <a:spcAft>
+                <a:spcPts val="333"/>
+              </a:spcAft>
+            </a:pPr>
+            <a:r>
+              <a:rPr sz="1000" lang="zh-TW" dirty="0">
+                <a:solidFill>
+                  <a:srgbClr val="000000"/>
+                </a:solidFill>
+                <a:latin typeface="Arial Unicode MS"/>
+                <a:ea typeface="Arial Unicode MS"/>
+                <a:cs typeface="Arial Unicode MS"/>
+              </a:rPr>
+              <a:t>29</a:t>
             </a:r>
           </a:p>
         </p:txBody>
@@ -11074,7 +11306,7 @@
                 <a:ea typeface="Arial" pitchFamily="34" charset="-122"/>
                 <a:cs typeface="Arial" pitchFamily="34" charset="-120"/>
               </a:rPr>
-              <a:t>10 / 28</a:t>
+              <a:t>10 / 29</a:t>
             </a:r>
             <a:endParaRPr lang="en-US" sz="690" dirty="0"/>
           </a:p>
@@ -11890,7 +12122,7 @@
                 <a:ea typeface="Arial" pitchFamily="34" charset="-122"/>
                 <a:cs typeface="Arial" pitchFamily="34" charset="-120"/>
               </a:rPr>
-              <a:t>11 / 28</a:t>
+              <a:t>11 / 29</a:t>
             </a:r>
             <a:endParaRPr lang="en-US" sz="710" dirty="0"/>
           </a:p>
@@ -12625,7 +12857,7 @@
                 <a:ea typeface="Arial" pitchFamily="34" charset="-122"/>
                 <a:cs typeface="Arial" pitchFamily="34" charset="-120"/>
               </a:rPr>
-              <a:t>12 / 28</a:t>
+              <a:t>12 / 29</a:t>
             </a:r>
             <a:endParaRPr lang="en-US" sz="700" dirty="0"/>
           </a:p>
@@ -13845,7 +14077,7 @@
                 <a:ea typeface="Arial" pitchFamily="34" charset="-122"/>
                 <a:cs typeface="Arial" pitchFamily="34" charset="-120"/>
               </a:rPr>
-              <a:t>13 / 28</a:t>
+              <a:t>13 / 29</a:t>
             </a:r>
             <a:endParaRPr lang="en-US" sz="700" dirty="0"/>
           </a:p>
@@ -14734,7 +14966,7 @@
                 <a:ea typeface="Arial" pitchFamily="34" charset="-122"/>
                 <a:cs typeface="Arial" pitchFamily="34" charset="-120"/>
               </a:rPr>
-              <a:t>14 / 28</a:t>
+              <a:t>14 / 29</a:t>
             </a:r>
             <a:endParaRPr lang="en-US" sz="690" dirty="0"/>
           </a:p>
@@ -15647,7 +15879,7 @@
                 <a:ea typeface="Arial" pitchFamily="34" charset="-122"/>
                 <a:cs typeface="Arial" pitchFamily="34" charset="-120"/>
               </a:rPr>
-              <a:t>15 / 28</a:t>
+              <a:t>15 / 29</a:t>
             </a:r>
             <a:endParaRPr lang="en-US" sz="700" dirty="0"/>
           </a:p>
@@ -16767,7 +16999,7 @@
                 <a:ea typeface="Arial" pitchFamily="34" charset="-122"/>
                 <a:cs typeface="Arial" pitchFamily="34" charset="-120"/>
               </a:rPr>
-              <a:t>16 / 28</a:t>
+              <a:t>16 / 29</a:t>
             </a:r>
             <a:endParaRPr lang="en-US" sz="720" dirty="0"/>
           </a:p>
@@ -19247,7 +19479,7 @@
                 <a:ea typeface="Arial" pitchFamily="34" charset="-122"/>
                 <a:cs typeface="Arial" pitchFamily="34" charset="-120"/>
               </a:rPr>
-              <a:t>17 / 28</a:t>
+              <a:t>17 / 29</a:t>
             </a:r>
             <a:endParaRPr lang="en-US" sz="640" dirty="0"/>
           </a:p>
@@ -20774,7 +21006,7 @@
                 <a:ea typeface="Arial" pitchFamily="34" charset="-122"/>
                 <a:cs typeface="Arial" pitchFamily="34" charset="-120"/>
               </a:rPr>
-              <a:t>18 / 28</a:t>
+              <a:t>18 / 29</a:t>
             </a:r>
             <a:endParaRPr lang="en-US" sz="720" dirty="0"/>
           </a:p>
@@ -21083,7 +21315,7 @@
                 <a:ea typeface="Arial" pitchFamily="34" charset="-122"/>
                 <a:cs typeface="Arial" pitchFamily="34" charset="-120"/>
               </a:rPr>
-              <a:t>19 / 28</a:t>
+              <a:t>19 / 29</a:t>
             </a:r>
             <a:endParaRPr lang="en-US" sz="720" dirty="0"/>
           </a:p>
@@ -21996,7 +22228,7 @@
                 <a:ea typeface="Arial" pitchFamily="34" charset="-122"/>
                 <a:cs typeface="Arial" pitchFamily="34" charset="-120"/>
               </a:rPr>
-              <a:t>2 / 28</a:t>
+              <a:t>2 / 29</a:t>
             </a:r>
             <a:endParaRPr lang="en-US" sz="700" dirty="0"/>
           </a:p>
@@ -22909,7 +23141,7 @@
                 <a:ea typeface="Arial" pitchFamily="34" charset="-122"/>
                 <a:cs typeface="Arial" pitchFamily="34" charset="-120"/>
               </a:rPr>
-              <a:t>20 / 28</a:t>
+              <a:t>20 / 29</a:t>
             </a:r>
             <a:endParaRPr lang="en-US" sz="700" dirty="0"/>
           </a:p>
@@ -23822,7 +24054,7 @@
                 <a:ea typeface="Arial" pitchFamily="34" charset="-122"/>
                 <a:cs typeface="Arial" pitchFamily="34" charset="-120"/>
               </a:rPr>
-              <a:t>21 / 28</a:t>
+              <a:t>21 / 29</a:t>
             </a:r>
             <a:endParaRPr lang="en-US" sz="700" dirty="0"/>
           </a:p>
@@ -24673,7 +24905,7 @@
                 <a:ea typeface="Arial" pitchFamily="34" charset="-122"/>
                 <a:cs typeface="Arial" pitchFamily="34" charset="-120"/>
               </a:rPr>
-              <a:t>22 / 28</a:t>
+              <a:t>22 / 29</a:t>
             </a:r>
             <a:endParaRPr lang="en-US" sz="700" dirty="0"/>
           </a:p>
@@ -25288,7 +25520,7 @@
                 <a:ea typeface="Arial" pitchFamily="34" charset="-122"/>
                 <a:cs typeface="Arial" pitchFamily="34" charset="-120"/>
               </a:rPr>
-              <a:t>23 / 28</a:t>
+              <a:t>23 / 29</a:t>
             </a:r>
             <a:endParaRPr lang="en-US" sz="710" dirty="0"/>
           </a:p>
@@ -26056,7 +26288,7 @@
                 <a:ea typeface="Arial" pitchFamily="34" charset="-122"/>
                 <a:cs typeface="Arial" pitchFamily="34" charset="-120"/>
               </a:rPr>
-              <a:t>24 / 28</a:t>
+              <a:t>24 / 29</a:t>
             </a:r>
             <a:endParaRPr lang="en-US" sz="690" dirty="0"/>
           </a:p>
@@ -26729,7 +26961,7 @@
                 <a:ea typeface="Arial" pitchFamily="34" charset="-122"/>
                 <a:cs typeface="Arial" pitchFamily="34" charset="-120"/>
               </a:rPr>
-              <a:t>25 / 28</a:t>
+              <a:t>25 / 29</a:t>
             </a:r>
             <a:endParaRPr lang="en-US" sz="700" dirty="0"/>
           </a:p>
@@ -28048,7 +28280,7 @@
                 <a:ea typeface="Arial" pitchFamily="34" charset="-122"/>
                 <a:cs typeface="Arial" pitchFamily="34" charset="-120"/>
               </a:rPr>
-              <a:t>26 / 28</a:t>
+              <a:t>26 / 29</a:t>
             </a:r>
             <a:endParaRPr lang="en-US" sz="710" dirty="0"/>
           </a:p>
@@ -28797,7 +29029,7 @@
                 <a:ea typeface="Arial" pitchFamily="34" charset="-122"/>
                 <a:cs typeface="Arial" pitchFamily="34" charset="-120"/>
               </a:rPr>
-              <a:t>27 / 28</a:t>
+              <a:t>27 / 29</a:t>
             </a:r>
             <a:endParaRPr lang="en-US" sz="720" dirty="0"/>
           </a:p>
@@ -28853,6 +29085,1949 @@
 <file path=ppt/slides/slide28.xml><?xml version="1.0" encoding="utf-8"?>
 <p:sld xmlns:a="http://schemas.openxmlformats.org/drawingml/2006/main" xmlns:r="http://schemas.openxmlformats.org/officeDocument/2006/relationships" xmlns:p="http://schemas.openxmlformats.org/presentationml/2006/main">
   <p:cSld name="Slide 28">
+    <p:spTree>
+      <p:nvGrpSpPr>
+        <p:cNvPr id="1" name=""/>
+        <p:cNvGrpSpPr/>
+        <p:nvPr/>
+      </p:nvGrpSpPr>
+      <p:grpSpPr>
+        <a:xfrm>
+          <a:off x="968667" y="0"/>
+          <a:ext cx="1" cy="1"/>
+          <a:chOff x="0" y="0"/>
+          <a:chExt cx="0" cy="0"/>
+        </a:xfrm>
+      </p:grpSpPr>
+      <p:sp>
+        <p:nvSpPr>
+          <p:cNvPr id="2" name="Text 0"/>
+          <p:cNvSpPr txBox="1"/>
+          <p:nvPr/>
+        </p:nvSpPr>
+        <p:spPr>
+          <a:xfrm>
+            <a:off x="1365034" y="230613"/>
+            <a:ext cx="6413933" cy="663013"/>
+          </a:xfrm>
+          <a:prstGeom prst="rect">
+            <a:avLst/>
+          </a:prstGeom>
+          <a:noFill/>
+          <a:ln/>
+        </p:spPr>
+        <p:txBody>
+          <a:bodyPr wrap="square" lIns="0" tIns="0" rIns="0" bIns="0" rtlCol="0" anchor="t"/>
+          <a:lstStyle/>
+          <a:p>
+            <a:pPr indent="0" marL="0">
+              <a:lnSpc>
+                <a:spcPct val="116000"/>
+              </a:lnSpc>
+              <a:buNone/>
+            </a:pPr>
+            <a:r>
+              <a:rPr lang="en-US" sz="1730" b="1" dirty="0">
+                <a:solidFill>
+                  <a:srgbClr val="0B1F3A"/>
+                </a:solidFill>
+                <a:latin typeface="Arial" pitchFamily="34" charset="0"/>
+                <a:ea typeface="Arial" pitchFamily="34" charset="-122"/>
+                <a:cs typeface="Arial" pitchFamily="34" charset="-120"/>
+              </a:rPr>
+              <a:t>Ba cột trên bảng, đáp án thường gặp trông như thế này</a:t>
+            </a:r>
+            <a:endParaRPr lang="en-US" sz="1730" dirty="0"/>
+          </a:p>
+          <a:p>
+            <a:pPr indent="0" marL="0">
+              <a:lnSpc>
+                <a:spcPct val="116000"/>
+              </a:lnSpc>
+              <a:buNone/>
+            </a:pPr>
+            <a:r>
+              <a:rPr lang="en-US" sz="1060" dirty="0">
+                <a:solidFill>
+                  <a:srgbClr val="5F7183"/>
+                </a:solidFill>
+                <a:latin typeface="微軟正黑體" pitchFamily="34" charset="0"/>
+                <a:ea typeface="微軟正黑體" pitchFamily="34" charset="-122"/>
+                <a:cs typeface="微軟正黑體" pitchFamily="34" charset="-120"/>
+              </a:rPr>
+              <a:t>白板上那三欄，常見的答案長這樣</a:t>
+            </a:r>
+            <a:endParaRPr lang="en-US" sz="1730" dirty="0"/>
+          </a:p>
+        </p:txBody>
+      </p:sp>
+      <p:graphicFrame>
+        <p:nvGraphicFramePr>
+          <p:cNvPr id="29" name="Table 0"/>
+          <p:cNvGraphicFramePr>
+            <a:graphicFrameLocks noGrp="1"/>
+          </p:cNvGraphicFramePr>
+          <p:nvPr>
+            <p:extLst>
+              <p:ext uri="{D42A27DB-BD31-4B8C-83A1-F6EECF244321}">
+                <p14:modId xmlns:p14="http://schemas.microsoft.com/office/powerpoint/2010/main" val="1579011935"/>
+              </p:ext>
+            </p:extLst>
+          </p:nvPr>
+        </p:nvGraphicFramePr>
+        <p:xfrm>
+          <a:off x="1365034" y="893627"/>
+          <a:ext cx="6413933" cy="720667"/>
+        </p:xfrm>
+        <a:graphic>
+          <a:graphicData uri="http://schemas.openxmlformats.org/drawingml/2006/table">
+            <a:tbl>
+              <a:tblPr/>
+              <a:tblGrid>
+                <a:gridCol w="2162000"/>
+                <a:gridCol w="2162000"/>
+                <a:gridCol w="2162000"/>
+              </a:tblGrid>
+              <a:tr h="288267">
+                <a:tc>
+                  <a:txBody>
+                    <a:bodyPr/>
+                    <a:lstStyle/>
+                    <a:p>
+                      <a:pPr algn="l" indent="0" marL="0">
+                        <a:buNone/>
+                      </a:pPr>
+                      <a:r>
+                        <a:rPr lang="en-US" sz="710" b="1" dirty="0">
+                          <a:solidFill>
+                            <a:srgbClr val="FFFFFF"/>
+                          </a:solidFill>
+                          <a:latin typeface="Arial" pitchFamily="34" charset="0"/>
+                          <a:ea typeface="Arial" pitchFamily="34" charset="-122"/>
+                          <a:cs typeface="Arial" pitchFamily="34" charset="-120"/>
+                        </a:rPr>
+                        <a:t>Hình ảnh</a:t>
+                      </a:r>
+                      <a:endParaRPr lang="en-US" sz="950" dirty="0"/>
+                    </a:p>
+                    <a:p>
+                      <a:pPr algn="l" indent="0" marL="0">
+                        <a:buNone/>
+                      </a:pPr>
+                      <a:r>
+                        <a:rPr lang="en-US" sz="590" dirty="0">
+                          <a:solidFill>
+                            <a:srgbClr val="CFE0EC"/>
+                          </a:solidFill>
+                          <a:latin typeface="微軟正黑體" pitchFamily="34" charset="0"/>
+                          <a:ea typeface="微軟正黑體" pitchFamily="34" charset="-122"/>
+                          <a:cs typeface="微軟正黑體" pitchFamily="34" charset="-120"/>
+                        </a:rPr>
+                        <a:t>外觀</a:t>
+                      </a:r>
+                      <a:endParaRPr lang="en-US" sz="950" dirty="0"/>
+                    </a:p>
+                  </a:txBody>
+                  <a:tcPr marL="63500" marR="63500" marT="38100" marB="38100" anchor="ctr">
+                    <a:lnL w="6350" cap="flat" cmpd="sng" algn="ctr">
+                      <a:solidFill>
+                        <a:srgbClr val="DBE3EA"/>
+                      </a:solidFill>
+                      <a:prstDash val="solid"/>
+                      <a:round/>
+                      <a:headEnd type="none" w="med" len="med"/>
+                      <a:tailEnd type="none" w="med" len="med"/>
+                    </a:lnL>
+                    <a:lnR w="6350" cap="flat" cmpd="sng" algn="ctr">
+                      <a:solidFill>
+                        <a:srgbClr val="DBE3EA"/>
+                      </a:solidFill>
+                      <a:prstDash val="solid"/>
+                      <a:round/>
+                      <a:headEnd type="none" w="med" len="med"/>
+                      <a:tailEnd type="none" w="med" len="med"/>
+                    </a:lnR>
+                    <a:lnT w="6350" cap="flat" cmpd="sng" algn="ctr">
+                      <a:solidFill>
+                        <a:srgbClr val="DBE3EA"/>
+                      </a:solidFill>
+                      <a:prstDash val="solid"/>
+                      <a:round/>
+                      <a:headEnd type="none" w="med" len="med"/>
+                      <a:tailEnd type="none" w="med" len="med"/>
+                    </a:lnT>
+                    <a:lnB w="6350" cap="flat" cmpd="sng" algn="ctr">
+                      <a:solidFill>
+                        <a:srgbClr val="DBE3EA"/>
+                      </a:solidFill>
+                      <a:prstDash val="solid"/>
+                      <a:round/>
+                      <a:headEnd type="none" w="med" len="med"/>
+                      <a:tailEnd type="none" w="med" len="med"/>
+                    </a:lnB>
+                    <a:solidFill>
+                      <a:srgbClr val="0B1F3A"/>
+                    </a:solidFill>
+                  </a:tcPr>
+                </a:tc>
+                <a:tc>
+                  <a:txBody>
+                    <a:bodyPr/>
+                    <a:lstStyle/>
+                    <a:p>
+                      <a:pPr algn="l" indent="0" marL="0">
+                        <a:buNone/>
+                      </a:pPr>
+                      <a:r>
+                        <a:rPr lang="en-US" sz="710" b="1" dirty="0">
+                          <a:solidFill>
+                            <a:srgbClr val="FFFFFF"/>
+                          </a:solidFill>
+                          <a:latin typeface="Arial" pitchFamily="34" charset="0"/>
+                          <a:ea typeface="Arial" pitchFamily="34" charset="-122"/>
+                          <a:cs typeface="Arial" pitchFamily="34" charset="-120"/>
+                        </a:rPr>
+                        <a:t>Hành vi</a:t>
+                      </a:r>
+                      <a:endParaRPr lang="en-US" sz="950" dirty="0"/>
+                    </a:p>
+                    <a:p>
+                      <a:pPr algn="l" indent="0" marL="0">
+                        <a:buNone/>
+                      </a:pPr>
+                      <a:r>
+                        <a:rPr lang="en-US" sz="590" dirty="0">
+                          <a:solidFill>
+                            <a:srgbClr val="CFE0EC"/>
+                          </a:solidFill>
+                          <a:latin typeface="微軟正黑體" pitchFamily="34" charset="0"/>
+                          <a:ea typeface="微軟正黑體" pitchFamily="34" charset="-122"/>
+                          <a:cs typeface="微軟正黑體" pitchFamily="34" charset="-120"/>
+                        </a:rPr>
+                        <a:t>行為</a:t>
+                      </a:r>
+                      <a:endParaRPr lang="en-US" sz="950" dirty="0"/>
+                    </a:p>
+                  </a:txBody>
+                  <a:tcPr marL="63500" marR="63500" marT="38100" marB="38100" anchor="ctr">
+                    <a:lnL w="6350" cap="flat" cmpd="sng" algn="ctr">
+                      <a:solidFill>
+                        <a:srgbClr val="DBE3EA"/>
+                      </a:solidFill>
+                      <a:prstDash val="solid"/>
+                      <a:round/>
+                      <a:headEnd type="none" w="med" len="med"/>
+                      <a:tailEnd type="none" w="med" len="med"/>
+                    </a:lnL>
+                    <a:lnR w="6350" cap="flat" cmpd="sng" algn="ctr">
+                      <a:solidFill>
+                        <a:srgbClr val="DBE3EA"/>
+                      </a:solidFill>
+                      <a:prstDash val="solid"/>
+                      <a:round/>
+                      <a:headEnd type="none" w="med" len="med"/>
+                      <a:tailEnd type="none" w="med" len="med"/>
+                    </a:lnR>
+                    <a:lnT w="6350" cap="flat" cmpd="sng" algn="ctr">
+                      <a:solidFill>
+                        <a:srgbClr val="DBE3EA"/>
+                      </a:solidFill>
+                      <a:prstDash val="solid"/>
+                      <a:round/>
+                      <a:headEnd type="none" w="med" len="med"/>
+                      <a:tailEnd type="none" w="med" len="med"/>
+                    </a:lnT>
+                    <a:lnB w="6350" cap="flat" cmpd="sng" algn="ctr">
+                      <a:solidFill>
+                        <a:srgbClr val="DBE3EA"/>
+                      </a:solidFill>
+                      <a:prstDash val="solid"/>
+                      <a:round/>
+                      <a:headEnd type="none" w="med" len="med"/>
+                      <a:tailEnd type="none" w="med" len="med"/>
+                    </a:lnB>
+                    <a:solidFill>
+                      <a:srgbClr val="0B1F3A"/>
+                    </a:solidFill>
+                  </a:tcPr>
+                </a:tc>
+                <a:tc>
+                  <a:txBody>
+                    <a:bodyPr/>
+                    <a:lstStyle/>
+                    <a:p>
+                      <a:pPr algn="l" indent="0" marL="0">
+                        <a:buNone/>
+                      </a:pPr>
+                      <a:r>
+                        <a:rPr lang="en-US" sz="710" b="1" dirty="0">
+                          <a:solidFill>
+                            <a:srgbClr val="FFFFFF"/>
+                          </a:solidFill>
+                          <a:latin typeface="Arial" pitchFamily="34" charset="0"/>
+                          <a:ea typeface="Arial" pitchFamily="34" charset="-122"/>
+                          <a:cs typeface="Arial" pitchFamily="34" charset="-120"/>
+                        </a:rPr>
+                        <a:t>Vật lý</a:t>
+                      </a:r>
+                      <a:endParaRPr lang="en-US" sz="950" dirty="0"/>
+                    </a:p>
+                    <a:p>
+                      <a:pPr algn="l" indent="0" marL="0">
+                        <a:buNone/>
+                      </a:pPr>
+                      <a:r>
+                        <a:rPr lang="en-US" sz="590" dirty="0">
+                          <a:solidFill>
+                            <a:srgbClr val="CFE0EC"/>
+                          </a:solidFill>
+                          <a:latin typeface="微軟正黑體" pitchFamily="34" charset="0"/>
+                          <a:ea typeface="微軟正黑體" pitchFamily="34" charset="-122"/>
+                          <a:cs typeface="微軟正黑體" pitchFamily="34" charset="-120"/>
+                        </a:rPr>
+                        <a:t>物理</a:t>
+                      </a:r>
+                      <a:endParaRPr lang="en-US" sz="950" dirty="0"/>
+                    </a:p>
+                  </a:txBody>
+                  <a:tcPr marL="63500" marR="63500" marT="38100" marB="38100" anchor="ctr">
+                    <a:lnL w="6350" cap="flat" cmpd="sng" algn="ctr">
+                      <a:solidFill>
+                        <a:srgbClr val="DBE3EA"/>
+                      </a:solidFill>
+                      <a:prstDash val="solid"/>
+                      <a:round/>
+                      <a:headEnd type="none" w="med" len="med"/>
+                      <a:tailEnd type="none" w="med" len="med"/>
+                    </a:lnL>
+                    <a:lnR w="6350" cap="flat" cmpd="sng" algn="ctr">
+                      <a:solidFill>
+                        <a:srgbClr val="DBE3EA"/>
+                      </a:solidFill>
+                      <a:prstDash val="solid"/>
+                      <a:round/>
+                      <a:headEnd type="none" w="med" len="med"/>
+                      <a:tailEnd type="none" w="med" len="med"/>
+                    </a:lnR>
+                    <a:lnT w="6350" cap="flat" cmpd="sng" algn="ctr">
+                      <a:solidFill>
+                        <a:srgbClr val="DBE3EA"/>
+                      </a:solidFill>
+                      <a:prstDash val="solid"/>
+                      <a:round/>
+                      <a:headEnd type="none" w="med" len="med"/>
+                      <a:tailEnd type="none" w="med" len="med"/>
+                    </a:lnT>
+                    <a:lnB w="6350" cap="flat" cmpd="sng" algn="ctr">
+                      <a:solidFill>
+                        <a:srgbClr val="DBE3EA"/>
+                      </a:solidFill>
+                      <a:prstDash val="solid"/>
+                      <a:round/>
+                      <a:headEnd type="none" w="med" len="med"/>
+                      <a:tailEnd type="none" w="med" len="med"/>
+                    </a:lnB>
+                    <a:solidFill>
+                      <a:srgbClr val="0B1F3A"/>
+                    </a:solidFill>
+                  </a:tcPr>
+                </a:tc>
+              </a:tr>
+              <a:tr h="288267">
+                <a:tc>
+                  <a:txBody>
+                    <a:bodyPr/>
+                    <a:lstStyle/>
+                    <a:p>
+                      <a:pPr algn="l" indent="0" marL="0">
+                        <a:buNone/>
+                      </a:pPr>
+                      <a:r>
+                        <a:rPr lang="en-US" sz="710" b="1" dirty="0">
+                          <a:solidFill>
+                            <a:srgbClr val="0B1F3A"/>
+                          </a:solidFill>
+                          <a:latin typeface="Arial" pitchFamily="34" charset="0"/>
+                          <a:ea typeface="Arial" pitchFamily="34" charset="-122"/>
+                          <a:cs typeface="Arial" pitchFamily="34" charset="-120"/>
+                        </a:rPr>
+                        <a:t>Mái hiên: người bước ra từ sau cột</a:t>
+                      </a:r>
+                      <a:endParaRPr lang="en-US" sz="950" dirty="0"/>
+                    </a:p>
+                    <a:p>
+                      <a:pPr algn="l" indent="0" marL="0">
+                        <a:buNone/>
+                      </a:pPr>
+                      <a:r>
+                        <a:rPr lang="en-US" sz="590" dirty="0">
+                          <a:solidFill>
+                            <a:srgbClr val="5F7183"/>
+                          </a:solidFill>
+                          <a:latin typeface="微軟正黑體" pitchFamily="34" charset="0"/>
+                          <a:ea typeface="微軟正黑體" pitchFamily="34" charset="-122"/>
+                          <a:cs typeface="微軟正黑體" pitchFamily="34" charset="-120"/>
+                        </a:rPr>
+                        <a:t>騎樓：人從柱子後面出現</a:t>
+                      </a:r>
+                      <a:endParaRPr lang="en-US" sz="950" dirty="0"/>
+                    </a:p>
+                  </a:txBody>
+                  <a:tcPr marL="63500" marR="63500" marT="38100" marB="38100" anchor="ctr">
+                    <a:lnL w="6350" cap="flat" cmpd="sng" algn="ctr">
+                      <a:solidFill>
+                        <a:srgbClr val="DBE3EA"/>
+                      </a:solidFill>
+                      <a:prstDash val="solid"/>
+                      <a:round/>
+                      <a:headEnd type="none" w="med" len="med"/>
+                      <a:tailEnd type="none" w="med" len="med"/>
+                    </a:lnL>
+                    <a:lnR w="6350" cap="flat" cmpd="sng" algn="ctr">
+                      <a:solidFill>
+                        <a:srgbClr val="DBE3EA"/>
+                      </a:solidFill>
+                      <a:prstDash val="solid"/>
+                      <a:round/>
+                      <a:headEnd type="none" w="med" len="med"/>
+                      <a:tailEnd type="none" w="med" len="med"/>
+                    </a:lnR>
+                    <a:lnT w="6350" cap="flat" cmpd="sng" algn="ctr">
+                      <a:solidFill>
+                        <a:srgbClr val="DBE3EA"/>
+                      </a:solidFill>
+                      <a:prstDash val="solid"/>
+                      <a:round/>
+                      <a:headEnd type="none" w="med" len="med"/>
+                      <a:tailEnd type="none" w="med" len="med"/>
+                    </a:lnT>
+                    <a:lnB w="6350" cap="flat" cmpd="sng" algn="ctr">
+                      <a:solidFill>
+                        <a:srgbClr val="DBE3EA"/>
+                      </a:solidFill>
+                      <a:prstDash val="solid"/>
+                      <a:round/>
+                      <a:headEnd type="none" w="med" len="med"/>
+                      <a:tailEnd type="none" w="med" len="med"/>
+                    </a:lnB>
+                  </a:tcPr>
+                </a:tc>
+                <a:tc>
+                  <a:txBody>
+                    <a:bodyPr/>
+                    <a:lstStyle/>
+                    <a:p>
+                      <a:pPr algn="l" indent="0" marL="0">
+                        <a:buNone/>
+                      </a:pPr>
+                      <a:r>
+                        <a:rPr lang="en-US" sz="710" dirty="0">
+                          <a:solidFill>
+                            <a:srgbClr val="1A2733"/>
+                          </a:solidFill>
+                          <a:latin typeface="Arial" pitchFamily="34" charset="0"/>
+                          <a:ea typeface="Arial" pitchFamily="34" charset="-122"/>
+                          <a:cs typeface="Arial" pitchFamily="34" charset="-120"/>
+                        </a:rPr>
+                        <a:t>Xe máy lách giữa hai ô tô</a:t>
+                      </a:r>
+                      <a:endParaRPr lang="en-US" sz="950" dirty="0"/>
+                    </a:p>
+                    <a:p>
+                      <a:pPr algn="l" indent="0" marL="0">
+                        <a:buNone/>
+                      </a:pPr>
+                      <a:r>
+                        <a:rPr lang="en-US" sz="590" dirty="0">
+                          <a:solidFill>
+                            <a:srgbClr val="5F7183"/>
+                          </a:solidFill>
+                          <a:latin typeface="微軟正黑體" pitchFamily="34" charset="0"/>
+                          <a:ea typeface="微軟正黑體" pitchFamily="34" charset="-122"/>
+                          <a:cs typeface="微軟正黑體" pitchFamily="34" charset="-120"/>
+                        </a:rPr>
+                        <a:t>機車從兩台車中間鑽過去</a:t>
+                      </a:r>
+                      <a:endParaRPr lang="en-US" sz="950" dirty="0"/>
+                    </a:p>
+                  </a:txBody>
+                  <a:tcPr marL="63500" marR="63500" marT="38100" marB="38100" anchor="ctr">
+                    <a:lnL w="6350" cap="flat" cmpd="sng" algn="ctr">
+                      <a:solidFill>
+                        <a:srgbClr val="DBE3EA"/>
+                      </a:solidFill>
+                      <a:prstDash val="solid"/>
+                      <a:round/>
+                      <a:headEnd type="none" w="med" len="med"/>
+                      <a:tailEnd type="none" w="med" len="med"/>
+                    </a:lnL>
+                    <a:lnR w="6350" cap="flat" cmpd="sng" algn="ctr">
+                      <a:solidFill>
+                        <a:srgbClr val="DBE3EA"/>
+                      </a:solidFill>
+                      <a:prstDash val="solid"/>
+                      <a:round/>
+                      <a:headEnd type="none" w="med" len="med"/>
+                      <a:tailEnd type="none" w="med" len="med"/>
+                    </a:lnR>
+                    <a:lnT w="6350" cap="flat" cmpd="sng" algn="ctr">
+                      <a:solidFill>
+                        <a:srgbClr val="DBE3EA"/>
+                      </a:solidFill>
+                      <a:prstDash val="solid"/>
+                      <a:round/>
+                      <a:headEnd type="none" w="med" len="med"/>
+                      <a:tailEnd type="none" w="med" len="med"/>
+                    </a:lnT>
+                    <a:lnB w="6350" cap="flat" cmpd="sng" algn="ctr">
+                      <a:solidFill>
+                        <a:srgbClr val="DBE3EA"/>
+                      </a:solidFill>
+                      <a:prstDash val="solid"/>
+                      <a:round/>
+                      <a:headEnd type="none" w="med" len="med"/>
+                      <a:tailEnd type="none" w="med" len="med"/>
+                    </a:lnB>
+                  </a:tcPr>
+                </a:tc>
+                <a:tc>
+                  <a:txBody>
+                    <a:bodyPr/>
+                    <a:lstStyle/>
+                    <a:p>
+                      <a:pPr algn="l" indent="0" marL="0">
+                        <a:buNone/>
+                      </a:pPr>
+                      <a:r>
+                        <a:rPr lang="en-US" sz="710" dirty="0">
+                          <a:solidFill>
+                            <a:srgbClr val="1A2733"/>
+                          </a:solidFill>
+                          <a:latin typeface="Arial" pitchFamily="34" charset="0"/>
+                          <a:ea typeface="Arial" pitchFamily="34" charset="-122"/>
+                          <a:cs typeface="Arial" pitchFamily="34" charset="-120"/>
+                        </a:rPr>
+                        <a:t>Nắp cống: trời mưa trơn, xe trượt</a:t>
+                      </a:r>
+                      <a:endParaRPr lang="en-US" sz="950" dirty="0"/>
+                    </a:p>
+                    <a:p>
+                      <a:pPr algn="l" indent="0" marL="0">
+                        <a:buNone/>
+                      </a:pPr>
+                      <a:r>
+                        <a:rPr lang="en-US" sz="590" dirty="0">
+                          <a:solidFill>
+                            <a:srgbClr val="5F7183"/>
+                          </a:solidFill>
+                          <a:latin typeface="微軟正黑體" pitchFamily="34" charset="0"/>
+                          <a:ea typeface="微軟正黑體" pitchFamily="34" charset="-122"/>
+                          <a:cs typeface="微軟正黑體" pitchFamily="34" charset="-120"/>
+                        </a:rPr>
+                        <a:t>人孔蓋：下雨壓過去會滑</a:t>
+                      </a:r>
+                      <a:endParaRPr lang="en-US" sz="950" dirty="0"/>
+                    </a:p>
+                  </a:txBody>
+                  <a:tcPr marL="63500" marR="63500" marT="38100" marB="38100" anchor="ctr">
+                    <a:lnL w="6350" cap="flat" cmpd="sng" algn="ctr">
+                      <a:solidFill>
+                        <a:srgbClr val="DBE3EA"/>
+                      </a:solidFill>
+                      <a:prstDash val="solid"/>
+                      <a:round/>
+                      <a:headEnd type="none" w="med" len="med"/>
+                      <a:tailEnd type="none" w="med" len="med"/>
+                    </a:lnL>
+                    <a:lnR w="6350" cap="flat" cmpd="sng" algn="ctr">
+                      <a:solidFill>
+                        <a:srgbClr val="DBE3EA"/>
+                      </a:solidFill>
+                      <a:prstDash val="solid"/>
+                      <a:round/>
+                      <a:headEnd type="none" w="med" len="med"/>
+                      <a:tailEnd type="none" w="med" len="med"/>
+                    </a:lnR>
+                    <a:lnT w="6350" cap="flat" cmpd="sng" algn="ctr">
+                      <a:solidFill>
+                        <a:srgbClr val="DBE3EA"/>
+                      </a:solidFill>
+                      <a:prstDash val="solid"/>
+                      <a:round/>
+                      <a:headEnd type="none" w="med" len="med"/>
+                      <a:tailEnd type="none" w="med" len="med"/>
+                    </a:lnT>
+                    <a:lnB w="6350" cap="flat" cmpd="sng" algn="ctr">
+                      <a:solidFill>
+                        <a:srgbClr val="DBE3EA"/>
+                      </a:solidFill>
+                      <a:prstDash val="solid"/>
+                      <a:round/>
+                      <a:headEnd type="none" w="med" len="med"/>
+                      <a:tailEnd type="none" w="med" len="med"/>
+                    </a:lnB>
+                  </a:tcPr>
+                </a:tc>
+              </a:tr>
+              <a:tr h="288267">
+                <a:tc>
+                  <a:txBody>
+                    <a:bodyPr/>
+                    <a:lstStyle/>
+                    <a:p>
+                      <a:pPr algn="l" indent="0" marL="0">
+                        <a:buNone/>
+                      </a:pPr>
+                      <a:r>
+                        <a:rPr lang="en-US" sz="710" b="1" dirty="0">
+                          <a:solidFill>
+                            <a:srgbClr val="0B1F3A"/>
+                          </a:solidFill>
+                          <a:latin typeface="Arial" pitchFamily="34" charset="0"/>
+                          <a:ea typeface="Arial" pitchFamily="34" charset="-122"/>
+                          <a:cs typeface="Arial" pitchFamily="34" charset="-120"/>
+                        </a:rPr>
+                        <a:t>Biển hiệu, băng rôn che đèn tín hiệu</a:t>
+                      </a:r>
+                      <a:endParaRPr lang="en-US" sz="950" dirty="0"/>
+                    </a:p>
+                    <a:p>
+                      <a:pPr algn="l" indent="0" marL="0">
+                        <a:buNone/>
+                      </a:pPr>
+                      <a:r>
+                        <a:rPr lang="en-US" sz="590" dirty="0">
+                          <a:solidFill>
+                            <a:srgbClr val="5F7183"/>
+                          </a:solidFill>
+                          <a:latin typeface="微軟正黑體" pitchFamily="34" charset="0"/>
+                          <a:ea typeface="微軟正黑體" pitchFamily="34" charset="-122"/>
+                          <a:cs typeface="微軟正黑體" pitchFamily="34" charset="-120"/>
+                        </a:rPr>
+                        <a:t>招牌、布條蓋住號誌</a:t>
+                      </a:r>
+                      <a:endParaRPr lang="en-US" sz="950" dirty="0"/>
+                    </a:p>
+                  </a:txBody>
+                  <a:tcPr marL="63500" marR="63500" marT="38100" marB="38100" anchor="ctr">
+                    <a:lnL w="6350" cap="flat" cmpd="sng" algn="ctr">
+                      <a:solidFill>
+                        <a:srgbClr val="DBE3EA"/>
+                      </a:solidFill>
+                      <a:prstDash val="solid"/>
+                      <a:round/>
+                      <a:headEnd type="none" w="med" len="med"/>
+                      <a:tailEnd type="none" w="med" len="med"/>
+                    </a:lnL>
+                    <a:lnR w="6350" cap="flat" cmpd="sng" algn="ctr">
+                      <a:solidFill>
+                        <a:srgbClr val="DBE3EA"/>
+                      </a:solidFill>
+                      <a:prstDash val="solid"/>
+                      <a:round/>
+                      <a:headEnd type="none" w="med" len="med"/>
+                      <a:tailEnd type="none" w="med" len="med"/>
+                    </a:lnR>
+                    <a:lnT w="6350" cap="flat" cmpd="sng" algn="ctr">
+                      <a:solidFill>
+                        <a:srgbClr val="DBE3EA"/>
+                      </a:solidFill>
+                      <a:prstDash val="solid"/>
+                      <a:round/>
+                      <a:headEnd type="none" w="med" len="med"/>
+                      <a:tailEnd type="none" w="med" len="med"/>
+                    </a:lnT>
+                    <a:lnB w="6350" cap="flat" cmpd="sng" algn="ctr">
+                      <a:solidFill>
+                        <a:srgbClr val="DBE3EA"/>
+                      </a:solidFill>
+                      <a:prstDash val="solid"/>
+                      <a:round/>
+                      <a:headEnd type="none" w="med" len="med"/>
+                      <a:tailEnd type="none" w="med" len="med"/>
+                    </a:lnB>
+                  </a:tcPr>
+                </a:tc>
+                <a:tc>
+                  <a:txBody>
+                    <a:bodyPr/>
+                    <a:lstStyle/>
+                    <a:p>
+                      <a:pPr algn="l" indent="0" marL="0">
+                        <a:buNone/>
+                      </a:pPr>
+                      <a:r>
+                        <a:rPr lang="en-US" sz="710" dirty="0">
+                          <a:solidFill>
+                            <a:srgbClr val="1A2733"/>
+                          </a:solidFill>
+                          <a:latin typeface="Arial" pitchFamily="34" charset="0"/>
+                          <a:ea typeface="Arial" pitchFamily="34" charset="-122"/>
+                          <a:cs typeface="Arial" pitchFamily="34" charset="-120"/>
+                        </a:rPr>
+                        <a:t>Đèn xanh: 20 xe toả ra hình quạt</a:t>
+                      </a:r>
+                      <a:endParaRPr lang="en-US" sz="950" dirty="0"/>
+                    </a:p>
+                    <a:p>
+                      <a:pPr algn="l" indent="0" marL="0">
+                        <a:buNone/>
+                      </a:pPr>
+                      <a:r>
+                        <a:rPr lang="en-US" sz="590" dirty="0">
+                          <a:solidFill>
+                            <a:srgbClr val="5F7183"/>
+                          </a:solidFill>
+                          <a:latin typeface="微軟正黑體" pitchFamily="34" charset="0"/>
+                          <a:ea typeface="微軟正黑體" pitchFamily="34" charset="-122"/>
+                          <a:cs typeface="微軟正黑體" pitchFamily="34" charset="-120"/>
+                        </a:rPr>
+                        <a:t>綠燈起步，二十台扇形散開</a:t>
+                      </a:r>
+                      <a:endParaRPr lang="en-US" sz="950" dirty="0"/>
+                    </a:p>
+                  </a:txBody>
+                  <a:tcPr marL="63500" marR="63500" marT="38100" marB="38100" anchor="ctr">
+                    <a:lnL w="6350" cap="flat" cmpd="sng" algn="ctr">
+                      <a:solidFill>
+                        <a:srgbClr val="DBE3EA"/>
+                      </a:solidFill>
+                      <a:prstDash val="solid"/>
+                      <a:round/>
+                      <a:headEnd type="none" w="med" len="med"/>
+                      <a:tailEnd type="none" w="med" len="med"/>
+                    </a:lnL>
+                    <a:lnR w="6350" cap="flat" cmpd="sng" algn="ctr">
+                      <a:solidFill>
+                        <a:srgbClr val="DBE3EA"/>
+                      </a:solidFill>
+                      <a:prstDash val="solid"/>
+                      <a:round/>
+                      <a:headEnd type="none" w="med" len="med"/>
+                      <a:tailEnd type="none" w="med" len="med"/>
+                    </a:lnR>
+                    <a:lnT w="6350" cap="flat" cmpd="sng" algn="ctr">
+                      <a:solidFill>
+                        <a:srgbClr val="DBE3EA"/>
+                      </a:solidFill>
+                      <a:prstDash val="solid"/>
+                      <a:round/>
+                      <a:headEnd type="none" w="med" len="med"/>
+                      <a:tailEnd type="none" w="med" len="med"/>
+                    </a:lnT>
+                    <a:lnB w="6350" cap="flat" cmpd="sng" algn="ctr">
+                      <a:solidFill>
+                        <a:srgbClr val="DBE3EA"/>
+                      </a:solidFill>
+                      <a:prstDash val="solid"/>
+                      <a:round/>
+                      <a:headEnd type="none" w="med" len="med"/>
+                      <a:tailEnd type="none" w="med" len="med"/>
+                    </a:lnB>
+                  </a:tcPr>
+                </a:tc>
+                <a:tc>
+                  <a:txBody>
+                    <a:bodyPr/>
+                    <a:lstStyle/>
+                    <a:p>
+                      <a:pPr algn="l" indent="0" marL="0">
+                        <a:buNone/>
+                      </a:pPr>
+                      <a:r>
+                        <a:rPr lang="en-US" sz="710" dirty="0">
+                          <a:solidFill>
+                            <a:srgbClr val="1A2733"/>
+                          </a:solidFill>
+                          <a:latin typeface="Arial" pitchFamily="34" charset="0"/>
+                          <a:ea typeface="Arial" pitchFamily="34" charset="-122"/>
+                          <a:cs typeface="Arial" pitchFamily="34" charset="-120"/>
+                        </a:rPr>
+                        <a:t>Vũng nước: sâu 2 cm hay 20 cm?</a:t>
+                      </a:r>
+                      <a:endParaRPr lang="en-US" sz="950" dirty="0"/>
+                    </a:p>
+                    <a:p>
+                      <a:pPr algn="l" indent="0" marL="0">
+                        <a:buNone/>
+                      </a:pPr>
+                      <a:r>
+                        <a:rPr lang="en-US" sz="590" dirty="0">
+                          <a:solidFill>
+                            <a:srgbClr val="5F7183"/>
+                          </a:solidFill>
+                          <a:latin typeface="微軟正黑體" pitchFamily="34" charset="0"/>
+                          <a:ea typeface="微軟正黑體" pitchFamily="34" charset="-122"/>
+                          <a:cs typeface="微軟正黑體" pitchFamily="34" charset="-120"/>
+                        </a:rPr>
+                        <a:t>積水：看不出兩公分還是二十</a:t>
+                      </a:r>
+                      <a:endParaRPr lang="en-US" sz="950" dirty="0"/>
+                    </a:p>
+                  </a:txBody>
+                  <a:tcPr marL="63500" marR="63500" marT="38100" marB="38100" anchor="ctr">
+                    <a:lnL w="6350" cap="flat" cmpd="sng" algn="ctr">
+                      <a:solidFill>
+                        <a:srgbClr val="DBE3EA"/>
+                      </a:solidFill>
+                      <a:prstDash val="solid"/>
+                      <a:round/>
+                      <a:headEnd type="none" w="med" len="med"/>
+                      <a:tailEnd type="none" w="med" len="med"/>
+                    </a:lnL>
+                    <a:lnR w="6350" cap="flat" cmpd="sng" algn="ctr">
+                      <a:solidFill>
+                        <a:srgbClr val="DBE3EA"/>
+                      </a:solidFill>
+                      <a:prstDash val="solid"/>
+                      <a:round/>
+                      <a:headEnd type="none" w="med" len="med"/>
+                      <a:tailEnd type="none" w="med" len="med"/>
+                    </a:lnR>
+                    <a:lnT w="6350" cap="flat" cmpd="sng" algn="ctr">
+                      <a:solidFill>
+                        <a:srgbClr val="DBE3EA"/>
+                      </a:solidFill>
+                      <a:prstDash val="solid"/>
+                      <a:round/>
+                      <a:headEnd type="none" w="med" len="med"/>
+                      <a:tailEnd type="none" w="med" len="med"/>
+                    </a:lnT>
+                    <a:lnB w="6350" cap="flat" cmpd="sng" algn="ctr">
+                      <a:solidFill>
+                        <a:srgbClr val="DBE3EA"/>
+                      </a:solidFill>
+                      <a:prstDash val="solid"/>
+                      <a:round/>
+                      <a:headEnd type="none" w="med" len="med"/>
+                      <a:tailEnd type="none" w="med" len="med"/>
+                    </a:lnB>
+                  </a:tcPr>
+                </a:tc>
+              </a:tr>
+              <a:tr h="288267">
+                <a:tc>
+                  <a:txBody>
+                    <a:bodyPr/>
+                    <a:lstStyle/>
+                    <a:p>
+                      <a:pPr algn="l" indent="0" marL="0">
+                        <a:buNone/>
+                      </a:pPr>
+                      <a:r>
+                        <a:rPr lang="en-US" sz="710" b="1" dirty="0">
+                          <a:solidFill>
+                            <a:srgbClr val="0B1F3A"/>
+                          </a:solidFill>
+                          <a:latin typeface="Arial" pitchFamily="34" charset="0"/>
+                          <a:ea typeface="Arial" pitchFamily="34" charset="-122"/>
+                          <a:cs typeface="Arial" pitchFamily="34" charset="-120"/>
+                        </a:rPr>
+                        <a:t>Xe máy đỗ thành hàng dài bên đường</a:t>
+                      </a:r>
+                      <a:endParaRPr lang="en-US" sz="950" dirty="0"/>
+                    </a:p>
+                    <a:p>
+                      <a:pPr algn="l" indent="0" marL="0">
+                        <a:buNone/>
+                      </a:pPr>
+                      <a:r>
+                        <a:rPr lang="en-US" sz="590" dirty="0">
+                          <a:solidFill>
+                            <a:srgbClr val="5F7183"/>
+                          </a:solidFill>
+                          <a:latin typeface="微軟正黑體" pitchFamily="34" charset="0"/>
+                          <a:ea typeface="微軟正黑體" pitchFamily="34" charset="-122"/>
+                          <a:cs typeface="微軟正黑體" pitchFamily="34" charset="-120"/>
+                        </a:rPr>
+                        <a:t>路邊成排停放的機車</a:t>
+                      </a:r>
+                      <a:endParaRPr lang="en-US" sz="950" dirty="0"/>
+                    </a:p>
+                  </a:txBody>
+                  <a:tcPr marL="63500" marR="63500" marT="38100" marB="38100" anchor="ctr">
+                    <a:lnL w="6350" cap="flat" cmpd="sng" algn="ctr">
+                      <a:solidFill>
+                        <a:srgbClr val="DBE3EA"/>
+                      </a:solidFill>
+                      <a:prstDash val="solid"/>
+                      <a:round/>
+                      <a:headEnd type="none" w="med" len="med"/>
+                      <a:tailEnd type="none" w="med" len="med"/>
+                    </a:lnL>
+                    <a:lnR w="6350" cap="flat" cmpd="sng" algn="ctr">
+                      <a:solidFill>
+                        <a:srgbClr val="DBE3EA"/>
+                      </a:solidFill>
+                      <a:prstDash val="solid"/>
+                      <a:round/>
+                      <a:headEnd type="none" w="med" len="med"/>
+                      <a:tailEnd type="none" w="med" len="med"/>
+                    </a:lnR>
+                    <a:lnT w="6350" cap="flat" cmpd="sng" algn="ctr">
+                      <a:solidFill>
+                        <a:srgbClr val="DBE3EA"/>
+                      </a:solidFill>
+                      <a:prstDash val="solid"/>
+                      <a:round/>
+                      <a:headEnd type="none" w="med" len="med"/>
+                      <a:tailEnd type="none" w="med" len="med"/>
+                    </a:lnT>
+                    <a:lnB w="6350" cap="flat" cmpd="sng" algn="ctr">
+                      <a:solidFill>
+                        <a:srgbClr val="DBE3EA"/>
+                      </a:solidFill>
+                      <a:prstDash val="solid"/>
+                      <a:round/>
+                      <a:headEnd type="none" w="med" len="med"/>
+                      <a:tailEnd type="none" w="med" len="med"/>
+                    </a:lnB>
+                  </a:tcPr>
+                </a:tc>
+                <a:tc>
+                  <a:txBody>
+                    <a:bodyPr/>
+                    <a:lstStyle/>
+                    <a:p>
+                      <a:pPr algn="l" indent="0" marL="0">
+                        <a:buNone/>
+                      </a:pPr>
+                      <a:r>
+                        <a:rPr lang="en-US" sz="710" dirty="0">
+                          <a:solidFill>
+                            <a:srgbClr val="1A2733"/>
+                          </a:solidFill>
+                          <a:latin typeface="Arial" pitchFamily="34" charset="0"/>
+                          <a:ea typeface="Arial" pitchFamily="34" charset="-122"/>
+                          <a:cs typeface="Arial" pitchFamily="34" charset="-120"/>
+                        </a:rPr>
+                        <a:t>Tạt đầu, không bật xi nhan</a:t>
+                      </a:r>
+                      <a:endParaRPr lang="en-US" sz="950" dirty="0"/>
+                    </a:p>
+                    <a:p>
+                      <a:pPr algn="l" indent="0" marL="0">
+                        <a:buNone/>
+                      </a:pPr>
+                      <a:r>
+                        <a:rPr lang="en-US" sz="590" dirty="0">
+                          <a:solidFill>
+                            <a:srgbClr val="5F7183"/>
+                          </a:solidFill>
+                          <a:latin typeface="微軟正黑體" pitchFamily="34" charset="0"/>
+                          <a:ea typeface="微軟正黑體" pitchFamily="34" charset="-122"/>
+                          <a:cs typeface="微軟正黑體" pitchFamily="34" charset="-120"/>
+                        </a:rPr>
+                        <a:t>不打方向燈直接切進來</a:t>
+                      </a:r>
+                      <a:endParaRPr lang="en-US" sz="950" dirty="0"/>
+                    </a:p>
+                  </a:txBody>
+                  <a:tcPr marL="63500" marR="63500" marT="38100" marB="38100" anchor="ctr">
+                    <a:lnL w="6350" cap="flat" cmpd="sng" algn="ctr">
+                      <a:solidFill>
+                        <a:srgbClr val="DBE3EA"/>
+                      </a:solidFill>
+                      <a:prstDash val="solid"/>
+                      <a:round/>
+                      <a:headEnd type="none" w="med" len="med"/>
+                      <a:tailEnd type="none" w="med" len="med"/>
+                    </a:lnL>
+                    <a:lnR w="6350" cap="flat" cmpd="sng" algn="ctr">
+                      <a:solidFill>
+                        <a:srgbClr val="DBE3EA"/>
+                      </a:solidFill>
+                      <a:prstDash val="solid"/>
+                      <a:round/>
+                      <a:headEnd type="none" w="med" len="med"/>
+                      <a:tailEnd type="none" w="med" len="med"/>
+                    </a:lnR>
+                    <a:lnT w="6350" cap="flat" cmpd="sng" algn="ctr">
+                      <a:solidFill>
+                        <a:srgbClr val="DBE3EA"/>
+                      </a:solidFill>
+                      <a:prstDash val="solid"/>
+                      <a:round/>
+                      <a:headEnd type="none" w="med" len="med"/>
+                      <a:tailEnd type="none" w="med" len="med"/>
+                    </a:lnT>
+                    <a:lnB w="6350" cap="flat" cmpd="sng" algn="ctr">
+                      <a:solidFill>
+                        <a:srgbClr val="DBE3EA"/>
+                      </a:solidFill>
+                      <a:prstDash val="solid"/>
+                      <a:round/>
+                      <a:headEnd type="none" w="med" len="med"/>
+                      <a:tailEnd type="none" w="med" len="med"/>
+                    </a:lnB>
+                  </a:tcPr>
+                </a:tc>
+                <a:tc>
+                  <a:txBody>
+                    <a:bodyPr/>
+                    <a:lstStyle/>
+                    <a:p>
+                      <a:pPr algn="l" indent="0" marL="0">
+                        <a:buNone/>
+                      </a:pPr>
+                      <a:r>
+                        <a:rPr lang="en-US" sz="710" dirty="0">
+                          <a:solidFill>
+                            <a:srgbClr val="1A2733"/>
+                          </a:solidFill>
+                          <a:latin typeface="Arial" pitchFamily="34" charset="0"/>
+                          <a:ea typeface="Arial" pitchFamily="34" charset="-122"/>
+                          <a:cs typeface="Arial" pitchFamily="34" charset="-120"/>
+                        </a:rPr>
+                        <a:t>Mặt đường vá: độ bám mỗi đoạn một khác</a:t>
+                      </a:r>
+                      <a:endParaRPr lang="en-US" sz="950" dirty="0"/>
+                    </a:p>
+                    <a:p>
+                      <a:pPr algn="l" indent="0" marL="0">
+                        <a:buNone/>
+                      </a:pPr>
+                      <a:r>
+                        <a:rPr lang="en-US" sz="590" dirty="0">
+                          <a:solidFill>
+                            <a:srgbClr val="5F7183"/>
+                          </a:solidFill>
+                          <a:latin typeface="微軟正黑體" pitchFamily="34" charset="0"/>
+                          <a:ea typeface="微軟正黑體" pitchFamily="34" charset="-122"/>
+                          <a:cs typeface="微軟正黑體" pitchFamily="34" charset="-120"/>
+                        </a:rPr>
+                        <a:t>補丁路面，抓地力每段不同</a:t>
+                      </a:r>
+                      <a:endParaRPr lang="en-US" sz="950" dirty="0"/>
+                    </a:p>
+                  </a:txBody>
+                  <a:tcPr marL="63500" marR="63500" marT="38100" marB="38100" anchor="ctr">
+                    <a:lnL w="6350" cap="flat" cmpd="sng" algn="ctr">
+                      <a:solidFill>
+                        <a:srgbClr val="DBE3EA"/>
+                      </a:solidFill>
+                      <a:prstDash val="solid"/>
+                      <a:round/>
+                      <a:headEnd type="none" w="med" len="med"/>
+                      <a:tailEnd type="none" w="med" len="med"/>
+                    </a:lnL>
+                    <a:lnR w="6350" cap="flat" cmpd="sng" algn="ctr">
+                      <a:solidFill>
+                        <a:srgbClr val="DBE3EA"/>
+                      </a:solidFill>
+                      <a:prstDash val="solid"/>
+                      <a:round/>
+                      <a:headEnd type="none" w="med" len="med"/>
+                      <a:tailEnd type="none" w="med" len="med"/>
+                    </a:lnR>
+                    <a:lnT w="6350" cap="flat" cmpd="sng" algn="ctr">
+                      <a:solidFill>
+                        <a:srgbClr val="DBE3EA"/>
+                      </a:solidFill>
+                      <a:prstDash val="solid"/>
+                      <a:round/>
+                      <a:headEnd type="none" w="med" len="med"/>
+                      <a:tailEnd type="none" w="med" len="med"/>
+                    </a:lnT>
+                    <a:lnB w="6350" cap="flat" cmpd="sng" algn="ctr">
+                      <a:solidFill>
+                        <a:srgbClr val="DBE3EA"/>
+                      </a:solidFill>
+                      <a:prstDash val="solid"/>
+                      <a:round/>
+                      <a:headEnd type="none" w="med" len="med"/>
+                      <a:tailEnd type="none" w="med" len="med"/>
+                    </a:lnB>
+                  </a:tcPr>
+                </a:tc>
+              </a:tr>
+              <a:tr h="288267">
+                <a:tc>
+                  <a:txBody>
+                    <a:bodyPr/>
+                    <a:lstStyle/>
+                    <a:p>
+                      <a:pPr algn="l" indent="0" marL="0">
+                        <a:buNone/>
+                      </a:pPr>
+                      <a:r>
+                        <a:rPr lang="en-US" sz="710" b="1" dirty="0">
+                          <a:solidFill>
+                            <a:srgbClr val="0B1F3A"/>
+                          </a:solidFill>
+                          <a:latin typeface="Arial" pitchFamily="34" charset="0"/>
+                          <a:ea typeface="Arial" pitchFamily="34" charset="-122"/>
+                          <a:cs typeface="Arial" pitchFamily="34" charset="-120"/>
+                        </a:rPr>
+                        <a:t>Xe đẩy hàng rong, ghế nhựa vỉa hè</a:t>
+                      </a:r>
+                      <a:endParaRPr lang="en-US" sz="950" dirty="0"/>
+                    </a:p>
+                    <a:p>
+                      <a:pPr algn="l" indent="0" marL="0">
+                        <a:buNone/>
+                      </a:pPr>
+                      <a:r>
+                        <a:rPr lang="en-US" sz="590" dirty="0">
+                          <a:solidFill>
+                            <a:srgbClr val="5F7183"/>
+                          </a:solidFill>
+                          <a:latin typeface="微軟正黑體" pitchFamily="34" charset="0"/>
+                          <a:ea typeface="微軟正黑體" pitchFamily="34" charset="-122"/>
+                          <a:cs typeface="微軟正黑體" pitchFamily="34" charset="-120"/>
+                        </a:rPr>
+                        <a:t>攤販推車、路邊塑膠小凳</a:t>
+                      </a:r>
+                      <a:endParaRPr lang="en-US" sz="950" dirty="0"/>
+                    </a:p>
+                  </a:txBody>
+                  <a:tcPr marL="63500" marR="63500" marT="38100" marB="38100" anchor="ctr">
+                    <a:lnL w="6350" cap="flat" cmpd="sng" algn="ctr">
+                      <a:solidFill>
+                        <a:srgbClr val="DBE3EA"/>
+                      </a:solidFill>
+                      <a:prstDash val="solid"/>
+                      <a:round/>
+                      <a:headEnd type="none" w="med" len="med"/>
+                      <a:tailEnd type="none" w="med" len="med"/>
+                    </a:lnL>
+                    <a:lnR w="6350" cap="flat" cmpd="sng" algn="ctr">
+                      <a:solidFill>
+                        <a:srgbClr val="DBE3EA"/>
+                      </a:solidFill>
+                      <a:prstDash val="solid"/>
+                      <a:round/>
+                      <a:headEnd type="none" w="med" len="med"/>
+                      <a:tailEnd type="none" w="med" len="med"/>
+                    </a:lnR>
+                    <a:lnT w="6350" cap="flat" cmpd="sng" algn="ctr">
+                      <a:solidFill>
+                        <a:srgbClr val="DBE3EA"/>
+                      </a:solidFill>
+                      <a:prstDash val="solid"/>
+                      <a:round/>
+                      <a:headEnd type="none" w="med" len="med"/>
+                      <a:tailEnd type="none" w="med" len="med"/>
+                    </a:lnT>
+                    <a:lnB w="6350" cap="flat" cmpd="sng" algn="ctr">
+                      <a:solidFill>
+                        <a:srgbClr val="DBE3EA"/>
+                      </a:solidFill>
+                      <a:prstDash val="solid"/>
+                      <a:round/>
+                      <a:headEnd type="none" w="med" len="med"/>
+                      <a:tailEnd type="none" w="med" len="med"/>
+                    </a:lnB>
+                  </a:tcPr>
+                </a:tc>
+                <a:tc>
+                  <a:txBody>
+                    <a:bodyPr/>
+                    <a:lstStyle/>
+                    <a:p>
+                      <a:pPr algn="l" indent="0" marL="0">
+                        <a:buNone/>
+                      </a:pPr>
+                      <a:r>
+                        <a:rPr lang="en-US" sz="710" dirty="0">
+                          <a:solidFill>
+                            <a:srgbClr val="1A2733"/>
+                          </a:solidFill>
+                          <a:latin typeface="Arial" pitchFamily="34" charset="0"/>
+                          <a:ea typeface="Arial" pitchFamily="34" charset="-122"/>
+                          <a:cs typeface="Arial" pitchFamily="34" charset="-120"/>
+                        </a:rPr>
+                        <a:t>Xe giao hàng dừng đột ngột bên đường</a:t>
+                      </a:r>
+                      <a:endParaRPr lang="en-US" sz="950" dirty="0"/>
+                    </a:p>
+                    <a:p>
+                      <a:pPr algn="l" indent="0" marL="0">
+                        <a:buNone/>
+                      </a:pPr>
+                      <a:r>
+                        <a:rPr lang="en-US" sz="590" dirty="0">
+                          <a:solidFill>
+                            <a:srgbClr val="5F7183"/>
+                          </a:solidFill>
+                          <a:latin typeface="微軟正黑體" pitchFamily="34" charset="0"/>
+                          <a:ea typeface="微軟正黑體" pitchFamily="34" charset="-122"/>
+                          <a:cs typeface="微軟正黑體" pitchFamily="34" charset="-120"/>
+                        </a:rPr>
+                        <a:t>外送機車路邊突然停下</a:t>
+                      </a:r>
+                      <a:endParaRPr lang="en-US" sz="950" dirty="0"/>
+                    </a:p>
+                  </a:txBody>
+                  <a:tcPr marL="63500" marR="63500" marT="38100" marB="38100" anchor="ctr">
+                    <a:lnL w="6350" cap="flat" cmpd="sng" algn="ctr">
+                      <a:solidFill>
+                        <a:srgbClr val="DBE3EA"/>
+                      </a:solidFill>
+                      <a:prstDash val="solid"/>
+                      <a:round/>
+                      <a:headEnd type="none" w="med" len="med"/>
+                      <a:tailEnd type="none" w="med" len="med"/>
+                    </a:lnL>
+                    <a:lnR w="6350" cap="flat" cmpd="sng" algn="ctr">
+                      <a:solidFill>
+                        <a:srgbClr val="DBE3EA"/>
+                      </a:solidFill>
+                      <a:prstDash val="solid"/>
+                      <a:round/>
+                      <a:headEnd type="none" w="med" len="med"/>
+                      <a:tailEnd type="none" w="med" len="med"/>
+                    </a:lnR>
+                    <a:lnT w="6350" cap="flat" cmpd="sng" algn="ctr">
+                      <a:solidFill>
+                        <a:srgbClr val="DBE3EA"/>
+                      </a:solidFill>
+                      <a:prstDash val="solid"/>
+                      <a:round/>
+                      <a:headEnd type="none" w="med" len="med"/>
+                      <a:tailEnd type="none" w="med" len="med"/>
+                    </a:lnT>
+                    <a:lnB w="6350" cap="flat" cmpd="sng" algn="ctr">
+                      <a:solidFill>
+                        <a:srgbClr val="DBE3EA"/>
+                      </a:solidFill>
+                      <a:prstDash val="solid"/>
+                      <a:round/>
+                      <a:headEnd type="none" w="med" len="med"/>
+                      <a:tailEnd type="none" w="med" len="med"/>
+                    </a:lnB>
+                  </a:tcPr>
+                </a:tc>
+                <a:tc>
+                  <a:txBody>
+                    <a:bodyPr/>
+                    <a:lstStyle/>
+                    <a:p>
+                      <a:pPr algn="l" indent="0" marL="0">
+                        <a:buNone/>
+                      </a:pPr>
+                      <a:r>
+                        <a:rPr lang="en-US" sz="710" dirty="0">
+                          <a:solidFill>
+                            <a:srgbClr val="1A2733"/>
+                          </a:solidFill>
+                          <a:latin typeface="Arial" pitchFamily="34" charset="0"/>
+                          <a:ea typeface="Arial" pitchFamily="34" charset="-122"/>
+                          <a:cs typeface="Arial" pitchFamily="34" charset="-120"/>
+                        </a:rPr>
+                        <a:t>Tấm thép công trình, ướt thì rất trơn</a:t>
+                      </a:r>
+                      <a:endParaRPr lang="en-US" sz="950" dirty="0"/>
+                    </a:p>
+                    <a:p>
+                      <a:pPr algn="l" indent="0" marL="0">
+                        <a:buNone/>
+                      </a:pPr>
+                      <a:r>
+                        <a:rPr lang="en-US" sz="590" dirty="0">
+                          <a:solidFill>
+                            <a:srgbClr val="5F7183"/>
+                          </a:solidFill>
+                          <a:latin typeface="微軟正黑體" pitchFamily="34" charset="0"/>
+                          <a:ea typeface="微軟正黑體" pitchFamily="34" charset="-122"/>
+                          <a:cs typeface="微軟正黑體" pitchFamily="34" charset="-120"/>
+                        </a:rPr>
+                        <a:t>施工鋪的鋼板，濕了特別滑</a:t>
+                      </a:r>
+                      <a:endParaRPr lang="en-US" sz="950" dirty="0"/>
+                    </a:p>
+                  </a:txBody>
+                  <a:tcPr marL="63500" marR="63500" marT="38100" marB="38100" anchor="ctr">
+                    <a:lnL w="6350" cap="flat" cmpd="sng" algn="ctr">
+                      <a:solidFill>
+                        <a:srgbClr val="DBE3EA"/>
+                      </a:solidFill>
+                      <a:prstDash val="solid"/>
+                      <a:round/>
+                      <a:headEnd type="none" w="med" len="med"/>
+                      <a:tailEnd type="none" w="med" len="med"/>
+                    </a:lnL>
+                    <a:lnR w="6350" cap="flat" cmpd="sng" algn="ctr">
+                      <a:solidFill>
+                        <a:srgbClr val="DBE3EA"/>
+                      </a:solidFill>
+                      <a:prstDash val="solid"/>
+                      <a:round/>
+                      <a:headEnd type="none" w="med" len="med"/>
+                      <a:tailEnd type="none" w="med" len="med"/>
+                    </a:lnR>
+                    <a:lnT w="6350" cap="flat" cmpd="sng" algn="ctr">
+                      <a:solidFill>
+                        <a:srgbClr val="DBE3EA"/>
+                      </a:solidFill>
+                      <a:prstDash val="solid"/>
+                      <a:round/>
+                      <a:headEnd type="none" w="med" len="med"/>
+                      <a:tailEnd type="none" w="med" len="med"/>
+                    </a:lnT>
+                    <a:lnB w="6350" cap="flat" cmpd="sng" algn="ctr">
+                      <a:solidFill>
+                        <a:srgbClr val="DBE3EA"/>
+                      </a:solidFill>
+                      <a:prstDash val="solid"/>
+                      <a:round/>
+                      <a:headEnd type="none" w="med" len="med"/>
+                      <a:tailEnd type="none" w="med" len="med"/>
+                    </a:lnB>
+                  </a:tcPr>
+                </a:tc>
+              </a:tr>
+              <a:tr h="288267">
+                <a:tc>
+                  <a:txBody>
+                    <a:bodyPr/>
+                    <a:lstStyle/>
+                    <a:p>
+                      <a:pPr algn="l" indent="0" marL="0">
+                        <a:buNone/>
+                      </a:pPr>
+                      <a:r>
+                        <a:rPr lang="en-US" sz="710" b="1" dirty="0">
+                          <a:solidFill>
+                            <a:srgbClr val="0B1F3A"/>
+                          </a:solidFill>
+                          <a:latin typeface="Arial" pitchFamily="34" charset="0"/>
+                          <a:ea typeface="Arial" pitchFamily="34" charset="-122"/>
+                          <a:cs typeface="Arial" pitchFamily="34" charset="-120"/>
+                        </a:rPr>
+                        <a:t>Vạch kẻ làn mờ, ngã tư không vạch</a:t>
+                      </a:r>
+                      <a:endParaRPr lang="en-US" sz="950" dirty="0"/>
+                    </a:p>
+                    <a:p>
+                      <a:pPr algn="l" indent="0" marL="0">
+                        <a:buNone/>
+                      </a:pPr>
+                      <a:r>
+                        <a:rPr lang="en-US" sz="590" dirty="0">
+                          <a:solidFill>
+                            <a:srgbClr val="5F7183"/>
+                          </a:solidFill>
+                          <a:latin typeface="微軟正黑體" pitchFamily="34" charset="0"/>
+                          <a:ea typeface="微軟正黑體" pitchFamily="34" charset="-122"/>
+                          <a:cs typeface="微軟正黑體" pitchFamily="34" charset="-120"/>
+                        </a:rPr>
+                        <a:t>車道線被磨掉、路口沒標線</a:t>
+                      </a:r>
+                      <a:endParaRPr lang="en-US" sz="950" dirty="0"/>
+                    </a:p>
+                  </a:txBody>
+                  <a:tcPr marL="63500" marR="63500" marT="38100" marB="38100" anchor="ctr">
+                    <a:lnL w="6350" cap="flat" cmpd="sng" algn="ctr">
+                      <a:solidFill>
+                        <a:srgbClr val="DBE3EA"/>
+                      </a:solidFill>
+                      <a:prstDash val="solid"/>
+                      <a:round/>
+                      <a:headEnd type="none" w="med" len="med"/>
+                      <a:tailEnd type="none" w="med" len="med"/>
+                    </a:lnL>
+                    <a:lnR w="6350" cap="flat" cmpd="sng" algn="ctr">
+                      <a:solidFill>
+                        <a:srgbClr val="DBE3EA"/>
+                      </a:solidFill>
+                      <a:prstDash val="solid"/>
+                      <a:round/>
+                      <a:headEnd type="none" w="med" len="med"/>
+                      <a:tailEnd type="none" w="med" len="med"/>
+                    </a:lnR>
+                    <a:lnT w="6350" cap="flat" cmpd="sng" algn="ctr">
+                      <a:solidFill>
+                        <a:srgbClr val="DBE3EA"/>
+                      </a:solidFill>
+                      <a:prstDash val="solid"/>
+                      <a:round/>
+                      <a:headEnd type="none" w="med" len="med"/>
+                      <a:tailEnd type="none" w="med" len="med"/>
+                    </a:lnT>
+                    <a:lnB w="6350" cap="flat" cmpd="sng" algn="ctr">
+                      <a:solidFill>
+                        <a:srgbClr val="DBE3EA"/>
+                      </a:solidFill>
+                      <a:prstDash val="solid"/>
+                      <a:round/>
+                      <a:headEnd type="none" w="med" len="med"/>
+                      <a:tailEnd type="none" w="med" len="med"/>
+                    </a:lnB>
+                  </a:tcPr>
+                </a:tc>
+                <a:tc>
+                  <a:txBody>
+                    <a:bodyPr/>
+                    <a:lstStyle/>
+                    <a:p>
+                      <a:pPr algn="l" indent="0" marL="0">
+                        <a:buNone/>
+                      </a:pPr>
+                      <a:r>
+                        <a:rPr lang="en-US" sz="710" dirty="0">
+                          <a:solidFill>
+                            <a:srgbClr val="1A2733"/>
+                          </a:solidFill>
+                          <a:latin typeface="Arial" pitchFamily="34" charset="0"/>
+                          <a:ea typeface="Arial" pitchFamily="34" charset="-122"/>
+                          <a:cs typeface="Arial" pitchFamily="34" charset="-120"/>
+                        </a:rPr>
+                        <a:t>Người băng ngang giữa dòng xe</a:t>
+                      </a:r>
+                      <a:endParaRPr lang="en-US" sz="950" dirty="0"/>
+                    </a:p>
+                    <a:p>
+                      <a:pPr algn="l" indent="0" marL="0">
+                        <a:buNone/>
+                      </a:pPr>
+                      <a:r>
+                        <a:rPr lang="en-US" sz="590" dirty="0">
+                          <a:solidFill>
+                            <a:srgbClr val="5F7183"/>
+                          </a:solidFill>
+                          <a:latin typeface="微軟正黑體" pitchFamily="34" charset="0"/>
+                          <a:ea typeface="微軟正黑體" pitchFamily="34" charset="-122"/>
+                          <a:cs typeface="微軟正黑體" pitchFamily="34" charset="-120"/>
+                        </a:rPr>
+                        <a:t>行人不走斑馬線穿車陣</a:t>
+                      </a:r>
+                      <a:endParaRPr lang="en-US" sz="950" dirty="0"/>
+                    </a:p>
+                  </a:txBody>
+                  <a:tcPr marL="63500" marR="63500" marT="38100" marB="38100" anchor="ctr">
+                    <a:lnL w="6350" cap="flat" cmpd="sng" algn="ctr">
+                      <a:solidFill>
+                        <a:srgbClr val="DBE3EA"/>
+                      </a:solidFill>
+                      <a:prstDash val="solid"/>
+                      <a:round/>
+                      <a:headEnd type="none" w="med" len="med"/>
+                      <a:tailEnd type="none" w="med" len="med"/>
+                    </a:lnL>
+                    <a:lnR w="6350" cap="flat" cmpd="sng" algn="ctr">
+                      <a:solidFill>
+                        <a:srgbClr val="DBE3EA"/>
+                      </a:solidFill>
+                      <a:prstDash val="solid"/>
+                      <a:round/>
+                      <a:headEnd type="none" w="med" len="med"/>
+                      <a:tailEnd type="none" w="med" len="med"/>
+                    </a:lnR>
+                    <a:lnT w="6350" cap="flat" cmpd="sng" algn="ctr">
+                      <a:solidFill>
+                        <a:srgbClr val="DBE3EA"/>
+                      </a:solidFill>
+                      <a:prstDash val="solid"/>
+                      <a:round/>
+                      <a:headEnd type="none" w="med" len="med"/>
+                      <a:tailEnd type="none" w="med" len="med"/>
+                    </a:lnT>
+                    <a:lnB w="6350" cap="flat" cmpd="sng" algn="ctr">
+                      <a:solidFill>
+                        <a:srgbClr val="DBE3EA"/>
+                      </a:solidFill>
+                      <a:prstDash val="solid"/>
+                      <a:round/>
+                      <a:headEnd type="none" w="med" len="med"/>
+                      <a:tailEnd type="none" w="med" len="med"/>
+                    </a:lnB>
+                  </a:tcPr>
+                </a:tc>
+                <a:tc>
+                  <a:txBody>
+                    <a:bodyPr/>
+                    <a:lstStyle/>
+                    <a:p>
+                      <a:pPr algn="l" indent="0" marL="0">
+                        <a:buNone/>
+                      </a:pPr>
+                      <a:r>
+                        <a:rPr lang="en-US" sz="710" dirty="0">
+                          <a:solidFill>
+                            <a:srgbClr val="1A2733"/>
+                          </a:solidFill>
+                          <a:latin typeface="Arial" pitchFamily="34" charset="0"/>
+                          <a:ea typeface="Arial" pitchFamily="34" charset="-122"/>
+                          <a:cs typeface="Arial" pitchFamily="34" charset="-120"/>
+                        </a:rPr>
+                        <a:t>Gờ giảm tốc không sơn báo</a:t>
+                      </a:r>
+                      <a:endParaRPr lang="en-US" sz="950" dirty="0"/>
+                    </a:p>
+                    <a:p>
+                      <a:pPr algn="l" indent="0" marL="0">
+                        <a:buNone/>
+                      </a:pPr>
+                      <a:r>
+                        <a:rPr lang="en-US" sz="590" dirty="0">
+                          <a:solidFill>
+                            <a:srgbClr val="5F7183"/>
+                          </a:solidFill>
+                          <a:latin typeface="微軟正黑體" pitchFamily="34" charset="0"/>
+                          <a:ea typeface="微軟正黑體" pitchFamily="34" charset="-122"/>
+                          <a:cs typeface="微軟正黑體" pitchFamily="34" charset="-120"/>
+                        </a:rPr>
+                        <a:t>減速丘沒標示，過去才知道</a:t>
+                      </a:r>
+                      <a:endParaRPr lang="en-US" sz="950" dirty="0"/>
+                    </a:p>
+                  </a:txBody>
+                  <a:tcPr marL="63500" marR="63500" marT="38100" marB="38100" anchor="ctr">
+                    <a:lnL w="6350" cap="flat" cmpd="sng" algn="ctr">
+                      <a:solidFill>
+                        <a:srgbClr val="DBE3EA"/>
+                      </a:solidFill>
+                      <a:prstDash val="solid"/>
+                      <a:round/>
+                      <a:headEnd type="none" w="med" len="med"/>
+                      <a:tailEnd type="none" w="med" len="med"/>
+                    </a:lnL>
+                    <a:lnR w="6350" cap="flat" cmpd="sng" algn="ctr">
+                      <a:solidFill>
+                        <a:srgbClr val="DBE3EA"/>
+                      </a:solidFill>
+                      <a:prstDash val="solid"/>
+                      <a:round/>
+                      <a:headEnd type="none" w="med" len="med"/>
+                      <a:tailEnd type="none" w="med" len="med"/>
+                    </a:lnR>
+                    <a:lnT w="6350" cap="flat" cmpd="sng" algn="ctr">
+                      <a:solidFill>
+                        <a:srgbClr val="DBE3EA"/>
+                      </a:solidFill>
+                      <a:prstDash val="solid"/>
+                      <a:round/>
+                      <a:headEnd type="none" w="med" len="med"/>
+                      <a:tailEnd type="none" w="med" len="med"/>
+                    </a:lnT>
+                    <a:lnB w="6350" cap="flat" cmpd="sng" algn="ctr">
+                      <a:solidFill>
+                        <a:srgbClr val="DBE3EA"/>
+                      </a:solidFill>
+                      <a:prstDash val="solid"/>
+                      <a:round/>
+                      <a:headEnd type="none" w="med" len="med"/>
+                      <a:tailEnd type="none" w="med" len="med"/>
+                    </a:lnB>
+                  </a:tcPr>
+                </a:tc>
+              </a:tr>
+              <a:tr h="288267">
+                <a:tc>
+                  <a:txBody>
+                    <a:bodyPr/>
+                    <a:lstStyle/>
+                    <a:p>
+                      <a:pPr algn="l" indent="0" marL="0">
+                        <a:buNone/>
+                      </a:pPr>
+                      <a:r>
+                        <a:rPr lang="en-US" sz="710" b="1" dirty="0">
+                          <a:solidFill>
+                            <a:srgbClr val="0B1F3A"/>
+                          </a:solidFill>
+                          <a:latin typeface="Arial" pitchFamily="34" charset="0"/>
+                          <a:ea typeface="Arial" pitchFamily="34" charset="-122"/>
+                          <a:cs typeface="Arial" pitchFamily="34" charset="-120"/>
+                        </a:rPr>
+                        <a:t>Rào công trình, đổi làn tạm thời</a:t>
+                      </a:r>
+                      <a:endParaRPr lang="en-US" sz="950" dirty="0"/>
+                    </a:p>
+                    <a:p>
+                      <a:pPr algn="l" indent="0" marL="0">
+                        <a:buNone/>
+                      </a:pPr>
+                      <a:r>
+                        <a:rPr lang="en-US" sz="590" dirty="0">
+                          <a:solidFill>
+                            <a:srgbClr val="5F7183"/>
+                          </a:solidFill>
+                          <a:latin typeface="微軟正黑體" pitchFamily="34" charset="0"/>
+                          <a:ea typeface="微軟正黑體" pitchFamily="34" charset="-122"/>
+                          <a:cs typeface="微軟正黑體" pitchFamily="34" charset="-120"/>
+                        </a:rPr>
+                        <a:t>施工圍籬臨時改道</a:t>
+                      </a:r>
+                      <a:endParaRPr lang="en-US" sz="950" dirty="0"/>
+                    </a:p>
+                  </a:txBody>
+                  <a:tcPr marL="63500" marR="63500" marT="38100" marB="38100" anchor="ctr">
+                    <a:lnL w="6350" cap="flat" cmpd="sng" algn="ctr">
+                      <a:solidFill>
+                        <a:srgbClr val="DBE3EA"/>
+                      </a:solidFill>
+                      <a:prstDash val="solid"/>
+                      <a:round/>
+                      <a:headEnd type="none" w="med" len="med"/>
+                      <a:tailEnd type="none" w="med" len="med"/>
+                    </a:lnL>
+                    <a:lnR w="6350" cap="flat" cmpd="sng" algn="ctr">
+                      <a:solidFill>
+                        <a:srgbClr val="DBE3EA"/>
+                      </a:solidFill>
+                      <a:prstDash val="solid"/>
+                      <a:round/>
+                      <a:headEnd type="none" w="med" len="med"/>
+                      <a:tailEnd type="none" w="med" len="med"/>
+                    </a:lnR>
+                    <a:lnT w="6350" cap="flat" cmpd="sng" algn="ctr">
+                      <a:solidFill>
+                        <a:srgbClr val="DBE3EA"/>
+                      </a:solidFill>
+                      <a:prstDash val="solid"/>
+                      <a:round/>
+                      <a:headEnd type="none" w="med" len="med"/>
+                      <a:tailEnd type="none" w="med" len="med"/>
+                    </a:lnT>
+                    <a:lnB w="6350" cap="flat" cmpd="sng" algn="ctr">
+                      <a:solidFill>
+                        <a:srgbClr val="DBE3EA"/>
+                      </a:solidFill>
+                      <a:prstDash val="solid"/>
+                      <a:round/>
+                      <a:headEnd type="none" w="med" len="med"/>
+                      <a:tailEnd type="none" w="med" len="med"/>
+                    </a:lnB>
+                  </a:tcPr>
+                </a:tc>
+                <a:tc>
+                  <a:txBody>
+                    <a:bodyPr/>
+                    <a:lstStyle/>
+                    <a:p>
+                      <a:pPr algn="l" indent="0" marL="0">
+                        <a:buNone/>
+                      </a:pPr>
+                      <a:r>
+                        <a:rPr lang="en-US" sz="710" dirty="0">
+                          <a:solidFill>
+                            <a:srgbClr val="1A2733"/>
+                          </a:solidFill>
+                          <a:latin typeface="Arial" pitchFamily="34" charset="0"/>
+                          <a:ea typeface="Arial" pitchFamily="34" charset="-122"/>
+                          <a:cs typeface="Arial" pitchFamily="34" charset="-120"/>
+                        </a:rPr>
+                        <a:t>Vòng xuyến đi bằng ánh mắt, không theo đèn</a:t>
+                      </a:r>
+                      <a:endParaRPr lang="en-US" sz="950" dirty="0"/>
+                    </a:p>
+                    <a:p>
+                      <a:pPr algn="l" indent="0" marL="0">
+                        <a:buNone/>
+                      </a:pPr>
+                      <a:r>
+                        <a:rPr lang="en-US" sz="590" dirty="0">
+                          <a:solidFill>
+                            <a:srgbClr val="5F7183"/>
+                          </a:solidFill>
+                          <a:latin typeface="微軟正黑體" pitchFamily="34" charset="0"/>
+                          <a:ea typeface="微軟正黑體" pitchFamily="34" charset="-122"/>
+                          <a:cs typeface="微軟正黑體" pitchFamily="34" charset="-120"/>
+                        </a:rPr>
+                        <a:t>圓環靠眼神，不看號誌</a:t>
+                      </a:r>
+                      <a:endParaRPr lang="en-US" sz="950" dirty="0"/>
+                    </a:p>
+                  </a:txBody>
+                  <a:tcPr marL="63500" marR="63500" marT="38100" marB="38100" anchor="ctr">
+                    <a:lnL w="6350" cap="flat" cmpd="sng" algn="ctr">
+                      <a:solidFill>
+                        <a:srgbClr val="DBE3EA"/>
+                      </a:solidFill>
+                      <a:prstDash val="solid"/>
+                      <a:round/>
+                      <a:headEnd type="none" w="med" len="med"/>
+                      <a:tailEnd type="none" w="med" len="med"/>
+                    </a:lnL>
+                    <a:lnR w="6350" cap="flat" cmpd="sng" algn="ctr">
+                      <a:solidFill>
+                        <a:srgbClr val="DBE3EA"/>
+                      </a:solidFill>
+                      <a:prstDash val="solid"/>
+                      <a:round/>
+                      <a:headEnd type="none" w="med" len="med"/>
+                      <a:tailEnd type="none" w="med" len="med"/>
+                    </a:lnR>
+                    <a:lnT w="6350" cap="flat" cmpd="sng" algn="ctr">
+                      <a:solidFill>
+                        <a:srgbClr val="DBE3EA"/>
+                      </a:solidFill>
+                      <a:prstDash val="solid"/>
+                      <a:round/>
+                      <a:headEnd type="none" w="med" len="med"/>
+                      <a:tailEnd type="none" w="med" len="med"/>
+                    </a:lnT>
+                    <a:lnB w="6350" cap="flat" cmpd="sng" algn="ctr">
+                      <a:solidFill>
+                        <a:srgbClr val="DBE3EA"/>
+                      </a:solidFill>
+                      <a:prstDash val="solid"/>
+                      <a:round/>
+                      <a:headEnd type="none" w="med" len="med"/>
+                      <a:tailEnd type="none" w="med" len="med"/>
+                    </a:lnB>
+                  </a:tcPr>
+                </a:tc>
+                <a:tc>
+                  <a:txBody>
+                    <a:bodyPr/>
+                    <a:lstStyle/>
+                    <a:p>
+                      <a:pPr algn="l" indent="0" marL="0">
+                        <a:buNone/>
+                      </a:pPr>
+                      <a:r>
+                        <a:rPr lang="en-US" sz="710" dirty="0">
+                          <a:solidFill>
+                            <a:srgbClr val="1A2733"/>
+                          </a:solidFill>
+                          <a:latin typeface="Arial" pitchFamily="34" charset="0"/>
+                          <a:ea typeface="Arial" pitchFamily="34" charset="-122"/>
+                          <a:cs typeface="Arial" pitchFamily="34" charset="-120"/>
+                        </a:rPr>
+                        <a:t>Sơn kẻ đường mưa xuống trơn hơn nhựa</a:t>
+                      </a:r>
+                      <a:endParaRPr lang="en-US" sz="950" dirty="0"/>
+                    </a:p>
+                    <a:p>
+                      <a:pPr algn="l" indent="0" marL="0">
+                        <a:buNone/>
+                      </a:pPr>
+                      <a:r>
+                        <a:rPr lang="en-US" sz="590" dirty="0">
+                          <a:solidFill>
+                            <a:srgbClr val="5F7183"/>
+                          </a:solidFill>
+                          <a:latin typeface="微軟正黑體" pitchFamily="34" charset="0"/>
+                          <a:ea typeface="微軟正黑體" pitchFamily="34" charset="-122"/>
+                          <a:cs typeface="微軟正黑體" pitchFamily="34" charset="-120"/>
+                        </a:rPr>
+                        <a:t>標線油漆下雨比柏油滑</a:t>
+                      </a:r>
+                      <a:endParaRPr lang="en-US" sz="950" dirty="0"/>
+                    </a:p>
+                  </a:txBody>
+                  <a:tcPr marL="63500" marR="63500" marT="38100" marB="38100" anchor="ctr">
+                    <a:lnL w="6350" cap="flat" cmpd="sng" algn="ctr">
+                      <a:solidFill>
+                        <a:srgbClr val="DBE3EA"/>
+                      </a:solidFill>
+                      <a:prstDash val="solid"/>
+                      <a:round/>
+                      <a:headEnd type="none" w="med" len="med"/>
+                      <a:tailEnd type="none" w="med" len="med"/>
+                    </a:lnL>
+                    <a:lnR w="6350" cap="flat" cmpd="sng" algn="ctr">
+                      <a:solidFill>
+                        <a:srgbClr val="DBE3EA"/>
+                      </a:solidFill>
+                      <a:prstDash val="solid"/>
+                      <a:round/>
+                      <a:headEnd type="none" w="med" len="med"/>
+                      <a:tailEnd type="none" w="med" len="med"/>
+                    </a:lnR>
+                    <a:lnT w="6350" cap="flat" cmpd="sng" algn="ctr">
+                      <a:solidFill>
+                        <a:srgbClr val="DBE3EA"/>
+                      </a:solidFill>
+                      <a:prstDash val="solid"/>
+                      <a:round/>
+                      <a:headEnd type="none" w="med" len="med"/>
+                      <a:tailEnd type="none" w="med" len="med"/>
+                    </a:lnT>
+                    <a:lnB w="6350" cap="flat" cmpd="sng" algn="ctr">
+                      <a:solidFill>
+                        <a:srgbClr val="DBE3EA"/>
+                      </a:solidFill>
+                      <a:prstDash val="solid"/>
+                      <a:round/>
+                      <a:headEnd type="none" w="med" len="med"/>
+                      <a:tailEnd type="none" w="med" len="med"/>
+                    </a:lnB>
+                  </a:tcPr>
+                </a:tc>
+              </a:tr>
+            </a:tbl>
+          </a:graphicData>
+        </a:graphic>
+      </p:graphicFrame>
+      <p:sp>
+        <p:nvSpPr>
+          <p:cNvPr id="4" name="Text 1"/>
+          <p:cNvSpPr txBox="1"/>
+          <p:nvPr/>
+        </p:nvSpPr>
+        <p:spPr>
+          <a:xfrm>
+            <a:off x="1365034" y="3240117"/>
+            <a:ext cx="6413933" cy="360333"/>
+          </a:xfrm>
+          <a:prstGeom prst="rect">
+            <a:avLst/>
+          </a:prstGeom>
+          <a:noFill/>
+          <a:ln/>
+        </p:spPr>
+        <p:txBody>
+          <a:bodyPr wrap="square" lIns="0" tIns="0" rIns="0" bIns="0" rtlCol="0" anchor="t"/>
+          <a:lstStyle/>
+          <a:p>
+            <a:pPr indent="0" marL="0">
+              <a:lnSpc>
+                <a:spcPct val="116000"/>
+              </a:lnSpc>
+              <a:buNone/>
+            </a:pPr>
+            <a:r>
+              <a:rPr lang="en-US" sz="950" b="1" dirty="0">
+                <a:solidFill>
+                  <a:srgbClr val="007F72"/>
+                </a:solidFill>
+                <a:latin typeface="Arial" pitchFamily="34" charset="0"/>
+                <a:ea typeface="Arial" pitchFamily="34" charset="-122"/>
+                <a:cs typeface="Arial" pitchFamily="34" charset="-120"/>
+              </a:rPr>
+              <a:t>Cột «Hành vi» đầy nhất — và đó chính là thứ mô phỏng có sẵn thiếu nhất.</a:t>
+            </a:r>
+            <a:endParaRPr lang="en-US" sz="950" dirty="0"/>
+          </a:p>
+          <a:p>
+            <a:pPr indent="0" marL="0">
+              <a:lnSpc>
+                <a:spcPct val="116000"/>
+              </a:lnSpc>
+              <a:buNone/>
+            </a:pPr>
+            <a:r>
+              <a:rPr lang="en-US" sz="870" dirty="0">
+                <a:solidFill>
+                  <a:srgbClr val="007F72"/>
+                </a:solidFill>
+                <a:latin typeface="微軟正黑體" pitchFamily="34" charset="0"/>
+                <a:ea typeface="微軟正黑體" pitchFamily="34" charset="-122"/>
+                <a:cs typeface="微軟正黑體" pitchFamily="34" charset="-120"/>
+              </a:rPr>
+              <a:t>「行為」那一欄最滿——而那一欄，正是現成模擬器最缺的。</a:t>
+            </a:r>
+            <a:endParaRPr lang="en-US" sz="950" dirty="0"/>
+          </a:p>
+        </p:txBody>
+      </p:sp>
+      <p:pic>
+        <p:nvPicPr>
+          <p:cNvPr id="6" name="Image 0" descr="/Users/tsengchenghsun/Class/carClass/Claude outputs/第四週(10-1)/src/logo.png">    </p:cNvPr>
+          <p:cNvPicPr>
+            <a:picLocks noChangeAspect="1"/>
+          </p:cNvPicPr>
+          <p:nvPr/>
+        </p:nvPicPr>
+        <p:blipFill>
+          <a:blip r:embed="rId1"/>
+          <a:stretch>
+            <a:fillRect/>
+          </a:stretch>
+        </p:blipFill>
+        <p:spPr>
+          <a:xfrm>
+            <a:off x="7180813" y="86480"/>
+            <a:ext cx="864800" cy="191074"/>
+          </a:xfrm>
+          <a:prstGeom prst="rect">
+            <a:avLst/>
+          </a:prstGeom>
+        </p:spPr>
+      </p:pic>
+      <p:sp>
+        <p:nvSpPr>
+          <p:cNvPr id="7" name="Text 2"/>
+          <p:cNvSpPr txBox="1"/>
+          <p:nvPr/>
+        </p:nvSpPr>
+        <p:spPr>
+          <a:xfrm>
+            <a:off x="1055147" y="100893"/>
+            <a:ext cx="648600" cy="201787"/>
+          </a:xfrm>
+          <a:prstGeom prst="rect">
+            <a:avLst/>
+          </a:prstGeom>
+          <a:noFill/>
+          <a:ln/>
+        </p:spPr>
+        <p:txBody>
+          <a:bodyPr wrap="square" lIns="0" tIns="0" rIns="0" bIns="0" rtlCol="0" anchor="ctr"/>
+          <a:lstStyle/>
+          <a:p>
+            <a:pPr indent="0" marL="0">
+              <a:buNone/>
+            </a:pPr>
+            <a:r>
+              <a:rPr lang="en-US" sz="710" dirty="0">
+                <a:solidFill>
+                  <a:srgbClr val="5F7183"/>
+                </a:solidFill>
+                <a:latin typeface="Arial" pitchFamily="34" charset="0"/>
+                <a:ea typeface="Arial" pitchFamily="34" charset="-122"/>
+                <a:cs typeface="Arial" pitchFamily="34" charset="-120"/>
+              </a:rPr>
+              <a:t>28 / 29</a:t>
+            </a:r>
+            <a:endParaRPr lang="en-US" sz="710" dirty="0"/>
+          </a:p>
+        </p:txBody>
+      </p:sp>
+      <p:sp>
+        <p:nvSpPr>
+          <p:cNvPr id="8" name="Text 3"/>
+          <p:cNvSpPr txBox="1"/>
+          <p:nvPr/>
+        </p:nvSpPr>
+        <p:spPr>
+          <a:xfrm>
+            <a:off x="1725367" y="100893"/>
+            <a:ext cx="1585467" cy="201787"/>
+          </a:xfrm>
+          <a:prstGeom prst="rect">
+            <a:avLst/>
+          </a:prstGeom>
+          <a:noFill/>
+          <a:ln/>
+        </p:spPr>
+        <p:txBody>
+          <a:bodyPr wrap="square" lIns="0" tIns="0" rIns="0" bIns="0" rtlCol="0" anchor="ctr"/>
+          <a:lstStyle/>
+          <a:p>
+            <a:pPr indent="0" marL="0">
+              <a:buNone/>
+            </a:pPr>
+            <a:r>
+              <a:rPr lang="en-US" sz="710" dirty="0">
+                <a:solidFill>
+                  <a:srgbClr val="5F7183"/>
+                </a:solidFill>
+                <a:latin typeface="Arial" pitchFamily="34" charset="0"/>
+                <a:ea typeface="Arial" pitchFamily="34" charset="-122"/>
+                <a:cs typeface="Arial" pitchFamily="34" charset="-120"/>
+              </a:rPr>
+              <a:t>Tiết 1 · 第 1 節</a:t>
+            </a:r>
+            <a:endParaRPr lang="en-US" sz="710" dirty="0"/>
+          </a:p>
+        </p:txBody>
+      </p:sp>
+    </p:spTree>
+  </p:cSld>
+  <p:clrMapOvr>
+    <a:masterClrMapping/>
+  </p:clrMapOvr>
+</p:sld>
+</file>
+
+<file path=ppt/slides/slide29.xml><?xml version="1.0" encoding="utf-8"?>
+<p:sld xmlns:a="http://schemas.openxmlformats.org/drawingml/2006/main" xmlns:r="http://schemas.openxmlformats.org/officeDocument/2006/relationships" xmlns:p="http://schemas.openxmlformats.org/presentationml/2006/main">
+  <p:cSld name="Slide 29">
     <p:bg>
       <p:bgPr>
         <a:solidFill>
@@ -29363,7 +31538,7 @@
                 <a:ea typeface="Arial" pitchFamily="34" charset="-122"/>
                 <a:cs typeface="Arial" pitchFamily="34" charset="-120"/>
               </a:rPr>
-              <a:t>28 / 28</a:t>
+              <a:t>29 / 29</a:t>
             </a:r>
             <a:endParaRPr lang="en-US" sz="720" dirty="0"/>
           </a:p>
@@ -30195,7 +32370,7 @@
                 <a:ea typeface="Arial" pitchFamily="34" charset="-122"/>
                 <a:cs typeface="Arial" pitchFamily="34" charset="-120"/>
               </a:rPr>
-              <a:t>3 / 28</a:t>
+              <a:t>3 / 29</a:t>
             </a:r>
             <a:endParaRPr lang="en-US" sz="720" dirty="0"/>
           </a:p>
@@ -30504,7 +32679,7 @@
                 <a:ea typeface="Arial" pitchFamily="34" charset="-122"/>
                 <a:cs typeface="Arial" pitchFamily="34" charset="-120"/>
               </a:rPr>
-              <a:t>4 / 28</a:t>
+              <a:t>4 / 29</a:t>
             </a:r>
             <a:endParaRPr lang="en-US" sz="720" dirty="0"/>
           </a:p>
@@ -31724,7 +33899,7 @@
                 <a:ea typeface="Arial" pitchFamily="34" charset="-122"/>
                 <a:cs typeface="Arial" pitchFamily="34" charset="-120"/>
               </a:rPr>
-              <a:t>5 / 28</a:t>
+              <a:t>5 / 29</a:t>
             </a:r>
             <a:endParaRPr lang="en-US" sz="700" dirty="0"/>
           </a:p>
@@ -33191,7 +35366,7 @@
                 <a:ea typeface="Arial" pitchFamily="34" charset="-122"/>
                 <a:cs typeface="Arial" pitchFamily="34" charset="-120"/>
               </a:rPr>
-              <a:t>6 / 28</a:t>
+              <a:t>6 / 29</a:t>
             </a:r>
             <a:endParaRPr lang="en-US" sz="720" dirty="0"/>
           </a:p>
@@ -33959,7 +36134,7 @@
                 <a:ea typeface="Arial" pitchFamily="34" charset="-122"/>
                 <a:cs typeface="Arial" pitchFamily="34" charset="-120"/>
               </a:rPr>
-              <a:t>7 / 28</a:t>
+              <a:t>7 / 29</a:t>
             </a:r>
             <a:endParaRPr lang="en-US" sz="690" dirty="0"/>
           </a:p>
@@ -34727,7 +36902,7 @@
                 <a:ea typeface="Arial" pitchFamily="34" charset="-122"/>
                 <a:cs typeface="Arial" pitchFamily="34" charset="-120"/>
               </a:rPr>
-              <a:t>8 / 28</a:t>
+              <a:t>8 / 29</a:t>
             </a:r>
             <a:endParaRPr lang="en-US" sz="690" dirty="0"/>
           </a:p>
@@ -36156,7 +38331,7 @@
                 <a:ea typeface="Arial" pitchFamily="34" charset="-122"/>
                 <a:cs typeface="Arial" pitchFamily="34" charset="-120"/>
               </a:rPr>
-              <a:t>9 / 28</a:t>
+              <a:t>9 / 29</a:t>
             </a:r>
             <a:endParaRPr lang="en-US" sz="720" dirty="0"/>
           </a:p>

--- a/第四週(10-01)/第四週_第1節_簡報.pptx
+++ b/第四週(10-01)/第四週_第1節_簡報.pptx
@@ -450,12 +450,12 @@
           <a:bodyPr vert="horz" wrap="square" anchor="t" lIns="91440" rIns="91440" tIns="45720" bIns="45720"/>
           <a:lstStyle/>
           <a:p>
-            <a:pPr algn="l">
-              <a:lnSpc>
-                <a:spcPct val="100000"/>
-              </a:lnSpc>
+            <a:pPr algn="l" marL="0" indent="0">
+              <a:spcBef>
+                <a:spcPts val="0"/>
+              </a:spcBef>
               <a:spcAft>
-                <a:spcPts val="400"/>
+                <a:spcPts val="200"/>
               </a:spcAft>
             </a:pPr>
             <a:r>
@@ -472,12 +472,12 @@
             </a:r>
           </a:p>
           <a:p>
-            <a:pPr algn="l">
-              <a:lnSpc>
-                <a:spcPct val="100000"/>
-              </a:lnSpc>
+            <a:pPr algn="l" marL="0" indent="0">
+              <a:spcBef>
+                <a:spcPts val="0"/>
+              </a:spcBef>
               <a:spcAft>
-                <a:spcPts val="400"/>
+                <a:spcPts val="200"/>
               </a:spcAft>
             </a:pPr>
             <a:r>
@@ -516,12 +516,12 @@
             </a:r>
           </a:p>
           <a:p>
-            <a:pPr algn="l">
-              <a:lnSpc>
-                <a:spcPct val="100000"/>
-              </a:lnSpc>
+            <a:pPr algn="l" marL="0" indent="0">
+              <a:spcBef>
+                <a:spcPts val="0"/>
+              </a:spcBef>
               <a:spcAft>
-                <a:spcPts val="400"/>
+                <a:spcPts val="200"/>
               </a:spcAft>
             </a:pPr>
             <a:r>
@@ -582,12 +582,12 @@
             </a:r>
           </a:p>
           <a:p>
-            <a:pPr algn="l">
-              <a:lnSpc>
-                <a:spcPct val="100000"/>
-              </a:lnSpc>
+            <a:pPr algn="l" marL="0" indent="0">
+              <a:spcBef>
+                <a:spcPts val="0"/>
+              </a:spcBef>
               <a:spcAft>
-                <a:spcPts val="400"/>
+                <a:spcPts val="200"/>
               </a:spcAft>
             </a:pPr>
             <a:r>
@@ -626,12 +626,12 @@
             </a:r>
           </a:p>
           <a:p>
-            <a:pPr algn="l">
-              <a:lnSpc>
-                <a:spcPct val="100000"/>
-              </a:lnSpc>
+            <a:pPr algn="l" marL="0" indent="0">
+              <a:spcBef>
+                <a:spcPts val="0"/>
+              </a:spcBef>
               <a:spcAft>
-                <a:spcPts val="400"/>
+                <a:spcPts val="200"/>
               </a:spcAft>
             </a:pPr>
             <a:r>
@@ -648,12 +648,12 @@
             </a:r>
           </a:p>
           <a:p>
-            <a:pPr algn="l">
-              <a:lnSpc>
-                <a:spcPct val="100000"/>
-              </a:lnSpc>
+            <a:pPr algn="l" marL="0" indent="0">
+              <a:spcBef>
+                <a:spcPts val="0"/>
+              </a:spcBef>
               <a:spcAft>
-                <a:spcPts val="400"/>
+                <a:spcPts val="200"/>
               </a:spcAft>
             </a:pPr>
             <a:r>
@@ -670,12 +670,12 @@
             </a:r>
           </a:p>
           <a:p>
-            <a:pPr algn="l">
-              <a:lnSpc>
-                <a:spcPct val="100000"/>
-              </a:lnSpc>
+            <a:pPr algn="l" marL="0" indent="0">
+              <a:spcBef>
+                <a:spcPts val="0"/>
+              </a:spcBef>
               <a:spcAft>
-                <a:spcPts val="400"/>
+                <a:spcPts val="200"/>
               </a:spcAft>
             </a:pPr>
             <a:r>
@@ -692,12 +692,12 @@
             </a:r>
           </a:p>
           <a:p>
-            <a:pPr algn="l">
-              <a:lnSpc>
-                <a:spcPct val="100000"/>
-              </a:lnSpc>
+            <a:pPr algn="l" marL="0" indent="0">
+              <a:spcBef>
+                <a:spcPts val="0"/>
+              </a:spcBef>
               <a:spcAft>
-                <a:spcPts val="400"/>
+                <a:spcPts val="200"/>
               </a:spcAft>
             </a:pPr>
             <a:r>
@@ -734,12 +734,12 @@
           <a:bodyPr vert="horz" wrap="square" anchor="t" lIns="91440" rIns="91440" tIns="45720" bIns="45720"/>
           <a:lstStyle/>
           <a:p>
-            <a:pPr algn="l">
-              <a:lnSpc>
-                <a:spcPct val="100000"/>
-              </a:lnSpc>
+            <a:pPr algn="l" marL="0" indent="0">
+              <a:spcBef>
+                <a:spcPts val="0"/>
+              </a:spcBef>
               <a:spcAft>
-                <a:spcPts val="333"/>
+                <a:spcPts val="167"/>
               </a:spcAft>
             </a:pPr>
             <a:r>
@@ -813,12 +813,12 @@
           <a:bodyPr vert="horz" wrap="square" anchor="t" lIns="91440" rIns="91440" tIns="45720" bIns="45720"/>
           <a:lstStyle/>
           <a:p>
-            <a:pPr algn="l">
-              <a:lnSpc>
-                <a:spcPct val="100000"/>
-              </a:lnSpc>
+            <a:pPr algn="l" marL="0" indent="0">
+              <a:spcBef>
+                <a:spcPts val="0"/>
+              </a:spcBef>
               <a:spcAft>
-                <a:spcPts val="400"/>
+                <a:spcPts val="200"/>
               </a:spcAft>
             </a:pPr>
             <a:r>
@@ -835,12 +835,12 @@
             </a:r>
           </a:p>
           <a:p>
-            <a:pPr algn="l">
-              <a:lnSpc>
-                <a:spcPct val="100000"/>
-              </a:lnSpc>
+            <a:pPr algn="l" marL="0" indent="0">
+              <a:spcBef>
+                <a:spcPts val="0"/>
+              </a:spcBef>
               <a:spcAft>
-                <a:spcPts val="400"/>
+                <a:spcPts val="200"/>
               </a:spcAft>
             </a:pPr>
             <a:r>
@@ -879,12 +879,12 @@
             </a:r>
           </a:p>
           <a:p>
-            <a:pPr algn="l">
-              <a:lnSpc>
-                <a:spcPct val="100000"/>
-              </a:lnSpc>
+            <a:pPr algn="l" marL="0" indent="0">
+              <a:spcBef>
+                <a:spcPts val="0"/>
+              </a:spcBef>
               <a:spcAft>
-                <a:spcPts val="400"/>
+                <a:spcPts val="200"/>
               </a:spcAft>
             </a:pPr>
             <a:r>
@@ -901,12 +901,12 @@
             </a:r>
           </a:p>
           <a:p>
-            <a:pPr algn="l">
-              <a:lnSpc>
-                <a:spcPct val="100000"/>
-              </a:lnSpc>
+            <a:pPr algn="l" marL="0" indent="0">
+              <a:spcBef>
+                <a:spcPts val="0"/>
+              </a:spcBef>
               <a:spcAft>
-                <a:spcPts val="400"/>
+                <a:spcPts val="200"/>
               </a:spcAft>
             </a:pPr>
             <a:r>
@@ -945,12 +945,12 @@
             </a:r>
           </a:p>
           <a:p>
-            <a:pPr algn="l">
-              <a:lnSpc>
-                <a:spcPct val="100000"/>
-              </a:lnSpc>
+            <a:pPr algn="l" marL="0" indent="0">
+              <a:spcBef>
+                <a:spcPts val="0"/>
+              </a:spcBef>
               <a:spcAft>
-                <a:spcPts val="400"/>
+                <a:spcPts val="200"/>
               </a:spcAft>
             </a:pPr>
             <a:r>
@@ -998,12 +998,12 @@
           <a:bodyPr vert="horz" wrap="square" anchor="t" lIns="91440" rIns="91440" tIns="45720" bIns="45720"/>
           <a:lstStyle/>
           <a:p>
-            <a:pPr algn="l">
-              <a:lnSpc>
-                <a:spcPct val="100000"/>
-              </a:lnSpc>
+            <a:pPr algn="l" marL="0" indent="0">
+              <a:spcBef>
+                <a:spcPts val="0"/>
+              </a:spcBef>
               <a:spcAft>
-                <a:spcPts val="333"/>
+                <a:spcPts val="167"/>
               </a:spcAft>
             </a:pPr>
             <a:r>
@@ -1077,12 +1077,12 @@
           <a:bodyPr vert="horz" wrap="square" anchor="t" lIns="91440" rIns="91440" tIns="45720" bIns="45720"/>
           <a:lstStyle/>
           <a:p>
-            <a:pPr algn="l">
-              <a:lnSpc>
-                <a:spcPct val="100000"/>
-              </a:lnSpc>
+            <a:pPr algn="l" marL="0" indent="0">
+              <a:spcBef>
+                <a:spcPts val="0"/>
+              </a:spcBef>
               <a:spcAft>
-                <a:spcPts val="400"/>
+                <a:spcPts val="200"/>
               </a:spcAft>
             </a:pPr>
             <a:r>
@@ -1099,12 +1099,12 @@
             </a:r>
           </a:p>
           <a:p>
-            <a:pPr algn="l">
-              <a:lnSpc>
-                <a:spcPct val="100000"/>
-              </a:lnSpc>
+            <a:pPr algn="l" marL="0" indent="0">
+              <a:spcBef>
+                <a:spcPts val="0"/>
+              </a:spcBef>
               <a:spcAft>
-                <a:spcPts val="400"/>
+                <a:spcPts val="200"/>
               </a:spcAft>
             </a:pPr>
             <a:r>
@@ -1143,12 +1143,12 @@
             </a:r>
           </a:p>
           <a:p>
-            <a:pPr algn="l">
-              <a:lnSpc>
-                <a:spcPct val="100000"/>
-              </a:lnSpc>
+            <a:pPr algn="l" marL="0" indent="0">
+              <a:spcBef>
+                <a:spcPts val="0"/>
+              </a:spcBef>
               <a:spcAft>
-                <a:spcPts val="400"/>
+                <a:spcPts val="200"/>
               </a:spcAft>
             </a:pPr>
             <a:r>
@@ -1165,12 +1165,12 @@
             </a:r>
           </a:p>
           <a:p>
-            <a:pPr algn="l">
-              <a:lnSpc>
-                <a:spcPct val="100000"/>
-              </a:lnSpc>
+            <a:pPr algn="l" marL="0" indent="0">
+              <a:spcBef>
+                <a:spcPts val="0"/>
+              </a:spcBef>
               <a:spcAft>
-                <a:spcPts val="400"/>
+                <a:spcPts val="200"/>
               </a:spcAft>
             </a:pPr>
             <a:r>
@@ -1229,12 +1229,12 @@
           <a:bodyPr vert="horz" wrap="square" anchor="t" lIns="91440" rIns="91440" tIns="45720" bIns="45720"/>
           <a:lstStyle/>
           <a:p>
-            <a:pPr algn="l">
-              <a:lnSpc>
-                <a:spcPct val="100000"/>
-              </a:lnSpc>
+            <a:pPr algn="l" marL="0" indent="0">
+              <a:spcBef>
+                <a:spcPts val="0"/>
+              </a:spcBef>
               <a:spcAft>
-                <a:spcPts val="333"/>
+                <a:spcPts val="167"/>
               </a:spcAft>
             </a:pPr>
             <a:r>
@@ -1308,12 +1308,12 @@
           <a:bodyPr vert="horz" wrap="square" anchor="t" lIns="91440" rIns="91440" tIns="45720" bIns="45720"/>
           <a:lstStyle/>
           <a:p>
-            <a:pPr algn="l">
-              <a:lnSpc>
-                <a:spcPct val="100000"/>
-              </a:lnSpc>
+            <a:pPr algn="l" marL="0" indent="0">
+              <a:spcBef>
+                <a:spcPts val="0"/>
+              </a:spcBef>
               <a:spcAft>
-                <a:spcPts val="400"/>
+                <a:spcPts val="200"/>
               </a:spcAft>
             </a:pPr>
             <a:r>
@@ -1330,12 +1330,12 @@
             </a:r>
           </a:p>
           <a:p>
-            <a:pPr algn="l">
-              <a:lnSpc>
-                <a:spcPct val="100000"/>
-              </a:lnSpc>
+            <a:pPr algn="l" marL="0" indent="0">
+              <a:spcBef>
+                <a:spcPts val="0"/>
+              </a:spcBef>
               <a:spcAft>
-                <a:spcPts val="400"/>
+                <a:spcPts val="200"/>
               </a:spcAft>
             </a:pPr>
             <a:r>
@@ -1363,12 +1363,12 @@
             </a:r>
           </a:p>
           <a:p>
-            <a:pPr algn="l">
-              <a:lnSpc>
-                <a:spcPct val="100000"/>
-              </a:lnSpc>
+            <a:pPr algn="l" marL="0" indent="0">
+              <a:spcBef>
+                <a:spcPts val="0"/>
+              </a:spcBef>
               <a:spcAft>
-                <a:spcPts val="400"/>
+                <a:spcPts val="200"/>
               </a:spcAft>
             </a:pPr>
             <a:r>
@@ -1385,12 +1385,12 @@
             </a:r>
           </a:p>
           <a:p>
-            <a:pPr algn="l">
-              <a:lnSpc>
-                <a:spcPct val="100000"/>
-              </a:lnSpc>
+            <a:pPr algn="l" marL="0" indent="0">
+              <a:spcBef>
+                <a:spcPts val="0"/>
+              </a:spcBef>
               <a:spcAft>
-                <a:spcPts val="400"/>
+                <a:spcPts val="200"/>
               </a:spcAft>
             </a:pPr>
             <a:r>
@@ -1451,12 +1451,12 @@
             </a:r>
           </a:p>
           <a:p>
-            <a:pPr algn="l">
-              <a:lnSpc>
-                <a:spcPct val="100000"/>
-              </a:lnSpc>
+            <a:pPr algn="l" marL="0" indent="0">
+              <a:spcBef>
+                <a:spcPts val="0"/>
+              </a:spcBef>
               <a:spcAft>
-                <a:spcPts val="400"/>
+                <a:spcPts val="200"/>
               </a:spcAft>
             </a:pPr>
             <a:r>
@@ -1473,12 +1473,12 @@
             </a:r>
           </a:p>
           <a:p>
-            <a:pPr algn="l">
-              <a:lnSpc>
-                <a:spcPct val="100000"/>
-              </a:lnSpc>
+            <a:pPr algn="l" marL="0" indent="0">
+              <a:spcBef>
+                <a:spcPts val="0"/>
+              </a:spcBef>
               <a:spcAft>
-                <a:spcPts val="400"/>
+                <a:spcPts val="200"/>
               </a:spcAft>
             </a:pPr>
             <a:r>
@@ -1550,12 +1550,12 @@
             </a:r>
           </a:p>
           <a:p>
-            <a:pPr algn="l">
-              <a:lnSpc>
-                <a:spcPct val="100000"/>
-              </a:lnSpc>
+            <a:pPr algn="l" marL="0" indent="0">
+              <a:spcBef>
+                <a:spcPts val="0"/>
+              </a:spcBef>
               <a:spcAft>
-                <a:spcPts val="400"/>
+                <a:spcPts val="200"/>
               </a:spcAft>
             </a:pPr>
             <a:r>
@@ -1649,12 +1649,12 @@
             </a:r>
           </a:p>
           <a:p>
-            <a:pPr algn="l">
-              <a:lnSpc>
-                <a:spcPct val="100000"/>
-              </a:lnSpc>
+            <a:pPr algn="l" marL="0" indent="0">
+              <a:spcBef>
+                <a:spcPts val="0"/>
+              </a:spcBef>
               <a:spcAft>
-                <a:spcPts val="400"/>
+                <a:spcPts val="200"/>
               </a:spcAft>
             </a:pPr>
             <a:r>
@@ -1691,12 +1691,12 @@
           <a:bodyPr vert="horz" wrap="square" anchor="t" lIns="91440" rIns="91440" tIns="45720" bIns="45720"/>
           <a:lstStyle/>
           <a:p>
-            <a:pPr algn="l">
-              <a:lnSpc>
-                <a:spcPct val="100000"/>
-              </a:lnSpc>
+            <a:pPr algn="l" marL="0" indent="0">
+              <a:spcBef>
+                <a:spcPts val="0"/>
+              </a:spcBef>
               <a:spcAft>
-                <a:spcPts val="333"/>
+                <a:spcPts val="167"/>
               </a:spcAft>
             </a:pPr>
             <a:r>
@@ -1770,12 +1770,12 @@
           <a:bodyPr vert="horz" wrap="square" anchor="t" lIns="91440" rIns="91440" tIns="45720" bIns="45720"/>
           <a:lstStyle/>
           <a:p>
-            <a:pPr algn="l">
-              <a:lnSpc>
-                <a:spcPct val="100000"/>
-              </a:lnSpc>
+            <a:pPr algn="l" marL="0" indent="0">
+              <a:spcBef>
+                <a:spcPts val="0"/>
+              </a:spcBef>
               <a:spcAft>
-                <a:spcPts val="400"/>
+                <a:spcPts val="200"/>
               </a:spcAft>
             </a:pPr>
             <a:r>
@@ -1792,12 +1792,12 @@
             </a:r>
           </a:p>
           <a:p>
-            <a:pPr algn="l">
-              <a:lnSpc>
-                <a:spcPct val="100000"/>
-              </a:lnSpc>
+            <a:pPr algn="l" marL="0" indent="0">
+              <a:spcBef>
+                <a:spcPts val="0"/>
+              </a:spcBef>
               <a:spcAft>
-                <a:spcPts val="400"/>
+                <a:spcPts val="200"/>
               </a:spcAft>
             </a:pPr>
             <a:r>
@@ -1891,12 +1891,12 @@
             </a:r>
           </a:p>
           <a:p>
-            <a:pPr algn="l">
-              <a:lnSpc>
-                <a:spcPct val="100000"/>
-              </a:lnSpc>
+            <a:pPr algn="l" marL="0" indent="0">
+              <a:spcBef>
+                <a:spcPts val="0"/>
+              </a:spcBef>
               <a:spcAft>
-                <a:spcPts val="400"/>
+                <a:spcPts val="200"/>
               </a:spcAft>
             </a:pPr>
             <a:r>
@@ -2012,12 +2012,12 @@
             </a:r>
           </a:p>
           <a:p>
-            <a:pPr algn="l">
-              <a:lnSpc>
-                <a:spcPct val="100000"/>
-              </a:lnSpc>
+            <a:pPr algn="l" marL="0" indent="0">
+              <a:spcBef>
+                <a:spcPts val="0"/>
+              </a:spcBef>
               <a:spcAft>
-                <a:spcPts val="400"/>
+                <a:spcPts val="200"/>
               </a:spcAft>
             </a:pPr>
             <a:r>
@@ -2078,12 +2078,12 @@
             </a:r>
           </a:p>
           <a:p>
-            <a:pPr algn="l">
-              <a:lnSpc>
-                <a:spcPct val="100000"/>
-              </a:lnSpc>
+            <a:pPr algn="l" marL="0" indent="0">
+              <a:spcBef>
+                <a:spcPts val="0"/>
+              </a:spcBef>
               <a:spcAft>
-                <a:spcPts val="400"/>
+                <a:spcPts val="200"/>
               </a:spcAft>
             </a:pPr>
             <a:r>
@@ -2122,12 +2122,12 @@
             </a:r>
           </a:p>
           <a:p>
-            <a:pPr algn="l">
-              <a:lnSpc>
-                <a:spcPct val="100000"/>
-              </a:lnSpc>
+            <a:pPr algn="l" marL="0" indent="0">
+              <a:spcBef>
+                <a:spcPts val="0"/>
+              </a:spcBef>
               <a:spcAft>
-                <a:spcPts val="400"/>
+                <a:spcPts val="200"/>
               </a:spcAft>
             </a:pPr>
             <a:r>
@@ -2164,12 +2164,12 @@
           <a:bodyPr vert="horz" wrap="square" anchor="t" lIns="91440" rIns="91440" tIns="45720" bIns="45720"/>
           <a:lstStyle/>
           <a:p>
-            <a:pPr algn="l">
-              <a:lnSpc>
-                <a:spcPct val="100000"/>
-              </a:lnSpc>
+            <a:pPr algn="l" marL="0" indent="0">
+              <a:spcBef>
+                <a:spcPts val="0"/>
+              </a:spcBef>
               <a:spcAft>
-                <a:spcPts val="333"/>
+                <a:spcPts val="167"/>
               </a:spcAft>
             </a:pPr>
             <a:r>
@@ -2243,12 +2243,12 @@
           <a:bodyPr vert="horz" wrap="square" anchor="t" lIns="91440" rIns="91440" tIns="45720" bIns="45720"/>
           <a:lstStyle/>
           <a:p>
-            <a:pPr algn="l">
-              <a:lnSpc>
-                <a:spcPct val="100000"/>
-              </a:lnSpc>
+            <a:pPr algn="l" marL="0" indent="0">
+              <a:spcBef>
+                <a:spcPts val="0"/>
+              </a:spcBef>
               <a:spcAft>
-                <a:spcPts val="400"/>
+                <a:spcPts val="200"/>
               </a:spcAft>
             </a:pPr>
             <a:r>
@@ -2265,12 +2265,12 @@
             </a:r>
           </a:p>
           <a:p>
-            <a:pPr algn="l">
-              <a:lnSpc>
-                <a:spcPct val="100000"/>
-              </a:lnSpc>
+            <a:pPr algn="l" marL="0" indent="0">
+              <a:spcBef>
+                <a:spcPts val="0"/>
+              </a:spcBef>
               <a:spcAft>
-                <a:spcPts val="400"/>
+                <a:spcPts val="200"/>
               </a:spcAft>
             </a:pPr>
             <a:r>
@@ -2353,12 +2353,12 @@
             </a:r>
           </a:p>
           <a:p>
-            <a:pPr algn="l">
-              <a:lnSpc>
-                <a:spcPct val="100000"/>
-              </a:lnSpc>
+            <a:pPr algn="l" marL="0" indent="0">
+              <a:spcBef>
+                <a:spcPts val="0"/>
+              </a:spcBef>
               <a:spcAft>
-                <a:spcPts val="400"/>
+                <a:spcPts val="200"/>
               </a:spcAft>
             </a:pPr>
             <a:r>
@@ -2397,12 +2397,12 @@
             </a:r>
           </a:p>
           <a:p>
-            <a:pPr algn="l">
-              <a:lnSpc>
-                <a:spcPct val="100000"/>
-              </a:lnSpc>
+            <a:pPr algn="l" marL="0" indent="0">
+              <a:spcBef>
+                <a:spcPts val="0"/>
+              </a:spcBef>
               <a:spcAft>
-                <a:spcPts val="400"/>
+                <a:spcPts val="200"/>
               </a:spcAft>
             </a:pPr>
             <a:r>
@@ -2441,12 +2441,12 @@
             </a:r>
           </a:p>
           <a:p>
-            <a:pPr algn="l">
-              <a:lnSpc>
-                <a:spcPct val="100000"/>
-              </a:lnSpc>
+            <a:pPr algn="l" marL="0" indent="0">
+              <a:spcBef>
+                <a:spcPts val="0"/>
+              </a:spcBef>
               <a:spcAft>
-                <a:spcPts val="400"/>
+                <a:spcPts val="200"/>
               </a:spcAft>
             </a:pPr>
             <a:r>
@@ -2483,12 +2483,12 @@
           <a:bodyPr vert="horz" wrap="square" anchor="t" lIns="91440" rIns="91440" tIns="45720" bIns="45720"/>
           <a:lstStyle/>
           <a:p>
-            <a:pPr algn="l">
-              <a:lnSpc>
-                <a:spcPct val="100000"/>
-              </a:lnSpc>
+            <a:pPr algn="l" marL="0" indent="0">
+              <a:spcBef>
+                <a:spcPts val="0"/>
+              </a:spcBef>
               <a:spcAft>
-                <a:spcPts val="333"/>
+                <a:spcPts val="167"/>
               </a:spcAft>
             </a:pPr>
             <a:r>
@@ -2562,12 +2562,12 @@
           <a:bodyPr vert="horz" wrap="square" anchor="t" lIns="91440" rIns="91440" tIns="45720" bIns="45720"/>
           <a:lstStyle/>
           <a:p>
-            <a:pPr algn="l">
-              <a:lnSpc>
-                <a:spcPct val="100000"/>
-              </a:lnSpc>
+            <a:pPr algn="l" marL="0" indent="0">
+              <a:spcBef>
+                <a:spcPts val="0"/>
+              </a:spcBef>
               <a:spcAft>
-                <a:spcPts val="400"/>
+                <a:spcPts val="200"/>
               </a:spcAft>
             </a:pPr>
             <a:r>
@@ -2606,12 +2606,12 @@
             </a:r>
           </a:p>
           <a:p>
-            <a:pPr algn="l">
-              <a:lnSpc>
-                <a:spcPct val="100000"/>
-              </a:lnSpc>
+            <a:pPr algn="l" marL="0" indent="0">
+              <a:spcBef>
+                <a:spcPts val="0"/>
+              </a:spcBef>
               <a:spcAft>
-                <a:spcPts val="400"/>
+                <a:spcPts val="200"/>
               </a:spcAft>
             </a:pPr>
             <a:r>
@@ -2628,12 +2628,12 @@
             </a:r>
           </a:p>
           <a:p>
-            <a:pPr algn="l">
-              <a:lnSpc>
-                <a:spcPct val="100000"/>
-              </a:lnSpc>
+            <a:pPr algn="l" marL="0" indent="0">
+              <a:spcBef>
+                <a:spcPts val="0"/>
+              </a:spcBef>
               <a:spcAft>
-                <a:spcPts val="400"/>
+                <a:spcPts val="200"/>
               </a:spcAft>
             </a:pPr>
             <a:r>
@@ -2672,12 +2672,12 @@
             </a:r>
           </a:p>
           <a:p>
-            <a:pPr algn="l">
-              <a:lnSpc>
-                <a:spcPct val="100000"/>
-              </a:lnSpc>
+            <a:pPr algn="l" marL="0" indent="0">
+              <a:spcBef>
+                <a:spcPts val="0"/>
+              </a:spcBef>
               <a:spcAft>
-                <a:spcPts val="400"/>
+                <a:spcPts val="200"/>
               </a:spcAft>
             </a:pPr>
             <a:r>
@@ -2716,12 +2716,12 @@
             </a:r>
           </a:p>
           <a:p>
-            <a:pPr algn="l">
-              <a:lnSpc>
-                <a:spcPct val="100000"/>
-              </a:lnSpc>
+            <a:pPr algn="l" marL="0" indent="0">
+              <a:spcBef>
+                <a:spcPts val="0"/>
+              </a:spcBef>
               <a:spcAft>
-                <a:spcPts val="400"/>
+                <a:spcPts val="200"/>
               </a:spcAft>
             </a:pPr>
             <a:r>
@@ -2758,12 +2758,12 @@
           <a:bodyPr vert="horz" wrap="square" anchor="t" lIns="91440" rIns="91440" tIns="45720" bIns="45720"/>
           <a:lstStyle/>
           <a:p>
-            <a:pPr algn="l">
-              <a:lnSpc>
-                <a:spcPct val="100000"/>
-              </a:lnSpc>
+            <a:pPr algn="l" marL="0" indent="0">
+              <a:spcBef>
+                <a:spcPts val="0"/>
+              </a:spcBef>
               <a:spcAft>
-                <a:spcPts val="333"/>
+                <a:spcPts val="167"/>
               </a:spcAft>
             </a:pPr>
             <a:r>
@@ -2837,12 +2837,12 @@
           <a:bodyPr vert="horz" wrap="square" anchor="t" lIns="91440" rIns="91440" tIns="45720" bIns="45720"/>
           <a:lstStyle/>
           <a:p>
-            <a:pPr algn="l">
-              <a:lnSpc>
-                <a:spcPct val="100000"/>
-              </a:lnSpc>
+            <a:pPr algn="l" marL="0" indent="0">
+              <a:spcBef>
+                <a:spcPts val="0"/>
+              </a:spcBef>
               <a:spcAft>
-                <a:spcPts val="400"/>
+                <a:spcPts val="200"/>
               </a:spcAft>
             </a:pPr>
             <a:r>
@@ -2859,12 +2859,12 @@
             </a:r>
           </a:p>
           <a:p>
-            <a:pPr algn="l">
-              <a:lnSpc>
-                <a:spcPct val="100000"/>
-              </a:lnSpc>
+            <a:pPr algn="l" marL="0" indent="0">
+              <a:spcBef>
+                <a:spcPts val="0"/>
+              </a:spcBef>
               <a:spcAft>
-                <a:spcPts val="400"/>
+                <a:spcPts val="200"/>
               </a:spcAft>
             </a:pPr>
             <a:r>
@@ -2903,12 +2903,12 @@
             </a:r>
           </a:p>
           <a:p>
-            <a:pPr algn="l">
-              <a:lnSpc>
-                <a:spcPct val="100000"/>
-              </a:lnSpc>
+            <a:pPr algn="l" marL="0" indent="0">
+              <a:spcBef>
+                <a:spcPts val="0"/>
+              </a:spcBef>
               <a:spcAft>
-                <a:spcPts val="400"/>
+                <a:spcPts val="200"/>
               </a:spcAft>
             </a:pPr>
             <a:r>
@@ -2925,12 +2925,12 @@
             </a:r>
           </a:p>
           <a:p>
-            <a:pPr algn="l">
-              <a:lnSpc>
-                <a:spcPct val="100000"/>
-              </a:lnSpc>
+            <a:pPr algn="l" marL="0" indent="0">
+              <a:spcBef>
+                <a:spcPts val="0"/>
+              </a:spcBef>
               <a:spcAft>
-                <a:spcPts val="400"/>
+                <a:spcPts val="200"/>
               </a:spcAft>
             </a:pPr>
             <a:r>
@@ -2969,12 +2969,12 @@
             </a:r>
           </a:p>
           <a:p>
-            <a:pPr algn="l">
-              <a:lnSpc>
-                <a:spcPct val="100000"/>
-              </a:lnSpc>
+            <a:pPr algn="l" marL="0" indent="0">
+              <a:spcBef>
+                <a:spcPts val="0"/>
+              </a:spcBef>
               <a:spcAft>
-                <a:spcPts val="400"/>
+                <a:spcPts val="200"/>
               </a:spcAft>
             </a:pPr>
             <a:r>
@@ -2991,12 +2991,12 @@
             </a:r>
           </a:p>
           <a:p>
-            <a:pPr algn="l">
-              <a:lnSpc>
-                <a:spcPct val="100000"/>
-              </a:lnSpc>
+            <a:pPr algn="l" marL="0" indent="0">
+              <a:spcBef>
+                <a:spcPts val="0"/>
+              </a:spcBef>
               <a:spcAft>
-                <a:spcPts val="400"/>
+                <a:spcPts val="200"/>
               </a:spcAft>
             </a:pPr>
             <a:r>
@@ -3013,12 +3013,12 @@
             </a:r>
           </a:p>
           <a:p>
-            <a:pPr algn="l">
-              <a:lnSpc>
-                <a:spcPct val="100000"/>
-              </a:lnSpc>
+            <a:pPr algn="l" marL="0" indent="0">
+              <a:spcBef>
+                <a:spcPts val="0"/>
+              </a:spcBef>
               <a:spcAft>
-                <a:spcPts val="400"/>
+                <a:spcPts val="200"/>
               </a:spcAft>
             </a:pPr>
             <a:r>
@@ -3035,12 +3035,12 @@
             </a:r>
           </a:p>
           <a:p>
-            <a:pPr algn="l">
-              <a:lnSpc>
-                <a:spcPct val="100000"/>
-              </a:lnSpc>
+            <a:pPr algn="l" marL="0" indent="0">
+              <a:spcBef>
+                <a:spcPts val="0"/>
+              </a:spcBef>
               <a:spcAft>
-                <a:spcPts val="400"/>
+                <a:spcPts val="200"/>
               </a:spcAft>
             </a:pPr>
             <a:r>
@@ -3057,12 +3057,12 @@
             </a:r>
           </a:p>
           <a:p>
-            <a:pPr algn="l">
-              <a:lnSpc>
-                <a:spcPct val="100000"/>
-              </a:lnSpc>
+            <a:pPr algn="l" marL="0" indent="0">
+              <a:spcBef>
+                <a:spcPts val="0"/>
+              </a:spcBef>
               <a:spcAft>
-                <a:spcPts val="400"/>
+                <a:spcPts val="200"/>
               </a:spcAft>
             </a:pPr>
             <a:r>
@@ -3099,12 +3099,12 @@
           <a:bodyPr vert="horz" wrap="square" anchor="t" lIns="91440" rIns="91440" tIns="45720" bIns="45720"/>
           <a:lstStyle/>
           <a:p>
-            <a:pPr algn="l">
-              <a:lnSpc>
-                <a:spcPct val="100000"/>
-              </a:lnSpc>
+            <a:pPr algn="l" marL="0" indent="0">
+              <a:spcBef>
+                <a:spcPts val="0"/>
+              </a:spcBef>
               <a:spcAft>
-                <a:spcPts val="333"/>
+                <a:spcPts val="167"/>
               </a:spcAft>
             </a:pPr>
             <a:r>
@@ -3178,12 +3178,12 @@
           <a:bodyPr vert="horz" wrap="square" anchor="t" lIns="91440" rIns="91440" tIns="45720" bIns="45720"/>
           <a:lstStyle/>
           <a:p>
-            <a:pPr algn="l">
-              <a:lnSpc>
-                <a:spcPct val="100000"/>
-              </a:lnSpc>
+            <a:pPr algn="l" marL="0" indent="0">
+              <a:spcBef>
+                <a:spcPts val="0"/>
+              </a:spcBef>
               <a:spcAft>
-                <a:spcPts val="400"/>
+                <a:spcPts val="200"/>
               </a:spcAft>
             </a:pPr>
             <a:r>
@@ -3200,12 +3200,12 @@
             </a:r>
           </a:p>
           <a:p>
-            <a:pPr algn="l">
-              <a:lnSpc>
-                <a:spcPct val="100000"/>
-              </a:lnSpc>
+            <a:pPr algn="l" marL="0" indent="0">
+              <a:spcBef>
+                <a:spcPts val="0"/>
+              </a:spcBef>
               <a:spcAft>
-                <a:spcPts val="400"/>
+                <a:spcPts val="200"/>
               </a:spcAft>
             </a:pPr>
             <a:r>
@@ -3266,12 +3266,12 @@
             </a:r>
           </a:p>
           <a:p>
-            <a:pPr algn="l">
-              <a:lnSpc>
-                <a:spcPct val="100000"/>
-              </a:lnSpc>
+            <a:pPr algn="l" marL="0" indent="0">
+              <a:spcBef>
+                <a:spcPts val="0"/>
+              </a:spcBef>
               <a:spcAft>
-                <a:spcPts val="400"/>
+                <a:spcPts val="200"/>
               </a:spcAft>
             </a:pPr>
             <a:r>
@@ -3310,12 +3310,12 @@
             </a:r>
           </a:p>
           <a:p>
-            <a:pPr algn="l">
-              <a:lnSpc>
-                <a:spcPct val="100000"/>
-              </a:lnSpc>
+            <a:pPr algn="l" marL="0" indent="0">
+              <a:spcBef>
+                <a:spcPts val="0"/>
+              </a:spcBef>
               <a:spcAft>
-                <a:spcPts val="400"/>
+                <a:spcPts val="200"/>
               </a:spcAft>
             </a:pPr>
             <a:r>
@@ -3354,12 +3354,12 @@
             </a:r>
           </a:p>
           <a:p>
-            <a:pPr algn="l">
-              <a:lnSpc>
-                <a:spcPct val="100000"/>
-              </a:lnSpc>
+            <a:pPr algn="l" marL="0" indent="0">
+              <a:spcBef>
+                <a:spcPts val="0"/>
+              </a:spcBef>
               <a:spcAft>
-                <a:spcPts val="400"/>
+                <a:spcPts val="200"/>
               </a:spcAft>
             </a:pPr>
             <a:r>
@@ -3398,12 +3398,12 @@
             </a:r>
           </a:p>
           <a:p>
-            <a:pPr algn="l">
-              <a:lnSpc>
-                <a:spcPct val="100000"/>
-              </a:lnSpc>
+            <a:pPr algn="l" marL="0" indent="0">
+              <a:spcBef>
+                <a:spcPts val="0"/>
+              </a:spcBef>
               <a:spcAft>
-                <a:spcPts val="400"/>
+                <a:spcPts val="200"/>
               </a:spcAft>
             </a:pPr>
             <a:r>
@@ -3442,12 +3442,12 @@
             </a:r>
           </a:p>
           <a:p>
-            <a:pPr algn="l">
-              <a:lnSpc>
-                <a:spcPct val="100000"/>
-              </a:lnSpc>
+            <a:pPr algn="l" marL="0" indent="0">
+              <a:spcBef>
+                <a:spcPts val="0"/>
+              </a:spcBef>
               <a:spcAft>
-                <a:spcPts val="400"/>
+                <a:spcPts val="200"/>
               </a:spcAft>
             </a:pPr>
             <a:r>
@@ -3486,12 +3486,12 @@
             </a:r>
           </a:p>
           <a:p>
-            <a:pPr algn="l">
-              <a:lnSpc>
-                <a:spcPct val="100000"/>
-              </a:lnSpc>
+            <a:pPr algn="l" marL="0" indent="0">
+              <a:spcBef>
+                <a:spcPts val="0"/>
+              </a:spcBef>
               <a:spcAft>
-                <a:spcPts val="400"/>
+                <a:spcPts val="200"/>
               </a:spcAft>
             </a:pPr>
             <a:r>
@@ -3539,12 +3539,12 @@
           <a:bodyPr vert="horz" wrap="square" anchor="t" lIns="91440" rIns="91440" tIns="45720" bIns="45720"/>
           <a:lstStyle/>
           <a:p>
-            <a:pPr algn="l">
-              <a:lnSpc>
-                <a:spcPct val="100000"/>
-              </a:lnSpc>
+            <a:pPr algn="l" marL="0" indent="0">
+              <a:spcBef>
+                <a:spcPts val="0"/>
+              </a:spcBef>
               <a:spcAft>
-                <a:spcPts val="333"/>
+                <a:spcPts val="167"/>
               </a:spcAft>
             </a:pPr>
             <a:r>
@@ -3618,12 +3618,12 @@
           <a:bodyPr vert="horz" wrap="square" anchor="t" lIns="91440" rIns="91440" tIns="45720" bIns="45720"/>
           <a:lstStyle/>
           <a:p>
-            <a:pPr algn="l">
-              <a:lnSpc>
-                <a:spcPct val="100000"/>
-              </a:lnSpc>
+            <a:pPr algn="l" marL="0" indent="0">
+              <a:spcBef>
+                <a:spcPts val="0"/>
+              </a:spcBef>
               <a:spcAft>
-                <a:spcPts val="400"/>
+                <a:spcPts val="200"/>
               </a:spcAft>
             </a:pPr>
             <a:r>
@@ -3662,12 +3662,12 @@
             </a:r>
           </a:p>
           <a:p>
-            <a:pPr algn="l">
-              <a:lnSpc>
-                <a:spcPct val="100000"/>
-              </a:lnSpc>
+            <a:pPr algn="l" marL="0" indent="0">
+              <a:spcBef>
+                <a:spcPts val="0"/>
+              </a:spcBef>
               <a:spcAft>
-                <a:spcPts val="400"/>
+                <a:spcPts val="200"/>
               </a:spcAft>
             </a:pPr>
             <a:r>
@@ -3728,12 +3728,12 @@
             </a:r>
           </a:p>
           <a:p>
-            <a:pPr algn="l">
-              <a:lnSpc>
-                <a:spcPct val="100000"/>
-              </a:lnSpc>
+            <a:pPr algn="l" marL="0" indent="0">
+              <a:spcBef>
+                <a:spcPts val="0"/>
+              </a:spcBef>
               <a:spcAft>
-                <a:spcPts val="400"/>
+                <a:spcPts val="200"/>
               </a:spcAft>
             </a:pPr>
             <a:r>
@@ -3750,12 +3750,12 @@
             </a:r>
           </a:p>
           <a:p>
-            <a:pPr algn="l">
-              <a:lnSpc>
-                <a:spcPct val="100000"/>
-              </a:lnSpc>
+            <a:pPr algn="l" marL="0" indent="0">
+              <a:spcBef>
+                <a:spcPts val="0"/>
+              </a:spcBef>
               <a:spcAft>
-                <a:spcPts val="400"/>
+                <a:spcPts val="200"/>
               </a:spcAft>
             </a:pPr>
             <a:r>
@@ -3794,12 +3794,12 @@
             </a:r>
           </a:p>
           <a:p>
-            <a:pPr algn="l">
-              <a:lnSpc>
-                <a:spcPct val="100000"/>
-              </a:lnSpc>
+            <a:pPr algn="l" marL="0" indent="0">
+              <a:spcBef>
+                <a:spcPts val="0"/>
+              </a:spcBef>
               <a:spcAft>
-                <a:spcPts val="400"/>
+                <a:spcPts val="200"/>
               </a:spcAft>
             </a:pPr>
             <a:r>
@@ -3816,12 +3816,12 @@
             </a:r>
           </a:p>
           <a:p>
-            <a:pPr algn="l">
-              <a:lnSpc>
-                <a:spcPct val="100000"/>
-              </a:lnSpc>
+            <a:pPr algn="l" marL="0" indent="0">
+              <a:spcBef>
+                <a:spcPts val="0"/>
+              </a:spcBef>
               <a:spcAft>
-                <a:spcPts val="400"/>
+                <a:spcPts val="200"/>
               </a:spcAft>
             </a:pPr>
             <a:r>
@@ -3860,12 +3860,12 @@
             </a:r>
           </a:p>
           <a:p>
-            <a:pPr algn="l">
-              <a:lnSpc>
-                <a:spcPct val="100000"/>
-              </a:lnSpc>
+            <a:pPr algn="l" marL="0" indent="0">
+              <a:spcBef>
+                <a:spcPts val="0"/>
+              </a:spcBef>
               <a:spcAft>
-                <a:spcPts val="400"/>
+                <a:spcPts val="200"/>
               </a:spcAft>
             </a:pPr>
             <a:r>
@@ -3882,12 +3882,12 @@
             </a:r>
           </a:p>
           <a:p>
-            <a:pPr algn="l">
-              <a:lnSpc>
-                <a:spcPct val="100000"/>
-              </a:lnSpc>
+            <a:pPr algn="l" marL="0" indent="0">
+              <a:spcBef>
+                <a:spcPts val="0"/>
+              </a:spcBef>
               <a:spcAft>
-                <a:spcPts val="400"/>
+                <a:spcPts val="200"/>
               </a:spcAft>
             </a:pPr>
             <a:r>
@@ -3924,12 +3924,12 @@
           <a:bodyPr vert="horz" wrap="square" anchor="t" lIns="91440" rIns="91440" tIns="45720" bIns="45720"/>
           <a:lstStyle/>
           <a:p>
-            <a:pPr algn="l">
-              <a:lnSpc>
-                <a:spcPct val="100000"/>
-              </a:lnSpc>
+            <a:pPr algn="l" marL="0" indent="0">
+              <a:spcBef>
+                <a:spcPts val="0"/>
+              </a:spcBef>
               <a:spcAft>
-                <a:spcPts val="333"/>
+                <a:spcPts val="167"/>
               </a:spcAft>
             </a:pPr>
             <a:r>
@@ -4003,12 +4003,12 @@
           <a:bodyPr vert="horz" wrap="square" anchor="t" lIns="91440" rIns="91440" tIns="45720" bIns="45720"/>
           <a:lstStyle/>
           <a:p>
-            <a:pPr algn="l">
-              <a:lnSpc>
-                <a:spcPct val="100000"/>
-              </a:lnSpc>
+            <a:pPr algn="l" marL="0" indent="0">
+              <a:spcBef>
+                <a:spcPts val="0"/>
+              </a:spcBef>
               <a:spcAft>
-                <a:spcPts val="400"/>
+                <a:spcPts val="200"/>
               </a:spcAft>
             </a:pPr>
             <a:r>
@@ -4025,12 +4025,12 @@
             </a:r>
           </a:p>
           <a:p>
-            <a:pPr algn="l">
-              <a:lnSpc>
-                <a:spcPct val="100000"/>
-              </a:lnSpc>
+            <a:pPr algn="l" marL="0" indent="0">
+              <a:spcBef>
+                <a:spcPts val="0"/>
+              </a:spcBef>
               <a:spcAft>
-                <a:spcPts val="400"/>
+                <a:spcPts val="200"/>
               </a:spcAft>
             </a:pPr>
             <a:r>
@@ -4069,12 +4069,12 @@
             </a:r>
           </a:p>
           <a:p>
-            <a:pPr algn="l">
-              <a:lnSpc>
-                <a:spcPct val="100000"/>
-              </a:lnSpc>
+            <a:pPr algn="l" marL="0" indent="0">
+              <a:spcBef>
+                <a:spcPts val="0"/>
+              </a:spcBef>
               <a:spcAft>
-                <a:spcPts val="400"/>
+                <a:spcPts val="200"/>
               </a:spcAft>
             </a:pPr>
             <a:r>
@@ -4111,12 +4111,12 @@
           <a:bodyPr vert="horz" wrap="square" anchor="t" lIns="91440" rIns="91440" tIns="45720" bIns="45720"/>
           <a:lstStyle/>
           <a:p>
-            <a:pPr algn="l">
-              <a:lnSpc>
-                <a:spcPct val="100000"/>
-              </a:lnSpc>
+            <a:pPr algn="l" marL="0" indent="0">
+              <a:spcBef>
+                <a:spcPts val="0"/>
+              </a:spcBef>
               <a:spcAft>
-                <a:spcPts val="333"/>
+                <a:spcPts val="167"/>
               </a:spcAft>
             </a:pPr>
             <a:r>
@@ -4190,12 +4190,12 @@
           <a:bodyPr vert="horz" wrap="square" anchor="t" lIns="91440" rIns="91440" tIns="45720" bIns="45720"/>
           <a:lstStyle/>
           <a:p>
-            <a:pPr algn="l">
-              <a:lnSpc>
-                <a:spcPct val="100000"/>
-              </a:lnSpc>
+            <a:pPr algn="l" marL="0" indent="0">
+              <a:spcBef>
+                <a:spcPts val="0"/>
+              </a:spcBef>
               <a:spcAft>
-                <a:spcPts val="400"/>
+                <a:spcPts val="200"/>
               </a:spcAft>
             </a:pPr>
             <a:r>
@@ -4212,12 +4212,12 @@
             </a:r>
           </a:p>
           <a:p>
-            <a:pPr algn="l">
-              <a:lnSpc>
-                <a:spcPct val="100000"/>
-              </a:lnSpc>
+            <a:pPr algn="l" marL="0" indent="0">
+              <a:spcBef>
+                <a:spcPts val="0"/>
+              </a:spcBef>
               <a:spcAft>
-                <a:spcPts val="400"/>
+                <a:spcPts val="200"/>
               </a:spcAft>
             </a:pPr>
             <a:r>
@@ -4245,12 +4245,12 @@
             </a:r>
           </a:p>
           <a:p>
-            <a:pPr algn="l">
-              <a:lnSpc>
-                <a:spcPct val="100000"/>
-              </a:lnSpc>
+            <a:pPr algn="l" marL="0" indent="0">
+              <a:spcBef>
+                <a:spcPts val="0"/>
+              </a:spcBef>
               <a:spcAft>
-                <a:spcPts val="400"/>
+                <a:spcPts val="200"/>
               </a:spcAft>
             </a:pPr>
             <a:r>
@@ -4278,12 +4278,12 @@
             </a:r>
           </a:p>
           <a:p>
-            <a:pPr algn="l">
-              <a:lnSpc>
-                <a:spcPct val="100000"/>
-              </a:lnSpc>
+            <a:pPr algn="l" marL="0" indent="0">
+              <a:spcBef>
+                <a:spcPts val="0"/>
+              </a:spcBef>
               <a:spcAft>
-                <a:spcPts val="400"/>
+                <a:spcPts val="200"/>
               </a:spcAft>
             </a:pPr>
             <a:r>
@@ -4311,12 +4311,12 @@
             </a:r>
           </a:p>
           <a:p>
-            <a:pPr algn="l">
-              <a:lnSpc>
-                <a:spcPct val="100000"/>
-              </a:lnSpc>
+            <a:pPr algn="l" marL="0" indent="0">
+              <a:spcBef>
+                <a:spcPts val="0"/>
+              </a:spcBef>
               <a:spcAft>
-                <a:spcPts val="400"/>
+                <a:spcPts val="200"/>
               </a:spcAft>
             </a:pPr>
             <a:r>
@@ -4364,12 +4364,12 @@
           <a:bodyPr vert="horz" wrap="square" anchor="t" lIns="91440" rIns="91440" tIns="45720" bIns="45720"/>
           <a:lstStyle/>
           <a:p>
-            <a:pPr algn="l">
-              <a:lnSpc>
-                <a:spcPct val="100000"/>
-              </a:lnSpc>
+            <a:pPr algn="l" marL="0" indent="0">
+              <a:spcBef>
+                <a:spcPts val="0"/>
+              </a:spcBef>
               <a:spcAft>
-                <a:spcPts val="333"/>
+                <a:spcPts val="167"/>
               </a:spcAft>
             </a:pPr>
             <a:r>
@@ -4443,12 +4443,12 @@
           <a:bodyPr vert="horz" wrap="square" anchor="t" lIns="91440" rIns="91440" tIns="45720" bIns="45720"/>
           <a:lstStyle/>
           <a:p>
-            <a:pPr algn="l">
-              <a:lnSpc>
-                <a:spcPct val="100000"/>
-              </a:lnSpc>
+            <a:pPr algn="l" marL="0" indent="0">
+              <a:spcBef>
+                <a:spcPts val="0"/>
+              </a:spcBef>
               <a:spcAft>
-                <a:spcPts val="400"/>
+                <a:spcPts val="200"/>
               </a:spcAft>
             </a:pPr>
             <a:r>
@@ -4487,12 +4487,12 @@
             </a:r>
           </a:p>
           <a:p>
-            <a:pPr algn="l">
-              <a:lnSpc>
-                <a:spcPct val="100000"/>
-              </a:lnSpc>
+            <a:pPr algn="l" marL="0" indent="0">
+              <a:spcBef>
+                <a:spcPts val="0"/>
+              </a:spcBef>
               <a:spcAft>
-                <a:spcPts val="400"/>
+                <a:spcPts val="200"/>
               </a:spcAft>
             </a:pPr>
             <a:r>
@@ -4509,12 +4509,12 @@
             </a:r>
           </a:p>
           <a:p>
-            <a:pPr algn="l">
-              <a:lnSpc>
-                <a:spcPct val="100000"/>
-              </a:lnSpc>
+            <a:pPr algn="l" marL="0" indent="0">
+              <a:spcBef>
+                <a:spcPts val="0"/>
+              </a:spcBef>
               <a:spcAft>
-                <a:spcPts val="400"/>
+                <a:spcPts val="200"/>
               </a:spcAft>
             </a:pPr>
             <a:r>
@@ -4553,12 +4553,12 @@
             </a:r>
           </a:p>
           <a:p>
-            <a:pPr algn="l">
-              <a:lnSpc>
-                <a:spcPct val="100000"/>
-              </a:lnSpc>
+            <a:pPr algn="l" marL="0" indent="0">
+              <a:spcBef>
+                <a:spcPts val="0"/>
+              </a:spcBef>
               <a:spcAft>
-                <a:spcPts val="400"/>
+                <a:spcPts val="200"/>
               </a:spcAft>
             </a:pPr>
             <a:r>
@@ -4597,12 +4597,12 @@
             </a:r>
           </a:p>
           <a:p>
-            <a:pPr algn="l">
-              <a:lnSpc>
-                <a:spcPct val="100000"/>
-              </a:lnSpc>
+            <a:pPr algn="l" marL="0" indent="0">
+              <a:spcBef>
+                <a:spcPts val="0"/>
+              </a:spcBef>
               <a:spcAft>
-                <a:spcPts val="400"/>
+                <a:spcPts val="200"/>
               </a:spcAft>
             </a:pPr>
             <a:r>
@@ -4619,12 +4619,12 @@
             </a:r>
           </a:p>
           <a:p>
-            <a:pPr algn="l">
-              <a:lnSpc>
-                <a:spcPct val="100000"/>
-              </a:lnSpc>
+            <a:pPr algn="l" marL="0" indent="0">
+              <a:spcBef>
+                <a:spcPts val="0"/>
+              </a:spcBef>
               <a:spcAft>
-                <a:spcPts val="400"/>
+                <a:spcPts val="200"/>
               </a:spcAft>
             </a:pPr>
             <a:r>
@@ -4661,12 +4661,12 @@
           <a:bodyPr vert="horz" wrap="square" anchor="t" lIns="91440" rIns="91440" tIns="45720" bIns="45720"/>
           <a:lstStyle/>
           <a:p>
-            <a:pPr algn="l">
-              <a:lnSpc>
-                <a:spcPct val="100000"/>
-              </a:lnSpc>
+            <a:pPr algn="l" marL="0" indent="0">
+              <a:spcBef>
+                <a:spcPts val="0"/>
+              </a:spcBef>
               <a:spcAft>
-                <a:spcPts val="333"/>
+                <a:spcPts val="167"/>
               </a:spcAft>
             </a:pPr>
             <a:r>
@@ -4740,12 +4740,12 @@
           <a:bodyPr vert="horz" wrap="square" anchor="t" lIns="91440" rIns="91440" tIns="45720" bIns="45720"/>
           <a:lstStyle/>
           <a:p>
-            <a:pPr algn="l">
-              <a:lnSpc>
-                <a:spcPct val="100000"/>
-              </a:lnSpc>
+            <a:pPr algn="l" marL="0" indent="0">
+              <a:spcBef>
+                <a:spcPts val="0"/>
+              </a:spcBef>
               <a:spcAft>
-                <a:spcPts val="400"/>
+                <a:spcPts val="200"/>
               </a:spcAft>
             </a:pPr>
             <a:r>
@@ -4784,12 +4784,12 @@
             </a:r>
           </a:p>
           <a:p>
-            <a:pPr algn="l">
-              <a:lnSpc>
-                <a:spcPct val="100000"/>
-              </a:lnSpc>
+            <a:pPr algn="l" marL="0" indent="0">
+              <a:spcBef>
+                <a:spcPts val="0"/>
+              </a:spcBef>
               <a:spcAft>
-                <a:spcPts val="400"/>
+                <a:spcPts val="200"/>
               </a:spcAft>
             </a:pPr>
             <a:r>
@@ -4828,12 +4828,12 @@
             </a:r>
           </a:p>
           <a:p>
-            <a:pPr algn="l">
-              <a:lnSpc>
-                <a:spcPct val="100000"/>
-              </a:lnSpc>
+            <a:pPr algn="l" marL="0" indent="0">
+              <a:spcBef>
+                <a:spcPts val="0"/>
+              </a:spcBef>
               <a:spcAft>
-                <a:spcPts val="400"/>
+                <a:spcPts val="200"/>
               </a:spcAft>
             </a:pPr>
             <a:r>
@@ -4850,12 +4850,12 @@
             </a:r>
           </a:p>
           <a:p>
-            <a:pPr algn="l">
-              <a:lnSpc>
-                <a:spcPct val="100000"/>
-              </a:lnSpc>
+            <a:pPr algn="l" marL="0" indent="0">
+              <a:spcBef>
+                <a:spcPts val="0"/>
+              </a:spcBef>
               <a:spcAft>
-                <a:spcPts val="400"/>
+                <a:spcPts val="200"/>
               </a:spcAft>
             </a:pPr>
             <a:r>
@@ -4894,12 +4894,12 @@
             </a:r>
           </a:p>
           <a:p>
-            <a:pPr algn="l">
-              <a:lnSpc>
-                <a:spcPct val="100000"/>
-              </a:lnSpc>
+            <a:pPr algn="l" marL="0" indent="0">
+              <a:spcBef>
+                <a:spcPts val="0"/>
+              </a:spcBef>
               <a:spcAft>
-                <a:spcPts val="400"/>
+                <a:spcPts val="200"/>
               </a:spcAft>
             </a:pPr>
             <a:r>
@@ -4938,12 +4938,12 @@
             </a:r>
           </a:p>
           <a:p>
-            <a:pPr algn="l">
-              <a:lnSpc>
-                <a:spcPct val="100000"/>
-              </a:lnSpc>
+            <a:pPr algn="l" marL="0" indent="0">
+              <a:spcBef>
+                <a:spcPts val="0"/>
+              </a:spcBef>
               <a:spcAft>
-                <a:spcPts val="400"/>
+                <a:spcPts val="200"/>
               </a:spcAft>
             </a:pPr>
             <a:r>
@@ -4991,12 +4991,12 @@
           <a:bodyPr vert="horz" wrap="square" anchor="t" lIns="91440" rIns="91440" tIns="45720" bIns="45720"/>
           <a:lstStyle/>
           <a:p>
-            <a:pPr algn="l">
-              <a:lnSpc>
-                <a:spcPct val="100000"/>
-              </a:lnSpc>
+            <a:pPr algn="l" marL="0" indent="0">
+              <a:spcBef>
+                <a:spcPts val="0"/>
+              </a:spcBef>
               <a:spcAft>
-                <a:spcPts val="333"/>
+                <a:spcPts val="167"/>
               </a:spcAft>
             </a:pPr>
             <a:r>
@@ -5070,12 +5070,12 @@
           <a:bodyPr vert="horz" wrap="square" anchor="t" lIns="91440" rIns="91440" tIns="45720" bIns="45720"/>
           <a:lstStyle/>
           <a:p>
-            <a:pPr algn="l">
-              <a:lnSpc>
-                <a:spcPct val="100000"/>
-              </a:lnSpc>
+            <a:pPr algn="l" marL="0" indent="0">
+              <a:spcBef>
+                <a:spcPts val="0"/>
+              </a:spcBef>
               <a:spcAft>
-                <a:spcPts val="400"/>
+                <a:spcPts val="200"/>
               </a:spcAft>
             </a:pPr>
             <a:r>
@@ -5114,12 +5114,12 @@
             </a:r>
           </a:p>
           <a:p>
-            <a:pPr algn="l">
-              <a:lnSpc>
-                <a:spcPct val="100000"/>
-              </a:lnSpc>
+            <a:pPr algn="l" marL="0" indent="0">
+              <a:spcBef>
+                <a:spcPts val="0"/>
+              </a:spcBef>
               <a:spcAft>
-                <a:spcPts val="400"/>
+                <a:spcPts val="200"/>
               </a:spcAft>
             </a:pPr>
             <a:r>
@@ -5136,12 +5136,12 @@
             </a:r>
           </a:p>
           <a:p>
-            <a:pPr algn="l">
-              <a:lnSpc>
-                <a:spcPct val="100000"/>
-              </a:lnSpc>
+            <a:pPr algn="l" marL="0" indent="0">
+              <a:spcBef>
+                <a:spcPts val="0"/>
+              </a:spcBef>
               <a:spcAft>
-                <a:spcPts val="400"/>
+                <a:spcPts val="200"/>
               </a:spcAft>
             </a:pPr>
             <a:r>
@@ -5158,12 +5158,12 @@
             </a:r>
           </a:p>
           <a:p>
-            <a:pPr algn="l">
-              <a:lnSpc>
-                <a:spcPct val="100000"/>
-              </a:lnSpc>
+            <a:pPr algn="l" marL="0" indent="0">
+              <a:spcBef>
+                <a:spcPts val="0"/>
+              </a:spcBef>
               <a:spcAft>
-                <a:spcPts val="400"/>
+                <a:spcPts val="200"/>
               </a:spcAft>
             </a:pPr>
             <a:r>
@@ -5180,12 +5180,12 @@
             </a:r>
           </a:p>
           <a:p>
-            <a:pPr algn="l">
-              <a:lnSpc>
-                <a:spcPct val="100000"/>
-              </a:lnSpc>
+            <a:pPr algn="l" marL="0" indent="0">
+              <a:spcBef>
+                <a:spcPts val="0"/>
+              </a:spcBef>
               <a:spcAft>
-                <a:spcPts val="400"/>
+                <a:spcPts val="200"/>
               </a:spcAft>
             </a:pPr>
             <a:r>
@@ -5224,12 +5224,12 @@
             </a:r>
           </a:p>
           <a:p>
-            <a:pPr algn="l">
-              <a:lnSpc>
-                <a:spcPct val="100000"/>
-              </a:lnSpc>
+            <a:pPr algn="l" marL="0" indent="0">
+              <a:spcBef>
+                <a:spcPts val="0"/>
+              </a:spcBef>
               <a:spcAft>
-                <a:spcPts val="400"/>
+                <a:spcPts val="200"/>
               </a:spcAft>
             </a:pPr>
             <a:r>
@@ -5266,12 +5266,12 @@
           <a:bodyPr vert="horz" wrap="square" anchor="t" lIns="91440" rIns="91440" tIns="45720" bIns="45720"/>
           <a:lstStyle/>
           <a:p>
-            <a:pPr algn="l">
-              <a:lnSpc>
-                <a:spcPct val="100000"/>
-              </a:lnSpc>
+            <a:pPr algn="l" marL="0" indent="0">
+              <a:spcBef>
+                <a:spcPts val="0"/>
+              </a:spcBef>
               <a:spcAft>
-                <a:spcPts val="333"/>
+                <a:spcPts val="167"/>
               </a:spcAft>
             </a:pPr>
             <a:r>
@@ -5345,12 +5345,12 @@
           <a:bodyPr vert="horz" wrap="square" anchor="t" lIns="91440" rIns="91440" tIns="45720" bIns="45720"/>
           <a:lstStyle/>
           <a:p>
-            <a:pPr algn="l">
-              <a:lnSpc>
-                <a:spcPct val="100000"/>
-              </a:lnSpc>
+            <a:pPr algn="l" marL="0" indent="0">
+              <a:spcBef>
+                <a:spcPts val="0"/>
+              </a:spcBef>
               <a:spcAft>
-                <a:spcPts val="400"/>
+                <a:spcPts val="200"/>
               </a:spcAft>
             </a:pPr>
             <a:r>
@@ -5367,12 +5367,12 @@
             </a:r>
           </a:p>
           <a:p>
-            <a:pPr algn="l">
-              <a:lnSpc>
-                <a:spcPct val="100000"/>
-              </a:lnSpc>
+            <a:pPr algn="l" marL="0" indent="0">
+              <a:spcBef>
+                <a:spcPts val="0"/>
+              </a:spcBef>
               <a:spcAft>
-                <a:spcPts val="400"/>
+                <a:spcPts val="200"/>
               </a:spcAft>
             </a:pPr>
             <a:r>
@@ -5400,12 +5400,12 @@
             </a:r>
           </a:p>
           <a:p>
-            <a:pPr algn="l">
-              <a:lnSpc>
-                <a:spcPct val="100000"/>
-              </a:lnSpc>
+            <a:pPr algn="l" marL="0" indent="0">
+              <a:spcBef>
+                <a:spcPts val="0"/>
+              </a:spcBef>
               <a:spcAft>
-                <a:spcPts val="400"/>
+                <a:spcPts val="200"/>
               </a:spcAft>
             </a:pPr>
             <a:r>
@@ -5422,12 +5422,12 @@
             </a:r>
           </a:p>
           <a:p>
-            <a:pPr algn="l">
-              <a:lnSpc>
-                <a:spcPct val="100000"/>
-              </a:lnSpc>
+            <a:pPr algn="l" marL="0" indent="0">
+              <a:spcBef>
+                <a:spcPts val="0"/>
+              </a:spcBef>
               <a:spcAft>
-                <a:spcPts val="400"/>
+                <a:spcPts val="200"/>
               </a:spcAft>
             </a:pPr>
             <a:r>
@@ -5466,12 +5466,12 @@
             </a:r>
           </a:p>
           <a:p>
-            <a:pPr algn="l">
-              <a:lnSpc>
-                <a:spcPct val="100000"/>
-              </a:lnSpc>
+            <a:pPr algn="l" marL="0" indent="0">
+              <a:spcBef>
+                <a:spcPts val="0"/>
+              </a:spcBef>
               <a:spcAft>
-                <a:spcPts val="400"/>
+                <a:spcPts val="200"/>
               </a:spcAft>
             </a:pPr>
             <a:r>
@@ -5488,12 +5488,12 @@
             </a:r>
           </a:p>
           <a:p>
-            <a:pPr algn="l">
-              <a:lnSpc>
-                <a:spcPct val="100000"/>
-              </a:lnSpc>
+            <a:pPr algn="l" marL="0" indent="0">
+              <a:spcBef>
+                <a:spcPts val="0"/>
+              </a:spcBef>
               <a:spcAft>
-                <a:spcPts val="400"/>
+                <a:spcPts val="200"/>
               </a:spcAft>
             </a:pPr>
             <a:r>
@@ -5532,12 +5532,12 @@
             </a:r>
           </a:p>
           <a:p>
-            <a:pPr algn="l">
-              <a:lnSpc>
-                <a:spcPct val="100000"/>
-              </a:lnSpc>
+            <a:pPr algn="l" marL="0" indent="0">
+              <a:spcBef>
+                <a:spcPts val="0"/>
+              </a:spcBef>
               <a:spcAft>
-                <a:spcPts val="400"/>
+                <a:spcPts val="200"/>
               </a:spcAft>
             </a:pPr>
             <a:r>
@@ -5574,12 +5574,12 @@
           <a:bodyPr vert="horz" wrap="square" anchor="t" lIns="91440" rIns="91440" tIns="45720" bIns="45720"/>
           <a:lstStyle/>
           <a:p>
-            <a:pPr algn="l">
-              <a:lnSpc>
-                <a:spcPct val="100000"/>
-              </a:lnSpc>
+            <a:pPr algn="l" marL="0" indent="0">
+              <a:spcBef>
+                <a:spcPts val="0"/>
+              </a:spcBef>
               <a:spcAft>
-                <a:spcPts val="333"/>
+                <a:spcPts val="167"/>
               </a:spcAft>
             </a:pPr>
             <a:r>
@@ -5653,12 +5653,12 @@
           <a:bodyPr vert="horz" wrap="square" anchor="t" lIns="91440" rIns="91440" tIns="45720" bIns="45720"/>
           <a:lstStyle/>
           <a:p>
-            <a:pPr algn="l">
-              <a:lnSpc>
-                <a:spcPct val="100000"/>
-              </a:lnSpc>
+            <a:pPr algn="l" marL="0" indent="0">
+              <a:spcBef>
+                <a:spcPts val="0"/>
+              </a:spcBef>
               <a:spcAft>
-                <a:spcPts val="400"/>
+                <a:spcPts val="200"/>
               </a:spcAft>
             </a:pPr>
             <a:r>
@@ -5697,12 +5697,12 @@
             </a:r>
           </a:p>
           <a:p>
-            <a:pPr algn="l">
-              <a:lnSpc>
-                <a:spcPct val="100000"/>
-              </a:lnSpc>
+            <a:pPr algn="l" marL="0" indent="0">
+              <a:spcBef>
+                <a:spcPts val="0"/>
+              </a:spcBef>
               <a:spcAft>
-                <a:spcPts val="400"/>
+                <a:spcPts val="200"/>
               </a:spcAft>
             </a:pPr>
             <a:r>
@@ -5741,12 +5741,12 @@
             </a:r>
           </a:p>
           <a:p>
-            <a:pPr algn="l">
-              <a:lnSpc>
-                <a:spcPct val="100000"/>
-              </a:lnSpc>
+            <a:pPr algn="l" marL="0" indent="0">
+              <a:spcBef>
+                <a:spcPts val="0"/>
+              </a:spcBef>
               <a:spcAft>
-                <a:spcPts val="400"/>
+                <a:spcPts val="200"/>
               </a:spcAft>
             </a:pPr>
             <a:r>
@@ -5785,12 +5785,12 @@
             </a:r>
           </a:p>
           <a:p>
-            <a:pPr algn="l">
-              <a:lnSpc>
-                <a:spcPct val="100000"/>
-              </a:lnSpc>
+            <a:pPr algn="l" marL="0" indent="0">
+              <a:spcBef>
+                <a:spcPts val="0"/>
+              </a:spcBef>
               <a:spcAft>
-                <a:spcPts val="400"/>
+                <a:spcPts val="200"/>
               </a:spcAft>
             </a:pPr>
             <a:r>
@@ -5807,12 +5807,12 @@
             </a:r>
           </a:p>
           <a:p>
-            <a:pPr algn="l">
-              <a:lnSpc>
-                <a:spcPct val="100000"/>
-              </a:lnSpc>
+            <a:pPr algn="l" marL="0" indent="0">
+              <a:spcBef>
+                <a:spcPts val="0"/>
+              </a:spcBef>
               <a:spcAft>
-                <a:spcPts val="400"/>
+                <a:spcPts val="200"/>
               </a:spcAft>
             </a:pPr>
             <a:r>
@@ -5851,12 +5851,12 @@
             </a:r>
           </a:p>
           <a:p>
-            <a:pPr algn="l">
-              <a:lnSpc>
-                <a:spcPct val="100000"/>
-              </a:lnSpc>
+            <a:pPr algn="l" marL="0" indent="0">
+              <a:spcBef>
+                <a:spcPts val="0"/>
+              </a:spcBef>
               <a:spcAft>
-                <a:spcPts val="400"/>
+                <a:spcPts val="200"/>
               </a:spcAft>
             </a:pPr>
             <a:r>
@@ -5895,12 +5895,12 @@
             </a:r>
           </a:p>
           <a:p>
-            <a:pPr algn="l">
-              <a:lnSpc>
-                <a:spcPct val="100000"/>
-              </a:lnSpc>
+            <a:pPr algn="l" marL="0" indent="0">
+              <a:spcBef>
+                <a:spcPts val="0"/>
+              </a:spcBef>
               <a:spcAft>
-                <a:spcPts val="400"/>
+                <a:spcPts val="200"/>
               </a:spcAft>
             </a:pPr>
             <a:r>
@@ -5937,12 +5937,12 @@
           <a:bodyPr vert="horz" wrap="square" anchor="t" lIns="91440" rIns="91440" tIns="45720" bIns="45720"/>
           <a:lstStyle/>
           <a:p>
-            <a:pPr algn="l">
-              <a:lnSpc>
-                <a:spcPct val="100000"/>
-              </a:lnSpc>
+            <a:pPr algn="l" marL="0" indent="0">
+              <a:spcBef>
+                <a:spcPts val="0"/>
+              </a:spcBef>
               <a:spcAft>
-                <a:spcPts val="333"/>
+                <a:spcPts val="167"/>
               </a:spcAft>
             </a:pPr>
             <a:r>
@@ -6016,12 +6016,12 @@
           <a:bodyPr vert="horz" wrap="square" anchor="t" lIns="91440" rIns="91440" tIns="45720" bIns="45720"/>
           <a:lstStyle/>
           <a:p>
-            <a:pPr algn="l">
-              <a:lnSpc>
-                <a:spcPct val="100000"/>
-              </a:lnSpc>
+            <a:pPr algn="l" marL="0" indent="0">
+              <a:spcBef>
+                <a:spcPts val="0"/>
+              </a:spcBef>
               <a:spcAft>
-                <a:spcPts val="400"/>
+                <a:spcPts val="200"/>
               </a:spcAft>
             </a:pPr>
             <a:r>
@@ -6038,12 +6038,12 @@
             </a:r>
           </a:p>
           <a:p>
-            <a:pPr algn="l">
-              <a:lnSpc>
-                <a:spcPct val="100000"/>
-              </a:lnSpc>
+            <a:pPr algn="l" marL="0" indent="0">
+              <a:spcBef>
+                <a:spcPts val="0"/>
+              </a:spcBef>
               <a:spcAft>
-                <a:spcPts val="400"/>
+                <a:spcPts val="200"/>
               </a:spcAft>
             </a:pPr>
             <a:r>
@@ -6071,12 +6071,12 @@
             </a:r>
           </a:p>
           <a:p>
-            <a:pPr algn="l">
-              <a:lnSpc>
-                <a:spcPct val="100000"/>
-              </a:lnSpc>
+            <a:pPr algn="l" marL="0" indent="0">
+              <a:spcBef>
+                <a:spcPts val="0"/>
+              </a:spcBef>
               <a:spcAft>
-                <a:spcPts val="400"/>
+                <a:spcPts val="200"/>
               </a:spcAft>
             </a:pPr>
             <a:r>
@@ -6093,12 +6093,12 @@
             </a:r>
           </a:p>
           <a:p>
-            <a:pPr algn="l">
-              <a:lnSpc>
-                <a:spcPct val="100000"/>
-              </a:lnSpc>
+            <a:pPr algn="l" marL="0" indent="0">
+              <a:spcBef>
+                <a:spcPts val="0"/>
+              </a:spcBef>
               <a:spcAft>
-                <a:spcPts val="400"/>
+                <a:spcPts val="200"/>
               </a:spcAft>
             </a:pPr>
             <a:r>
@@ -6137,12 +6137,12 @@
             </a:r>
           </a:p>
           <a:p>
-            <a:pPr algn="l">
-              <a:lnSpc>
-                <a:spcPct val="100000"/>
-              </a:lnSpc>
+            <a:pPr algn="l" marL="0" indent="0">
+              <a:spcBef>
+                <a:spcPts val="0"/>
+              </a:spcBef>
               <a:spcAft>
-                <a:spcPts val="400"/>
+                <a:spcPts val="200"/>
               </a:spcAft>
             </a:pPr>
             <a:r>
@@ -6159,12 +6159,12 @@
             </a:r>
           </a:p>
           <a:p>
-            <a:pPr algn="l">
-              <a:lnSpc>
-                <a:spcPct val="100000"/>
-              </a:lnSpc>
+            <a:pPr algn="l" marL="0" indent="0">
+              <a:spcBef>
+                <a:spcPts val="0"/>
+              </a:spcBef>
               <a:spcAft>
-                <a:spcPts val="400"/>
+                <a:spcPts val="200"/>
               </a:spcAft>
             </a:pPr>
             <a:r>
@@ -6203,12 +6203,12 @@
             </a:r>
           </a:p>
           <a:p>
-            <a:pPr algn="l">
-              <a:lnSpc>
-                <a:spcPct val="100000"/>
-              </a:lnSpc>
+            <a:pPr algn="l" marL="0" indent="0">
+              <a:spcBef>
+                <a:spcPts val="0"/>
+              </a:spcBef>
               <a:spcAft>
-                <a:spcPts val="400"/>
+                <a:spcPts val="200"/>
               </a:spcAft>
             </a:pPr>
             <a:r>
@@ -6267,12 +6267,12 @@
           <a:bodyPr vert="horz" wrap="square" anchor="t" lIns="91440" rIns="91440" tIns="45720" bIns="45720"/>
           <a:lstStyle/>
           <a:p>
-            <a:pPr algn="l">
-              <a:lnSpc>
-                <a:spcPct val="100000"/>
-              </a:lnSpc>
+            <a:pPr algn="l" marL="0" indent="0">
+              <a:spcBef>
+                <a:spcPts val="0"/>
+              </a:spcBef>
               <a:spcAft>
-                <a:spcPts val="333"/>
+                <a:spcPts val="167"/>
               </a:spcAft>
             </a:pPr>
             <a:r>
@@ -6346,12 +6346,12 @@
           <a:bodyPr vert="horz" wrap="square" anchor="t" lIns="91440" rIns="91440" tIns="45720" bIns="45720"/>
           <a:lstStyle/>
           <a:p>
-            <a:pPr algn="l">
-              <a:lnSpc>
-                <a:spcPct val="100000"/>
-              </a:lnSpc>
+            <a:pPr algn="l" marL="0" indent="0">
+              <a:spcBef>
+                <a:spcPts val="0"/>
+              </a:spcBef>
               <a:spcAft>
-                <a:spcPts val="400"/>
+                <a:spcPts val="200"/>
               </a:spcAft>
             </a:pPr>
             <a:r>
@@ -6412,12 +6412,12 @@
             </a:r>
           </a:p>
           <a:p>
-            <a:pPr algn="l">
-              <a:lnSpc>
-                <a:spcPct val="100000"/>
-              </a:lnSpc>
+            <a:pPr algn="l" marL="0" indent="0">
+              <a:spcBef>
+                <a:spcPts val="0"/>
+              </a:spcBef>
               <a:spcAft>
-                <a:spcPts val="400"/>
+                <a:spcPts val="200"/>
               </a:spcAft>
             </a:pPr>
             <a:r>
@@ -6434,12 +6434,12 @@
             </a:r>
           </a:p>
           <a:p>
-            <a:pPr algn="l">
-              <a:lnSpc>
-                <a:spcPct val="100000"/>
-              </a:lnSpc>
+            <a:pPr algn="l" marL="0" indent="0">
+              <a:spcBef>
+                <a:spcPts val="0"/>
+              </a:spcBef>
               <a:spcAft>
-                <a:spcPts val="400"/>
+                <a:spcPts val="200"/>
               </a:spcAft>
             </a:pPr>
             <a:r>
@@ -6467,12 +6467,12 @@
             </a:r>
           </a:p>
           <a:p>
-            <a:pPr algn="l">
-              <a:lnSpc>
-                <a:spcPct val="100000"/>
-              </a:lnSpc>
+            <a:pPr algn="l" marL="0" indent="0">
+              <a:spcBef>
+                <a:spcPts val="0"/>
+              </a:spcBef>
               <a:spcAft>
-                <a:spcPts val="400"/>
+                <a:spcPts val="200"/>
               </a:spcAft>
             </a:pPr>
             <a:r>
@@ -6522,12 +6522,12 @@
             </a:r>
           </a:p>
           <a:p>
-            <a:pPr algn="l">
-              <a:lnSpc>
-                <a:spcPct val="100000"/>
-              </a:lnSpc>
+            <a:pPr algn="l" marL="0" indent="0">
+              <a:spcBef>
+                <a:spcPts val="0"/>
+              </a:spcBef>
               <a:spcAft>
-                <a:spcPts val="400"/>
+                <a:spcPts val="200"/>
               </a:spcAft>
             </a:pPr>
             <a:r>
@@ -6555,12 +6555,12 @@
             </a:r>
           </a:p>
           <a:p>
-            <a:pPr algn="l">
-              <a:lnSpc>
-                <a:spcPct val="100000"/>
-              </a:lnSpc>
+            <a:pPr algn="l" marL="0" indent="0">
+              <a:spcBef>
+                <a:spcPts val="0"/>
+              </a:spcBef>
               <a:spcAft>
-                <a:spcPts val="400"/>
+                <a:spcPts val="200"/>
               </a:spcAft>
             </a:pPr>
             <a:r>
@@ -6597,12 +6597,12 @@
           <a:bodyPr vert="horz" wrap="square" anchor="t" lIns="91440" rIns="91440" tIns="45720" bIns="45720"/>
           <a:lstStyle/>
           <a:p>
-            <a:pPr algn="l">
-              <a:lnSpc>
-                <a:spcPct val="100000"/>
-              </a:lnSpc>
+            <a:pPr algn="l" marL="0" indent="0">
+              <a:spcBef>
+                <a:spcPts val="0"/>
+              </a:spcBef>
               <a:spcAft>
-                <a:spcPts val="333"/>
+                <a:spcPts val="167"/>
               </a:spcAft>
             </a:pPr>
             <a:r>
@@ -6676,12 +6676,12 @@
           <a:bodyPr vert="horz" wrap="square" anchor="t" lIns="91440" rIns="91440" tIns="45720" bIns="45720"/>
           <a:lstStyle/>
           <a:p>
-            <a:pPr algn="l">
-              <a:lnSpc>
-                <a:spcPct val="100000"/>
-              </a:lnSpc>
+            <a:pPr algn="l" marL="0" indent="0">
+              <a:spcBef>
+                <a:spcPts val="0"/>
+              </a:spcBef>
               <a:spcAft>
-                <a:spcPts val="383"/>
+                <a:spcPts val="192"/>
               </a:spcAft>
             </a:pPr>
             <a:r>
@@ -6698,12 +6698,12 @@
             </a:r>
           </a:p>
           <a:p>
-            <a:pPr algn="l">
-              <a:lnSpc>
-                <a:spcPct val="100000"/>
-              </a:lnSpc>
+            <a:pPr algn="l" marL="0" indent="0">
+              <a:spcBef>
+                <a:spcPts val="0"/>
+              </a:spcBef>
               <a:spcAft>
-                <a:spcPts val="383"/>
+                <a:spcPts val="192"/>
               </a:spcAft>
             </a:pPr>
             <a:r>
@@ -6720,12 +6720,12 @@
             </a:r>
           </a:p>
           <a:p>
-            <a:pPr algn="l">
-              <a:lnSpc>
-                <a:spcPct val="100000"/>
-              </a:lnSpc>
+            <a:pPr algn="l" marL="0" indent="0">
+              <a:spcBef>
+                <a:spcPts val="0"/>
+              </a:spcBef>
               <a:spcAft>
-                <a:spcPts val="383"/>
+                <a:spcPts val="192"/>
               </a:spcAft>
             </a:pPr>
             <a:r>
@@ -6764,12 +6764,12 @@
             </a:r>
           </a:p>
           <a:p>
-            <a:pPr algn="l">
-              <a:lnSpc>
-                <a:spcPct val="100000"/>
-              </a:lnSpc>
+            <a:pPr algn="l" marL="0" indent="0">
+              <a:spcBef>
+                <a:spcPts val="0"/>
+              </a:spcBef>
               <a:spcAft>
-                <a:spcPts val="383"/>
+                <a:spcPts val="192"/>
               </a:spcAft>
             </a:pPr>
             <a:r>
@@ -6786,12 +6786,12 @@
             </a:r>
           </a:p>
           <a:p>
-            <a:pPr algn="l">
-              <a:lnSpc>
-                <a:spcPct val="100000"/>
-              </a:lnSpc>
+            <a:pPr algn="l" marL="0" indent="0">
+              <a:spcBef>
+                <a:spcPts val="0"/>
+              </a:spcBef>
               <a:spcAft>
-                <a:spcPts val="383"/>
+                <a:spcPts val="192"/>
               </a:spcAft>
             </a:pPr>
             <a:r>
@@ -6808,12 +6808,12 @@
             </a:r>
           </a:p>
           <a:p>
-            <a:pPr algn="l">
-              <a:lnSpc>
-                <a:spcPct val="100000"/>
-              </a:lnSpc>
+            <a:pPr algn="l" marL="0" indent="0">
+              <a:spcBef>
+                <a:spcPts val="0"/>
+              </a:spcBef>
               <a:spcAft>
-                <a:spcPts val="383"/>
+                <a:spcPts val="192"/>
               </a:spcAft>
             </a:pPr>
             <a:r>
@@ -6830,12 +6830,12 @@
             </a:r>
           </a:p>
           <a:p>
-            <a:pPr algn="l">
-              <a:lnSpc>
-                <a:spcPct val="100000"/>
-              </a:lnSpc>
+            <a:pPr algn="l" marL="0" indent="0">
+              <a:spcBef>
+                <a:spcPts val="0"/>
+              </a:spcBef>
               <a:spcAft>
-                <a:spcPts val="383"/>
+                <a:spcPts val="192"/>
               </a:spcAft>
             </a:pPr>
             <a:r>
@@ -6863,12 +6863,12 @@
             </a:r>
           </a:p>
           <a:p>
-            <a:pPr algn="l">
-              <a:lnSpc>
-                <a:spcPct val="100000"/>
-              </a:lnSpc>
+            <a:pPr algn="l" marL="0" indent="0">
+              <a:spcBef>
+                <a:spcPts val="0"/>
+              </a:spcBef>
               <a:spcAft>
-                <a:spcPts val="383"/>
+                <a:spcPts val="192"/>
               </a:spcAft>
             </a:pPr>
             <a:r>
@@ -6885,12 +6885,12 @@
             </a:r>
           </a:p>
           <a:p>
-            <a:pPr algn="l">
-              <a:lnSpc>
-                <a:spcPct val="100000"/>
-              </a:lnSpc>
+            <a:pPr algn="l" marL="0" indent="0">
+              <a:spcBef>
+                <a:spcPts val="0"/>
+              </a:spcBef>
               <a:spcAft>
-                <a:spcPts val="383"/>
+                <a:spcPts val="192"/>
               </a:spcAft>
             </a:pPr>
             <a:r>
@@ -6907,12 +6907,12 @@
             </a:r>
           </a:p>
           <a:p>
-            <a:pPr algn="l">
-              <a:lnSpc>
-                <a:spcPct val="100000"/>
-              </a:lnSpc>
+            <a:pPr algn="l" marL="0" indent="0">
+              <a:spcBef>
+                <a:spcPts val="0"/>
+              </a:spcBef>
               <a:spcAft>
-                <a:spcPts val="383"/>
+                <a:spcPts val="192"/>
               </a:spcAft>
             </a:pPr>
             <a:r>
@@ -6971,12 +6971,12 @@
           <a:bodyPr vert="horz" wrap="square" anchor="t" lIns="91440" rIns="91440" tIns="45720" bIns="45720"/>
           <a:lstStyle/>
           <a:p>
-            <a:pPr algn="l">
-              <a:lnSpc>
-                <a:spcPct val="100000"/>
-              </a:lnSpc>
+            <a:pPr algn="l" marL="0" indent="0">
+              <a:spcBef>
+                <a:spcPts val="0"/>
+              </a:spcBef>
               <a:spcAft>
-                <a:spcPts val="333"/>
+                <a:spcPts val="167"/>
               </a:spcAft>
             </a:pPr>
             <a:r>
@@ -7050,12 +7050,12 @@
           <a:bodyPr vert="horz" wrap="square" anchor="t" lIns="91440" rIns="91440" tIns="45720" bIns="45720"/>
           <a:lstStyle/>
           <a:p>
-            <a:pPr algn="l">
-              <a:lnSpc>
-                <a:spcPct val="100000"/>
-              </a:lnSpc>
+            <a:pPr algn="l" marL="0" indent="0">
+              <a:spcBef>
+                <a:spcPts val="0"/>
+              </a:spcBef>
               <a:spcAft>
-                <a:spcPts val="400"/>
+                <a:spcPts val="200"/>
               </a:spcAft>
             </a:pPr>
             <a:r>
@@ -7072,12 +7072,12 @@
             </a:r>
           </a:p>
           <a:p>
-            <a:pPr algn="l">
-              <a:lnSpc>
-                <a:spcPct val="100000"/>
-              </a:lnSpc>
+            <a:pPr algn="l" marL="0" indent="0">
+              <a:spcBef>
+                <a:spcPts val="0"/>
+              </a:spcBef>
               <a:spcAft>
-                <a:spcPts val="400"/>
+                <a:spcPts val="200"/>
               </a:spcAft>
             </a:pPr>
             <a:r>
@@ -7138,12 +7138,12 @@
             </a:r>
           </a:p>
           <a:p>
-            <a:pPr algn="l">
-              <a:lnSpc>
-                <a:spcPct val="100000"/>
-              </a:lnSpc>
+            <a:pPr algn="l" marL="0" indent="0">
+              <a:spcBef>
+                <a:spcPts val="0"/>
+              </a:spcBef>
               <a:spcAft>
-                <a:spcPts val="400"/>
+                <a:spcPts val="200"/>
               </a:spcAft>
             </a:pPr>
             <a:r>
@@ -7202,12 +7202,12 @@
           <a:bodyPr vert="horz" wrap="square" anchor="t" lIns="91440" rIns="91440" tIns="45720" bIns="45720"/>
           <a:lstStyle/>
           <a:p>
-            <a:pPr algn="l">
-              <a:lnSpc>
-                <a:spcPct val="100000"/>
-              </a:lnSpc>
+            <a:pPr algn="l" marL="0" indent="0">
+              <a:spcBef>
+                <a:spcPts val="0"/>
+              </a:spcBef>
               <a:spcAft>
-                <a:spcPts val="333"/>
+                <a:spcPts val="167"/>
               </a:spcAft>
             </a:pPr>
             <a:r>
@@ -7281,12 +7281,12 @@
           <a:bodyPr vert="horz" wrap="square" anchor="t" lIns="91440" rIns="91440" tIns="45720" bIns="45720"/>
           <a:lstStyle/>
           <a:p>
-            <a:pPr algn="l">
-              <a:lnSpc>
-                <a:spcPct val="100000"/>
-              </a:lnSpc>
+            <a:pPr algn="l" marL="0" indent="0">
+              <a:spcBef>
+                <a:spcPts val="0"/>
+              </a:spcBef>
               <a:spcAft>
-                <a:spcPts val="400"/>
+                <a:spcPts val="200"/>
               </a:spcAft>
             </a:pPr>
             <a:r>
@@ -7303,12 +7303,12 @@
             </a:r>
           </a:p>
           <a:p>
-            <a:pPr algn="l">
-              <a:lnSpc>
-                <a:spcPct val="100000"/>
-              </a:lnSpc>
+            <a:pPr algn="l" marL="0" indent="0">
+              <a:spcBef>
+                <a:spcPts val="0"/>
+              </a:spcBef>
               <a:spcAft>
-                <a:spcPts val="400"/>
+                <a:spcPts val="200"/>
               </a:spcAft>
             </a:pPr>
             <a:r>
@@ -7347,12 +7347,12 @@
             </a:r>
           </a:p>
           <a:p>
-            <a:pPr algn="l">
-              <a:lnSpc>
-                <a:spcPct val="100000"/>
-              </a:lnSpc>
+            <a:pPr algn="l" marL="0" indent="0">
+              <a:spcBef>
+                <a:spcPts val="0"/>
+              </a:spcBef>
               <a:spcAft>
-                <a:spcPts val="400"/>
+                <a:spcPts val="200"/>
               </a:spcAft>
             </a:pPr>
             <a:r>
@@ -7391,12 +7391,12 @@
             </a:r>
           </a:p>
           <a:p>
-            <a:pPr algn="l">
-              <a:lnSpc>
-                <a:spcPct val="100000"/>
-              </a:lnSpc>
+            <a:pPr algn="l" marL="0" indent="0">
+              <a:spcBef>
+                <a:spcPts val="0"/>
+              </a:spcBef>
               <a:spcAft>
-                <a:spcPts val="400"/>
+                <a:spcPts val="200"/>
               </a:spcAft>
             </a:pPr>
             <a:r>
@@ -7435,12 +7435,12 @@
             </a:r>
           </a:p>
           <a:p>
-            <a:pPr algn="l">
-              <a:lnSpc>
-                <a:spcPct val="100000"/>
-              </a:lnSpc>
+            <a:pPr algn="l" marL="0" indent="0">
+              <a:spcBef>
+                <a:spcPts val="0"/>
+              </a:spcBef>
               <a:spcAft>
-                <a:spcPts val="400"/>
+                <a:spcPts val="200"/>
               </a:spcAft>
             </a:pPr>
             <a:r>
@@ -7479,12 +7479,12 @@
             </a:r>
           </a:p>
           <a:p>
-            <a:pPr algn="l">
-              <a:lnSpc>
-                <a:spcPct val="100000"/>
-              </a:lnSpc>
+            <a:pPr algn="l" marL="0" indent="0">
+              <a:spcBef>
+                <a:spcPts val="0"/>
+              </a:spcBef>
               <a:spcAft>
-                <a:spcPts val="400"/>
+                <a:spcPts val="200"/>
               </a:spcAft>
             </a:pPr>
             <a:r>
@@ -7501,12 +7501,12 @@
             </a:r>
           </a:p>
           <a:p>
-            <a:pPr algn="l">
-              <a:lnSpc>
-                <a:spcPct val="100000"/>
-              </a:lnSpc>
+            <a:pPr algn="l" marL="0" indent="0">
+              <a:spcBef>
+                <a:spcPts val="0"/>
+              </a:spcBef>
               <a:spcAft>
-                <a:spcPts val="400"/>
+                <a:spcPts val="200"/>
               </a:spcAft>
             </a:pPr>
             <a:r>
@@ -7543,12 +7543,12 @@
           <a:bodyPr vert="horz" wrap="square" anchor="t" lIns="91440" rIns="91440" tIns="45720" bIns="45720"/>
           <a:lstStyle/>
           <a:p>
-            <a:pPr algn="l">
-              <a:lnSpc>
-                <a:spcPct val="100000"/>
-              </a:lnSpc>
+            <a:pPr algn="l" marL="0" indent="0">
+              <a:spcBef>
+                <a:spcPts val="0"/>
+              </a:spcBef>
               <a:spcAft>
-                <a:spcPts val="333"/>
+                <a:spcPts val="167"/>
               </a:spcAft>
             </a:pPr>
             <a:r>
@@ -7622,12 +7622,12 @@
           <a:bodyPr vert="horz" wrap="square" anchor="t" lIns="91440" rIns="91440" tIns="45720" bIns="45720"/>
           <a:lstStyle/>
           <a:p>
-            <a:pPr algn="l">
-              <a:lnSpc>
-                <a:spcPct val="100000"/>
-              </a:lnSpc>
+            <a:pPr algn="l" marL="0" indent="0">
+              <a:spcBef>
+                <a:spcPts val="0"/>
+              </a:spcBef>
               <a:spcAft>
-                <a:spcPts val="400"/>
+                <a:spcPts val="200"/>
               </a:spcAft>
             </a:pPr>
             <a:r>
@@ -7644,12 +7644,12 @@
             </a:r>
           </a:p>
           <a:p>
-            <a:pPr algn="l">
-              <a:lnSpc>
-                <a:spcPct val="100000"/>
-              </a:lnSpc>
+            <a:pPr algn="l" marL="0" indent="0">
+              <a:spcBef>
+                <a:spcPts val="0"/>
+              </a:spcBef>
               <a:spcAft>
-                <a:spcPts val="400"/>
+                <a:spcPts val="200"/>
               </a:spcAft>
             </a:pPr>
             <a:r>
@@ -7666,12 +7666,12 @@
             </a:r>
           </a:p>
           <a:p>
-            <a:pPr algn="l">
-              <a:lnSpc>
-                <a:spcPct val="100000"/>
-              </a:lnSpc>
+            <a:pPr algn="l" marL="0" indent="0">
+              <a:spcBef>
+                <a:spcPts val="0"/>
+              </a:spcBef>
               <a:spcAft>
-                <a:spcPts val="400"/>
+                <a:spcPts val="200"/>
               </a:spcAft>
             </a:pPr>
             <a:r>
@@ -7710,12 +7710,12 @@
             </a:r>
           </a:p>
           <a:p>
-            <a:pPr algn="l">
-              <a:lnSpc>
-                <a:spcPct val="100000"/>
-              </a:lnSpc>
+            <a:pPr algn="l" marL="0" indent="0">
+              <a:spcBef>
+                <a:spcPts val="0"/>
+              </a:spcBef>
               <a:spcAft>
-                <a:spcPts val="400"/>
+                <a:spcPts val="200"/>
               </a:spcAft>
             </a:pPr>
             <a:r>
@@ -7732,12 +7732,12 @@
             </a:r>
           </a:p>
           <a:p>
-            <a:pPr algn="l">
-              <a:lnSpc>
-                <a:spcPct val="100000"/>
-              </a:lnSpc>
+            <a:pPr algn="l" marL="0" indent="0">
+              <a:spcBef>
+                <a:spcPts val="0"/>
+              </a:spcBef>
               <a:spcAft>
-                <a:spcPts val="400"/>
+                <a:spcPts val="200"/>
               </a:spcAft>
             </a:pPr>
             <a:r>
@@ -7798,12 +7798,12 @@
             </a:r>
           </a:p>
           <a:p>
-            <a:pPr algn="l">
-              <a:lnSpc>
-                <a:spcPct val="100000"/>
-              </a:lnSpc>
+            <a:pPr algn="l" marL="0" indent="0">
+              <a:spcBef>
+                <a:spcPts val="0"/>
+              </a:spcBef>
               <a:spcAft>
-                <a:spcPts val="400"/>
+                <a:spcPts val="200"/>
               </a:spcAft>
             </a:pPr>
             <a:r>
@@ -7842,12 +7842,12 @@
             </a:r>
           </a:p>
           <a:p>
-            <a:pPr algn="l">
-              <a:lnSpc>
-                <a:spcPct val="100000"/>
-              </a:lnSpc>
+            <a:pPr algn="l" marL="0" indent="0">
+              <a:spcBef>
+                <a:spcPts val="0"/>
+              </a:spcBef>
               <a:spcAft>
-                <a:spcPts val="400"/>
+                <a:spcPts val="200"/>
               </a:spcAft>
             </a:pPr>
             <a:r>
@@ -7884,12 +7884,12 @@
           <a:bodyPr vert="horz" wrap="square" anchor="t" lIns="91440" rIns="91440" tIns="45720" bIns="45720"/>
           <a:lstStyle/>
           <a:p>
-            <a:pPr algn="l">
-              <a:lnSpc>
-                <a:spcPct val="100000"/>
-              </a:lnSpc>
+            <a:pPr algn="l" marL="0" indent="0">
+              <a:spcBef>
+                <a:spcPts val="0"/>
+              </a:spcBef>
               <a:spcAft>
-                <a:spcPts val="333"/>
+                <a:spcPts val="167"/>
               </a:spcAft>
             </a:pPr>
             <a:r>
@@ -7963,12 +7963,12 @@
           <a:bodyPr vert="horz" wrap="square" anchor="t" lIns="91440" rIns="91440" tIns="45720" bIns="45720"/>
           <a:lstStyle/>
           <a:p>
-            <a:pPr algn="l">
-              <a:lnSpc>
-                <a:spcPct val="100000"/>
-              </a:lnSpc>
+            <a:pPr algn="l" marL="0" indent="0">
+              <a:spcBef>
+                <a:spcPts val="0"/>
+              </a:spcBef>
               <a:spcAft>
-                <a:spcPts val="400"/>
+                <a:spcPts val="200"/>
               </a:spcAft>
             </a:pPr>
             <a:r>
@@ -7985,12 +7985,12 @@
             </a:r>
           </a:p>
           <a:p>
-            <a:pPr algn="l">
-              <a:lnSpc>
-                <a:spcPct val="100000"/>
-              </a:lnSpc>
+            <a:pPr algn="l" marL="0" indent="0">
+              <a:spcBef>
+                <a:spcPts val="0"/>
+              </a:spcBef>
               <a:spcAft>
-                <a:spcPts val="400"/>
+                <a:spcPts val="200"/>
               </a:spcAft>
             </a:pPr>
             <a:r>
@@ -8051,12 +8051,12 @@
             </a:r>
           </a:p>
           <a:p>
-            <a:pPr algn="l">
-              <a:lnSpc>
-                <a:spcPct val="100000"/>
-              </a:lnSpc>
+            <a:pPr algn="l" marL="0" indent="0">
+              <a:spcBef>
+                <a:spcPts val="0"/>
+              </a:spcBef>
               <a:spcAft>
-                <a:spcPts val="400"/>
+                <a:spcPts val="200"/>
               </a:spcAft>
             </a:pPr>
             <a:r>
@@ -8117,12 +8117,12 @@
             </a:r>
           </a:p>
           <a:p>
-            <a:pPr algn="l">
-              <a:lnSpc>
-                <a:spcPct val="100000"/>
-              </a:lnSpc>
+            <a:pPr algn="l" marL="0" indent="0">
+              <a:spcBef>
+                <a:spcPts val="0"/>
+              </a:spcBef>
               <a:spcAft>
-                <a:spcPts val="400"/>
+                <a:spcPts val="200"/>
               </a:spcAft>
             </a:pPr>
             <a:r>
@@ -8181,12 +8181,12 @@
           <a:bodyPr vert="horz" wrap="square" anchor="t" lIns="91440" rIns="91440" tIns="45720" bIns="45720"/>
           <a:lstStyle/>
           <a:p>
-            <a:pPr algn="l">
-              <a:lnSpc>
-                <a:spcPct val="100000"/>
-              </a:lnSpc>
+            <a:pPr algn="l" marL="0" indent="0">
+              <a:spcBef>
+                <a:spcPts val="0"/>
+              </a:spcBef>
               <a:spcAft>
-                <a:spcPts val="333"/>
+                <a:spcPts val="167"/>
               </a:spcAft>
             </a:pPr>
             <a:r>
@@ -8260,12 +8260,12 @@
           <a:bodyPr vert="horz" wrap="square" anchor="t" lIns="91440" rIns="91440" tIns="45720" bIns="45720"/>
           <a:lstStyle/>
           <a:p>
-            <a:pPr algn="l">
-              <a:lnSpc>
-                <a:spcPct val="100000"/>
-              </a:lnSpc>
+            <a:pPr algn="l" marL="0" indent="0">
+              <a:spcBef>
+                <a:spcPts val="0"/>
+              </a:spcBef>
               <a:spcAft>
-                <a:spcPts val="400"/>
+                <a:spcPts val="200"/>
               </a:spcAft>
             </a:pPr>
             <a:r>
@@ -8282,12 +8282,12 @@
             </a:r>
           </a:p>
           <a:p>
-            <a:pPr algn="l">
-              <a:lnSpc>
-                <a:spcPct val="100000"/>
-              </a:lnSpc>
+            <a:pPr algn="l" marL="0" indent="0">
+              <a:spcBef>
+                <a:spcPts val="0"/>
+              </a:spcBef>
               <a:spcAft>
-                <a:spcPts val="400"/>
+                <a:spcPts val="200"/>
               </a:spcAft>
             </a:pPr>
             <a:r>
@@ -8348,12 +8348,12 @@
             </a:r>
           </a:p>
           <a:p>
-            <a:pPr algn="l">
-              <a:lnSpc>
-                <a:spcPct val="100000"/>
-              </a:lnSpc>
+            <a:pPr algn="l" marL="0" indent="0">
+              <a:spcBef>
+                <a:spcPts val="0"/>
+              </a:spcBef>
               <a:spcAft>
-                <a:spcPts val="400"/>
+                <a:spcPts val="200"/>
               </a:spcAft>
             </a:pPr>
             <a:r>
@@ -8392,12 +8392,12 @@
             </a:r>
           </a:p>
           <a:p>
-            <a:pPr algn="l">
-              <a:lnSpc>
-                <a:spcPct val="100000"/>
-              </a:lnSpc>
+            <a:pPr algn="l" marL="0" indent="0">
+              <a:spcBef>
+                <a:spcPts val="0"/>
+              </a:spcBef>
               <a:spcAft>
-                <a:spcPts val="400"/>
+                <a:spcPts val="200"/>
               </a:spcAft>
             </a:pPr>
             <a:r>
@@ -8456,12 +8456,12 @@
           <a:bodyPr vert="horz" wrap="square" anchor="t" lIns="91440" rIns="91440" tIns="45720" bIns="45720"/>
           <a:lstStyle/>
           <a:p>
-            <a:pPr algn="l">
-              <a:lnSpc>
-                <a:spcPct val="100000"/>
-              </a:lnSpc>
+            <a:pPr algn="l" marL="0" indent="0">
+              <a:spcBef>
+                <a:spcPts val="0"/>
+              </a:spcBef>
               <a:spcAft>
-                <a:spcPts val="333"/>
+                <a:spcPts val="167"/>
               </a:spcAft>
             </a:pPr>
             <a:r>
@@ -8535,12 +8535,12 @@
           <a:bodyPr vert="horz" wrap="square" anchor="t" lIns="91440" rIns="91440" tIns="45720" bIns="45720"/>
           <a:lstStyle/>
           <a:p>
-            <a:pPr algn="l">
-              <a:lnSpc>
-                <a:spcPct val="100000"/>
-              </a:lnSpc>
+            <a:pPr algn="l" marL="0" indent="0">
+              <a:spcBef>
+                <a:spcPts val="0"/>
+              </a:spcBef>
               <a:spcAft>
-                <a:spcPts val="400"/>
+                <a:spcPts val="200"/>
               </a:spcAft>
             </a:pPr>
             <a:r>
@@ -8601,12 +8601,12 @@
             </a:r>
           </a:p>
           <a:p>
-            <a:pPr algn="l">
-              <a:lnSpc>
-                <a:spcPct val="100000"/>
-              </a:lnSpc>
+            <a:pPr algn="l" marL="0" indent="0">
+              <a:spcBef>
+                <a:spcPts val="0"/>
+              </a:spcBef>
               <a:spcAft>
-                <a:spcPts val="400"/>
+                <a:spcPts val="200"/>
               </a:spcAft>
             </a:pPr>
             <a:r>
@@ -8623,12 +8623,12 @@
             </a:r>
           </a:p>
           <a:p>
-            <a:pPr algn="l">
-              <a:lnSpc>
-                <a:spcPct val="100000"/>
-              </a:lnSpc>
+            <a:pPr algn="l" marL="0" indent="0">
+              <a:spcBef>
+                <a:spcPts val="0"/>
+              </a:spcBef>
               <a:spcAft>
-                <a:spcPts val="400"/>
+                <a:spcPts val="200"/>
               </a:spcAft>
             </a:pPr>
             <a:r>
@@ -8667,12 +8667,12 @@
             </a:r>
           </a:p>
           <a:p>
-            <a:pPr algn="l">
-              <a:lnSpc>
-                <a:spcPct val="100000"/>
-              </a:lnSpc>
+            <a:pPr algn="l" marL="0" indent="0">
+              <a:spcBef>
+                <a:spcPts val="0"/>
+              </a:spcBef>
               <a:spcAft>
-                <a:spcPts val="400"/>
+                <a:spcPts val="200"/>
               </a:spcAft>
             </a:pPr>
             <a:r>
@@ -8689,12 +8689,12 @@
             </a:r>
           </a:p>
           <a:p>
-            <a:pPr algn="l">
-              <a:lnSpc>
-                <a:spcPct val="100000"/>
-              </a:lnSpc>
+            <a:pPr algn="l" marL="0" indent="0">
+              <a:spcBef>
+                <a:spcPts val="0"/>
+              </a:spcBef>
               <a:spcAft>
-                <a:spcPts val="400"/>
+                <a:spcPts val="200"/>
               </a:spcAft>
             </a:pPr>
             <a:r>
@@ -8731,12 +8731,12 @@
           <a:bodyPr vert="horz" wrap="square" anchor="t" lIns="91440" rIns="91440" tIns="45720" bIns="45720"/>
           <a:lstStyle/>
           <a:p>
-            <a:pPr algn="l">
-              <a:lnSpc>
-                <a:spcPct val="100000"/>
-              </a:lnSpc>
+            <a:pPr algn="l" marL="0" indent="0">
+              <a:spcBef>
+                <a:spcPts val="0"/>
+              </a:spcBef>
               <a:spcAft>
-                <a:spcPts val="333"/>
+                <a:spcPts val="167"/>
               </a:spcAft>
             </a:pPr>
             <a:r>
@@ -8810,12 +8810,12 @@
           <a:bodyPr vert="horz" wrap="square" anchor="t" lIns="91440" rIns="91440" tIns="45720" bIns="45720"/>
           <a:lstStyle/>
           <a:p>
-            <a:pPr algn="l">
-              <a:lnSpc>
-                <a:spcPct val="100000"/>
-              </a:lnSpc>
+            <a:pPr algn="l" marL="0" indent="0">
+              <a:spcBef>
+                <a:spcPts val="0"/>
+              </a:spcBef>
               <a:spcAft>
-                <a:spcPts val="400"/>
+                <a:spcPts val="200"/>
               </a:spcAft>
             </a:pPr>
             <a:r>
@@ -8832,12 +8832,12 @@
             </a:r>
           </a:p>
           <a:p>
-            <a:pPr algn="l">
-              <a:lnSpc>
-                <a:spcPct val="100000"/>
-              </a:lnSpc>
+            <a:pPr algn="l" marL="0" indent="0">
+              <a:spcBef>
+                <a:spcPts val="0"/>
+              </a:spcBef>
               <a:spcAft>
-                <a:spcPts val="400"/>
+                <a:spcPts val="200"/>
               </a:spcAft>
             </a:pPr>
             <a:r>
@@ -8854,12 +8854,12 @@
             </a:r>
           </a:p>
           <a:p>
-            <a:pPr algn="l">
-              <a:lnSpc>
-                <a:spcPct val="100000"/>
-              </a:lnSpc>
+            <a:pPr algn="l" marL="0" indent="0">
+              <a:spcBef>
+                <a:spcPts val="0"/>
+              </a:spcBef>
               <a:spcAft>
-                <a:spcPts val="400"/>
+                <a:spcPts val="200"/>
               </a:spcAft>
             </a:pPr>
             <a:r>
@@ -8898,12 +8898,12 @@
             </a:r>
           </a:p>
           <a:p>
-            <a:pPr algn="l">
-              <a:lnSpc>
-                <a:spcPct val="100000"/>
-              </a:lnSpc>
+            <a:pPr algn="l" marL="0" indent="0">
+              <a:spcBef>
+                <a:spcPts val="0"/>
+              </a:spcBef>
               <a:spcAft>
-                <a:spcPts val="400"/>
+                <a:spcPts val="200"/>
               </a:spcAft>
             </a:pPr>
             <a:r>
@@ -8986,12 +8986,12 @@
             </a:r>
           </a:p>
           <a:p>
-            <a:pPr algn="l">
-              <a:lnSpc>
-                <a:spcPct val="100000"/>
-              </a:lnSpc>
+            <a:pPr algn="l" marL="0" indent="0">
+              <a:spcBef>
+                <a:spcPts val="0"/>
+              </a:spcBef>
               <a:spcAft>
-                <a:spcPts val="400"/>
+                <a:spcPts val="200"/>
               </a:spcAft>
             </a:pPr>
             <a:r>
@@ -9030,12 +9030,12 @@
             </a:r>
           </a:p>
           <a:p>
-            <a:pPr algn="l">
-              <a:lnSpc>
-                <a:spcPct val="100000"/>
-              </a:lnSpc>
+            <a:pPr algn="l" marL="0" indent="0">
+              <a:spcBef>
+                <a:spcPts val="0"/>
+              </a:spcBef>
               <a:spcAft>
-                <a:spcPts val="400"/>
+                <a:spcPts val="200"/>
               </a:spcAft>
             </a:pPr>
             <a:r>
@@ -9072,12 +9072,12 @@
           <a:bodyPr vert="horz" wrap="square" anchor="t" lIns="91440" rIns="91440" tIns="45720" bIns="45720"/>
           <a:lstStyle/>
           <a:p>
-            <a:pPr algn="l">
-              <a:lnSpc>
-                <a:spcPct val="100000"/>
-              </a:lnSpc>
+            <a:pPr algn="l" marL="0" indent="0">
+              <a:spcBef>
+                <a:spcPts val="0"/>
+              </a:spcBef>
               <a:spcAft>
-                <a:spcPts val="333"/>
+                <a:spcPts val="167"/>
               </a:spcAft>
             </a:pPr>
             <a:r>
@@ -9151,12 +9151,12 @@
           <a:bodyPr vert="horz" wrap="square" anchor="t" lIns="91440" rIns="91440" tIns="45720" bIns="45720"/>
           <a:lstStyle/>
           <a:p>
-            <a:pPr algn="l">
-              <a:lnSpc>
-                <a:spcPct val="100000"/>
-              </a:lnSpc>
+            <a:pPr algn="l" marL="0" indent="0">
+              <a:spcBef>
+                <a:spcPts val="0"/>
+              </a:spcBef>
               <a:spcAft>
-                <a:spcPts val="400"/>
+                <a:spcPts val="200"/>
               </a:spcAft>
             </a:pPr>
             <a:r>
@@ -9217,12 +9217,12 @@
             </a:r>
           </a:p>
           <a:p>
-            <a:pPr algn="l">
-              <a:lnSpc>
-                <a:spcPct val="100000"/>
-              </a:lnSpc>
+            <a:pPr algn="l" marL="0" indent="0">
+              <a:spcBef>
+                <a:spcPts val="0"/>
+              </a:spcBef>
               <a:spcAft>
-                <a:spcPts val="400"/>
+                <a:spcPts val="200"/>
               </a:spcAft>
             </a:pPr>
             <a:r>
@@ -9261,12 +9261,12 @@
             </a:r>
           </a:p>
           <a:p>
-            <a:pPr algn="l">
-              <a:lnSpc>
-                <a:spcPct val="100000"/>
-              </a:lnSpc>
+            <a:pPr algn="l" marL="0" indent="0">
+              <a:spcBef>
+                <a:spcPts val="0"/>
+              </a:spcBef>
               <a:spcAft>
-                <a:spcPts val="400"/>
+                <a:spcPts val="200"/>
               </a:spcAft>
             </a:pPr>
             <a:r>
@@ -9283,12 +9283,12 @@
             </a:r>
           </a:p>
           <a:p>
-            <a:pPr algn="l">
-              <a:lnSpc>
-                <a:spcPct val="100000"/>
-              </a:lnSpc>
+            <a:pPr algn="l" marL="0" indent="0">
+              <a:spcBef>
+                <a:spcPts val="0"/>
+              </a:spcBef>
               <a:spcAft>
-                <a:spcPts val="400"/>
+                <a:spcPts val="200"/>
               </a:spcAft>
             </a:pPr>
             <a:r>
@@ -9305,12 +9305,12 @@
             </a:r>
           </a:p>
           <a:p>
-            <a:pPr algn="l">
-              <a:lnSpc>
-                <a:spcPct val="100000"/>
-              </a:lnSpc>
+            <a:pPr algn="l" marL="0" indent="0">
+              <a:spcBef>
+                <a:spcPts val="0"/>
+              </a:spcBef>
               <a:spcAft>
-                <a:spcPts val="400"/>
+                <a:spcPts val="200"/>
               </a:spcAft>
             </a:pPr>
             <a:r>
@@ -9327,12 +9327,12 @@
             </a:r>
           </a:p>
           <a:p>
-            <a:pPr algn="l">
-              <a:lnSpc>
-                <a:spcPct val="100000"/>
-              </a:lnSpc>
+            <a:pPr algn="l" marL="0" indent="0">
+              <a:spcBef>
+                <a:spcPts val="0"/>
+              </a:spcBef>
               <a:spcAft>
-                <a:spcPts val="400"/>
+                <a:spcPts val="200"/>
               </a:spcAft>
             </a:pPr>
             <a:r>
@@ -9369,12 +9369,12 @@
           <a:bodyPr vert="horz" wrap="square" anchor="t" lIns="91440" rIns="91440" tIns="45720" bIns="45720"/>
           <a:lstStyle/>
           <a:p>
-            <a:pPr algn="l">
-              <a:lnSpc>
-                <a:spcPct val="100000"/>
-              </a:lnSpc>
+            <a:pPr algn="l" marL="0" indent="0">
+              <a:spcBef>
+                <a:spcPts val="0"/>
+              </a:spcBef>
               <a:spcAft>
-                <a:spcPts val="333"/>
+                <a:spcPts val="167"/>
               </a:spcAft>
             </a:pPr>
             <a:r>
@@ -9448,12 +9448,12 @@
           <a:bodyPr vert="horz" wrap="square" anchor="t" lIns="91440" rIns="91440" tIns="45720" bIns="45720"/>
           <a:lstStyle/>
           <a:p>
-            <a:pPr algn="l">
-              <a:lnSpc>
-                <a:spcPct val="100000"/>
-              </a:lnSpc>
+            <a:pPr algn="l" marL="0" indent="0">
+              <a:spcBef>
+                <a:spcPts val="0"/>
+              </a:spcBef>
               <a:spcAft>
-                <a:spcPts val="400"/>
+                <a:spcPts val="200"/>
               </a:spcAft>
             </a:pPr>
             <a:r>
@@ -9514,12 +9514,12 @@
             </a:r>
           </a:p>
           <a:p>
-            <a:pPr algn="l">
-              <a:lnSpc>
-                <a:spcPct val="100000"/>
-              </a:lnSpc>
+            <a:pPr algn="l" marL="0" indent="0">
+              <a:spcBef>
+                <a:spcPts val="0"/>
+              </a:spcBef>
               <a:spcAft>
-                <a:spcPts val="400"/>
+                <a:spcPts val="200"/>
               </a:spcAft>
             </a:pPr>
             <a:r>
@@ -9536,12 +9536,12 @@
             </a:r>
           </a:p>
           <a:p>
-            <a:pPr algn="l">
-              <a:lnSpc>
-                <a:spcPct val="100000"/>
-              </a:lnSpc>
+            <a:pPr algn="l" marL="0" indent="0">
+              <a:spcBef>
+                <a:spcPts val="0"/>
+              </a:spcBef>
               <a:spcAft>
-                <a:spcPts val="400"/>
+                <a:spcPts val="200"/>
               </a:spcAft>
             </a:pPr>
             <a:r>
@@ -9558,12 +9558,12 @@
             </a:r>
           </a:p>
           <a:p>
-            <a:pPr algn="l">
-              <a:lnSpc>
-                <a:spcPct val="100000"/>
-              </a:lnSpc>
+            <a:pPr algn="l" marL="0" indent="0">
+              <a:spcBef>
+                <a:spcPts val="0"/>
+              </a:spcBef>
               <a:spcAft>
-                <a:spcPts val="400"/>
+                <a:spcPts val="200"/>
               </a:spcAft>
             </a:pPr>
             <a:r>
@@ -9600,12 +9600,12 @@
           <a:bodyPr vert="horz" wrap="square" anchor="t" lIns="91440" rIns="91440" tIns="45720" bIns="45720"/>
           <a:lstStyle/>
           <a:p>
-            <a:pPr algn="l">
-              <a:lnSpc>
-                <a:spcPct val="100000"/>
-              </a:lnSpc>
+            <a:pPr algn="l" marL="0" indent="0">
+              <a:spcBef>
+                <a:spcPts val="0"/>
+              </a:spcBef>
               <a:spcAft>
-                <a:spcPts val="333"/>
+                <a:spcPts val="167"/>
               </a:spcAft>
             </a:pPr>
             <a:r>

--- a/第四週(10-01)/第四週_第1節_簡報.pptx
+++ b/第四週(10-01)/第四週_第1節_簡報.pptx
@@ -8575,7 +8575,7 @@
                 <a:ea typeface="Arial Unicode MS"/>
                 <a:cs typeface="Arial Unicode MS"/>
               </a:rPr>
-              <a:t>第一段。模擬器上那三個滑桿，在真車的規格表上叫什麼名字。
+              <a:t>第一段。
 </a:t>
             </a:r>
           </a:p>
@@ -8597,51 +8597,7 @@
                 <a:ea typeface="Arial Unicode MS"/>
                 <a:cs typeface="Arial Unicode MS"/>
               </a:rPr>
-              <a:t>先交代一件事：</a:t>
-            </a:r>
-            <a:r>
-              <a:rPr sz="1200" b="1" lang="zh-TW" dirty="0">
-                <a:solidFill>
-                  <a:srgbClr val="000000"/>
-                </a:solidFill>
-                <a:latin typeface="Arial Unicode MS"/>
-                <a:ea typeface="Arial Unicode MS"/>
-                <a:cs typeface="Arial Unicode MS"/>
-              </a:rPr>
-              <a:t>這幾條射線是上週那個光達的簡化版</a:t>
-            </a:r>
-            <a:r>
-              <a:rPr sz="1200" lang="zh-TW" dirty="0">
-                <a:solidFill>
-                  <a:srgbClr val="000000"/>
-                </a:solidFill>
-                <a:latin typeface="Arial Unicode MS"/>
-                <a:ea typeface="Arial Unicode MS"/>
-                <a:cs typeface="Arial Unicode MS"/>
-              </a:rPr>
-              <a:t>——真光達上下分好幾層、一層打幾百個點，我們只留</a:t>
-            </a:r>
-            <a:r>
-              <a:rPr sz="1200" b="1" lang="zh-TW" dirty="0">
-                <a:solidFill>
-                  <a:srgbClr val="000000"/>
-                </a:solidFill>
-                <a:latin typeface="Arial Unicode MS"/>
-                <a:ea typeface="Arial Unicode MS"/>
-                <a:cs typeface="Arial Unicode MS"/>
-              </a:rPr>
-              <a:t>一層、幾條</a:t>
-            </a:r>
-            <a:r>
-              <a:rPr sz="1200" lang="zh-TW" dirty="0">
-                <a:solidFill>
-                  <a:srgbClr val="000000"/>
-                </a:solidFill>
-                <a:latin typeface="Arial Unicode MS"/>
-                <a:ea typeface="Arial Unicode MS"/>
-                <a:cs typeface="Arial Unicode MS"/>
-              </a:rPr>
-              <a:t>，為的是讓各位拉得動、算得出來。
+              <a:t>模擬器上那三個滑桿，在真車的規格表上叫什麼名字？
 </a:t>
             </a:r>
           </a:p>
@@ -8663,51 +8619,7 @@
                 <a:ea typeface="Arial Unicode MS"/>
                 <a:cs typeface="Arial Unicode MS"/>
               </a:rPr>
-              <a:t>免得誤會，還要講清楚：</a:t>
-            </a:r>
-            <a:r>
-              <a:rPr sz="1200" b="1" lang="zh-TW" dirty="0">
-                <a:solidFill>
-                  <a:srgbClr val="000000"/>
-                </a:solidFill>
-                <a:latin typeface="Arial Unicode MS"/>
-                <a:ea typeface="Arial Unicode MS"/>
-                <a:cs typeface="Arial Unicode MS"/>
-              </a:rPr>
-              <a:t>接下來問的那三件事，不是光達專屬的。</a:t>
-            </a:r>
-            <a:r>
-              <a:rPr sz="1200" lang="zh-TW" dirty="0">
-                <a:solidFill>
-                  <a:srgbClr val="000000"/>
-                </a:solidFill>
-                <a:latin typeface="Arial Unicode MS"/>
-                <a:ea typeface="Arial Unicode MS"/>
-                <a:cs typeface="Arial Unicode MS"/>
-              </a:rPr>
-              <a:t>看多遠、看多寬、看多細——相機、雷達也都要回答，只是規格表上名字不一樣。今天學的不是「光達怎麼看」，是「</a:t>
-            </a:r>
-            <a:r>
-              <a:rPr sz="1200" b="1" lang="zh-TW" dirty="0">
-                <a:solidFill>
-                  <a:srgbClr val="000000"/>
-                </a:solidFill>
-                <a:latin typeface="Arial Unicode MS"/>
-                <a:ea typeface="Arial Unicode MS"/>
-                <a:cs typeface="Arial Unicode MS"/>
-              </a:rPr>
-              <a:t>任何感測器都要交代的三個數字</a:t>
-            </a:r>
-            <a:r>
-              <a:rPr sz="1200" lang="zh-TW" dirty="0">
-                <a:solidFill>
-                  <a:srgbClr val="000000"/>
-                </a:solidFill>
-                <a:latin typeface="Arial Unicode MS"/>
-                <a:ea typeface="Arial Unicode MS"/>
-                <a:cs typeface="Arial Unicode MS"/>
-              </a:rPr>
-              <a:t>」。
+              <a:t>先講一件事，免得等一下誤會。
 </a:t>
             </a:r>
           </a:p>
@@ -8721,6 +8633,17 @@
               </a:spcAft>
             </a:pPr>
             <a:r>
+              <a:rPr sz="1200" b="1" lang="zh-TW" dirty="0">
+                <a:solidFill>
+                  <a:srgbClr val="000000"/>
+                </a:solidFill>
+                <a:latin typeface="Arial Unicode MS"/>
+                <a:ea typeface="Arial Unicode MS"/>
+                <a:cs typeface="Arial Unicode MS"/>
+              </a:rPr>
+              <a:t>那幾條射線，是光達的簡化版。</a:t>
+            </a:r>
+            <a:r>
               <a:rPr sz="1200" lang="zh-TW" dirty="0">
                 <a:solidFill>
                   <a:srgbClr val="000000"/>
@@ -8729,8 +8652,19 @@
                 <a:ea typeface="Arial Unicode MS"/>
                 <a:cs typeface="Arial Unicode MS"/>
               </a:rPr>
-              <a:t>為什麼先挑光達？因為它的規格最乾淨——三個數字都拉得動、算得出來。相機和雷達沒這麼直白，要等第三章，也就是</a:t>
-            </a:r>
+              <a:t>真的光達上下分好幾層，一層打幾百個點。我們只留一層、幾條，是為了讓各位拉得動。
+</a:t>
+            </a:r>
+          </a:p>
+          <a:p>
+            <a:pPr algn="l" marL="0" indent="0">
+              <a:spcBef>
+                <a:spcPts val="0"/>
+              </a:spcBef>
+              <a:spcAft>
+                <a:spcPts val="200"/>
+              </a:spcAft>
+            </a:pPr>
             <a:r>
               <a:rPr sz="1200" b="1" lang="zh-TW" dirty="0">
                 <a:solidFill>
@@ -8740,7 +8674,7 @@
                 <a:ea typeface="Arial Unicode MS"/>
                 <a:cs typeface="Arial Unicode MS"/>
               </a:rPr>
-              <a:t>下週開始的第五到第七週</a:t>
+              <a:t>但接下來問的三件事，不是光達專屬的。</a:t>
             </a:r>
             <a:r>
               <a:rPr sz="1200" lang="zh-TW" dirty="0">
@@ -8751,7 +8685,73 @@
                 <a:ea typeface="Arial Unicode MS"/>
                 <a:cs typeface="Arial Unicode MS"/>
               </a:rPr>
-              <a:t>。</a:t>
+              <a:t>看多遠、看多寬、看多細——相機要回答，雷達也要回答，只是名字不一樣。
+</a:t>
+            </a:r>
+          </a:p>
+          <a:p>
+            <a:pPr algn="l" marL="0" indent="0">
+              <a:spcBef>
+                <a:spcPts val="0"/>
+              </a:spcBef>
+              <a:spcAft>
+                <a:spcPts val="200"/>
+              </a:spcAft>
+            </a:pPr>
+            <a:r>
+              <a:rPr sz="1200" lang="zh-TW" dirty="0">
+                <a:solidFill>
+                  <a:srgbClr val="000000"/>
+                </a:solidFill>
+                <a:latin typeface="Arial Unicode MS"/>
+                <a:ea typeface="Arial Unicode MS"/>
+                <a:cs typeface="Arial Unicode MS"/>
+              </a:rPr>
+              <a:t>所以今天學的不是「光達怎麼看」，是</a:t>
+            </a:r>
+            <a:r>
+              <a:rPr sz="1200" b="1" lang="zh-TW" dirty="0">
+                <a:solidFill>
+                  <a:srgbClr val="000000"/>
+                </a:solidFill>
+                <a:latin typeface="Arial Unicode MS"/>
+                <a:ea typeface="Arial Unicode MS"/>
+                <a:cs typeface="Arial Unicode MS"/>
+              </a:rPr>
+              <a:t>任何感測器都要交代的三個數字</a:t>
+            </a:r>
+            <a:r>
+              <a:rPr sz="1200" lang="zh-TW" dirty="0">
+                <a:solidFill>
+                  <a:srgbClr val="000000"/>
+                </a:solidFill>
+                <a:latin typeface="Arial Unicode MS"/>
+                <a:ea typeface="Arial Unicode MS"/>
+                <a:cs typeface="Arial Unicode MS"/>
+              </a:rPr>
+              <a:t>。
+</a:t>
+            </a:r>
+          </a:p>
+          <a:p>
+            <a:pPr algn="l" marL="0" indent="0">
+              <a:spcBef>
+                <a:spcPts val="0"/>
+              </a:spcBef>
+              <a:spcAft>
+                <a:spcPts val="200"/>
+              </a:spcAft>
+            </a:pPr>
+            <a:r>
+              <a:rPr sz="1200" lang="zh-TW" dirty="0">
+                <a:solidFill>
+                  <a:srgbClr val="000000"/>
+                </a:solidFill>
+                <a:latin typeface="Arial Unicode MS"/>
+                <a:ea typeface="Arial Unicode MS"/>
+                <a:cs typeface="Arial Unicode MS"/>
+              </a:rPr>
+              <a:t>那為什麼先挑光達？因為它最乾淨——三個數字都算得出來。相機和雷達沒這麼直白，要等第三章，下週開始。</a:t>
             </a:r>
           </a:p>
         </p:txBody>

--- a/第四週(10-01)/第四週_第1節_簡報.pptx
+++ b/第四週(10-01)/第四週_第1節_簡報.pptx
@@ -5,7 +5,7 @@
     <p:sldMasterId id="2147483648" r:id="rId1"/>
   </p:sldMasterIdLst>
   <p:notesMasterIdLst>
-    <p:notesMasterId r:id="rId32"/>
+    <p:notesMasterId r:id="rId34"/>
   </p:notesMasterIdLst>
   <p:sldIdLst>
     <p:sldId id="256" r:id="rId2"/>
@@ -38,6 +38,8 @@
     <p:sldId id="283" r:id="rId29"/>
     <p:sldId id="284" r:id="rId30"/>
     <p:sldId id="285" r:id="rId31"/>
+    <p:sldId id="286" r:id="rId32"/>
+    <p:sldId id="287" r:id="rId33"/>
   </p:sldIdLst>
   <p:sldSz cx="9144000" cy="5143500"/>
   <p:notesSz cx="7560000" cy="10692000"/>
@@ -5429,29 +5431,7 @@
                 <a:ea typeface="Arial Unicode MS"/>
                 <a:cs typeface="Arial Unicode MS"/>
               </a:rPr>
-              <a:t>第二種：</a:t>
-            </a:r>
-            <a:r>
-              <a:rPr sz="1200" b="1" lang="zh-TW" dirty="0">
-                <a:solidFill>
-                  <a:srgbClr val="000000"/>
-                </a:solidFill>
-                <a:latin typeface="Arial Unicode MS"/>
-                <a:ea typeface="Arial Unicode MS"/>
-                <a:cs typeface="Arial Unicode MS"/>
-              </a:rPr>
-              <a:t>行為落差</a:t>
-            </a:r>
-            <a:r>
-              <a:rPr sz="1200" lang="zh-TW" dirty="0">
-                <a:solidFill>
-                  <a:srgbClr val="000000"/>
-                </a:solidFill>
-                <a:latin typeface="Arial Unicode MS"/>
-                <a:ea typeface="Arial Unicode MS"/>
-                <a:cs typeface="Arial Unicode MS"/>
-              </a:rPr>
-              <a:t>。這一種對各位來說最有感覺。
+              <a:t>如果進度還有餘裕，這裡有一支影片，一分五十二秒，NVIDIA 官方的。
 </a:t>
             </a:r>
           </a:p>
@@ -5473,7 +5453,51 @@
                 <a:ea typeface="Arial Unicode MS"/>
                 <a:cs typeface="Arial Unicode MS"/>
               </a:rPr>
-              <a:t>模擬裡的車在做什麼？待在車道中間、跟前車保持安全距離、要變換車道之前先打方向燈。
+              <a:t>先說它在演什麼。NVIDIA 有一套自駕車的模擬器叫 </a:t>
+            </a:r>
+            <a:r>
+              <a:rPr sz="1200" b="1" lang="zh-TW" dirty="0">
+                <a:solidFill>
+                  <a:srgbClr val="000000"/>
+                </a:solidFill>
+                <a:latin typeface="Arial Unicode MS"/>
+                <a:ea typeface="Arial Unicode MS"/>
+                <a:cs typeface="Arial Unicode MS"/>
+              </a:rPr>
+              <a:t>DRIVE Sim</a:t>
+            </a:r>
+            <a:r>
+              <a:rPr sz="1200" lang="zh-TW" dirty="0">
+                <a:solidFill>
+                  <a:srgbClr val="000000"/>
+                </a:solidFill>
+                <a:latin typeface="Arial Unicode MS"/>
+                <a:ea typeface="Arial Unicode MS"/>
+                <a:cs typeface="Arial Unicode MS"/>
+              </a:rPr>
+              <a:t>。這支講的是它其中一個功能：</a:t>
+            </a:r>
+            <a:r>
+              <a:rPr sz="1200" b="1" lang="zh-TW" dirty="0">
+                <a:solidFill>
+                  <a:srgbClr val="000000"/>
+                </a:solidFill>
+                <a:latin typeface="Arial Unicode MS"/>
+                <a:ea typeface="Arial Unicode MS"/>
+                <a:cs typeface="Arial Unicode MS"/>
+              </a:rPr>
+              <a:t>讓模擬器自己生出訓練資料</a:t>
+            </a:r>
+            <a:r>
+              <a:rPr sz="1200" lang="zh-TW" dirty="0">
+                <a:solidFill>
+                  <a:srgbClr val="000000"/>
+                </a:solidFill>
+                <a:latin typeface="Arial Unicode MS"/>
+                <a:ea typeface="Arial Unicode MS"/>
+                <a:cs typeface="Arial Unicode MS"/>
+              </a:rPr>
+              <a:t>。
 </a:t>
             </a:r>
           </a:p>
@@ -5495,7 +5519,7 @@
                 <a:ea typeface="Arial Unicode MS"/>
                 <a:cs typeface="Arial Unicode MS"/>
               </a:rPr>
-              <a:t>（問全班）真實世界的機車是這樣嗎？
+              <a:t>看的時候注意三件事。
 </a:t>
             </a:r>
           </a:p>
@@ -5509,6 +5533,17 @@
               </a:spcAft>
             </a:pPr>
             <a:r>
+              <a:rPr sz="1200" b="1" lang="zh-TW" dirty="0">
+                <a:solidFill>
+                  <a:srgbClr val="000000"/>
+                </a:solidFill>
+                <a:latin typeface="Arial Unicode MS"/>
+                <a:ea typeface="Arial Unicode MS"/>
+                <a:cs typeface="Arial Unicode MS"/>
+              </a:rPr>
+              <a:t>第一，模擬器不是只畫一張好看的畫面。</a:t>
+            </a:r>
+            <a:r>
               <a:rPr sz="1200" lang="zh-TW" dirty="0">
                 <a:solidFill>
                   <a:srgbClr val="000000"/>
@@ -5517,7 +5552,7 @@
                 <a:ea typeface="Arial Unicode MS"/>
                 <a:cs typeface="Arial Unicode MS"/>
               </a:rPr>
-              <a:t>不是。鑽縫、紅燈前擠到最前面、沒有標線的路口靠眼神。
+              <a:t>它會分別算出相機拍到什麼、光達打回來什麼、雷達量到什麼——同一個場景，每一種感測器各一份。
 </a:t>
             </a:r>
           </a:p>
@@ -5531,6 +5566,17 @@
               </a:spcAft>
             </a:pPr>
             <a:r>
+              <a:rPr sz="1200" b="1" lang="zh-TW" dirty="0">
+                <a:solidFill>
+                  <a:srgbClr val="000000"/>
+                </a:solidFill>
+                <a:latin typeface="Arial Unicode MS"/>
+                <a:ea typeface="Arial Unicode MS"/>
+                <a:cs typeface="Arial Unicode MS"/>
+              </a:rPr>
+              <a:t>第二，同一個場景可以換很多種樣子。</a:t>
+            </a:r>
+            <a:r>
               <a:rPr sz="1200" lang="zh-TW" dirty="0">
                 <a:solidFill>
                   <a:srgbClr val="000000"/>
@@ -5539,7 +5585,7 @@
                 <a:ea typeface="Arial Unicode MS"/>
                 <a:cs typeface="Arial Unicode MS"/>
               </a:rPr>
-              <a:t>所以會發生一件很諷刺的事：</a:t>
+              <a:t>換天氣、換光線、換材質、換路邊有什麼。這就是上一頁講的</a:t>
             </a:r>
             <a:r>
               <a:rPr sz="1200" b="1" lang="zh-TW" dirty="0">
@@ -5550,7 +5596,7 @@
                 <a:ea typeface="Arial Unicode MS"/>
                 <a:cs typeface="Arial Unicode MS"/>
               </a:rPr>
-              <a:t>一台在模擬裡表現完美的自駕車，丟到真的河內街頭，可能完全動不了</a:t>
+              <a:t>域隨機化</a:t>
             </a:r>
             <a:r>
               <a:rPr sz="1200" lang="zh-TW" dirty="0">
@@ -5561,7 +5607,7 @@
                 <a:ea typeface="Arial Unicode MS"/>
                 <a:cs typeface="Arial Unicode MS"/>
               </a:rPr>
-              <a:t>——因為它學到的規則在那裡不適用。
+              <a:t>，只是用在資料上。
 </a:t>
             </a:r>
           </a:p>
@@ -5575,6 +5621,17 @@
               </a:spcAft>
             </a:pPr>
             <a:r>
+              <a:rPr sz="1200" b="1" lang="zh-TW" dirty="0">
+                <a:solidFill>
+                  <a:srgbClr val="000000"/>
+                </a:solidFill>
+                <a:latin typeface="Arial Unicode MS"/>
+                <a:ea typeface="Arial Unicode MS"/>
+                <a:cs typeface="Arial Unicode MS"/>
+              </a:rPr>
+              <a:t>第三，這一點最關鍵：標準答案是免費的。</a:t>
+            </a:r>
+            <a:r>
               <a:rPr sz="1200" lang="zh-TW" dirty="0">
                 <a:solidFill>
                   <a:srgbClr val="000000"/>
@@ -5583,7 +5640,73 @@
                 <a:ea typeface="Arial Unicode MS"/>
                 <a:cs typeface="Arial Unicode MS"/>
               </a:rPr>
-              <a:t>解法寫在最下面：把真實道路上錄到的軌跡回放進模擬。可是這裡有個問題，下一頁。</a:t>
+              <a:t>真實世界收來的影片，要有人一張一張把車框起來、告訴電腦「這是車」——很慢、很貴。模擬出來的不用，</a:t>
+            </a:r>
+            <a:r>
+              <a:rPr sz="1200" b="1" lang="zh-TW" dirty="0">
+                <a:solidFill>
+                  <a:srgbClr val="000000"/>
+                </a:solidFill>
+                <a:latin typeface="Arial Unicode MS"/>
+                <a:ea typeface="Arial Unicode MS"/>
+                <a:cs typeface="Arial Unicode MS"/>
+              </a:rPr>
+              <a:t>電腦本來就知道每一個東西在哪裡</a:t>
+            </a:r>
+            <a:r>
+              <a:rPr sz="1200" lang="zh-TW" dirty="0">
+                <a:solidFill>
+                  <a:srgbClr val="000000"/>
+                </a:solidFill>
+                <a:latin typeface="Arial Unicode MS"/>
+                <a:ea typeface="Arial Unicode MS"/>
+                <a:cs typeface="Arial Unicode MS"/>
+              </a:rPr>
+              <a:t>，那是它自己畫的。
+</a:t>
+            </a:r>
+          </a:p>
+          <a:p>
+            <a:pPr algn="l" marL="0" indent="0">
+              <a:spcBef>
+                <a:spcPts val="0"/>
+              </a:spcBef>
+              <a:spcAft>
+                <a:spcPts val="200"/>
+              </a:spcAft>
+            </a:pPr>
+            <a:r>
+              <a:rPr sz="1200" lang="zh-TW" dirty="0">
+                <a:solidFill>
+                  <a:srgbClr val="000000"/>
+                </a:solidFill>
+                <a:latin typeface="Arial Unicode MS"/>
+                <a:ea typeface="Arial Unicode MS"/>
+                <a:cs typeface="Arial Unicode MS"/>
+              </a:rPr>
+              <a:t>（播完）所以回到上一頁那句話：與其把模擬做得跟現實一模一樣，不如</a:t>
+            </a:r>
+            <a:r>
+              <a:rPr sz="1200" b="1" lang="zh-TW" dirty="0">
+                <a:solidFill>
+                  <a:srgbClr val="000000"/>
+                </a:solidFill>
+                <a:latin typeface="Arial Unicode MS"/>
+                <a:ea typeface="Arial Unicode MS"/>
+                <a:cs typeface="Arial Unicode MS"/>
+              </a:rPr>
+              <a:t>讓現實只是其中一種情況</a:t>
+            </a:r>
+            <a:r>
+              <a:rPr sz="1200" lang="zh-TW" dirty="0">
+                <a:solidFill>
+                  <a:srgbClr val="000000"/>
+                </a:solidFill>
+                <a:latin typeface="Arial Unicode MS"/>
+                <a:ea typeface="Arial Unicode MS"/>
+                <a:cs typeface="Arial Unicode MS"/>
+              </a:rPr>
+              <a:t>。這支影片就是業界真的在做這件事。</a:t>
             </a:r>
           </a:p>
         </p:txBody>
@@ -5704,7 +5827,29 @@
                 <a:ea typeface="Arial Unicode MS"/>
                 <a:cs typeface="Arial Unicode MS"/>
               </a:rPr>
-              <a:t>解法是把真實道路上錄到的軌跡回放進模擬。但這裡有個問題留給各位想。
+              <a:t>這一支比較長，三分二十九秒，播兩分鐘就夠。它不是車，是</a:t>
+            </a:r>
+            <a:r>
+              <a:rPr sz="1200" b="1" lang="zh-TW" dirty="0">
+                <a:solidFill>
+                  <a:srgbClr val="000000"/>
+                </a:solidFill>
+                <a:latin typeface="Arial Unicode MS"/>
+                <a:ea typeface="Arial Unicode MS"/>
+                <a:cs typeface="Arial Unicode MS"/>
+              </a:rPr>
+              <a:t>一隻機械手</a:t>
+            </a:r>
+            <a:r>
+              <a:rPr sz="1200" lang="zh-TW" dirty="0">
+                <a:solidFill>
+                  <a:srgbClr val="000000"/>
+                </a:solidFill>
+                <a:latin typeface="Arial Unicode MS"/>
+                <a:ea typeface="Arial Unicode MS"/>
+                <a:cs typeface="Arial Unicode MS"/>
+              </a:rPr>
+              <a:t>——但方法跟上一頁一模一樣。
 </a:t>
             </a:r>
           </a:p>
@@ -5718,17 +5863,6 @@
               </a:spcAft>
             </a:pPr>
             <a:r>
-              <a:rPr sz="1200" b="1" lang="zh-TW" dirty="0">
-                <a:solidFill>
-                  <a:srgbClr val="000000"/>
-                </a:solidFill>
-                <a:latin typeface="Arial Unicode MS"/>
-                <a:ea typeface="Arial Unicode MS"/>
-                <a:cs typeface="Arial Unicode MS"/>
-              </a:rPr>
-              <a:t>要回放河內的軌跡，你得先有河內的軌跡。</a:t>
-            </a:r>
-            <a:r>
               <a:rPr sz="1200" lang="zh-TW" dirty="0">
                 <a:solidFill>
                   <a:srgbClr val="000000"/>
@@ -5737,7 +5871,7 @@
                 <a:ea typeface="Arial Unicode MS"/>
                 <a:cs typeface="Arial Unicode MS"/>
               </a:rPr>
-              <a:t>誰有？
+              <a:t>先說背景。這是 OpenAI 二〇一八年做的，系統叫 Dactyl。任務很單純：讓機械手把一個方塊轉到指定的那一面。
 </a:t>
             </a:r>
           </a:p>
@@ -5751,6 +5885,17 @@
               </a:spcAft>
             </a:pPr>
             <a:r>
+              <a:rPr sz="1200" b="1" lang="zh-TW" dirty="0">
+                <a:solidFill>
+                  <a:srgbClr val="000000"/>
+                </a:solidFill>
+                <a:latin typeface="Arial Unicode MS"/>
+                <a:ea typeface="Arial Unicode MS"/>
+                <a:cs typeface="Arial Unicode MS"/>
+              </a:rPr>
+              <a:t>關鍵在這裡：這隻手從頭到尾沒有碰過真的方塊。</a:t>
+            </a:r>
+            <a:r>
               <a:rPr sz="1200" lang="zh-TW" dirty="0">
                 <a:solidFill>
                   <a:srgbClr val="000000"/>
@@ -5759,7 +5904,7 @@
                 <a:ea typeface="Arial Unicode MS"/>
                 <a:cs typeface="Arial Unicode MS"/>
               </a:rPr>
-              <a:t>（等學生回答。）
+              <a:t>所有的練習都在電腦的模擬裡完成。
 </a:t>
             </a:r>
           </a:p>
@@ -5781,7 +5926,7 @@
                 <a:ea typeface="Arial Unicode MS"/>
                 <a:cs typeface="Arial Unicode MS"/>
               </a:rPr>
-              <a:t>在越南賣車的公司有——VinFast 二〇二五年就在越南交了十七萬台車。但那是公司內部的資料，不會公開。所以答案是：</a:t>
+              <a:t>那為什麼搬到真的手上還能動？因為他們在模擬裡</a:t>
             </a:r>
             <a:r>
               <a:rPr sz="1200" b="1" lang="zh-TW" dirty="0">
@@ -5792,7 +5937,7 @@
                 <a:ea typeface="Arial Unicode MS"/>
                 <a:cs typeface="Arial Unicode MS"/>
               </a:rPr>
-              <a:t>有人有，但你拿不到；公開的資料裡，找不到河內的軌跡。</a:t>
+              <a:t>一直亂調</a:t>
             </a:r>
             <a:r>
               <a:rPr sz="1200" lang="zh-TW" dirty="0">
@@ -5803,7 +5948,7 @@
                 <a:ea typeface="Arial Unicode MS"/>
                 <a:cs typeface="Arial Unicode MS"/>
               </a:rPr>
-              <a:t>
+              <a:t>——方塊的重量、大小、表面的摩擦力、手指反應的快慢，連看方塊的攝影機角度都在變。每一次練習的條件都不一樣。
 </a:t>
             </a:r>
           </a:p>
@@ -5825,7 +5970,29 @@
                 <a:ea typeface="Arial Unicode MS"/>
                 <a:cs typeface="Arial Unicode MS"/>
               </a:rPr>
-              <a:t>所以這不是抱怨，這是機會。各位不用去做一個完整的交通行為模型，那是好幾年的工程。
+              <a:t>所以這隻手學到的不是「在某一組數字下怎麼轉」，是「</a:t>
+            </a:r>
+            <a:r>
+              <a:rPr sz="1200" b="1" lang="zh-TW" dirty="0">
+                <a:solidFill>
+                  <a:srgbClr val="000000"/>
+                </a:solidFill>
+                <a:latin typeface="Arial Unicode MS"/>
+                <a:ea typeface="Arial Unicode MS"/>
+                <a:cs typeface="Arial Unicode MS"/>
+              </a:rPr>
+              <a:t>不管數字怎麼變都轉得動</a:t>
+            </a:r>
+            <a:r>
+              <a:rPr sz="1200" lang="zh-TW" dirty="0">
+                <a:solidFill>
+                  <a:srgbClr val="000000"/>
+                </a:solidFill>
+                <a:latin typeface="Arial Unicode MS"/>
+                <a:ea typeface="Arial Unicode MS"/>
+                <a:cs typeface="Arial Unicode MS"/>
+              </a:rPr>
+              <a:t>」。真實世界那一組數字，對它來說只是練過的其中一種。
 </a:t>
             </a:r>
           </a:p>
@@ -5847,7 +6014,7 @@
                 <a:ea typeface="Arial Unicode MS"/>
                 <a:cs typeface="Arial Unicode MS"/>
               </a:rPr>
-              <a:t>但</a:t>
+              <a:t>（播完）這就是上一頁那句話最極端的版本。而且各位第三節掃參數的時候，做的其實是同一件事——</a:t>
             </a:r>
             <a:r>
               <a:rPr sz="1200" b="1" lang="zh-TW" dirty="0">
@@ -5858,7 +6025,7 @@
                 <a:ea typeface="Arial Unicode MS"/>
                 <a:cs typeface="Arial Unicode MS"/>
               </a:rPr>
-              <a:t>第一步很小，各位現在就做得到</a:t>
+              <a:t>把一組數字掃過一整個範圍，而不是只試一個</a:t>
             </a:r>
             <a:r>
               <a:rPr sz="1200" lang="zh-TW" dirty="0">
@@ -5869,29 +6036,7 @@
                 <a:ea typeface="Arial Unicode MS"/>
                 <a:cs typeface="Arial Unicode MS"/>
               </a:rPr>
-              <a:t>：挑一個每天經過的路口，用手機錄三十秒，回去把畫面暫停，數同時有幾台機車、離你多遠。
-</a:t>
-            </a:r>
-          </a:p>
-          <a:p>
-            <a:pPr algn="l" marL="0" indent="0">
-              <a:spcBef>
-                <a:spcPts val="0"/>
-              </a:spcBef>
-              <a:spcAft>
-                <a:spcPts val="200"/>
-              </a:spcAft>
-            </a:pPr>
-            <a:r>
-              <a:rPr sz="1200" lang="zh-TW" dirty="0">
-                <a:solidFill>
-                  <a:srgbClr val="000000"/>
-                </a:solidFill>
-                <a:latin typeface="Arial Unicode MS"/>
-                <a:ea typeface="Arial Unicode MS"/>
-                <a:cs typeface="Arial Unicode MS"/>
-              </a:rPr>
-              <a:t>這樣就有一筆別人沒有的數字。第二節會教各位這種東西要怎麼寫下來。</a:t>
+              <a:t>。</a:t>
             </a:r>
           </a:p>
         </p:txBody>
@@ -6012,7 +6157,7 @@
                 <a:ea typeface="Arial Unicode MS"/>
                 <a:cs typeface="Arial Unicode MS"/>
               </a:rPr>
-              <a:t>第三種：</a:t>
+              <a:t>第二種：</a:t>
             </a:r>
             <a:r>
               <a:rPr sz="1200" b="1" lang="zh-TW" dirty="0">
@@ -6023,7 +6168,7 @@
                 <a:ea typeface="Arial Unicode MS"/>
                 <a:cs typeface="Arial Unicode MS"/>
               </a:rPr>
-              <a:t>物理落差</a:t>
+              <a:t>行為落差</a:t>
             </a:r>
             <a:r>
               <a:rPr sz="1200" lang="zh-TW" dirty="0">
@@ -6034,7 +6179,7 @@
                 <a:ea typeface="Arial Unicode MS"/>
                 <a:cs typeface="Arial Unicode MS"/>
               </a:rPr>
-              <a:t>。
+              <a:t>。這一種對各位來說最有感覺。
 </a:t>
             </a:r>
           </a:p>
@@ -6056,29 +6201,7 @@
                 <a:ea typeface="Arial Unicode MS"/>
                 <a:cs typeface="Arial Unicode MS"/>
               </a:rPr>
-              <a:t>輪胎怎麼抓地、懸吊怎麼吸震、煞車踩下去到真的減速中間有多少延遲——這些在模擬裡都是</a:t>
-            </a:r>
-            <a:r>
-              <a:rPr sz="1200" b="1" lang="zh-TW" dirty="0">
-                <a:solidFill>
-                  <a:srgbClr val="000000"/>
-                </a:solidFill>
-                <a:latin typeface="Arial Unicode MS"/>
-                <a:ea typeface="Arial Unicode MS"/>
-                <a:cs typeface="Arial Unicode MS"/>
-              </a:rPr>
-              <a:t>近似值</a:t>
-            </a:r>
-            <a:r>
-              <a:rPr sz="1200" lang="zh-TW" dirty="0">
-                <a:solidFill>
-                  <a:srgbClr val="000000"/>
-                </a:solidFill>
-                <a:latin typeface="Arial Unicode MS"/>
-                <a:ea typeface="Arial Unicode MS"/>
-                <a:cs typeface="Arial Unicode MS"/>
-              </a:rPr>
-              <a:t>。
+              <a:t>模擬裡的車在做什麼？待在車道中間、跟前車保持安全距離、要變換車道之前先打方向燈。
 </a:t>
             </a:r>
           </a:p>
@@ -6100,29 +6223,7 @@
                 <a:ea typeface="Arial Unicode MS"/>
                 <a:cs typeface="Arial Unicode MS"/>
               </a:rPr>
-              <a:t>我們的模擬器更簡化：減速度就是一個固定的數字，</a:t>
-            </a:r>
-            <a:r>
-              <a:rPr sz="1200" b="1" lang="zh-TW" dirty="0">
-                <a:solidFill>
-                  <a:srgbClr val="000000"/>
-                </a:solidFill>
-                <a:latin typeface="Arial Unicode MS"/>
-                <a:ea typeface="Arial Unicode MS"/>
-                <a:cs typeface="Arial Unicode MS"/>
-              </a:rPr>
-              <a:t>六</a:t>
-            </a:r>
-            <a:r>
-              <a:rPr sz="1200" lang="zh-TW" dirty="0">
-                <a:solidFill>
-                  <a:srgbClr val="000000"/>
-                </a:solidFill>
-                <a:latin typeface="Arial Unicode MS"/>
-                <a:ea typeface="Arial Unicode MS"/>
-                <a:cs typeface="Arial Unicode MS"/>
-              </a:rPr>
-              <a:t>。
+              <a:t>（問全班）真實世界的機車是這樣嗎？
 </a:t>
             </a:r>
           </a:p>
@@ -6144,7 +6245,7 @@
                 <a:ea typeface="Arial Unicode MS"/>
                 <a:cs typeface="Arial Unicode MS"/>
               </a:rPr>
-              <a:t>（問全班）下雨天煞車，煞得住嗎？
+              <a:t>不是。鑽縫、紅燈前擠到最前面、沒有標線的路口靠眼神。
 </a:t>
             </a:r>
           </a:p>
@@ -6166,7 +6267,7 @@
                 <a:ea typeface="Arial Unicode MS"/>
                 <a:cs typeface="Arial Unicode MS"/>
               </a:rPr>
-              <a:t>比較難煞。</a:t>
+              <a:t>所以會發生一件很諷刺的事：</a:t>
             </a:r>
             <a:r>
               <a:rPr sz="1200" b="1" lang="zh-TW" dirty="0">
@@ -6177,7 +6278,7 @@
                 <a:ea typeface="Arial Unicode MS"/>
                 <a:cs typeface="Arial Unicode MS"/>
               </a:rPr>
-              <a:t>濕路面的減速度大約只剩一半</a:t>
+              <a:t>一台在模擬裡表現完美的自駕車，丟到真的河內街頭，可能完全動不了</a:t>
             </a:r>
             <a:r>
               <a:rPr sz="1200" lang="zh-TW" dirty="0">
@@ -6188,7 +6289,7 @@
                 <a:ea typeface="Arial Unicode MS"/>
                 <a:cs typeface="Arial Unicode MS"/>
               </a:rPr>
-              <a:t>，時速五十的煞停距離從二十公尺變成三十六公尺。
+              <a:t>——因為它學到的規則在那裡不適用。
 </a:t>
             </a:r>
           </a:p>
@@ -6210,51 +6311,7 @@
                 <a:ea typeface="Arial Unicode MS"/>
                 <a:cs typeface="Arial Unicode MS"/>
               </a:rPr>
-              <a:t>所以回頭看那張五個車速的表——</a:t>
-            </a:r>
-            <a:r>
-              <a:rPr sz="1200" b="1" lang="zh-TW" dirty="0">
-                <a:solidFill>
-                  <a:srgbClr val="000000"/>
-                </a:solidFill>
-                <a:latin typeface="Arial Unicode MS"/>
-                <a:ea typeface="Arial Unicode MS"/>
-                <a:cs typeface="Arial Unicode MS"/>
-              </a:rPr>
-              <a:t>那張表只在乾的柏油路上成立。</a:t>
-            </a:r>
-            <a:r>
-              <a:rPr sz="1200" lang="zh-TW" dirty="0">
-                <a:solidFill>
-                  <a:srgbClr val="000000"/>
-                </a:solidFill>
-                <a:latin typeface="Arial Unicode MS"/>
-                <a:ea typeface="Arial Unicode MS"/>
-                <a:cs typeface="Arial Unicode MS"/>
-              </a:rPr>
-              <a:t>
-</a:t>
-            </a:r>
-          </a:p>
-          <a:p>
-            <a:pPr algn="l" marL="0" indent="0">
-              <a:spcBef>
-                <a:spcPts val="0"/>
-              </a:spcBef>
-              <a:spcAft>
-                <a:spcPts val="200"/>
-              </a:spcAft>
-            </a:pPr>
-            <a:r>
-              <a:rPr sz="1200" lang="zh-TW" dirty="0">
-                <a:solidFill>
-                  <a:srgbClr val="000000"/>
-                </a:solidFill>
-                <a:latin typeface="Arial Unicode MS"/>
-                <a:ea typeface="Arial Unicode MS"/>
-                <a:cs typeface="Arial Unicode MS"/>
-              </a:rPr>
-              <a:t>第三節打開雨天的時候，各位會親眼看到，而且會發現一個陷阱：射線變短了，但煞停距離沒有變短。</a:t>
+              <a:t>解法寫在最下面：把真實道路上錄到的軌跡回放進模擬。可是這裡有個問題，下一頁。</a:t>
             </a:r>
           </a:p>
         </p:txBody>
@@ -6375,7 +6432,7 @@
                 <a:ea typeface="Arial Unicode MS"/>
                 <a:cs typeface="Arial Unicode MS"/>
               </a:rPr>
-              <a:t>講了三種落差，好像模擬一無是處。反過來也要講。
+              <a:t>解法是把真實道路上錄到的軌跡回放進模擬。但這裡有個問題留給各位想。
 </a:t>
             </a:r>
           </a:p>
@@ -6397,7 +6454,7 @@
                 <a:ea typeface="Arial Unicode MS"/>
                 <a:cs typeface="Arial Unicode MS"/>
               </a:rPr>
-              <a:t>模擬能做兩件真實世界做不到的事。</a:t>
+              <a:t>要回放河內的軌跡，你得先有河內的軌跡。</a:t>
             </a:r>
             <a:r>
               <a:rPr sz="1200" lang="zh-TW" dirty="0">
@@ -6408,7 +6465,7 @@
                 <a:ea typeface="Arial Unicode MS"/>
                 <a:cs typeface="Arial Unicode MS"/>
               </a:rPr>
-              <a:t>
+              <a:t>誰有？
 </a:t>
             </a:r>
           </a:p>
@@ -6430,7 +6487,7 @@
                 <a:ea typeface="Arial Unicode MS"/>
                 <a:cs typeface="Arial Unicode MS"/>
               </a:rPr>
-              <a:t>第一件：同一個情況重跑一萬次，每次只改一個參數。真實世界能嗎？不能。
+              <a:t>（等學生回答。）
 </a:t>
             </a:r>
           </a:p>
@@ -6452,7 +6509,7 @@
                 <a:ea typeface="Arial Unicode MS"/>
                 <a:cs typeface="Arial Unicode MS"/>
               </a:rPr>
-              <a:t>第二件更重要：讓行人剛好在</a:t>
+              <a:t>在越南賣車的公司有——VinFast 二〇二五年就在越南交了十七萬台車。但那是公司內部的資料，不會公開。所以答案是：</a:t>
             </a:r>
             <a:r>
               <a:rPr sz="1200" b="1" lang="zh-TW" dirty="0">
@@ -6463,7 +6520,7 @@
                 <a:ea typeface="Arial Unicode MS"/>
                 <a:cs typeface="Arial Unicode MS"/>
               </a:rPr>
-              <a:t>最糟的時間點</a:t>
+              <a:t>有人有，但你拿不到；公開的資料裡，找不到河內的軌跡。</a:t>
             </a:r>
             <a:r>
               <a:rPr sz="1200" lang="zh-TW" dirty="0">
@@ -6474,7 +6531,7 @@
                 <a:ea typeface="Arial Unicode MS"/>
                 <a:cs typeface="Arial Unicode MS"/>
               </a:rPr>
-              <a:t>走出來。真實世界能嗎？
+              <a:t>
 </a:t>
             </a:r>
           </a:p>
@@ -6496,7 +6553,7 @@
                 <a:ea typeface="Arial Unicode MS"/>
                 <a:cs typeface="Arial Unicode MS"/>
               </a:rPr>
-              <a:t>這一句我想聽大家自己說出來。
+              <a:t>所以這不是抱怨，這是機會。各位不用去做一個完整的交通行為模型，那是好幾年的工程。
 </a:t>
             </a:r>
           </a:p>
@@ -6518,7 +6575,7 @@
                 <a:ea typeface="Arial Unicode MS"/>
                 <a:cs typeface="Arial Unicode MS"/>
               </a:rPr>
-              <a:t>技術上做得到，但</a:t>
+              <a:t>但</a:t>
             </a:r>
             <a:r>
               <a:rPr sz="1200" b="1" lang="zh-TW" dirty="0">
@@ -6529,7 +6586,7 @@
                 <a:ea typeface="Arial Unicode MS"/>
                 <a:cs typeface="Arial Unicode MS"/>
               </a:rPr>
-              <a:t>不可以做</a:t>
+              <a:t>第一步很小，各位現在就做得到</a:t>
             </a:r>
             <a:r>
               <a:rPr sz="1200" lang="zh-TW" dirty="0">
@@ -6540,7 +6597,7 @@
                 <a:ea typeface="Arial Unicode MS"/>
                 <a:cs typeface="Arial Unicode MS"/>
               </a:rPr>
-              <a:t>。你不能為了測試，讓一個真人冒生命危險。
+              <a:t>：挑一個每天經過的路口，用手機錄三十秒，回去把畫面暫停，數同時有幾台機車、離你多遠。
 </a:t>
             </a:r>
           </a:p>
@@ -6562,29 +6619,7 @@
                 <a:ea typeface="Arial Unicode MS"/>
                 <a:cs typeface="Arial Unicode MS"/>
               </a:rPr>
-              <a:t>所以模擬不是「比較差的真實」，它是</a:t>
-            </a:r>
-            <a:r>
-              <a:rPr sz="1200" b="1" lang="zh-TW" dirty="0">
-                <a:solidFill>
-                  <a:srgbClr val="000000"/>
-                </a:solidFill>
-                <a:latin typeface="Arial Unicode MS"/>
-                <a:ea typeface="Arial Unicode MS"/>
-                <a:cs typeface="Arial Unicode MS"/>
-              </a:rPr>
-              <a:t>另一種工具</a:t>
-            </a:r>
-            <a:r>
-              <a:rPr sz="1200" lang="zh-TW" dirty="0">
-                <a:solidFill>
-                  <a:srgbClr val="000000"/>
-                </a:solidFill>
-                <a:latin typeface="Arial Unicode MS"/>
-                <a:ea typeface="Arial Unicode MS"/>
-                <a:cs typeface="Arial Unicode MS"/>
-              </a:rPr>
-              <a:t>。這句話我寫在白板上：模擬做不到的，真車做得到；真車做不到的，模擬做得到。兩個都要。</a:t>
+              <a:t>這樣就有一筆別人沒有的數字。第二節會教各位這種東西要怎麼寫下來。</a:t>
             </a:r>
           </a:p>
         </p:txBody>
@@ -6705,7 +6740,7 @@
                 <a:ea typeface="Arial Unicode MS"/>
                 <a:cs typeface="Arial Unicode MS"/>
               </a:rPr>
-              <a:t>剛剛那三種落差，在台灣和越南</a:t>
+              <a:t>第三種：</a:t>
             </a:r>
             <a:r>
               <a:rPr sz="1200" b="1" lang="zh-TW" dirty="0">
@@ -6716,29 +6751,7 @@
                 <a:ea typeface="Arial Unicode MS"/>
                 <a:cs typeface="Arial Unicode MS"/>
               </a:rPr>
-              <a:t>更大</a:t>
-            </a:r>
-            <a:r>
-              <a:rPr sz="1200" lang="zh-TW" dirty="0">
-                <a:solidFill>
-                  <a:srgbClr val="000000"/>
-                </a:solidFill>
-                <a:latin typeface="Arial Unicode MS"/>
-                <a:ea typeface="Arial Unicode MS"/>
-                <a:cs typeface="Arial Unicode MS"/>
-              </a:rPr>
-              <a:t>。原因很單純：現成的模擬器裡面的世界、車輛、行為，</a:t>
-            </a:r>
-            <a:r>
-              <a:rPr sz="1200" b="1" lang="zh-TW" dirty="0">
-                <a:solidFill>
-                  <a:srgbClr val="000000"/>
-                </a:solidFill>
-                <a:latin typeface="Arial Unicode MS"/>
-                <a:ea typeface="Arial Unicode MS"/>
-                <a:cs typeface="Arial Unicode MS"/>
-              </a:rPr>
-              <a:t>都是照歐美做的</a:t>
+              <a:t>物理落差</a:t>
             </a:r>
             <a:r>
               <a:rPr sz="1200" lang="zh-TW" dirty="0">
@@ -6771,7 +6784,29 @@
                 <a:ea typeface="Arial Unicode MS"/>
                 <a:cs typeface="Arial Unicode MS"/>
               </a:rPr>
-              <a:t>一欄一欄看。
+              <a:t>輪胎怎麼抓地、懸吊怎麼吸震、煞車踩下去到真的減速中間有多少延遲——這些在模擬裡都是</a:t>
+            </a:r>
+            <a:r>
+              <a:rPr sz="1200" b="1" lang="zh-TW" dirty="0">
+                <a:solidFill>
+                  <a:srgbClr val="000000"/>
+                </a:solidFill>
+                <a:latin typeface="Arial Unicode MS"/>
+                <a:ea typeface="Arial Unicode MS"/>
+                <a:cs typeface="Arial Unicode MS"/>
+              </a:rPr>
+              <a:t>近似值</a:t>
+            </a:r>
+            <a:r>
+              <a:rPr sz="1200" lang="zh-TW" dirty="0">
+                <a:solidFill>
+                  <a:srgbClr val="000000"/>
+                </a:solidFill>
+                <a:latin typeface="Arial Unicode MS"/>
+                <a:ea typeface="Arial Unicode MS"/>
+                <a:cs typeface="Arial Unicode MS"/>
+              </a:rPr>
+              <a:t>。
 </a:t>
             </a:r>
           </a:p>
@@ -6785,6 +6820,17 @@
               </a:spcAft>
             </a:pPr>
             <a:r>
+              <a:rPr sz="1200" lang="zh-TW" dirty="0">
+                <a:solidFill>
+                  <a:srgbClr val="000000"/>
+                </a:solidFill>
+                <a:latin typeface="Arial Unicode MS"/>
+                <a:ea typeface="Arial Unicode MS"/>
+                <a:cs typeface="Arial Unicode MS"/>
+              </a:rPr>
+              <a:t>我們的模擬器更簡化：減速度就是一個固定的數字，</a:t>
+            </a:r>
+            <a:r>
               <a:rPr sz="1200" b="1" lang="zh-TW" dirty="0">
                 <a:solidFill>
                   <a:srgbClr val="000000"/>
@@ -6793,7 +6839,7 @@
                 <a:ea typeface="Arial Unicode MS"/>
                 <a:cs typeface="Arial Unicode MS"/>
               </a:rPr>
-              <a:t>外觀</a:t>
+              <a:t>六</a:t>
             </a:r>
             <a:r>
               <a:rPr sz="1200" lang="zh-TW" dirty="0">
@@ -6804,7 +6850,7 @@
                 <a:ea typeface="Arial Unicode MS"/>
                 <a:cs typeface="Arial Unicode MS"/>
               </a:rPr>
-              <a:t>：CARLA 裡有騎樓嗎？沒有。有滿街的招牌嗎？沒有。有機車待轉區嗎？沒有。
+              <a:t>。
 </a:t>
             </a:r>
           </a:p>
@@ -6818,17 +6864,6 @@
               </a:spcAft>
             </a:pPr>
             <a:r>
-              <a:rPr sz="1200" b="1" lang="zh-TW" dirty="0">
-                <a:solidFill>
-                  <a:srgbClr val="000000"/>
-                </a:solidFill>
-                <a:latin typeface="Arial Unicode MS"/>
-                <a:ea typeface="Arial Unicode MS"/>
-                <a:cs typeface="Arial Unicode MS"/>
-              </a:rPr>
-              <a:t>行為</a:t>
-            </a:r>
-            <a:r>
               <a:rPr sz="1200" lang="zh-TW" dirty="0">
                 <a:solidFill>
                   <a:srgbClr val="000000"/>
@@ -6837,29 +6872,7 @@
                 <a:ea typeface="Arial Unicode MS"/>
                 <a:cs typeface="Arial Unicode MS"/>
               </a:rPr>
-              <a:t>：這是差最多的。歐美的模擬器裡，機車是「偶爾出現的一台」。台灣綠燈起步是二十台機車扇形散開；越南是五公尺內十二台互相鑽。</a:t>
-            </a:r>
-            <a:r>
-              <a:rPr sz="1200" b="1" lang="zh-TW" dirty="0">
-                <a:solidFill>
-                  <a:srgbClr val="000000"/>
-                </a:solidFill>
-                <a:latin typeface="Arial Unicode MS"/>
-                <a:ea typeface="Arial Unicode MS"/>
-                <a:cs typeface="Arial Unicode MS"/>
-              </a:rPr>
-              <a:t>這種行為模型，現成的模擬器裡根本沒有。</a:t>
-            </a:r>
-            <a:r>
-              <a:rPr sz="1200" lang="zh-TW" dirty="0">
-                <a:solidFill>
-                  <a:srgbClr val="000000"/>
-                </a:solidFill>
-                <a:latin typeface="Arial Unicode MS"/>
-                <a:ea typeface="Arial Unicode MS"/>
-                <a:cs typeface="Arial Unicode MS"/>
-              </a:rPr>
-              <a:t>
+              <a:t>（問全班）下雨天煞車，煞得住嗎？
 </a:t>
             </a:r>
           </a:p>
@@ -6873,6 +6886,17 @@
               </a:spcAft>
             </a:pPr>
             <a:r>
+              <a:rPr sz="1200" lang="zh-TW" dirty="0">
+                <a:solidFill>
+                  <a:srgbClr val="000000"/>
+                </a:solidFill>
+                <a:latin typeface="Arial Unicode MS"/>
+                <a:ea typeface="Arial Unicode MS"/>
+                <a:cs typeface="Arial Unicode MS"/>
+              </a:rPr>
+              <a:t>比較難煞。</a:t>
+            </a:r>
+            <a:r>
               <a:rPr sz="1200" b="1" lang="zh-TW" dirty="0">
                 <a:solidFill>
                   <a:srgbClr val="000000"/>
@@ -6881,7 +6905,7 @@
                 <a:ea typeface="Arial Unicode MS"/>
                 <a:cs typeface="Arial Unicode MS"/>
               </a:rPr>
-              <a:t>物理</a:t>
+              <a:t>濕路面的減速度大約只剩一半</a:t>
             </a:r>
             <a:r>
               <a:rPr sz="1200" lang="zh-TW" dirty="0">
@@ -6892,7 +6916,7 @@
                 <a:ea typeface="Arial Unicode MS"/>
                 <a:cs typeface="Arial Unicode MS"/>
               </a:rPr>
-              <a:t>：補丁路面、人孔蓋、深淺不一的積水，這些都會影響抓地力，而模擬器裡的地面是一整片完美的平面。
+              <a:t>，時速五十的煞停距離從二十公尺變成三十六公尺。
 </a:t>
             </a:r>
           </a:p>
@@ -6914,7 +6938,51 @@
                 <a:ea typeface="Arial Unicode MS"/>
                 <a:cs typeface="Arial Unicode MS"/>
               </a:rPr>
-              <a:t>所以看最下面那句話。這不是抱怨，這是機會：那份資料只有各位收得到。</a:t>
+              <a:t>所以回頭看那張五個車速的表——</a:t>
+            </a:r>
+            <a:r>
+              <a:rPr sz="1200" b="1" lang="zh-TW" dirty="0">
+                <a:solidFill>
+                  <a:srgbClr val="000000"/>
+                </a:solidFill>
+                <a:latin typeface="Arial Unicode MS"/>
+                <a:ea typeface="Arial Unicode MS"/>
+                <a:cs typeface="Arial Unicode MS"/>
+              </a:rPr>
+              <a:t>那張表只在乾的柏油路上成立。</a:t>
+            </a:r>
+            <a:r>
+              <a:rPr sz="1200" lang="zh-TW" dirty="0">
+                <a:solidFill>
+                  <a:srgbClr val="000000"/>
+                </a:solidFill>
+                <a:latin typeface="Arial Unicode MS"/>
+                <a:ea typeface="Arial Unicode MS"/>
+                <a:cs typeface="Arial Unicode MS"/>
+              </a:rPr>
+              <a:t>
+</a:t>
+            </a:r>
+          </a:p>
+          <a:p>
+            <a:pPr algn="l" marL="0" indent="0">
+              <a:spcBef>
+                <a:spcPts val="0"/>
+              </a:spcBef>
+              <a:spcAft>
+                <a:spcPts val="200"/>
+              </a:spcAft>
+            </a:pPr>
+            <a:r>
+              <a:rPr sz="1200" lang="zh-TW" dirty="0">
+                <a:solidFill>
+                  <a:srgbClr val="000000"/>
+                </a:solidFill>
+                <a:latin typeface="Arial Unicode MS"/>
+                <a:ea typeface="Arial Unicode MS"/>
+                <a:cs typeface="Arial Unicode MS"/>
+              </a:rPr>
+              <a:t>第三節打開雨天的時候，各位會親眼看到，而且會發現一個陷阱：射線變短了，但煞停距離沒有變短。</a:t>
             </a:r>
           </a:p>
         </p:txBody>
@@ -7023,19 +7091,19 @@
                 <a:spcPts val="0"/>
               </a:spcBef>
               <a:spcAft>
-                <a:spcPts val="192"/>
+                <a:spcPts val="200"/>
               </a:spcAft>
             </a:pPr>
             <a:r>
-              <a:rPr sz="1150" lang="zh-TW" dirty="0">
-                <a:solidFill>
-                  <a:srgbClr val="000000"/>
-                </a:solidFill>
-                <a:latin typeface="Arial Unicode MS"/>
-                <a:ea typeface="Arial Unicode MS"/>
-                <a:cs typeface="Arial Unicode MS"/>
-              </a:rPr>
-              <a:t>現在做一個四分鐘的討論。
+              <a:rPr sz="1200" lang="zh-TW" dirty="0">
+                <a:solidFill>
+                  <a:srgbClr val="000000"/>
+                </a:solidFill>
+                <a:latin typeface="Arial Unicode MS"/>
+                <a:ea typeface="Arial Unicode MS"/>
+                <a:cs typeface="Arial Unicode MS"/>
+              </a:rPr>
+              <a:t>講了三種落差，好像模擬一無是處。反過來也要講。
 </a:t>
             </a:r>
           </a:p>
@@ -7045,19 +7113,30 @@
                 <a:spcPts val="0"/>
               </a:spcBef>
               <a:spcAft>
-                <a:spcPts val="192"/>
+                <a:spcPts val="200"/>
               </a:spcAft>
             </a:pPr>
             <a:r>
-              <a:rPr sz="1150" lang="zh-TW" dirty="0">
-                <a:solidFill>
-                  <a:srgbClr val="000000"/>
-                </a:solidFill>
-                <a:latin typeface="Arial Unicode MS"/>
-                <a:ea typeface="Arial Unicode MS"/>
-                <a:cs typeface="Arial Unicode MS"/>
-              </a:rPr>
-              <a:t>每一組講一件，我在白板上分三欄記下來：外觀、行為、物理。
+              <a:rPr sz="1200" b="1" lang="zh-TW" dirty="0">
+                <a:solidFill>
+                  <a:srgbClr val="000000"/>
+                </a:solidFill>
+                <a:latin typeface="Arial Unicode MS"/>
+                <a:ea typeface="Arial Unicode MS"/>
+                <a:cs typeface="Arial Unicode MS"/>
+              </a:rPr>
+              <a:t>模擬能做兩件真實世界做不到的事。</a:t>
+            </a:r>
+            <a:r>
+              <a:rPr sz="1200" lang="zh-TW" dirty="0">
+                <a:solidFill>
+                  <a:srgbClr val="000000"/>
+                </a:solidFill>
+                <a:latin typeface="Arial Unicode MS"/>
+                <a:ea typeface="Arial Unicode MS"/>
+                <a:cs typeface="Arial Unicode MS"/>
+              </a:rPr>
+              <a:t>
 </a:t>
             </a:r>
           </a:p>
@@ -7067,41 +7146,19 @@
                 <a:spcPts val="0"/>
               </a:spcBef>
               <a:spcAft>
-                <a:spcPts val="192"/>
+                <a:spcPts val="200"/>
               </a:spcAft>
             </a:pPr>
             <a:r>
-              <a:rPr sz="1150" lang="zh-TW" dirty="0">
-                <a:solidFill>
-                  <a:srgbClr val="000000"/>
-                </a:solidFill>
-                <a:latin typeface="Arial Unicode MS"/>
-                <a:ea typeface="Arial Unicode MS"/>
-                <a:cs typeface="Arial Unicode MS"/>
-              </a:rPr>
-              <a:t>先讓全班猜一下：</a:t>
-            </a:r>
-            <a:r>
-              <a:rPr sz="1150" b="1" lang="zh-TW" dirty="0">
-                <a:solidFill>
-                  <a:srgbClr val="000000"/>
-                </a:solidFill>
-                <a:latin typeface="Arial Unicode MS"/>
-                <a:ea typeface="Arial Unicode MS"/>
-                <a:cs typeface="Arial Unicode MS"/>
-              </a:rPr>
-              <a:t>哪一欄會最滿？</a:t>
-            </a:r>
-            <a:r>
-              <a:rPr sz="1150" lang="zh-TW" dirty="0">
-                <a:solidFill>
-                  <a:srgbClr val="000000"/>
-                </a:solidFill>
-                <a:latin typeface="Arial Unicode MS"/>
-                <a:ea typeface="Arial Unicode MS"/>
-                <a:cs typeface="Arial Unicode MS"/>
-              </a:rPr>
-              <a:t>
+              <a:rPr sz="1200" lang="zh-TW" dirty="0">
+                <a:solidFill>
+                  <a:srgbClr val="000000"/>
+                </a:solidFill>
+                <a:latin typeface="Arial Unicode MS"/>
+                <a:ea typeface="Arial Unicode MS"/>
+                <a:cs typeface="Arial Unicode MS"/>
+              </a:rPr>
+              <a:t>第一件：同一個情況重跑一萬次，每次只改一個參數。真實世界能嗎？不能。
 </a:t>
             </a:r>
           </a:p>
@@ -7111,19 +7168,41 @@
                 <a:spcPts val="0"/>
               </a:spcBef>
               <a:spcAft>
-                <a:spcPts val="192"/>
+                <a:spcPts val="200"/>
               </a:spcAft>
             </a:pPr>
             <a:r>
-              <a:rPr sz="1150" lang="zh-TW" dirty="0">
-                <a:solidFill>
-                  <a:srgbClr val="000000"/>
-                </a:solidFill>
-                <a:latin typeface="Arial Unicode MS"/>
-                <a:ea typeface="Arial Unicode MS"/>
-                <a:cs typeface="Arial Unicode MS"/>
-              </a:rPr>
-              <a:t>大部分的人會猜行為，而且會猜對。
+              <a:rPr sz="1200" lang="zh-TW" dirty="0">
+                <a:solidFill>
+                  <a:srgbClr val="000000"/>
+                </a:solidFill>
+                <a:latin typeface="Arial Unicode MS"/>
+                <a:ea typeface="Arial Unicode MS"/>
+                <a:cs typeface="Arial Unicode MS"/>
+              </a:rPr>
+              <a:t>第二件更重要：讓行人剛好在</a:t>
+            </a:r>
+            <a:r>
+              <a:rPr sz="1200" b="1" lang="zh-TW" dirty="0">
+                <a:solidFill>
+                  <a:srgbClr val="000000"/>
+                </a:solidFill>
+                <a:latin typeface="Arial Unicode MS"/>
+                <a:ea typeface="Arial Unicode MS"/>
+                <a:cs typeface="Arial Unicode MS"/>
+              </a:rPr>
+              <a:t>最糟的時間點</a:t>
+            </a:r>
+            <a:r>
+              <a:rPr sz="1200" lang="zh-TW" dirty="0">
+                <a:solidFill>
+                  <a:srgbClr val="000000"/>
+                </a:solidFill>
+                <a:latin typeface="Arial Unicode MS"/>
+                <a:ea typeface="Arial Unicode MS"/>
+                <a:cs typeface="Arial Unicode MS"/>
+              </a:rPr>
+              <a:t>走出來。真實世界能嗎？
 </a:t>
             </a:r>
           </a:p>
@@ -7133,19 +7212,19 @@
                 <a:spcPts val="0"/>
               </a:spcBef>
               <a:spcAft>
-                <a:spcPts val="192"/>
+                <a:spcPts val="200"/>
               </a:spcAft>
             </a:pPr>
             <a:r>
-              <a:rPr sz="1150" lang="zh-TW" dirty="0">
-                <a:solidFill>
-                  <a:srgbClr val="000000"/>
-                </a:solidFill>
-                <a:latin typeface="Arial Unicode MS"/>
-                <a:ea typeface="Arial Unicode MS"/>
-                <a:cs typeface="Arial Unicode MS"/>
-              </a:rPr>
-              <a:t>開始。
+              <a:rPr sz="1200" lang="zh-TW" dirty="0">
+                <a:solidFill>
+                  <a:srgbClr val="000000"/>
+                </a:solidFill>
+                <a:latin typeface="Arial Unicode MS"/>
+                <a:ea typeface="Arial Unicode MS"/>
+                <a:cs typeface="Arial Unicode MS"/>
+              </a:rPr>
+              <a:t>這一句我想聽大家自己說出來。
 </a:t>
             </a:r>
           </a:p>
@@ -7155,19 +7234,41 @@
                 <a:spcPts val="0"/>
               </a:spcBef>
               <a:spcAft>
-                <a:spcPts val="192"/>
+                <a:spcPts val="200"/>
               </a:spcAft>
             </a:pPr>
             <a:r>
-              <a:rPr sz="1150" lang="zh-TW" dirty="0">
-                <a:solidFill>
-                  <a:srgbClr val="000000"/>
-                </a:solidFill>
-                <a:latin typeface="Arial Unicode MS"/>
-                <a:ea typeface="Arial Unicode MS"/>
-                <a:cs typeface="Arial Unicode MS"/>
-              </a:rPr>
-              <a:t>大家講的例子，大部分會落在「行為」那一欄：鑽車縫、逆向、闖紅燈、路口不打方向燈、外送機車突然停下。這很正常，因為行為最有感。
+              <a:rPr sz="1200" lang="zh-TW" dirty="0">
+                <a:solidFill>
+                  <a:srgbClr val="000000"/>
+                </a:solidFill>
+                <a:latin typeface="Arial Unicode MS"/>
+                <a:ea typeface="Arial Unicode MS"/>
+                <a:cs typeface="Arial Unicode MS"/>
+              </a:rPr>
+              <a:t>技術上做得到，但</a:t>
+            </a:r>
+            <a:r>
+              <a:rPr sz="1200" b="1" lang="zh-TW" dirty="0">
+                <a:solidFill>
+                  <a:srgbClr val="000000"/>
+                </a:solidFill>
+                <a:latin typeface="Arial Unicode MS"/>
+                <a:ea typeface="Arial Unicode MS"/>
+                <a:cs typeface="Arial Unicode MS"/>
+              </a:rPr>
+              <a:t>不可以做</a:t>
+            </a:r>
+            <a:r>
+              <a:rPr sz="1200" lang="zh-TW" dirty="0">
+                <a:solidFill>
+                  <a:srgbClr val="000000"/>
+                </a:solidFill>
+                <a:latin typeface="Arial Unicode MS"/>
+                <a:ea typeface="Arial Unicode MS"/>
+                <a:cs typeface="Arial Unicode MS"/>
+              </a:rPr>
+              <a:t>。你不能為了測試，讓一個真人冒生命危險。
 </a:t>
             </a:r>
           </a:p>
@@ -7177,118 +7278,41 @@
                 <a:spcPts val="0"/>
               </a:spcBef>
               <a:spcAft>
-                <a:spcPts val="192"/>
+                <a:spcPts val="200"/>
               </a:spcAft>
             </a:pPr>
             <a:r>
-              <a:rPr sz="1150" b="1" lang="zh-TW" dirty="0">
-                <a:solidFill>
-                  <a:srgbClr val="000000"/>
-                </a:solidFill>
-                <a:latin typeface="Arial Unicode MS"/>
-                <a:ea typeface="Arial Unicode MS"/>
-                <a:cs typeface="Arial Unicode MS"/>
-              </a:rPr>
-              <a:t>老師要主動補一到兩個「物理」的例子</a:t>
-            </a:r>
-            <a:r>
-              <a:rPr sz="1150" lang="zh-TW" dirty="0">
-                <a:solidFill>
-                  <a:srgbClr val="000000"/>
-                </a:solidFill>
-                <a:latin typeface="Arial Unicode MS"/>
-                <a:ea typeface="Arial Unicode MS"/>
-                <a:cs typeface="Arial Unicode MS"/>
-              </a:rPr>
-              <a:t>，因為學生通常想不到：
-</a:t>
-            </a:r>
-          </a:p>
-          <a:p>
-            <a:pPr algn="l" marL="0" indent="0">
-              <a:spcBef>
-                <a:spcPts val="0"/>
-              </a:spcBef>
-              <a:spcAft>
-                <a:spcPts val="192"/>
-              </a:spcAft>
-            </a:pPr>
-            <a:r>
-              <a:rPr sz="1150" lang="zh-TW" dirty="0">
-                <a:solidFill>
-                  <a:srgbClr val="000000"/>
-                </a:solidFill>
-                <a:latin typeface="Arial Unicode MS"/>
-                <a:ea typeface="Arial Unicode MS"/>
-                <a:cs typeface="Arial Unicode MS"/>
-              </a:rPr>
-              <a:t>「人孔蓋。下雨天的人孔蓋很滑，機車壓過去會打滑。模擬器裡的地面是一整片，沒有人孔蓋這種東西。」
-</a:t>
-            </a:r>
-          </a:p>
-          <a:p>
-            <a:pPr algn="l" marL="0" indent="0">
-              <a:spcBef>
-                <a:spcPts val="0"/>
-              </a:spcBef>
-              <a:spcAft>
-                <a:spcPts val="192"/>
-              </a:spcAft>
-            </a:pPr>
-            <a:r>
-              <a:rPr sz="1150" lang="zh-TW" dirty="0">
-                <a:solidFill>
-                  <a:srgbClr val="000000"/>
-                </a:solidFill>
-                <a:latin typeface="Arial Unicode MS"/>
-                <a:ea typeface="Arial Unicode MS"/>
-                <a:cs typeface="Arial Unicode MS"/>
-              </a:rPr>
-              <a:t>「積水。你看到一個水窪，你不知道它是兩公分還是二十公分深。模擬器裡沒有水窪，就算有，也不會有深度不確定這件事。」
-</a:t>
-            </a:r>
-          </a:p>
-          <a:p>
-            <a:pPr algn="l" marL="0" indent="0">
-              <a:spcBef>
-                <a:spcPts val="0"/>
-              </a:spcBef>
-              <a:spcAft>
-                <a:spcPts val="192"/>
-              </a:spcAft>
-            </a:pPr>
-            <a:r>
-              <a:rPr sz="1150" lang="zh-TW" dirty="0">
-                <a:solidFill>
-                  <a:srgbClr val="000000"/>
-                </a:solidFill>
-                <a:latin typeface="Arial Unicode MS"/>
-                <a:ea typeface="Arial Unicode MS"/>
-                <a:cs typeface="Arial Unicode MS"/>
-              </a:rPr>
-              <a:t>（補完之後說）看白板：三欄都有東西，而且都是各位自己講出來的。</a:t>
-            </a:r>
-            <a:r>
-              <a:rPr sz="1150" b="1" lang="zh-TW" dirty="0">
-                <a:solidFill>
-                  <a:srgbClr val="000000"/>
-                </a:solidFill>
-                <a:latin typeface="Arial Unicode MS"/>
-                <a:ea typeface="Arial Unicode MS"/>
-                <a:cs typeface="Arial Unicode MS"/>
-              </a:rPr>
-              <a:t>這張白板就是台灣和越南版模擬器缺的東西清單。</a:t>
-            </a:r>
-            <a:r>
-              <a:rPr sz="1150" lang="zh-TW" dirty="0">
-                <a:solidFill>
-                  <a:srgbClr val="000000"/>
-                </a:solidFill>
-                <a:latin typeface="Arial Unicode MS"/>
-                <a:ea typeface="Arial Unicode MS"/>
-                <a:cs typeface="Arial Unicode MS"/>
-              </a:rPr>
-              <a:t>下一頁我把常見的答案列出來，各位對照一下自己講的。</a:t>
+              <a:rPr sz="1200" lang="zh-TW" dirty="0">
+                <a:solidFill>
+                  <a:srgbClr val="000000"/>
+                </a:solidFill>
+                <a:latin typeface="Arial Unicode MS"/>
+                <a:ea typeface="Arial Unicode MS"/>
+                <a:cs typeface="Arial Unicode MS"/>
+              </a:rPr>
+              <a:t>所以模擬不是「比較差的真實」，它是</a:t>
+            </a:r>
+            <a:r>
+              <a:rPr sz="1200" b="1" lang="zh-TW" dirty="0">
+                <a:solidFill>
+                  <a:srgbClr val="000000"/>
+                </a:solidFill>
+                <a:latin typeface="Arial Unicode MS"/>
+                <a:ea typeface="Arial Unicode MS"/>
+                <a:cs typeface="Arial Unicode MS"/>
+              </a:rPr>
+              <a:t>另一種工具</a:t>
+            </a:r>
+            <a:r>
+              <a:rPr sz="1200" lang="zh-TW" dirty="0">
+                <a:solidFill>
+                  <a:srgbClr val="000000"/>
+                </a:solidFill>
+                <a:latin typeface="Arial Unicode MS"/>
+                <a:ea typeface="Arial Unicode MS"/>
+                <a:cs typeface="Arial Unicode MS"/>
+              </a:rPr>
+              <a:t>。這句話我寫在白板上：模擬做不到的，真車做得到；真車做不到的，模擬做得到。兩個都要。</a:t>
             </a:r>
           </a:p>
         </p:txBody>
@@ -7409,7 +7433,51 @@
                 <a:ea typeface="Arial Unicode MS"/>
                 <a:cs typeface="Arial Unicode MS"/>
               </a:rPr>
-              <a:t>（討論結束）看這一頁，我把常見的答案列出來了，各位剛剛講的大部分都在裡面。
+              <a:t>剛剛那三種落差，在台灣和越南</a:t>
+            </a:r>
+            <a:r>
+              <a:rPr sz="1200" b="1" lang="zh-TW" dirty="0">
+                <a:solidFill>
+                  <a:srgbClr val="000000"/>
+                </a:solidFill>
+                <a:latin typeface="Arial Unicode MS"/>
+                <a:ea typeface="Arial Unicode MS"/>
+                <a:cs typeface="Arial Unicode MS"/>
+              </a:rPr>
+              <a:t>更大</a:t>
+            </a:r>
+            <a:r>
+              <a:rPr sz="1200" lang="zh-TW" dirty="0">
+                <a:solidFill>
+                  <a:srgbClr val="000000"/>
+                </a:solidFill>
+                <a:latin typeface="Arial Unicode MS"/>
+                <a:ea typeface="Arial Unicode MS"/>
+                <a:cs typeface="Arial Unicode MS"/>
+              </a:rPr>
+              <a:t>。原因很單純：現成的模擬器裡面的世界、車輛、行為，</a:t>
+            </a:r>
+            <a:r>
+              <a:rPr sz="1200" b="1" lang="zh-TW" dirty="0">
+                <a:solidFill>
+                  <a:srgbClr val="000000"/>
+                </a:solidFill>
+                <a:latin typeface="Arial Unicode MS"/>
+                <a:ea typeface="Arial Unicode MS"/>
+                <a:cs typeface="Arial Unicode MS"/>
+              </a:rPr>
+              <a:t>都是照歐美做的</a:t>
+            </a:r>
+            <a:r>
+              <a:rPr sz="1200" lang="zh-TW" dirty="0">
+                <a:solidFill>
+                  <a:srgbClr val="000000"/>
+                </a:solidFill>
+                <a:latin typeface="Arial Unicode MS"/>
+                <a:ea typeface="Arial Unicode MS"/>
+                <a:cs typeface="Arial Unicode MS"/>
+              </a:rPr>
+              <a:t>。
 </a:t>
             </a:r>
           </a:p>
@@ -7431,51 +7499,7 @@
                 <a:ea typeface="Arial Unicode MS"/>
                 <a:cs typeface="Arial Unicode MS"/>
               </a:rPr>
-              <a:t>回頭看白板：</a:t>
-            </a:r>
-            <a:r>
-              <a:rPr sz="1200" b="1" lang="zh-TW" dirty="0">
-                <a:solidFill>
-                  <a:srgbClr val="000000"/>
-                </a:solidFill>
-                <a:latin typeface="Arial Unicode MS"/>
-                <a:ea typeface="Arial Unicode MS"/>
-                <a:cs typeface="Arial Unicode MS"/>
-              </a:rPr>
-              <a:t>哪一欄最滿？行為。</a:t>
-            </a:r>
-            <a:r>
-              <a:rPr sz="1200" lang="zh-TW" dirty="0">
-                <a:solidFill>
-                  <a:srgbClr val="000000"/>
-                </a:solidFill>
-                <a:latin typeface="Arial Unicode MS"/>
-                <a:ea typeface="Arial Unicode MS"/>
-                <a:cs typeface="Arial Unicode MS"/>
-              </a:rPr>
-              <a:t>跟一開始猜的一樣。這不是巧合——外觀可以拍照建模，物理可以量，</a:t>
-            </a:r>
-            <a:r>
-              <a:rPr sz="1200" b="1" lang="zh-TW" dirty="0">
-                <a:solidFill>
-                  <a:srgbClr val="000000"/>
-                </a:solidFill>
-                <a:latin typeface="Arial Unicode MS"/>
-                <a:ea typeface="Arial Unicode MS"/>
-                <a:cs typeface="Arial Unicode MS"/>
-              </a:rPr>
-              <a:t>行為要先有人去收，而台灣和越南的沒有人收過。</a:t>
-            </a:r>
-            <a:r>
-              <a:rPr sz="1200" lang="zh-TW" dirty="0">
-                <a:solidFill>
-                  <a:srgbClr val="000000"/>
-                </a:solidFill>
-                <a:latin typeface="Arial Unicode MS"/>
-                <a:ea typeface="Arial Unicode MS"/>
-                <a:cs typeface="Arial Unicode MS"/>
-              </a:rPr>
-              <a:t>
+              <a:t>一欄一欄看。
 </a:t>
             </a:r>
           </a:p>
@@ -7489,6 +7513,17 @@
               </a:spcAft>
             </a:pPr>
             <a:r>
+              <a:rPr sz="1200" b="1" lang="zh-TW" dirty="0">
+                <a:solidFill>
+                  <a:srgbClr val="000000"/>
+                </a:solidFill>
+                <a:latin typeface="Arial Unicode MS"/>
+                <a:ea typeface="Arial Unicode MS"/>
+                <a:cs typeface="Arial Unicode MS"/>
+              </a:rPr>
+              <a:t>外觀</a:t>
+            </a:r>
+            <a:r>
               <a:rPr sz="1200" lang="zh-TW" dirty="0">
                 <a:solidFill>
                   <a:srgbClr val="000000"/>
@@ -7497,8 +7532,19 @@
                 <a:ea typeface="Arial Unicode MS"/>
                 <a:cs typeface="Arial Unicode MS"/>
               </a:rPr>
-              <a:t>物理那一欄我多列了幾條，因為剛剛比較少人講到。這一頁拍下來，上面每一條都是一個</a:t>
-            </a:r>
+              <a:t>：CARLA 裡有騎樓嗎？沒有。有滿街的招牌嗎？沒有。有機車待轉區嗎？沒有。
+</a:t>
+            </a:r>
+          </a:p>
+          <a:p>
+            <a:pPr algn="l" marL="0" indent="0">
+              <a:spcBef>
+                <a:spcPts val="0"/>
+              </a:spcBef>
+              <a:spcAft>
+                <a:spcPts val="200"/>
+              </a:spcAft>
+            </a:pPr>
             <a:r>
               <a:rPr sz="1200" b="1" lang="zh-TW" dirty="0">
                 <a:solidFill>
@@ -7508,7 +7554,7 @@
                 <a:ea typeface="Arial Unicode MS"/>
                 <a:cs typeface="Arial Unicode MS"/>
               </a:rPr>
-              <a:t>還沒有人做過</a:t>
+              <a:t>行為</a:t>
             </a:r>
             <a:r>
               <a:rPr sz="1200" lang="zh-TW" dirty="0">
@@ -7519,7 +7565,84 @@
                 <a:ea typeface="Arial Unicode MS"/>
                 <a:cs typeface="Arial Unicode MS"/>
               </a:rPr>
-              <a:t>的題目。</a:t>
+              <a:t>：這是差最多的。歐美的模擬器裡，機車是「偶爾出現的一台」。台灣綠燈起步是二十台機車扇形散開；越南是五公尺內十二台互相鑽。</a:t>
+            </a:r>
+            <a:r>
+              <a:rPr sz="1200" b="1" lang="zh-TW" dirty="0">
+                <a:solidFill>
+                  <a:srgbClr val="000000"/>
+                </a:solidFill>
+                <a:latin typeface="Arial Unicode MS"/>
+                <a:ea typeface="Arial Unicode MS"/>
+                <a:cs typeface="Arial Unicode MS"/>
+              </a:rPr>
+              <a:t>這種行為模型，現成的模擬器裡根本沒有。</a:t>
+            </a:r>
+            <a:r>
+              <a:rPr sz="1200" lang="zh-TW" dirty="0">
+                <a:solidFill>
+                  <a:srgbClr val="000000"/>
+                </a:solidFill>
+                <a:latin typeface="Arial Unicode MS"/>
+                <a:ea typeface="Arial Unicode MS"/>
+                <a:cs typeface="Arial Unicode MS"/>
+              </a:rPr>
+              <a:t>
+</a:t>
+            </a:r>
+          </a:p>
+          <a:p>
+            <a:pPr algn="l" marL="0" indent="0">
+              <a:spcBef>
+                <a:spcPts val="0"/>
+              </a:spcBef>
+              <a:spcAft>
+                <a:spcPts val="200"/>
+              </a:spcAft>
+            </a:pPr>
+            <a:r>
+              <a:rPr sz="1200" b="1" lang="zh-TW" dirty="0">
+                <a:solidFill>
+                  <a:srgbClr val="000000"/>
+                </a:solidFill>
+                <a:latin typeface="Arial Unicode MS"/>
+                <a:ea typeface="Arial Unicode MS"/>
+                <a:cs typeface="Arial Unicode MS"/>
+              </a:rPr>
+              <a:t>物理</a:t>
+            </a:r>
+            <a:r>
+              <a:rPr sz="1200" lang="zh-TW" dirty="0">
+                <a:solidFill>
+                  <a:srgbClr val="000000"/>
+                </a:solidFill>
+                <a:latin typeface="Arial Unicode MS"/>
+                <a:ea typeface="Arial Unicode MS"/>
+                <a:cs typeface="Arial Unicode MS"/>
+              </a:rPr>
+              <a:t>：補丁路面、人孔蓋、深淺不一的積水，這些都會影響抓地力，而模擬器裡的地面是一整片完美的平面。
+</a:t>
+            </a:r>
+          </a:p>
+          <a:p>
+            <a:pPr algn="l" marL="0" indent="0">
+              <a:spcBef>
+                <a:spcPts val="0"/>
+              </a:spcBef>
+              <a:spcAft>
+                <a:spcPts val="200"/>
+              </a:spcAft>
+            </a:pPr>
+            <a:r>
+              <a:rPr sz="1200" lang="zh-TW" dirty="0">
+                <a:solidFill>
+                  <a:srgbClr val="000000"/>
+                </a:solidFill>
+                <a:latin typeface="Arial Unicode MS"/>
+                <a:ea typeface="Arial Unicode MS"/>
+                <a:cs typeface="Arial Unicode MS"/>
+              </a:rPr>
+              <a:t>所以看最下面那句話。這不是抱怨，這是機會：那份資料只有各位收得到。</a:t>
             </a:r>
           </a:p>
         </p:txBody>
@@ -7881,22 +8004,374 @@
                 <a:spcPts val="0"/>
               </a:spcBef>
               <a:spcAft>
-                <a:spcPts val="200"/>
+                <a:spcPts val="192"/>
               </a:spcAft>
             </a:pPr>
             <a:r>
-              <a:rPr sz="1200" lang="zh-TW" dirty="0">
-                <a:solidFill>
-                  <a:srgbClr val="000000"/>
-                </a:solidFill>
-                <a:latin typeface="Arial Unicode MS"/>
-                <a:ea typeface="Arial Unicode MS"/>
-                <a:cs typeface="Arial Unicode MS"/>
-              </a:rPr>
-              <a:t>第一節到這裡。三句話帶走。
+              <a:rPr sz="1150" lang="zh-TW" dirty="0">
+                <a:solidFill>
+                  <a:srgbClr val="000000"/>
+                </a:solidFill>
+                <a:latin typeface="Arial Unicode MS"/>
+                <a:ea typeface="Arial Unicode MS"/>
+                <a:cs typeface="Arial Unicode MS"/>
+              </a:rPr>
+              <a:t>現在做一個四分鐘的討論。
 </a:t>
             </a:r>
           </a:p>
+          <a:p>
+            <a:pPr algn="l" marL="0" indent="0">
+              <a:spcBef>
+                <a:spcPts val="0"/>
+              </a:spcBef>
+              <a:spcAft>
+                <a:spcPts val="192"/>
+              </a:spcAft>
+            </a:pPr>
+            <a:r>
+              <a:rPr sz="1150" lang="zh-TW" dirty="0">
+                <a:solidFill>
+                  <a:srgbClr val="000000"/>
+                </a:solidFill>
+                <a:latin typeface="Arial Unicode MS"/>
+                <a:ea typeface="Arial Unicode MS"/>
+                <a:cs typeface="Arial Unicode MS"/>
+              </a:rPr>
+              <a:t>每一組講一件，我在白板上分三欄記下來：外觀、行為、物理。
+</a:t>
+            </a:r>
+          </a:p>
+          <a:p>
+            <a:pPr algn="l" marL="0" indent="0">
+              <a:spcBef>
+                <a:spcPts val="0"/>
+              </a:spcBef>
+              <a:spcAft>
+                <a:spcPts val="192"/>
+              </a:spcAft>
+            </a:pPr>
+            <a:r>
+              <a:rPr sz="1150" lang="zh-TW" dirty="0">
+                <a:solidFill>
+                  <a:srgbClr val="000000"/>
+                </a:solidFill>
+                <a:latin typeface="Arial Unicode MS"/>
+                <a:ea typeface="Arial Unicode MS"/>
+                <a:cs typeface="Arial Unicode MS"/>
+              </a:rPr>
+              <a:t>先讓全班猜一下：</a:t>
+            </a:r>
+            <a:r>
+              <a:rPr sz="1150" b="1" lang="zh-TW" dirty="0">
+                <a:solidFill>
+                  <a:srgbClr val="000000"/>
+                </a:solidFill>
+                <a:latin typeface="Arial Unicode MS"/>
+                <a:ea typeface="Arial Unicode MS"/>
+                <a:cs typeface="Arial Unicode MS"/>
+              </a:rPr>
+              <a:t>哪一欄會最滿？</a:t>
+            </a:r>
+            <a:r>
+              <a:rPr sz="1150" lang="zh-TW" dirty="0">
+                <a:solidFill>
+                  <a:srgbClr val="000000"/>
+                </a:solidFill>
+                <a:latin typeface="Arial Unicode MS"/>
+                <a:ea typeface="Arial Unicode MS"/>
+                <a:cs typeface="Arial Unicode MS"/>
+              </a:rPr>
+              <a:t>
+</a:t>
+            </a:r>
+          </a:p>
+          <a:p>
+            <a:pPr algn="l" marL="0" indent="0">
+              <a:spcBef>
+                <a:spcPts val="0"/>
+              </a:spcBef>
+              <a:spcAft>
+                <a:spcPts val="192"/>
+              </a:spcAft>
+            </a:pPr>
+            <a:r>
+              <a:rPr sz="1150" lang="zh-TW" dirty="0">
+                <a:solidFill>
+                  <a:srgbClr val="000000"/>
+                </a:solidFill>
+                <a:latin typeface="Arial Unicode MS"/>
+                <a:ea typeface="Arial Unicode MS"/>
+                <a:cs typeface="Arial Unicode MS"/>
+              </a:rPr>
+              <a:t>大部分的人會猜行為，而且會猜對。
+</a:t>
+            </a:r>
+          </a:p>
+          <a:p>
+            <a:pPr algn="l" marL="0" indent="0">
+              <a:spcBef>
+                <a:spcPts val="0"/>
+              </a:spcBef>
+              <a:spcAft>
+                <a:spcPts val="192"/>
+              </a:spcAft>
+            </a:pPr>
+            <a:r>
+              <a:rPr sz="1150" lang="zh-TW" dirty="0">
+                <a:solidFill>
+                  <a:srgbClr val="000000"/>
+                </a:solidFill>
+                <a:latin typeface="Arial Unicode MS"/>
+                <a:ea typeface="Arial Unicode MS"/>
+                <a:cs typeface="Arial Unicode MS"/>
+              </a:rPr>
+              <a:t>開始。
+</a:t>
+            </a:r>
+          </a:p>
+          <a:p>
+            <a:pPr algn="l" marL="0" indent="0">
+              <a:spcBef>
+                <a:spcPts val="0"/>
+              </a:spcBef>
+              <a:spcAft>
+                <a:spcPts val="192"/>
+              </a:spcAft>
+            </a:pPr>
+            <a:r>
+              <a:rPr sz="1150" lang="zh-TW" dirty="0">
+                <a:solidFill>
+                  <a:srgbClr val="000000"/>
+                </a:solidFill>
+                <a:latin typeface="Arial Unicode MS"/>
+                <a:ea typeface="Arial Unicode MS"/>
+                <a:cs typeface="Arial Unicode MS"/>
+              </a:rPr>
+              <a:t>大家講的例子，大部分會落在「行為」那一欄：鑽車縫、逆向、闖紅燈、路口不打方向燈、外送機車突然停下。這很正常，因為行為最有感。
+</a:t>
+            </a:r>
+          </a:p>
+          <a:p>
+            <a:pPr algn="l" marL="0" indent="0">
+              <a:spcBef>
+                <a:spcPts val="0"/>
+              </a:spcBef>
+              <a:spcAft>
+                <a:spcPts val="192"/>
+              </a:spcAft>
+            </a:pPr>
+            <a:r>
+              <a:rPr sz="1150" b="1" lang="zh-TW" dirty="0">
+                <a:solidFill>
+                  <a:srgbClr val="000000"/>
+                </a:solidFill>
+                <a:latin typeface="Arial Unicode MS"/>
+                <a:ea typeface="Arial Unicode MS"/>
+                <a:cs typeface="Arial Unicode MS"/>
+              </a:rPr>
+              <a:t>老師要主動補一到兩個「物理」的例子</a:t>
+            </a:r>
+            <a:r>
+              <a:rPr sz="1150" lang="zh-TW" dirty="0">
+                <a:solidFill>
+                  <a:srgbClr val="000000"/>
+                </a:solidFill>
+                <a:latin typeface="Arial Unicode MS"/>
+                <a:ea typeface="Arial Unicode MS"/>
+                <a:cs typeface="Arial Unicode MS"/>
+              </a:rPr>
+              <a:t>，因為學生通常想不到：
+</a:t>
+            </a:r>
+          </a:p>
+          <a:p>
+            <a:pPr algn="l" marL="0" indent="0">
+              <a:spcBef>
+                <a:spcPts val="0"/>
+              </a:spcBef>
+              <a:spcAft>
+                <a:spcPts val="192"/>
+              </a:spcAft>
+            </a:pPr>
+            <a:r>
+              <a:rPr sz="1150" lang="zh-TW" dirty="0">
+                <a:solidFill>
+                  <a:srgbClr val="000000"/>
+                </a:solidFill>
+                <a:latin typeface="Arial Unicode MS"/>
+                <a:ea typeface="Arial Unicode MS"/>
+                <a:cs typeface="Arial Unicode MS"/>
+              </a:rPr>
+              <a:t>「人孔蓋。下雨天的人孔蓋很滑，機車壓過去會打滑。模擬器裡的地面是一整片，沒有人孔蓋這種東西。」
+</a:t>
+            </a:r>
+          </a:p>
+          <a:p>
+            <a:pPr algn="l" marL="0" indent="0">
+              <a:spcBef>
+                <a:spcPts val="0"/>
+              </a:spcBef>
+              <a:spcAft>
+                <a:spcPts val="192"/>
+              </a:spcAft>
+            </a:pPr>
+            <a:r>
+              <a:rPr sz="1150" lang="zh-TW" dirty="0">
+                <a:solidFill>
+                  <a:srgbClr val="000000"/>
+                </a:solidFill>
+                <a:latin typeface="Arial Unicode MS"/>
+                <a:ea typeface="Arial Unicode MS"/>
+                <a:cs typeface="Arial Unicode MS"/>
+              </a:rPr>
+              <a:t>「積水。你看到一個水窪，你不知道它是兩公分還是二十公分深。模擬器裡沒有水窪，就算有，也不會有深度不確定這件事。」
+</a:t>
+            </a:r>
+          </a:p>
+          <a:p>
+            <a:pPr algn="l" marL="0" indent="0">
+              <a:spcBef>
+                <a:spcPts val="0"/>
+              </a:spcBef>
+              <a:spcAft>
+                <a:spcPts val="192"/>
+              </a:spcAft>
+            </a:pPr>
+            <a:r>
+              <a:rPr sz="1150" lang="zh-TW" dirty="0">
+                <a:solidFill>
+                  <a:srgbClr val="000000"/>
+                </a:solidFill>
+                <a:latin typeface="Arial Unicode MS"/>
+                <a:ea typeface="Arial Unicode MS"/>
+                <a:cs typeface="Arial Unicode MS"/>
+              </a:rPr>
+              <a:t>（補完之後說）看白板：三欄都有東西，而且都是各位自己講出來的。</a:t>
+            </a:r>
+            <a:r>
+              <a:rPr sz="1150" b="1" lang="zh-TW" dirty="0">
+                <a:solidFill>
+                  <a:srgbClr val="000000"/>
+                </a:solidFill>
+                <a:latin typeface="Arial Unicode MS"/>
+                <a:ea typeface="Arial Unicode MS"/>
+                <a:cs typeface="Arial Unicode MS"/>
+              </a:rPr>
+              <a:t>這張白板就是台灣和越南版模擬器缺的東西清單。</a:t>
+            </a:r>
+            <a:r>
+              <a:rPr sz="1150" lang="zh-TW" dirty="0">
+                <a:solidFill>
+                  <a:srgbClr val="000000"/>
+                </a:solidFill>
+                <a:latin typeface="Arial Unicode MS"/>
+                <a:ea typeface="Arial Unicode MS"/>
+                <a:cs typeface="Arial Unicode MS"/>
+              </a:rPr>
+              <a:t>下一頁我把常見的答案列出來，各位對照一下自己講的。</a:t>
+            </a:r>
+          </a:p>
+        </p:txBody>
+      </p:sp>
+      <p:sp>
+        <p:nvSpPr>
+          <p:cNvPr id="4" name="Slide Number Placeholder 3"/>
+          <p:cNvSpPr>
+            <a:spLocks noGrp="1"/>
+          </p:cNvSpPr>
+          <p:nvPr>
+            <p:ph type="sldNum" idx="5"/>
+          </p:nvPr>
+        </p:nvSpPr>
+        <p:spPr>
+          <a:xfrm>
+            <a:off x="6500000" y="10200000"/>
+            <a:ext cx="500000" cy="300000"/>
+          </a:xfrm>
+        </p:spPr>
+        <p:txBody>
+          <a:bodyPr vert="horz" wrap="square" anchor="t" lIns="91440" rIns="91440" tIns="45720" bIns="45720"/>
+          <a:lstStyle/>
+          <a:p>
+            <a:pPr algn="l" marL="0" indent="0">
+              <a:spcBef>
+                <a:spcPts val="0"/>
+              </a:spcBef>
+              <a:spcAft>
+                <a:spcPts val="167"/>
+              </a:spcAft>
+            </a:pPr>
+            <a:r>
+              <a:rPr sz="1000" lang="zh-TW" dirty="0">
+                <a:solidFill>
+                  <a:srgbClr val="000000"/>
+                </a:solidFill>
+                <a:latin typeface="Arial Unicode MS"/>
+                <a:ea typeface="Arial Unicode MS"/>
+                <a:cs typeface="Arial Unicode MS"/>
+              </a:rPr>
+              <a:t>30</a:t>
+            </a:r>
+          </a:p>
+        </p:txBody>
+      </p:sp>
+    </p:spTree>
+  </p:cSld>
+  <p:clrMapOvr>
+    <a:masterClrMapping/>
+  </p:clrMapOvr>
+</p:notes>
+</file>
+
+<file path=ppt/notesSlides/notesSlide31.xml><?xml version="1.0" encoding="utf-8"?>
+<p:notes xmlns:a="http://schemas.openxmlformats.org/drawingml/2006/main" xmlns:p="http://schemas.openxmlformats.org/presentationml/2006/main">
+  <p:cSld>
+    <p:spTree>
+      <p:nvGrpSpPr>
+        <p:cNvPr id="1" name=""/>
+        <p:cNvGrpSpPr/>
+        <p:nvPr/>
+      </p:nvGrpSpPr>
+      <p:grpSpPr>
+        <a:xfrm/>
+      </p:grpSpPr>
+      <p:sp>
+        <p:nvSpPr>
+          <p:cNvPr id="2" name="Slide Image Placeholder 1"/>
+          <p:cNvSpPr>
+            <a:spLocks noGrp="1"/>
+          </p:cNvSpPr>
+          <p:nvPr>
+            <p:ph type="sldImg" idx="2"/>
+          </p:nvPr>
+        </p:nvSpPr>
+        <p:spPr>
+          <a:xfrm>
+            <a:off x="540000" y="540000"/>
+            <a:ext cx="6480000" cy="3645000"/>
+          </a:xfrm>
+        </p:spPr>
+      </p:sp>
+      <p:sp>
+        <p:nvSpPr>
+          <p:cNvPr id="3" name="Notes Placeholder 2"/>
+          <p:cNvSpPr>
+            <a:spLocks noGrp="1"/>
+          </p:cNvSpPr>
+          <p:nvPr>
+            <p:ph type="body" idx="3"/>
+          </p:nvPr>
+        </p:nvSpPr>
+        <p:spPr>
+          <a:xfrm>
+            <a:off x="540000" y="4440000"/>
+            <a:ext cx="6480000" cy="5500000"/>
+          </a:xfrm>
+        </p:spPr>
+        <p:txBody>
+          <a:bodyPr vert="horz" wrap="square" anchor="t" lIns="91440" rIns="91440" tIns="45720" bIns="45720"/>
+          <a:lstStyle/>
           <a:p>
             <a:pPr algn="l" marL="0" indent="0">
               <a:spcBef>
@@ -7915,29 +8390,7 @@
                 <a:ea typeface="Arial Unicode MS"/>
                 <a:cs typeface="Arial Unicode MS"/>
               </a:rPr>
-              <a:t>第一句，</a:t>
-            </a:r>
-            <a:r>
-              <a:rPr sz="1200" b="1" lang="zh-TW" dirty="0">
-                <a:solidFill>
-                  <a:srgbClr val="000000"/>
-                </a:solidFill>
-                <a:latin typeface="Arial Unicode MS"/>
-                <a:ea typeface="Arial Unicode MS"/>
-                <a:cs typeface="Arial Unicode MS"/>
-              </a:rPr>
-              <a:t>三個滑桿就是三個規格</a:t>
-            </a:r>
-            <a:r>
-              <a:rPr sz="1200" lang="zh-TW" dirty="0">
-                <a:solidFill>
-                  <a:srgbClr val="000000"/>
-                </a:solidFill>
-                <a:latin typeface="Arial Unicode MS"/>
-                <a:ea typeface="Arial Unicode MS"/>
-                <a:cs typeface="Arial Unicode MS"/>
-              </a:rPr>
-              <a:t>：射線數是解析度、長度是測距範圍、張角是視野。第五週我拿真的規格表來，各位會發現上面就是這三個數字。
+              <a:t>（討論結束）看這一頁，我把常見的答案列出來了，各位剛剛講的大部分都在裡面。
 </a:t>
             </a:r>
           </a:p>
@@ -7959,7 +8412,7 @@
                 <a:ea typeface="Arial Unicode MS"/>
                 <a:cs typeface="Arial Unicode MS"/>
               </a:rPr>
-              <a:t>第二句，</a:t>
+              <a:t>回頭看白板：</a:t>
             </a:r>
             <a:r>
               <a:rPr sz="1200" b="1" lang="zh-TW" dirty="0">
@@ -7970,7 +8423,7 @@
                 <a:ea typeface="Arial Unicode MS"/>
                 <a:cs typeface="Arial Unicode MS"/>
               </a:rPr>
-              <a:t>煞停距離決定射線至少要多長</a:t>
+              <a:t>哪一欄最滿？行為。</a:t>
             </a:r>
             <a:r>
               <a:rPr sz="1200" lang="zh-TW" dirty="0">
@@ -7981,7 +8434,29 @@
                 <a:ea typeface="Arial Unicode MS"/>
                 <a:cs typeface="Arial Unicode MS"/>
               </a:rPr>
-              <a:t>。時速五十，至少二十五公尺。這是被物理逼出來的下限，不是喜好問題。
+              <a:t>跟一開始猜的一樣。這不是巧合——外觀可以拍照建模，物理可以量，</a:t>
+            </a:r>
+            <a:r>
+              <a:rPr sz="1200" b="1" lang="zh-TW" dirty="0">
+                <a:solidFill>
+                  <a:srgbClr val="000000"/>
+                </a:solidFill>
+                <a:latin typeface="Arial Unicode MS"/>
+                <a:ea typeface="Arial Unicode MS"/>
+                <a:cs typeface="Arial Unicode MS"/>
+              </a:rPr>
+              <a:t>行為要先有人去收，而台灣和越南的沒有人收過。</a:t>
+            </a:r>
+            <a:r>
+              <a:rPr sz="1200" lang="zh-TW" dirty="0">
+                <a:solidFill>
+                  <a:srgbClr val="000000"/>
+                </a:solidFill>
+                <a:latin typeface="Arial Unicode MS"/>
+                <a:ea typeface="Arial Unicode MS"/>
+                <a:cs typeface="Arial Unicode MS"/>
+              </a:rPr>
+              <a:t>
 </a:t>
             </a:r>
           </a:p>
@@ -8003,7 +8478,7 @@
                 <a:ea typeface="Arial Unicode MS"/>
                 <a:cs typeface="Arial Unicode MS"/>
               </a:rPr>
-              <a:t>第三句，</a:t>
+              <a:t>物理那一欄我多列了幾條，因為剛剛比較少人講到。這一頁拍下來，上面每一條都是一個</a:t>
             </a:r>
             <a:r>
               <a:rPr sz="1200" b="1" lang="zh-TW" dirty="0">
@@ -8014,7 +8489,7 @@
                 <a:ea typeface="Arial Unicode MS"/>
                 <a:cs typeface="Arial Unicode MS"/>
               </a:rPr>
-              <a:t>三種落差：外觀、行為、物理</a:t>
+              <a:t>還沒有人做過</a:t>
             </a:r>
             <a:r>
               <a:rPr sz="1200" lang="zh-TW" dirty="0">
@@ -8025,10 +8500,109 @@
                 <a:ea typeface="Arial Unicode MS"/>
                 <a:cs typeface="Arial Unicode MS"/>
               </a:rPr>
-              <a:t>。而且在台灣和越南都更大，因為現成的模擬器是照歐美做的。
-</a:t>
-            </a:r>
-          </a:p>
+              <a:t>的題目。</a:t>
+            </a:r>
+          </a:p>
+        </p:txBody>
+      </p:sp>
+      <p:sp>
+        <p:nvSpPr>
+          <p:cNvPr id="4" name="Slide Number Placeholder 3"/>
+          <p:cNvSpPr>
+            <a:spLocks noGrp="1"/>
+          </p:cNvSpPr>
+          <p:nvPr>
+            <p:ph type="sldNum" idx="5"/>
+          </p:nvPr>
+        </p:nvSpPr>
+        <p:spPr>
+          <a:xfrm>
+            <a:off x="6500000" y="10200000"/>
+            <a:ext cx="500000" cy="300000"/>
+          </a:xfrm>
+        </p:spPr>
+        <p:txBody>
+          <a:bodyPr vert="horz" wrap="square" anchor="t" lIns="91440" rIns="91440" tIns="45720" bIns="45720"/>
+          <a:lstStyle/>
+          <a:p>
+            <a:pPr algn="l" marL="0" indent="0">
+              <a:spcBef>
+                <a:spcPts val="0"/>
+              </a:spcBef>
+              <a:spcAft>
+                <a:spcPts val="167"/>
+              </a:spcAft>
+            </a:pPr>
+            <a:r>
+              <a:rPr sz="1000" lang="zh-TW" dirty="0">
+                <a:solidFill>
+                  <a:srgbClr val="000000"/>
+                </a:solidFill>
+                <a:latin typeface="Arial Unicode MS"/>
+                <a:ea typeface="Arial Unicode MS"/>
+                <a:cs typeface="Arial Unicode MS"/>
+              </a:rPr>
+              <a:t>31</a:t>
+            </a:r>
+          </a:p>
+        </p:txBody>
+      </p:sp>
+    </p:spTree>
+  </p:cSld>
+  <p:clrMapOvr>
+    <a:masterClrMapping/>
+  </p:clrMapOvr>
+</p:notes>
+</file>
+
+<file path=ppt/notesSlides/notesSlide32.xml><?xml version="1.0" encoding="utf-8"?>
+<p:notes xmlns:a="http://schemas.openxmlformats.org/drawingml/2006/main" xmlns:p="http://schemas.openxmlformats.org/presentationml/2006/main">
+  <p:cSld>
+    <p:spTree>
+      <p:nvGrpSpPr>
+        <p:cNvPr id="1" name=""/>
+        <p:cNvGrpSpPr/>
+        <p:nvPr/>
+      </p:nvGrpSpPr>
+      <p:grpSpPr>
+        <a:xfrm/>
+      </p:grpSpPr>
+      <p:sp>
+        <p:nvSpPr>
+          <p:cNvPr id="2" name="Slide Image Placeholder 1"/>
+          <p:cNvSpPr>
+            <a:spLocks noGrp="1"/>
+          </p:cNvSpPr>
+          <p:nvPr>
+            <p:ph type="sldImg" idx="2"/>
+          </p:nvPr>
+        </p:nvSpPr>
+        <p:spPr>
+          <a:xfrm>
+            <a:off x="540000" y="540000"/>
+            <a:ext cx="6480000" cy="3645000"/>
+          </a:xfrm>
+        </p:spPr>
+      </p:sp>
+      <p:sp>
+        <p:nvSpPr>
+          <p:cNvPr id="3" name="Notes Placeholder 2"/>
+          <p:cNvSpPr>
+            <a:spLocks noGrp="1"/>
+          </p:cNvSpPr>
+          <p:nvPr>
+            <p:ph type="body" idx="3"/>
+          </p:nvPr>
+        </p:nvSpPr>
+        <p:spPr>
+          <a:xfrm>
+            <a:off x="540000" y="4440000"/>
+            <a:ext cx="6480000" cy="5500000"/>
+          </a:xfrm>
+        </p:spPr>
+        <p:txBody>
+          <a:bodyPr vert="horz" wrap="square" anchor="t" lIns="91440" rIns="91440" tIns="45720" bIns="45720"/>
+          <a:lstStyle/>
           <a:p>
             <a:pPr algn="l" marL="0" indent="0">
               <a:spcBef>
@@ -8047,29 +8621,7 @@
                 <a:ea typeface="Arial Unicode MS"/>
                 <a:cs typeface="Arial Unicode MS"/>
               </a:rPr>
-              <a:t>休息十分鐘。</a:t>
-            </a:r>
-            <a:r>
-              <a:rPr sz="1200" b="1" lang="zh-TW" dirty="0">
-                <a:solidFill>
-                  <a:srgbClr val="000000"/>
-                </a:solidFill>
-                <a:latin typeface="Arial Unicode MS"/>
-                <a:ea typeface="Arial Unicode MS"/>
-                <a:cs typeface="Arial Unicode MS"/>
-              </a:rPr>
-              <a:t>模擬器那個分頁先不要關</a:t>
-            </a:r>
-            <a:r>
-              <a:rPr sz="1200" lang="zh-TW" dirty="0">
-                <a:solidFill>
-                  <a:srgbClr val="000000"/>
-                </a:solidFill>
-                <a:latin typeface="Arial Unicode MS"/>
-                <a:ea typeface="Arial Unicode MS"/>
-                <a:cs typeface="Arial Unicode MS"/>
-              </a:rPr>
-              <a:t>——第二節中間會用到一次，第三節整整五十分鐘都在用它。
+              <a:t>第一節到這裡。三句話帶走。
 </a:t>
             </a:r>
           </a:p>
@@ -8091,7 +8643,29 @@
                 <a:ea typeface="Arial Unicode MS"/>
                 <a:cs typeface="Arial Unicode MS"/>
               </a:rPr>
-              <a:t>第二節我要問各位一個問題：如果「跑了幾公里」不是一個好的測試單位，那什麼才是？
+              <a:t>第一句，</a:t>
+            </a:r>
+            <a:r>
+              <a:rPr sz="1200" b="1" lang="zh-TW" dirty="0">
+                <a:solidFill>
+                  <a:srgbClr val="000000"/>
+                </a:solidFill>
+                <a:latin typeface="Arial Unicode MS"/>
+                <a:ea typeface="Arial Unicode MS"/>
+                <a:cs typeface="Arial Unicode MS"/>
+              </a:rPr>
+              <a:t>三個滑桿就是三個規格</a:t>
+            </a:r>
+            <a:r>
+              <a:rPr sz="1200" lang="zh-TW" dirty="0">
+                <a:solidFill>
+                  <a:srgbClr val="000000"/>
+                </a:solidFill>
+                <a:latin typeface="Arial Unicode MS"/>
+                <a:ea typeface="Arial Unicode MS"/>
+                <a:cs typeface="Arial Unicode MS"/>
+              </a:rPr>
+              <a:t>：射線數是解析度、長度是測距範圍、張角是視野。第五週我拿真的規格表來，各位會發現上面就是這三個數字。
 </a:t>
             </a:r>
           </a:p>
@@ -8113,6 +8687,160 @@
                 <a:ea typeface="Arial Unicode MS"/>
                 <a:cs typeface="Arial Unicode MS"/>
               </a:rPr>
+              <a:t>第二句，</a:t>
+            </a:r>
+            <a:r>
+              <a:rPr sz="1200" b="1" lang="zh-TW" dirty="0">
+                <a:solidFill>
+                  <a:srgbClr val="000000"/>
+                </a:solidFill>
+                <a:latin typeface="Arial Unicode MS"/>
+                <a:ea typeface="Arial Unicode MS"/>
+                <a:cs typeface="Arial Unicode MS"/>
+              </a:rPr>
+              <a:t>煞停距離決定射線至少要多長</a:t>
+            </a:r>
+            <a:r>
+              <a:rPr sz="1200" lang="zh-TW" dirty="0">
+                <a:solidFill>
+                  <a:srgbClr val="000000"/>
+                </a:solidFill>
+                <a:latin typeface="Arial Unicode MS"/>
+                <a:ea typeface="Arial Unicode MS"/>
+                <a:cs typeface="Arial Unicode MS"/>
+              </a:rPr>
+              <a:t>。時速五十，至少二十五公尺。這是被物理逼出來的下限，不是喜好問題。
+</a:t>
+            </a:r>
+          </a:p>
+          <a:p>
+            <a:pPr algn="l" marL="0" indent="0">
+              <a:spcBef>
+                <a:spcPts val="0"/>
+              </a:spcBef>
+              <a:spcAft>
+                <a:spcPts val="200"/>
+              </a:spcAft>
+            </a:pPr>
+            <a:r>
+              <a:rPr sz="1200" lang="zh-TW" dirty="0">
+                <a:solidFill>
+                  <a:srgbClr val="000000"/>
+                </a:solidFill>
+                <a:latin typeface="Arial Unicode MS"/>
+                <a:ea typeface="Arial Unicode MS"/>
+                <a:cs typeface="Arial Unicode MS"/>
+              </a:rPr>
+              <a:t>第三句，</a:t>
+            </a:r>
+            <a:r>
+              <a:rPr sz="1200" b="1" lang="zh-TW" dirty="0">
+                <a:solidFill>
+                  <a:srgbClr val="000000"/>
+                </a:solidFill>
+                <a:latin typeface="Arial Unicode MS"/>
+                <a:ea typeface="Arial Unicode MS"/>
+                <a:cs typeface="Arial Unicode MS"/>
+              </a:rPr>
+              <a:t>三種落差：外觀、行為、物理</a:t>
+            </a:r>
+            <a:r>
+              <a:rPr sz="1200" lang="zh-TW" dirty="0">
+                <a:solidFill>
+                  <a:srgbClr val="000000"/>
+                </a:solidFill>
+                <a:latin typeface="Arial Unicode MS"/>
+                <a:ea typeface="Arial Unicode MS"/>
+                <a:cs typeface="Arial Unicode MS"/>
+              </a:rPr>
+              <a:t>。而且在台灣和越南都更大，因為現成的模擬器是照歐美做的。
+</a:t>
+            </a:r>
+          </a:p>
+          <a:p>
+            <a:pPr algn="l" marL="0" indent="0">
+              <a:spcBef>
+                <a:spcPts val="0"/>
+              </a:spcBef>
+              <a:spcAft>
+                <a:spcPts val="200"/>
+              </a:spcAft>
+            </a:pPr>
+            <a:r>
+              <a:rPr sz="1200" lang="zh-TW" dirty="0">
+                <a:solidFill>
+                  <a:srgbClr val="000000"/>
+                </a:solidFill>
+                <a:latin typeface="Arial Unicode MS"/>
+                <a:ea typeface="Arial Unicode MS"/>
+                <a:cs typeface="Arial Unicode MS"/>
+              </a:rPr>
+              <a:t>休息十分鐘。</a:t>
+            </a:r>
+            <a:r>
+              <a:rPr sz="1200" b="1" lang="zh-TW" dirty="0">
+                <a:solidFill>
+                  <a:srgbClr val="000000"/>
+                </a:solidFill>
+                <a:latin typeface="Arial Unicode MS"/>
+                <a:ea typeface="Arial Unicode MS"/>
+                <a:cs typeface="Arial Unicode MS"/>
+              </a:rPr>
+              <a:t>模擬器那個分頁先不要關</a:t>
+            </a:r>
+            <a:r>
+              <a:rPr sz="1200" lang="zh-TW" dirty="0">
+                <a:solidFill>
+                  <a:srgbClr val="000000"/>
+                </a:solidFill>
+                <a:latin typeface="Arial Unicode MS"/>
+                <a:ea typeface="Arial Unicode MS"/>
+                <a:cs typeface="Arial Unicode MS"/>
+              </a:rPr>
+              <a:t>——第二節中間會用到一次，第三節整整五十分鐘都在用它。
+</a:t>
+            </a:r>
+          </a:p>
+          <a:p>
+            <a:pPr algn="l" marL="0" indent="0">
+              <a:spcBef>
+                <a:spcPts val="0"/>
+              </a:spcBef>
+              <a:spcAft>
+                <a:spcPts val="200"/>
+              </a:spcAft>
+            </a:pPr>
+            <a:r>
+              <a:rPr sz="1200" lang="zh-TW" dirty="0">
+                <a:solidFill>
+                  <a:srgbClr val="000000"/>
+                </a:solidFill>
+                <a:latin typeface="Arial Unicode MS"/>
+                <a:ea typeface="Arial Unicode MS"/>
+                <a:cs typeface="Arial Unicode MS"/>
+              </a:rPr>
+              <a:t>第二節我要問各位一個問題：如果「跑了幾公里」不是一個好的測試單位，那什麼才是？
+</a:t>
+            </a:r>
+          </a:p>
+          <a:p>
+            <a:pPr algn="l" marL="0" indent="0">
+              <a:spcBef>
+                <a:spcPts val="0"/>
+              </a:spcBef>
+              <a:spcAft>
+                <a:spcPts val="200"/>
+              </a:spcAft>
+            </a:pPr>
+            <a:r>
+              <a:rPr sz="1200" lang="zh-TW" dirty="0">
+                <a:solidFill>
+                  <a:srgbClr val="000000"/>
+                </a:solidFill>
+                <a:latin typeface="Arial Unicode MS"/>
+                <a:ea typeface="Arial Unicode MS"/>
+                <a:cs typeface="Arial Unicode MS"/>
+              </a:rPr>
               <a:t>第二節的主題就是「場景」。</a:t>
             </a:r>
           </a:p>
@@ -8155,7 +8883,7 @@
                 <a:ea typeface="Arial Unicode MS"/>
                 <a:cs typeface="Arial Unicode MS"/>
               </a:rPr>
-              <a:t>30</a:t>
+              <a:t>32</a:t>
             </a:r>
           </a:p>
         </p:txBody>
@@ -11724,7 +12452,7 @@
                 <a:ea typeface="Arial" pitchFamily="34" charset="-122"/>
                 <a:cs typeface="Arial" pitchFamily="34" charset="-120"/>
               </a:rPr>
-              <a:t>1 / 30</a:t>
+              <a:t>1 / 32</a:t>
             </a:r>
             <a:endParaRPr lang="en-US" sz="700" dirty="0"/>
           </a:p>
@@ -13153,7 +13881,7 @@
                 <a:ea typeface="Arial" pitchFamily="34" charset="-122"/>
                 <a:cs typeface="Arial" pitchFamily="34" charset="-120"/>
               </a:rPr>
-              <a:t>10 / 30</a:t>
+              <a:t>10 / 32</a:t>
             </a:r>
             <a:endParaRPr lang="en-US" sz="720" dirty="0"/>
           </a:p>
@@ -13921,7 +14649,7 @@
                 <a:ea typeface="Arial" pitchFamily="34" charset="-122"/>
                 <a:cs typeface="Arial" pitchFamily="34" charset="-120"/>
               </a:rPr>
-              <a:t>11 / 30</a:t>
+              <a:t>11 / 32</a:t>
             </a:r>
             <a:endParaRPr lang="en-US" sz="690" dirty="0"/>
           </a:p>
@@ -14737,7 +15465,7 @@
                 <a:ea typeface="Arial" pitchFamily="34" charset="-122"/>
                 <a:cs typeface="Arial" pitchFamily="34" charset="-120"/>
               </a:rPr>
-              <a:t>12 / 30</a:t>
+              <a:t>12 / 32</a:t>
             </a:r>
             <a:endParaRPr lang="en-US" sz="710" dirty="0"/>
           </a:p>
@@ -15472,7 +16200,7 @@
                 <a:ea typeface="Arial" pitchFamily="34" charset="-122"/>
                 <a:cs typeface="Arial" pitchFamily="34" charset="-120"/>
               </a:rPr>
-              <a:t>13 / 30</a:t>
+              <a:t>13 / 32</a:t>
             </a:r>
             <a:endParaRPr lang="en-US" sz="700" dirty="0"/>
           </a:p>
@@ -16692,7 +17420,7 @@
                 <a:ea typeface="Arial" pitchFamily="34" charset="-122"/>
                 <a:cs typeface="Arial" pitchFamily="34" charset="-120"/>
               </a:rPr>
-              <a:t>14 / 30</a:t>
+              <a:t>14 / 32</a:t>
             </a:r>
             <a:endParaRPr lang="en-US" sz="700" dirty="0"/>
           </a:p>
@@ -17581,7 +18309,7 @@
                 <a:ea typeface="Arial" pitchFamily="34" charset="-122"/>
                 <a:cs typeface="Arial" pitchFamily="34" charset="-120"/>
               </a:rPr>
-              <a:t>15 / 30</a:t>
+              <a:t>15 / 32</a:t>
             </a:r>
             <a:endParaRPr lang="en-US" sz="690" dirty="0"/>
           </a:p>
@@ -18494,7 +19222,7 @@
                 <a:ea typeface="Arial" pitchFamily="34" charset="-122"/>
                 <a:cs typeface="Arial" pitchFamily="34" charset="-120"/>
               </a:rPr>
-              <a:t>16 / 30</a:t>
+              <a:t>16 / 32</a:t>
             </a:r>
             <a:endParaRPr lang="en-US" sz="700" dirty="0"/>
           </a:p>
@@ -19614,7 +20342,7 @@
                 <a:ea typeface="Arial" pitchFamily="34" charset="-122"/>
                 <a:cs typeface="Arial" pitchFamily="34" charset="-120"/>
               </a:rPr>
-              <a:t>17 / 30</a:t>
+              <a:t>17 / 32</a:t>
             </a:r>
             <a:endParaRPr lang="en-US" sz="720" dirty="0"/>
           </a:p>
@@ -22094,7 +22822,7 @@
                 <a:ea typeface="Arial" pitchFamily="34" charset="-122"/>
                 <a:cs typeface="Arial" pitchFamily="34" charset="-120"/>
               </a:rPr>
-              <a:t>18 / 30</a:t>
+              <a:t>18 / 32</a:t>
             </a:r>
             <a:endParaRPr lang="en-US" sz="640" dirty="0"/>
           </a:p>
@@ -23621,7 +24349,7 @@
                 <a:ea typeface="Arial" pitchFamily="34" charset="-122"/>
                 <a:cs typeface="Arial" pitchFamily="34" charset="-120"/>
               </a:rPr>
-              <a:t>19 / 30</a:t>
+              <a:t>19 / 32</a:t>
             </a:r>
             <a:endParaRPr lang="en-US" sz="720" dirty="0"/>
           </a:p>
@@ -24584,7 +25312,7 @@
                 <a:ea typeface="Arial" pitchFamily="34" charset="-122"/>
                 <a:cs typeface="Arial" pitchFamily="34" charset="-120"/>
               </a:rPr>
-              <a:t>20 / 30</a:t>
+              <a:t>20 / 32</a:t>
             </a:r>
             <a:endParaRPr lang="en-US" sz="720" dirty="0"/>
           </a:p>
@@ -25497,7 +26225,7 @@
                 <a:ea typeface="Arial" pitchFamily="34" charset="-122"/>
                 <a:cs typeface="Arial" pitchFamily="34" charset="-120"/>
               </a:rPr>
-              <a:t>21 / 30</a:t>
+              <a:t>21 / 32</a:t>
             </a:r>
             <a:endParaRPr lang="en-US" sz="700" dirty="0"/>
           </a:p>
@@ -26410,7 +27138,7 @@
                 <a:ea typeface="Arial" pitchFamily="34" charset="-122"/>
                 <a:cs typeface="Arial" pitchFamily="34" charset="-120"/>
               </a:rPr>
-              <a:t>22 / 30</a:t>
+              <a:t>22 / 32</a:t>
             </a:r>
             <a:endParaRPr lang="en-US" sz="700" dirty="0"/>
           </a:p>
@@ -26474,7 +27202,7 @@
       </p:nvGrpSpPr>
       <p:grpSpPr>
         <a:xfrm>
-          <a:off x="1000125" y="0"/>
+          <a:off x="898071" y="0"/>
           <a:ext cx="1" cy="1"/>
           <a:chOff x="0" y="0"/>
           <a:chExt cx="0" cy="0"/>
@@ -26488,8 +27216,8 @@
         </p:nvSpPr>
         <p:spPr>
           <a:xfrm>
-            <a:off x="1393031" y="300038"/>
-            <a:ext cx="6357938" cy="214313"/>
+            <a:off x="1302204" y="293914"/>
+            <a:ext cx="6539593" cy="220436"/>
           </a:xfrm>
           <a:prstGeom prst="rect">
             <a:avLst/>
@@ -26505,7 +27233,7 @@
               <a:buNone/>
             </a:pPr>
             <a:r>
-              <a:rPr lang="en-US" sz="980" b="1" dirty="0">
+              <a:rPr lang="en-US" sz="1040" b="1" dirty="0">
                 <a:solidFill>
                   <a:srgbClr val="007F72"/>
                 </a:solidFill>
@@ -26513,9 +27241,9 @@
                 <a:ea typeface="Arial" pitchFamily="34" charset="-122"/>
                 <a:cs typeface="Arial" pitchFamily="34" charset="-120"/>
               </a:rPr>
-              <a:t>Khoảng cách 2 / 3 · 落差之二：行為</a:t>
-            </a:r>
-            <a:endParaRPr lang="en-US" sz="980" dirty="0"/>
+              <a:t>▶ Video · 有時間才播：外觀落差怎麼補</a:t>
+            </a:r>
+            <a:endParaRPr lang="en-US" sz="1040" dirty="0"/>
           </a:p>
         </p:txBody>
       </p:sp>
@@ -26527,8 +27255,8 @@
         </p:nvSpPr>
         <p:spPr>
           <a:xfrm>
-            <a:off x="1393031" y="528638"/>
-            <a:ext cx="6357938" cy="638228"/>
+            <a:off x="1302204" y="543741"/>
+            <a:ext cx="6539593" cy="450550"/>
           </a:xfrm>
           <a:prstGeom prst="rect">
             <a:avLst/>
@@ -26547,7 +27275,7 @@
               <a:buNone/>
             </a:pPr>
             <a:r>
-              <a:rPr lang="en-US" sz="1480" b="1" dirty="0">
+              <a:rPr lang="en-US" sz="1370" b="1" dirty="0">
                 <a:solidFill>
                   <a:srgbClr val="0B1F3A"/>
                 </a:solidFill>
@@ -26555,9 +27283,9 @@
                 <a:ea typeface="Arial" pitchFamily="34" charset="-122"/>
                 <a:cs typeface="Arial" pitchFamily="34" charset="-120"/>
               </a:rPr>
-              <a:t>Khoảng cách về hành vi: trong mô phỏng ai cũng đi đúng luật, ngoài đường thì không</a:t>
-            </a:r>
-            <a:endParaRPr lang="en-US" sz="1480" dirty="0"/>
+              <a:t>Ngành làm thế nào: để chính mô phỏng sinh ra dữ liệu huấn luyện</a:t>
+            </a:r>
+            <a:endParaRPr lang="en-US" sz="1370" dirty="0"/>
           </a:p>
           <a:p>
             <a:pPr indent="0" marL="0">
@@ -26567,17 +27295,17 @@
               <a:buNone/>
             </a:pPr>
             <a:r>
-              <a:rPr lang="en-US" sz="980" dirty="0">
-                <a:solidFill>
-                  <a:srgbClr val="007F72"/>
+              <a:rPr lang="en-US" sz="1000" dirty="0">
+                <a:solidFill>
+                  <a:srgbClr val="5F7183"/>
                 </a:solidFill>
                 <a:latin typeface="微軟正黑體" pitchFamily="34" charset="0"/>
                 <a:ea typeface="微軟正黑體" pitchFamily="34" charset="-122"/>
                 <a:cs typeface="微軟正黑體" pitchFamily="34" charset="-120"/>
               </a:rPr>
-              <a:t>行為落差：模擬裡的車都照規則走，真實世界的人不照規則</a:t>
-            </a:r>
-            <a:endParaRPr lang="en-US" sz="1480" dirty="0"/>
+              <a:t>業界怎麼補外觀落差：讓模擬器自己生出訓練資料</a:t>
+            </a:r>
+            <a:endParaRPr lang="en-US" sz="1370" dirty="0"/>
           </a:p>
         </p:txBody>
       </p:sp>
@@ -26589,12 +27317,12 @@
         </p:nvSpPr>
         <p:spPr>
           <a:xfrm>
-            <a:off x="1393031" y="1253548"/>
-            <a:ext cx="1995488" cy="1818264"/>
+            <a:off x="1302204" y="1008987"/>
+            <a:ext cx="3137535" cy="2062418"/>
           </a:xfrm>
           <a:prstGeom prst="roundRect">
             <a:avLst>
-              <a:gd name="adj" fmla="val 3929"/>
+              <a:gd name="adj" fmla="val 3563"/>
             </a:avLst>
           </a:prstGeom>
           <a:solidFill>
@@ -26606,13 +27334,6 @@
             </a:solidFill>
             <a:prstDash val="solid"/>
           </a:ln>
-          <a:effectLst>
-            <a:outerShdw sx="100000" sy="100000" kx="0" ky="0" algn="bl" rotWithShape="0" blurRad="76200" dist="12700" dir="5400000">
-              <a:srgbClr val="9AAAB8">
-                <a:alpha val="28000"/>
-              </a:srgbClr>
-            </a:outerShdw>
-          </a:effectLst>
         </p:spPr>
       </p:sp>
       <p:sp>
@@ -26623,28 +27344,155 @@
         </p:nvSpPr>
         <p:spPr>
           <a:xfrm>
-            <a:off x="1393031" y="1253548"/>
-            <a:ext cx="1995488" cy="42863"/>
+            <a:off x="2564639" y="1752249"/>
+            <a:ext cx="1169632" cy="506357"/>
+          </a:xfrm>
+          <a:prstGeom prst="roundRect">
+            <a:avLst>
+              <a:gd name="adj" fmla="val 7256"/>
+            </a:avLst>
+          </a:prstGeom>
+          <a:solidFill>
+            <a:srgbClr val="C8D3DE"/>
+          </a:solidFill>
+          <a:ln w="15240">
+            <a:solidFill>
+              <a:srgbClr val="F4F7FA"/>
+            </a:solidFill>
+            <a:prstDash val="solid"/>
+          </a:ln>
+        </p:spPr>
+      </p:sp>
+      <p:sp>
+        <p:nvSpPr>
+          <p:cNvPr id="6" name="Shape 4"/>
+          <p:cNvSpPr/>
+          <p:nvPr/>
+        </p:nvSpPr>
+        <p:spPr>
+          <a:xfrm>
+            <a:off x="2369700" y="1648000"/>
+            <a:ext cx="1169632" cy="506357"/>
+          </a:xfrm>
+          <a:prstGeom prst="roundRect">
+            <a:avLst>
+              <a:gd name="adj" fmla="val 7256"/>
+            </a:avLst>
+          </a:prstGeom>
+          <a:solidFill>
+            <a:srgbClr val="C8D3DE"/>
+          </a:solidFill>
+          <a:ln w="15240">
+            <a:solidFill>
+              <a:srgbClr val="F4F7FA"/>
+            </a:solidFill>
+            <a:prstDash val="solid"/>
+          </a:ln>
+        </p:spPr>
+      </p:sp>
+      <p:sp>
+        <p:nvSpPr>
+          <p:cNvPr id="7" name="Shape 5"/>
+          <p:cNvSpPr/>
+          <p:nvPr/>
+        </p:nvSpPr>
+        <p:spPr>
+          <a:xfrm>
+            <a:off x="2174762" y="1543749"/>
+            <a:ext cx="1169632" cy="506357"/>
+          </a:xfrm>
+          <a:prstGeom prst="roundRect">
+            <a:avLst>
+              <a:gd name="adj" fmla="val 7256"/>
+            </a:avLst>
+          </a:prstGeom>
+          <a:solidFill>
+            <a:srgbClr val="C8D3DE"/>
+          </a:solidFill>
+          <a:ln w="15240">
+            <a:solidFill>
+              <a:srgbClr val="F4F7FA"/>
+            </a:solidFill>
+            <a:prstDash val="solid"/>
+          </a:ln>
+        </p:spPr>
+      </p:sp>
+      <p:sp>
+        <p:nvSpPr>
+          <p:cNvPr id="8" name="Shape 6"/>
+          <p:cNvSpPr/>
+          <p:nvPr/>
+        </p:nvSpPr>
+        <p:spPr>
+          <a:xfrm>
+            <a:off x="1979823" y="1439499"/>
+            <a:ext cx="1169632" cy="506357"/>
+          </a:xfrm>
+          <a:prstGeom prst="roundRect">
+            <a:avLst>
+              <a:gd name="adj" fmla="val 7256"/>
+            </a:avLst>
+          </a:prstGeom>
+          <a:solidFill>
+            <a:srgbClr val="1F4E79"/>
+          </a:solidFill>
+          <a:ln w="15240">
+            <a:solidFill>
+              <a:srgbClr val="F4F7FA"/>
+            </a:solidFill>
+            <a:prstDash val="solid"/>
+          </a:ln>
+        </p:spPr>
+      </p:sp>
+      <p:sp>
+        <p:nvSpPr>
+          <p:cNvPr id="9" name="Text 7"/>
+          <p:cNvSpPr txBox="1"/>
+          <p:nvPr/>
+        </p:nvSpPr>
+        <p:spPr>
+          <a:xfrm>
+            <a:off x="1478552" y="2213928"/>
+            <a:ext cx="2784838" cy="268071"/>
           </a:xfrm>
           <a:prstGeom prst="rect">
             <a:avLst/>
           </a:prstGeom>
-          <a:solidFill>
-            <a:srgbClr val="0B1F3A"/>
-          </a:solidFill>
-          <a:ln/>
-        </p:spPr>
-      </p:sp>
-      <p:sp>
-        <p:nvSpPr>
-          <p:cNvPr id="6" name="Text 4"/>
+          <a:noFill/>
+          <a:ln/>
+        </p:spPr>
+        <p:txBody>
+          <a:bodyPr wrap="square" lIns="0" tIns="0" rIns="0" bIns="0" rtlCol="0" anchor="ctr"/>
+          <a:lstStyle/>
+          <a:p>
+            <a:pPr algn="ctr" indent="0" marL="0">
+              <a:buNone/>
+            </a:pPr>
+            <a:r>
+              <a:rPr lang="en-US" sz="880" b="1" dirty="0">
+                <a:solidFill>
+                  <a:srgbClr val="1F4E79"/>
+                </a:solidFill>
+                <a:latin typeface="Arial" pitchFamily="34" charset="0"/>
+                <a:ea typeface="Arial" pitchFamily="34" charset="-122"/>
+                <a:cs typeface="Arial" pitchFamily="34" charset="-120"/>
+              </a:rPr>
+              <a:t>× 10 000</a:t>
+            </a:r>
+            <a:endParaRPr lang="en-US" sz="880" dirty="0"/>
+          </a:p>
+        </p:txBody>
+      </p:sp>
+      <p:sp>
+        <p:nvSpPr>
+          <p:cNvPr id="10" name="Text 8"/>
           <p:cNvSpPr txBox="1"/>
           <p:nvPr/>
         </p:nvSpPr>
         <p:spPr>
           <a:xfrm>
-            <a:off x="1507331" y="1346417"/>
-            <a:ext cx="1766888" cy="303941"/>
+            <a:off x="1449161" y="2630533"/>
+            <a:ext cx="2843621" cy="382089"/>
           </a:xfrm>
           <a:prstGeom prst="rect">
             <a:avLst/>
@@ -26656,123 +27504,61 @@
           <a:bodyPr wrap="square" lIns="0" tIns="0" rIns="0" bIns="0" rtlCol="0" anchor="t"/>
           <a:lstStyle/>
           <a:p>
-            <a:pPr indent="0" marL="0">
+            <a:pPr algn="ctr" indent="0" marL="0">
               <a:lnSpc>
-                <a:spcPct val="112000"/>
+                <a:spcPct val="110000"/>
               </a:lnSpc>
               <a:buNone/>
             </a:pPr>
             <a:r>
-              <a:rPr lang="en-US" sz="980" b="1" dirty="0">
-                <a:solidFill>
-                  <a:srgbClr val="0B1F3A"/>
+              <a:rPr lang="en-US" sz="760" dirty="0">
+                <a:solidFill>
+                  <a:srgbClr val="5F7183"/>
                 </a:solidFill>
                 <a:latin typeface="Arial" pitchFamily="34" charset="0"/>
                 <a:ea typeface="Arial" pitchFamily="34" charset="-122"/>
                 <a:cs typeface="Arial" pitchFamily="34" charset="-120"/>
               </a:rPr>
-              <a:t>Xe trong mô phỏng làm gì</a:t>
-            </a:r>
-            <a:endParaRPr lang="en-US" sz="980" dirty="0"/>
-          </a:p>
-          <a:p>
-            <a:pPr indent="0" marL="0">
+              <a:t>Một cảnh, đổi thời tiết và ánh sáng, sinh ra rất nhiều bản.</a:t>
+            </a:r>
+            <a:endParaRPr lang="en-US" sz="760" dirty="0"/>
+          </a:p>
+          <a:p>
+            <a:pPr algn="ctr" indent="0" marL="0">
               <a:lnSpc>
-                <a:spcPct val="112000"/>
+                <a:spcPct val="110000"/>
               </a:lnSpc>
               <a:buNone/>
             </a:pPr>
             <a:r>
-              <a:rPr lang="en-US" sz="860" dirty="0">
-                <a:solidFill>
-                  <a:srgbClr val="007F72"/>
+              <a:rPr lang="en-US" sz="720" dirty="0">
+                <a:solidFill>
+                  <a:srgbClr val="5F7183"/>
                 </a:solidFill>
                 <a:latin typeface="微軟正黑體" pitchFamily="34" charset="0"/>
                 <a:ea typeface="微軟正黑體" pitchFamily="34" charset="-122"/>
                 <a:cs typeface="微軟正黑體" pitchFamily="34" charset="-120"/>
               </a:rPr>
-              <a:t>模擬裡的車在做什麼</a:t>
-            </a:r>
-            <a:endParaRPr lang="en-US" sz="980" dirty="0"/>
+              <a:t>同一個場景換天氣、換光線，一次生出很多份。</a:t>
+            </a:r>
+            <a:endParaRPr lang="en-US" sz="760" dirty="0"/>
           </a:p>
         </p:txBody>
       </p:sp>
       <p:sp>
         <p:nvSpPr>
-          <p:cNvPr id="7" name="Text 5"/>
-          <p:cNvSpPr txBox="1"/>
-          <p:nvPr/>
-        </p:nvSpPr>
-        <p:spPr>
-          <a:xfrm>
-            <a:off x="1507331" y="1678933"/>
-            <a:ext cx="1766888" cy="1321442"/>
-          </a:xfrm>
-          <a:prstGeom prst="rect">
-            <a:avLst/>
-          </a:prstGeom>
-          <a:noFill/>
-          <a:ln/>
-        </p:spPr>
-        <p:txBody>
-          <a:bodyPr wrap="square" lIns="0" tIns="0" rIns="0" bIns="0" rtlCol="0" anchor="t"/>
-          <a:lstStyle/>
-          <a:p>
-            <a:pPr indent="0" marL="0">
-              <a:lnSpc>
-                <a:spcPct val="130000"/>
-              </a:lnSpc>
-              <a:buNone/>
-            </a:pPr>
-            <a:r>
-              <a:rPr lang="en-US" sz="900" dirty="0">
-                <a:solidFill>
-                  <a:srgbClr val="1A2733"/>
-                </a:solidFill>
-                <a:latin typeface="Arial" pitchFamily="34" charset="0"/>
-                <a:ea typeface="Arial" pitchFamily="34" charset="-122"/>
-                <a:cs typeface="Arial" pitchFamily="34" charset="-120"/>
-              </a:rPr>
-              <a:t>Giữ giữa làn, giữ khoảng cách an toàn với xe trước, muốn chuyển làn thì bật xi-nhan trước đã.</a:t>
-            </a:r>
-            <a:endParaRPr lang="en-US" sz="900" dirty="0"/>
-          </a:p>
-          <a:p>
-            <a:pPr indent="0" marL="0">
-              <a:lnSpc>
-                <a:spcPct val="130000"/>
-              </a:lnSpc>
-              <a:buNone/>
-            </a:pPr>
-            <a:r>
-              <a:rPr lang="en-US" sz="820" dirty="0">
-                <a:solidFill>
-                  <a:srgbClr val="5F7183"/>
-                </a:solidFill>
-                <a:latin typeface="微軟正黑體" pitchFamily="34" charset="0"/>
-                <a:ea typeface="微軟正黑體" pitchFamily="34" charset="-122"/>
-                <a:cs typeface="微軟正黑體" pitchFamily="34" charset="-120"/>
-              </a:rPr>
-              <a:t>待在車道中間、跟前車保持安全距離、要變換車道先打方向燈。</a:t>
-            </a:r>
-            <a:endParaRPr lang="en-US" sz="900" dirty="0"/>
-          </a:p>
-        </p:txBody>
-      </p:sp>
-      <p:sp>
-        <p:nvSpPr>
-          <p:cNvPr id="8" name="Shape 6"/>
+          <p:cNvPr id="11" name="Shape 9"/>
           <p:cNvSpPr/>
           <p:nvPr/>
         </p:nvSpPr>
         <p:spPr>
           <a:xfrm>
-            <a:off x="3574256" y="1253548"/>
-            <a:ext cx="1995488" cy="1818264"/>
+            <a:off x="4704261" y="1008987"/>
+            <a:ext cx="3137535" cy="2062418"/>
           </a:xfrm>
           <a:prstGeom prst="roundRect">
             <a:avLst>
-              <a:gd name="adj" fmla="val 3929"/>
+              <a:gd name="adj" fmla="val 3563"/>
             </a:avLst>
           </a:prstGeom>
           <a:solidFill>
@@ -26784,45 +27570,223 @@
             </a:solidFill>
             <a:prstDash val="solid"/>
           </a:ln>
-          <a:effectLst>
-            <a:outerShdw sx="100000" sy="100000" kx="0" ky="0" algn="bl" rotWithShape="0" blurRad="76200" dist="12700" dir="5400000">
-              <a:srgbClr val="9AAAB8">
-                <a:alpha val="28000"/>
-              </a:srgbClr>
-            </a:outerShdw>
-          </a:effectLst>
-        </p:spPr>
-      </p:sp>
-      <p:sp>
-        <p:nvSpPr>
-          <p:cNvPr id="9" name="Shape 7"/>
+        </p:spPr>
+      </p:sp>
+      <p:sp>
+        <p:nvSpPr>
+          <p:cNvPr id="12" name="Shape 10"/>
           <p:cNvSpPr/>
           <p:nvPr/>
         </p:nvSpPr>
         <p:spPr>
           <a:xfrm>
-            <a:off x="3574256" y="1253548"/>
-            <a:ext cx="1995488" cy="42863"/>
+            <a:off x="4851219" y="1141248"/>
+            <a:ext cx="279219" cy="279219"/>
+          </a:xfrm>
+          <a:prstGeom prst="ellipse">
+            <a:avLst/>
+          </a:prstGeom>
+          <a:solidFill>
+            <a:srgbClr val="D9463E"/>
+          </a:solidFill>
+          <a:ln/>
+        </p:spPr>
+      </p:sp>
+      <p:sp>
+        <p:nvSpPr>
+          <p:cNvPr id="13" name="Text 11"/>
+          <p:cNvSpPr txBox="1"/>
+          <p:nvPr/>
+        </p:nvSpPr>
+        <p:spPr>
+          <a:xfrm>
+            <a:off x="4851219" y="1177988"/>
+            <a:ext cx="279219" cy="205740"/>
           </a:xfrm>
           <a:prstGeom prst="rect">
             <a:avLst/>
           </a:prstGeom>
+          <a:noFill/>
+          <a:ln/>
+        </p:spPr>
+        <p:txBody>
+          <a:bodyPr wrap="square" lIns="0" tIns="0" rIns="0" bIns="0" rtlCol="0" anchor="ctr"/>
+          <a:lstStyle/>
+          <a:p>
+            <a:pPr algn="ctr" indent="0" marL="0">
+              <a:buNone/>
+            </a:pPr>
+            <a:r>
+              <a:rPr lang="en-US" sz="960" b="1" dirty="0">
+                <a:solidFill>
+                  <a:srgbClr val="FFFFFF"/>
+                </a:solidFill>
+                <a:latin typeface="Arial" pitchFamily="34" charset="0"/>
+                <a:ea typeface="Arial" pitchFamily="34" charset="-122"/>
+                <a:cs typeface="Arial" pitchFamily="34" charset="-120"/>
+              </a:rPr>
+              <a:t>▶</a:t>
+            </a:r>
+            <a:endParaRPr lang="en-US" sz="960" dirty="0"/>
+          </a:p>
+        </p:txBody>
+      </p:sp>
+      <p:sp>
+        <p:nvSpPr>
+          <p:cNvPr id="14" name="Text 12"/>
+          <p:cNvSpPr txBox="1"/>
+          <p:nvPr/>
+        </p:nvSpPr>
+        <p:spPr>
+          <a:xfrm>
+            <a:off x="5189220" y="1126553"/>
+            <a:ext cx="2505619" cy="338001"/>
+          </a:xfrm>
+          <a:prstGeom prst="rect">
+            <a:avLst/>
+          </a:prstGeom>
+          <a:noFill/>
+          <a:ln/>
+        </p:spPr>
+        <p:txBody>
+          <a:bodyPr wrap="square" lIns="0" tIns="0" rIns="0" bIns="0" rtlCol="0" anchor="ctr"/>
+          <a:lstStyle/>
+          <a:p>
+            <a:pPr indent="0" marL="0">
+              <a:buNone/>
+            </a:pPr>
+            <a:r>
+              <a:rPr lang="en-US" sz="840" b="1" dirty="0">
+                <a:solidFill>
+                  <a:srgbClr val="0B1F3A"/>
+                </a:solidFill>
+                <a:latin typeface="Arial" pitchFamily="34" charset="0"/>
+                <a:ea typeface="Arial" pitchFamily="34" charset="-122"/>
+                <a:cs typeface="Arial" pitchFamily="34" charset="-120"/>
+              </a:rPr>
+              <a:t>Omniverse Replicator For DRIVE Sim – Synthetic Data Generation</a:t>
+            </a:r>
+            <a:endParaRPr lang="en-US" sz="840" dirty="0"/>
+          </a:p>
+        </p:txBody>
+      </p:sp>
+      <p:sp>
+        <p:nvSpPr>
+          <p:cNvPr id="15" name="Text 13"/>
+          <p:cNvSpPr txBox="1"/>
+          <p:nvPr/>
+        </p:nvSpPr>
+        <p:spPr>
+          <a:xfrm>
+            <a:off x="4851219" y="1493945"/>
+            <a:ext cx="2843621" cy="161653"/>
+          </a:xfrm>
+          <a:prstGeom prst="rect">
+            <a:avLst/>
+          </a:prstGeom>
+          <a:noFill/>
+          <a:ln/>
+        </p:spPr>
+        <p:txBody>
+          <a:bodyPr wrap="square" lIns="0" tIns="0" rIns="0" bIns="0" rtlCol="0" anchor="ctr"/>
+          <a:lstStyle/>
+          <a:p>
+            <a:pPr indent="0" marL="0">
+              <a:buNone/>
+            </a:pPr>
+            <a:r>
+              <a:rPr lang="en-US" sz="720" dirty="0">
+                <a:solidFill>
+                  <a:srgbClr val="5F7183"/>
+                </a:solidFill>
+                <a:latin typeface="Arial" pitchFamily="34" charset="0"/>
+                <a:ea typeface="Arial" pitchFamily="34" charset="-122"/>
+                <a:cs typeface="Arial" pitchFamily="34" charset="-120"/>
+              </a:rPr>
+              <a:t>NVIDIA（官方）　·　1:52，整支播完</a:t>
+            </a:r>
+            <a:endParaRPr lang="en-US" sz="720" dirty="0"/>
+          </a:p>
+        </p:txBody>
+      </p:sp>
+      <p:sp>
+        <p:nvSpPr>
+          <p:cNvPr id="16" name="Text 14">
+            <a:hlinkClick r:id="rId1" tooltip=""/>
+          </p:cNvPr>
+          <p:cNvSpPr txBox="1"/>
+          <p:nvPr/>
+        </p:nvSpPr>
+        <p:spPr>
+          <a:xfrm>
+            <a:off x="4851219" y="1640903"/>
+            <a:ext cx="2843621" cy="161653"/>
+          </a:xfrm>
+          <a:prstGeom prst="rect">
+            <a:avLst/>
+          </a:prstGeom>
+          <a:noFill/>
+          <a:ln/>
+        </p:spPr>
+        <p:txBody>
+          <a:bodyPr wrap="square" lIns="0" tIns="0" rIns="0" bIns="0" rtlCol="0" anchor="ctr"/>
+          <a:lstStyle/>
+          <a:p>
+            <a:pPr indent="0" marL="0">
+              <a:buNone/>
+            </a:pPr>
+            <a:r>
+              <a:rPr lang="en-US" sz="680" u="sng" dirty="0">
+                <a:solidFill>
+                  <a:srgbClr val="1F6FBF"/>
+                </a:solidFill>
+                <a:latin typeface="Arial" pitchFamily="34" charset="0"/>
+                <a:ea typeface="Arial" pitchFamily="34" charset="-122"/>
+                <a:cs typeface="Arial" pitchFamily="34" charset="-120"/>
+                <a:hlinkClick r:id="rId1" invalidUrl="" action="" tgtFrame="" tooltip="" history="1" highlightClick="0" endSnd="0">
+                  <a:extLst>
+                    <a:ext uri="{A12FA001-AC4F-418D-AE19-62706E023703}">
+                      <ahyp:hlinkClr xmlns:ahyp="http://schemas.microsoft.com/office/drawing/2018/hyperlinkcolor" val="tx"/>
+                    </a:ext>
+                  </a:extLst>
+                </a:hlinkClick>
+              </a:rPr>
+              <a:t>https://www.youtube.com/watch?v=gPaFgNEF82Q</a:t>
+            </a:r>
+            <a:endParaRPr lang="en-US" sz="680" dirty="0"/>
+          </a:p>
+        </p:txBody>
+      </p:sp>
+      <p:sp>
+        <p:nvSpPr>
+          <p:cNvPr id="17" name="Shape 15"/>
+          <p:cNvSpPr/>
+          <p:nvPr/>
+        </p:nvSpPr>
+        <p:spPr>
+          <a:xfrm>
+            <a:off x="4851219" y="1861338"/>
+            <a:ext cx="29391" cy="191044"/>
+          </a:xfrm>
+          <a:prstGeom prst="rect">
+            <a:avLst/>
+          </a:prstGeom>
           <a:solidFill>
-            <a:srgbClr val="007F72"/>
+            <a:srgbClr val="00A896"/>
           </a:solidFill>
           <a:ln/>
         </p:spPr>
       </p:sp>
       <p:sp>
         <p:nvSpPr>
-          <p:cNvPr id="10" name="Text 8"/>
+          <p:cNvPr id="18" name="Text 16"/>
           <p:cNvSpPr txBox="1"/>
           <p:nvPr/>
         </p:nvSpPr>
         <p:spPr>
           <a:xfrm>
-            <a:off x="3688556" y="1346417"/>
-            <a:ext cx="1766888" cy="442813"/>
+            <a:off x="4954089" y="1831947"/>
+            <a:ext cx="2755446" cy="366492"/>
           </a:xfrm>
           <a:prstGeom prst="rect">
             <a:avLst/>
@@ -26836,55 +27800,75 @@
           <a:p>
             <a:pPr indent="0" marL="0">
               <a:lnSpc>
-                <a:spcPct val="112000"/>
+                <a:spcPct val="118000"/>
               </a:lnSpc>
               <a:buNone/>
             </a:pPr>
             <a:r>
-              <a:rPr lang="en-US" sz="980" b="1" dirty="0">
-                <a:solidFill>
-                  <a:srgbClr val="0B1F3A"/>
+              <a:rPr lang="en-US" sz="760" dirty="0">
+                <a:solidFill>
+                  <a:srgbClr val="1A2733"/>
                 </a:solidFill>
                 <a:latin typeface="Arial" pitchFamily="34" charset="0"/>
                 <a:ea typeface="Arial" pitchFamily="34" charset="-122"/>
                 <a:cs typeface="Arial" pitchFamily="34" charset="-120"/>
               </a:rPr>
-              <a:t>Xe máy thật ngoài đường thì sao</a:t>
-            </a:r>
-            <a:endParaRPr lang="en-US" sz="980" dirty="0"/>
+              <a:t>Mô phỏng tính riêng: camera thấy gì, LiDAR thấy gì, radar thấy gì</a:t>
+            </a:r>
+            <a:endParaRPr lang="en-US" sz="760" dirty="0"/>
           </a:p>
           <a:p>
             <a:pPr indent="0" marL="0">
               <a:lnSpc>
-                <a:spcPct val="112000"/>
+                <a:spcPct val="118000"/>
               </a:lnSpc>
               <a:buNone/>
             </a:pPr>
             <a:r>
-              <a:rPr lang="en-US" sz="860" dirty="0">
-                <a:solidFill>
-                  <a:srgbClr val="007F72"/>
+              <a:rPr lang="en-US" sz="720" dirty="0">
+                <a:solidFill>
+                  <a:srgbClr val="5F7183"/>
                 </a:solidFill>
                 <a:latin typeface="微軟正黑體" pitchFamily="34" charset="0"/>
                 <a:ea typeface="微軟正黑體" pitchFamily="34" charset="-122"/>
                 <a:cs typeface="微軟正黑體" pitchFamily="34" charset="-120"/>
               </a:rPr>
-              <a:t>真實世界的機車呢</a:t>
-            </a:r>
-            <a:endParaRPr lang="en-US" sz="980" dirty="0"/>
+              <a:t>模擬器分別算出：相機拍到什麼、光達打回什麼、雷達量到什麼</a:t>
+            </a:r>
+            <a:endParaRPr lang="en-US" sz="760" dirty="0"/>
           </a:p>
         </p:txBody>
       </p:sp>
       <p:sp>
         <p:nvSpPr>
-          <p:cNvPr id="11" name="Text 9"/>
+          <p:cNvPr id="19" name="Shape 17"/>
+          <p:cNvSpPr/>
+          <p:nvPr/>
+        </p:nvSpPr>
+        <p:spPr>
+          <a:xfrm>
+            <a:off x="4851219" y="2257222"/>
+            <a:ext cx="29391" cy="191044"/>
+          </a:xfrm>
+          <a:prstGeom prst="rect">
+            <a:avLst/>
+          </a:prstGeom>
+          <a:solidFill>
+            <a:srgbClr val="00A896"/>
+          </a:solidFill>
+          <a:ln/>
+        </p:spPr>
+      </p:sp>
+      <p:sp>
+        <p:nvSpPr>
+          <p:cNvPr id="20" name="Text 18"/>
           <p:cNvSpPr txBox="1"/>
           <p:nvPr/>
         </p:nvSpPr>
         <p:spPr>
           <a:xfrm>
-            <a:off x="3688556" y="1817805"/>
-            <a:ext cx="1766888" cy="1182570"/>
+            <a:off x="4954089" y="2227830"/>
+            <a:ext cx="2755446" cy="366492"/>
           </a:xfrm>
           <a:prstGeom prst="rect">
             <a:avLst/>
@@ -26898,12 +27882,12 @@
           <a:p>
             <a:pPr indent="0" marL="0">
               <a:lnSpc>
-                <a:spcPct val="130000"/>
+                <a:spcPct val="118000"/>
               </a:lnSpc>
               <a:buNone/>
             </a:pPr>
             <a:r>
-              <a:rPr lang="en-US" sz="900" dirty="0">
+              <a:rPr lang="en-US" sz="760" dirty="0">
                 <a:solidFill>
                   <a:srgbClr val="1A2733"/>
                 </a:solidFill>
@@ -26911,19 +27895,19 @@
                 <a:ea typeface="Arial" pitchFamily="34" charset="-122"/>
                 <a:cs typeface="Arial" pitchFamily="34" charset="-120"/>
               </a:rPr>
-              <a:t>Lách khe, đèn đỏ thì chen lên tận đầu, ngã tư không có vạch kẻ thì nhìn mắt nhau mà đi.</a:t>
-            </a:r>
-            <a:endParaRPr lang="en-US" sz="900" dirty="0"/>
+              <a:t>Cùng một cảnh, đổi thời tiết, ánh sáng, vật liệu — sinh ra nhiều bản</a:t>
+            </a:r>
+            <a:endParaRPr lang="en-US" sz="760" dirty="0"/>
           </a:p>
           <a:p>
             <a:pPr indent="0" marL="0">
               <a:lnSpc>
-                <a:spcPct val="130000"/>
+                <a:spcPct val="118000"/>
               </a:lnSpc>
               <a:buNone/>
             </a:pPr>
             <a:r>
-              <a:rPr lang="en-US" sz="820" dirty="0">
+              <a:rPr lang="en-US" sz="720" dirty="0">
                 <a:solidFill>
                   <a:srgbClr val="5F7183"/>
                 </a:solidFill>
@@ -26931,76 +27915,42 @@
                 <a:ea typeface="微軟正黑體" pitchFamily="34" charset="-122"/>
                 <a:cs typeface="微軟正黑體" pitchFamily="34" charset="-120"/>
               </a:rPr>
-              <a:t>鑽縫、在紅燈前擠到最前面、在沒有標線的路口靠眼神決定誰先走。</a:t>
-            </a:r>
-            <a:endParaRPr lang="en-US" sz="900" dirty="0"/>
+              <a:t>同一個場景，換天氣、換光線、換材質，一次生出很多份</a:t>
+            </a:r>
+            <a:endParaRPr lang="en-US" sz="760" dirty="0"/>
           </a:p>
         </p:txBody>
       </p:sp>
       <p:sp>
         <p:nvSpPr>
-          <p:cNvPr id="12" name="Shape 10"/>
+          <p:cNvPr id="21" name="Shape 19"/>
           <p:cNvSpPr/>
           <p:nvPr/>
         </p:nvSpPr>
         <p:spPr>
           <a:xfrm>
-            <a:off x="5755481" y="1253548"/>
-            <a:ext cx="1995488" cy="1818264"/>
-          </a:xfrm>
-          <a:prstGeom prst="roundRect">
-            <a:avLst>
-              <a:gd name="adj" fmla="val 3929"/>
-            </a:avLst>
+            <a:off x="4851219" y="2653105"/>
+            <a:ext cx="29391" cy="191044"/>
+          </a:xfrm>
+          <a:prstGeom prst="rect">
+            <a:avLst/>
           </a:prstGeom>
           <a:solidFill>
-            <a:srgbClr val="F4F7FA"/>
+            <a:srgbClr val="00A896"/>
           </a:solidFill>
-          <a:ln w="12700">
-            <a:solidFill>
-              <a:srgbClr val="DBE3EA"/>
-            </a:solidFill>
-            <a:prstDash val="solid"/>
-          </a:ln>
-          <a:effectLst>
-            <a:outerShdw sx="100000" sy="100000" kx="0" ky="0" algn="bl" rotWithShape="0" blurRad="76200" dist="12700" dir="5400000">
-              <a:srgbClr val="9AAAB8">
-                <a:alpha val="28000"/>
-              </a:srgbClr>
-            </a:outerShdw>
-          </a:effectLst>
-        </p:spPr>
-      </p:sp>
-      <p:sp>
-        <p:nvSpPr>
-          <p:cNvPr id="13" name="Shape 11"/>
-          <p:cNvSpPr/>
-          <p:nvPr/>
-        </p:nvSpPr>
-        <p:spPr>
-          <a:xfrm>
-            <a:off x="5755481" y="1253548"/>
-            <a:ext cx="1995488" cy="42863"/>
-          </a:xfrm>
-          <a:prstGeom prst="rect">
-            <a:avLst/>
-          </a:prstGeom>
-          <a:solidFill>
-            <a:srgbClr val="FFB020"/>
-          </a:solidFill>
-          <a:ln/>
-        </p:spPr>
-      </p:sp>
-      <p:sp>
-        <p:nvSpPr>
-          <p:cNvPr id="14" name="Text 12"/>
+          <a:ln/>
+        </p:spPr>
+      </p:sp>
+      <p:sp>
+        <p:nvSpPr>
+          <p:cNvPr id="22" name="Text 20"/>
           <p:cNvSpPr txBox="1"/>
           <p:nvPr/>
         </p:nvSpPr>
         <p:spPr>
           <a:xfrm>
-            <a:off x="5869781" y="1346417"/>
-            <a:ext cx="1766888" cy="442813"/>
+            <a:off x="4954089" y="2623714"/>
+            <a:ext cx="2755446" cy="366492"/>
           </a:xfrm>
           <a:prstGeom prst="rect">
             <a:avLst/>
@@ -27014,121 +27964,59 @@
           <a:p>
             <a:pPr indent="0" marL="0">
               <a:lnSpc>
-                <a:spcPct val="112000"/>
+                <a:spcPct val="118000"/>
               </a:lnSpc>
               <a:buNone/>
             </a:pPr>
             <a:r>
-              <a:rPr lang="en-US" sz="980" b="1" dirty="0">
-                <a:solidFill>
-                  <a:srgbClr val="0B1F3A"/>
+              <a:rPr lang="en-US" sz="760" dirty="0">
+                <a:solidFill>
+                  <a:srgbClr val="1A2733"/>
                 </a:solidFill>
                 <a:latin typeface="Arial" pitchFamily="34" charset="0"/>
                 <a:ea typeface="Arial" pitchFamily="34" charset="-122"/>
                 <a:cs typeface="Arial" pitchFamily="34" charset="-120"/>
               </a:rPr>
-              <a:t>Nên xảy ra một chuyện rất mỉa mai</a:t>
-            </a:r>
-            <a:endParaRPr lang="en-US" sz="980" dirty="0"/>
+              <a:t>Và đáp án chuẩn là miễn phí — máy vốn đã biết mọi thứ nằm ở đâu</a:t>
+            </a:r>
+            <a:endParaRPr lang="en-US" sz="760" dirty="0"/>
           </a:p>
           <a:p>
             <a:pPr indent="0" marL="0">
               <a:lnSpc>
-                <a:spcPct val="112000"/>
+                <a:spcPct val="118000"/>
               </a:lnSpc>
               <a:buNone/>
             </a:pPr>
             <a:r>
-              <a:rPr lang="en-US" sz="860" dirty="0">
-                <a:solidFill>
-                  <a:srgbClr val="007F72"/>
+              <a:rPr lang="en-US" sz="720" dirty="0">
+                <a:solidFill>
+                  <a:srgbClr val="5F7183"/>
                 </a:solidFill>
                 <a:latin typeface="微軟正黑體" pitchFamily="34" charset="0"/>
                 <a:ea typeface="微軟正黑體" pitchFamily="34" charset="-122"/>
                 <a:cs typeface="微軟正黑體" pitchFamily="34" charset="-120"/>
               </a:rPr>
-              <a:t>所以會發生一件很諷刺的事</a:t>
-            </a:r>
-            <a:endParaRPr lang="en-US" sz="980" dirty="0"/>
+              <a:t>而且標準答案是免費的——電腦本來就知道每個東西在哪</a:t>
+            </a:r>
+            <a:endParaRPr lang="en-US" sz="760" dirty="0"/>
           </a:p>
         </p:txBody>
       </p:sp>
       <p:sp>
         <p:nvSpPr>
-          <p:cNvPr id="15" name="Text 13"/>
-          <p:cNvSpPr txBox="1"/>
-          <p:nvPr/>
-        </p:nvSpPr>
-        <p:spPr>
-          <a:xfrm>
-            <a:off x="5869781" y="1817805"/>
-            <a:ext cx="1766888" cy="1182570"/>
-          </a:xfrm>
-          <a:prstGeom prst="rect">
-            <a:avLst/>
-          </a:prstGeom>
-          <a:noFill/>
-          <a:ln/>
-        </p:spPr>
-        <p:txBody>
-          <a:bodyPr wrap="square" lIns="0" tIns="0" rIns="0" bIns="0" rtlCol="0" anchor="t"/>
-          <a:lstStyle/>
-          <a:p>
-            <a:pPr indent="0" marL="0">
-              <a:lnSpc>
-                <a:spcPct val="130000"/>
-              </a:lnSpc>
-              <a:buNone/>
-            </a:pPr>
-            <a:r>
-              <a:rPr lang="en-US" sz="900" dirty="0">
-                <a:solidFill>
-                  <a:srgbClr val="1A2733"/>
-                </a:solidFill>
-                <a:latin typeface="Arial" pitchFamily="34" charset="0"/>
-                <a:ea typeface="Arial" pitchFamily="34" charset="-122"/>
-                <a:cs typeface="Arial" pitchFamily="34" charset="-120"/>
-              </a:rPr>
-              <a:t>Một chiếc xe tự lái hoàn hảo trong mô phỏng, thả ra đường Hà Nội thật có thể không nhúc nhích nổi.</a:t>
-            </a:r>
-            <a:endParaRPr lang="en-US" sz="900" dirty="0"/>
-          </a:p>
-          <a:p>
-            <a:pPr indent="0" marL="0">
-              <a:lnSpc>
-                <a:spcPct val="130000"/>
-              </a:lnSpc>
-              <a:buNone/>
-            </a:pPr>
-            <a:r>
-              <a:rPr lang="en-US" sz="820" dirty="0">
-                <a:solidFill>
-                  <a:srgbClr val="5F7183"/>
-                </a:solidFill>
-                <a:latin typeface="微軟正黑體" pitchFamily="34" charset="0"/>
-                <a:ea typeface="微軟正黑體" pitchFamily="34" charset="-122"/>
-                <a:cs typeface="微軟正黑體" pitchFamily="34" charset="-120"/>
-              </a:rPr>
-              <a:t>在模擬裡完美的自駕車，丟到真的河內街頭可能完全動不了——它學到的規則在那裡不適用。</a:t>
-            </a:r>
-            <a:endParaRPr lang="en-US" sz="900" dirty="0"/>
-          </a:p>
-        </p:txBody>
-      </p:sp>
-      <p:sp>
-        <p:nvSpPr>
-          <p:cNvPr id="16" name="Shape 14"/>
+          <p:cNvPr id="23" name="Shape 21"/>
           <p:cNvSpPr/>
           <p:nvPr/>
         </p:nvSpPr>
         <p:spPr>
           <a:xfrm>
-            <a:off x="1393031" y="3128963"/>
-            <a:ext cx="6357938" cy="471488"/>
+            <a:off x="1302204" y="3159579"/>
+            <a:ext cx="6539593" cy="440871"/>
           </a:xfrm>
           <a:prstGeom prst="roundRect">
             <a:avLst>
-              <a:gd name="adj" fmla="val 13636"/>
+              <a:gd name="adj" fmla="val 15000"/>
             </a:avLst>
           </a:prstGeom>
           <a:solidFill>
@@ -27144,14 +28032,14 @@
       </p:sp>
       <p:sp>
         <p:nvSpPr>
-          <p:cNvPr id="17" name="Text 15"/>
+          <p:cNvPr id="24" name="Text 22"/>
           <p:cNvSpPr txBox="1"/>
           <p:nvPr/>
         </p:nvSpPr>
         <p:spPr>
           <a:xfrm>
-            <a:off x="1535906" y="3171825"/>
-            <a:ext cx="6072188" cy="400050"/>
+            <a:off x="1449161" y="3211014"/>
+            <a:ext cx="6245679" cy="352697"/>
           </a:xfrm>
           <a:prstGeom prst="rect">
             <a:avLst/>
@@ -27165,12 +28053,12 @@
           <a:p>
             <a:pPr indent="0" marL="0">
               <a:lnSpc>
-                <a:spcPct val="116000"/>
+                <a:spcPct val="114000"/>
               </a:lnSpc>
               <a:buNone/>
             </a:pPr>
             <a:r>
-              <a:rPr lang="en-US" sz="900" b="1" dirty="0">
+              <a:rPr lang="en-US" sz="920" b="1" dirty="0">
                 <a:solidFill>
                   <a:srgbClr val="7A4E00"/>
                 </a:solidFill>
@@ -27178,19 +28066,19 @@
                 <a:ea typeface="Arial" pitchFamily="34" charset="-122"/>
                 <a:cs typeface="Arial" pitchFamily="34" charset="-120"/>
               </a:rPr>
-              <a:t>Cách chữa: ghi lại quỹ đạo thật ngoài đường rồi phát lại vào trong mô phỏng.</a:t>
-            </a:r>
-            <a:endParaRPr lang="en-US" sz="900" dirty="0"/>
+              <a:t>Dữ liệu thật phải có người khoanh từng tấm. Dữ liệu mô phỏng thì nhãn là tính ra được.</a:t>
+            </a:r>
+            <a:endParaRPr lang="en-US" sz="920" dirty="0"/>
           </a:p>
           <a:p>
             <a:pPr indent="0" marL="0">
               <a:lnSpc>
-                <a:spcPct val="116000"/>
+                <a:spcPct val="114000"/>
               </a:lnSpc>
               <a:buNone/>
             </a:pPr>
             <a:r>
-              <a:rPr lang="en-US" sz="820" dirty="0">
+              <a:rPr lang="en-US" sz="840" dirty="0">
                 <a:solidFill>
                   <a:srgbClr val="7A4E00"/>
                 </a:solidFill>
@@ -27198,30 +28086,30 @@
                 <a:ea typeface="微軟正黑體" pitchFamily="34" charset="-122"/>
                 <a:cs typeface="微軟正黑體" pitchFamily="34" charset="-120"/>
               </a:rPr>
-              <a:t>解法：把真實道路上錄到的軌跡，回放進模擬裡。</a:t>
-            </a:r>
-            <a:endParaRPr lang="en-US" sz="900" dirty="0"/>
+              <a:t>真實資料要人工一張一張框；模擬資料的標註是算出來的。</a:t>
+            </a:r>
+            <a:endParaRPr lang="en-US" sz="920" dirty="0"/>
           </a:p>
         </p:txBody>
       </p:sp>
       <p:pic>
         <p:nvPicPr>
-          <p:cNvPr id="19" name="Image 0" descr="/Users/tsengchenghsun/Class/carClass/Claude outputs/第四週(10-1)/src/logo.png">    </p:cNvPr>
+          <p:cNvPr id="26" name="Image 0" descr="/Users/tsengchenghsun/Class/carClass/Claude outputs/第四週(10-1)/src/logo.png">    </p:cNvPr>
           <p:cNvPicPr>
             <a:picLocks noChangeAspect="1"/>
           </p:cNvPicPr>
           <p:nvPr/>
         </p:nvPicPr>
         <p:blipFill>
-          <a:blip r:embed="rId1"/>
+          <a:blip r:embed="rId2"/>
           <a:stretch>
             <a:fillRect/>
           </a:stretch>
         </p:blipFill>
         <p:spPr>
           <a:xfrm>
-            <a:off x="7158038" y="85725"/>
-            <a:ext cx="857250" cy="189405"/>
+            <a:off x="7231924" y="88174"/>
+            <a:ext cx="881743" cy="194817"/>
           </a:xfrm>
           <a:prstGeom prst="rect">
             <a:avLst/>
@@ -27230,14 +28118,14 @@
       </p:pic>
       <p:sp>
         <p:nvSpPr>
-          <p:cNvPr id="20" name="Text 16"/>
+          <p:cNvPr id="27" name="Text 23"/>
           <p:cNvSpPr txBox="1"/>
           <p:nvPr/>
         </p:nvSpPr>
         <p:spPr>
           <a:xfrm>
-            <a:off x="1085850" y="100013"/>
-            <a:ext cx="642938" cy="200025"/>
+            <a:off x="986246" y="102870"/>
+            <a:ext cx="661307" cy="205740"/>
           </a:xfrm>
           <a:prstGeom prst="rect">
             <a:avLst/>
@@ -27253,7 +28141,7 @@
               <a:buNone/>
             </a:pPr>
             <a:r>
-              <a:rPr lang="en-US" sz="700" dirty="0">
+              <a:rPr lang="en-US" sz="720" dirty="0">
                 <a:solidFill>
                   <a:srgbClr val="5F7183"/>
                 </a:solidFill>
@@ -27261,22 +28149,22 @@
                 <a:ea typeface="Arial" pitchFamily="34" charset="-122"/>
                 <a:cs typeface="Arial" pitchFamily="34" charset="-120"/>
               </a:rPr>
-              <a:t>23 / 30</a:t>
-            </a:r>
-            <a:endParaRPr lang="en-US" sz="700" dirty="0"/>
+              <a:t>23 / 32</a:t>
+            </a:r>
+            <a:endParaRPr lang="en-US" sz="720" dirty="0"/>
           </a:p>
         </p:txBody>
       </p:sp>
       <p:sp>
         <p:nvSpPr>
-          <p:cNvPr id="21" name="Text 17"/>
+          <p:cNvPr id="28" name="Text 24"/>
           <p:cNvSpPr txBox="1"/>
           <p:nvPr/>
         </p:nvSpPr>
         <p:spPr>
           <a:xfrm>
-            <a:off x="1750219" y="100013"/>
-            <a:ext cx="1571625" cy="200025"/>
+            <a:off x="1669596" y="102870"/>
+            <a:ext cx="1616529" cy="205740"/>
           </a:xfrm>
           <a:prstGeom prst="rect">
             <a:avLst/>
@@ -27292,7 +28180,7 @@
               <a:buNone/>
             </a:pPr>
             <a:r>
-              <a:rPr lang="en-US" sz="700" dirty="0">
+              <a:rPr lang="en-US" sz="720" dirty="0">
                 <a:solidFill>
                   <a:srgbClr val="5F7183"/>
                 </a:solidFill>
@@ -27302,7 +28190,7 @@
               </a:rPr>
               <a:t>Tiết 1 · 第 1 節</a:t>
             </a:r>
-            <a:endParaRPr lang="en-US" sz="700" dirty="0"/>
+            <a:endParaRPr lang="en-US" sz="720" dirty="0"/>
           </a:p>
         </p:txBody>
       </p:sp>
@@ -27325,7 +28213,7 @@
       </p:nvGrpSpPr>
       <p:grpSpPr>
         <a:xfrm>
-          <a:off x="942514" y="0"/>
+          <a:off x="898071" y="0"/>
           <a:ext cx="1" cy="1"/>
           <a:chOff x="0" y="0"/>
           <a:chExt cx="0" cy="0"/>
@@ -27339,8 +28227,8 @@
         </p:nvSpPr>
         <p:spPr>
           <a:xfrm>
-            <a:off x="1341758" y="333913"/>
-            <a:ext cx="6460485" cy="217769"/>
+            <a:off x="1302204" y="293914"/>
+            <a:ext cx="6539593" cy="220436"/>
           </a:xfrm>
           <a:prstGeom prst="rect">
             <a:avLst/>
@@ -27356,7 +28244,7 @@
               <a:buNone/>
             </a:pPr>
             <a:r>
-              <a:rPr lang="en-US" sz="990" b="1" dirty="0">
+              <a:rPr lang="en-US" sz="1040" b="1" dirty="0">
                 <a:solidFill>
                   <a:srgbClr val="007F72"/>
                 </a:solidFill>
@@ -27364,26 +28252,88 @@
                 <a:ea typeface="Arial" pitchFamily="34" charset="-122"/>
                 <a:cs typeface="Arial" pitchFamily="34" charset="-120"/>
               </a:rPr>
-              <a:t>Vấn đề · 一個留給各位的問題</a:t>
-            </a:r>
-            <a:endParaRPr lang="en-US" sz="990" dirty="0"/>
+              <a:t>▶ Video · 有時間才播：域隨機化的經典示範</a:t>
+            </a:r>
+            <a:endParaRPr lang="en-US" sz="1040" dirty="0"/>
           </a:p>
         </p:txBody>
       </p:sp>
       <p:sp>
         <p:nvSpPr>
-          <p:cNvPr id="3" name="Shape 1"/>
+          <p:cNvPr id="3" name="Text 1"/>
+          <p:cNvSpPr txBox="1"/>
+          <p:nvPr/>
+        </p:nvSpPr>
+        <p:spPr>
+          <a:xfrm>
+            <a:off x="1302204" y="543741"/>
+            <a:ext cx="6539593" cy="450550"/>
+          </a:xfrm>
+          <a:prstGeom prst="rect">
+            <a:avLst/>
+          </a:prstGeom>
+          <a:noFill/>
+          <a:ln/>
+        </p:spPr>
+        <p:txBody>
+          <a:bodyPr wrap="square" lIns="0" tIns="0" rIns="0" bIns="0" rtlCol="0" anchor="t"/>
+          <a:lstStyle/>
+          <a:p>
+            <a:pPr indent="0" marL="0">
+              <a:lnSpc>
+                <a:spcPct val="116000"/>
+              </a:lnSpc>
+              <a:buNone/>
+            </a:pPr>
+            <a:r>
+              <a:rPr lang="en-US" sz="1370" b="1" dirty="0">
+                <a:solidFill>
+                  <a:srgbClr val="0B1F3A"/>
+                </a:solidFill>
+                <a:latin typeface="Arial" pitchFamily="34" charset="0"/>
+                <a:ea typeface="Arial" pitchFamily="34" charset="-122"/>
+                <a:cs typeface="Arial" pitchFamily="34" charset="-120"/>
+              </a:rPr>
+              <a:t>Học xong hoàn toàn trong mô phỏng, rồi bê thẳng ra đời thật</a:t>
+            </a:r>
+            <a:endParaRPr lang="en-US" sz="1370" dirty="0"/>
+          </a:p>
+          <a:p>
+            <a:pPr indent="0" marL="0">
+              <a:lnSpc>
+                <a:spcPct val="116000"/>
+              </a:lnSpc>
+              <a:buNone/>
+            </a:pPr>
+            <a:r>
+              <a:rPr lang="en-US" sz="1000" dirty="0">
+                <a:solidFill>
+                  <a:srgbClr val="5F7183"/>
+                </a:solidFill>
+                <a:latin typeface="微軟正黑體" pitchFamily="34" charset="0"/>
+                <a:ea typeface="微軟正黑體" pitchFamily="34" charset="-122"/>
+                <a:cs typeface="微軟正黑體" pitchFamily="34" charset="-120"/>
+              </a:rPr>
+              <a:t>完全在模擬裡學會，直接搬到真實世界</a:t>
+            </a:r>
+            <a:endParaRPr lang="en-US" sz="1370" dirty="0"/>
+          </a:p>
+        </p:txBody>
+      </p:sp>
+      <p:sp>
+        <p:nvSpPr>
+          <p:cNvPr id="4" name="Shape 2"/>
           <p:cNvSpPr/>
           <p:nvPr/>
         </p:nvSpPr>
         <p:spPr>
           <a:xfrm>
-            <a:off x="1341758" y="874706"/>
-            <a:ext cx="1959922" cy="1996217"/>
+            <a:off x="1302204" y="1008987"/>
+            <a:ext cx="3137535" cy="2062418"/>
           </a:xfrm>
           <a:prstGeom prst="roundRect">
             <a:avLst>
-              <a:gd name="adj" fmla="val 4444"/>
+              <a:gd name="adj" fmla="val 3563"/>
             </a:avLst>
           </a:prstGeom>
           <a:solidFill>
@@ -27399,48 +28349,24 @@
       </p:sp>
       <p:sp>
         <p:nvSpPr>
-          <p:cNvPr id="4" name="Shape 2"/>
-          <p:cNvSpPr/>
-          <p:nvPr/>
-        </p:nvSpPr>
-        <p:spPr>
-          <a:xfrm>
-            <a:off x="1654184" y="1590586"/>
-            <a:ext cx="1335070" cy="1"/>
-          </a:xfrm>
-          <a:prstGeom prst="line">
-            <a:avLst/>
-          </a:prstGeom>
-          <a:noFill/>
-          <a:ln w="12700">
-            <a:solidFill>
-              <a:srgbClr val="9AA6B0"/>
-            </a:solidFill>
-            <a:prstDash val="dash"/>
-          </a:ln>
-        </p:spPr>
-      </p:sp>
-      <p:sp>
-        <p:nvSpPr>
           <p:cNvPr id="5" name="Shape 3"/>
           <p:cNvSpPr/>
           <p:nvPr/>
         </p:nvSpPr>
         <p:spPr>
           <a:xfrm>
-            <a:off x="1654184" y="1802257"/>
-            <a:ext cx="1335070" cy="1"/>
-          </a:xfrm>
-          <a:prstGeom prst="line">
-            <a:avLst/>
-          </a:prstGeom>
-          <a:noFill/>
-          <a:ln w="12700">
-            <a:solidFill>
-              <a:srgbClr val="9AA6B0"/>
-            </a:solidFill>
-            <a:prstDash val="dash"/>
-          </a:ln>
+            <a:off x="1868430" y="1496093"/>
+            <a:ext cx="2005083" cy="65529"/>
+          </a:xfrm>
+          <a:prstGeom prst="roundRect">
+            <a:avLst>
+              <a:gd name="adj" fmla="val 50000"/>
+            </a:avLst>
+          </a:prstGeom>
+          <a:solidFill>
+            <a:srgbClr val="D5DEE6"/>
+          </a:solidFill>
+          <a:ln/>
         </p:spPr>
       </p:sp>
       <p:sp>
@@ -27451,20 +28377,16 @@
         </p:nvSpPr>
         <p:spPr>
           <a:xfrm>
-            <a:off x="1654184" y="1696422"/>
-            <a:ext cx="1229670" cy="1"/>
-          </a:xfrm>
-          <a:prstGeom prst="line">
-            <a:avLst/>
-          </a:prstGeom>
-          <a:noFill/>
-          <a:ln w="25400">
-            <a:solidFill>
-              <a:srgbClr val="00A896"/>
-            </a:solidFill>
-            <a:prstDash val="solid"/>
-            <a:tailEnd type="triangle"/>
-          </a:ln>
+            <a:off x="2224768" y="1484178"/>
+            <a:ext cx="89357" cy="89357"/>
+          </a:xfrm>
+          <a:prstGeom prst="ellipse">
+            <a:avLst/>
+          </a:prstGeom>
+          <a:solidFill>
+            <a:srgbClr val="1F4E79"/>
+          </a:solidFill>
+          <a:ln/>
         </p:spPr>
       </p:sp>
       <p:sp>
@@ -27475,19 +28397,16 @@
         </p:nvSpPr>
         <p:spPr>
           <a:xfrm>
-            <a:off x="1654184" y="2260879"/>
-            <a:ext cx="1335070" cy="1"/>
-          </a:xfrm>
-          <a:prstGeom prst="line">
-            <a:avLst/>
-          </a:prstGeom>
-          <a:noFill/>
-          <a:ln w="12700">
-            <a:solidFill>
-              <a:srgbClr val="9AA6B0"/>
-            </a:solidFill>
-            <a:prstDash val="dash"/>
-          </a:ln>
+            <a:off x="2545581" y="1484178"/>
+            <a:ext cx="89357" cy="89357"/>
+          </a:xfrm>
+          <a:prstGeom prst="ellipse">
+            <a:avLst/>
+          </a:prstGeom>
+          <a:solidFill>
+            <a:srgbClr val="1F4E79"/>
+          </a:solidFill>
+          <a:ln/>
         </p:spPr>
       </p:sp>
       <p:sp>
@@ -27498,19 +28417,16 @@
         </p:nvSpPr>
         <p:spPr>
           <a:xfrm>
-            <a:off x="1654184" y="2472551"/>
-            <a:ext cx="1335070" cy="1"/>
-          </a:xfrm>
-          <a:prstGeom prst="line">
-            <a:avLst/>
-          </a:prstGeom>
-          <a:noFill/>
-          <a:ln w="12700">
-            <a:solidFill>
-              <a:srgbClr val="9AA6B0"/>
-            </a:solidFill>
-            <a:prstDash val="dash"/>
-          </a:ln>
+            <a:off x="2866394" y="1484178"/>
+            <a:ext cx="89357" cy="89357"/>
+          </a:xfrm>
+          <a:prstGeom prst="ellipse">
+            <a:avLst/>
+          </a:prstGeom>
+          <a:solidFill>
+            <a:srgbClr val="1F4E79"/>
+          </a:solidFill>
+          <a:ln/>
         </p:spPr>
       </p:sp>
       <p:sp>
@@ -27520,20 +28436,17 @@
           <p:nvPr/>
         </p:nvSpPr>
         <p:spPr>
-          <a:xfrm flipV="1">
-            <a:off x="1654184" y="2296158"/>
-            <a:ext cx="333767" cy="141114"/>
-          </a:xfrm>
-          <a:prstGeom prst="line">
-            <a:avLst/>
-          </a:prstGeom>
-          <a:noFill/>
-          <a:ln w="25400">
-            <a:solidFill>
-              <a:srgbClr val="D9463E"/>
-            </a:solidFill>
-            <a:prstDash val="solid"/>
-          </a:ln>
+          <a:xfrm>
+            <a:off x="3187208" y="1484178"/>
+            <a:ext cx="89357" cy="89357"/>
+          </a:xfrm>
+          <a:prstGeom prst="ellipse">
+            <a:avLst/>
+          </a:prstGeom>
+          <a:solidFill>
+            <a:srgbClr val="1F4E79"/>
+          </a:solidFill>
+          <a:ln/>
         </p:spPr>
       </p:sp>
       <p:sp>
@@ -27544,19 +28457,18 @@
         </p:nvSpPr>
         <p:spPr>
           <a:xfrm>
-            <a:off x="1987951" y="2296158"/>
-            <a:ext cx="333767" cy="158753"/>
-          </a:xfrm>
-          <a:prstGeom prst="line">
-            <a:avLst/>
-          </a:prstGeom>
-          <a:noFill/>
-          <a:ln w="25400">
-            <a:solidFill>
-              <a:srgbClr val="D9463E"/>
-            </a:solidFill>
-            <a:prstDash val="solid"/>
-          </a:ln>
+            <a:off x="1868430" y="1823735"/>
+            <a:ext cx="2005083" cy="65529"/>
+          </a:xfrm>
+          <a:prstGeom prst="roundRect">
+            <a:avLst>
+              <a:gd name="adj" fmla="val 50000"/>
+            </a:avLst>
+          </a:prstGeom>
+          <a:solidFill>
+            <a:srgbClr val="D5DEE6"/>
+          </a:solidFill>
+          <a:ln/>
         </p:spPr>
       </p:sp>
       <p:sp>
@@ -27566,20 +28478,17 @@
           <p:nvPr/>
         </p:nvSpPr>
         <p:spPr>
-          <a:xfrm flipV="1">
-            <a:off x="2321719" y="2225600"/>
-            <a:ext cx="333767" cy="229311"/>
-          </a:xfrm>
-          <a:prstGeom prst="line">
-            <a:avLst/>
-          </a:prstGeom>
-          <a:noFill/>
-          <a:ln w="25400">
-            <a:solidFill>
-              <a:srgbClr val="D9463E"/>
-            </a:solidFill>
-            <a:prstDash val="solid"/>
-          </a:ln>
+          <a:xfrm>
+            <a:off x="2224768" y="1811821"/>
+            <a:ext cx="89357" cy="89357"/>
+          </a:xfrm>
+          <a:prstGeom prst="ellipse">
+            <a:avLst/>
+          </a:prstGeom>
+          <a:solidFill>
+            <a:srgbClr val="1F4E79"/>
+          </a:solidFill>
+          <a:ln/>
         </p:spPr>
       </p:sp>
       <p:sp>
@@ -27590,14 +28499,74 @@
         </p:nvSpPr>
         <p:spPr>
           <a:xfrm>
-            <a:off x="2655486" y="2225600"/>
-            <a:ext cx="228367" cy="141114"/>
+            <a:off x="2545581" y="1811821"/>
+            <a:ext cx="89357" cy="89357"/>
+          </a:xfrm>
+          <a:prstGeom prst="ellipse">
+            <a:avLst/>
+          </a:prstGeom>
+          <a:solidFill>
+            <a:srgbClr val="1F4E79"/>
+          </a:solidFill>
+          <a:ln/>
+        </p:spPr>
+      </p:sp>
+      <p:sp>
+        <p:nvSpPr>
+          <p:cNvPr id="13" name="Shape 11"/>
+          <p:cNvSpPr/>
+          <p:nvPr/>
+        </p:nvSpPr>
+        <p:spPr>
+          <a:xfrm>
+            <a:off x="2866394" y="1811821"/>
+            <a:ext cx="89357" cy="89357"/>
+          </a:xfrm>
+          <a:prstGeom prst="ellipse">
+            <a:avLst/>
+          </a:prstGeom>
+          <a:solidFill>
+            <a:srgbClr val="1F4E79"/>
+          </a:solidFill>
+          <a:ln/>
+        </p:spPr>
+      </p:sp>
+      <p:sp>
+        <p:nvSpPr>
+          <p:cNvPr id="14" name="Shape 12"/>
+          <p:cNvSpPr/>
+          <p:nvPr/>
+        </p:nvSpPr>
+        <p:spPr>
+          <a:xfrm>
+            <a:off x="3187208" y="1811821"/>
+            <a:ext cx="89357" cy="89357"/>
+          </a:xfrm>
+          <a:prstGeom prst="ellipse">
+            <a:avLst/>
+          </a:prstGeom>
+          <a:solidFill>
+            <a:srgbClr val="D9463E"/>
+          </a:solidFill>
+          <a:ln/>
+        </p:spPr>
+      </p:sp>
+      <p:sp>
+        <p:nvSpPr>
+          <p:cNvPr id="15" name="Shape 13"/>
+          <p:cNvSpPr/>
+          <p:nvPr/>
+        </p:nvSpPr>
+        <p:spPr>
+          <a:xfrm>
+            <a:off x="3352191" y="1856499"/>
+            <a:ext cx="360915" cy="1"/>
           </a:xfrm>
           <a:prstGeom prst="line">
             <a:avLst/>
           </a:prstGeom>
           <a:noFill/>
-          <a:ln w="25400">
+          <a:ln w="20320">
             <a:solidFill>
               <a:srgbClr val="D9463E"/>
             </a:solidFill>
@@ -27608,14 +28577,116 @@
       </p:sp>
       <p:sp>
         <p:nvSpPr>
-          <p:cNvPr id="13" name="Text 11"/>
+          <p:cNvPr id="16" name="Shape 14"/>
+          <p:cNvSpPr/>
+          <p:nvPr/>
+        </p:nvSpPr>
+        <p:spPr>
+          <a:xfrm>
+            <a:off x="1868430" y="2151378"/>
+            <a:ext cx="2005083" cy="65529"/>
+          </a:xfrm>
+          <a:prstGeom prst="roundRect">
+            <a:avLst>
+              <a:gd name="adj" fmla="val 50000"/>
+            </a:avLst>
+          </a:prstGeom>
+          <a:solidFill>
+            <a:srgbClr val="D5DEE6"/>
+          </a:solidFill>
+          <a:ln/>
+        </p:spPr>
+      </p:sp>
+      <p:sp>
+        <p:nvSpPr>
+          <p:cNvPr id="17" name="Shape 15"/>
+          <p:cNvSpPr/>
+          <p:nvPr/>
+        </p:nvSpPr>
+        <p:spPr>
+          <a:xfrm>
+            <a:off x="2224768" y="2139463"/>
+            <a:ext cx="89357" cy="89357"/>
+          </a:xfrm>
+          <a:prstGeom prst="ellipse">
+            <a:avLst/>
+          </a:prstGeom>
+          <a:solidFill>
+            <a:srgbClr val="1F4E79"/>
+          </a:solidFill>
+          <a:ln/>
+        </p:spPr>
+      </p:sp>
+      <p:sp>
+        <p:nvSpPr>
+          <p:cNvPr id="18" name="Shape 16"/>
+          <p:cNvSpPr/>
+          <p:nvPr/>
+        </p:nvSpPr>
+        <p:spPr>
+          <a:xfrm>
+            <a:off x="2545581" y="2139463"/>
+            <a:ext cx="89357" cy="89357"/>
+          </a:xfrm>
+          <a:prstGeom prst="ellipse">
+            <a:avLst/>
+          </a:prstGeom>
+          <a:solidFill>
+            <a:srgbClr val="1F4E79"/>
+          </a:solidFill>
+          <a:ln/>
+        </p:spPr>
+      </p:sp>
+      <p:sp>
+        <p:nvSpPr>
+          <p:cNvPr id="19" name="Shape 17"/>
+          <p:cNvSpPr/>
+          <p:nvPr/>
+        </p:nvSpPr>
+        <p:spPr>
+          <a:xfrm>
+            <a:off x="2866394" y="2139463"/>
+            <a:ext cx="89357" cy="89357"/>
+          </a:xfrm>
+          <a:prstGeom prst="ellipse">
+            <a:avLst/>
+          </a:prstGeom>
+          <a:solidFill>
+            <a:srgbClr val="1F4E79"/>
+          </a:solidFill>
+          <a:ln/>
+        </p:spPr>
+      </p:sp>
+      <p:sp>
+        <p:nvSpPr>
+          <p:cNvPr id="20" name="Shape 18"/>
+          <p:cNvSpPr/>
+          <p:nvPr/>
+        </p:nvSpPr>
+        <p:spPr>
+          <a:xfrm>
+            <a:off x="3187208" y="2139463"/>
+            <a:ext cx="89357" cy="89357"/>
+          </a:xfrm>
+          <a:prstGeom prst="ellipse">
+            <a:avLst/>
+          </a:prstGeom>
+          <a:solidFill>
+            <a:srgbClr val="1F4E79"/>
+          </a:solidFill>
+          <a:ln/>
+        </p:spPr>
+      </p:sp>
+      <p:sp>
+        <p:nvSpPr>
+          <p:cNvPr id="21" name="Text 19"/>
           <p:cNvSpPr txBox="1"/>
           <p:nvPr/>
         </p:nvSpPr>
         <p:spPr>
           <a:xfrm>
-            <a:off x="3664629" y="1047093"/>
-            <a:ext cx="4137614" cy="798305"/>
+            <a:off x="1449161" y="2630533"/>
+            <a:ext cx="2843621" cy="382089"/>
           </a:xfrm>
           <a:prstGeom prst="rect">
             <a:avLst/>
@@ -27627,57 +28698,289 @@
           <a:bodyPr wrap="square" lIns="0" tIns="0" rIns="0" bIns="0" rtlCol="0" anchor="t"/>
           <a:lstStyle/>
           <a:p>
-            <a:pPr indent="0" marL="0">
+            <a:pPr algn="ctr" indent="0" marL="0">
               <a:lnSpc>
-                <a:spcPct val="120000"/>
+                <a:spcPct val="110000"/>
               </a:lnSpc>
               <a:buNone/>
             </a:pPr>
             <a:r>
-              <a:rPr lang="en-US" sz="1830" b="1" dirty="0">
-                <a:solidFill>
-                  <a:srgbClr val="0B1F3A"/>
+              <a:rPr lang="en-US" sz="760" dirty="0">
+                <a:solidFill>
+                  <a:srgbClr val="5F7183"/>
                 </a:solidFill>
                 <a:latin typeface="Arial" pitchFamily="34" charset="0"/>
                 <a:ea typeface="Arial" pitchFamily="34" charset="-122"/>
                 <a:cs typeface="Arial" pitchFamily="34" charset="-120"/>
               </a:rPr>
-              <a:t>Muốn phát lại quỹ đạo Hà Nội, trước hết bạn phải có quỹ đạo Hà Nội</a:t>
-            </a:r>
-            <a:endParaRPr lang="en-US" sz="1830" dirty="0"/>
-          </a:p>
-          <a:p>
-            <a:pPr indent="0" marL="0">
+              <a:t>Trọng lượng, ma sát, tốc độ ngón tay — cứ đổi liên tục.</a:t>
+            </a:r>
+            <a:endParaRPr lang="en-US" sz="760" dirty="0"/>
+          </a:p>
+          <a:p>
+            <a:pPr algn="ctr" indent="0" marL="0">
               <a:lnSpc>
-                <a:spcPct val="120000"/>
+                <a:spcPct val="110000"/>
               </a:lnSpc>
               <a:buNone/>
             </a:pPr>
             <a:r>
-              <a:rPr lang="en-US" sz="1110" dirty="0">
-                <a:solidFill>
-                  <a:srgbClr val="007F72"/>
+              <a:rPr lang="en-US" sz="720" dirty="0">
+                <a:solidFill>
+                  <a:srgbClr val="5F7183"/>
                 </a:solidFill>
                 <a:latin typeface="微軟正黑體" pitchFamily="34" charset="0"/>
                 <a:ea typeface="微軟正黑體" pitchFamily="34" charset="-122"/>
                 <a:cs typeface="微軟正黑體" pitchFamily="34" charset="-120"/>
               </a:rPr>
-              <a:t>要回放河內的軌跡，你得先有河內的軌跡</a:t>
-            </a:r>
-            <a:endParaRPr lang="en-US" sz="1830" dirty="0"/>
+              <a:t>重量、摩擦力、手指反應快慢，一直亂調。</a:t>
+            </a:r>
+            <a:endParaRPr lang="en-US" sz="760" dirty="0"/>
           </a:p>
         </p:txBody>
       </p:sp>
       <p:sp>
         <p:nvSpPr>
-          <p:cNvPr id="14" name="Text 12"/>
+          <p:cNvPr id="22" name="Shape 20"/>
+          <p:cNvSpPr/>
+          <p:nvPr/>
+        </p:nvSpPr>
+        <p:spPr>
+          <a:xfrm>
+            <a:off x="4704261" y="1008987"/>
+            <a:ext cx="3137535" cy="2062418"/>
+          </a:xfrm>
+          <a:prstGeom prst="roundRect">
+            <a:avLst>
+              <a:gd name="adj" fmla="val 3563"/>
+            </a:avLst>
+          </a:prstGeom>
+          <a:solidFill>
+            <a:srgbClr val="F4F7FA"/>
+          </a:solidFill>
+          <a:ln w="12700">
+            <a:solidFill>
+              <a:srgbClr val="DBE3EA"/>
+            </a:solidFill>
+            <a:prstDash val="solid"/>
+          </a:ln>
+        </p:spPr>
+      </p:sp>
+      <p:sp>
+        <p:nvSpPr>
+          <p:cNvPr id="23" name="Shape 21"/>
+          <p:cNvSpPr/>
+          <p:nvPr/>
+        </p:nvSpPr>
+        <p:spPr>
+          <a:xfrm>
+            <a:off x="4851219" y="1141248"/>
+            <a:ext cx="279219" cy="279219"/>
+          </a:xfrm>
+          <a:prstGeom prst="ellipse">
+            <a:avLst/>
+          </a:prstGeom>
+          <a:solidFill>
+            <a:srgbClr val="D9463E"/>
+          </a:solidFill>
+          <a:ln/>
+        </p:spPr>
+      </p:sp>
+      <p:sp>
+        <p:nvSpPr>
+          <p:cNvPr id="24" name="Text 22"/>
           <p:cNvSpPr txBox="1"/>
           <p:nvPr/>
         </p:nvSpPr>
         <p:spPr>
           <a:xfrm>
-            <a:off x="3664629" y="1917989"/>
-            <a:ext cx="4137614" cy="853137"/>
+            <a:off x="4851219" y="1177988"/>
+            <a:ext cx="279219" cy="205740"/>
+          </a:xfrm>
+          <a:prstGeom prst="rect">
+            <a:avLst/>
+          </a:prstGeom>
+          <a:noFill/>
+          <a:ln/>
+        </p:spPr>
+        <p:txBody>
+          <a:bodyPr wrap="square" lIns="0" tIns="0" rIns="0" bIns="0" rtlCol="0" anchor="ctr"/>
+          <a:lstStyle/>
+          <a:p>
+            <a:pPr algn="ctr" indent="0" marL="0">
+              <a:buNone/>
+            </a:pPr>
+            <a:r>
+              <a:rPr lang="en-US" sz="960" b="1" dirty="0">
+                <a:solidFill>
+                  <a:srgbClr val="FFFFFF"/>
+                </a:solidFill>
+                <a:latin typeface="Arial" pitchFamily="34" charset="0"/>
+                <a:ea typeface="Arial" pitchFamily="34" charset="-122"/>
+                <a:cs typeface="Arial" pitchFamily="34" charset="-120"/>
+              </a:rPr>
+              <a:t>▶</a:t>
+            </a:r>
+            <a:endParaRPr lang="en-US" sz="960" dirty="0"/>
+          </a:p>
+        </p:txBody>
+      </p:sp>
+      <p:sp>
+        <p:nvSpPr>
+          <p:cNvPr id="25" name="Text 23"/>
+          <p:cNvSpPr txBox="1"/>
+          <p:nvPr/>
+        </p:nvSpPr>
+        <p:spPr>
+          <a:xfrm>
+            <a:off x="5189220" y="1126553"/>
+            <a:ext cx="2505619" cy="338001"/>
+          </a:xfrm>
+          <a:prstGeom prst="rect">
+            <a:avLst/>
+          </a:prstGeom>
+          <a:noFill/>
+          <a:ln/>
+        </p:spPr>
+        <p:txBody>
+          <a:bodyPr wrap="square" lIns="0" tIns="0" rIns="0" bIns="0" rtlCol="0" anchor="ctr"/>
+          <a:lstStyle/>
+          <a:p>
+            <a:pPr indent="0" marL="0">
+              <a:buNone/>
+            </a:pPr>
+            <a:r>
+              <a:rPr lang="en-US" sz="840" b="1" dirty="0">
+                <a:solidFill>
+                  <a:srgbClr val="0B1F3A"/>
+                </a:solidFill>
+                <a:latin typeface="Arial" pitchFamily="34" charset="0"/>
+                <a:ea typeface="Arial" pitchFamily="34" charset="-122"/>
+                <a:cs typeface="Arial" pitchFamily="34" charset="-120"/>
+              </a:rPr>
+              <a:t>Learning Dexterity</a:t>
+            </a:r>
+            <a:endParaRPr lang="en-US" sz="840" dirty="0"/>
+          </a:p>
+        </p:txBody>
+      </p:sp>
+      <p:sp>
+        <p:nvSpPr>
+          <p:cNvPr id="26" name="Text 24"/>
+          <p:cNvSpPr txBox="1"/>
+          <p:nvPr/>
+        </p:nvSpPr>
+        <p:spPr>
+          <a:xfrm>
+            <a:off x="4851219" y="1493945"/>
+            <a:ext cx="2843621" cy="161653"/>
+          </a:xfrm>
+          <a:prstGeom prst="rect">
+            <a:avLst/>
+          </a:prstGeom>
+          <a:noFill/>
+          <a:ln/>
+        </p:spPr>
+        <p:txBody>
+          <a:bodyPr wrap="square" lIns="0" tIns="0" rIns="0" bIns="0" rtlCol="0" anchor="ctr"/>
+          <a:lstStyle/>
+          <a:p>
+            <a:pPr indent="0" marL="0">
+              <a:buNone/>
+            </a:pPr>
+            <a:r>
+              <a:rPr lang="en-US" sz="720" dirty="0">
+                <a:solidFill>
+                  <a:srgbClr val="5F7183"/>
+                </a:solidFill>
+                <a:latin typeface="Arial" pitchFamily="34" charset="0"/>
+                <a:ea typeface="Arial" pitchFamily="34" charset="-122"/>
+                <a:cs typeface="Arial" pitchFamily="34" charset="-120"/>
+              </a:rPr>
+              <a:t>OpenAI（官方）　·　3:29，播 2 分鐘就夠</a:t>
+            </a:r>
+            <a:endParaRPr lang="en-US" sz="720" dirty="0"/>
+          </a:p>
+        </p:txBody>
+      </p:sp>
+      <p:sp>
+        <p:nvSpPr>
+          <p:cNvPr id="27" name="Text 25">
+            <a:hlinkClick r:id="rId1" tooltip=""/>
+          </p:cNvPr>
+          <p:cNvSpPr txBox="1"/>
+          <p:nvPr/>
+        </p:nvSpPr>
+        <p:spPr>
+          <a:xfrm>
+            <a:off x="4851219" y="1640903"/>
+            <a:ext cx="2843621" cy="161653"/>
+          </a:xfrm>
+          <a:prstGeom prst="rect">
+            <a:avLst/>
+          </a:prstGeom>
+          <a:noFill/>
+          <a:ln/>
+        </p:spPr>
+        <p:txBody>
+          <a:bodyPr wrap="square" lIns="0" tIns="0" rIns="0" bIns="0" rtlCol="0" anchor="ctr"/>
+          <a:lstStyle/>
+          <a:p>
+            <a:pPr indent="0" marL="0">
+              <a:buNone/>
+            </a:pPr>
+            <a:r>
+              <a:rPr lang="en-US" sz="680" u="sng" dirty="0">
+                <a:solidFill>
+                  <a:srgbClr val="1F6FBF"/>
+                </a:solidFill>
+                <a:latin typeface="Arial" pitchFamily="34" charset="0"/>
+                <a:ea typeface="Arial" pitchFamily="34" charset="-122"/>
+                <a:cs typeface="Arial" pitchFamily="34" charset="-120"/>
+                <a:hlinkClick r:id="rId1" invalidUrl="" action="" tgtFrame="" tooltip="" history="1" highlightClick="0" endSnd="0">
+                  <a:extLst>
+                    <a:ext uri="{A12FA001-AC4F-418D-AE19-62706E023703}">
+                      <ahyp:hlinkClr xmlns:ahyp="http://schemas.microsoft.com/office/drawing/2018/hyperlinkcolor" val="tx"/>
+                    </a:ext>
+                  </a:extLst>
+                </a:hlinkClick>
+              </a:rPr>
+              <a:t>https://www.youtube.com/watch?v=jwSbzNHGflM</a:t>
+            </a:r>
+            <a:endParaRPr lang="en-US" sz="680" dirty="0"/>
+          </a:p>
+        </p:txBody>
+      </p:sp>
+      <p:sp>
+        <p:nvSpPr>
+          <p:cNvPr id="28" name="Shape 26"/>
+          <p:cNvSpPr/>
+          <p:nvPr/>
+        </p:nvSpPr>
+        <p:spPr>
+          <a:xfrm>
+            <a:off x="4851219" y="1861338"/>
+            <a:ext cx="29391" cy="191044"/>
+          </a:xfrm>
+          <a:prstGeom prst="rect">
+            <a:avLst/>
+          </a:prstGeom>
+          <a:solidFill>
+            <a:srgbClr val="00A896"/>
+          </a:solidFill>
+          <a:ln/>
+        </p:spPr>
+      </p:sp>
+      <p:sp>
+        <p:nvSpPr>
+          <p:cNvPr id="29" name="Text 27"/>
+          <p:cNvSpPr txBox="1"/>
+          <p:nvPr/>
+        </p:nvSpPr>
+        <p:spPr>
+          <a:xfrm>
+            <a:off x="4954089" y="1831947"/>
+            <a:ext cx="2755446" cy="366492"/>
           </a:xfrm>
           <a:prstGeom prst="rect">
             <a:avLst/>
@@ -27691,32 +28994,32 @@
           <a:p>
             <a:pPr indent="0" marL="0">
               <a:lnSpc>
-                <a:spcPct val="128000"/>
+                <a:spcPct val="118000"/>
               </a:lnSpc>
               <a:buNone/>
             </a:pPr>
             <a:r>
-              <a:rPr lang="en-US" sz="990" dirty="0">
-                <a:solidFill>
-                  <a:srgbClr val="5F7183"/>
+              <a:rPr lang="en-US" sz="760" dirty="0">
+                <a:solidFill>
+                  <a:srgbClr val="1A2733"/>
                 </a:solidFill>
                 <a:latin typeface="Arial" pitchFamily="34" charset="0"/>
                 <a:ea typeface="Arial" pitchFamily="34" charset="-122"/>
                 <a:cs typeface="Arial" pitchFamily="34" charset="-120"/>
               </a:rPr>
-              <a:t>Ai có? Câu trả lời là không ai có sẵn, phải tự đi thu. Vì thế «làm một mô hình hành vi giao thông Đài Loan hoặc Việt Nam» là một đề tài rất có giá trị — dữ liệu đó chỉ các bạn thu được.</a:t>
-            </a:r>
-            <a:endParaRPr lang="en-US" sz="990" dirty="0"/>
+              <a:t>Bàn tay này chưa từng chạm khối thật — học toàn bộ trong mô phỏng</a:t>
+            </a:r>
+            <a:endParaRPr lang="en-US" sz="760" dirty="0"/>
           </a:p>
           <a:p>
             <a:pPr indent="0" marL="0">
               <a:lnSpc>
-                <a:spcPct val="128000"/>
+                <a:spcPct val="118000"/>
               </a:lnSpc>
               <a:buNone/>
             </a:pPr>
             <a:r>
-              <a:rPr lang="en-US" sz="910" dirty="0">
+              <a:rPr lang="en-US" sz="720" dirty="0">
                 <a:solidFill>
                   <a:srgbClr val="5F7183"/>
                 </a:solidFill>
@@ -27724,26 +29027,190 @@
                 <a:ea typeface="微軟正黑體" pitchFamily="34" charset="-122"/>
                 <a:cs typeface="微軟正黑體" pitchFamily="34" charset="-120"/>
               </a:rPr>
-              <a:t>誰有？答案是沒有人有，要自己去收。所以「做一個台灣或越南的交通行為模型」是很有價值的題目——那份資料只有各位收得到。</a:t>
-            </a:r>
-            <a:endParaRPr lang="en-US" sz="990" dirty="0"/>
+              <a:t>這隻機械手從頭到尾沒碰過真的方塊——全部在模擬裡學</a:t>
+            </a:r>
+            <a:endParaRPr lang="en-US" sz="760" dirty="0"/>
           </a:p>
         </p:txBody>
       </p:sp>
       <p:sp>
         <p:nvSpPr>
-          <p:cNvPr id="15" name="Shape 13"/>
+          <p:cNvPr id="30" name="Shape 28"/>
           <p:cNvSpPr/>
           <p:nvPr/>
         </p:nvSpPr>
         <p:spPr>
           <a:xfrm>
-            <a:off x="1341758" y="3106840"/>
-            <a:ext cx="6460485" cy="493610"/>
+            <a:off x="4851219" y="2257222"/>
+            <a:ext cx="29391" cy="191044"/>
+          </a:xfrm>
+          <a:prstGeom prst="rect">
+            <a:avLst/>
+          </a:prstGeom>
+          <a:solidFill>
+            <a:srgbClr val="00A896"/>
+          </a:solidFill>
+          <a:ln/>
+        </p:spPr>
+      </p:sp>
+      <p:sp>
+        <p:nvSpPr>
+          <p:cNvPr id="31" name="Text 29"/>
+          <p:cNvSpPr txBox="1"/>
+          <p:nvPr/>
+        </p:nvSpPr>
+        <p:spPr>
+          <a:xfrm>
+            <a:off x="4954089" y="2227830"/>
+            <a:ext cx="2755446" cy="366492"/>
+          </a:xfrm>
+          <a:prstGeom prst="rect">
+            <a:avLst/>
+          </a:prstGeom>
+          <a:noFill/>
+          <a:ln/>
+        </p:spPr>
+        <p:txBody>
+          <a:bodyPr wrap="square" lIns="0" tIns="0" rIns="0" bIns="0" rtlCol="0" anchor="t"/>
+          <a:lstStyle/>
+          <a:p>
+            <a:pPr indent="0" marL="0">
+              <a:lnSpc>
+                <a:spcPct val="118000"/>
+              </a:lnSpc>
+              <a:buNone/>
+            </a:pPr>
+            <a:r>
+              <a:rPr lang="en-US" sz="760" dirty="0">
+                <a:solidFill>
+                  <a:srgbClr val="1A2733"/>
+                </a:solidFill>
+                <a:latin typeface="Arial" pitchFamily="34" charset="0"/>
+                <a:ea typeface="Arial" pitchFamily="34" charset="-122"/>
+                <a:cs typeface="Arial" pitchFamily="34" charset="-120"/>
+              </a:rPr>
+              <a:t>Trong mô phỏng: trọng lượng, ma sát, độ nhanh của ngón tay đều bị đổi liên tục</a:t>
+            </a:r>
+            <a:endParaRPr lang="en-US" sz="760" dirty="0"/>
+          </a:p>
+          <a:p>
+            <a:pPr indent="0" marL="0">
+              <a:lnSpc>
+                <a:spcPct val="118000"/>
+              </a:lnSpc>
+              <a:buNone/>
+            </a:pPr>
+            <a:r>
+              <a:rPr lang="en-US" sz="720" dirty="0">
+                <a:solidFill>
+                  <a:srgbClr val="5F7183"/>
+                </a:solidFill>
+                <a:latin typeface="微軟正黑體" pitchFamily="34" charset="0"/>
+                <a:ea typeface="微軟正黑體" pitchFamily="34" charset="-122"/>
+                <a:cs typeface="微軟正黑體" pitchFamily="34" charset="-120"/>
+              </a:rPr>
+              <a:t>模擬裡的方塊重量、摩擦力、手指反應快慢，一直亂調</a:t>
+            </a:r>
+            <a:endParaRPr lang="en-US" sz="760" dirty="0"/>
+          </a:p>
+        </p:txBody>
+      </p:sp>
+      <p:sp>
+        <p:nvSpPr>
+          <p:cNvPr id="32" name="Shape 30"/>
+          <p:cNvSpPr/>
+          <p:nvPr/>
+        </p:nvSpPr>
+        <p:spPr>
+          <a:xfrm>
+            <a:off x="4851219" y="2653105"/>
+            <a:ext cx="29391" cy="191044"/>
+          </a:xfrm>
+          <a:prstGeom prst="rect">
+            <a:avLst/>
+          </a:prstGeom>
+          <a:solidFill>
+            <a:srgbClr val="00A896"/>
+          </a:solidFill>
+          <a:ln/>
+        </p:spPr>
+      </p:sp>
+      <p:sp>
+        <p:nvSpPr>
+          <p:cNvPr id="33" name="Text 31"/>
+          <p:cNvSpPr txBox="1"/>
+          <p:nvPr/>
+        </p:nvSpPr>
+        <p:spPr>
+          <a:xfrm>
+            <a:off x="4954089" y="2623714"/>
+            <a:ext cx="2755446" cy="252119"/>
+          </a:xfrm>
+          <a:prstGeom prst="rect">
+            <a:avLst/>
+          </a:prstGeom>
+          <a:noFill/>
+          <a:ln/>
+        </p:spPr>
+        <p:txBody>
+          <a:bodyPr wrap="square" lIns="0" tIns="0" rIns="0" bIns="0" rtlCol="0" anchor="t"/>
+          <a:lstStyle/>
+          <a:p>
+            <a:pPr indent="0" marL="0">
+              <a:lnSpc>
+                <a:spcPct val="118000"/>
+              </a:lnSpc>
+              <a:buNone/>
+            </a:pPr>
+            <a:r>
+              <a:rPr lang="en-US" sz="760" dirty="0">
+                <a:solidFill>
+                  <a:srgbClr val="1A2733"/>
+                </a:solidFill>
+                <a:latin typeface="Arial" pitchFamily="34" charset="0"/>
+                <a:ea typeface="Arial" pitchFamily="34" charset="-122"/>
+                <a:cs typeface="Arial" pitchFamily="34" charset="-120"/>
+              </a:rPr>
+              <a:t>Học xong bê thẳng sang tay thật, nó vẫn xoay được</a:t>
+            </a:r>
+            <a:endParaRPr lang="en-US" sz="760" dirty="0"/>
+          </a:p>
+          <a:p>
+            <a:pPr indent="0" marL="0">
+              <a:lnSpc>
+                <a:spcPct val="118000"/>
+              </a:lnSpc>
+              <a:buNone/>
+            </a:pPr>
+            <a:r>
+              <a:rPr lang="en-US" sz="720" dirty="0">
+                <a:solidFill>
+                  <a:srgbClr val="5F7183"/>
+                </a:solidFill>
+                <a:latin typeface="微軟正黑體" pitchFamily="34" charset="0"/>
+                <a:ea typeface="微軟正黑體" pitchFamily="34" charset="-122"/>
+                <a:cs typeface="微軟正黑體" pitchFamily="34" charset="-120"/>
+              </a:rPr>
+              <a:t>學完直接搬到真手上，它還是轉得動</a:t>
+            </a:r>
+            <a:endParaRPr lang="en-US" sz="760" dirty="0"/>
+          </a:p>
+        </p:txBody>
+      </p:sp>
+      <p:sp>
+        <p:nvSpPr>
+          <p:cNvPr id="34" name="Shape 32"/>
+          <p:cNvSpPr/>
+          <p:nvPr/>
+        </p:nvSpPr>
+        <p:spPr>
+          <a:xfrm>
+            <a:off x="1302204" y="3159579"/>
+            <a:ext cx="6539593" cy="440871"/>
           </a:xfrm>
           <a:prstGeom prst="roundRect">
             <a:avLst>
-              <a:gd name="adj" fmla="val 13235"/>
+              <a:gd name="adj" fmla="val 15000"/>
             </a:avLst>
           </a:prstGeom>
           <a:solidFill>
@@ -27759,14 +29226,14 @@
       </p:sp>
       <p:sp>
         <p:nvSpPr>
-          <p:cNvPr id="16" name="Text 14"/>
+          <p:cNvPr id="35" name="Text 33"/>
           <p:cNvSpPr txBox="1"/>
           <p:nvPr/>
         </p:nvSpPr>
         <p:spPr>
           <a:xfrm>
-            <a:off x="1486937" y="3150394"/>
-            <a:ext cx="6170126" cy="435538"/>
+            <a:off x="1449161" y="3211014"/>
+            <a:ext cx="6245679" cy="352697"/>
           </a:xfrm>
           <a:prstGeom prst="rect">
             <a:avLst/>
@@ -27780,12 +29247,12 @@
           <a:p>
             <a:pPr indent="0" marL="0">
               <a:lnSpc>
-                <a:spcPct val="116000"/>
+                <a:spcPct val="114000"/>
               </a:lnSpc>
               <a:buNone/>
             </a:pPr>
             <a:r>
-              <a:rPr lang="en-US" sz="950" b="1" dirty="0">
+              <a:rPr lang="en-US" sz="920" b="1" dirty="0">
                 <a:solidFill>
                   <a:srgbClr val="7A4E00"/>
                 </a:solidFill>
@@ -27793,19 +29260,19 @@
                 <a:ea typeface="Arial" pitchFamily="34" charset="-122"/>
                 <a:cs typeface="Arial" pitchFamily="34" charset="-120"/>
               </a:rPr>
-              <a:t>Muốn thử? Bắt đầu từ một ngã tư: quay một đoạn bằng điện thoại, rồi đếm và đo.</a:t>
-            </a:r>
-            <a:endParaRPr lang="en-US" sz="950" dirty="0"/>
+              <a:t>Không phải xe, nhưng cách làm y hệt: làm loạn mô phỏng, để đời thật chỉ là một trường hợp.</a:t>
+            </a:r>
+            <a:endParaRPr lang="en-US" sz="920" dirty="0"/>
           </a:p>
           <a:p>
             <a:pPr indent="0" marL="0">
               <a:lnSpc>
-                <a:spcPct val="116000"/>
+                <a:spcPct val="114000"/>
               </a:lnSpc>
               <a:buNone/>
             </a:pPr>
             <a:r>
-              <a:rPr lang="en-US" sz="870" dirty="0">
+              <a:rPr lang="en-US" sz="840" dirty="0">
                 <a:solidFill>
                   <a:srgbClr val="7A4E00"/>
                 </a:solidFill>
@@ -27813,30 +29280,30 @@
                 <a:ea typeface="微軟正黑體" pitchFamily="34" charset="-122"/>
                 <a:cs typeface="微軟正黑體" pitchFamily="34" charset="-120"/>
               </a:rPr>
-              <a:t>想試試看？從一個路口開始：用手機錄一段，然後數出來、量出來。</a:t>
-            </a:r>
-            <a:endParaRPr lang="en-US" sz="950" dirty="0"/>
+              <a:t>不是車，但方法一模一樣：把模擬弄亂，讓現實只是其中一種情況。</a:t>
+            </a:r>
+            <a:endParaRPr lang="en-US" sz="920" dirty="0"/>
           </a:p>
         </p:txBody>
       </p:sp>
       <p:pic>
         <p:nvPicPr>
-          <p:cNvPr id="18" name="Image 0" descr="/Users/tsengchenghsun/Class/carClass/Claude outputs/第四週(10-1)/src/logo.png">    </p:cNvPr>
+          <p:cNvPr id="37" name="Image 0" descr="/Users/tsengchenghsun/Class/carClass/Claude outputs/第四週(10-1)/src/logo.png">    </p:cNvPr>
           <p:cNvPicPr>
             <a:picLocks noChangeAspect="1"/>
           </p:cNvPicPr>
           <p:nvPr/>
         </p:nvPicPr>
         <p:blipFill>
-          <a:blip r:embed="rId1"/>
+          <a:blip r:embed="rId2"/>
           <a:stretch>
             <a:fillRect/>
           </a:stretch>
         </p:blipFill>
         <p:spPr>
           <a:xfrm>
-            <a:off x="7199748" y="87108"/>
-            <a:ext cx="871077" cy="192460"/>
+            <a:off x="7231924" y="88174"/>
+            <a:ext cx="881743" cy="194817"/>
           </a:xfrm>
           <a:prstGeom prst="rect">
             <a:avLst/>
@@ -27845,14 +29312,14 @@
       </p:pic>
       <p:sp>
         <p:nvSpPr>
-          <p:cNvPr id="19" name="Text 15"/>
+          <p:cNvPr id="38" name="Text 34"/>
           <p:cNvSpPr txBox="1"/>
           <p:nvPr/>
         </p:nvSpPr>
         <p:spPr>
           <a:xfrm>
-            <a:off x="1029622" y="101626"/>
-            <a:ext cx="653307" cy="203251"/>
+            <a:off x="986246" y="102870"/>
+            <a:ext cx="661307" cy="205740"/>
           </a:xfrm>
           <a:prstGeom prst="rect">
             <a:avLst/>
@@ -27868,7 +29335,7 @@
               <a:buNone/>
             </a:pPr>
             <a:r>
-              <a:rPr lang="en-US" sz="710" dirty="0">
+              <a:rPr lang="en-US" sz="720" dirty="0">
                 <a:solidFill>
                   <a:srgbClr val="5F7183"/>
                 </a:solidFill>
@@ -27876,22 +29343,22 @@
                 <a:ea typeface="Arial" pitchFamily="34" charset="-122"/>
                 <a:cs typeface="Arial" pitchFamily="34" charset="-120"/>
               </a:rPr>
-              <a:t>24 / 30</a:t>
-            </a:r>
-            <a:endParaRPr lang="en-US" sz="710" dirty="0"/>
+              <a:t>24 / 32</a:t>
+            </a:r>
+            <a:endParaRPr lang="en-US" sz="720" dirty="0"/>
           </a:p>
         </p:txBody>
       </p:sp>
       <p:sp>
         <p:nvSpPr>
-          <p:cNvPr id="20" name="Text 16"/>
+          <p:cNvPr id="39" name="Text 35"/>
           <p:cNvSpPr txBox="1"/>
           <p:nvPr/>
         </p:nvSpPr>
         <p:spPr>
           <a:xfrm>
-            <a:off x="1704706" y="101626"/>
-            <a:ext cx="1596974" cy="203251"/>
+            <a:off x="1669596" y="102870"/>
+            <a:ext cx="1616529" cy="205740"/>
           </a:xfrm>
           <a:prstGeom prst="rect">
             <a:avLst/>
@@ -27907,7 +29374,7 @@
               <a:buNone/>
             </a:pPr>
             <a:r>
-              <a:rPr lang="en-US" sz="710" dirty="0">
+              <a:rPr lang="en-US" sz="720" dirty="0">
                 <a:solidFill>
                   <a:srgbClr val="5F7183"/>
                 </a:solidFill>
@@ -27917,7 +29384,7 @@
               </a:rPr>
               <a:t>Tiết 1 · 第 1 節</a:t>
             </a:r>
-            <a:endParaRPr lang="en-US" sz="710" dirty="0"/>
+            <a:endParaRPr lang="en-US" sz="720" dirty="0"/>
           </a:p>
         </p:txBody>
       </p:sp>
@@ -27932,6 +29399,1472 @@
 <file path=ppt/slides/slide25.xml><?xml version="1.0" encoding="utf-8"?>
 <p:sld xmlns:a="http://schemas.openxmlformats.org/drawingml/2006/main" xmlns:r="http://schemas.openxmlformats.org/officeDocument/2006/relationships" xmlns:p="http://schemas.openxmlformats.org/presentationml/2006/main">
   <p:cSld name="Slide 25">
+    <p:spTree>
+      <p:nvGrpSpPr>
+        <p:cNvPr id="1" name=""/>
+        <p:cNvGrpSpPr/>
+        <p:nvPr/>
+      </p:nvGrpSpPr>
+      <p:grpSpPr>
+        <a:xfrm>
+          <a:off x="1000125" y="0"/>
+          <a:ext cx="1" cy="1"/>
+          <a:chOff x="0" y="0"/>
+          <a:chExt cx="0" cy="0"/>
+        </a:xfrm>
+      </p:grpSpPr>
+      <p:sp>
+        <p:nvSpPr>
+          <p:cNvPr id="2" name="Text 0"/>
+          <p:cNvSpPr txBox="1"/>
+          <p:nvPr/>
+        </p:nvSpPr>
+        <p:spPr>
+          <a:xfrm>
+            <a:off x="1393031" y="300038"/>
+            <a:ext cx="6357938" cy="214313"/>
+          </a:xfrm>
+          <a:prstGeom prst="rect">
+            <a:avLst/>
+          </a:prstGeom>
+          <a:noFill/>
+          <a:ln/>
+        </p:spPr>
+        <p:txBody>
+          <a:bodyPr wrap="square" lIns="0" tIns="0" rIns="0" bIns="0" rtlCol="0" anchor="ctr"/>
+          <a:lstStyle/>
+          <a:p>
+            <a:pPr indent="0" marL="0">
+              <a:buNone/>
+            </a:pPr>
+            <a:r>
+              <a:rPr lang="en-US" sz="980" b="1" dirty="0">
+                <a:solidFill>
+                  <a:srgbClr val="007F72"/>
+                </a:solidFill>
+                <a:latin typeface="Arial" pitchFamily="34" charset="0"/>
+                <a:ea typeface="Arial" pitchFamily="34" charset="-122"/>
+                <a:cs typeface="Arial" pitchFamily="34" charset="-120"/>
+              </a:rPr>
+              <a:t>Khoảng cách 2 / 3 · 落差之二：行為</a:t>
+            </a:r>
+            <a:endParaRPr lang="en-US" sz="980" dirty="0"/>
+          </a:p>
+        </p:txBody>
+      </p:sp>
+      <p:sp>
+        <p:nvSpPr>
+          <p:cNvPr id="3" name="Text 1"/>
+          <p:cNvSpPr txBox="1"/>
+          <p:nvPr/>
+        </p:nvSpPr>
+        <p:spPr>
+          <a:xfrm>
+            <a:off x="1393031" y="528638"/>
+            <a:ext cx="6357938" cy="638228"/>
+          </a:xfrm>
+          <a:prstGeom prst="rect">
+            <a:avLst/>
+          </a:prstGeom>
+          <a:noFill/>
+          <a:ln/>
+        </p:spPr>
+        <p:txBody>
+          <a:bodyPr wrap="square" lIns="0" tIns="0" rIns="0" bIns="0" rtlCol="0" anchor="t"/>
+          <a:lstStyle/>
+          <a:p>
+            <a:pPr indent="0" marL="0">
+              <a:lnSpc>
+                <a:spcPct val="116000"/>
+              </a:lnSpc>
+              <a:buNone/>
+            </a:pPr>
+            <a:r>
+              <a:rPr lang="en-US" sz="1480" b="1" dirty="0">
+                <a:solidFill>
+                  <a:srgbClr val="0B1F3A"/>
+                </a:solidFill>
+                <a:latin typeface="Arial" pitchFamily="34" charset="0"/>
+                <a:ea typeface="Arial" pitchFamily="34" charset="-122"/>
+                <a:cs typeface="Arial" pitchFamily="34" charset="-120"/>
+              </a:rPr>
+              <a:t>Khoảng cách về hành vi: trong mô phỏng ai cũng đi đúng luật, ngoài đường thì không</a:t>
+            </a:r>
+            <a:endParaRPr lang="en-US" sz="1480" dirty="0"/>
+          </a:p>
+          <a:p>
+            <a:pPr indent="0" marL="0">
+              <a:lnSpc>
+                <a:spcPct val="116000"/>
+              </a:lnSpc>
+              <a:buNone/>
+            </a:pPr>
+            <a:r>
+              <a:rPr lang="en-US" sz="980" dirty="0">
+                <a:solidFill>
+                  <a:srgbClr val="007F72"/>
+                </a:solidFill>
+                <a:latin typeface="微軟正黑體" pitchFamily="34" charset="0"/>
+                <a:ea typeface="微軟正黑體" pitchFamily="34" charset="-122"/>
+                <a:cs typeface="微軟正黑體" pitchFamily="34" charset="-120"/>
+              </a:rPr>
+              <a:t>行為落差：模擬裡的車都照規則走，真實世界的人不照規則</a:t>
+            </a:r>
+            <a:endParaRPr lang="en-US" sz="1480" dirty="0"/>
+          </a:p>
+        </p:txBody>
+      </p:sp>
+      <p:sp>
+        <p:nvSpPr>
+          <p:cNvPr id="4" name="Shape 2"/>
+          <p:cNvSpPr/>
+          <p:nvPr/>
+        </p:nvSpPr>
+        <p:spPr>
+          <a:xfrm>
+            <a:off x="1393031" y="1253548"/>
+            <a:ext cx="1995488" cy="1818264"/>
+          </a:xfrm>
+          <a:prstGeom prst="roundRect">
+            <a:avLst>
+              <a:gd name="adj" fmla="val 3929"/>
+            </a:avLst>
+          </a:prstGeom>
+          <a:solidFill>
+            <a:srgbClr val="F4F7FA"/>
+          </a:solidFill>
+          <a:ln w="12700">
+            <a:solidFill>
+              <a:srgbClr val="DBE3EA"/>
+            </a:solidFill>
+            <a:prstDash val="solid"/>
+          </a:ln>
+          <a:effectLst>
+            <a:outerShdw sx="100000" sy="100000" kx="0" ky="0" algn="bl" rotWithShape="0" blurRad="76200" dist="12700" dir="5400000">
+              <a:srgbClr val="9AAAB8">
+                <a:alpha val="28000"/>
+              </a:srgbClr>
+            </a:outerShdw>
+          </a:effectLst>
+        </p:spPr>
+      </p:sp>
+      <p:sp>
+        <p:nvSpPr>
+          <p:cNvPr id="5" name="Shape 3"/>
+          <p:cNvSpPr/>
+          <p:nvPr/>
+        </p:nvSpPr>
+        <p:spPr>
+          <a:xfrm>
+            <a:off x="1393031" y="1253548"/>
+            <a:ext cx="1995488" cy="42863"/>
+          </a:xfrm>
+          <a:prstGeom prst="rect">
+            <a:avLst/>
+          </a:prstGeom>
+          <a:solidFill>
+            <a:srgbClr val="0B1F3A"/>
+          </a:solidFill>
+          <a:ln/>
+        </p:spPr>
+      </p:sp>
+      <p:sp>
+        <p:nvSpPr>
+          <p:cNvPr id="6" name="Text 4"/>
+          <p:cNvSpPr txBox="1"/>
+          <p:nvPr/>
+        </p:nvSpPr>
+        <p:spPr>
+          <a:xfrm>
+            <a:off x="1507331" y="1346417"/>
+            <a:ext cx="1766888" cy="303941"/>
+          </a:xfrm>
+          <a:prstGeom prst="rect">
+            <a:avLst/>
+          </a:prstGeom>
+          <a:noFill/>
+          <a:ln/>
+        </p:spPr>
+        <p:txBody>
+          <a:bodyPr wrap="square" lIns="0" tIns="0" rIns="0" bIns="0" rtlCol="0" anchor="t"/>
+          <a:lstStyle/>
+          <a:p>
+            <a:pPr indent="0" marL="0">
+              <a:lnSpc>
+                <a:spcPct val="112000"/>
+              </a:lnSpc>
+              <a:buNone/>
+            </a:pPr>
+            <a:r>
+              <a:rPr lang="en-US" sz="980" b="1" dirty="0">
+                <a:solidFill>
+                  <a:srgbClr val="0B1F3A"/>
+                </a:solidFill>
+                <a:latin typeface="Arial" pitchFamily="34" charset="0"/>
+                <a:ea typeface="Arial" pitchFamily="34" charset="-122"/>
+                <a:cs typeface="Arial" pitchFamily="34" charset="-120"/>
+              </a:rPr>
+              <a:t>Xe trong mô phỏng làm gì</a:t>
+            </a:r>
+            <a:endParaRPr lang="en-US" sz="980" dirty="0"/>
+          </a:p>
+          <a:p>
+            <a:pPr indent="0" marL="0">
+              <a:lnSpc>
+                <a:spcPct val="112000"/>
+              </a:lnSpc>
+              <a:buNone/>
+            </a:pPr>
+            <a:r>
+              <a:rPr lang="en-US" sz="860" dirty="0">
+                <a:solidFill>
+                  <a:srgbClr val="007F72"/>
+                </a:solidFill>
+                <a:latin typeface="微軟正黑體" pitchFamily="34" charset="0"/>
+                <a:ea typeface="微軟正黑體" pitchFamily="34" charset="-122"/>
+                <a:cs typeface="微軟正黑體" pitchFamily="34" charset="-120"/>
+              </a:rPr>
+              <a:t>模擬裡的車在做什麼</a:t>
+            </a:r>
+            <a:endParaRPr lang="en-US" sz="980" dirty="0"/>
+          </a:p>
+        </p:txBody>
+      </p:sp>
+      <p:sp>
+        <p:nvSpPr>
+          <p:cNvPr id="7" name="Text 5"/>
+          <p:cNvSpPr txBox="1"/>
+          <p:nvPr/>
+        </p:nvSpPr>
+        <p:spPr>
+          <a:xfrm>
+            <a:off x="1507331" y="1678933"/>
+            <a:ext cx="1766888" cy="1321442"/>
+          </a:xfrm>
+          <a:prstGeom prst="rect">
+            <a:avLst/>
+          </a:prstGeom>
+          <a:noFill/>
+          <a:ln/>
+        </p:spPr>
+        <p:txBody>
+          <a:bodyPr wrap="square" lIns="0" tIns="0" rIns="0" bIns="0" rtlCol="0" anchor="t"/>
+          <a:lstStyle/>
+          <a:p>
+            <a:pPr indent="0" marL="0">
+              <a:lnSpc>
+                <a:spcPct val="130000"/>
+              </a:lnSpc>
+              <a:buNone/>
+            </a:pPr>
+            <a:r>
+              <a:rPr lang="en-US" sz="900" dirty="0">
+                <a:solidFill>
+                  <a:srgbClr val="1A2733"/>
+                </a:solidFill>
+                <a:latin typeface="Arial" pitchFamily="34" charset="0"/>
+                <a:ea typeface="Arial" pitchFamily="34" charset="-122"/>
+                <a:cs typeface="Arial" pitchFamily="34" charset="-120"/>
+              </a:rPr>
+              <a:t>Giữ giữa làn, giữ khoảng cách an toàn với xe trước, muốn chuyển làn thì bật xi-nhan trước đã.</a:t>
+            </a:r>
+            <a:endParaRPr lang="en-US" sz="900" dirty="0"/>
+          </a:p>
+          <a:p>
+            <a:pPr indent="0" marL="0">
+              <a:lnSpc>
+                <a:spcPct val="130000"/>
+              </a:lnSpc>
+              <a:buNone/>
+            </a:pPr>
+            <a:r>
+              <a:rPr lang="en-US" sz="820" dirty="0">
+                <a:solidFill>
+                  <a:srgbClr val="5F7183"/>
+                </a:solidFill>
+                <a:latin typeface="微軟正黑體" pitchFamily="34" charset="0"/>
+                <a:ea typeface="微軟正黑體" pitchFamily="34" charset="-122"/>
+                <a:cs typeface="微軟正黑體" pitchFamily="34" charset="-120"/>
+              </a:rPr>
+              <a:t>待在車道中間、跟前車保持安全距離、要變換車道先打方向燈。</a:t>
+            </a:r>
+            <a:endParaRPr lang="en-US" sz="900" dirty="0"/>
+          </a:p>
+        </p:txBody>
+      </p:sp>
+      <p:sp>
+        <p:nvSpPr>
+          <p:cNvPr id="8" name="Shape 6"/>
+          <p:cNvSpPr/>
+          <p:nvPr/>
+        </p:nvSpPr>
+        <p:spPr>
+          <a:xfrm>
+            <a:off x="3574256" y="1253548"/>
+            <a:ext cx="1995488" cy="1818264"/>
+          </a:xfrm>
+          <a:prstGeom prst="roundRect">
+            <a:avLst>
+              <a:gd name="adj" fmla="val 3929"/>
+            </a:avLst>
+          </a:prstGeom>
+          <a:solidFill>
+            <a:srgbClr val="F4F7FA"/>
+          </a:solidFill>
+          <a:ln w="12700">
+            <a:solidFill>
+              <a:srgbClr val="DBE3EA"/>
+            </a:solidFill>
+            <a:prstDash val="solid"/>
+          </a:ln>
+          <a:effectLst>
+            <a:outerShdw sx="100000" sy="100000" kx="0" ky="0" algn="bl" rotWithShape="0" blurRad="76200" dist="12700" dir="5400000">
+              <a:srgbClr val="9AAAB8">
+                <a:alpha val="28000"/>
+              </a:srgbClr>
+            </a:outerShdw>
+          </a:effectLst>
+        </p:spPr>
+      </p:sp>
+      <p:sp>
+        <p:nvSpPr>
+          <p:cNvPr id="9" name="Shape 7"/>
+          <p:cNvSpPr/>
+          <p:nvPr/>
+        </p:nvSpPr>
+        <p:spPr>
+          <a:xfrm>
+            <a:off x="3574256" y="1253548"/>
+            <a:ext cx="1995488" cy="42863"/>
+          </a:xfrm>
+          <a:prstGeom prst="rect">
+            <a:avLst/>
+          </a:prstGeom>
+          <a:solidFill>
+            <a:srgbClr val="007F72"/>
+          </a:solidFill>
+          <a:ln/>
+        </p:spPr>
+      </p:sp>
+      <p:sp>
+        <p:nvSpPr>
+          <p:cNvPr id="10" name="Text 8"/>
+          <p:cNvSpPr txBox="1"/>
+          <p:nvPr/>
+        </p:nvSpPr>
+        <p:spPr>
+          <a:xfrm>
+            <a:off x="3688556" y="1346417"/>
+            <a:ext cx="1766888" cy="442813"/>
+          </a:xfrm>
+          <a:prstGeom prst="rect">
+            <a:avLst/>
+          </a:prstGeom>
+          <a:noFill/>
+          <a:ln/>
+        </p:spPr>
+        <p:txBody>
+          <a:bodyPr wrap="square" lIns="0" tIns="0" rIns="0" bIns="0" rtlCol="0" anchor="t"/>
+          <a:lstStyle/>
+          <a:p>
+            <a:pPr indent="0" marL="0">
+              <a:lnSpc>
+                <a:spcPct val="112000"/>
+              </a:lnSpc>
+              <a:buNone/>
+            </a:pPr>
+            <a:r>
+              <a:rPr lang="en-US" sz="980" b="1" dirty="0">
+                <a:solidFill>
+                  <a:srgbClr val="0B1F3A"/>
+                </a:solidFill>
+                <a:latin typeface="Arial" pitchFamily="34" charset="0"/>
+                <a:ea typeface="Arial" pitchFamily="34" charset="-122"/>
+                <a:cs typeface="Arial" pitchFamily="34" charset="-120"/>
+              </a:rPr>
+              <a:t>Xe máy thật ngoài đường thì sao</a:t>
+            </a:r>
+            <a:endParaRPr lang="en-US" sz="980" dirty="0"/>
+          </a:p>
+          <a:p>
+            <a:pPr indent="0" marL="0">
+              <a:lnSpc>
+                <a:spcPct val="112000"/>
+              </a:lnSpc>
+              <a:buNone/>
+            </a:pPr>
+            <a:r>
+              <a:rPr lang="en-US" sz="860" dirty="0">
+                <a:solidFill>
+                  <a:srgbClr val="007F72"/>
+                </a:solidFill>
+                <a:latin typeface="微軟正黑體" pitchFamily="34" charset="0"/>
+                <a:ea typeface="微軟正黑體" pitchFamily="34" charset="-122"/>
+                <a:cs typeface="微軟正黑體" pitchFamily="34" charset="-120"/>
+              </a:rPr>
+              <a:t>真實世界的機車呢</a:t>
+            </a:r>
+            <a:endParaRPr lang="en-US" sz="980" dirty="0"/>
+          </a:p>
+        </p:txBody>
+      </p:sp>
+      <p:sp>
+        <p:nvSpPr>
+          <p:cNvPr id="11" name="Text 9"/>
+          <p:cNvSpPr txBox="1"/>
+          <p:nvPr/>
+        </p:nvSpPr>
+        <p:spPr>
+          <a:xfrm>
+            <a:off x="3688556" y="1817805"/>
+            <a:ext cx="1766888" cy="1182570"/>
+          </a:xfrm>
+          <a:prstGeom prst="rect">
+            <a:avLst/>
+          </a:prstGeom>
+          <a:noFill/>
+          <a:ln/>
+        </p:spPr>
+        <p:txBody>
+          <a:bodyPr wrap="square" lIns="0" tIns="0" rIns="0" bIns="0" rtlCol="0" anchor="t"/>
+          <a:lstStyle/>
+          <a:p>
+            <a:pPr indent="0" marL="0">
+              <a:lnSpc>
+                <a:spcPct val="130000"/>
+              </a:lnSpc>
+              <a:buNone/>
+            </a:pPr>
+            <a:r>
+              <a:rPr lang="en-US" sz="900" dirty="0">
+                <a:solidFill>
+                  <a:srgbClr val="1A2733"/>
+                </a:solidFill>
+                <a:latin typeface="Arial" pitchFamily="34" charset="0"/>
+                <a:ea typeface="Arial" pitchFamily="34" charset="-122"/>
+                <a:cs typeface="Arial" pitchFamily="34" charset="-120"/>
+              </a:rPr>
+              <a:t>Lách khe, đèn đỏ thì chen lên tận đầu, ngã tư không có vạch kẻ thì nhìn mắt nhau mà đi.</a:t>
+            </a:r>
+            <a:endParaRPr lang="en-US" sz="900" dirty="0"/>
+          </a:p>
+          <a:p>
+            <a:pPr indent="0" marL="0">
+              <a:lnSpc>
+                <a:spcPct val="130000"/>
+              </a:lnSpc>
+              <a:buNone/>
+            </a:pPr>
+            <a:r>
+              <a:rPr lang="en-US" sz="820" dirty="0">
+                <a:solidFill>
+                  <a:srgbClr val="5F7183"/>
+                </a:solidFill>
+                <a:latin typeface="微軟正黑體" pitchFamily="34" charset="0"/>
+                <a:ea typeface="微軟正黑體" pitchFamily="34" charset="-122"/>
+                <a:cs typeface="微軟正黑體" pitchFamily="34" charset="-120"/>
+              </a:rPr>
+              <a:t>鑽縫、在紅燈前擠到最前面、在沒有標線的路口靠眼神決定誰先走。</a:t>
+            </a:r>
+            <a:endParaRPr lang="en-US" sz="900" dirty="0"/>
+          </a:p>
+        </p:txBody>
+      </p:sp>
+      <p:sp>
+        <p:nvSpPr>
+          <p:cNvPr id="12" name="Shape 10"/>
+          <p:cNvSpPr/>
+          <p:nvPr/>
+        </p:nvSpPr>
+        <p:spPr>
+          <a:xfrm>
+            <a:off x="5755481" y="1253548"/>
+            <a:ext cx="1995488" cy="1818264"/>
+          </a:xfrm>
+          <a:prstGeom prst="roundRect">
+            <a:avLst>
+              <a:gd name="adj" fmla="val 3929"/>
+            </a:avLst>
+          </a:prstGeom>
+          <a:solidFill>
+            <a:srgbClr val="F4F7FA"/>
+          </a:solidFill>
+          <a:ln w="12700">
+            <a:solidFill>
+              <a:srgbClr val="DBE3EA"/>
+            </a:solidFill>
+            <a:prstDash val="solid"/>
+          </a:ln>
+          <a:effectLst>
+            <a:outerShdw sx="100000" sy="100000" kx="0" ky="0" algn="bl" rotWithShape="0" blurRad="76200" dist="12700" dir="5400000">
+              <a:srgbClr val="9AAAB8">
+                <a:alpha val="28000"/>
+              </a:srgbClr>
+            </a:outerShdw>
+          </a:effectLst>
+        </p:spPr>
+      </p:sp>
+      <p:sp>
+        <p:nvSpPr>
+          <p:cNvPr id="13" name="Shape 11"/>
+          <p:cNvSpPr/>
+          <p:nvPr/>
+        </p:nvSpPr>
+        <p:spPr>
+          <a:xfrm>
+            <a:off x="5755481" y="1253548"/>
+            <a:ext cx="1995488" cy="42863"/>
+          </a:xfrm>
+          <a:prstGeom prst="rect">
+            <a:avLst/>
+          </a:prstGeom>
+          <a:solidFill>
+            <a:srgbClr val="FFB020"/>
+          </a:solidFill>
+          <a:ln/>
+        </p:spPr>
+      </p:sp>
+      <p:sp>
+        <p:nvSpPr>
+          <p:cNvPr id="14" name="Text 12"/>
+          <p:cNvSpPr txBox="1"/>
+          <p:nvPr/>
+        </p:nvSpPr>
+        <p:spPr>
+          <a:xfrm>
+            <a:off x="5869781" y="1346417"/>
+            <a:ext cx="1766888" cy="442813"/>
+          </a:xfrm>
+          <a:prstGeom prst="rect">
+            <a:avLst/>
+          </a:prstGeom>
+          <a:noFill/>
+          <a:ln/>
+        </p:spPr>
+        <p:txBody>
+          <a:bodyPr wrap="square" lIns="0" tIns="0" rIns="0" bIns="0" rtlCol="0" anchor="t"/>
+          <a:lstStyle/>
+          <a:p>
+            <a:pPr indent="0" marL="0">
+              <a:lnSpc>
+                <a:spcPct val="112000"/>
+              </a:lnSpc>
+              <a:buNone/>
+            </a:pPr>
+            <a:r>
+              <a:rPr lang="en-US" sz="980" b="1" dirty="0">
+                <a:solidFill>
+                  <a:srgbClr val="0B1F3A"/>
+                </a:solidFill>
+                <a:latin typeface="Arial" pitchFamily="34" charset="0"/>
+                <a:ea typeface="Arial" pitchFamily="34" charset="-122"/>
+                <a:cs typeface="Arial" pitchFamily="34" charset="-120"/>
+              </a:rPr>
+              <a:t>Nên xảy ra một chuyện rất mỉa mai</a:t>
+            </a:r>
+            <a:endParaRPr lang="en-US" sz="980" dirty="0"/>
+          </a:p>
+          <a:p>
+            <a:pPr indent="0" marL="0">
+              <a:lnSpc>
+                <a:spcPct val="112000"/>
+              </a:lnSpc>
+              <a:buNone/>
+            </a:pPr>
+            <a:r>
+              <a:rPr lang="en-US" sz="860" dirty="0">
+                <a:solidFill>
+                  <a:srgbClr val="007F72"/>
+                </a:solidFill>
+                <a:latin typeface="微軟正黑體" pitchFamily="34" charset="0"/>
+                <a:ea typeface="微軟正黑體" pitchFamily="34" charset="-122"/>
+                <a:cs typeface="微軟正黑體" pitchFamily="34" charset="-120"/>
+              </a:rPr>
+              <a:t>所以會發生一件很諷刺的事</a:t>
+            </a:r>
+            <a:endParaRPr lang="en-US" sz="980" dirty="0"/>
+          </a:p>
+        </p:txBody>
+      </p:sp>
+      <p:sp>
+        <p:nvSpPr>
+          <p:cNvPr id="15" name="Text 13"/>
+          <p:cNvSpPr txBox="1"/>
+          <p:nvPr/>
+        </p:nvSpPr>
+        <p:spPr>
+          <a:xfrm>
+            <a:off x="5869781" y="1817805"/>
+            <a:ext cx="1766888" cy="1182570"/>
+          </a:xfrm>
+          <a:prstGeom prst="rect">
+            <a:avLst/>
+          </a:prstGeom>
+          <a:noFill/>
+          <a:ln/>
+        </p:spPr>
+        <p:txBody>
+          <a:bodyPr wrap="square" lIns="0" tIns="0" rIns="0" bIns="0" rtlCol="0" anchor="t"/>
+          <a:lstStyle/>
+          <a:p>
+            <a:pPr indent="0" marL="0">
+              <a:lnSpc>
+                <a:spcPct val="130000"/>
+              </a:lnSpc>
+              <a:buNone/>
+            </a:pPr>
+            <a:r>
+              <a:rPr lang="en-US" sz="900" dirty="0">
+                <a:solidFill>
+                  <a:srgbClr val="1A2733"/>
+                </a:solidFill>
+                <a:latin typeface="Arial" pitchFamily="34" charset="0"/>
+                <a:ea typeface="Arial" pitchFamily="34" charset="-122"/>
+                <a:cs typeface="Arial" pitchFamily="34" charset="-120"/>
+              </a:rPr>
+              <a:t>Một chiếc xe tự lái hoàn hảo trong mô phỏng, thả ra đường Hà Nội thật có thể không nhúc nhích nổi.</a:t>
+            </a:r>
+            <a:endParaRPr lang="en-US" sz="900" dirty="0"/>
+          </a:p>
+          <a:p>
+            <a:pPr indent="0" marL="0">
+              <a:lnSpc>
+                <a:spcPct val="130000"/>
+              </a:lnSpc>
+              <a:buNone/>
+            </a:pPr>
+            <a:r>
+              <a:rPr lang="en-US" sz="820" dirty="0">
+                <a:solidFill>
+                  <a:srgbClr val="5F7183"/>
+                </a:solidFill>
+                <a:latin typeface="微軟正黑體" pitchFamily="34" charset="0"/>
+                <a:ea typeface="微軟正黑體" pitchFamily="34" charset="-122"/>
+                <a:cs typeface="微軟正黑體" pitchFamily="34" charset="-120"/>
+              </a:rPr>
+              <a:t>在模擬裡完美的自駕車，丟到真的河內街頭可能完全動不了——它學到的規則在那裡不適用。</a:t>
+            </a:r>
+            <a:endParaRPr lang="en-US" sz="900" dirty="0"/>
+          </a:p>
+        </p:txBody>
+      </p:sp>
+      <p:sp>
+        <p:nvSpPr>
+          <p:cNvPr id="16" name="Shape 14"/>
+          <p:cNvSpPr/>
+          <p:nvPr/>
+        </p:nvSpPr>
+        <p:spPr>
+          <a:xfrm>
+            <a:off x="1393031" y="3128963"/>
+            <a:ext cx="6357938" cy="471488"/>
+          </a:xfrm>
+          <a:prstGeom prst="roundRect">
+            <a:avLst>
+              <a:gd name="adj" fmla="val 13636"/>
+            </a:avLst>
+          </a:prstGeom>
+          <a:solidFill>
+            <a:srgbClr val="FFF6E3"/>
+          </a:solidFill>
+          <a:ln w="12700">
+            <a:solidFill>
+              <a:srgbClr val="FFB020"/>
+            </a:solidFill>
+            <a:prstDash val="solid"/>
+          </a:ln>
+        </p:spPr>
+      </p:sp>
+      <p:sp>
+        <p:nvSpPr>
+          <p:cNvPr id="17" name="Text 15"/>
+          <p:cNvSpPr txBox="1"/>
+          <p:nvPr/>
+        </p:nvSpPr>
+        <p:spPr>
+          <a:xfrm>
+            <a:off x="1535906" y="3171825"/>
+            <a:ext cx="6072188" cy="400050"/>
+          </a:xfrm>
+          <a:prstGeom prst="rect">
+            <a:avLst/>
+          </a:prstGeom>
+          <a:noFill/>
+          <a:ln/>
+        </p:spPr>
+        <p:txBody>
+          <a:bodyPr wrap="square" lIns="0" tIns="0" rIns="0" bIns="0" rtlCol="0" anchor="t"/>
+          <a:lstStyle/>
+          <a:p>
+            <a:pPr indent="0" marL="0">
+              <a:lnSpc>
+                <a:spcPct val="116000"/>
+              </a:lnSpc>
+              <a:buNone/>
+            </a:pPr>
+            <a:r>
+              <a:rPr lang="en-US" sz="900" b="1" dirty="0">
+                <a:solidFill>
+                  <a:srgbClr val="7A4E00"/>
+                </a:solidFill>
+                <a:latin typeface="Arial" pitchFamily="34" charset="0"/>
+                <a:ea typeface="Arial" pitchFamily="34" charset="-122"/>
+                <a:cs typeface="Arial" pitchFamily="34" charset="-120"/>
+              </a:rPr>
+              <a:t>Cách chữa: ghi lại quỹ đạo thật ngoài đường rồi phát lại vào trong mô phỏng.</a:t>
+            </a:r>
+            <a:endParaRPr lang="en-US" sz="900" dirty="0"/>
+          </a:p>
+          <a:p>
+            <a:pPr indent="0" marL="0">
+              <a:lnSpc>
+                <a:spcPct val="116000"/>
+              </a:lnSpc>
+              <a:buNone/>
+            </a:pPr>
+            <a:r>
+              <a:rPr lang="en-US" sz="820" dirty="0">
+                <a:solidFill>
+                  <a:srgbClr val="7A4E00"/>
+                </a:solidFill>
+                <a:latin typeface="微軟正黑體" pitchFamily="34" charset="0"/>
+                <a:ea typeface="微軟正黑體" pitchFamily="34" charset="-122"/>
+                <a:cs typeface="微軟正黑體" pitchFamily="34" charset="-120"/>
+              </a:rPr>
+              <a:t>解法：把真實道路上錄到的軌跡，回放進模擬裡。</a:t>
+            </a:r>
+            <a:endParaRPr lang="en-US" sz="900" dirty="0"/>
+          </a:p>
+        </p:txBody>
+      </p:sp>
+      <p:pic>
+        <p:nvPicPr>
+          <p:cNvPr id="19" name="Image 0" descr="/Users/tsengchenghsun/Class/carClass/Claude outputs/第四週(10-1)/src/logo.png">    </p:cNvPr>
+          <p:cNvPicPr>
+            <a:picLocks noChangeAspect="1"/>
+          </p:cNvPicPr>
+          <p:nvPr/>
+        </p:nvPicPr>
+        <p:blipFill>
+          <a:blip r:embed="rId1"/>
+          <a:stretch>
+            <a:fillRect/>
+          </a:stretch>
+        </p:blipFill>
+        <p:spPr>
+          <a:xfrm>
+            <a:off x="7158038" y="85725"/>
+            <a:ext cx="857250" cy="189405"/>
+          </a:xfrm>
+          <a:prstGeom prst="rect">
+            <a:avLst/>
+          </a:prstGeom>
+        </p:spPr>
+      </p:pic>
+      <p:sp>
+        <p:nvSpPr>
+          <p:cNvPr id="20" name="Text 16"/>
+          <p:cNvSpPr txBox="1"/>
+          <p:nvPr/>
+        </p:nvSpPr>
+        <p:spPr>
+          <a:xfrm>
+            <a:off x="1085850" y="100013"/>
+            <a:ext cx="642938" cy="200025"/>
+          </a:xfrm>
+          <a:prstGeom prst="rect">
+            <a:avLst/>
+          </a:prstGeom>
+          <a:noFill/>
+          <a:ln/>
+        </p:spPr>
+        <p:txBody>
+          <a:bodyPr wrap="square" lIns="0" tIns="0" rIns="0" bIns="0" rtlCol="0" anchor="ctr"/>
+          <a:lstStyle/>
+          <a:p>
+            <a:pPr indent="0" marL="0">
+              <a:buNone/>
+            </a:pPr>
+            <a:r>
+              <a:rPr lang="en-US" sz="700" dirty="0">
+                <a:solidFill>
+                  <a:srgbClr val="5F7183"/>
+                </a:solidFill>
+                <a:latin typeface="Arial" pitchFamily="34" charset="0"/>
+                <a:ea typeface="Arial" pitchFamily="34" charset="-122"/>
+                <a:cs typeface="Arial" pitchFamily="34" charset="-120"/>
+              </a:rPr>
+              <a:t>25 / 32</a:t>
+            </a:r>
+            <a:endParaRPr lang="en-US" sz="700" dirty="0"/>
+          </a:p>
+        </p:txBody>
+      </p:sp>
+      <p:sp>
+        <p:nvSpPr>
+          <p:cNvPr id="21" name="Text 17"/>
+          <p:cNvSpPr txBox="1"/>
+          <p:nvPr/>
+        </p:nvSpPr>
+        <p:spPr>
+          <a:xfrm>
+            <a:off x="1750219" y="100013"/>
+            <a:ext cx="1571625" cy="200025"/>
+          </a:xfrm>
+          <a:prstGeom prst="rect">
+            <a:avLst/>
+          </a:prstGeom>
+          <a:noFill/>
+          <a:ln/>
+        </p:spPr>
+        <p:txBody>
+          <a:bodyPr wrap="square" lIns="0" tIns="0" rIns="0" bIns="0" rtlCol="0" anchor="ctr"/>
+          <a:lstStyle/>
+          <a:p>
+            <a:pPr indent="0" marL="0">
+              <a:buNone/>
+            </a:pPr>
+            <a:r>
+              <a:rPr lang="en-US" sz="700" dirty="0">
+                <a:solidFill>
+                  <a:srgbClr val="5F7183"/>
+                </a:solidFill>
+                <a:latin typeface="Arial" pitchFamily="34" charset="0"/>
+                <a:ea typeface="Arial" pitchFamily="34" charset="-122"/>
+                <a:cs typeface="Arial" pitchFamily="34" charset="-120"/>
+              </a:rPr>
+              <a:t>Tiết 1 · 第 1 節</a:t>
+            </a:r>
+            <a:endParaRPr lang="en-US" sz="700" dirty="0"/>
+          </a:p>
+        </p:txBody>
+      </p:sp>
+    </p:spTree>
+  </p:cSld>
+  <p:clrMapOvr>
+    <a:masterClrMapping/>
+  </p:clrMapOvr>
+</p:sld>
+</file>
+
+<file path=ppt/slides/slide26.xml><?xml version="1.0" encoding="utf-8"?>
+<p:sld xmlns:a="http://schemas.openxmlformats.org/drawingml/2006/main" xmlns:r="http://schemas.openxmlformats.org/officeDocument/2006/relationships" xmlns:p="http://schemas.openxmlformats.org/presentationml/2006/main">
+  <p:cSld name="Slide 26">
+    <p:spTree>
+      <p:nvGrpSpPr>
+        <p:cNvPr id="1" name=""/>
+        <p:cNvGrpSpPr/>
+        <p:nvPr/>
+      </p:nvGrpSpPr>
+      <p:grpSpPr>
+        <a:xfrm>
+          <a:off x="942514" y="0"/>
+          <a:ext cx="1" cy="1"/>
+          <a:chOff x="0" y="0"/>
+          <a:chExt cx="0" cy="0"/>
+        </a:xfrm>
+      </p:grpSpPr>
+      <p:sp>
+        <p:nvSpPr>
+          <p:cNvPr id="2" name="Text 0"/>
+          <p:cNvSpPr txBox="1"/>
+          <p:nvPr/>
+        </p:nvSpPr>
+        <p:spPr>
+          <a:xfrm>
+            <a:off x="1341758" y="333913"/>
+            <a:ext cx="6460485" cy="217769"/>
+          </a:xfrm>
+          <a:prstGeom prst="rect">
+            <a:avLst/>
+          </a:prstGeom>
+          <a:noFill/>
+          <a:ln/>
+        </p:spPr>
+        <p:txBody>
+          <a:bodyPr wrap="square" lIns="0" tIns="0" rIns="0" bIns="0" rtlCol="0" anchor="ctr"/>
+          <a:lstStyle/>
+          <a:p>
+            <a:pPr indent="0" marL="0">
+              <a:buNone/>
+            </a:pPr>
+            <a:r>
+              <a:rPr lang="en-US" sz="990" b="1" dirty="0">
+                <a:solidFill>
+                  <a:srgbClr val="007F72"/>
+                </a:solidFill>
+                <a:latin typeface="Arial" pitchFamily="34" charset="0"/>
+                <a:ea typeface="Arial" pitchFamily="34" charset="-122"/>
+                <a:cs typeface="Arial" pitchFamily="34" charset="-120"/>
+              </a:rPr>
+              <a:t>Vấn đề · 一個留給各位的問題</a:t>
+            </a:r>
+            <a:endParaRPr lang="en-US" sz="990" dirty="0"/>
+          </a:p>
+        </p:txBody>
+      </p:sp>
+      <p:sp>
+        <p:nvSpPr>
+          <p:cNvPr id="3" name="Shape 1"/>
+          <p:cNvSpPr/>
+          <p:nvPr/>
+        </p:nvSpPr>
+        <p:spPr>
+          <a:xfrm>
+            <a:off x="1341758" y="874706"/>
+            <a:ext cx="1959922" cy="1996217"/>
+          </a:xfrm>
+          <a:prstGeom prst="roundRect">
+            <a:avLst>
+              <a:gd name="adj" fmla="val 4444"/>
+            </a:avLst>
+          </a:prstGeom>
+          <a:solidFill>
+            <a:srgbClr val="F4F7FA"/>
+          </a:solidFill>
+          <a:ln w="12700">
+            <a:solidFill>
+              <a:srgbClr val="DBE3EA"/>
+            </a:solidFill>
+            <a:prstDash val="solid"/>
+          </a:ln>
+        </p:spPr>
+      </p:sp>
+      <p:sp>
+        <p:nvSpPr>
+          <p:cNvPr id="4" name="Shape 2"/>
+          <p:cNvSpPr/>
+          <p:nvPr/>
+        </p:nvSpPr>
+        <p:spPr>
+          <a:xfrm>
+            <a:off x="1654184" y="1590586"/>
+            <a:ext cx="1335070" cy="1"/>
+          </a:xfrm>
+          <a:prstGeom prst="line">
+            <a:avLst/>
+          </a:prstGeom>
+          <a:noFill/>
+          <a:ln w="12700">
+            <a:solidFill>
+              <a:srgbClr val="9AA6B0"/>
+            </a:solidFill>
+            <a:prstDash val="dash"/>
+          </a:ln>
+        </p:spPr>
+      </p:sp>
+      <p:sp>
+        <p:nvSpPr>
+          <p:cNvPr id="5" name="Shape 3"/>
+          <p:cNvSpPr/>
+          <p:nvPr/>
+        </p:nvSpPr>
+        <p:spPr>
+          <a:xfrm>
+            <a:off x="1654184" y="1802257"/>
+            <a:ext cx="1335070" cy="1"/>
+          </a:xfrm>
+          <a:prstGeom prst="line">
+            <a:avLst/>
+          </a:prstGeom>
+          <a:noFill/>
+          <a:ln w="12700">
+            <a:solidFill>
+              <a:srgbClr val="9AA6B0"/>
+            </a:solidFill>
+            <a:prstDash val="dash"/>
+          </a:ln>
+        </p:spPr>
+      </p:sp>
+      <p:sp>
+        <p:nvSpPr>
+          <p:cNvPr id="6" name="Shape 4"/>
+          <p:cNvSpPr/>
+          <p:nvPr/>
+        </p:nvSpPr>
+        <p:spPr>
+          <a:xfrm>
+            <a:off x="1654184" y="1696422"/>
+            <a:ext cx="1229670" cy="1"/>
+          </a:xfrm>
+          <a:prstGeom prst="line">
+            <a:avLst/>
+          </a:prstGeom>
+          <a:noFill/>
+          <a:ln w="25400">
+            <a:solidFill>
+              <a:srgbClr val="00A896"/>
+            </a:solidFill>
+            <a:prstDash val="solid"/>
+            <a:tailEnd type="triangle"/>
+          </a:ln>
+        </p:spPr>
+      </p:sp>
+      <p:sp>
+        <p:nvSpPr>
+          <p:cNvPr id="7" name="Shape 5"/>
+          <p:cNvSpPr/>
+          <p:nvPr/>
+        </p:nvSpPr>
+        <p:spPr>
+          <a:xfrm>
+            <a:off x="1654184" y="2260879"/>
+            <a:ext cx="1335070" cy="1"/>
+          </a:xfrm>
+          <a:prstGeom prst="line">
+            <a:avLst/>
+          </a:prstGeom>
+          <a:noFill/>
+          <a:ln w="12700">
+            <a:solidFill>
+              <a:srgbClr val="9AA6B0"/>
+            </a:solidFill>
+            <a:prstDash val="dash"/>
+          </a:ln>
+        </p:spPr>
+      </p:sp>
+      <p:sp>
+        <p:nvSpPr>
+          <p:cNvPr id="8" name="Shape 6"/>
+          <p:cNvSpPr/>
+          <p:nvPr/>
+        </p:nvSpPr>
+        <p:spPr>
+          <a:xfrm>
+            <a:off x="1654184" y="2472551"/>
+            <a:ext cx="1335070" cy="1"/>
+          </a:xfrm>
+          <a:prstGeom prst="line">
+            <a:avLst/>
+          </a:prstGeom>
+          <a:noFill/>
+          <a:ln w="12700">
+            <a:solidFill>
+              <a:srgbClr val="9AA6B0"/>
+            </a:solidFill>
+            <a:prstDash val="dash"/>
+          </a:ln>
+        </p:spPr>
+      </p:sp>
+      <p:sp>
+        <p:nvSpPr>
+          <p:cNvPr id="9" name="Shape 7"/>
+          <p:cNvSpPr/>
+          <p:nvPr/>
+        </p:nvSpPr>
+        <p:spPr>
+          <a:xfrm flipV="1">
+            <a:off x="1654184" y="2296158"/>
+            <a:ext cx="333767" cy="141114"/>
+          </a:xfrm>
+          <a:prstGeom prst="line">
+            <a:avLst/>
+          </a:prstGeom>
+          <a:noFill/>
+          <a:ln w="25400">
+            <a:solidFill>
+              <a:srgbClr val="D9463E"/>
+            </a:solidFill>
+            <a:prstDash val="solid"/>
+          </a:ln>
+        </p:spPr>
+      </p:sp>
+      <p:sp>
+        <p:nvSpPr>
+          <p:cNvPr id="10" name="Shape 8"/>
+          <p:cNvSpPr/>
+          <p:nvPr/>
+        </p:nvSpPr>
+        <p:spPr>
+          <a:xfrm>
+            <a:off x="1987951" y="2296158"/>
+            <a:ext cx="333767" cy="158753"/>
+          </a:xfrm>
+          <a:prstGeom prst="line">
+            <a:avLst/>
+          </a:prstGeom>
+          <a:noFill/>
+          <a:ln w="25400">
+            <a:solidFill>
+              <a:srgbClr val="D9463E"/>
+            </a:solidFill>
+            <a:prstDash val="solid"/>
+          </a:ln>
+        </p:spPr>
+      </p:sp>
+      <p:sp>
+        <p:nvSpPr>
+          <p:cNvPr id="11" name="Shape 9"/>
+          <p:cNvSpPr/>
+          <p:nvPr/>
+        </p:nvSpPr>
+        <p:spPr>
+          <a:xfrm flipV="1">
+            <a:off x="2321719" y="2225600"/>
+            <a:ext cx="333767" cy="229311"/>
+          </a:xfrm>
+          <a:prstGeom prst="line">
+            <a:avLst/>
+          </a:prstGeom>
+          <a:noFill/>
+          <a:ln w="25400">
+            <a:solidFill>
+              <a:srgbClr val="D9463E"/>
+            </a:solidFill>
+            <a:prstDash val="solid"/>
+          </a:ln>
+        </p:spPr>
+      </p:sp>
+      <p:sp>
+        <p:nvSpPr>
+          <p:cNvPr id="12" name="Shape 10"/>
+          <p:cNvSpPr/>
+          <p:nvPr/>
+        </p:nvSpPr>
+        <p:spPr>
+          <a:xfrm>
+            <a:off x="2655486" y="2225600"/>
+            <a:ext cx="228367" cy="141114"/>
+          </a:xfrm>
+          <a:prstGeom prst="line">
+            <a:avLst/>
+          </a:prstGeom>
+          <a:noFill/>
+          <a:ln w="25400">
+            <a:solidFill>
+              <a:srgbClr val="D9463E"/>
+            </a:solidFill>
+            <a:prstDash val="solid"/>
+            <a:tailEnd type="triangle"/>
+          </a:ln>
+        </p:spPr>
+      </p:sp>
+      <p:sp>
+        <p:nvSpPr>
+          <p:cNvPr id="13" name="Text 11"/>
+          <p:cNvSpPr txBox="1"/>
+          <p:nvPr/>
+        </p:nvSpPr>
+        <p:spPr>
+          <a:xfrm>
+            <a:off x="3664629" y="1047093"/>
+            <a:ext cx="4137614" cy="798305"/>
+          </a:xfrm>
+          <a:prstGeom prst="rect">
+            <a:avLst/>
+          </a:prstGeom>
+          <a:noFill/>
+          <a:ln/>
+        </p:spPr>
+        <p:txBody>
+          <a:bodyPr wrap="square" lIns="0" tIns="0" rIns="0" bIns="0" rtlCol="0" anchor="t"/>
+          <a:lstStyle/>
+          <a:p>
+            <a:pPr indent="0" marL="0">
+              <a:lnSpc>
+                <a:spcPct val="120000"/>
+              </a:lnSpc>
+              <a:buNone/>
+            </a:pPr>
+            <a:r>
+              <a:rPr lang="en-US" sz="1830" b="1" dirty="0">
+                <a:solidFill>
+                  <a:srgbClr val="0B1F3A"/>
+                </a:solidFill>
+                <a:latin typeface="Arial" pitchFamily="34" charset="0"/>
+                <a:ea typeface="Arial" pitchFamily="34" charset="-122"/>
+                <a:cs typeface="Arial" pitchFamily="34" charset="-120"/>
+              </a:rPr>
+              <a:t>Muốn phát lại quỹ đạo Hà Nội, trước hết bạn phải có quỹ đạo Hà Nội</a:t>
+            </a:r>
+            <a:endParaRPr lang="en-US" sz="1830" dirty="0"/>
+          </a:p>
+          <a:p>
+            <a:pPr indent="0" marL="0">
+              <a:lnSpc>
+                <a:spcPct val="120000"/>
+              </a:lnSpc>
+              <a:buNone/>
+            </a:pPr>
+            <a:r>
+              <a:rPr lang="en-US" sz="1110" dirty="0">
+                <a:solidFill>
+                  <a:srgbClr val="007F72"/>
+                </a:solidFill>
+                <a:latin typeface="微軟正黑體" pitchFamily="34" charset="0"/>
+                <a:ea typeface="微軟正黑體" pitchFamily="34" charset="-122"/>
+                <a:cs typeface="微軟正黑體" pitchFamily="34" charset="-120"/>
+              </a:rPr>
+              <a:t>要回放河內的軌跡，你得先有河內的軌跡</a:t>
+            </a:r>
+            <a:endParaRPr lang="en-US" sz="1830" dirty="0"/>
+          </a:p>
+        </p:txBody>
+      </p:sp>
+      <p:sp>
+        <p:nvSpPr>
+          <p:cNvPr id="14" name="Text 12"/>
+          <p:cNvSpPr txBox="1"/>
+          <p:nvPr/>
+        </p:nvSpPr>
+        <p:spPr>
+          <a:xfrm>
+            <a:off x="3664629" y="1917989"/>
+            <a:ext cx="4137614" cy="853137"/>
+          </a:xfrm>
+          <a:prstGeom prst="rect">
+            <a:avLst/>
+          </a:prstGeom>
+          <a:noFill/>
+          <a:ln/>
+        </p:spPr>
+        <p:txBody>
+          <a:bodyPr wrap="square" lIns="0" tIns="0" rIns="0" bIns="0" rtlCol="0" anchor="t"/>
+          <a:lstStyle/>
+          <a:p>
+            <a:pPr indent="0" marL="0">
+              <a:lnSpc>
+                <a:spcPct val="128000"/>
+              </a:lnSpc>
+              <a:buNone/>
+            </a:pPr>
+            <a:r>
+              <a:rPr lang="en-US" sz="990" dirty="0">
+                <a:solidFill>
+                  <a:srgbClr val="5F7183"/>
+                </a:solidFill>
+                <a:latin typeface="Arial" pitchFamily="34" charset="0"/>
+                <a:ea typeface="Arial" pitchFamily="34" charset="-122"/>
+                <a:cs typeface="Arial" pitchFamily="34" charset="-120"/>
+              </a:rPr>
+              <a:t>Ai có? Câu trả lời là không ai có sẵn, phải tự đi thu. Vì thế «làm một mô hình hành vi giao thông Đài Loan hoặc Việt Nam» là một đề tài rất có giá trị — dữ liệu đó chỉ các bạn thu được.</a:t>
+            </a:r>
+            <a:endParaRPr lang="en-US" sz="990" dirty="0"/>
+          </a:p>
+          <a:p>
+            <a:pPr indent="0" marL="0">
+              <a:lnSpc>
+                <a:spcPct val="128000"/>
+              </a:lnSpc>
+              <a:buNone/>
+            </a:pPr>
+            <a:r>
+              <a:rPr lang="en-US" sz="910" dirty="0">
+                <a:solidFill>
+                  <a:srgbClr val="5F7183"/>
+                </a:solidFill>
+                <a:latin typeface="微軟正黑體" pitchFamily="34" charset="0"/>
+                <a:ea typeface="微軟正黑體" pitchFamily="34" charset="-122"/>
+                <a:cs typeface="微軟正黑體" pitchFamily="34" charset="-120"/>
+              </a:rPr>
+              <a:t>誰有？答案是沒有人有，要自己去收。所以「做一個台灣或越南的交通行為模型」是很有價值的題目——那份資料只有各位收得到。</a:t>
+            </a:r>
+            <a:endParaRPr lang="en-US" sz="990" dirty="0"/>
+          </a:p>
+        </p:txBody>
+      </p:sp>
+      <p:sp>
+        <p:nvSpPr>
+          <p:cNvPr id="15" name="Shape 13"/>
+          <p:cNvSpPr/>
+          <p:nvPr/>
+        </p:nvSpPr>
+        <p:spPr>
+          <a:xfrm>
+            <a:off x="1341758" y="3106840"/>
+            <a:ext cx="6460485" cy="493610"/>
+          </a:xfrm>
+          <a:prstGeom prst="roundRect">
+            <a:avLst>
+              <a:gd name="adj" fmla="val 13235"/>
+            </a:avLst>
+          </a:prstGeom>
+          <a:solidFill>
+            <a:srgbClr val="FFF6E3"/>
+          </a:solidFill>
+          <a:ln w="12700">
+            <a:solidFill>
+              <a:srgbClr val="FFB020"/>
+            </a:solidFill>
+            <a:prstDash val="solid"/>
+          </a:ln>
+        </p:spPr>
+      </p:sp>
+      <p:sp>
+        <p:nvSpPr>
+          <p:cNvPr id="16" name="Text 14"/>
+          <p:cNvSpPr txBox="1"/>
+          <p:nvPr/>
+        </p:nvSpPr>
+        <p:spPr>
+          <a:xfrm>
+            <a:off x="1486937" y="3150394"/>
+            <a:ext cx="6170126" cy="435538"/>
+          </a:xfrm>
+          <a:prstGeom prst="rect">
+            <a:avLst/>
+          </a:prstGeom>
+          <a:noFill/>
+          <a:ln/>
+        </p:spPr>
+        <p:txBody>
+          <a:bodyPr wrap="square" lIns="0" tIns="0" rIns="0" bIns="0" rtlCol="0" anchor="t"/>
+          <a:lstStyle/>
+          <a:p>
+            <a:pPr indent="0" marL="0">
+              <a:lnSpc>
+                <a:spcPct val="116000"/>
+              </a:lnSpc>
+              <a:buNone/>
+            </a:pPr>
+            <a:r>
+              <a:rPr lang="en-US" sz="950" b="1" dirty="0">
+                <a:solidFill>
+                  <a:srgbClr val="7A4E00"/>
+                </a:solidFill>
+                <a:latin typeface="Arial" pitchFamily="34" charset="0"/>
+                <a:ea typeface="Arial" pitchFamily="34" charset="-122"/>
+                <a:cs typeface="Arial" pitchFamily="34" charset="-120"/>
+              </a:rPr>
+              <a:t>Muốn thử? Bắt đầu từ một ngã tư: quay một đoạn bằng điện thoại, rồi đếm và đo.</a:t>
+            </a:r>
+            <a:endParaRPr lang="en-US" sz="950" dirty="0"/>
+          </a:p>
+          <a:p>
+            <a:pPr indent="0" marL="0">
+              <a:lnSpc>
+                <a:spcPct val="116000"/>
+              </a:lnSpc>
+              <a:buNone/>
+            </a:pPr>
+            <a:r>
+              <a:rPr lang="en-US" sz="870" dirty="0">
+                <a:solidFill>
+                  <a:srgbClr val="7A4E00"/>
+                </a:solidFill>
+                <a:latin typeface="微軟正黑體" pitchFamily="34" charset="0"/>
+                <a:ea typeface="微軟正黑體" pitchFamily="34" charset="-122"/>
+                <a:cs typeface="微軟正黑體" pitchFamily="34" charset="-120"/>
+              </a:rPr>
+              <a:t>想試試看？從一個路口開始：用手機錄一段，然後數出來、量出來。</a:t>
+            </a:r>
+            <a:endParaRPr lang="en-US" sz="950" dirty="0"/>
+          </a:p>
+        </p:txBody>
+      </p:sp>
+      <p:pic>
+        <p:nvPicPr>
+          <p:cNvPr id="18" name="Image 0" descr="/Users/tsengchenghsun/Class/carClass/Claude outputs/第四週(10-1)/src/logo.png">    </p:cNvPr>
+          <p:cNvPicPr>
+            <a:picLocks noChangeAspect="1"/>
+          </p:cNvPicPr>
+          <p:nvPr/>
+        </p:nvPicPr>
+        <p:blipFill>
+          <a:blip r:embed="rId1"/>
+          <a:stretch>
+            <a:fillRect/>
+          </a:stretch>
+        </p:blipFill>
+        <p:spPr>
+          <a:xfrm>
+            <a:off x="7199748" y="87108"/>
+            <a:ext cx="871077" cy="192460"/>
+          </a:xfrm>
+          <a:prstGeom prst="rect">
+            <a:avLst/>
+          </a:prstGeom>
+        </p:spPr>
+      </p:pic>
+      <p:sp>
+        <p:nvSpPr>
+          <p:cNvPr id="19" name="Text 15"/>
+          <p:cNvSpPr txBox="1"/>
+          <p:nvPr/>
+        </p:nvSpPr>
+        <p:spPr>
+          <a:xfrm>
+            <a:off x="1029622" y="101626"/>
+            <a:ext cx="653307" cy="203251"/>
+          </a:xfrm>
+          <a:prstGeom prst="rect">
+            <a:avLst/>
+          </a:prstGeom>
+          <a:noFill/>
+          <a:ln/>
+        </p:spPr>
+        <p:txBody>
+          <a:bodyPr wrap="square" lIns="0" tIns="0" rIns="0" bIns="0" rtlCol="0" anchor="ctr"/>
+          <a:lstStyle/>
+          <a:p>
+            <a:pPr indent="0" marL="0">
+              <a:buNone/>
+            </a:pPr>
+            <a:r>
+              <a:rPr lang="en-US" sz="710" dirty="0">
+                <a:solidFill>
+                  <a:srgbClr val="5F7183"/>
+                </a:solidFill>
+                <a:latin typeface="Arial" pitchFamily="34" charset="0"/>
+                <a:ea typeface="Arial" pitchFamily="34" charset="-122"/>
+                <a:cs typeface="Arial" pitchFamily="34" charset="-120"/>
+              </a:rPr>
+              <a:t>26 / 32</a:t>
+            </a:r>
+            <a:endParaRPr lang="en-US" sz="710" dirty="0"/>
+          </a:p>
+        </p:txBody>
+      </p:sp>
+      <p:sp>
+        <p:nvSpPr>
+          <p:cNvPr id="20" name="Text 16"/>
+          <p:cNvSpPr txBox="1"/>
+          <p:nvPr/>
+        </p:nvSpPr>
+        <p:spPr>
+          <a:xfrm>
+            <a:off x="1704706" y="101626"/>
+            <a:ext cx="1596974" cy="203251"/>
+          </a:xfrm>
+          <a:prstGeom prst="rect">
+            <a:avLst/>
+          </a:prstGeom>
+          <a:noFill/>
+          <a:ln/>
+        </p:spPr>
+        <p:txBody>
+          <a:bodyPr wrap="square" lIns="0" tIns="0" rIns="0" bIns="0" rtlCol="0" anchor="ctr"/>
+          <a:lstStyle/>
+          <a:p>
+            <a:pPr indent="0" marL="0">
+              <a:buNone/>
+            </a:pPr>
+            <a:r>
+              <a:rPr lang="en-US" sz="710" dirty="0">
+                <a:solidFill>
+                  <a:srgbClr val="5F7183"/>
+                </a:solidFill>
+                <a:latin typeface="Arial" pitchFamily="34" charset="0"/>
+                <a:ea typeface="Arial" pitchFamily="34" charset="-122"/>
+                <a:cs typeface="Arial" pitchFamily="34" charset="-120"/>
+              </a:rPr>
+              <a:t>Tiết 1 · 第 1 節</a:t>
+            </a:r>
+            <a:endParaRPr lang="en-US" sz="710" dirty="0"/>
+          </a:p>
+        </p:txBody>
+      </p:sp>
+    </p:spTree>
+  </p:cSld>
+  <p:clrMapOvr>
+    <a:masterClrMapping/>
+  </p:clrMapOvr>
+</p:sld>
+</file>
+
+<file path=ppt/slides/slide27.xml><?xml version="1.0" encoding="utf-8"?>
+<p:sld xmlns:a="http://schemas.openxmlformats.org/drawingml/2006/main" xmlns:r="http://schemas.openxmlformats.org/officeDocument/2006/relationships" xmlns:p="http://schemas.openxmlformats.org/presentationml/2006/main">
+  <p:cSld name="Slide 27">
     <p:bg>
       <p:bgPr>
         <a:solidFill>
@@ -28644,7 +31577,7 @@
                 <a:ea typeface="Arial" pitchFamily="34" charset="-122"/>
                 <a:cs typeface="Arial" pitchFamily="34" charset="-120"/>
               </a:rPr>
-              <a:t>25 / 30</a:t>
+              <a:t>27 / 32</a:t>
             </a:r>
             <a:endParaRPr lang="en-US" sz="690" dirty="0"/>
           </a:p>
@@ -28697,9 +31630,9 @@
 </p:sld>
 </file>
 
-<file path=ppt/slides/slide26.xml><?xml version="1.0" encoding="utf-8"?>
+<file path=ppt/slides/slide28.xml><?xml version="1.0" encoding="utf-8"?>
 <p:sld xmlns:a="http://schemas.openxmlformats.org/drawingml/2006/main" xmlns:r="http://schemas.openxmlformats.org/officeDocument/2006/relationships" xmlns:p="http://schemas.openxmlformats.org/presentationml/2006/main">
-  <p:cSld name="Slide 26">
+  <p:cSld name="Slide 28">
     <p:spTree>
       <p:nvGrpSpPr>
         <p:cNvPr id="1" name=""/>
@@ -29317,7 +32250,7 @@
                 <a:ea typeface="Arial" pitchFamily="34" charset="-122"/>
                 <a:cs typeface="Arial" pitchFamily="34" charset="-120"/>
               </a:rPr>
-              <a:t>26 / 30</a:t>
+              <a:t>28 / 32</a:t>
             </a:r>
             <a:endParaRPr lang="en-US" sz="700" dirty="0"/>
           </a:p>
@@ -29370,9 +32303,9 @@
 </p:sld>
 </file>
 
-<file path=ppt/slides/slide27.xml><?xml version="1.0" encoding="utf-8"?>
+<file path=ppt/slides/slide29.xml><?xml version="1.0" encoding="utf-8"?>
 <p:sld xmlns:a="http://schemas.openxmlformats.org/drawingml/2006/main" xmlns:r="http://schemas.openxmlformats.org/officeDocument/2006/relationships" xmlns:p="http://schemas.openxmlformats.org/presentationml/2006/main">
-  <p:cSld name="Slide 27">
+  <p:cSld name="Slide 29">
     <p:spTree>
       <p:nvGrpSpPr>
         <p:cNvPr id="1" name=""/>
@@ -29535,7 +32468,7 @@
       </p:sp>
       <p:graphicFrame>
         <p:nvGraphicFramePr>
-          <p:cNvPr id="28" name="Table 0"/>
+          <p:cNvPr id="30" name="Table 0"/>
           <p:cNvGraphicFramePr>
             <a:graphicFrameLocks noGrp="1"/>
           </p:cNvGraphicFramePr>
@@ -30636,7 +33569,7 @@
                 <a:ea typeface="Arial" pitchFamily="34" charset="-122"/>
                 <a:cs typeface="Arial" pitchFamily="34" charset="-120"/>
               </a:rPr>
-              <a:t>27 / 30</a:t>
+              <a:t>29 / 32</a:t>
             </a:r>
             <a:endParaRPr lang="en-US" sz="710" dirty="0"/>
           </a:p>
@@ -30689,9 +33622,922 @@
 </p:sld>
 </file>
 
-<file path=ppt/slides/slide28.xml><?xml version="1.0" encoding="utf-8"?>
+<file path=ppt/slides/slide3.xml><?xml version="1.0" encoding="utf-8"?>
 <p:sld xmlns:a="http://schemas.openxmlformats.org/drawingml/2006/main" xmlns:r="http://schemas.openxmlformats.org/officeDocument/2006/relationships" xmlns:p="http://schemas.openxmlformats.org/presentationml/2006/main">
-  <p:cSld name="Slide 28">
+  <p:cSld name="Slide 3">
+    <p:spTree>
+      <p:nvGrpSpPr>
+        <p:cNvPr id="1" name=""/>
+        <p:cNvGrpSpPr/>
+        <p:nvPr/>
+      </p:nvGrpSpPr>
+      <p:grpSpPr>
+        <a:xfrm>
+          <a:off x="1000125" y="0"/>
+          <a:ext cx="1" cy="1"/>
+          <a:chOff x="0" y="0"/>
+          <a:chExt cx="0" cy="0"/>
+        </a:xfrm>
+      </p:grpSpPr>
+      <p:sp>
+        <p:nvSpPr>
+          <p:cNvPr id="2" name="Text 0"/>
+          <p:cNvSpPr txBox="1"/>
+          <p:nvPr/>
+        </p:nvSpPr>
+        <p:spPr>
+          <a:xfrm>
+            <a:off x="1393031" y="300038"/>
+            <a:ext cx="6357938" cy="214313"/>
+          </a:xfrm>
+          <a:prstGeom prst="rect">
+            <a:avLst/>
+          </a:prstGeom>
+          <a:noFill/>
+          <a:ln/>
+        </p:spPr>
+        <p:txBody>
+          <a:bodyPr wrap="square" lIns="0" tIns="0" rIns="0" bIns="0" rtlCol="0" anchor="ctr"/>
+          <a:lstStyle/>
+          <a:p>
+            <a:pPr indent="0" marL="0">
+              <a:buNone/>
+            </a:pPr>
+            <a:r>
+              <a:rPr lang="en-US" sz="980" b="1" dirty="0">
+                <a:solidFill>
+                  <a:srgbClr val="007F72"/>
+                </a:solidFill>
+                <a:latin typeface="Arial" pitchFamily="34" charset="0"/>
+                <a:ea typeface="Arial" pitchFamily="34" charset="-122"/>
+                <a:cs typeface="Arial" pitchFamily="34" charset="-120"/>
+              </a:rPr>
+              <a:t>Lộ trình · 本週三節要做什麼</a:t>
+            </a:r>
+            <a:endParaRPr lang="en-US" sz="980" dirty="0"/>
+          </a:p>
+        </p:txBody>
+      </p:sp>
+      <p:sp>
+        <p:nvSpPr>
+          <p:cNvPr id="3" name="Text 1"/>
+          <p:cNvSpPr txBox="1"/>
+          <p:nvPr/>
+        </p:nvSpPr>
+        <p:spPr>
+          <a:xfrm>
+            <a:off x="1393031" y="528638"/>
+            <a:ext cx="6357938" cy="638228"/>
+          </a:xfrm>
+          <a:prstGeom prst="rect">
+            <a:avLst/>
+          </a:prstGeom>
+          <a:noFill/>
+          <a:ln/>
+        </p:spPr>
+        <p:txBody>
+          <a:bodyPr wrap="square" lIns="0" tIns="0" rIns="0" bIns="0" rtlCol="0" anchor="t"/>
+          <a:lstStyle/>
+          <a:p>
+            <a:pPr indent="0" marL="0">
+              <a:lnSpc>
+                <a:spcPct val="116000"/>
+              </a:lnSpc>
+              <a:buNone/>
+            </a:pPr>
+            <a:r>
+              <a:rPr lang="en-US" sz="1480" b="1" dirty="0">
+                <a:solidFill>
+                  <a:srgbClr val="0B1F3A"/>
+                </a:solidFill>
+                <a:latin typeface="Arial" pitchFamily="34" charset="0"/>
+                <a:ea typeface="Arial" pitchFamily="34" charset="-122"/>
+                <a:cs typeface="Arial" pitchFamily="34" charset="-120"/>
+              </a:rPr>
+              <a:t>Chạy tốt trong máy tính, dựa vào đâu mà tin xe thật ra đường cũng được?</a:t>
+            </a:r>
+            <a:endParaRPr lang="en-US" sz="1480" dirty="0"/>
+          </a:p>
+          <a:p>
+            <a:pPr indent="0" marL="0">
+              <a:lnSpc>
+                <a:spcPct val="116000"/>
+              </a:lnSpc>
+              <a:buNone/>
+            </a:pPr>
+            <a:r>
+              <a:rPr lang="en-US" sz="980" dirty="0">
+                <a:solidFill>
+                  <a:srgbClr val="007F72"/>
+                </a:solidFill>
+                <a:latin typeface="微軟正黑體" pitchFamily="34" charset="0"/>
+                <a:ea typeface="微軟正黑體" pitchFamily="34" charset="-122"/>
+                <a:cs typeface="微軟正黑體" pitchFamily="34" charset="-120"/>
+              </a:rPr>
+              <a:t>在電腦裡跑得好，憑什麼相信真車上路也可以？</a:t>
+            </a:r>
+            <a:endParaRPr lang="en-US" sz="1480" dirty="0"/>
+          </a:p>
+        </p:txBody>
+      </p:sp>
+      <p:sp>
+        <p:nvSpPr>
+          <p:cNvPr id="4" name="Text 2"/>
+          <p:cNvSpPr txBox="1"/>
+          <p:nvPr/>
+        </p:nvSpPr>
+        <p:spPr>
+          <a:xfrm>
+            <a:off x="1393031" y="1253548"/>
+            <a:ext cx="6357938" cy="313463"/>
+          </a:xfrm>
+          <a:prstGeom prst="rect">
+            <a:avLst/>
+          </a:prstGeom>
+          <a:noFill/>
+          <a:ln/>
+        </p:spPr>
+        <p:txBody>
+          <a:bodyPr wrap="square" lIns="0" tIns="0" rIns="0" bIns="0" rtlCol="0" anchor="t"/>
+          <a:lstStyle/>
+          <a:p>
+            <a:pPr indent="0" marL="0">
+              <a:lnSpc>
+                <a:spcPct val="124000"/>
+              </a:lnSpc>
+              <a:buNone/>
+            </a:pPr>
+            <a:r>
+              <a:rPr lang="en-US" sz="900" dirty="0">
+                <a:solidFill>
+                  <a:srgbClr val="5F7183"/>
+                </a:solidFill>
+                <a:latin typeface="Arial" pitchFamily="34" charset="0"/>
+                <a:ea typeface="Arial" pitchFamily="34" charset="-122"/>
+                <a:cs typeface="Arial" pitchFamily="34" charset="-120"/>
+              </a:rPr>
+              <a:t>Tuần trước: «lắp sáu cảm biến lên xe biết chạy, xem có dừng kịp không» — hôm nay lắp LiDAR.</a:t>
+            </a:r>
+            <a:endParaRPr lang="en-US" sz="900" dirty="0"/>
+          </a:p>
+          <a:p>
+            <a:pPr indent="0" marL="0">
+              <a:lnSpc>
+                <a:spcPct val="124000"/>
+              </a:lnSpc>
+              <a:buNone/>
+            </a:pPr>
+            <a:r>
+              <a:rPr lang="en-US" sz="820" dirty="0">
+                <a:solidFill>
+                  <a:srgbClr val="5F7183"/>
+                </a:solidFill>
+                <a:latin typeface="微軟正黑體" pitchFamily="34" charset="0"/>
+                <a:ea typeface="微軟正黑體" pitchFamily="34" charset="-122"/>
+                <a:cs typeface="微軟正黑體" pitchFamily="34" charset="-120"/>
+              </a:rPr>
+              <a:t>上週說：「把這六樣感測器裝到會跑的車上，看它停不停得住。」今天先裝光達（LiDAR）。</a:t>
+            </a:r>
+            <a:endParaRPr lang="en-US" sz="900" dirty="0"/>
+          </a:p>
+        </p:txBody>
+      </p:sp>
+      <p:sp>
+        <p:nvSpPr>
+          <p:cNvPr id="5" name="Shape 3"/>
+          <p:cNvSpPr/>
+          <p:nvPr/>
+        </p:nvSpPr>
+        <p:spPr>
+          <a:xfrm>
+            <a:off x="1393031" y="1644078"/>
+            <a:ext cx="1995488" cy="1427734"/>
+          </a:xfrm>
+          <a:prstGeom prst="roundRect">
+            <a:avLst>
+              <a:gd name="adj" fmla="val 5004"/>
+            </a:avLst>
+          </a:prstGeom>
+          <a:solidFill>
+            <a:srgbClr val="F4F7FA"/>
+          </a:solidFill>
+          <a:ln w="12700">
+            <a:solidFill>
+              <a:srgbClr val="DBE3EA"/>
+            </a:solidFill>
+            <a:prstDash val="solid"/>
+          </a:ln>
+          <a:effectLst>
+            <a:outerShdw sx="100000" sy="100000" kx="0" ky="0" algn="bl" rotWithShape="0" blurRad="76200" dist="12700" dir="5400000">
+              <a:srgbClr val="9AAAB8">
+                <a:alpha val="28000"/>
+              </a:srgbClr>
+            </a:outerShdw>
+          </a:effectLst>
+        </p:spPr>
+      </p:sp>
+      <p:sp>
+        <p:nvSpPr>
+          <p:cNvPr id="6" name="Shape 4"/>
+          <p:cNvSpPr/>
+          <p:nvPr/>
+        </p:nvSpPr>
+        <p:spPr>
+          <a:xfrm>
+            <a:off x="1393031" y="1644078"/>
+            <a:ext cx="1995488" cy="42863"/>
+          </a:xfrm>
+          <a:prstGeom prst="rect">
+            <a:avLst/>
+          </a:prstGeom>
+          <a:solidFill>
+            <a:srgbClr val="0B1F3A"/>
+          </a:solidFill>
+          <a:ln/>
+        </p:spPr>
+      </p:sp>
+      <p:sp>
+        <p:nvSpPr>
+          <p:cNvPr id="7" name="Text 5"/>
+          <p:cNvSpPr txBox="1"/>
+          <p:nvPr/>
+        </p:nvSpPr>
+        <p:spPr>
+          <a:xfrm>
+            <a:off x="1507331" y="1736947"/>
+            <a:ext cx="1766888" cy="303941"/>
+          </a:xfrm>
+          <a:prstGeom prst="rect">
+            <a:avLst/>
+          </a:prstGeom>
+          <a:noFill/>
+          <a:ln/>
+        </p:spPr>
+        <p:txBody>
+          <a:bodyPr wrap="square" lIns="0" tIns="0" rIns="0" bIns="0" rtlCol="0" anchor="t"/>
+          <a:lstStyle/>
+          <a:p>
+            <a:pPr indent="0" marL="0">
+              <a:lnSpc>
+                <a:spcPct val="112000"/>
+              </a:lnSpc>
+              <a:buNone/>
+            </a:pPr>
+            <a:r>
+              <a:rPr lang="en-US" sz="980" b="1" dirty="0">
+                <a:solidFill>
+                  <a:srgbClr val="0B1F3A"/>
+                </a:solidFill>
+                <a:latin typeface="Arial" pitchFamily="34" charset="0"/>
+                <a:ea typeface="Arial" pitchFamily="34" charset="-122"/>
+                <a:cs typeface="Arial" pitchFamily="34" charset="-120"/>
+              </a:rPr>
+              <a:t>Tiết 1 — bây giờ</a:t>
+            </a:r>
+            <a:endParaRPr lang="en-US" sz="980" dirty="0"/>
+          </a:p>
+          <a:p>
+            <a:pPr indent="0" marL="0">
+              <a:lnSpc>
+                <a:spcPct val="112000"/>
+              </a:lnSpc>
+              <a:buNone/>
+            </a:pPr>
+            <a:r>
+              <a:rPr lang="en-US" sz="860" dirty="0">
+                <a:solidFill>
+                  <a:srgbClr val="007F72"/>
+                </a:solidFill>
+                <a:latin typeface="微軟正黑體" pitchFamily="34" charset="0"/>
+                <a:ea typeface="微軟正黑體" pitchFamily="34" charset="-122"/>
+                <a:cs typeface="微軟正黑體" pitchFamily="34" charset="-120"/>
+              </a:rPr>
+              <a:t>第 1 節（現在）</a:t>
+            </a:r>
+            <a:endParaRPr lang="en-US" sz="980" dirty="0"/>
+          </a:p>
+        </p:txBody>
+      </p:sp>
+      <p:sp>
+        <p:nvSpPr>
+          <p:cNvPr id="8" name="Text 6"/>
+          <p:cNvSpPr txBox="1"/>
+          <p:nvPr/>
+        </p:nvSpPr>
+        <p:spPr>
+          <a:xfrm>
+            <a:off x="1507331" y="2069463"/>
+            <a:ext cx="1766888" cy="930912"/>
+          </a:xfrm>
+          <a:prstGeom prst="rect">
+            <a:avLst/>
+          </a:prstGeom>
+          <a:noFill/>
+          <a:ln/>
+        </p:spPr>
+        <p:txBody>
+          <a:bodyPr wrap="square" lIns="0" tIns="0" rIns="0" bIns="0" rtlCol="0" anchor="t"/>
+          <a:lstStyle/>
+          <a:p>
+            <a:pPr indent="0" marL="0">
+              <a:lnSpc>
+                <a:spcPct val="130000"/>
+              </a:lnSpc>
+              <a:buNone/>
+            </a:pPr>
+            <a:r>
+              <a:rPr lang="en-US" sz="900" dirty="0">
+                <a:solidFill>
+                  <a:srgbClr val="1A2733"/>
+                </a:solidFill>
+                <a:latin typeface="Arial" pitchFamily="34" charset="0"/>
+                <a:ea typeface="Arial" pitchFamily="34" charset="-122"/>
+                <a:cs typeface="Arial" pitchFamily="34" charset="-120"/>
+              </a:rPr>
+              <a:t>Số tia, chiều dài tia, góc quét — trên bảng thông số (datasheet) gọi là gì?</a:t>
+            </a:r>
+            <a:endParaRPr lang="en-US" sz="900" dirty="0"/>
+          </a:p>
+          <a:p>
+            <a:pPr indent="0" marL="0">
+              <a:lnSpc>
+                <a:spcPct val="130000"/>
+              </a:lnSpc>
+              <a:buNone/>
+            </a:pPr>
+            <a:r>
+              <a:rPr lang="en-US" sz="820" dirty="0">
+                <a:solidFill>
+                  <a:srgbClr val="5F7183"/>
+                </a:solidFill>
+                <a:latin typeface="微軟正黑體" pitchFamily="34" charset="0"/>
+                <a:ea typeface="微軟正黑體" pitchFamily="34" charset="-122"/>
+                <a:cs typeface="微軟正黑體" pitchFamily="34" charset="-120"/>
+              </a:rPr>
+              <a:t>射線數、長度、張角——規格表（datasheet）上叫什麼，為什麼不能亂選。</a:t>
+            </a:r>
+            <a:endParaRPr lang="en-US" sz="900" dirty="0"/>
+          </a:p>
+        </p:txBody>
+      </p:sp>
+      <p:sp>
+        <p:nvSpPr>
+          <p:cNvPr id="9" name="Shape 7"/>
+          <p:cNvSpPr/>
+          <p:nvPr/>
+        </p:nvSpPr>
+        <p:spPr>
+          <a:xfrm>
+            <a:off x="3574256" y="1644078"/>
+            <a:ext cx="1995488" cy="1427734"/>
+          </a:xfrm>
+          <a:prstGeom prst="roundRect">
+            <a:avLst>
+              <a:gd name="adj" fmla="val 5004"/>
+            </a:avLst>
+          </a:prstGeom>
+          <a:solidFill>
+            <a:srgbClr val="F4F7FA"/>
+          </a:solidFill>
+          <a:ln w="12700">
+            <a:solidFill>
+              <a:srgbClr val="DBE3EA"/>
+            </a:solidFill>
+            <a:prstDash val="solid"/>
+          </a:ln>
+          <a:effectLst>
+            <a:outerShdw sx="100000" sy="100000" kx="0" ky="0" algn="bl" rotWithShape="0" blurRad="76200" dist="12700" dir="5400000">
+              <a:srgbClr val="9AAAB8">
+                <a:alpha val="28000"/>
+              </a:srgbClr>
+            </a:outerShdw>
+          </a:effectLst>
+        </p:spPr>
+      </p:sp>
+      <p:sp>
+        <p:nvSpPr>
+          <p:cNvPr id="10" name="Shape 8"/>
+          <p:cNvSpPr/>
+          <p:nvPr/>
+        </p:nvSpPr>
+        <p:spPr>
+          <a:xfrm>
+            <a:off x="3574256" y="1644078"/>
+            <a:ext cx="1995488" cy="42863"/>
+          </a:xfrm>
+          <a:prstGeom prst="rect">
+            <a:avLst/>
+          </a:prstGeom>
+          <a:solidFill>
+            <a:srgbClr val="007F72"/>
+          </a:solidFill>
+          <a:ln/>
+        </p:spPr>
+      </p:sp>
+      <p:sp>
+        <p:nvSpPr>
+          <p:cNvPr id="11" name="Text 9"/>
+          <p:cNvSpPr txBox="1"/>
+          <p:nvPr/>
+        </p:nvSpPr>
+        <p:spPr>
+          <a:xfrm>
+            <a:off x="3688556" y="1736947"/>
+            <a:ext cx="1766888" cy="303941"/>
+          </a:xfrm>
+          <a:prstGeom prst="rect">
+            <a:avLst/>
+          </a:prstGeom>
+          <a:noFill/>
+          <a:ln/>
+        </p:spPr>
+        <p:txBody>
+          <a:bodyPr wrap="square" lIns="0" tIns="0" rIns="0" bIns="0" rtlCol="0" anchor="t"/>
+          <a:lstStyle/>
+          <a:p>
+            <a:pPr indent="0" marL="0">
+              <a:lnSpc>
+                <a:spcPct val="112000"/>
+              </a:lnSpc>
+              <a:buNone/>
+            </a:pPr>
+            <a:r>
+              <a:rPr lang="en-US" sz="980" b="1" dirty="0">
+                <a:solidFill>
+                  <a:srgbClr val="0B1F3A"/>
+                </a:solidFill>
+                <a:latin typeface="Arial" pitchFamily="34" charset="0"/>
+                <a:ea typeface="Arial" pitchFamily="34" charset="-122"/>
+                <a:cs typeface="Arial" pitchFamily="34" charset="-120"/>
+              </a:rPr>
+              <a:t>Tiết 2</a:t>
+            </a:r>
+            <a:endParaRPr lang="en-US" sz="980" dirty="0"/>
+          </a:p>
+          <a:p>
+            <a:pPr indent="0" marL="0">
+              <a:lnSpc>
+                <a:spcPct val="112000"/>
+              </a:lnSpc>
+              <a:buNone/>
+            </a:pPr>
+            <a:r>
+              <a:rPr lang="en-US" sz="860" dirty="0">
+                <a:solidFill>
+                  <a:srgbClr val="007F72"/>
+                </a:solidFill>
+                <a:latin typeface="微軟正黑體" pitchFamily="34" charset="0"/>
+                <a:ea typeface="微軟正黑體" pitchFamily="34" charset="-122"/>
+                <a:cs typeface="微軟正黑體" pitchFamily="34" charset="-120"/>
+              </a:rPr>
+              <a:t>第 2 節</a:t>
+            </a:r>
+            <a:endParaRPr lang="en-US" sz="980" dirty="0"/>
+          </a:p>
+        </p:txBody>
+      </p:sp>
+      <p:sp>
+        <p:nvSpPr>
+          <p:cNvPr id="12" name="Text 10"/>
+          <p:cNvSpPr txBox="1"/>
+          <p:nvPr/>
+        </p:nvSpPr>
+        <p:spPr>
+          <a:xfrm>
+            <a:off x="3688556" y="2069463"/>
+            <a:ext cx="1766888" cy="930912"/>
+          </a:xfrm>
+          <a:prstGeom prst="rect">
+            <a:avLst/>
+          </a:prstGeom>
+          <a:noFill/>
+          <a:ln/>
+        </p:spPr>
+        <p:txBody>
+          <a:bodyPr wrap="square" lIns="0" tIns="0" rIns="0" bIns="0" rtlCol="0" anchor="t"/>
+          <a:lstStyle/>
+          <a:p>
+            <a:pPr indent="0" marL="0">
+              <a:lnSpc>
+                <a:spcPct val="130000"/>
+              </a:lnSpc>
+              <a:buNone/>
+            </a:pPr>
+            <a:r>
+              <a:rPr lang="en-US" sz="900" dirty="0">
+                <a:solidFill>
+                  <a:srgbClr val="1A2733"/>
+                </a:solidFill>
+                <a:latin typeface="Arial" pitchFamily="34" charset="0"/>
+                <a:ea typeface="Arial" pitchFamily="34" charset="-122"/>
+                <a:cs typeface="Arial" pitchFamily="34" charset="-120"/>
+              </a:rPr>
+              <a:t>Test thế nào mới biết xe an toàn? Đáp án không phải số km, mà là «kịch bản» (scenario).</a:t>
+            </a:r>
+            <a:endParaRPr lang="en-US" sz="900" dirty="0"/>
+          </a:p>
+          <a:p>
+            <a:pPr indent="0" marL="0">
+              <a:lnSpc>
+                <a:spcPct val="130000"/>
+              </a:lnSpc>
+              <a:buNone/>
+            </a:pPr>
+            <a:r>
+              <a:rPr lang="en-US" sz="820" dirty="0">
+                <a:solidFill>
+                  <a:srgbClr val="5F7183"/>
+                </a:solidFill>
+                <a:latin typeface="微軟正黑體" pitchFamily="34" charset="0"/>
+                <a:ea typeface="微軟正黑體" pitchFamily="34" charset="-122"/>
+                <a:cs typeface="微軟正黑體" pitchFamily="34" charset="-120"/>
+              </a:rPr>
+              <a:t>要怎麼測才知道車子安全？答案不是里程，是「場景」（scenario）。</a:t>
+            </a:r>
+            <a:endParaRPr lang="en-US" sz="900" dirty="0"/>
+          </a:p>
+        </p:txBody>
+      </p:sp>
+      <p:sp>
+        <p:nvSpPr>
+          <p:cNvPr id="13" name="Shape 11"/>
+          <p:cNvSpPr/>
+          <p:nvPr/>
+        </p:nvSpPr>
+        <p:spPr>
+          <a:xfrm>
+            <a:off x="5755481" y="1644078"/>
+            <a:ext cx="1995488" cy="1427734"/>
+          </a:xfrm>
+          <a:prstGeom prst="roundRect">
+            <a:avLst>
+              <a:gd name="adj" fmla="val 5004"/>
+            </a:avLst>
+          </a:prstGeom>
+          <a:solidFill>
+            <a:srgbClr val="F4F7FA"/>
+          </a:solidFill>
+          <a:ln w="12700">
+            <a:solidFill>
+              <a:srgbClr val="DBE3EA"/>
+            </a:solidFill>
+            <a:prstDash val="solid"/>
+          </a:ln>
+          <a:effectLst>
+            <a:outerShdw sx="100000" sy="100000" kx="0" ky="0" algn="bl" rotWithShape="0" blurRad="76200" dist="12700" dir="5400000">
+              <a:srgbClr val="9AAAB8">
+                <a:alpha val="28000"/>
+              </a:srgbClr>
+            </a:outerShdw>
+          </a:effectLst>
+        </p:spPr>
+      </p:sp>
+      <p:sp>
+        <p:nvSpPr>
+          <p:cNvPr id="14" name="Shape 12"/>
+          <p:cNvSpPr/>
+          <p:nvPr/>
+        </p:nvSpPr>
+        <p:spPr>
+          <a:xfrm>
+            <a:off x="5755481" y="1644078"/>
+            <a:ext cx="1995488" cy="42863"/>
+          </a:xfrm>
+          <a:prstGeom prst="rect">
+            <a:avLst/>
+          </a:prstGeom>
+          <a:solidFill>
+            <a:srgbClr val="FFB020"/>
+          </a:solidFill>
+          <a:ln/>
+        </p:spPr>
+      </p:sp>
+      <p:sp>
+        <p:nvSpPr>
+          <p:cNvPr id="15" name="Text 13"/>
+          <p:cNvSpPr txBox="1"/>
+          <p:nvPr/>
+        </p:nvSpPr>
+        <p:spPr>
+          <a:xfrm>
+            <a:off x="5869781" y="1736947"/>
+            <a:ext cx="1766888" cy="303941"/>
+          </a:xfrm>
+          <a:prstGeom prst="rect">
+            <a:avLst/>
+          </a:prstGeom>
+          <a:noFill/>
+          <a:ln/>
+        </p:spPr>
+        <p:txBody>
+          <a:bodyPr wrap="square" lIns="0" tIns="0" rIns="0" bIns="0" rtlCol="0" anchor="t"/>
+          <a:lstStyle/>
+          <a:p>
+            <a:pPr indent="0" marL="0">
+              <a:lnSpc>
+                <a:spcPct val="112000"/>
+              </a:lnSpc>
+              <a:buNone/>
+            </a:pPr>
+            <a:r>
+              <a:rPr lang="en-US" sz="980" b="1" dirty="0">
+                <a:solidFill>
+                  <a:srgbClr val="0B1F3A"/>
+                </a:solidFill>
+                <a:latin typeface="Arial" pitchFamily="34" charset="0"/>
+                <a:ea typeface="Arial" pitchFamily="34" charset="-122"/>
+                <a:cs typeface="Arial" pitchFamily="34" charset="-120"/>
+              </a:rPr>
+              <a:t>Tiết 3 — lên máy</a:t>
+            </a:r>
+            <a:endParaRPr lang="en-US" sz="980" dirty="0"/>
+          </a:p>
+          <a:p>
+            <a:pPr indent="0" marL="0">
+              <a:lnSpc>
+                <a:spcPct val="112000"/>
+              </a:lnSpc>
+              <a:buNone/>
+            </a:pPr>
+            <a:r>
+              <a:rPr lang="en-US" sz="860" dirty="0">
+                <a:solidFill>
+                  <a:srgbClr val="007F72"/>
+                </a:solidFill>
+                <a:latin typeface="微軟正黑體" pitchFamily="34" charset="0"/>
+                <a:ea typeface="微軟正黑體" pitchFamily="34" charset="-122"/>
+                <a:cs typeface="微軟正黑體" pitchFamily="34" charset="-120"/>
+              </a:rPr>
+              <a:t>第 3 節（上機）</a:t>
+            </a:r>
+            <a:endParaRPr lang="en-US" sz="980" dirty="0"/>
+          </a:p>
+        </p:txBody>
+      </p:sp>
+      <p:sp>
+        <p:nvSpPr>
+          <p:cNvPr id="16" name="Text 14"/>
+          <p:cNvSpPr txBox="1"/>
+          <p:nvPr/>
+        </p:nvSpPr>
+        <p:spPr>
+          <a:xfrm>
+            <a:off x="5869781" y="2069463"/>
+            <a:ext cx="1766888" cy="930912"/>
+          </a:xfrm>
+          <a:prstGeom prst="rect">
+            <a:avLst/>
+          </a:prstGeom>
+          <a:noFill/>
+          <a:ln/>
+        </p:spPr>
+        <p:txBody>
+          <a:bodyPr wrap="square" lIns="0" tIns="0" rIns="0" bIns="0" rtlCol="0" anchor="t"/>
+          <a:lstStyle/>
+          <a:p>
+            <a:pPr indent="0" marL="0">
+              <a:lnSpc>
+                <a:spcPct val="130000"/>
+              </a:lnSpc>
+              <a:buNone/>
+            </a:pPr>
+            <a:r>
+              <a:rPr lang="en-US" sz="900" dirty="0">
+                <a:solidFill>
+                  <a:srgbClr val="1A2733"/>
+                </a:solidFill>
+                <a:latin typeface="Arial" pitchFamily="34" charset="0"/>
+                <a:ea typeface="Arial" pitchFamily="34" charset="-122"/>
+                <a:cs typeface="Arial" pitchFamily="34" charset="-120"/>
+              </a:rPr>
+              <a:t>Tự cấu hình một bộ cảm biến cho Hà Nội. Ba con số đó hãy tự giữ lại.</a:t>
+            </a:r>
+            <a:endParaRPr lang="en-US" sz="900" dirty="0"/>
+          </a:p>
+          <a:p>
+            <a:pPr indent="0" marL="0">
+              <a:lnSpc>
+                <a:spcPct val="130000"/>
+              </a:lnSpc>
+              <a:buNone/>
+            </a:pPr>
+            <a:r>
+              <a:rPr lang="en-US" sz="820" dirty="0">
+                <a:solidFill>
+                  <a:srgbClr val="5F7183"/>
+                </a:solidFill>
+                <a:latin typeface="微軟正黑體" pitchFamily="34" charset="0"/>
+                <a:ea typeface="微軟正黑體" pitchFamily="34" charset="-122"/>
+                <a:cs typeface="微軟正黑體" pitchFamily="34" charset="-120"/>
+              </a:rPr>
+              <a:t>各位自己為河內配一組感測器。那三個數字請自己留著。</a:t>
+            </a:r>
+            <a:endParaRPr lang="en-US" sz="900" dirty="0"/>
+          </a:p>
+        </p:txBody>
+      </p:sp>
+      <p:sp>
+        <p:nvSpPr>
+          <p:cNvPr id="17" name="Shape 15"/>
+          <p:cNvSpPr/>
+          <p:nvPr/>
+        </p:nvSpPr>
+        <p:spPr>
+          <a:xfrm>
+            <a:off x="1393031" y="3128963"/>
+            <a:ext cx="6357938" cy="471488"/>
+          </a:xfrm>
+          <a:prstGeom prst="roundRect">
+            <a:avLst>
+              <a:gd name="adj" fmla="val 13636"/>
+            </a:avLst>
+          </a:prstGeom>
+          <a:solidFill>
+            <a:srgbClr val="FFF6E3"/>
+          </a:solidFill>
+          <a:ln w="12700">
+            <a:solidFill>
+              <a:srgbClr val="FFB020"/>
+            </a:solidFill>
+            <a:prstDash val="solid"/>
+          </a:ln>
+        </p:spPr>
+      </p:sp>
+      <p:sp>
+        <p:nvSpPr>
+          <p:cNvPr id="18" name="Text 16"/>
+          <p:cNvSpPr txBox="1"/>
+          <p:nvPr/>
+        </p:nvSpPr>
+        <p:spPr>
+          <a:xfrm>
+            <a:off x="1535906" y="3171825"/>
+            <a:ext cx="6072188" cy="400050"/>
+          </a:xfrm>
+          <a:prstGeom prst="rect">
+            <a:avLst/>
+          </a:prstGeom>
+          <a:noFill/>
+          <a:ln/>
+        </p:spPr>
+        <p:txBody>
+          <a:bodyPr wrap="square" lIns="0" tIns="0" rIns="0" bIns="0" rtlCol="0" anchor="t"/>
+          <a:lstStyle/>
+          <a:p>
+            <a:pPr indent="0" marL="0">
+              <a:lnSpc>
+                <a:spcPct val="116000"/>
+              </a:lnSpc>
+              <a:buNone/>
+            </a:pPr>
+            <a:r>
+              <a:rPr lang="en-US" sz="900" b="1" dirty="0">
+                <a:solidFill>
+                  <a:srgbClr val="7A4E00"/>
+                </a:solidFill>
+                <a:latin typeface="Arial" pitchFamily="34" charset="0"/>
+                <a:ea typeface="Arial" pitchFamily="34" charset="-122"/>
+                <a:cs typeface="Arial" pitchFamily="34" charset="-120"/>
+              </a:rPr>
+              <a:t>Xuyên suốt ba tiết còn một chuyện: chạy tốt trong mô phỏng thì lên xe thật chắc chắn sẽ kém đi.</a:t>
+            </a:r>
+            <a:endParaRPr lang="en-US" sz="900" dirty="0"/>
+          </a:p>
+          <a:p>
+            <a:pPr indent="0" marL="0">
+              <a:lnSpc>
+                <a:spcPct val="116000"/>
+              </a:lnSpc>
+              <a:buNone/>
+            </a:pPr>
+            <a:r>
+              <a:rPr lang="en-US" sz="820" dirty="0">
+                <a:solidFill>
+                  <a:srgbClr val="7A4E00"/>
+                </a:solidFill>
+                <a:latin typeface="微軟正黑體" pitchFamily="34" charset="0"/>
+                <a:ea typeface="微軟正黑體" pitchFamily="34" charset="-122"/>
+                <a:cs typeface="微軟正黑體" pitchFamily="34" charset="-120"/>
+              </a:rPr>
+              <a:t>還有一件事貫穿三節：在模擬裡跑得好，搬到真車上一定會退步。</a:t>
+            </a:r>
+            <a:endParaRPr lang="en-US" sz="900" dirty="0"/>
+          </a:p>
+        </p:txBody>
+      </p:sp>
+      <p:pic>
+        <p:nvPicPr>
+          <p:cNvPr id="20" name="Image 0" descr="/Users/tsengchenghsun/Class/carClass/Claude outputs/第四週(10-1)/src/logo.png">    </p:cNvPr>
+          <p:cNvPicPr>
+            <a:picLocks noChangeAspect="1"/>
+          </p:cNvPicPr>
+          <p:nvPr/>
+        </p:nvPicPr>
+        <p:blipFill>
+          <a:blip r:embed="rId1"/>
+          <a:stretch>
+            <a:fillRect/>
+          </a:stretch>
+        </p:blipFill>
+        <p:spPr>
+          <a:xfrm>
+            <a:off x="7158038" y="85725"/>
+            <a:ext cx="857250" cy="189405"/>
+          </a:xfrm>
+          <a:prstGeom prst="rect">
+            <a:avLst/>
+          </a:prstGeom>
+        </p:spPr>
+      </p:pic>
+      <p:sp>
+        <p:nvSpPr>
+          <p:cNvPr id="21" name="Text 17"/>
+          <p:cNvSpPr txBox="1"/>
+          <p:nvPr/>
+        </p:nvSpPr>
+        <p:spPr>
+          <a:xfrm>
+            <a:off x="1085850" y="100013"/>
+            <a:ext cx="642938" cy="200025"/>
+          </a:xfrm>
+          <a:prstGeom prst="rect">
+            <a:avLst/>
+          </a:prstGeom>
+          <a:noFill/>
+          <a:ln/>
+        </p:spPr>
+        <p:txBody>
+          <a:bodyPr wrap="square" lIns="0" tIns="0" rIns="0" bIns="0" rtlCol="0" anchor="ctr"/>
+          <a:lstStyle/>
+          <a:p>
+            <a:pPr indent="0" marL="0">
+              <a:buNone/>
+            </a:pPr>
+            <a:r>
+              <a:rPr lang="en-US" sz="700" dirty="0">
+                <a:solidFill>
+                  <a:srgbClr val="5F7183"/>
+                </a:solidFill>
+                <a:latin typeface="Arial" pitchFamily="34" charset="0"/>
+                <a:ea typeface="Arial" pitchFamily="34" charset="-122"/>
+                <a:cs typeface="Arial" pitchFamily="34" charset="-120"/>
+              </a:rPr>
+              <a:t>3 / 32</a:t>
+            </a:r>
+            <a:endParaRPr lang="en-US" sz="700" dirty="0"/>
+          </a:p>
+        </p:txBody>
+      </p:sp>
+      <p:sp>
+        <p:nvSpPr>
+          <p:cNvPr id="22" name="Text 18"/>
+          <p:cNvSpPr txBox="1"/>
+          <p:nvPr/>
+        </p:nvSpPr>
+        <p:spPr>
+          <a:xfrm>
+            <a:off x="1750219" y="100013"/>
+            <a:ext cx="1571625" cy="200025"/>
+          </a:xfrm>
+          <a:prstGeom prst="rect">
+            <a:avLst/>
+          </a:prstGeom>
+          <a:noFill/>
+          <a:ln/>
+        </p:spPr>
+        <p:txBody>
+          <a:bodyPr wrap="square" lIns="0" tIns="0" rIns="0" bIns="0" rtlCol="0" anchor="ctr"/>
+          <a:lstStyle/>
+          <a:p>
+            <a:pPr indent="0" marL="0">
+              <a:buNone/>
+            </a:pPr>
+            <a:r>
+              <a:rPr lang="en-US" sz="700" dirty="0">
+                <a:solidFill>
+                  <a:srgbClr val="5F7183"/>
+                </a:solidFill>
+                <a:latin typeface="Arial" pitchFamily="34" charset="0"/>
+                <a:ea typeface="Arial" pitchFamily="34" charset="-122"/>
+                <a:cs typeface="Arial" pitchFamily="34" charset="-120"/>
+              </a:rPr>
+              <a:t>Tiết 1 · 第 1 節</a:t>
+            </a:r>
+            <a:endParaRPr lang="en-US" sz="700" dirty="0"/>
+          </a:p>
+        </p:txBody>
+      </p:sp>
+    </p:spTree>
+  </p:cSld>
+  <p:clrMapOvr>
+    <a:masterClrMapping/>
+  </p:clrMapOvr>
+</p:sld>
+</file>
+
+<file path=ppt/slides/slide30.xml><?xml version="1.0" encoding="utf-8"?>
+<p:sld xmlns:a="http://schemas.openxmlformats.org/drawingml/2006/main" xmlns:r="http://schemas.openxmlformats.org/officeDocument/2006/relationships" xmlns:p="http://schemas.openxmlformats.org/presentationml/2006/main">
+  <p:cSld name="Slide 30">
     <p:bg>
       <p:bgPr>
         <a:solidFill>
@@ -31385,7 +35231,7 @@
                 <a:ea typeface="Arial" pitchFamily="34" charset="-122"/>
                 <a:cs typeface="Arial" pitchFamily="34" charset="-120"/>
               </a:rPr>
-              <a:t>28 / 30</a:t>
+              <a:t>30 / 32</a:t>
             </a:r>
             <a:endParaRPr lang="en-US" sz="720" dirty="0"/>
           </a:p>
@@ -31438,9 +35284,9 @@
 </p:sld>
 </file>
 
-<file path=ppt/slides/slide29.xml><?xml version="1.0" encoding="utf-8"?>
+<file path=ppt/slides/slide31.xml><?xml version="1.0" encoding="utf-8"?>
 <p:sld xmlns:a="http://schemas.openxmlformats.org/drawingml/2006/main" xmlns:r="http://schemas.openxmlformats.org/officeDocument/2006/relationships" xmlns:p="http://schemas.openxmlformats.org/presentationml/2006/main">
-  <p:cSld name="Slide 29">
+  <p:cSld name="Slide 31">
     <p:spTree>
       <p:nvGrpSpPr>
         <p:cNvPr id="1" name=""/>
@@ -31519,7 +35365,7 @@
       </p:sp>
       <p:graphicFrame>
         <p:nvGraphicFramePr>
-          <p:cNvPr id="30" name="Table 0"/>
+          <p:cNvPr id="32" name="Table 0"/>
           <p:cNvGraphicFramePr>
             <a:graphicFrameLocks noGrp="1"/>
           </p:cNvGraphicFramePr>
@@ -33328,7 +37174,7 @@
                 <a:ea typeface="Arial" pitchFamily="34" charset="-122"/>
                 <a:cs typeface="Arial" pitchFamily="34" charset="-120"/>
               </a:rPr>
-              <a:t>29 / 30</a:t>
+              <a:t>31 / 32</a:t>
             </a:r>
             <a:endParaRPr lang="en-US" sz="710" dirty="0"/>
           </a:p>
@@ -33381,922 +37227,9 @@
 </p:sld>
 </file>
 
-<file path=ppt/slides/slide3.xml><?xml version="1.0" encoding="utf-8"?>
+<file path=ppt/slides/slide32.xml><?xml version="1.0" encoding="utf-8"?>
 <p:sld xmlns:a="http://schemas.openxmlformats.org/drawingml/2006/main" xmlns:r="http://schemas.openxmlformats.org/officeDocument/2006/relationships" xmlns:p="http://schemas.openxmlformats.org/presentationml/2006/main">
-  <p:cSld name="Slide 3">
-    <p:spTree>
-      <p:nvGrpSpPr>
-        <p:cNvPr id="1" name=""/>
-        <p:cNvGrpSpPr/>
-        <p:nvPr/>
-      </p:nvGrpSpPr>
-      <p:grpSpPr>
-        <a:xfrm>
-          <a:off x="1000125" y="0"/>
-          <a:ext cx="1" cy="1"/>
-          <a:chOff x="0" y="0"/>
-          <a:chExt cx="0" cy="0"/>
-        </a:xfrm>
-      </p:grpSpPr>
-      <p:sp>
-        <p:nvSpPr>
-          <p:cNvPr id="2" name="Text 0"/>
-          <p:cNvSpPr txBox="1"/>
-          <p:nvPr/>
-        </p:nvSpPr>
-        <p:spPr>
-          <a:xfrm>
-            <a:off x="1393031" y="300038"/>
-            <a:ext cx="6357938" cy="214313"/>
-          </a:xfrm>
-          <a:prstGeom prst="rect">
-            <a:avLst/>
-          </a:prstGeom>
-          <a:noFill/>
-          <a:ln/>
-        </p:spPr>
-        <p:txBody>
-          <a:bodyPr wrap="square" lIns="0" tIns="0" rIns="0" bIns="0" rtlCol="0" anchor="ctr"/>
-          <a:lstStyle/>
-          <a:p>
-            <a:pPr indent="0" marL="0">
-              <a:buNone/>
-            </a:pPr>
-            <a:r>
-              <a:rPr lang="en-US" sz="980" b="1" dirty="0">
-                <a:solidFill>
-                  <a:srgbClr val="007F72"/>
-                </a:solidFill>
-                <a:latin typeface="Arial" pitchFamily="34" charset="0"/>
-                <a:ea typeface="Arial" pitchFamily="34" charset="-122"/>
-                <a:cs typeface="Arial" pitchFamily="34" charset="-120"/>
-              </a:rPr>
-              <a:t>Lộ trình · 本週三節要做什麼</a:t>
-            </a:r>
-            <a:endParaRPr lang="en-US" sz="980" dirty="0"/>
-          </a:p>
-        </p:txBody>
-      </p:sp>
-      <p:sp>
-        <p:nvSpPr>
-          <p:cNvPr id="3" name="Text 1"/>
-          <p:cNvSpPr txBox="1"/>
-          <p:nvPr/>
-        </p:nvSpPr>
-        <p:spPr>
-          <a:xfrm>
-            <a:off x="1393031" y="528638"/>
-            <a:ext cx="6357938" cy="638228"/>
-          </a:xfrm>
-          <a:prstGeom prst="rect">
-            <a:avLst/>
-          </a:prstGeom>
-          <a:noFill/>
-          <a:ln/>
-        </p:spPr>
-        <p:txBody>
-          <a:bodyPr wrap="square" lIns="0" tIns="0" rIns="0" bIns="0" rtlCol="0" anchor="t"/>
-          <a:lstStyle/>
-          <a:p>
-            <a:pPr indent="0" marL="0">
-              <a:lnSpc>
-                <a:spcPct val="116000"/>
-              </a:lnSpc>
-              <a:buNone/>
-            </a:pPr>
-            <a:r>
-              <a:rPr lang="en-US" sz="1480" b="1" dirty="0">
-                <a:solidFill>
-                  <a:srgbClr val="0B1F3A"/>
-                </a:solidFill>
-                <a:latin typeface="Arial" pitchFamily="34" charset="0"/>
-                <a:ea typeface="Arial" pitchFamily="34" charset="-122"/>
-                <a:cs typeface="Arial" pitchFamily="34" charset="-120"/>
-              </a:rPr>
-              <a:t>Chạy tốt trong máy tính, dựa vào đâu mà tin xe thật ra đường cũng được?</a:t>
-            </a:r>
-            <a:endParaRPr lang="en-US" sz="1480" dirty="0"/>
-          </a:p>
-          <a:p>
-            <a:pPr indent="0" marL="0">
-              <a:lnSpc>
-                <a:spcPct val="116000"/>
-              </a:lnSpc>
-              <a:buNone/>
-            </a:pPr>
-            <a:r>
-              <a:rPr lang="en-US" sz="980" dirty="0">
-                <a:solidFill>
-                  <a:srgbClr val="007F72"/>
-                </a:solidFill>
-                <a:latin typeface="微軟正黑體" pitchFamily="34" charset="0"/>
-                <a:ea typeface="微軟正黑體" pitchFamily="34" charset="-122"/>
-                <a:cs typeface="微軟正黑體" pitchFamily="34" charset="-120"/>
-              </a:rPr>
-              <a:t>在電腦裡跑得好，憑什麼相信真車上路也可以？</a:t>
-            </a:r>
-            <a:endParaRPr lang="en-US" sz="1480" dirty="0"/>
-          </a:p>
-        </p:txBody>
-      </p:sp>
-      <p:sp>
-        <p:nvSpPr>
-          <p:cNvPr id="4" name="Text 2"/>
-          <p:cNvSpPr txBox="1"/>
-          <p:nvPr/>
-        </p:nvSpPr>
-        <p:spPr>
-          <a:xfrm>
-            <a:off x="1393031" y="1253548"/>
-            <a:ext cx="6357938" cy="313463"/>
-          </a:xfrm>
-          <a:prstGeom prst="rect">
-            <a:avLst/>
-          </a:prstGeom>
-          <a:noFill/>
-          <a:ln/>
-        </p:spPr>
-        <p:txBody>
-          <a:bodyPr wrap="square" lIns="0" tIns="0" rIns="0" bIns="0" rtlCol="0" anchor="t"/>
-          <a:lstStyle/>
-          <a:p>
-            <a:pPr indent="0" marL="0">
-              <a:lnSpc>
-                <a:spcPct val="124000"/>
-              </a:lnSpc>
-              <a:buNone/>
-            </a:pPr>
-            <a:r>
-              <a:rPr lang="en-US" sz="900" dirty="0">
-                <a:solidFill>
-                  <a:srgbClr val="5F7183"/>
-                </a:solidFill>
-                <a:latin typeface="Arial" pitchFamily="34" charset="0"/>
-                <a:ea typeface="Arial" pitchFamily="34" charset="-122"/>
-                <a:cs typeface="Arial" pitchFamily="34" charset="-120"/>
-              </a:rPr>
-              <a:t>Tuần trước: «lắp sáu cảm biến lên xe biết chạy, xem có dừng kịp không» — hôm nay lắp LiDAR.</a:t>
-            </a:r>
-            <a:endParaRPr lang="en-US" sz="900" dirty="0"/>
-          </a:p>
-          <a:p>
-            <a:pPr indent="0" marL="0">
-              <a:lnSpc>
-                <a:spcPct val="124000"/>
-              </a:lnSpc>
-              <a:buNone/>
-            </a:pPr>
-            <a:r>
-              <a:rPr lang="en-US" sz="820" dirty="0">
-                <a:solidFill>
-                  <a:srgbClr val="5F7183"/>
-                </a:solidFill>
-                <a:latin typeface="微軟正黑體" pitchFamily="34" charset="0"/>
-                <a:ea typeface="微軟正黑體" pitchFamily="34" charset="-122"/>
-                <a:cs typeface="微軟正黑體" pitchFamily="34" charset="-120"/>
-              </a:rPr>
-              <a:t>上週說：「把這六樣感測器裝到會跑的車上，看它停不停得住。」今天先裝光達（LiDAR）。</a:t>
-            </a:r>
-            <a:endParaRPr lang="en-US" sz="900" dirty="0"/>
-          </a:p>
-        </p:txBody>
-      </p:sp>
-      <p:sp>
-        <p:nvSpPr>
-          <p:cNvPr id="5" name="Shape 3"/>
-          <p:cNvSpPr/>
-          <p:nvPr/>
-        </p:nvSpPr>
-        <p:spPr>
-          <a:xfrm>
-            <a:off x="1393031" y="1644078"/>
-            <a:ext cx="1995488" cy="1427734"/>
-          </a:xfrm>
-          <a:prstGeom prst="roundRect">
-            <a:avLst>
-              <a:gd name="adj" fmla="val 5004"/>
-            </a:avLst>
-          </a:prstGeom>
-          <a:solidFill>
-            <a:srgbClr val="F4F7FA"/>
-          </a:solidFill>
-          <a:ln w="12700">
-            <a:solidFill>
-              <a:srgbClr val="DBE3EA"/>
-            </a:solidFill>
-            <a:prstDash val="solid"/>
-          </a:ln>
-          <a:effectLst>
-            <a:outerShdw sx="100000" sy="100000" kx="0" ky="0" algn="bl" rotWithShape="0" blurRad="76200" dist="12700" dir="5400000">
-              <a:srgbClr val="9AAAB8">
-                <a:alpha val="28000"/>
-              </a:srgbClr>
-            </a:outerShdw>
-          </a:effectLst>
-        </p:spPr>
-      </p:sp>
-      <p:sp>
-        <p:nvSpPr>
-          <p:cNvPr id="6" name="Shape 4"/>
-          <p:cNvSpPr/>
-          <p:nvPr/>
-        </p:nvSpPr>
-        <p:spPr>
-          <a:xfrm>
-            <a:off x="1393031" y="1644078"/>
-            <a:ext cx="1995488" cy="42863"/>
-          </a:xfrm>
-          <a:prstGeom prst="rect">
-            <a:avLst/>
-          </a:prstGeom>
-          <a:solidFill>
-            <a:srgbClr val="0B1F3A"/>
-          </a:solidFill>
-          <a:ln/>
-        </p:spPr>
-      </p:sp>
-      <p:sp>
-        <p:nvSpPr>
-          <p:cNvPr id="7" name="Text 5"/>
-          <p:cNvSpPr txBox="1"/>
-          <p:nvPr/>
-        </p:nvSpPr>
-        <p:spPr>
-          <a:xfrm>
-            <a:off x="1507331" y="1736947"/>
-            <a:ext cx="1766888" cy="303941"/>
-          </a:xfrm>
-          <a:prstGeom prst="rect">
-            <a:avLst/>
-          </a:prstGeom>
-          <a:noFill/>
-          <a:ln/>
-        </p:spPr>
-        <p:txBody>
-          <a:bodyPr wrap="square" lIns="0" tIns="0" rIns="0" bIns="0" rtlCol="0" anchor="t"/>
-          <a:lstStyle/>
-          <a:p>
-            <a:pPr indent="0" marL="0">
-              <a:lnSpc>
-                <a:spcPct val="112000"/>
-              </a:lnSpc>
-              <a:buNone/>
-            </a:pPr>
-            <a:r>
-              <a:rPr lang="en-US" sz="980" b="1" dirty="0">
-                <a:solidFill>
-                  <a:srgbClr val="0B1F3A"/>
-                </a:solidFill>
-                <a:latin typeface="Arial" pitchFamily="34" charset="0"/>
-                <a:ea typeface="Arial" pitchFamily="34" charset="-122"/>
-                <a:cs typeface="Arial" pitchFamily="34" charset="-120"/>
-              </a:rPr>
-              <a:t>Tiết 1 — bây giờ</a:t>
-            </a:r>
-            <a:endParaRPr lang="en-US" sz="980" dirty="0"/>
-          </a:p>
-          <a:p>
-            <a:pPr indent="0" marL="0">
-              <a:lnSpc>
-                <a:spcPct val="112000"/>
-              </a:lnSpc>
-              <a:buNone/>
-            </a:pPr>
-            <a:r>
-              <a:rPr lang="en-US" sz="860" dirty="0">
-                <a:solidFill>
-                  <a:srgbClr val="007F72"/>
-                </a:solidFill>
-                <a:latin typeface="微軟正黑體" pitchFamily="34" charset="0"/>
-                <a:ea typeface="微軟正黑體" pitchFamily="34" charset="-122"/>
-                <a:cs typeface="微軟正黑體" pitchFamily="34" charset="-120"/>
-              </a:rPr>
-              <a:t>第 1 節（現在）</a:t>
-            </a:r>
-            <a:endParaRPr lang="en-US" sz="980" dirty="0"/>
-          </a:p>
-        </p:txBody>
-      </p:sp>
-      <p:sp>
-        <p:nvSpPr>
-          <p:cNvPr id="8" name="Text 6"/>
-          <p:cNvSpPr txBox="1"/>
-          <p:nvPr/>
-        </p:nvSpPr>
-        <p:spPr>
-          <a:xfrm>
-            <a:off x="1507331" y="2069463"/>
-            <a:ext cx="1766888" cy="930912"/>
-          </a:xfrm>
-          <a:prstGeom prst="rect">
-            <a:avLst/>
-          </a:prstGeom>
-          <a:noFill/>
-          <a:ln/>
-        </p:spPr>
-        <p:txBody>
-          <a:bodyPr wrap="square" lIns="0" tIns="0" rIns="0" bIns="0" rtlCol="0" anchor="t"/>
-          <a:lstStyle/>
-          <a:p>
-            <a:pPr indent="0" marL="0">
-              <a:lnSpc>
-                <a:spcPct val="130000"/>
-              </a:lnSpc>
-              <a:buNone/>
-            </a:pPr>
-            <a:r>
-              <a:rPr lang="en-US" sz="900" dirty="0">
-                <a:solidFill>
-                  <a:srgbClr val="1A2733"/>
-                </a:solidFill>
-                <a:latin typeface="Arial" pitchFamily="34" charset="0"/>
-                <a:ea typeface="Arial" pitchFamily="34" charset="-122"/>
-                <a:cs typeface="Arial" pitchFamily="34" charset="-120"/>
-              </a:rPr>
-              <a:t>Số tia, chiều dài tia, góc quét — trên bảng thông số (datasheet) gọi là gì?</a:t>
-            </a:r>
-            <a:endParaRPr lang="en-US" sz="900" dirty="0"/>
-          </a:p>
-          <a:p>
-            <a:pPr indent="0" marL="0">
-              <a:lnSpc>
-                <a:spcPct val="130000"/>
-              </a:lnSpc>
-              <a:buNone/>
-            </a:pPr>
-            <a:r>
-              <a:rPr lang="en-US" sz="820" dirty="0">
-                <a:solidFill>
-                  <a:srgbClr val="5F7183"/>
-                </a:solidFill>
-                <a:latin typeface="微軟正黑體" pitchFamily="34" charset="0"/>
-                <a:ea typeface="微軟正黑體" pitchFamily="34" charset="-122"/>
-                <a:cs typeface="微軟正黑體" pitchFamily="34" charset="-120"/>
-              </a:rPr>
-              <a:t>射線數、長度、張角——規格表（datasheet）上叫什麼，為什麼不能亂選。</a:t>
-            </a:r>
-            <a:endParaRPr lang="en-US" sz="900" dirty="0"/>
-          </a:p>
-        </p:txBody>
-      </p:sp>
-      <p:sp>
-        <p:nvSpPr>
-          <p:cNvPr id="9" name="Shape 7"/>
-          <p:cNvSpPr/>
-          <p:nvPr/>
-        </p:nvSpPr>
-        <p:spPr>
-          <a:xfrm>
-            <a:off x="3574256" y="1644078"/>
-            <a:ext cx="1995488" cy="1427734"/>
-          </a:xfrm>
-          <a:prstGeom prst="roundRect">
-            <a:avLst>
-              <a:gd name="adj" fmla="val 5004"/>
-            </a:avLst>
-          </a:prstGeom>
-          <a:solidFill>
-            <a:srgbClr val="F4F7FA"/>
-          </a:solidFill>
-          <a:ln w="12700">
-            <a:solidFill>
-              <a:srgbClr val="DBE3EA"/>
-            </a:solidFill>
-            <a:prstDash val="solid"/>
-          </a:ln>
-          <a:effectLst>
-            <a:outerShdw sx="100000" sy="100000" kx="0" ky="0" algn="bl" rotWithShape="0" blurRad="76200" dist="12700" dir="5400000">
-              <a:srgbClr val="9AAAB8">
-                <a:alpha val="28000"/>
-              </a:srgbClr>
-            </a:outerShdw>
-          </a:effectLst>
-        </p:spPr>
-      </p:sp>
-      <p:sp>
-        <p:nvSpPr>
-          <p:cNvPr id="10" name="Shape 8"/>
-          <p:cNvSpPr/>
-          <p:nvPr/>
-        </p:nvSpPr>
-        <p:spPr>
-          <a:xfrm>
-            <a:off x="3574256" y="1644078"/>
-            <a:ext cx="1995488" cy="42863"/>
-          </a:xfrm>
-          <a:prstGeom prst="rect">
-            <a:avLst/>
-          </a:prstGeom>
-          <a:solidFill>
-            <a:srgbClr val="007F72"/>
-          </a:solidFill>
-          <a:ln/>
-        </p:spPr>
-      </p:sp>
-      <p:sp>
-        <p:nvSpPr>
-          <p:cNvPr id="11" name="Text 9"/>
-          <p:cNvSpPr txBox="1"/>
-          <p:nvPr/>
-        </p:nvSpPr>
-        <p:spPr>
-          <a:xfrm>
-            <a:off x="3688556" y="1736947"/>
-            <a:ext cx="1766888" cy="303941"/>
-          </a:xfrm>
-          <a:prstGeom prst="rect">
-            <a:avLst/>
-          </a:prstGeom>
-          <a:noFill/>
-          <a:ln/>
-        </p:spPr>
-        <p:txBody>
-          <a:bodyPr wrap="square" lIns="0" tIns="0" rIns="0" bIns="0" rtlCol="0" anchor="t"/>
-          <a:lstStyle/>
-          <a:p>
-            <a:pPr indent="0" marL="0">
-              <a:lnSpc>
-                <a:spcPct val="112000"/>
-              </a:lnSpc>
-              <a:buNone/>
-            </a:pPr>
-            <a:r>
-              <a:rPr lang="en-US" sz="980" b="1" dirty="0">
-                <a:solidFill>
-                  <a:srgbClr val="0B1F3A"/>
-                </a:solidFill>
-                <a:latin typeface="Arial" pitchFamily="34" charset="0"/>
-                <a:ea typeface="Arial" pitchFamily="34" charset="-122"/>
-                <a:cs typeface="Arial" pitchFamily="34" charset="-120"/>
-              </a:rPr>
-              <a:t>Tiết 2</a:t>
-            </a:r>
-            <a:endParaRPr lang="en-US" sz="980" dirty="0"/>
-          </a:p>
-          <a:p>
-            <a:pPr indent="0" marL="0">
-              <a:lnSpc>
-                <a:spcPct val="112000"/>
-              </a:lnSpc>
-              <a:buNone/>
-            </a:pPr>
-            <a:r>
-              <a:rPr lang="en-US" sz="860" dirty="0">
-                <a:solidFill>
-                  <a:srgbClr val="007F72"/>
-                </a:solidFill>
-                <a:latin typeface="微軟正黑體" pitchFamily="34" charset="0"/>
-                <a:ea typeface="微軟正黑體" pitchFamily="34" charset="-122"/>
-                <a:cs typeface="微軟正黑體" pitchFamily="34" charset="-120"/>
-              </a:rPr>
-              <a:t>第 2 節</a:t>
-            </a:r>
-            <a:endParaRPr lang="en-US" sz="980" dirty="0"/>
-          </a:p>
-        </p:txBody>
-      </p:sp>
-      <p:sp>
-        <p:nvSpPr>
-          <p:cNvPr id="12" name="Text 10"/>
-          <p:cNvSpPr txBox="1"/>
-          <p:nvPr/>
-        </p:nvSpPr>
-        <p:spPr>
-          <a:xfrm>
-            <a:off x="3688556" y="2069463"/>
-            <a:ext cx="1766888" cy="930912"/>
-          </a:xfrm>
-          <a:prstGeom prst="rect">
-            <a:avLst/>
-          </a:prstGeom>
-          <a:noFill/>
-          <a:ln/>
-        </p:spPr>
-        <p:txBody>
-          <a:bodyPr wrap="square" lIns="0" tIns="0" rIns="0" bIns="0" rtlCol="0" anchor="t"/>
-          <a:lstStyle/>
-          <a:p>
-            <a:pPr indent="0" marL="0">
-              <a:lnSpc>
-                <a:spcPct val="130000"/>
-              </a:lnSpc>
-              <a:buNone/>
-            </a:pPr>
-            <a:r>
-              <a:rPr lang="en-US" sz="900" dirty="0">
-                <a:solidFill>
-                  <a:srgbClr val="1A2733"/>
-                </a:solidFill>
-                <a:latin typeface="Arial" pitchFamily="34" charset="0"/>
-                <a:ea typeface="Arial" pitchFamily="34" charset="-122"/>
-                <a:cs typeface="Arial" pitchFamily="34" charset="-120"/>
-              </a:rPr>
-              <a:t>Test thế nào mới biết xe an toàn? Đáp án không phải số km, mà là «kịch bản» (scenario).</a:t>
-            </a:r>
-            <a:endParaRPr lang="en-US" sz="900" dirty="0"/>
-          </a:p>
-          <a:p>
-            <a:pPr indent="0" marL="0">
-              <a:lnSpc>
-                <a:spcPct val="130000"/>
-              </a:lnSpc>
-              <a:buNone/>
-            </a:pPr>
-            <a:r>
-              <a:rPr lang="en-US" sz="820" dirty="0">
-                <a:solidFill>
-                  <a:srgbClr val="5F7183"/>
-                </a:solidFill>
-                <a:latin typeface="微軟正黑體" pitchFamily="34" charset="0"/>
-                <a:ea typeface="微軟正黑體" pitchFamily="34" charset="-122"/>
-                <a:cs typeface="微軟正黑體" pitchFamily="34" charset="-120"/>
-              </a:rPr>
-              <a:t>要怎麼測才知道車子安全？答案不是里程，是「場景」（scenario）。</a:t>
-            </a:r>
-            <a:endParaRPr lang="en-US" sz="900" dirty="0"/>
-          </a:p>
-        </p:txBody>
-      </p:sp>
-      <p:sp>
-        <p:nvSpPr>
-          <p:cNvPr id="13" name="Shape 11"/>
-          <p:cNvSpPr/>
-          <p:nvPr/>
-        </p:nvSpPr>
-        <p:spPr>
-          <a:xfrm>
-            <a:off x="5755481" y="1644078"/>
-            <a:ext cx="1995488" cy="1427734"/>
-          </a:xfrm>
-          <a:prstGeom prst="roundRect">
-            <a:avLst>
-              <a:gd name="adj" fmla="val 5004"/>
-            </a:avLst>
-          </a:prstGeom>
-          <a:solidFill>
-            <a:srgbClr val="F4F7FA"/>
-          </a:solidFill>
-          <a:ln w="12700">
-            <a:solidFill>
-              <a:srgbClr val="DBE3EA"/>
-            </a:solidFill>
-            <a:prstDash val="solid"/>
-          </a:ln>
-          <a:effectLst>
-            <a:outerShdw sx="100000" sy="100000" kx="0" ky="0" algn="bl" rotWithShape="0" blurRad="76200" dist="12700" dir="5400000">
-              <a:srgbClr val="9AAAB8">
-                <a:alpha val="28000"/>
-              </a:srgbClr>
-            </a:outerShdw>
-          </a:effectLst>
-        </p:spPr>
-      </p:sp>
-      <p:sp>
-        <p:nvSpPr>
-          <p:cNvPr id="14" name="Shape 12"/>
-          <p:cNvSpPr/>
-          <p:nvPr/>
-        </p:nvSpPr>
-        <p:spPr>
-          <a:xfrm>
-            <a:off x="5755481" y="1644078"/>
-            <a:ext cx="1995488" cy="42863"/>
-          </a:xfrm>
-          <a:prstGeom prst="rect">
-            <a:avLst/>
-          </a:prstGeom>
-          <a:solidFill>
-            <a:srgbClr val="FFB020"/>
-          </a:solidFill>
-          <a:ln/>
-        </p:spPr>
-      </p:sp>
-      <p:sp>
-        <p:nvSpPr>
-          <p:cNvPr id="15" name="Text 13"/>
-          <p:cNvSpPr txBox="1"/>
-          <p:nvPr/>
-        </p:nvSpPr>
-        <p:spPr>
-          <a:xfrm>
-            <a:off x="5869781" y="1736947"/>
-            <a:ext cx="1766888" cy="303941"/>
-          </a:xfrm>
-          <a:prstGeom prst="rect">
-            <a:avLst/>
-          </a:prstGeom>
-          <a:noFill/>
-          <a:ln/>
-        </p:spPr>
-        <p:txBody>
-          <a:bodyPr wrap="square" lIns="0" tIns="0" rIns="0" bIns="0" rtlCol="0" anchor="t"/>
-          <a:lstStyle/>
-          <a:p>
-            <a:pPr indent="0" marL="0">
-              <a:lnSpc>
-                <a:spcPct val="112000"/>
-              </a:lnSpc>
-              <a:buNone/>
-            </a:pPr>
-            <a:r>
-              <a:rPr lang="en-US" sz="980" b="1" dirty="0">
-                <a:solidFill>
-                  <a:srgbClr val="0B1F3A"/>
-                </a:solidFill>
-                <a:latin typeface="Arial" pitchFamily="34" charset="0"/>
-                <a:ea typeface="Arial" pitchFamily="34" charset="-122"/>
-                <a:cs typeface="Arial" pitchFamily="34" charset="-120"/>
-              </a:rPr>
-              <a:t>Tiết 3 — lên máy</a:t>
-            </a:r>
-            <a:endParaRPr lang="en-US" sz="980" dirty="0"/>
-          </a:p>
-          <a:p>
-            <a:pPr indent="0" marL="0">
-              <a:lnSpc>
-                <a:spcPct val="112000"/>
-              </a:lnSpc>
-              <a:buNone/>
-            </a:pPr>
-            <a:r>
-              <a:rPr lang="en-US" sz="860" dirty="0">
-                <a:solidFill>
-                  <a:srgbClr val="007F72"/>
-                </a:solidFill>
-                <a:latin typeface="微軟正黑體" pitchFamily="34" charset="0"/>
-                <a:ea typeface="微軟正黑體" pitchFamily="34" charset="-122"/>
-                <a:cs typeface="微軟正黑體" pitchFamily="34" charset="-120"/>
-              </a:rPr>
-              <a:t>第 3 節（上機）</a:t>
-            </a:r>
-            <a:endParaRPr lang="en-US" sz="980" dirty="0"/>
-          </a:p>
-        </p:txBody>
-      </p:sp>
-      <p:sp>
-        <p:nvSpPr>
-          <p:cNvPr id="16" name="Text 14"/>
-          <p:cNvSpPr txBox="1"/>
-          <p:nvPr/>
-        </p:nvSpPr>
-        <p:spPr>
-          <a:xfrm>
-            <a:off x="5869781" y="2069463"/>
-            <a:ext cx="1766888" cy="930912"/>
-          </a:xfrm>
-          <a:prstGeom prst="rect">
-            <a:avLst/>
-          </a:prstGeom>
-          <a:noFill/>
-          <a:ln/>
-        </p:spPr>
-        <p:txBody>
-          <a:bodyPr wrap="square" lIns="0" tIns="0" rIns="0" bIns="0" rtlCol="0" anchor="t"/>
-          <a:lstStyle/>
-          <a:p>
-            <a:pPr indent="0" marL="0">
-              <a:lnSpc>
-                <a:spcPct val="130000"/>
-              </a:lnSpc>
-              <a:buNone/>
-            </a:pPr>
-            <a:r>
-              <a:rPr lang="en-US" sz="900" dirty="0">
-                <a:solidFill>
-                  <a:srgbClr val="1A2733"/>
-                </a:solidFill>
-                <a:latin typeface="Arial" pitchFamily="34" charset="0"/>
-                <a:ea typeface="Arial" pitchFamily="34" charset="-122"/>
-                <a:cs typeface="Arial" pitchFamily="34" charset="-120"/>
-              </a:rPr>
-              <a:t>Tự cấu hình một bộ cảm biến cho Hà Nội. Ba con số đó hãy tự giữ lại.</a:t>
-            </a:r>
-            <a:endParaRPr lang="en-US" sz="900" dirty="0"/>
-          </a:p>
-          <a:p>
-            <a:pPr indent="0" marL="0">
-              <a:lnSpc>
-                <a:spcPct val="130000"/>
-              </a:lnSpc>
-              <a:buNone/>
-            </a:pPr>
-            <a:r>
-              <a:rPr lang="en-US" sz="820" dirty="0">
-                <a:solidFill>
-                  <a:srgbClr val="5F7183"/>
-                </a:solidFill>
-                <a:latin typeface="微軟正黑體" pitchFamily="34" charset="0"/>
-                <a:ea typeface="微軟正黑體" pitchFamily="34" charset="-122"/>
-                <a:cs typeface="微軟正黑體" pitchFamily="34" charset="-120"/>
-              </a:rPr>
-              <a:t>各位自己為河內配一組感測器。那三個數字請自己留著。</a:t>
-            </a:r>
-            <a:endParaRPr lang="en-US" sz="900" dirty="0"/>
-          </a:p>
-        </p:txBody>
-      </p:sp>
-      <p:sp>
-        <p:nvSpPr>
-          <p:cNvPr id="17" name="Shape 15"/>
-          <p:cNvSpPr/>
-          <p:nvPr/>
-        </p:nvSpPr>
-        <p:spPr>
-          <a:xfrm>
-            <a:off x="1393031" y="3128963"/>
-            <a:ext cx="6357938" cy="471488"/>
-          </a:xfrm>
-          <a:prstGeom prst="roundRect">
-            <a:avLst>
-              <a:gd name="adj" fmla="val 13636"/>
-            </a:avLst>
-          </a:prstGeom>
-          <a:solidFill>
-            <a:srgbClr val="FFF6E3"/>
-          </a:solidFill>
-          <a:ln w="12700">
-            <a:solidFill>
-              <a:srgbClr val="FFB020"/>
-            </a:solidFill>
-            <a:prstDash val="solid"/>
-          </a:ln>
-        </p:spPr>
-      </p:sp>
-      <p:sp>
-        <p:nvSpPr>
-          <p:cNvPr id="18" name="Text 16"/>
-          <p:cNvSpPr txBox="1"/>
-          <p:nvPr/>
-        </p:nvSpPr>
-        <p:spPr>
-          <a:xfrm>
-            <a:off x="1535906" y="3171825"/>
-            <a:ext cx="6072188" cy="400050"/>
-          </a:xfrm>
-          <a:prstGeom prst="rect">
-            <a:avLst/>
-          </a:prstGeom>
-          <a:noFill/>
-          <a:ln/>
-        </p:spPr>
-        <p:txBody>
-          <a:bodyPr wrap="square" lIns="0" tIns="0" rIns="0" bIns="0" rtlCol="0" anchor="t"/>
-          <a:lstStyle/>
-          <a:p>
-            <a:pPr indent="0" marL="0">
-              <a:lnSpc>
-                <a:spcPct val="116000"/>
-              </a:lnSpc>
-              <a:buNone/>
-            </a:pPr>
-            <a:r>
-              <a:rPr lang="en-US" sz="900" b="1" dirty="0">
-                <a:solidFill>
-                  <a:srgbClr val="7A4E00"/>
-                </a:solidFill>
-                <a:latin typeface="Arial" pitchFamily="34" charset="0"/>
-                <a:ea typeface="Arial" pitchFamily="34" charset="-122"/>
-                <a:cs typeface="Arial" pitchFamily="34" charset="-120"/>
-              </a:rPr>
-              <a:t>Xuyên suốt ba tiết còn một chuyện: chạy tốt trong mô phỏng thì lên xe thật chắc chắn sẽ kém đi.</a:t>
-            </a:r>
-            <a:endParaRPr lang="en-US" sz="900" dirty="0"/>
-          </a:p>
-          <a:p>
-            <a:pPr indent="0" marL="0">
-              <a:lnSpc>
-                <a:spcPct val="116000"/>
-              </a:lnSpc>
-              <a:buNone/>
-            </a:pPr>
-            <a:r>
-              <a:rPr lang="en-US" sz="820" dirty="0">
-                <a:solidFill>
-                  <a:srgbClr val="7A4E00"/>
-                </a:solidFill>
-                <a:latin typeface="微軟正黑體" pitchFamily="34" charset="0"/>
-                <a:ea typeface="微軟正黑體" pitchFamily="34" charset="-122"/>
-                <a:cs typeface="微軟正黑體" pitchFamily="34" charset="-120"/>
-              </a:rPr>
-              <a:t>還有一件事貫穿三節：在模擬裡跑得好，搬到真車上一定會退步。</a:t>
-            </a:r>
-            <a:endParaRPr lang="en-US" sz="900" dirty="0"/>
-          </a:p>
-        </p:txBody>
-      </p:sp>
-      <p:pic>
-        <p:nvPicPr>
-          <p:cNvPr id="20" name="Image 0" descr="/Users/tsengchenghsun/Class/carClass/Claude outputs/第四週(10-1)/src/logo.png">    </p:cNvPr>
-          <p:cNvPicPr>
-            <a:picLocks noChangeAspect="1"/>
-          </p:cNvPicPr>
-          <p:nvPr/>
-        </p:nvPicPr>
-        <p:blipFill>
-          <a:blip r:embed="rId1"/>
-          <a:stretch>
-            <a:fillRect/>
-          </a:stretch>
-        </p:blipFill>
-        <p:spPr>
-          <a:xfrm>
-            <a:off x="7158038" y="85725"/>
-            <a:ext cx="857250" cy="189405"/>
-          </a:xfrm>
-          <a:prstGeom prst="rect">
-            <a:avLst/>
-          </a:prstGeom>
-        </p:spPr>
-      </p:pic>
-      <p:sp>
-        <p:nvSpPr>
-          <p:cNvPr id="21" name="Text 17"/>
-          <p:cNvSpPr txBox="1"/>
-          <p:nvPr/>
-        </p:nvSpPr>
-        <p:spPr>
-          <a:xfrm>
-            <a:off x="1085850" y="100013"/>
-            <a:ext cx="642938" cy="200025"/>
-          </a:xfrm>
-          <a:prstGeom prst="rect">
-            <a:avLst/>
-          </a:prstGeom>
-          <a:noFill/>
-          <a:ln/>
-        </p:spPr>
-        <p:txBody>
-          <a:bodyPr wrap="square" lIns="0" tIns="0" rIns="0" bIns="0" rtlCol="0" anchor="ctr"/>
-          <a:lstStyle/>
-          <a:p>
-            <a:pPr indent="0" marL="0">
-              <a:buNone/>
-            </a:pPr>
-            <a:r>
-              <a:rPr lang="en-US" sz="700" dirty="0">
-                <a:solidFill>
-                  <a:srgbClr val="5F7183"/>
-                </a:solidFill>
-                <a:latin typeface="Arial" pitchFamily="34" charset="0"/>
-                <a:ea typeface="Arial" pitchFamily="34" charset="-122"/>
-                <a:cs typeface="Arial" pitchFamily="34" charset="-120"/>
-              </a:rPr>
-              <a:t>3 / 30</a:t>
-            </a:r>
-            <a:endParaRPr lang="en-US" sz="700" dirty="0"/>
-          </a:p>
-        </p:txBody>
-      </p:sp>
-      <p:sp>
-        <p:nvSpPr>
-          <p:cNvPr id="22" name="Text 18"/>
-          <p:cNvSpPr txBox="1"/>
-          <p:nvPr/>
-        </p:nvSpPr>
-        <p:spPr>
-          <a:xfrm>
-            <a:off x="1750219" y="100013"/>
-            <a:ext cx="1571625" cy="200025"/>
-          </a:xfrm>
-          <a:prstGeom prst="rect">
-            <a:avLst/>
-          </a:prstGeom>
-          <a:noFill/>
-          <a:ln/>
-        </p:spPr>
-        <p:txBody>
-          <a:bodyPr wrap="square" lIns="0" tIns="0" rIns="0" bIns="0" rtlCol="0" anchor="ctr"/>
-          <a:lstStyle/>
-          <a:p>
-            <a:pPr indent="0" marL="0">
-              <a:buNone/>
-            </a:pPr>
-            <a:r>
-              <a:rPr lang="en-US" sz="700" dirty="0">
-                <a:solidFill>
-                  <a:srgbClr val="5F7183"/>
-                </a:solidFill>
-                <a:latin typeface="Arial" pitchFamily="34" charset="0"/>
-                <a:ea typeface="Arial" pitchFamily="34" charset="-122"/>
-                <a:cs typeface="Arial" pitchFamily="34" charset="-120"/>
-              </a:rPr>
-              <a:t>Tiết 1 · 第 1 節</a:t>
-            </a:r>
-            <a:endParaRPr lang="en-US" sz="700" dirty="0"/>
-          </a:p>
-        </p:txBody>
-      </p:sp>
-    </p:spTree>
-  </p:cSld>
-  <p:clrMapOvr>
-    <a:masterClrMapping/>
-  </p:clrMapOvr>
-</p:sld>
-</file>
-
-<file path=ppt/slides/slide30.xml><?xml version="1.0" encoding="utf-8"?>
-<p:sld xmlns:a="http://schemas.openxmlformats.org/drawingml/2006/main" xmlns:r="http://schemas.openxmlformats.org/officeDocument/2006/relationships" xmlns:p="http://schemas.openxmlformats.org/presentationml/2006/main">
-  <p:cSld name="Slide 30">
+  <p:cSld name="Slide 32">
     <p:bg>
       <p:bgPr>
         <a:solidFill>
@@ -34807,7 +37740,7 @@
                 <a:ea typeface="Arial" pitchFamily="34" charset="-122"/>
                 <a:cs typeface="Arial" pitchFamily="34" charset="-120"/>
               </a:rPr>
-              <a:t>30 / 30</a:t>
+              <a:t>32 / 32</a:t>
             </a:r>
             <a:endParaRPr lang="en-US" sz="720" dirty="0"/>
           </a:p>
@@ -35639,7 +38572,7 @@
                 <a:ea typeface="Arial" pitchFamily="34" charset="-122"/>
                 <a:cs typeface="Arial" pitchFamily="34" charset="-120"/>
               </a:rPr>
-              <a:t>4 / 30</a:t>
+              <a:t>4 / 32</a:t>
             </a:r>
             <a:endParaRPr lang="en-US" sz="720" dirty="0"/>
           </a:p>
@@ -35948,7 +38881,7 @@
                 <a:ea typeface="Arial" pitchFamily="34" charset="-122"/>
                 <a:cs typeface="Arial" pitchFamily="34" charset="-120"/>
               </a:rPr>
-              <a:t>5 / 30</a:t>
+              <a:t>5 / 32</a:t>
             </a:r>
             <a:endParaRPr lang="en-US" sz="720" dirty="0"/>
           </a:p>
@@ -37168,7 +40101,7 @@
                 <a:ea typeface="Arial" pitchFamily="34" charset="-122"/>
                 <a:cs typeface="Arial" pitchFamily="34" charset="-120"/>
               </a:rPr>
-              <a:t>6 / 30</a:t>
+              <a:t>6 / 32</a:t>
             </a:r>
             <a:endParaRPr lang="en-US" sz="700" dirty="0"/>
           </a:p>
@@ -38635,7 +41568,7 @@
                 <a:ea typeface="Arial" pitchFamily="34" charset="-122"/>
                 <a:cs typeface="Arial" pitchFamily="34" charset="-120"/>
               </a:rPr>
-              <a:t>7 / 30</a:t>
+              <a:t>7 / 32</a:t>
             </a:r>
             <a:endParaRPr lang="en-US" sz="720" dirty="0"/>
           </a:p>
@@ -39403,7 +42336,7 @@
                 <a:ea typeface="Arial" pitchFamily="34" charset="-122"/>
                 <a:cs typeface="Arial" pitchFamily="34" charset="-120"/>
               </a:rPr>
-              <a:t>8 / 30</a:t>
+              <a:t>8 / 32</a:t>
             </a:r>
             <a:endParaRPr lang="en-US" sz="690" dirty="0"/>
           </a:p>
@@ -40171,7 +43104,7 @@
                 <a:ea typeface="Arial" pitchFamily="34" charset="-122"/>
                 <a:cs typeface="Arial" pitchFamily="34" charset="-120"/>
               </a:rPr>
-              <a:t>9 / 30</a:t>
+              <a:t>9 / 32</a:t>
             </a:r>
             <a:endParaRPr lang="en-US" sz="690" dirty="0"/>
           </a:p>

--- a/第四週(10-01)/第四週_第1節_簡報.pptx
+++ b/第四週(10-01)/第四週_第1節_簡報.pptx
@@ -3417,19 +3417,19 @@
                 <a:spcPts val="0"/>
               </a:spcBef>
               <a:spcAft>
-                <a:spcPts val="200"/>
+                <a:spcPts val="192"/>
               </a:spcAft>
             </a:pPr>
             <a:r>
-              <a:rPr sz="1200" lang="zh-TW" dirty="0">
-                <a:solidFill>
-                  <a:srgbClr val="000000"/>
-                </a:solidFill>
-                <a:latin typeface="Arial Unicode MS"/>
-                <a:ea typeface="Arial Unicode MS"/>
-                <a:cs typeface="Arial Unicode MS"/>
-              </a:rPr>
-              <a:t>這張表把那條公式，五個常見車速各算一次。
+              <a:rPr sz="1150" lang="zh-TW" dirty="0">
+                <a:solidFill>
+                  <a:srgbClr val="000000"/>
+                </a:solidFill>
+                <a:latin typeface="Arial Unicode MS"/>
+                <a:ea typeface="Arial Unicode MS"/>
+                <a:cs typeface="Arial Unicode MS"/>
+              </a:rPr>
+              <a:t>這張表把那條公式，六個常見車速各算一次。
 </a:t>
             </a:r>
           </a:p>
@@ -3439,11 +3439,11 @@
                 <a:spcPts val="0"/>
               </a:spcBef>
               <a:spcAft>
-                <a:spcPts val="200"/>
+                <a:spcPts val="192"/>
               </a:spcAft>
             </a:pPr>
             <a:r>
-              <a:rPr sz="1200" lang="zh-TW" dirty="0">
+              <a:rPr sz="1150" lang="zh-TW" dirty="0">
                 <a:solidFill>
                   <a:srgbClr val="000000"/>
                 </a:solidFill>
@@ -3454,7 +3454,7 @@
               <a:t>「射線至少」那一欄是</a:t>
             </a:r>
             <a:r>
-              <a:rPr sz="1200" b="1" lang="zh-TW" dirty="0">
+              <a:rPr sz="1150" b="1" lang="zh-TW" dirty="0">
                 <a:solidFill>
                   <a:srgbClr val="000000"/>
                 </a:solidFill>
@@ -3465,7 +3465,7 @@
               <a:t>煞停距離乘一點二五</a:t>
             </a:r>
             <a:r>
-              <a:rPr sz="1200" lang="zh-TW" dirty="0">
+              <a:rPr sz="1150" lang="zh-TW" dirty="0">
                 <a:solidFill>
                   <a:srgbClr val="000000"/>
                 </a:solidFill>
@@ -3476,7 +3476,7 @@
               <a:t>。先說清楚一件事：</a:t>
             </a:r>
             <a:r>
-              <a:rPr sz="1200" b="1" lang="zh-TW" dirty="0">
+              <a:rPr sz="1150" b="1" lang="zh-TW" dirty="0">
                 <a:solidFill>
                   <a:srgbClr val="000000"/>
                 </a:solidFill>
@@ -3487,7 +3487,7 @@
               <a:t>這個兩成五是我們這門課取的餘裕，不是法規規定的數字。</a:t>
             </a:r>
             <a:r>
-              <a:rPr sz="1200" lang="zh-TW" dirty="0">
+              <a:rPr sz="1150" lang="zh-TW" dirty="0">
                 <a:solidFill>
                   <a:srgbClr val="000000"/>
                 </a:solidFill>
@@ -3505,11 +3505,11 @@
                 <a:spcPts val="0"/>
               </a:spcBef>
               <a:spcAft>
-                <a:spcPts val="200"/>
+                <a:spcPts val="192"/>
               </a:spcAft>
             </a:pPr>
             <a:r>
-              <a:rPr sz="1200" lang="zh-TW" dirty="0">
+              <a:rPr sz="1150" lang="zh-TW" dirty="0">
                 <a:solidFill>
                   <a:srgbClr val="000000"/>
                 </a:solidFill>
@@ -3520,7 +3520,7 @@
               <a:t>為什麼要加餘裕？因為公式算的是「剛剛好停住」，而剛剛好等於</a:t>
             </a:r>
             <a:r>
-              <a:rPr sz="1200" b="1" lang="zh-TW" dirty="0">
+              <a:rPr sz="1150" b="1" lang="zh-TW" dirty="0">
                 <a:solidFill>
                   <a:srgbClr val="000000"/>
                 </a:solidFill>
@@ -3531,7 +3531,7 @@
               <a:t>貼著前車停</a:t>
             </a:r>
             <a:r>
-              <a:rPr sz="1200" lang="zh-TW" dirty="0">
+              <a:rPr sz="1150" lang="zh-TW" dirty="0">
                 <a:solidFill>
                   <a:srgbClr val="000000"/>
                 </a:solidFill>
@@ -3549,11 +3549,11 @@
                 <a:spcPts val="0"/>
               </a:spcBef>
               <a:spcAft>
-                <a:spcPts val="200"/>
+                <a:spcPts val="192"/>
               </a:spcAft>
             </a:pPr>
             <a:r>
-              <a:rPr sz="1200" lang="zh-TW" dirty="0">
+              <a:rPr sz="1150" lang="zh-TW" dirty="0">
                 <a:solidFill>
                   <a:srgbClr val="000000"/>
                 </a:solidFill>
@@ -3564,7 +3564,7 @@
               <a:t>這兩成五涵蓋的是：反應時間不見得每次都是零點三秒、偵測不是瞬間完成、量測本身有誤差。</a:t>
             </a:r>
             <a:r>
-              <a:rPr sz="1200" b="1" lang="zh-TW" dirty="0">
+              <a:rPr sz="1150" b="1" lang="zh-TW" dirty="0">
                 <a:solidFill>
                   <a:srgbClr val="000000"/>
                 </a:solidFill>
@@ -3575,7 +3575,7 @@
               <a:t>它不涵蓋天候</a:t>
             </a:r>
             <a:r>
-              <a:rPr sz="1200" lang="zh-TW" dirty="0">
+              <a:rPr sz="1150" lang="zh-TW" dirty="0">
                 <a:solidFill>
                   <a:srgbClr val="000000"/>
                 </a:solidFill>
@@ -3593,11 +3593,11 @@
                 <a:spcPts val="0"/>
               </a:spcBef>
               <a:spcAft>
-                <a:spcPts val="200"/>
+                <a:spcPts val="192"/>
               </a:spcAft>
             </a:pPr>
             <a:r>
-              <a:rPr sz="1200" lang="zh-TW" dirty="0">
+              <a:rPr sz="1150" lang="zh-TW" dirty="0">
                 <a:solidFill>
                   <a:srgbClr val="000000"/>
                 </a:solidFill>
@@ -3608,18 +3608,18 @@
               <a:t>對一次：時速五十，二十乘一點二五等於二十五——</a:t>
             </a:r>
             <a:r>
-              <a:rPr sz="1200" b="1" lang="zh-TW" dirty="0">
-                <a:solidFill>
-                  <a:srgbClr val="000000"/>
-                </a:solidFill>
-                <a:latin typeface="Arial Unicode MS"/>
-                <a:ea typeface="Arial Unicode MS"/>
-                <a:cs typeface="Arial Unicode MS"/>
-              </a:rPr>
-              <a:t>那就是我們模擬器的預設值</a:t>
-            </a:r>
-            <a:r>
-              <a:rPr sz="1200" lang="zh-TW" dirty="0">
+              <a:rPr sz="1150" b="1" lang="zh-TW" dirty="0">
+                <a:solidFill>
+                  <a:srgbClr val="000000"/>
+                </a:solidFill>
+                <a:latin typeface="Arial Unicode MS"/>
+                <a:ea typeface="Arial Unicode MS"/>
+                <a:cs typeface="Arial Unicode MS"/>
+              </a:rPr>
+              <a:t>那就是模擬器剛打開時的預設值</a:t>
+            </a:r>
+            <a:r>
+              <a:rPr sz="1150" lang="zh-TW" dirty="0">
                 <a:solidFill>
                   <a:srgbClr val="000000"/>
                 </a:solidFill>
@@ -3637,33 +3637,99 @@
                 <a:spcPts val="0"/>
               </a:spcBef>
               <a:spcAft>
-                <a:spcPts val="200"/>
+                <a:spcPts val="192"/>
               </a:spcAft>
             </a:pPr>
             <a:r>
-              <a:rPr sz="1200" lang="zh-TW" dirty="0">
-                <a:solidFill>
-                  <a:srgbClr val="000000"/>
-                </a:solidFill>
-                <a:latin typeface="Arial Unicode MS"/>
-                <a:ea typeface="Arial Unicode MS"/>
-                <a:cs typeface="Arial Unicode MS"/>
-              </a:rPr>
-              <a:t>一定會有人問：</a:t>
-            </a:r>
-            <a:r>
-              <a:rPr sz="1200" b="1" lang="zh-TW" dirty="0">
-                <a:solidFill>
-                  <a:srgbClr val="000000"/>
-                </a:solidFill>
-                <a:latin typeface="Arial Unicode MS"/>
-                <a:ea typeface="Arial Unicode MS"/>
-                <a:cs typeface="Arial Unicode MS"/>
-              </a:rPr>
-              <a:t>五列的減速度都是六嗎？</a:t>
-            </a:r>
-            <a:r>
-              <a:rPr sz="1200" lang="zh-TW" dirty="0">
+              <a:rPr sz="1150" lang="zh-TW" dirty="0">
+                <a:solidFill>
+                  <a:srgbClr val="000000"/>
+                </a:solidFill>
+                <a:latin typeface="Arial Unicode MS"/>
+                <a:ea typeface="Arial Unicode MS"/>
+                <a:cs typeface="Arial Unicode MS"/>
+              </a:rPr>
+              <a:t>不過各位</a:t>
+            </a:r>
+            <a:r>
+              <a:rPr sz="1150" b="1" lang="zh-TW" dirty="0">
+                <a:solidFill>
+                  <a:srgbClr val="000000"/>
+                </a:solidFill>
+                <a:latin typeface="Arial Unicode MS"/>
+                <a:ea typeface="Arial Unicode MS"/>
+                <a:cs typeface="Arial Unicode MS"/>
+              </a:rPr>
+              <a:t>第三節上機不是跑五十</a:t>
+            </a:r>
+            <a:r>
+              <a:rPr sz="1150" lang="zh-TW" dirty="0">
+                <a:solidFill>
+                  <a:srgbClr val="000000"/>
+                </a:solidFill>
+                <a:latin typeface="Arial Unicode MS"/>
+                <a:ea typeface="Arial Unicode MS"/>
+                <a:cs typeface="Arial Unicode MS"/>
+              </a:rPr>
+              <a:t>。上機要選的那個情境「河內尖峰」，目標車速是</a:t>
+            </a:r>
+            <a:r>
+              <a:rPr sz="1150" b="1" lang="zh-TW" dirty="0">
+                <a:solidFill>
+                  <a:srgbClr val="000000"/>
+                </a:solidFill>
+                <a:latin typeface="Arial Unicode MS"/>
+                <a:ea typeface="Arial Unicode MS"/>
+                <a:cs typeface="Arial Unicode MS"/>
+              </a:rPr>
+              <a:t>四十</a:t>
+            </a:r>
+            <a:r>
+              <a:rPr sz="1150" lang="zh-TW" dirty="0">
+                <a:solidFill>
+                  <a:srgbClr val="000000"/>
+                </a:solidFill>
+                <a:latin typeface="Arial Unicode MS"/>
+                <a:ea typeface="Arial Unicode MS"/>
+                <a:cs typeface="Arial Unicode MS"/>
+              </a:rPr>
+              <a:t>，煞停距離十三點六公尺，所以射線長度的下限是</a:t>
+            </a:r>
+            <a:r>
+              <a:rPr sz="1150" b="1" lang="zh-TW" dirty="0">
+                <a:solidFill>
+                  <a:srgbClr val="000000"/>
+                </a:solidFill>
+                <a:latin typeface="Arial Unicode MS"/>
+                <a:ea typeface="Arial Unicode MS"/>
+                <a:cs typeface="Arial Unicode MS"/>
+              </a:rPr>
+              <a:t>十七公尺左右</a:t>
+            </a:r>
+            <a:r>
+              <a:rPr sz="1150" lang="zh-TW" dirty="0">
+                <a:solidFill>
+                  <a:srgbClr val="000000"/>
+                </a:solidFill>
+                <a:latin typeface="Arial Unicode MS"/>
+                <a:ea typeface="Arial Unicode MS"/>
+                <a:cs typeface="Arial Unicode MS"/>
+              </a:rPr>
+              <a:t>。實測是十八公尺以上就看不出差別，十六公尺以下才會掉——</a:t>
+            </a:r>
+            <a:r>
+              <a:rPr sz="1150" b="1" lang="zh-TW" dirty="0">
+                <a:solidFill>
+                  <a:srgbClr val="000000"/>
+                </a:solidFill>
+                <a:latin typeface="Arial Unicode MS"/>
+                <a:ea typeface="Arial Unicode MS"/>
+                <a:cs typeface="Arial Unicode MS"/>
+              </a:rPr>
+              <a:t>上機的時候不要把長度調到十七公尺以下，那是白調的。</a:t>
+            </a:r>
+            <a:r>
+              <a:rPr sz="1150" lang="zh-TW" dirty="0">
                 <a:solidFill>
                   <a:srgbClr val="000000"/>
                 </a:solidFill>
@@ -3681,41 +3747,41 @@
                 <a:spcPts val="0"/>
               </a:spcBef>
               <a:spcAft>
-                <a:spcPts val="200"/>
+                <a:spcPts val="192"/>
               </a:spcAft>
             </a:pPr>
             <a:r>
-              <a:rPr sz="1200" lang="zh-TW" dirty="0">
-                <a:solidFill>
-                  <a:srgbClr val="000000"/>
-                </a:solidFill>
-                <a:latin typeface="Arial Unicode MS"/>
-                <a:ea typeface="Arial Unicode MS"/>
-                <a:cs typeface="Arial Unicode MS"/>
-              </a:rPr>
-              <a:t>是。</a:t>
-            </a:r>
-            <a:r>
-              <a:rPr sz="1200" b="1" lang="zh-TW" dirty="0">
-                <a:solidFill>
-                  <a:srgbClr val="000000"/>
-                </a:solidFill>
-                <a:latin typeface="Arial Unicode MS"/>
-                <a:ea typeface="Arial Unicode MS"/>
-                <a:cs typeface="Arial Unicode MS"/>
-              </a:rPr>
-              <a:t>減速度由輪胎和路面決定，跟車速沒有關係。</a:t>
-            </a:r>
-            <a:r>
-              <a:rPr sz="1200" lang="zh-TW" dirty="0">
-                <a:solidFill>
-                  <a:srgbClr val="000000"/>
-                </a:solidFill>
-                <a:latin typeface="Arial Unicode MS"/>
-                <a:ea typeface="Arial Unicode MS"/>
-                <a:cs typeface="Arial Unicode MS"/>
-              </a:rPr>
-              <a:t>這正是為什麼煞車距離跟速度的平方成正比。
+              <a:rPr sz="1150" lang="zh-TW" dirty="0">
+                <a:solidFill>
+                  <a:srgbClr val="000000"/>
+                </a:solidFill>
+                <a:latin typeface="Arial Unicode MS"/>
+                <a:ea typeface="Arial Unicode MS"/>
+                <a:cs typeface="Arial Unicode MS"/>
+              </a:rPr>
+              <a:t>一定會有人問：</a:t>
+            </a:r>
+            <a:r>
+              <a:rPr sz="1150" b="1" lang="zh-TW" dirty="0">
+                <a:solidFill>
+                  <a:srgbClr val="000000"/>
+                </a:solidFill>
+                <a:latin typeface="Arial Unicode MS"/>
+                <a:ea typeface="Arial Unicode MS"/>
+                <a:cs typeface="Arial Unicode MS"/>
+              </a:rPr>
+              <a:t>六列的減速度都是六嗎？</a:t>
+            </a:r>
+            <a:r>
+              <a:rPr sz="1150" lang="zh-TW" dirty="0">
+                <a:solidFill>
+                  <a:srgbClr val="000000"/>
+                </a:solidFill>
+                <a:latin typeface="Arial Unicode MS"/>
+                <a:ea typeface="Arial Unicode MS"/>
+                <a:cs typeface="Arial Unicode MS"/>
+              </a:rPr>
+              <a:t>
 </a:t>
             </a:r>
           </a:p>
@@ -3725,11 +3791,55 @@
                 <a:spcPts val="0"/>
               </a:spcBef>
               <a:spcAft>
-                <a:spcPts val="200"/>
+                <a:spcPts val="192"/>
               </a:spcAft>
             </a:pPr>
             <a:r>
-              <a:rPr sz="1200" lang="zh-TW" dirty="0">
+              <a:rPr sz="1150" lang="zh-TW" dirty="0">
+                <a:solidFill>
+                  <a:srgbClr val="000000"/>
+                </a:solidFill>
+                <a:latin typeface="Arial Unicode MS"/>
+                <a:ea typeface="Arial Unicode MS"/>
+                <a:cs typeface="Arial Unicode MS"/>
+              </a:rPr>
+              <a:t>是。</a:t>
+            </a:r>
+            <a:r>
+              <a:rPr sz="1150" b="1" lang="zh-TW" dirty="0">
+                <a:solidFill>
+                  <a:srgbClr val="000000"/>
+                </a:solidFill>
+                <a:latin typeface="Arial Unicode MS"/>
+                <a:ea typeface="Arial Unicode MS"/>
+                <a:cs typeface="Arial Unicode MS"/>
+              </a:rPr>
+              <a:t>減速度由輪胎和路面決定，跟車速沒有關係。</a:t>
+            </a:r>
+            <a:r>
+              <a:rPr sz="1150" lang="zh-TW" dirty="0">
+                <a:solidFill>
+                  <a:srgbClr val="000000"/>
+                </a:solidFill>
+                <a:latin typeface="Arial Unicode MS"/>
+                <a:ea typeface="Arial Unicode MS"/>
+                <a:cs typeface="Arial Unicode MS"/>
+              </a:rPr>
+              <a:t>這正是為什麼煞車距離跟速度的平方成正比。
+</a:t>
+            </a:r>
+          </a:p>
+          <a:p>
+            <a:pPr algn="l" marL="0" indent="0">
+              <a:spcBef>
+                <a:spcPts val="0"/>
+              </a:spcBef>
+              <a:spcAft>
+                <a:spcPts val="192"/>
+              </a:spcAft>
+            </a:pPr>
+            <a:r>
+              <a:rPr sz="1150" lang="zh-TW" dirty="0">
                 <a:solidFill>
                   <a:srgbClr val="000000"/>
                 </a:solidFill>
@@ -3740,7 +3850,7 @@
               <a:t>最下面那句話留給第三章：真車的光達做到一百五十到三百公尺，是「剛好煞得住」的兩倍以上。</a:t>
             </a:r>
             <a:r>
-              <a:rPr sz="1200" b="1" lang="zh-TW" dirty="0">
+              <a:rPr sz="1150" b="1" lang="zh-TW" dirty="0">
                 <a:solidFill>
                   <a:srgbClr val="000000"/>
                 </a:solidFill>
@@ -20406,7 +20516,7 @@
       </p:nvGrpSpPr>
       <p:grpSpPr>
         <a:xfrm>
-          <a:off x="1337099" y="0"/>
+          <a:off x="1570700" y="0"/>
           <a:ext cx="1" cy="1"/>
           <a:chOff x="0" y="0"/>
           <a:chExt cx="0" cy="0"/>
@@ -20420,8 +20530,8 @@
         </p:nvSpPr>
         <p:spPr>
           <a:xfrm>
-            <a:off x="1692938" y="207034"/>
-            <a:ext cx="5758123" cy="595222"/>
+            <a:off x="1900843" y="192083"/>
+            <a:ext cx="5342314" cy="552239"/>
           </a:xfrm>
           <a:prstGeom prst="rect">
             <a:avLst/>
@@ -20440,7 +20550,7 @@
               <a:buNone/>
             </a:pPr>
             <a:r>
-              <a:rPr lang="en-US" sz="1560" b="1" dirty="0">
+              <a:rPr lang="en-US" sz="1440" b="1" dirty="0">
                 <a:solidFill>
                   <a:srgbClr val="0B1F3A"/>
                 </a:solidFill>
@@ -20448,9 +20558,9 @@
                 <a:ea typeface="Arial" pitchFamily="34" charset="-122"/>
                 <a:cs typeface="Arial" pitchFamily="34" charset="-120"/>
               </a:rPr>
-              <a:t>Năm tốc độ thường gặp, chiều dài tia phải ít nhất bao nhiêu</a:t>
-            </a:r>
-            <a:endParaRPr lang="en-US" sz="1560" dirty="0"/>
+              <a:t>Sáu tốc độ thường gặp, chiều dài tia phải ít nhất bao nhiêu</a:t>
+            </a:r>
+            <a:endParaRPr lang="en-US" sz="1440" dirty="0"/>
           </a:p>
           <a:p>
             <a:pPr indent="0" marL="0">
@@ -20460,7 +20570,7 @@
               <a:buNone/>
             </a:pPr>
             <a:r>
-              <a:rPr lang="en-US" sz="960" dirty="0">
+              <a:rPr lang="en-US" sz="890" dirty="0">
                 <a:solidFill>
                   <a:srgbClr val="5F7183"/>
                 </a:solidFill>
@@ -20468,9 +20578,9 @@
                 <a:ea typeface="微軟正黑體" pitchFamily="34" charset="-122"/>
                 <a:cs typeface="微軟正黑體" pitchFamily="34" charset="-120"/>
               </a:rPr>
-              <a:t>五個常見的車速，射線長度至少要多長</a:t>
-            </a:r>
-            <a:endParaRPr lang="en-US" sz="1560" dirty="0"/>
+              <a:t>六個常見的車速，射線長度至少要多長</a:t>
+            </a:r>
+            <a:endParaRPr lang="en-US" sz="1440" dirty="0"/>
           </a:p>
         </p:txBody>
       </p:sp>
@@ -20482,8 +20592,8 @@
         </p:nvSpPr>
         <p:spPr>
           <a:xfrm>
-            <a:off x="1692938" y="935635"/>
-            <a:ext cx="5758123" cy="504644"/>
+            <a:off x="1900843" y="868070"/>
+            <a:ext cx="5342314" cy="468203"/>
           </a:xfrm>
           <a:prstGeom prst="roundRect">
             <a:avLst>
@@ -20504,8 +20614,8 @@
         </p:nvSpPr>
         <p:spPr>
           <a:xfrm>
-            <a:off x="1796455" y="987393"/>
-            <a:ext cx="5551089" cy="401128"/>
+            <a:off x="1996885" y="916091"/>
+            <a:ext cx="5150231" cy="372161"/>
           </a:xfrm>
           <a:prstGeom prst="rect">
             <a:avLst/>
@@ -20524,7 +20634,7 @@
               <a:buNone/>
             </a:pPr>
             <a:r>
-              <a:rPr lang="en-US" sz="810" b="1" dirty="0">
+              <a:rPr lang="en-US" sz="750" b="1" dirty="0">
                 <a:solidFill>
                   <a:srgbClr val="007F72"/>
                 </a:solidFill>
@@ -20534,7 +20644,7 @@
               </a:rPr>
               <a:t>«Phanh» tính bằng công thức. «Tia tối thiểu» = phanh × 1,25 — mức dư môn này chọn, không phải quy định.</a:t>
             </a:r>
-            <a:endParaRPr lang="en-US" sz="810" dirty="0"/>
+            <a:endParaRPr lang="en-US" sz="750" dirty="0"/>
           </a:p>
           <a:p>
             <a:pPr indent="0" marL="0">
@@ -20544,7 +20654,7 @@
               <a:buNone/>
             </a:pPr>
             <a:r>
-              <a:rPr lang="en-US" sz="710" dirty="0">
+              <a:rPr lang="en-US" sz="660" dirty="0">
                 <a:solidFill>
                   <a:srgbClr val="007F72"/>
                 </a:solidFill>
@@ -20554,7 +20664,7 @@
               </a:rPr>
               <a:t>「煞停距離」用公式算。「射線至少」＝ 煞停距離 × 1.25——這是本課取的餘裕，不是法規規定。</a:t>
             </a:r>
-            <a:endParaRPr lang="en-US" sz="810" dirty="0"/>
+            <a:endParaRPr lang="en-US" sz="750" dirty="0"/>
           </a:p>
         </p:txBody>
       </p:sp>
@@ -20573,21 +20683,21 @@
           </p:nvPr>
         </p:nvGraphicFramePr>
         <p:xfrm>
-          <a:off x="1692938" y="1517917"/>
-          <a:ext cx="5758123" cy="646980"/>
+          <a:off x="1900843" y="1408304"/>
+          <a:ext cx="5342314" cy="600260"/>
         </p:xfrm>
         <a:graphic>
           <a:graphicData uri="http://schemas.openxmlformats.org/drawingml/2006/table">
             <a:tbl>
               <a:tblPr/>
               <a:tblGrid>
-                <a:gridCol w="646980"/>
-                <a:gridCol w="646980"/>
-                <a:gridCol w="711678"/>
-                <a:gridCol w="744027"/>
-                <a:gridCol w="3008458"/>
+                <a:gridCol w="600260"/>
+                <a:gridCol w="600260"/>
+                <a:gridCol w="660286"/>
+                <a:gridCol w="690299"/>
+                <a:gridCol w="2791209"/>
               </a:tblGrid>
-              <a:tr h="200564">
+              <a:tr h="186081">
                 <a:tc>
                   <a:txBody>
                     <a:bodyPr/>
@@ -20597,7 +20707,7 @@
                         <a:buNone/>
                       </a:pPr>
                       <a:r>
-                        <a:rPr lang="en-US" sz="670" b="1" dirty="0">
+                        <a:rPr lang="en-US" sz="620" b="1" dirty="0">
                           <a:solidFill>
                             <a:srgbClr val="FFFFFF"/>
                           </a:solidFill>
@@ -20607,14 +20717,14 @@
                         </a:rPr>
                         <a:t>Tốc độ</a:t>
                       </a:r>
-                      <a:endParaRPr lang="en-US" sz="850" dirty="0"/>
+                      <a:endParaRPr lang="en-US" sz="790" dirty="0"/>
                     </a:p>
                     <a:p>
                       <a:pPr algn="l" indent="0" marL="0">
                         <a:buNone/>
                       </a:pPr>
                       <a:r>
-                        <a:rPr lang="en-US" sz="570" dirty="0">
+                        <a:rPr lang="en-US" sz="530" dirty="0">
                           <a:solidFill>
                             <a:srgbClr val="CFE0EC"/>
                           </a:solidFill>
@@ -20624,7 +20734,7 @@
                         </a:rPr>
                         <a:t>車速</a:t>
                       </a:r>
-                      <a:endParaRPr lang="en-US" sz="850" dirty="0"/>
+                      <a:endParaRPr lang="en-US" sz="790" dirty="0"/>
                     </a:p>
                   </a:txBody>
                   <a:tcPr marL="63500" marR="63500" marT="38100" marB="38100" anchor="ctr">
@@ -20678,7 +20788,7 @@
                         <a:buNone/>
                       </a:pPr>
                       <a:r>
-                        <a:rPr lang="en-US" sz="670" b="1" dirty="0">
+                        <a:rPr lang="en-US" sz="620" b="1" dirty="0">
                           <a:solidFill>
                             <a:srgbClr val="FFFFFF"/>
                           </a:solidFill>
@@ -20688,14 +20798,14 @@
                         </a:rPr>
                         <a:t>m/s</a:t>
                       </a:r>
-                      <a:endParaRPr lang="en-US" sz="850" dirty="0"/>
+                      <a:endParaRPr lang="en-US" sz="790" dirty="0"/>
                     </a:p>
                     <a:p>
                       <a:pPr algn="l" indent="0" marL="0">
                         <a:buNone/>
                       </a:pPr>
                       <a:r>
-                        <a:rPr lang="en-US" sz="570" dirty="0">
+                        <a:rPr lang="en-US" sz="530" dirty="0">
                           <a:solidFill>
                             <a:srgbClr val="CFE0EC"/>
                           </a:solidFill>
@@ -20705,7 +20815,7 @@
                         </a:rPr>
                         <a:t>每秒公尺</a:t>
                       </a:r>
-                      <a:endParaRPr lang="en-US" sz="850" dirty="0"/>
+                      <a:endParaRPr lang="en-US" sz="790" dirty="0"/>
                     </a:p>
                   </a:txBody>
                   <a:tcPr marL="63500" marR="63500" marT="38100" marB="38100" anchor="ctr">
@@ -20759,7 +20869,7 @@
                         <a:buNone/>
                       </a:pPr>
                       <a:r>
-                        <a:rPr lang="en-US" sz="670" b="1" dirty="0">
+                        <a:rPr lang="en-US" sz="620" b="1" dirty="0">
                           <a:solidFill>
                             <a:srgbClr val="FFFFFF"/>
                           </a:solidFill>
@@ -20769,14 +20879,14 @@
                         </a:rPr>
                         <a:t>Phanh</a:t>
                       </a:r>
-                      <a:endParaRPr lang="en-US" sz="850" dirty="0"/>
+                      <a:endParaRPr lang="en-US" sz="790" dirty="0"/>
                     </a:p>
                     <a:p>
                       <a:pPr algn="l" indent="0" marL="0">
                         <a:buNone/>
                       </a:pPr>
                       <a:r>
-                        <a:rPr lang="en-US" sz="570" dirty="0">
+                        <a:rPr lang="en-US" sz="530" dirty="0">
                           <a:solidFill>
                             <a:srgbClr val="CFE0EC"/>
                           </a:solidFill>
@@ -20786,7 +20896,7 @@
                         </a:rPr>
                         <a:t>煞停距離</a:t>
                       </a:r>
-                      <a:endParaRPr lang="en-US" sz="850" dirty="0"/>
+                      <a:endParaRPr lang="en-US" sz="790" dirty="0"/>
                     </a:p>
                   </a:txBody>
                   <a:tcPr marL="63500" marR="63500" marT="38100" marB="38100" anchor="ctr">
@@ -20840,7 +20950,7 @@
                         <a:buNone/>
                       </a:pPr>
                       <a:r>
-                        <a:rPr lang="en-US" sz="670" b="1" dirty="0">
+                        <a:rPr lang="en-US" sz="620" b="1" dirty="0">
                           <a:solidFill>
                             <a:srgbClr val="FFFFFF"/>
                           </a:solidFill>
@@ -20850,14 +20960,14 @@
                         </a:rPr>
                         <a:t>Tia tối thiểu</a:t>
                       </a:r>
-                      <a:endParaRPr lang="en-US" sz="850" dirty="0"/>
+                      <a:endParaRPr lang="en-US" sz="790" dirty="0"/>
                     </a:p>
                     <a:p>
                       <a:pPr algn="l" indent="0" marL="0">
                         <a:buNone/>
                       </a:pPr>
                       <a:r>
-                        <a:rPr lang="en-US" sz="570" dirty="0">
+                        <a:rPr lang="en-US" sz="530" dirty="0">
                           <a:solidFill>
                             <a:srgbClr val="CFE0EC"/>
                           </a:solidFill>
@@ -20867,7 +20977,7 @@
                         </a:rPr>
                         <a:t>射線至少</a:t>
                       </a:r>
-                      <a:endParaRPr lang="en-US" sz="850" dirty="0"/>
+                      <a:endParaRPr lang="en-US" sz="790" dirty="0"/>
                     </a:p>
                   </a:txBody>
                   <a:tcPr marL="63500" marR="63500" marT="38100" marB="38100" anchor="ctr">
@@ -20921,7 +21031,7 @@
                         <a:buNone/>
                       </a:pPr>
                       <a:r>
-                        <a:rPr lang="en-US" sz="670" b="1" dirty="0">
+                        <a:rPr lang="en-US" sz="620" b="1" dirty="0">
                           <a:solidFill>
                             <a:srgbClr val="FFFFFF"/>
                           </a:solidFill>
@@ -20931,14 +21041,14 @@
                         </a:rPr>
                         <a:t>Ở đâu gặp tốc độ này</a:t>
                       </a:r>
-                      <a:endParaRPr lang="en-US" sz="850" dirty="0"/>
+                      <a:endParaRPr lang="en-US" sz="790" dirty="0"/>
                     </a:p>
                     <a:p>
                       <a:pPr algn="l" indent="0" marL="0">
                         <a:buNone/>
                       </a:pPr>
                       <a:r>
-                        <a:rPr lang="en-US" sz="570" dirty="0">
+                        <a:rPr lang="en-US" sz="530" dirty="0">
                           <a:solidFill>
                             <a:srgbClr val="CFE0EC"/>
                           </a:solidFill>
@@ -20948,7 +21058,7 @@
                         </a:rPr>
                         <a:t>什麼地方會開到這個速度</a:t>
                       </a:r>
-                      <a:endParaRPr lang="en-US" sz="850" dirty="0"/>
+                      <a:endParaRPr lang="en-US" sz="790" dirty="0"/>
                     </a:p>
                   </a:txBody>
                   <a:tcPr marL="63500" marR="63500" marT="38100" marB="38100" anchor="ctr">
@@ -20994,7 +21104,7 @@
                   </a:tcPr>
                 </a:tc>
               </a:tr>
-              <a:tr h="200564">
+              <a:tr h="186081">
                 <a:tc>
                   <a:txBody>
                     <a:bodyPr/>
@@ -21004,7 +21114,7 @@
                         <a:buNone/>
                       </a:pPr>
                       <a:r>
-                        <a:rPr lang="en-US" sz="670" b="1" dirty="0">
+                        <a:rPr lang="en-US" sz="620" b="1" dirty="0">
                           <a:solidFill>
                             <a:srgbClr val="0B1F3A"/>
                           </a:solidFill>
@@ -21014,14 +21124,14 @@
                         </a:rPr>
                         <a:t>30 km/h</a:t>
                       </a:r>
-                      <a:endParaRPr lang="en-US" sz="850" dirty="0"/>
+                      <a:endParaRPr lang="en-US" sz="790" dirty="0"/>
                     </a:p>
                     <a:p>
                       <a:pPr algn="l" indent="0" marL="0">
                         <a:buNone/>
                       </a:pPr>
                       <a:r>
-                        <a:rPr lang="en-US" sz="570" dirty="0">
+                        <a:rPr lang="en-US" sz="530" dirty="0">
                           <a:solidFill>
                             <a:srgbClr val="5F7183"/>
                           </a:solidFill>
@@ -21031,7 +21141,7 @@
                         </a:rPr>
                         <a:t>時速 30</a:t>
                       </a:r>
-                      <a:endParaRPr lang="en-US" sz="850" dirty="0"/>
+                      <a:endParaRPr lang="en-US" sz="790" dirty="0"/>
                     </a:p>
                   </a:txBody>
                   <a:tcPr marL="63500" marR="63500" marT="38100" marB="38100" anchor="ctr">
@@ -21082,7 +21192,7 @@
                         <a:buNone/>
                       </a:pPr>
                       <a:r>
-                        <a:rPr lang="en-US" sz="670" dirty="0">
+                        <a:rPr lang="en-US" sz="620" dirty="0">
                           <a:solidFill>
                             <a:srgbClr val="1A2733"/>
                           </a:solidFill>
@@ -21092,7 +21202,7 @@
                         </a:rPr>
                         <a:t>8,3</a:t>
                       </a:r>
-                      <a:endParaRPr lang="en-US" sz="850" dirty="0"/>
+                      <a:endParaRPr lang="en-US" sz="790" dirty="0"/>
                     </a:p>
                   </a:txBody>
                   <a:tcPr marL="63500" marR="63500" marT="38100" marB="38100" anchor="ctr">
@@ -21143,7 +21253,7 @@
                         <a:buNone/>
                       </a:pPr>
                       <a:r>
-                        <a:rPr lang="en-US" sz="670" dirty="0">
+                        <a:rPr lang="en-US" sz="620" dirty="0">
                           <a:solidFill>
                             <a:srgbClr val="1A2733"/>
                           </a:solidFill>
@@ -21153,7 +21263,7 @@
                         </a:rPr>
                         <a:t>8 m</a:t>
                       </a:r>
-                      <a:endParaRPr lang="en-US" sz="850" dirty="0"/>
+                      <a:endParaRPr lang="en-US" sz="790" dirty="0"/>
                     </a:p>
                   </a:txBody>
                   <a:tcPr marL="63500" marR="63500" marT="38100" marB="38100" anchor="ctr">
@@ -21204,7 +21314,7 @@
                         <a:buNone/>
                       </a:pPr>
                       <a:r>
-                        <a:rPr lang="en-US" sz="670" dirty="0">
+                        <a:rPr lang="en-US" sz="620" dirty="0">
                           <a:solidFill>
                             <a:srgbClr val="1A2733"/>
                           </a:solidFill>
@@ -21214,7 +21324,7 @@
                         </a:rPr>
                         <a:t>10 m</a:t>
                       </a:r>
-                      <a:endParaRPr lang="en-US" sz="850" dirty="0"/>
+                      <a:endParaRPr lang="en-US" sz="790" dirty="0"/>
                     </a:p>
                   </a:txBody>
                   <a:tcPr marL="63500" marR="63500" marT="38100" marB="38100" anchor="ctr">
@@ -21265,7 +21375,7 @@
                         <a:buNone/>
                       </a:pPr>
                       <a:r>
-                        <a:rPr lang="en-US" sz="670" dirty="0">
+                        <a:rPr lang="en-US" sz="620" dirty="0">
                           <a:solidFill>
                             <a:srgbClr val="1A2733"/>
                           </a:solidFill>
@@ -21275,14 +21385,14 @@
                         </a:rPr>
                         <a:t>Trong ngõ, khu dân cư, trường học</a:t>
                       </a:r>
-                      <a:endParaRPr lang="en-US" sz="850" dirty="0"/>
+                      <a:endParaRPr lang="en-US" sz="790" dirty="0"/>
                     </a:p>
                     <a:p>
                       <a:pPr algn="l" indent="0" marL="0">
                         <a:buNone/>
                       </a:pPr>
                       <a:r>
-                        <a:rPr lang="en-US" sz="570" dirty="0">
+                        <a:rPr lang="en-US" sz="530" dirty="0">
                           <a:solidFill>
                             <a:srgbClr val="5F7183"/>
                           </a:solidFill>
@@ -21292,7 +21402,7 @@
                         </a:rPr>
                         <a:t>巷弄、社區、學校周邊</a:t>
                       </a:r>
-                      <a:endParaRPr lang="en-US" sz="850" dirty="0"/>
+                      <a:endParaRPr lang="en-US" sz="790" dirty="0"/>
                     </a:p>
                   </a:txBody>
                   <a:tcPr marL="63500" marR="63500" marT="38100" marB="38100" anchor="ctr">
@@ -21335,7 +21445,7 @@
                   </a:tcPr>
                 </a:tc>
               </a:tr>
-              <a:tr h="200564">
+              <a:tr h="186081">
                 <a:tc>
                   <a:txBody>
                     <a:bodyPr/>
@@ -21345,7 +21455,7 @@
                         <a:buNone/>
                       </a:pPr>
                       <a:r>
-                        <a:rPr lang="en-US" sz="670" b="1" dirty="0">
+                        <a:rPr lang="en-US" sz="620" b="1" dirty="0">
                           <a:solidFill>
                             <a:srgbClr val="0B1F3A"/>
                           </a:solidFill>
@@ -21353,16 +21463,16 @@
                           <a:ea typeface="Arial" pitchFamily="34" charset="-122"/>
                           <a:cs typeface="Arial" pitchFamily="34" charset="-120"/>
                         </a:rPr>
-                        <a:t>50 km/h</a:t>
+                        <a:t>40 km/h</a:t>
                       </a:r>
-                      <a:endParaRPr lang="en-US" sz="850" dirty="0"/>
+                      <a:endParaRPr lang="en-US" sz="790" dirty="0"/>
                     </a:p>
                     <a:p>
                       <a:pPr algn="l" indent="0" marL="0">
                         <a:buNone/>
                       </a:pPr>
                       <a:r>
-                        <a:rPr lang="en-US" sz="570" dirty="0">
+                        <a:rPr lang="en-US" sz="530" dirty="0">
                           <a:solidFill>
                             <a:srgbClr val="5F7183"/>
                           </a:solidFill>
@@ -21370,9 +21480,9 @@
                           <a:ea typeface="微軟正黑體" pitchFamily="34" charset="-122"/>
                           <a:cs typeface="微軟正黑體" pitchFamily="34" charset="-120"/>
                         </a:rPr>
-                        <a:t>時速 50</a:t>
+                        <a:t>時速 40</a:t>
                       </a:r>
-                      <a:endParaRPr lang="en-US" sz="850" dirty="0"/>
+                      <a:endParaRPr lang="en-US" sz="790" dirty="0"/>
                     </a:p>
                   </a:txBody>
                   <a:tcPr marL="63500" marR="63500" marT="38100" marB="38100" anchor="ctr">
@@ -21423,7 +21533,7 @@
                         <a:buNone/>
                       </a:pPr>
                       <a:r>
-                        <a:rPr lang="en-US" sz="670" dirty="0">
+                        <a:rPr lang="en-US" sz="620" dirty="0">
                           <a:solidFill>
                             <a:srgbClr val="1A2733"/>
                           </a:solidFill>
@@ -21431,9 +21541,9 @@
                           <a:ea typeface="Arial" pitchFamily="34" charset="-122"/>
                           <a:cs typeface="Arial" pitchFamily="34" charset="-120"/>
                         </a:rPr>
-                        <a:t>13,9</a:t>
+                        <a:t>11,1</a:t>
                       </a:r>
-                      <a:endParaRPr lang="en-US" sz="850" dirty="0"/>
+                      <a:endParaRPr lang="en-US" sz="790" dirty="0"/>
                     </a:p>
                   </a:txBody>
                   <a:tcPr marL="63500" marR="63500" marT="38100" marB="38100" anchor="ctr">
@@ -21484,7 +21594,7 @@
                         <a:buNone/>
                       </a:pPr>
                       <a:r>
-                        <a:rPr lang="en-US" sz="670" dirty="0">
+                        <a:rPr lang="en-US" sz="620" dirty="0">
                           <a:solidFill>
                             <a:srgbClr val="1A2733"/>
                           </a:solidFill>
@@ -21492,9 +21602,9 @@
                           <a:ea typeface="Arial" pitchFamily="34" charset="-122"/>
                           <a:cs typeface="Arial" pitchFamily="34" charset="-120"/>
                         </a:rPr>
-                        <a:t>20 m</a:t>
+                        <a:t>13,6 m</a:t>
                       </a:r>
-                      <a:endParaRPr lang="en-US" sz="850" dirty="0"/>
+                      <a:endParaRPr lang="en-US" sz="790" dirty="0"/>
                     </a:p>
                   </a:txBody>
                   <a:tcPr marL="63500" marR="63500" marT="38100" marB="38100" anchor="ctr">
@@ -21545,7 +21655,7 @@
                         <a:buNone/>
                       </a:pPr>
                       <a:r>
-                        <a:rPr lang="en-US" sz="670" dirty="0">
+                        <a:rPr lang="en-US" sz="620" dirty="0">
                           <a:solidFill>
                             <a:srgbClr val="1A2733"/>
                           </a:solidFill>
@@ -21553,9 +21663,9 @@
                           <a:ea typeface="Arial" pitchFamily="34" charset="-122"/>
                           <a:cs typeface="Arial" pitchFamily="34" charset="-120"/>
                         </a:rPr>
-                        <a:t>25 m</a:t>
+                        <a:t>17 m</a:t>
                       </a:r>
-                      <a:endParaRPr lang="en-US" sz="850" dirty="0"/>
+                      <a:endParaRPr lang="en-US" sz="790" dirty="0"/>
                     </a:p>
                   </a:txBody>
                   <a:tcPr marL="63500" marR="63500" marT="38100" marB="38100" anchor="ctr">
@@ -21606,7 +21716,7 @@
                         <a:buNone/>
                       </a:pPr>
                       <a:r>
-                        <a:rPr lang="en-US" sz="670" dirty="0">
+                        <a:rPr lang="en-US" sz="620" dirty="0">
                           <a:solidFill>
                             <a:srgbClr val="1A2733"/>
                           </a:solidFill>
@@ -21614,16 +21724,16 @@
                           <a:ea typeface="Arial" pitchFamily="34" charset="-122"/>
                           <a:cs typeface="Arial" pitchFamily="34" charset="-120"/>
                         </a:rPr>
-                        <a:t>Đường phố bình thường — tốc độ của bài tập hôm nay</a:t>
+                        <a:t>«Hà Nội cao điểm» — bài thực hành tiết 3</a:t>
                       </a:r>
-                      <a:endParaRPr lang="en-US" sz="850" dirty="0"/>
+                      <a:endParaRPr lang="en-US" sz="790" dirty="0"/>
                     </a:p>
                     <a:p>
                       <a:pPr algn="l" indent="0" marL="0">
                         <a:buNone/>
                       </a:pPr>
                       <a:r>
-                        <a:rPr lang="en-US" sz="570" dirty="0">
+                        <a:rPr lang="en-US" sz="530" dirty="0">
                           <a:solidFill>
                             <a:srgbClr val="5F7183"/>
                           </a:solidFill>
@@ -21631,9 +21741,9 @@
                           <a:ea typeface="微軟正黑體" pitchFamily="34" charset="-122"/>
                           <a:cs typeface="微軟正黑體" pitchFamily="34" charset="-120"/>
                         </a:rPr>
-                        <a:t>一般市區道路——今天上機用的就是這個</a:t>
+                        <a:t>「河內尖峰」——第 3 節上機就是這個</a:t>
                       </a:r>
-                      <a:endParaRPr lang="en-US" sz="850" dirty="0"/>
+                      <a:endParaRPr lang="en-US" sz="790" dirty="0"/>
                     </a:p>
                   </a:txBody>
                   <a:tcPr marL="63500" marR="63500" marT="38100" marB="38100" anchor="ctr">
@@ -21676,7 +21786,7 @@
                   </a:tcPr>
                 </a:tc>
               </a:tr>
-              <a:tr h="200564">
+              <a:tr h="186081">
                 <a:tc>
                   <a:txBody>
                     <a:bodyPr/>
@@ -21686,7 +21796,7 @@
                         <a:buNone/>
                       </a:pPr>
                       <a:r>
-                        <a:rPr lang="en-US" sz="670" b="1" dirty="0">
+                        <a:rPr lang="en-US" sz="620" b="1" dirty="0">
                           <a:solidFill>
                             <a:srgbClr val="0B1F3A"/>
                           </a:solidFill>
@@ -21694,16 +21804,16 @@
                           <a:ea typeface="Arial" pitchFamily="34" charset="-122"/>
                           <a:cs typeface="Arial" pitchFamily="34" charset="-120"/>
                         </a:rPr>
-                        <a:t>60 km/h</a:t>
+                        <a:t>50 km/h</a:t>
                       </a:r>
-                      <a:endParaRPr lang="en-US" sz="850" dirty="0"/>
+                      <a:endParaRPr lang="en-US" sz="790" dirty="0"/>
                     </a:p>
                     <a:p>
                       <a:pPr algn="l" indent="0" marL="0">
                         <a:buNone/>
                       </a:pPr>
                       <a:r>
-                        <a:rPr lang="en-US" sz="570" dirty="0">
+                        <a:rPr lang="en-US" sz="530" dirty="0">
                           <a:solidFill>
                             <a:srgbClr val="5F7183"/>
                           </a:solidFill>
@@ -21711,9 +21821,9 @@
                           <a:ea typeface="微軟正黑體" pitchFamily="34" charset="-122"/>
                           <a:cs typeface="微軟正黑體" pitchFamily="34" charset="-120"/>
                         </a:rPr>
-                        <a:t>時速 60</a:t>
+                        <a:t>時速 50</a:t>
                       </a:r>
-                      <a:endParaRPr lang="en-US" sz="850" dirty="0"/>
+                      <a:endParaRPr lang="en-US" sz="790" dirty="0"/>
                     </a:p>
                   </a:txBody>
                   <a:tcPr marL="63500" marR="63500" marT="38100" marB="38100" anchor="ctr">
@@ -21764,7 +21874,7 @@
                         <a:buNone/>
                       </a:pPr>
                       <a:r>
-                        <a:rPr lang="en-US" sz="670" dirty="0">
+                        <a:rPr lang="en-US" sz="620" dirty="0">
                           <a:solidFill>
                             <a:srgbClr val="1A2733"/>
                           </a:solidFill>
@@ -21772,9 +21882,9 @@
                           <a:ea typeface="Arial" pitchFamily="34" charset="-122"/>
                           <a:cs typeface="Arial" pitchFamily="34" charset="-120"/>
                         </a:rPr>
-                        <a:t>16,7</a:t>
+                        <a:t>13,9</a:t>
                       </a:r>
-                      <a:endParaRPr lang="en-US" sz="850" dirty="0"/>
+                      <a:endParaRPr lang="en-US" sz="790" dirty="0"/>
                     </a:p>
                   </a:txBody>
                   <a:tcPr marL="63500" marR="63500" marT="38100" marB="38100" anchor="ctr">
@@ -21825,7 +21935,7 @@
                         <a:buNone/>
                       </a:pPr>
                       <a:r>
-                        <a:rPr lang="en-US" sz="670" dirty="0">
+                        <a:rPr lang="en-US" sz="620" dirty="0">
                           <a:solidFill>
                             <a:srgbClr val="1A2733"/>
                           </a:solidFill>
@@ -21833,9 +21943,9 @@
                           <a:ea typeface="Arial" pitchFamily="34" charset="-122"/>
                           <a:cs typeface="Arial" pitchFamily="34" charset="-120"/>
                         </a:rPr>
-                        <a:t>28 m</a:t>
+                        <a:t>20 m</a:t>
                       </a:r>
-                      <a:endParaRPr lang="en-US" sz="850" dirty="0"/>
+                      <a:endParaRPr lang="en-US" sz="790" dirty="0"/>
                     </a:p>
                   </a:txBody>
                   <a:tcPr marL="63500" marR="63500" marT="38100" marB="38100" anchor="ctr">
@@ -21886,7 +21996,7 @@
                         <a:buNone/>
                       </a:pPr>
                       <a:r>
-                        <a:rPr lang="en-US" sz="670" dirty="0">
+                        <a:rPr lang="en-US" sz="620" dirty="0">
                           <a:solidFill>
                             <a:srgbClr val="1A2733"/>
                           </a:solidFill>
@@ -21894,9 +22004,9 @@
                           <a:ea typeface="Arial" pitchFamily="34" charset="-122"/>
                           <a:cs typeface="Arial" pitchFamily="34" charset="-120"/>
                         </a:rPr>
-                        <a:t>35 m</a:t>
+                        <a:t>25 m</a:t>
                       </a:r>
-                      <a:endParaRPr lang="en-US" sz="850" dirty="0"/>
+                      <a:endParaRPr lang="en-US" sz="790" dirty="0"/>
                     </a:p>
                   </a:txBody>
                   <a:tcPr marL="63500" marR="63500" marT="38100" marB="38100" anchor="ctr">
@@ -21947,7 +22057,7 @@
                         <a:buNone/>
                       </a:pPr>
                       <a:r>
-                        <a:rPr lang="en-US" sz="670" dirty="0">
+                        <a:rPr lang="en-US" sz="620" dirty="0">
                           <a:solidFill>
                             <a:srgbClr val="1A2733"/>
                           </a:solidFill>
@@ -21955,16 +22065,16 @@
                           <a:ea typeface="Arial" pitchFamily="34" charset="-122"/>
                           <a:cs typeface="Arial" pitchFamily="34" charset="-120"/>
                         </a:rPr>
-                        <a:t>Đường lớn, đường vành đai</a:t>
+                        <a:t>Đường phố bình thường — mặc định khi mở mô phỏng</a:t>
                       </a:r>
-                      <a:endParaRPr lang="en-US" sz="850" dirty="0"/>
+                      <a:endParaRPr lang="en-US" sz="790" dirty="0"/>
                     </a:p>
                     <a:p>
                       <a:pPr algn="l" indent="0" marL="0">
                         <a:buNone/>
                       </a:pPr>
                       <a:r>
-                        <a:rPr lang="en-US" sz="570" dirty="0">
+                        <a:rPr lang="en-US" sz="530" dirty="0">
                           <a:solidFill>
                             <a:srgbClr val="5F7183"/>
                           </a:solidFill>
@@ -21972,9 +22082,9 @@
                           <a:ea typeface="微軟正黑體" pitchFamily="34" charset="-122"/>
                           <a:cs typeface="微軟正黑體" pitchFamily="34" charset="-120"/>
                         </a:rPr>
-                        <a:t>大馬路、外環道</a:t>
+                        <a:t>一般市區道路——模擬器剛打開時的預設</a:t>
                       </a:r>
-                      <a:endParaRPr lang="en-US" sz="850" dirty="0"/>
+                      <a:endParaRPr lang="en-US" sz="790" dirty="0"/>
                     </a:p>
                   </a:txBody>
                   <a:tcPr marL="63500" marR="63500" marT="38100" marB="38100" anchor="ctr">
@@ -22017,7 +22127,7 @@
                   </a:tcPr>
                 </a:tc>
               </a:tr>
-              <a:tr h="200564">
+              <a:tr h="186081">
                 <a:tc>
                   <a:txBody>
                     <a:bodyPr/>
@@ -22027,7 +22137,7 @@
                         <a:buNone/>
                       </a:pPr>
                       <a:r>
-                        <a:rPr lang="en-US" sz="670" b="1" dirty="0">
+                        <a:rPr lang="en-US" sz="620" b="1" dirty="0">
                           <a:solidFill>
                             <a:srgbClr val="0B1F3A"/>
                           </a:solidFill>
@@ -22035,16 +22145,16 @@
                           <a:ea typeface="Arial" pitchFamily="34" charset="-122"/>
                           <a:cs typeface="Arial" pitchFamily="34" charset="-120"/>
                         </a:rPr>
-                        <a:t>80 km/h</a:t>
+                        <a:t>60 km/h</a:t>
                       </a:r>
-                      <a:endParaRPr lang="en-US" sz="850" dirty="0"/>
+                      <a:endParaRPr lang="en-US" sz="790" dirty="0"/>
                     </a:p>
                     <a:p>
                       <a:pPr algn="l" indent="0" marL="0">
                         <a:buNone/>
                       </a:pPr>
                       <a:r>
-                        <a:rPr lang="en-US" sz="570" dirty="0">
+                        <a:rPr lang="en-US" sz="530" dirty="0">
                           <a:solidFill>
                             <a:srgbClr val="5F7183"/>
                           </a:solidFill>
@@ -22052,9 +22162,9 @@
                           <a:ea typeface="微軟正黑體" pitchFamily="34" charset="-122"/>
                           <a:cs typeface="微軟正黑體" pitchFamily="34" charset="-120"/>
                         </a:rPr>
-                        <a:t>時速 80</a:t>
+                        <a:t>時速 60</a:t>
                       </a:r>
-                      <a:endParaRPr lang="en-US" sz="850" dirty="0"/>
+                      <a:endParaRPr lang="en-US" sz="790" dirty="0"/>
                     </a:p>
                   </a:txBody>
                   <a:tcPr marL="63500" marR="63500" marT="38100" marB="38100" anchor="ctr">
@@ -22105,7 +22215,7 @@
                         <a:buNone/>
                       </a:pPr>
                       <a:r>
-                        <a:rPr lang="en-US" sz="670" dirty="0">
+                        <a:rPr lang="en-US" sz="620" dirty="0">
                           <a:solidFill>
                             <a:srgbClr val="1A2733"/>
                           </a:solidFill>
@@ -22113,9 +22223,9 @@
                           <a:ea typeface="Arial" pitchFamily="34" charset="-122"/>
                           <a:cs typeface="Arial" pitchFamily="34" charset="-120"/>
                         </a:rPr>
-                        <a:t>22,2</a:t>
+                        <a:t>16,7</a:t>
                       </a:r>
-                      <a:endParaRPr lang="en-US" sz="850" dirty="0"/>
+                      <a:endParaRPr lang="en-US" sz="790" dirty="0"/>
                     </a:p>
                   </a:txBody>
                   <a:tcPr marL="63500" marR="63500" marT="38100" marB="38100" anchor="ctr">
@@ -22166,7 +22276,7 @@
                         <a:buNone/>
                       </a:pPr>
                       <a:r>
-                        <a:rPr lang="en-US" sz="670" dirty="0">
+                        <a:rPr lang="en-US" sz="620" dirty="0">
                           <a:solidFill>
                             <a:srgbClr val="1A2733"/>
                           </a:solidFill>
@@ -22174,9 +22284,9 @@
                           <a:ea typeface="Arial" pitchFamily="34" charset="-122"/>
                           <a:cs typeface="Arial" pitchFamily="34" charset="-120"/>
                         </a:rPr>
-                        <a:t>48 m</a:t>
+                        <a:t>28 m</a:t>
                       </a:r>
-                      <a:endParaRPr lang="en-US" sz="850" dirty="0"/>
+                      <a:endParaRPr lang="en-US" sz="790" dirty="0"/>
                     </a:p>
                   </a:txBody>
                   <a:tcPr marL="63500" marR="63500" marT="38100" marB="38100" anchor="ctr">
@@ -22227,7 +22337,7 @@
                         <a:buNone/>
                       </a:pPr>
                       <a:r>
-                        <a:rPr lang="en-US" sz="670" dirty="0">
+                        <a:rPr lang="en-US" sz="620" dirty="0">
                           <a:solidFill>
                             <a:srgbClr val="1A2733"/>
                           </a:solidFill>
@@ -22235,9 +22345,9 @@
                           <a:ea typeface="Arial" pitchFamily="34" charset="-122"/>
                           <a:cs typeface="Arial" pitchFamily="34" charset="-120"/>
                         </a:rPr>
-                        <a:t>60 m</a:t>
+                        <a:t>35 m</a:t>
                       </a:r>
-                      <a:endParaRPr lang="en-US" sz="850" dirty="0"/>
+                      <a:endParaRPr lang="en-US" sz="790" dirty="0"/>
                     </a:p>
                   </a:txBody>
                   <a:tcPr marL="63500" marR="63500" marT="38100" marB="38100" anchor="ctr">
@@ -22288,7 +22398,7 @@
                         <a:buNone/>
                       </a:pPr>
                       <a:r>
-                        <a:rPr lang="en-US" sz="670" dirty="0">
+                        <a:rPr lang="en-US" sz="620" dirty="0">
                           <a:solidFill>
                             <a:srgbClr val="1A2733"/>
                           </a:solidFill>
@@ -22296,16 +22406,16 @@
                           <a:ea typeface="Arial" pitchFamily="34" charset="-122"/>
                           <a:cs typeface="Arial" pitchFamily="34" charset="-120"/>
                         </a:rPr>
-                        <a:t>Đường cao tốc chậm</a:t>
+                        <a:t>Đường lớn, đường vành đai</a:t>
                       </a:r>
-                      <a:endParaRPr lang="en-US" sz="850" dirty="0"/>
+                      <a:endParaRPr lang="en-US" sz="790" dirty="0"/>
                     </a:p>
                     <a:p>
                       <a:pPr algn="l" indent="0" marL="0">
                         <a:buNone/>
                       </a:pPr>
                       <a:r>
-                        <a:rPr lang="en-US" sz="570" dirty="0">
+                        <a:rPr lang="en-US" sz="530" dirty="0">
                           <a:solidFill>
                             <a:srgbClr val="5F7183"/>
                           </a:solidFill>
@@ -22313,9 +22423,9 @@
                           <a:ea typeface="微軟正黑體" pitchFamily="34" charset="-122"/>
                           <a:cs typeface="微軟正黑體" pitchFamily="34" charset="-120"/>
                         </a:rPr>
-                        <a:t>快速道路</a:t>
+                        <a:t>大馬路、外環道</a:t>
                       </a:r>
-                      <a:endParaRPr lang="en-US" sz="850" dirty="0"/>
+                      <a:endParaRPr lang="en-US" sz="790" dirty="0"/>
                     </a:p>
                   </a:txBody>
                   <a:tcPr marL="63500" marR="63500" marT="38100" marB="38100" anchor="ctr">
@@ -22358,7 +22468,7 @@
                   </a:tcPr>
                 </a:tc>
               </a:tr>
-              <a:tr h="200564">
+              <a:tr h="186081">
                 <a:tc>
                   <a:txBody>
                     <a:bodyPr/>
@@ -22368,7 +22478,7 @@
                         <a:buNone/>
                       </a:pPr>
                       <a:r>
-                        <a:rPr lang="en-US" sz="670" b="1" dirty="0">
+                        <a:rPr lang="en-US" sz="620" b="1" dirty="0">
                           <a:solidFill>
                             <a:srgbClr val="0B1F3A"/>
                           </a:solidFill>
@@ -22376,16 +22486,16 @@
                           <a:ea typeface="Arial" pitchFamily="34" charset="-122"/>
                           <a:cs typeface="Arial" pitchFamily="34" charset="-120"/>
                         </a:rPr>
-                        <a:t>100 km/h</a:t>
+                        <a:t>80 km/h</a:t>
                       </a:r>
-                      <a:endParaRPr lang="en-US" sz="850" dirty="0"/>
+                      <a:endParaRPr lang="en-US" sz="790" dirty="0"/>
                     </a:p>
                     <a:p>
                       <a:pPr algn="l" indent="0" marL="0">
                         <a:buNone/>
                       </a:pPr>
                       <a:r>
-                        <a:rPr lang="en-US" sz="570" dirty="0">
+                        <a:rPr lang="en-US" sz="530" dirty="0">
                           <a:solidFill>
                             <a:srgbClr val="5F7183"/>
                           </a:solidFill>
@@ -22393,9 +22503,9 @@
                           <a:ea typeface="微軟正黑體" pitchFamily="34" charset="-122"/>
                           <a:cs typeface="微軟正黑體" pitchFamily="34" charset="-120"/>
                         </a:rPr>
-                        <a:t>時速 100</a:t>
+                        <a:t>時速 80</a:t>
                       </a:r>
-                      <a:endParaRPr lang="en-US" sz="850" dirty="0"/>
+                      <a:endParaRPr lang="en-US" sz="790" dirty="0"/>
                     </a:p>
                   </a:txBody>
                   <a:tcPr marL="63500" marR="63500" marT="38100" marB="38100" anchor="ctr">
@@ -22446,7 +22556,7 @@
                         <a:buNone/>
                       </a:pPr>
                       <a:r>
-                        <a:rPr lang="en-US" sz="670" dirty="0">
+                        <a:rPr lang="en-US" sz="620" dirty="0">
                           <a:solidFill>
                             <a:srgbClr val="1A2733"/>
                           </a:solidFill>
@@ -22454,9 +22564,9 @@
                           <a:ea typeface="Arial" pitchFamily="34" charset="-122"/>
                           <a:cs typeface="Arial" pitchFamily="34" charset="-120"/>
                         </a:rPr>
-                        <a:t>27,8</a:t>
+                        <a:t>22,2</a:t>
                       </a:r>
-                      <a:endParaRPr lang="en-US" sz="850" dirty="0"/>
+                      <a:endParaRPr lang="en-US" sz="790" dirty="0"/>
                     </a:p>
                   </a:txBody>
                   <a:tcPr marL="63500" marR="63500" marT="38100" marB="38100" anchor="ctr">
@@ -22507,7 +22617,7 @@
                         <a:buNone/>
                       </a:pPr>
                       <a:r>
-                        <a:rPr lang="en-US" sz="670" dirty="0">
+                        <a:rPr lang="en-US" sz="620" dirty="0">
                           <a:solidFill>
                             <a:srgbClr val="1A2733"/>
                           </a:solidFill>
@@ -22515,9 +22625,9 @@
                           <a:ea typeface="Arial" pitchFamily="34" charset="-122"/>
                           <a:cs typeface="Arial" pitchFamily="34" charset="-120"/>
                         </a:rPr>
-                        <a:t>73 m</a:t>
+                        <a:t>48 m</a:t>
                       </a:r>
-                      <a:endParaRPr lang="en-US" sz="850" dirty="0"/>
+                      <a:endParaRPr lang="en-US" sz="790" dirty="0"/>
                     </a:p>
                   </a:txBody>
                   <a:tcPr marL="63500" marR="63500" marT="38100" marB="38100" anchor="ctr">
@@ -22568,7 +22678,7 @@
                         <a:buNone/>
                       </a:pPr>
                       <a:r>
-                        <a:rPr lang="en-US" sz="670" dirty="0">
+                        <a:rPr lang="en-US" sz="620" dirty="0">
                           <a:solidFill>
                             <a:srgbClr val="1A2733"/>
                           </a:solidFill>
@@ -22576,9 +22686,9 @@
                           <a:ea typeface="Arial" pitchFamily="34" charset="-122"/>
                           <a:cs typeface="Arial" pitchFamily="34" charset="-120"/>
                         </a:rPr>
-                        <a:t>90 m</a:t>
+                        <a:t>60 m</a:t>
                       </a:r>
-                      <a:endParaRPr lang="en-US" sz="850" dirty="0"/>
+                      <a:endParaRPr lang="en-US" sz="790" dirty="0"/>
                     </a:p>
                   </a:txBody>
                   <a:tcPr marL="63500" marR="63500" marT="38100" marB="38100" anchor="ctr">
@@ -22629,7 +22739,348 @@
                         <a:buNone/>
                       </a:pPr>
                       <a:r>
-                        <a:rPr lang="en-US" sz="670" dirty="0">
+                        <a:rPr lang="en-US" sz="620" dirty="0">
+                          <a:solidFill>
+                            <a:srgbClr val="1A2733"/>
+                          </a:solidFill>
+                          <a:latin typeface="Arial" pitchFamily="34" charset="0"/>
+                          <a:ea typeface="Arial" pitchFamily="34" charset="-122"/>
+                          <a:cs typeface="Arial" pitchFamily="34" charset="-120"/>
+                        </a:rPr>
+                        <a:t>Đường cao tốc chậm</a:t>
+                      </a:r>
+                      <a:endParaRPr lang="en-US" sz="790" dirty="0"/>
+                    </a:p>
+                    <a:p>
+                      <a:pPr algn="l" indent="0" marL="0">
+                        <a:buNone/>
+                      </a:pPr>
+                      <a:r>
+                        <a:rPr lang="en-US" sz="530" dirty="0">
+                          <a:solidFill>
+                            <a:srgbClr val="5F7183"/>
+                          </a:solidFill>
+                          <a:latin typeface="微軟正黑體" pitchFamily="34" charset="0"/>
+                          <a:ea typeface="微軟正黑體" pitchFamily="34" charset="-122"/>
+                          <a:cs typeface="微軟正黑體" pitchFamily="34" charset="-120"/>
+                        </a:rPr>
+                        <a:t>快速道路</a:t>
+                      </a:r>
+                      <a:endParaRPr lang="en-US" sz="790" dirty="0"/>
+                    </a:p>
+                  </a:txBody>
+                  <a:tcPr marL="63500" marR="63500" marT="38100" marB="38100" anchor="ctr">
+                    <a:lnL w="6350" cap="flat" cmpd="sng" algn="ctr">
+                      <a:solidFill>
+                        <a:srgbClr val="DBE3EA"/>
+                      </a:solidFill>
+                      <a:prstDash val="solid"/>
+                      <a:round/>
+                      <a:headEnd type="none" w="med" len="med"/>
+                      <a:tailEnd type="none" w="med" len="med"/>
+                    </a:lnL>
+                    <a:lnR w="6350" cap="flat" cmpd="sng" algn="ctr">
+                      <a:solidFill>
+                        <a:srgbClr val="DBE3EA"/>
+                      </a:solidFill>
+                      <a:prstDash val="solid"/>
+                      <a:round/>
+                      <a:headEnd type="none" w="med" len="med"/>
+                      <a:tailEnd type="none" w="med" len="med"/>
+                    </a:lnR>
+                    <a:lnT w="6350" cap="flat" cmpd="sng" algn="ctr">
+                      <a:solidFill>
+                        <a:srgbClr val="DBE3EA"/>
+                      </a:solidFill>
+                      <a:prstDash val="solid"/>
+                      <a:round/>
+                      <a:headEnd type="none" w="med" len="med"/>
+                      <a:tailEnd type="none" w="med" len="med"/>
+                    </a:lnT>
+                    <a:lnB w="6350" cap="flat" cmpd="sng" algn="ctr">
+                      <a:solidFill>
+                        <a:srgbClr val="DBE3EA"/>
+                      </a:solidFill>
+                      <a:prstDash val="solid"/>
+                      <a:round/>
+                      <a:headEnd type="none" w="med" len="med"/>
+                      <a:tailEnd type="none" w="med" len="med"/>
+                    </a:lnB>
+                  </a:tcPr>
+                </a:tc>
+              </a:tr>
+              <a:tr h="186081">
+                <a:tc>
+                  <a:txBody>
+                    <a:bodyPr/>
+                    <a:lstStyle/>
+                    <a:p>
+                      <a:pPr algn="l" indent="0" marL="0">
+                        <a:buNone/>
+                      </a:pPr>
+                      <a:r>
+                        <a:rPr lang="en-US" sz="620" b="1" dirty="0">
+                          <a:solidFill>
+                            <a:srgbClr val="0B1F3A"/>
+                          </a:solidFill>
+                          <a:latin typeface="Arial" pitchFamily="34" charset="0"/>
+                          <a:ea typeface="Arial" pitchFamily="34" charset="-122"/>
+                          <a:cs typeface="Arial" pitchFamily="34" charset="-120"/>
+                        </a:rPr>
+                        <a:t>100 km/h</a:t>
+                      </a:r>
+                      <a:endParaRPr lang="en-US" sz="790" dirty="0"/>
+                    </a:p>
+                    <a:p>
+                      <a:pPr algn="l" indent="0" marL="0">
+                        <a:buNone/>
+                      </a:pPr>
+                      <a:r>
+                        <a:rPr lang="en-US" sz="530" dirty="0">
+                          <a:solidFill>
+                            <a:srgbClr val="5F7183"/>
+                          </a:solidFill>
+                          <a:latin typeface="微軟正黑體" pitchFamily="34" charset="0"/>
+                          <a:ea typeface="微軟正黑體" pitchFamily="34" charset="-122"/>
+                          <a:cs typeface="微軟正黑體" pitchFamily="34" charset="-120"/>
+                        </a:rPr>
+                        <a:t>時速 100</a:t>
+                      </a:r>
+                      <a:endParaRPr lang="en-US" sz="790" dirty="0"/>
+                    </a:p>
+                  </a:txBody>
+                  <a:tcPr marL="63500" marR="63500" marT="38100" marB="38100" anchor="ctr">
+                    <a:lnL w="6350" cap="flat" cmpd="sng" algn="ctr">
+                      <a:solidFill>
+                        <a:srgbClr val="DBE3EA"/>
+                      </a:solidFill>
+                      <a:prstDash val="solid"/>
+                      <a:round/>
+                      <a:headEnd type="none" w="med" len="med"/>
+                      <a:tailEnd type="none" w="med" len="med"/>
+                    </a:lnL>
+                    <a:lnR w="6350" cap="flat" cmpd="sng" algn="ctr">
+                      <a:solidFill>
+                        <a:srgbClr val="DBE3EA"/>
+                      </a:solidFill>
+                      <a:prstDash val="solid"/>
+                      <a:round/>
+                      <a:headEnd type="none" w="med" len="med"/>
+                      <a:tailEnd type="none" w="med" len="med"/>
+                    </a:lnR>
+                    <a:lnT w="6350" cap="flat" cmpd="sng" algn="ctr">
+                      <a:solidFill>
+                        <a:srgbClr val="DBE3EA"/>
+                      </a:solidFill>
+                      <a:prstDash val="solid"/>
+                      <a:round/>
+                      <a:headEnd type="none" w="med" len="med"/>
+                      <a:tailEnd type="none" w="med" len="med"/>
+                    </a:lnT>
+                    <a:lnB w="6350" cap="flat" cmpd="sng" algn="ctr">
+                      <a:solidFill>
+                        <a:srgbClr val="DBE3EA"/>
+                      </a:solidFill>
+                      <a:prstDash val="solid"/>
+                      <a:round/>
+                      <a:headEnd type="none" w="med" len="med"/>
+                      <a:tailEnd type="none" w="med" len="med"/>
+                    </a:lnB>
+                  </a:tcPr>
+                </a:tc>
+                <a:tc>
+                  <a:txBody>
+                    <a:bodyPr/>
+                    <a:lstStyle/>
+                    <a:p>
+                      <a:pPr algn="l" indent="0" marL="0">
+                        <a:buNone/>
+                      </a:pPr>
+                      <a:r>
+                        <a:rPr lang="en-US" sz="620" dirty="0">
+                          <a:solidFill>
+                            <a:srgbClr val="1A2733"/>
+                          </a:solidFill>
+                          <a:latin typeface="Arial" pitchFamily="34" charset="0"/>
+                          <a:ea typeface="Arial" pitchFamily="34" charset="-122"/>
+                          <a:cs typeface="Arial" pitchFamily="34" charset="-120"/>
+                        </a:rPr>
+                        <a:t>27,8</a:t>
+                      </a:r>
+                      <a:endParaRPr lang="en-US" sz="790" dirty="0"/>
+                    </a:p>
+                  </a:txBody>
+                  <a:tcPr marL="63500" marR="63500" marT="38100" marB="38100" anchor="ctr">
+                    <a:lnL w="6350" cap="flat" cmpd="sng" algn="ctr">
+                      <a:solidFill>
+                        <a:srgbClr val="DBE3EA"/>
+                      </a:solidFill>
+                      <a:prstDash val="solid"/>
+                      <a:round/>
+                      <a:headEnd type="none" w="med" len="med"/>
+                      <a:tailEnd type="none" w="med" len="med"/>
+                    </a:lnL>
+                    <a:lnR w="6350" cap="flat" cmpd="sng" algn="ctr">
+                      <a:solidFill>
+                        <a:srgbClr val="DBE3EA"/>
+                      </a:solidFill>
+                      <a:prstDash val="solid"/>
+                      <a:round/>
+                      <a:headEnd type="none" w="med" len="med"/>
+                      <a:tailEnd type="none" w="med" len="med"/>
+                    </a:lnR>
+                    <a:lnT w="6350" cap="flat" cmpd="sng" algn="ctr">
+                      <a:solidFill>
+                        <a:srgbClr val="DBE3EA"/>
+                      </a:solidFill>
+                      <a:prstDash val="solid"/>
+                      <a:round/>
+                      <a:headEnd type="none" w="med" len="med"/>
+                      <a:tailEnd type="none" w="med" len="med"/>
+                    </a:lnT>
+                    <a:lnB w="6350" cap="flat" cmpd="sng" algn="ctr">
+                      <a:solidFill>
+                        <a:srgbClr val="DBE3EA"/>
+                      </a:solidFill>
+                      <a:prstDash val="solid"/>
+                      <a:round/>
+                      <a:headEnd type="none" w="med" len="med"/>
+                      <a:tailEnd type="none" w="med" len="med"/>
+                    </a:lnB>
+                  </a:tcPr>
+                </a:tc>
+                <a:tc>
+                  <a:txBody>
+                    <a:bodyPr/>
+                    <a:lstStyle/>
+                    <a:p>
+                      <a:pPr algn="l" indent="0" marL="0">
+                        <a:buNone/>
+                      </a:pPr>
+                      <a:r>
+                        <a:rPr lang="en-US" sz="620" dirty="0">
+                          <a:solidFill>
+                            <a:srgbClr val="1A2733"/>
+                          </a:solidFill>
+                          <a:latin typeface="Arial" pitchFamily="34" charset="0"/>
+                          <a:ea typeface="Arial" pitchFamily="34" charset="-122"/>
+                          <a:cs typeface="Arial" pitchFamily="34" charset="-120"/>
+                        </a:rPr>
+                        <a:t>73 m</a:t>
+                      </a:r>
+                      <a:endParaRPr lang="en-US" sz="790" dirty="0"/>
+                    </a:p>
+                  </a:txBody>
+                  <a:tcPr marL="63500" marR="63500" marT="38100" marB="38100" anchor="ctr">
+                    <a:lnL w="6350" cap="flat" cmpd="sng" algn="ctr">
+                      <a:solidFill>
+                        <a:srgbClr val="DBE3EA"/>
+                      </a:solidFill>
+                      <a:prstDash val="solid"/>
+                      <a:round/>
+                      <a:headEnd type="none" w="med" len="med"/>
+                      <a:tailEnd type="none" w="med" len="med"/>
+                    </a:lnL>
+                    <a:lnR w="6350" cap="flat" cmpd="sng" algn="ctr">
+                      <a:solidFill>
+                        <a:srgbClr val="DBE3EA"/>
+                      </a:solidFill>
+                      <a:prstDash val="solid"/>
+                      <a:round/>
+                      <a:headEnd type="none" w="med" len="med"/>
+                      <a:tailEnd type="none" w="med" len="med"/>
+                    </a:lnR>
+                    <a:lnT w="6350" cap="flat" cmpd="sng" algn="ctr">
+                      <a:solidFill>
+                        <a:srgbClr val="DBE3EA"/>
+                      </a:solidFill>
+                      <a:prstDash val="solid"/>
+                      <a:round/>
+                      <a:headEnd type="none" w="med" len="med"/>
+                      <a:tailEnd type="none" w="med" len="med"/>
+                    </a:lnT>
+                    <a:lnB w="6350" cap="flat" cmpd="sng" algn="ctr">
+                      <a:solidFill>
+                        <a:srgbClr val="DBE3EA"/>
+                      </a:solidFill>
+                      <a:prstDash val="solid"/>
+                      <a:round/>
+                      <a:headEnd type="none" w="med" len="med"/>
+                      <a:tailEnd type="none" w="med" len="med"/>
+                    </a:lnB>
+                  </a:tcPr>
+                </a:tc>
+                <a:tc>
+                  <a:txBody>
+                    <a:bodyPr/>
+                    <a:lstStyle/>
+                    <a:p>
+                      <a:pPr algn="l" indent="0" marL="0">
+                        <a:buNone/>
+                      </a:pPr>
+                      <a:r>
+                        <a:rPr lang="en-US" sz="620" dirty="0">
+                          <a:solidFill>
+                            <a:srgbClr val="1A2733"/>
+                          </a:solidFill>
+                          <a:latin typeface="Arial" pitchFamily="34" charset="0"/>
+                          <a:ea typeface="Arial" pitchFamily="34" charset="-122"/>
+                          <a:cs typeface="Arial" pitchFamily="34" charset="-120"/>
+                        </a:rPr>
+                        <a:t>90 m</a:t>
+                      </a:r>
+                      <a:endParaRPr lang="en-US" sz="790" dirty="0"/>
+                    </a:p>
+                  </a:txBody>
+                  <a:tcPr marL="63500" marR="63500" marT="38100" marB="38100" anchor="ctr">
+                    <a:lnL w="6350" cap="flat" cmpd="sng" algn="ctr">
+                      <a:solidFill>
+                        <a:srgbClr val="DBE3EA"/>
+                      </a:solidFill>
+                      <a:prstDash val="solid"/>
+                      <a:round/>
+                      <a:headEnd type="none" w="med" len="med"/>
+                      <a:tailEnd type="none" w="med" len="med"/>
+                    </a:lnL>
+                    <a:lnR w="6350" cap="flat" cmpd="sng" algn="ctr">
+                      <a:solidFill>
+                        <a:srgbClr val="DBE3EA"/>
+                      </a:solidFill>
+                      <a:prstDash val="solid"/>
+                      <a:round/>
+                      <a:headEnd type="none" w="med" len="med"/>
+                      <a:tailEnd type="none" w="med" len="med"/>
+                    </a:lnR>
+                    <a:lnT w="6350" cap="flat" cmpd="sng" algn="ctr">
+                      <a:solidFill>
+                        <a:srgbClr val="DBE3EA"/>
+                      </a:solidFill>
+                      <a:prstDash val="solid"/>
+                      <a:round/>
+                      <a:headEnd type="none" w="med" len="med"/>
+                      <a:tailEnd type="none" w="med" len="med"/>
+                    </a:lnT>
+                    <a:lnB w="6350" cap="flat" cmpd="sng" algn="ctr">
+                      <a:solidFill>
+                        <a:srgbClr val="DBE3EA"/>
+                      </a:solidFill>
+                      <a:prstDash val="solid"/>
+                      <a:round/>
+                      <a:headEnd type="none" w="med" len="med"/>
+                      <a:tailEnd type="none" w="med" len="med"/>
+                    </a:lnB>
+                  </a:tcPr>
+                </a:tc>
+                <a:tc>
+                  <a:txBody>
+                    <a:bodyPr/>
+                    <a:lstStyle/>
+                    <a:p>
+                      <a:pPr algn="l" indent="0" marL="0">
+                        <a:buNone/>
+                      </a:pPr>
+                      <a:r>
+                        <a:rPr lang="en-US" sz="620" dirty="0">
                           <a:solidFill>
                             <a:srgbClr val="1A2733"/>
                           </a:solidFill>
@@ -22639,14 +23090,14 @@
                         </a:rPr>
                         <a:t>Đường cao tốc</a:t>
                       </a:r>
-                      <a:endParaRPr lang="en-US" sz="850" dirty="0"/>
+                      <a:endParaRPr lang="en-US" sz="790" dirty="0"/>
                     </a:p>
                     <a:p>
                       <a:pPr algn="l" indent="0" marL="0">
                         <a:buNone/>
                       </a:pPr>
                       <a:r>
-                        <a:rPr lang="en-US" sz="570" dirty="0">
+                        <a:rPr lang="en-US" sz="530" dirty="0">
                           <a:solidFill>
                             <a:srgbClr val="5F7183"/>
                           </a:solidFill>
@@ -22656,7 +23107,7 @@
                         </a:rPr>
                         <a:t>高速公路</a:t>
                       </a:r>
-                      <a:endParaRPr lang="en-US" sz="850" dirty="0"/>
+                      <a:endParaRPr lang="en-US" sz="790" dirty="0"/>
                     </a:p>
                   </a:txBody>
                   <a:tcPr marL="63500" marR="63500" marT="38100" marB="38100" anchor="ctr">
@@ -22711,8 +23162,8 @@
         </p:nvSpPr>
         <p:spPr>
           <a:xfrm>
-            <a:off x="1692938" y="3276960"/>
-            <a:ext cx="5758123" cy="323490"/>
+            <a:off x="1900843" y="3300320"/>
+            <a:ext cx="5342314" cy="300130"/>
           </a:xfrm>
           <a:prstGeom prst="rect">
             <a:avLst/>
@@ -22731,7 +23182,7 @@
               <a:buNone/>
             </a:pPr>
             <a:r>
-              <a:rPr lang="en-US" sz="850" b="1" dirty="0">
+              <a:rPr lang="en-US" sz="790" b="1" dirty="0">
                 <a:solidFill>
                   <a:srgbClr val="007F72"/>
                 </a:solidFill>
@@ -22741,7 +23192,7 @@
               </a:rPr>
               <a:t>LiDAR xe thật làm tới 150–300 m — gấp đôi mức «vừa đủ phanh». Nhìn xa thế để làm gì? Chương 3.</a:t>
             </a:r>
-            <a:endParaRPr lang="en-US" sz="850" dirty="0"/>
+            <a:endParaRPr lang="en-US" sz="790" dirty="0"/>
           </a:p>
           <a:p>
             <a:pPr indent="0" marL="0">
@@ -22751,7 +23202,7 @@
               <a:buNone/>
             </a:pPr>
             <a:r>
-              <a:rPr lang="en-US" sz="780" dirty="0">
+              <a:rPr lang="en-US" sz="720" dirty="0">
                 <a:solidFill>
                   <a:srgbClr val="007F72"/>
                 </a:solidFill>
@@ -22761,7 +23212,7 @@
               </a:rPr>
               <a:t>真車的光達做到 150–300 公尺，是「剛好煞得住」的兩倍以上。看那麼遠要做什麼？第三章回答。</a:t>
             </a:r>
-            <a:endParaRPr lang="en-US" sz="850" dirty="0"/>
+            <a:endParaRPr lang="en-US" sz="790" dirty="0"/>
           </a:p>
         </p:txBody>
       </p:sp>
@@ -22781,8 +23232,8 @@
         </p:blipFill>
         <p:spPr>
           <a:xfrm>
-            <a:off x="6914068" y="77638"/>
-            <a:ext cx="776376" cy="171537"/>
+            <a:off x="6744941" y="72031"/>
+            <a:ext cx="720312" cy="159150"/>
           </a:xfrm>
           <a:prstGeom prst="rect">
             <a:avLst/>
@@ -22797,8 +23248,8 @@
         </p:nvSpPr>
         <p:spPr>
           <a:xfrm>
-            <a:off x="1414737" y="90577"/>
-            <a:ext cx="582282" cy="181154"/>
+            <a:off x="1642731" y="84036"/>
+            <a:ext cx="540234" cy="168073"/>
           </a:xfrm>
           <a:prstGeom prst="rect">
             <a:avLst/>
@@ -22814,7 +23265,7 @@
               <a:buNone/>
             </a:pPr>
             <a:r>
-              <a:rPr lang="en-US" sz="640" dirty="0">
+              <a:rPr lang="en-US" sz="590" dirty="0">
                 <a:solidFill>
                   <a:srgbClr val="5F7183"/>
                 </a:solidFill>
@@ -22824,7 +23275,7 @@
               </a:rPr>
               <a:t>18 / 32</a:t>
             </a:r>
-            <a:endParaRPr lang="en-US" sz="640" dirty="0"/>
+            <a:endParaRPr lang="en-US" sz="590" dirty="0"/>
           </a:p>
         </p:txBody>
       </p:sp>
@@ -22836,8 +23287,8 @@
         </p:nvSpPr>
         <p:spPr>
           <a:xfrm>
-            <a:off x="2016429" y="90577"/>
-            <a:ext cx="1423356" cy="181154"/>
+            <a:off x="2200973" y="84036"/>
+            <a:ext cx="1320572" cy="168073"/>
           </a:xfrm>
           <a:prstGeom prst="rect">
             <a:avLst/>
@@ -22853,7 +23304,7 @@
               <a:buNone/>
             </a:pPr>
             <a:r>
-              <a:rPr lang="en-US" sz="640" dirty="0">
+              <a:rPr lang="en-US" sz="590" dirty="0">
                 <a:solidFill>
                   <a:srgbClr val="5F7183"/>
                 </a:solidFill>
@@ -22863,7 +23314,7 @@
               </a:rPr>
               <a:t>Tiết 1 · 第 1 節</a:t>
             </a:r>
-            <a:endParaRPr lang="en-US" sz="640" dirty="0"/>
+            <a:endParaRPr lang="en-US" sz="590" dirty="0"/>
           </a:p>
         </p:txBody>
       </p:sp>
